--- a/艾多美何以成为100兆韩元企业.pptx
+++ b/艾多美何以成为100兆韩元企业.pptx
@@ -19,6 +19,9 @@
     <p:sldId id="267" r:id="rId19"/>
     <p:sldId id="268" r:id="rId20"/>
     <p:sldId id="269" r:id="rId21"/>
+    <p:sldId id="270" r:id="rId22"/>
+    <p:sldId id="271" r:id="rId23"/>
+    <p:sldId id="272" r:id="rId24"/>
   </p:sldIdLst>
   <p:sldSz cx="12192000" cy="6858000" type="screen4x3"/>
   <p:notesSz cx="6858000" cy="9144000"/>
@@ -515,7 +518,7 @@
           <a:lstStyle/>
           <a:p>
             <a:r>
-              <a:t>全稿 14 页。开场用这一句定标准：下面要证明的是结构，不是信念。</a:t>
+              <a:t>全稿 17 页。开场用这一句定标准：下面要证明的是结构，不是信念。</a:t>
             </a:r>
           </a:p>
         </p:txBody>
@@ -865,7 +868,217 @@
           <a:lstStyle/>
           <a:p>
             <a:r>
-              <a:t>收束不再加新论点。四句对上封面那句：工序、组织、选择。然后停住。</a:t>
+              <a:t>中国市场把细分、低价和门店三句同时喊响。中国法人的第一件事，是这三句都不跟。</a:t>
+            </a:r>
+          </a:p>
+        </p:txBody>
+      </p:sp>
+      <p:sp>
+        <p:nvSpPr>
+          <p:cNvPr id="4" name="Slide Number Placeholder 3"/>
+          <p:cNvSpPr>
+            <a:spLocks noGrp="1"/>
+          </p:cNvSpPr>
+          <p:nvPr>
+            <p:ph type="sldNum" idx="5" sz="quarter"/>
+          </p:nvPr>
+        </p:nvSpPr>
+        <p:spPr/>
+      </p:sp>
+    </p:spTree>
+  </p:cSld>
+  <p:clrMapOvr>
+    <a:masterClrMapping/>
+  </p:clrMapOvr>
+</p:notes>
+</file>
+
+<file path=ppt/notesSlides/notesSlide15.xml><?xml version="1.0" encoding="utf-8"?>
+<p:notes xmlns:a="http://schemas.openxmlformats.org/drawingml/2006/main" xmlns:p="http://schemas.openxmlformats.org/presentationml/2006/main" xmlns:r="http://schemas.openxmlformats.org/officeDocument/2006/relationships">
+  <p:cSld>
+    <p:spTree>
+      <p:nvGrpSpPr>
+        <p:cNvPr id="1" name=""/>
+        <p:cNvGrpSpPr/>
+        <p:nvPr/>
+      </p:nvGrpSpPr>
+      <p:grpSpPr>
+        <a:xfrm>
+          <a:off x="0" y="0"/>
+          <a:ext cx="0" cy="0"/>
+          <a:chOff x="0" y="0"/>
+          <a:chExt cx="0" cy="0"/>
+        </a:xfrm>
+      </p:grpSpPr>
+      <p:sp>
+        <p:nvSpPr>
+          <p:cNvPr id="2" name="Slide Image Placeholder 1"/>
+          <p:cNvSpPr>
+            <a:spLocks noGrp="1"/>
+          </p:cNvSpPr>
+          <p:nvPr>
+            <p:ph type="sldImg" idx="2"/>
+          </p:nvPr>
+        </p:nvSpPr>
+        <p:spPr/>
+      </p:sp>
+      <p:sp>
+        <p:nvSpPr>
+          <p:cNvPr id="3" name="Notes Placeholder 2"/>
+          <p:cNvSpPr>
+            <a:spLocks noGrp="1"/>
+          </p:cNvSpPr>
+          <p:nvPr>
+            <p:ph type="body" idx="3" sz="quarter"/>
+          </p:nvPr>
+        </p:nvSpPr>
+        <p:spPr/>
+        <p:txBody>
+          <a:bodyPr/>
+          <a:lstStyle/>
+          <a:p>
+            <a:r>
+              <a:t>四件都是同一套结构在中国的动作。加款、加价、加店、加广告，都是把方向做松。</a:t>
+            </a:r>
+          </a:p>
+        </p:txBody>
+      </p:sp>
+      <p:sp>
+        <p:nvSpPr>
+          <p:cNvPr id="4" name="Slide Number Placeholder 3"/>
+          <p:cNvSpPr>
+            <a:spLocks noGrp="1"/>
+          </p:cNvSpPr>
+          <p:nvPr>
+            <p:ph type="sldNum" idx="5" sz="quarter"/>
+          </p:nvPr>
+        </p:nvSpPr>
+        <p:spPr/>
+      </p:sp>
+    </p:spTree>
+  </p:cSld>
+  <p:clrMapOvr>
+    <a:masterClrMapping/>
+  </p:clrMapOvr>
+</p:notes>
+</file>
+
+<file path=ppt/notesSlides/notesSlide16.xml><?xml version="1.0" encoding="utf-8"?>
+<p:notes xmlns:a="http://schemas.openxmlformats.org/drawingml/2006/main" xmlns:p="http://schemas.openxmlformats.org/presentationml/2006/main" xmlns:r="http://schemas.openxmlformats.org/officeDocument/2006/relationships">
+  <p:cSld>
+    <p:spTree>
+      <p:nvGrpSpPr>
+        <p:cNvPr id="1" name=""/>
+        <p:cNvGrpSpPr/>
+        <p:nvPr/>
+      </p:nvGrpSpPr>
+      <p:grpSpPr>
+        <a:xfrm>
+          <a:off x="0" y="0"/>
+          <a:ext cx="0" cy="0"/>
+          <a:chOff x="0" y="0"/>
+          <a:chExt cx="0" cy="0"/>
+        </a:xfrm>
+      </p:grpSpPr>
+      <p:sp>
+        <p:nvSpPr>
+          <p:cNvPr id="2" name="Slide Image Placeholder 1"/>
+          <p:cNvSpPr>
+            <a:spLocks noGrp="1"/>
+          </p:cNvSpPr>
+          <p:nvPr>
+            <p:ph type="sldImg" idx="2"/>
+          </p:nvPr>
+        </p:nvSpPr>
+        <p:spPr/>
+      </p:sp>
+      <p:sp>
+        <p:nvSpPr>
+          <p:cNvPr id="3" name="Notes Placeholder 2"/>
+          <p:cNvSpPr>
+            <a:spLocks noGrp="1"/>
+          </p:cNvSpPr>
+          <p:nvPr>
+            <p:ph type="body" idx="3" sz="quarter"/>
+          </p:nvPr>
+        </p:nvSpPr>
+        <p:spPr/>
+        <p:txBody>
+          <a:bodyPr/>
+          <a:lstStyle/>
+          <a:p>
+            <a:r>
+              <a:t>工具不换一套。换的是中国会员听得懂的话，和规则里面能做成的接法。医院不是开工的前提。</a:t>
+            </a:r>
+          </a:p>
+        </p:txBody>
+      </p:sp>
+      <p:sp>
+        <p:nvSpPr>
+          <p:cNvPr id="4" name="Slide Number Placeholder 3"/>
+          <p:cNvSpPr>
+            <a:spLocks noGrp="1"/>
+          </p:cNvSpPr>
+          <p:nvPr>
+            <p:ph type="sldNum" idx="5" sz="quarter"/>
+          </p:nvPr>
+        </p:nvSpPr>
+        <p:spPr/>
+      </p:sp>
+    </p:spTree>
+  </p:cSld>
+  <p:clrMapOvr>
+    <a:masterClrMapping/>
+  </p:clrMapOvr>
+</p:notes>
+</file>
+
+<file path=ppt/notesSlides/notesSlide17.xml><?xml version="1.0" encoding="utf-8"?>
+<p:notes xmlns:a="http://schemas.openxmlformats.org/drawingml/2006/main" xmlns:p="http://schemas.openxmlformats.org/presentationml/2006/main" xmlns:r="http://schemas.openxmlformats.org/officeDocument/2006/relationships">
+  <p:cSld>
+    <p:spTree>
+      <p:nvGrpSpPr>
+        <p:cNvPr id="1" name=""/>
+        <p:cNvGrpSpPr/>
+        <p:nvPr/>
+      </p:nvGrpSpPr>
+      <p:grpSpPr>
+        <a:xfrm>
+          <a:off x="0" y="0"/>
+          <a:ext cx="0" cy="0"/>
+          <a:chOff x="0" y="0"/>
+          <a:chExt cx="0" cy="0"/>
+        </a:xfrm>
+      </p:grpSpPr>
+      <p:sp>
+        <p:nvSpPr>
+          <p:cNvPr id="2" name="Slide Image Placeholder 1"/>
+          <p:cNvSpPr>
+            <a:spLocks noGrp="1"/>
+          </p:cNvSpPr>
+          <p:nvPr>
+            <p:ph type="sldImg" idx="2"/>
+          </p:nvPr>
+        </p:nvSpPr>
+        <p:spPr/>
+      </p:sp>
+      <p:sp>
+        <p:nvSpPr>
+          <p:cNvPr id="3" name="Notes Placeholder 2"/>
+          <p:cNvSpPr>
+            <a:spLocks noGrp="1"/>
+          </p:cNvSpPr>
+          <p:nvPr>
+            <p:ph type="body" idx="3" sz="quarter"/>
+          </p:nvPr>
+        </p:nvSpPr>
+        <p:spPr/>
+        <p:txBody>
+          <a:bodyPr/>
+          <a:lstStyle/>
+          <a:p>
+            <a:r>
+              <a:t>收束不再加新论点。四句对上封面。最后一句落到中国法人自己身上，然后停住。</a:t>
             </a:r>
           </a:p>
         </p:txBody>
@@ -4574,7 +4787,7 @@
         </p:nvSpPr>
         <p:spPr>
           <a:xfrm>
-            <a:off x="804672" y="4297680"/>
+            <a:off x="804672" y="4160520"/>
             <a:ext cx="960120" cy="32004"/>
           </a:xfrm>
           <a:prstGeom prst="rect">
@@ -4617,8 +4830,8 @@
         </p:nvSpPr>
         <p:spPr>
           <a:xfrm>
-            <a:off x="804672" y="4572000"/>
-            <a:ext cx="9601200" cy="1051560"/>
+            <a:off x="804672" y="4434840"/>
+            <a:ext cx="10241280" cy="1325880"/>
           </a:xfrm>
           <a:prstGeom prst="rect">
             <a:avLst/>
@@ -4631,7 +4844,7 @@
           <a:p>
             <a:pPr algn="l">
               <a:lnSpc>
-                <a:spcPct val="145000"/>
+                <a:spcPct val="140000"/>
               </a:lnSpc>
             </a:pPr>
             <a:r>
@@ -4644,7 +4857,8 @@
                 <a:cs typeface="Noto Sans CJK SC"/>
               </a:rPr>
               <a:t>一百兆不是喊出来的。
-工序造出价格，组织代替店铺，选择被拿掉。三件事锁在一起，它就往那里去。</a:t>
+工序造出价格，组织代替店铺，选择被拿掉。
+中国法人要做的，是把这三件事在中国做成事实。</a:t>
             </a:r>
           </a:p>
         </p:txBody>
@@ -7120,7 +7334,7 @@
     <p:bg>
       <p:bgPr>
         <a:solidFill>
-          <a:srgbClr val="121212"/>
+          <a:srgbClr val="FFFFFF"/>
         </a:solidFill>
         <a:effectLst/>
       </p:bgPr>
@@ -7134,20 +7348,90 @@
       <p:grpSpPr/>
       <p:sp>
         <p:nvSpPr>
-          <p:cNvPr id="2" name="Rectangle 1"/>
+          <p:cNvPr id="2" name="TextBox 1"/>
+          <p:cNvSpPr txBox="1"/>
+          <p:nvPr/>
+        </p:nvSpPr>
+        <p:spPr>
+          <a:xfrm>
+            <a:off x="658368" y="365760"/>
+            <a:ext cx="640080" cy="329184"/>
+          </a:xfrm>
+          <a:prstGeom prst="rect">
+            <a:avLst/>
+          </a:prstGeom>
+          <a:noFill/>
+        </p:spPr>
+        <p:txBody>
+          <a:bodyPr wrap="square" anchor="t" lIns="0" rIns="0" tIns="0" bIns="0"/>
+          <a:lstStyle/>
+          <a:p>
+            <a:pPr algn="l"/>
+            <a:r>
+              <a:rPr sz="1500" b="0" i="0" lang="zh-CN" altLang="en-US">
+                <a:solidFill>
+                  <a:srgbClr val="9E1B1B"/>
+                </a:solidFill>
+                <a:latin typeface="Noto Sans CJK SC Medium"/>
+                <a:ea typeface="Noto Sans CJK SC Medium"/>
+                <a:cs typeface="Noto Sans CJK SC Medium"/>
+              </a:rPr>
+              <a:t>12</a:t>
+            </a:r>
+          </a:p>
+        </p:txBody>
+      </p:sp>
+      <p:sp>
+        <p:nvSpPr>
+          <p:cNvPr id="3" name="TextBox 2"/>
+          <p:cNvSpPr txBox="1"/>
+          <p:nvPr/>
+        </p:nvSpPr>
+        <p:spPr>
+          <a:xfrm>
+            <a:off x="1371600" y="310896"/>
+            <a:ext cx="10058400" cy="438912"/>
+          </a:xfrm>
+          <a:prstGeom prst="rect">
+            <a:avLst/>
+          </a:prstGeom>
+          <a:noFill/>
+        </p:spPr>
+        <p:txBody>
+          <a:bodyPr wrap="square" anchor="t" lIns="0" rIns="0" tIns="0" bIns="0"/>
+          <a:lstStyle/>
+          <a:p>
+            <a:pPr algn="l"/>
+            <a:r>
+              <a:rPr sz="3000" b="0" i="0" lang="zh-CN" altLang="en-US">
+                <a:solidFill>
+                  <a:srgbClr val="141414"/>
+                </a:solidFill>
+                <a:latin typeface="Noto Sans CJK SC Medium"/>
+                <a:ea typeface="Noto Sans CJK SC Medium"/>
+                <a:cs typeface="Noto Sans CJK SC Medium"/>
+              </a:rPr>
+              <a:t>中国把三种诱惑同时放大</a:t>
+            </a:r>
+          </a:p>
+        </p:txBody>
+      </p:sp>
+      <p:sp>
+        <p:nvSpPr>
+          <p:cNvPr id="4" name="Rectangle 3"/>
           <p:cNvSpPr/>
           <p:nvPr/>
         </p:nvSpPr>
         <p:spPr>
           <a:xfrm>
-            <a:off x="0" y="0"/>
-            <a:ext cx="73152" cy="6858000"/>
+            <a:off x="658368" y="960120"/>
+            <a:ext cx="10881360" cy="10972"/>
           </a:xfrm>
           <a:prstGeom prst="rect">
             <a:avLst/>
           </a:prstGeom>
           <a:solidFill>
-            <a:srgbClr val="9E1B1B"/>
+            <a:srgbClr val="E2E2E2"/>
           </a:solidFill>
           <a:ln>
             <a:noFill/>
@@ -7177,14 +7461,14 @@
       </p:sp>
       <p:sp>
         <p:nvSpPr>
-          <p:cNvPr id="3" name="TextBox 2"/>
-          <p:cNvSpPr txBox="1"/>
-          <p:nvPr/>
-        </p:nvSpPr>
-        <p:spPr>
-          <a:xfrm>
-            <a:off x="777240" y="658368"/>
-            <a:ext cx="4572000" cy="457200"/>
+          <p:cNvPr id="5" name="TextBox 4"/>
+          <p:cNvSpPr txBox="1"/>
+          <p:nvPr/>
+        </p:nvSpPr>
+        <p:spPr>
+          <a:xfrm>
+            <a:off x="658368" y="1280160"/>
+            <a:ext cx="3200400" cy="274320"/>
           </a:xfrm>
           <a:prstGeom prst="rect">
             <a:avLst/>
@@ -7197,29 +7481,29 @@
           <a:p>
             <a:pPr algn="l"/>
             <a:r>
-              <a:rPr sz="2600" b="0" i="0" lang="zh-CN" altLang="en-US">
-                <a:solidFill>
-                  <a:srgbClr val="FFFFFF"/>
+              <a:rPr sz="1400" b="0" i="0" lang="zh-CN" altLang="en-US">
+                <a:solidFill>
+                  <a:srgbClr val="9E1B1B"/>
                 </a:solidFill>
                 <a:latin typeface="Noto Sans CJK SC Medium"/>
                 <a:ea typeface="Noto Sans CJK SC Medium"/>
                 <a:cs typeface="Noto Sans CJK SC Medium"/>
               </a:rPr>
-              <a:t>生产被重做</a:t>
-            </a:r>
-          </a:p>
-        </p:txBody>
-      </p:sp>
-      <p:sp>
-        <p:nvSpPr>
-          <p:cNvPr id="4" name="TextBox 3"/>
-          <p:cNvSpPr txBox="1"/>
-          <p:nvPr/>
-        </p:nvSpPr>
-        <p:spPr>
-          <a:xfrm>
-            <a:off x="5623560" y="731519"/>
-            <a:ext cx="5760720" cy="365760"/>
+              <a:t>01</a:t>
+            </a:r>
+          </a:p>
+        </p:txBody>
+      </p:sp>
+      <p:sp>
+        <p:nvSpPr>
+          <p:cNvPr id="6" name="TextBox 5"/>
+          <p:cNvSpPr txBox="1"/>
+          <p:nvPr/>
+        </p:nvSpPr>
+        <p:spPr>
+          <a:xfrm>
+            <a:off x="658368" y="1691640"/>
+            <a:ext cx="3246120" cy="777240"/>
           </a:xfrm>
           <a:prstGeom prst="rect">
             <a:avLst/>
@@ -7232,29 +7516,111 @@
           <a:p>
             <a:pPr algn="l"/>
             <a:r>
-              <a:rPr sz="1600" b="0" i="0" lang="zh-CN" altLang="en-US">
-                <a:solidFill>
-                  <a:srgbClr val="B5B5B5"/>
+              <a:rPr sz="2600" b="0" i="0" lang="zh-CN" altLang="en-US">
+                <a:solidFill>
+                  <a:srgbClr val="141414"/>
+                </a:solidFill>
+                <a:latin typeface="Noto Sans CJK SC Medium"/>
+                <a:ea typeface="Noto Sans CJK SC Medium"/>
+                <a:cs typeface="Noto Sans CJK SC Medium"/>
+              </a:rPr>
+              <a:t>自己挑</a:t>
+            </a:r>
+          </a:p>
+        </p:txBody>
+      </p:sp>
+      <p:sp>
+        <p:nvSpPr>
+          <p:cNvPr id="7" name="TextBox 6"/>
+          <p:cNvSpPr txBox="1"/>
+          <p:nvPr/>
+        </p:nvSpPr>
+        <p:spPr>
+          <a:xfrm>
+            <a:off x="658368" y="2651760"/>
+            <a:ext cx="3246120" cy="1554480"/>
+          </a:xfrm>
+          <a:prstGeom prst="rect">
+            <a:avLst/>
+          </a:prstGeom>
+          <a:noFill/>
+        </p:spPr>
+        <p:txBody>
+          <a:bodyPr wrap="square" anchor="t" lIns="0" rIns="0" tIns="0" bIns="0"/>
+          <a:lstStyle/>
+          <a:p>
+            <a:pPr algn="l">
+              <a:lnSpc>
+                <a:spcPct val="145000"/>
+              </a:lnSpc>
+            </a:pPr>
+            <a:r>
+              <a:rPr sz="1500" b="0" i="0" lang="zh-CN" altLang="en-US">
+                <a:solidFill>
+                  <a:srgbClr val="2C2C2C"/>
                 </a:solidFill>
                 <a:latin typeface="Noto Sans CJK SC"/>
                 <a:ea typeface="Noto Sans CJK SC"/>
                 <a:cs typeface="Noto Sans CJK SC"/>
               </a:rPr>
-              <a:t>三十五个点有了出处</a:t>
-            </a:r>
-          </a:p>
-        </p:txBody>
-      </p:sp>
-      <p:sp>
-        <p:nvSpPr>
-          <p:cNvPr id="5" name="TextBox 4"/>
-          <p:cNvSpPr txBox="1"/>
-          <p:nvPr/>
-        </p:nvSpPr>
-        <p:spPr>
-          <a:xfrm>
-            <a:off x="777240" y="1371600"/>
-            <a:ext cx="4572000" cy="457200"/>
+              <a:t>天猫、京东把货铺开，让人在里面比较。选择一多，绝对品质就松。</a:t>
+            </a:r>
+          </a:p>
+        </p:txBody>
+      </p:sp>
+      <p:sp>
+        <p:nvSpPr>
+          <p:cNvPr id="8" name="Rectangle 7"/>
+          <p:cNvSpPr/>
+          <p:nvPr/>
+        </p:nvSpPr>
+        <p:spPr>
+          <a:xfrm>
+            <a:off x="4160520" y="1280160"/>
+            <a:ext cx="10972" cy="2880360"/>
+          </a:xfrm>
+          <a:prstGeom prst="rect">
+            <a:avLst/>
+          </a:prstGeom>
+          <a:solidFill>
+            <a:srgbClr val="E2E2E2"/>
+          </a:solidFill>
+          <a:ln>
+            <a:noFill/>
+          </a:ln>
+        </p:spPr>
+        <p:style>
+          <a:lnRef idx="1">
+            <a:schemeClr val="accent1"/>
+          </a:lnRef>
+          <a:fillRef idx="3">
+            <a:schemeClr val="accent1"/>
+          </a:fillRef>
+          <a:effectRef idx="2">
+            <a:schemeClr val="accent1"/>
+          </a:effectRef>
+          <a:fontRef idx="minor">
+            <a:schemeClr val="lt1"/>
+          </a:fontRef>
+        </p:style>
+        <p:txBody>
+          <a:bodyPr rtlCol="0" anchor="ctr"/>
+          <a:lstStyle/>
+          <a:p>
+            <a:pPr algn="ctr"/>
+          </a:p>
+        </p:txBody>
+      </p:sp>
+      <p:sp>
+        <p:nvSpPr>
+          <p:cNvPr id="9" name="TextBox 8"/>
+          <p:cNvSpPr txBox="1"/>
+          <p:nvPr/>
+        </p:nvSpPr>
+        <p:spPr>
+          <a:xfrm>
+            <a:off x="4361688" y="1280160"/>
+            <a:ext cx="3200400" cy="274320"/>
           </a:xfrm>
           <a:prstGeom prst="rect">
             <a:avLst/>
@@ -7267,29 +7633,29 @@
           <a:p>
             <a:pPr algn="l"/>
             <a:r>
-              <a:rPr sz="2600" b="0" i="0" lang="zh-CN" altLang="en-US">
-                <a:solidFill>
-                  <a:srgbClr val="FFFFFF"/>
+              <a:rPr sz="1400" b="0" i="0" lang="zh-CN" altLang="en-US">
+                <a:solidFill>
+                  <a:srgbClr val="9E1B1B"/>
                 </a:solidFill>
                 <a:latin typeface="Noto Sans CJK SC Medium"/>
                 <a:ea typeface="Noto Sans CJK SC Medium"/>
                 <a:cs typeface="Noto Sans CJK SC Medium"/>
               </a:rPr>
-              <a:t>消费者被组织</a:t>
-            </a:r>
-          </a:p>
-        </p:txBody>
-      </p:sp>
-      <p:sp>
-        <p:nvSpPr>
-          <p:cNvPr id="6" name="TextBox 5"/>
-          <p:cNvSpPr txBox="1"/>
-          <p:nvPr/>
-        </p:nvSpPr>
-        <p:spPr>
-          <a:xfrm>
-            <a:off x="5623560" y="1444752"/>
-            <a:ext cx="5760720" cy="365760"/>
+              <a:t>02</a:t>
+            </a:r>
+          </a:p>
+        </p:txBody>
+      </p:sp>
+      <p:sp>
+        <p:nvSpPr>
+          <p:cNvPr id="10" name="TextBox 9"/>
+          <p:cNvSpPr txBox="1"/>
+          <p:nvPr/>
+        </p:nvSpPr>
+        <p:spPr>
+          <a:xfrm>
+            <a:off x="4361688" y="1691640"/>
+            <a:ext cx="3246120" cy="777240"/>
           </a:xfrm>
           <a:prstGeom prst="rect">
             <a:avLst/>
@@ -7302,29 +7668,113 @@
           <a:p>
             <a:pPr algn="l"/>
             <a:r>
-              <a:rPr sz="1600" b="0" i="0" lang="zh-CN" altLang="en-US">
-                <a:solidFill>
-                  <a:srgbClr val="B5B5B5"/>
+              <a:rPr sz="2600" b="0" i="0" lang="zh-CN" altLang="en-US">
+                <a:solidFill>
+                  <a:srgbClr val="141414"/>
+                </a:solidFill>
+                <a:latin typeface="Noto Sans CJK SC Medium"/>
+                <a:ea typeface="Noto Sans CJK SC Medium"/>
+                <a:cs typeface="Noto Sans CJK SC Medium"/>
+              </a:rPr>
+              <a:t>只要便宜</a:t>
+            </a:r>
+          </a:p>
+        </p:txBody>
+      </p:sp>
+      <p:sp>
+        <p:nvSpPr>
+          <p:cNvPr id="11" name="TextBox 10"/>
+          <p:cNvSpPr txBox="1"/>
+          <p:nvPr/>
+        </p:nvSpPr>
+        <p:spPr>
+          <a:xfrm>
+            <a:off x="4361688" y="2651760"/>
+            <a:ext cx="3246120" cy="1554480"/>
+          </a:xfrm>
+          <a:prstGeom prst="rect">
+            <a:avLst/>
+          </a:prstGeom>
+          <a:noFill/>
+        </p:spPr>
+        <p:txBody>
+          <a:bodyPr wrap="square" anchor="t" lIns="0" rIns="0" tIns="0" bIns="0"/>
+          <a:lstStyle/>
+          <a:p>
+            <a:pPr algn="l">
+              <a:lnSpc>
+                <a:spcPct val="145000"/>
+              </a:lnSpc>
+            </a:pPr>
+            <a:r>
+              <a:rPr sz="1500" b="0" i="0" lang="zh-CN" altLang="en-US">
+                <a:solidFill>
+                  <a:srgbClr val="2C2C2C"/>
                 </a:solidFill>
                 <a:latin typeface="Noto Sans CJK SC"/>
                 <a:ea typeface="Noto Sans CJK SC"/>
                 <a:cs typeface="Noto Sans CJK SC"/>
               </a:rPr>
-              <a:t>广告和店铺被省掉</a:t>
-            </a:r>
-          </a:p>
-        </p:txBody>
-      </p:sp>
-      <p:sp>
-        <p:nvSpPr>
-          <p:cNvPr id="7" name="TextBox 6"/>
-          <p:cNvSpPr txBox="1"/>
-          <p:nvPr/>
-        </p:nvSpPr>
-        <p:spPr>
-          <a:xfrm>
-            <a:off x="777240" y="2084832"/>
-            <a:ext cx="4572000" cy="457200"/>
+              <a:t>低价平台把“最贱”做成默认。
+只认便宜的那一层，在中国更响。
+跟过去，就会另做一条贱的线。</a:t>
+            </a:r>
+          </a:p>
+        </p:txBody>
+      </p:sp>
+      <p:sp>
+        <p:nvSpPr>
+          <p:cNvPr id="12" name="Rectangle 11"/>
+          <p:cNvSpPr/>
+          <p:nvPr/>
+        </p:nvSpPr>
+        <p:spPr>
+          <a:xfrm>
+            <a:off x="7863840" y="1280160"/>
+            <a:ext cx="10972" cy="2880360"/>
+          </a:xfrm>
+          <a:prstGeom prst="rect">
+            <a:avLst/>
+          </a:prstGeom>
+          <a:solidFill>
+            <a:srgbClr val="E2E2E2"/>
+          </a:solidFill>
+          <a:ln>
+            <a:noFill/>
+          </a:ln>
+        </p:spPr>
+        <p:style>
+          <a:lnRef idx="1">
+            <a:schemeClr val="accent1"/>
+          </a:lnRef>
+          <a:fillRef idx="3">
+            <a:schemeClr val="accent1"/>
+          </a:fillRef>
+          <a:effectRef idx="2">
+            <a:schemeClr val="accent1"/>
+          </a:effectRef>
+          <a:fontRef idx="minor">
+            <a:schemeClr val="lt1"/>
+          </a:fontRef>
+        </p:style>
+        <p:txBody>
+          <a:bodyPr rtlCol="0" anchor="ctr"/>
+          <a:lstStyle/>
+          <a:p>
+            <a:pPr algn="ctr"/>
+          </a:p>
+        </p:txBody>
+      </p:sp>
+      <p:sp>
+        <p:nvSpPr>
+          <p:cNvPr id="13" name="TextBox 12"/>
+          <p:cNvSpPr txBox="1"/>
+          <p:nvPr/>
+        </p:nvSpPr>
+        <p:spPr>
+          <a:xfrm>
+            <a:off x="8065008" y="1280160"/>
+            <a:ext cx="3200400" cy="274320"/>
           </a:xfrm>
           <a:prstGeom prst="rect">
             <a:avLst/>
@@ -7337,29 +7787,29 @@
           <a:p>
             <a:pPr algn="l"/>
             <a:r>
-              <a:rPr sz="2600" b="0" i="0" lang="zh-CN" altLang="en-US">
-                <a:solidFill>
-                  <a:srgbClr val="FFFFFF"/>
+              <a:rPr sz="1400" b="0" i="0" lang="zh-CN" altLang="en-US">
+                <a:solidFill>
+                  <a:srgbClr val="9E1B1B"/>
                 </a:solidFill>
                 <a:latin typeface="Noto Sans CJK SC Medium"/>
                 <a:ea typeface="Noto Sans CJK SC Medium"/>
                 <a:cs typeface="Noto Sans CJK SC Medium"/>
               </a:rPr>
-              <a:t>选择被拿掉</a:t>
-            </a:r>
-          </a:p>
-        </p:txBody>
-      </p:sp>
-      <p:sp>
-        <p:nvSpPr>
-          <p:cNvPr id="8" name="TextBox 7"/>
-          <p:cNvSpPr txBox="1"/>
-          <p:nvPr/>
-        </p:nvSpPr>
-        <p:spPr>
-          <a:xfrm>
-            <a:off x="5623560" y="2157984"/>
-            <a:ext cx="5760720" cy="365760"/>
+              <a:t>03</a:t>
+            </a:r>
+          </a:p>
+        </p:txBody>
+      </p:sp>
+      <p:sp>
+        <p:nvSpPr>
+          <p:cNvPr id="14" name="TextBox 13"/>
+          <p:cNvSpPr txBox="1"/>
+          <p:nvPr/>
+        </p:nvSpPr>
+        <p:spPr>
+          <a:xfrm>
+            <a:off x="8065008" y="1691640"/>
+            <a:ext cx="3246120" cy="777240"/>
           </a:xfrm>
           <a:prstGeom prst="rect">
             <a:avLst/>
@@ -7372,99 +7822,214 @@
           <a:p>
             <a:pPr algn="l"/>
             <a:r>
-              <a:rPr sz="1600" b="0" i="0" lang="zh-CN" altLang="en-US">
-                <a:solidFill>
-                  <a:srgbClr val="B5B5B5"/>
+              <a:rPr sz="2600" b="0" i="0" lang="zh-CN" altLang="en-US">
+                <a:solidFill>
+                  <a:srgbClr val="141414"/>
+                </a:solidFill>
+                <a:latin typeface="Noto Sans CJK SC Medium"/>
+                <a:ea typeface="Noto Sans CJK SC Medium"/>
+                <a:cs typeface="Noto Sans CJK SC Medium"/>
+              </a:rPr>
+              <a:t>先把店开起来</a:t>
+            </a:r>
+          </a:p>
+        </p:txBody>
+      </p:sp>
+      <p:sp>
+        <p:nvSpPr>
+          <p:cNvPr id="15" name="TextBox 14"/>
+          <p:cNvSpPr txBox="1"/>
+          <p:nvPr/>
+        </p:nvSpPr>
+        <p:spPr>
+          <a:xfrm>
+            <a:off x="8065008" y="2651760"/>
+            <a:ext cx="3246120" cy="1554480"/>
+          </a:xfrm>
+          <a:prstGeom prst="rect">
+            <a:avLst/>
+          </a:prstGeom>
+          <a:noFill/>
+        </p:spPr>
+        <p:txBody>
+          <a:bodyPr wrap="square" anchor="t" lIns="0" rIns="0" tIns="0" bIns="0"/>
+          <a:lstStyle/>
+          <a:p>
+            <a:pPr algn="l">
+              <a:lnSpc>
+                <a:spcPct val="145000"/>
+              </a:lnSpc>
+            </a:pPr>
+            <a:r>
+              <a:rPr sz="1500" b="0" i="0" lang="zh-CN" altLang="en-US">
+                <a:solidFill>
+                  <a:srgbClr val="2C2C2C"/>
                 </a:solidFill>
                 <a:latin typeface="Noto Sans CJK SC"/>
                 <a:ea typeface="Noto Sans CJK SC"/>
                 <a:cs typeface="Noto Sans CJK SC"/>
               </a:rPr>
-              <a:t>一个品类，只留一个</a:t>
-            </a:r>
-          </a:p>
-        </p:txBody>
-      </p:sp>
-      <p:sp>
-        <p:nvSpPr>
-          <p:cNvPr id="9" name="TextBox 8"/>
-          <p:cNvSpPr txBox="1"/>
-          <p:nvPr/>
-        </p:nvSpPr>
-        <p:spPr>
-          <a:xfrm>
-            <a:off x="777240" y="2798064"/>
-            <a:ext cx="4572000" cy="457200"/>
-          </a:xfrm>
-          <a:prstGeom prst="rect">
-            <a:avLst/>
-          </a:prstGeom>
-          <a:noFill/>
-        </p:spPr>
-        <p:txBody>
-          <a:bodyPr wrap="square" anchor="t" lIns="0" rIns="0" tIns="0" bIns="0"/>
-          <a:lstStyle/>
-          <a:p>
-            <a:pPr algn="l"/>
-            <a:r>
-              <a:rPr sz="2600" b="0" i="0" lang="zh-CN" altLang="en-US">
-                <a:solidFill>
-                  <a:srgbClr val="FFFFFF"/>
+              <a:t>开市客、大创、名创优品，
+都用店把人接住。
+中国法人若先开店，三十五个点就没了。</a:t>
+            </a:r>
+          </a:p>
+        </p:txBody>
+      </p:sp>
+      <p:sp>
+        <p:nvSpPr>
+          <p:cNvPr id="16" name="Rectangle 15"/>
+          <p:cNvSpPr/>
+          <p:nvPr/>
+        </p:nvSpPr>
+        <p:spPr>
+          <a:xfrm>
+            <a:off x="658368" y="4709160"/>
+            <a:ext cx="10881360" cy="10972"/>
+          </a:xfrm>
+          <a:prstGeom prst="rect">
+            <a:avLst/>
+          </a:prstGeom>
+          <a:solidFill>
+            <a:srgbClr val="E2E2E2"/>
+          </a:solidFill>
+          <a:ln>
+            <a:noFill/>
+          </a:ln>
+        </p:spPr>
+        <p:style>
+          <a:lnRef idx="1">
+            <a:schemeClr val="accent1"/>
+          </a:lnRef>
+          <a:fillRef idx="3">
+            <a:schemeClr val="accent1"/>
+          </a:fillRef>
+          <a:effectRef idx="2">
+            <a:schemeClr val="accent1"/>
+          </a:effectRef>
+          <a:fontRef idx="minor">
+            <a:schemeClr val="lt1"/>
+          </a:fontRef>
+        </p:style>
+        <p:txBody>
+          <a:bodyPr rtlCol="0" anchor="ctr"/>
+          <a:lstStyle/>
+          <a:p>
+            <a:pPr algn="ctr"/>
+          </a:p>
+        </p:txBody>
+      </p:sp>
+      <p:sp>
+        <p:nvSpPr>
+          <p:cNvPr id="17" name="TextBox 16"/>
+          <p:cNvSpPr txBox="1"/>
+          <p:nvPr/>
+        </p:nvSpPr>
+        <p:spPr>
+          <a:xfrm>
+            <a:off x="658368" y="4983480"/>
+            <a:ext cx="10789920" cy="1097280"/>
+          </a:xfrm>
+          <a:prstGeom prst="rect">
+            <a:avLst/>
+          </a:prstGeom>
+          <a:noFill/>
+        </p:spPr>
+        <p:txBody>
+          <a:bodyPr wrap="square" anchor="t" lIns="0" rIns="0" tIns="0" bIns="0"/>
+          <a:lstStyle/>
+          <a:p>
+            <a:pPr algn="l">
+              <a:lnSpc>
+                <a:spcPct val="135000"/>
+              </a:lnSpc>
+            </a:pPr>
+            <a:r>
+              <a:rPr sz="2200" b="0" i="0" lang="zh-CN" altLang="en-US">
+                <a:solidFill>
+                  <a:srgbClr val="9E1B1B"/>
                 </a:solidFill>
                 <a:latin typeface="Noto Sans CJK SC Medium"/>
                 <a:ea typeface="Noto Sans CJK SC Medium"/>
                 <a:cs typeface="Noto Sans CJK SC Medium"/>
               </a:rPr>
-              <a:t>人留在结构里</a:t>
-            </a:r>
-          </a:p>
-        </p:txBody>
-      </p:sp>
-      <p:sp>
-        <p:nvSpPr>
-          <p:cNvPr id="10" name="TextBox 9"/>
-          <p:cNvSpPr txBox="1"/>
-          <p:nvPr/>
-        </p:nvSpPr>
-        <p:spPr>
-          <a:xfrm>
-            <a:off x="5623560" y="2871216"/>
-            <a:ext cx="5760720" cy="365760"/>
-          </a:xfrm>
-          <a:prstGeom prst="rect">
-            <a:avLst/>
-          </a:prstGeom>
-          <a:noFill/>
-        </p:spPr>
-        <p:txBody>
-          <a:bodyPr wrap="square" anchor="t" lIns="0" rIns="0" tIns="0" bIns="0"/>
-          <a:lstStyle/>
-          <a:p>
-            <a:pPr algn="l"/>
-            <a:r>
-              <a:rPr sz="1600" b="0" i="0" lang="zh-CN" altLang="en-US">
-                <a:solidFill>
-                  <a:srgbClr val="B5B5B5"/>
+              <a:t>三种都在叫中国法人改模式。
+改了，就不再是同一套结构。</a:t>
+            </a:r>
+          </a:p>
+        </p:txBody>
+      </p:sp>
+      <p:sp>
+        <p:nvSpPr>
+          <p:cNvPr id="18" name="TextBox 17"/>
+          <p:cNvSpPr txBox="1"/>
+          <p:nvPr/>
+        </p:nvSpPr>
+        <p:spPr>
+          <a:xfrm>
+            <a:off x="10561320" y="6492240"/>
+            <a:ext cx="1051560" cy="201168"/>
+          </a:xfrm>
+          <a:prstGeom prst="rect">
+            <a:avLst/>
+          </a:prstGeom>
+          <a:noFill/>
+        </p:spPr>
+        <p:txBody>
+          <a:bodyPr wrap="square" anchor="t" lIns="0" rIns="0" tIns="0" bIns="0"/>
+          <a:lstStyle/>
+          <a:p>
+            <a:pPr algn="r"/>
+            <a:r>
+              <a:rPr sz="1100" b="0" i="0" lang="zh-CN" altLang="en-US">
+                <a:solidFill>
+                  <a:srgbClr val="C8C8C8"/>
                 </a:solidFill>
                 <a:latin typeface="Noto Sans CJK SC"/>
                 <a:ea typeface="Noto Sans CJK SC"/>
                 <a:cs typeface="Noto Sans CJK SC"/>
               </a:rPr>
-              <a:t>产量才继续把成本压低</a:t>
-            </a:r>
-          </a:p>
-        </p:txBody>
-      </p:sp>
-      <p:sp>
-        <p:nvSpPr>
-          <p:cNvPr id="11" name="TextBox 10"/>
-          <p:cNvSpPr txBox="1"/>
-          <p:nvPr/>
-        </p:nvSpPr>
-        <p:spPr>
-          <a:xfrm>
-            <a:off x="749808" y="3794760"/>
-            <a:ext cx="10058400" cy="868680"/>
+              <a:t>14</a:t>
+            </a:r>
+          </a:p>
+        </p:txBody>
+      </p:sp>
+    </p:spTree>
+  </p:cSld>
+  <p:clrMapOvr>
+    <a:masterClrMapping/>
+  </p:clrMapOvr>
+</p:sld>
+</file>
+
+<file path=ppt/slides/slide15.xml><?xml version="1.0" encoding="utf-8"?>
+<p:sld xmlns:a="http://schemas.openxmlformats.org/drawingml/2006/main" xmlns:p="http://schemas.openxmlformats.org/presentationml/2006/main" xmlns:r="http://schemas.openxmlformats.org/officeDocument/2006/relationships">
+  <p:cSld>
+    <p:bg>
+      <p:bgPr>
+        <a:solidFill>
+          <a:srgbClr val="FFFFFF"/>
+        </a:solidFill>
+        <a:effectLst/>
+      </p:bgPr>
+    </p:bg>
+    <p:spTree>
+      <p:nvGrpSpPr>
+        <p:cNvPr id="1" name=""/>
+        <p:cNvGrpSpPr/>
+        <p:nvPr/>
+      </p:nvGrpSpPr>
+      <p:grpSpPr/>
+      <p:sp>
+        <p:nvSpPr>
+          <p:cNvPr id="2" name="TextBox 1"/>
+          <p:cNvSpPr txBox="1"/>
+          <p:nvPr/>
+        </p:nvSpPr>
+        <p:spPr>
+          <a:xfrm>
+            <a:off x="658368" y="365760"/>
+            <a:ext cx="640080" cy="329184"/>
           </a:xfrm>
           <a:prstGeom prst="rect">
             <a:avLst/>
@@ -7477,7 +8042,7 @@
           <a:p>
             <a:pPr algn="l"/>
             <a:r>
-              <a:rPr sz="5200" b="0" i="0" lang="zh-CN" altLang="en-US">
+              <a:rPr sz="1500" b="0" i="0" lang="zh-CN" altLang="en-US">
                 <a:solidFill>
                   <a:srgbClr val="9E1B1B"/>
                 </a:solidFill>
@@ -7485,21 +8050,21 @@
                 <a:ea typeface="Noto Sans CJK SC Medium"/>
                 <a:cs typeface="Noto Sans CJK SC Medium"/>
               </a:rPr>
-              <a:t>不能不去</a:t>
-            </a:r>
-          </a:p>
-        </p:txBody>
-      </p:sp>
-      <p:sp>
-        <p:nvSpPr>
-          <p:cNvPr id="12" name="TextBox 11"/>
-          <p:cNvSpPr txBox="1"/>
-          <p:nvPr/>
-        </p:nvSpPr>
-        <p:spPr>
-          <a:xfrm>
-            <a:off x="804672" y="5806440"/>
-            <a:ext cx="8229600" cy="274320"/>
+              <a:t>13</a:t>
+            </a:r>
+          </a:p>
+        </p:txBody>
+      </p:sp>
+      <p:sp>
+        <p:nvSpPr>
+          <p:cNvPr id="3" name="TextBox 2"/>
+          <p:cNvSpPr txBox="1"/>
+          <p:nvPr/>
+        </p:nvSpPr>
+        <p:spPr>
+          <a:xfrm>
+            <a:off x="1371600" y="310896"/>
+            <a:ext cx="10058400" cy="438912"/>
           </a:xfrm>
           <a:prstGeom prst="rect">
             <a:avLst/>
@@ -7512,50 +8077,1576 @@
           <a:p>
             <a:pPr algn="l"/>
             <a:r>
-              <a:rPr sz="1400" b="0" i="0" lang="zh-CN" altLang="en-US">
-                <a:solidFill>
-                  <a:srgbClr val="9A9A9A"/>
+              <a:rPr sz="3000" b="0" i="0" lang="zh-CN" altLang="en-US">
+                <a:solidFill>
+                  <a:srgbClr val="141414"/>
+                </a:solidFill>
+                <a:latin typeface="Noto Sans CJK SC Medium"/>
+                <a:ea typeface="Noto Sans CJK SC Medium"/>
+                <a:cs typeface="Noto Sans CJK SC Medium"/>
+              </a:rPr>
+              <a:t>中国法人就做这四件</a:t>
+            </a:r>
+          </a:p>
+        </p:txBody>
+      </p:sp>
+      <p:sp>
+        <p:nvSpPr>
+          <p:cNvPr id="4" name="Rectangle 3"/>
+          <p:cNvSpPr/>
+          <p:nvPr/>
+        </p:nvSpPr>
+        <p:spPr>
+          <a:xfrm>
+            <a:off x="658368" y="960120"/>
+            <a:ext cx="10881360" cy="10972"/>
+          </a:xfrm>
+          <a:prstGeom prst="rect">
+            <a:avLst/>
+          </a:prstGeom>
+          <a:solidFill>
+            <a:srgbClr val="E2E2E2"/>
+          </a:solidFill>
+          <a:ln>
+            <a:noFill/>
+          </a:ln>
+        </p:spPr>
+        <p:style>
+          <a:lnRef idx="1">
+            <a:schemeClr val="accent1"/>
+          </a:lnRef>
+          <a:fillRef idx="3">
+            <a:schemeClr val="accent1"/>
+          </a:fillRef>
+          <a:effectRef idx="2">
+            <a:schemeClr val="accent1"/>
+          </a:effectRef>
+          <a:fontRef idx="minor">
+            <a:schemeClr val="lt1"/>
+          </a:fontRef>
+        </p:style>
+        <p:txBody>
+          <a:bodyPr rtlCol="0" anchor="ctr"/>
+          <a:lstStyle/>
+          <a:p>
+            <a:pPr algn="ctr"/>
+          </a:p>
+        </p:txBody>
+      </p:sp>
+      <p:sp>
+        <p:nvSpPr>
+          <p:cNvPr id="5" name="TextBox 4"/>
+          <p:cNvSpPr txBox="1"/>
+          <p:nvPr/>
+        </p:nvSpPr>
+        <p:spPr>
+          <a:xfrm>
+            <a:off x="658368" y="1207008"/>
+            <a:ext cx="640080" cy="365760"/>
+          </a:xfrm>
+          <a:prstGeom prst="rect">
+            <a:avLst/>
+          </a:prstGeom>
+          <a:noFill/>
+        </p:spPr>
+        <p:txBody>
+          <a:bodyPr wrap="square" anchor="t" lIns="0" rIns="0" tIns="0" bIns="0"/>
+          <a:lstStyle/>
+          <a:p>
+            <a:pPr algn="l"/>
+            <a:r>
+              <a:rPr sz="1600" b="0" i="0" lang="zh-CN" altLang="en-US">
+                <a:solidFill>
+                  <a:srgbClr val="9E1B1B"/>
+                </a:solidFill>
+                <a:latin typeface="Noto Sans CJK SC Medium"/>
+                <a:ea typeface="Noto Sans CJK SC Medium"/>
+                <a:cs typeface="Noto Sans CJK SC Medium"/>
+              </a:rPr>
+              <a:t>01</a:t>
+            </a:r>
+          </a:p>
+        </p:txBody>
+      </p:sp>
+      <p:sp>
+        <p:nvSpPr>
+          <p:cNvPr id="6" name="TextBox 5"/>
+          <p:cNvSpPr txBox="1"/>
+          <p:nvPr/>
+        </p:nvSpPr>
+        <p:spPr>
+          <a:xfrm>
+            <a:off x="1463040" y="1188720"/>
+            <a:ext cx="9875520" cy="384048"/>
+          </a:xfrm>
+          <a:prstGeom prst="rect">
+            <a:avLst/>
+          </a:prstGeom>
+          <a:noFill/>
+        </p:spPr>
+        <p:txBody>
+          <a:bodyPr wrap="square" anchor="t" lIns="0" rIns="0" tIns="0" bIns="0"/>
+          <a:lstStyle/>
+          <a:p>
+            <a:pPr algn="l"/>
+            <a:r>
+              <a:rPr sz="2200" b="0" i="0" lang="zh-CN" altLang="en-US">
+                <a:solidFill>
+                  <a:srgbClr val="141414"/>
+                </a:solidFill>
+                <a:latin typeface="Noto Sans CJK SC Medium"/>
+                <a:ea typeface="Noto Sans CJK SC Medium"/>
+                <a:cs typeface="Noto Sans CJK SC Medium"/>
+              </a:rPr>
+              <a:t>不另做一条中国线</a:t>
+            </a:r>
+          </a:p>
+        </p:txBody>
+      </p:sp>
+      <p:sp>
+        <p:nvSpPr>
+          <p:cNvPr id="7" name="TextBox 6"/>
+          <p:cNvSpPr txBox="1"/>
+          <p:nvPr/>
+        </p:nvSpPr>
+        <p:spPr>
+          <a:xfrm>
+            <a:off x="1463040" y="1627632"/>
+            <a:ext cx="9875520" cy="365760"/>
+          </a:xfrm>
+          <a:prstGeom prst="rect">
+            <a:avLst/>
+          </a:prstGeom>
+          <a:noFill/>
+        </p:spPr>
+        <p:txBody>
+          <a:bodyPr wrap="square" anchor="t" lIns="0" rIns="0" tIns="0" bIns="0"/>
+          <a:lstStyle/>
+          <a:p>
+            <a:pPr algn="l"/>
+            <a:r>
+              <a:rPr sz="1500" b="0" i="0" lang="zh-CN" altLang="en-US">
+                <a:solidFill>
+                  <a:srgbClr val="2C2C2C"/>
                 </a:solidFill>
                 <a:latin typeface="Noto Sans CJK SC"/>
                 <a:ea typeface="Noto Sans CJK SC"/>
                 <a:cs typeface="Noto Sans CJK SC"/>
               </a:rPr>
-              <a:t>蒙想讯息    2026年9月22日</a:t>
-            </a:r>
-          </a:p>
-        </p:txBody>
-      </p:sp>
-      <p:sp>
-        <p:nvSpPr>
-          <p:cNvPr id="13" name="TextBox 12"/>
-          <p:cNvSpPr txBox="1"/>
-          <p:nvPr/>
-        </p:nvSpPr>
-        <p:spPr>
-          <a:xfrm>
-            <a:off x="10561320" y="6492240"/>
-            <a:ext cx="1051560" cy="201168"/>
-          </a:xfrm>
-          <a:prstGeom prst="rect">
-            <a:avLst/>
-          </a:prstGeom>
-          <a:noFill/>
-        </p:spPr>
-        <p:txBody>
-          <a:bodyPr wrap="square" anchor="t" lIns="0" rIns="0" tIns="0" bIns="0"/>
-          <a:lstStyle/>
-          <a:p>
-            <a:pPr algn="r"/>
-            <a:r>
-              <a:rPr sz="1100" b="0" i="0" lang="zh-CN" altLang="en-US">
-                <a:solidFill>
-                  <a:srgbClr val="6A6A6A"/>
+              <a:t>一个品类仍是一个。不为最上的人做贵的，不为只认便宜的人做贱的。</a:t>
+            </a:r>
+          </a:p>
+        </p:txBody>
+      </p:sp>
+      <p:sp>
+        <p:nvSpPr>
+          <p:cNvPr id="8" name="TextBox 7"/>
+          <p:cNvSpPr txBox="1"/>
+          <p:nvPr/>
+        </p:nvSpPr>
+        <p:spPr>
+          <a:xfrm>
+            <a:off x="658368" y="2377440"/>
+            <a:ext cx="640080" cy="365760"/>
+          </a:xfrm>
+          <a:prstGeom prst="rect">
+            <a:avLst/>
+          </a:prstGeom>
+          <a:noFill/>
+        </p:spPr>
+        <p:txBody>
+          <a:bodyPr wrap="square" anchor="t" lIns="0" rIns="0" tIns="0" bIns="0"/>
+          <a:lstStyle/>
+          <a:p>
+            <a:pPr algn="l"/>
+            <a:r>
+              <a:rPr sz="1600" b="0" i="0" lang="zh-CN" altLang="en-US">
+                <a:solidFill>
+                  <a:srgbClr val="9E1B1B"/>
+                </a:solidFill>
+                <a:latin typeface="Noto Sans CJK SC Medium"/>
+                <a:ea typeface="Noto Sans CJK SC Medium"/>
+                <a:cs typeface="Noto Sans CJK SC Medium"/>
+              </a:rPr>
+              <a:t>02</a:t>
+            </a:r>
+          </a:p>
+        </p:txBody>
+      </p:sp>
+      <p:sp>
+        <p:nvSpPr>
+          <p:cNvPr id="9" name="TextBox 8"/>
+          <p:cNvSpPr txBox="1"/>
+          <p:nvPr/>
+        </p:nvSpPr>
+        <p:spPr>
+          <a:xfrm>
+            <a:off x="1463040" y="2359152"/>
+            <a:ext cx="9875520" cy="384048"/>
+          </a:xfrm>
+          <a:prstGeom prst="rect">
+            <a:avLst/>
+          </a:prstGeom>
+          <a:noFill/>
+        </p:spPr>
+        <p:txBody>
+          <a:bodyPr wrap="square" anchor="t" lIns="0" rIns="0" tIns="0" bIns="0"/>
+          <a:lstStyle/>
+          <a:p>
+            <a:pPr algn="l"/>
+            <a:r>
+              <a:rPr sz="2200" b="0" i="0" lang="zh-CN" altLang="en-US">
+                <a:solidFill>
+                  <a:srgbClr val="141414"/>
+                </a:solidFill>
+                <a:latin typeface="Noto Sans CJK SC Medium"/>
+                <a:ea typeface="Noto Sans CJK SC Medium"/>
+                <a:cs typeface="Noto Sans CJK SC Medium"/>
+              </a:rPr>
+              <a:t>不在中国价格上加一层</a:t>
+            </a:r>
+          </a:p>
+        </p:txBody>
+      </p:sp>
+      <p:sp>
+        <p:nvSpPr>
+          <p:cNvPr id="10" name="TextBox 9"/>
+          <p:cNvSpPr txBox="1"/>
+          <p:nvPr/>
+        </p:nvSpPr>
+        <p:spPr>
+          <a:xfrm>
+            <a:off x="1463040" y="2798064"/>
+            <a:ext cx="9875520" cy="365760"/>
+          </a:xfrm>
+          <a:prstGeom prst="rect">
+            <a:avLst/>
+          </a:prstGeom>
+          <a:noFill/>
+        </p:spPr>
+        <p:txBody>
+          <a:bodyPr wrap="square" anchor="t" lIns="0" rIns="0" tIns="0" bIns="0"/>
+          <a:lstStyle/>
+          <a:p>
+            <a:pPr algn="l"/>
+            <a:r>
+              <a:rPr sz="1500" b="0" i="0" lang="zh-CN" altLang="en-US">
+                <a:solidFill>
+                  <a:srgbClr val="2C2C2C"/>
                 </a:solidFill>
                 <a:latin typeface="Noto Sans CJK SC"/>
                 <a:ea typeface="Noto Sans CJK SC"/>
                 <a:cs typeface="Noto Sans CJK SC"/>
               </a:rPr>
+              <a:t>三十五个点不向中国消费者要。加了，就该让人去开市客。</a:t>
+            </a:r>
+          </a:p>
+        </p:txBody>
+      </p:sp>
+      <p:sp>
+        <p:nvSpPr>
+          <p:cNvPr id="11" name="TextBox 10"/>
+          <p:cNvSpPr txBox="1"/>
+          <p:nvPr/>
+        </p:nvSpPr>
+        <p:spPr>
+          <a:xfrm>
+            <a:off x="658368" y="3547872"/>
+            <a:ext cx="640080" cy="365760"/>
+          </a:xfrm>
+          <a:prstGeom prst="rect">
+            <a:avLst/>
+          </a:prstGeom>
+          <a:noFill/>
+        </p:spPr>
+        <p:txBody>
+          <a:bodyPr wrap="square" anchor="t" lIns="0" rIns="0" tIns="0" bIns="0"/>
+          <a:lstStyle/>
+          <a:p>
+            <a:pPr algn="l"/>
+            <a:r>
+              <a:rPr sz="1600" b="0" i="0" lang="zh-CN" altLang="en-US">
+                <a:solidFill>
+                  <a:srgbClr val="9E1B1B"/>
+                </a:solidFill>
+                <a:latin typeface="Noto Sans CJK SC Medium"/>
+                <a:ea typeface="Noto Sans CJK SC Medium"/>
+                <a:cs typeface="Noto Sans CJK SC Medium"/>
+              </a:rPr>
+              <a:t>03</a:t>
+            </a:r>
+          </a:p>
+        </p:txBody>
+      </p:sp>
+      <p:sp>
+        <p:nvSpPr>
+          <p:cNvPr id="12" name="TextBox 11"/>
+          <p:cNvSpPr txBox="1"/>
+          <p:nvPr/>
+        </p:nvSpPr>
+        <p:spPr>
+          <a:xfrm>
+            <a:off x="1463040" y="3529584"/>
+            <a:ext cx="9875520" cy="384048"/>
+          </a:xfrm>
+          <a:prstGeom prst="rect">
+            <a:avLst/>
+          </a:prstGeom>
+          <a:noFill/>
+        </p:spPr>
+        <p:txBody>
+          <a:bodyPr wrap="square" anchor="t" lIns="0" rIns="0" tIns="0" bIns="0"/>
+          <a:lstStyle/>
+          <a:p>
+            <a:pPr algn="l"/>
+            <a:r>
+              <a:rPr sz="2200" b="0" i="0" lang="zh-CN" altLang="en-US">
+                <a:solidFill>
+                  <a:srgbClr val="141414"/>
+                </a:solidFill>
+                <a:latin typeface="Noto Sans CJK SC Medium"/>
+                <a:ea typeface="Noto Sans CJK SC Medium"/>
+                <a:cs typeface="Noto Sans CJK SC Medium"/>
+              </a:rPr>
+              <a:t>用中国的量，把工序锁住</a:t>
+            </a:r>
+          </a:p>
+        </p:txBody>
+      </p:sp>
+      <p:sp>
+        <p:nvSpPr>
+          <p:cNvPr id="13" name="TextBox 12"/>
+          <p:cNvSpPr txBox="1"/>
+          <p:nvPr/>
+        </p:nvSpPr>
+        <p:spPr>
+          <a:xfrm>
+            <a:off x="1463040" y="3968496"/>
+            <a:ext cx="9875520" cy="365760"/>
+          </a:xfrm>
+          <a:prstGeom prst="rect">
+            <a:avLst/>
+          </a:prstGeom>
+          <a:noFill/>
+        </p:spPr>
+        <p:txBody>
+          <a:bodyPr wrap="square" anchor="t" lIns="0" rIns="0" tIns="0" bIns="0"/>
+          <a:lstStyle/>
+          <a:p>
+            <a:pPr algn="l"/>
+            <a:r>
+              <a:rPr sz="1500" b="0" i="0" lang="zh-CN" altLang="en-US">
+                <a:solidFill>
+                  <a:srgbClr val="2C2C2C"/>
+                </a:solidFill>
+                <a:latin typeface="Noto Sans CJK SC"/>
+                <a:ea typeface="Noto Sans CJK SC"/>
+                <a:cs typeface="Noto Sans CJK SC"/>
+              </a:rPr>
+              <a:t>把看得见的需求交给一条线。愿景让对方看见，比先堆很多款有用。</a:t>
+            </a:r>
+          </a:p>
+        </p:txBody>
+      </p:sp>
+      <p:sp>
+        <p:nvSpPr>
+          <p:cNvPr id="14" name="TextBox 13"/>
+          <p:cNvSpPr txBox="1"/>
+          <p:nvPr/>
+        </p:nvSpPr>
+        <p:spPr>
+          <a:xfrm>
+            <a:off x="658368" y="4718304"/>
+            <a:ext cx="640080" cy="365760"/>
+          </a:xfrm>
+          <a:prstGeom prst="rect">
+            <a:avLst/>
+          </a:prstGeom>
+          <a:noFill/>
+        </p:spPr>
+        <p:txBody>
+          <a:bodyPr wrap="square" anchor="t" lIns="0" rIns="0" tIns="0" bIns="0"/>
+          <a:lstStyle/>
+          <a:p>
+            <a:pPr algn="l"/>
+            <a:r>
+              <a:rPr sz="1600" b="0" i="0" lang="zh-CN" altLang="en-US">
+                <a:solidFill>
+                  <a:srgbClr val="9E1B1B"/>
+                </a:solidFill>
+                <a:latin typeface="Noto Sans CJK SC Medium"/>
+                <a:ea typeface="Noto Sans CJK SC Medium"/>
+                <a:cs typeface="Noto Sans CJK SC Medium"/>
+              </a:rPr>
+              <a:t>04</a:t>
+            </a:r>
+          </a:p>
+        </p:txBody>
+      </p:sp>
+      <p:sp>
+        <p:nvSpPr>
+          <p:cNvPr id="15" name="TextBox 14"/>
+          <p:cNvSpPr txBox="1"/>
+          <p:nvPr/>
+        </p:nvSpPr>
+        <p:spPr>
+          <a:xfrm>
+            <a:off x="1463040" y="4700016"/>
+            <a:ext cx="9875520" cy="384048"/>
+          </a:xfrm>
+          <a:prstGeom prst="rect">
+            <a:avLst/>
+          </a:prstGeom>
+          <a:noFill/>
+        </p:spPr>
+        <p:txBody>
+          <a:bodyPr wrap="square" anchor="t" lIns="0" rIns="0" tIns="0" bIns="0"/>
+          <a:lstStyle/>
+          <a:p>
+            <a:pPr algn="l"/>
+            <a:r>
+              <a:rPr sz="2200" b="0" i="0" lang="zh-CN" altLang="en-US">
+                <a:solidFill>
+                  <a:srgbClr val="141414"/>
+                </a:solidFill>
+                <a:latin typeface="Noto Sans CJK SC Medium"/>
+                <a:ea typeface="Noto Sans CJK SC Medium"/>
+                <a:cs typeface="Noto Sans CJK SC Medium"/>
+              </a:rPr>
+              <a:t>先有队伍，再谈店和广告</a:t>
+            </a:r>
+          </a:p>
+        </p:txBody>
+      </p:sp>
+      <p:sp>
+        <p:nvSpPr>
+          <p:cNvPr id="16" name="TextBox 15"/>
+          <p:cNvSpPr txBox="1"/>
+          <p:nvPr/>
+        </p:nvSpPr>
+        <p:spPr>
+          <a:xfrm>
+            <a:off x="1463040" y="5138928"/>
+            <a:ext cx="9875520" cy="365760"/>
+          </a:xfrm>
+          <a:prstGeom prst="rect">
+            <a:avLst/>
+          </a:prstGeom>
+          <a:noFill/>
+        </p:spPr>
+        <p:txBody>
+          <a:bodyPr wrap="square" anchor="t" lIns="0" rIns="0" tIns="0" bIns="0"/>
+          <a:lstStyle/>
+          <a:p>
+            <a:pPr algn="l"/>
+            <a:r>
+              <a:rPr sz="1500" b="0" i="0" lang="zh-CN" altLang="en-US">
+                <a:solidFill>
+                  <a:srgbClr val="2C2C2C"/>
+                </a:solidFill>
+                <a:latin typeface="Noto Sans CJK SC"/>
+                <a:ea typeface="Noto Sans CJK SC"/>
+                <a:cs typeface="Noto Sans CJK SC"/>
+              </a:rPr>
+              <a:t>店和投放吃掉的，就是那三十五个点。组织先动，店可以后有。</a:t>
+            </a:r>
+          </a:p>
+        </p:txBody>
+      </p:sp>
+      <p:sp>
+        <p:nvSpPr>
+          <p:cNvPr id="17" name="TextBox 16"/>
+          <p:cNvSpPr txBox="1"/>
+          <p:nvPr/>
+        </p:nvSpPr>
+        <p:spPr>
+          <a:xfrm>
+            <a:off x="10561320" y="6492240"/>
+            <a:ext cx="1051560" cy="201168"/>
+          </a:xfrm>
+          <a:prstGeom prst="rect">
+            <a:avLst/>
+          </a:prstGeom>
+          <a:noFill/>
+        </p:spPr>
+        <p:txBody>
+          <a:bodyPr wrap="square" anchor="t" lIns="0" rIns="0" tIns="0" bIns="0"/>
+          <a:lstStyle/>
+          <a:p>
+            <a:pPr algn="r"/>
+            <a:r>
+              <a:rPr sz="1100" b="0" i="0" lang="zh-CN" altLang="en-US">
+                <a:solidFill>
+                  <a:srgbClr val="C8C8C8"/>
+                </a:solidFill>
+                <a:latin typeface="Noto Sans CJK SC"/>
+                <a:ea typeface="Noto Sans CJK SC"/>
+                <a:cs typeface="Noto Sans CJK SC"/>
+              </a:rPr>
+              <a:t>15</a:t>
+            </a:r>
+          </a:p>
+        </p:txBody>
+      </p:sp>
+    </p:spTree>
+  </p:cSld>
+  <p:clrMapOvr>
+    <a:masterClrMapping/>
+  </p:clrMapOvr>
+</p:sld>
+</file>
+
+<file path=ppt/slides/slide16.xml><?xml version="1.0" encoding="utf-8"?>
+<p:sld xmlns:a="http://schemas.openxmlformats.org/drawingml/2006/main" xmlns:p="http://schemas.openxmlformats.org/presentationml/2006/main" xmlns:r="http://schemas.openxmlformats.org/officeDocument/2006/relationships">
+  <p:cSld>
+    <p:bg>
+      <p:bgPr>
+        <a:solidFill>
+          <a:srgbClr val="FFFFFF"/>
+        </a:solidFill>
+        <a:effectLst/>
+      </p:bgPr>
+    </p:bg>
+    <p:spTree>
+      <p:nvGrpSpPr>
+        <p:cNvPr id="1" name=""/>
+        <p:cNvGrpSpPr/>
+        <p:nvPr/>
+      </p:nvGrpSpPr>
+      <p:grpSpPr/>
+      <p:sp>
+        <p:nvSpPr>
+          <p:cNvPr id="2" name="TextBox 1"/>
+          <p:cNvSpPr txBox="1"/>
+          <p:nvPr/>
+        </p:nvSpPr>
+        <p:spPr>
+          <a:xfrm>
+            <a:off x="658368" y="365760"/>
+            <a:ext cx="640080" cy="329184"/>
+          </a:xfrm>
+          <a:prstGeom prst="rect">
+            <a:avLst/>
+          </a:prstGeom>
+          <a:noFill/>
+        </p:spPr>
+        <p:txBody>
+          <a:bodyPr wrap="square" anchor="t" lIns="0" rIns="0" tIns="0" bIns="0"/>
+          <a:lstStyle/>
+          <a:p>
+            <a:pPr algn="l"/>
+            <a:r>
+              <a:rPr sz="1500" b="0" i="0" lang="zh-CN" altLang="en-US">
+                <a:solidFill>
+                  <a:srgbClr val="9E1B1B"/>
+                </a:solidFill>
+                <a:latin typeface="Noto Sans CJK SC Medium"/>
+                <a:ea typeface="Noto Sans CJK SC Medium"/>
+                <a:cs typeface="Noto Sans CJK SC Medium"/>
+              </a:rPr>
               <a:t>14</a:t>
+            </a:r>
+          </a:p>
+        </p:txBody>
+      </p:sp>
+      <p:sp>
+        <p:nvSpPr>
+          <p:cNvPr id="3" name="TextBox 2"/>
+          <p:cNvSpPr txBox="1"/>
+          <p:nvPr/>
+        </p:nvSpPr>
+        <p:spPr>
+          <a:xfrm>
+            <a:off x="1371600" y="310896"/>
+            <a:ext cx="10058400" cy="438912"/>
+          </a:xfrm>
+          <a:prstGeom prst="rect">
+            <a:avLst/>
+          </a:prstGeom>
+          <a:noFill/>
+        </p:spPr>
+        <p:txBody>
+          <a:bodyPr wrap="square" anchor="t" lIns="0" rIns="0" tIns="0" bIns="0"/>
+          <a:lstStyle/>
+          <a:p>
+            <a:pPr algn="l"/>
+            <a:r>
+              <a:rPr sz="3000" b="0" i="0" lang="zh-CN" altLang="en-US">
+                <a:solidFill>
+                  <a:srgbClr val="141414"/>
+                </a:solidFill>
+                <a:latin typeface="Noto Sans CJK SC Medium"/>
+                <a:ea typeface="Noto Sans CJK SC Medium"/>
+                <a:cs typeface="Noto Sans CJK SC Medium"/>
+              </a:rPr>
+              <a:t>三台引擎，在中国转起来</a:t>
+            </a:r>
+          </a:p>
+        </p:txBody>
+      </p:sp>
+      <p:sp>
+        <p:nvSpPr>
+          <p:cNvPr id="4" name="Rectangle 3"/>
+          <p:cNvSpPr/>
+          <p:nvPr/>
+        </p:nvSpPr>
+        <p:spPr>
+          <a:xfrm>
+            <a:off x="658368" y="960120"/>
+            <a:ext cx="10881360" cy="10972"/>
+          </a:xfrm>
+          <a:prstGeom prst="rect">
+            <a:avLst/>
+          </a:prstGeom>
+          <a:solidFill>
+            <a:srgbClr val="E2E2E2"/>
+          </a:solidFill>
+          <a:ln>
+            <a:noFill/>
+          </a:ln>
+        </p:spPr>
+        <p:style>
+          <a:lnRef idx="1">
+            <a:schemeClr val="accent1"/>
+          </a:lnRef>
+          <a:fillRef idx="3">
+            <a:schemeClr val="accent1"/>
+          </a:fillRef>
+          <a:effectRef idx="2">
+            <a:schemeClr val="accent1"/>
+          </a:effectRef>
+          <a:fontRef idx="minor">
+            <a:schemeClr val="lt1"/>
+          </a:fontRef>
+        </p:style>
+        <p:txBody>
+          <a:bodyPr rtlCol="0" anchor="ctr"/>
+          <a:lstStyle/>
+          <a:p>
+            <a:pPr algn="ctr"/>
+          </a:p>
+        </p:txBody>
+      </p:sp>
+      <p:sp>
+        <p:nvSpPr>
+          <p:cNvPr id="5" name="TextBox 4"/>
+          <p:cNvSpPr txBox="1"/>
+          <p:nvPr/>
+        </p:nvSpPr>
+        <p:spPr>
+          <a:xfrm>
+            <a:off x="658368" y="1325880"/>
+            <a:ext cx="3246120" cy="548640"/>
+          </a:xfrm>
+          <a:prstGeom prst="rect">
+            <a:avLst/>
+          </a:prstGeom>
+          <a:noFill/>
+        </p:spPr>
+        <p:txBody>
+          <a:bodyPr wrap="square" anchor="t" lIns="0" rIns="0" tIns="0" bIns="0"/>
+          <a:lstStyle/>
+          <a:p>
+            <a:pPr algn="l"/>
+            <a:r>
+              <a:rPr sz="2400" b="0" i="0" lang="zh-CN" altLang="en-US">
+                <a:solidFill>
+                  <a:srgbClr val="141414"/>
+                </a:solidFill>
+                <a:latin typeface="Noto Sans CJK SC Medium"/>
+                <a:ea typeface="Noto Sans CJK SC Medium"/>
+                <a:cs typeface="Noto Sans CJK SC Medium"/>
+              </a:rPr>
+              <a:t>个人平台</a:t>
+            </a:r>
+          </a:p>
+        </p:txBody>
+      </p:sp>
+      <p:sp>
+        <p:nvSpPr>
+          <p:cNvPr id="6" name="TextBox 5"/>
+          <p:cNvSpPr txBox="1"/>
+          <p:nvPr/>
+        </p:nvSpPr>
+        <p:spPr>
+          <a:xfrm>
+            <a:off x="658368" y="2103120"/>
+            <a:ext cx="3246120" cy="2011680"/>
+          </a:xfrm>
+          <a:prstGeom prst="rect">
+            <a:avLst/>
+          </a:prstGeom>
+          <a:noFill/>
+        </p:spPr>
+        <p:txBody>
+          <a:bodyPr wrap="square" anchor="t" lIns="0" rIns="0" tIns="0" bIns="0"/>
+          <a:lstStyle/>
+          <a:p>
+            <a:pPr algn="l">
+              <a:lnSpc>
+                <a:spcPct val="145000"/>
+              </a:lnSpc>
+            </a:pPr>
+            <a:r>
+              <a:rPr sz="1500" b="0" i="0" lang="zh-CN" altLang="en-US">
+                <a:solidFill>
+                  <a:srgbClr val="2C2C2C"/>
+                </a:solidFill>
+                <a:latin typeface="Noto Sans CJK SC"/>
+                <a:ea typeface="Noto Sans CJK SC"/>
+                <a:cs typeface="Noto Sans CJK SC"/>
+              </a:rPr>
+              <a:t>用中国会员听得懂的话，
+把一小时收成五分钟。
+事业者是这家平台的主人，
+不是发链接的人。</a:t>
+            </a:r>
+          </a:p>
+        </p:txBody>
+      </p:sp>
+      <p:sp>
+        <p:nvSpPr>
+          <p:cNvPr id="7" name="Rectangle 6"/>
+          <p:cNvSpPr/>
+          <p:nvPr/>
+        </p:nvSpPr>
+        <p:spPr>
+          <a:xfrm>
+            <a:off x="4160520" y="1280160"/>
+            <a:ext cx="10972" cy="2880360"/>
+          </a:xfrm>
+          <a:prstGeom prst="rect">
+            <a:avLst/>
+          </a:prstGeom>
+          <a:solidFill>
+            <a:srgbClr val="E2E2E2"/>
+          </a:solidFill>
+          <a:ln>
+            <a:noFill/>
+          </a:ln>
+        </p:spPr>
+        <p:style>
+          <a:lnRef idx="1">
+            <a:schemeClr val="accent1"/>
+          </a:lnRef>
+          <a:fillRef idx="3">
+            <a:schemeClr val="accent1"/>
+          </a:fillRef>
+          <a:effectRef idx="2">
+            <a:schemeClr val="accent1"/>
+          </a:effectRef>
+          <a:fontRef idx="minor">
+            <a:schemeClr val="lt1"/>
+          </a:fontRef>
+        </p:style>
+        <p:txBody>
+          <a:bodyPr rtlCol="0" anchor="ctr"/>
+          <a:lstStyle/>
+          <a:p>
+            <a:pPr algn="ctr"/>
+          </a:p>
+        </p:txBody>
+      </p:sp>
+      <p:sp>
+        <p:nvSpPr>
+          <p:cNvPr id="8" name="TextBox 7"/>
+          <p:cNvSpPr txBox="1"/>
+          <p:nvPr/>
+        </p:nvSpPr>
+        <p:spPr>
+          <a:xfrm>
+            <a:off x="4361688" y="1325880"/>
+            <a:ext cx="3246120" cy="548640"/>
+          </a:xfrm>
+          <a:prstGeom prst="rect">
+            <a:avLst/>
+          </a:prstGeom>
+          <a:noFill/>
+        </p:spPr>
+        <p:txBody>
+          <a:bodyPr wrap="square" anchor="t" lIns="0" rIns="0" tIns="0" bIns="0"/>
+          <a:lstStyle/>
+          <a:p>
+            <a:pPr algn="l"/>
+            <a:r>
+              <a:rPr sz="2400" b="0" i="0" lang="zh-CN" altLang="en-US">
+                <a:solidFill>
+                  <a:srgbClr val="141414"/>
+                </a:solidFill>
+                <a:latin typeface="Noto Sans CJK SC Medium"/>
+                <a:ea typeface="Noto Sans CJK SC Medium"/>
+                <a:cs typeface="Noto Sans CJK SC Medium"/>
+              </a:rPr>
+              <a:t>艾护理</a:t>
+            </a:r>
+          </a:p>
+        </p:txBody>
+      </p:sp>
+      <p:sp>
+        <p:nvSpPr>
+          <p:cNvPr id="9" name="TextBox 8"/>
+          <p:cNvSpPr txBox="1"/>
+          <p:nvPr/>
+        </p:nvSpPr>
+        <p:spPr>
+          <a:xfrm>
+            <a:off x="4361688" y="2103120"/>
+            <a:ext cx="3246120" cy="2011680"/>
+          </a:xfrm>
+          <a:prstGeom prst="rect">
+            <a:avLst/>
+          </a:prstGeom>
+          <a:noFill/>
+        </p:spPr>
+        <p:txBody>
+          <a:bodyPr wrap="square" anchor="t" lIns="0" rIns="0" tIns="0" bIns="0"/>
+          <a:lstStyle/>
+          <a:p>
+            <a:pPr algn="l">
+              <a:lnSpc>
+                <a:spcPct val="145000"/>
+              </a:lnSpc>
+            </a:pPr>
+            <a:r>
+              <a:rPr sz="1500" b="0" i="0" lang="zh-CN" altLang="en-US">
+                <a:solidFill>
+                  <a:srgbClr val="2C2C2C"/>
+                </a:solidFill>
+                <a:latin typeface="Noto Sans CJK SC"/>
+                <a:ea typeface="Noto Sans CJK SC"/>
+                <a:cs typeface="Noto Sans CJK SC"/>
+              </a:rPr>
+              <a:t>从身体和饮食进入，
+不再“好东西请用”。
+人越用越留下，建议才因人而异。
+不必等一座医院盖好才开始。</a:t>
+            </a:r>
+          </a:p>
+        </p:txBody>
+      </p:sp>
+      <p:sp>
+        <p:nvSpPr>
+          <p:cNvPr id="10" name="Rectangle 9"/>
+          <p:cNvSpPr/>
+          <p:nvPr/>
+        </p:nvSpPr>
+        <p:spPr>
+          <a:xfrm>
+            <a:off x="7863840" y="1280160"/>
+            <a:ext cx="10972" cy="2880360"/>
+          </a:xfrm>
+          <a:prstGeom prst="rect">
+            <a:avLst/>
+          </a:prstGeom>
+          <a:solidFill>
+            <a:srgbClr val="E2E2E2"/>
+          </a:solidFill>
+          <a:ln>
+            <a:noFill/>
+          </a:ln>
+        </p:spPr>
+        <p:style>
+          <a:lnRef idx="1">
+            <a:schemeClr val="accent1"/>
+          </a:lnRef>
+          <a:fillRef idx="3">
+            <a:schemeClr val="accent1"/>
+          </a:fillRef>
+          <a:effectRef idx="2">
+            <a:schemeClr val="accent1"/>
+          </a:effectRef>
+          <a:fontRef idx="minor">
+            <a:schemeClr val="lt1"/>
+          </a:fontRef>
+        </p:style>
+        <p:txBody>
+          <a:bodyPr rtlCol="0" anchor="ctr"/>
+          <a:lstStyle/>
+          <a:p>
+            <a:pPr algn="ctr"/>
+          </a:p>
+        </p:txBody>
+      </p:sp>
+      <p:sp>
+        <p:nvSpPr>
+          <p:cNvPr id="11" name="TextBox 10"/>
+          <p:cNvSpPr txBox="1"/>
+          <p:nvPr/>
+        </p:nvSpPr>
+        <p:spPr>
+          <a:xfrm>
+            <a:off x="8065008" y="1325880"/>
+            <a:ext cx="3246120" cy="548640"/>
+          </a:xfrm>
+          <a:prstGeom prst="rect">
+            <a:avLst/>
+          </a:prstGeom>
+          <a:noFill/>
+        </p:spPr>
+        <p:txBody>
+          <a:bodyPr wrap="square" anchor="t" lIns="0" rIns="0" tIns="0" bIns="0"/>
+          <a:lstStyle/>
+          <a:p>
+            <a:pPr algn="l"/>
+            <a:r>
+              <a:rPr sz="2400" b="0" i="0" lang="zh-CN" altLang="en-US">
+                <a:solidFill>
+                  <a:srgbClr val="141414"/>
+                </a:solidFill>
+                <a:latin typeface="Noto Sans CJK SC Medium"/>
+                <a:ea typeface="Noto Sans CJK SC Medium"/>
+                <a:cs typeface="Noto Sans CJK SC Medium"/>
+              </a:rPr>
+              <a:t>阿扎</a:t>
+            </a:r>
+          </a:p>
+        </p:txBody>
+      </p:sp>
+      <p:sp>
+        <p:nvSpPr>
+          <p:cNvPr id="12" name="TextBox 11"/>
+          <p:cNvSpPr txBox="1"/>
+          <p:nvPr/>
+        </p:nvSpPr>
+        <p:spPr>
+          <a:xfrm>
+            <a:off x="8065008" y="2103120"/>
+            <a:ext cx="3246120" cy="2011680"/>
+          </a:xfrm>
+          <a:prstGeom prst="rect">
+            <a:avLst/>
+          </a:prstGeom>
+          <a:noFill/>
+        </p:spPr>
+        <p:txBody>
+          <a:bodyPr wrap="square" anchor="t" lIns="0" rIns="0" tIns="0" bIns="0"/>
+          <a:lstStyle/>
+          <a:p>
+            <a:pPr algn="l">
+              <a:lnSpc>
+                <a:spcPct val="145000"/>
+              </a:lnSpc>
+            </a:pPr>
+            <a:r>
+              <a:rPr sz="1500" b="0" i="0" lang="zh-CN" altLang="en-US">
+                <a:solidFill>
+                  <a:srgbClr val="2C2C2C"/>
+                </a:solidFill>
+                <a:latin typeface="Noto Sans CJK SC"/>
+                <a:ea typeface="Noto Sans CJK SC"/>
+                <a:cs typeface="Noto Sans CJK SC"/>
+              </a:rPr>
+              <a:t>油、蛋、充电，每天的开支接进来。
+电要在规则里面找能累积的办法。
+十万个日常品目让人每天来。
+一百兆仍由大约五百个主力品目赚。</a:t>
+            </a:r>
+          </a:p>
+        </p:txBody>
+      </p:sp>
+      <p:sp>
+        <p:nvSpPr>
+          <p:cNvPr id="13" name="Rectangle 12"/>
+          <p:cNvSpPr/>
+          <p:nvPr/>
+        </p:nvSpPr>
+        <p:spPr>
+          <a:xfrm>
+            <a:off x="658368" y="4709160"/>
+            <a:ext cx="10881360" cy="10972"/>
+          </a:xfrm>
+          <a:prstGeom prst="rect">
+            <a:avLst/>
+          </a:prstGeom>
+          <a:solidFill>
+            <a:srgbClr val="E2E2E2"/>
+          </a:solidFill>
+          <a:ln>
+            <a:noFill/>
+          </a:ln>
+        </p:spPr>
+        <p:style>
+          <a:lnRef idx="1">
+            <a:schemeClr val="accent1"/>
+          </a:lnRef>
+          <a:fillRef idx="3">
+            <a:schemeClr val="accent1"/>
+          </a:fillRef>
+          <a:effectRef idx="2">
+            <a:schemeClr val="accent1"/>
+          </a:effectRef>
+          <a:fontRef idx="minor">
+            <a:schemeClr val="lt1"/>
+          </a:fontRef>
+        </p:style>
+        <p:txBody>
+          <a:bodyPr rtlCol="0" anchor="ctr"/>
+          <a:lstStyle/>
+          <a:p>
+            <a:pPr algn="ctr"/>
+          </a:p>
+        </p:txBody>
+      </p:sp>
+      <p:sp>
+        <p:nvSpPr>
+          <p:cNvPr id="14" name="TextBox 13"/>
+          <p:cNvSpPr txBox="1"/>
+          <p:nvPr/>
+        </p:nvSpPr>
+        <p:spPr>
+          <a:xfrm>
+            <a:off x="658368" y="4983480"/>
+            <a:ext cx="10789920" cy="1097280"/>
+          </a:xfrm>
+          <a:prstGeom prst="rect">
+            <a:avLst/>
+          </a:prstGeom>
+          <a:noFill/>
+        </p:spPr>
+        <p:txBody>
+          <a:bodyPr wrap="square" anchor="t" lIns="0" rIns="0" tIns="0" bIns="0"/>
+          <a:lstStyle/>
+          <a:p>
+            <a:pPr algn="l">
+              <a:lnSpc>
+                <a:spcPct val="135000"/>
+              </a:lnSpc>
+            </a:pPr>
+            <a:r>
+              <a:rPr sz="2200" b="0" i="0" lang="zh-CN" altLang="en-US">
+                <a:solidFill>
+                  <a:srgbClr val="9E1B1B"/>
+                </a:solidFill>
+                <a:latin typeface="Noto Sans CJK SC Medium"/>
+                <a:ea typeface="Noto Sans CJK SC Medium"/>
+                <a:cs typeface="Noto Sans CJK SC Medium"/>
+              </a:rPr>
+              <a:t>中国法人不另造一个中国模式。
+同一套结构，在中国转起来。</a:t>
+            </a:r>
+          </a:p>
+        </p:txBody>
+      </p:sp>
+      <p:sp>
+        <p:nvSpPr>
+          <p:cNvPr id="15" name="TextBox 14"/>
+          <p:cNvSpPr txBox="1"/>
+          <p:nvPr/>
+        </p:nvSpPr>
+        <p:spPr>
+          <a:xfrm>
+            <a:off x="10561320" y="6492240"/>
+            <a:ext cx="1051560" cy="201168"/>
+          </a:xfrm>
+          <a:prstGeom prst="rect">
+            <a:avLst/>
+          </a:prstGeom>
+          <a:noFill/>
+        </p:spPr>
+        <p:txBody>
+          <a:bodyPr wrap="square" anchor="t" lIns="0" rIns="0" tIns="0" bIns="0"/>
+          <a:lstStyle/>
+          <a:p>
+            <a:pPr algn="r"/>
+            <a:r>
+              <a:rPr sz="1100" b="0" i="0" lang="zh-CN" altLang="en-US">
+                <a:solidFill>
+                  <a:srgbClr val="C8C8C8"/>
+                </a:solidFill>
+                <a:latin typeface="Noto Sans CJK SC"/>
+                <a:ea typeface="Noto Sans CJK SC"/>
+                <a:cs typeface="Noto Sans CJK SC"/>
+              </a:rPr>
+              <a:t>16</a:t>
+            </a:r>
+          </a:p>
+        </p:txBody>
+      </p:sp>
+    </p:spTree>
+  </p:cSld>
+  <p:clrMapOvr>
+    <a:masterClrMapping/>
+  </p:clrMapOvr>
+</p:sld>
+</file>
+
+<file path=ppt/slides/slide17.xml><?xml version="1.0" encoding="utf-8"?>
+<p:sld xmlns:a="http://schemas.openxmlformats.org/drawingml/2006/main" xmlns:p="http://schemas.openxmlformats.org/presentationml/2006/main" xmlns:r="http://schemas.openxmlformats.org/officeDocument/2006/relationships">
+  <p:cSld>
+    <p:bg>
+      <p:bgPr>
+        <a:solidFill>
+          <a:srgbClr val="121212"/>
+        </a:solidFill>
+        <a:effectLst/>
+      </p:bgPr>
+    </p:bg>
+    <p:spTree>
+      <p:nvGrpSpPr>
+        <p:cNvPr id="1" name=""/>
+        <p:cNvGrpSpPr/>
+        <p:nvPr/>
+      </p:nvGrpSpPr>
+      <p:grpSpPr/>
+      <p:sp>
+        <p:nvSpPr>
+          <p:cNvPr id="2" name="Rectangle 1"/>
+          <p:cNvSpPr/>
+          <p:nvPr/>
+        </p:nvSpPr>
+        <p:spPr>
+          <a:xfrm>
+            <a:off x="0" y="0"/>
+            <a:ext cx="73152" cy="6858000"/>
+          </a:xfrm>
+          <a:prstGeom prst="rect">
+            <a:avLst/>
+          </a:prstGeom>
+          <a:solidFill>
+            <a:srgbClr val="9E1B1B"/>
+          </a:solidFill>
+          <a:ln>
+            <a:noFill/>
+          </a:ln>
+        </p:spPr>
+        <p:style>
+          <a:lnRef idx="1">
+            <a:schemeClr val="accent1"/>
+          </a:lnRef>
+          <a:fillRef idx="3">
+            <a:schemeClr val="accent1"/>
+          </a:fillRef>
+          <a:effectRef idx="2">
+            <a:schemeClr val="accent1"/>
+          </a:effectRef>
+          <a:fontRef idx="minor">
+            <a:schemeClr val="lt1"/>
+          </a:fontRef>
+        </p:style>
+        <p:txBody>
+          <a:bodyPr rtlCol="0" anchor="ctr"/>
+          <a:lstStyle/>
+          <a:p>
+            <a:pPr algn="ctr"/>
+          </a:p>
+        </p:txBody>
+      </p:sp>
+      <p:sp>
+        <p:nvSpPr>
+          <p:cNvPr id="3" name="TextBox 2"/>
+          <p:cNvSpPr txBox="1"/>
+          <p:nvPr/>
+        </p:nvSpPr>
+        <p:spPr>
+          <a:xfrm>
+            <a:off x="777240" y="658368"/>
+            <a:ext cx="4572000" cy="457200"/>
+          </a:xfrm>
+          <a:prstGeom prst="rect">
+            <a:avLst/>
+          </a:prstGeom>
+          <a:noFill/>
+        </p:spPr>
+        <p:txBody>
+          <a:bodyPr wrap="square" anchor="t" lIns="0" rIns="0" tIns="0" bIns="0"/>
+          <a:lstStyle/>
+          <a:p>
+            <a:pPr algn="l"/>
+            <a:r>
+              <a:rPr sz="2600" b="0" i="0" lang="zh-CN" altLang="en-US">
+                <a:solidFill>
+                  <a:srgbClr val="FFFFFF"/>
+                </a:solidFill>
+                <a:latin typeface="Noto Sans CJK SC Medium"/>
+                <a:ea typeface="Noto Sans CJK SC Medium"/>
+                <a:cs typeface="Noto Sans CJK SC Medium"/>
+              </a:rPr>
+              <a:t>生产被重做</a:t>
+            </a:r>
+          </a:p>
+        </p:txBody>
+      </p:sp>
+      <p:sp>
+        <p:nvSpPr>
+          <p:cNvPr id="4" name="TextBox 3"/>
+          <p:cNvSpPr txBox="1"/>
+          <p:nvPr/>
+        </p:nvSpPr>
+        <p:spPr>
+          <a:xfrm>
+            <a:off x="5623560" y="731519"/>
+            <a:ext cx="5760720" cy="365760"/>
+          </a:xfrm>
+          <a:prstGeom prst="rect">
+            <a:avLst/>
+          </a:prstGeom>
+          <a:noFill/>
+        </p:spPr>
+        <p:txBody>
+          <a:bodyPr wrap="square" anchor="t" lIns="0" rIns="0" tIns="0" bIns="0"/>
+          <a:lstStyle/>
+          <a:p>
+            <a:pPr algn="l"/>
+            <a:r>
+              <a:rPr sz="1600" b="0" i="0" lang="zh-CN" altLang="en-US">
+                <a:solidFill>
+                  <a:srgbClr val="B5B5B5"/>
+                </a:solidFill>
+                <a:latin typeface="Noto Sans CJK SC"/>
+                <a:ea typeface="Noto Sans CJK SC"/>
+                <a:cs typeface="Noto Sans CJK SC"/>
+              </a:rPr>
+              <a:t>三十五个点有了出处</a:t>
+            </a:r>
+          </a:p>
+        </p:txBody>
+      </p:sp>
+      <p:sp>
+        <p:nvSpPr>
+          <p:cNvPr id="5" name="TextBox 4"/>
+          <p:cNvSpPr txBox="1"/>
+          <p:nvPr/>
+        </p:nvSpPr>
+        <p:spPr>
+          <a:xfrm>
+            <a:off x="777240" y="1371600"/>
+            <a:ext cx="4572000" cy="457200"/>
+          </a:xfrm>
+          <a:prstGeom prst="rect">
+            <a:avLst/>
+          </a:prstGeom>
+          <a:noFill/>
+        </p:spPr>
+        <p:txBody>
+          <a:bodyPr wrap="square" anchor="t" lIns="0" rIns="0" tIns="0" bIns="0"/>
+          <a:lstStyle/>
+          <a:p>
+            <a:pPr algn="l"/>
+            <a:r>
+              <a:rPr sz="2600" b="0" i="0" lang="zh-CN" altLang="en-US">
+                <a:solidFill>
+                  <a:srgbClr val="FFFFFF"/>
+                </a:solidFill>
+                <a:latin typeface="Noto Sans CJK SC Medium"/>
+                <a:ea typeface="Noto Sans CJK SC Medium"/>
+                <a:cs typeface="Noto Sans CJK SC Medium"/>
+              </a:rPr>
+              <a:t>消费者被组织</a:t>
+            </a:r>
+          </a:p>
+        </p:txBody>
+      </p:sp>
+      <p:sp>
+        <p:nvSpPr>
+          <p:cNvPr id="6" name="TextBox 5"/>
+          <p:cNvSpPr txBox="1"/>
+          <p:nvPr/>
+        </p:nvSpPr>
+        <p:spPr>
+          <a:xfrm>
+            <a:off x="5623560" y="1444752"/>
+            <a:ext cx="5760720" cy="365760"/>
+          </a:xfrm>
+          <a:prstGeom prst="rect">
+            <a:avLst/>
+          </a:prstGeom>
+          <a:noFill/>
+        </p:spPr>
+        <p:txBody>
+          <a:bodyPr wrap="square" anchor="t" lIns="0" rIns="0" tIns="0" bIns="0"/>
+          <a:lstStyle/>
+          <a:p>
+            <a:pPr algn="l"/>
+            <a:r>
+              <a:rPr sz="1600" b="0" i="0" lang="zh-CN" altLang="en-US">
+                <a:solidFill>
+                  <a:srgbClr val="B5B5B5"/>
+                </a:solidFill>
+                <a:latin typeface="Noto Sans CJK SC"/>
+                <a:ea typeface="Noto Sans CJK SC"/>
+                <a:cs typeface="Noto Sans CJK SC"/>
+              </a:rPr>
+              <a:t>广告和店铺被省掉</a:t>
+            </a:r>
+          </a:p>
+        </p:txBody>
+      </p:sp>
+      <p:sp>
+        <p:nvSpPr>
+          <p:cNvPr id="7" name="TextBox 6"/>
+          <p:cNvSpPr txBox="1"/>
+          <p:nvPr/>
+        </p:nvSpPr>
+        <p:spPr>
+          <a:xfrm>
+            <a:off x="777240" y="2084832"/>
+            <a:ext cx="4572000" cy="457200"/>
+          </a:xfrm>
+          <a:prstGeom prst="rect">
+            <a:avLst/>
+          </a:prstGeom>
+          <a:noFill/>
+        </p:spPr>
+        <p:txBody>
+          <a:bodyPr wrap="square" anchor="t" lIns="0" rIns="0" tIns="0" bIns="0"/>
+          <a:lstStyle/>
+          <a:p>
+            <a:pPr algn="l"/>
+            <a:r>
+              <a:rPr sz="2600" b="0" i="0" lang="zh-CN" altLang="en-US">
+                <a:solidFill>
+                  <a:srgbClr val="FFFFFF"/>
+                </a:solidFill>
+                <a:latin typeface="Noto Sans CJK SC Medium"/>
+                <a:ea typeface="Noto Sans CJK SC Medium"/>
+                <a:cs typeface="Noto Sans CJK SC Medium"/>
+              </a:rPr>
+              <a:t>选择被拿掉</a:t>
+            </a:r>
+          </a:p>
+        </p:txBody>
+      </p:sp>
+      <p:sp>
+        <p:nvSpPr>
+          <p:cNvPr id="8" name="TextBox 7"/>
+          <p:cNvSpPr txBox="1"/>
+          <p:nvPr/>
+        </p:nvSpPr>
+        <p:spPr>
+          <a:xfrm>
+            <a:off x="5623560" y="2157984"/>
+            <a:ext cx="5760720" cy="365760"/>
+          </a:xfrm>
+          <a:prstGeom prst="rect">
+            <a:avLst/>
+          </a:prstGeom>
+          <a:noFill/>
+        </p:spPr>
+        <p:txBody>
+          <a:bodyPr wrap="square" anchor="t" lIns="0" rIns="0" tIns="0" bIns="0"/>
+          <a:lstStyle/>
+          <a:p>
+            <a:pPr algn="l"/>
+            <a:r>
+              <a:rPr sz="1600" b="0" i="0" lang="zh-CN" altLang="en-US">
+                <a:solidFill>
+                  <a:srgbClr val="B5B5B5"/>
+                </a:solidFill>
+                <a:latin typeface="Noto Sans CJK SC"/>
+                <a:ea typeface="Noto Sans CJK SC"/>
+                <a:cs typeface="Noto Sans CJK SC"/>
+              </a:rPr>
+              <a:t>一个品类，只留一个</a:t>
+            </a:r>
+          </a:p>
+        </p:txBody>
+      </p:sp>
+      <p:sp>
+        <p:nvSpPr>
+          <p:cNvPr id="9" name="TextBox 8"/>
+          <p:cNvSpPr txBox="1"/>
+          <p:nvPr/>
+        </p:nvSpPr>
+        <p:spPr>
+          <a:xfrm>
+            <a:off x="777240" y="2798064"/>
+            <a:ext cx="4572000" cy="457200"/>
+          </a:xfrm>
+          <a:prstGeom prst="rect">
+            <a:avLst/>
+          </a:prstGeom>
+          <a:noFill/>
+        </p:spPr>
+        <p:txBody>
+          <a:bodyPr wrap="square" anchor="t" lIns="0" rIns="0" tIns="0" bIns="0"/>
+          <a:lstStyle/>
+          <a:p>
+            <a:pPr algn="l"/>
+            <a:r>
+              <a:rPr sz="2600" b="0" i="0" lang="zh-CN" altLang="en-US">
+                <a:solidFill>
+                  <a:srgbClr val="FFFFFF"/>
+                </a:solidFill>
+                <a:latin typeface="Noto Sans CJK SC Medium"/>
+                <a:ea typeface="Noto Sans CJK SC Medium"/>
+                <a:cs typeface="Noto Sans CJK SC Medium"/>
+              </a:rPr>
+              <a:t>人留在结构里</a:t>
+            </a:r>
+          </a:p>
+        </p:txBody>
+      </p:sp>
+      <p:sp>
+        <p:nvSpPr>
+          <p:cNvPr id="10" name="TextBox 9"/>
+          <p:cNvSpPr txBox="1"/>
+          <p:nvPr/>
+        </p:nvSpPr>
+        <p:spPr>
+          <a:xfrm>
+            <a:off x="5623560" y="2871216"/>
+            <a:ext cx="5760720" cy="365760"/>
+          </a:xfrm>
+          <a:prstGeom prst="rect">
+            <a:avLst/>
+          </a:prstGeom>
+          <a:noFill/>
+        </p:spPr>
+        <p:txBody>
+          <a:bodyPr wrap="square" anchor="t" lIns="0" rIns="0" tIns="0" bIns="0"/>
+          <a:lstStyle/>
+          <a:p>
+            <a:pPr algn="l"/>
+            <a:r>
+              <a:rPr sz="1600" b="0" i="0" lang="zh-CN" altLang="en-US">
+                <a:solidFill>
+                  <a:srgbClr val="B5B5B5"/>
+                </a:solidFill>
+                <a:latin typeface="Noto Sans CJK SC"/>
+                <a:ea typeface="Noto Sans CJK SC"/>
+                <a:cs typeface="Noto Sans CJK SC"/>
+              </a:rPr>
+              <a:t>产量才继续把成本压低</a:t>
+            </a:r>
+          </a:p>
+        </p:txBody>
+      </p:sp>
+      <p:sp>
+        <p:nvSpPr>
+          <p:cNvPr id="11" name="TextBox 10"/>
+          <p:cNvSpPr txBox="1"/>
+          <p:nvPr/>
+        </p:nvSpPr>
+        <p:spPr>
+          <a:xfrm>
+            <a:off x="749808" y="3703320"/>
+            <a:ext cx="10058400" cy="777240"/>
+          </a:xfrm>
+          <a:prstGeom prst="rect">
+            <a:avLst/>
+          </a:prstGeom>
+          <a:noFill/>
+        </p:spPr>
+        <p:txBody>
+          <a:bodyPr wrap="square" anchor="t" lIns="0" rIns="0" tIns="0" bIns="0"/>
+          <a:lstStyle/>
+          <a:p>
+            <a:pPr algn="l"/>
+            <a:r>
+              <a:rPr sz="4800" b="0" i="0" lang="zh-CN" altLang="en-US">
+                <a:solidFill>
+                  <a:srgbClr val="9E1B1B"/>
+                </a:solidFill>
+                <a:latin typeface="Noto Sans CJK SC Medium"/>
+                <a:ea typeface="Noto Sans CJK SC Medium"/>
+                <a:cs typeface="Noto Sans CJK SC Medium"/>
+              </a:rPr>
+              <a:t>不能不去</a:t>
+            </a:r>
+          </a:p>
+        </p:txBody>
+      </p:sp>
+      <p:sp>
+        <p:nvSpPr>
+          <p:cNvPr id="12" name="TextBox 11"/>
+          <p:cNvSpPr txBox="1"/>
+          <p:nvPr/>
+        </p:nvSpPr>
+        <p:spPr>
+          <a:xfrm>
+            <a:off x="804672" y="4709160"/>
+            <a:ext cx="10058400" cy="640080"/>
+          </a:xfrm>
+          <a:prstGeom prst="rect">
+            <a:avLst/>
+          </a:prstGeom>
+          <a:noFill/>
+        </p:spPr>
+        <p:txBody>
+          <a:bodyPr wrap="square" anchor="t" lIns="0" rIns="0" tIns="0" bIns="0"/>
+          <a:lstStyle/>
+          <a:p>
+            <a:pPr algn="l"/>
+            <a:r>
+              <a:rPr sz="1800" b="0" i="0" lang="zh-CN" altLang="en-US">
+                <a:solidFill>
+                  <a:srgbClr val="D4D4D4"/>
+                </a:solidFill>
+                <a:latin typeface="Noto Sans CJK SC"/>
+                <a:ea typeface="Noto Sans CJK SC"/>
+                <a:cs typeface="Noto Sans CJK SC"/>
+              </a:rPr>
+              <a:t>中国法人要做的，是把这四句在中国做成事实。</a:t>
+            </a:r>
+          </a:p>
+        </p:txBody>
+      </p:sp>
+      <p:sp>
+        <p:nvSpPr>
+          <p:cNvPr id="13" name="TextBox 12"/>
+          <p:cNvSpPr txBox="1"/>
+          <p:nvPr/>
+        </p:nvSpPr>
+        <p:spPr>
+          <a:xfrm>
+            <a:off x="804672" y="5806440"/>
+            <a:ext cx="8229600" cy="274320"/>
+          </a:xfrm>
+          <a:prstGeom prst="rect">
+            <a:avLst/>
+          </a:prstGeom>
+          <a:noFill/>
+        </p:spPr>
+        <p:txBody>
+          <a:bodyPr wrap="square" anchor="t" lIns="0" rIns="0" tIns="0" bIns="0"/>
+          <a:lstStyle/>
+          <a:p>
+            <a:pPr algn="l"/>
+            <a:r>
+              <a:rPr sz="1400" b="0" i="0" lang="zh-CN" altLang="en-US">
+                <a:solidFill>
+                  <a:srgbClr val="9A9A9A"/>
+                </a:solidFill>
+                <a:latin typeface="Noto Sans CJK SC"/>
+                <a:ea typeface="Noto Sans CJK SC"/>
+                <a:cs typeface="Noto Sans CJK SC"/>
+              </a:rPr>
+              <a:t>蒙想讯息    2026年9月22日</a:t>
+            </a:r>
+          </a:p>
+        </p:txBody>
+      </p:sp>
+      <p:sp>
+        <p:nvSpPr>
+          <p:cNvPr id="14" name="TextBox 13"/>
+          <p:cNvSpPr txBox="1"/>
+          <p:nvPr/>
+        </p:nvSpPr>
+        <p:spPr>
+          <a:xfrm>
+            <a:off x="10561320" y="6492240"/>
+            <a:ext cx="1051560" cy="201168"/>
+          </a:xfrm>
+          <a:prstGeom prst="rect">
+            <a:avLst/>
+          </a:prstGeom>
+          <a:noFill/>
+        </p:spPr>
+        <p:txBody>
+          <a:bodyPr wrap="square" anchor="t" lIns="0" rIns="0" tIns="0" bIns="0"/>
+          <a:lstStyle/>
+          <a:p>
+            <a:pPr algn="r"/>
+            <a:r>
+              <a:rPr sz="1100" b="0" i="0" lang="zh-CN" altLang="en-US">
+                <a:solidFill>
+                  <a:srgbClr val="6A6A6A"/>
+                </a:solidFill>
+                <a:latin typeface="Noto Sans CJK SC"/>
+                <a:ea typeface="Noto Sans CJK SC"/>
+                <a:cs typeface="Noto Sans CJK SC"/>
+              </a:rPr>
+              <a:t>17</a:t>
             </a:r>
           </a:p>
         </p:txBody>

--- a/艾多美何以成为100兆韩元企业.pptx
+++ b/艾多美何以成为100兆韩元企业.pptx
@@ -868,7 +868,7 @@
           <a:lstStyle/>
           <a:p>
             <a:r>
-              <a:t>中国市场把细分、低价和门店三句同时喊响。中国法人的第一件事，是这三句都不跟。</a:t>
+              <a:t>降运费是采购都会做的事。一贯工程删的是只为旧卖法存在的工序，或把下一道工序搬到原料那面墙外。</a:t>
             </a:r>
           </a:p>
         </p:txBody>
@@ -938,7 +938,7 @@
           <a:lstStyle/>
           <a:p>
             <a:r>
-              <a:t>四件都是同一套结构在中国的动作。加款、加价、加店、加广告，都是把方向做松。</a:t>
+              <a:t>四件都落在工序上：模具、配方、罐容、鲜品。加款、谈运费、再加一个口味，都不在这四件里。</a:t>
             </a:r>
           </a:p>
         </p:txBody>
@@ -1008,7 +1008,7 @@
           <a:lstStyle/>
           <a:p>
             <a:r>
-              <a:t>工具不换一套。换的是中国会员听得懂的话，和规则里面能做成的接法。医院不是开工的前提。</a:t>
+              <a:t>合作方先要看见能排产的量、设备由谁出、原料从育苗锁到哪一年。询价单给不出这些。</a:t>
             </a:r>
           </a:p>
         </p:txBody>
@@ -4858,7 +4858,7 @@
               </a:rPr>
               <a:t>一百兆不是喊出来的。
 工序造出价格，组织代替店铺，选择被拿掉。
-中国法人要做的，是把这三件事在中国做成事实。</a:t>
+中国法人要做的，是把只为旧卖法存在的工序拿掉。</a:t>
             </a:r>
           </a:p>
         </p:txBody>
@@ -7411,7 +7411,7 @@
                 <a:ea typeface="Noto Sans CJK SC Medium"/>
                 <a:cs typeface="Noto Sans CJK SC Medium"/>
               </a:rPr>
-              <a:t>中国把三种诱惑同时放大</a:t>
+              <a:t>运费，不做一贯工程也会降</a:t>
             </a:r>
           </a:p>
         </p:txBody>
@@ -7503,7 +7503,7 @@
         <p:spPr>
           <a:xfrm>
             <a:off x="658368" y="1691640"/>
-            <a:ext cx="3246120" cy="777240"/>
+            <a:ext cx="3246120" cy="640080"/>
           </a:xfrm>
           <a:prstGeom prst="rect">
             <a:avLst/>
@@ -7524,7 +7524,7 @@
                 <a:ea typeface="Noto Sans CJK SC Medium"/>
                 <a:cs typeface="Noto Sans CJK SC Medium"/>
               </a:rPr>
-              <a:t>自己挑</a:t>
+              <a:t>谈运费</a:t>
             </a:r>
           </a:p>
         </p:txBody>
@@ -7537,8 +7537,8 @@
         </p:nvSpPr>
         <p:spPr>
           <a:xfrm>
-            <a:off x="658368" y="2651760"/>
-            <a:ext cx="3246120" cy="1554480"/>
+            <a:off x="658368" y="2514600"/>
+            <a:ext cx="3246120" cy="1691640"/>
           </a:xfrm>
           <a:prstGeom prst="rect">
             <a:avLst/>
@@ -7563,7 +7563,10 @@
                 <a:ea typeface="Noto Sans CJK SC"/>
                 <a:cs typeface="Noto Sans CJK SC"/>
               </a:rPr>
-              <a:t>天猫、京东把货铺开，让人在里面比较。选择一多，绝对品质就松。</a:t>
+              <a:t>包材、账期、运费，
+谈下来报价会好看。
+不做一贯工程的采购也会做。
+三十五个点仍没有出处。</a:t>
             </a:r>
           </a:p>
         </p:txBody>
@@ -7655,7 +7658,7 @@
         <p:spPr>
           <a:xfrm>
             <a:off x="4361688" y="1691640"/>
-            <a:ext cx="3246120" cy="777240"/>
+            <a:ext cx="3246120" cy="640080"/>
           </a:xfrm>
           <a:prstGeom prst="rect">
             <a:avLst/>
@@ -7676,7 +7679,7 @@
                 <a:ea typeface="Noto Sans CJK SC Medium"/>
                 <a:cs typeface="Noto Sans CJK SC Medium"/>
               </a:rPr>
-              <a:t>只要便宜</a:t>
+              <a:t>删工序</a:t>
             </a:r>
           </a:p>
         </p:txBody>
@@ -7689,8 +7692,8 @@
         </p:nvSpPr>
         <p:spPr>
           <a:xfrm>
-            <a:off x="4361688" y="2651760"/>
-            <a:ext cx="3246120" cy="1554480"/>
+            <a:off x="4361688" y="2514600"/>
+            <a:ext cx="3246120" cy="1691640"/>
           </a:xfrm>
           <a:prstGeom prst="rect">
             <a:avLst/>
@@ -7715,9 +7718,10 @@
                 <a:ea typeface="Noto Sans CJK SC"/>
                 <a:cs typeface="Noto Sans CJK SC"/>
               </a:rPr>
-              <a:t>低价平台把“最贱”做成默认。
-只认便宜的那一层，在中国更响。
-跟过去，就会另做一条贱的线。</a:t>
+              <a:t>干燥、切断，
+是药房按克卖才有的。
+十八吨的罐子吃洗净的鲜品。
+这两步可以没有。</a:t>
             </a:r>
           </a:p>
         </p:txBody>
@@ -7809,7 +7813,7 @@
         <p:spPr>
           <a:xfrm>
             <a:off x="8065008" y="1691640"/>
-            <a:ext cx="3246120" cy="777240"/>
+            <a:ext cx="3246120" cy="640080"/>
           </a:xfrm>
           <a:prstGeom prst="rect">
             <a:avLst/>
@@ -7830,7 +7834,7 @@
                 <a:ea typeface="Noto Sans CJK SC Medium"/>
                 <a:cs typeface="Noto Sans CJK SC Medium"/>
               </a:rPr>
-              <a:t>先把店开起来</a:t>
+              <a:t>搬到墙外</a:t>
             </a:r>
           </a:p>
         </p:txBody>
@@ -7843,8 +7847,8 @@
         </p:nvSpPr>
         <p:spPr>
           <a:xfrm>
-            <a:off x="8065008" y="2651760"/>
-            <a:ext cx="3246120" cy="1554480"/>
+            <a:off x="8065008" y="2514600"/>
+            <a:ext cx="3246120" cy="1691640"/>
           </a:xfrm>
           <a:prstGeom prst="rect">
             <a:avLst/>
@@ -7869,9 +7873,10 @@
                 <a:ea typeface="Noto Sans CJK SC"/>
                 <a:cs typeface="Noto Sans CJK SC"/>
               </a:rPr>
-              <a:t>开市客、大创、名创优品，
-都用店把人接住。
-中国法人若先开店，三十五个点就没了。</a:t>
+              <a:t>下一道工序盖在原料厂的院墙外，
+用管道接。
+运的那一趟被拿掉，
+才不是在谈运费。</a:t>
             </a:r>
           </a:p>
         </p:txBody>
@@ -7953,8 +7958,8 @@
                 <a:ea typeface="Noto Sans CJK SC Medium"/>
                 <a:cs typeface="Noto Sans CJK SC Medium"/>
               </a:rPr>
-              <a:t>三种都在叫中国法人改模式。
-改了，就不再是同一套结构。</a:t>
+              <a:t>第一件，谁都会做。
+后两件，才是一贯工程。</a:t>
             </a:r>
           </a:p>
         </p:txBody>
@@ -8085,7 +8090,7 @@
                 <a:ea typeface="Noto Sans CJK SC Medium"/>
                 <a:cs typeface="Noto Sans CJK SC Medium"/>
               </a:rPr>
-              <a:t>中国法人就做这四件</a:t>
+              <a:t>中国产线上就做这四件</a:t>
             </a:r>
           </a:p>
         </p:txBody>
@@ -8141,8 +8146,8 @@
         </p:nvSpPr>
         <p:spPr>
           <a:xfrm>
-            <a:off x="658368" y="1207008"/>
-            <a:ext cx="640080" cy="365760"/>
+            <a:off x="658368" y="1170432"/>
+            <a:ext cx="640080" cy="329184"/>
           </a:xfrm>
           <a:prstGeom prst="rect">
             <a:avLst/>
@@ -8176,8 +8181,8 @@
         </p:nvSpPr>
         <p:spPr>
           <a:xfrm>
-            <a:off x="1463040" y="1188720"/>
-            <a:ext cx="9875520" cy="384048"/>
+            <a:off x="1417320" y="1152144"/>
+            <a:ext cx="9966960" cy="365760"/>
           </a:xfrm>
           <a:prstGeom prst="rect">
             <a:avLst/>
@@ -8198,7 +8203,7 @@
                 <a:ea typeface="Noto Sans CJK SC Medium"/>
                 <a:cs typeface="Noto Sans CJK SC Medium"/>
               </a:rPr>
-              <a:t>不另做一条中国线</a:t>
+              <a:t>一个模具做大</a:t>
             </a:r>
           </a:p>
         </p:txBody>
@@ -8211,8 +8216,8 @@
         </p:nvSpPr>
         <p:spPr>
           <a:xfrm>
-            <a:off x="1463040" y="1627632"/>
-            <a:ext cx="9875520" cy="365760"/>
+            <a:off x="1417320" y="1554480"/>
+            <a:ext cx="9966960" cy="640080"/>
           </a:xfrm>
           <a:prstGeom prst="rect">
             <a:avLst/>
@@ -8233,7 +8238,7 @@
                 <a:ea typeface="Noto Sans CJK SC"/>
                 <a:cs typeface="Noto Sans CJK SC"/>
               </a:rPr>
-              <a:t>一个品类仍是一个。不为最上的人做贵的，不为只认便宜的人做贱的。</a:t>
+              <a:t>牙刷造型不改。腔数做大，机器换大，原料买吨袋，付现金。再换一个造型，腔数就做不大。</a:t>
             </a:r>
           </a:p>
         </p:txBody>
@@ -8247,7 +8252,7 @@
         <p:spPr>
           <a:xfrm>
             <a:off x="658368" y="2377440"/>
-            <a:ext cx="640080" cy="365760"/>
+            <a:ext cx="640080" cy="329184"/>
           </a:xfrm>
           <a:prstGeom prst="rect">
             <a:avLst/>
@@ -8281,8 +8286,8 @@
         </p:nvSpPr>
         <p:spPr>
           <a:xfrm>
-            <a:off x="1463040" y="2359152"/>
-            <a:ext cx="9875520" cy="384048"/>
+            <a:off x="1417320" y="2359152"/>
+            <a:ext cx="9966960" cy="365760"/>
           </a:xfrm>
           <a:prstGeom prst="rect">
             <a:avLst/>
@@ -8303,7 +8308,7 @@
                 <a:ea typeface="Noto Sans CJK SC Medium"/>
                 <a:cs typeface="Noto Sans CJK SC Medium"/>
               </a:rPr>
-              <a:t>不在中国价格上加一层</a:t>
+              <a:t>一种配方，罐子不洗</a:t>
             </a:r>
           </a:p>
         </p:txBody>
@@ -8316,8 +8321,8 @@
         </p:nvSpPr>
         <p:spPr>
           <a:xfrm>
-            <a:off x="1463040" y="2798064"/>
-            <a:ext cx="9875520" cy="365760"/>
+            <a:off x="1417320" y="2761488"/>
+            <a:ext cx="9966960" cy="640080"/>
           </a:xfrm>
           <a:prstGeom prst="rect">
             <a:avLst/>
@@ -8338,7 +8343,7 @@
                 <a:ea typeface="Noto Sans CJK SC"/>
                 <a:cs typeface="Noto Sans CJK SC"/>
               </a:rPr>
-              <a:t>三十五个点不向中国消费者要。加了，就该让人去开市客。</a:t>
+              <a:t>洗发水四五款并成一款。换料和清洗都在多款里。再加一个口味，清洗就回来。</a:t>
             </a:r>
           </a:p>
         </p:txBody>
@@ -8351,8 +8356,8 @@
         </p:nvSpPr>
         <p:spPr>
           <a:xfrm>
-            <a:off x="658368" y="3547872"/>
-            <a:ext cx="640080" cy="365760"/>
+            <a:off x="658368" y="3584448"/>
+            <a:ext cx="640080" cy="329184"/>
           </a:xfrm>
           <a:prstGeom prst="rect">
             <a:avLst/>
@@ -8386,8 +8391,8 @@
         </p:nvSpPr>
         <p:spPr>
           <a:xfrm>
-            <a:off x="1463040" y="3529584"/>
-            <a:ext cx="9875520" cy="384048"/>
+            <a:off x="1417320" y="3566160"/>
+            <a:ext cx="9966960" cy="365760"/>
           </a:xfrm>
           <a:prstGeom prst="rect">
             <a:avLst/>
@@ -8408,7 +8413,7 @@
                 <a:ea typeface="Noto Sans CJK SC Medium"/>
                 <a:cs typeface="Noto Sans CJK SC Medium"/>
               </a:rPr>
-              <a:t>用中国的量，把工序锁住</a:t>
+              <a:t>罐子做大，人还是一个</a:t>
             </a:r>
           </a:p>
         </p:txBody>
@@ -8421,8 +8426,8 @@
         </p:nvSpPr>
         <p:spPr>
           <a:xfrm>
-            <a:off x="1463040" y="3968496"/>
-            <a:ext cx="9875520" cy="365760"/>
+            <a:off x="1417320" y="3968496"/>
+            <a:ext cx="9966960" cy="640080"/>
           </a:xfrm>
           <a:prstGeom prst="rect">
             <a:avLst/>
@@ -8443,7 +8448,7 @@
                 <a:ea typeface="Noto Sans CJK SC"/>
                 <a:cs typeface="Noto Sans CJK SC"/>
               </a:rPr>
-              <a:t>把看得见的需求交给一条线。愿景让对方看见，比先堆很多款有用。</a:t>
+              <a:t>萃取罐从 0.5 吨做到 18 吨，三十六倍，操作的人仍是一个。要推的是这只罐子，不是多找几家小厂。</a:t>
             </a:r>
           </a:p>
         </p:txBody>
@@ -8456,8 +8461,8 @@
         </p:nvSpPr>
         <p:spPr>
           <a:xfrm>
-            <a:off x="658368" y="4718304"/>
-            <a:ext cx="640080" cy="365760"/>
+            <a:off x="658368" y="4791456"/>
+            <a:ext cx="640080" cy="329184"/>
           </a:xfrm>
           <a:prstGeom prst="rect">
             <a:avLst/>
@@ -8491,8 +8496,8 @@
         </p:nvSpPr>
         <p:spPr>
           <a:xfrm>
-            <a:off x="1463040" y="4700016"/>
-            <a:ext cx="9875520" cy="384048"/>
+            <a:off x="1417320" y="4773168"/>
+            <a:ext cx="9966960" cy="365760"/>
           </a:xfrm>
           <a:prstGeom prst="rect">
             <a:avLst/>
@@ -8513,7 +8518,7 @@
                 <a:ea typeface="Noto Sans CJK SC Medium"/>
                 <a:cs typeface="Noto Sans CJK SC Medium"/>
               </a:rPr>
-              <a:t>先有队伍，再谈店和广告</a:t>
+              <a:t>鲜品进罐</a:t>
             </a:r>
           </a:p>
         </p:txBody>
@@ -8526,8 +8531,8 @@
         </p:nvSpPr>
         <p:spPr>
           <a:xfrm>
-            <a:off x="1463040" y="5138928"/>
-            <a:ext cx="9875520" cy="365760"/>
+            <a:off x="1417320" y="5175504"/>
+            <a:ext cx="9966960" cy="640080"/>
           </a:xfrm>
           <a:prstGeom prst="rect">
             <a:avLst/>
@@ -8548,7 +8553,7 @@
                 <a:ea typeface="Noto Sans CJK SC"/>
                 <a:cs typeface="Noto Sans CJK SC"/>
               </a:rPr>
-              <a:t>店和投放吃掉的，就是那三十五个点。组织先动，店可以后有。</a:t>
+              <a:t>川芎、当归、白芍洗净直接煮。干燥和切断是按克卖药才有的。中国法人在产地守的是这一步。</a:t>
             </a:r>
           </a:p>
         </p:txBody>
@@ -8679,7 +8684,7 @@
                 <a:ea typeface="Noto Sans CJK SC Medium"/>
                 <a:cs typeface="Noto Sans CJK SC Medium"/>
               </a:rPr>
-              <a:t>三台引擎，在中国转起来</a:t>
+              <a:t>带去合作方的，是这三样</a:t>
             </a:r>
           </a:p>
         </p:txBody>
@@ -8735,8 +8740,8 @@
         </p:nvSpPr>
         <p:spPr>
           <a:xfrm>
-            <a:off x="658368" y="1325880"/>
-            <a:ext cx="3246120" cy="548640"/>
+            <a:off x="658368" y="1371600"/>
+            <a:ext cx="3246120" cy="1051560"/>
           </a:xfrm>
           <a:prstGeom prst="rect">
             <a:avLst/>
@@ -8757,7 +8762,7 @@
                 <a:ea typeface="Noto Sans CJK SC Medium"/>
                 <a:cs typeface="Noto Sans CJK SC Medium"/>
               </a:rPr>
-              <a:t>个人平台</a:t>
+              <a:t>一个月十万套</a:t>
             </a:r>
           </a:p>
         </p:txBody>
@@ -8770,8 +8775,8 @@
         </p:nvSpPr>
         <p:spPr>
           <a:xfrm>
-            <a:off x="658368" y="2103120"/>
-            <a:ext cx="3246120" cy="2011680"/>
+            <a:off x="658368" y="2560320"/>
+            <a:ext cx="3246120" cy="1645920"/>
           </a:xfrm>
           <a:prstGeom prst="rect">
             <a:avLst/>
@@ -8796,10 +8801,9 @@
                 <a:ea typeface="Noto Sans CJK SC"/>
                 <a:cs typeface="Noto Sans CJK SC"/>
               </a:rPr>
-              <a:t>用中国会员听得懂的话，
-把一小时收成五分钟。
-事业者是这家平台的主人，
-不是发链接的人。</a:t>
+              <a:t>价格按这个量重算，
+才落到原来的十分之一。
+交出去的是能排产的这个数。</a:t>
             </a:r>
           </a:p>
         </p:txBody>
@@ -8855,8 +8859,8 @@
         </p:nvSpPr>
         <p:spPr>
           <a:xfrm>
-            <a:off x="4361688" y="1325880"/>
-            <a:ext cx="3246120" cy="548640"/>
+            <a:off x="4361688" y="1371600"/>
+            <a:ext cx="3246120" cy="1051560"/>
           </a:xfrm>
           <a:prstGeom prst="rect">
             <a:avLst/>
@@ -8877,7 +8881,7 @@
                 <a:ea typeface="Noto Sans CJK SC Medium"/>
                 <a:cs typeface="Noto Sans CJK SC Medium"/>
               </a:rPr>
-              <a:t>艾护理</a:t>
+              <a:t>设备图纸</a:t>
             </a:r>
           </a:p>
         </p:txBody>
@@ -8890,8 +8894,8 @@
         </p:nvSpPr>
         <p:spPr>
           <a:xfrm>
-            <a:off x="4361688" y="2103120"/>
-            <a:ext cx="3246120" cy="2011680"/>
+            <a:off x="4361688" y="2560320"/>
+            <a:ext cx="3246120" cy="1645920"/>
           </a:xfrm>
           <a:prstGeom prst="rect">
             <a:avLst/>
@@ -8916,10 +8920,9 @@
                 <a:ea typeface="Noto Sans CJK SC"/>
                 <a:cs typeface="Noto Sans CJK SC"/>
               </a:rPr>
-              <a:t>从身体和饮食进入，
-不再“好东西请用”。
-人越用越留下，建议才因人而异。
-不必等一座医院盖好才开始。</a:t>
+              <a:t>设备公司出。没有厂房，就在旁边盖。
+原料买断，对方只运转。
+拿去的是图纸，不是询价单。</a:t>
             </a:r>
           </a:p>
         </p:txBody>
@@ -8975,8 +8978,8 @@
         </p:nvSpPr>
         <p:spPr>
           <a:xfrm>
-            <a:off x="8065008" y="1325880"/>
-            <a:ext cx="3246120" cy="548640"/>
+            <a:off x="8065008" y="1371600"/>
+            <a:ext cx="3246120" cy="1051560"/>
           </a:xfrm>
           <a:prstGeom prst="rect">
             <a:avLst/>
@@ -8997,7 +9000,7 @@
                 <a:ea typeface="Noto Sans CJK SC Medium"/>
                 <a:cs typeface="Noto Sans CJK SC Medium"/>
               </a:rPr>
-              <a:t>阿扎</a:t>
+              <a:t>育苗就开始的合同</a:t>
             </a:r>
           </a:p>
         </p:txBody>
@@ -9010,8 +9013,8 @@
         </p:nvSpPr>
         <p:spPr>
           <a:xfrm>
-            <a:off x="8065008" y="2103120"/>
-            <a:ext cx="3246120" cy="2011680"/>
+            <a:off x="8065008" y="2560320"/>
+            <a:ext cx="3246120" cy="1645920"/>
           </a:xfrm>
           <a:prstGeom prst="rect">
             <a:avLst/>
@@ -9036,10 +9039,9 @@
                 <a:ea typeface="Noto Sans CJK SC"/>
                 <a:cs typeface="Noto Sans CJK SC"/>
               </a:rPr>
-              <a:t>油、蛋、充电，每天的开支接进来。
-电要在规则里面找能累积的办法。
-十万个日常品目让人每天来。
-一百兆仍由大约五百个主力品目赚。</a:t>
+              <a:t>川芎、当归、白芍从育苗起要一两年。
+合同在涨价之前锁上。
+农活不会，就公司带。</a:t>
             </a:r>
           </a:p>
         </p:txBody>
@@ -9121,8 +9123,8 @@
                 <a:ea typeface="Noto Sans CJK SC Medium"/>
                 <a:cs typeface="Noto Sans CJK SC Medium"/>
               </a:rPr>
-              <a:t>中国法人不另造一个中国模式。
-同一套结构，在中国转起来。</a:t>
+              <a:t>大量生产不是第一步。
+这个数、这张图纸、这份合同，才是。</a:t>
             </a:r>
           </a:p>
         </p:txBody>
@@ -9576,7 +9578,7 @@
                 <a:ea typeface="Noto Sans CJK SC"/>
                 <a:cs typeface="Noto Sans CJK SC"/>
               </a:rPr>
-              <a:t>中国法人要做的，是把这四句在中国做成事实。</a:t>
+              <a:t>中国法人要做的，是把只为旧卖法存在的工序拿掉。</a:t>
             </a:r>
           </a:p>
         </p:txBody>

--- a/艾多美何以成为100兆韩元企业.pptx
+++ b/艾多美何以成为100兆韩元企业.pptx
@@ -22,6 +22,8 @@
     <p:sldId id="270" r:id="rId22"/>
     <p:sldId id="271" r:id="rId23"/>
     <p:sldId id="272" r:id="rId24"/>
+    <p:sldId id="273" r:id="rId25"/>
+    <p:sldId id="274" r:id="rId26"/>
   </p:sldIdLst>
   <p:sldSz cx="12192000" cy="6858000" type="screen4x3"/>
   <p:notesSz cx="6858000" cy="9144000"/>
@@ -518,7 +520,7 @@
           <a:lstStyle/>
           <a:p>
             <a:r>
-              <a:t>全稿 17 页。开场用这一句定标准：下面要证明的是结构，不是信念。</a:t>
+              <a:t>全稿 19 页。开场用这一句定标准：下面要证明的是结构，不是信念。</a:t>
             </a:r>
           </a:p>
         </p:txBody>
@@ -1034,6 +1036,146 @@
 </file>
 
 <file path=ppt/notesSlides/notesSlide17.xml><?xml version="1.0" encoding="utf-8"?>
+<p:notes xmlns:a="http://schemas.openxmlformats.org/drawingml/2006/main" xmlns:p="http://schemas.openxmlformats.org/presentationml/2006/main" xmlns:r="http://schemas.openxmlformats.org/officeDocument/2006/relationships">
+  <p:cSld>
+    <p:spTree>
+      <p:nvGrpSpPr>
+        <p:cNvPr id="1" name=""/>
+        <p:cNvGrpSpPr/>
+        <p:nvPr/>
+      </p:nvGrpSpPr>
+      <p:grpSpPr>
+        <a:xfrm>
+          <a:off x="0" y="0"/>
+          <a:ext cx="0" cy="0"/>
+          <a:chOff x="0" y="0"/>
+          <a:chExt cx="0" cy="0"/>
+        </a:xfrm>
+      </p:grpSpPr>
+      <p:sp>
+        <p:nvSpPr>
+          <p:cNvPr id="2" name="Slide Image Placeholder 1"/>
+          <p:cNvSpPr>
+            <a:spLocks noGrp="1"/>
+          </p:cNvSpPr>
+          <p:nvPr>
+            <p:ph type="sldImg" idx="2"/>
+          </p:nvPr>
+        </p:nvSpPr>
+        <p:spPr/>
+      </p:sp>
+      <p:sp>
+        <p:nvSpPr>
+          <p:cNvPr id="3" name="Notes Placeholder 2"/>
+          <p:cNvSpPr>
+            <a:spLocks noGrp="1"/>
+          </p:cNvSpPr>
+          <p:nvPr>
+            <p:ph type="body" idx="3" sz="quarter"/>
+          </p:nvPr>
+        </p:nvSpPr>
+        <p:spPr/>
+        <p:txBody>
+          <a:bodyPr/>
+          <a:lstStyle/>
+          <a:p>
+            <a:r>
+              <a:t>开放平台的人工智能负责在长尾里排序。艾多美的人工智能负责对一个人说出为什么是这一个。目录不因此变长。</a:t>
+            </a:r>
+          </a:p>
+        </p:txBody>
+      </p:sp>
+      <p:sp>
+        <p:nvSpPr>
+          <p:cNvPr id="4" name="Slide Number Placeholder 3"/>
+          <p:cNvSpPr>
+            <a:spLocks noGrp="1"/>
+          </p:cNvSpPr>
+          <p:nvPr>
+            <p:ph type="sldNum" idx="5" sz="quarter"/>
+          </p:nvPr>
+        </p:nvSpPr>
+        <p:spPr/>
+      </p:sp>
+    </p:spTree>
+  </p:cSld>
+  <p:clrMapOvr>
+    <a:masterClrMapping/>
+  </p:clrMapOvr>
+</p:notes>
+</file>
+
+<file path=ppt/notesSlides/notesSlide18.xml><?xml version="1.0" encoding="utf-8"?>
+<p:notes xmlns:a="http://schemas.openxmlformats.org/drawingml/2006/main" xmlns:p="http://schemas.openxmlformats.org/presentationml/2006/main" xmlns:r="http://schemas.openxmlformats.org/officeDocument/2006/relationships">
+  <p:cSld>
+    <p:spTree>
+      <p:nvGrpSpPr>
+        <p:cNvPr id="1" name=""/>
+        <p:cNvGrpSpPr/>
+        <p:nvPr/>
+      </p:nvGrpSpPr>
+      <p:grpSpPr>
+        <a:xfrm>
+          <a:off x="0" y="0"/>
+          <a:ext cx="0" cy="0"/>
+          <a:chOff x="0" y="0"/>
+          <a:chExt cx="0" cy="0"/>
+        </a:xfrm>
+      </p:grpSpPr>
+      <p:sp>
+        <p:nvSpPr>
+          <p:cNvPr id="2" name="Slide Image Placeholder 1"/>
+          <p:cNvSpPr>
+            <a:spLocks noGrp="1"/>
+          </p:cNvSpPr>
+          <p:nvPr>
+            <p:ph type="sldImg" idx="2"/>
+          </p:nvPr>
+        </p:nvSpPr>
+        <p:spPr/>
+      </p:sp>
+      <p:sp>
+        <p:nvSpPr>
+          <p:cNvPr id="3" name="Notes Placeholder 2"/>
+          <p:cNvSpPr>
+            <a:spLocks noGrp="1"/>
+          </p:cNvSpPr>
+          <p:nvPr>
+            <p:ph type="body" idx="3" sz="quarter"/>
+          </p:nvPr>
+        </p:nvSpPr>
+        <p:spPr/>
+        <p:txBody>
+          <a:bodyPr/>
+          <a:lstStyle/>
+          <a:p>
+            <a:r>
+              <a:t>选择变快之外，中国的使用要收成合作方能排产的数；被删掉的工序若回来，数据上先看见；教育从一小时收成五分钟。</a:t>
+            </a:r>
+          </a:p>
+        </p:txBody>
+      </p:sp>
+      <p:sp>
+        <p:nvSpPr>
+          <p:cNvPr id="4" name="Slide Number Placeholder 3"/>
+          <p:cNvSpPr>
+            <a:spLocks noGrp="1"/>
+          </p:cNvSpPr>
+          <p:nvPr>
+            <p:ph type="sldNum" idx="5" sz="quarter"/>
+          </p:nvPr>
+        </p:nvSpPr>
+        <p:spPr/>
+      </p:sp>
+    </p:spTree>
+  </p:cSld>
+  <p:clrMapOvr>
+    <a:masterClrMapping/>
+  </p:clrMapOvr>
+</p:notes>
+</file>
+
+<file path=ppt/notesSlides/notesSlide19.xml><?xml version="1.0" encoding="utf-8"?>
 <p:notes xmlns:a="http://schemas.openxmlformats.org/drawingml/2006/main" xmlns:p="http://schemas.openxmlformats.org/presentationml/2006/main" xmlns:r="http://schemas.openxmlformats.org/officeDocument/2006/relationships">
   <p:cSld>
     <p:spTree>
@@ -9178,6 +9320,1364 @@
     <p:bg>
       <p:bgPr>
         <a:solidFill>
+          <a:srgbClr val="FFFFFF"/>
+        </a:solidFill>
+        <a:effectLst/>
+      </p:bgPr>
+    </p:bg>
+    <p:spTree>
+      <p:nvGrpSpPr>
+        <p:cNvPr id="1" name=""/>
+        <p:cNvGrpSpPr/>
+        <p:nvPr/>
+      </p:nvGrpSpPr>
+      <p:grpSpPr/>
+      <p:sp>
+        <p:nvSpPr>
+          <p:cNvPr id="2" name="TextBox 1"/>
+          <p:cNvSpPr txBox="1"/>
+          <p:nvPr/>
+        </p:nvSpPr>
+        <p:spPr>
+          <a:xfrm>
+            <a:off x="658368" y="365760"/>
+            <a:ext cx="640080" cy="329184"/>
+          </a:xfrm>
+          <a:prstGeom prst="rect">
+            <a:avLst/>
+          </a:prstGeom>
+          <a:noFill/>
+        </p:spPr>
+        <p:txBody>
+          <a:bodyPr wrap="square" anchor="t" lIns="0" rIns="0" tIns="0" bIns="0"/>
+          <a:lstStyle/>
+          <a:p>
+            <a:pPr algn="l"/>
+            <a:r>
+              <a:rPr sz="1500" b="0" i="0" lang="zh-CN" altLang="en-US">
+                <a:solidFill>
+                  <a:srgbClr val="9E1B1B"/>
+                </a:solidFill>
+                <a:latin typeface="Noto Sans CJK SC Medium"/>
+                <a:ea typeface="Noto Sans CJK SC Medium"/>
+                <a:cs typeface="Noto Sans CJK SC Medium"/>
+              </a:rPr>
+              <a:t>15</a:t>
+            </a:r>
+          </a:p>
+        </p:txBody>
+      </p:sp>
+      <p:sp>
+        <p:nvSpPr>
+          <p:cNvPr id="3" name="TextBox 2"/>
+          <p:cNvSpPr txBox="1"/>
+          <p:nvPr/>
+        </p:nvSpPr>
+        <p:spPr>
+          <a:xfrm>
+            <a:off x="1371600" y="310896"/>
+            <a:ext cx="10058400" cy="438912"/>
+          </a:xfrm>
+          <a:prstGeom prst="rect">
+            <a:avLst/>
+          </a:prstGeom>
+          <a:noFill/>
+        </p:spPr>
+        <p:txBody>
+          <a:bodyPr wrap="square" anchor="t" lIns="0" rIns="0" tIns="0" bIns="0"/>
+          <a:lstStyle/>
+          <a:p>
+            <a:pPr algn="l"/>
+            <a:r>
+              <a:rPr sz="3000" b="0" i="0" lang="zh-CN" altLang="en-US">
+                <a:solidFill>
+                  <a:srgbClr val="141414"/>
+                </a:solidFill>
+                <a:latin typeface="Noto Sans CJK SC Medium"/>
+                <a:ea typeface="Noto Sans CJK SC Medium"/>
+                <a:cs typeface="Noto Sans CJK SC Medium"/>
+              </a:rPr>
+              <a:t>选得快，靠的不是搜索</a:t>
+            </a:r>
+          </a:p>
+        </p:txBody>
+      </p:sp>
+      <p:sp>
+        <p:nvSpPr>
+          <p:cNvPr id="4" name="Rectangle 3"/>
+          <p:cNvSpPr/>
+          <p:nvPr/>
+        </p:nvSpPr>
+        <p:spPr>
+          <a:xfrm>
+            <a:off x="658368" y="960120"/>
+            <a:ext cx="10881360" cy="10972"/>
+          </a:xfrm>
+          <a:prstGeom prst="rect">
+            <a:avLst/>
+          </a:prstGeom>
+          <a:solidFill>
+            <a:srgbClr val="E2E2E2"/>
+          </a:solidFill>
+          <a:ln>
+            <a:noFill/>
+          </a:ln>
+        </p:spPr>
+        <p:style>
+          <a:lnRef idx="1">
+            <a:schemeClr val="accent1"/>
+          </a:lnRef>
+          <a:fillRef idx="3">
+            <a:schemeClr val="accent1"/>
+          </a:fillRef>
+          <a:effectRef idx="2">
+            <a:schemeClr val="accent1"/>
+          </a:effectRef>
+          <a:fontRef idx="minor">
+            <a:schemeClr val="lt1"/>
+          </a:fontRef>
+        </p:style>
+        <p:txBody>
+          <a:bodyPr rtlCol="0" anchor="ctr"/>
+          <a:lstStyle/>
+          <a:p>
+            <a:pPr algn="ctr"/>
+          </a:p>
+        </p:txBody>
+      </p:sp>
+      <p:sp>
+        <p:nvSpPr>
+          <p:cNvPr id="5" name="TextBox 4"/>
+          <p:cNvSpPr txBox="1"/>
+          <p:nvPr/>
+        </p:nvSpPr>
+        <p:spPr>
+          <a:xfrm>
+            <a:off x="658368" y="1234440"/>
+            <a:ext cx="3200400" cy="256032"/>
+          </a:xfrm>
+          <a:prstGeom prst="rect">
+            <a:avLst/>
+          </a:prstGeom>
+          <a:noFill/>
+        </p:spPr>
+        <p:txBody>
+          <a:bodyPr wrap="square" anchor="t" lIns="0" rIns="0" tIns="0" bIns="0"/>
+          <a:lstStyle/>
+          <a:p>
+            <a:pPr algn="l"/>
+            <a:r>
+              <a:rPr sz="1400" b="0" i="0" lang="zh-CN" altLang="en-US">
+                <a:solidFill>
+                  <a:srgbClr val="9E1B1B"/>
+                </a:solidFill>
+                <a:latin typeface="Noto Sans CJK SC Medium"/>
+                <a:ea typeface="Noto Sans CJK SC Medium"/>
+                <a:cs typeface="Noto Sans CJK SC Medium"/>
+              </a:rPr>
+              <a:t>01</a:t>
+            </a:r>
+          </a:p>
+        </p:txBody>
+      </p:sp>
+      <p:sp>
+        <p:nvSpPr>
+          <p:cNvPr id="6" name="TextBox 5"/>
+          <p:cNvSpPr txBox="1"/>
+          <p:nvPr/>
+        </p:nvSpPr>
+        <p:spPr>
+          <a:xfrm>
+            <a:off x="658368" y="1572768"/>
+            <a:ext cx="3246120" cy="502920"/>
+          </a:xfrm>
+          <a:prstGeom prst="rect">
+            <a:avLst/>
+          </a:prstGeom>
+          <a:noFill/>
+        </p:spPr>
+        <p:txBody>
+          <a:bodyPr wrap="square" anchor="t" lIns="0" rIns="0" tIns="0" bIns="0"/>
+          <a:lstStyle/>
+          <a:p>
+            <a:pPr algn="l"/>
+            <a:r>
+              <a:rPr sz="2400" b="0" i="0" lang="zh-CN" altLang="en-US">
+                <a:solidFill>
+                  <a:srgbClr val="141414"/>
+                </a:solidFill>
+                <a:latin typeface="Noto Sans CJK SC Medium"/>
+                <a:ea typeface="Noto Sans CJK SC Medium"/>
+                <a:cs typeface="Noto Sans CJK SC Medium"/>
+              </a:rPr>
+              <a:t>平台已经会</a:t>
+            </a:r>
+          </a:p>
+        </p:txBody>
+      </p:sp>
+      <p:sp>
+        <p:nvSpPr>
+          <p:cNvPr id="7" name="TextBox 6"/>
+          <p:cNvSpPr txBox="1"/>
+          <p:nvPr/>
+        </p:nvSpPr>
+        <p:spPr>
+          <a:xfrm>
+            <a:off x="658368" y="2194560"/>
+            <a:ext cx="3246120" cy="1965960"/>
+          </a:xfrm>
+          <a:prstGeom prst="rect">
+            <a:avLst/>
+          </a:prstGeom>
+          <a:noFill/>
+        </p:spPr>
+        <p:txBody>
+          <a:bodyPr wrap="square" anchor="t" lIns="0" rIns="0" tIns="0" bIns="0"/>
+          <a:lstStyle/>
+          <a:p>
+            <a:pPr algn="l">
+              <a:lnSpc>
+                <a:spcPct val="140000"/>
+              </a:lnSpc>
+            </a:pPr>
+            <a:r>
+              <a:rPr sz="1500" b="0" i="0" lang="zh-CN" altLang="en-US">
+                <a:solidFill>
+                  <a:srgbClr val="2C2C2C"/>
+                </a:solidFill>
+                <a:latin typeface="Noto Sans CJK SC"/>
+                <a:ea typeface="Noto Sans CJK SC"/>
+                <a:cs typeface="Noto Sans CJK SC"/>
+              </a:rPr>
+              <a:t>推荐几百款里的一个。
+款还在，人还在挑。
+搜索再快，选择的成本还在。</a:t>
+            </a:r>
+          </a:p>
+        </p:txBody>
+      </p:sp>
+      <p:sp>
+        <p:nvSpPr>
+          <p:cNvPr id="8" name="Rectangle 7"/>
+          <p:cNvSpPr/>
+          <p:nvPr/>
+        </p:nvSpPr>
+        <p:spPr>
+          <a:xfrm>
+            <a:off x="4160520" y="1234440"/>
+            <a:ext cx="10972" cy="2971800"/>
+          </a:xfrm>
+          <a:prstGeom prst="rect">
+            <a:avLst/>
+          </a:prstGeom>
+          <a:solidFill>
+            <a:srgbClr val="E2E2E2"/>
+          </a:solidFill>
+          <a:ln>
+            <a:noFill/>
+          </a:ln>
+        </p:spPr>
+        <p:style>
+          <a:lnRef idx="1">
+            <a:schemeClr val="accent1"/>
+          </a:lnRef>
+          <a:fillRef idx="3">
+            <a:schemeClr val="accent1"/>
+          </a:fillRef>
+          <a:effectRef idx="2">
+            <a:schemeClr val="accent1"/>
+          </a:effectRef>
+          <a:fontRef idx="minor">
+            <a:schemeClr val="lt1"/>
+          </a:fontRef>
+        </p:style>
+        <p:txBody>
+          <a:bodyPr rtlCol="0" anchor="ctr"/>
+          <a:lstStyle/>
+          <a:p>
+            <a:pPr algn="ctr"/>
+          </a:p>
+        </p:txBody>
+      </p:sp>
+      <p:sp>
+        <p:nvSpPr>
+          <p:cNvPr id="9" name="TextBox 8"/>
+          <p:cNvSpPr txBox="1"/>
+          <p:nvPr/>
+        </p:nvSpPr>
+        <p:spPr>
+          <a:xfrm>
+            <a:off x="4361688" y="1234440"/>
+            <a:ext cx="3200400" cy="256032"/>
+          </a:xfrm>
+          <a:prstGeom prst="rect">
+            <a:avLst/>
+          </a:prstGeom>
+          <a:noFill/>
+        </p:spPr>
+        <p:txBody>
+          <a:bodyPr wrap="square" anchor="t" lIns="0" rIns="0" tIns="0" bIns="0"/>
+          <a:lstStyle/>
+          <a:p>
+            <a:pPr algn="l"/>
+            <a:r>
+              <a:rPr sz="1400" b="0" i="0" lang="zh-CN" altLang="en-US">
+                <a:solidFill>
+                  <a:srgbClr val="9E1B1B"/>
+                </a:solidFill>
+                <a:latin typeface="Noto Sans CJK SC Medium"/>
+                <a:ea typeface="Noto Sans CJK SC Medium"/>
+                <a:cs typeface="Noto Sans CJK SC Medium"/>
+              </a:rPr>
+              <a:t>02</a:t>
+            </a:r>
+          </a:p>
+        </p:txBody>
+      </p:sp>
+      <p:sp>
+        <p:nvSpPr>
+          <p:cNvPr id="10" name="TextBox 9"/>
+          <p:cNvSpPr txBox="1"/>
+          <p:nvPr/>
+        </p:nvSpPr>
+        <p:spPr>
+          <a:xfrm>
+            <a:off x="4361688" y="1572768"/>
+            <a:ext cx="3246120" cy="502920"/>
+          </a:xfrm>
+          <a:prstGeom prst="rect">
+            <a:avLst/>
+          </a:prstGeom>
+          <a:noFill/>
+        </p:spPr>
+        <p:txBody>
+          <a:bodyPr wrap="square" anchor="t" lIns="0" rIns="0" tIns="0" bIns="0"/>
+          <a:lstStyle/>
+          <a:p>
+            <a:pPr algn="l"/>
+            <a:r>
+              <a:rPr sz="2400" b="0" i="0" lang="zh-CN" altLang="en-US">
+                <a:solidFill>
+                  <a:srgbClr val="141414"/>
+                </a:solidFill>
+                <a:latin typeface="Noto Sans CJK SC Medium"/>
+                <a:ea typeface="Noto Sans CJK SC Medium"/>
+                <a:cs typeface="Noto Sans CJK SC Medium"/>
+              </a:rPr>
+              <a:t>先知道为什么</a:t>
+            </a:r>
+          </a:p>
+        </p:txBody>
+      </p:sp>
+      <p:sp>
+        <p:nvSpPr>
+          <p:cNvPr id="11" name="TextBox 10"/>
+          <p:cNvSpPr txBox="1"/>
+          <p:nvPr/>
+        </p:nvSpPr>
+        <p:spPr>
+          <a:xfrm>
+            <a:off x="4361688" y="2194560"/>
+            <a:ext cx="3246120" cy="1965960"/>
+          </a:xfrm>
+          <a:prstGeom prst="rect">
+            <a:avLst/>
+          </a:prstGeom>
+          <a:noFill/>
+        </p:spPr>
+        <p:txBody>
+          <a:bodyPr wrap="square" anchor="t" lIns="0" rIns="0" tIns="0" bIns="0"/>
+          <a:lstStyle/>
+          <a:p>
+            <a:pPr algn="l">
+              <a:lnSpc>
+                <a:spcPct val="140000"/>
+              </a:lnSpc>
+            </a:pPr>
+            <a:r>
+              <a:rPr sz="1500" b="0" i="0" lang="zh-CN" altLang="en-US">
+                <a:solidFill>
+                  <a:srgbClr val="2C2C2C"/>
+                </a:solidFill>
+                <a:latin typeface="Noto Sans CJK SC"/>
+                <a:ea typeface="Noto Sans CJK SC"/>
+                <a:cs typeface="Noto Sans CJK SC"/>
+              </a:rPr>
+              <a:t>品类里只剩一个。
+要回答的是这个人，
+为什么是这一个。
+餐食拍一张，步数接进来，
+话就跟着变。</a:t>
+            </a:r>
+          </a:p>
+        </p:txBody>
+      </p:sp>
+      <p:sp>
+        <p:nvSpPr>
+          <p:cNvPr id="12" name="Rectangle 11"/>
+          <p:cNvSpPr/>
+          <p:nvPr/>
+        </p:nvSpPr>
+        <p:spPr>
+          <a:xfrm>
+            <a:off x="7863840" y="1234440"/>
+            <a:ext cx="10972" cy="2971800"/>
+          </a:xfrm>
+          <a:prstGeom prst="rect">
+            <a:avLst/>
+          </a:prstGeom>
+          <a:solidFill>
+            <a:srgbClr val="E2E2E2"/>
+          </a:solidFill>
+          <a:ln>
+            <a:noFill/>
+          </a:ln>
+        </p:spPr>
+        <p:style>
+          <a:lnRef idx="1">
+            <a:schemeClr val="accent1"/>
+          </a:lnRef>
+          <a:fillRef idx="3">
+            <a:schemeClr val="accent1"/>
+          </a:fillRef>
+          <a:effectRef idx="2">
+            <a:schemeClr val="accent1"/>
+          </a:effectRef>
+          <a:fontRef idx="minor">
+            <a:schemeClr val="lt1"/>
+          </a:fontRef>
+        </p:style>
+        <p:txBody>
+          <a:bodyPr rtlCol="0" anchor="ctr"/>
+          <a:lstStyle/>
+          <a:p>
+            <a:pPr algn="ctr"/>
+          </a:p>
+        </p:txBody>
+      </p:sp>
+      <p:sp>
+        <p:nvSpPr>
+          <p:cNvPr id="13" name="TextBox 12"/>
+          <p:cNvSpPr txBox="1"/>
+          <p:nvPr/>
+        </p:nvSpPr>
+        <p:spPr>
+          <a:xfrm>
+            <a:off x="8065008" y="1234440"/>
+            <a:ext cx="3200400" cy="256032"/>
+          </a:xfrm>
+          <a:prstGeom prst="rect">
+            <a:avLst/>
+          </a:prstGeom>
+          <a:noFill/>
+        </p:spPr>
+        <p:txBody>
+          <a:bodyPr wrap="square" anchor="t" lIns="0" rIns="0" tIns="0" bIns="0"/>
+          <a:lstStyle/>
+          <a:p>
+            <a:pPr algn="l"/>
+            <a:r>
+              <a:rPr sz="1400" b="0" i="0" lang="zh-CN" altLang="en-US">
+                <a:solidFill>
+                  <a:srgbClr val="9E1B1B"/>
+                </a:solidFill>
+                <a:latin typeface="Noto Sans CJK SC Medium"/>
+                <a:ea typeface="Noto Sans CJK SC Medium"/>
+                <a:cs typeface="Noto Sans CJK SC Medium"/>
+              </a:rPr>
+              <a:t>03</a:t>
+            </a:r>
+          </a:p>
+        </p:txBody>
+      </p:sp>
+      <p:sp>
+        <p:nvSpPr>
+          <p:cNvPr id="14" name="TextBox 13"/>
+          <p:cNvSpPr txBox="1"/>
+          <p:nvPr/>
+        </p:nvSpPr>
+        <p:spPr>
+          <a:xfrm>
+            <a:off x="8065008" y="1572768"/>
+            <a:ext cx="3246120" cy="502920"/>
+          </a:xfrm>
+          <a:prstGeom prst="rect">
+            <a:avLst/>
+          </a:prstGeom>
+          <a:noFill/>
+        </p:spPr>
+        <p:txBody>
+          <a:bodyPr wrap="square" anchor="t" lIns="0" rIns="0" tIns="0" bIns="0"/>
+          <a:lstStyle/>
+          <a:p>
+            <a:pPr algn="l"/>
+            <a:r>
+              <a:rPr sz="2400" b="0" i="0" lang="zh-CN" altLang="en-US">
+                <a:solidFill>
+                  <a:srgbClr val="141414"/>
+                </a:solidFill>
+                <a:latin typeface="Noto Sans CJK SC Medium"/>
+                <a:ea typeface="Noto Sans CJK SC Medium"/>
+                <a:cs typeface="Noto Sans CJK SC Medium"/>
+              </a:rPr>
+              <a:t>不必先搜</a:t>
+            </a:r>
+          </a:p>
+        </p:txBody>
+      </p:sp>
+      <p:sp>
+        <p:nvSpPr>
+          <p:cNvPr id="15" name="TextBox 14"/>
+          <p:cNvSpPr txBox="1"/>
+          <p:nvPr/>
+        </p:nvSpPr>
+        <p:spPr>
+          <a:xfrm>
+            <a:off x="8065008" y="2194560"/>
+            <a:ext cx="3246120" cy="1965960"/>
+          </a:xfrm>
+          <a:prstGeom prst="rect">
+            <a:avLst/>
+          </a:prstGeom>
+          <a:noFill/>
+        </p:spPr>
+        <p:txBody>
+          <a:bodyPr wrap="square" anchor="t" lIns="0" rIns="0" tIns="0" bIns="0"/>
+          <a:lstStyle/>
+          <a:p>
+            <a:pPr algn="l">
+              <a:lnSpc>
+                <a:spcPct val="140000"/>
+              </a:lnSpc>
+            </a:pPr>
+            <a:r>
+              <a:rPr sz="1500" b="0" i="0" lang="zh-CN" altLang="en-US">
+                <a:solidFill>
+                  <a:srgbClr val="2C2C2C"/>
+                </a:solidFill>
+                <a:latin typeface="Noto Sans CJK SC"/>
+                <a:ea typeface="Noto Sans CJK SC"/>
+                <a:cs typeface="Noto Sans CJK SC"/>
+              </a:rPr>
+              <a:t>打开就是今天的两样：
+一件主力，一件每天用的。
+介绍别人，先进入艾护理，
+不是先发一个产品链接。</a:t>
+            </a:r>
+          </a:p>
+        </p:txBody>
+      </p:sp>
+      <p:sp>
+        <p:nvSpPr>
+          <p:cNvPr id="16" name="Rectangle 15"/>
+          <p:cNvSpPr/>
+          <p:nvPr/>
+        </p:nvSpPr>
+        <p:spPr>
+          <a:xfrm>
+            <a:off x="658368" y="4709160"/>
+            <a:ext cx="10881360" cy="10972"/>
+          </a:xfrm>
+          <a:prstGeom prst="rect">
+            <a:avLst/>
+          </a:prstGeom>
+          <a:solidFill>
+            <a:srgbClr val="E2E2E2"/>
+          </a:solidFill>
+          <a:ln>
+            <a:noFill/>
+          </a:ln>
+        </p:spPr>
+        <p:style>
+          <a:lnRef idx="1">
+            <a:schemeClr val="accent1"/>
+          </a:lnRef>
+          <a:fillRef idx="3">
+            <a:schemeClr val="accent1"/>
+          </a:fillRef>
+          <a:effectRef idx="2">
+            <a:schemeClr val="accent1"/>
+          </a:effectRef>
+          <a:fontRef idx="minor">
+            <a:schemeClr val="lt1"/>
+          </a:fontRef>
+        </p:style>
+        <p:txBody>
+          <a:bodyPr rtlCol="0" anchor="ctr"/>
+          <a:lstStyle/>
+          <a:p>
+            <a:pPr algn="ctr"/>
+          </a:p>
+        </p:txBody>
+      </p:sp>
+      <p:sp>
+        <p:nvSpPr>
+          <p:cNvPr id="17" name="TextBox 16"/>
+          <p:cNvSpPr txBox="1"/>
+          <p:nvPr/>
+        </p:nvSpPr>
+        <p:spPr>
+          <a:xfrm>
+            <a:off x="658368" y="4956048"/>
+            <a:ext cx="10789920" cy="1097280"/>
+          </a:xfrm>
+          <a:prstGeom prst="rect">
+            <a:avLst/>
+          </a:prstGeom>
+          <a:noFill/>
+        </p:spPr>
+        <p:txBody>
+          <a:bodyPr wrap="square" anchor="t" lIns="0" rIns="0" tIns="0" bIns="0"/>
+          <a:lstStyle/>
+          <a:p>
+            <a:pPr algn="l">
+              <a:lnSpc>
+                <a:spcPct val="135000"/>
+              </a:lnSpc>
+            </a:pPr>
+            <a:r>
+              <a:rPr sz="2200" b="0" i="0" lang="zh-CN" altLang="en-US">
+                <a:solidFill>
+                  <a:srgbClr val="9E1B1B"/>
+                </a:solidFill>
+                <a:latin typeface="Noto Sans CJK SC Medium"/>
+                <a:ea typeface="Noto Sans CJK SC Medium"/>
+                <a:cs typeface="Noto Sans CJK SC Medium"/>
+              </a:rPr>
+              <a:t>中国法人若用它去铺更多款，
+就是在做平台已经会做的事。</a:t>
+            </a:r>
+          </a:p>
+        </p:txBody>
+      </p:sp>
+      <p:sp>
+        <p:nvSpPr>
+          <p:cNvPr id="18" name="TextBox 17"/>
+          <p:cNvSpPr txBox="1"/>
+          <p:nvPr/>
+        </p:nvSpPr>
+        <p:spPr>
+          <a:xfrm>
+            <a:off x="10561320" y="6492240"/>
+            <a:ext cx="1051560" cy="201168"/>
+          </a:xfrm>
+          <a:prstGeom prst="rect">
+            <a:avLst/>
+          </a:prstGeom>
+          <a:noFill/>
+        </p:spPr>
+        <p:txBody>
+          <a:bodyPr wrap="square" anchor="t" lIns="0" rIns="0" tIns="0" bIns="0"/>
+          <a:lstStyle/>
+          <a:p>
+            <a:pPr algn="r"/>
+            <a:r>
+              <a:rPr sz="1100" b="0" i="0" lang="zh-CN" altLang="en-US">
+                <a:solidFill>
+                  <a:srgbClr val="C8C8C8"/>
+                </a:solidFill>
+                <a:latin typeface="Noto Sans CJK SC"/>
+                <a:ea typeface="Noto Sans CJK SC"/>
+                <a:cs typeface="Noto Sans CJK SC"/>
+              </a:rPr>
+              <a:t>17</a:t>
+            </a:r>
+          </a:p>
+        </p:txBody>
+      </p:sp>
+    </p:spTree>
+  </p:cSld>
+  <p:clrMapOvr>
+    <a:masterClrMapping/>
+  </p:clrMapOvr>
+</p:sld>
+</file>
+
+<file path=ppt/slides/slide18.xml><?xml version="1.0" encoding="utf-8"?>
+<p:sld xmlns:a="http://schemas.openxmlformats.org/drawingml/2006/main" xmlns:p="http://schemas.openxmlformats.org/presentationml/2006/main" xmlns:r="http://schemas.openxmlformats.org/officeDocument/2006/relationships">
+  <p:cSld>
+    <p:bg>
+      <p:bgPr>
+        <a:solidFill>
+          <a:srgbClr val="FFFFFF"/>
+        </a:solidFill>
+        <a:effectLst/>
+      </p:bgPr>
+    </p:bg>
+    <p:spTree>
+      <p:nvGrpSpPr>
+        <p:cNvPr id="1" name=""/>
+        <p:cNvGrpSpPr/>
+        <p:nvPr/>
+      </p:nvGrpSpPr>
+      <p:grpSpPr/>
+      <p:sp>
+        <p:nvSpPr>
+          <p:cNvPr id="2" name="TextBox 1"/>
+          <p:cNvSpPr txBox="1"/>
+          <p:nvPr/>
+        </p:nvSpPr>
+        <p:spPr>
+          <a:xfrm>
+            <a:off x="658368" y="365760"/>
+            <a:ext cx="640080" cy="329184"/>
+          </a:xfrm>
+          <a:prstGeom prst="rect">
+            <a:avLst/>
+          </a:prstGeom>
+          <a:noFill/>
+        </p:spPr>
+        <p:txBody>
+          <a:bodyPr wrap="square" anchor="t" lIns="0" rIns="0" tIns="0" bIns="0"/>
+          <a:lstStyle/>
+          <a:p>
+            <a:pPr algn="l"/>
+            <a:r>
+              <a:rPr sz="1500" b="0" i="0" lang="zh-CN" altLang="en-US">
+                <a:solidFill>
+                  <a:srgbClr val="9E1B1B"/>
+                </a:solidFill>
+                <a:latin typeface="Noto Sans CJK SC Medium"/>
+                <a:ea typeface="Noto Sans CJK SC Medium"/>
+                <a:cs typeface="Noto Sans CJK SC Medium"/>
+              </a:rPr>
+              <a:t>16</a:t>
+            </a:r>
+          </a:p>
+        </p:txBody>
+      </p:sp>
+      <p:sp>
+        <p:nvSpPr>
+          <p:cNvPr id="3" name="TextBox 2"/>
+          <p:cNvSpPr txBox="1"/>
+          <p:nvPr/>
+        </p:nvSpPr>
+        <p:spPr>
+          <a:xfrm>
+            <a:off x="1371600" y="310896"/>
+            <a:ext cx="10058400" cy="438912"/>
+          </a:xfrm>
+          <a:prstGeom prst="rect">
+            <a:avLst/>
+          </a:prstGeom>
+          <a:noFill/>
+        </p:spPr>
+        <p:txBody>
+          <a:bodyPr wrap="square" anchor="t" lIns="0" rIns="0" tIns="0" bIns="0"/>
+          <a:lstStyle/>
+          <a:p>
+            <a:pPr algn="l"/>
+            <a:r>
+              <a:rPr sz="3000" b="0" i="0" lang="zh-CN" altLang="en-US">
+                <a:solidFill>
+                  <a:srgbClr val="141414"/>
+                </a:solidFill>
+                <a:latin typeface="Noto Sans CJK SC Medium"/>
+                <a:ea typeface="Noto Sans CJK SC Medium"/>
+                <a:cs typeface="Noto Sans CJK SC Medium"/>
+              </a:rPr>
+              <a:t>选得快，只是其中一件</a:t>
+            </a:r>
+          </a:p>
+        </p:txBody>
+      </p:sp>
+      <p:sp>
+        <p:nvSpPr>
+          <p:cNvPr id="4" name="Rectangle 3"/>
+          <p:cNvSpPr/>
+          <p:nvPr/>
+        </p:nvSpPr>
+        <p:spPr>
+          <a:xfrm>
+            <a:off x="658368" y="960120"/>
+            <a:ext cx="10881360" cy="10972"/>
+          </a:xfrm>
+          <a:prstGeom prst="rect">
+            <a:avLst/>
+          </a:prstGeom>
+          <a:solidFill>
+            <a:srgbClr val="E2E2E2"/>
+          </a:solidFill>
+          <a:ln>
+            <a:noFill/>
+          </a:ln>
+        </p:spPr>
+        <p:style>
+          <a:lnRef idx="1">
+            <a:schemeClr val="accent1"/>
+          </a:lnRef>
+          <a:fillRef idx="3">
+            <a:schemeClr val="accent1"/>
+          </a:fillRef>
+          <a:effectRef idx="2">
+            <a:schemeClr val="accent1"/>
+          </a:effectRef>
+          <a:fontRef idx="minor">
+            <a:schemeClr val="lt1"/>
+          </a:fontRef>
+        </p:style>
+        <p:txBody>
+          <a:bodyPr rtlCol="0" anchor="ctr"/>
+          <a:lstStyle/>
+          <a:p>
+            <a:pPr algn="ctr"/>
+          </a:p>
+        </p:txBody>
+      </p:sp>
+      <p:sp>
+        <p:nvSpPr>
+          <p:cNvPr id="5" name="TextBox 4"/>
+          <p:cNvSpPr txBox="1"/>
+          <p:nvPr/>
+        </p:nvSpPr>
+        <p:spPr>
+          <a:xfrm>
+            <a:off x="658368" y="1234440"/>
+            <a:ext cx="3200400" cy="256032"/>
+          </a:xfrm>
+          <a:prstGeom prst="rect">
+            <a:avLst/>
+          </a:prstGeom>
+          <a:noFill/>
+        </p:spPr>
+        <p:txBody>
+          <a:bodyPr wrap="square" anchor="t" lIns="0" rIns="0" tIns="0" bIns="0"/>
+          <a:lstStyle/>
+          <a:p>
+            <a:pPr algn="l"/>
+            <a:r>
+              <a:rPr sz="1400" b="0" i="0" lang="zh-CN" altLang="en-US">
+                <a:solidFill>
+                  <a:srgbClr val="9E1B1B"/>
+                </a:solidFill>
+                <a:latin typeface="Noto Sans CJK SC Medium"/>
+                <a:ea typeface="Noto Sans CJK SC Medium"/>
+                <a:cs typeface="Noto Sans CJK SC Medium"/>
+              </a:rPr>
+              <a:t>01</a:t>
+            </a:r>
+          </a:p>
+        </p:txBody>
+      </p:sp>
+      <p:sp>
+        <p:nvSpPr>
+          <p:cNvPr id="6" name="TextBox 5"/>
+          <p:cNvSpPr txBox="1"/>
+          <p:nvPr/>
+        </p:nvSpPr>
+        <p:spPr>
+          <a:xfrm>
+            <a:off x="658368" y="1572768"/>
+            <a:ext cx="3246120" cy="640080"/>
+          </a:xfrm>
+          <a:prstGeom prst="rect">
+            <a:avLst/>
+          </a:prstGeom>
+          <a:noFill/>
+        </p:spPr>
+        <p:txBody>
+          <a:bodyPr wrap="square" anchor="t" lIns="0" rIns="0" tIns="0" bIns="0"/>
+          <a:lstStyle/>
+          <a:p>
+            <a:pPr algn="l"/>
+            <a:r>
+              <a:rPr sz="2200" b="0" i="0" lang="zh-CN" altLang="en-US">
+                <a:solidFill>
+                  <a:srgbClr val="141414"/>
+                </a:solidFill>
+                <a:latin typeface="Noto Sans CJK SC Medium"/>
+                <a:ea typeface="Noto Sans CJK SC Medium"/>
+                <a:cs typeface="Noto Sans CJK SC Medium"/>
+              </a:rPr>
+              <a:t>收成能排产的数</a:t>
+            </a:r>
+          </a:p>
+        </p:txBody>
+      </p:sp>
+      <p:sp>
+        <p:nvSpPr>
+          <p:cNvPr id="7" name="TextBox 6"/>
+          <p:cNvSpPr txBox="1"/>
+          <p:nvPr/>
+        </p:nvSpPr>
+        <p:spPr>
+          <a:xfrm>
+            <a:off x="658368" y="2331720"/>
+            <a:ext cx="3246120" cy="1828800"/>
+          </a:xfrm>
+          <a:prstGeom prst="rect">
+            <a:avLst/>
+          </a:prstGeom>
+          <a:noFill/>
+        </p:spPr>
+        <p:txBody>
+          <a:bodyPr wrap="square" anchor="t" lIns="0" rIns="0" tIns="0" bIns="0"/>
+          <a:lstStyle/>
+          <a:p>
+            <a:pPr algn="l">
+              <a:lnSpc>
+                <a:spcPct val="140000"/>
+              </a:lnSpc>
+            </a:pPr>
+            <a:r>
+              <a:rPr sz="1500" b="0" i="0" lang="zh-CN" altLang="en-US">
+                <a:solidFill>
+                  <a:srgbClr val="2C2C2C"/>
+                </a:solidFill>
+                <a:latin typeface="Noto Sans CJK SC"/>
+                <a:ea typeface="Noto Sans CJK SC"/>
+                <a:cs typeface="Noto Sans CJK SC"/>
+              </a:rPr>
+              <a:t>谁在用，下个月抽多少，
+喂回那只罐子和栽培合同。
+一个月十万套，
+要变成对方看得见的数。</a:t>
+            </a:r>
+          </a:p>
+        </p:txBody>
+      </p:sp>
+      <p:sp>
+        <p:nvSpPr>
+          <p:cNvPr id="8" name="Rectangle 7"/>
+          <p:cNvSpPr/>
+          <p:nvPr/>
+        </p:nvSpPr>
+        <p:spPr>
+          <a:xfrm>
+            <a:off x="4160520" y="1234440"/>
+            <a:ext cx="10972" cy="2971800"/>
+          </a:xfrm>
+          <a:prstGeom prst="rect">
+            <a:avLst/>
+          </a:prstGeom>
+          <a:solidFill>
+            <a:srgbClr val="E2E2E2"/>
+          </a:solidFill>
+          <a:ln>
+            <a:noFill/>
+          </a:ln>
+        </p:spPr>
+        <p:style>
+          <a:lnRef idx="1">
+            <a:schemeClr val="accent1"/>
+          </a:lnRef>
+          <a:fillRef idx="3">
+            <a:schemeClr val="accent1"/>
+          </a:fillRef>
+          <a:effectRef idx="2">
+            <a:schemeClr val="accent1"/>
+          </a:effectRef>
+          <a:fontRef idx="minor">
+            <a:schemeClr val="lt1"/>
+          </a:fontRef>
+        </p:style>
+        <p:txBody>
+          <a:bodyPr rtlCol="0" anchor="ctr"/>
+          <a:lstStyle/>
+          <a:p>
+            <a:pPr algn="ctr"/>
+          </a:p>
+        </p:txBody>
+      </p:sp>
+      <p:sp>
+        <p:nvSpPr>
+          <p:cNvPr id="9" name="TextBox 8"/>
+          <p:cNvSpPr txBox="1"/>
+          <p:nvPr/>
+        </p:nvSpPr>
+        <p:spPr>
+          <a:xfrm>
+            <a:off x="4361688" y="1234440"/>
+            <a:ext cx="3200400" cy="256032"/>
+          </a:xfrm>
+          <a:prstGeom prst="rect">
+            <a:avLst/>
+          </a:prstGeom>
+          <a:noFill/>
+        </p:spPr>
+        <p:txBody>
+          <a:bodyPr wrap="square" anchor="t" lIns="0" rIns="0" tIns="0" bIns="0"/>
+          <a:lstStyle/>
+          <a:p>
+            <a:pPr algn="l"/>
+            <a:r>
+              <a:rPr sz="1400" b="0" i="0" lang="zh-CN" altLang="en-US">
+                <a:solidFill>
+                  <a:srgbClr val="9E1B1B"/>
+                </a:solidFill>
+                <a:latin typeface="Noto Sans CJK SC Medium"/>
+                <a:ea typeface="Noto Sans CJK SC Medium"/>
+                <a:cs typeface="Noto Sans CJK SC Medium"/>
+              </a:rPr>
+              <a:t>02</a:t>
+            </a:r>
+          </a:p>
+        </p:txBody>
+      </p:sp>
+      <p:sp>
+        <p:nvSpPr>
+          <p:cNvPr id="10" name="TextBox 9"/>
+          <p:cNvSpPr txBox="1"/>
+          <p:nvPr/>
+        </p:nvSpPr>
+        <p:spPr>
+          <a:xfrm>
+            <a:off x="4361688" y="1572768"/>
+            <a:ext cx="3246120" cy="640080"/>
+          </a:xfrm>
+          <a:prstGeom prst="rect">
+            <a:avLst/>
+          </a:prstGeom>
+          <a:noFill/>
+        </p:spPr>
+        <p:txBody>
+          <a:bodyPr wrap="square" anchor="t" lIns="0" rIns="0" tIns="0" bIns="0"/>
+          <a:lstStyle/>
+          <a:p>
+            <a:pPr algn="l"/>
+            <a:r>
+              <a:rPr sz="2200" b="0" i="0" lang="zh-CN" altLang="en-US">
+                <a:solidFill>
+                  <a:srgbClr val="141414"/>
+                </a:solidFill>
+                <a:latin typeface="Noto Sans CJK SC Medium"/>
+                <a:ea typeface="Noto Sans CJK SC Medium"/>
+                <a:cs typeface="Noto Sans CJK SC Medium"/>
+              </a:rPr>
+              <a:t>看守删掉的工序</a:t>
+            </a:r>
+          </a:p>
+        </p:txBody>
+      </p:sp>
+      <p:sp>
+        <p:nvSpPr>
+          <p:cNvPr id="11" name="TextBox 10"/>
+          <p:cNvSpPr txBox="1"/>
+          <p:nvPr/>
+        </p:nvSpPr>
+        <p:spPr>
+          <a:xfrm>
+            <a:off x="4361688" y="2331720"/>
+            <a:ext cx="3246120" cy="1828800"/>
+          </a:xfrm>
+          <a:prstGeom prst="rect">
+            <a:avLst/>
+          </a:prstGeom>
+          <a:noFill/>
+        </p:spPr>
+        <p:txBody>
+          <a:bodyPr wrap="square" anchor="t" lIns="0" rIns="0" tIns="0" bIns="0"/>
+          <a:lstStyle/>
+          <a:p>
+            <a:pPr algn="l">
+              <a:lnSpc>
+                <a:spcPct val="140000"/>
+              </a:lnSpc>
+            </a:pPr>
+            <a:r>
+              <a:rPr sz="1500" b="0" i="0" lang="zh-CN" altLang="en-US">
+                <a:solidFill>
+                  <a:srgbClr val="2C2C2C"/>
+                </a:solidFill>
+                <a:latin typeface="Noto Sans CJK SC"/>
+                <a:ea typeface="Noto Sans CJK SC"/>
+                <a:cs typeface="Noto Sans CJK SC"/>
+              </a:rPr>
+              <a:t>原料物性、配方、设备基准
+在自己手里。
+干燥、切断、换料清洗若回来，
+数据上要先看见。</a:t>
+            </a:r>
+          </a:p>
+        </p:txBody>
+      </p:sp>
+      <p:sp>
+        <p:nvSpPr>
+          <p:cNvPr id="12" name="Rectangle 11"/>
+          <p:cNvSpPr/>
+          <p:nvPr/>
+        </p:nvSpPr>
+        <p:spPr>
+          <a:xfrm>
+            <a:off x="7863840" y="1234440"/>
+            <a:ext cx="10972" cy="2971800"/>
+          </a:xfrm>
+          <a:prstGeom prst="rect">
+            <a:avLst/>
+          </a:prstGeom>
+          <a:solidFill>
+            <a:srgbClr val="E2E2E2"/>
+          </a:solidFill>
+          <a:ln>
+            <a:noFill/>
+          </a:ln>
+        </p:spPr>
+        <p:style>
+          <a:lnRef idx="1">
+            <a:schemeClr val="accent1"/>
+          </a:lnRef>
+          <a:fillRef idx="3">
+            <a:schemeClr val="accent1"/>
+          </a:fillRef>
+          <a:effectRef idx="2">
+            <a:schemeClr val="accent1"/>
+          </a:effectRef>
+          <a:fontRef idx="minor">
+            <a:schemeClr val="lt1"/>
+          </a:fontRef>
+        </p:style>
+        <p:txBody>
+          <a:bodyPr rtlCol="0" anchor="ctr"/>
+          <a:lstStyle/>
+          <a:p>
+            <a:pPr algn="ctr"/>
+          </a:p>
+        </p:txBody>
+      </p:sp>
+      <p:sp>
+        <p:nvSpPr>
+          <p:cNvPr id="13" name="TextBox 12"/>
+          <p:cNvSpPr txBox="1"/>
+          <p:nvPr/>
+        </p:nvSpPr>
+        <p:spPr>
+          <a:xfrm>
+            <a:off x="8065008" y="1234440"/>
+            <a:ext cx="3200400" cy="256032"/>
+          </a:xfrm>
+          <a:prstGeom prst="rect">
+            <a:avLst/>
+          </a:prstGeom>
+          <a:noFill/>
+        </p:spPr>
+        <p:txBody>
+          <a:bodyPr wrap="square" anchor="t" lIns="0" rIns="0" tIns="0" bIns="0"/>
+          <a:lstStyle/>
+          <a:p>
+            <a:pPr algn="l"/>
+            <a:r>
+              <a:rPr sz="1400" b="0" i="0" lang="zh-CN" altLang="en-US">
+                <a:solidFill>
+                  <a:srgbClr val="9E1B1B"/>
+                </a:solidFill>
+                <a:latin typeface="Noto Sans CJK SC Medium"/>
+                <a:ea typeface="Noto Sans CJK SC Medium"/>
+                <a:cs typeface="Noto Sans CJK SC Medium"/>
+              </a:rPr>
+              <a:t>03</a:t>
+            </a:r>
+          </a:p>
+        </p:txBody>
+      </p:sp>
+      <p:sp>
+        <p:nvSpPr>
+          <p:cNvPr id="14" name="TextBox 13"/>
+          <p:cNvSpPr txBox="1"/>
+          <p:nvPr/>
+        </p:nvSpPr>
+        <p:spPr>
+          <a:xfrm>
+            <a:off x="8065008" y="1572768"/>
+            <a:ext cx="3246120" cy="640080"/>
+          </a:xfrm>
+          <a:prstGeom prst="rect">
+            <a:avLst/>
+          </a:prstGeom>
+          <a:noFill/>
+        </p:spPr>
+        <p:txBody>
+          <a:bodyPr wrap="square" anchor="t" lIns="0" rIns="0" tIns="0" bIns="0"/>
+          <a:lstStyle/>
+          <a:p>
+            <a:pPr algn="l"/>
+            <a:r>
+              <a:rPr sz="2200" b="0" i="0" lang="zh-CN" altLang="en-US">
+                <a:solidFill>
+                  <a:srgbClr val="141414"/>
+                </a:solidFill>
+                <a:latin typeface="Noto Sans CJK SC Medium"/>
+                <a:ea typeface="Noto Sans CJK SC Medium"/>
+                <a:cs typeface="Noto Sans CJK SC Medium"/>
+              </a:rPr>
+              <a:t>一小时收成五分钟</a:t>
+            </a:r>
+          </a:p>
+        </p:txBody>
+      </p:sp>
+      <p:sp>
+        <p:nvSpPr>
+          <p:cNvPr id="15" name="TextBox 14"/>
+          <p:cNvSpPr txBox="1"/>
+          <p:nvPr/>
+        </p:nvSpPr>
+        <p:spPr>
+          <a:xfrm>
+            <a:off x="8065008" y="2331720"/>
+            <a:ext cx="3246120" cy="1828800"/>
+          </a:xfrm>
+          <a:prstGeom prst="rect">
+            <a:avLst/>
+          </a:prstGeom>
+          <a:noFill/>
+        </p:spPr>
+        <p:txBody>
+          <a:bodyPr wrap="square" anchor="t" lIns="0" rIns="0" tIns="0" bIns="0"/>
+          <a:lstStyle/>
+          <a:p>
+            <a:pPr algn="l">
+              <a:lnSpc>
+                <a:spcPct val="140000"/>
+              </a:lnSpc>
+            </a:pPr>
+            <a:r>
+              <a:rPr sz="1500" b="0" i="0" lang="zh-CN" altLang="en-US">
+                <a:solidFill>
+                  <a:srgbClr val="2C2C2C"/>
+                </a:solidFill>
+                <a:latin typeface="Noto Sans CJK SC"/>
+                <a:ea typeface="Noto Sans CJK SC"/>
+                <a:cs typeface="Noto Sans CJK SC"/>
+              </a:rPr>
+              <a:t>明年年底，先有
+一百到二百支骨架。
+中国法人做中文的。
+事业者换成自己的脸。</a:t>
+            </a:r>
+          </a:p>
+        </p:txBody>
+      </p:sp>
+      <p:sp>
+        <p:nvSpPr>
+          <p:cNvPr id="16" name="Rectangle 15"/>
+          <p:cNvSpPr/>
+          <p:nvPr/>
+        </p:nvSpPr>
+        <p:spPr>
+          <a:xfrm>
+            <a:off x="658368" y="4709160"/>
+            <a:ext cx="10881360" cy="10972"/>
+          </a:xfrm>
+          <a:prstGeom prst="rect">
+            <a:avLst/>
+          </a:prstGeom>
+          <a:solidFill>
+            <a:srgbClr val="E2E2E2"/>
+          </a:solidFill>
+          <a:ln>
+            <a:noFill/>
+          </a:ln>
+        </p:spPr>
+        <p:style>
+          <a:lnRef idx="1">
+            <a:schemeClr val="accent1"/>
+          </a:lnRef>
+          <a:fillRef idx="3">
+            <a:schemeClr val="accent1"/>
+          </a:fillRef>
+          <a:effectRef idx="2">
+            <a:schemeClr val="accent1"/>
+          </a:effectRef>
+          <a:fontRef idx="minor">
+            <a:schemeClr val="lt1"/>
+          </a:fontRef>
+        </p:style>
+        <p:txBody>
+          <a:bodyPr rtlCol="0" anchor="ctr"/>
+          <a:lstStyle/>
+          <a:p>
+            <a:pPr algn="ctr"/>
+          </a:p>
+        </p:txBody>
+      </p:sp>
+      <p:sp>
+        <p:nvSpPr>
+          <p:cNvPr id="17" name="TextBox 16"/>
+          <p:cNvSpPr txBox="1"/>
+          <p:nvPr/>
+        </p:nvSpPr>
+        <p:spPr>
+          <a:xfrm>
+            <a:off x="658368" y="4956048"/>
+            <a:ext cx="10789920" cy="1097280"/>
+          </a:xfrm>
+          <a:prstGeom prst="rect">
+            <a:avLst/>
+          </a:prstGeom>
+          <a:noFill/>
+        </p:spPr>
+        <p:txBody>
+          <a:bodyPr wrap="square" anchor="t" lIns="0" rIns="0" tIns="0" bIns="0"/>
+          <a:lstStyle/>
+          <a:p>
+            <a:pPr algn="l">
+              <a:lnSpc>
+                <a:spcPct val="135000"/>
+              </a:lnSpc>
+            </a:pPr>
+            <a:r>
+              <a:rPr sz="2200" b="0" i="0" lang="zh-CN" altLang="en-US">
+                <a:solidFill>
+                  <a:srgbClr val="9E1B1B"/>
+                </a:solidFill>
+                <a:latin typeface="Noto Sans CJK SC Medium"/>
+                <a:ea typeface="Noto Sans CJK SC Medium"/>
+                <a:cs typeface="Noto Sans CJK SC Medium"/>
+              </a:rPr>
+              <a:t>数、工序、教育，要一起变。
+酒店和培训部，是旧成本。</a:t>
+            </a:r>
+          </a:p>
+        </p:txBody>
+      </p:sp>
+      <p:sp>
+        <p:nvSpPr>
+          <p:cNvPr id="18" name="TextBox 17"/>
+          <p:cNvSpPr txBox="1"/>
+          <p:nvPr/>
+        </p:nvSpPr>
+        <p:spPr>
+          <a:xfrm>
+            <a:off x="10561320" y="6492240"/>
+            <a:ext cx="1051560" cy="201168"/>
+          </a:xfrm>
+          <a:prstGeom prst="rect">
+            <a:avLst/>
+          </a:prstGeom>
+          <a:noFill/>
+        </p:spPr>
+        <p:txBody>
+          <a:bodyPr wrap="square" anchor="t" lIns="0" rIns="0" tIns="0" bIns="0"/>
+          <a:lstStyle/>
+          <a:p>
+            <a:pPr algn="r"/>
+            <a:r>
+              <a:rPr sz="1100" b="0" i="0" lang="zh-CN" altLang="en-US">
+                <a:solidFill>
+                  <a:srgbClr val="C8C8C8"/>
+                </a:solidFill>
+                <a:latin typeface="Noto Sans CJK SC"/>
+                <a:ea typeface="Noto Sans CJK SC"/>
+                <a:cs typeface="Noto Sans CJK SC"/>
+              </a:rPr>
+              <a:t>18</a:t>
+            </a:r>
+          </a:p>
+        </p:txBody>
+      </p:sp>
+    </p:spTree>
+  </p:cSld>
+  <p:clrMapOvr>
+    <a:masterClrMapping/>
+  </p:clrMapOvr>
+</p:sld>
+</file>
+
+<file path=ppt/slides/slide19.xml><?xml version="1.0" encoding="utf-8"?>
+<p:sld xmlns:a="http://schemas.openxmlformats.org/drawingml/2006/main" xmlns:p="http://schemas.openxmlformats.org/presentationml/2006/main" xmlns:r="http://schemas.openxmlformats.org/officeDocument/2006/relationships">
+  <p:cSld>
+    <p:bg>
+      <p:bgPr>
+        <a:solidFill>
           <a:srgbClr val="121212"/>
         </a:solidFill>
         <a:effectLst/>
@@ -9648,7 +11148,7 @@
                 <a:ea typeface="Noto Sans CJK SC"/>
                 <a:cs typeface="Noto Sans CJK SC"/>
               </a:rPr>
-              <a:t>17</a:t>
+              <a:t>19</a:t>
             </a:r>
           </a:p>
         </p:txBody>

--- a/艾多美何以成为100兆韩元企业.pptx
+++ b/艾多美何以成为100兆韩元企业.pptx
@@ -24,6 +24,7 @@
     <p:sldId id="272" r:id="rId24"/>
     <p:sldId id="273" r:id="rId25"/>
     <p:sldId id="274" r:id="rId26"/>
+    <p:sldId id="275" r:id="rId27"/>
   </p:sldIdLst>
   <p:sldSz cx="12192000" cy="6858000" type="screen4x3"/>
   <p:notesSz cx="6858000" cy="9144000"/>
@@ -520,7 +521,7 @@
           <a:lstStyle/>
           <a:p>
             <a:r>
-              <a:t>全稿 19 页。开场用这一句定标准：下面要证明的是结构，不是信念。</a:t>
+              <a:t>全稿 20 页。开场用这一句定标准：下面要证明的是结构，不是信念。</a:t>
             </a:r>
           </a:p>
         </p:txBody>
@@ -1080,7 +1081,7 @@
           <a:lstStyle/>
           <a:p>
             <a:r>
-              <a:t>开放平台的人工智能负责在长尾里排序。艾多美的人工智能负责对一个人说出为什么是这一个。目录不因此变长。</a:t>
+              <a:t>个人平台先武装事业者：阶段、中文骨架、顾客进门就知道为什么买。酒店课和培训部是旧成本。</a:t>
             </a:r>
           </a:p>
         </p:txBody>
@@ -1150,7 +1151,7 @@
           <a:lstStyle/>
           <a:p>
             <a:r>
-              <a:t>选择变快之外，中国的使用要收成合作方能排产的数；被删掉的工序若回来，数据上先看见；教育从一小时收成五分钟。</a:t>
+              <a:t>艾护理的输入是每餐、体型、步数、用药。输出是对这个人的一句：为什么是这一个。血和尿可以后补，记录不能等医院。</a:t>
             </a:r>
           </a:p>
         </p:txBody>
@@ -1220,7 +1221,7 @@
           <a:lstStyle/>
           <a:p>
             <a:r>
-              <a:t>收束不再加新论点。四句对上封面。最后一句落到中国法人自己身上，然后停住。</a:t>
+              <a:t>阿扎是市集的地面，不是行政窗口。鲭鱼这类高成本率的日常品负责人来。一百兆仍由大约五百个主力品目赚。电走规则内的积分，不卖加油券。</a:t>
             </a:r>
           </a:p>
         </p:txBody>
@@ -1291,6 +1292,76 @@
           <a:p>
             <a:r>
               <a:t>先把落差放上桌。听众若不信，后面每一页都是写给这个不信的。</a:t>
+            </a:r>
+          </a:p>
+        </p:txBody>
+      </p:sp>
+      <p:sp>
+        <p:nvSpPr>
+          <p:cNvPr id="4" name="Slide Number Placeholder 3"/>
+          <p:cNvSpPr>
+            <a:spLocks noGrp="1"/>
+          </p:cNvSpPr>
+          <p:nvPr>
+            <p:ph type="sldNum" idx="5" sz="quarter"/>
+          </p:nvPr>
+        </p:nvSpPr>
+        <p:spPr/>
+      </p:sp>
+    </p:spTree>
+  </p:cSld>
+  <p:clrMapOvr>
+    <a:masterClrMapping/>
+  </p:clrMapOvr>
+</p:notes>
+</file>
+
+<file path=ppt/notesSlides/notesSlide20.xml><?xml version="1.0" encoding="utf-8"?>
+<p:notes xmlns:a="http://schemas.openxmlformats.org/drawingml/2006/main" xmlns:p="http://schemas.openxmlformats.org/presentationml/2006/main" xmlns:r="http://schemas.openxmlformats.org/officeDocument/2006/relationships">
+  <p:cSld>
+    <p:spTree>
+      <p:nvGrpSpPr>
+        <p:cNvPr id="1" name=""/>
+        <p:cNvGrpSpPr/>
+        <p:nvPr/>
+      </p:nvGrpSpPr>
+      <p:grpSpPr>
+        <a:xfrm>
+          <a:off x="0" y="0"/>
+          <a:ext cx="0" cy="0"/>
+          <a:chOff x="0" y="0"/>
+          <a:chExt cx="0" cy="0"/>
+        </a:xfrm>
+      </p:grpSpPr>
+      <p:sp>
+        <p:nvSpPr>
+          <p:cNvPr id="2" name="Slide Image Placeholder 1"/>
+          <p:cNvSpPr>
+            <a:spLocks noGrp="1"/>
+          </p:cNvSpPr>
+          <p:nvPr>
+            <p:ph type="sldImg" idx="2"/>
+          </p:nvPr>
+        </p:nvSpPr>
+        <p:spPr/>
+      </p:sp>
+      <p:sp>
+        <p:nvSpPr>
+          <p:cNvPr id="3" name="Notes Placeholder 2"/>
+          <p:cNvSpPr>
+            <a:spLocks noGrp="1"/>
+          </p:cNvSpPr>
+          <p:nvPr>
+            <p:ph type="body" idx="3" sz="quarter"/>
+          </p:nvPr>
+        </p:nvSpPr>
+        <p:spPr/>
+        <p:txBody>
+          <a:bodyPr/>
+          <a:lstStyle/>
+          <a:p>
+            <a:r>
+              <a:t>收束把三 A 落回中国法人：店、这个人、每天。然后停住。</a:t>
             </a:r>
           </a:p>
         </p:txBody>
@@ -9397,7 +9468,7 @@
                 <a:ea typeface="Noto Sans CJK SC Medium"/>
                 <a:cs typeface="Noto Sans CJK SC Medium"/>
               </a:rPr>
-              <a:t>选得快，靠的不是搜索</a:t>
+              <a:t>个人平台，先改变事业者</a:t>
             </a:r>
           </a:p>
         </p:txBody>
@@ -9453,8 +9524,8 @@
         </p:nvSpPr>
         <p:spPr>
           <a:xfrm>
-            <a:off x="658368" y="1234440"/>
-            <a:ext cx="3200400" cy="256032"/>
+            <a:off x="658368" y="1207008"/>
+            <a:ext cx="3200400" cy="237744"/>
           </a:xfrm>
           <a:prstGeom prst="rect">
             <a:avLst/>
@@ -9488,8 +9559,8 @@
         </p:nvSpPr>
         <p:spPr>
           <a:xfrm>
-            <a:off x="658368" y="1572768"/>
-            <a:ext cx="3246120" cy="502920"/>
+            <a:off x="658368" y="1499616"/>
+            <a:ext cx="3246120" cy="640080"/>
           </a:xfrm>
           <a:prstGeom prst="rect">
             <a:avLst/>
@@ -9502,7 +9573,7 @@
           <a:p>
             <a:pPr algn="l"/>
             <a:r>
-              <a:rPr sz="2400" b="0" i="0" lang="zh-CN" altLang="en-US">
+              <a:rPr sz="2200" b="0" i="0" lang="zh-CN" altLang="en-US">
                 <a:solidFill>
                   <a:srgbClr val="141414"/>
                 </a:solidFill>
@@ -9510,7 +9581,7 @@
                 <a:ea typeface="Noto Sans CJK SC Medium"/>
                 <a:cs typeface="Noto Sans CJK SC Medium"/>
               </a:rPr>
-              <a:t>平台已经会</a:t>
+              <a:t>八个阶段在里面</a:t>
             </a:r>
           </a:p>
         </p:txBody>
@@ -9523,7 +9594,7 @@
         </p:nvSpPr>
         <p:spPr>
           <a:xfrm>
-            <a:off x="658368" y="2194560"/>
+            <a:off x="658368" y="2240280"/>
             <a:ext cx="3246120" cy="1965960"/>
           </a:xfrm>
           <a:prstGeom prst="rect">
@@ -9537,7 +9608,7 @@
           <a:p>
             <a:pPr algn="l">
               <a:lnSpc>
-                <a:spcPct val="140000"/>
+                <a:spcPct val="135000"/>
               </a:lnSpc>
             </a:pPr>
             <a:r>
@@ -9549,9 +9620,11 @@
                 <a:ea typeface="Noto Sans CJK SC"/>
                 <a:cs typeface="Noto Sans CJK SC"/>
               </a:rPr>
-              <a:t>推荐几百款里的一个。
-款还在，人还在挑。
-搜索再快，选择的成本还在。</a:t>
+              <a:t>产品懂得多少，
+八个阶段走到哪一步，
+下一步学什么，都在里面。
+中国法人做成中文的路径。
+人不用等一场酒店课。</a:t>
             </a:r>
           </a:p>
         </p:txBody>
@@ -9564,8 +9637,8 @@
         </p:nvSpPr>
         <p:spPr>
           <a:xfrm>
-            <a:off x="4160520" y="1234440"/>
-            <a:ext cx="10972" cy="2971800"/>
+            <a:off x="4160520" y="1207008"/>
+            <a:ext cx="10972" cy="3063240"/>
           </a:xfrm>
           <a:prstGeom prst="rect">
             <a:avLst/>
@@ -9607,8 +9680,8 @@
         </p:nvSpPr>
         <p:spPr>
           <a:xfrm>
-            <a:off x="4361688" y="1234440"/>
-            <a:ext cx="3200400" cy="256032"/>
+            <a:off x="4361688" y="1207008"/>
+            <a:ext cx="3200400" cy="237744"/>
           </a:xfrm>
           <a:prstGeom prst="rect">
             <a:avLst/>
@@ -9642,8 +9715,8 @@
         </p:nvSpPr>
         <p:spPr>
           <a:xfrm>
-            <a:off x="4361688" y="1572768"/>
-            <a:ext cx="3246120" cy="502920"/>
+            <a:off x="4361688" y="1499616"/>
+            <a:ext cx="3246120" cy="640080"/>
           </a:xfrm>
           <a:prstGeom prst="rect">
             <a:avLst/>
@@ -9656,7 +9729,7 @@
           <a:p>
             <a:pPr algn="l"/>
             <a:r>
-              <a:rPr sz="2400" b="0" i="0" lang="zh-CN" altLang="en-US">
+              <a:rPr sz="2200" b="0" i="0" lang="zh-CN" altLang="en-US">
                 <a:solidFill>
                   <a:srgbClr val="141414"/>
                 </a:solidFill>
@@ -9664,7 +9737,7 @@
                 <a:ea typeface="Noto Sans CJK SC Medium"/>
                 <a:cs typeface="Noto Sans CJK SC Medium"/>
               </a:rPr>
-              <a:t>先知道为什么</a:t>
+              <a:t>一百到二百支骨架</a:t>
             </a:r>
           </a:p>
         </p:txBody>
@@ -9677,7 +9750,7 @@
         </p:nvSpPr>
         <p:spPr>
           <a:xfrm>
-            <a:off x="4361688" y="2194560"/>
+            <a:off x="4361688" y="2240280"/>
             <a:ext cx="3246120" cy="1965960"/>
           </a:xfrm>
           <a:prstGeom prst="rect">
@@ -9691,7 +9764,7 @@
           <a:p>
             <a:pPr algn="l">
               <a:lnSpc>
-                <a:spcPct val="140000"/>
+                <a:spcPct val="135000"/>
               </a:lnSpc>
             </a:pPr>
             <a:r>
@@ -9703,11 +9776,11 @@
                 <a:ea typeface="Noto Sans CJK SC"/>
                 <a:cs typeface="Noto Sans CJK SC"/>
               </a:rPr>
-              <a:t>品类里只剩一个。
-要回答的是这个人，
-为什么是这一个。
-餐食拍一张，步数接进来，
-话就跟着变。</a:t>
+              <a:t>到明年年底先打好骨架。
+事业者换成自己的脸、
+自己的讲法。
+一小时收成五分钟。
+说明在这个人的平台上完成。</a:t>
             </a:r>
           </a:p>
         </p:txBody>
@@ -9720,8 +9793,8 @@
         </p:nvSpPr>
         <p:spPr>
           <a:xfrm>
-            <a:off x="7863840" y="1234440"/>
-            <a:ext cx="10972" cy="2971800"/>
+            <a:off x="7863840" y="1207008"/>
+            <a:ext cx="10972" cy="3063240"/>
           </a:xfrm>
           <a:prstGeom prst="rect">
             <a:avLst/>
@@ -9763,8 +9836,8 @@
         </p:nvSpPr>
         <p:spPr>
           <a:xfrm>
-            <a:off x="8065008" y="1234440"/>
-            <a:ext cx="3200400" cy="256032"/>
+            <a:off x="8065008" y="1207008"/>
+            <a:ext cx="3200400" cy="237744"/>
           </a:xfrm>
           <a:prstGeom prst="rect">
             <a:avLst/>
@@ -9798,8 +9871,8 @@
         </p:nvSpPr>
         <p:spPr>
           <a:xfrm>
-            <a:off x="8065008" y="1572768"/>
-            <a:ext cx="3246120" cy="502920"/>
+            <a:off x="8065008" y="1499616"/>
+            <a:ext cx="3246120" cy="640080"/>
           </a:xfrm>
           <a:prstGeom prst="rect">
             <a:avLst/>
@@ -9812,7 +9885,7 @@
           <a:p>
             <a:pPr algn="l"/>
             <a:r>
-              <a:rPr sz="2400" b="0" i="0" lang="zh-CN" altLang="en-US">
+              <a:rPr sz="2200" b="0" i="0" lang="zh-CN" altLang="en-US">
                 <a:solidFill>
                   <a:srgbClr val="141414"/>
                 </a:solidFill>
@@ -9820,7 +9893,7 @@
                 <a:ea typeface="Noto Sans CJK SC Medium"/>
                 <a:cs typeface="Noto Sans CJK SC Medium"/>
               </a:rPr>
-              <a:t>不必先搜</a:t>
+              <a:t>主人，不是链接</a:t>
             </a:r>
           </a:p>
         </p:txBody>
@@ -9833,7 +9906,7 @@
         </p:nvSpPr>
         <p:spPr>
           <a:xfrm>
-            <a:off x="8065008" y="2194560"/>
+            <a:off x="8065008" y="2240280"/>
             <a:ext cx="3246120" cy="1965960"/>
           </a:xfrm>
           <a:prstGeom prst="rect">
@@ -9847,7 +9920,7 @@
           <a:p>
             <a:pPr algn="l">
               <a:lnSpc>
-                <a:spcPct val="140000"/>
+                <a:spcPct val="135000"/>
               </a:lnSpc>
             </a:pPr>
             <a:r>
@@ -9859,10 +9932,10 @@
                 <a:ea typeface="Noto Sans CJK SC"/>
                 <a:cs typeface="Noto Sans CJK SC"/>
               </a:rPr>
-              <a:t>打开就是今天的两样：
-一件主力，一件每天用的。
-介绍别人，先进入艾护理，
-不是先发一个产品链接。</a:t>
+              <a:t>自己的店、健康、教育，
+收在一处。
+顾客进来就知道为什么买。
+平台本身就是人工智能。</a:t>
             </a:r>
           </a:p>
         </p:txBody>
@@ -9875,7 +9948,7 @@
         </p:nvSpPr>
         <p:spPr>
           <a:xfrm>
-            <a:off x="658368" y="4709160"/>
+            <a:off x="658368" y="4754880"/>
             <a:ext cx="10881360" cy="10972"/>
           </a:xfrm>
           <a:prstGeom prst="rect">
@@ -9919,7 +9992,7 @@
         <p:spPr>
           <a:xfrm>
             <a:off x="658368" y="4956048"/>
-            <a:ext cx="10789920" cy="1097280"/>
+            <a:ext cx="10789920" cy="1051560"/>
           </a:xfrm>
           <a:prstGeom prst="rect">
             <a:avLst/>
@@ -9932,7 +10005,7 @@
           <a:p>
             <a:pPr algn="l">
               <a:lnSpc>
-                <a:spcPct val="135000"/>
+                <a:spcPct val="130000"/>
               </a:lnSpc>
             </a:pPr>
             <a:r>
@@ -9944,8 +10017,8 @@
                 <a:ea typeface="Noto Sans CJK SC Medium"/>
                 <a:cs typeface="Noto Sans CJK SC Medium"/>
               </a:rPr>
-              <a:t>中国法人若用它去铺更多款，
-就是在做平台已经会做的事。</a:t>
+              <a:t>教育的大笔费用在这里消失。
+省下来的，还是那三十五个点。</a:t>
             </a:r>
           </a:p>
         </p:txBody>
@@ -10076,7 +10149,7 @@
                 <a:ea typeface="Noto Sans CJK SC Medium"/>
                 <a:cs typeface="Noto Sans CJK SC Medium"/>
               </a:rPr>
-              <a:t>选得快，只是其中一件</a:t>
+              <a:t>艾护理对着这个人说</a:t>
             </a:r>
           </a:p>
         </p:txBody>
@@ -10132,8 +10205,8 @@
         </p:nvSpPr>
         <p:spPr>
           <a:xfrm>
-            <a:off x="658368" y="1234440"/>
-            <a:ext cx="3200400" cy="256032"/>
+            <a:off x="658368" y="1170432"/>
+            <a:ext cx="5029200" cy="365760"/>
           </a:xfrm>
           <a:prstGeom prst="rect">
             <a:avLst/>
@@ -10146,7 +10219,7 @@
           <a:p>
             <a:pPr algn="l"/>
             <a:r>
-              <a:rPr sz="1400" b="0" i="0" lang="zh-CN" altLang="en-US">
+              <a:rPr sz="2000" b="0" i="0" lang="zh-CN" altLang="en-US">
                 <a:solidFill>
                   <a:srgbClr val="9E1B1B"/>
                 </a:solidFill>
@@ -10154,7 +10227,7 @@
                 <a:ea typeface="Noto Sans CJK SC Medium"/>
                 <a:cs typeface="Noto Sans CJK SC Medium"/>
               </a:rPr>
-              <a:t>01</a:t>
+              <a:t>放进来</a:t>
             </a:r>
           </a:p>
         </p:txBody>
@@ -10167,8 +10240,8 @@
         </p:nvSpPr>
         <p:spPr>
           <a:xfrm>
-            <a:off x="658368" y="1572768"/>
-            <a:ext cx="3246120" cy="640080"/>
+            <a:off x="6263640" y="1170432"/>
+            <a:ext cx="5120640" cy="365760"/>
           </a:xfrm>
           <a:prstGeom prst="rect">
             <a:avLst/>
@@ -10181,15 +10254,15 @@
           <a:p>
             <a:pPr algn="l"/>
             <a:r>
-              <a:rPr sz="2200" b="0" i="0" lang="zh-CN" altLang="en-US">
-                <a:solidFill>
-                  <a:srgbClr val="141414"/>
+              <a:rPr sz="2000" b="0" i="0" lang="zh-CN" altLang="en-US">
+                <a:solidFill>
+                  <a:srgbClr val="9E1B1B"/>
                 </a:solidFill>
                 <a:latin typeface="Noto Sans CJK SC Medium"/>
                 <a:ea typeface="Noto Sans CJK SC Medium"/>
                 <a:cs typeface="Noto Sans CJK SC Medium"/>
               </a:rPr>
-              <a:t>收成能排产的数</a:t>
+              <a:t>说出来</a:t>
             </a:r>
           </a:p>
         </p:txBody>
@@ -10202,25 +10275,56 @@
         </p:nvSpPr>
         <p:spPr>
           <a:xfrm>
-            <a:off x="658368" y="2331720"/>
-            <a:ext cx="3246120" cy="1828800"/>
-          </a:xfrm>
-          <a:prstGeom prst="rect">
-            <a:avLst/>
-          </a:prstGeom>
-          <a:noFill/>
-        </p:spPr>
-        <p:txBody>
-          <a:bodyPr wrap="square" anchor="t" lIns="0" rIns="0" tIns="0" bIns="0"/>
-          <a:lstStyle/>
-          <a:p>
-            <a:pPr algn="l">
-              <a:lnSpc>
-                <a:spcPct val="140000"/>
-              </a:lnSpc>
-            </a:pPr>
-            <a:r>
-              <a:rPr sz="1500" b="0" i="0" lang="zh-CN" altLang="en-US">
+            <a:off x="658368" y="1572768"/>
+            <a:ext cx="5029200" cy="274320"/>
+          </a:xfrm>
+          <a:prstGeom prst="rect">
+            <a:avLst/>
+          </a:prstGeom>
+          <a:noFill/>
+        </p:spPr>
+        <p:txBody>
+          <a:bodyPr wrap="square" anchor="t" lIns="0" rIns="0" tIns="0" bIns="0"/>
+          <a:lstStyle/>
+          <a:p>
+            <a:pPr algn="l"/>
+            <a:r>
+              <a:rPr sz="1600" b="0" i="0" lang="zh-CN" altLang="en-US">
+                <a:solidFill>
+                  <a:srgbClr val="141414"/>
+                </a:solidFill>
+                <a:latin typeface="Noto Sans CJK SC Medium"/>
+                <a:ea typeface="Noto Sans CJK SC Medium"/>
+                <a:cs typeface="Noto Sans CJK SC Medium"/>
+              </a:rPr>
+              <a:t>每餐一张照片</a:t>
+            </a:r>
+          </a:p>
+        </p:txBody>
+      </p:sp>
+      <p:sp>
+        <p:nvSpPr>
+          <p:cNvPr id="8" name="TextBox 7"/>
+          <p:cNvSpPr txBox="1"/>
+          <p:nvPr/>
+        </p:nvSpPr>
+        <p:spPr>
+          <a:xfrm>
+            <a:off x="658368" y="1847088"/>
+            <a:ext cx="5029200" cy="384048"/>
+          </a:xfrm>
+          <a:prstGeom prst="rect">
+            <a:avLst/>
+          </a:prstGeom>
+          <a:noFill/>
+        </p:spPr>
+        <p:txBody>
+          <a:bodyPr wrap="square" anchor="t" lIns="0" rIns="0" tIns="0" bIns="0"/>
+          <a:lstStyle/>
+          <a:p>
+            <a:pPr algn="l"/>
+            <a:r>
+              <a:rPr sz="1400" b="0" i="0" lang="zh-CN" altLang="en-US">
                 <a:solidFill>
                   <a:srgbClr val="2C2C2C"/>
                 </a:solidFill>
@@ -10228,24 +10332,511 @@
                 <a:ea typeface="Noto Sans CJK SC"/>
                 <a:cs typeface="Noto Sans CJK SC"/>
               </a:rPr>
-              <a:t>谁在用，下个月抽多少，
-喂回那只罐子和栽培合同。
-一个月十万套，
-要变成对方看得见的数。</a:t>
-            </a:r>
-          </a:p>
-        </p:txBody>
-      </p:sp>
-      <p:sp>
-        <p:nvSpPr>
-          <p:cNvPr id="8" name="Rectangle 7"/>
+              <a:t>碳水、蛋白、脂肪，白米还是玄米，蔬菜和纤维有多少。</a:t>
+            </a:r>
+          </a:p>
+        </p:txBody>
+      </p:sp>
+      <p:sp>
+        <p:nvSpPr>
+          <p:cNvPr id="9" name="TextBox 8"/>
+          <p:cNvSpPr txBox="1"/>
+          <p:nvPr/>
+        </p:nvSpPr>
+        <p:spPr>
+          <a:xfrm>
+            <a:off x="658368" y="2267712"/>
+            <a:ext cx="5029200" cy="274320"/>
+          </a:xfrm>
+          <a:prstGeom prst="rect">
+            <a:avLst/>
+          </a:prstGeom>
+          <a:noFill/>
+        </p:spPr>
+        <p:txBody>
+          <a:bodyPr wrap="square" anchor="t" lIns="0" rIns="0" tIns="0" bIns="0"/>
+          <a:lstStyle/>
+          <a:p>
+            <a:pPr algn="l"/>
+            <a:r>
+              <a:rPr sz="1600" b="0" i="0" lang="zh-CN" altLang="en-US">
+                <a:solidFill>
+                  <a:srgbClr val="141414"/>
+                </a:solidFill>
+                <a:latin typeface="Noto Sans CJK SC Medium"/>
+                <a:ea typeface="Noto Sans CJK SC Medium"/>
+                <a:cs typeface="Noto Sans CJK SC Medium"/>
+              </a:rPr>
+              <a:t>身高、体重、步数</a:t>
+            </a:r>
+          </a:p>
+        </p:txBody>
+      </p:sp>
+      <p:sp>
+        <p:nvSpPr>
+          <p:cNvPr id="10" name="TextBox 9"/>
+          <p:cNvSpPr txBox="1"/>
+          <p:nvPr/>
+        </p:nvSpPr>
+        <p:spPr>
+          <a:xfrm>
+            <a:off x="658368" y="2542032"/>
+            <a:ext cx="5029200" cy="384048"/>
+          </a:xfrm>
+          <a:prstGeom prst="rect">
+            <a:avLst/>
+          </a:prstGeom>
+          <a:noFill/>
+        </p:spPr>
+        <p:txBody>
+          <a:bodyPr wrap="square" anchor="t" lIns="0" rIns="0" tIns="0" bIns="0"/>
+          <a:lstStyle/>
+          <a:p>
+            <a:pPr algn="l"/>
+            <a:r>
+              <a:rPr sz="1400" b="0" i="0" lang="zh-CN" altLang="en-US">
+                <a:solidFill>
+                  <a:srgbClr val="2C2C2C"/>
+                </a:solidFill>
+                <a:latin typeface="Noto Sans CJK SC"/>
+                <a:ea typeface="Noto Sans CJK SC"/>
+                <a:cs typeface="Noto Sans CJK SC"/>
+              </a:rPr>
+              <a:t>肥胖还是肌肉，活动够不够。步数从手机接进来。</a:t>
+            </a:r>
+          </a:p>
+        </p:txBody>
+      </p:sp>
+      <p:sp>
+        <p:nvSpPr>
+          <p:cNvPr id="11" name="TextBox 10"/>
+          <p:cNvSpPr txBox="1"/>
+          <p:nvPr/>
+        </p:nvSpPr>
+        <p:spPr>
+          <a:xfrm>
+            <a:off x="658368" y="2962656"/>
+            <a:ext cx="5029200" cy="274320"/>
+          </a:xfrm>
+          <a:prstGeom prst="rect">
+            <a:avLst/>
+          </a:prstGeom>
+          <a:noFill/>
+        </p:spPr>
+        <p:txBody>
+          <a:bodyPr wrap="square" anchor="t" lIns="0" rIns="0" tIns="0" bIns="0"/>
+          <a:lstStyle/>
+          <a:p>
+            <a:pPr algn="l"/>
+            <a:r>
+              <a:rPr sz="1600" b="0" i="0" lang="zh-CN" altLang="en-US">
+                <a:solidFill>
+                  <a:srgbClr val="141414"/>
+                </a:solidFill>
+                <a:latin typeface="Noto Sans CJK SC Medium"/>
+                <a:ea typeface="Noto Sans CJK SC Medium"/>
+                <a:cs typeface="Noto Sans CJK SC Medium"/>
+              </a:rPr>
+              <a:t>用药和注射</a:t>
+            </a:r>
+          </a:p>
+        </p:txBody>
+      </p:sp>
+      <p:sp>
+        <p:nvSpPr>
+          <p:cNvPr id="12" name="TextBox 11"/>
+          <p:cNvSpPr txBox="1"/>
+          <p:nvPr/>
+        </p:nvSpPr>
+        <p:spPr>
+          <a:xfrm>
+            <a:off x="658368" y="3236976"/>
+            <a:ext cx="5029200" cy="384048"/>
+          </a:xfrm>
+          <a:prstGeom prst="rect">
+            <a:avLst/>
+          </a:prstGeom>
+          <a:noFill/>
+        </p:spPr>
+        <p:txBody>
+          <a:bodyPr wrap="square" anchor="t" lIns="0" rIns="0" tIns="0" bIns="0"/>
+          <a:lstStyle/>
+          <a:p>
+            <a:pPr algn="l"/>
+            <a:r>
+              <a:rPr sz="1400" b="0" i="0" lang="zh-CN" altLang="en-US">
+                <a:solidFill>
+                  <a:srgbClr val="2C2C2C"/>
+                </a:solidFill>
+                <a:latin typeface="Noto Sans CJK SC"/>
+                <a:ea typeface="Noto Sans CJK SC"/>
+                <a:cs typeface="Noto Sans CJK SC"/>
+              </a:rPr>
+              <a:t>代谢顺不顺，有连续记录才说得清。</a:t>
+            </a:r>
+          </a:p>
+        </p:txBody>
+      </p:sp>
+      <p:sp>
+        <p:nvSpPr>
+          <p:cNvPr id="13" name="TextBox 12"/>
+          <p:cNvSpPr txBox="1"/>
+          <p:nvPr/>
+        </p:nvSpPr>
+        <p:spPr>
+          <a:xfrm>
+            <a:off x="658368" y="3657600"/>
+            <a:ext cx="5029200" cy="274320"/>
+          </a:xfrm>
+          <a:prstGeom prst="rect">
+            <a:avLst/>
+          </a:prstGeom>
+          <a:noFill/>
+        </p:spPr>
+        <p:txBody>
+          <a:bodyPr wrap="square" anchor="t" lIns="0" rIns="0" tIns="0" bIns="0"/>
+          <a:lstStyle/>
+          <a:p>
+            <a:pPr algn="l"/>
+            <a:r>
+              <a:rPr sz="1600" b="0" i="0" lang="zh-CN" altLang="en-US">
+                <a:solidFill>
+                  <a:srgbClr val="141414"/>
+                </a:solidFill>
+                <a:latin typeface="Noto Sans CJK SC Medium"/>
+                <a:ea typeface="Noto Sans CJK SC Medium"/>
+                <a:cs typeface="Noto Sans CJK SC Medium"/>
+              </a:rPr>
+              <a:t>血和尿可以后补</a:t>
+            </a:r>
+          </a:p>
+        </p:txBody>
+      </p:sp>
+      <p:sp>
+        <p:nvSpPr>
+          <p:cNvPr id="14" name="TextBox 13"/>
+          <p:cNvSpPr txBox="1"/>
+          <p:nvPr/>
+        </p:nvSpPr>
+        <p:spPr>
+          <a:xfrm>
+            <a:off x="658368" y="3931920"/>
+            <a:ext cx="5029200" cy="384048"/>
+          </a:xfrm>
+          <a:prstGeom prst="rect">
+            <a:avLst/>
+          </a:prstGeom>
+          <a:noFill/>
+        </p:spPr>
+        <p:txBody>
+          <a:bodyPr wrap="square" anchor="t" lIns="0" rIns="0" tIns="0" bIns="0"/>
+          <a:lstStyle/>
+          <a:p>
+            <a:pPr algn="l"/>
+            <a:r>
+              <a:rPr sz="1400" b="0" i="0" lang="zh-CN" altLang="en-US">
+                <a:solidFill>
+                  <a:srgbClr val="2C2C2C"/>
+                </a:solidFill>
+                <a:latin typeface="Noto Sans CJK SC"/>
+                <a:ea typeface="Noto Sans CJK SC"/>
+                <a:cs typeface="Noto Sans CJK SC"/>
+              </a:rPr>
+              <a:t>上面这些先每天跑起来。不必等一座医院。</a:t>
+            </a:r>
+          </a:p>
+        </p:txBody>
+      </p:sp>
+      <p:sp>
+        <p:nvSpPr>
+          <p:cNvPr id="15" name="TextBox 14"/>
+          <p:cNvSpPr txBox="1"/>
+          <p:nvPr/>
+        </p:nvSpPr>
+        <p:spPr>
+          <a:xfrm>
+            <a:off x="6263640" y="1572768"/>
+            <a:ext cx="5120640" cy="274320"/>
+          </a:xfrm>
+          <a:prstGeom prst="rect">
+            <a:avLst/>
+          </a:prstGeom>
+          <a:noFill/>
+        </p:spPr>
+        <p:txBody>
+          <a:bodyPr wrap="square" anchor="t" lIns="0" rIns="0" tIns="0" bIns="0"/>
+          <a:lstStyle/>
+          <a:p>
+            <a:pPr algn="l"/>
+            <a:r>
+              <a:rPr sz="1600" b="0" i="0" lang="zh-CN" altLang="en-US">
+                <a:solidFill>
+                  <a:srgbClr val="141414"/>
+                </a:solidFill>
+                <a:latin typeface="Noto Sans CJK SC Medium"/>
+                <a:ea typeface="Noto Sans CJK SC Medium"/>
+                <a:cs typeface="Noto Sans CJK SC Medium"/>
+              </a:rPr>
+              <a:t>该减，还是该补</a:t>
+            </a:r>
+          </a:p>
+        </p:txBody>
+      </p:sp>
+      <p:sp>
+        <p:nvSpPr>
+          <p:cNvPr id="16" name="TextBox 15"/>
+          <p:cNvSpPr txBox="1"/>
+          <p:nvPr/>
+        </p:nvSpPr>
+        <p:spPr>
+          <a:xfrm>
+            <a:off x="6263640" y="1847088"/>
+            <a:ext cx="5120640" cy="384048"/>
+          </a:xfrm>
+          <a:prstGeom prst="rect">
+            <a:avLst/>
+          </a:prstGeom>
+          <a:noFill/>
+        </p:spPr>
+        <p:txBody>
+          <a:bodyPr wrap="square" anchor="t" lIns="0" rIns="0" tIns="0" bIns="0"/>
+          <a:lstStyle/>
+          <a:p>
+            <a:pPr algn="l"/>
+            <a:r>
+              <a:rPr sz="1400" b="0" i="0" lang="zh-CN" altLang="en-US">
+                <a:solidFill>
+                  <a:srgbClr val="2C2C2C"/>
+                </a:solidFill>
+                <a:latin typeface="Noto Sans CJK SC"/>
+                <a:ea typeface="Noto Sans CJK SC"/>
+                <a:cs typeface="Noto Sans CJK SC"/>
+              </a:rPr>
+              <a:t>减碳水，补蛋白；吃多了；或只吃精制，碳水其实不够。</a:t>
+            </a:r>
+          </a:p>
+        </p:txBody>
+      </p:sp>
+      <p:sp>
+        <p:nvSpPr>
+          <p:cNvPr id="17" name="TextBox 16"/>
+          <p:cNvSpPr txBox="1"/>
+          <p:nvPr/>
+        </p:nvSpPr>
+        <p:spPr>
+          <a:xfrm>
+            <a:off x="6263640" y="2267712"/>
+            <a:ext cx="5120640" cy="274320"/>
+          </a:xfrm>
+          <a:prstGeom prst="rect">
+            <a:avLst/>
+          </a:prstGeom>
+          <a:noFill/>
+        </p:spPr>
+        <p:txBody>
+          <a:bodyPr wrap="square" anchor="t" lIns="0" rIns="0" tIns="0" bIns="0"/>
+          <a:lstStyle/>
+          <a:p>
+            <a:pPr algn="l"/>
+            <a:r>
+              <a:rPr sz="1600" b="0" i="0" lang="zh-CN" altLang="en-US">
+                <a:solidFill>
+                  <a:srgbClr val="141414"/>
+                </a:solidFill>
+                <a:latin typeface="Noto Sans CJK SC Medium"/>
+                <a:ea typeface="Noto Sans CJK SC Medium"/>
+                <a:cs typeface="Noto Sans CJK SC Medium"/>
+              </a:rPr>
+              <a:t>一年、五年、十年</a:t>
+            </a:r>
+          </a:p>
+        </p:txBody>
+      </p:sp>
+      <p:sp>
+        <p:nvSpPr>
+          <p:cNvPr id="18" name="TextBox 17"/>
+          <p:cNvSpPr txBox="1"/>
+          <p:nvPr/>
+        </p:nvSpPr>
+        <p:spPr>
+          <a:xfrm>
+            <a:off x="6263640" y="2542032"/>
+            <a:ext cx="5120640" cy="384048"/>
+          </a:xfrm>
+          <a:prstGeom prst="rect">
+            <a:avLst/>
+          </a:prstGeom>
+          <a:noFill/>
+        </p:spPr>
+        <p:txBody>
+          <a:bodyPr wrap="square" anchor="t" lIns="0" rIns="0" tIns="0" bIns="0"/>
+          <a:lstStyle/>
+          <a:p>
+            <a:pPr algn="l"/>
+            <a:r>
+              <a:rPr sz="1400" b="0" i="0" lang="zh-CN" altLang="en-US">
+                <a:solidFill>
+                  <a:srgbClr val="2C2C2C"/>
+                </a:solidFill>
+                <a:latin typeface="Noto Sans CJK SC"/>
+                <a:ea typeface="Noto Sans CJK SC"/>
+                <a:cs typeface="Noto Sans CJK SC"/>
+              </a:rPr>
+              <a:t>照这样下去，身体可以估。家族里带下来的病要能看见。</a:t>
+            </a:r>
+          </a:p>
+        </p:txBody>
+      </p:sp>
+      <p:sp>
+        <p:nvSpPr>
+          <p:cNvPr id="19" name="TextBox 18"/>
+          <p:cNvSpPr txBox="1"/>
+          <p:nvPr/>
+        </p:nvSpPr>
+        <p:spPr>
+          <a:xfrm>
+            <a:off x="6263640" y="2962656"/>
+            <a:ext cx="5120640" cy="274320"/>
+          </a:xfrm>
+          <a:prstGeom prst="rect">
+            <a:avLst/>
+          </a:prstGeom>
+          <a:noFill/>
+        </p:spPr>
+        <p:txBody>
+          <a:bodyPr wrap="square" anchor="t" lIns="0" rIns="0" tIns="0" bIns="0"/>
+          <a:lstStyle/>
+          <a:p>
+            <a:pPr algn="l"/>
+            <a:r>
+              <a:rPr sz="1600" b="0" i="0" lang="zh-CN" altLang="en-US">
+                <a:solidFill>
+                  <a:srgbClr val="141414"/>
+                </a:solidFill>
+                <a:latin typeface="Noto Sans CJK SC Medium"/>
+                <a:ea typeface="Noto Sans CJK SC Medium"/>
+                <a:cs typeface="Noto Sans CJK SC Medium"/>
+              </a:rPr>
+              <a:t>为什么是这一个</a:t>
+            </a:r>
+          </a:p>
+        </p:txBody>
+      </p:sp>
+      <p:sp>
+        <p:nvSpPr>
+          <p:cNvPr id="20" name="TextBox 19"/>
+          <p:cNvSpPr txBox="1"/>
+          <p:nvPr/>
+        </p:nvSpPr>
+        <p:spPr>
+          <a:xfrm>
+            <a:off x="6263640" y="3236976"/>
+            <a:ext cx="5120640" cy="384048"/>
+          </a:xfrm>
+          <a:prstGeom prst="rect">
+            <a:avLst/>
+          </a:prstGeom>
+          <a:noFill/>
+        </p:spPr>
+        <p:txBody>
+          <a:bodyPr wrap="square" anchor="t" lIns="0" rIns="0" tIns="0" bIns="0"/>
+          <a:lstStyle/>
+          <a:p>
+            <a:pPr algn="l"/>
+            <a:r>
+              <a:rPr sz="1400" b="0" i="0" lang="zh-CN" altLang="en-US">
+                <a:solidFill>
+                  <a:srgbClr val="2C2C2C"/>
+                </a:solidFill>
+                <a:latin typeface="Noto Sans CJK SC"/>
+                <a:ea typeface="Noto Sans CJK SC"/>
+                <a:cs typeface="Noto Sans CJK SC"/>
+              </a:rPr>
+              <a:t>水飞蓟不再对所有人说对肝好。这个人的肝，才决定这句话。</a:t>
+            </a:r>
+          </a:p>
+        </p:txBody>
+      </p:sp>
+      <p:sp>
+        <p:nvSpPr>
+          <p:cNvPr id="21" name="TextBox 20"/>
+          <p:cNvSpPr txBox="1"/>
+          <p:nvPr/>
+        </p:nvSpPr>
+        <p:spPr>
+          <a:xfrm>
+            <a:off x="6263640" y="3657600"/>
+            <a:ext cx="5120640" cy="274320"/>
+          </a:xfrm>
+          <a:prstGeom prst="rect">
+            <a:avLst/>
+          </a:prstGeom>
+          <a:noFill/>
+        </p:spPr>
+        <p:txBody>
+          <a:bodyPr wrap="square" anchor="t" lIns="0" rIns="0" tIns="0" bIns="0"/>
+          <a:lstStyle/>
+          <a:p>
+            <a:pPr algn="l"/>
+            <a:r>
+              <a:rPr sz="1600" b="0" i="0" lang="zh-CN" altLang="en-US">
+                <a:solidFill>
+                  <a:srgbClr val="141414"/>
+                </a:solidFill>
+                <a:latin typeface="Noto Sans CJK SC Medium"/>
+                <a:ea typeface="Noto Sans CJK SC Medium"/>
+                <a:cs typeface="Noto Sans CJK SC Medium"/>
+              </a:rPr>
+              <a:t>先进入艾护理</a:t>
+            </a:r>
+          </a:p>
+        </p:txBody>
+      </p:sp>
+      <p:sp>
+        <p:nvSpPr>
+          <p:cNvPr id="22" name="TextBox 21"/>
+          <p:cNvSpPr txBox="1"/>
+          <p:nvPr/>
+        </p:nvSpPr>
+        <p:spPr>
+          <a:xfrm>
+            <a:off x="6263640" y="3931920"/>
+            <a:ext cx="5120640" cy="384048"/>
+          </a:xfrm>
+          <a:prstGeom prst="rect">
+            <a:avLst/>
+          </a:prstGeom>
+          <a:noFill/>
+        </p:spPr>
+        <p:txBody>
+          <a:bodyPr wrap="square" anchor="t" lIns="0" rIns="0" tIns="0" bIns="0"/>
+          <a:lstStyle/>
+          <a:p>
+            <a:pPr algn="l"/>
+            <a:r>
+              <a:rPr sz="1400" b="0" i="0" lang="zh-CN" altLang="en-US">
+                <a:solidFill>
+                  <a:srgbClr val="2C2C2C"/>
+                </a:solidFill>
+                <a:latin typeface="Noto Sans CJK SC"/>
+                <a:ea typeface="Noto Sans CJK SC"/>
+                <a:cs typeface="Noto Sans CJK SC"/>
+              </a:rPr>
+              <a:t>介绍别人，先把对方的记录建起来，再谈产品。</a:t>
+            </a:r>
+          </a:p>
+        </p:txBody>
+      </p:sp>
+      <p:sp>
+        <p:nvSpPr>
+          <p:cNvPr id="23" name="Rectangle 22"/>
           <p:cNvSpPr/>
           <p:nvPr/>
         </p:nvSpPr>
         <p:spPr>
           <a:xfrm>
-            <a:off x="4160520" y="1234440"/>
-            <a:ext cx="10972" cy="2971800"/>
+            <a:off x="5897880" y="1170432"/>
+            <a:ext cx="10972" cy="3200400"/>
           </a:xfrm>
           <a:prstGeom prst="rect">
             <a:avLst/>
@@ -10281,126 +10872,14 @@
       </p:sp>
       <p:sp>
         <p:nvSpPr>
-          <p:cNvPr id="9" name="TextBox 8"/>
-          <p:cNvSpPr txBox="1"/>
-          <p:nvPr/>
-        </p:nvSpPr>
-        <p:spPr>
-          <a:xfrm>
-            <a:off x="4361688" y="1234440"/>
-            <a:ext cx="3200400" cy="256032"/>
-          </a:xfrm>
-          <a:prstGeom prst="rect">
-            <a:avLst/>
-          </a:prstGeom>
-          <a:noFill/>
-        </p:spPr>
-        <p:txBody>
-          <a:bodyPr wrap="square" anchor="t" lIns="0" rIns="0" tIns="0" bIns="0"/>
-          <a:lstStyle/>
-          <a:p>
-            <a:pPr algn="l"/>
-            <a:r>
-              <a:rPr sz="1400" b="0" i="0" lang="zh-CN" altLang="en-US">
-                <a:solidFill>
-                  <a:srgbClr val="9E1B1B"/>
-                </a:solidFill>
-                <a:latin typeface="Noto Sans CJK SC Medium"/>
-                <a:ea typeface="Noto Sans CJK SC Medium"/>
-                <a:cs typeface="Noto Sans CJK SC Medium"/>
-              </a:rPr>
-              <a:t>02</a:t>
-            </a:r>
-          </a:p>
-        </p:txBody>
-      </p:sp>
-      <p:sp>
-        <p:nvSpPr>
-          <p:cNvPr id="10" name="TextBox 9"/>
-          <p:cNvSpPr txBox="1"/>
-          <p:nvPr/>
-        </p:nvSpPr>
-        <p:spPr>
-          <a:xfrm>
-            <a:off x="4361688" y="1572768"/>
-            <a:ext cx="3246120" cy="640080"/>
-          </a:xfrm>
-          <a:prstGeom prst="rect">
-            <a:avLst/>
-          </a:prstGeom>
-          <a:noFill/>
-        </p:spPr>
-        <p:txBody>
-          <a:bodyPr wrap="square" anchor="t" lIns="0" rIns="0" tIns="0" bIns="0"/>
-          <a:lstStyle/>
-          <a:p>
-            <a:pPr algn="l"/>
-            <a:r>
-              <a:rPr sz="2200" b="0" i="0" lang="zh-CN" altLang="en-US">
-                <a:solidFill>
-                  <a:srgbClr val="141414"/>
-                </a:solidFill>
-                <a:latin typeface="Noto Sans CJK SC Medium"/>
-                <a:ea typeface="Noto Sans CJK SC Medium"/>
-                <a:cs typeface="Noto Sans CJK SC Medium"/>
-              </a:rPr>
-              <a:t>看守删掉的工序</a:t>
-            </a:r>
-          </a:p>
-        </p:txBody>
-      </p:sp>
-      <p:sp>
-        <p:nvSpPr>
-          <p:cNvPr id="11" name="TextBox 10"/>
-          <p:cNvSpPr txBox="1"/>
-          <p:nvPr/>
-        </p:nvSpPr>
-        <p:spPr>
-          <a:xfrm>
-            <a:off x="4361688" y="2331720"/>
-            <a:ext cx="3246120" cy="1828800"/>
-          </a:xfrm>
-          <a:prstGeom prst="rect">
-            <a:avLst/>
-          </a:prstGeom>
-          <a:noFill/>
-        </p:spPr>
-        <p:txBody>
-          <a:bodyPr wrap="square" anchor="t" lIns="0" rIns="0" tIns="0" bIns="0"/>
-          <a:lstStyle/>
-          <a:p>
-            <a:pPr algn="l">
-              <a:lnSpc>
-                <a:spcPct val="140000"/>
-              </a:lnSpc>
-            </a:pPr>
-            <a:r>
-              <a:rPr sz="1500" b="0" i="0" lang="zh-CN" altLang="en-US">
-                <a:solidFill>
-                  <a:srgbClr val="2C2C2C"/>
-                </a:solidFill>
-                <a:latin typeface="Noto Sans CJK SC"/>
-                <a:ea typeface="Noto Sans CJK SC"/>
-                <a:cs typeface="Noto Sans CJK SC"/>
-              </a:rPr>
-              <a:t>原料物性、配方、设备基准
-在自己手里。
-干燥、切断、换料清洗若回来，
-数据上要先看见。</a:t>
-            </a:r>
-          </a:p>
-        </p:txBody>
-      </p:sp>
-      <p:sp>
-        <p:nvSpPr>
-          <p:cNvPr id="12" name="Rectangle 11"/>
+          <p:cNvPr id="24" name="Rectangle 23"/>
           <p:cNvSpPr/>
           <p:nvPr/>
         </p:nvSpPr>
         <p:spPr>
           <a:xfrm>
-            <a:off x="7863840" y="1234440"/>
-            <a:ext cx="10972" cy="2971800"/>
+            <a:off x="658368" y="4617720"/>
+            <a:ext cx="10881360" cy="10972"/>
           </a:xfrm>
           <a:prstGeom prst="rect">
             <a:avLst/>
@@ -10436,27 +10915,31 @@
       </p:sp>
       <p:sp>
         <p:nvSpPr>
-          <p:cNvPr id="13" name="TextBox 12"/>
-          <p:cNvSpPr txBox="1"/>
-          <p:nvPr/>
-        </p:nvSpPr>
-        <p:spPr>
-          <a:xfrm>
-            <a:off x="8065008" y="1234440"/>
-            <a:ext cx="3200400" cy="256032"/>
-          </a:xfrm>
-          <a:prstGeom prst="rect">
-            <a:avLst/>
-          </a:prstGeom>
-          <a:noFill/>
-        </p:spPr>
-        <p:txBody>
-          <a:bodyPr wrap="square" anchor="t" lIns="0" rIns="0" tIns="0" bIns="0"/>
-          <a:lstStyle/>
-          <a:p>
-            <a:pPr algn="l"/>
-            <a:r>
-              <a:rPr sz="1400" b="0" i="0" lang="zh-CN" altLang="en-US">
+          <p:cNvPr id="25" name="TextBox 24"/>
+          <p:cNvSpPr txBox="1"/>
+          <p:nvPr/>
+        </p:nvSpPr>
+        <p:spPr>
+          <a:xfrm>
+            <a:off x="658368" y="4773168"/>
+            <a:ext cx="10789920" cy="1051560"/>
+          </a:xfrm>
+          <a:prstGeom prst="rect">
+            <a:avLst/>
+          </a:prstGeom>
+          <a:noFill/>
+        </p:spPr>
+        <p:txBody>
+          <a:bodyPr wrap="square" anchor="t" lIns="0" rIns="0" tIns="0" bIns="0"/>
+          <a:lstStyle/>
+          <a:p>
+            <a:pPr algn="l">
+              <a:lnSpc>
+                <a:spcPct val="130000"/>
+              </a:lnSpc>
+            </a:pPr>
+            <a:r>
+              <a:rPr sz="1800" b="0" i="0" lang="zh-CN" altLang="en-US">
                 <a:solidFill>
                   <a:srgbClr val="9E1B1B"/>
                 </a:solidFill>
@@ -10464,174 +10947,15 @@
                 <a:ea typeface="Noto Sans CJK SC Medium"/>
                 <a:cs typeface="Noto Sans CJK SC Medium"/>
               </a:rPr>
-              <a:t>03</a:t>
-            </a:r>
-          </a:p>
-        </p:txBody>
-      </p:sp>
-      <p:sp>
-        <p:nvSpPr>
-          <p:cNvPr id="14" name="TextBox 13"/>
-          <p:cNvSpPr txBox="1"/>
-          <p:nvPr/>
-        </p:nvSpPr>
-        <p:spPr>
-          <a:xfrm>
-            <a:off x="8065008" y="1572768"/>
-            <a:ext cx="3246120" cy="640080"/>
-          </a:xfrm>
-          <a:prstGeom prst="rect">
-            <a:avLst/>
-          </a:prstGeom>
-          <a:noFill/>
-        </p:spPr>
-        <p:txBody>
-          <a:bodyPr wrap="square" anchor="t" lIns="0" rIns="0" tIns="0" bIns="0"/>
-          <a:lstStyle/>
-          <a:p>
-            <a:pPr algn="l"/>
-            <a:r>
-              <a:rPr sz="2200" b="0" i="0" lang="zh-CN" altLang="en-US">
-                <a:solidFill>
-                  <a:srgbClr val="141414"/>
-                </a:solidFill>
-                <a:latin typeface="Noto Sans CJK SC Medium"/>
-                <a:ea typeface="Noto Sans CJK SC Medium"/>
-                <a:cs typeface="Noto Sans CJK SC Medium"/>
-              </a:rPr>
-              <a:t>一小时收成五分钟</a:t>
-            </a:r>
-          </a:p>
-        </p:txBody>
-      </p:sp>
-      <p:sp>
-        <p:nvSpPr>
-          <p:cNvPr id="15" name="TextBox 14"/>
-          <p:cNvSpPr txBox="1"/>
-          <p:nvPr/>
-        </p:nvSpPr>
-        <p:spPr>
-          <a:xfrm>
-            <a:off x="8065008" y="2331720"/>
-            <a:ext cx="3246120" cy="1828800"/>
-          </a:xfrm>
-          <a:prstGeom prst="rect">
-            <a:avLst/>
-          </a:prstGeom>
-          <a:noFill/>
-        </p:spPr>
-        <p:txBody>
-          <a:bodyPr wrap="square" anchor="t" lIns="0" rIns="0" tIns="0" bIns="0"/>
-          <a:lstStyle/>
-          <a:p>
-            <a:pPr algn="l">
-              <a:lnSpc>
-                <a:spcPct val="140000"/>
-              </a:lnSpc>
-            </a:pPr>
-            <a:r>
-              <a:rPr sz="1500" b="0" i="0" lang="zh-CN" altLang="en-US">
-                <a:solidFill>
-                  <a:srgbClr val="2C2C2C"/>
-                </a:solidFill>
-                <a:latin typeface="Noto Sans CJK SC"/>
-                <a:ea typeface="Noto Sans CJK SC"/>
-                <a:cs typeface="Noto Sans CJK SC"/>
-              </a:rPr>
-              <a:t>明年年底，先有
-一百到二百支骨架。
-中国法人做中文的。
-事业者换成自己的脸。</a:t>
-            </a:r>
-          </a:p>
-        </p:txBody>
-      </p:sp>
-      <p:sp>
-        <p:nvSpPr>
-          <p:cNvPr id="16" name="Rectangle 15"/>
-          <p:cNvSpPr/>
-          <p:nvPr/>
-        </p:nvSpPr>
-        <p:spPr>
-          <a:xfrm>
-            <a:off x="658368" y="4709160"/>
-            <a:ext cx="10881360" cy="10972"/>
-          </a:xfrm>
-          <a:prstGeom prst="rect">
-            <a:avLst/>
-          </a:prstGeom>
-          <a:solidFill>
-            <a:srgbClr val="E2E2E2"/>
-          </a:solidFill>
-          <a:ln>
-            <a:noFill/>
-          </a:ln>
-        </p:spPr>
-        <p:style>
-          <a:lnRef idx="1">
-            <a:schemeClr val="accent1"/>
-          </a:lnRef>
-          <a:fillRef idx="3">
-            <a:schemeClr val="accent1"/>
-          </a:fillRef>
-          <a:effectRef idx="2">
-            <a:schemeClr val="accent1"/>
-          </a:effectRef>
-          <a:fontRef idx="minor">
-            <a:schemeClr val="lt1"/>
-          </a:fontRef>
-        </p:style>
-        <p:txBody>
-          <a:bodyPr rtlCol="0" anchor="ctr"/>
-          <a:lstStyle/>
-          <a:p>
-            <a:pPr algn="ctr"/>
-          </a:p>
-        </p:txBody>
-      </p:sp>
-      <p:sp>
-        <p:nvSpPr>
-          <p:cNvPr id="17" name="TextBox 16"/>
-          <p:cNvSpPr txBox="1"/>
-          <p:nvPr/>
-        </p:nvSpPr>
-        <p:spPr>
-          <a:xfrm>
-            <a:off x="658368" y="4956048"/>
-            <a:ext cx="10789920" cy="1097280"/>
-          </a:xfrm>
-          <a:prstGeom prst="rect">
-            <a:avLst/>
-          </a:prstGeom>
-          <a:noFill/>
-        </p:spPr>
-        <p:txBody>
-          <a:bodyPr wrap="square" anchor="t" lIns="0" rIns="0" tIns="0" bIns="0"/>
-          <a:lstStyle/>
-          <a:p>
-            <a:pPr algn="l">
-              <a:lnSpc>
-                <a:spcPct val="135000"/>
-              </a:lnSpc>
-            </a:pPr>
-            <a:r>
-              <a:rPr sz="2200" b="0" i="0" lang="zh-CN" altLang="en-US">
-                <a:solidFill>
-                  <a:srgbClr val="9E1B1B"/>
-                </a:solidFill>
-                <a:latin typeface="Noto Sans CJK SC Medium"/>
-                <a:ea typeface="Noto Sans CJK SC Medium"/>
-                <a:cs typeface="Noto Sans CJK SC Medium"/>
-              </a:rPr>
-              <a:t>数、工序、教育，要一起变。
-酒店和培训部，是旧成本。</a:t>
-            </a:r>
-          </a:p>
-        </p:txBody>
-      </p:sp>
-      <p:sp>
-        <p:nvSpPr>
-          <p:cNvPr id="18" name="TextBox 17"/>
+              <a:t>终点是个人健康数据银行。本人同意，隐私守住。
+人连续用，下个月那只罐子要排的数才看得见。</a:t>
+            </a:r>
+          </a:p>
+        </p:txBody>
+      </p:sp>
+      <p:sp>
+        <p:nvSpPr>
+          <p:cNvPr id="26" name="TextBox 25"/>
           <p:cNvSpPr txBox="1"/>
           <p:nvPr/>
         </p:nvSpPr>
@@ -10678,7 +11002,7 @@
     <p:bg>
       <p:bgPr>
         <a:solidFill>
-          <a:srgbClr val="121212"/>
+          <a:srgbClr val="FFFFFF"/>
         </a:solidFill>
         <a:effectLst/>
       </p:bgPr>
@@ -10692,20 +11016,90 @@
       <p:grpSpPr/>
       <p:sp>
         <p:nvSpPr>
-          <p:cNvPr id="2" name="Rectangle 1"/>
+          <p:cNvPr id="2" name="TextBox 1"/>
+          <p:cNvSpPr txBox="1"/>
+          <p:nvPr/>
+        </p:nvSpPr>
+        <p:spPr>
+          <a:xfrm>
+            <a:off x="658368" y="365760"/>
+            <a:ext cx="640080" cy="329184"/>
+          </a:xfrm>
+          <a:prstGeom prst="rect">
+            <a:avLst/>
+          </a:prstGeom>
+          <a:noFill/>
+        </p:spPr>
+        <p:txBody>
+          <a:bodyPr wrap="square" anchor="t" lIns="0" rIns="0" tIns="0" bIns="0"/>
+          <a:lstStyle/>
+          <a:p>
+            <a:pPr algn="l"/>
+            <a:r>
+              <a:rPr sz="1500" b="0" i="0" lang="zh-CN" altLang="en-US">
+                <a:solidFill>
+                  <a:srgbClr val="9E1B1B"/>
+                </a:solidFill>
+                <a:latin typeface="Noto Sans CJK SC Medium"/>
+                <a:ea typeface="Noto Sans CJK SC Medium"/>
+                <a:cs typeface="Noto Sans CJK SC Medium"/>
+              </a:rPr>
+              <a:t>17</a:t>
+            </a:r>
+          </a:p>
+        </p:txBody>
+      </p:sp>
+      <p:sp>
+        <p:nvSpPr>
+          <p:cNvPr id="3" name="TextBox 2"/>
+          <p:cNvSpPr txBox="1"/>
+          <p:nvPr/>
+        </p:nvSpPr>
+        <p:spPr>
+          <a:xfrm>
+            <a:off x="1371600" y="310896"/>
+            <a:ext cx="10058400" cy="438912"/>
+          </a:xfrm>
+          <a:prstGeom prst="rect">
+            <a:avLst/>
+          </a:prstGeom>
+          <a:noFill/>
+        </p:spPr>
+        <p:txBody>
+          <a:bodyPr wrap="square" anchor="t" lIns="0" rIns="0" tIns="0" bIns="0"/>
+          <a:lstStyle/>
+          <a:p>
+            <a:pPr algn="l"/>
+            <a:r>
+              <a:rPr sz="3000" b="0" i="0" lang="zh-CN" altLang="en-US">
+                <a:solidFill>
+                  <a:srgbClr val="141414"/>
+                </a:solidFill>
+                <a:latin typeface="Noto Sans CJK SC Medium"/>
+                <a:ea typeface="Noto Sans CJK SC Medium"/>
+                <a:cs typeface="Noto Sans CJK SC Medium"/>
+              </a:rPr>
+              <a:t>阿扎让人每天走进来</a:t>
+            </a:r>
+          </a:p>
+        </p:txBody>
+      </p:sp>
+      <p:sp>
+        <p:nvSpPr>
+          <p:cNvPr id="4" name="Rectangle 3"/>
           <p:cNvSpPr/>
           <p:nvPr/>
         </p:nvSpPr>
         <p:spPr>
           <a:xfrm>
-            <a:off x="0" y="0"/>
-            <a:ext cx="73152" cy="6858000"/>
+            <a:off x="658368" y="960120"/>
+            <a:ext cx="10881360" cy="10972"/>
           </a:xfrm>
           <a:prstGeom prst="rect">
             <a:avLst/>
           </a:prstGeom>
           <a:solidFill>
-            <a:srgbClr val="9E1B1B"/>
+            <a:srgbClr val="E2E2E2"/>
           </a:solidFill>
           <a:ln>
             <a:noFill/>
@@ -10735,14 +11129,14 @@
       </p:sp>
       <p:sp>
         <p:nvSpPr>
-          <p:cNvPr id="3" name="TextBox 2"/>
-          <p:cNvSpPr txBox="1"/>
-          <p:nvPr/>
-        </p:nvSpPr>
-        <p:spPr>
-          <a:xfrm>
-            <a:off x="777240" y="658368"/>
-            <a:ext cx="4572000" cy="457200"/>
+          <p:cNvPr id="5" name="TextBox 4"/>
+          <p:cNvSpPr txBox="1"/>
+          <p:nvPr/>
+        </p:nvSpPr>
+        <p:spPr>
+          <a:xfrm>
+            <a:off x="658368" y="1207008"/>
+            <a:ext cx="3200400" cy="237744"/>
           </a:xfrm>
           <a:prstGeom prst="rect">
             <a:avLst/>
@@ -10755,29 +11149,29 @@
           <a:p>
             <a:pPr algn="l"/>
             <a:r>
-              <a:rPr sz="2600" b="0" i="0" lang="zh-CN" altLang="en-US">
-                <a:solidFill>
-                  <a:srgbClr val="FFFFFF"/>
+              <a:rPr sz="1400" b="0" i="0" lang="zh-CN" altLang="en-US">
+                <a:solidFill>
+                  <a:srgbClr val="9E1B1B"/>
                 </a:solidFill>
                 <a:latin typeface="Noto Sans CJK SC Medium"/>
                 <a:ea typeface="Noto Sans CJK SC Medium"/>
                 <a:cs typeface="Noto Sans CJK SC Medium"/>
               </a:rPr>
-              <a:t>生产被重做</a:t>
-            </a:r>
-          </a:p>
-        </p:txBody>
-      </p:sp>
-      <p:sp>
-        <p:nvSpPr>
-          <p:cNvPr id="4" name="TextBox 3"/>
-          <p:cNvSpPr txBox="1"/>
-          <p:nvPr/>
-        </p:nvSpPr>
-        <p:spPr>
-          <a:xfrm>
-            <a:off x="5623560" y="731519"/>
-            <a:ext cx="5760720" cy="365760"/>
+              <a:t>01</a:t>
+            </a:r>
+          </a:p>
+        </p:txBody>
+      </p:sp>
+      <p:sp>
+        <p:nvSpPr>
+          <p:cNvPr id="6" name="TextBox 5"/>
+          <p:cNvSpPr txBox="1"/>
+          <p:nvPr/>
+        </p:nvSpPr>
+        <p:spPr>
+          <a:xfrm>
+            <a:off x="658368" y="1499616"/>
+            <a:ext cx="3246120" cy="640080"/>
           </a:xfrm>
           <a:prstGeom prst="rect">
             <a:avLst/>
@@ -10790,29 +11184,115 @@
           <a:p>
             <a:pPr algn="l"/>
             <a:r>
-              <a:rPr sz="1600" b="0" i="0" lang="zh-CN" altLang="en-US">
-                <a:solidFill>
-                  <a:srgbClr val="B5B5B5"/>
+              <a:rPr sz="2200" b="0" i="0" lang="zh-CN" altLang="en-US">
+                <a:solidFill>
+                  <a:srgbClr val="141414"/>
+                </a:solidFill>
+                <a:latin typeface="Noto Sans CJK SC Medium"/>
+                <a:ea typeface="Noto Sans CJK SC Medium"/>
+                <a:cs typeface="Noto Sans CJK SC Medium"/>
+              </a:rPr>
+              <a:t>十万个，不赚一百兆</a:t>
+            </a:r>
+          </a:p>
+        </p:txBody>
+      </p:sp>
+      <p:sp>
+        <p:nvSpPr>
+          <p:cNvPr id="7" name="TextBox 6"/>
+          <p:cNvSpPr txBox="1"/>
+          <p:nvPr/>
+        </p:nvSpPr>
+        <p:spPr>
+          <a:xfrm>
+            <a:off x="658368" y="2240280"/>
+            <a:ext cx="3246120" cy="1965960"/>
+          </a:xfrm>
+          <a:prstGeom prst="rect">
+            <a:avLst/>
+          </a:prstGeom>
+          <a:noFill/>
+        </p:spPr>
+        <p:txBody>
+          <a:bodyPr wrap="square" anchor="t" lIns="0" rIns="0" tIns="0" bIns="0"/>
+          <a:lstStyle/>
+          <a:p>
+            <a:pPr algn="l">
+              <a:lnSpc>
+                <a:spcPct val="135000"/>
+              </a:lnSpc>
+            </a:pPr>
+            <a:r>
+              <a:rPr sz="1500" b="0" i="0" lang="zh-CN" altLang="en-US">
+                <a:solidFill>
+                  <a:srgbClr val="2C2C2C"/>
                 </a:solidFill>
                 <a:latin typeface="Noto Sans CJK SC"/>
                 <a:ea typeface="Noto Sans CJK SC"/>
                 <a:cs typeface="Noto Sans CJK SC"/>
               </a:rPr>
-              <a:t>三十五个点有了出处</a:t>
-            </a:r>
-          </a:p>
-        </p:txBody>
-      </p:sp>
-      <p:sp>
-        <p:nvSpPr>
-          <p:cNvPr id="5" name="TextBox 4"/>
-          <p:cNvSpPr txBox="1"/>
-          <p:nvPr/>
-        </p:nvSpPr>
-        <p:spPr>
-          <a:xfrm>
-            <a:off x="777240" y="1371600"/>
-            <a:ext cx="4572000" cy="457200"/>
+              <a:t>鸡蛋、油、充电接进来。
+一百兆由大约五百个
+主力品目赚。
+阿扎做的是热狗那一件事：
+让人每天打开这个平台。</a:t>
+            </a:r>
+          </a:p>
+        </p:txBody>
+      </p:sp>
+      <p:sp>
+        <p:nvSpPr>
+          <p:cNvPr id="8" name="Rectangle 7"/>
+          <p:cNvSpPr/>
+          <p:nvPr/>
+        </p:nvSpPr>
+        <p:spPr>
+          <a:xfrm>
+            <a:off x="4160520" y="1207008"/>
+            <a:ext cx="10972" cy="3063240"/>
+          </a:xfrm>
+          <a:prstGeom prst="rect">
+            <a:avLst/>
+          </a:prstGeom>
+          <a:solidFill>
+            <a:srgbClr val="E2E2E2"/>
+          </a:solidFill>
+          <a:ln>
+            <a:noFill/>
+          </a:ln>
+        </p:spPr>
+        <p:style>
+          <a:lnRef idx="1">
+            <a:schemeClr val="accent1"/>
+          </a:lnRef>
+          <a:fillRef idx="3">
+            <a:schemeClr val="accent1"/>
+          </a:fillRef>
+          <a:effectRef idx="2">
+            <a:schemeClr val="accent1"/>
+          </a:effectRef>
+          <a:fontRef idx="minor">
+            <a:schemeClr val="lt1"/>
+          </a:fontRef>
+        </p:style>
+        <p:txBody>
+          <a:bodyPr rtlCol="0" anchor="ctr"/>
+          <a:lstStyle/>
+          <a:p>
+            <a:pPr algn="ctr"/>
+          </a:p>
+        </p:txBody>
+      </p:sp>
+      <p:sp>
+        <p:nvSpPr>
+          <p:cNvPr id="9" name="TextBox 8"/>
+          <p:cNvSpPr txBox="1"/>
+          <p:nvPr/>
+        </p:nvSpPr>
+        <p:spPr>
+          <a:xfrm>
+            <a:off x="4361688" y="1207008"/>
+            <a:ext cx="3200400" cy="237744"/>
           </a:xfrm>
           <a:prstGeom prst="rect">
             <a:avLst/>
@@ -10825,29 +11305,29 @@
           <a:p>
             <a:pPr algn="l"/>
             <a:r>
-              <a:rPr sz="2600" b="0" i="0" lang="zh-CN" altLang="en-US">
-                <a:solidFill>
-                  <a:srgbClr val="FFFFFF"/>
+              <a:rPr sz="1400" b="0" i="0" lang="zh-CN" altLang="en-US">
+                <a:solidFill>
+                  <a:srgbClr val="9E1B1B"/>
                 </a:solidFill>
                 <a:latin typeface="Noto Sans CJK SC Medium"/>
                 <a:ea typeface="Noto Sans CJK SC Medium"/>
                 <a:cs typeface="Noto Sans CJK SC Medium"/>
               </a:rPr>
-              <a:t>消费者被组织</a:t>
-            </a:r>
-          </a:p>
-        </p:txBody>
-      </p:sp>
-      <p:sp>
-        <p:nvSpPr>
-          <p:cNvPr id="6" name="TextBox 5"/>
-          <p:cNvSpPr txBox="1"/>
-          <p:nvPr/>
-        </p:nvSpPr>
-        <p:spPr>
-          <a:xfrm>
-            <a:off x="5623560" y="1444752"/>
-            <a:ext cx="5760720" cy="365760"/>
+              <a:t>02</a:t>
+            </a:r>
+          </a:p>
+        </p:txBody>
+      </p:sp>
+      <p:sp>
+        <p:nvSpPr>
+          <p:cNvPr id="10" name="TextBox 9"/>
+          <p:cNvSpPr txBox="1"/>
+          <p:nvPr/>
+        </p:nvSpPr>
+        <p:spPr>
+          <a:xfrm>
+            <a:off x="4361688" y="1499616"/>
+            <a:ext cx="3246120" cy="640080"/>
           </a:xfrm>
           <a:prstGeom prst="rect">
             <a:avLst/>
@@ -10860,29 +11340,114 @@
           <a:p>
             <a:pPr algn="l"/>
             <a:r>
-              <a:rPr sz="1600" b="0" i="0" lang="zh-CN" altLang="en-US">
-                <a:solidFill>
-                  <a:srgbClr val="B5B5B5"/>
+              <a:rPr sz="2200" b="0" i="0" lang="zh-CN" altLang="en-US">
+                <a:solidFill>
+                  <a:srgbClr val="141414"/>
+                </a:solidFill>
+                <a:latin typeface="Noto Sans CJK SC Medium"/>
+                <a:ea typeface="Noto Sans CJK SC Medium"/>
+                <a:cs typeface="Noto Sans CJK SC Medium"/>
+              </a:rPr>
+              <a:t>鲭鱼回答不了</a:t>
+            </a:r>
+          </a:p>
+        </p:txBody>
+      </p:sp>
+      <p:sp>
+        <p:nvSpPr>
+          <p:cNvPr id="11" name="TextBox 10"/>
+          <p:cNvSpPr txBox="1"/>
+          <p:nvPr/>
+        </p:nvSpPr>
+        <p:spPr>
+          <a:xfrm>
+            <a:off x="4361688" y="2240280"/>
+            <a:ext cx="3246120" cy="1965960"/>
+          </a:xfrm>
+          <a:prstGeom prst="rect">
+            <a:avLst/>
+          </a:prstGeom>
+          <a:noFill/>
+        </p:spPr>
+        <p:txBody>
+          <a:bodyPr wrap="square" anchor="t" lIns="0" rIns="0" tIns="0" bIns="0"/>
+          <a:lstStyle/>
+          <a:p>
+            <a:pPr algn="l">
+              <a:lnSpc>
+                <a:spcPct val="135000"/>
+              </a:lnSpc>
+            </a:pPr>
+            <a:r>
+              <a:rPr sz="1500" b="0" i="0" lang="zh-CN" altLang="en-US">
+                <a:solidFill>
+                  <a:srgbClr val="2C2C2C"/>
                 </a:solidFill>
                 <a:latin typeface="Noto Sans CJK SC"/>
                 <a:ea typeface="Noto Sans CJK SC"/>
                 <a:cs typeface="Noto Sans CJK SC"/>
               </a:rPr>
-              <a:t>广告和店铺被省掉</a:t>
-            </a:r>
-          </a:p>
-        </p:txBody>
-      </p:sp>
-      <p:sp>
-        <p:nvSpPr>
-          <p:cNvPr id="7" name="TextBox 6"/>
-          <p:cNvSpPr txBox="1"/>
-          <p:nvPr/>
-        </p:nvSpPr>
-        <p:spPr>
-          <a:xfrm>
-            <a:off x="777240" y="2084832"/>
-            <a:ext cx="4572000" cy="457200"/>
+              <a:t>成本率到七成五的日常品，
+单靠它到不了一百兆。
+它负责人每天来。
+主力品目负责赚。</a:t>
+            </a:r>
+          </a:p>
+        </p:txBody>
+      </p:sp>
+      <p:sp>
+        <p:nvSpPr>
+          <p:cNvPr id="12" name="Rectangle 11"/>
+          <p:cNvSpPr/>
+          <p:nvPr/>
+        </p:nvSpPr>
+        <p:spPr>
+          <a:xfrm>
+            <a:off x="7863840" y="1207008"/>
+            <a:ext cx="10972" cy="3063240"/>
+          </a:xfrm>
+          <a:prstGeom prst="rect">
+            <a:avLst/>
+          </a:prstGeom>
+          <a:solidFill>
+            <a:srgbClr val="E2E2E2"/>
+          </a:solidFill>
+          <a:ln>
+            <a:noFill/>
+          </a:ln>
+        </p:spPr>
+        <p:style>
+          <a:lnRef idx="1">
+            <a:schemeClr val="accent1"/>
+          </a:lnRef>
+          <a:fillRef idx="3">
+            <a:schemeClr val="accent1"/>
+          </a:fillRef>
+          <a:effectRef idx="2">
+            <a:schemeClr val="accent1"/>
+          </a:effectRef>
+          <a:fontRef idx="minor">
+            <a:schemeClr val="lt1"/>
+          </a:fontRef>
+        </p:style>
+        <p:txBody>
+          <a:bodyPr rtlCol="0" anchor="ctr"/>
+          <a:lstStyle/>
+          <a:p>
+            <a:pPr algn="ctr"/>
+          </a:p>
+        </p:txBody>
+      </p:sp>
+      <p:sp>
+        <p:nvSpPr>
+          <p:cNvPr id="13" name="TextBox 12"/>
+          <p:cNvSpPr txBox="1"/>
+          <p:nvPr/>
+        </p:nvSpPr>
+        <p:spPr>
+          <a:xfrm>
+            <a:off x="8065008" y="1207008"/>
+            <a:ext cx="3200400" cy="237744"/>
           </a:xfrm>
           <a:prstGeom prst="rect">
             <a:avLst/>
@@ -10895,29 +11460,29 @@
           <a:p>
             <a:pPr algn="l"/>
             <a:r>
-              <a:rPr sz="2600" b="0" i="0" lang="zh-CN" altLang="en-US">
-                <a:solidFill>
-                  <a:srgbClr val="FFFFFF"/>
+              <a:rPr sz="1400" b="0" i="0" lang="zh-CN" altLang="en-US">
+                <a:solidFill>
+                  <a:srgbClr val="9E1B1B"/>
                 </a:solidFill>
                 <a:latin typeface="Noto Sans CJK SC Medium"/>
                 <a:ea typeface="Noto Sans CJK SC Medium"/>
                 <a:cs typeface="Noto Sans CJK SC Medium"/>
               </a:rPr>
-              <a:t>选择被拿掉</a:t>
-            </a:r>
-          </a:p>
-        </p:txBody>
-      </p:sp>
-      <p:sp>
-        <p:nvSpPr>
-          <p:cNvPr id="8" name="TextBox 7"/>
-          <p:cNvSpPr txBox="1"/>
-          <p:nvPr/>
-        </p:nvSpPr>
-        <p:spPr>
-          <a:xfrm>
-            <a:off x="5623560" y="2157984"/>
-            <a:ext cx="5760720" cy="365760"/>
+              <a:t>03</a:t>
+            </a:r>
+          </a:p>
+        </p:txBody>
+      </p:sp>
+      <p:sp>
+        <p:nvSpPr>
+          <p:cNvPr id="14" name="TextBox 13"/>
+          <p:cNvSpPr txBox="1"/>
+          <p:nvPr/>
+        </p:nvSpPr>
+        <p:spPr>
+          <a:xfrm>
+            <a:off x="8065008" y="1499616"/>
+            <a:ext cx="3246120" cy="640080"/>
           </a:xfrm>
           <a:prstGeom prst="rect">
             <a:avLst/>
@@ -10930,197 +11495,148 @@
           <a:p>
             <a:pPr algn="l"/>
             <a:r>
-              <a:rPr sz="1600" b="0" i="0" lang="zh-CN" altLang="en-US">
-                <a:solidFill>
-                  <a:srgbClr val="B5B5B5"/>
+              <a:rPr sz="2200" b="0" i="0" lang="zh-CN" altLang="en-US">
+                <a:solidFill>
+                  <a:srgbClr val="141414"/>
+                </a:solidFill>
+                <a:latin typeface="Noto Sans CJK SC Medium"/>
+                <a:ea typeface="Noto Sans CJK SC Medium"/>
+                <a:cs typeface="Noto Sans CJK SC Medium"/>
+              </a:rPr>
+              <a:t>电在规则里累积</a:t>
+            </a:r>
+          </a:p>
+        </p:txBody>
+      </p:sp>
+      <p:sp>
+        <p:nvSpPr>
+          <p:cNvPr id="15" name="TextBox 14"/>
+          <p:cNvSpPr txBox="1"/>
+          <p:nvPr/>
+        </p:nvSpPr>
+        <p:spPr>
+          <a:xfrm>
+            <a:off x="8065008" y="2240280"/>
+            <a:ext cx="3246120" cy="1965960"/>
+          </a:xfrm>
+          <a:prstGeom prst="rect">
+            <a:avLst/>
+          </a:prstGeom>
+          <a:noFill/>
+        </p:spPr>
+        <p:txBody>
+          <a:bodyPr wrap="square" anchor="t" lIns="0" rIns="0" tIns="0" bIns="0"/>
+          <a:lstStyle/>
+          <a:p>
+            <a:pPr algn="l">
+              <a:lnSpc>
+                <a:spcPct val="135000"/>
+              </a:lnSpc>
+            </a:pPr>
+            <a:r>
+              <a:rPr sz="1500" b="0" i="0" lang="zh-CN" altLang="en-US">
+                <a:solidFill>
+                  <a:srgbClr val="2C2C2C"/>
                 </a:solidFill>
                 <a:latin typeface="Noto Sans CJK SC"/>
                 <a:ea typeface="Noto Sans CJK SC"/>
                 <a:cs typeface="Noto Sans CJK SC"/>
               </a:rPr>
-              <a:t>一个品类，只留一个</a:t>
-            </a:r>
-          </a:p>
-        </p:txBody>
-      </p:sp>
-      <p:sp>
-        <p:nvSpPr>
-          <p:cNvPr id="9" name="TextBox 8"/>
-          <p:cNvSpPr txBox="1"/>
-          <p:nvPr/>
-        </p:nvSpPr>
-        <p:spPr>
-          <a:xfrm>
-            <a:off x="777240" y="2798064"/>
-            <a:ext cx="4572000" cy="457200"/>
-          </a:xfrm>
-          <a:prstGeom prst="rect">
-            <a:avLst/>
-          </a:prstGeom>
-          <a:noFill/>
-        </p:spPr>
-        <p:txBody>
-          <a:bodyPr wrap="square" anchor="t" lIns="0" rIns="0" tIns="0" bIns="0"/>
-          <a:lstStyle/>
-          <a:p>
-            <a:pPr algn="l"/>
-            <a:r>
-              <a:rPr sz="2600" b="0" i="0" lang="zh-CN" altLang="en-US">
-                <a:solidFill>
-                  <a:srgbClr val="FFFFFF"/>
+              <a:t>不卖加油券，
+走联名卡积分。
+中国电动车多。
+家用的电也要能累积。
+办法在规则里面。</a:t>
+            </a:r>
+          </a:p>
+        </p:txBody>
+      </p:sp>
+      <p:sp>
+        <p:nvSpPr>
+          <p:cNvPr id="16" name="Rectangle 15"/>
+          <p:cNvSpPr/>
+          <p:nvPr/>
+        </p:nvSpPr>
+        <p:spPr>
+          <a:xfrm>
+            <a:off x="658368" y="4754880"/>
+            <a:ext cx="10881360" cy="10972"/>
+          </a:xfrm>
+          <a:prstGeom prst="rect">
+            <a:avLst/>
+          </a:prstGeom>
+          <a:solidFill>
+            <a:srgbClr val="E2E2E2"/>
+          </a:solidFill>
+          <a:ln>
+            <a:noFill/>
+          </a:ln>
+        </p:spPr>
+        <p:style>
+          <a:lnRef idx="1">
+            <a:schemeClr val="accent1"/>
+          </a:lnRef>
+          <a:fillRef idx="3">
+            <a:schemeClr val="accent1"/>
+          </a:fillRef>
+          <a:effectRef idx="2">
+            <a:schemeClr val="accent1"/>
+          </a:effectRef>
+          <a:fontRef idx="minor">
+            <a:schemeClr val="lt1"/>
+          </a:fontRef>
+        </p:style>
+        <p:txBody>
+          <a:bodyPr rtlCol="0" anchor="ctr"/>
+          <a:lstStyle/>
+          <a:p>
+            <a:pPr algn="ctr"/>
+          </a:p>
+        </p:txBody>
+      </p:sp>
+      <p:sp>
+        <p:nvSpPr>
+          <p:cNvPr id="17" name="TextBox 16"/>
+          <p:cNvSpPr txBox="1"/>
+          <p:nvPr/>
+        </p:nvSpPr>
+        <p:spPr>
+          <a:xfrm>
+            <a:off x="658368" y="4956048"/>
+            <a:ext cx="10789920" cy="1051560"/>
+          </a:xfrm>
+          <a:prstGeom prst="rect">
+            <a:avLst/>
+          </a:prstGeom>
+          <a:noFill/>
+        </p:spPr>
+        <p:txBody>
+          <a:bodyPr wrap="square" anchor="t" lIns="0" rIns="0" tIns="0" bIns="0"/>
+          <a:lstStyle/>
+          <a:p>
+            <a:pPr algn="l">
+              <a:lnSpc>
+                <a:spcPct val="130000"/>
+              </a:lnSpc>
+            </a:pPr>
+            <a:r>
+              <a:rPr sz="2000" b="0" i="0" lang="zh-CN" altLang="en-US">
+                <a:solidFill>
+                  <a:srgbClr val="9E1B1B"/>
                 </a:solidFill>
                 <a:latin typeface="Noto Sans CJK SC Medium"/>
                 <a:ea typeface="Noto Sans CJK SC Medium"/>
                 <a:cs typeface="Noto Sans CJK SC Medium"/>
               </a:rPr>
-              <a:t>人留在结构里</a:t>
-            </a:r>
-          </a:p>
-        </p:txBody>
-      </p:sp>
-      <p:sp>
-        <p:nvSpPr>
-          <p:cNvPr id="10" name="TextBox 9"/>
-          <p:cNvSpPr txBox="1"/>
-          <p:nvPr/>
-        </p:nvSpPr>
-        <p:spPr>
-          <a:xfrm>
-            <a:off x="5623560" y="2871216"/>
-            <a:ext cx="5760720" cy="365760"/>
-          </a:xfrm>
-          <a:prstGeom prst="rect">
-            <a:avLst/>
-          </a:prstGeom>
-          <a:noFill/>
-        </p:spPr>
-        <p:txBody>
-          <a:bodyPr wrap="square" anchor="t" lIns="0" rIns="0" tIns="0" bIns="0"/>
-          <a:lstStyle/>
-          <a:p>
-            <a:pPr algn="l"/>
-            <a:r>
-              <a:rPr sz="1600" b="0" i="0" lang="zh-CN" altLang="en-US">
-                <a:solidFill>
-                  <a:srgbClr val="B5B5B5"/>
-                </a:solidFill>
-                <a:latin typeface="Noto Sans CJK SC"/>
-                <a:ea typeface="Noto Sans CJK SC"/>
-                <a:cs typeface="Noto Sans CJK SC"/>
-              </a:rPr>
-              <a:t>产量才继续把成本压低</a:t>
-            </a:r>
-          </a:p>
-        </p:txBody>
-      </p:sp>
-      <p:sp>
-        <p:nvSpPr>
-          <p:cNvPr id="11" name="TextBox 10"/>
-          <p:cNvSpPr txBox="1"/>
-          <p:nvPr/>
-        </p:nvSpPr>
-        <p:spPr>
-          <a:xfrm>
-            <a:off x="749808" y="3703320"/>
-            <a:ext cx="10058400" cy="777240"/>
-          </a:xfrm>
-          <a:prstGeom prst="rect">
-            <a:avLst/>
-          </a:prstGeom>
-          <a:noFill/>
-        </p:spPr>
-        <p:txBody>
-          <a:bodyPr wrap="square" anchor="t" lIns="0" rIns="0" tIns="0" bIns="0"/>
-          <a:lstStyle/>
-          <a:p>
-            <a:pPr algn="l"/>
-            <a:r>
-              <a:rPr sz="4800" b="0" i="0" lang="zh-CN" altLang="en-US">
-                <a:solidFill>
-                  <a:srgbClr val="9E1B1B"/>
-                </a:solidFill>
-                <a:latin typeface="Noto Sans CJK SC Medium"/>
-                <a:ea typeface="Noto Sans CJK SC Medium"/>
-                <a:cs typeface="Noto Sans CJK SC Medium"/>
-              </a:rPr>
-              <a:t>不能不去</a:t>
-            </a:r>
-          </a:p>
-        </p:txBody>
-      </p:sp>
-      <p:sp>
-        <p:nvSpPr>
-          <p:cNvPr id="12" name="TextBox 11"/>
-          <p:cNvSpPr txBox="1"/>
-          <p:nvPr/>
-        </p:nvSpPr>
-        <p:spPr>
-          <a:xfrm>
-            <a:off x="804672" y="4709160"/>
-            <a:ext cx="10058400" cy="640080"/>
-          </a:xfrm>
-          <a:prstGeom prst="rect">
-            <a:avLst/>
-          </a:prstGeom>
-          <a:noFill/>
-        </p:spPr>
-        <p:txBody>
-          <a:bodyPr wrap="square" anchor="t" lIns="0" rIns="0" tIns="0" bIns="0"/>
-          <a:lstStyle/>
-          <a:p>
-            <a:pPr algn="l"/>
-            <a:r>
-              <a:rPr sz="1800" b="0" i="0" lang="zh-CN" altLang="en-US">
-                <a:solidFill>
-                  <a:srgbClr val="D4D4D4"/>
-                </a:solidFill>
-                <a:latin typeface="Noto Sans CJK SC"/>
-                <a:ea typeface="Noto Sans CJK SC"/>
-                <a:cs typeface="Noto Sans CJK SC"/>
-              </a:rPr>
-              <a:t>中国法人要做的，是把只为旧卖法存在的工序拿掉。</a:t>
-            </a:r>
-          </a:p>
-        </p:txBody>
-      </p:sp>
-      <p:sp>
-        <p:nvSpPr>
-          <p:cNvPr id="13" name="TextBox 12"/>
-          <p:cNvSpPr txBox="1"/>
-          <p:nvPr/>
-        </p:nvSpPr>
-        <p:spPr>
-          <a:xfrm>
-            <a:off x="804672" y="5806440"/>
-            <a:ext cx="8229600" cy="274320"/>
-          </a:xfrm>
-          <a:prstGeom prst="rect">
-            <a:avLst/>
-          </a:prstGeom>
-          <a:noFill/>
-        </p:spPr>
-        <p:txBody>
-          <a:bodyPr wrap="square" anchor="t" lIns="0" rIns="0" tIns="0" bIns="0"/>
-          <a:lstStyle/>
-          <a:p>
-            <a:pPr algn="l"/>
-            <a:r>
-              <a:rPr sz="1400" b="0" i="0" lang="zh-CN" altLang="en-US">
-                <a:solidFill>
-                  <a:srgbClr val="9A9A9A"/>
-                </a:solidFill>
-                <a:latin typeface="Noto Sans CJK SC"/>
-                <a:ea typeface="Noto Sans CJK SC"/>
-                <a:cs typeface="Noto Sans CJK SC"/>
-              </a:rPr>
-              <a:t>蒙想讯息    2026年9月22日</a:t>
-            </a:r>
-          </a:p>
-        </p:txBody>
-      </p:sp>
-      <p:sp>
-        <p:nvSpPr>
-          <p:cNvPr id="14" name="TextBox 13"/>
+              <a:t>每天的开支接进同一个平台。
+人每天来，五百个主力的产量才留得住。</a:t>
+            </a:r>
+          </a:p>
+        </p:txBody>
+      </p:sp>
+      <p:sp>
+        <p:nvSpPr>
+          <p:cNvPr id="18" name="TextBox 17"/>
           <p:cNvSpPr txBox="1"/>
           <p:nvPr/>
         </p:nvSpPr>
@@ -11142,7 +11658,7 @@
             <a:r>
               <a:rPr sz="1100" b="0" i="0" lang="zh-CN" altLang="en-US">
                 <a:solidFill>
-                  <a:srgbClr val="6A6A6A"/>
+                  <a:srgbClr val="C8C8C8"/>
                 </a:solidFill>
                 <a:latin typeface="Noto Sans CJK SC"/>
                 <a:ea typeface="Noto Sans CJK SC"/>
@@ -11626,6 +12142,500 @@
                 <a:cs typeface="Noto Sans CJK SC"/>
               </a:rPr>
               <a:t>02</a:t>
+            </a:r>
+          </a:p>
+        </p:txBody>
+      </p:sp>
+    </p:spTree>
+  </p:cSld>
+  <p:clrMapOvr>
+    <a:masterClrMapping/>
+  </p:clrMapOvr>
+</p:sld>
+</file>
+
+<file path=ppt/slides/slide20.xml><?xml version="1.0" encoding="utf-8"?>
+<p:sld xmlns:a="http://schemas.openxmlformats.org/drawingml/2006/main" xmlns:p="http://schemas.openxmlformats.org/presentationml/2006/main" xmlns:r="http://schemas.openxmlformats.org/officeDocument/2006/relationships">
+  <p:cSld>
+    <p:bg>
+      <p:bgPr>
+        <a:solidFill>
+          <a:srgbClr val="121212"/>
+        </a:solidFill>
+        <a:effectLst/>
+      </p:bgPr>
+    </p:bg>
+    <p:spTree>
+      <p:nvGrpSpPr>
+        <p:cNvPr id="1" name=""/>
+        <p:cNvGrpSpPr/>
+        <p:nvPr/>
+      </p:nvGrpSpPr>
+      <p:grpSpPr/>
+      <p:sp>
+        <p:nvSpPr>
+          <p:cNvPr id="2" name="Rectangle 1"/>
+          <p:cNvSpPr/>
+          <p:nvPr/>
+        </p:nvSpPr>
+        <p:spPr>
+          <a:xfrm>
+            <a:off x="0" y="0"/>
+            <a:ext cx="73152" cy="6858000"/>
+          </a:xfrm>
+          <a:prstGeom prst="rect">
+            <a:avLst/>
+          </a:prstGeom>
+          <a:solidFill>
+            <a:srgbClr val="9E1B1B"/>
+          </a:solidFill>
+          <a:ln>
+            <a:noFill/>
+          </a:ln>
+        </p:spPr>
+        <p:style>
+          <a:lnRef idx="1">
+            <a:schemeClr val="accent1"/>
+          </a:lnRef>
+          <a:fillRef idx="3">
+            <a:schemeClr val="accent1"/>
+          </a:fillRef>
+          <a:effectRef idx="2">
+            <a:schemeClr val="accent1"/>
+          </a:effectRef>
+          <a:fontRef idx="minor">
+            <a:schemeClr val="lt1"/>
+          </a:fontRef>
+        </p:style>
+        <p:txBody>
+          <a:bodyPr rtlCol="0" anchor="ctr"/>
+          <a:lstStyle/>
+          <a:p>
+            <a:pPr algn="ctr"/>
+          </a:p>
+        </p:txBody>
+      </p:sp>
+      <p:sp>
+        <p:nvSpPr>
+          <p:cNvPr id="3" name="TextBox 2"/>
+          <p:cNvSpPr txBox="1"/>
+          <p:nvPr/>
+        </p:nvSpPr>
+        <p:spPr>
+          <a:xfrm>
+            <a:off x="777240" y="658368"/>
+            <a:ext cx="4572000" cy="457200"/>
+          </a:xfrm>
+          <a:prstGeom prst="rect">
+            <a:avLst/>
+          </a:prstGeom>
+          <a:noFill/>
+        </p:spPr>
+        <p:txBody>
+          <a:bodyPr wrap="square" anchor="t" lIns="0" rIns="0" tIns="0" bIns="0"/>
+          <a:lstStyle/>
+          <a:p>
+            <a:pPr algn="l"/>
+            <a:r>
+              <a:rPr sz="2600" b="0" i="0" lang="zh-CN" altLang="en-US">
+                <a:solidFill>
+                  <a:srgbClr val="FFFFFF"/>
+                </a:solidFill>
+                <a:latin typeface="Noto Sans CJK SC Medium"/>
+                <a:ea typeface="Noto Sans CJK SC Medium"/>
+                <a:cs typeface="Noto Sans CJK SC Medium"/>
+              </a:rPr>
+              <a:t>生产被重做</a:t>
+            </a:r>
+          </a:p>
+        </p:txBody>
+      </p:sp>
+      <p:sp>
+        <p:nvSpPr>
+          <p:cNvPr id="4" name="TextBox 3"/>
+          <p:cNvSpPr txBox="1"/>
+          <p:nvPr/>
+        </p:nvSpPr>
+        <p:spPr>
+          <a:xfrm>
+            <a:off x="5623560" y="731519"/>
+            <a:ext cx="5760720" cy="365760"/>
+          </a:xfrm>
+          <a:prstGeom prst="rect">
+            <a:avLst/>
+          </a:prstGeom>
+          <a:noFill/>
+        </p:spPr>
+        <p:txBody>
+          <a:bodyPr wrap="square" anchor="t" lIns="0" rIns="0" tIns="0" bIns="0"/>
+          <a:lstStyle/>
+          <a:p>
+            <a:pPr algn="l"/>
+            <a:r>
+              <a:rPr sz="1600" b="0" i="0" lang="zh-CN" altLang="en-US">
+                <a:solidFill>
+                  <a:srgbClr val="B5B5B5"/>
+                </a:solidFill>
+                <a:latin typeface="Noto Sans CJK SC"/>
+                <a:ea typeface="Noto Sans CJK SC"/>
+                <a:cs typeface="Noto Sans CJK SC"/>
+              </a:rPr>
+              <a:t>三十五个点有了出处</a:t>
+            </a:r>
+          </a:p>
+        </p:txBody>
+      </p:sp>
+      <p:sp>
+        <p:nvSpPr>
+          <p:cNvPr id="5" name="TextBox 4"/>
+          <p:cNvSpPr txBox="1"/>
+          <p:nvPr/>
+        </p:nvSpPr>
+        <p:spPr>
+          <a:xfrm>
+            <a:off x="777240" y="1371600"/>
+            <a:ext cx="4572000" cy="457200"/>
+          </a:xfrm>
+          <a:prstGeom prst="rect">
+            <a:avLst/>
+          </a:prstGeom>
+          <a:noFill/>
+        </p:spPr>
+        <p:txBody>
+          <a:bodyPr wrap="square" anchor="t" lIns="0" rIns="0" tIns="0" bIns="0"/>
+          <a:lstStyle/>
+          <a:p>
+            <a:pPr algn="l"/>
+            <a:r>
+              <a:rPr sz="2600" b="0" i="0" lang="zh-CN" altLang="en-US">
+                <a:solidFill>
+                  <a:srgbClr val="FFFFFF"/>
+                </a:solidFill>
+                <a:latin typeface="Noto Sans CJK SC Medium"/>
+                <a:ea typeface="Noto Sans CJK SC Medium"/>
+                <a:cs typeface="Noto Sans CJK SC Medium"/>
+              </a:rPr>
+              <a:t>消费者被组织</a:t>
+            </a:r>
+          </a:p>
+        </p:txBody>
+      </p:sp>
+      <p:sp>
+        <p:nvSpPr>
+          <p:cNvPr id="6" name="TextBox 5"/>
+          <p:cNvSpPr txBox="1"/>
+          <p:nvPr/>
+        </p:nvSpPr>
+        <p:spPr>
+          <a:xfrm>
+            <a:off x="5623560" y="1444752"/>
+            <a:ext cx="5760720" cy="365760"/>
+          </a:xfrm>
+          <a:prstGeom prst="rect">
+            <a:avLst/>
+          </a:prstGeom>
+          <a:noFill/>
+        </p:spPr>
+        <p:txBody>
+          <a:bodyPr wrap="square" anchor="t" lIns="0" rIns="0" tIns="0" bIns="0"/>
+          <a:lstStyle/>
+          <a:p>
+            <a:pPr algn="l"/>
+            <a:r>
+              <a:rPr sz="1600" b="0" i="0" lang="zh-CN" altLang="en-US">
+                <a:solidFill>
+                  <a:srgbClr val="B5B5B5"/>
+                </a:solidFill>
+                <a:latin typeface="Noto Sans CJK SC"/>
+                <a:ea typeface="Noto Sans CJK SC"/>
+                <a:cs typeface="Noto Sans CJK SC"/>
+              </a:rPr>
+              <a:t>广告和店铺被省掉</a:t>
+            </a:r>
+          </a:p>
+        </p:txBody>
+      </p:sp>
+      <p:sp>
+        <p:nvSpPr>
+          <p:cNvPr id="7" name="TextBox 6"/>
+          <p:cNvSpPr txBox="1"/>
+          <p:nvPr/>
+        </p:nvSpPr>
+        <p:spPr>
+          <a:xfrm>
+            <a:off x="777240" y="2084832"/>
+            <a:ext cx="4572000" cy="457200"/>
+          </a:xfrm>
+          <a:prstGeom prst="rect">
+            <a:avLst/>
+          </a:prstGeom>
+          <a:noFill/>
+        </p:spPr>
+        <p:txBody>
+          <a:bodyPr wrap="square" anchor="t" lIns="0" rIns="0" tIns="0" bIns="0"/>
+          <a:lstStyle/>
+          <a:p>
+            <a:pPr algn="l"/>
+            <a:r>
+              <a:rPr sz="2600" b="0" i="0" lang="zh-CN" altLang="en-US">
+                <a:solidFill>
+                  <a:srgbClr val="FFFFFF"/>
+                </a:solidFill>
+                <a:latin typeface="Noto Sans CJK SC Medium"/>
+                <a:ea typeface="Noto Sans CJK SC Medium"/>
+                <a:cs typeface="Noto Sans CJK SC Medium"/>
+              </a:rPr>
+              <a:t>选择被拿掉</a:t>
+            </a:r>
+          </a:p>
+        </p:txBody>
+      </p:sp>
+      <p:sp>
+        <p:nvSpPr>
+          <p:cNvPr id="8" name="TextBox 7"/>
+          <p:cNvSpPr txBox="1"/>
+          <p:nvPr/>
+        </p:nvSpPr>
+        <p:spPr>
+          <a:xfrm>
+            <a:off x="5623560" y="2157984"/>
+            <a:ext cx="5760720" cy="365760"/>
+          </a:xfrm>
+          <a:prstGeom prst="rect">
+            <a:avLst/>
+          </a:prstGeom>
+          <a:noFill/>
+        </p:spPr>
+        <p:txBody>
+          <a:bodyPr wrap="square" anchor="t" lIns="0" rIns="0" tIns="0" bIns="0"/>
+          <a:lstStyle/>
+          <a:p>
+            <a:pPr algn="l"/>
+            <a:r>
+              <a:rPr sz="1600" b="0" i="0" lang="zh-CN" altLang="en-US">
+                <a:solidFill>
+                  <a:srgbClr val="B5B5B5"/>
+                </a:solidFill>
+                <a:latin typeface="Noto Sans CJK SC"/>
+                <a:ea typeface="Noto Sans CJK SC"/>
+                <a:cs typeface="Noto Sans CJK SC"/>
+              </a:rPr>
+              <a:t>一个品类，只留一个</a:t>
+            </a:r>
+          </a:p>
+        </p:txBody>
+      </p:sp>
+      <p:sp>
+        <p:nvSpPr>
+          <p:cNvPr id="9" name="TextBox 8"/>
+          <p:cNvSpPr txBox="1"/>
+          <p:nvPr/>
+        </p:nvSpPr>
+        <p:spPr>
+          <a:xfrm>
+            <a:off x="777240" y="2798064"/>
+            <a:ext cx="4572000" cy="457200"/>
+          </a:xfrm>
+          <a:prstGeom prst="rect">
+            <a:avLst/>
+          </a:prstGeom>
+          <a:noFill/>
+        </p:spPr>
+        <p:txBody>
+          <a:bodyPr wrap="square" anchor="t" lIns="0" rIns="0" tIns="0" bIns="0"/>
+          <a:lstStyle/>
+          <a:p>
+            <a:pPr algn="l"/>
+            <a:r>
+              <a:rPr sz="2600" b="0" i="0" lang="zh-CN" altLang="en-US">
+                <a:solidFill>
+                  <a:srgbClr val="FFFFFF"/>
+                </a:solidFill>
+                <a:latin typeface="Noto Sans CJK SC Medium"/>
+                <a:ea typeface="Noto Sans CJK SC Medium"/>
+                <a:cs typeface="Noto Sans CJK SC Medium"/>
+              </a:rPr>
+              <a:t>人留在结构里</a:t>
+            </a:r>
+          </a:p>
+        </p:txBody>
+      </p:sp>
+      <p:sp>
+        <p:nvSpPr>
+          <p:cNvPr id="10" name="TextBox 9"/>
+          <p:cNvSpPr txBox="1"/>
+          <p:nvPr/>
+        </p:nvSpPr>
+        <p:spPr>
+          <a:xfrm>
+            <a:off x="5623560" y="2871216"/>
+            <a:ext cx="5760720" cy="365760"/>
+          </a:xfrm>
+          <a:prstGeom prst="rect">
+            <a:avLst/>
+          </a:prstGeom>
+          <a:noFill/>
+        </p:spPr>
+        <p:txBody>
+          <a:bodyPr wrap="square" anchor="t" lIns="0" rIns="0" tIns="0" bIns="0"/>
+          <a:lstStyle/>
+          <a:p>
+            <a:pPr algn="l"/>
+            <a:r>
+              <a:rPr sz="1600" b="0" i="0" lang="zh-CN" altLang="en-US">
+                <a:solidFill>
+                  <a:srgbClr val="B5B5B5"/>
+                </a:solidFill>
+                <a:latin typeface="Noto Sans CJK SC"/>
+                <a:ea typeface="Noto Sans CJK SC"/>
+                <a:cs typeface="Noto Sans CJK SC"/>
+              </a:rPr>
+              <a:t>产量才继续把成本压低</a:t>
+            </a:r>
+          </a:p>
+        </p:txBody>
+      </p:sp>
+      <p:sp>
+        <p:nvSpPr>
+          <p:cNvPr id="11" name="TextBox 10"/>
+          <p:cNvSpPr txBox="1"/>
+          <p:nvPr/>
+        </p:nvSpPr>
+        <p:spPr>
+          <a:xfrm>
+            <a:off x="749808" y="3703320"/>
+            <a:ext cx="10058400" cy="777240"/>
+          </a:xfrm>
+          <a:prstGeom prst="rect">
+            <a:avLst/>
+          </a:prstGeom>
+          <a:noFill/>
+        </p:spPr>
+        <p:txBody>
+          <a:bodyPr wrap="square" anchor="t" lIns="0" rIns="0" tIns="0" bIns="0"/>
+          <a:lstStyle/>
+          <a:p>
+            <a:pPr algn="l"/>
+            <a:r>
+              <a:rPr sz="4800" b="0" i="0" lang="zh-CN" altLang="en-US">
+                <a:solidFill>
+                  <a:srgbClr val="9E1B1B"/>
+                </a:solidFill>
+                <a:latin typeface="Noto Sans CJK SC Medium"/>
+                <a:ea typeface="Noto Sans CJK SC Medium"/>
+                <a:cs typeface="Noto Sans CJK SC Medium"/>
+              </a:rPr>
+              <a:t>不能不去</a:t>
+            </a:r>
+          </a:p>
+        </p:txBody>
+      </p:sp>
+      <p:sp>
+        <p:nvSpPr>
+          <p:cNvPr id="12" name="TextBox 11"/>
+          <p:cNvSpPr txBox="1"/>
+          <p:nvPr/>
+        </p:nvSpPr>
+        <p:spPr>
+          <a:xfrm>
+            <a:off x="804672" y="4617720"/>
+            <a:ext cx="10241280" cy="777240"/>
+          </a:xfrm>
+          <a:prstGeom prst="rect">
+            <a:avLst/>
+          </a:prstGeom>
+          <a:noFill/>
+        </p:spPr>
+        <p:txBody>
+          <a:bodyPr wrap="square" anchor="t" lIns="0" rIns="0" tIns="0" bIns="0"/>
+          <a:lstStyle/>
+          <a:p>
+            <a:pPr algn="l">
+              <a:lnSpc>
+                <a:spcPct val="125000"/>
+              </a:lnSpc>
+            </a:pPr>
+            <a:r>
+              <a:rPr sz="1800" b="0" i="0" lang="zh-CN" altLang="en-US">
+                <a:solidFill>
+                  <a:srgbClr val="D4D4D4"/>
+                </a:solidFill>
+                <a:latin typeface="Noto Sans CJK SC"/>
+                <a:ea typeface="Noto Sans CJK SC"/>
+                <a:cs typeface="Noto Sans CJK SC"/>
+              </a:rPr>
+              <a:t>个人平台是店，艾护理对着这个人说，
+阿扎把每天接进来。</a:t>
+            </a:r>
+          </a:p>
+        </p:txBody>
+      </p:sp>
+      <p:sp>
+        <p:nvSpPr>
+          <p:cNvPr id="13" name="TextBox 12"/>
+          <p:cNvSpPr txBox="1"/>
+          <p:nvPr/>
+        </p:nvSpPr>
+        <p:spPr>
+          <a:xfrm>
+            <a:off x="804672" y="5806440"/>
+            <a:ext cx="8229600" cy="274320"/>
+          </a:xfrm>
+          <a:prstGeom prst="rect">
+            <a:avLst/>
+          </a:prstGeom>
+          <a:noFill/>
+        </p:spPr>
+        <p:txBody>
+          <a:bodyPr wrap="square" anchor="t" lIns="0" rIns="0" tIns="0" bIns="0"/>
+          <a:lstStyle/>
+          <a:p>
+            <a:pPr algn="l"/>
+            <a:r>
+              <a:rPr sz="1400" b="0" i="0" lang="zh-CN" altLang="en-US">
+                <a:solidFill>
+                  <a:srgbClr val="9A9A9A"/>
+                </a:solidFill>
+                <a:latin typeface="Noto Sans CJK SC"/>
+                <a:ea typeface="Noto Sans CJK SC"/>
+                <a:cs typeface="Noto Sans CJK SC"/>
+              </a:rPr>
+              <a:t>蒙想讯息    2026年9月22日</a:t>
+            </a:r>
+          </a:p>
+        </p:txBody>
+      </p:sp>
+      <p:sp>
+        <p:nvSpPr>
+          <p:cNvPr id="14" name="TextBox 13"/>
+          <p:cNvSpPr txBox="1"/>
+          <p:nvPr/>
+        </p:nvSpPr>
+        <p:spPr>
+          <a:xfrm>
+            <a:off x="10561320" y="6492240"/>
+            <a:ext cx="1051560" cy="201168"/>
+          </a:xfrm>
+          <a:prstGeom prst="rect">
+            <a:avLst/>
+          </a:prstGeom>
+          <a:noFill/>
+        </p:spPr>
+        <p:txBody>
+          <a:bodyPr wrap="square" anchor="t" lIns="0" rIns="0" tIns="0" bIns="0"/>
+          <a:lstStyle/>
+          <a:p>
+            <a:pPr algn="r"/>
+            <a:r>
+              <a:rPr sz="1100" b="0" i="0" lang="zh-CN" altLang="en-US">
+                <a:solidFill>
+                  <a:srgbClr val="6A6A6A"/>
+                </a:solidFill>
+                <a:latin typeface="Noto Sans CJK SC"/>
+                <a:ea typeface="Noto Sans CJK SC"/>
+                <a:cs typeface="Noto Sans CJK SC"/>
+              </a:rPr>
+              <a:t>20</a:t>
             </a:r>
           </a:p>
         </p:txBody>

--- a/艾多美何以成为100兆韩元企业.pptx
+++ b/艾多美何以成为100兆韩元企业.pptx
@@ -25,6 +25,9 @@
     <p:sldId id="273" r:id="rId25"/>
     <p:sldId id="274" r:id="rId26"/>
     <p:sldId id="275" r:id="rId27"/>
+    <p:sldId id="276" r:id="rId28"/>
+    <p:sldId id="277" r:id="rId29"/>
+    <p:sldId id="278" r:id="rId30"/>
   </p:sldIdLst>
   <p:sldSz cx="12192000" cy="6858000" type="screen4x3"/>
   <p:notesSz cx="6858000" cy="9144000"/>
@@ -521,7 +524,7 @@
           <a:lstStyle/>
           <a:p>
             <a:r>
-              <a:t>全稿 20 页。开场用这一句定标准：下面要证明的是结构，不是信念。</a:t>
+              <a:t>全稿 23 页。开场用这一句定标准：下面要证明的是结构，不是信念。</a:t>
             </a:r>
           </a:p>
         </p:txBody>
@@ -591,7 +594,7 @@
           <a:lstStyle/>
           <a:p>
             <a:r>
-              <a:t>非洲、孟加拉、秘鲁、巴拿马，都是队伍先走。店不是起点。</a:t>
+              <a:t>7月28日工作坊：面对按规格生产的竞争者，回到重新制定标准。三条是一能一品、品质加倍或价格减半、从超大规模重构成本。9月13日把品质定为世界第一、价格竞争力定为压倒性第一，一能一品是一个产品、一个全球冠军。</a:t>
             </a:r>
           </a:p>
         </p:txBody>
@@ -661,7 +664,7 @@
           <a:lstStyle/>
           <a:p>
             <a:r>
-              <a:t>开放市场用长尾。艾多美把量集中到一个做得好的合作方。愿景先被看见，大量生产的循环才进得去。</a:t>
+              <a:t>7月28日：批评线性接力，要求从一体化企划一次贯通到终点。中国法人先出货、再补内容、再办培训，链在企划上就断了。</a:t>
             </a:r>
           </a:p>
         </p:txBody>
@@ -731,7 +734,7 @@
           <a:lstStyle/>
           <a:p>
             <a:r>
-              <a:t>艾护理负责关系，阿扎负责每天来，个人平台负责把事业做成方法。加油走联名卡积分，不卖加油券。</a:t>
+              <a:t>非洲、孟加拉、秘鲁、巴拿马，都是队伍先走。店不是起点。</a:t>
             </a:r>
           </a:p>
         </p:txBody>
@@ -801,7 +804,7 @@
           <a:lstStyle/>
           <a:p>
             <a:r>
-              <a:t>可以分开讲。不能分开成立。四句同时转，才是一百兆。</a:t>
+              <a:t>开放市场用长尾。艾多美把量集中到一个做得好的合作方。愿景先被看见，大量生产的循环才进得去。</a:t>
             </a:r>
           </a:p>
         </p:txBody>
@@ -871,7 +874,7 @@
           <a:lstStyle/>
           <a:p>
             <a:r>
-              <a:t>降运费是采购都会做的事。一贯工程删的是只为旧卖法存在的工序，或把下一道工序搬到原料那面墙外。</a:t>
+              <a:t>艾护理负责关系，阿扎负责每天来，个人平台负责把事业做成方法。加油走联名卡积分，不卖加油券。</a:t>
             </a:r>
           </a:p>
         </p:txBody>
@@ -941,7 +944,7 @@
           <a:lstStyle/>
           <a:p>
             <a:r>
-              <a:t>四件都落在工序上：模具、配方、罐容、鲜品。加款、谈运费、再加一个口味，都不在这四件里。</a:t>
+              <a:t>可以分开讲。不能分开成立。四句同时转，才是一百兆。</a:t>
             </a:r>
           </a:p>
         </p:txBody>
@@ -1011,7 +1014,7 @@
           <a:lstStyle/>
           <a:p>
             <a:r>
-              <a:t>合作方先要看见能排产的量、设备由谁出、原料从育苗锁到哪一年。询价单给不出这些。</a:t>
+              <a:t>降运费是采购都会做的事。一贯工程删的是只为旧卖法存在的工序，或把下一道工序搬到原料那面墙外。</a:t>
             </a:r>
           </a:p>
         </p:txBody>
@@ -1081,7 +1084,7 @@
           <a:lstStyle/>
           <a:p>
             <a:r>
-              <a:t>个人平台先武装事业者：阶段、中文骨架、顾客进门就知道为什么买。酒店课和培训部是旧成本。</a:t>
+              <a:t>四件都落在工序上：模具、配方、罐容、鲜品。加款、谈运费、再加一个口味，都不在这四件里。</a:t>
             </a:r>
           </a:p>
         </p:txBody>
@@ -1151,7 +1154,7 @@
           <a:lstStyle/>
           <a:p>
             <a:r>
-              <a:t>艾护理的输入是每餐、体型、步数、用药。输出是对这个人的一句：为什么是这一个。血和尿可以后补，记录不能等医院。</a:t>
+              <a:t>合作方先要看见能排产的量、设备由谁出、原料从育苗锁到哪一年。询价单给不出这些。</a:t>
             </a:r>
           </a:p>
         </p:txBody>
@@ -1221,7 +1224,7 @@
           <a:lstStyle/>
           <a:p>
             <a:r>
-              <a:t>阿扎是市集的地面，不是行政窗口。鲭鱼这类高成本率的日常品负责人来。一百兆仍由大约五百个主力品目赚。电走规则内的积分，不卖加油券。</a:t>
+              <a:t>个人平台先武装事业者：阶段、中文骨架、顾客进门就知道为什么买。酒店课和培训部是旧成本。</a:t>
             </a:r>
           </a:p>
         </p:txBody>
@@ -1317,6 +1320,216 @@
 </file>
 
 <file path=ppt/notesSlides/notesSlide20.xml><?xml version="1.0" encoding="utf-8"?>
+<p:notes xmlns:a="http://schemas.openxmlformats.org/drawingml/2006/main" xmlns:p="http://schemas.openxmlformats.org/presentationml/2006/main" xmlns:r="http://schemas.openxmlformats.org/officeDocument/2006/relationships">
+  <p:cSld>
+    <p:spTree>
+      <p:nvGrpSpPr>
+        <p:cNvPr id="1" name=""/>
+        <p:cNvGrpSpPr/>
+        <p:nvPr/>
+      </p:nvGrpSpPr>
+      <p:grpSpPr>
+        <a:xfrm>
+          <a:off x="0" y="0"/>
+          <a:ext cx="0" cy="0"/>
+          <a:chOff x="0" y="0"/>
+          <a:chExt cx="0" cy="0"/>
+        </a:xfrm>
+      </p:grpSpPr>
+      <p:sp>
+        <p:nvSpPr>
+          <p:cNvPr id="2" name="Slide Image Placeholder 1"/>
+          <p:cNvSpPr>
+            <a:spLocks noGrp="1"/>
+          </p:cNvSpPr>
+          <p:nvPr>
+            <p:ph type="sldImg" idx="2"/>
+          </p:nvPr>
+        </p:nvSpPr>
+        <p:spPr/>
+      </p:sp>
+      <p:sp>
+        <p:nvSpPr>
+          <p:cNvPr id="3" name="Notes Placeholder 2"/>
+          <p:cNvSpPr>
+            <a:spLocks noGrp="1"/>
+          </p:cNvSpPr>
+          <p:nvPr>
+            <p:ph type="body" idx="3" sz="quarter"/>
+          </p:nvPr>
+        </p:nvSpPr>
+        <p:spPr/>
+        <p:txBody>
+          <a:bodyPr/>
+          <a:lstStyle/>
+          <a:p>
+            <a:r>
+              <a:t>艾护理的输入是每餐、体型、步数、用药。输出是对这个人的一句：为什么是这一个。血和尿可以后补，记录不能等医院。</a:t>
+            </a:r>
+          </a:p>
+        </p:txBody>
+      </p:sp>
+      <p:sp>
+        <p:nvSpPr>
+          <p:cNvPr id="4" name="Slide Number Placeholder 3"/>
+          <p:cNvSpPr>
+            <a:spLocks noGrp="1"/>
+          </p:cNvSpPr>
+          <p:nvPr>
+            <p:ph type="sldNum" idx="5" sz="quarter"/>
+          </p:nvPr>
+        </p:nvSpPr>
+        <p:spPr/>
+      </p:sp>
+    </p:spTree>
+  </p:cSld>
+  <p:clrMapOvr>
+    <a:masterClrMapping/>
+  </p:clrMapOvr>
+</p:notes>
+</file>
+
+<file path=ppt/notesSlides/notesSlide21.xml><?xml version="1.0" encoding="utf-8"?>
+<p:notes xmlns:a="http://schemas.openxmlformats.org/drawingml/2006/main" xmlns:p="http://schemas.openxmlformats.org/presentationml/2006/main" xmlns:r="http://schemas.openxmlformats.org/officeDocument/2006/relationships">
+  <p:cSld>
+    <p:spTree>
+      <p:nvGrpSpPr>
+        <p:cNvPr id="1" name=""/>
+        <p:cNvGrpSpPr/>
+        <p:nvPr/>
+      </p:nvGrpSpPr>
+      <p:grpSpPr>
+        <a:xfrm>
+          <a:off x="0" y="0"/>
+          <a:ext cx="0" cy="0"/>
+          <a:chOff x="0" y="0"/>
+          <a:chExt cx="0" cy="0"/>
+        </a:xfrm>
+      </p:grpSpPr>
+      <p:sp>
+        <p:nvSpPr>
+          <p:cNvPr id="2" name="Slide Image Placeholder 1"/>
+          <p:cNvSpPr>
+            <a:spLocks noGrp="1"/>
+          </p:cNvSpPr>
+          <p:nvPr>
+            <p:ph type="sldImg" idx="2"/>
+          </p:nvPr>
+        </p:nvSpPr>
+        <p:spPr/>
+      </p:sp>
+      <p:sp>
+        <p:nvSpPr>
+          <p:cNvPr id="3" name="Notes Placeholder 2"/>
+          <p:cNvSpPr>
+            <a:spLocks noGrp="1"/>
+          </p:cNvSpPr>
+          <p:nvPr>
+            <p:ph type="body" idx="3" sz="quarter"/>
+          </p:nvPr>
+        </p:nvSpPr>
+        <p:spPr/>
+        <p:txBody>
+          <a:bodyPr/>
+          <a:lstStyle/>
+          <a:p>
+            <a:r>
+              <a:t>阿扎是市集的地面，不是行政窗口。鲭鱼这类高成本率的日常品负责人来。一百兆仍由大约五百个主力品目赚。电走规则内的积分，不卖加油券。</a:t>
+            </a:r>
+          </a:p>
+        </p:txBody>
+      </p:sp>
+      <p:sp>
+        <p:nvSpPr>
+          <p:cNvPr id="4" name="Slide Number Placeholder 3"/>
+          <p:cNvSpPr>
+            <a:spLocks noGrp="1"/>
+          </p:cNvSpPr>
+          <p:nvPr>
+            <p:ph type="sldNum" idx="5" sz="quarter"/>
+          </p:nvPr>
+        </p:nvSpPr>
+        <p:spPr/>
+      </p:sp>
+    </p:spTree>
+  </p:cSld>
+  <p:clrMapOvr>
+    <a:masterClrMapping/>
+  </p:clrMapOvr>
+</p:notes>
+</file>
+
+<file path=ppt/notesSlides/notesSlide22.xml><?xml version="1.0" encoding="utf-8"?>
+<p:notes xmlns:a="http://schemas.openxmlformats.org/drawingml/2006/main" xmlns:p="http://schemas.openxmlformats.org/presentationml/2006/main" xmlns:r="http://schemas.openxmlformats.org/officeDocument/2006/relationships">
+  <p:cSld>
+    <p:spTree>
+      <p:nvGrpSpPr>
+        <p:cNvPr id="1" name=""/>
+        <p:cNvGrpSpPr/>
+        <p:nvPr/>
+      </p:nvGrpSpPr>
+      <p:grpSpPr>
+        <a:xfrm>
+          <a:off x="0" y="0"/>
+          <a:ext cx="0" cy="0"/>
+          <a:chOff x="0" y="0"/>
+          <a:chExt cx="0" cy="0"/>
+        </a:xfrm>
+      </p:grpSpPr>
+      <p:sp>
+        <p:nvSpPr>
+          <p:cNvPr id="2" name="Slide Image Placeholder 1"/>
+          <p:cNvSpPr>
+            <a:spLocks noGrp="1"/>
+          </p:cNvSpPr>
+          <p:nvPr>
+            <p:ph type="sldImg" idx="2"/>
+          </p:nvPr>
+        </p:nvSpPr>
+        <p:spPr/>
+      </p:sp>
+      <p:sp>
+        <p:nvSpPr>
+          <p:cNvPr id="3" name="Notes Placeholder 2"/>
+          <p:cNvSpPr>
+            <a:spLocks noGrp="1"/>
+          </p:cNvSpPr>
+          <p:nvPr>
+            <p:ph type="body" idx="3" sz="quarter"/>
+          </p:nvPr>
+        </p:nvSpPr>
+        <p:spPr/>
+        <p:txBody>
+          <a:bodyPr/>
+          <a:lstStyle/>
+          <a:p>
+            <a:r>
+              <a:t>9月13日全球一体化工艺奖的三个发表主题：一百兆的论证，一能一品与一体化的产品策展，三A扩散与平台主人培育。9月15日座谈已知重点是中国市场增长、对合作方成功负责、决策速度与投入。完整稿不在手上，幻灯片只使用这三句，不补写原话。</a:t>
+            </a:r>
+          </a:p>
+        </p:txBody>
+      </p:sp>
+      <p:sp>
+        <p:nvSpPr>
+          <p:cNvPr id="4" name="Slide Number Placeholder 3"/>
+          <p:cNvSpPr>
+            <a:spLocks noGrp="1"/>
+          </p:cNvSpPr>
+          <p:nvPr>
+            <p:ph type="sldNum" idx="5" sz="quarter"/>
+          </p:nvPr>
+        </p:nvSpPr>
+        <p:spPr/>
+      </p:sp>
+    </p:spTree>
+  </p:cSld>
+  <p:clrMapOvr>
+    <a:masterClrMapping/>
+  </p:clrMapOvr>
+</p:notes>
+</file>
+
+<file path=ppt/notesSlides/notesSlide23.xml><?xml version="1.0" encoding="utf-8"?>
 <p:notes xmlns:a="http://schemas.openxmlformats.org/drawingml/2006/main" xmlns:p="http://schemas.openxmlformats.org/presentationml/2006/main" xmlns:r="http://schemas.openxmlformats.org/officeDocument/2006/relationships">
   <p:cSld>
     <p:spTree>
@@ -5202,7 +5415,7 @@
                 <a:ea typeface="Noto Sans CJK SC Medium"/>
                 <a:cs typeface="Noto Sans CJK SC Medium"/>
               </a:rPr>
-              <a:t>没有店，那三十五个点才回得来</a:t>
+              <a:t>回到重定标准的时候</a:t>
             </a:r>
           </a:p>
         </p:txBody>
@@ -5258,8 +5471,8 @@
         </p:nvSpPr>
         <p:spPr>
           <a:xfrm>
-            <a:off x="658368" y="1234440"/>
-            <a:ext cx="4937760" cy="365760"/>
+            <a:off x="658368" y="1207008"/>
+            <a:ext cx="3200400" cy="237744"/>
           </a:xfrm>
           <a:prstGeom prst="rect">
             <a:avLst/>
@@ -5272,15 +5485,15 @@
           <a:p>
             <a:pPr algn="l"/>
             <a:r>
-              <a:rPr sz="2200" b="0" i="0" lang="zh-CN" altLang="en-US">
-                <a:solidFill>
-                  <a:srgbClr val="141414"/>
+              <a:rPr sz="1400" b="0" i="0" lang="zh-CN" altLang="en-US">
+                <a:solidFill>
+                  <a:srgbClr val="9E1B1B"/>
                 </a:solidFill>
                 <a:latin typeface="Noto Sans CJK SC Medium"/>
                 <a:ea typeface="Noto Sans CJK SC Medium"/>
                 <a:cs typeface="Noto Sans CJK SC Medium"/>
               </a:rPr>
-              <a:t>大创</a:t>
+              <a:t>01</a:t>
             </a:r>
           </a:p>
         </p:txBody>
@@ -5293,8 +5506,43 @@
         </p:nvSpPr>
         <p:spPr>
           <a:xfrm>
-            <a:off x="658368" y="1737360"/>
-            <a:ext cx="4937760" cy="1234440"/>
+            <a:off x="658368" y="1499616"/>
+            <a:ext cx="3246120" cy="640080"/>
+          </a:xfrm>
+          <a:prstGeom prst="rect">
+            <a:avLst/>
+          </a:prstGeom>
+          <a:noFill/>
+        </p:spPr>
+        <p:txBody>
+          <a:bodyPr wrap="square" anchor="t" lIns="0" rIns="0" tIns="0" bIns="0"/>
+          <a:lstStyle/>
+          <a:p>
+            <a:pPr algn="l"/>
+            <a:r>
+              <a:rPr sz="2200" b="0" i="0" lang="zh-CN" altLang="en-US">
+                <a:solidFill>
+                  <a:srgbClr val="141414"/>
+                </a:solidFill>
+                <a:latin typeface="Noto Sans CJK SC Medium"/>
+                <a:ea typeface="Noto Sans CJK SC Medium"/>
+                <a:cs typeface="Noto Sans CJK SC Medium"/>
+              </a:rPr>
+              <a:t>一能一品</a:t>
+            </a:r>
+          </a:p>
+        </p:txBody>
+      </p:sp>
+      <p:sp>
+        <p:nvSpPr>
+          <p:cNvPr id="7" name="TextBox 6"/>
+          <p:cNvSpPr txBox="1"/>
+          <p:nvPr/>
+        </p:nvSpPr>
+        <p:spPr>
+          <a:xfrm>
+            <a:off x="658368" y="2240280"/>
+            <a:ext cx="3246120" cy="2011680"/>
           </a:xfrm>
           <a:prstGeom prst="rect">
             <a:avLst/>
@@ -5307,11 +5555,11 @@
           <a:p>
             <a:pPr algn="l">
               <a:lnSpc>
-                <a:spcPct val="145000"/>
+                <a:spcPct val="135000"/>
               </a:lnSpc>
             </a:pPr>
             <a:r>
-              <a:rPr sz="1600" b="0" i="0" lang="zh-CN" altLang="en-US">
+              <a:rPr sz="1500" b="0" i="0" lang="zh-CN" altLang="en-US">
                 <a:solidFill>
                   <a:srgbClr val="2C2C2C"/>
                 </a:solidFill>
@@ -5319,282 +5567,25 @@
                 <a:ea typeface="Noto Sans CJK SC"/>
                 <a:cs typeface="Noto Sans CJK SC"/>
               </a:rPr>
-              <a:t>必须先有店，人再来。
-店的成本，和人找上门的成本，
-都是实的。没有店，就没有消费者。</a:t>
-            </a:r>
-          </a:p>
-        </p:txBody>
-      </p:sp>
-      <p:sp>
-        <p:nvSpPr>
-          <p:cNvPr id="7" name="Rectangle 6"/>
+              <a:t>散开的品类收成一个。
+一个功能，一个产品。
+这一个，要成为品类里的
+全球冠军。
+中国的量用在这一个上。</a:t>
+            </a:r>
+          </a:p>
+        </p:txBody>
+      </p:sp>
+      <p:sp>
+        <p:nvSpPr>
+          <p:cNvPr id="8" name="Rectangle 7"/>
           <p:cNvSpPr/>
           <p:nvPr/>
         </p:nvSpPr>
         <p:spPr>
           <a:xfrm>
-            <a:off x="6126480" y="1170432"/>
-            <a:ext cx="6071616" cy="2148840"/>
-          </a:xfrm>
-          <a:prstGeom prst="rect">
-            <a:avLst/>
-          </a:prstGeom>
-          <a:solidFill>
-            <a:srgbClr val="121212"/>
-          </a:solidFill>
-          <a:ln>
-            <a:noFill/>
-          </a:ln>
-        </p:spPr>
-        <p:style>
-          <a:lnRef idx="1">
-            <a:schemeClr val="accent1"/>
-          </a:lnRef>
-          <a:fillRef idx="3">
-            <a:schemeClr val="accent1"/>
-          </a:fillRef>
-          <a:effectRef idx="2">
-            <a:schemeClr val="accent1"/>
-          </a:effectRef>
-          <a:fontRef idx="minor">
-            <a:schemeClr val="lt1"/>
-          </a:fontRef>
-        </p:style>
-        <p:txBody>
-          <a:bodyPr rtlCol="0" anchor="ctr"/>
-          <a:lstStyle/>
-          <a:p>
-            <a:pPr algn="ctr"/>
-          </a:p>
-        </p:txBody>
-      </p:sp>
-      <p:sp>
-        <p:nvSpPr>
-          <p:cNvPr id="8" name="TextBox 7"/>
-          <p:cNvSpPr txBox="1"/>
-          <p:nvPr/>
-        </p:nvSpPr>
-        <p:spPr>
-          <a:xfrm>
-            <a:off x="6446520" y="1353312"/>
-            <a:ext cx="5212080" cy="365760"/>
-          </a:xfrm>
-          <a:prstGeom prst="rect">
-            <a:avLst/>
-          </a:prstGeom>
-          <a:noFill/>
-        </p:spPr>
-        <p:txBody>
-          <a:bodyPr wrap="square" anchor="t" lIns="0" rIns="0" tIns="0" bIns="0"/>
-          <a:lstStyle/>
-          <a:p>
-            <a:pPr algn="l"/>
-            <a:r>
-              <a:rPr sz="2200" b="0" i="0" lang="zh-CN" altLang="en-US">
-                <a:solidFill>
-                  <a:srgbClr val="FFFFFF"/>
-                </a:solidFill>
-                <a:latin typeface="Noto Sans CJK SC Medium"/>
-                <a:ea typeface="Noto Sans CJK SC Medium"/>
-                <a:cs typeface="Noto Sans CJK SC Medium"/>
-              </a:rPr>
-              <a:t>艾多美</a:t>
-            </a:r>
-          </a:p>
-        </p:txBody>
-      </p:sp>
-      <p:sp>
-        <p:nvSpPr>
-          <p:cNvPr id="9" name="TextBox 8"/>
-          <p:cNvSpPr txBox="1"/>
-          <p:nvPr/>
-        </p:nvSpPr>
-        <p:spPr>
-          <a:xfrm>
-            <a:off x="6446520" y="1828800"/>
-            <a:ext cx="5303520" cy="1188720"/>
-          </a:xfrm>
-          <a:prstGeom prst="rect">
-            <a:avLst/>
-          </a:prstGeom>
-          <a:noFill/>
-        </p:spPr>
-        <p:txBody>
-          <a:bodyPr wrap="square" anchor="t" lIns="0" rIns="0" tIns="0" bIns="0"/>
-          <a:lstStyle/>
-          <a:p>
-            <a:pPr algn="l">
-              <a:lnSpc>
-                <a:spcPct val="140000"/>
-              </a:lnSpc>
-            </a:pPr>
-            <a:r>
-              <a:rPr sz="1600" b="0" i="0" lang="zh-CN" altLang="en-US">
-                <a:solidFill>
-                  <a:srgbClr val="E8E8E8"/>
-                </a:solidFill>
-                <a:latin typeface="Noto Sans CJK SC"/>
-                <a:ea typeface="Noto Sans CJK SC"/>
-                <a:cs typeface="Noto Sans CJK SC"/>
-              </a:rPr>
-              <a:t>没有店。人自己用，也介绍。
-半价的体验代替广告和店铺。
-省下来的，就是那 35%。</a:t>
-            </a:r>
-          </a:p>
-        </p:txBody>
-      </p:sp>
-      <p:sp>
-        <p:nvSpPr>
-          <p:cNvPr id="10" name="TextBox 9"/>
-          <p:cNvSpPr txBox="1"/>
-          <p:nvPr/>
-        </p:nvSpPr>
-        <p:spPr>
-          <a:xfrm>
-            <a:off x="658368" y="3657600"/>
-            <a:ext cx="2606040" cy="411480"/>
-          </a:xfrm>
-          <a:prstGeom prst="rect">
-            <a:avLst/>
-          </a:prstGeom>
-          <a:noFill/>
-        </p:spPr>
-        <p:txBody>
-          <a:bodyPr wrap="square" anchor="t" lIns="0" rIns="0" tIns="0" bIns="0"/>
-          <a:lstStyle/>
-          <a:p>
-            <a:pPr algn="ctr"/>
-            <a:r>
-              <a:rPr sz="1800" b="0" i="0" lang="zh-CN" altLang="en-US">
-                <a:solidFill>
-                  <a:srgbClr val="9E1B1B"/>
-                </a:solidFill>
-                <a:latin typeface="Noto Sans CJK SC Medium"/>
-                <a:ea typeface="Noto Sans CJK SC Medium"/>
-                <a:cs typeface="Noto Sans CJK SC Medium"/>
-              </a:rPr>
-              <a:t>绝对价格</a:t>
-            </a:r>
-          </a:p>
-        </p:txBody>
-      </p:sp>
-      <p:sp>
-        <p:nvSpPr>
-          <p:cNvPr id="11" name="TextBox 10"/>
-          <p:cNvSpPr txBox="1"/>
-          <p:nvPr/>
-        </p:nvSpPr>
-        <p:spPr>
-          <a:xfrm>
-            <a:off x="3401568" y="3657600"/>
-            <a:ext cx="2606040" cy="411480"/>
-          </a:xfrm>
-          <a:prstGeom prst="rect">
-            <a:avLst/>
-          </a:prstGeom>
-          <a:noFill/>
-        </p:spPr>
-        <p:txBody>
-          <a:bodyPr wrap="square" anchor="t" lIns="0" rIns="0" tIns="0" bIns="0"/>
-          <a:lstStyle/>
-          <a:p>
-            <a:pPr algn="ctr"/>
-            <a:r>
-              <a:rPr sz="1800" b="0" i="0" lang="zh-CN" altLang="en-US">
-                <a:solidFill>
-                  <a:srgbClr val="141414"/>
-                </a:solidFill>
-                <a:latin typeface="Noto Sans CJK SC Medium"/>
-                <a:ea typeface="Noto Sans CJK SC Medium"/>
-                <a:cs typeface="Noto Sans CJK SC Medium"/>
-              </a:rPr>
-              <a:t>会员</a:t>
-            </a:r>
-          </a:p>
-        </p:txBody>
-      </p:sp>
-      <p:sp>
-        <p:nvSpPr>
-          <p:cNvPr id="12" name="TextBox 11"/>
-          <p:cNvSpPr txBox="1"/>
-          <p:nvPr/>
-        </p:nvSpPr>
-        <p:spPr>
-          <a:xfrm>
-            <a:off x="6144768" y="3657600"/>
-            <a:ext cx="2606040" cy="411480"/>
-          </a:xfrm>
-          <a:prstGeom prst="rect">
-            <a:avLst/>
-          </a:prstGeom>
-          <a:noFill/>
-        </p:spPr>
-        <p:txBody>
-          <a:bodyPr wrap="square" anchor="t" lIns="0" rIns="0" tIns="0" bIns="0"/>
-          <a:lstStyle/>
-          <a:p>
-            <a:pPr algn="ctr"/>
-            <a:r>
-              <a:rPr sz="1800" b="0" i="0" lang="zh-CN" altLang="en-US">
-                <a:solidFill>
-                  <a:srgbClr val="141414"/>
-                </a:solidFill>
-                <a:latin typeface="Noto Sans CJK SC Medium"/>
-                <a:ea typeface="Noto Sans CJK SC Medium"/>
-                <a:cs typeface="Noto Sans CJK SC Medium"/>
-              </a:rPr>
-              <a:t>产量</a:t>
-            </a:r>
-          </a:p>
-        </p:txBody>
-      </p:sp>
-      <p:sp>
-        <p:nvSpPr>
-          <p:cNvPr id="13" name="TextBox 12"/>
-          <p:cNvSpPr txBox="1"/>
-          <p:nvPr/>
-        </p:nvSpPr>
-        <p:spPr>
-          <a:xfrm>
-            <a:off x="8887968" y="3657600"/>
-            <a:ext cx="2606040" cy="411480"/>
-          </a:xfrm>
-          <a:prstGeom prst="rect">
-            <a:avLst/>
-          </a:prstGeom>
-          <a:noFill/>
-        </p:spPr>
-        <p:txBody>
-          <a:bodyPr wrap="square" anchor="t" lIns="0" rIns="0" tIns="0" bIns="0"/>
-          <a:lstStyle/>
-          <a:p>
-            <a:pPr algn="ctr"/>
-            <a:r>
-              <a:rPr sz="1800" b="0" i="0" lang="zh-CN" altLang="en-US">
-                <a:solidFill>
-                  <a:srgbClr val="141414"/>
-                </a:solidFill>
-                <a:latin typeface="Noto Sans CJK SC Medium"/>
-                <a:ea typeface="Noto Sans CJK SC Medium"/>
-                <a:cs typeface="Noto Sans CJK SC Medium"/>
-              </a:rPr>
-              <a:t>成本再降</a:t>
-            </a:r>
-          </a:p>
-        </p:txBody>
-      </p:sp>
-      <p:sp>
-        <p:nvSpPr>
-          <p:cNvPr id="14" name="Rectangle 13"/>
-          <p:cNvSpPr/>
-          <p:nvPr/>
-        </p:nvSpPr>
-        <p:spPr>
-          <a:xfrm>
-            <a:off x="658368" y="4206240"/>
-            <a:ext cx="10881360" cy="10972"/>
+            <a:off x="4160520" y="1207008"/>
+            <a:ext cx="10972" cy="3063240"/>
           </a:xfrm>
           <a:prstGeom prst="rect">
             <a:avLst/>
@@ -5630,14 +5621,84 @@
       </p:sp>
       <p:sp>
         <p:nvSpPr>
-          <p:cNvPr id="15" name="TextBox 14"/>
-          <p:cNvSpPr txBox="1"/>
-          <p:nvPr/>
-        </p:nvSpPr>
-        <p:spPr>
-          <a:xfrm>
-            <a:off x="658368" y="4434840"/>
-            <a:ext cx="10789920" cy="1463040"/>
+          <p:cNvPr id="9" name="TextBox 8"/>
+          <p:cNvSpPr txBox="1"/>
+          <p:nvPr/>
+        </p:nvSpPr>
+        <p:spPr>
+          <a:xfrm>
+            <a:off x="4361688" y="1207008"/>
+            <a:ext cx="3200400" cy="237744"/>
+          </a:xfrm>
+          <a:prstGeom prst="rect">
+            <a:avLst/>
+          </a:prstGeom>
+          <a:noFill/>
+        </p:spPr>
+        <p:txBody>
+          <a:bodyPr wrap="square" anchor="t" lIns="0" rIns="0" tIns="0" bIns="0"/>
+          <a:lstStyle/>
+          <a:p>
+            <a:pPr algn="l"/>
+            <a:r>
+              <a:rPr sz="1400" b="0" i="0" lang="zh-CN" altLang="en-US">
+                <a:solidFill>
+                  <a:srgbClr val="9E1B1B"/>
+                </a:solidFill>
+                <a:latin typeface="Noto Sans CJK SC Medium"/>
+                <a:ea typeface="Noto Sans CJK SC Medium"/>
+                <a:cs typeface="Noto Sans CJK SC Medium"/>
+              </a:rPr>
+              <a:t>02</a:t>
+            </a:r>
+          </a:p>
+        </p:txBody>
+      </p:sp>
+      <p:sp>
+        <p:nvSpPr>
+          <p:cNvPr id="10" name="TextBox 9"/>
+          <p:cNvSpPr txBox="1"/>
+          <p:nvPr/>
+        </p:nvSpPr>
+        <p:spPr>
+          <a:xfrm>
+            <a:off x="4361688" y="1499616"/>
+            <a:ext cx="3246120" cy="640080"/>
+          </a:xfrm>
+          <a:prstGeom prst="rect">
+            <a:avLst/>
+          </a:prstGeom>
+          <a:noFill/>
+        </p:spPr>
+        <p:txBody>
+          <a:bodyPr wrap="square" anchor="t" lIns="0" rIns="0" tIns="0" bIns="0"/>
+          <a:lstStyle/>
+          <a:p>
+            <a:pPr algn="l"/>
+            <a:r>
+              <a:rPr sz="2200" b="0" i="0" lang="zh-CN" altLang="en-US">
+                <a:solidFill>
+                  <a:srgbClr val="141414"/>
+                </a:solidFill>
+                <a:latin typeface="Noto Sans CJK SC Medium"/>
+                <a:ea typeface="Noto Sans CJK SC Medium"/>
+                <a:cs typeface="Noto Sans CJK SC Medium"/>
+              </a:rPr>
+              <a:t>加倍，或减半</a:t>
+            </a:r>
+          </a:p>
+        </p:txBody>
+      </p:sp>
+      <p:sp>
+        <p:nvSpPr>
+          <p:cNvPr id="11" name="TextBox 10"/>
+          <p:cNvSpPr txBox="1"/>
+          <p:nvPr/>
+        </p:nvSpPr>
+        <p:spPr>
+          <a:xfrm>
+            <a:off x="4361688" y="2240280"/>
+            <a:ext cx="3246120" cy="2011680"/>
           </a:xfrm>
           <a:prstGeom prst="rect">
             <a:avLst/>
@@ -5650,11 +5711,11 @@
           <a:p>
             <a:pPr algn="l">
               <a:lnSpc>
-                <a:spcPct val="145000"/>
+                <a:spcPct val="135000"/>
               </a:lnSpc>
             </a:pPr>
             <a:r>
-              <a:rPr sz="1600" b="0" i="0" lang="zh-CN" altLang="en-US">
+              <a:rPr sz="1500" b="0" i="0" lang="zh-CN" altLang="en-US">
                 <a:solidFill>
                   <a:srgbClr val="2C2C2C"/>
                 </a:solidFill>
@@ -5662,16 +5723,255 @@
                 <a:ea typeface="Noto Sans CJK SC"/>
                 <a:cs typeface="Noto Sans CJK SC"/>
               </a:rPr>
-              <a:t>价格带来会员，会员堆出产量，产量把成本再压低。轮子没有刹车。
-摩洛哥会员十万以上，孟加拉约二十万。收入差这么远，卖的是同一套产品。
-这种东西不是广告推过境的。组织先动，店可以后有。</a:t>
-            </a:r>
-          </a:p>
-        </p:txBody>
-      </p:sp>
-      <p:sp>
-        <p:nvSpPr>
-          <p:cNvPr id="16" name="TextBox 15"/>
+              <a:t>品质加倍，或价格减半。
+两件可以一起发生。
+品质是世界第一。
+价格是压倒性的第一。</a:t>
+            </a:r>
+          </a:p>
+        </p:txBody>
+      </p:sp>
+      <p:sp>
+        <p:nvSpPr>
+          <p:cNvPr id="12" name="Rectangle 11"/>
+          <p:cNvSpPr/>
+          <p:nvPr/>
+        </p:nvSpPr>
+        <p:spPr>
+          <a:xfrm>
+            <a:off x="7863840" y="1207008"/>
+            <a:ext cx="10972" cy="3063240"/>
+          </a:xfrm>
+          <a:prstGeom prst="rect">
+            <a:avLst/>
+          </a:prstGeom>
+          <a:solidFill>
+            <a:srgbClr val="E2E2E2"/>
+          </a:solidFill>
+          <a:ln>
+            <a:noFill/>
+          </a:ln>
+        </p:spPr>
+        <p:style>
+          <a:lnRef idx="1">
+            <a:schemeClr val="accent1"/>
+          </a:lnRef>
+          <a:fillRef idx="3">
+            <a:schemeClr val="accent1"/>
+          </a:fillRef>
+          <a:effectRef idx="2">
+            <a:schemeClr val="accent1"/>
+          </a:effectRef>
+          <a:fontRef idx="minor">
+            <a:schemeClr val="lt1"/>
+          </a:fontRef>
+        </p:style>
+        <p:txBody>
+          <a:bodyPr rtlCol="0" anchor="ctr"/>
+          <a:lstStyle/>
+          <a:p>
+            <a:pPr algn="ctr"/>
+          </a:p>
+        </p:txBody>
+      </p:sp>
+      <p:sp>
+        <p:nvSpPr>
+          <p:cNvPr id="13" name="TextBox 12"/>
+          <p:cNvSpPr txBox="1"/>
+          <p:nvPr/>
+        </p:nvSpPr>
+        <p:spPr>
+          <a:xfrm>
+            <a:off x="8065008" y="1207008"/>
+            <a:ext cx="3200400" cy="237744"/>
+          </a:xfrm>
+          <a:prstGeom prst="rect">
+            <a:avLst/>
+          </a:prstGeom>
+          <a:noFill/>
+        </p:spPr>
+        <p:txBody>
+          <a:bodyPr wrap="square" anchor="t" lIns="0" rIns="0" tIns="0" bIns="0"/>
+          <a:lstStyle/>
+          <a:p>
+            <a:pPr algn="l"/>
+            <a:r>
+              <a:rPr sz="1400" b="0" i="0" lang="zh-CN" altLang="en-US">
+                <a:solidFill>
+                  <a:srgbClr val="9E1B1B"/>
+                </a:solidFill>
+                <a:latin typeface="Noto Sans CJK SC Medium"/>
+                <a:ea typeface="Noto Sans CJK SC Medium"/>
+                <a:cs typeface="Noto Sans CJK SC Medium"/>
+              </a:rPr>
+              <a:t>03</a:t>
+            </a:r>
+          </a:p>
+        </p:txBody>
+      </p:sp>
+      <p:sp>
+        <p:nvSpPr>
+          <p:cNvPr id="14" name="TextBox 13"/>
+          <p:cNvSpPr txBox="1"/>
+          <p:nvPr/>
+        </p:nvSpPr>
+        <p:spPr>
+          <a:xfrm>
+            <a:off x="8065008" y="1499616"/>
+            <a:ext cx="3246120" cy="640080"/>
+          </a:xfrm>
+          <a:prstGeom prst="rect">
+            <a:avLst/>
+          </a:prstGeom>
+          <a:noFill/>
+        </p:spPr>
+        <p:txBody>
+          <a:bodyPr wrap="square" anchor="t" lIns="0" rIns="0" tIns="0" bIns="0"/>
+          <a:lstStyle/>
+          <a:p>
+            <a:pPr algn="l"/>
+            <a:r>
+              <a:rPr sz="2200" b="0" i="0" lang="zh-CN" altLang="en-US">
+                <a:solidFill>
+                  <a:srgbClr val="141414"/>
+                </a:solidFill>
+                <a:latin typeface="Noto Sans CJK SC Medium"/>
+                <a:ea typeface="Noto Sans CJK SC Medium"/>
+                <a:cs typeface="Noto Sans CJK SC Medium"/>
+              </a:rPr>
+              <a:t>成本先按超大算</a:t>
+            </a:r>
+          </a:p>
+        </p:txBody>
+      </p:sp>
+      <p:sp>
+        <p:nvSpPr>
+          <p:cNvPr id="15" name="TextBox 14"/>
+          <p:cNvSpPr txBox="1"/>
+          <p:nvPr/>
+        </p:nvSpPr>
+        <p:spPr>
+          <a:xfrm>
+            <a:off x="8065008" y="2240280"/>
+            <a:ext cx="3246120" cy="2011680"/>
+          </a:xfrm>
+          <a:prstGeom prst="rect">
+            <a:avLst/>
+          </a:prstGeom>
+          <a:noFill/>
+        </p:spPr>
+        <p:txBody>
+          <a:bodyPr wrap="square" anchor="t" lIns="0" rIns="0" tIns="0" bIns="0"/>
+          <a:lstStyle/>
+          <a:p>
+            <a:pPr algn="l">
+              <a:lnSpc>
+                <a:spcPct val="135000"/>
+              </a:lnSpc>
+            </a:pPr>
+            <a:r>
+              <a:rPr sz="1500" b="0" i="0" lang="zh-CN" altLang="en-US">
+                <a:solidFill>
+                  <a:srgbClr val="2C2C2C"/>
+                </a:solidFill>
+                <a:latin typeface="Noto Sans CJK SC"/>
+                <a:ea typeface="Noto Sans CJK SC"/>
+                <a:cs typeface="Noto Sans CJK SC"/>
+              </a:rPr>
+              <a:t>从起点就按超大规模重算。
+一个月十万套是前提，
+不是卖起来再去谈。
+谈运费，谁都会。</a:t>
+            </a:r>
+          </a:p>
+        </p:txBody>
+      </p:sp>
+      <p:sp>
+        <p:nvSpPr>
+          <p:cNvPr id="16" name="Rectangle 15"/>
+          <p:cNvSpPr/>
+          <p:nvPr/>
+        </p:nvSpPr>
+        <p:spPr>
+          <a:xfrm>
+            <a:off x="658368" y="4754880"/>
+            <a:ext cx="10881360" cy="10972"/>
+          </a:xfrm>
+          <a:prstGeom prst="rect">
+            <a:avLst/>
+          </a:prstGeom>
+          <a:solidFill>
+            <a:srgbClr val="E2E2E2"/>
+          </a:solidFill>
+          <a:ln>
+            <a:noFill/>
+          </a:ln>
+        </p:spPr>
+        <p:style>
+          <a:lnRef idx="1">
+            <a:schemeClr val="accent1"/>
+          </a:lnRef>
+          <a:fillRef idx="3">
+            <a:schemeClr val="accent1"/>
+          </a:fillRef>
+          <a:effectRef idx="2">
+            <a:schemeClr val="accent1"/>
+          </a:effectRef>
+          <a:fontRef idx="minor">
+            <a:schemeClr val="lt1"/>
+          </a:fontRef>
+        </p:style>
+        <p:txBody>
+          <a:bodyPr rtlCol="0" anchor="ctr"/>
+          <a:lstStyle/>
+          <a:p>
+            <a:pPr algn="ctr"/>
+          </a:p>
+        </p:txBody>
+      </p:sp>
+      <p:sp>
+        <p:nvSpPr>
+          <p:cNvPr id="17" name="TextBox 16"/>
+          <p:cNvSpPr txBox="1"/>
+          <p:nvPr/>
+        </p:nvSpPr>
+        <p:spPr>
+          <a:xfrm>
+            <a:off x="658368" y="4956048"/>
+            <a:ext cx="10789920" cy="1051560"/>
+          </a:xfrm>
+          <a:prstGeom prst="rect">
+            <a:avLst/>
+          </a:prstGeom>
+          <a:noFill/>
+        </p:spPr>
+        <p:txBody>
+          <a:bodyPr wrap="square" anchor="t" lIns="0" rIns="0" tIns="0" bIns="0"/>
+          <a:lstStyle/>
+          <a:p>
+            <a:pPr algn="l">
+              <a:lnSpc>
+                <a:spcPct val="130000"/>
+              </a:lnSpc>
+            </a:pPr>
+            <a:r>
+              <a:rPr sz="2000" b="0" i="0" lang="zh-CN" altLang="en-US">
+                <a:solidFill>
+                  <a:srgbClr val="9E1B1B"/>
+                </a:solidFill>
+                <a:latin typeface="Noto Sans CJK SC Medium"/>
+                <a:ea typeface="Noto Sans CJK SC Medium"/>
+                <a:cs typeface="Noto Sans CJK SC Medium"/>
+              </a:rPr>
+              <a:t>总目标：十年前的价格，十年后的品质。
+按规格跟着市场走，标准就在对方手里。</a:t>
+            </a:r>
+          </a:p>
+        </p:txBody>
+      </p:sp>
+      <p:sp>
+        <p:nvSpPr>
+          <p:cNvPr id="18" name="TextBox 17"/>
           <p:cNvSpPr txBox="1"/>
           <p:nvPr/>
         </p:nvSpPr>
@@ -5795,7 +6095,7 @@
                 <a:ea typeface="Noto Sans CJK SC Medium"/>
                 <a:cs typeface="Noto Sans CJK SC Medium"/>
               </a:rPr>
-              <a:t>策展不停在货架上</a:t>
+              <a:t>从企划一次通到终点</a:t>
             </a:r>
           </a:p>
         </p:txBody>
@@ -5852,7 +6152,7 @@
         <p:spPr>
           <a:xfrm>
             <a:off x="658368" y="1234440"/>
-            <a:ext cx="2468880" cy="640080"/>
+            <a:ext cx="640080" cy="329184"/>
           </a:xfrm>
           <a:prstGeom prst="rect">
             <a:avLst/>
@@ -5865,15 +6165,15 @@
           <a:p>
             <a:pPr algn="l"/>
             <a:r>
-              <a:rPr sz="2000" b="0" i="0" lang="zh-CN" altLang="en-US">
-                <a:solidFill>
-                  <a:srgbClr val="141414"/>
+              <a:rPr sz="1600" b="0" i="0" lang="zh-CN" altLang="en-US">
+                <a:solidFill>
+                  <a:srgbClr val="9E1B1B"/>
                 </a:solidFill>
                 <a:latin typeface="Noto Sans CJK SC Medium"/>
                 <a:ea typeface="Noto Sans CJK SC Medium"/>
                 <a:cs typeface="Noto Sans CJK SC Medium"/>
               </a:rPr>
-              <a:t>留下什么</a:t>
+              <a:t>01</a:t>
             </a:r>
           </a:p>
         </p:txBody>
@@ -5886,23 +6186,54 @@
         </p:nvSpPr>
         <p:spPr>
           <a:xfrm>
-            <a:off x="3291840" y="1252728"/>
-            <a:ext cx="8138160" cy="777240"/>
-          </a:xfrm>
-          <a:prstGeom prst="rect">
-            <a:avLst/>
-          </a:prstGeom>
-          <a:noFill/>
-        </p:spPr>
-        <p:txBody>
-          <a:bodyPr wrap="square" anchor="t" lIns="0" rIns="0" tIns="0" bIns="0"/>
-          <a:lstStyle/>
-          <a:p>
-            <a:pPr algn="l">
-              <a:lnSpc>
-                <a:spcPct val="135000"/>
-              </a:lnSpc>
-            </a:pPr>
+            <a:off x="1417320" y="1216152"/>
+            <a:ext cx="9966960" cy="365760"/>
+          </a:xfrm>
+          <a:prstGeom prst="rect">
+            <a:avLst/>
+          </a:prstGeom>
+          <a:noFill/>
+        </p:spPr>
+        <p:txBody>
+          <a:bodyPr wrap="square" anchor="t" lIns="0" rIns="0" tIns="0" bIns="0"/>
+          <a:lstStyle/>
+          <a:p>
+            <a:pPr algn="l"/>
+            <a:r>
+              <a:rPr sz="2200" b="0" i="0" lang="zh-CN" altLang="en-US">
+                <a:solidFill>
+                  <a:srgbClr val="141414"/>
+                </a:solidFill>
+                <a:latin typeface="Noto Sans CJK SC Medium"/>
+                <a:ea typeface="Noto Sans CJK SC Medium"/>
+                <a:cs typeface="Noto Sans CJK SC Medium"/>
+              </a:rPr>
+              <a:t>接力做不成一炉</a:t>
+            </a:r>
+          </a:p>
+        </p:txBody>
+      </p:sp>
+      <p:sp>
+        <p:nvSpPr>
+          <p:cNvPr id="7" name="TextBox 6"/>
+          <p:cNvSpPr txBox="1"/>
+          <p:nvPr/>
+        </p:nvSpPr>
+        <p:spPr>
+          <a:xfrm>
+            <a:off x="1417320" y="1655064"/>
+            <a:ext cx="9966960" cy="502920"/>
+          </a:xfrm>
+          <a:prstGeom prst="rect">
+            <a:avLst/>
+          </a:prstGeom>
+          <a:noFill/>
+        </p:spPr>
+        <p:txBody>
+          <a:bodyPr wrap="square" anchor="t" lIns="0" rIns="0" tIns="0" bIns="0"/>
+          <a:lstStyle/>
+          <a:p>
+            <a:pPr algn="l"/>
             <a:r>
               <a:rPr sz="1600" b="0" i="0" lang="zh-CN" altLang="en-US">
                 <a:solidFill>
@@ -5912,21 +6243,231 @@
                 <a:ea typeface="Noto Sans CJK SC"/>
                 <a:cs typeface="Noto Sans CJK SC"/>
               </a:rPr>
-              <a:t>一个品类，一个。品质不拿来换价格。顾客不必在几百个相近的东西里比较。</a:t>
-            </a:r>
-          </a:p>
-        </p:txBody>
-      </p:sp>
-      <p:sp>
-        <p:nvSpPr>
-          <p:cNvPr id="7" name="Rectangle 6"/>
+              <a:t>商品做完才做内容，内容做完才培训。任何一环停下，后面都在等。</a:t>
+            </a:r>
+          </a:p>
+        </p:txBody>
+      </p:sp>
+      <p:sp>
+        <p:nvSpPr>
+          <p:cNvPr id="8" name="TextBox 7"/>
+          <p:cNvSpPr txBox="1"/>
+          <p:nvPr/>
+        </p:nvSpPr>
+        <p:spPr>
+          <a:xfrm>
+            <a:off x="658368" y="2350008"/>
+            <a:ext cx="640080" cy="329184"/>
+          </a:xfrm>
+          <a:prstGeom prst="rect">
+            <a:avLst/>
+          </a:prstGeom>
+          <a:noFill/>
+        </p:spPr>
+        <p:txBody>
+          <a:bodyPr wrap="square" anchor="t" lIns="0" rIns="0" tIns="0" bIns="0"/>
+          <a:lstStyle/>
+          <a:p>
+            <a:pPr algn="l"/>
+            <a:r>
+              <a:rPr sz="1600" b="0" i="0" lang="zh-CN" altLang="en-US">
+                <a:solidFill>
+                  <a:srgbClr val="9E1B1B"/>
+                </a:solidFill>
+                <a:latin typeface="Noto Sans CJK SC Medium"/>
+                <a:ea typeface="Noto Sans CJK SC Medium"/>
+                <a:cs typeface="Noto Sans CJK SC Medium"/>
+              </a:rPr>
+              <a:t>02</a:t>
+            </a:r>
+          </a:p>
+        </p:txBody>
+      </p:sp>
+      <p:sp>
+        <p:nvSpPr>
+          <p:cNvPr id="9" name="TextBox 8"/>
+          <p:cNvSpPr txBox="1"/>
+          <p:nvPr/>
+        </p:nvSpPr>
+        <p:spPr>
+          <a:xfrm>
+            <a:off x="1417320" y="2331720"/>
+            <a:ext cx="9966960" cy="365760"/>
+          </a:xfrm>
+          <a:prstGeom prst="rect">
+            <a:avLst/>
+          </a:prstGeom>
+          <a:noFill/>
+        </p:spPr>
+        <p:txBody>
+          <a:bodyPr wrap="square" anchor="t" lIns="0" rIns="0" tIns="0" bIns="0"/>
+          <a:lstStyle/>
+          <a:p>
+            <a:pPr algn="l"/>
+            <a:r>
+              <a:rPr sz="2200" b="0" i="0" lang="zh-CN" altLang="en-US">
+                <a:solidFill>
+                  <a:srgbClr val="141414"/>
+                </a:solidFill>
+                <a:latin typeface="Noto Sans CJK SC Medium"/>
+                <a:ea typeface="Noto Sans CJK SC Medium"/>
+                <a:cs typeface="Noto Sans CJK SC Medium"/>
+              </a:rPr>
+              <a:t>中间不能熄火</a:t>
+            </a:r>
+          </a:p>
+        </p:txBody>
+      </p:sp>
+      <p:sp>
+        <p:nvSpPr>
+          <p:cNvPr id="10" name="TextBox 9"/>
+          <p:cNvSpPr txBox="1"/>
+          <p:nvPr/>
+        </p:nvSpPr>
+        <p:spPr>
+          <a:xfrm>
+            <a:off x="1417320" y="2770632"/>
+            <a:ext cx="9966960" cy="502920"/>
+          </a:xfrm>
+          <a:prstGeom prst="rect">
+            <a:avLst/>
+          </a:prstGeom>
+          <a:noFill/>
+        </p:spPr>
+        <p:txBody>
+          <a:bodyPr wrap="square" anchor="t" lIns="0" rIns="0" tIns="0" bIns="0"/>
+          <a:lstStyle/>
+          <a:p>
+            <a:pPr algn="l"/>
+            <a:r>
+              <a:rPr sz="1600" b="0" i="0" lang="zh-CN" altLang="en-US">
+                <a:solidFill>
+                  <a:srgbClr val="2C2C2C"/>
+                </a:solidFill>
+                <a:latin typeface="Noto Sans CJK SC"/>
+                <a:ea typeface="Noto Sans CJK SC"/>
+                <a:cs typeface="Noto Sans CJK SC"/>
+              </a:rPr>
+              <a:t>钢铁厂从原料到成品不能中断。干燥、切断、运去别处再运回，都是中间熄火。</a:t>
+            </a:r>
+          </a:p>
+        </p:txBody>
+      </p:sp>
+      <p:sp>
+        <p:nvSpPr>
+          <p:cNvPr id="11" name="TextBox 10"/>
+          <p:cNvSpPr txBox="1"/>
+          <p:nvPr/>
+        </p:nvSpPr>
+        <p:spPr>
+          <a:xfrm>
+            <a:off x="658368" y="3465576"/>
+            <a:ext cx="640080" cy="329184"/>
+          </a:xfrm>
+          <a:prstGeom prst="rect">
+            <a:avLst/>
+          </a:prstGeom>
+          <a:noFill/>
+        </p:spPr>
+        <p:txBody>
+          <a:bodyPr wrap="square" anchor="t" lIns="0" rIns="0" tIns="0" bIns="0"/>
+          <a:lstStyle/>
+          <a:p>
+            <a:pPr algn="l"/>
+            <a:r>
+              <a:rPr sz="1600" b="0" i="0" lang="zh-CN" altLang="en-US">
+                <a:solidFill>
+                  <a:srgbClr val="9E1B1B"/>
+                </a:solidFill>
+                <a:latin typeface="Noto Sans CJK SC Medium"/>
+                <a:ea typeface="Noto Sans CJK SC Medium"/>
+                <a:cs typeface="Noto Sans CJK SC Medium"/>
+              </a:rPr>
+              <a:t>03</a:t>
+            </a:r>
+          </a:p>
+        </p:txBody>
+      </p:sp>
+      <p:sp>
+        <p:nvSpPr>
+          <p:cNvPr id="12" name="TextBox 11"/>
+          <p:cNvSpPr txBox="1"/>
+          <p:nvPr/>
+        </p:nvSpPr>
+        <p:spPr>
+          <a:xfrm>
+            <a:off x="1417320" y="3447288"/>
+            <a:ext cx="9966960" cy="365760"/>
+          </a:xfrm>
+          <a:prstGeom prst="rect">
+            <a:avLst/>
+          </a:prstGeom>
+          <a:noFill/>
+        </p:spPr>
+        <p:txBody>
+          <a:bodyPr wrap="square" anchor="t" lIns="0" rIns="0" tIns="0" bIns="0"/>
+          <a:lstStyle/>
+          <a:p>
+            <a:pPr algn="l"/>
+            <a:r>
+              <a:rPr sz="2200" b="0" i="0" lang="zh-CN" altLang="en-US">
+                <a:solidFill>
+                  <a:srgbClr val="141414"/>
+                </a:solidFill>
+                <a:latin typeface="Noto Sans CJK SC Medium"/>
+                <a:ea typeface="Noto Sans CJK SC Medium"/>
+                <a:cs typeface="Noto Sans CJK SC Medium"/>
+              </a:rPr>
+              <a:t>一次写完</a:t>
+            </a:r>
+          </a:p>
+        </p:txBody>
+      </p:sp>
+      <p:sp>
+        <p:nvSpPr>
+          <p:cNvPr id="13" name="TextBox 12"/>
+          <p:cNvSpPr txBox="1"/>
+          <p:nvPr/>
+        </p:nvSpPr>
+        <p:spPr>
+          <a:xfrm>
+            <a:off x="1417320" y="3886200"/>
+            <a:ext cx="9966960" cy="502920"/>
+          </a:xfrm>
+          <a:prstGeom prst="rect">
+            <a:avLst/>
+          </a:prstGeom>
+          <a:noFill/>
+        </p:spPr>
+        <p:txBody>
+          <a:bodyPr wrap="square" anchor="t" lIns="0" rIns="0" tIns="0" bIns="0"/>
+          <a:lstStyle/>
+          <a:p>
+            <a:pPr algn="l"/>
+            <a:r>
+              <a:rPr sz="1600" b="0" i="0" lang="zh-CN" altLang="en-US">
+                <a:solidFill>
+                  <a:srgbClr val="2C2C2C"/>
+                </a:solidFill>
+                <a:latin typeface="Noto Sans CJK SC"/>
+                <a:ea typeface="Noto Sans CJK SC"/>
+                <a:cs typeface="Noto Sans CJK SC"/>
+              </a:rPr>
+              <a:t>这个产品、这条工序、中文骨架、对这个人的那句话、每天打开的那一件，写在同一次企划里。</a:t>
+            </a:r>
+          </a:p>
+        </p:txBody>
+      </p:sp>
+      <p:sp>
+        <p:nvSpPr>
+          <p:cNvPr id="14" name="Rectangle 13"/>
           <p:cNvSpPr/>
           <p:nvPr/>
         </p:nvSpPr>
         <p:spPr>
           <a:xfrm>
-            <a:off x="658368" y="2121408"/>
-            <a:ext cx="10881360" cy="9144"/>
+            <a:off x="658368" y="4754880"/>
+            <a:ext cx="10881360" cy="10972"/>
           </a:xfrm>
           <a:prstGeom prst="rect">
             <a:avLst/>
@@ -5962,281 +6503,47 @@
       </p:sp>
       <p:sp>
         <p:nvSpPr>
-          <p:cNvPr id="8" name="TextBox 7"/>
-          <p:cNvSpPr txBox="1"/>
-          <p:nvPr/>
-        </p:nvSpPr>
-        <p:spPr>
-          <a:xfrm>
-            <a:off x="658368" y="2286000"/>
-            <a:ext cx="2468880" cy="640080"/>
-          </a:xfrm>
-          <a:prstGeom prst="rect">
-            <a:avLst/>
-          </a:prstGeom>
-          <a:noFill/>
-        </p:spPr>
-        <p:txBody>
-          <a:bodyPr wrap="square" anchor="t" lIns="0" rIns="0" tIns="0" bIns="0"/>
-          <a:lstStyle/>
-          <a:p>
-            <a:pPr algn="l"/>
-            <a:r>
-              <a:rPr sz="2000" b="0" i="0" lang="zh-CN" altLang="en-US">
-                <a:solidFill>
-                  <a:srgbClr val="141414"/>
+          <p:cNvPr id="15" name="TextBox 14"/>
+          <p:cNvSpPr txBox="1"/>
+          <p:nvPr/>
+        </p:nvSpPr>
+        <p:spPr>
+          <a:xfrm>
+            <a:off x="658368" y="4983480"/>
+            <a:ext cx="10789920" cy="1005840"/>
+          </a:xfrm>
+          <a:prstGeom prst="rect">
+            <a:avLst/>
+          </a:prstGeom>
+          <a:noFill/>
+        </p:spPr>
+        <p:txBody>
+          <a:bodyPr wrap="square" anchor="t" lIns="0" rIns="0" tIns="0" bIns="0"/>
+          <a:lstStyle/>
+          <a:p>
+            <a:pPr algn="l">
+              <a:lnSpc>
+                <a:spcPct val="130000"/>
+              </a:lnSpc>
+            </a:pPr>
+            <a:r>
+              <a:rPr sz="2200" b="0" i="0" lang="zh-CN" altLang="en-US">
+                <a:solidFill>
+                  <a:srgbClr val="9E1B1B"/>
                 </a:solidFill>
                 <a:latin typeface="Noto Sans CJK SC Medium"/>
                 <a:ea typeface="Noto Sans CJK SC Medium"/>
                 <a:cs typeface="Noto Sans CJK SC Medium"/>
               </a:rPr>
-              <a:t>如何守住</a:t>
-            </a:r>
-          </a:p>
-        </p:txBody>
-      </p:sp>
-      <p:sp>
-        <p:nvSpPr>
-          <p:cNvPr id="9" name="TextBox 8"/>
-          <p:cNvSpPr txBox="1"/>
-          <p:nvPr/>
-        </p:nvSpPr>
-        <p:spPr>
-          <a:xfrm>
-            <a:off x="3291840" y="2304288"/>
-            <a:ext cx="8138160" cy="777240"/>
-          </a:xfrm>
-          <a:prstGeom prst="rect">
-            <a:avLst/>
-          </a:prstGeom>
-          <a:noFill/>
-        </p:spPr>
-        <p:txBody>
-          <a:bodyPr wrap="square" anchor="t" lIns="0" rIns="0" tIns="0" bIns="0"/>
-          <a:lstStyle/>
-          <a:p>
-            <a:pPr algn="l">
-              <a:lnSpc>
-                <a:spcPct val="135000"/>
-              </a:lnSpc>
-            </a:pPr>
-            <a:r>
-              <a:rPr sz="1600" b="0" i="0" lang="zh-CN" altLang="en-US">
-                <a:solidFill>
-                  <a:srgbClr val="2C2C2C"/>
-                </a:solidFill>
-                <a:latin typeface="Noto Sans CJK SC"/>
-                <a:ea typeface="Noto Sans CJK SC"/>
-                <a:cs typeface="Noto Sans CJK SC"/>
-              </a:rPr>
-              <a:t>从原物管到流通。工厂不必座座自有。原料、设备基准和数据要在自己手里。循环的第一步，是对方看得见的愿景，不是先把货堆出来。</a:t>
-            </a:r>
-          </a:p>
-        </p:txBody>
-      </p:sp>
-      <p:sp>
-        <p:nvSpPr>
-          <p:cNvPr id="10" name="Rectangle 9"/>
-          <p:cNvSpPr/>
-          <p:nvPr/>
-        </p:nvSpPr>
-        <p:spPr>
-          <a:xfrm>
-            <a:off x="658368" y="3172968"/>
-            <a:ext cx="10881360" cy="9144"/>
-          </a:xfrm>
-          <a:prstGeom prst="rect">
-            <a:avLst/>
-          </a:prstGeom>
-          <a:solidFill>
-            <a:srgbClr val="E2E2E2"/>
-          </a:solidFill>
-          <a:ln>
-            <a:noFill/>
-          </a:ln>
-        </p:spPr>
-        <p:style>
-          <a:lnRef idx="1">
-            <a:schemeClr val="accent1"/>
-          </a:lnRef>
-          <a:fillRef idx="3">
-            <a:schemeClr val="accent1"/>
-          </a:fillRef>
-          <a:effectRef idx="2">
-            <a:schemeClr val="accent1"/>
-          </a:effectRef>
-          <a:fontRef idx="minor">
-            <a:schemeClr val="lt1"/>
-          </a:fontRef>
-        </p:style>
-        <p:txBody>
-          <a:bodyPr rtlCol="0" anchor="ctr"/>
-          <a:lstStyle/>
-          <a:p>
-            <a:pPr algn="ctr"/>
-          </a:p>
-        </p:txBody>
-      </p:sp>
-      <p:sp>
-        <p:nvSpPr>
-          <p:cNvPr id="11" name="TextBox 10"/>
-          <p:cNvSpPr txBox="1"/>
-          <p:nvPr/>
-        </p:nvSpPr>
-        <p:spPr>
-          <a:xfrm>
-            <a:off x="658368" y="3337560"/>
-            <a:ext cx="2468880" cy="640080"/>
-          </a:xfrm>
-          <a:prstGeom prst="rect">
-            <a:avLst/>
-          </a:prstGeom>
-          <a:noFill/>
-        </p:spPr>
-        <p:txBody>
-          <a:bodyPr wrap="square" anchor="t" lIns="0" rIns="0" tIns="0" bIns="0"/>
-          <a:lstStyle/>
-          <a:p>
-            <a:pPr algn="l"/>
-            <a:r>
-              <a:rPr sz="2000" b="0" i="0" lang="zh-CN" altLang="en-US">
-                <a:solidFill>
-                  <a:srgbClr val="141414"/>
-                </a:solidFill>
-                <a:latin typeface="Noto Sans CJK SC Medium"/>
-                <a:ea typeface="Noto Sans CJK SC Medium"/>
-                <a:cs typeface="Noto Sans CJK SC Medium"/>
-              </a:rPr>
-              <a:t>对准谁</a:t>
-            </a:r>
-          </a:p>
-        </p:txBody>
-      </p:sp>
-      <p:sp>
-        <p:nvSpPr>
-          <p:cNvPr id="12" name="TextBox 11"/>
-          <p:cNvSpPr txBox="1"/>
-          <p:nvPr/>
-        </p:nvSpPr>
-        <p:spPr>
-          <a:xfrm>
-            <a:off x="3291840" y="3355848"/>
-            <a:ext cx="8138160" cy="777240"/>
-          </a:xfrm>
-          <a:prstGeom prst="rect">
-            <a:avLst/>
-          </a:prstGeom>
-          <a:noFill/>
-        </p:spPr>
-        <p:txBody>
-          <a:bodyPr wrap="square" anchor="t" lIns="0" rIns="0" tIns="0" bIns="0"/>
-          <a:lstStyle/>
-          <a:p>
-            <a:pPr algn="l">
-              <a:lnSpc>
-                <a:spcPct val="135000"/>
-              </a:lnSpc>
-            </a:pPr>
-            <a:r>
-              <a:rPr sz="1600" b="0" i="0" lang="zh-CN" altLang="en-US">
-                <a:solidFill>
-                  <a:srgbClr val="2C2C2C"/>
-                </a:solidFill>
-                <a:latin typeface="Noto Sans CJK SC"/>
-                <a:ea typeface="Noto Sans CJK SC"/>
-                <a:cs typeface="Noto Sans CJK SC"/>
-              </a:rPr>
-              <a:t>同一种产品，不再对所有人说同一句话。身体不同，建议就不同。</a:t>
-            </a:r>
-          </a:p>
-        </p:txBody>
-      </p:sp>
-      <p:sp>
-        <p:nvSpPr>
-          <p:cNvPr id="13" name="Rectangle 12"/>
-          <p:cNvSpPr/>
-          <p:nvPr/>
-        </p:nvSpPr>
-        <p:spPr>
-          <a:xfrm>
-            <a:off x="658368" y="4224528"/>
-            <a:ext cx="10881360" cy="9144"/>
-          </a:xfrm>
-          <a:prstGeom prst="rect">
-            <a:avLst/>
-          </a:prstGeom>
-          <a:solidFill>
-            <a:srgbClr val="E2E2E2"/>
-          </a:solidFill>
-          <a:ln>
-            <a:noFill/>
-          </a:ln>
-        </p:spPr>
-        <p:style>
-          <a:lnRef idx="1">
-            <a:schemeClr val="accent1"/>
-          </a:lnRef>
-          <a:fillRef idx="3">
-            <a:schemeClr val="accent1"/>
-          </a:fillRef>
-          <a:effectRef idx="2">
-            <a:schemeClr val="accent1"/>
-          </a:effectRef>
-          <a:fontRef idx="minor">
-            <a:schemeClr val="lt1"/>
-          </a:fontRef>
-        </p:style>
-        <p:txBody>
-          <a:bodyPr rtlCol="0" anchor="ctr"/>
-          <a:lstStyle/>
-          <a:p>
-            <a:pPr algn="ctr"/>
-          </a:p>
-        </p:txBody>
-      </p:sp>
-      <p:sp>
-        <p:nvSpPr>
-          <p:cNvPr id="14" name="TextBox 13"/>
-          <p:cNvSpPr txBox="1"/>
-          <p:nvPr/>
-        </p:nvSpPr>
-        <p:spPr>
-          <a:xfrm>
-            <a:off x="658368" y="4709160"/>
-            <a:ext cx="10789920" cy="1097280"/>
-          </a:xfrm>
-          <a:prstGeom prst="rect">
-            <a:avLst/>
-          </a:prstGeom>
-          <a:noFill/>
-        </p:spPr>
-        <p:txBody>
-          <a:bodyPr wrap="square" anchor="t" lIns="0" rIns="0" tIns="0" bIns="0"/>
-          <a:lstStyle/>
-          <a:p>
-            <a:pPr algn="l">
-              <a:lnSpc>
-                <a:spcPct val="140000"/>
-              </a:lnSpc>
-            </a:pPr>
-            <a:r>
-              <a:rPr sz="1800" b="0" i="0" lang="zh-CN" altLang="en-US">
-                <a:solidFill>
-                  <a:srgbClr val="9E1B1B"/>
-                </a:solidFill>
-                <a:latin typeface="Noto Sans CJK SC Medium"/>
-                <a:ea typeface="Noto Sans CJK SC Medium"/>
-                <a:cs typeface="Noto Sans CJK SC Medium"/>
-              </a:rPr>
-              <a:t>所以五百个，不能按五百个算。
-亚马逊一把牙刷就有几百款。我们一把，顶的是被挑剩的那一个。</a:t>
-            </a:r>
-          </a:p>
-        </p:txBody>
-      </p:sp>
-      <p:sp>
-        <p:nvSpPr>
-          <p:cNvPr id="15" name="TextBox 14"/>
+              <a:t>中国法人先出货、再补内容、再办培训，
+链就在企划上断了。</a:t>
+            </a:r>
+          </a:p>
+        </p:txBody>
+      </p:sp>
+      <p:sp>
+        <p:nvSpPr>
+          <p:cNvPr id="16" name="TextBox 15"/>
           <p:cNvSpPr txBox="1"/>
           <p:nvPr/>
         </p:nvSpPr>
@@ -6360,7 +6667,7 @@
                 <a:ea typeface="Noto Sans CJK SC Medium"/>
                 <a:cs typeface="Noto Sans CJK SC Medium"/>
               </a:rPr>
-              <a:t>三个工具，是一个结构</a:t>
+              <a:t>没有店，那三十五个点才回得来</a:t>
             </a:r>
           </a:p>
         </p:txBody>
@@ -6417,7 +6724,7 @@
         <p:spPr>
           <a:xfrm>
             <a:off x="658368" y="1234440"/>
-            <a:ext cx="3246120" cy="256032"/>
+            <a:ext cx="4937760" cy="365760"/>
           </a:xfrm>
           <a:prstGeom prst="rect">
             <a:avLst/>
@@ -6430,15 +6737,15 @@
           <a:p>
             <a:pPr algn="l"/>
             <a:r>
-              <a:rPr sz="1300" b="0" i="0" lang="zh-CN" altLang="en-US">
-                <a:solidFill>
-                  <a:srgbClr val="9E1B1B"/>
+              <a:rPr sz="2200" b="0" i="0" lang="zh-CN" altLang="en-US">
+                <a:solidFill>
+                  <a:srgbClr val="141414"/>
                 </a:solidFill>
                 <a:latin typeface="Noto Sans CJK SC Medium"/>
                 <a:ea typeface="Noto Sans CJK SC Medium"/>
                 <a:cs typeface="Noto Sans CJK SC Medium"/>
               </a:rPr>
-              <a:t>APP</a:t>
+              <a:t>大创</a:t>
             </a:r>
           </a:p>
         </p:txBody>
@@ -6451,43 +6758,8 @@
         </p:nvSpPr>
         <p:spPr>
           <a:xfrm>
-            <a:off x="658368" y="1600200"/>
-            <a:ext cx="3291840" cy="457200"/>
-          </a:xfrm>
-          <a:prstGeom prst="rect">
-            <a:avLst/>
-          </a:prstGeom>
-          <a:noFill/>
-        </p:spPr>
-        <p:txBody>
-          <a:bodyPr wrap="square" anchor="t" lIns="0" rIns="0" tIns="0" bIns="0"/>
-          <a:lstStyle/>
-          <a:p>
-            <a:pPr algn="l"/>
-            <a:r>
-              <a:rPr sz="2400" b="0" i="0" lang="zh-CN" altLang="en-US">
-                <a:solidFill>
-                  <a:srgbClr val="141414"/>
-                </a:solidFill>
-                <a:latin typeface="Noto Sans CJK SC Medium"/>
-                <a:ea typeface="Noto Sans CJK SC Medium"/>
-                <a:cs typeface="Noto Sans CJK SC Medium"/>
-              </a:rPr>
-              <a:t>个人平台</a:t>
-            </a:r>
-          </a:p>
-        </p:txBody>
-      </p:sp>
-      <p:sp>
-        <p:nvSpPr>
-          <p:cNvPr id="7" name="TextBox 6"/>
-          <p:cNvSpPr txBox="1"/>
-          <p:nvPr/>
-        </p:nvSpPr>
-        <p:spPr>
-          <a:xfrm>
-            <a:off x="658368" y="2240280"/>
-            <a:ext cx="3246120" cy="2011680"/>
+            <a:off x="658368" y="1737360"/>
+            <a:ext cx="4937760" cy="1234440"/>
           </a:xfrm>
           <a:prstGeom prst="rect">
             <a:avLst/>
@@ -6504,7 +6776,7 @@
               </a:lnSpc>
             </a:pPr>
             <a:r>
-              <a:rPr sz="1500" b="0" i="0" lang="zh-CN" altLang="en-US">
+              <a:rPr sz="1600" b="0" i="0" lang="zh-CN" altLang="en-US">
                 <a:solidFill>
                   <a:srgbClr val="2C2C2C"/>
                 </a:solidFill>
@@ -6512,21 +6784,282 @@
                 <a:ea typeface="Noto Sans CJK SC"/>
                 <a:cs typeface="Noto Sans CJK SC"/>
               </a:rPr>
-              <a:t>自己的店、自己的健康、自己的教育，收在一处。过去租酒店讲一小时，收成五分钟。平台本身就是人工智能。</a:t>
-            </a:r>
-          </a:p>
-        </p:txBody>
-      </p:sp>
-      <p:sp>
-        <p:nvSpPr>
-          <p:cNvPr id="8" name="Rectangle 7"/>
+              <a:t>必须先有店，人再来。
+店的成本，和人找上门的成本，
+都是实的。没有店，就没有消费者。</a:t>
+            </a:r>
+          </a:p>
+        </p:txBody>
+      </p:sp>
+      <p:sp>
+        <p:nvSpPr>
+          <p:cNvPr id="7" name="Rectangle 6"/>
           <p:cNvSpPr/>
           <p:nvPr/>
         </p:nvSpPr>
         <p:spPr>
           <a:xfrm>
-            <a:off x="4160520" y="1280160"/>
-            <a:ext cx="10972" cy="3063240"/>
+            <a:off x="6126480" y="1170432"/>
+            <a:ext cx="6071616" cy="2148840"/>
+          </a:xfrm>
+          <a:prstGeom prst="rect">
+            <a:avLst/>
+          </a:prstGeom>
+          <a:solidFill>
+            <a:srgbClr val="121212"/>
+          </a:solidFill>
+          <a:ln>
+            <a:noFill/>
+          </a:ln>
+        </p:spPr>
+        <p:style>
+          <a:lnRef idx="1">
+            <a:schemeClr val="accent1"/>
+          </a:lnRef>
+          <a:fillRef idx="3">
+            <a:schemeClr val="accent1"/>
+          </a:fillRef>
+          <a:effectRef idx="2">
+            <a:schemeClr val="accent1"/>
+          </a:effectRef>
+          <a:fontRef idx="minor">
+            <a:schemeClr val="lt1"/>
+          </a:fontRef>
+        </p:style>
+        <p:txBody>
+          <a:bodyPr rtlCol="0" anchor="ctr"/>
+          <a:lstStyle/>
+          <a:p>
+            <a:pPr algn="ctr"/>
+          </a:p>
+        </p:txBody>
+      </p:sp>
+      <p:sp>
+        <p:nvSpPr>
+          <p:cNvPr id="8" name="TextBox 7"/>
+          <p:cNvSpPr txBox="1"/>
+          <p:nvPr/>
+        </p:nvSpPr>
+        <p:spPr>
+          <a:xfrm>
+            <a:off x="6446520" y="1353312"/>
+            <a:ext cx="5212080" cy="365760"/>
+          </a:xfrm>
+          <a:prstGeom prst="rect">
+            <a:avLst/>
+          </a:prstGeom>
+          <a:noFill/>
+        </p:spPr>
+        <p:txBody>
+          <a:bodyPr wrap="square" anchor="t" lIns="0" rIns="0" tIns="0" bIns="0"/>
+          <a:lstStyle/>
+          <a:p>
+            <a:pPr algn="l"/>
+            <a:r>
+              <a:rPr sz="2200" b="0" i="0" lang="zh-CN" altLang="en-US">
+                <a:solidFill>
+                  <a:srgbClr val="FFFFFF"/>
+                </a:solidFill>
+                <a:latin typeface="Noto Sans CJK SC Medium"/>
+                <a:ea typeface="Noto Sans CJK SC Medium"/>
+                <a:cs typeface="Noto Sans CJK SC Medium"/>
+              </a:rPr>
+              <a:t>艾多美</a:t>
+            </a:r>
+          </a:p>
+        </p:txBody>
+      </p:sp>
+      <p:sp>
+        <p:nvSpPr>
+          <p:cNvPr id="9" name="TextBox 8"/>
+          <p:cNvSpPr txBox="1"/>
+          <p:nvPr/>
+        </p:nvSpPr>
+        <p:spPr>
+          <a:xfrm>
+            <a:off x="6446520" y="1828800"/>
+            <a:ext cx="5303520" cy="1188720"/>
+          </a:xfrm>
+          <a:prstGeom prst="rect">
+            <a:avLst/>
+          </a:prstGeom>
+          <a:noFill/>
+        </p:spPr>
+        <p:txBody>
+          <a:bodyPr wrap="square" anchor="t" lIns="0" rIns="0" tIns="0" bIns="0"/>
+          <a:lstStyle/>
+          <a:p>
+            <a:pPr algn="l">
+              <a:lnSpc>
+                <a:spcPct val="140000"/>
+              </a:lnSpc>
+            </a:pPr>
+            <a:r>
+              <a:rPr sz="1600" b="0" i="0" lang="zh-CN" altLang="en-US">
+                <a:solidFill>
+                  <a:srgbClr val="E8E8E8"/>
+                </a:solidFill>
+                <a:latin typeface="Noto Sans CJK SC"/>
+                <a:ea typeface="Noto Sans CJK SC"/>
+                <a:cs typeface="Noto Sans CJK SC"/>
+              </a:rPr>
+              <a:t>没有店。人自己用，也介绍。
+半价的体验代替广告和店铺。
+省下来的，就是那 35%。</a:t>
+            </a:r>
+          </a:p>
+        </p:txBody>
+      </p:sp>
+      <p:sp>
+        <p:nvSpPr>
+          <p:cNvPr id="10" name="TextBox 9"/>
+          <p:cNvSpPr txBox="1"/>
+          <p:nvPr/>
+        </p:nvSpPr>
+        <p:spPr>
+          <a:xfrm>
+            <a:off x="658368" y="3657600"/>
+            <a:ext cx="2606040" cy="411480"/>
+          </a:xfrm>
+          <a:prstGeom prst="rect">
+            <a:avLst/>
+          </a:prstGeom>
+          <a:noFill/>
+        </p:spPr>
+        <p:txBody>
+          <a:bodyPr wrap="square" anchor="t" lIns="0" rIns="0" tIns="0" bIns="0"/>
+          <a:lstStyle/>
+          <a:p>
+            <a:pPr algn="ctr"/>
+            <a:r>
+              <a:rPr sz="1800" b="0" i="0" lang="zh-CN" altLang="en-US">
+                <a:solidFill>
+                  <a:srgbClr val="9E1B1B"/>
+                </a:solidFill>
+                <a:latin typeface="Noto Sans CJK SC Medium"/>
+                <a:ea typeface="Noto Sans CJK SC Medium"/>
+                <a:cs typeface="Noto Sans CJK SC Medium"/>
+              </a:rPr>
+              <a:t>绝对价格</a:t>
+            </a:r>
+          </a:p>
+        </p:txBody>
+      </p:sp>
+      <p:sp>
+        <p:nvSpPr>
+          <p:cNvPr id="11" name="TextBox 10"/>
+          <p:cNvSpPr txBox="1"/>
+          <p:nvPr/>
+        </p:nvSpPr>
+        <p:spPr>
+          <a:xfrm>
+            <a:off x="3401568" y="3657600"/>
+            <a:ext cx="2606040" cy="411480"/>
+          </a:xfrm>
+          <a:prstGeom prst="rect">
+            <a:avLst/>
+          </a:prstGeom>
+          <a:noFill/>
+        </p:spPr>
+        <p:txBody>
+          <a:bodyPr wrap="square" anchor="t" lIns="0" rIns="0" tIns="0" bIns="0"/>
+          <a:lstStyle/>
+          <a:p>
+            <a:pPr algn="ctr"/>
+            <a:r>
+              <a:rPr sz="1800" b="0" i="0" lang="zh-CN" altLang="en-US">
+                <a:solidFill>
+                  <a:srgbClr val="141414"/>
+                </a:solidFill>
+                <a:latin typeface="Noto Sans CJK SC Medium"/>
+                <a:ea typeface="Noto Sans CJK SC Medium"/>
+                <a:cs typeface="Noto Sans CJK SC Medium"/>
+              </a:rPr>
+              <a:t>会员</a:t>
+            </a:r>
+          </a:p>
+        </p:txBody>
+      </p:sp>
+      <p:sp>
+        <p:nvSpPr>
+          <p:cNvPr id="12" name="TextBox 11"/>
+          <p:cNvSpPr txBox="1"/>
+          <p:nvPr/>
+        </p:nvSpPr>
+        <p:spPr>
+          <a:xfrm>
+            <a:off x="6144768" y="3657600"/>
+            <a:ext cx="2606040" cy="411480"/>
+          </a:xfrm>
+          <a:prstGeom prst="rect">
+            <a:avLst/>
+          </a:prstGeom>
+          <a:noFill/>
+        </p:spPr>
+        <p:txBody>
+          <a:bodyPr wrap="square" anchor="t" lIns="0" rIns="0" tIns="0" bIns="0"/>
+          <a:lstStyle/>
+          <a:p>
+            <a:pPr algn="ctr"/>
+            <a:r>
+              <a:rPr sz="1800" b="0" i="0" lang="zh-CN" altLang="en-US">
+                <a:solidFill>
+                  <a:srgbClr val="141414"/>
+                </a:solidFill>
+                <a:latin typeface="Noto Sans CJK SC Medium"/>
+                <a:ea typeface="Noto Sans CJK SC Medium"/>
+                <a:cs typeface="Noto Sans CJK SC Medium"/>
+              </a:rPr>
+              <a:t>产量</a:t>
+            </a:r>
+          </a:p>
+        </p:txBody>
+      </p:sp>
+      <p:sp>
+        <p:nvSpPr>
+          <p:cNvPr id="13" name="TextBox 12"/>
+          <p:cNvSpPr txBox="1"/>
+          <p:nvPr/>
+        </p:nvSpPr>
+        <p:spPr>
+          <a:xfrm>
+            <a:off x="8887968" y="3657600"/>
+            <a:ext cx="2606040" cy="411480"/>
+          </a:xfrm>
+          <a:prstGeom prst="rect">
+            <a:avLst/>
+          </a:prstGeom>
+          <a:noFill/>
+        </p:spPr>
+        <p:txBody>
+          <a:bodyPr wrap="square" anchor="t" lIns="0" rIns="0" tIns="0" bIns="0"/>
+          <a:lstStyle/>
+          <a:p>
+            <a:pPr algn="ctr"/>
+            <a:r>
+              <a:rPr sz="1800" b="0" i="0" lang="zh-CN" altLang="en-US">
+                <a:solidFill>
+                  <a:srgbClr val="141414"/>
+                </a:solidFill>
+                <a:latin typeface="Noto Sans CJK SC Medium"/>
+                <a:ea typeface="Noto Sans CJK SC Medium"/>
+                <a:cs typeface="Noto Sans CJK SC Medium"/>
+              </a:rPr>
+              <a:t>成本再降</a:t>
+            </a:r>
+          </a:p>
+        </p:txBody>
+      </p:sp>
+      <p:sp>
+        <p:nvSpPr>
+          <p:cNvPr id="14" name="Rectangle 13"/>
+          <p:cNvSpPr/>
+          <p:nvPr/>
+        </p:nvSpPr>
+        <p:spPr>
+          <a:xfrm>
+            <a:off x="658368" y="4206240"/>
+            <a:ext cx="10881360" cy="10972"/>
           </a:xfrm>
           <a:prstGeom prst="rect">
             <a:avLst/>
@@ -6562,84 +7095,14 @@
       </p:sp>
       <p:sp>
         <p:nvSpPr>
-          <p:cNvPr id="9" name="TextBox 8"/>
-          <p:cNvSpPr txBox="1"/>
-          <p:nvPr/>
-        </p:nvSpPr>
-        <p:spPr>
-          <a:xfrm>
-            <a:off x="4361688" y="1234440"/>
-            <a:ext cx="3246120" cy="256032"/>
-          </a:xfrm>
-          <a:prstGeom prst="rect">
-            <a:avLst/>
-          </a:prstGeom>
-          <a:noFill/>
-        </p:spPr>
-        <p:txBody>
-          <a:bodyPr wrap="square" anchor="t" lIns="0" rIns="0" tIns="0" bIns="0"/>
-          <a:lstStyle/>
-          <a:p>
-            <a:pPr algn="l"/>
-            <a:r>
-              <a:rPr sz="1300" b="0" i="0" lang="zh-CN" altLang="en-US">
-                <a:solidFill>
-                  <a:srgbClr val="9E1B1B"/>
-                </a:solidFill>
-                <a:latin typeface="Noto Sans CJK SC Medium"/>
-                <a:ea typeface="Noto Sans CJK SC Medium"/>
-                <a:cs typeface="Noto Sans CJK SC Medium"/>
-              </a:rPr>
-              <a:t>A-Care</a:t>
-            </a:r>
-          </a:p>
-        </p:txBody>
-      </p:sp>
-      <p:sp>
-        <p:nvSpPr>
-          <p:cNvPr id="10" name="TextBox 9"/>
-          <p:cNvSpPr txBox="1"/>
-          <p:nvPr/>
-        </p:nvSpPr>
-        <p:spPr>
-          <a:xfrm>
-            <a:off x="4361688" y="1600200"/>
-            <a:ext cx="3291840" cy="457200"/>
-          </a:xfrm>
-          <a:prstGeom prst="rect">
-            <a:avLst/>
-          </a:prstGeom>
-          <a:noFill/>
-        </p:spPr>
-        <p:txBody>
-          <a:bodyPr wrap="square" anchor="t" lIns="0" rIns="0" tIns="0" bIns="0"/>
-          <a:lstStyle/>
-          <a:p>
-            <a:pPr algn="l"/>
-            <a:r>
-              <a:rPr sz="2400" b="0" i="0" lang="zh-CN" altLang="en-US">
-                <a:solidFill>
-                  <a:srgbClr val="141414"/>
-                </a:solidFill>
-                <a:latin typeface="Noto Sans CJK SC Medium"/>
-                <a:ea typeface="Noto Sans CJK SC Medium"/>
-                <a:cs typeface="Noto Sans CJK SC Medium"/>
-              </a:rPr>
-              <a:t>艾护理</a:t>
-            </a:r>
-          </a:p>
-        </p:txBody>
-      </p:sp>
-      <p:sp>
-        <p:nvSpPr>
-          <p:cNvPr id="11" name="TextBox 10"/>
-          <p:cNvSpPr txBox="1"/>
-          <p:nvPr/>
-        </p:nvSpPr>
-        <p:spPr>
-          <a:xfrm>
-            <a:off x="4361688" y="2240280"/>
-            <a:ext cx="3246120" cy="2011680"/>
+          <p:cNvPr id="15" name="TextBox 14"/>
+          <p:cNvSpPr txBox="1"/>
+          <p:nvPr/>
+        </p:nvSpPr>
+        <p:spPr>
+          <a:xfrm>
+            <a:off x="658368" y="4434840"/>
+            <a:ext cx="10789920" cy="1463040"/>
           </a:xfrm>
           <a:prstGeom prst="rect">
             <a:avLst/>
@@ -6656,7 +7119,7 @@
               </a:lnSpc>
             </a:pPr>
             <a:r>
-              <a:rPr sz="1500" b="0" i="0" lang="zh-CN" altLang="en-US">
+              <a:rPr sz="1600" b="0" i="0" lang="zh-CN" altLang="en-US">
                 <a:solidFill>
                   <a:srgbClr val="2C2C2C"/>
                 </a:solidFill>
@@ -6664,249 +7127,16 @@
                 <a:ea typeface="Noto Sans CJK SC"/>
                 <a:cs typeface="Noto Sans CJK SC"/>
               </a:rPr>
-              <a:t>不再说“做好了请用”。血、饮食、活动放进来，一年、五年、十年后的身体可以估。越用越准，人才留下来。</a:t>
-            </a:r>
-          </a:p>
-        </p:txBody>
-      </p:sp>
-      <p:sp>
-        <p:nvSpPr>
-          <p:cNvPr id="12" name="Rectangle 11"/>
-          <p:cNvSpPr/>
-          <p:nvPr/>
-        </p:nvSpPr>
-        <p:spPr>
-          <a:xfrm>
-            <a:off x="7863840" y="1280160"/>
-            <a:ext cx="10972" cy="3063240"/>
-          </a:xfrm>
-          <a:prstGeom prst="rect">
-            <a:avLst/>
-          </a:prstGeom>
-          <a:solidFill>
-            <a:srgbClr val="E2E2E2"/>
-          </a:solidFill>
-          <a:ln>
-            <a:noFill/>
-          </a:ln>
-        </p:spPr>
-        <p:style>
-          <a:lnRef idx="1">
-            <a:schemeClr val="accent1"/>
-          </a:lnRef>
-          <a:fillRef idx="3">
-            <a:schemeClr val="accent1"/>
-          </a:fillRef>
-          <a:effectRef idx="2">
-            <a:schemeClr val="accent1"/>
-          </a:effectRef>
-          <a:fontRef idx="minor">
-            <a:schemeClr val="lt1"/>
-          </a:fontRef>
-        </p:style>
-        <p:txBody>
-          <a:bodyPr rtlCol="0" anchor="ctr"/>
-          <a:lstStyle/>
-          <a:p>
-            <a:pPr algn="ctr"/>
-          </a:p>
-        </p:txBody>
-      </p:sp>
-      <p:sp>
-        <p:nvSpPr>
-          <p:cNvPr id="13" name="TextBox 12"/>
-          <p:cNvSpPr txBox="1"/>
-          <p:nvPr/>
-        </p:nvSpPr>
-        <p:spPr>
-          <a:xfrm>
-            <a:off x="8065008" y="1234440"/>
-            <a:ext cx="3246120" cy="256032"/>
-          </a:xfrm>
-          <a:prstGeom prst="rect">
-            <a:avLst/>
-          </a:prstGeom>
-          <a:noFill/>
-        </p:spPr>
-        <p:txBody>
-          <a:bodyPr wrap="square" anchor="t" lIns="0" rIns="0" tIns="0" bIns="0"/>
-          <a:lstStyle/>
-          <a:p>
-            <a:pPr algn="l"/>
-            <a:r>
-              <a:rPr sz="1300" b="0" i="0" lang="zh-CN" altLang="en-US">
-                <a:solidFill>
-                  <a:srgbClr val="9E1B1B"/>
-                </a:solidFill>
-                <a:latin typeface="Noto Sans CJK SC Medium"/>
-                <a:ea typeface="Noto Sans CJK SC Medium"/>
-                <a:cs typeface="Noto Sans CJK SC Medium"/>
-              </a:rPr>
-              <a:t>AZA</a:t>
-            </a:r>
-          </a:p>
-        </p:txBody>
-      </p:sp>
-      <p:sp>
-        <p:nvSpPr>
-          <p:cNvPr id="14" name="TextBox 13"/>
-          <p:cNvSpPr txBox="1"/>
-          <p:nvPr/>
-        </p:nvSpPr>
-        <p:spPr>
-          <a:xfrm>
-            <a:off x="8065008" y="1600200"/>
-            <a:ext cx="3291840" cy="457200"/>
-          </a:xfrm>
-          <a:prstGeom prst="rect">
-            <a:avLst/>
-          </a:prstGeom>
-          <a:noFill/>
-        </p:spPr>
-        <p:txBody>
-          <a:bodyPr wrap="square" anchor="t" lIns="0" rIns="0" tIns="0" bIns="0"/>
-          <a:lstStyle/>
-          <a:p>
-            <a:pPr algn="l"/>
-            <a:r>
-              <a:rPr sz="2400" b="0" i="0" lang="zh-CN" altLang="en-US">
-                <a:solidFill>
-                  <a:srgbClr val="141414"/>
-                </a:solidFill>
-                <a:latin typeface="Noto Sans CJK SC Medium"/>
-                <a:ea typeface="Noto Sans CJK SC Medium"/>
-                <a:cs typeface="Noto Sans CJK SC Medium"/>
-              </a:rPr>
-              <a:t>阿扎</a:t>
-            </a:r>
-          </a:p>
-        </p:txBody>
-      </p:sp>
-      <p:sp>
-        <p:nvSpPr>
-          <p:cNvPr id="15" name="TextBox 14"/>
-          <p:cNvSpPr txBox="1"/>
-          <p:nvPr/>
-        </p:nvSpPr>
-        <p:spPr>
-          <a:xfrm>
-            <a:off x="8065008" y="2240280"/>
-            <a:ext cx="3246120" cy="2011680"/>
-          </a:xfrm>
-          <a:prstGeom prst="rect">
-            <a:avLst/>
-          </a:prstGeom>
-          <a:noFill/>
-        </p:spPr>
-        <p:txBody>
-          <a:bodyPr wrap="square" anchor="t" lIns="0" rIns="0" tIns="0" bIns="0"/>
-          <a:lstStyle/>
-          <a:p>
-            <a:pPr algn="l">
-              <a:lnSpc>
-                <a:spcPct val="145000"/>
-              </a:lnSpc>
-            </a:pPr>
-            <a:r>
-              <a:rPr sz="1500" b="0" i="0" lang="zh-CN" altLang="en-US">
-                <a:solidFill>
-                  <a:srgbClr val="2C2C2C"/>
-                </a:solidFill>
-                <a:latin typeface="Noto Sans CJK SC"/>
-                <a:ea typeface="Noto Sans CJK SC"/>
-                <a:cs typeface="Noto Sans CJK SC"/>
-              </a:rPr>
-              <a:t>鸡蛋、油、加油接进来，负责人每天走进来。十万个品目不赚一百兆。一百兆，由大约五百个主力品目赚。</a:t>
-            </a:r>
-          </a:p>
-        </p:txBody>
-      </p:sp>
-      <p:sp>
-        <p:nvSpPr>
-          <p:cNvPr id="16" name="Rectangle 15"/>
-          <p:cNvSpPr/>
-          <p:nvPr/>
-        </p:nvSpPr>
-        <p:spPr>
-          <a:xfrm>
-            <a:off x="658368" y="4709160"/>
-            <a:ext cx="10881360" cy="10972"/>
-          </a:xfrm>
-          <a:prstGeom prst="rect">
-            <a:avLst/>
-          </a:prstGeom>
-          <a:solidFill>
-            <a:srgbClr val="E2E2E2"/>
-          </a:solidFill>
-          <a:ln>
-            <a:noFill/>
-          </a:ln>
-        </p:spPr>
-        <p:style>
-          <a:lnRef idx="1">
-            <a:schemeClr val="accent1"/>
-          </a:lnRef>
-          <a:fillRef idx="3">
-            <a:schemeClr val="accent1"/>
-          </a:fillRef>
-          <a:effectRef idx="2">
-            <a:schemeClr val="accent1"/>
-          </a:effectRef>
-          <a:fontRef idx="minor">
-            <a:schemeClr val="lt1"/>
-          </a:fontRef>
-        </p:style>
-        <p:txBody>
-          <a:bodyPr rtlCol="0" anchor="ctr"/>
-          <a:lstStyle/>
-          <a:p>
-            <a:pPr algn="ctr"/>
-          </a:p>
-        </p:txBody>
-      </p:sp>
-      <p:sp>
-        <p:nvSpPr>
-          <p:cNvPr id="17" name="TextBox 16"/>
-          <p:cNvSpPr txBox="1"/>
-          <p:nvPr/>
-        </p:nvSpPr>
-        <p:spPr>
-          <a:xfrm>
-            <a:off x="658368" y="4937760"/>
-            <a:ext cx="10789920" cy="1051560"/>
-          </a:xfrm>
-          <a:prstGeom prst="rect">
-            <a:avLst/>
-          </a:prstGeom>
-          <a:noFill/>
-        </p:spPr>
-        <p:txBody>
-          <a:bodyPr wrap="square" anchor="t" lIns="0" rIns="0" tIns="0" bIns="0"/>
-          <a:lstStyle/>
-          <a:p>
-            <a:pPr algn="l">
-              <a:lnSpc>
-                <a:spcPct val="140000"/>
-              </a:lnSpc>
-            </a:pPr>
-            <a:r>
-              <a:rPr sz="1600" b="0" i="0" lang="zh-CN" altLang="en-US">
-                <a:solidFill>
-                  <a:srgbClr val="141414"/>
-                </a:solidFill>
-                <a:latin typeface="Noto Sans CJK SC"/>
-                <a:ea typeface="Noto Sans CJK SC"/>
-                <a:cs typeface="Noto Sans CJK SC"/>
-              </a:rPr>
-              <a:t>事业者因此不再只是推销的人。工具一变，行为就变，身份就变成顾问，变成这家平台的主人。
-消费、推荐和组织，变成留得下的资产。人留下，产量才留下。</a:t>
-            </a:r>
-          </a:p>
-        </p:txBody>
-      </p:sp>
-      <p:sp>
-        <p:nvSpPr>
-          <p:cNvPr id="18" name="TextBox 17"/>
+              <a:t>价格带来会员，会员堆出产量，产量把成本再压低。轮子没有刹车。
+摩洛哥会员十万以上，孟加拉约二十万。收入差这么远，卖的是同一套产品。
+这种东西不是广告推过境的。组织先动，店可以后有。</a:t>
+            </a:r>
+          </a:p>
+        </p:txBody>
+      </p:sp>
+      <p:sp>
+        <p:nvSpPr>
+          <p:cNvPr id="16" name="TextBox 15"/>
           <p:cNvSpPr txBox="1"/>
           <p:nvPr/>
         </p:nvSpPr>
@@ -7030,7 +7260,7 @@
                 <a:ea typeface="Noto Sans CJK SC Medium"/>
                 <a:cs typeface="Noto Sans CJK SC Medium"/>
               </a:rPr>
-              <a:t>四件事情要同时为真</a:t>
+              <a:t>策展不停在货架上</a:t>
             </a:r>
           </a:p>
         </p:txBody>
@@ -7087,7 +7317,7 @@
         <p:spPr>
           <a:xfrm>
             <a:off x="658368" y="1234440"/>
-            <a:ext cx="640080" cy="365760"/>
+            <a:ext cx="2468880" cy="640080"/>
           </a:xfrm>
           <a:prstGeom prst="rect">
             <a:avLst/>
@@ -7100,15 +7330,15 @@
           <a:p>
             <a:pPr algn="l"/>
             <a:r>
-              <a:rPr sz="1600" b="0" i="0" lang="zh-CN" altLang="en-US">
-                <a:solidFill>
-                  <a:srgbClr val="9E1B1B"/>
+              <a:rPr sz="2000" b="0" i="0" lang="zh-CN" altLang="en-US">
+                <a:solidFill>
+                  <a:srgbClr val="141414"/>
                 </a:solidFill>
                 <a:latin typeface="Noto Sans CJK SC Medium"/>
                 <a:ea typeface="Noto Sans CJK SC Medium"/>
                 <a:cs typeface="Noto Sans CJK SC Medium"/>
               </a:rPr>
-              <a:t>01</a:t>
+              <a:t>留下什么</a:t>
             </a:r>
           </a:p>
         </p:txBody>
@@ -7121,8 +7351,90 @@
         </p:nvSpPr>
         <p:spPr>
           <a:xfrm>
-            <a:off x="1463040" y="1216152"/>
-            <a:ext cx="9875520" cy="365760"/>
+            <a:off x="3291840" y="1252728"/>
+            <a:ext cx="8138160" cy="777240"/>
+          </a:xfrm>
+          <a:prstGeom prst="rect">
+            <a:avLst/>
+          </a:prstGeom>
+          <a:noFill/>
+        </p:spPr>
+        <p:txBody>
+          <a:bodyPr wrap="square" anchor="t" lIns="0" rIns="0" tIns="0" bIns="0"/>
+          <a:lstStyle/>
+          <a:p>
+            <a:pPr algn="l">
+              <a:lnSpc>
+                <a:spcPct val="135000"/>
+              </a:lnSpc>
+            </a:pPr>
+            <a:r>
+              <a:rPr sz="1600" b="0" i="0" lang="zh-CN" altLang="en-US">
+                <a:solidFill>
+                  <a:srgbClr val="2C2C2C"/>
+                </a:solidFill>
+                <a:latin typeface="Noto Sans CJK SC"/>
+                <a:ea typeface="Noto Sans CJK SC"/>
+                <a:cs typeface="Noto Sans CJK SC"/>
+              </a:rPr>
+              <a:t>一个品类，一个。品质不拿来换价格。顾客不必在几百个相近的东西里比较。</a:t>
+            </a:r>
+          </a:p>
+        </p:txBody>
+      </p:sp>
+      <p:sp>
+        <p:nvSpPr>
+          <p:cNvPr id="7" name="Rectangle 6"/>
+          <p:cNvSpPr/>
+          <p:nvPr/>
+        </p:nvSpPr>
+        <p:spPr>
+          <a:xfrm>
+            <a:off x="658368" y="2121408"/>
+            <a:ext cx="10881360" cy="9144"/>
+          </a:xfrm>
+          <a:prstGeom prst="rect">
+            <a:avLst/>
+          </a:prstGeom>
+          <a:solidFill>
+            <a:srgbClr val="E2E2E2"/>
+          </a:solidFill>
+          <a:ln>
+            <a:noFill/>
+          </a:ln>
+        </p:spPr>
+        <p:style>
+          <a:lnRef idx="1">
+            <a:schemeClr val="accent1"/>
+          </a:lnRef>
+          <a:fillRef idx="3">
+            <a:schemeClr val="accent1"/>
+          </a:fillRef>
+          <a:effectRef idx="2">
+            <a:schemeClr val="accent1"/>
+          </a:effectRef>
+          <a:fontRef idx="minor">
+            <a:schemeClr val="lt1"/>
+          </a:fontRef>
+        </p:style>
+        <p:txBody>
+          <a:bodyPr rtlCol="0" anchor="ctr"/>
+          <a:lstStyle/>
+          <a:p>
+            <a:pPr algn="ctr"/>
+          </a:p>
+        </p:txBody>
+      </p:sp>
+      <p:sp>
+        <p:nvSpPr>
+          <p:cNvPr id="8" name="TextBox 7"/>
+          <p:cNvSpPr txBox="1"/>
+          <p:nvPr/>
+        </p:nvSpPr>
+        <p:spPr>
+          <a:xfrm>
+            <a:off x="658368" y="2286000"/>
+            <a:ext cx="2468880" cy="640080"/>
           </a:xfrm>
           <a:prstGeom prst="rect">
             <a:avLst/>
@@ -7135,7 +7447,7 @@
           <a:p>
             <a:pPr algn="l"/>
             <a:r>
-              <a:rPr sz="2200" b="0" i="0" lang="zh-CN" altLang="en-US">
+              <a:rPr sz="2000" b="0" i="0" lang="zh-CN" altLang="en-US">
                 <a:solidFill>
                   <a:srgbClr val="141414"/>
                 </a:solidFill>
@@ -7143,34 +7455,38 @@
                 <a:ea typeface="Noto Sans CJK SC Medium"/>
                 <a:cs typeface="Noto Sans CJK SC Medium"/>
               </a:rPr>
-              <a:t>这条链不容易被照抄</a:t>
-            </a:r>
-          </a:p>
-        </p:txBody>
-      </p:sp>
-      <p:sp>
-        <p:nvSpPr>
-          <p:cNvPr id="7" name="TextBox 6"/>
-          <p:cNvSpPr txBox="1"/>
-          <p:nvPr/>
-        </p:nvSpPr>
-        <p:spPr>
-          <a:xfrm>
-            <a:off x="1463040" y="1655064"/>
-            <a:ext cx="9875520" cy="365760"/>
-          </a:xfrm>
-          <a:prstGeom prst="rect">
-            <a:avLst/>
-          </a:prstGeom>
-          <a:noFill/>
-        </p:spPr>
-        <p:txBody>
-          <a:bodyPr wrap="square" anchor="t" lIns="0" rIns="0" tIns="0" bIns="0"/>
-          <a:lstStyle/>
-          <a:p>
-            <a:pPr algn="l"/>
-            <a:r>
-              <a:rPr sz="1500" b="0" i="0" lang="zh-CN" altLang="en-US">
+              <a:t>如何守住</a:t>
+            </a:r>
+          </a:p>
+        </p:txBody>
+      </p:sp>
+      <p:sp>
+        <p:nvSpPr>
+          <p:cNvPr id="9" name="TextBox 8"/>
+          <p:cNvSpPr txBox="1"/>
+          <p:nvPr/>
+        </p:nvSpPr>
+        <p:spPr>
+          <a:xfrm>
+            <a:off x="3291840" y="2304288"/>
+            <a:ext cx="8138160" cy="777240"/>
+          </a:xfrm>
+          <a:prstGeom prst="rect">
+            <a:avLst/>
+          </a:prstGeom>
+          <a:noFill/>
+        </p:spPr>
+        <p:txBody>
+          <a:bodyPr wrap="square" anchor="t" lIns="0" rIns="0" tIns="0" bIns="0"/>
+          <a:lstStyle/>
+          <a:p>
+            <a:pPr algn="l">
+              <a:lnSpc>
+                <a:spcPct val="135000"/>
+              </a:lnSpc>
+            </a:pPr>
+            <a:r>
+              <a:rPr sz="1600" b="0" i="0" lang="zh-CN" altLang="en-US">
                 <a:solidFill>
                   <a:srgbClr val="2C2C2C"/>
                 </a:solidFill>
@@ -7178,21 +7494,64 @@
                 <a:ea typeface="Noto Sans CJK SC"/>
                 <a:cs typeface="Noto Sans CJK SC"/>
               </a:rPr>
-              <a:t>价格表好抄。育苗、栽培、图纸、专用线和数据，要有人先把愿景和钱放进去。</a:t>
-            </a:r>
-          </a:p>
-        </p:txBody>
-      </p:sp>
-      <p:sp>
-        <p:nvSpPr>
-          <p:cNvPr id="8" name="TextBox 7"/>
-          <p:cNvSpPr txBox="1"/>
-          <p:nvPr/>
-        </p:nvSpPr>
-        <p:spPr>
-          <a:xfrm>
-            <a:off x="658368" y="2423160"/>
-            <a:ext cx="640080" cy="365760"/>
+              <a:t>从原物管到流通。工厂不必座座自有。原料、设备基准和数据要在自己手里。循环的第一步，是对方看得见的愿景，不是先把货堆出来。</a:t>
+            </a:r>
+          </a:p>
+        </p:txBody>
+      </p:sp>
+      <p:sp>
+        <p:nvSpPr>
+          <p:cNvPr id="10" name="Rectangle 9"/>
+          <p:cNvSpPr/>
+          <p:nvPr/>
+        </p:nvSpPr>
+        <p:spPr>
+          <a:xfrm>
+            <a:off x="658368" y="3172968"/>
+            <a:ext cx="10881360" cy="9144"/>
+          </a:xfrm>
+          <a:prstGeom prst="rect">
+            <a:avLst/>
+          </a:prstGeom>
+          <a:solidFill>
+            <a:srgbClr val="E2E2E2"/>
+          </a:solidFill>
+          <a:ln>
+            <a:noFill/>
+          </a:ln>
+        </p:spPr>
+        <p:style>
+          <a:lnRef idx="1">
+            <a:schemeClr val="accent1"/>
+          </a:lnRef>
+          <a:fillRef idx="3">
+            <a:schemeClr val="accent1"/>
+          </a:fillRef>
+          <a:effectRef idx="2">
+            <a:schemeClr val="accent1"/>
+          </a:effectRef>
+          <a:fontRef idx="minor">
+            <a:schemeClr val="lt1"/>
+          </a:fontRef>
+        </p:style>
+        <p:txBody>
+          <a:bodyPr rtlCol="0" anchor="ctr"/>
+          <a:lstStyle/>
+          <a:p>
+            <a:pPr algn="ctr"/>
+          </a:p>
+        </p:txBody>
+      </p:sp>
+      <p:sp>
+        <p:nvSpPr>
+          <p:cNvPr id="11" name="TextBox 10"/>
+          <p:cNvSpPr txBox="1"/>
+          <p:nvPr/>
+        </p:nvSpPr>
+        <p:spPr>
+          <a:xfrm>
+            <a:off x="658368" y="3337560"/>
+            <a:ext cx="2468880" cy="640080"/>
           </a:xfrm>
           <a:prstGeom prst="rect">
             <a:avLst/>
@@ -7205,225 +7564,137 @@
           <a:p>
             <a:pPr algn="l"/>
             <a:r>
-              <a:rPr sz="1600" b="0" i="0" lang="zh-CN" altLang="en-US">
-                <a:solidFill>
-                  <a:srgbClr val="9E1B1B"/>
+              <a:rPr sz="2000" b="0" i="0" lang="zh-CN" altLang="en-US">
+                <a:solidFill>
+                  <a:srgbClr val="141414"/>
                 </a:solidFill>
                 <a:latin typeface="Noto Sans CJK SC Medium"/>
                 <a:ea typeface="Noto Sans CJK SC Medium"/>
                 <a:cs typeface="Noto Sans CJK SC Medium"/>
               </a:rPr>
-              <a:t>02</a:t>
-            </a:r>
-          </a:p>
-        </p:txBody>
-      </p:sp>
-      <p:sp>
-        <p:nvSpPr>
-          <p:cNvPr id="9" name="TextBox 8"/>
-          <p:cNvSpPr txBox="1"/>
-          <p:nvPr/>
-        </p:nvSpPr>
-        <p:spPr>
-          <a:xfrm>
-            <a:off x="1463040" y="2404872"/>
-            <a:ext cx="9875520" cy="365760"/>
-          </a:xfrm>
-          <a:prstGeom prst="rect">
-            <a:avLst/>
-          </a:prstGeom>
-          <a:noFill/>
-        </p:spPr>
-        <p:txBody>
-          <a:bodyPr wrap="square" anchor="t" lIns="0" rIns="0" tIns="0" bIns="0"/>
-          <a:lstStyle/>
-          <a:p>
-            <a:pPr algn="l"/>
-            <a:r>
-              <a:rPr sz="2200" b="0" i="0" lang="zh-CN" altLang="en-US">
-                <a:solidFill>
-                  <a:srgbClr val="141414"/>
+              <a:t>对准谁</a:t>
+            </a:r>
+          </a:p>
+        </p:txBody>
+      </p:sp>
+      <p:sp>
+        <p:nvSpPr>
+          <p:cNvPr id="12" name="TextBox 11"/>
+          <p:cNvSpPr txBox="1"/>
+          <p:nvPr/>
+        </p:nvSpPr>
+        <p:spPr>
+          <a:xfrm>
+            <a:off x="3291840" y="3355848"/>
+            <a:ext cx="8138160" cy="777240"/>
+          </a:xfrm>
+          <a:prstGeom prst="rect">
+            <a:avLst/>
+          </a:prstGeom>
+          <a:noFill/>
+        </p:spPr>
+        <p:txBody>
+          <a:bodyPr wrap="square" anchor="t" lIns="0" rIns="0" tIns="0" bIns="0"/>
+          <a:lstStyle/>
+          <a:p>
+            <a:pPr algn="l">
+              <a:lnSpc>
+                <a:spcPct val="135000"/>
+              </a:lnSpc>
+            </a:pPr>
+            <a:r>
+              <a:rPr sz="1600" b="0" i="0" lang="zh-CN" altLang="en-US">
+                <a:solidFill>
+                  <a:srgbClr val="2C2C2C"/>
+                </a:solidFill>
+                <a:latin typeface="Noto Sans CJK SC"/>
+                <a:ea typeface="Noto Sans CJK SC"/>
+                <a:cs typeface="Noto Sans CJK SC"/>
+              </a:rPr>
+              <a:t>同一种产品，不再对所有人说同一句话。身体不同，建议就不同。</a:t>
+            </a:r>
+          </a:p>
+        </p:txBody>
+      </p:sp>
+      <p:sp>
+        <p:nvSpPr>
+          <p:cNvPr id="13" name="Rectangle 12"/>
+          <p:cNvSpPr/>
+          <p:nvPr/>
+        </p:nvSpPr>
+        <p:spPr>
+          <a:xfrm>
+            <a:off x="658368" y="4224528"/>
+            <a:ext cx="10881360" cy="9144"/>
+          </a:xfrm>
+          <a:prstGeom prst="rect">
+            <a:avLst/>
+          </a:prstGeom>
+          <a:solidFill>
+            <a:srgbClr val="E2E2E2"/>
+          </a:solidFill>
+          <a:ln>
+            <a:noFill/>
+          </a:ln>
+        </p:spPr>
+        <p:style>
+          <a:lnRef idx="1">
+            <a:schemeClr val="accent1"/>
+          </a:lnRef>
+          <a:fillRef idx="3">
+            <a:schemeClr val="accent1"/>
+          </a:fillRef>
+          <a:effectRef idx="2">
+            <a:schemeClr val="accent1"/>
+          </a:effectRef>
+          <a:fontRef idx="minor">
+            <a:schemeClr val="lt1"/>
+          </a:fontRef>
+        </p:style>
+        <p:txBody>
+          <a:bodyPr rtlCol="0" anchor="ctr"/>
+          <a:lstStyle/>
+          <a:p>
+            <a:pPr algn="ctr"/>
+          </a:p>
+        </p:txBody>
+      </p:sp>
+      <p:sp>
+        <p:nvSpPr>
+          <p:cNvPr id="14" name="TextBox 13"/>
+          <p:cNvSpPr txBox="1"/>
+          <p:nvPr/>
+        </p:nvSpPr>
+        <p:spPr>
+          <a:xfrm>
+            <a:off x="658368" y="4709160"/>
+            <a:ext cx="10789920" cy="1097280"/>
+          </a:xfrm>
+          <a:prstGeom prst="rect">
+            <a:avLst/>
+          </a:prstGeom>
+          <a:noFill/>
+        </p:spPr>
+        <p:txBody>
+          <a:bodyPr wrap="square" anchor="t" lIns="0" rIns="0" tIns="0" bIns="0"/>
+          <a:lstStyle/>
+          <a:p>
+            <a:pPr algn="l">
+              <a:lnSpc>
+                <a:spcPct val="140000"/>
+              </a:lnSpc>
+            </a:pPr>
+            <a:r>
+              <a:rPr sz="1800" b="0" i="0" lang="zh-CN" altLang="en-US">
+                <a:solidFill>
+                  <a:srgbClr val="9E1B1B"/>
                 </a:solidFill>
                 <a:latin typeface="Noto Sans CJK SC Medium"/>
                 <a:ea typeface="Noto Sans CJK SC Medium"/>
                 <a:cs typeface="Noto Sans CJK SC Medium"/>
               </a:rPr>
-              <a:t>不附带对方肯配合</a:t>
-            </a:r>
-          </a:p>
-        </p:txBody>
-      </p:sp>
-      <p:sp>
-        <p:nvSpPr>
-          <p:cNvPr id="10" name="TextBox 9"/>
-          <p:cNvSpPr txBox="1"/>
-          <p:nvPr/>
-        </p:nvSpPr>
-        <p:spPr>
-          <a:xfrm>
-            <a:off x="1463040" y="2843784"/>
-            <a:ext cx="9875520" cy="365760"/>
-          </a:xfrm>
-          <a:prstGeom prst="rect">
-            <a:avLst/>
-          </a:prstGeom>
-          <a:noFill/>
-        </p:spPr>
-        <p:txBody>
-          <a:bodyPr wrap="square" anchor="t" lIns="0" rIns="0" tIns="0" bIns="0"/>
-          <a:lstStyle/>
-          <a:p>
-            <a:pPr algn="l"/>
-            <a:r>
-              <a:rPr sz="1500" b="0" i="0" lang="zh-CN" altLang="en-US">
-                <a:solidFill>
-                  <a:srgbClr val="2C2C2C"/>
-                </a:solidFill>
-                <a:latin typeface="Noto Sans CJK SC"/>
-                <a:ea typeface="Noto Sans CJK SC"/>
-                <a:cs typeface="Noto Sans CJK SC"/>
-              </a:rPr>
-              <a:t>跟，就一起把小公司做大。不跟，优化也不停。目标没有这个条件。</a:t>
-            </a:r>
-          </a:p>
-        </p:txBody>
-      </p:sp>
-      <p:sp>
-        <p:nvSpPr>
-          <p:cNvPr id="11" name="TextBox 10"/>
-          <p:cNvSpPr txBox="1"/>
-          <p:nvPr/>
-        </p:nvSpPr>
-        <p:spPr>
-          <a:xfrm>
-            <a:off x="658368" y="3611880"/>
-            <a:ext cx="640080" cy="365760"/>
-          </a:xfrm>
-          <a:prstGeom prst="rect">
-            <a:avLst/>
-          </a:prstGeom>
-          <a:noFill/>
-        </p:spPr>
-        <p:txBody>
-          <a:bodyPr wrap="square" anchor="t" lIns="0" rIns="0" tIns="0" bIns="0"/>
-          <a:lstStyle/>
-          <a:p>
-            <a:pPr algn="l"/>
-            <a:r>
-              <a:rPr sz="1600" b="0" i="0" lang="zh-CN" altLang="en-US">
-                <a:solidFill>
-                  <a:srgbClr val="9E1B1B"/>
-                </a:solidFill>
-                <a:latin typeface="Noto Sans CJK SC Medium"/>
-                <a:ea typeface="Noto Sans CJK SC Medium"/>
-                <a:cs typeface="Noto Sans CJK SC Medium"/>
-              </a:rPr>
-              <a:t>03</a:t>
-            </a:r>
-          </a:p>
-        </p:txBody>
-      </p:sp>
-      <p:sp>
-        <p:nvSpPr>
-          <p:cNvPr id="12" name="TextBox 11"/>
-          <p:cNvSpPr txBox="1"/>
-          <p:nvPr/>
-        </p:nvSpPr>
-        <p:spPr>
-          <a:xfrm>
-            <a:off x="1463040" y="3593592"/>
-            <a:ext cx="9875520" cy="365760"/>
-          </a:xfrm>
-          <a:prstGeom prst="rect">
-            <a:avLst/>
-          </a:prstGeom>
-          <a:noFill/>
-        </p:spPr>
-        <p:txBody>
-          <a:bodyPr wrap="square" anchor="t" lIns="0" rIns="0" tIns="0" bIns="0"/>
-          <a:lstStyle/>
-          <a:p>
-            <a:pPr algn="l"/>
-            <a:r>
-              <a:rPr sz="2200" b="0" i="0" lang="zh-CN" altLang="en-US">
-                <a:solidFill>
-                  <a:srgbClr val="141414"/>
-                </a:solidFill>
-                <a:latin typeface="Noto Sans CJK SC Medium"/>
-                <a:ea typeface="Noto Sans CJK SC Medium"/>
-                <a:cs typeface="Noto Sans CJK SC Medium"/>
-              </a:rPr>
-              <a:t>一半，就是千兆的底</a:t>
-            </a:r>
-          </a:p>
-        </p:txBody>
-      </p:sp>
-      <p:sp>
-        <p:nvSpPr>
-          <p:cNvPr id="13" name="TextBox 12"/>
-          <p:cNvSpPr txBox="1"/>
-          <p:nvPr/>
-        </p:nvSpPr>
-        <p:spPr>
-          <a:xfrm>
-            <a:off x="1463040" y="4032504"/>
-            <a:ext cx="9875520" cy="365760"/>
-          </a:xfrm>
-          <a:prstGeom prst="rect">
-            <a:avLst/>
-          </a:prstGeom>
-          <a:noFill/>
-        </p:spPr>
-        <p:txBody>
-          <a:bodyPr wrap="square" anchor="t" lIns="0" rIns="0" tIns="0" bIns="0"/>
-          <a:lstStyle/>
-          <a:p>
-            <a:pPr algn="l"/>
-            <a:r>
-              <a:rPr sz="1500" b="0" i="0" lang="zh-CN" altLang="en-US">
-                <a:solidFill>
-                  <a:srgbClr val="2C2C2C"/>
-                </a:solidFill>
-                <a:latin typeface="Noto Sans CJK SC"/>
-                <a:ea typeface="Noto Sans CJK SC"/>
-                <a:cs typeface="Noto Sans CJK SC"/>
-              </a:rPr>
-              <a:t>不要全部市场。绝对品质、绝对价格这一层的一半，已经够。</a:t>
-            </a:r>
-          </a:p>
-        </p:txBody>
-      </p:sp>
-      <p:sp>
-        <p:nvSpPr>
-          <p:cNvPr id="14" name="TextBox 13"/>
-          <p:cNvSpPr txBox="1"/>
-          <p:nvPr/>
-        </p:nvSpPr>
-        <p:spPr>
-          <a:xfrm>
-            <a:off x="658368" y="4800600"/>
-            <a:ext cx="640080" cy="365760"/>
-          </a:xfrm>
-          <a:prstGeom prst="rect">
-            <a:avLst/>
-          </a:prstGeom>
-          <a:noFill/>
-        </p:spPr>
-        <p:txBody>
-          <a:bodyPr wrap="square" anchor="t" lIns="0" rIns="0" tIns="0" bIns="0"/>
-          <a:lstStyle/>
-          <a:p>
-            <a:pPr algn="l"/>
-            <a:r>
-              <a:rPr sz="1600" b="0" i="0" lang="zh-CN" altLang="en-US">
-                <a:solidFill>
-                  <a:srgbClr val="9E1B1B"/>
-                </a:solidFill>
-                <a:latin typeface="Noto Sans CJK SC Medium"/>
-                <a:ea typeface="Noto Sans CJK SC Medium"/>
-                <a:cs typeface="Noto Sans CJK SC Medium"/>
-              </a:rPr>
-              <a:t>04</a:t>
+              <a:t>所以五百个，不能按五百个算。
+亚马逊一把牙刷就有几百款。我们一把，顶的是被挑剩的那一个。</a:t>
             </a:r>
           </a:p>
         </p:txBody>
@@ -7431,76 +7702,6 @@
       <p:sp>
         <p:nvSpPr>
           <p:cNvPr id="15" name="TextBox 14"/>
-          <p:cNvSpPr txBox="1"/>
-          <p:nvPr/>
-        </p:nvSpPr>
-        <p:spPr>
-          <a:xfrm>
-            <a:off x="1463040" y="4782312"/>
-            <a:ext cx="9875520" cy="365760"/>
-          </a:xfrm>
-          <a:prstGeom prst="rect">
-            <a:avLst/>
-          </a:prstGeom>
-          <a:noFill/>
-        </p:spPr>
-        <p:txBody>
-          <a:bodyPr wrap="square" anchor="t" lIns="0" rIns="0" tIns="0" bIns="0"/>
-          <a:lstStyle/>
-          <a:p>
-            <a:pPr algn="l"/>
-            <a:r>
-              <a:rPr sz="2200" b="0" i="0" lang="zh-CN" altLang="en-US">
-                <a:solidFill>
-                  <a:srgbClr val="141414"/>
-                </a:solidFill>
-                <a:latin typeface="Noto Sans CJK SC Medium"/>
-                <a:ea typeface="Noto Sans CJK SC Medium"/>
-                <a:cs typeface="Noto Sans CJK SC Medium"/>
-              </a:rPr>
-              <a:t>人留下，产量才留下</a:t>
-            </a:r>
-          </a:p>
-        </p:txBody>
-      </p:sp>
-      <p:sp>
-        <p:nvSpPr>
-          <p:cNvPr id="16" name="TextBox 15"/>
-          <p:cNvSpPr txBox="1"/>
-          <p:nvPr/>
-        </p:nvSpPr>
-        <p:spPr>
-          <a:xfrm>
-            <a:off x="1463040" y="5221224"/>
-            <a:ext cx="9875520" cy="365760"/>
-          </a:xfrm>
-          <a:prstGeom prst="rect">
-            <a:avLst/>
-          </a:prstGeom>
-          <a:noFill/>
-        </p:spPr>
-        <p:txBody>
-          <a:bodyPr wrap="square" anchor="t" lIns="0" rIns="0" tIns="0" bIns="0"/>
-          <a:lstStyle/>
-          <a:p>
-            <a:pPr algn="l"/>
-            <a:r>
-              <a:rPr sz="1500" b="0" i="0" lang="zh-CN" altLang="en-US">
-                <a:solidFill>
-                  <a:srgbClr val="2C2C2C"/>
-                </a:solidFill>
-                <a:latin typeface="Noto Sans CJK SC"/>
-                <a:ea typeface="Noto Sans CJK SC"/>
-                <a:cs typeface="Noto Sans CJK SC"/>
-              </a:rPr>
-              <a:t>健康越用越准，日常开支接在一处，内容和组织长在自己的平台上。</a:t>
-            </a:r>
-          </a:p>
-        </p:txBody>
-      </p:sp>
-      <p:sp>
-        <p:nvSpPr>
-          <p:cNvPr id="17" name="TextBox 16"/>
           <p:cNvSpPr txBox="1"/>
           <p:nvPr/>
         </p:nvSpPr>
@@ -7624,7 +7825,7 @@
                 <a:ea typeface="Noto Sans CJK SC Medium"/>
                 <a:cs typeface="Noto Sans CJK SC Medium"/>
               </a:rPr>
-              <a:t>运费，不做一贯工程也会降</a:t>
+              <a:t>三个工具，是一个结构</a:t>
             </a:r>
           </a:p>
         </p:txBody>
@@ -7680,8 +7881,8 @@
         </p:nvSpPr>
         <p:spPr>
           <a:xfrm>
-            <a:off x="658368" y="1280160"/>
-            <a:ext cx="3200400" cy="274320"/>
+            <a:off x="658368" y="1234440"/>
+            <a:ext cx="3246120" cy="256032"/>
           </a:xfrm>
           <a:prstGeom prst="rect">
             <a:avLst/>
@@ -7694,7 +7895,7 @@
           <a:p>
             <a:pPr algn="l"/>
             <a:r>
-              <a:rPr sz="1400" b="0" i="0" lang="zh-CN" altLang="en-US">
+              <a:rPr sz="1300" b="0" i="0" lang="zh-CN" altLang="en-US">
                 <a:solidFill>
                   <a:srgbClr val="9E1B1B"/>
                 </a:solidFill>
@@ -7702,7 +7903,7 @@
                 <a:ea typeface="Noto Sans CJK SC Medium"/>
                 <a:cs typeface="Noto Sans CJK SC Medium"/>
               </a:rPr>
-              <a:t>01</a:t>
+              <a:t>APP</a:t>
             </a:r>
           </a:p>
         </p:txBody>
@@ -7715,8 +7916,8 @@
         </p:nvSpPr>
         <p:spPr>
           <a:xfrm>
-            <a:off x="658368" y="1691640"/>
-            <a:ext cx="3246120" cy="640080"/>
+            <a:off x="658368" y="1600200"/>
+            <a:ext cx="3291840" cy="457200"/>
           </a:xfrm>
           <a:prstGeom prst="rect">
             <a:avLst/>
@@ -7729,7 +7930,7 @@
           <a:p>
             <a:pPr algn="l"/>
             <a:r>
-              <a:rPr sz="2600" b="0" i="0" lang="zh-CN" altLang="en-US">
+              <a:rPr sz="2400" b="0" i="0" lang="zh-CN" altLang="en-US">
                 <a:solidFill>
                   <a:srgbClr val="141414"/>
                 </a:solidFill>
@@ -7737,7 +7938,7 @@
                 <a:ea typeface="Noto Sans CJK SC Medium"/>
                 <a:cs typeface="Noto Sans CJK SC Medium"/>
               </a:rPr>
-              <a:t>谈运费</a:t>
+              <a:t>个人平台</a:t>
             </a:r>
           </a:p>
         </p:txBody>
@@ -7750,8 +7951,8 @@
         </p:nvSpPr>
         <p:spPr>
           <a:xfrm>
-            <a:off x="658368" y="2514600"/>
-            <a:ext cx="3246120" cy="1691640"/>
+            <a:off x="658368" y="2240280"/>
+            <a:ext cx="3246120" cy="2011680"/>
           </a:xfrm>
           <a:prstGeom prst="rect">
             <a:avLst/>
@@ -7776,10 +7977,7 @@
                 <a:ea typeface="Noto Sans CJK SC"/>
                 <a:cs typeface="Noto Sans CJK SC"/>
               </a:rPr>
-              <a:t>包材、账期、运费，
-谈下来报价会好看。
-不做一贯工程的采购也会做。
-三十五个点仍没有出处。</a:t>
+              <a:t>自己的店、自己的健康、自己的教育，收在一处。过去租酒店讲一小时，收成五分钟。平台本身就是人工智能。</a:t>
             </a:r>
           </a:p>
         </p:txBody>
@@ -7793,7 +7991,7 @@
         <p:spPr>
           <a:xfrm>
             <a:off x="4160520" y="1280160"/>
-            <a:ext cx="10972" cy="2880360"/>
+            <a:ext cx="10972" cy="3063240"/>
           </a:xfrm>
           <a:prstGeom prst="rect">
             <a:avLst/>
@@ -7835,8 +8033,8 @@
         </p:nvSpPr>
         <p:spPr>
           <a:xfrm>
-            <a:off x="4361688" y="1280160"/>
-            <a:ext cx="3200400" cy="274320"/>
+            <a:off x="4361688" y="1234440"/>
+            <a:ext cx="3246120" cy="256032"/>
           </a:xfrm>
           <a:prstGeom prst="rect">
             <a:avLst/>
@@ -7849,7 +8047,7 @@
           <a:p>
             <a:pPr algn="l"/>
             <a:r>
-              <a:rPr sz="1400" b="0" i="0" lang="zh-CN" altLang="en-US">
+              <a:rPr sz="1300" b="0" i="0" lang="zh-CN" altLang="en-US">
                 <a:solidFill>
                   <a:srgbClr val="9E1B1B"/>
                 </a:solidFill>
@@ -7857,7 +8055,7 @@
                 <a:ea typeface="Noto Sans CJK SC Medium"/>
                 <a:cs typeface="Noto Sans CJK SC Medium"/>
               </a:rPr>
-              <a:t>02</a:t>
+              <a:t>A-Care</a:t>
             </a:r>
           </a:p>
         </p:txBody>
@@ -7870,8 +8068,8 @@
         </p:nvSpPr>
         <p:spPr>
           <a:xfrm>
-            <a:off x="4361688" y="1691640"/>
-            <a:ext cx="3246120" cy="640080"/>
+            <a:off x="4361688" y="1600200"/>
+            <a:ext cx="3291840" cy="457200"/>
           </a:xfrm>
           <a:prstGeom prst="rect">
             <a:avLst/>
@@ -7884,7 +8082,7 @@
           <a:p>
             <a:pPr algn="l"/>
             <a:r>
-              <a:rPr sz="2600" b="0" i="0" lang="zh-CN" altLang="en-US">
+              <a:rPr sz="2400" b="0" i="0" lang="zh-CN" altLang="en-US">
                 <a:solidFill>
                   <a:srgbClr val="141414"/>
                 </a:solidFill>
@@ -7892,7 +8090,7 @@
                 <a:ea typeface="Noto Sans CJK SC Medium"/>
                 <a:cs typeface="Noto Sans CJK SC Medium"/>
               </a:rPr>
-              <a:t>删工序</a:t>
+              <a:t>艾护理</a:t>
             </a:r>
           </a:p>
         </p:txBody>
@@ -7905,8 +8103,8 @@
         </p:nvSpPr>
         <p:spPr>
           <a:xfrm>
-            <a:off x="4361688" y="2514600"/>
-            <a:ext cx="3246120" cy="1691640"/>
+            <a:off x="4361688" y="2240280"/>
+            <a:ext cx="3246120" cy="2011680"/>
           </a:xfrm>
           <a:prstGeom prst="rect">
             <a:avLst/>
@@ -7931,10 +8129,7 @@
                 <a:ea typeface="Noto Sans CJK SC"/>
                 <a:cs typeface="Noto Sans CJK SC"/>
               </a:rPr>
-              <a:t>干燥、切断，
-是药房按克卖才有的。
-十八吨的罐子吃洗净的鲜品。
-这两步可以没有。</a:t>
+              <a:t>不再说“做好了请用”。血、饮食、活动放进来，一年、五年、十年后的身体可以估。越用越准，人才留下来。</a:t>
             </a:r>
           </a:p>
         </p:txBody>
@@ -7948,7 +8143,7 @@
         <p:spPr>
           <a:xfrm>
             <a:off x="7863840" y="1280160"/>
-            <a:ext cx="10972" cy="2880360"/>
+            <a:ext cx="10972" cy="3063240"/>
           </a:xfrm>
           <a:prstGeom prst="rect">
             <a:avLst/>
@@ -7990,8 +8185,8 @@
         </p:nvSpPr>
         <p:spPr>
           <a:xfrm>
-            <a:off x="8065008" y="1280160"/>
-            <a:ext cx="3200400" cy="274320"/>
+            <a:off x="8065008" y="1234440"/>
+            <a:ext cx="3246120" cy="256032"/>
           </a:xfrm>
           <a:prstGeom prst="rect">
             <a:avLst/>
@@ -8004,7 +8199,7 @@
           <a:p>
             <a:pPr algn="l"/>
             <a:r>
-              <a:rPr sz="1400" b="0" i="0" lang="zh-CN" altLang="en-US">
+              <a:rPr sz="1300" b="0" i="0" lang="zh-CN" altLang="en-US">
                 <a:solidFill>
                   <a:srgbClr val="9E1B1B"/>
                 </a:solidFill>
@@ -8012,7 +8207,7 @@
                 <a:ea typeface="Noto Sans CJK SC Medium"/>
                 <a:cs typeface="Noto Sans CJK SC Medium"/>
               </a:rPr>
-              <a:t>03</a:t>
+              <a:t>AZA</a:t>
             </a:r>
           </a:p>
         </p:txBody>
@@ -8025,8 +8220,8 @@
         </p:nvSpPr>
         <p:spPr>
           <a:xfrm>
-            <a:off x="8065008" y="1691640"/>
-            <a:ext cx="3246120" cy="640080"/>
+            <a:off x="8065008" y="1600200"/>
+            <a:ext cx="3291840" cy="457200"/>
           </a:xfrm>
           <a:prstGeom prst="rect">
             <a:avLst/>
@@ -8039,7 +8234,7 @@
           <a:p>
             <a:pPr algn="l"/>
             <a:r>
-              <a:rPr sz="2600" b="0" i="0" lang="zh-CN" altLang="en-US">
+              <a:rPr sz="2400" b="0" i="0" lang="zh-CN" altLang="en-US">
                 <a:solidFill>
                   <a:srgbClr val="141414"/>
                 </a:solidFill>
@@ -8047,7 +8242,7 @@
                 <a:ea typeface="Noto Sans CJK SC Medium"/>
                 <a:cs typeface="Noto Sans CJK SC Medium"/>
               </a:rPr>
-              <a:t>搬到墙外</a:t>
+              <a:t>阿扎</a:t>
             </a:r>
           </a:p>
         </p:txBody>
@@ -8060,8 +8255,8 @@
         </p:nvSpPr>
         <p:spPr>
           <a:xfrm>
-            <a:off x="8065008" y="2514600"/>
-            <a:ext cx="3246120" cy="1691640"/>
+            <a:off x="8065008" y="2240280"/>
+            <a:ext cx="3246120" cy="2011680"/>
           </a:xfrm>
           <a:prstGeom prst="rect">
             <a:avLst/>
@@ -8086,10 +8281,7 @@
                 <a:ea typeface="Noto Sans CJK SC"/>
                 <a:cs typeface="Noto Sans CJK SC"/>
               </a:rPr>
-              <a:t>下一道工序盖在原料厂的院墙外，
-用管道接。
-运的那一趟被拿掉，
-才不是在谈运费。</a:t>
+              <a:t>鸡蛋、油、加油接进来，负责人每天走进来。十万个品目不赚一百兆。一百兆，由大约五百个主力品目赚。</a:t>
             </a:r>
           </a:p>
         </p:txBody>
@@ -8145,8 +8337,8 @@
         </p:nvSpPr>
         <p:spPr>
           <a:xfrm>
-            <a:off x="658368" y="4983480"/>
-            <a:ext cx="10789920" cy="1097280"/>
+            <a:off x="658368" y="4937760"/>
+            <a:ext cx="10789920" cy="1051560"/>
           </a:xfrm>
           <a:prstGeom prst="rect">
             <a:avLst/>
@@ -8159,20 +8351,20 @@
           <a:p>
             <a:pPr algn="l">
               <a:lnSpc>
-                <a:spcPct val="135000"/>
+                <a:spcPct val="140000"/>
               </a:lnSpc>
             </a:pPr>
             <a:r>
-              <a:rPr sz="2200" b="0" i="0" lang="zh-CN" altLang="en-US">
-                <a:solidFill>
-                  <a:srgbClr val="9E1B1B"/>
-                </a:solidFill>
-                <a:latin typeface="Noto Sans CJK SC Medium"/>
-                <a:ea typeface="Noto Sans CJK SC Medium"/>
-                <a:cs typeface="Noto Sans CJK SC Medium"/>
-              </a:rPr>
-              <a:t>第一件，谁都会做。
-后两件，才是一贯工程。</a:t>
+              <a:rPr sz="1600" b="0" i="0" lang="zh-CN" altLang="en-US">
+                <a:solidFill>
+                  <a:srgbClr val="141414"/>
+                </a:solidFill>
+                <a:latin typeface="Noto Sans CJK SC"/>
+                <a:ea typeface="Noto Sans CJK SC"/>
+                <a:cs typeface="Noto Sans CJK SC"/>
+              </a:rPr>
+              <a:t>事业者因此不再只是推销的人。工具一变，行为就变，身份就变成顾问，变成这家平台的主人。
+消费、推荐和组织，变成留得下的资产。人留下，产量才留下。</a:t>
             </a:r>
           </a:p>
         </p:txBody>
@@ -8303,7 +8495,7 @@
                 <a:ea typeface="Noto Sans CJK SC Medium"/>
                 <a:cs typeface="Noto Sans CJK SC Medium"/>
               </a:rPr>
-              <a:t>中国产线上就做这四件</a:t>
+              <a:t>四件事情要同时为真</a:t>
             </a:r>
           </a:p>
         </p:txBody>
@@ -8359,8 +8551,8 @@
         </p:nvSpPr>
         <p:spPr>
           <a:xfrm>
-            <a:off x="658368" y="1170432"/>
-            <a:ext cx="640080" cy="329184"/>
+            <a:off x="658368" y="1234440"/>
+            <a:ext cx="640080" cy="365760"/>
           </a:xfrm>
           <a:prstGeom prst="rect">
             <a:avLst/>
@@ -8394,8 +8586,8 @@
         </p:nvSpPr>
         <p:spPr>
           <a:xfrm>
-            <a:off x="1417320" y="1152144"/>
-            <a:ext cx="9966960" cy="365760"/>
+            <a:off x="1463040" y="1216152"/>
+            <a:ext cx="9875520" cy="365760"/>
           </a:xfrm>
           <a:prstGeom prst="rect">
             <a:avLst/>
@@ -8416,7 +8608,7 @@
                 <a:ea typeface="Noto Sans CJK SC Medium"/>
                 <a:cs typeface="Noto Sans CJK SC Medium"/>
               </a:rPr>
-              <a:t>一个模具做大</a:t>
+              <a:t>这条链不容易被照抄</a:t>
             </a:r>
           </a:p>
         </p:txBody>
@@ -8429,8 +8621,8 @@
         </p:nvSpPr>
         <p:spPr>
           <a:xfrm>
-            <a:off x="1417320" y="1554480"/>
-            <a:ext cx="9966960" cy="640080"/>
+            <a:off x="1463040" y="1655064"/>
+            <a:ext cx="9875520" cy="365760"/>
           </a:xfrm>
           <a:prstGeom prst="rect">
             <a:avLst/>
@@ -8451,7 +8643,7 @@
                 <a:ea typeface="Noto Sans CJK SC"/>
                 <a:cs typeface="Noto Sans CJK SC"/>
               </a:rPr>
-              <a:t>牙刷造型不改。腔数做大，机器换大，原料买吨袋，付现金。再换一个造型，腔数就做不大。</a:t>
+              <a:t>价格表好抄。育苗、栽培、图纸、专用线和数据，要有人先把愿景和钱放进去。</a:t>
             </a:r>
           </a:p>
         </p:txBody>
@@ -8464,8 +8656,8 @@
         </p:nvSpPr>
         <p:spPr>
           <a:xfrm>
-            <a:off x="658368" y="2377440"/>
-            <a:ext cx="640080" cy="329184"/>
+            <a:off x="658368" y="2423160"/>
+            <a:ext cx="640080" cy="365760"/>
           </a:xfrm>
           <a:prstGeom prst="rect">
             <a:avLst/>
@@ -8499,8 +8691,8 @@
         </p:nvSpPr>
         <p:spPr>
           <a:xfrm>
-            <a:off x="1417320" y="2359152"/>
-            <a:ext cx="9966960" cy="365760"/>
+            <a:off x="1463040" y="2404872"/>
+            <a:ext cx="9875520" cy="365760"/>
           </a:xfrm>
           <a:prstGeom prst="rect">
             <a:avLst/>
@@ -8521,7 +8713,7 @@
                 <a:ea typeface="Noto Sans CJK SC Medium"/>
                 <a:cs typeface="Noto Sans CJK SC Medium"/>
               </a:rPr>
-              <a:t>一种配方，罐子不洗</a:t>
+              <a:t>不附带对方肯配合</a:t>
             </a:r>
           </a:p>
         </p:txBody>
@@ -8534,8 +8726,8 @@
         </p:nvSpPr>
         <p:spPr>
           <a:xfrm>
-            <a:off x="1417320" y="2761488"/>
-            <a:ext cx="9966960" cy="640080"/>
+            <a:off x="1463040" y="2843784"/>
+            <a:ext cx="9875520" cy="365760"/>
           </a:xfrm>
           <a:prstGeom prst="rect">
             <a:avLst/>
@@ -8556,7 +8748,7 @@
                 <a:ea typeface="Noto Sans CJK SC"/>
                 <a:cs typeface="Noto Sans CJK SC"/>
               </a:rPr>
-              <a:t>洗发水四五款并成一款。换料和清洗都在多款里。再加一个口味，清洗就回来。</a:t>
+              <a:t>跟，就一起把小公司做大。不跟，优化也不停。目标没有这个条件。</a:t>
             </a:r>
           </a:p>
         </p:txBody>
@@ -8569,8 +8761,8 @@
         </p:nvSpPr>
         <p:spPr>
           <a:xfrm>
-            <a:off x="658368" y="3584448"/>
-            <a:ext cx="640080" cy="329184"/>
+            <a:off x="658368" y="3611880"/>
+            <a:ext cx="640080" cy="365760"/>
           </a:xfrm>
           <a:prstGeom prst="rect">
             <a:avLst/>
@@ -8604,8 +8796,8 @@
         </p:nvSpPr>
         <p:spPr>
           <a:xfrm>
-            <a:off x="1417320" y="3566160"/>
-            <a:ext cx="9966960" cy="365760"/>
+            <a:off x="1463040" y="3593592"/>
+            <a:ext cx="9875520" cy="365760"/>
           </a:xfrm>
           <a:prstGeom prst="rect">
             <a:avLst/>
@@ -8626,7 +8818,7 @@
                 <a:ea typeface="Noto Sans CJK SC Medium"/>
                 <a:cs typeface="Noto Sans CJK SC Medium"/>
               </a:rPr>
-              <a:t>罐子做大，人还是一个</a:t>
+              <a:t>一半，就是千兆的底</a:t>
             </a:r>
           </a:p>
         </p:txBody>
@@ -8639,8 +8831,8 @@
         </p:nvSpPr>
         <p:spPr>
           <a:xfrm>
-            <a:off x="1417320" y="3968496"/>
-            <a:ext cx="9966960" cy="640080"/>
+            <a:off x="1463040" y="4032504"/>
+            <a:ext cx="9875520" cy="365760"/>
           </a:xfrm>
           <a:prstGeom prst="rect">
             <a:avLst/>
@@ -8661,7 +8853,7 @@
                 <a:ea typeface="Noto Sans CJK SC"/>
                 <a:cs typeface="Noto Sans CJK SC"/>
               </a:rPr>
-              <a:t>萃取罐从 0.5 吨做到 18 吨，三十六倍，操作的人仍是一个。要推的是这只罐子，不是多找几家小厂。</a:t>
+              <a:t>不要全部市场。绝对品质、绝对价格这一层的一半，已经够。</a:t>
             </a:r>
           </a:p>
         </p:txBody>
@@ -8674,8 +8866,8 @@
         </p:nvSpPr>
         <p:spPr>
           <a:xfrm>
-            <a:off x="658368" y="4791456"/>
-            <a:ext cx="640080" cy="329184"/>
+            <a:off x="658368" y="4800600"/>
+            <a:ext cx="640080" cy="365760"/>
           </a:xfrm>
           <a:prstGeom prst="rect">
             <a:avLst/>
@@ -8709,8 +8901,8 @@
         </p:nvSpPr>
         <p:spPr>
           <a:xfrm>
-            <a:off x="1417320" y="4773168"/>
-            <a:ext cx="9966960" cy="365760"/>
+            <a:off x="1463040" y="4782312"/>
+            <a:ext cx="9875520" cy="365760"/>
           </a:xfrm>
           <a:prstGeom prst="rect">
             <a:avLst/>
@@ -8731,7 +8923,7 @@
                 <a:ea typeface="Noto Sans CJK SC Medium"/>
                 <a:cs typeface="Noto Sans CJK SC Medium"/>
               </a:rPr>
-              <a:t>鲜品进罐</a:t>
+              <a:t>人留下，产量才留下</a:t>
             </a:r>
           </a:p>
         </p:txBody>
@@ -8744,8 +8936,8 @@
         </p:nvSpPr>
         <p:spPr>
           <a:xfrm>
-            <a:off x="1417320" y="5175504"/>
-            <a:ext cx="9966960" cy="640080"/>
+            <a:off x="1463040" y="5221224"/>
+            <a:ext cx="9875520" cy="365760"/>
           </a:xfrm>
           <a:prstGeom prst="rect">
             <a:avLst/>
@@ -8766,7 +8958,7 @@
                 <a:ea typeface="Noto Sans CJK SC"/>
                 <a:cs typeface="Noto Sans CJK SC"/>
               </a:rPr>
-              <a:t>川芎、当归、白芍洗净直接煮。干燥和切断是按克卖药才有的。中国法人在产地守的是这一步。</a:t>
+              <a:t>健康越用越准，日常开支接在一处，内容和组织长在自己的平台上。</a:t>
             </a:r>
           </a:p>
         </p:txBody>
@@ -8897,7 +9089,7 @@
                 <a:ea typeface="Noto Sans CJK SC Medium"/>
                 <a:cs typeface="Noto Sans CJK SC Medium"/>
               </a:rPr>
-              <a:t>带去合作方的，是这三样</a:t>
+              <a:t>运费，不做一贯工程也会降</a:t>
             </a:r>
           </a:p>
         </p:txBody>
@@ -8953,8 +9145,8 @@
         </p:nvSpPr>
         <p:spPr>
           <a:xfrm>
-            <a:off x="658368" y="1371600"/>
-            <a:ext cx="3246120" cy="1051560"/>
+            <a:off x="658368" y="1280160"/>
+            <a:ext cx="3200400" cy="274320"/>
           </a:xfrm>
           <a:prstGeom prst="rect">
             <a:avLst/>
@@ -8967,15 +9159,15 @@
           <a:p>
             <a:pPr algn="l"/>
             <a:r>
-              <a:rPr sz="2400" b="0" i="0" lang="zh-CN" altLang="en-US">
-                <a:solidFill>
-                  <a:srgbClr val="141414"/>
+              <a:rPr sz="1400" b="0" i="0" lang="zh-CN" altLang="en-US">
+                <a:solidFill>
+                  <a:srgbClr val="9E1B1B"/>
                 </a:solidFill>
                 <a:latin typeface="Noto Sans CJK SC Medium"/>
                 <a:ea typeface="Noto Sans CJK SC Medium"/>
                 <a:cs typeface="Noto Sans CJK SC Medium"/>
               </a:rPr>
-              <a:t>一个月十万套</a:t>
+              <a:t>01</a:t>
             </a:r>
           </a:p>
         </p:txBody>
@@ -8988,8 +9180,43 @@
         </p:nvSpPr>
         <p:spPr>
           <a:xfrm>
-            <a:off x="658368" y="2560320"/>
-            <a:ext cx="3246120" cy="1645920"/>
+            <a:off x="658368" y="1691640"/>
+            <a:ext cx="3246120" cy="640080"/>
+          </a:xfrm>
+          <a:prstGeom prst="rect">
+            <a:avLst/>
+          </a:prstGeom>
+          <a:noFill/>
+        </p:spPr>
+        <p:txBody>
+          <a:bodyPr wrap="square" anchor="t" lIns="0" rIns="0" tIns="0" bIns="0"/>
+          <a:lstStyle/>
+          <a:p>
+            <a:pPr algn="l"/>
+            <a:r>
+              <a:rPr sz="2600" b="0" i="0" lang="zh-CN" altLang="en-US">
+                <a:solidFill>
+                  <a:srgbClr val="141414"/>
+                </a:solidFill>
+                <a:latin typeface="Noto Sans CJK SC Medium"/>
+                <a:ea typeface="Noto Sans CJK SC Medium"/>
+                <a:cs typeface="Noto Sans CJK SC Medium"/>
+              </a:rPr>
+              <a:t>谈运费</a:t>
+            </a:r>
+          </a:p>
+        </p:txBody>
+      </p:sp>
+      <p:sp>
+        <p:nvSpPr>
+          <p:cNvPr id="7" name="TextBox 6"/>
+          <p:cNvSpPr txBox="1"/>
+          <p:nvPr/>
+        </p:nvSpPr>
+        <p:spPr>
+          <a:xfrm>
+            <a:off x="658368" y="2514600"/>
+            <a:ext cx="3246120" cy="1691640"/>
           </a:xfrm>
           <a:prstGeom prst="rect">
             <a:avLst/>
@@ -9014,16 +9241,17 @@
                 <a:ea typeface="Noto Sans CJK SC"/>
                 <a:cs typeface="Noto Sans CJK SC"/>
               </a:rPr>
-              <a:t>价格按这个量重算，
-才落到原来的十分之一。
-交出去的是能排产的这个数。</a:t>
-            </a:r>
-          </a:p>
-        </p:txBody>
-      </p:sp>
-      <p:sp>
-        <p:nvSpPr>
-          <p:cNvPr id="7" name="Rectangle 6"/>
+              <a:t>包材、账期、运费，
+谈下来报价会好看。
+不做一贯工程的采购也会做。
+三十五个点仍没有出处。</a:t>
+            </a:r>
+          </a:p>
+        </p:txBody>
+      </p:sp>
+      <p:sp>
+        <p:nvSpPr>
+          <p:cNvPr id="8" name="Rectangle 7"/>
           <p:cNvSpPr/>
           <p:nvPr/>
         </p:nvSpPr>
@@ -9066,14 +9294,14 @@
       </p:sp>
       <p:sp>
         <p:nvSpPr>
-          <p:cNvPr id="8" name="TextBox 7"/>
-          <p:cNvSpPr txBox="1"/>
-          <p:nvPr/>
-        </p:nvSpPr>
-        <p:spPr>
-          <a:xfrm>
-            <a:off x="4361688" y="1371600"/>
-            <a:ext cx="3246120" cy="1051560"/>
+          <p:cNvPr id="9" name="TextBox 8"/>
+          <p:cNvSpPr txBox="1"/>
+          <p:nvPr/>
+        </p:nvSpPr>
+        <p:spPr>
+          <a:xfrm>
+            <a:off x="4361688" y="1280160"/>
+            <a:ext cx="3200400" cy="274320"/>
           </a:xfrm>
           <a:prstGeom prst="rect">
             <a:avLst/>
@@ -9086,29 +9314,64 @@
           <a:p>
             <a:pPr algn="l"/>
             <a:r>
-              <a:rPr sz="2400" b="0" i="0" lang="zh-CN" altLang="en-US">
-                <a:solidFill>
-                  <a:srgbClr val="141414"/>
+              <a:rPr sz="1400" b="0" i="0" lang="zh-CN" altLang="en-US">
+                <a:solidFill>
+                  <a:srgbClr val="9E1B1B"/>
                 </a:solidFill>
                 <a:latin typeface="Noto Sans CJK SC Medium"/>
                 <a:ea typeface="Noto Sans CJK SC Medium"/>
                 <a:cs typeface="Noto Sans CJK SC Medium"/>
               </a:rPr>
-              <a:t>设备图纸</a:t>
-            </a:r>
-          </a:p>
-        </p:txBody>
-      </p:sp>
-      <p:sp>
-        <p:nvSpPr>
-          <p:cNvPr id="9" name="TextBox 8"/>
-          <p:cNvSpPr txBox="1"/>
-          <p:nvPr/>
-        </p:nvSpPr>
-        <p:spPr>
-          <a:xfrm>
-            <a:off x="4361688" y="2560320"/>
-            <a:ext cx="3246120" cy="1645920"/>
+              <a:t>02</a:t>
+            </a:r>
+          </a:p>
+        </p:txBody>
+      </p:sp>
+      <p:sp>
+        <p:nvSpPr>
+          <p:cNvPr id="10" name="TextBox 9"/>
+          <p:cNvSpPr txBox="1"/>
+          <p:nvPr/>
+        </p:nvSpPr>
+        <p:spPr>
+          <a:xfrm>
+            <a:off x="4361688" y="1691640"/>
+            <a:ext cx="3246120" cy="640080"/>
+          </a:xfrm>
+          <a:prstGeom prst="rect">
+            <a:avLst/>
+          </a:prstGeom>
+          <a:noFill/>
+        </p:spPr>
+        <p:txBody>
+          <a:bodyPr wrap="square" anchor="t" lIns="0" rIns="0" tIns="0" bIns="0"/>
+          <a:lstStyle/>
+          <a:p>
+            <a:pPr algn="l"/>
+            <a:r>
+              <a:rPr sz="2600" b="0" i="0" lang="zh-CN" altLang="en-US">
+                <a:solidFill>
+                  <a:srgbClr val="141414"/>
+                </a:solidFill>
+                <a:latin typeface="Noto Sans CJK SC Medium"/>
+                <a:ea typeface="Noto Sans CJK SC Medium"/>
+                <a:cs typeface="Noto Sans CJK SC Medium"/>
+              </a:rPr>
+              <a:t>删工序</a:t>
+            </a:r>
+          </a:p>
+        </p:txBody>
+      </p:sp>
+      <p:sp>
+        <p:nvSpPr>
+          <p:cNvPr id="11" name="TextBox 10"/>
+          <p:cNvSpPr txBox="1"/>
+          <p:nvPr/>
+        </p:nvSpPr>
+        <p:spPr>
+          <a:xfrm>
+            <a:off x="4361688" y="2514600"/>
+            <a:ext cx="3246120" cy="1691640"/>
           </a:xfrm>
           <a:prstGeom prst="rect">
             <a:avLst/>
@@ -9133,16 +9396,17 @@
                 <a:ea typeface="Noto Sans CJK SC"/>
                 <a:cs typeface="Noto Sans CJK SC"/>
               </a:rPr>
-              <a:t>设备公司出。没有厂房，就在旁边盖。
-原料买断，对方只运转。
-拿去的是图纸，不是询价单。</a:t>
-            </a:r>
-          </a:p>
-        </p:txBody>
-      </p:sp>
-      <p:sp>
-        <p:nvSpPr>
-          <p:cNvPr id="10" name="Rectangle 9"/>
+              <a:t>干燥、切断，
+是药房按克卖才有的。
+十八吨的罐子吃洗净的鲜品。
+这两步可以没有。</a:t>
+            </a:r>
+          </a:p>
+        </p:txBody>
+      </p:sp>
+      <p:sp>
+        <p:nvSpPr>
+          <p:cNvPr id="12" name="Rectangle 11"/>
           <p:cNvSpPr/>
           <p:nvPr/>
         </p:nvSpPr>
@@ -9185,14 +9449,14 @@
       </p:sp>
       <p:sp>
         <p:nvSpPr>
-          <p:cNvPr id="11" name="TextBox 10"/>
-          <p:cNvSpPr txBox="1"/>
-          <p:nvPr/>
-        </p:nvSpPr>
-        <p:spPr>
-          <a:xfrm>
-            <a:off x="8065008" y="1371600"/>
-            <a:ext cx="3246120" cy="1051560"/>
+          <p:cNvPr id="13" name="TextBox 12"/>
+          <p:cNvSpPr txBox="1"/>
+          <p:nvPr/>
+        </p:nvSpPr>
+        <p:spPr>
+          <a:xfrm>
+            <a:off x="8065008" y="1280160"/>
+            <a:ext cx="3200400" cy="274320"/>
           </a:xfrm>
           <a:prstGeom prst="rect">
             <a:avLst/>
@@ -9205,29 +9469,64 @@
           <a:p>
             <a:pPr algn="l"/>
             <a:r>
-              <a:rPr sz="2400" b="0" i="0" lang="zh-CN" altLang="en-US">
-                <a:solidFill>
-                  <a:srgbClr val="141414"/>
+              <a:rPr sz="1400" b="0" i="0" lang="zh-CN" altLang="en-US">
+                <a:solidFill>
+                  <a:srgbClr val="9E1B1B"/>
                 </a:solidFill>
                 <a:latin typeface="Noto Sans CJK SC Medium"/>
                 <a:ea typeface="Noto Sans CJK SC Medium"/>
                 <a:cs typeface="Noto Sans CJK SC Medium"/>
               </a:rPr>
-              <a:t>育苗就开始的合同</a:t>
-            </a:r>
-          </a:p>
-        </p:txBody>
-      </p:sp>
-      <p:sp>
-        <p:nvSpPr>
-          <p:cNvPr id="12" name="TextBox 11"/>
-          <p:cNvSpPr txBox="1"/>
-          <p:nvPr/>
-        </p:nvSpPr>
-        <p:spPr>
-          <a:xfrm>
-            <a:off x="8065008" y="2560320"/>
-            <a:ext cx="3246120" cy="1645920"/>
+              <a:t>03</a:t>
+            </a:r>
+          </a:p>
+        </p:txBody>
+      </p:sp>
+      <p:sp>
+        <p:nvSpPr>
+          <p:cNvPr id="14" name="TextBox 13"/>
+          <p:cNvSpPr txBox="1"/>
+          <p:nvPr/>
+        </p:nvSpPr>
+        <p:spPr>
+          <a:xfrm>
+            <a:off x="8065008" y="1691640"/>
+            <a:ext cx="3246120" cy="640080"/>
+          </a:xfrm>
+          <a:prstGeom prst="rect">
+            <a:avLst/>
+          </a:prstGeom>
+          <a:noFill/>
+        </p:spPr>
+        <p:txBody>
+          <a:bodyPr wrap="square" anchor="t" lIns="0" rIns="0" tIns="0" bIns="0"/>
+          <a:lstStyle/>
+          <a:p>
+            <a:pPr algn="l"/>
+            <a:r>
+              <a:rPr sz="2600" b="0" i="0" lang="zh-CN" altLang="en-US">
+                <a:solidFill>
+                  <a:srgbClr val="141414"/>
+                </a:solidFill>
+                <a:latin typeface="Noto Sans CJK SC Medium"/>
+                <a:ea typeface="Noto Sans CJK SC Medium"/>
+                <a:cs typeface="Noto Sans CJK SC Medium"/>
+              </a:rPr>
+              <a:t>搬到墙外</a:t>
+            </a:r>
+          </a:p>
+        </p:txBody>
+      </p:sp>
+      <p:sp>
+        <p:nvSpPr>
+          <p:cNvPr id="15" name="TextBox 14"/>
+          <p:cNvSpPr txBox="1"/>
+          <p:nvPr/>
+        </p:nvSpPr>
+        <p:spPr>
+          <a:xfrm>
+            <a:off x="8065008" y="2514600"/>
+            <a:ext cx="3246120" cy="1691640"/>
           </a:xfrm>
           <a:prstGeom prst="rect">
             <a:avLst/>
@@ -9252,16 +9551,17 @@
                 <a:ea typeface="Noto Sans CJK SC"/>
                 <a:cs typeface="Noto Sans CJK SC"/>
               </a:rPr>
-              <a:t>川芎、当归、白芍从育苗起要一两年。
-合同在涨价之前锁上。
-农活不会，就公司带。</a:t>
-            </a:r>
-          </a:p>
-        </p:txBody>
-      </p:sp>
-      <p:sp>
-        <p:nvSpPr>
-          <p:cNvPr id="13" name="Rectangle 12"/>
+              <a:t>下一道工序盖在原料厂的院墙外，
+用管道接。
+运的那一趟被拿掉，
+才不是在谈运费。</a:t>
+            </a:r>
+          </a:p>
+        </p:txBody>
+      </p:sp>
+      <p:sp>
+        <p:nvSpPr>
+          <p:cNvPr id="16" name="Rectangle 15"/>
           <p:cNvSpPr/>
           <p:nvPr/>
         </p:nvSpPr>
@@ -9304,7 +9604,7 @@
       </p:sp>
       <p:sp>
         <p:nvSpPr>
-          <p:cNvPr id="14" name="TextBox 13"/>
+          <p:cNvPr id="17" name="TextBox 16"/>
           <p:cNvSpPr txBox="1"/>
           <p:nvPr/>
         </p:nvSpPr>
@@ -9336,15 +9636,15 @@
                 <a:ea typeface="Noto Sans CJK SC Medium"/>
                 <a:cs typeface="Noto Sans CJK SC Medium"/>
               </a:rPr>
-              <a:t>大量生产不是第一步。
-这个数、这张图纸、这份合同，才是。</a:t>
-            </a:r>
-          </a:p>
-        </p:txBody>
-      </p:sp>
-      <p:sp>
-        <p:nvSpPr>
-          <p:cNvPr id="15" name="TextBox 14"/>
+              <a:t>第一件，谁都会做。
+后两件，才是一贯工程。</a:t>
+            </a:r>
+          </a:p>
+        </p:txBody>
+      </p:sp>
+      <p:sp>
+        <p:nvSpPr>
+          <p:cNvPr id="18" name="TextBox 17"/>
           <p:cNvSpPr txBox="1"/>
           <p:nvPr/>
         </p:nvSpPr>
@@ -9468,7 +9768,7 @@
                 <a:ea typeface="Noto Sans CJK SC Medium"/>
                 <a:cs typeface="Noto Sans CJK SC Medium"/>
               </a:rPr>
-              <a:t>个人平台，先改变事业者</a:t>
+              <a:t>中国产线上就做这四件</a:t>
             </a:r>
           </a:p>
         </p:txBody>
@@ -9524,8 +9824,8 @@
         </p:nvSpPr>
         <p:spPr>
           <a:xfrm>
-            <a:off x="658368" y="1207008"/>
-            <a:ext cx="3200400" cy="237744"/>
+            <a:off x="658368" y="1170432"/>
+            <a:ext cx="640080" cy="329184"/>
           </a:xfrm>
           <a:prstGeom prst="rect">
             <a:avLst/>
@@ -9538,7 +9838,7 @@
           <a:p>
             <a:pPr algn="l"/>
             <a:r>
-              <a:rPr sz="1400" b="0" i="0" lang="zh-CN" altLang="en-US">
+              <a:rPr sz="1600" b="0" i="0" lang="zh-CN" altLang="en-US">
                 <a:solidFill>
                   <a:srgbClr val="9E1B1B"/>
                 </a:solidFill>
@@ -9559,8 +9859,8 @@
         </p:nvSpPr>
         <p:spPr>
           <a:xfrm>
-            <a:off x="658368" y="1499616"/>
-            <a:ext cx="3246120" cy="640080"/>
+            <a:off x="1417320" y="1152144"/>
+            <a:ext cx="9966960" cy="365760"/>
           </a:xfrm>
           <a:prstGeom prst="rect">
             <a:avLst/>
@@ -9581,7 +9881,7 @@
                 <a:ea typeface="Noto Sans CJK SC Medium"/>
                 <a:cs typeface="Noto Sans CJK SC Medium"/>
               </a:rPr>
-              <a:t>八个阶段在里面</a:t>
+              <a:t>一个模具做大</a:t>
             </a:r>
           </a:p>
         </p:txBody>
@@ -9594,23 +9894,19 @@
         </p:nvSpPr>
         <p:spPr>
           <a:xfrm>
-            <a:off x="658368" y="2240280"/>
-            <a:ext cx="3246120" cy="1965960"/>
-          </a:xfrm>
-          <a:prstGeom prst="rect">
-            <a:avLst/>
-          </a:prstGeom>
-          <a:noFill/>
-        </p:spPr>
-        <p:txBody>
-          <a:bodyPr wrap="square" anchor="t" lIns="0" rIns="0" tIns="0" bIns="0"/>
-          <a:lstStyle/>
-          <a:p>
-            <a:pPr algn="l">
-              <a:lnSpc>
-                <a:spcPct val="135000"/>
-              </a:lnSpc>
-            </a:pPr>
+            <a:off x="1417320" y="1554480"/>
+            <a:ext cx="9966960" cy="640080"/>
+          </a:xfrm>
+          <a:prstGeom prst="rect">
+            <a:avLst/>
+          </a:prstGeom>
+          <a:noFill/>
+        </p:spPr>
+        <p:txBody>
+          <a:bodyPr wrap="square" anchor="t" lIns="0" rIns="0" tIns="0" bIns="0"/>
+          <a:lstStyle/>
+          <a:p>
+            <a:pPr algn="l"/>
             <a:r>
               <a:rPr sz="1500" b="0" i="0" lang="zh-CN" altLang="en-US">
                 <a:solidFill>
@@ -9620,68 +9916,21 @@
                 <a:ea typeface="Noto Sans CJK SC"/>
                 <a:cs typeface="Noto Sans CJK SC"/>
               </a:rPr>
-              <a:t>产品懂得多少，
-八个阶段走到哪一步，
-下一步学什么，都在里面。
-中国法人做成中文的路径。
-人不用等一场酒店课。</a:t>
-            </a:r>
-          </a:p>
-        </p:txBody>
-      </p:sp>
-      <p:sp>
-        <p:nvSpPr>
-          <p:cNvPr id="8" name="Rectangle 7"/>
-          <p:cNvSpPr/>
-          <p:nvPr/>
-        </p:nvSpPr>
-        <p:spPr>
-          <a:xfrm>
-            <a:off x="4160520" y="1207008"/>
-            <a:ext cx="10972" cy="3063240"/>
-          </a:xfrm>
-          <a:prstGeom prst="rect">
-            <a:avLst/>
-          </a:prstGeom>
-          <a:solidFill>
-            <a:srgbClr val="E2E2E2"/>
-          </a:solidFill>
-          <a:ln>
-            <a:noFill/>
-          </a:ln>
-        </p:spPr>
-        <p:style>
-          <a:lnRef idx="1">
-            <a:schemeClr val="accent1"/>
-          </a:lnRef>
-          <a:fillRef idx="3">
-            <a:schemeClr val="accent1"/>
-          </a:fillRef>
-          <a:effectRef idx="2">
-            <a:schemeClr val="accent1"/>
-          </a:effectRef>
-          <a:fontRef idx="minor">
-            <a:schemeClr val="lt1"/>
-          </a:fontRef>
-        </p:style>
-        <p:txBody>
-          <a:bodyPr rtlCol="0" anchor="ctr"/>
-          <a:lstStyle/>
-          <a:p>
-            <a:pPr algn="ctr"/>
-          </a:p>
-        </p:txBody>
-      </p:sp>
-      <p:sp>
-        <p:nvSpPr>
-          <p:cNvPr id="9" name="TextBox 8"/>
-          <p:cNvSpPr txBox="1"/>
-          <p:nvPr/>
-        </p:nvSpPr>
-        <p:spPr>
-          <a:xfrm>
-            <a:off x="4361688" y="1207008"/>
-            <a:ext cx="3200400" cy="237744"/>
+              <a:t>牙刷造型不改。腔数做大，机器换大，原料买吨袋，付现金。再换一个造型，腔数就做不大。</a:t>
+            </a:r>
+          </a:p>
+        </p:txBody>
+      </p:sp>
+      <p:sp>
+        <p:nvSpPr>
+          <p:cNvPr id="8" name="TextBox 7"/>
+          <p:cNvSpPr txBox="1"/>
+          <p:nvPr/>
+        </p:nvSpPr>
+        <p:spPr>
+          <a:xfrm>
+            <a:off x="658368" y="2377440"/>
+            <a:ext cx="640080" cy="329184"/>
           </a:xfrm>
           <a:prstGeom prst="rect">
             <a:avLst/>
@@ -9694,7 +9943,7 @@
           <a:p>
             <a:pPr algn="l"/>
             <a:r>
-              <a:rPr sz="1400" b="0" i="0" lang="zh-CN" altLang="en-US">
+              <a:rPr sz="1600" b="0" i="0" lang="zh-CN" altLang="en-US">
                 <a:solidFill>
                   <a:srgbClr val="9E1B1B"/>
                 </a:solidFill>
@@ -9709,14 +9958,14 @@
       </p:sp>
       <p:sp>
         <p:nvSpPr>
-          <p:cNvPr id="10" name="TextBox 9"/>
-          <p:cNvSpPr txBox="1"/>
-          <p:nvPr/>
-        </p:nvSpPr>
-        <p:spPr>
-          <a:xfrm>
-            <a:off x="4361688" y="1499616"/>
-            <a:ext cx="3246120" cy="640080"/>
+          <p:cNvPr id="9" name="TextBox 8"/>
+          <p:cNvSpPr txBox="1"/>
+          <p:nvPr/>
+        </p:nvSpPr>
+        <p:spPr>
+          <a:xfrm>
+            <a:off x="1417320" y="2359152"/>
+            <a:ext cx="9966960" cy="365760"/>
           </a:xfrm>
           <a:prstGeom prst="rect">
             <a:avLst/>
@@ -9737,36 +9986,32 @@
                 <a:ea typeface="Noto Sans CJK SC Medium"/>
                 <a:cs typeface="Noto Sans CJK SC Medium"/>
               </a:rPr>
-              <a:t>一百到二百支骨架</a:t>
-            </a:r>
-          </a:p>
-        </p:txBody>
-      </p:sp>
-      <p:sp>
-        <p:nvSpPr>
-          <p:cNvPr id="11" name="TextBox 10"/>
-          <p:cNvSpPr txBox="1"/>
-          <p:nvPr/>
-        </p:nvSpPr>
-        <p:spPr>
-          <a:xfrm>
-            <a:off x="4361688" y="2240280"/>
-            <a:ext cx="3246120" cy="1965960"/>
-          </a:xfrm>
-          <a:prstGeom prst="rect">
-            <a:avLst/>
-          </a:prstGeom>
-          <a:noFill/>
-        </p:spPr>
-        <p:txBody>
-          <a:bodyPr wrap="square" anchor="t" lIns="0" rIns="0" tIns="0" bIns="0"/>
-          <a:lstStyle/>
-          <a:p>
-            <a:pPr algn="l">
-              <a:lnSpc>
-                <a:spcPct val="135000"/>
-              </a:lnSpc>
-            </a:pPr>
+              <a:t>一种配方，罐子不洗</a:t>
+            </a:r>
+          </a:p>
+        </p:txBody>
+      </p:sp>
+      <p:sp>
+        <p:nvSpPr>
+          <p:cNvPr id="10" name="TextBox 9"/>
+          <p:cNvSpPr txBox="1"/>
+          <p:nvPr/>
+        </p:nvSpPr>
+        <p:spPr>
+          <a:xfrm>
+            <a:off x="1417320" y="2761488"/>
+            <a:ext cx="9966960" cy="640080"/>
+          </a:xfrm>
+          <a:prstGeom prst="rect">
+            <a:avLst/>
+          </a:prstGeom>
+          <a:noFill/>
+        </p:spPr>
+        <p:txBody>
+          <a:bodyPr wrap="square" anchor="t" lIns="0" rIns="0" tIns="0" bIns="0"/>
+          <a:lstStyle/>
+          <a:p>
+            <a:pPr algn="l"/>
             <a:r>
               <a:rPr sz="1500" b="0" i="0" lang="zh-CN" altLang="en-US">
                 <a:solidFill>
@@ -9776,68 +10021,21 @@
                 <a:ea typeface="Noto Sans CJK SC"/>
                 <a:cs typeface="Noto Sans CJK SC"/>
               </a:rPr>
-              <a:t>到明年年底先打好骨架。
-事业者换成自己的脸、
-自己的讲法。
-一小时收成五分钟。
-说明在这个人的平台上完成。</a:t>
-            </a:r>
-          </a:p>
-        </p:txBody>
-      </p:sp>
-      <p:sp>
-        <p:nvSpPr>
-          <p:cNvPr id="12" name="Rectangle 11"/>
-          <p:cNvSpPr/>
-          <p:nvPr/>
-        </p:nvSpPr>
-        <p:spPr>
-          <a:xfrm>
-            <a:off x="7863840" y="1207008"/>
-            <a:ext cx="10972" cy="3063240"/>
-          </a:xfrm>
-          <a:prstGeom prst="rect">
-            <a:avLst/>
-          </a:prstGeom>
-          <a:solidFill>
-            <a:srgbClr val="E2E2E2"/>
-          </a:solidFill>
-          <a:ln>
-            <a:noFill/>
-          </a:ln>
-        </p:spPr>
-        <p:style>
-          <a:lnRef idx="1">
-            <a:schemeClr val="accent1"/>
-          </a:lnRef>
-          <a:fillRef idx="3">
-            <a:schemeClr val="accent1"/>
-          </a:fillRef>
-          <a:effectRef idx="2">
-            <a:schemeClr val="accent1"/>
-          </a:effectRef>
-          <a:fontRef idx="minor">
-            <a:schemeClr val="lt1"/>
-          </a:fontRef>
-        </p:style>
-        <p:txBody>
-          <a:bodyPr rtlCol="0" anchor="ctr"/>
-          <a:lstStyle/>
-          <a:p>
-            <a:pPr algn="ctr"/>
-          </a:p>
-        </p:txBody>
-      </p:sp>
-      <p:sp>
-        <p:nvSpPr>
-          <p:cNvPr id="13" name="TextBox 12"/>
-          <p:cNvSpPr txBox="1"/>
-          <p:nvPr/>
-        </p:nvSpPr>
-        <p:spPr>
-          <a:xfrm>
-            <a:off x="8065008" y="1207008"/>
-            <a:ext cx="3200400" cy="237744"/>
+              <a:t>洗发水四五款并成一款。换料和清洗都在多款里。再加一个口味，清洗就回来。</a:t>
+            </a:r>
+          </a:p>
+        </p:txBody>
+      </p:sp>
+      <p:sp>
+        <p:nvSpPr>
+          <p:cNvPr id="11" name="TextBox 10"/>
+          <p:cNvSpPr txBox="1"/>
+          <p:nvPr/>
+        </p:nvSpPr>
+        <p:spPr>
+          <a:xfrm>
+            <a:off x="658368" y="3584448"/>
+            <a:ext cx="640080" cy="329184"/>
           </a:xfrm>
           <a:prstGeom prst="rect">
             <a:avLst/>
@@ -9850,7 +10048,7 @@
           <a:p>
             <a:pPr algn="l"/>
             <a:r>
-              <a:rPr sz="1400" b="0" i="0" lang="zh-CN" altLang="en-US">
+              <a:rPr sz="1600" b="0" i="0" lang="zh-CN" altLang="en-US">
                 <a:solidFill>
                   <a:srgbClr val="9E1B1B"/>
                 </a:solidFill>
@@ -9865,14 +10063,14 @@
       </p:sp>
       <p:sp>
         <p:nvSpPr>
-          <p:cNvPr id="14" name="TextBox 13"/>
-          <p:cNvSpPr txBox="1"/>
-          <p:nvPr/>
-        </p:nvSpPr>
-        <p:spPr>
-          <a:xfrm>
-            <a:off x="8065008" y="1499616"/>
-            <a:ext cx="3246120" cy="640080"/>
+          <p:cNvPr id="12" name="TextBox 11"/>
+          <p:cNvSpPr txBox="1"/>
+          <p:nvPr/>
+        </p:nvSpPr>
+        <p:spPr>
+          <a:xfrm>
+            <a:off x="1417320" y="3566160"/>
+            <a:ext cx="9966960" cy="365760"/>
           </a:xfrm>
           <a:prstGeom prst="rect">
             <a:avLst/>
@@ -9893,36 +10091,32 @@
                 <a:ea typeface="Noto Sans CJK SC Medium"/>
                 <a:cs typeface="Noto Sans CJK SC Medium"/>
               </a:rPr>
-              <a:t>主人，不是链接</a:t>
-            </a:r>
-          </a:p>
-        </p:txBody>
-      </p:sp>
-      <p:sp>
-        <p:nvSpPr>
-          <p:cNvPr id="15" name="TextBox 14"/>
-          <p:cNvSpPr txBox="1"/>
-          <p:nvPr/>
-        </p:nvSpPr>
-        <p:spPr>
-          <a:xfrm>
-            <a:off x="8065008" y="2240280"/>
-            <a:ext cx="3246120" cy="1965960"/>
-          </a:xfrm>
-          <a:prstGeom prst="rect">
-            <a:avLst/>
-          </a:prstGeom>
-          <a:noFill/>
-        </p:spPr>
-        <p:txBody>
-          <a:bodyPr wrap="square" anchor="t" lIns="0" rIns="0" tIns="0" bIns="0"/>
-          <a:lstStyle/>
-          <a:p>
-            <a:pPr algn="l">
-              <a:lnSpc>
-                <a:spcPct val="135000"/>
-              </a:lnSpc>
-            </a:pPr>
+              <a:t>罐子做大，人还是一个</a:t>
+            </a:r>
+          </a:p>
+        </p:txBody>
+      </p:sp>
+      <p:sp>
+        <p:nvSpPr>
+          <p:cNvPr id="13" name="TextBox 12"/>
+          <p:cNvSpPr txBox="1"/>
+          <p:nvPr/>
+        </p:nvSpPr>
+        <p:spPr>
+          <a:xfrm>
+            <a:off x="1417320" y="3968496"/>
+            <a:ext cx="9966960" cy="640080"/>
+          </a:xfrm>
+          <a:prstGeom prst="rect">
+            <a:avLst/>
+          </a:prstGeom>
+          <a:noFill/>
+        </p:spPr>
+        <p:txBody>
+          <a:bodyPr wrap="square" anchor="t" lIns="0" rIns="0" tIns="0" bIns="0"/>
+          <a:lstStyle/>
+          <a:p>
+            <a:pPr algn="l"/>
             <a:r>
               <a:rPr sz="1500" b="0" i="0" lang="zh-CN" altLang="en-US">
                 <a:solidFill>
@@ -9932,84 +10126,34 @@
                 <a:ea typeface="Noto Sans CJK SC"/>
                 <a:cs typeface="Noto Sans CJK SC"/>
               </a:rPr>
-              <a:t>自己的店、健康、教育，
-收在一处。
-顾客进来就知道为什么买。
-平台本身就是人工智能。</a:t>
-            </a:r>
-          </a:p>
-        </p:txBody>
-      </p:sp>
-      <p:sp>
-        <p:nvSpPr>
-          <p:cNvPr id="16" name="Rectangle 15"/>
-          <p:cNvSpPr/>
-          <p:nvPr/>
-        </p:nvSpPr>
-        <p:spPr>
-          <a:xfrm>
-            <a:off x="658368" y="4754880"/>
-            <a:ext cx="10881360" cy="10972"/>
-          </a:xfrm>
-          <a:prstGeom prst="rect">
-            <a:avLst/>
-          </a:prstGeom>
-          <a:solidFill>
-            <a:srgbClr val="E2E2E2"/>
-          </a:solidFill>
-          <a:ln>
-            <a:noFill/>
-          </a:ln>
-        </p:spPr>
-        <p:style>
-          <a:lnRef idx="1">
-            <a:schemeClr val="accent1"/>
-          </a:lnRef>
-          <a:fillRef idx="3">
-            <a:schemeClr val="accent1"/>
-          </a:fillRef>
-          <a:effectRef idx="2">
-            <a:schemeClr val="accent1"/>
-          </a:effectRef>
-          <a:fontRef idx="minor">
-            <a:schemeClr val="lt1"/>
-          </a:fontRef>
-        </p:style>
-        <p:txBody>
-          <a:bodyPr rtlCol="0" anchor="ctr"/>
-          <a:lstStyle/>
-          <a:p>
-            <a:pPr algn="ctr"/>
-          </a:p>
-        </p:txBody>
-      </p:sp>
-      <p:sp>
-        <p:nvSpPr>
-          <p:cNvPr id="17" name="TextBox 16"/>
-          <p:cNvSpPr txBox="1"/>
-          <p:nvPr/>
-        </p:nvSpPr>
-        <p:spPr>
-          <a:xfrm>
-            <a:off x="658368" y="4956048"/>
-            <a:ext cx="10789920" cy="1051560"/>
-          </a:xfrm>
-          <a:prstGeom prst="rect">
-            <a:avLst/>
-          </a:prstGeom>
-          <a:noFill/>
-        </p:spPr>
-        <p:txBody>
-          <a:bodyPr wrap="square" anchor="t" lIns="0" rIns="0" tIns="0" bIns="0"/>
-          <a:lstStyle/>
-          <a:p>
-            <a:pPr algn="l">
-              <a:lnSpc>
-                <a:spcPct val="130000"/>
-              </a:lnSpc>
-            </a:pPr>
-            <a:r>
-              <a:rPr sz="2200" b="0" i="0" lang="zh-CN" altLang="en-US">
+              <a:t>萃取罐从 0.5 吨做到 18 吨，三十六倍，操作的人仍是一个。要推的是这只罐子，不是多找几家小厂。</a:t>
+            </a:r>
+          </a:p>
+        </p:txBody>
+      </p:sp>
+      <p:sp>
+        <p:nvSpPr>
+          <p:cNvPr id="14" name="TextBox 13"/>
+          <p:cNvSpPr txBox="1"/>
+          <p:nvPr/>
+        </p:nvSpPr>
+        <p:spPr>
+          <a:xfrm>
+            <a:off x="658368" y="4791456"/>
+            <a:ext cx="640080" cy="329184"/>
+          </a:xfrm>
+          <a:prstGeom prst="rect">
+            <a:avLst/>
+          </a:prstGeom>
+          <a:noFill/>
+        </p:spPr>
+        <p:txBody>
+          <a:bodyPr wrap="square" anchor="t" lIns="0" rIns="0" tIns="0" bIns="0"/>
+          <a:lstStyle/>
+          <a:p>
+            <a:pPr algn="l"/>
+            <a:r>
+              <a:rPr sz="1600" b="0" i="0" lang="zh-CN" altLang="en-US">
                 <a:solidFill>
                   <a:srgbClr val="9E1B1B"/>
                 </a:solidFill>
@@ -10017,15 +10161,84 @@
                 <a:ea typeface="Noto Sans CJK SC Medium"/>
                 <a:cs typeface="Noto Sans CJK SC Medium"/>
               </a:rPr>
-              <a:t>教育的大笔费用在这里消失。
-省下来的，还是那三十五个点。</a:t>
-            </a:r>
-          </a:p>
-        </p:txBody>
-      </p:sp>
-      <p:sp>
-        <p:nvSpPr>
-          <p:cNvPr id="18" name="TextBox 17"/>
+              <a:t>04</a:t>
+            </a:r>
+          </a:p>
+        </p:txBody>
+      </p:sp>
+      <p:sp>
+        <p:nvSpPr>
+          <p:cNvPr id="15" name="TextBox 14"/>
+          <p:cNvSpPr txBox="1"/>
+          <p:nvPr/>
+        </p:nvSpPr>
+        <p:spPr>
+          <a:xfrm>
+            <a:off x="1417320" y="4773168"/>
+            <a:ext cx="9966960" cy="365760"/>
+          </a:xfrm>
+          <a:prstGeom prst="rect">
+            <a:avLst/>
+          </a:prstGeom>
+          <a:noFill/>
+        </p:spPr>
+        <p:txBody>
+          <a:bodyPr wrap="square" anchor="t" lIns="0" rIns="0" tIns="0" bIns="0"/>
+          <a:lstStyle/>
+          <a:p>
+            <a:pPr algn="l"/>
+            <a:r>
+              <a:rPr sz="2200" b="0" i="0" lang="zh-CN" altLang="en-US">
+                <a:solidFill>
+                  <a:srgbClr val="141414"/>
+                </a:solidFill>
+                <a:latin typeface="Noto Sans CJK SC Medium"/>
+                <a:ea typeface="Noto Sans CJK SC Medium"/>
+                <a:cs typeface="Noto Sans CJK SC Medium"/>
+              </a:rPr>
+              <a:t>鲜品进罐</a:t>
+            </a:r>
+          </a:p>
+        </p:txBody>
+      </p:sp>
+      <p:sp>
+        <p:nvSpPr>
+          <p:cNvPr id="16" name="TextBox 15"/>
+          <p:cNvSpPr txBox="1"/>
+          <p:nvPr/>
+        </p:nvSpPr>
+        <p:spPr>
+          <a:xfrm>
+            <a:off x="1417320" y="5175504"/>
+            <a:ext cx="9966960" cy="640080"/>
+          </a:xfrm>
+          <a:prstGeom prst="rect">
+            <a:avLst/>
+          </a:prstGeom>
+          <a:noFill/>
+        </p:spPr>
+        <p:txBody>
+          <a:bodyPr wrap="square" anchor="t" lIns="0" rIns="0" tIns="0" bIns="0"/>
+          <a:lstStyle/>
+          <a:p>
+            <a:pPr algn="l"/>
+            <a:r>
+              <a:rPr sz="1500" b="0" i="0" lang="zh-CN" altLang="en-US">
+                <a:solidFill>
+                  <a:srgbClr val="2C2C2C"/>
+                </a:solidFill>
+                <a:latin typeface="Noto Sans CJK SC"/>
+                <a:ea typeface="Noto Sans CJK SC"/>
+                <a:cs typeface="Noto Sans CJK SC"/>
+              </a:rPr>
+              <a:t>川芎、当归、白芍洗净直接煮。干燥和切断是按克卖药才有的。中国法人在产地守的是这一步。</a:t>
+            </a:r>
+          </a:p>
+        </p:txBody>
+      </p:sp>
+      <p:sp>
+        <p:nvSpPr>
+          <p:cNvPr id="17" name="TextBox 16"/>
           <p:cNvSpPr txBox="1"/>
           <p:nvPr/>
         </p:nvSpPr>
@@ -10149,7 +10362,7 @@
                 <a:ea typeface="Noto Sans CJK SC Medium"/>
                 <a:cs typeface="Noto Sans CJK SC Medium"/>
               </a:rPr>
-              <a:t>艾护理对着这个人说</a:t>
+              <a:t>带去合作方的，是这三样</a:t>
             </a:r>
           </a:p>
         </p:txBody>
@@ -10205,8 +10418,8 @@
         </p:nvSpPr>
         <p:spPr>
           <a:xfrm>
-            <a:off x="658368" y="1170432"/>
-            <a:ext cx="5029200" cy="365760"/>
+            <a:off x="658368" y="1371600"/>
+            <a:ext cx="3246120" cy="1051560"/>
           </a:xfrm>
           <a:prstGeom prst="rect">
             <a:avLst/>
@@ -10219,15 +10432,15 @@
           <a:p>
             <a:pPr algn="l"/>
             <a:r>
-              <a:rPr sz="2000" b="0" i="0" lang="zh-CN" altLang="en-US">
-                <a:solidFill>
-                  <a:srgbClr val="9E1B1B"/>
+              <a:rPr sz="2400" b="0" i="0" lang="zh-CN" altLang="en-US">
+                <a:solidFill>
+                  <a:srgbClr val="141414"/>
                 </a:solidFill>
                 <a:latin typeface="Noto Sans CJK SC Medium"/>
                 <a:ea typeface="Noto Sans CJK SC Medium"/>
                 <a:cs typeface="Noto Sans CJK SC Medium"/>
               </a:rPr>
-              <a:t>放进来</a:t>
+              <a:t>一个月十万套</a:t>
             </a:r>
           </a:p>
         </p:txBody>
@@ -10240,91 +10453,25 @@
         </p:nvSpPr>
         <p:spPr>
           <a:xfrm>
-            <a:off x="6263640" y="1170432"/>
-            <a:ext cx="5120640" cy="365760"/>
-          </a:xfrm>
-          <a:prstGeom prst="rect">
-            <a:avLst/>
-          </a:prstGeom>
-          <a:noFill/>
-        </p:spPr>
-        <p:txBody>
-          <a:bodyPr wrap="square" anchor="t" lIns="0" rIns="0" tIns="0" bIns="0"/>
-          <a:lstStyle/>
-          <a:p>
-            <a:pPr algn="l"/>
-            <a:r>
-              <a:rPr sz="2000" b="0" i="0" lang="zh-CN" altLang="en-US">
-                <a:solidFill>
-                  <a:srgbClr val="9E1B1B"/>
-                </a:solidFill>
-                <a:latin typeface="Noto Sans CJK SC Medium"/>
-                <a:ea typeface="Noto Sans CJK SC Medium"/>
-                <a:cs typeface="Noto Sans CJK SC Medium"/>
-              </a:rPr>
-              <a:t>说出来</a:t>
-            </a:r>
-          </a:p>
-        </p:txBody>
-      </p:sp>
-      <p:sp>
-        <p:nvSpPr>
-          <p:cNvPr id="7" name="TextBox 6"/>
-          <p:cNvSpPr txBox="1"/>
-          <p:nvPr/>
-        </p:nvSpPr>
-        <p:spPr>
-          <a:xfrm>
-            <a:off x="658368" y="1572768"/>
-            <a:ext cx="5029200" cy="274320"/>
-          </a:xfrm>
-          <a:prstGeom prst="rect">
-            <a:avLst/>
-          </a:prstGeom>
-          <a:noFill/>
-        </p:spPr>
-        <p:txBody>
-          <a:bodyPr wrap="square" anchor="t" lIns="0" rIns="0" tIns="0" bIns="0"/>
-          <a:lstStyle/>
-          <a:p>
-            <a:pPr algn="l"/>
-            <a:r>
-              <a:rPr sz="1600" b="0" i="0" lang="zh-CN" altLang="en-US">
-                <a:solidFill>
-                  <a:srgbClr val="141414"/>
-                </a:solidFill>
-                <a:latin typeface="Noto Sans CJK SC Medium"/>
-                <a:ea typeface="Noto Sans CJK SC Medium"/>
-                <a:cs typeface="Noto Sans CJK SC Medium"/>
-              </a:rPr>
-              <a:t>每餐一张照片</a:t>
-            </a:r>
-          </a:p>
-        </p:txBody>
-      </p:sp>
-      <p:sp>
-        <p:nvSpPr>
-          <p:cNvPr id="8" name="TextBox 7"/>
-          <p:cNvSpPr txBox="1"/>
-          <p:nvPr/>
-        </p:nvSpPr>
-        <p:spPr>
-          <a:xfrm>
-            <a:off x="658368" y="1847088"/>
-            <a:ext cx="5029200" cy="384048"/>
-          </a:xfrm>
-          <a:prstGeom prst="rect">
-            <a:avLst/>
-          </a:prstGeom>
-          <a:noFill/>
-        </p:spPr>
-        <p:txBody>
-          <a:bodyPr wrap="square" anchor="t" lIns="0" rIns="0" tIns="0" bIns="0"/>
-          <a:lstStyle/>
-          <a:p>
-            <a:pPr algn="l"/>
-            <a:r>
-              <a:rPr sz="1400" b="0" i="0" lang="zh-CN" altLang="en-US">
+            <a:off x="658368" y="2560320"/>
+            <a:ext cx="3246120" cy="1645920"/>
+          </a:xfrm>
+          <a:prstGeom prst="rect">
+            <a:avLst/>
+          </a:prstGeom>
+          <a:noFill/>
+        </p:spPr>
+        <p:txBody>
+          <a:bodyPr wrap="square" anchor="t" lIns="0" rIns="0" tIns="0" bIns="0"/>
+          <a:lstStyle/>
+          <a:p>
+            <a:pPr algn="l">
+              <a:lnSpc>
+                <a:spcPct val="145000"/>
+              </a:lnSpc>
+            </a:pPr>
+            <a:r>
+              <a:rPr sz="1500" b="0" i="0" lang="zh-CN" altLang="en-US">
                 <a:solidFill>
                   <a:srgbClr val="2C2C2C"/>
                 </a:solidFill>
@@ -10332,511 +10479,23 @@
                 <a:ea typeface="Noto Sans CJK SC"/>
                 <a:cs typeface="Noto Sans CJK SC"/>
               </a:rPr>
-              <a:t>碳水、蛋白、脂肪，白米还是玄米，蔬菜和纤维有多少。</a:t>
-            </a:r>
-          </a:p>
-        </p:txBody>
-      </p:sp>
-      <p:sp>
-        <p:nvSpPr>
-          <p:cNvPr id="9" name="TextBox 8"/>
-          <p:cNvSpPr txBox="1"/>
-          <p:nvPr/>
-        </p:nvSpPr>
-        <p:spPr>
-          <a:xfrm>
-            <a:off x="658368" y="2267712"/>
-            <a:ext cx="5029200" cy="274320"/>
-          </a:xfrm>
-          <a:prstGeom prst="rect">
-            <a:avLst/>
-          </a:prstGeom>
-          <a:noFill/>
-        </p:spPr>
-        <p:txBody>
-          <a:bodyPr wrap="square" anchor="t" lIns="0" rIns="0" tIns="0" bIns="0"/>
-          <a:lstStyle/>
-          <a:p>
-            <a:pPr algn="l"/>
-            <a:r>
-              <a:rPr sz="1600" b="0" i="0" lang="zh-CN" altLang="en-US">
-                <a:solidFill>
-                  <a:srgbClr val="141414"/>
-                </a:solidFill>
-                <a:latin typeface="Noto Sans CJK SC Medium"/>
-                <a:ea typeface="Noto Sans CJK SC Medium"/>
-                <a:cs typeface="Noto Sans CJK SC Medium"/>
-              </a:rPr>
-              <a:t>身高、体重、步数</a:t>
-            </a:r>
-          </a:p>
-        </p:txBody>
-      </p:sp>
-      <p:sp>
-        <p:nvSpPr>
-          <p:cNvPr id="10" name="TextBox 9"/>
-          <p:cNvSpPr txBox="1"/>
-          <p:nvPr/>
-        </p:nvSpPr>
-        <p:spPr>
-          <a:xfrm>
-            <a:off x="658368" y="2542032"/>
-            <a:ext cx="5029200" cy="384048"/>
-          </a:xfrm>
-          <a:prstGeom prst="rect">
-            <a:avLst/>
-          </a:prstGeom>
-          <a:noFill/>
-        </p:spPr>
-        <p:txBody>
-          <a:bodyPr wrap="square" anchor="t" lIns="0" rIns="0" tIns="0" bIns="0"/>
-          <a:lstStyle/>
-          <a:p>
-            <a:pPr algn="l"/>
-            <a:r>
-              <a:rPr sz="1400" b="0" i="0" lang="zh-CN" altLang="en-US">
-                <a:solidFill>
-                  <a:srgbClr val="2C2C2C"/>
-                </a:solidFill>
-                <a:latin typeface="Noto Sans CJK SC"/>
-                <a:ea typeface="Noto Sans CJK SC"/>
-                <a:cs typeface="Noto Sans CJK SC"/>
-              </a:rPr>
-              <a:t>肥胖还是肌肉，活动够不够。步数从手机接进来。</a:t>
-            </a:r>
-          </a:p>
-        </p:txBody>
-      </p:sp>
-      <p:sp>
-        <p:nvSpPr>
-          <p:cNvPr id="11" name="TextBox 10"/>
-          <p:cNvSpPr txBox="1"/>
-          <p:nvPr/>
-        </p:nvSpPr>
-        <p:spPr>
-          <a:xfrm>
-            <a:off x="658368" y="2962656"/>
-            <a:ext cx="5029200" cy="274320"/>
-          </a:xfrm>
-          <a:prstGeom prst="rect">
-            <a:avLst/>
-          </a:prstGeom>
-          <a:noFill/>
-        </p:spPr>
-        <p:txBody>
-          <a:bodyPr wrap="square" anchor="t" lIns="0" rIns="0" tIns="0" bIns="0"/>
-          <a:lstStyle/>
-          <a:p>
-            <a:pPr algn="l"/>
-            <a:r>
-              <a:rPr sz="1600" b="0" i="0" lang="zh-CN" altLang="en-US">
-                <a:solidFill>
-                  <a:srgbClr val="141414"/>
-                </a:solidFill>
-                <a:latin typeface="Noto Sans CJK SC Medium"/>
-                <a:ea typeface="Noto Sans CJK SC Medium"/>
-                <a:cs typeface="Noto Sans CJK SC Medium"/>
-              </a:rPr>
-              <a:t>用药和注射</a:t>
-            </a:r>
-          </a:p>
-        </p:txBody>
-      </p:sp>
-      <p:sp>
-        <p:nvSpPr>
-          <p:cNvPr id="12" name="TextBox 11"/>
-          <p:cNvSpPr txBox="1"/>
-          <p:nvPr/>
-        </p:nvSpPr>
-        <p:spPr>
-          <a:xfrm>
-            <a:off x="658368" y="3236976"/>
-            <a:ext cx="5029200" cy="384048"/>
-          </a:xfrm>
-          <a:prstGeom prst="rect">
-            <a:avLst/>
-          </a:prstGeom>
-          <a:noFill/>
-        </p:spPr>
-        <p:txBody>
-          <a:bodyPr wrap="square" anchor="t" lIns="0" rIns="0" tIns="0" bIns="0"/>
-          <a:lstStyle/>
-          <a:p>
-            <a:pPr algn="l"/>
-            <a:r>
-              <a:rPr sz="1400" b="0" i="0" lang="zh-CN" altLang="en-US">
-                <a:solidFill>
-                  <a:srgbClr val="2C2C2C"/>
-                </a:solidFill>
-                <a:latin typeface="Noto Sans CJK SC"/>
-                <a:ea typeface="Noto Sans CJK SC"/>
-                <a:cs typeface="Noto Sans CJK SC"/>
-              </a:rPr>
-              <a:t>代谢顺不顺，有连续记录才说得清。</a:t>
-            </a:r>
-          </a:p>
-        </p:txBody>
-      </p:sp>
-      <p:sp>
-        <p:nvSpPr>
-          <p:cNvPr id="13" name="TextBox 12"/>
-          <p:cNvSpPr txBox="1"/>
-          <p:nvPr/>
-        </p:nvSpPr>
-        <p:spPr>
-          <a:xfrm>
-            <a:off x="658368" y="3657600"/>
-            <a:ext cx="5029200" cy="274320"/>
-          </a:xfrm>
-          <a:prstGeom prst="rect">
-            <a:avLst/>
-          </a:prstGeom>
-          <a:noFill/>
-        </p:spPr>
-        <p:txBody>
-          <a:bodyPr wrap="square" anchor="t" lIns="0" rIns="0" tIns="0" bIns="0"/>
-          <a:lstStyle/>
-          <a:p>
-            <a:pPr algn="l"/>
-            <a:r>
-              <a:rPr sz="1600" b="0" i="0" lang="zh-CN" altLang="en-US">
-                <a:solidFill>
-                  <a:srgbClr val="141414"/>
-                </a:solidFill>
-                <a:latin typeface="Noto Sans CJK SC Medium"/>
-                <a:ea typeface="Noto Sans CJK SC Medium"/>
-                <a:cs typeface="Noto Sans CJK SC Medium"/>
-              </a:rPr>
-              <a:t>血和尿可以后补</a:t>
-            </a:r>
-          </a:p>
-        </p:txBody>
-      </p:sp>
-      <p:sp>
-        <p:nvSpPr>
-          <p:cNvPr id="14" name="TextBox 13"/>
-          <p:cNvSpPr txBox="1"/>
-          <p:nvPr/>
-        </p:nvSpPr>
-        <p:spPr>
-          <a:xfrm>
-            <a:off x="658368" y="3931920"/>
-            <a:ext cx="5029200" cy="384048"/>
-          </a:xfrm>
-          <a:prstGeom prst="rect">
-            <a:avLst/>
-          </a:prstGeom>
-          <a:noFill/>
-        </p:spPr>
-        <p:txBody>
-          <a:bodyPr wrap="square" anchor="t" lIns="0" rIns="0" tIns="0" bIns="0"/>
-          <a:lstStyle/>
-          <a:p>
-            <a:pPr algn="l"/>
-            <a:r>
-              <a:rPr sz="1400" b="0" i="0" lang="zh-CN" altLang="en-US">
-                <a:solidFill>
-                  <a:srgbClr val="2C2C2C"/>
-                </a:solidFill>
-                <a:latin typeface="Noto Sans CJK SC"/>
-                <a:ea typeface="Noto Sans CJK SC"/>
-                <a:cs typeface="Noto Sans CJK SC"/>
-              </a:rPr>
-              <a:t>上面这些先每天跑起来。不必等一座医院。</a:t>
-            </a:r>
-          </a:p>
-        </p:txBody>
-      </p:sp>
-      <p:sp>
-        <p:nvSpPr>
-          <p:cNvPr id="15" name="TextBox 14"/>
-          <p:cNvSpPr txBox="1"/>
-          <p:nvPr/>
-        </p:nvSpPr>
-        <p:spPr>
-          <a:xfrm>
-            <a:off x="6263640" y="1572768"/>
-            <a:ext cx="5120640" cy="274320"/>
-          </a:xfrm>
-          <a:prstGeom prst="rect">
-            <a:avLst/>
-          </a:prstGeom>
-          <a:noFill/>
-        </p:spPr>
-        <p:txBody>
-          <a:bodyPr wrap="square" anchor="t" lIns="0" rIns="0" tIns="0" bIns="0"/>
-          <a:lstStyle/>
-          <a:p>
-            <a:pPr algn="l"/>
-            <a:r>
-              <a:rPr sz="1600" b="0" i="0" lang="zh-CN" altLang="en-US">
-                <a:solidFill>
-                  <a:srgbClr val="141414"/>
-                </a:solidFill>
-                <a:latin typeface="Noto Sans CJK SC Medium"/>
-                <a:ea typeface="Noto Sans CJK SC Medium"/>
-                <a:cs typeface="Noto Sans CJK SC Medium"/>
-              </a:rPr>
-              <a:t>该减，还是该补</a:t>
-            </a:r>
-          </a:p>
-        </p:txBody>
-      </p:sp>
-      <p:sp>
-        <p:nvSpPr>
-          <p:cNvPr id="16" name="TextBox 15"/>
-          <p:cNvSpPr txBox="1"/>
-          <p:nvPr/>
-        </p:nvSpPr>
-        <p:spPr>
-          <a:xfrm>
-            <a:off x="6263640" y="1847088"/>
-            <a:ext cx="5120640" cy="384048"/>
-          </a:xfrm>
-          <a:prstGeom prst="rect">
-            <a:avLst/>
-          </a:prstGeom>
-          <a:noFill/>
-        </p:spPr>
-        <p:txBody>
-          <a:bodyPr wrap="square" anchor="t" lIns="0" rIns="0" tIns="0" bIns="0"/>
-          <a:lstStyle/>
-          <a:p>
-            <a:pPr algn="l"/>
-            <a:r>
-              <a:rPr sz="1400" b="0" i="0" lang="zh-CN" altLang="en-US">
-                <a:solidFill>
-                  <a:srgbClr val="2C2C2C"/>
-                </a:solidFill>
-                <a:latin typeface="Noto Sans CJK SC"/>
-                <a:ea typeface="Noto Sans CJK SC"/>
-                <a:cs typeface="Noto Sans CJK SC"/>
-              </a:rPr>
-              <a:t>减碳水，补蛋白；吃多了；或只吃精制，碳水其实不够。</a:t>
-            </a:r>
-          </a:p>
-        </p:txBody>
-      </p:sp>
-      <p:sp>
-        <p:nvSpPr>
-          <p:cNvPr id="17" name="TextBox 16"/>
-          <p:cNvSpPr txBox="1"/>
-          <p:nvPr/>
-        </p:nvSpPr>
-        <p:spPr>
-          <a:xfrm>
-            <a:off x="6263640" y="2267712"/>
-            <a:ext cx="5120640" cy="274320"/>
-          </a:xfrm>
-          <a:prstGeom prst="rect">
-            <a:avLst/>
-          </a:prstGeom>
-          <a:noFill/>
-        </p:spPr>
-        <p:txBody>
-          <a:bodyPr wrap="square" anchor="t" lIns="0" rIns="0" tIns="0" bIns="0"/>
-          <a:lstStyle/>
-          <a:p>
-            <a:pPr algn="l"/>
-            <a:r>
-              <a:rPr sz="1600" b="0" i="0" lang="zh-CN" altLang="en-US">
-                <a:solidFill>
-                  <a:srgbClr val="141414"/>
-                </a:solidFill>
-                <a:latin typeface="Noto Sans CJK SC Medium"/>
-                <a:ea typeface="Noto Sans CJK SC Medium"/>
-                <a:cs typeface="Noto Sans CJK SC Medium"/>
-              </a:rPr>
-              <a:t>一年、五年、十年</a:t>
-            </a:r>
-          </a:p>
-        </p:txBody>
-      </p:sp>
-      <p:sp>
-        <p:nvSpPr>
-          <p:cNvPr id="18" name="TextBox 17"/>
-          <p:cNvSpPr txBox="1"/>
-          <p:nvPr/>
-        </p:nvSpPr>
-        <p:spPr>
-          <a:xfrm>
-            <a:off x="6263640" y="2542032"/>
-            <a:ext cx="5120640" cy="384048"/>
-          </a:xfrm>
-          <a:prstGeom prst="rect">
-            <a:avLst/>
-          </a:prstGeom>
-          <a:noFill/>
-        </p:spPr>
-        <p:txBody>
-          <a:bodyPr wrap="square" anchor="t" lIns="0" rIns="0" tIns="0" bIns="0"/>
-          <a:lstStyle/>
-          <a:p>
-            <a:pPr algn="l"/>
-            <a:r>
-              <a:rPr sz="1400" b="0" i="0" lang="zh-CN" altLang="en-US">
-                <a:solidFill>
-                  <a:srgbClr val="2C2C2C"/>
-                </a:solidFill>
-                <a:latin typeface="Noto Sans CJK SC"/>
-                <a:ea typeface="Noto Sans CJK SC"/>
-                <a:cs typeface="Noto Sans CJK SC"/>
-              </a:rPr>
-              <a:t>照这样下去，身体可以估。家族里带下来的病要能看见。</a:t>
-            </a:r>
-          </a:p>
-        </p:txBody>
-      </p:sp>
-      <p:sp>
-        <p:nvSpPr>
-          <p:cNvPr id="19" name="TextBox 18"/>
-          <p:cNvSpPr txBox="1"/>
-          <p:nvPr/>
-        </p:nvSpPr>
-        <p:spPr>
-          <a:xfrm>
-            <a:off x="6263640" y="2962656"/>
-            <a:ext cx="5120640" cy="274320"/>
-          </a:xfrm>
-          <a:prstGeom prst="rect">
-            <a:avLst/>
-          </a:prstGeom>
-          <a:noFill/>
-        </p:spPr>
-        <p:txBody>
-          <a:bodyPr wrap="square" anchor="t" lIns="0" rIns="0" tIns="0" bIns="0"/>
-          <a:lstStyle/>
-          <a:p>
-            <a:pPr algn="l"/>
-            <a:r>
-              <a:rPr sz="1600" b="0" i="0" lang="zh-CN" altLang="en-US">
-                <a:solidFill>
-                  <a:srgbClr val="141414"/>
-                </a:solidFill>
-                <a:latin typeface="Noto Sans CJK SC Medium"/>
-                <a:ea typeface="Noto Sans CJK SC Medium"/>
-                <a:cs typeface="Noto Sans CJK SC Medium"/>
-              </a:rPr>
-              <a:t>为什么是这一个</a:t>
-            </a:r>
-          </a:p>
-        </p:txBody>
-      </p:sp>
-      <p:sp>
-        <p:nvSpPr>
-          <p:cNvPr id="20" name="TextBox 19"/>
-          <p:cNvSpPr txBox="1"/>
-          <p:nvPr/>
-        </p:nvSpPr>
-        <p:spPr>
-          <a:xfrm>
-            <a:off x="6263640" y="3236976"/>
-            <a:ext cx="5120640" cy="384048"/>
-          </a:xfrm>
-          <a:prstGeom prst="rect">
-            <a:avLst/>
-          </a:prstGeom>
-          <a:noFill/>
-        </p:spPr>
-        <p:txBody>
-          <a:bodyPr wrap="square" anchor="t" lIns="0" rIns="0" tIns="0" bIns="0"/>
-          <a:lstStyle/>
-          <a:p>
-            <a:pPr algn="l"/>
-            <a:r>
-              <a:rPr sz="1400" b="0" i="0" lang="zh-CN" altLang="en-US">
-                <a:solidFill>
-                  <a:srgbClr val="2C2C2C"/>
-                </a:solidFill>
-                <a:latin typeface="Noto Sans CJK SC"/>
-                <a:ea typeface="Noto Sans CJK SC"/>
-                <a:cs typeface="Noto Sans CJK SC"/>
-              </a:rPr>
-              <a:t>水飞蓟不再对所有人说对肝好。这个人的肝，才决定这句话。</a:t>
-            </a:r>
-          </a:p>
-        </p:txBody>
-      </p:sp>
-      <p:sp>
-        <p:nvSpPr>
-          <p:cNvPr id="21" name="TextBox 20"/>
-          <p:cNvSpPr txBox="1"/>
-          <p:nvPr/>
-        </p:nvSpPr>
-        <p:spPr>
-          <a:xfrm>
-            <a:off x="6263640" y="3657600"/>
-            <a:ext cx="5120640" cy="274320"/>
-          </a:xfrm>
-          <a:prstGeom prst="rect">
-            <a:avLst/>
-          </a:prstGeom>
-          <a:noFill/>
-        </p:spPr>
-        <p:txBody>
-          <a:bodyPr wrap="square" anchor="t" lIns="0" rIns="0" tIns="0" bIns="0"/>
-          <a:lstStyle/>
-          <a:p>
-            <a:pPr algn="l"/>
-            <a:r>
-              <a:rPr sz="1600" b="0" i="0" lang="zh-CN" altLang="en-US">
-                <a:solidFill>
-                  <a:srgbClr val="141414"/>
-                </a:solidFill>
-                <a:latin typeface="Noto Sans CJK SC Medium"/>
-                <a:ea typeface="Noto Sans CJK SC Medium"/>
-                <a:cs typeface="Noto Sans CJK SC Medium"/>
-              </a:rPr>
-              <a:t>先进入艾护理</a:t>
-            </a:r>
-          </a:p>
-        </p:txBody>
-      </p:sp>
-      <p:sp>
-        <p:nvSpPr>
-          <p:cNvPr id="22" name="TextBox 21"/>
-          <p:cNvSpPr txBox="1"/>
-          <p:nvPr/>
-        </p:nvSpPr>
-        <p:spPr>
-          <a:xfrm>
-            <a:off x="6263640" y="3931920"/>
-            <a:ext cx="5120640" cy="384048"/>
-          </a:xfrm>
-          <a:prstGeom prst="rect">
-            <a:avLst/>
-          </a:prstGeom>
-          <a:noFill/>
-        </p:spPr>
-        <p:txBody>
-          <a:bodyPr wrap="square" anchor="t" lIns="0" rIns="0" tIns="0" bIns="0"/>
-          <a:lstStyle/>
-          <a:p>
-            <a:pPr algn="l"/>
-            <a:r>
-              <a:rPr sz="1400" b="0" i="0" lang="zh-CN" altLang="en-US">
-                <a:solidFill>
-                  <a:srgbClr val="2C2C2C"/>
-                </a:solidFill>
-                <a:latin typeface="Noto Sans CJK SC"/>
-                <a:ea typeface="Noto Sans CJK SC"/>
-                <a:cs typeface="Noto Sans CJK SC"/>
-              </a:rPr>
-              <a:t>介绍别人，先把对方的记录建起来，再谈产品。</a:t>
-            </a:r>
-          </a:p>
-        </p:txBody>
-      </p:sp>
-      <p:sp>
-        <p:nvSpPr>
-          <p:cNvPr id="23" name="Rectangle 22"/>
+              <a:t>价格按这个量重算，
+才落到原来的十分之一。
+交出去的是能排产的这个数。</a:t>
+            </a:r>
+          </a:p>
+        </p:txBody>
+      </p:sp>
+      <p:sp>
+        <p:nvSpPr>
+          <p:cNvPr id="7" name="Rectangle 6"/>
           <p:cNvSpPr/>
           <p:nvPr/>
         </p:nvSpPr>
         <p:spPr>
           <a:xfrm>
-            <a:off x="5897880" y="1170432"/>
-            <a:ext cx="10972" cy="3200400"/>
+            <a:off x="4160520" y="1280160"/>
+            <a:ext cx="10972" cy="2880360"/>
           </a:xfrm>
           <a:prstGeom prst="rect">
             <a:avLst/>
@@ -10872,14 +10531,90 @@
       </p:sp>
       <p:sp>
         <p:nvSpPr>
-          <p:cNvPr id="24" name="Rectangle 23"/>
+          <p:cNvPr id="8" name="TextBox 7"/>
+          <p:cNvSpPr txBox="1"/>
+          <p:nvPr/>
+        </p:nvSpPr>
+        <p:spPr>
+          <a:xfrm>
+            <a:off x="4361688" y="1371600"/>
+            <a:ext cx="3246120" cy="1051560"/>
+          </a:xfrm>
+          <a:prstGeom prst="rect">
+            <a:avLst/>
+          </a:prstGeom>
+          <a:noFill/>
+        </p:spPr>
+        <p:txBody>
+          <a:bodyPr wrap="square" anchor="t" lIns="0" rIns="0" tIns="0" bIns="0"/>
+          <a:lstStyle/>
+          <a:p>
+            <a:pPr algn="l"/>
+            <a:r>
+              <a:rPr sz="2400" b="0" i="0" lang="zh-CN" altLang="en-US">
+                <a:solidFill>
+                  <a:srgbClr val="141414"/>
+                </a:solidFill>
+                <a:latin typeface="Noto Sans CJK SC Medium"/>
+                <a:ea typeface="Noto Sans CJK SC Medium"/>
+                <a:cs typeface="Noto Sans CJK SC Medium"/>
+              </a:rPr>
+              <a:t>设备图纸</a:t>
+            </a:r>
+          </a:p>
+        </p:txBody>
+      </p:sp>
+      <p:sp>
+        <p:nvSpPr>
+          <p:cNvPr id="9" name="TextBox 8"/>
+          <p:cNvSpPr txBox="1"/>
+          <p:nvPr/>
+        </p:nvSpPr>
+        <p:spPr>
+          <a:xfrm>
+            <a:off x="4361688" y="2560320"/>
+            <a:ext cx="3246120" cy="1645920"/>
+          </a:xfrm>
+          <a:prstGeom prst="rect">
+            <a:avLst/>
+          </a:prstGeom>
+          <a:noFill/>
+        </p:spPr>
+        <p:txBody>
+          <a:bodyPr wrap="square" anchor="t" lIns="0" rIns="0" tIns="0" bIns="0"/>
+          <a:lstStyle/>
+          <a:p>
+            <a:pPr algn="l">
+              <a:lnSpc>
+                <a:spcPct val="145000"/>
+              </a:lnSpc>
+            </a:pPr>
+            <a:r>
+              <a:rPr sz="1500" b="0" i="0" lang="zh-CN" altLang="en-US">
+                <a:solidFill>
+                  <a:srgbClr val="2C2C2C"/>
+                </a:solidFill>
+                <a:latin typeface="Noto Sans CJK SC"/>
+                <a:ea typeface="Noto Sans CJK SC"/>
+                <a:cs typeface="Noto Sans CJK SC"/>
+              </a:rPr>
+              <a:t>设备公司出。没有厂房，就在旁边盖。
+原料买断，对方只运转。
+拿去的是图纸，不是询价单。</a:t>
+            </a:r>
+          </a:p>
+        </p:txBody>
+      </p:sp>
+      <p:sp>
+        <p:nvSpPr>
+          <p:cNvPr id="10" name="Rectangle 9"/>
           <p:cNvSpPr/>
           <p:nvPr/>
         </p:nvSpPr>
         <p:spPr>
           <a:xfrm>
-            <a:off x="658368" y="4617720"/>
-            <a:ext cx="10881360" cy="10972"/>
+            <a:off x="7863840" y="1280160"/>
+            <a:ext cx="10972" cy="2880360"/>
           </a:xfrm>
           <a:prstGeom prst="rect">
             <a:avLst/>
@@ -10915,47 +10650,166 @@
       </p:sp>
       <p:sp>
         <p:nvSpPr>
-          <p:cNvPr id="25" name="TextBox 24"/>
-          <p:cNvSpPr txBox="1"/>
-          <p:nvPr/>
-        </p:nvSpPr>
-        <p:spPr>
-          <a:xfrm>
-            <a:off x="658368" y="4773168"/>
-            <a:ext cx="10789920" cy="1051560"/>
-          </a:xfrm>
-          <a:prstGeom prst="rect">
-            <a:avLst/>
-          </a:prstGeom>
-          <a:noFill/>
-        </p:spPr>
-        <p:txBody>
-          <a:bodyPr wrap="square" anchor="t" lIns="0" rIns="0" tIns="0" bIns="0"/>
-          <a:lstStyle/>
-          <a:p>
-            <a:pPr algn="l">
-              <a:lnSpc>
-                <a:spcPct val="130000"/>
-              </a:lnSpc>
-            </a:pPr>
-            <a:r>
-              <a:rPr sz="1800" b="0" i="0" lang="zh-CN" altLang="en-US">
-                <a:solidFill>
-                  <a:srgbClr val="9E1B1B"/>
+          <p:cNvPr id="11" name="TextBox 10"/>
+          <p:cNvSpPr txBox="1"/>
+          <p:nvPr/>
+        </p:nvSpPr>
+        <p:spPr>
+          <a:xfrm>
+            <a:off x="8065008" y="1371600"/>
+            <a:ext cx="3246120" cy="1051560"/>
+          </a:xfrm>
+          <a:prstGeom prst="rect">
+            <a:avLst/>
+          </a:prstGeom>
+          <a:noFill/>
+        </p:spPr>
+        <p:txBody>
+          <a:bodyPr wrap="square" anchor="t" lIns="0" rIns="0" tIns="0" bIns="0"/>
+          <a:lstStyle/>
+          <a:p>
+            <a:pPr algn="l"/>
+            <a:r>
+              <a:rPr sz="2400" b="0" i="0" lang="zh-CN" altLang="en-US">
+                <a:solidFill>
+                  <a:srgbClr val="141414"/>
                 </a:solidFill>
                 <a:latin typeface="Noto Sans CJK SC Medium"/>
                 <a:ea typeface="Noto Sans CJK SC Medium"/>
                 <a:cs typeface="Noto Sans CJK SC Medium"/>
               </a:rPr>
-              <a:t>终点是个人健康数据银行。本人同意，隐私守住。
-人连续用，下个月那只罐子要排的数才看得见。</a:t>
-            </a:r>
-          </a:p>
-        </p:txBody>
-      </p:sp>
-      <p:sp>
-        <p:nvSpPr>
-          <p:cNvPr id="26" name="TextBox 25"/>
+              <a:t>育苗就开始的合同</a:t>
+            </a:r>
+          </a:p>
+        </p:txBody>
+      </p:sp>
+      <p:sp>
+        <p:nvSpPr>
+          <p:cNvPr id="12" name="TextBox 11"/>
+          <p:cNvSpPr txBox="1"/>
+          <p:nvPr/>
+        </p:nvSpPr>
+        <p:spPr>
+          <a:xfrm>
+            <a:off x="8065008" y="2560320"/>
+            <a:ext cx="3246120" cy="1645920"/>
+          </a:xfrm>
+          <a:prstGeom prst="rect">
+            <a:avLst/>
+          </a:prstGeom>
+          <a:noFill/>
+        </p:spPr>
+        <p:txBody>
+          <a:bodyPr wrap="square" anchor="t" lIns="0" rIns="0" tIns="0" bIns="0"/>
+          <a:lstStyle/>
+          <a:p>
+            <a:pPr algn="l">
+              <a:lnSpc>
+                <a:spcPct val="145000"/>
+              </a:lnSpc>
+            </a:pPr>
+            <a:r>
+              <a:rPr sz="1500" b="0" i="0" lang="zh-CN" altLang="en-US">
+                <a:solidFill>
+                  <a:srgbClr val="2C2C2C"/>
+                </a:solidFill>
+                <a:latin typeface="Noto Sans CJK SC"/>
+                <a:ea typeface="Noto Sans CJK SC"/>
+                <a:cs typeface="Noto Sans CJK SC"/>
+              </a:rPr>
+              <a:t>川芎、当归、白芍从育苗起要一两年。
+合同在涨价之前锁上。
+农活不会，就公司带。</a:t>
+            </a:r>
+          </a:p>
+        </p:txBody>
+      </p:sp>
+      <p:sp>
+        <p:nvSpPr>
+          <p:cNvPr id="13" name="Rectangle 12"/>
+          <p:cNvSpPr/>
+          <p:nvPr/>
+        </p:nvSpPr>
+        <p:spPr>
+          <a:xfrm>
+            <a:off x="658368" y="4709160"/>
+            <a:ext cx="10881360" cy="10972"/>
+          </a:xfrm>
+          <a:prstGeom prst="rect">
+            <a:avLst/>
+          </a:prstGeom>
+          <a:solidFill>
+            <a:srgbClr val="E2E2E2"/>
+          </a:solidFill>
+          <a:ln>
+            <a:noFill/>
+          </a:ln>
+        </p:spPr>
+        <p:style>
+          <a:lnRef idx="1">
+            <a:schemeClr val="accent1"/>
+          </a:lnRef>
+          <a:fillRef idx="3">
+            <a:schemeClr val="accent1"/>
+          </a:fillRef>
+          <a:effectRef idx="2">
+            <a:schemeClr val="accent1"/>
+          </a:effectRef>
+          <a:fontRef idx="minor">
+            <a:schemeClr val="lt1"/>
+          </a:fontRef>
+        </p:style>
+        <p:txBody>
+          <a:bodyPr rtlCol="0" anchor="ctr"/>
+          <a:lstStyle/>
+          <a:p>
+            <a:pPr algn="ctr"/>
+          </a:p>
+        </p:txBody>
+      </p:sp>
+      <p:sp>
+        <p:nvSpPr>
+          <p:cNvPr id="14" name="TextBox 13"/>
+          <p:cNvSpPr txBox="1"/>
+          <p:nvPr/>
+        </p:nvSpPr>
+        <p:spPr>
+          <a:xfrm>
+            <a:off x="658368" y="4983480"/>
+            <a:ext cx="10789920" cy="1097280"/>
+          </a:xfrm>
+          <a:prstGeom prst="rect">
+            <a:avLst/>
+          </a:prstGeom>
+          <a:noFill/>
+        </p:spPr>
+        <p:txBody>
+          <a:bodyPr wrap="square" anchor="t" lIns="0" rIns="0" tIns="0" bIns="0"/>
+          <a:lstStyle/>
+          <a:p>
+            <a:pPr algn="l">
+              <a:lnSpc>
+                <a:spcPct val="135000"/>
+              </a:lnSpc>
+            </a:pPr>
+            <a:r>
+              <a:rPr sz="2200" b="0" i="0" lang="zh-CN" altLang="en-US">
+                <a:solidFill>
+                  <a:srgbClr val="9E1B1B"/>
+                </a:solidFill>
+                <a:latin typeface="Noto Sans CJK SC Medium"/>
+                <a:ea typeface="Noto Sans CJK SC Medium"/>
+                <a:cs typeface="Noto Sans CJK SC Medium"/>
+              </a:rPr>
+              <a:t>大量生产不是第一步。
+这个数、这张图纸、这份合同，才是。</a:t>
+            </a:r>
+          </a:p>
+        </p:txBody>
+      </p:sp>
+      <p:sp>
+        <p:nvSpPr>
+          <p:cNvPr id="15" name="TextBox 14"/>
           <p:cNvSpPr txBox="1"/>
           <p:nvPr/>
         </p:nvSpPr>
@@ -11079,7 +10933,7 @@
                 <a:ea typeface="Noto Sans CJK SC Medium"/>
                 <a:cs typeface="Noto Sans CJK SC Medium"/>
               </a:rPr>
-              <a:t>阿扎让人每天走进来</a:t>
+              <a:t>个人平台，先改变事业者</a:t>
             </a:r>
           </a:p>
         </p:txBody>
@@ -11192,7 +11046,7 @@
                 <a:ea typeface="Noto Sans CJK SC Medium"/>
                 <a:cs typeface="Noto Sans CJK SC Medium"/>
               </a:rPr>
-              <a:t>十万个，不赚一百兆</a:t>
+              <a:t>八个阶段在里面</a:t>
             </a:r>
           </a:p>
         </p:txBody>
@@ -11231,11 +11085,11 @@
                 <a:ea typeface="Noto Sans CJK SC"/>
                 <a:cs typeface="Noto Sans CJK SC"/>
               </a:rPr>
-              <a:t>鸡蛋、油、充电接进来。
-一百兆由大约五百个
-主力品目赚。
-阿扎做的是热狗那一件事：
-让人每天打开这个平台。</a:t>
+              <a:t>产品懂得多少，
+八个阶段走到哪一步，
+下一步学什么，都在里面。
+中国法人做成中文的路径。
+人不用等一场酒店课。</a:t>
             </a:r>
           </a:p>
         </p:txBody>
@@ -11348,7 +11202,7 @@
                 <a:ea typeface="Noto Sans CJK SC Medium"/>
                 <a:cs typeface="Noto Sans CJK SC Medium"/>
               </a:rPr>
-              <a:t>鲭鱼回答不了</a:t>
+              <a:t>一百到二百支骨架</a:t>
             </a:r>
           </a:p>
         </p:txBody>
@@ -11387,10 +11241,11 @@
                 <a:ea typeface="Noto Sans CJK SC"/>
                 <a:cs typeface="Noto Sans CJK SC"/>
               </a:rPr>
-              <a:t>成本率到七成五的日常品，
-单靠它到不了一百兆。
-它负责人每天来。
-主力品目负责赚。</a:t>
+              <a:t>到明年年底先打好骨架。
+事业者换成自己的脸、
+自己的讲法。
+一小时收成五分钟。
+说明在这个人的平台上完成。</a:t>
             </a:r>
           </a:p>
         </p:txBody>
@@ -11503,7 +11358,7 @@
                 <a:ea typeface="Noto Sans CJK SC Medium"/>
                 <a:cs typeface="Noto Sans CJK SC Medium"/>
               </a:rPr>
-              <a:t>电在规则里累积</a:t>
+              <a:t>主人，不是链接</a:t>
             </a:r>
           </a:p>
         </p:txBody>
@@ -11542,11 +11397,10 @@
                 <a:ea typeface="Noto Sans CJK SC"/>
                 <a:cs typeface="Noto Sans CJK SC"/>
               </a:rPr>
-              <a:t>不卖加油券，
-走联名卡积分。
-中国电动车多。
-家用的电也要能累积。
-办法在规则里面。</a:t>
+              <a:t>自己的店、健康、教育，
+收在一处。
+顾客进来就知道为什么买。
+平台本身就是人工智能。</a:t>
             </a:r>
           </a:p>
         </p:txBody>
@@ -11620,7 +11474,7 @@
               </a:lnSpc>
             </a:pPr>
             <a:r>
-              <a:rPr sz="2000" b="0" i="0" lang="zh-CN" altLang="en-US">
+              <a:rPr sz="2200" b="0" i="0" lang="zh-CN" altLang="en-US">
                 <a:solidFill>
                   <a:srgbClr val="9E1B1B"/>
                 </a:solidFill>
@@ -11628,8 +11482,8 @@
                 <a:ea typeface="Noto Sans CJK SC Medium"/>
                 <a:cs typeface="Noto Sans CJK SC Medium"/>
               </a:rPr>
-              <a:t>每天的开支接进同一个平台。
-人每天来，五百个主力的产量才留得住。</a:t>
+              <a:t>教育的大笔费用在这里消失。
+省下来的，还是那三十五个点。</a:t>
             </a:r>
           </a:p>
         </p:txBody>
@@ -12160,6 +12014,2299 @@
     <p:bg>
       <p:bgPr>
         <a:solidFill>
+          <a:srgbClr val="FFFFFF"/>
+        </a:solidFill>
+        <a:effectLst/>
+      </p:bgPr>
+    </p:bg>
+    <p:spTree>
+      <p:nvGrpSpPr>
+        <p:cNvPr id="1" name=""/>
+        <p:cNvGrpSpPr/>
+        <p:nvPr/>
+      </p:nvGrpSpPr>
+      <p:grpSpPr/>
+      <p:sp>
+        <p:nvSpPr>
+          <p:cNvPr id="2" name="TextBox 1"/>
+          <p:cNvSpPr txBox="1"/>
+          <p:nvPr/>
+        </p:nvSpPr>
+        <p:spPr>
+          <a:xfrm>
+            <a:off x="658368" y="365760"/>
+            <a:ext cx="640080" cy="329184"/>
+          </a:xfrm>
+          <a:prstGeom prst="rect">
+            <a:avLst/>
+          </a:prstGeom>
+          <a:noFill/>
+        </p:spPr>
+        <p:txBody>
+          <a:bodyPr wrap="square" anchor="t" lIns="0" rIns="0" tIns="0" bIns="0"/>
+          <a:lstStyle/>
+          <a:p>
+            <a:pPr algn="l"/>
+            <a:r>
+              <a:rPr sz="1500" b="0" i="0" lang="zh-CN" altLang="en-US">
+                <a:solidFill>
+                  <a:srgbClr val="9E1B1B"/>
+                </a:solidFill>
+                <a:latin typeface="Noto Sans CJK SC Medium"/>
+                <a:ea typeface="Noto Sans CJK SC Medium"/>
+                <a:cs typeface="Noto Sans CJK SC Medium"/>
+              </a:rPr>
+              <a:t>18</a:t>
+            </a:r>
+          </a:p>
+        </p:txBody>
+      </p:sp>
+      <p:sp>
+        <p:nvSpPr>
+          <p:cNvPr id="3" name="TextBox 2"/>
+          <p:cNvSpPr txBox="1"/>
+          <p:nvPr/>
+        </p:nvSpPr>
+        <p:spPr>
+          <a:xfrm>
+            <a:off x="1371600" y="310896"/>
+            <a:ext cx="10058400" cy="438912"/>
+          </a:xfrm>
+          <a:prstGeom prst="rect">
+            <a:avLst/>
+          </a:prstGeom>
+          <a:noFill/>
+        </p:spPr>
+        <p:txBody>
+          <a:bodyPr wrap="square" anchor="t" lIns="0" rIns="0" tIns="0" bIns="0"/>
+          <a:lstStyle/>
+          <a:p>
+            <a:pPr algn="l"/>
+            <a:r>
+              <a:rPr sz="3000" b="0" i="0" lang="zh-CN" altLang="en-US">
+                <a:solidFill>
+                  <a:srgbClr val="141414"/>
+                </a:solidFill>
+                <a:latin typeface="Noto Sans CJK SC Medium"/>
+                <a:ea typeface="Noto Sans CJK SC Medium"/>
+                <a:cs typeface="Noto Sans CJK SC Medium"/>
+              </a:rPr>
+              <a:t>艾护理对着这个人说</a:t>
+            </a:r>
+          </a:p>
+        </p:txBody>
+      </p:sp>
+      <p:sp>
+        <p:nvSpPr>
+          <p:cNvPr id="4" name="Rectangle 3"/>
+          <p:cNvSpPr/>
+          <p:nvPr/>
+        </p:nvSpPr>
+        <p:spPr>
+          <a:xfrm>
+            <a:off x="658368" y="960120"/>
+            <a:ext cx="10881360" cy="10972"/>
+          </a:xfrm>
+          <a:prstGeom prst="rect">
+            <a:avLst/>
+          </a:prstGeom>
+          <a:solidFill>
+            <a:srgbClr val="E2E2E2"/>
+          </a:solidFill>
+          <a:ln>
+            <a:noFill/>
+          </a:ln>
+        </p:spPr>
+        <p:style>
+          <a:lnRef idx="1">
+            <a:schemeClr val="accent1"/>
+          </a:lnRef>
+          <a:fillRef idx="3">
+            <a:schemeClr val="accent1"/>
+          </a:fillRef>
+          <a:effectRef idx="2">
+            <a:schemeClr val="accent1"/>
+          </a:effectRef>
+          <a:fontRef idx="minor">
+            <a:schemeClr val="lt1"/>
+          </a:fontRef>
+        </p:style>
+        <p:txBody>
+          <a:bodyPr rtlCol="0" anchor="ctr"/>
+          <a:lstStyle/>
+          <a:p>
+            <a:pPr algn="ctr"/>
+          </a:p>
+        </p:txBody>
+      </p:sp>
+      <p:sp>
+        <p:nvSpPr>
+          <p:cNvPr id="5" name="TextBox 4"/>
+          <p:cNvSpPr txBox="1"/>
+          <p:nvPr/>
+        </p:nvSpPr>
+        <p:spPr>
+          <a:xfrm>
+            <a:off x="658368" y="1170432"/>
+            <a:ext cx="5029200" cy="365760"/>
+          </a:xfrm>
+          <a:prstGeom prst="rect">
+            <a:avLst/>
+          </a:prstGeom>
+          <a:noFill/>
+        </p:spPr>
+        <p:txBody>
+          <a:bodyPr wrap="square" anchor="t" lIns="0" rIns="0" tIns="0" bIns="0"/>
+          <a:lstStyle/>
+          <a:p>
+            <a:pPr algn="l"/>
+            <a:r>
+              <a:rPr sz="2000" b="0" i="0" lang="zh-CN" altLang="en-US">
+                <a:solidFill>
+                  <a:srgbClr val="9E1B1B"/>
+                </a:solidFill>
+                <a:latin typeface="Noto Sans CJK SC Medium"/>
+                <a:ea typeface="Noto Sans CJK SC Medium"/>
+                <a:cs typeface="Noto Sans CJK SC Medium"/>
+              </a:rPr>
+              <a:t>放进来</a:t>
+            </a:r>
+          </a:p>
+        </p:txBody>
+      </p:sp>
+      <p:sp>
+        <p:nvSpPr>
+          <p:cNvPr id="6" name="TextBox 5"/>
+          <p:cNvSpPr txBox="1"/>
+          <p:nvPr/>
+        </p:nvSpPr>
+        <p:spPr>
+          <a:xfrm>
+            <a:off x="6263640" y="1170432"/>
+            <a:ext cx="5120640" cy="365760"/>
+          </a:xfrm>
+          <a:prstGeom prst="rect">
+            <a:avLst/>
+          </a:prstGeom>
+          <a:noFill/>
+        </p:spPr>
+        <p:txBody>
+          <a:bodyPr wrap="square" anchor="t" lIns="0" rIns="0" tIns="0" bIns="0"/>
+          <a:lstStyle/>
+          <a:p>
+            <a:pPr algn="l"/>
+            <a:r>
+              <a:rPr sz="2000" b="0" i="0" lang="zh-CN" altLang="en-US">
+                <a:solidFill>
+                  <a:srgbClr val="9E1B1B"/>
+                </a:solidFill>
+                <a:latin typeface="Noto Sans CJK SC Medium"/>
+                <a:ea typeface="Noto Sans CJK SC Medium"/>
+                <a:cs typeface="Noto Sans CJK SC Medium"/>
+              </a:rPr>
+              <a:t>说出来</a:t>
+            </a:r>
+          </a:p>
+        </p:txBody>
+      </p:sp>
+      <p:sp>
+        <p:nvSpPr>
+          <p:cNvPr id="7" name="TextBox 6"/>
+          <p:cNvSpPr txBox="1"/>
+          <p:nvPr/>
+        </p:nvSpPr>
+        <p:spPr>
+          <a:xfrm>
+            <a:off x="658368" y="1572768"/>
+            <a:ext cx="5029200" cy="274320"/>
+          </a:xfrm>
+          <a:prstGeom prst="rect">
+            <a:avLst/>
+          </a:prstGeom>
+          <a:noFill/>
+        </p:spPr>
+        <p:txBody>
+          <a:bodyPr wrap="square" anchor="t" lIns="0" rIns="0" tIns="0" bIns="0"/>
+          <a:lstStyle/>
+          <a:p>
+            <a:pPr algn="l"/>
+            <a:r>
+              <a:rPr sz="1600" b="0" i="0" lang="zh-CN" altLang="en-US">
+                <a:solidFill>
+                  <a:srgbClr val="141414"/>
+                </a:solidFill>
+                <a:latin typeface="Noto Sans CJK SC Medium"/>
+                <a:ea typeface="Noto Sans CJK SC Medium"/>
+                <a:cs typeface="Noto Sans CJK SC Medium"/>
+              </a:rPr>
+              <a:t>每餐一张照片</a:t>
+            </a:r>
+          </a:p>
+        </p:txBody>
+      </p:sp>
+      <p:sp>
+        <p:nvSpPr>
+          <p:cNvPr id="8" name="TextBox 7"/>
+          <p:cNvSpPr txBox="1"/>
+          <p:nvPr/>
+        </p:nvSpPr>
+        <p:spPr>
+          <a:xfrm>
+            <a:off x="658368" y="1847088"/>
+            <a:ext cx="5029200" cy="384048"/>
+          </a:xfrm>
+          <a:prstGeom prst="rect">
+            <a:avLst/>
+          </a:prstGeom>
+          <a:noFill/>
+        </p:spPr>
+        <p:txBody>
+          <a:bodyPr wrap="square" anchor="t" lIns="0" rIns="0" tIns="0" bIns="0"/>
+          <a:lstStyle/>
+          <a:p>
+            <a:pPr algn="l"/>
+            <a:r>
+              <a:rPr sz="1400" b="0" i="0" lang="zh-CN" altLang="en-US">
+                <a:solidFill>
+                  <a:srgbClr val="2C2C2C"/>
+                </a:solidFill>
+                <a:latin typeface="Noto Sans CJK SC"/>
+                <a:ea typeface="Noto Sans CJK SC"/>
+                <a:cs typeface="Noto Sans CJK SC"/>
+              </a:rPr>
+              <a:t>碳水、蛋白、脂肪，白米还是玄米，蔬菜和纤维有多少。</a:t>
+            </a:r>
+          </a:p>
+        </p:txBody>
+      </p:sp>
+      <p:sp>
+        <p:nvSpPr>
+          <p:cNvPr id="9" name="TextBox 8"/>
+          <p:cNvSpPr txBox="1"/>
+          <p:nvPr/>
+        </p:nvSpPr>
+        <p:spPr>
+          <a:xfrm>
+            <a:off x="658368" y="2267712"/>
+            <a:ext cx="5029200" cy="274320"/>
+          </a:xfrm>
+          <a:prstGeom prst="rect">
+            <a:avLst/>
+          </a:prstGeom>
+          <a:noFill/>
+        </p:spPr>
+        <p:txBody>
+          <a:bodyPr wrap="square" anchor="t" lIns="0" rIns="0" tIns="0" bIns="0"/>
+          <a:lstStyle/>
+          <a:p>
+            <a:pPr algn="l"/>
+            <a:r>
+              <a:rPr sz="1600" b="0" i="0" lang="zh-CN" altLang="en-US">
+                <a:solidFill>
+                  <a:srgbClr val="141414"/>
+                </a:solidFill>
+                <a:latin typeface="Noto Sans CJK SC Medium"/>
+                <a:ea typeface="Noto Sans CJK SC Medium"/>
+                <a:cs typeface="Noto Sans CJK SC Medium"/>
+              </a:rPr>
+              <a:t>身高、体重、步数</a:t>
+            </a:r>
+          </a:p>
+        </p:txBody>
+      </p:sp>
+      <p:sp>
+        <p:nvSpPr>
+          <p:cNvPr id="10" name="TextBox 9"/>
+          <p:cNvSpPr txBox="1"/>
+          <p:nvPr/>
+        </p:nvSpPr>
+        <p:spPr>
+          <a:xfrm>
+            <a:off x="658368" y="2542032"/>
+            <a:ext cx="5029200" cy="384048"/>
+          </a:xfrm>
+          <a:prstGeom prst="rect">
+            <a:avLst/>
+          </a:prstGeom>
+          <a:noFill/>
+        </p:spPr>
+        <p:txBody>
+          <a:bodyPr wrap="square" anchor="t" lIns="0" rIns="0" tIns="0" bIns="0"/>
+          <a:lstStyle/>
+          <a:p>
+            <a:pPr algn="l"/>
+            <a:r>
+              <a:rPr sz="1400" b="0" i="0" lang="zh-CN" altLang="en-US">
+                <a:solidFill>
+                  <a:srgbClr val="2C2C2C"/>
+                </a:solidFill>
+                <a:latin typeface="Noto Sans CJK SC"/>
+                <a:ea typeface="Noto Sans CJK SC"/>
+                <a:cs typeface="Noto Sans CJK SC"/>
+              </a:rPr>
+              <a:t>肥胖还是肌肉，活动够不够。步数从手机接进来。</a:t>
+            </a:r>
+          </a:p>
+        </p:txBody>
+      </p:sp>
+      <p:sp>
+        <p:nvSpPr>
+          <p:cNvPr id="11" name="TextBox 10"/>
+          <p:cNvSpPr txBox="1"/>
+          <p:nvPr/>
+        </p:nvSpPr>
+        <p:spPr>
+          <a:xfrm>
+            <a:off x="658368" y="2962656"/>
+            <a:ext cx="5029200" cy="274320"/>
+          </a:xfrm>
+          <a:prstGeom prst="rect">
+            <a:avLst/>
+          </a:prstGeom>
+          <a:noFill/>
+        </p:spPr>
+        <p:txBody>
+          <a:bodyPr wrap="square" anchor="t" lIns="0" rIns="0" tIns="0" bIns="0"/>
+          <a:lstStyle/>
+          <a:p>
+            <a:pPr algn="l"/>
+            <a:r>
+              <a:rPr sz="1600" b="0" i="0" lang="zh-CN" altLang="en-US">
+                <a:solidFill>
+                  <a:srgbClr val="141414"/>
+                </a:solidFill>
+                <a:latin typeface="Noto Sans CJK SC Medium"/>
+                <a:ea typeface="Noto Sans CJK SC Medium"/>
+                <a:cs typeface="Noto Sans CJK SC Medium"/>
+              </a:rPr>
+              <a:t>用药和注射</a:t>
+            </a:r>
+          </a:p>
+        </p:txBody>
+      </p:sp>
+      <p:sp>
+        <p:nvSpPr>
+          <p:cNvPr id="12" name="TextBox 11"/>
+          <p:cNvSpPr txBox="1"/>
+          <p:nvPr/>
+        </p:nvSpPr>
+        <p:spPr>
+          <a:xfrm>
+            <a:off x="658368" y="3236976"/>
+            <a:ext cx="5029200" cy="384048"/>
+          </a:xfrm>
+          <a:prstGeom prst="rect">
+            <a:avLst/>
+          </a:prstGeom>
+          <a:noFill/>
+        </p:spPr>
+        <p:txBody>
+          <a:bodyPr wrap="square" anchor="t" lIns="0" rIns="0" tIns="0" bIns="0"/>
+          <a:lstStyle/>
+          <a:p>
+            <a:pPr algn="l"/>
+            <a:r>
+              <a:rPr sz="1400" b="0" i="0" lang="zh-CN" altLang="en-US">
+                <a:solidFill>
+                  <a:srgbClr val="2C2C2C"/>
+                </a:solidFill>
+                <a:latin typeface="Noto Sans CJK SC"/>
+                <a:ea typeface="Noto Sans CJK SC"/>
+                <a:cs typeface="Noto Sans CJK SC"/>
+              </a:rPr>
+              <a:t>代谢顺不顺，有连续记录才说得清。</a:t>
+            </a:r>
+          </a:p>
+        </p:txBody>
+      </p:sp>
+      <p:sp>
+        <p:nvSpPr>
+          <p:cNvPr id="13" name="TextBox 12"/>
+          <p:cNvSpPr txBox="1"/>
+          <p:nvPr/>
+        </p:nvSpPr>
+        <p:spPr>
+          <a:xfrm>
+            <a:off x="658368" y="3657600"/>
+            <a:ext cx="5029200" cy="274320"/>
+          </a:xfrm>
+          <a:prstGeom prst="rect">
+            <a:avLst/>
+          </a:prstGeom>
+          <a:noFill/>
+        </p:spPr>
+        <p:txBody>
+          <a:bodyPr wrap="square" anchor="t" lIns="0" rIns="0" tIns="0" bIns="0"/>
+          <a:lstStyle/>
+          <a:p>
+            <a:pPr algn="l"/>
+            <a:r>
+              <a:rPr sz="1600" b="0" i="0" lang="zh-CN" altLang="en-US">
+                <a:solidFill>
+                  <a:srgbClr val="141414"/>
+                </a:solidFill>
+                <a:latin typeface="Noto Sans CJK SC Medium"/>
+                <a:ea typeface="Noto Sans CJK SC Medium"/>
+                <a:cs typeface="Noto Sans CJK SC Medium"/>
+              </a:rPr>
+              <a:t>血和尿可以后补</a:t>
+            </a:r>
+          </a:p>
+        </p:txBody>
+      </p:sp>
+      <p:sp>
+        <p:nvSpPr>
+          <p:cNvPr id="14" name="TextBox 13"/>
+          <p:cNvSpPr txBox="1"/>
+          <p:nvPr/>
+        </p:nvSpPr>
+        <p:spPr>
+          <a:xfrm>
+            <a:off x="658368" y="3931920"/>
+            <a:ext cx="5029200" cy="384048"/>
+          </a:xfrm>
+          <a:prstGeom prst="rect">
+            <a:avLst/>
+          </a:prstGeom>
+          <a:noFill/>
+        </p:spPr>
+        <p:txBody>
+          <a:bodyPr wrap="square" anchor="t" lIns="0" rIns="0" tIns="0" bIns="0"/>
+          <a:lstStyle/>
+          <a:p>
+            <a:pPr algn="l"/>
+            <a:r>
+              <a:rPr sz="1400" b="0" i="0" lang="zh-CN" altLang="en-US">
+                <a:solidFill>
+                  <a:srgbClr val="2C2C2C"/>
+                </a:solidFill>
+                <a:latin typeface="Noto Sans CJK SC"/>
+                <a:ea typeface="Noto Sans CJK SC"/>
+                <a:cs typeface="Noto Sans CJK SC"/>
+              </a:rPr>
+              <a:t>上面这些先每天跑起来。不必等一座医院。</a:t>
+            </a:r>
+          </a:p>
+        </p:txBody>
+      </p:sp>
+      <p:sp>
+        <p:nvSpPr>
+          <p:cNvPr id="15" name="TextBox 14"/>
+          <p:cNvSpPr txBox="1"/>
+          <p:nvPr/>
+        </p:nvSpPr>
+        <p:spPr>
+          <a:xfrm>
+            <a:off x="6263640" y="1572768"/>
+            <a:ext cx="5120640" cy="274320"/>
+          </a:xfrm>
+          <a:prstGeom prst="rect">
+            <a:avLst/>
+          </a:prstGeom>
+          <a:noFill/>
+        </p:spPr>
+        <p:txBody>
+          <a:bodyPr wrap="square" anchor="t" lIns="0" rIns="0" tIns="0" bIns="0"/>
+          <a:lstStyle/>
+          <a:p>
+            <a:pPr algn="l"/>
+            <a:r>
+              <a:rPr sz="1600" b="0" i="0" lang="zh-CN" altLang="en-US">
+                <a:solidFill>
+                  <a:srgbClr val="141414"/>
+                </a:solidFill>
+                <a:latin typeface="Noto Sans CJK SC Medium"/>
+                <a:ea typeface="Noto Sans CJK SC Medium"/>
+                <a:cs typeface="Noto Sans CJK SC Medium"/>
+              </a:rPr>
+              <a:t>该减，还是该补</a:t>
+            </a:r>
+          </a:p>
+        </p:txBody>
+      </p:sp>
+      <p:sp>
+        <p:nvSpPr>
+          <p:cNvPr id="16" name="TextBox 15"/>
+          <p:cNvSpPr txBox="1"/>
+          <p:nvPr/>
+        </p:nvSpPr>
+        <p:spPr>
+          <a:xfrm>
+            <a:off x="6263640" y="1847088"/>
+            <a:ext cx="5120640" cy="384048"/>
+          </a:xfrm>
+          <a:prstGeom prst="rect">
+            <a:avLst/>
+          </a:prstGeom>
+          <a:noFill/>
+        </p:spPr>
+        <p:txBody>
+          <a:bodyPr wrap="square" anchor="t" lIns="0" rIns="0" tIns="0" bIns="0"/>
+          <a:lstStyle/>
+          <a:p>
+            <a:pPr algn="l"/>
+            <a:r>
+              <a:rPr sz="1400" b="0" i="0" lang="zh-CN" altLang="en-US">
+                <a:solidFill>
+                  <a:srgbClr val="2C2C2C"/>
+                </a:solidFill>
+                <a:latin typeface="Noto Sans CJK SC"/>
+                <a:ea typeface="Noto Sans CJK SC"/>
+                <a:cs typeface="Noto Sans CJK SC"/>
+              </a:rPr>
+              <a:t>减碳水，补蛋白；吃多了；或只吃精制，碳水其实不够。</a:t>
+            </a:r>
+          </a:p>
+        </p:txBody>
+      </p:sp>
+      <p:sp>
+        <p:nvSpPr>
+          <p:cNvPr id="17" name="TextBox 16"/>
+          <p:cNvSpPr txBox="1"/>
+          <p:nvPr/>
+        </p:nvSpPr>
+        <p:spPr>
+          <a:xfrm>
+            <a:off x="6263640" y="2267712"/>
+            <a:ext cx="5120640" cy="274320"/>
+          </a:xfrm>
+          <a:prstGeom prst="rect">
+            <a:avLst/>
+          </a:prstGeom>
+          <a:noFill/>
+        </p:spPr>
+        <p:txBody>
+          <a:bodyPr wrap="square" anchor="t" lIns="0" rIns="0" tIns="0" bIns="0"/>
+          <a:lstStyle/>
+          <a:p>
+            <a:pPr algn="l"/>
+            <a:r>
+              <a:rPr sz="1600" b="0" i="0" lang="zh-CN" altLang="en-US">
+                <a:solidFill>
+                  <a:srgbClr val="141414"/>
+                </a:solidFill>
+                <a:latin typeface="Noto Sans CJK SC Medium"/>
+                <a:ea typeface="Noto Sans CJK SC Medium"/>
+                <a:cs typeface="Noto Sans CJK SC Medium"/>
+              </a:rPr>
+              <a:t>一年、五年、十年</a:t>
+            </a:r>
+          </a:p>
+        </p:txBody>
+      </p:sp>
+      <p:sp>
+        <p:nvSpPr>
+          <p:cNvPr id="18" name="TextBox 17"/>
+          <p:cNvSpPr txBox="1"/>
+          <p:nvPr/>
+        </p:nvSpPr>
+        <p:spPr>
+          <a:xfrm>
+            <a:off x="6263640" y="2542032"/>
+            <a:ext cx="5120640" cy="384048"/>
+          </a:xfrm>
+          <a:prstGeom prst="rect">
+            <a:avLst/>
+          </a:prstGeom>
+          <a:noFill/>
+        </p:spPr>
+        <p:txBody>
+          <a:bodyPr wrap="square" anchor="t" lIns="0" rIns="0" tIns="0" bIns="0"/>
+          <a:lstStyle/>
+          <a:p>
+            <a:pPr algn="l"/>
+            <a:r>
+              <a:rPr sz="1400" b="0" i="0" lang="zh-CN" altLang="en-US">
+                <a:solidFill>
+                  <a:srgbClr val="2C2C2C"/>
+                </a:solidFill>
+                <a:latin typeface="Noto Sans CJK SC"/>
+                <a:ea typeface="Noto Sans CJK SC"/>
+                <a:cs typeface="Noto Sans CJK SC"/>
+              </a:rPr>
+              <a:t>照这样下去，身体可以估。家族里带下来的病要能看见。</a:t>
+            </a:r>
+          </a:p>
+        </p:txBody>
+      </p:sp>
+      <p:sp>
+        <p:nvSpPr>
+          <p:cNvPr id="19" name="TextBox 18"/>
+          <p:cNvSpPr txBox="1"/>
+          <p:nvPr/>
+        </p:nvSpPr>
+        <p:spPr>
+          <a:xfrm>
+            <a:off x="6263640" y="2962656"/>
+            <a:ext cx="5120640" cy="274320"/>
+          </a:xfrm>
+          <a:prstGeom prst="rect">
+            <a:avLst/>
+          </a:prstGeom>
+          <a:noFill/>
+        </p:spPr>
+        <p:txBody>
+          <a:bodyPr wrap="square" anchor="t" lIns="0" rIns="0" tIns="0" bIns="0"/>
+          <a:lstStyle/>
+          <a:p>
+            <a:pPr algn="l"/>
+            <a:r>
+              <a:rPr sz="1600" b="0" i="0" lang="zh-CN" altLang="en-US">
+                <a:solidFill>
+                  <a:srgbClr val="141414"/>
+                </a:solidFill>
+                <a:latin typeface="Noto Sans CJK SC Medium"/>
+                <a:ea typeface="Noto Sans CJK SC Medium"/>
+                <a:cs typeface="Noto Sans CJK SC Medium"/>
+              </a:rPr>
+              <a:t>为什么是这一个</a:t>
+            </a:r>
+          </a:p>
+        </p:txBody>
+      </p:sp>
+      <p:sp>
+        <p:nvSpPr>
+          <p:cNvPr id="20" name="TextBox 19"/>
+          <p:cNvSpPr txBox="1"/>
+          <p:nvPr/>
+        </p:nvSpPr>
+        <p:spPr>
+          <a:xfrm>
+            <a:off x="6263640" y="3236976"/>
+            <a:ext cx="5120640" cy="384048"/>
+          </a:xfrm>
+          <a:prstGeom prst="rect">
+            <a:avLst/>
+          </a:prstGeom>
+          <a:noFill/>
+        </p:spPr>
+        <p:txBody>
+          <a:bodyPr wrap="square" anchor="t" lIns="0" rIns="0" tIns="0" bIns="0"/>
+          <a:lstStyle/>
+          <a:p>
+            <a:pPr algn="l"/>
+            <a:r>
+              <a:rPr sz="1400" b="0" i="0" lang="zh-CN" altLang="en-US">
+                <a:solidFill>
+                  <a:srgbClr val="2C2C2C"/>
+                </a:solidFill>
+                <a:latin typeface="Noto Sans CJK SC"/>
+                <a:ea typeface="Noto Sans CJK SC"/>
+                <a:cs typeface="Noto Sans CJK SC"/>
+              </a:rPr>
+              <a:t>水飞蓟不再对所有人说对肝好。这个人的肝，才决定这句话。</a:t>
+            </a:r>
+          </a:p>
+        </p:txBody>
+      </p:sp>
+      <p:sp>
+        <p:nvSpPr>
+          <p:cNvPr id="21" name="TextBox 20"/>
+          <p:cNvSpPr txBox="1"/>
+          <p:nvPr/>
+        </p:nvSpPr>
+        <p:spPr>
+          <a:xfrm>
+            <a:off x="6263640" y="3657600"/>
+            <a:ext cx="5120640" cy="274320"/>
+          </a:xfrm>
+          <a:prstGeom prst="rect">
+            <a:avLst/>
+          </a:prstGeom>
+          <a:noFill/>
+        </p:spPr>
+        <p:txBody>
+          <a:bodyPr wrap="square" anchor="t" lIns="0" rIns="0" tIns="0" bIns="0"/>
+          <a:lstStyle/>
+          <a:p>
+            <a:pPr algn="l"/>
+            <a:r>
+              <a:rPr sz="1600" b="0" i="0" lang="zh-CN" altLang="en-US">
+                <a:solidFill>
+                  <a:srgbClr val="141414"/>
+                </a:solidFill>
+                <a:latin typeface="Noto Sans CJK SC Medium"/>
+                <a:ea typeface="Noto Sans CJK SC Medium"/>
+                <a:cs typeface="Noto Sans CJK SC Medium"/>
+              </a:rPr>
+              <a:t>先进入艾护理</a:t>
+            </a:r>
+          </a:p>
+        </p:txBody>
+      </p:sp>
+      <p:sp>
+        <p:nvSpPr>
+          <p:cNvPr id="22" name="TextBox 21"/>
+          <p:cNvSpPr txBox="1"/>
+          <p:nvPr/>
+        </p:nvSpPr>
+        <p:spPr>
+          <a:xfrm>
+            <a:off x="6263640" y="3931920"/>
+            <a:ext cx="5120640" cy="384048"/>
+          </a:xfrm>
+          <a:prstGeom prst="rect">
+            <a:avLst/>
+          </a:prstGeom>
+          <a:noFill/>
+        </p:spPr>
+        <p:txBody>
+          <a:bodyPr wrap="square" anchor="t" lIns="0" rIns="0" tIns="0" bIns="0"/>
+          <a:lstStyle/>
+          <a:p>
+            <a:pPr algn="l"/>
+            <a:r>
+              <a:rPr sz="1400" b="0" i="0" lang="zh-CN" altLang="en-US">
+                <a:solidFill>
+                  <a:srgbClr val="2C2C2C"/>
+                </a:solidFill>
+                <a:latin typeface="Noto Sans CJK SC"/>
+                <a:ea typeface="Noto Sans CJK SC"/>
+                <a:cs typeface="Noto Sans CJK SC"/>
+              </a:rPr>
+              <a:t>介绍别人，先把对方的记录建起来，再谈产品。</a:t>
+            </a:r>
+          </a:p>
+        </p:txBody>
+      </p:sp>
+      <p:sp>
+        <p:nvSpPr>
+          <p:cNvPr id="23" name="Rectangle 22"/>
+          <p:cNvSpPr/>
+          <p:nvPr/>
+        </p:nvSpPr>
+        <p:spPr>
+          <a:xfrm>
+            <a:off x="5897880" y="1170432"/>
+            <a:ext cx="10972" cy="3200400"/>
+          </a:xfrm>
+          <a:prstGeom prst="rect">
+            <a:avLst/>
+          </a:prstGeom>
+          <a:solidFill>
+            <a:srgbClr val="E2E2E2"/>
+          </a:solidFill>
+          <a:ln>
+            <a:noFill/>
+          </a:ln>
+        </p:spPr>
+        <p:style>
+          <a:lnRef idx="1">
+            <a:schemeClr val="accent1"/>
+          </a:lnRef>
+          <a:fillRef idx="3">
+            <a:schemeClr val="accent1"/>
+          </a:fillRef>
+          <a:effectRef idx="2">
+            <a:schemeClr val="accent1"/>
+          </a:effectRef>
+          <a:fontRef idx="minor">
+            <a:schemeClr val="lt1"/>
+          </a:fontRef>
+        </p:style>
+        <p:txBody>
+          <a:bodyPr rtlCol="0" anchor="ctr"/>
+          <a:lstStyle/>
+          <a:p>
+            <a:pPr algn="ctr"/>
+          </a:p>
+        </p:txBody>
+      </p:sp>
+      <p:sp>
+        <p:nvSpPr>
+          <p:cNvPr id="24" name="Rectangle 23"/>
+          <p:cNvSpPr/>
+          <p:nvPr/>
+        </p:nvSpPr>
+        <p:spPr>
+          <a:xfrm>
+            <a:off x="658368" y="4617720"/>
+            <a:ext cx="10881360" cy="10972"/>
+          </a:xfrm>
+          <a:prstGeom prst="rect">
+            <a:avLst/>
+          </a:prstGeom>
+          <a:solidFill>
+            <a:srgbClr val="E2E2E2"/>
+          </a:solidFill>
+          <a:ln>
+            <a:noFill/>
+          </a:ln>
+        </p:spPr>
+        <p:style>
+          <a:lnRef idx="1">
+            <a:schemeClr val="accent1"/>
+          </a:lnRef>
+          <a:fillRef idx="3">
+            <a:schemeClr val="accent1"/>
+          </a:fillRef>
+          <a:effectRef idx="2">
+            <a:schemeClr val="accent1"/>
+          </a:effectRef>
+          <a:fontRef idx="minor">
+            <a:schemeClr val="lt1"/>
+          </a:fontRef>
+        </p:style>
+        <p:txBody>
+          <a:bodyPr rtlCol="0" anchor="ctr"/>
+          <a:lstStyle/>
+          <a:p>
+            <a:pPr algn="ctr"/>
+          </a:p>
+        </p:txBody>
+      </p:sp>
+      <p:sp>
+        <p:nvSpPr>
+          <p:cNvPr id="25" name="TextBox 24"/>
+          <p:cNvSpPr txBox="1"/>
+          <p:nvPr/>
+        </p:nvSpPr>
+        <p:spPr>
+          <a:xfrm>
+            <a:off x="658368" y="4773168"/>
+            <a:ext cx="10789920" cy="1051560"/>
+          </a:xfrm>
+          <a:prstGeom prst="rect">
+            <a:avLst/>
+          </a:prstGeom>
+          <a:noFill/>
+        </p:spPr>
+        <p:txBody>
+          <a:bodyPr wrap="square" anchor="t" lIns="0" rIns="0" tIns="0" bIns="0"/>
+          <a:lstStyle/>
+          <a:p>
+            <a:pPr algn="l">
+              <a:lnSpc>
+                <a:spcPct val="130000"/>
+              </a:lnSpc>
+            </a:pPr>
+            <a:r>
+              <a:rPr sz="1800" b="0" i="0" lang="zh-CN" altLang="en-US">
+                <a:solidFill>
+                  <a:srgbClr val="9E1B1B"/>
+                </a:solidFill>
+                <a:latin typeface="Noto Sans CJK SC Medium"/>
+                <a:ea typeface="Noto Sans CJK SC Medium"/>
+                <a:cs typeface="Noto Sans CJK SC Medium"/>
+              </a:rPr>
+              <a:t>终点是个人健康数据银行。本人同意，隐私守住。
+人连续用，下个月那只罐子要排的数才看得见。</a:t>
+            </a:r>
+          </a:p>
+        </p:txBody>
+      </p:sp>
+      <p:sp>
+        <p:nvSpPr>
+          <p:cNvPr id="26" name="TextBox 25"/>
+          <p:cNvSpPr txBox="1"/>
+          <p:nvPr/>
+        </p:nvSpPr>
+        <p:spPr>
+          <a:xfrm>
+            <a:off x="10561320" y="6492240"/>
+            <a:ext cx="1051560" cy="201168"/>
+          </a:xfrm>
+          <a:prstGeom prst="rect">
+            <a:avLst/>
+          </a:prstGeom>
+          <a:noFill/>
+        </p:spPr>
+        <p:txBody>
+          <a:bodyPr wrap="square" anchor="t" lIns="0" rIns="0" tIns="0" bIns="0"/>
+          <a:lstStyle/>
+          <a:p>
+            <a:pPr algn="r"/>
+            <a:r>
+              <a:rPr sz="1100" b="0" i="0" lang="zh-CN" altLang="en-US">
+                <a:solidFill>
+                  <a:srgbClr val="C8C8C8"/>
+                </a:solidFill>
+                <a:latin typeface="Noto Sans CJK SC"/>
+                <a:ea typeface="Noto Sans CJK SC"/>
+                <a:cs typeface="Noto Sans CJK SC"/>
+              </a:rPr>
+              <a:t>20</a:t>
+            </a:r>
+          </a:p>
+        </p:txBody>
+      </p:sp>
+    </p:spTree>
+  </p:cSld>
+  <p:clrMapOvr>
+    <a:masterClrMapping/>
+  </p:clrMapOvr>
+</p:sld>
+</file>
+
+<file path=ppt/slides/slide21.xml><?xml version="1.0" encoding="utf-8"?>
+<p:sld xmlns:a="http://schemas.openxmlformats.org/drawingml/2006/main" xmlns:p="http://schemas.openxmlformats.org/presentationml/2006/main" xmlns:r="http://schemas.openxmlformats.org/officeDocument/2006/relationships">
+  <p:cSld>
+    <p:bg>
+      <p:bgPr>
+        <a:solidFill>
+          <a:srgbClr val="FFFFFF"/>
+        </a:solidFill>
+        <a:effectLst/>
+      </p:bgPr>
+    </p:bg>
+    <p:spTree>
+      <p:nvGrpSpPr>
+        <p:cNvPr id="1" name=""/>
+        <p:cNvGrpSpPr/>
+        <p:nvPr/>
+      </p:nvGrpSpPr>
+      <p:grpSpPr/>
+      <p:sp>
+        <p:nvSpPr>
+          <p:cNvPr id="2" name="TextBox 1"/>
+          <p:cNvSpPr txBox="1"/>
+          <p:nvPr/>
+        </p:nvSpPr>
+        <p:spPr>
+          <a:xfrm>
+            <a:off x="658368" y="365760"/>
+            <a:ext cx="640080" cy="329184"/>
+          </a:xfrm>
+          <a:prstGeom prst="rect">
+            <a:avLst/>
+          </a:prstGeom>
+          <a:noFill/>
+        </p:spPr>
+        <p:txBody>
+          <a:bodyPr wrap="square" anchor="t" lIns="0" rIns="0" tIns="0" bIns="0"/>
+          <a:lstStyle/>
+          <a:p>
+            <a:pPr algn="l"/>
+            <a:r>
+              <a:rPr sz="1500" b="0" i="0" lang="zh-CN" altLang="en-US">
+                <a:solidFill>
+                  <a:srgbClr val="9E1B1B"/>
+                </a:solidFill>
+                <a:latin typeface="Noto Sans CJK SC Medium"/>
+                <a:ea typeface="Noto Sans CJK SC Medium"/>
+                <a:cs typeface="Noto Sans CJK SC Medium"/>
+              </a:rPr>
+              <a:t>19</a:t>
+            </a:r>
+          </a:p>
+        </p:txBody>
+      </p:sp>
+      <p:sp>
+        <p:nvSpPr>
+          <p:cNvPr id="3" name="TextBox 2"/>
+          <p:cNvSpPr txBox="1"/>
+          <p:nvPr/>
+        </p:nvSpPr>
+        <p:spPr>
+          <a:xfrm>
+            <a:off x="1371600" y="310896"/>
+            <a:ext cx="10058400" cy="438912"/>
+          </a:xfrm>
+          <a:prstGeom prst="rect">
+            <a:avLst/>
+          </a:prstGeom>
+          <a:noFill/>
+        </p:spPr>
+        <p:txBody>
+          <a:bodyPr wrap="square" anchor="t" lIns="0" rIns="0" tIns="0" bIns="0"/>
+          <a:lstStyle/>
+          <a:p>
+            <a:pPr algn="l"/>
+            <a:r>
+              <a:rPr sz="3000" b="0" i="0" lang="zh-CN" altLang="en-US">
+                <a:solidFill>
+                  <a:srgbClr val="141414"/>
+                </a:solidFill>
+                <a:latin typeface="Noto Sans CJK SC Medium"/>
+                <a:ea typeface="Noto Sans CJK SC Medium"/>
+                <a:cs typeface="Noto Sans CJK SC Medium"/>
+              </a:rPr>
+              <a:t>阿扎让人每天走进来</a:t>
+            </a:r>
+          </a:p>
+        </p:txBody>
+      </p:sp>
+      <p:sp>
+        <p:nvSpPr>
+          <p:cNvPr id="4" name="Rectangle 3"/>
+          <p:cNvSpPr/>
+          <p:nvPr/>
+        </p:nvSpPr>
+        <p:spPr>
+          <a:xfrm>
+            <a:off x="658368" y="960120"/>
+            <a:ext cx="10881360" cy="10972"/>
+          </a:xfrm>
+          <a:prstGeom prst="rect">
+            <a:avLst/>
+          </a:prstGeom>
+          <a:solidFill>
+            <a:srgbClr val="E2E2E2"/>
+          </a:solidFill>
+          <a:ln>
+            <a:noFill/>
+          </a:ln>
+        </p:spPr>
+        <p:style>
+          <a:lnRef idx="1">
+            <a:schemeClr val="accent1"/>
+          </a:lnRef>
+          <a:fillRef idx="3">
+            <a:schemeClr val="accent1"/>
+          </a:fillRef>
+          <a:effectRef idx="2">
+            <a:schemeClr val="accent1"/>
+          </a:effectRef>
+          <a:fontRef idx="minor">
+            <a:schemeClr val="lt1"/>
+          </a:fontRef>
+        </p:style>
+        <p:txBody>
+          <a:bodyPr rtlCol="0" anchor="ctr"/>
+          <a:lstStyle/>
+          <a:p>
+            <a:pPr algn="ctr"/>
+          </a:p>
+        </p:txBody>
+      </p:sp>
+      <p:sp>
+        <p:nvSpPr>
+          <p:cNvPr id="5" name="TextBox 4"/>
+          <p:cNvSpPr txBox="1"/>
+          <p:nvPr/>
+        </p:nvSpPr>
+        <p:spPr>
+          <a:xfrm>
+            <a:off x="658368" y="1207008"/>
+            <a:ext cx="3200400" cy="237744"/>
+          </a:xfrm>
+          <a:prstGeom prst="rect">
+            <a:avLst/>
+          </a:prstGeom>
+          <a:noFill/>
+        </p:spPr>
+        <p:txBody>
+          <a:bodyPr wrap="square" anchor="t" lIns="0" rIns="0" tIns="0" bIns="0"/>
+          <a:lstStyle/>
+          <a:p>
+            <a:pPr algn="l"/>
+            <a:r>
+              <a:rPr sz="1400" b="0" i="0" lang="zh-CN" altLang="en-US">
+                <a:solidFill>
+                  <a:srgbClr val="9E1B1B"/>
+                </a:solidFill>
+                <a:latin typeface="Noto Sans CJK SC Medium"/>
+                <a:ea typeface="Noto Sans CJK SC Medium"/>
+                <a:cs typeface="Noto Sans CJK SC Medium"/>
+              </a:rPr>
+              <a:t>01</a:t>
+            </a:r>
+          </a:p>
+        </p:txBody>
+      </p:sp>
+      <p:sp>
+        <p:nvSpPr>
+          <p:cNvPr id="6" name="TextBox 5"/>
+          <p:cNvSpPr txBox="1"/>
+          <p:nvPr/>
+        </p:nvSpPr>
+        <p:spPr>
+          <a:xfrm>
+            <a:off x="658368" y="1499616"/>
+            <a:ext cx="3246120" cy="640080"/>
+          </a:xfrm>
+          <a:prstGeom prst="rect">
+            <a:avLst/>
+          </a:prstGeom>
+          <a:noFill/>
+        </p:spPr>
+        <p:txBody>
+          <a:bodyPr wrap="square" anchor="t" lIns="0" rIns="0" tIns="0" bIns="0"/>
+          <a:lstStyle/>
+          <a:p>
+            <a:pPr algn="l"/>
+            <a:r>
+              <a:rPr sz="2200" b="0" i="0" lang="zh-CN" altLang="en-US">
+                <a:solidFill>
+                  <a:srgbClr val="141414"/>
+                </a:solidFill>
+                <a:latin typeface="Noto Sans CJK SC Medium"/>
+                <a:ea typeface="Noto Sans CJK SC Medium"/>
+                <a:cs typeface="Noto Sans CJK SC Medium"/>
+              </a:rPr>
+              <a:t>十万个，不赚一百兆</a:t>
+            </a:r>
+          </a:p>
+        </p:txBody>
+      </p:sp>
+      <p:sp>
+        <p:nvSpPr>
+          <p:cNvPr id="7" name="TextBox 6"/>
+          <p:cNvSpPr txBox="1"/>
+          <p:nvPr/>
+        </p:nvSpPr>
+        <p:spPr>
+          <a:xfrm>
+            <a:off x="658368" y="2240280"/>
+            <a:ext cx="3246120" cy="1965960"/>
+          </a:xfrm>
+          <a:prstGeom prst="rect">
+            <a:avLst/>
+          </a:prstGeom>
+          <a:noFill/>
+        </p:spPr>
+        <p:txBody>
+          <a:bodyPr wrap="square" anchor="t" lIns="0" rIns="0" tIns="0" bIns="0"/>
+          <a:lstStyle/>
+          <a:p>
+            <a:pPr algn="l">
+              <a:lnSpc>
+                <a:spcPct val="135000"/>
+              </a:lnSpc>
+            </a:pPr>
+            <a:r>
+              <a:rPr sz="1500" b="0" i="0" lang="zh-CN" altLang="en-US">
+                <a:solidFill>
+                  <a:srgbClr val="2C2C2C"/>
+                </a:solidFill>
+                <a:latin typeface="Noto Sans CJK SC"/>
+                <a:ea typeface="Noto Sans CJK SC"/>
+                <a:cs typeface="Noto Sans CJK SC"/>
+              </a:rPr>
+              <a:t>鸡蛋、油、充电接进来。
+一百兆由大约五百个
+主力品目赚。
+阿扎做的是热狗那一件事：
+让人每天打开这个平台。</a:t>
+            </a:r>
+          </a:p>
+        </p:txBody>
+      </p:sp>
+      <p:sp>
+        <p:nvSpPr>
+          <p:cNvPr id="8" name="Rectangle 7"/>
+          <p:cNvSpPr/>
+          <p:nvPr/>
+        </p:nvSpPr>
+        <p:spPr>
+          <a:xfrm>
+            <a:off x="4160520" y="1207008"/>
+            <a:ext cx="10972" cy="3063240"/>
+          </a:xfrm>
+          <a:prstGeom prst="rect">
+            <a:avLst/>
+          </a:prstGeom>
+          <a:solidFill>
+            <a:srgbClr val="E2E2E2"/>
+          </a:solidFill>
+          <a:ln>
+            <a:noFill/>
+          </a:ln>
+        </p:spPr>
+        <p:style>
+          <a:lnRef idx="1">
+            <a:schemeClr val="accent1"/>
+          </a:lnRef>
+          <a:fillRef idx="3">
+            <a:schemeClr val="accent1"/>
+          </a:fillRef>
+          <a:effectRef idx="2">
+            <a:schemeClr val="accent1"/>
+          </a:effectRef>
+          <a:fontRef idx="minor">
+            <a:schemeClr val="lt1"/>
+          </a:fontRef>
+        </p:style>
+        <p:txBody>
+          <a:bodyPr rtlCol="0" anchor="ctr"/>
+          <a:lstStyle/>
+          <a:p>
+            <a:pPr algn="ctr"/>
+          </a:p>
+        </p:txBody>
+      </p:sp>
+      <p:sp>
+        <p:nvSpPr>
+          <p:cNvPr id="9" name="TextBox 8"/>
+          <p:cNvSpPr txBox="1"/>
+          <p:nvPr/>
+        </p:nvSpPr>
+        <p:spPr>
+          <a:xfrm>
+            <a:off x="4361688" y="1207008"/>
+            <a:ext cx="3200400" cy="237744"/>
+          </a:xfrm>
+          <a:prstGeom prst="rect">
+            <a:avLst/>
+          </a:prstGeom>
+          <a:noFill/>
+        </p:spPr>
+        <p:txBody>
+          <a:bodyPr wrap="square" anchor="t" lIns="0" rIns="0" tIns="0" bIns="0"/>
+          <a:lstStyle/>
+          <a:p>
+            <a:pPr algn="l"/>
+            <a:r>
+              <a:rPr sz="1400" b="0" i="0" lang="zh-CN" altLang="en-US">
+                <a:solidFill>
+                  <a:srgbClr val="9E1B1B"/>
+                </a:solidFill>
+                <a:latin typeface="Noto Sans CJK SC Medium"/>
+                <a:ea typeface="Noto Sans CJK SC Medium"/>
+                <a:cs typeface="Noto Sans CJK SC Medium"/>
+              </a:rPr>
+              <a:t>02</a:t>
+            </a:r>
+          </a:p>
+        </p:txBody>
+      </p:sp>
+      <p:sp>
+        <p:nvSpPr>
+          <p:cNvPr id="10" name="TextBox 9"/>
+          <p:cNvSpPr txBox="1"/>
+          <p:nvPr/>
+        </p:nvSpPr>
+        <p:spPr>
+          <a:xfrm>
+            <a:off x="4361688" y="1499616"/>
+            <a:ext cx="3246120" cy="640080"/>
+          </a:xfrm>
+          <a:prstGeom prst="rect">
+            <a:avLst/>
+          </a:prstGeom>
+          <a:noFill/>
+        </p:spPr>
+        <p:txBody>
+          <a:bodyPr wrap="square" anchor="t" lIns="0" rIns="0" tIns="0" bIns="0"/>
+          <a:lstStyle/>
+          <a:p>
+            <a:pPr algn="l"/>
+            <a:r>
+              <a:rPr sz="2200" b="0" i="0" lang="zh-CN" altLang="en-US">
+                <a:solidFill>
+                  <a:srgbClr val="141414"/>
+                </a:solidFill>
+                <a:latin typeface="Noto Sans CJK SC Medium"/>
+                <a:ea typeface="Noto Sans CJK SC Medium"/>
+                <a:cs typeface="Noto Sans CJK SC Medium"/>
+              </a:rPr>
+              <a:t>鲭鱼回答不了</a:t>
+            </a:r>
+          </a:p>
+        </p:txBody>
+      </p:sp>
+      <p:sp>
+        <p:nvSpPr>
+          <p:cNvPr id="11" name="TextBox 10"/>
+          <p:cNvSpPr txBox="1"/>
+          <p:nvPr/>
+        </p:nvSpPr>
+        <p:spPr>
+          <a:xfrm>
+            <a:off x="4361688" y="2240280"/>
+            <a:ext cx="3246120" cy="1965960"/>
+          </a:xfrm>
+          <a:prstGeom prst="rect">
+            <a:avLst/>
+          </a:prstGeom>
+          <a:noFill/>
+        </p:spPr>
+        <p:txBody>
+          <a:bodyPr wrap="square" anchor="t" lIns="0" rIns="0" tIns="0" bIns="0"/>
+          <a:lstStyle/>
+          <a:p>
+            <a:pPr algn="l">
+              <a:lnSpc>
+                <a:spcPct val="135000"/>
+              </a:lnSpc>
+            </a:pPr>
+            <a:r>
+              <a:rPr sz="1500" b="0" i="0" lang="zh-CN" altLang="en-US">
+                <a:solidFill>
+                  <a:srgbClr val="2C2C2C"/>
+                </a:solidFill>
+                <a:latin typeface="Noto Sans CJK SC"/>
+                <a:ea typeface="Noto Sans CJK SC"/>
+                <a:cs typeface="Noto Sans CJK SC"/>
+              </a:rPr>
+              <a:t>成本率到七成五的日常品，
+单靠它到不了一百兆。
+它负责人每天来。
+主力品目负责赚。</a:t>
+            </a:r>
+          </a:p>
+        </p:txBody>
+      </p:sp>
+      <p:sp>
+        <p:nvSpPr>
+          <p:cNvPr id="12" name="Rectangle 11"/>
+          <p:cNvSpPr/>
+          <p:nvPr/>
+        </p:nvSpPr>
+        <p:spPr>
+          <a:xfrm>
+            <a:off x="7863840" y="1207008"/>
+            <a:ext cx="10972" cy="3063240"/>
+          </a:xfrm>
+          <a:prstGeom prst="rect">
+            <a:avLst/>
+          </a:prstGeom>
+          <a:solidFill>
+            <a:srgbClr val="E2E2E2"/>
+          </a:solidFill>
+          <a:ln>
+            <a:noFill/>
+          </a:ln>
+        </p:spPr>
+        <p:style>
+          <a:lnRef idx="1">
+            <a:schemeClr val="accent1"/>
+          </a:lnRef>
+          <a:fillRef idx="3">
+            <a:schemeClr val="accent1"/>
+          </a:fillRef>
+          <a:effectRef idx="2">
+            <a:schemeClr val="accent1"/>
+          </a:effectRef>
+          <a:fontRef idx="minor">
+            <a:schemeClr val="lt1"/>
+          </a:fontRef>
+        </p:style>
+        <p:txBody>
+          <a:bodyPr rtlCol="0" anchor="ctr"/>
+          <a:lstStyle/>
+          <a:p>
+            <a:pPr algn="ctr"/>
+          </a:p>
+        </p:txBody>
+      </p:sp>
+      <p:sp>
+        <p:nvSpPr>
+          <p:cNvPr id="13" name="TextBox 12"/>
+          <p:cNvSpPr txBox="1"/>
+          <p:nvPr/>
+        </p:nvSpPr>
+        <p:spPr>
+          <a:xfrm>
+            <a:off x="8065008" y="1207008"/>
+            <a:ext cx="3200400" cy="237744"/>
+          </a:xfrm>
+          <a:prstGeom prst="rect">
+            <a:avLst/>
+          </a:prstGeom>
+          <a:noFill/>
+        </p:spPr>
+        <p:txBody>
+          <a:bodyPr wrap="square" anchor="t" lIns="0" rIns="0" tIns="0" bIns="0"/>
+          <a:lstStyle/>
+          <a:p>
+            <a:pPr algn="l"/>
+            <a:r>
+              <a:rPr sz="1400" b="0" i="0" lang="zh-CN" altLang="en-US">
+                <a:solidFill>
+                  <a:srgbClr val="9E1B1B"/>
+                </a:solidFill>
+                <a:latin typeface="Noto Sans CJK SC Medium"/>
+                <a:ea typeface="Noto Sans CJK SC Medium"/>
+                <a:cs typeface="Noto Sans CJK SC Medium"/>
+              </a:rPr>
+              <a:t>03</a:t>
+            </a:r>
+          </a:p>
+        </p:txBody>
+      </p:sp>
+      <p:sp>
+        <p:nvSpPr>
+          <p:cNvPr id="14" name="TextBox 13"/>
+          <p:cNvSpPr txBox="1"/>
+          <p:nvPr/>
+        </p:nvSpPr>
+        <p:spPr>
+          <a:xfrm>
+            <a:off x="8065008" y="1499616"/>
+            <a:ext cx="3246120" cy="640080"/>
+          </a:xfrm>
+          <a:prstGeom prst="rect">
+            <a:avLst/>
+          </a:prstGeom>
+          <a:noFill/>
+        </p:spPr>
+        <p:txBody>
+          <a:bodyPr wrap="square" anchor="t" lIns="0" rIns="0" tIns="0" bIns="0"/>
+          <a:lstStyle/>
+          <a:p>
+            <a:pPr algn="l"/>
+            <a:r>
+              <a:rPr sz="2200" b="0" i="0" lang="zh-CN" altLang="en-US">
+                <a:solidFill>
+                  <a:srgbClr val="141414"/>
+                </a:solidFill>
+                <a:latin typeface="Noto Sans CJK SC Medium"/>
+                <a:ea typeface="Noto Sans CJK SC Medium"/>
+                <a:cs typeface="Noto Sans CJK SC Medium"/>
+              </a:rPr>
+              <a:t>电在规则里累积</a:t>
+            </a:r>
+          </a:p>
+        </p:txBody>
+      </p:sp>
+      <p:sp>
+        <p:nvSpPr>
+          <p:cNvPr id="15" name="TextBox 14"/>
+          <p:cNvSpPr txBox="1"/>
+          <p:nvPr/>
+        </p:nvSpPr>
+        <p:spPr>
+          <a:xfrm>
+            <a:off x="8065008" y="2240280"/>
+            <a:ext cx="3246120" cy="1965960"/>
+          </a:xfrm>
+          <a:prstGeom prst="rect">
+            <a:avLst/>
+          </a:prstGeom>
+          <a:noFill/>
+        </p:spPr>
+        <p:txBody>
+          <a:bodyPr wrap="square" anchor="t" lIns="0" rIns="0" tIns="0" bIns="0"/>
+          <a:lstStyle/>
+          <a:p>
+            <a:pPr algn="l">
+              <a:lnSpc>
+                <a:spcPct val="135000"/>
+              </a:lnSpc>
+            </a:pPr>
+            <a:r>
+              <a:rPr sz="1500" b="0" i="0" lang="zh-CN" altLang="en-US">
+                <a:solidFill>
+                  <a:srgbClr val="2C2C2C"/>
+                </a:solidFill>
+                <a:latin typeface="Noto Sans CJK SC"/>
+                <a:ea typeface="Noto Sans CJK SC"/>
+                <a:cs typeface="Noto Sans CJK SC"/>
+              </a:rPr>
+              <a:t>不卖加油券，
+走联名卡积分。
+中国电动车多。
+家用的电也要能累积。
+办法在规则里面。</a:t>
+            </a:r>
+          </a:p>
+        </p:txBody>
+      </p:sp>
+      <p:sp>
+        <p:nvSpPr>
+          <p:cNvPr id="16" name="Rectangle 15"/>
+          <p:cNvSpPr/>
+          <p:nvPr/>
+        </p:nvSpPr>
+        <p:spPr>
+          <a:xfrm>
+            <a:off x="658368" y="4754880"/>
+            <a:ext cx="10881360" cy="10972"/>
+          </a:xfrm>
+          <a:prstGeom prst="rect">
+            <a:avLst/>
+          </a:prstGeom>
+          <a:solidFill>
+            <a:srgbClr val="E2E2E2"/>
+          </a:solidFill>
+          <a:ln>
+            <a:noFill/>
+          </a:ln>
+        </p:spPr>
+        <p:style>
+          <a:lnRef idx="1">
+            <a:schemeClr val="accent1"/>
+          </a:lnRef>
+          <a:fillRef idx="3">
+            <a:schemeClr val="accent1"/>
+          </a:fillRef>
+          <a:effectRef idx="2">
+            <a:schemeClr val="accent1"/>
+          </a:effectRef>
+          <a:fontRef idx="minor">
+            <a:schemeClr val="lt1"/>
+          </a:fontRef>
+        </p:style>
+        <p:txBody>
+          <a:bodyPr rtlCol="0" anchor="ctr"/>
+          <a:lstStyle/>
+          <a:p>
+            <a:pPr algn="ctr"/>
+          </a:p>
+        </p:txBody>
+      </p:sp>
+      <p:sp>
+        <p:nvSpPr>
+          <p:cNvPr id="17" name="TextBox 16"/>
+          <p:cNvSpPr txBox="1"/>
+          <p:nvPr/>
+        </p:nvSpPr>
+        <p:spPr>
+          <a:xfrm>
+            <a:off x="658368" y="4956048"/>
+            <a:ext cx="10789920" cy="1051560"/>
+          </a:xfrm>
+          <a:prstGeom prst="rect">
+            <a:avLst/>
+          </a:prstGeom>
+          <a:noFill/>
+        </p:spPr>
+        <p:txBody>
+          <a:bodyPr wrap="square" anchor="t" lIns="0" rIns="0" tIns="0" bIns="0"/>
+          <a:lstStyle/>
+          <a:p>
+            <a:pPr algn="l">
+              <a:lnSpc>
+                <a:spcPct val="130000"/>
+              </a:lnSpc>
+            </a:pPr>
+            <a:r>
+              <a:rPr sz="2000" b="0" i="0" lang="zh-CN" altLang="en-US">
+                <a:solidFill>
+                  <a:srgbClr val="9E1B1B"/>
+                </a:solidFill>
+                <a:latin typeface="Noto Sans CJK SC Medium"/>
+                <a:ea typeface="Noto Sans CJK SC Medium"/>
+                <a:cs typeface="Noto Sans CJK SC Medium"/>
+              </a:rPr>
+              <a:t>每天的开支接进同一个平台。
+人每天来，五百个主力的产量才留得住。</a:t>
+            </a:r>
+          </a:p>
+        </p:txBody>
+      </p:sp>
+      <p:sp>
+        <p:nvSpPr>
+          <p:cNvPr id="18" name="TextBox 17"/>
+          <p:cNvSpPr txBox="1"/>
+          <p:nvPr/>
+        </p:nvSpPr>
+        <p:spPr>
+          <a:xfrm>
+            <a:off x="10561320" y="6492240"/>
+            <a:ext cx="1051560" cy="201168"/>
+          </a:xfrm>
+          <a:prstGeom prst="rect">
+            <a:avLst/>
+          </a:prstGeom>
+          <a:noFill/>
+        </p:spPr>
+        <p:txBody>
+          <a:bodyPr wrap="square" anchor="t" lIns="0" rIns="0" tIns="0" bIns="0"/>
+          <a:lstStyle/>
+          <a:p>
+            <a:pPr algn="r"/>
+            <a:r>
+              <a:rPr sz="1100" b="0" i="0" lang="zh-CN" altLang="en-US">
+                <a:solidFill>
+                  <a:srgbClr val="C8C8C8"/>
+                </a:solidFill>
+                <a:latin typeface="Noto Sans CJK SC"/>
+                <a:ea typeface="Noto Sans CJK SC"/>
+                <a:cs typeface="Noto Sans CJK SC"/>
+              </a:rPr>
+              <a:t>21</a:t>
+            </a:r>
+          </a:p>
+        </p:txBody>
+      </p:sp>
+    </p:spTree>
+  </p:cSld>
+  <p:clrMapOvr>
+    <a:masterClrMapping/>
+  </p:clrMapOvr>
+</p:sld>
+</file>
+
+<file path=ppt/slides/slide22.xml><?xml version="1.0" encoding="utf-8"?>
+<p:sld xmlns:a="http://schemas.openxmlformats.org/drawingml/2006/main" xmlns:p="http://schemas.openxmlformats.org/presentationml/2006/main" xmlns:r="http://schemas.openxmlformats.org/officeDocument/2006/relationships">
+  <p:cSld>
+    <p:bg>
+      <p:bgPr>
+        <a:solidFill>
+          <a:srgbClr val="FFFFFF"/>
+        </a:solidFill>
+        <a:effectLst/>
+      </p:bgPr>
+    </p:bg>
+    <p:spTree>
+      <p:nvGrpSpPr>
+        <p:cNvPr id="1" name=""/>
+        <p:cNvGrpSpPr/>
+        <p:nvPr/>
+      </p:nvGrpSpPr>
+      <p:grpSpPr/>
+      <p:sp>
+        <p:nvSpPr>
+          <p:cNvPr id="2" name="TextBox 1"/>
+          <p:cNvSpPr txBox="1"/>
+          <p:nvPr/>
+        </p:nvSpPr>
+        <p:spPr>
+          <a:xfrm>
+            <a:off x="658368" y="365760"/>
+            <a:ext cx="640080" cy="329184"/>
+          </a:xfrm>
+          <a:prstGeom prst="rect">
+            <a:avLst/>
+          </a:prstGeom>
+          <a:noFill/>
+        </p:spPr>
+        <p:txBody>
+          <a:bodyPr wrap="square" anchor="t" lIns="0" rIns="0" tIns="0" bIns="0"/>
+          <a:lstStyle/>
+          <a:p>
+            <a:pPr algn="l"/>
+            <a:r>
+              <a:rPr sz="1500" b="0" i="0" lang="zh-CN" altLang="en-US">
+                <a:solidFill>
+                  <a:srgbClr val="9E1B1B"/>
+                </a:solidFill>
+                <a:latin typeface="Noto Sans CJK SC Medium"/>
+                <a:ea typeface="Noto Sans CJK SC Medium"/>
+                <a:cs typeface="Noto Sans CJK SC Medium"/>
+              </a:rPr>
+              <a:t>20</a:t>
+            </a:r>
+          </a:p>
+        </p:txBody>
+      </p:sp>
+      <p:sp>
+        <p:nvSpPr>
+          <p:cNvPr id="3" name="TextBox 2"/>
+          <p:cNvSpPr txBox="1"/>
+          <p:nvPr/>
+        </p:nvSpPr>
+        <p:spPr>
+          <a:xfrm>
+            <a:off x="1371600" y="310896"/>
+            <a:ext cx="10058400" cy="438912"/>
+          </a:xfrm>
+          <a:prstGeom prst="rect">
+            <a:avLst/>
+          </a:prstGeom>
+          <a:noFill/>
+        </p:spPr>
+        <p:txBody>
+          <a:bodyPr wrap="square" anchor="t" lIns="0" rIns="0" tIns="0" bIns="0"/>
+          <a:lstStyle/>
+          <a:p>
+            <a:pPr algn="l"/>
+            <a:r>
+              <a:rPr sz="3000" b="0" i="0" lang="zh-CN" altLang="en-US">
+                <a:solidFill>
+                  <a:srgbClr val="141414"/>
+                </a:solidFill>
+                <a:latin typeface="Noto Sans CJK SC Medium"/>
+                <a:ea typeface="Noto Sans CJK SC Medium"/>
+                <a:cs typeface="Noto Sans CJK SC Medium"/>
+              </a:rPr>
+              <a:t>中国法人要交的三份证明</a:t>
+            </a:r>
+          </a:p>
+        </p:txBody>
+      </p:sp>
+      <p:sp>
+        <p:nvSpPr>
+          <p:cNvPr id="4" name="Rectangle 3"/>
+          <p:cNvSpPr/>
+          <p:nvPr/>
+        </p:nvSpPr>
+        <p:spPr>
+          <a:xfrm>
+            <a:off x="658368" y="960120"/>
+            <a:ext cx="10881360" cy="10972"/>
+          </a:xfrm>
+          <a:prstGeom prst="rect">
+            <a:avLst/>
+          </a:prstGeom>
+          <a:solidFill>
+            <a:srgbClr val="E2E2E2"/>
+          </a:solidFill>
+          <a:ln>
+            <a:noFill/>
+          </a:ln>
+        </p:spPr>
+        <p:style>
+          <a:lnRef idx="1">
+            <a:schemeClr val="accent1"/>
+          </a:lnRef>
+          <a:fillRef idx="3">
+            <a:schemeClr val="accent1"/>
+          </a:fillRef>
+          <a:effectRef idx="2">
+            <a:schemeClr val="accent1"/>
+          </a:effectRef>
+          <a:fontRef idx="minor">
+            <a:schemeClr val="lt1"/>
+          </a:fontRef>
+        </p:style>
+        <p:txBody>
+          <a:bodyPr rtlCol="0" anchor="ctr"/>
+          <a:lstStyle/>
+          <a:p>
+            <a:pPr algn="ctr"/>
+          </a:p>
+        </p:txBody>
+      </p:sp>
+      <p:sp>
+        <p:nvSpPr>
+          <p:cNvPr id="5" name="TextBox 4"/>
+          <p:cNvSpPr txBox="1"/>
+          <p:nvPr/>
+        </p:nvSpPr>
+        <p:spPr>
+          <a:xfrm>
+            <a:off x="658368" y="1207008"/>
+            <a:ext cx="3200400" cy="237744"/>
+          </a:xfrm>
+          <a:prstGeom prst="rect">
+            <a:avLst/>
+          </a:prstGeom>
+          <a:noFill/>
+        </p:spPr>
+        <p:txBody>
+          <a:bodyPr wrap="square" anchor="t" lIns="0" rIns="0" tIns="0" bIns="0"/>
+          <a:lstStyle/>
+          <a:p>
+            <a:pPr algn="l"/>
+            <a:r>
+              <a:rPr sz="1400" b="0" i="0" lang="zh-CN" altLang="en-US">
+                <a:solidFill>
+                  <a:srgbClr val="9E1B1B"/>
+                </a:solidFill>
+                <a:latin typeface="Noto Sans CJK SC Medium"/>
+                <a:ea typeface="Noto Sans CJK SC Medium"/>
+                <a:cs typeface="Noto Sans CJK SC Medium"/>
+              </a:rPr>
+              <a:t>01</a:t>
+            </a:r>
+          </a:p>
+        </p:txBody>
+      </p:sp>
+      <p:sp>
+        <p:nvSpPr>
+          <p:cNvPr id="6" name="TextBox 5"/>
+          <p:cNvSpPr txBox="1"/>
+          <p:nvPr/>
+        </p:nvSpPr>
+        <p:spPr>
+          <a:xfrm>
+            <a:off x="658368" y="1499616"/>
+            <a:ext cx="3246120" cy="685800"/>
+          </a:xfrm>
+          <a:prstGeom prst="rect">
+            <a:avLst/>
+          </a:prstGeom>
+          <a:noFill/>
+        </p:spPr>
+        <p:txBody>
+          <a:bodyPr wrap="square" anchor="t" lIns="0" rIns="0" tIns="0" bIns="0"/>
+          <a:lstStyle/>
+          <a:p>
+            <a:pPr algn="l"/>
+            <a:r>
+              <a:rPr sz="2200" b="0" i="0" lang="zh-CN" altLang="en-US">
+                <a:solidFill>
+                  <a:srgbClr val="141414"/>
+                </a:solidFill>
+                <a:latin typeface="Noto Sans CJK SC Medium"/>
+                <a:ea typeface="Noto Sans CJK SC Medium"/>
+                <a:cs typeface="Noto Sans CJK SC Medium"/>
+              </a:rPr>
+              <a:t>一百兆为何成立</a:t>
+            </a:r>
+          </a:p>
+        </p:txBody>
+      </p:sp>
+      <p:sp>
+        <p:nvSpPr>
+          <p:cNvPr id="7" name="TextBox 6"/>
+          <p:cNvSpPr txBox="1"/>
+          <p:nvPr/>
+        </p:nvSpPr>
+        <p:spPr>
+          <a:xfrm>
+            <a:off x="658368" y="2286000"/>
+            <a:ext cx="3246120" cy="1920240"/>
+          </a:xfrm>
+          <a:prstGeom prst="rect">
+            <a:avLst/>
+          </a:prstGeom>
+          <a:noFill/>
+        </p:spPr>
+        <p:txBody>
+          <a:bodyPr wrap="square" anchor="t" lIns="0" rIns="0" tIns="0" bIns="0"/>
+          <a:lstStyle/>
+          <a:p>
+            <a:pPr algn="l">
+              <a:lnSpc>
+                <a:spcPct val="135000"/>
+              </a:lnSpc>
+            </a:pPr>
+            <a:r>
+              <a:rPr sz="1500" b="0" i="0" lang="zh-CN" altLang="en-US">
+                <a:solidFill>
+                  <a:srgbClr val="2C2C2C"/>
+                </a:solidFill>
+                <a:latin typeface="Noto Sans CJK SC"/>
+                <a:ea typeface="Noto Sans CJK SC"/>
+                <a:cs typeface="Noto Sans CJK SC"/>
+              </a:rPr>
+              <a:t>用工序、组织、选择证明。
+中国要的增长，
+靠决策快、投入真。
+图纸、栽培合同、骨架，
+都是投入。</a:t>
+            </a:r>
+          </a:p>
+        </p:txBody>
+      </p:sp>
+      <p:sp>
+        <p:nvSpPr>
+          <p:cNvPr id="8" name="Rectangle 7"/>
+          <p:cNvSpPr/>
+          <p:nvPr/>
+        </p:nvSpPr>
+        <p:spPr>
+          <a:xfrm>
+            <a:off x="4160520" y="1207008"/>
+            <a:ext cx="10972" cy="3063240"/>
+          </a:xfrm>
+          <a:prstGeom prst="rect">
+            <a:avLst/>
+          </a:prstGeom>
+          <a:solidFill>
+            <a:srgbClr val="E2E2E2"/>
+          </a:solidFill>
+          <a:ln>
+            <a:noFill/>
+          </a:ln>
+        </p:spPr>
+        <p:style>
+          <a:lnRef idx="1">
+            <a:schemeClr val="accent1"/>
+          </a:lnRef>
+          <a:fillRef idx="3">
+            <a:schemeClr val="accent1"/>
+          </a:fillRef>
+          <a:effectRef idx="2">
+            <a:schemeClr val="accent1"/>
+          </a:effectRef>
+          <a:fontRef idx="minor">
+            <a:schemeClr val="lt1"/>
+          </a:fontRef>
+        </p:style>
+        <p:txBody>
+          <a:bodyPr rtlCol="0" anchor="ctr"/>
+          <a:lstStyle/>
+          <a:p>
+            <a:pPr algn="ctr"/>
+          </a:p>
+        </p:txBody>
+      </p:sp>
+      <p:sp>
+        <p:nvSpPr>
+          <p:cNvPr id="9" name="TextBox 8"/>
+          <p:cNvSpPr txBox="1"/>
+          <p:nvPr/>
+        </p:nvSpPr>
+        <p:spPr>
+          <a:xfrm>
+            <a:off x="4361688" y="1207008"/>
+            <a:ext cx="3200400" cy="237744"/>
+          </a:xfrm>
+          <a:prstGeom prst="rect">
+            <a:avLst/>
+          </a:prstGeom>
+          <a:noFill/>
+        </p:spPr>
+        <p:txBody>
+          <a:bodyPr wrap="square" anchor="t" lIns="0" rIns="0" tIns="0" bIns="0"/>
+          <a:lstStyle/>
+          <a:p>
+            <a:pPr algn="l"/>
+            <a:r>
+              <a:rPr sz="1400" b="0" i="0" lang="zh-CN" altLang="en-US">
+                <a:solidFill>
+                  <a:srgbClr val="9E1B1B"/>
+                </a:solidFill>
+                <a:latin typeface="Noto Sans CJK SC Medium"/>
+                <a:ea typeface="Noto Sans CJK SC Medium"/>
+                <a:cs typeface="Noto Sans CJK SC Medium"/>
+              </a:rPr>
+              <a:t>02</a:t>
+            </a:r>
+          </a:p>
+        </p:txBody>
+      </p:sp>
+      <p:sp>
+        <p:nvSpPr>
+          <p:cNvPr id="10" name="TextBox 9"/>
+          <p:cNvSpPr txBox="1"/>
+          <p:nvPr/>
+        </p:nvSpPr>
+        <p:spPr>
+          <a:xfrm>
+            <a:off x="4361688" y="1499616"/>
+            <a:ext cx="3246120" cy="685800"/>
+          </a:xfrm>
+          <a:prstGeom prst="rect">
+            <a:avLst/>
+          </a:prstGeom>
+          <a:noFill/>
+        </p:spPr>
+        <p:txBody>
+          <a:bodyPr wrap="square" anchor="t" lIns="0" rIns="0" tIns="0" bIns="0"/>
+          <a:lstStyle/>
+          <a:p>
+            <a:pPr algn="l"/>
+            <a:r>
+              <a:rPr sz="2200" b="0" i="0" lang="zh-CN" altLang="en-US">
+                <a:solidFill>
+                  <a:srgbClr val="141414"/>
+                </a:solidFill>
+                <a:latin typeface="Noto Sans CJK SC Medium"/>
+                <a:ea typeface="Noto Sans CJK SC Medium"/>
+                <a:cs typeface="Noto Sans CJK SC Medium"/>
+              </a:rPr>
+              <a:t>一个全球冠军</a:t>
+            </a:r>
+          </a:p>
+        </p:txBody>
+      </p:sp>
+      <p:sp>
+        <p:nvSpPr>
+          <p:cNvPr id="11" name="TextBox 10"/>
+          <p:cNvSpPr txBox="1"/>
+          <p:nvPr/>
+        </p:nvSpPr>
+        <p:spPr>
+          <a:xfrm>
+            <a:off x="4361688" y="2286000"/>
+            <a:ext cx="3246120" cy="1920240"/>
+          </a:xfrm>
+          <a:prstGeom prst="rect">
+            <a:avLst/>
+          </a:prstGeom>
+          <a:noFill/>
+        </p:spPr>
+        <p:txBody>
+          <a:bodyPr wrap="square" anchor="t" lIns="0" rIns="0" tIns="0" bIns="0"/>
+          <a:lstStyle/>
+          <a:p>
+            <a:pPr algn="l">
+              <a:lnSpc>
+                <a:spcPct val="135000"/>
+              </a:lnSpc>
+            </a:pPr>
+            <a:r>
+              <a:rPr sz="1500" b="0" i="0" lang="zh-CN" altLang="en-US">
+                <a:solidFill>
+                  <a:srgbClr val="2C2C2C"/>
+                </a:solidFill>
+                <a:latin typeface="Noto Sans CJK SC"/>
+                <a:ea typeface="Noto Sans CJK SC"/>
+                <a:cs typeface="Noto Sans CJK SC"/>
+              </a:rPr>
+              <a:t>一个功能，一个产品。
+品质世界第一。
+价格压倒性第一。
+中国的量，用来让
+这一个主导品类。</a:t>
+            </a:r>
+          </a:p>
+        </p:txBody>
+      </p:sp>
+      <p:sp>
+        <p:nvSpPr>
+          <p:cNvPr id="12" name="Rectangle 11"/>
+          <p:cNvSpPr/>
+          <p:nvPr/>
+        </p:nvSpPr>
+        <p:spPr>
+          <a:xfrm>
+            <a:off x="7863840" y="1207008"/>
+            <a:ext cx="10972" cy="3063240"/>
+          </a:xfrm>
+          <a:prstGeom prst="rect">
+            <a:avLst/>
+          </a:prstGeom>
+          <a:solidFill>
+            <a:srgbClr val="E2E2E2"/>
+          </a:solidFill>
+          <a:ln>
+            <a:noFill/>
+          </a:ln>
+        </p:spPr>
+        <p:style>
+          <a:lnRef idx="1">
+            <a:schemeClr val="accent1"/>
+          </a:lnRef>
+          <a:fillRef idx="3">
+            <a:schemeClr val="accent1"/>
+          </a:fillRef>
+          <a:effectRef idx="2">
+            <a:schemeClr val="accent1"/>
+          </a:effectRef>
+          <a:fontRef idx="minor">
+            <a:schemeClr val="lt1"/>
+          </a:fontRef>
+        </p:style>
+        <p:txBody>
+          <a:bodyPr rtlCol="0" anchor="ctr"/>
+          <a:lstStyle/>
+          <a:p>
+            <a:pPr algn="ctr"/>
+          </a:p>
+        </p:txBody>
+      </p:sp>
+      <p:sp>
+        <p:nvSpPr>
+          <p:cNvPr id="13" name="TextBox 12"/>
+          <p:cNvSpPr txBox="1"/>
+          <p:nvPr/>
+        </p:nvSpPr>
+        <p:spPr>
+          <a:xfrm>
+            <a:off x="8065008" y="1207008"/>
+            <a:ext cx="3200400" cy="237744"/>
+          </a:xfrm>
+          <a:prstGeom prst="rect">
+            <a:avLst/>
+          </a:prstGeom>
+          <a:noFill/>
+        </p:spPr>
+        <p:txBody>
+          <a:bodyPr wrap="square" anchor="t" lIns="0" rIns="0" tIns="0" bIns="0"/>
+          <a:lstStyle/>
+          <a:p>
+            <a:pPr algn="l"/>
+            <a:r>
+              <a:rPr sz="1400" b="0" i="0" lang="zh-CN" altLang="en-US">
+                <a:solidFill>
+                  <a:srgbClr val="9E1B1B"/>
+                </a:solidFill>
+                <a:latin typeface="Noto Sans CJK SC Medium"/>
+                <a:ea typeface="Noto Sans CJK SC Medium"/>
+                <a:cs typeface="Noto Sans CJK SC Medium"/>
+              </a:rPr>
+              <a:t>03</a:t>
+            </a:r>
+          </a:p>
+        </p:txBody>
+      </p:sp>
+      <p:sp>
+        <p:nvSpPr>
+          <p:cNvPr id="14" name="TextBox 13"/>
+          <p:cNvSpPr txBox="1"/>
+          <p:nvPr/>
+        </p:nvSpPr>
+        <p:spPr>
+          <a:xfrm>
+            <a:off x="8065008" y="1499616"/>
+            <a:ext cx="3246120" cy="685800"/>
+          </a:xfrm>
+          <a:prstGeom prst="rect">
+            <a:avLst/>
+          </a:prstGeom>
+          <a:noFill/>
+        </p:spPr>
+        <p:txBody>
+          <a:bodyPr wrap="square" anchor="t" lIns="0" rIns="0" tIns="0" bIns="0"/>
+          <a:lstStyle/>
+          <a:p>
+            <a:pPr algn="l"/>
+            <a:r>
+              <a:rPr sz="2200" b="0" i="0" lang="zh-CN" altLang="en-US">
+                <a:solidFill>
+                  <a:srgbClr val="141414"/>
+                </a:solidFill>
+                <a:latin typeface="Noto Sans CJK SC Medium"/>
+                <a:ea typeface="Noto Sans CJK SC Medium"/>
+                <a:cs typeface="Noto Sans CJK SC Medium"/>
+              </a:rPr>
+              <a:t>三 A 与平台主人</a:t>
+            </a:r>
+          </a:p>
+        </p:txBody>
+      </p:sp>
+      <p:sp>
+        <p:nvSpPr>
+          <p:cNvPr id="15" name="TextBox 14"/>
+          <p:cNvSpPr txBox="1"/>
+          <p:nvPr/>
+        </p:nvSpPr>
+        <p:spPr>
+          <a:xfrm>
+            <a:off x="8065008" y="2286000"/>
+            <a:ext cx="3246120" cy="1920240"/>
+          </a:xfrm>
+          <a:prstGeom prst="rect">
+            <a:avLst/>
+          </a:prstGeom>
+          <a:noFill/>
+        </p:spPr>
+        <p:txBody>
+          <a:bodyPr wrap="square" anchor="t" lIns="0" rIns="0" tIns="0" bIns="0"/>
+          <a:lstStyle/>
+          <a:p>
+            <a:pPr algn="l">
+              <a:lnSpc>
+                <a:spcPct val="135000"/>
+              </a:lnSpc>
+            </a:pPr>
+            <a:r>
+              <a:rPr sz="1500" b="0" i="0" lang="zh-CN" altLang="en-US">
+                <a:solidFill>
+                  <a:srgbClr val="2C2C2C"/>
+                </a:solidFill>
+                <a:latin typeface="Noto Sans CJK SC"/>
+                <a:ea typeface="Noto Sans CJK SC"/>
+                <a:cs typeface="Noto Sans CJK SC"/>
+              </a:rPr>
+              <a:t>个人平台、艾护理、阿扎
+一起扩散。
+事业者育成平台主人。
+跟上来的合作方，
+成功一起负责。</a:t>
+            </a:r>
+          </a:p>
+        </p:txBody>
+      </p:sp>
+      <p:sp>
+        <p:nvSpPr>
+          <p:cNvPr id="16" name="Rectangle 15"/>
+          <p:cNvSpPr/>
+          <p:nvPr/>
+        </p:nvSpPr>
+        <p:spPr>
+          <a:xfrm>
+            <a:off x="658368" y="4754880"/>
+            <a:ext cx="10881360" cy="10972"/>
+          </a:xfrm>
+          <a:prstGeom prst="rect">
+            <a:avLst/>
+          </a:prstGeom>
+          <a:solidFill>
+            <a:srgbClr val="E2E2E2"/>
+          </a:solidFill>
+          <a:ln>
+            <a:noFill/>
+          </a:ln>
+        </p:spPr>
+        <p:style>
+          <a:lnRef idx="1">
+            <a:schemeClr val="accent1"/>
+          </a:lnRef>
+          <a:fillRef idx="3">
+            <a:schemeClr val="accent1"/>
+          </a:fillRef>
+          <a:effectRef idx="2">
+            <a:schemeClr val="accent1"/>
+          </a:effectRef>
+          <a:fontRef idx="minor">
+            <a:schemeClr val="lt1"/>
+          </a:fontRef>
+        </p:style>
+        <p:txBody>
+          <a:bodyPr rtlCol="0" anchor="ctr"/>
+          <a:lstStyle/>
+          <a:p>
+            <a:pPr algn="ctr"/>
+          </a:p>
+        </p:txBody>
+      </p:sp>
+      <p:sp>
+        <p:nvSpPr>
+          <p:cNvPr id="17" name="TextBox 16"/>
+          <p:cNvSpPr txBox="1"/>
+          <p:nvPr/>
+        </p:nvSpPr>
+        <p:spPr>
+          <a:xfrm>
+            <a:off x="658368" y="4956048"/>
+            <a:ext cx="10789920" cy="1051560"/>
+          </a:xfrm>
+          <a:prstGeom prst="rect">
+            <a:avLst/>
+          </a:prstGeom>
+          <a:noFill/>
+        </p:spPr>
+        <p:txBody>
+          <a:bodyPr wrap="square" anchor="t" lIns="0" rIns="0" tIns="0" bIns="0"/>
+          <a:lstStyle/>
+          <a:p>
+            <a:pPr algn="l">
+              <a:lnSpc>
+                <a:spcPct val="130000"/>
+              </a:lnSpc>
+            </a:pPr>
+            <a:r>
+              <a:rPr sz="2200" b="0" i="0" lang="zh-CN" altLang="en-US">
+                <a:solidFill>
+                  <a:srgbClr val="9E1B1B"/>
+                </a:solidFill>
+                <a:latin typeface="Noto Sans CJK SC Medium"/>
+                <a:ea typeface="Noto Sans CJK SC Medium"/>
+                <a:cs typeface="Noto Sans CJK SC Medium"/>
+              </a:rPr>
+              <a:t>三份是同一次企划。
+分开做，就是接力。</a:t>
+            </a:r>
+          </a:p>
+        </p:txBody>
+      </p:sp>
+      <p:sp>
+        <p:nvSpPr>
+          <p:cNvPr id="18" name="TextBox 17"/>
+          <p:cNvSpPr txBox="1"/>
+          <p:nvPr/>
+        </p:nvSpPr>
+        <p:spPr>
+          <a:xfrm>
+            <a:off x="10561320" y="6492240"/>
+            <a:ext cx="1051560" cy="201168"/>
+          </a:xfrm>
+          <a:prstGeom prst="rect">
+            <a:avLst/>
+          </a:prstGeom>
+          <a:noFill/>
+        </p:spPr>
+        <p:txBody>
+          <a:bodyPr wrap="square" anchor="t" lIns="0" rIns="0" tIns="0" bIns="0"/>
+          <a:lstStyle/>
+          <a:p>
+            <a:pPr algn="r"/>
+            <a:r>
+              <a:rPr sz="1100" b="0" i="0" lang="zh-CN" altLang="en-US">
+                <a:solidFill>
+                  <a:srgbClr val="C8C8C8"/>
+                </a:solidFill>
+                <a:latin typeface="Noto Sans CJK SC"/>
+                <a:ea typeface="Noto Sans CJK SC"/>
+                <a:cs typeface="Noto Sans CJK SC"/>
+              </a:rPr>
+              <a:t>22</a:t>
+            </a:r>
+          </a:p>
+        </p:txBody>
+      </p:sp>
+    </p:spTree>
+  </p:cSld>
+  <p:clrMapOvr>
+    <a:masterClrMapping/>
+  </p:clrMapOvr>
+</p:sld>
+</file>
+
+<file path=ppt/slides/slide23.xml><?xml version="1.0" encoding="utf-8"?>
+<p:sld xmlns:a="http://schemas.openxmlformats.org/drawingml/2006/main" xmlns:p="http://schemas.openxmlformats.org/presentationml/2006/main" xmlns:r="http://schemas.openxmlformats.org/officeDocument/2006/relationships">
+  <p:cSld>
+    <p:bg>
+      <p:bgPr>
+        <a:solidFill>
           <a:srgbClr val="121212"/>
         </a:solidFill>
         <a:effectLst/>
@@ -12635,7 +14782,7 @@
                 <a:ea typeface="Noto Sans CJK SC"/>
                 <a:cs typeface="Noto Sans CJK SC"/>
               </a:rPr>
-              <a:t>20</a:t>
+              <a:t>23</a:t>
             </a:r>
           </a:p>
         </p:txBody>

--- a/艾多美何以成为100兆韩元企业.pptx
+++ b/艾多美何以成为100兆韩元企业.pptx
@@ -874,7 +874,7 @@
           <a:lstStyle/>
           <a:p>
             <a:r>
-              <a:t>艾护理负责关系，阿扎负责每天来，个人平台负责把事业做成方法。加油走联名卡积分，不卖加油券。</a:t>
+              <a:t>可以分开讲。不能分开成立。四句同时转，才是一百兆。</a:t>
             </a:r>
           </a:p>
         </p:txBody>
@@ -944,7 +944,7 @@
           <a:lstStyle/>
           <a:p>
             <a:r>
-              <a:t>可以分开讲。不能分开成立。四句同时转，才是一百兆。</a:t>
+              <a:t>降运费是采购都会做的事。一贯工程删的是只为旧卖法存在的工序，或把下一道工序搬到原料那面墙外。</a:t>
             </a:r>
           </a:p>
         </p:txBody>
@@ -1014,7 +1014,7 @@
           <a:lstStyle/>
           <a:p>
             <a:r>
-              <a:t>降运费是采购都会做的事。一贯工程删的是只为旧卖法存在的工序，或把下一道工序搬到原料那面墙外。</a:t>
+              <a:t>四件都落在工序上：模具、配方、罐容、鲜品。加款、谈运费、再加一个口味，都不在这四件里。</a:t>
             </a:r>
           </a:p>
         </p:txBody>
@@ -1084,7 +1084,7 @@
           <a:lstStyle/>
           <a:p>
             <a:r>
-              <a:t>四件都落在工序上：模具、配方、罐容、鲜品。加款、谈运费、再加一个口味，都不在这四件里。</a:t>
+              <a:t>合作方先要看见能排产的量、设备由谁出、原料从育苗锁到哪一年。询价单给不出这些。</a:t>
             </a:r>
           </a:p>
         </p:txBody>
@@ -1154,7 +1154,7 @@
           <a:lstStyle/>
           <a:p>
             <a:r>
-              <a:t>合作方先要看见能排产的量、设备由谁出、原料从育苗锁到哪一年。询价单给不出这些。</a:t>
+              <a:t>个人平台先武装事业者：阶段、中文骨架、PPO。培育 PPO 是9月13日奖项的三份发表之一。酒店课和培训部是旧成本。</a:t>
             </a:r>
           </a:p>
         </p:txBody>
@@ -1224,7 +1224,7 @@
           <a:lstStyle/>
           <a:p>
             <a:r>
-              <a:t>个人平台先武装事业者：阶段、中文骨架、顾客进门就知道为什么买。酒店课和培训部是旧成本。</a:t>
+              <a:t>艾护理的输入是每餐、体型、步数、用药。输出先是这个人缺哪个功能，产品因一能一品而跟着定，人工智能不是在几个产品里挑。血和尿可以后补，记录不能等医院。记录存哪里、哪句话能说，中国要先定，定之前不对会员说。</a:t>
             </a:r>
           </a:p>
         </p:txBody>
@@ -1364,7 +1364,7 @@
           <a:lstStyle/>
           <a:p>
             <a:r>
-              <a:t>艾护理的输入是每餐、体型、步数、用药。输出是对这个人的一句：为什么是这一个。血和尿可以后补，记录不能等医院。</a:t>
+              <a:t>阿扎是市集的地面，不是行政窗口。鲭鱼这类高成本率的日常品负责人来。一百兆仍由大约五百个主力品目赚。充电接不接、走哪张卡哪张网，中国先定，不卖加油券。</a:t>
             </a:r>
           </a:p>
         </p:txBody>
@@ -1434,7 +1434,7 @@
           <a:lstStyle/>
           <a:p>
             <a:r>
-              <a:t>阿扎是市集的地面，不是行政窗口。鲭鱼这类高成本率的日常品负责人来。一百兆仍由大约五百个主力品目赚。电走规则内的积分，不卖加油券。</a:t>
+              <a:t>三 A 不是三个并列的应用。新人进艾护理建记录，记录说缺哪个功能，一能一品定那一个产品，阿扎每天接开支带出主力品目，用的人记在 PPO 名下，合起来变成能排产的数。要数的三样由中国法人自己给出，这里不填数字。</a:t>
             </a:r>
           </a:p>
         </p:txBody>
@@ -7825,7 +7825,7 @@
                 <a:ea typeface="Noto Sans CJK SC Medium"/>
                 <a:cs typeface="Noto Sans CJK SC Medium"/>
               </a:rPr>
-              <a:t>三个工具，是一个结构</a:t>
+              <a:t>四件事情要同时为真</a:t>
             </a:r>
           </a:p>
         </p:txBody>
@@ -7882,7 +7882,7 @@
         <p:spPr>
           <a:xfrm>
             <a:off x="658368" y="1234440"/>
-            <a:ext cx="3246120" cy="256032"/>
+            <a:ext cx="640080" cy="365760"/>
           </a:xfrm>
           <a:prstGeom prst="rect">
             <a:avLst/>
@@ -7895,7 +7895,7 @@
           <a:p>
             <a:pPr algn="l"/>
             <a:r>
-              <a:rPr sz="1300" b="0" i="0" lang="zh-CN" altLang="en-US">
+              <a:rPr sz="1600" b="0" i="0" lang="zh-CN" altLang="en-US">
                 <a:solidFill>
                   <a:srgbClr val="9E1B1B"/>
                 </a:solidFill>
@@ -7903,7 +7903,7 @@
                 <a:ea typeface="Noto Sans CJK SC Medium"/>
                 <a:cs typeface="Noto Sans CJK SC Medium"/>
               </a:rPr>
-              <a:t>APP</a:t>
+              <a:t>01</a:t>
             </a:r>
           </a:p>
         </p:txBody>
@@ -7916,8 +7916,8 @@
         </p:nvSpPr>
         <p:spPr>
           <a:xfrm>
-            <a:off x="658368" y="1600200"/>
-            <a:ext cx="3291840" cy="457200"/>
+            <a:off x="1463040" y="1216152"/>
+            <a:ext cx="9875520" cy="365760"/>
           </a:xfrm>
           <a:prstGeom prst="rect">
             <a:avLst/>
@@ -7930,7 +7930,7 @@
           <a:p>
             <a:pPr algn="l"/>
             <a:r>
-              <a:rPr sz="2400" b="0" i="0" lang="zh-CN" altLang="en-US">
+              <a:rPr sz="2200" b="0" i="0" lang="zh-CN" altLang="en-US">
                 <a:solidFill>
                   <a:srgbClr val="141414"/>
                 </a:solidFill>
@@ -7938,7 +7938,7 @@
                 <a:ea typeface="Noto Sans CJK SC Medium"/>
                 <a:cs typeface="Noto Sans CJK SC Medium"/>
               </a:rPr>
-              <a:t>个人平台</a:t>
+              <a:t>这条链不容易被照抄</a:t>
             </a:r>
           </a:p>
         </p:txBody>
@@ -7951,23 +7951,19 @@
         </p:nvSpPr>
         <p:spPr>
           <a:xfrm>
-            <a:off x="658368" y="2240280"/>
-            <a:ext cx="3246120" cy="2011680"/>
-          </a:xfrm>
-          <a:prstGeom prst="rect">
-            <a:avLst/>
-          </a:prstGeom>
-          <a:noFill/>
-        </p:spPr>
-        <p:txBody>
-          <a:bodyPr wrap="square" anchor="t" lIns="0" rIns="0" tIns="0" bIns="0"/>
-          <a:lstStyle/>
-          <a:p>
-            <a:pPr algn="l">
-              <a:lnSpc>
-                <a:spcPct val="145000"/>
-              </a:lnSpc>
-            </a:pPr>
+            <a:off x="1463040" y="1655064"/>
+            <a:ext cx="9875520" cy="365760"/>
+          </a:xfrm>
+          <a:prstGeom prst="rect">
+            <a:avLst/>
+          </a:prstGeom>
+          <a:noFill/>
+        </p:spPr>
+        <p:txBody>
+          <a:bodyPr wrap="square" anchor="t" lIns="0" rIns="0" tIns="0" bIns="0"/>
+          <a:lstStyle/>
+          <a:p>
+            <a:pPr algn="l"/>
             <a:r>
               <a:rPr sz="1500" b="0" i="0" lang="zh-CN" altLang="en-US">
                 <a:solidFill>
@@ -7977,64 +7973,21 @@
                 <a:ea typeface="Noto Sans CJK SC"/>
                 <a:cs typeface="Noto Sans CJK SC"/>
               </a:rPr>
-              <a:t>自己的店、自己的健康、自己的教育，收在一处。过去租酒店讲一小时，收成五分钟。平台本身就是人工智能。</a:t>
-            </a:r>
-          </a:p>
-        </p:txBody>
-      </p:sp>
-      <p:sp>
-        <p:nvSpPr>
-          <p:cNvPr id="8" name="Rectangle 7"/>
-          <p:cNvSpPr/>
-          <p:nvPr/>
-        </p:nvSpPr>
-        <p:spPr>
-          <a:xfrm>
-            <a:off x="4160520" y="1280160"/>
-            <a:ext cx="10972" cy="3063240"/>
-          </a:xfrm>
-          <a:prstGeom prst="rect">
-            <a:avLst/>
-          </a:prstGeom>
-          <a:solidFill>
-            <a:srgbClr val="E2E2E2"/>
-          </a:solidFill>
-          <a:ln>
-            <a:noFill/>
-          </a:ln>
-        </p:spPr>
-        <p:style>
-          <a:lnRef idx="1">
-            <a:schemeClr val="accent1"/>
-          </a:lnRef>
-          <a:fillRef idx="3">
-            <a:schemeClr val="accent1"/>
-          </a:fillRef>
-          <a:effectRef idx="2">
-            <a:schemeClr val="accent1"/>
-          </a:effectRef>
-          <a:fontRef idx="minor">
-            <a:schemeClr val="lt1"/>
-          </a:fontRef>
-        </p:style>
-        <p:txBody>
-          <a:bodyPr rtlCol="0" anchor="ctr"/>
-          <a:lstStyle/>
-          <a:p>
-            <a:pPr algn="ctr"/>
-          </a:p>
-        </p:txBody>
-      </p:sp>
-      <p:sp>
-        <p:nvSpPr>
-          <p:cNvPr id="9" name="TextBox 8"/>
-          <p:cNvSpPr txBox="1"/>
-          <p:nvPr/>
-        </p:nvSpPr>
-        <p:spPr>
-          <a:xfrm>
-            <a:off x="4361688" y="1234440"/>
-            <a:ext cx="3246120" cy="256032"/>
+              <a:t>价格表好抄。育苗、栽培、图纸、专用线和数据，要有人先把愿景和钱放进去。</a:t>
+            </a:r>
+          </a:p>
+        </p:txBody>
+      </p:sp>
+      <p:sp>
+        <p:nvSpPr>
+          <p:cNvPr id="8" name="TextBox 7"/>
+          <p:cNvSpPr txBox="1"/>
+          <p:nvPr/>
+        </p:nvSpPr>
+        <p:spPr>
+          <a:xfrm>
+            <a:off x="658368" y="2423160"/>
+            <a:ext cx="640080" cy="365760"/>
           </a:xfrm>
           <a:prstGeom prst="rect">
             <a:avLst/>
@@ -8047,7 +8000,7 @@
           <a:p>
             <a:pPr algn="l"/>
             <a:r>
-              <a:rPr sz="1300" b="0" i="0" lang="zh-CN" altLang="en-US">
+              <a:rPr sz="1600" b="0" i="0" lang="zh-CN" altLang="en-US">
                 <a:solidFill>
                   <a:srgbClr val="9E1B1B"/>
                 </a:solidFill>
@@ -8055,21 +8008,21 @@
                 <a:ea typeface="Noto Sans CJK SC Medium"/>
                 <a:cs typeface="Noto Sans CJK SC Medium"/>
               </a:rPr>
-              <a:t>A-Care</a:t>
-            </a:r>
-          </a:p>
-        </p:txBody>
-      </p:sp>
-      <p:sp>
-        <p:nvSpPr>
-          <p:cNvPr id="10" name="TextBox 9"/>
-          <p:cNvSpPr txBox="1"/>
-          <p:nvPr/>
-        </p:nvSpPr>
-        <p:spPr>
-          <a:xfrm>
-            <a:off x="4361688" y="1600200"/>
-            <a:ext cx="3291840" cy="457200"/>
+              <a:t>02</a:t>
+            </a:r>
+          </a:p>
+        </p:txBody>
+      </p:sp>
+      <p:sp>
+        <p:nvSpPr>
+          <p:cNvPr id="9" name="TextBox 8"/>
+          <p:cNvSpPr txBox="1"/>
+          <p:nvPr/>
+        </p:nvSpPr>
+        <p:spPr>
+          <a:xfrm>
+            <a:off x="1463040" y="2404872"/>
+            <a:ext cx="9875520" cy="365760"/>
           </a:xfrm>
           <a:prstGeom prst="rect">
             <a:avLst/>
@@ -8082,7 +8035,7 @@
           <a:p>
             <a:pPr algn="l"/>
             <a:r>
-              <a:rPr sz="2400" b="0" i="0" lang="zh-CN" altLang="en-US">
+              <a:rPr sz="2200" b="0" i="0" lang="zh-CN" altLang="en-US">
                 <a:solidFill>
                   <a:srgbClr val="141414"/>
                 </a:solidFill>
@@ -8090,36 +8043,32 @@
                 <a:ea typeface="Noto Sans CJK SC Medium"/>
                 <a:cs typeface="Noto Sans CJK SC Medium"/>
               </a:rPr>
-              <a:t>艾护理</a:t>
-            </a:r>
-          </a:p>
-        </p:txBody>
-      </p:sp>
-      <p:sp>
-        <p:nvSpPr>
-          <p:cNvPr id="11" name="TextBox 10"/>
-          <p:cNvSpPr txBox="1"/>
-          <p:nvPr/>
-        </p:nvSpPr>
-        <p:spPr>
-          <a:xfrm>
-            <a:off x="4361688" y="2240280"/>
-            <a:ext cx="3246120" cy="2011680"/>
-          </a:xfrm>
-          <a:prstGeom prst="rect">
-            <a:avLst/>
-          </a:prstGeom>
-          <a:noFill/>
-        </p:spPr>
-        <p:txBody>
-          <a:bodyPr wrap="square" anchor="t" lIns="0" rIns="0" tIns="0" bIns="0"/>
-          <a:lstStyle/>
-          <a:p>
-            <a:pPr algn="l">
-              <a:lnSpc>
-                <a:spcPct val="145000"/>
-              </a:lnSpc>
-            </a:pPr>
+              <a:t>不附带对方肯配合</a:t>
+            </a:r>
+          </a:p>
+        </p:txBody>
+      </p:sp>
+      <p:sp>
+        <p:nvSpPr>
+          <p:cNvPr id="10" name="TextBox 9"/>
+          <p:cNvSpPr txBox="1"/>
+          <p:nvPr/>
+        </p:nvSpPr>
+        <p:spPr>
+          <a:xfrm>
+            <a:off x="1463040" y="2843784"/>
+            <a:ext cx="9875520" cy="365760"/>
+          </a:xfrm>
+          <a:prstGeom prst="rect">
+            <a:avLst/>
+          </a:prstGeom>
+          <a:noFill/>
+        </p:spPr>
+        <p:txBody>
+          <a:bodyPr wrap="square" anchor="t" lIns="0" rIns="0" tIns="0" bIns="0"/>
+          <a:lstStyle/>
+          <a:p>
+            <a:pPr algn="l"/>
             <a:r>
               <a:rPr sz="1500" b="0" i="0" lang="zh-CN" altLang="en-US">
                 <a:solidFill>
@@ -8129,64 +8078,21 @@
                 <a:ea typeface="Noto Sans CJK SC"/>
                 <a:cs typeface="Noto Sans CJK SC"/>
               </a:rPr>
-              <a:t>不再说“做好了请用”。血、饮食、活动放进来，一年、五年、十年后的身体可以估。越用越准，人才留下来。</a:t>
-            </a:r>
-          </a:p>
-        </p:txBody>
-      </p:sp>
-      <p:sp>
-        <p:nvSpPr>
-          <p:cNvPr id="12" name="Rectangle 11"/>
-          <p:cNvSpPr/>
-          <p:nvPr/>
-        </p:nvSpPr>
-        <p:spPr>
-          <a:xfrm>
-            <a:off x="7863840" y="1280160"/>
-            <a:ext cx="10972" cy="3063240"/>
-          </a:xfrm>
-          <a:prstGeom prst="rect">
-            <a:avLst/>
-          </a:prstGeom>
-          <a:solidFill>
-            <a:srgbClr val="E2E2E2"/>
-          </a:solidFill>
-          <a:ln>
-            <a:noFill/>
-          </a:ln>
-        </p:spPr>
-        <p:style>
-          <a:lnRef idx="1">
-            <a:schemeClr val="accent1"/>
-          </a:lnRef>
-          <a:fillRef idx="3">
-            <a:schemeClr val="accent1"/>
-          </a:fillRef>
-          <a:effectRef idx="2">
-            <a:schemeClr val="accent1"/>
-          </a:effectRef>
-          <a:fontRef idx="minor">
-            <a:schemeClr val="lt1"/>
-          </a:fontRef>
-        </p:style>
-        <p:txBody>
-          <a:bodyPr rtlCol="0" anchor="ctr"/>
-          <a:lstStyle/>
-          <a:p>
-            <a:pPr algn="ctr"/>
-          </a:p>
-        </p:txBody>
-      </p:sp>
-      <p:sp>
-        <p:nvSpPr>
-          <p:cNvPr id="13" name="TextBox 12"/>
-          <p:cNvSpPr txBox="1"/>
-          <p:nvPr/>
-        </p:nvSpPr>
-        <p:spPr>
-          <a:xfrm>
-            <a:off x="8065008" y="1234440"/>
-            <a:ext cx="3246120" cy="256032"/>
+              <a:t>跟，就一起把小公司做大。不跟，优化也不停。目标没有这个条件。</a:t>
+            </a:r>
+          </a:p>
+        </p:txBody>
+      </p:sp>
+      <p:sp>
+        <p:nvSpPr>
+          <p:cNvPr id="11" name="TextBox 10"/>
+          <p:cNvSpPr txBox="1"/>
+          <p:nvPr/>
+        </p:nvSpPr>
+        <p:spPr>
+          <a:xfrm>
+            <a:off x="658368" y="3611880"/>
+            <a:ext cx="640080" cy="365760"/>
           </a:xfrm>
           <a:prstGeom prst="rect">
             <a:avLst/>
@@ -8199,7 +8105,7 @@
           <a:p>
             <a:pPr algn="l"/>
             <a:r>
-              <a:rPr sz="1300" b="0" i="0" lang="zh-CN" altLang="en-US">
+              <a:rPr sz="1600" b="0" i="0" lang="zh-CN" altLang="en-US">
                 <a:solidFill>
                   <a:srgbClr val="9E1B1B"/>
                 </a:solidFill>
@@ -8207,21 +8113,21 @@
                 <a:ea typeface="Noto Sans CJK SC Medium"/>
                 <a:cs typeface="Noto Sans CJK SC Medium"/>
               </a:rPr>
-              <a:t>AZA</a:t>
-            </a:r>
-          </a:p>
-        </p:txBody>
-      </p:sp>
-      <p:sp>
-        <p:nvSpPr>
-          <p:cNvPr id="14" name="TextBox 13"/>
-          <p:cNvSpPr txBox="1"/>
-          <p:nvPr/>
-        </p:nvSpPr>
-        <p:spPr>
-          <a:xfrm>
-            <a:off x="8065008" y="1600200"/>
-            <a:ext cx="3291840" cy="457200"/>
+              <a:t>03</a:t>
+            </a:r>
+          </a:p>
+        </p:txBody>
+      </p:sp>
+      <p:sp>
+        <p:nvSpPr>
+          <p:cNvPr id="12" name="TextBox 11"/>
+          <p:cNvSpPr txBox="1"/>
+          <p:nvPr/>
+        </p:nvSpPr>
+        <p:spPr>
+          <a:xfrm>
+            <a:off x="1463040" y="3593592"/>
+            <a:ext cx="9875520" cy="365760"/>
           </a:xfrm>
           <a:prstGeom prst="rect">
             <a:avLst/>
@@ -8234,7 +8140,7 @@
           <a:p>
             <a:pPr algn="l"/>
             <a:r>
-              <a:rPr sz="2400" b="0" i="0" lang="zh-CN" altLang="en-US">
+              <a:rPr sz="2200" b="0" i="0" lang="zh-CN" altLang="en-US">
                 <a:solidFill>
                   <a:srgbClr val="141414"/>
                 </a:solidFill>
@@ -8242,36 +8148,32 @@
                 <a:ea typeface="Noto Sans CJK SC Medium"/>
                 <a:cs typeface="Noto Sans CJK SC Medium"/>
               </a:rPr>
-              <a:t>阿扎</a:t>
-            </a:r>
-          </a:p>
-        </p:txBody>
-      </p:sp>
-      <p:sp>
-        <p:nvSpPr>
-          <p:cNvPr id="15" name="TextBox 14"/>
-          <p:cNvSpPr txBox="1"/>
-          <p:nvPr/>
-        </p:nvSpPr>
-        <p:spPr>
-          <a:xfrm>
-            <a:off x="8065008" y="2240280"/>
-            <a:ext cx="3246120" cy="2011680"/>
-          </a:xfrm>
-          <a:prstGeom prst="rect">
-            <a:avLst/>
-          </a:prstGeom>
-          <a:noFill/>
-        </p:spPr>
-        <p:txBody>
-          <a:bodyPr wrap="square" anchor="t" lIns="0" rIns="0" tIns="0" bIns="0"/>
-          <a:lstStyle/>
-          <a:p>
-            <a:pPr algn="l">
-              <a:lnSpc>
-                <a:spcPct val="145000"/>
-              </a:lnSpc>
-            </a:pPr>
+              <a:t>一半，就是千兆的底</a:t>
+            </a:r>
+          </a:p>
+        </p:txBody>
+      </p:sp>
+      <p:sp>
+        <p:nvSpPr>
+          <p:cNvPr id="13" name="TextBox 12"/>
+          <p:cNvSpPr txBox="1"/>
+          <p:nvPr/>
+        </p:nvSpPr>
+        <p:spPr>
+          <a:xfrm>
+            <a:off x="1463040" y="4032504"/>
+            <a:ext cx="9875520" cy="365760"/>
+          </a:xfrm>
+          <a:prstGeom prst="rect">
+            <a:avLst/>
+          </a:prstGeom>
+          <a:noFill/>
+        </p:spPr>
+        <p:txBody>
+          <a:bodyPr wrap="square" anchor="t" lIns="0" rIns="0" tIns="0" bIns="0"/>
+          <a:lstStyle/>
+          <a:p>
+            <a:pPr algn="l"/>
             <a:r>
               <a:rPr sz="1500" b="0" i="0" lang="zh-CN" altLang="en-US">
                 <a:solidFill>
@@ -8281,97 +8183,119 @@
                 <a:ea typeface="Noto Sans CJK SC"/>
                 <a:cs typeface="Noto Sans CJK SC"/>
               </a:rPr>
-              <a:t>鸡蛋、油、加油接进来，负责人每天走进来。十万个品目不赚一百兆。一百兆，由大约五百个主力品目赚。</a:t>
-            </a:r>
-          </a:p>
-        </p:txBody>
-      </p:sp>
-      <p:sp>
-        <p:nvSpPr>
-          <p:cNvPr id="16" name="Rectangle 15"/>
-          <p:cNvSpPr/>
-          <p:nvPr/>
-        </p:nvSpPr>
-        <p:spPr>
-          <a:xfrm>
-            <a:off x="658368" y="4709160"/>
-            <a:ext cx="10881360" cy="10972"/>
-          </a:xfrm>
-          <a:prstGeom prst="rect">
-            <a:avLst/>
-          </a:prstGeom>
-          <a:solidFill>
-            <a:srgbClr val="E2E2E2"/>
-          </a:solidFill>
-          <a:ln>
-            <a:noFill/>
-          </a:ln>
-        </p:spPr>
-        <p:style>
-          <a:lnRef idx="1">
-            <a:schemeClr val="accent1"/>
-          </a:lnRef>
-          <a:fillRef idx="3">
-            <a:schemeClr val="accent1"/>
-          </a:fillRef>
-          <a:effectRef idx="2">
-            <a:schemeClr val="accent1"/>
-          </a:effectRef>
-          <a:fontRef idx="minor">
-            <a:schemeClr val="lt1"/>
-          </a:fontRef>
-        </p:style>
-        <p:txBody>
-          <a:bodyPr rtlCol="0" anchor="ctr"/>
-          <a:lstStyle/>
-          <a:p>
-            <a:pPr algn="ctr"/>
-          </a:p>
-        </p:txBody>
-      </p:sp>
-      <p:sp>
-        <p:nvSpPr>
-          <p:cNvPr id="17" name="TextBox 16"/>
-          <p:cNvSpPr txBox="1"/>
-          <p:nvPr/>
-        </p:nvSpPr>
-        <p:spPr>
-          <a:xfrm>
-            <a:off x="658368" y="4937760"/>
-            <a:ext cx="10789920" cy="1051560"/>
-          </a:xfrm>
-          <a:prstGeom prst="rect">
-            <a:avLst/>
-          </a:prstGeom>
-          <a:noFill/>
-        </p:spPr>
-        <p:txBody>
-          <a:bodyPr wrap="square" anchor="t" lIns="0" rIns="0" tIns="0" bIns="0"/>
-          <a:lstStyle/>
-          <a:p>
-            <a:pPr algn="l">
-              <a:lnSpc>
-                <a:spcPct val="140000"/>
-              </a:lnSpc>
-            </a:pPr>
+              <a:t>不要全部市场。绝对品质、绝对价格这一层的一半，已经够。</a:t>
+            </a:r>
+          </a:p>
+        </p:txBody>
+      </p:sp>
+      <p:sp>
+        <p:nvSpPr>
+          <p:cNvPr id="14" name="TextBox 13"/>
+          <p:cNvSpPr txBox="1"/>
+          <p:nvPr/>
+        </p:nvSpPr>
+        <p:spPr>
+          <a:xfrm>
+            <a:off x="658368" y="4800600"/>
+            <a:ext cx="640080" cy="365760"/>
+          </a:xfrm>
+          <a:prstGeom prst="rect">
+            <a:avLst/>
+          </a:prstGeom>
+          <a:noFill/>
+        </p:spPr>
+        <p:txBody>
+          <a:bodyPr wrap="square" anchor="t" lIns="0" rIns="0" tIns="0" bIns="0"/>
+          <a:lstStyle/>
+          <a:p>
+            <a:pPr algn="l"/>
             <a:r>
               <a:rPr sz="1600" b="0" i="0" lang="zh-CN" altLang="en-US">
                 <a:solidFill>
+                  <a:srgbClr val="9E1B1B"/>
+                </a:solidFill>
+                <a:latin typeface="Noto Sans CJK SC Medium"/>
+                <a:ea typeface="Noto Sans CJK SC Medium"/>
+                <a:cs typeface="Noto Sans CJK SC Medium"/>
+              </a:rPr>
+              <a:t>04</a:t>
+            </a:r>
+          </a:p>
+        </p:txBody>
+      </p:sp>
+      <p:sp>
+        <p:nvSpPr>
+          <p:cNvPr id="15" name="TextBox 14"/>
+          <p:cNvSpPr txBox="1"/>
+          <p:nvPr/>
+        </p:nvSpPr>
+        <p:spPr>
+          <a:xfrm>
+            <a:off x="1463040" y="4782312"/>
+            <a:ext cx="9875520" cy="365760"/>
+          </a:xfrm>
+          <a:prstGeom prst="rect">
+            <a:avLst/>
+          </a:prstGeom>
+          <a:noFill/>
+        </p:spPr>
+        <p:txBody>
+          <a:bodyPr wrap="square" anchor="t" lIns="0" rIns="0" tIns="0" bIns="0"/>
+          <a:lstStyle/>
+          <a:p>
+            <a:pPr algn="l"/>
+            <a:r>
+              <a:rPr sz="2200" b="0" i="0" lang="zh-CN" altLang="en-US">
+                <a:solidFill>
                   <a:srgbClr val="141414"/>
+                </a:solidFill>
+                <a:latin typeface="Noto Sans CJK SC Medium"/>
+                <a:ea typeface="Noto Sans CJK SC Medium"/>
+                <a:cs typeface="Noto Sans CJK SC Medium"/>
+              </a:rPr>
+              <a:t>人留下，产量才留下</a:t>
+            </a:r>
+          </a:p>
+        </p:txBody>
+      </p:sp>
+      <p:sp>
+        <p:nvSpPr>
+          <p:cNvPr id="16" name="TextBox 15"/>
+          <p:cNvSpPr txBox="1"/>
+          <p:nvPr/>
+        </p:nvSpPr>
+        <p:spPr>
+          <a:xfrm>
+            <a:off x="1463040" y="5221224"/>
+            <a:ext cx="9875520" cy="365760"/>
+          </a:xfrm>
+          <a:prstGeom prst="rect">
+            <a:avLst/>
+          </a:prstGeom>
+          <a:noFill/>
+        </p:spPr>
+        <p:txBody>
+          <a:bodyPr wrap="square" anchor="t" lIns="0" rIns="0" tIns="0" bIns="0"/>
+          <a:lstStyle/>
+          <a:p>
+            <a:pPr algn="l"/>
+            <a:r>
+              <a:rPr sz="1500" b="0" i="0" lang="zh-CN" altLang="en-US">
+                <a:solidFill>
+                  <a:srgbClr val="2C2C2C"/>
                 </a:solidFill>
                 <a:latin typeface="Noto Sans CJK SC"/>
                 <a:ea typeface="Noto Sans CJK SC"/>
                 <a:cs typeface="Noto Sans CJK SC"/>
               </a:rPr>
-              <a:t>事业者因此不再只是推销的人。工具一变，行为就变，身份就变成顾问，变成这家平台的主人。
-消费、推荐和组织，变成留得下的资产。人留下，产量才留下。</a:t>
-            </a:r>
-          </a:p>
-        </p:txBody>
-      </p:sp>
-      <p:sp>
-        <p:nvSpPr>
-          <p:cNvPr id="18" name="TextBox 17"/>
+              <a:t>健康越用越准，日常开支接在一处，内容和组织长在自己的平台上。</a:t>
+            </a:r>
+          </a:p>
+        </p:txBody>
+      </p:sp>
+      <p:sp>
+        <p:nvSpPr>
+          <p:cNvPr id="17" name="TextBox 16"/>
           <p:cNvSpPr txBox="1"/>
           <p:nvPr/>
         </p:nvSpPr>
@@ -8495,7 +8419,7 @@
                 <a:ea typeface="Noto Sans CJK SC Medium"/>
                 <a:cs typeface="Noto Sans CJK SC Medium"/>
               </a:rPr>
-              <a:t>四件事情要同时为真</a:t>
+              <a:t>运费，不做一贯工程也会降</a:t>
             </a:r>
           </a:p>
         </p:txBody>
@@ -8551,8 +8475,8 @@
         </p:nvSpPr>
         <p:spPr>
           <a:xfrm>
-            <a:off x="658368" y="1234440"/>
-            <a:ext cx="640080" cy="365760"/>
+            <a:off x="658368" y="1280160"/>
+            <a:ext cx="3200400" cy="274320"/>
           </a:xfrm>
           <a:prstGeom prst="rect">
             <a:avLst/>
@@ -8565,7 +8489,7 @@
           <a:p>
             <a:pPr algn="l"/>
             <a:r>
-              <a:rPr sz="1600" b="0" i="0" lang="zh-CN" altLang="en-US">
+              <a:rPr sz="1400" b="0" i="0" lang="zh-CN" altLang="en-US">
                 <a:solidFill>
                   <a:srgbClr val="9E1B1B"/>
                 </a:solidFill>
@@ -8586,8 +8510,8 @@
         </p:nvSpPr>
         <p:spPr>
           <a:xfrm>
-            <a:off x="1463040" y="1216152"/>
-            <a:ext cx="9875520" cy="365760"/>
+            <a:off x="658368" y="1691640"/>
+            <a:ext cx="3246120" cy="640080"/>
           </a:xfrm>
           <a:prstGeom prst="rect">
             <a:avLst/>
@@ -8600,7 +8524,7 @@
           <a:p>
             <a:pPr algn="l"/>
             <a:r>
-              <a:rPr sz="2200" b="0" i="0" lang="zh-CN" altLang="en-US">
+              <a:rPr sz="2600" b="0" i="0" lang="zh-CN" altLang="en-US">
                 <a:solidFill>
                   <a:srgbClr val="141414"/>
                 </a:solidFill>
@@ -8608,7 +8532,7 @@
                 <a:ea typeface="Noto Sans CJK SC Medium"/>
                 <a:cs typeface="Noto Sans CJK SC Medium"/>
               </a:rPr>
-              <a:t>这条链不容易被照抄</a:t>
+              <a:t>谈运费</a:t>
             </a:r>
           </a:p>
         </p:txBody>
@@ -8621,19 +8545,23 @@
         </p:nvSpPr>
         <p:spPr>
           <a:xfrm>
-            <a:off x="1463040" y="1655064"/>
-            <a:ext cx="9875520" cy="365760"/>
-          </a:xfrm>
-          <a:prstGeom prst="rect">
-            <a:avLst/>
-          </a:prstGeom>
-          <a:noFill/>
-        </p:spPr>
-        <p:txBody>
-          <a:bodyPr wrap="square" anchor="t" lIns="0" rIns="0" tIns="0" bIns="0"/>
-          <a:lstStyle/>
-          <a:p>
-            <a:pPr algn="l"/>
+            <a:off x="658368" y="2514600"/>
+            <a:ext cx="3246120" cy="1691640"/>
+          </a:xfrm>
+          <a:prstGeom prst="rect">
+            <a:avLst/>
+          </a:prstGeom>
+          <a:noFill/>
+        </p:spPr>
+        <p:txBody>
+          <a:bodyPr wrap="square" anchor="t" lIns="0" rIns="0" tIns="0" bIns="0"/>
+          <a:lstStyle/>
+          <a:p>
+            <a:pPr algn="l">
+              <a:lnSpc>
+                <a:spcPct val="145000"/>
+              </a:lnSpc>
+            </a:pPr>
             <a:r>
               <a:rPr sz="1500" b="0" i="0" lang="zh-CN" altLang="en-US">
                 <a:solidFill>
@@ -8643,21 +8571,67 @@
                 <a:ea typeface="Noto Sans CJK SC"/>
                 <a:cs typeface="Noto Sans CJK SC"/>
               </a:rPr>
-              <a:t>价格表好抄。育苗、栽培、图纸、专用线和数据，要有人先把愿景和钱放进去。</a:t>
-            </a:r>
-          </a:p>
-        </p:txBody>
-      </p:sp>
-      <p:sp>
-        <p:nvSpPr>
-          <p:cNvPr id="8" name="TextBox 7"/>
-          <p:cNvSpPr txBox="1"/>
-          <p:nvPr/>
-        </p:nvSpPr>
-        <p:spPr>
-          <a:xfrm>
-            <a:off x="658368" y="2423160"/>
-            <a:ext cx="640080" cy="365760"/>
+              <a:t>包材、账期、运费，
+谈下来报价会好看。
+不做一贯工程的采购也会做。
+三十五个点仍没有出处。</a:t>
+            </a:r>
+          </a:p>
+        </p:txBody>
+      </p:sp>
+      <p:sp>
+        <p:nvSpPr>
+          <p:cNvPr id="8" name="Rectangle 7"/>
+          <p:cNvSpPr/>
+          <p:nvPr/>
+        </p:nvSpPr>
+        <p:spPr>
+          <a:xfrm>
+            <a:off x="4160520" y="1280160"/>
+            <a:ext cx="10972" cy="2880360"/>
+          </a:xfrm>
+          <a:prstGeom prst="rect">
+            <a:avLst/>
+          </a:prstGeom>
+          <a:solidFill>
+            <a:srgbClr val="E2E2E2"/>
+          </a:solidFill>
+          <a:ln>
+            <a:noFill/>
+          </a:ln>
+        </p:spPr>
+        <p:style>
+          <a:lnRef idx="1">
+            <a:schemeClr val="accent1"/>
+          </a:lnRef>
+          <a:fillRef idx="3">
+            <a:schemeClr val="accent1"/>
+          </a:fillRef>
+          <a:effectRef idx="2">
+            <a:schemeClr val="accent1"/>
+          </a:effectRef>
+          <a:fontRef idx="minor">
+            <a:schemeClr val="lt1"/>
+          </a:fontRef>
+        </p:style>
+        <p:txBody>
+          <a:bodyPr rtlCol="0" anchor="ctr"/>
+          <a:lstStyle/>
+          <a:p>
+            <a:pPr algn="ctr"/>
+          </a:p>
+        </p:txBody>
+      </p:sp>
+      <p:sp>
+        <p:nvSpPr>
+          <p:cNvPr id="9" name="TextBox 8"/>
+          <p:cNvSpPr txBox="1"/>
+          <p:nvPr/>
+        </p:nvSpPr>
+        <p:spPr>
+          <a:xfrm>
+            <a:off x="4361688" y="1280160"/>
+            <a:ext cx="3200400" cy="274320"/>
           </a:xfrm>
           <a:prstGeom prst="rect">
             <a:avLst/>
@@ -8670,7 +8644,7 @@
           <a:p>
             <a:pPr algn="l"/>
             <a:r>
-              <a:rPr sz="1600" b="0" i="0" lang="zh-CN" altLang="en-US">
+              <a:rPr sz="1400" b="0" i="0" lang="zh-CN" altLang="en-US">
                 <a:solidFill>
                   <a:srgbClr val="9E1B1B"/>
                 </a:solidFill>
@@ -8685,14 +8659,14 @@
       </p:sp>
       <p:sp>
         <p:nvSpPr>
-          <p:cNvPr id="9" name="TextBox 8"/>
-          <p:cNvSpPr txBox="1"/>
-          <p:nvPr/>
-        </p:nvSpPr>
-        <p:spPr>
-          <a:xfrm>
-            <a:off x="1463040" y="2404872"/>
-            <a:ext cx="9875520" cy="365760"/>
+          <p:cNvPr id="10" name="TextBox 9"/>
+          <p:cNvSpPr txBox="1"/>
+          <p:nvPr/>
+        </p:nvSpPr>
+        <p:spPr>
+          <a:xfrm>
+            <a:off x="4361688" y="1691640"/>
+            <a:ext cx="3246120" cy="640080"/>
           </a:xfrm>
           <a:prstGeom prst="rect">
             <a:avLst/>
@@ -8705,7 +8679,7 @@
           <a:p>
             <a:pPr algn="l"/>
             <a:r>
-              <a:rPr sz="2200" b="0" i="0" lang="zh-CN" altLang="en-US">
+              <a:rPr sz="2600" b="0" i="0" lang="zh-CN" altLang="en-US">
                 <a:solidFill>
                   <a:srgbClr val="141414"/>
                 </a:solidFill>
@@ -8713,32 +8687,36 @@
                 <a:ea typeface="Noto Sans CJK SC Medium"/>
                 <a:cs typeface="Noto Sans CJK SC Medium"/>
               </a:rPr>
-              <a:t>不附带对方肯配合</a:t>
-            </a:r>
-          </a:p>
-        </p:txBody>
-      </p:sp>
-      <p:sp>
-        <p:nvSpPr>
-          <p:cNvPr id="10" name="TextBox 9"/>
-          <p:cNvSpPr txBox="1"/>
-          <p:nvPr/>
-        </p:nvSpPr>
-        <p:spPr>
-          <a:xfrm>
-            <a:off x="1463040" y="2843784"/>
-            <a:ext cx="9875520" cy="365760"/>
-          </a:xfrm>
-          <a:prstGeom prst="rect">
-            <a:avLst/>
-          </a:prstGeom>
-          <a:noFill/>
-        </p:spPr>
-        <p:txBody>
-          <a:bodyPr wrap="square" anchor="t" lIns="0" rIns="0" tIns="0" bIns="0"/>
-          <a:lstStyle/>
-          <a:p>
-            <a:pPr algn="l"/>
+              <a:t>删工序</a:t>
+            </a:r>
+          </a:p>
+        </p:txBody>
+      </p:sp>
+      <p:sp>
+        <p:nvSpPr>
+          <p:cNvPr id="11" name="TextBox 10"/>
+          <p:cNvSpPr txBox="1"/>
+          <p:nvPr/>
+        </p:nvSpPr>
+        <p:spPr>
+          <a:xfrm>
+            <a:off x="4361688" y="2514600"/>
+            <a:ext cx="3246120" cy="1691640"/>
+          </a:xfrm>
+          <a:prstGeom prst="rect">
+            <a:avLst/>
+          </a:prstGeom>
+          <a:noFill/>
+        </p:spPr>
+        <p:txBody>
+          <a:bodyPr wrap="square" anchor="t" lIns="0" rIns="0" tIns="0" bIns="0"/>
+          <a:lstStyle/>
+          <a:p>
+            <a:pPr algn="l">
+              <a:lnSpc>
+                <a:spcPct val="145000"/>
+              </a:lnSpc>
+            </a:pPr>
             <a:r>
               <a:rPr sz="1500" b="0" i="0" lang="zh-CN" altLang="en-US">
                 <a:solidFill>
@@ -8748,21 +8726,67 @@
                 <a:ea typeface="Noto Sans CJK SC"/>
                 <a:cs typeface="Noto Sans CJK SC"/>
               </a:rPr>
-              <a:t>跟，就一起把小公司做大。不跟，优化也不停。目标没有这个条件。</a:t>
-            </a:r>
-          </a:p>
-        </p:txBody>
-      </p:sp>
-      <p:sp>
-        <p:nvSpPr>
-          <p:cNvPr id="11" name="TextBox 10"/>
-          <p:cNvSpPr txBox="1"/>
-          <p:nvPr/>
-        </p:nvSpPr>
-        <p:spPr>
-          <a:xfrm>
-            <a:off x="658368" y="3611880"/>
-            <a:ext cx="640080" cy="365760"/>
+              <a:t>干燥、切断，
+是药房按克卖才有的。
+十八吨的罐子吃洗净的鲜品。
+这两步可以没有。</a:t>
+            </a:r>
+          </a:p>
+        </p:txBody>
+      </p:sp>
+      <p:sp>
+        <p:nvSpPr>
+          <p:cNvPr id="12" name="Rectangle 11"/>
+          <p:cNvSpPr/>
+          <p:nvPr/>
+        </p:nvSpPr>
+        <p:spPr>
+          <a:xfrm>
+            <a:off x="7863840" y="1280160"/>
+            <a:ext cx="10972" cy="2880360"/>
+          </a:xfrm>
+          <a:prstGeom prst="rect">
+            <a:avLst/>
+          </a:prstGeom>
+          <a:solidFill>
+            <a:srgbClr val="E2E2E2"/>
+          </a:solidFill>
+          <a:ln>
+            <a:noFill/>
+          </a:ln>
+        </p:spPr>
+        <p:style>
+          <a:lnRef idx="1">
+            <a:schemeClr val="accent1"/>
+          </a:lnRef>
+          <a:fillRef idx="3">
+            <a:schemeClr val="accent1"/>
+          </a:fillRef>
+          <a:effectRef idx="2">
+            <a:schemeClr val="accent1"/>
+          </a:effectRef>
+          <a:fontRef idx="minor">
+            <a:schemeClr val="lt1"/>
+          </a:fontRef>
+        </p:style>
+        <p:txBody>
+          <a:bodyPr rtlCol="0" anchor="ctr"/>
+          <a:lstStyle/>
+          <a:p>
+            <a:pPr algn="ctr"/>
+          </a:p>
+        </p:txBody>
+      </p:sp>
+      <p:sp>
+        <p:nvSpPr>
+          <p:cNvPr id="13" name="TextBox 12"/>
+          <p:cNvSpPr txBox="1"/>
+          <p:nvPr/>
+        </p:nvSpPr>
+        <p:spPr>
+          <a:xfrm>
+            <a:off x="8065008" y="1280160"/>
+            <a:ext cx="3200400" cy="274320"/>
           </a:xfrm>
           <a:prstGeom prst="rect">
             <a:avLst/>
@@ -8775,7 +8799,7 @@
           <a:p>
             <a:pPr algn="l"/>
             <a:r>
-              <a:rPr sz="1600" b="0" i="0" lang="zh-CN" altLang="en-US">
+              <a:rPr sz="1400" b="0" i="0" lang="zh-CN" altLang="en-US">
                 <a:solidFill>
                   <a:srgbClr val="9E1B1B"/>
                 </a:solidFill>
@@ -8790,14 +8814,14 @@
       </p:sp>
       <p:sp>
         <p:nvSpPr>
-          <p:cNvPr id="12" name="TextBox 11"/>
-          <p:cNvSpPr txBox="1"/>
-          <p:nvPr/>
-        </p:nvSpPr>
-        <p:spPr>
-          <a:xfrm>
-            <a:off x="1463040" y="3593592"/>
-            <a:ext cx="9875520" cy="365760"/>
+          <p:cNvPr id="14" name="TextBox 13"/>
+          <p:cNvSpPr txBox="1"/>
+          <p:nvPr/>
+        </p:nvSpPr>
+        <p:spPr>
+          <a:xfrm>
+            <a:off x="8065008" y="1691640"/>
+            <a:ext cx="3246120" cy="640080"/>
           </a:xfrm>
           <a:prstGeom prst="rect">
             <a:avLst/>
@@ -8810,7 +8834,7 @@
           <a:p>
             <a:pPr algn="l"/>
             <a:r>
-              <a:rPr sz="2200" b="0" i="0" lang="zh-CN" altLang="en-US">
+              <a:rPr sz="2600" b="0" i="0" lang="zh-CN" altLang="en-US">
                 <a:solidFill>
                   <a:srgbClr val="141414"/>
                 </a:solidFill>
@@ -8818,32 +8842,36 @@
                 <a:ea typeface="Noto Sans CJK SC Medium"/>
                 <a:cs typeface="Noto Sans CJK SC Medium"/>
               </a:rPr>
-              <a:t>一半，就是千兆的底</a:t>
-            </a:r>
-          </a:p>
-        </p:txBody>
-      </p:sp>
-      <p:sp>
-        <p:nvSpPr>
-          <p:cNvPr id="13" name="TextBox 12"/>
-          <p:cNvSpPr txBox="1"/>
-          <p:nvPr/>
-        </p:nvSpPr>
-        <p:spPr>
-          <a:xfrm>
-            <a:off x="1463040" y="4032504"/>
-            <a:ext cx="9875520" cy="365760"/>
-          </a:xfrm>
-          <a:prstGeom prst="rect">
-            <a:avLst/>
-          </a:prstGeom>
-          <a:noFill/>
-        </p:spPr>
-        <p:txBody>
-          <a:bodyPr wrap="square" anchor="t" lIns="0" rIns="0" tIns="0" bIns="0"/>
-          <a:lstStyle/>
-          <a:p>
-            <a:pPr algn="l"/>
+              <a:t>搬到墙外</a:t>
+            </a:r>
+          </a:p>
+        </p:txBody>
+      </p:sp>
+      <p:sp>
+        <p:nvSpPr>
+          <p:cNvPr id="15" name="TextBox 14"/>
+          <p:cNvSpPr txBox="1"/>
+          <p:nvPr/>
+        </p:nvSpPr>
+        <p:spPr>
+          <a:xfrm>
+            <a:off x="8065008" y="2514600"/>
+            <a:ext cx="3246120" cy="1691640"/>
+          </a:xfrm>
+          <a:prstGeom prst="rect">
+            <a:avLst/>
+          </a:prstGeom>
+          <a:noFill/>
+        </p:spPr>
+        <p:txBody>
+          <a:bodyPr wrap="square" anchor="t" lIns="0" rIns="0" tIns="0" bIns="0"/>
+          <a:lstStyle/>
+          <a:p>
+            <a:pPr algn="l">
+              <a:lnSpc>
+                <a:spcPct val="145000"/>
+              </a:lnSpc>
+            </a:pPr>
             <a:r>
               <a:rPr sz="1500" b="0" i="0" lang="zh-CN" altLang="en-US">
                 <a:solidFill>
@@ -8853,34 +8881,84 @@
                 <a:ea typeface="Noto Sans CJK SC"/>
                 <a:cs typeface="Noto Sans CJK SC"/>
               </a:rPr>
-              <a:t>不要全部市场。绝对品质、绝对价格这一层的一半，已经够。</a:t>
-            </a:r>
-          </a:p>
-        </p:txBody>
-      </p:sp>
-      <p:sp>
-        <p:nvSpPr>
-          <p:cNvPr id="14" name="TextBox 13"/>
-          <p:cNvSpPr txBox="1"/>
-          <p:nvPr/>
-        </p:nvSpPr>
-        <p:spPr>
-          <a:xfrm>
-            <a:off x="658368" y="4800600"/>
-            <a:ext cx="640080" cy="365760"/>
-          </a:xfrm>
-          <a:prstGeom prst="rect">
-            <a:avLst/>
-          </a:prstGeom>
-          <a:noFill/>
-        </p:spPr>
-        <p:txBody>
-          <a:bodyPr wrap="square" anchor="t" lIns="0" rIns="0" tIns="0" bIns="0"/>
-          <a:lstStyle/>
-          <a:p>
-            <a:pPr algn="l"/>
-            <a:r>
-              <a:rPr sz="1600" b="0" i="0" lang="zh-CN" altLang="en-US">
+              <a:t>下一道工序盖在原料厂的院墙外，
+用管道接。
+运的那一趟被拿掉，
+才不是在谈运费。</a:t>
+            </a:r>
+          </a:p>
+        </p:txBody>
+      </p:sp>
+      <p:sp>
+        <p:nvSpPr>
+          <p:cNvPr id="16" name="Rectangle 15"/>
+          <p:cNvSpPr/>
+          <p:nvPr/>
+        </p:nvSpPr>
+        <p:spPr>
+          <a:xfrm>
+            <a:off x="658368" y="4709160"/>
+            <a:ext cx="10881360" cy="10972"/>
+          </a:xfrm>
+          <a:prstGeom prst="rect">
+            <a:avLst/>
+          </a:prstGeom>
+          <a:solidFill>
+            <a:srgbClr val="E2E2E2"/>
+          </a:solidFill>
+          <a:ln>
+            <a:noFill/>
+          </a:ln>
+        </p:spPr>
+        <p:style>
+          <a:lnRef idx="1">
+            <a:schemeClr val="accent1"/>
+          </a:lnRef>
+          <a:fillRef idx="3">
+            <a:schemeClr val="accent1"/>
+          </a:fillRef>
+          <a:effectRef idx="2">
+            <a:schemeClr val="accent1"/>
+          </a:effectRef>
+          <a:fontRef idx="minor">
+            <a:schemeClr val="lt1"/>
+          </a:fontRef>
+        </p:style>
+        <p:txBody>
+          <a:bodyPr rtlCol="0" anchor="ctr"/>
+          <a:lstStyle/>
+          <a:p>
+            <a:pPr algn="ctr"/>
+          </a:p>
+        </p:txBody>
+      </p:sp>
+      <p:sp>
+        <p:nvSpPr>
+          <p:cNvPr id="17" name="TextBox 16"/>
+          <p:cNvSpPr txBox="1"/>
+          <p:nvPr/>
+        </p:nvSpPr>
+        <p:spPr>
+          <a:xfrm>
+            <a:off x="658368" y="4983480"/>
+            <a:ext cx="10789920" cy="1097280"/>
+          </a:xfrm>
+          <a:prstGeom prst="rect">
+            <a:avLst/>
+          </a:prstGeom>
+          <a:noFill/>
+        </p:spPr>
+        <p:txBody>
+          <a:bodyPr wrap="square" anchor="t" lIns="0" rIns="0" tIns="0" bIns="0"/>
+          <a:lstStyle/>
+          <a:p>
+            <a:pPr algn="l">
+              <a:lnSpc>
+                <a:spcPct val="135000"/>
+              </a:lnSpc>
+            </a:pPr>
+            <a:r>
+              <a:rPr sz="2200" b="0" i="0" lang="zh-CN" altLang="en-US">
                 <a:solidFill>
                   <a:srgbClr val="9E1B1B"/>
                 </a:solidFill>
@@ -8888,84 +8966,15 @@
                 <a:ea typeface="Noto Sans CJK SC Medium"/>
                 <a:cs typeface="Noto Sans CJK SC Medium"/>
               </a:rPr>
-              <a:t>04</a:t>
-            </a:r>
-          </a:p>
-        </p:txBody>
-      </p:sp>
-      <p:sp>
-        <p:nvSpPr>
-          <p:cNvPr id="15" name="TextBox 14"/>
-          <p:cNvSpPr txBox="1"/>
-          <p:nvPr/>
-        </p:nvSpPr>
-        <p:spPr>
-          <a:xfrm>
-            <a:off x="1463040" y="4782312"/>
-            <a:ext cx="9875520" cy="365760"/>
-          </a:xfrm>
-          <a:prstGeom prst="rect">
-            <a:avLst/>
-          </a:prstGeom>
-          <a:noFill/>
-        </p:spPr>
-        <p:txBody>
-          <a:bodyPr wrap="square" anchor="t" lIns="0" rIns="0" tIns="0" bIns="0"/>
-          <a:lstStyle/>
-          <a:p>
-            <a:pPr algn="l"/>
-            <a:r>
-              <a:rPr sz="2200" b="0" i="0" lang="zh-CN" altLang="en-US">
-                <a:solidFill>
-                  <a:srgbClr val="141414"/>
-                </a:solidFill>
-                <a:latin typeface="Noto Sans CJK SC Medium"/>
-                <a:ea typeface="Noto Sans CJK SC Medium"/>
-                <a:cs typeface="Noto Sans CJK SC Medium"/>
-              </a:rPr>
-              <a:t>人留下，产量才留下</a:t>
-            </a:r>
-          </a:p>
-        </p:txBody>
-      </p:sp>
-      <p:sp>
-        <p:nvSpPr>
-          <p:cNvPr id="16" name="TextBox 15"/>
-          <p:cNvSpPr txBox="1"/>
-          <p:nvPr/>
-        </p:nvSpPr>
-        <p:spPr>
-          <a:xfrm>
-            <a:off x="1463040" y="5221224"/>
-            <a:ext cx="9875520" cy="365760"/>
-          </a:xfrm>
-          <a:prstGeom prst="rect">
-            <a:avLst/>
-          </a:prstGeom>
-          <a:noFill/>
-        </p:spPr>
-        <p:txBody>
-          <a:bodyPr wrap="square" anchor="t" lIns="0" rIns="0" tIns="0" bIns="0"/>
-          <a:lstStyle/>
-          <a:p>
-            <a:pPr algn="l"/>
-            <a:r>
-              <a:rPr sz="1500" b="0" i="0" lang="zh-CN" altLang="en-US">
-                <a:solidFill>
-                  <a:srgbClr val="2C2C2C"/>
-                </a:solidFill>
-                <a:latin typeface="Noto Sans CJK SC"/>
-                <a:ea typeface="Noto Sans CJK SC"/>
-                <a:cs typeface="Noto Sans CJK SC"/>
-              </a:rPr>
-              <a:t>健康越用越准，日常开支接在一处，内容和组织长在自己的平台上。</a:t>
-            </a:r>
-          </a:p>
-        </p:txBody>
-      </p:sp>
-      <p:sp>
-        <p:nvSpPr>
-          <p:cNvPr id="17" name="TextBox 16"/>
+              <a:t>第一件，谁都会做。
+后两件，才是一贯工程。</a:t>
+            </a:r>
+          </a:p>
+        </p:txBody>
+      </p:sp>
+      <p:sp>
+        <p:nvSpPr>
+          <p:cNvPr id="18" name="TextBox 17"/>
           <p:cNvSpPr txBox="1"/>
           <p:nvPr/>
         </p:nvSpPr>
@@ -9089,7 +9098,7 @@
                 <a:ea typeface="Noto Sans CJK SC Medium"/>
                 <a:cs typeface="Noto Sans CJK SC Medium"/>
               </a:rPr>
-              <a:t>运费，不做一贯工程也会降</a:t>
+              <a:t>中国产线上就做这四件</a:t>
             </a:r>
           </a:p>
         </p:txBody>
@@ -9145,8 +9154,8 @@
         </p:nvSpPr>
         <p:spPr>
           <a:xfrm>
-            <a:off x="658368" y="1280160"/>
-            <a:ext cx="3200400" cy="274320"/>
+            <a:off x="658368" y="1170432"/>
+            <a:ext cx="640080" cy="329184"/>
           </a:xfrm>
           <a:prstGeom prst="rect">
             <a:avLst/>
@@ -9159,7 +9168,7 @@
           <a:p>
             <a:pPr algn="l"/>
             <a:r>
-              <a:rPr sz="1400" b="0" i="0" lang="zh-CN" altLang="en-US">
+              <a:rPr sz="1600" b="0" i="0" lang="zh-CN" altLang="en-US">
                 <a:solidFill>
                   <a:srgbClr val="9E1B1B"/>
                 </a:solidFill>
@@ -9180,8 +9189,8 @@
         </p:nvSpPr>
         <p:spPr>
           <a:xfrm>
-            <a:off x="658368" y="1691640"/>
-            <a:ext cx="3246120" cy="640080"/>
+            <a:off x="1417320" y="1152144"/>
+            <a:ext cx="9966960" cy="365760"/>
           </a:xfrm>
           <a:prstGeom prst="rect">
             <a:avLst/>
@@ -9194,7 +9203,7 @@
           <a:p>
             <a:pPr algn="l"/>
             <a:r>
-              <a:rPr sz="2600" b="0" i="0" lang="zh-CN" altLang="en-US">
+              <a:rPr sz="2200" b="0" i="0" lang="zh-CN" altLang="en-US">
                 <a:solidFill>
                   <a:srgbClr val="141414"/>
                 </a:solidFill>
@@ -9202,7 +9211,7 @@
                 <a:ea typeface="Noto Sans CJK SC Medium"/>
                 <a:cs typeface="Noto Sans CJK SC Medium"/>
               </a:rPr>
-              <a:t>谈运费</a:t>
+              <a:t>一个模具做大</a:t>
             </a:r>
           </a:p>
         </p:txBody>
@@ -9215,23 +9224,19 @@
         </p:nvSpPr>
         <p:spPr>
           <a:xfrm>
-            <a:off x="658368" y="2514600"/>
-            <a:ext cx="3246120" cy="1691640"/>
-          </a:xfrm>
-          <a:prstGeom prst="rect">
-            <a:avLst/>
-          </a:prstGeom>
-          <a:noFill/>
-        </p:spPr>
-        <p:txBody>
-          <a:bodyPr wrap="square" anchor="t" lIns="0" rIns="0" tIns="0" bIns="0"/>
-          <a:lstStyle/>
-          <a:p>
-            <a:pPr algn="l">
-              <a:lnSpc>
-                <a:spcPct val="145000"/>
-              </a:lnSpc>
-            </a:pPr>
+            <a:off x="1417320" y="1554480"/>
+            <a:ext cx="9966960" cy="640080"/>
+          </a:xfrm>
+          <a:prstGeom prst="rect">
+            <a:avLst/>
+          </a:prstGeom>
+          <a:noFill/>
+        </p:spPr>
+        <p:txBody>
+          <a:bodyPr wrap="square" anchor="t" lIns="0" rIns="0" tIns="0" bIns="0"/>
+          <a:lstStyle/>
+          <a:p>
+            <a:pPr algn="l"/>
             <a:r>
               <a:rPr sz="1500" b="0" i="0" lang="zh-CN" altLang="en-US">
                 <a:solidFill>
@@ -9241,67 +9246,21 @@
                 <a:ea typeface="Noto Sans CJK SC"/>
                 <a:cs typeface="Noto Sans CJK SC"/>
               </a:rPr>
-              <a:t>包材、账期、运费，
-谈下来报价会好看。
-不做一贯工程的采购也会做。
-三十五个点仍没有出处。</a:t>
-            </a:r>
-          </a:p>
-        </p:txBody>
-      </p:sp>
-      <p:sp>
-        <p:nvSpPr>
-          <p:cNvPr id="8" name="Rectangle 7"/>
-          <p:cNvSpPr/>
-          <p:nvPr/>
-        </p:nvSpPr>
-        <p:spPr>
-          <a:xfrm>
-            <a:off x="4160520" y="1280160"/>
-            <a:ext cx="10972" cy="2880360"/>
-          </a:xfrm>
-          <a:prstGeom prst="rect">
-            <a:avLst/>
-          </a:prstGeom>
-          <a:solidFill>
-            <a:srgbClr val="E2E2E2"/>
-          </a:solidFill>
-          <a:ln>
-            <a:noFill/>
-          </a:ln>
-        </p:spPr>
-        <p:style>
-          <a:lnRef idx="1">
-            <a:schemeClr val="accent1"/>
-          </a:lnRef>
-          <a:fillRef idx="3">
-            <a:schemeClr val="accent1"/>
-          </a:fillRef>
-          <a:effectRef idx="2">
-            <a:schemeClr val="accent1"/>
-          </a:effectRef>
-          <a:fontRef idx="minor">
-            <a:schemeClr val="lt1"/>
-          </a:fontRef>
-        </p:style>
-        <p:txBody>
-          <a:bodyPr rtlCol="0" anchor="ctr"/>
-          <a:lstStyle/>
-          <a:p>
-            <a:pPr algn="ctr"/>
-          </a:p>
-        </p:txBody>
-      </p:sp>
-      <p:sp>
-        <p:nvSpPr>
-          <p:cNvPr id="9" name="TextBox 8"/>
-          <p:cNvSpPr txBox="1"/>
-          <p:nvPr/>
-        </p:nvSpPr>
-        <p:spPr>
-          <a:xfrm>
-            <a:off x="4361688" y="1280160"/>
-            <a:ext cx="3200400" cy="274320"/>
+              <a:t>牙刷造型不改。腔数做大，机器换大，原料买吨袋，付现金。再换一个造型，腔数就做不大。</a:t>
+            </a:r>
+          </a:p>
+        </p:txBody>
+      </p:sp>
+      <p:sp>
+        <p:nvSpPr>
+          <p:cNvPr id="8" name="TextBox 7"/>
+          <p:cNvSpPr txBox="1"/>
+          <p:nvPr/>
+        </p:nvSpPr>
+        <p:spPr>
+          <a:xfrm>
+            <a:off x="658368" y="2377440"/>
+            <a:ext cx="640080" cy="329184"/>
           </a:xfrm>
           <a:prstGeom prst="rect">
             <a:avLst/>
@@ -9314,7 +9273,7 @@
           <a:p>
             <a:pPr algn="l"/>
             <a:r>
-              <a:rPr sz="1400" b="0" i="0" lang="zh-CN" altLang="en-US">
+              <a:rPr sz="1600" b="0" i="0" lang="zh-CN" altLang="en-US">
                 <a:solidFill>
                   <a:srgbClr val="9E1B1B"/>
                 </a:solidFill>
@@ -9329,14 +9288,14 @@
       </p:sp>
       <p:sp>
         <p:nvSpPr>
-          <p:cNvPr id="10" name="TextBox 9"/>
-          <p:cNvSpPr txBox="1"/>
-          <p:nvPr/>
-        </p:nvSpPr>
-        <p:spPr>
-          <a:xfrm>
-            <a:off x="4361688" y="1691640"/>
-            <a:ext cx="3246120" cy="640080"/>
+          <p:cNvPr id="9" name="TextBox 8"/>
+          <p:cNvSpPr txBox="1"/>
+          <p:nvPr/>
+        </p:nvSpPr>
+        <p:spPr>
+          <a:xfrm>
+            <a:off x="1417320" y="2359152"/>
+            <a:ext cx="9966960" cy="365760"/>
           </a:xfrm>
           <a:prstGeom prst="rect">
             <a:avLst/>
@@ -9349,7 +9308,7 @@
           <a:p>
             <a:pPr algn="l"/>
             <a:r>
-              <a:rPr sz="2600" b="0" i="0" lang="zh-CN" altLang="en-US">
+              <a:rPr sz="2200" b="0" i="0" lang="zh-CN" altLang="en-US">
                 <a:solidFill>
                   <a:srgbClr val="141414"/>
                 </a:solidFill>
@@ -9357,36 +9316,32 @@
                 <a:ea typeface="Noto Sans CJK SC Medium"/>
                 <a:cs typeface="Noto Sans CJK SC Medium"/>
               </a:rPr>
-              <a:t>删工序</a:t>
-            </a:r>
-          </a:p>
-        </p:txBody>
-      </p:sp>
-      <p:sp>
-        <p:nvSpPr>
-          <p:cNvPr id="11" name="TextBox 10"/>
-          <p:cNvSpPr txBox="1"/>
-          <p:nvPr/>
-        </p:nvSpPr>
-        <p:spPr>
-          <a:xfrm>
-            <a:off x="4361688" y="2514600"/>
-            <a:ext cx="3246120" cy="1691640"/>
-          </a:xfrm>
-          <a:prstGeom prst="rect">
-            <a:avLst/>
-          </a:prstGeom>
-          <a:noFill/>
-        </p:spPr>
-        <p:txBody>
-          <a:bodyPr wrap="square" anchor="t" lIns="0" rIns="0" tIns="0" bIns="0"/>
-          <a:lstStyle/>
-          <a:p>
-            <a:pPr algn="l">
-              <a:lnSpc>
-                <a:spcPct val="145000"/>
-              </a:lnSpc>
-            </a:pPr>
+              <a:t>一种配方，罐子不洗</a:t>
+            </a:r>
+          </a:p>
+        </p:txBody>
+      </p:sp>
+      <p:sp>
+        <p:nvSpPr>
+          <p:cNvPr id="10" name="TextBox 9"/>
+          <p:cNvSpPr txBox="1"/>
+          <p:nvPr/>
+        </p:nvSpPr>
+        <p:spPr>
+          <a:xfrm>
+            <a:off x="1417320" y="2761488"/>
+            <a:ext cx="9966960" cy="640080"/>
+          </a:xfrm>
+          <a:prstGeom prst="rect">
+            <a:avLst/>
+          </a:prstGeom>
+          <a:noFill/>
+        </p:spPr>
+        <p:txBody>
+          <a:bodyPr wrap="square" anchor="t" lIns="0" rIns="0" tIns="0" bIns="0"/>
+          <a:lstStyle/>
+          <a:p>
+            <a:pPr algn="l"/>
             <a:r>
               <a:rPr sz="1500" b="0" i="0" lang="zh-CN" altLang="en-US">
                 <a:solidFill>
@@ -9396,67 +9351,21 @@
                 <a:ea typeface="Noto Sans CJK SC"/>
                 <a:cs typeface="Noto Sans CJK SC"/>
               </a:rPr>
-              <a:t>干燥、切断，
-是药房按克卖才有的。
-十八吨的罐子吃洗净的鲜品。
-这两步可以没有。</a:t>
-            </a:r>
-          </a:p>
-        </p:txBody>
-      </p:sp>
-      <p:sp>
-        <p:nvSpPr>
-          <p:cNvPr id="12" name="Rectangle 11"/>
-          <p:cNvSpPr/>
-          <p:nvPr/>
-        </p:nvSpPr>
-        <p:spPr>
-          <a:xfrm>
-            <a:off x="7863840" y="1280160"/>
-            <a:ext cx="10972" cy="2880360"/>
-          </a:xfrm>
-          <a:prstGeom prst="rect">
-            <a:avLst/>
-          </a:prstGeom>
-          <a:solidFill>
-            <a:srgbClr val="E2E2E2"/>
-          </a:solidFill>
-          <a:ln>
-            <a:noFill/>
-          </a:ln>
-        </p:spPr>
-        <p:style>
-          <a:lnRef idx="1">
-            <a:schemeClr val="accent1"/>
-          </a:lnRef>
-          <a:fillRef idx="3">
-            <a:schemeClr val="accent1"/>
-          </a:fillRef>
-          <a:effectRef idx="2">
-            <a:schemeClr val="accent1"/>
-          </a:effectRef>
-          <a:fontRef idx="minor">
-            <a:schemeClr val="lt1"/>
-          </a:fontRef>
-        </p:style>
-        <p:txBody>
-          <a:bodyPr rtlCol="0" anchor="ctr"/>
-          <a:lstStyle/>
-          <a:p>
-            <a:pPr algn="ctr"/>
-          </a:p>
-        </p:txBody>
-      </p:sp>
-      <p:sp>
-        <p:nvSpPr>
-          <p:cNvPr id="13" name="TextBox 12"/>
-          <p:cNvSpPr txBox="1"/>
-          <p:nvPr/>
-        </p:nvSpPr>
-        <p:spPr>
-          <a:xfrm>
-            <a:off x="8065008" y="1280160"/>
-            <a:ext cx="3200400" cy="274320"/>
+              <a:t>洗发水四五款并成一款。换料和清洗都在多款里。再加一个口味，清洗就回来。</a:t>
+            </a:r>
+          </a:p>
+        </p:txBody>
+      </p:sp>
+      <p:sp>
+        <p:nvSpPr>
+          <p:cNvPr id="11" name="TextBox 10"/>
+          <p:cNvSpPr txBox="1"/>
+          <p:nvPr/>
+        </p:nvSpPr>
+        <p:spPr>
+          <a:xfrm>
+            <a:off x="658368" y="3584448"/>
+            <a:ext cx="640080" cy="329184"/>
           </a:xfrm>
           <a:prstGeom prst="rect">
             <a:avLst/>
@@ -9469,7 +9378,7 @@
           <a:p>
             <a:pPr algn="l"/>
             <a:r>
-              <a:rPr sz="1400" b="0" i="0" lang="zh-CN" altLang="en-US">
+              <a:rPr sz="1600" b="0" i="0" lang="zh-CN" altLang="en-US">
                 <a:solidFill>
                   <a:srgbClr val="9E1B1B"/>
                 </a:solidFill>
@@ -9484,14 +9393,14 @@
       </p:sp>
       <p:sp>
         <p:nvSpPr>
-          <p:cNvPr id="14" name="TextBox 13"/>
-          <p:cNvSpPr txBox="1"/>
-          <p:nvPr/>
-        </p:nvSpPr>
-        <p:spPr>
-          <a:xfrm>
-            <a:off x="8065008" y="1691640"/>
-            <a:ext cx="3246120" cy="640080"/>
+          <p:cNvPr id="12" name="TextBox 11"/>
+          <p:cNvSpPr txBox="1"/>
+          <p:nvPr/>
+        </p:nvSpPr>
+        <p:spPr>
+          <a:xfrm>
+            <a:off x="1417320" y="3566160"/>
+            <a:ext cx="9966960" cy="365760"/>
           </a:xfrm>
           <a:prstGeom prst="rect">
             <a:avLst/>
@@ -9504,7 +9413,7 @@
           <a:p>
             <a:pPr algn="l"/>
             <a:r>
-              <a:rPr sz="2600" b="0" i="0" lang="zh-CN" altLang="en-US">
+              <a:rPr sz="2200" b="0" i="0" lang="zh-CN" altLang="en-US">
                 <a:solidFill>
                   <a:srgbClr val="141414"/>
                 </a:solidFill>
@@ -9512,36 +9421,32 @@
                 <a:ea typeface="Noto Sans CJK SC Medium"/>
                 <a:cs typeface="Noto Sans CJK SC Medium"/>
               </a:rPr>
-              <a:t>搬到墙外</a:t>
-            </a:r>
-          </a:p>
-        </p:txBody>
-      </p:sp>
-      <p:sp>
-        <p:nvSpPr>
-          <p:cNvPr id="15" name="TextBox 14"/>
-          <p:cNvSpPr txBox="1"/>
-          <p:nvPr/>
-        </p:nvSpPr>
-        <p:spPr>
-          <a:xfrm>
-            <a:off x="8065008" y="2514600"/>
-            <a:ext cx="3246120" cy="1691640"/>
-          </a:xfrm>
-          <a:prstGeom prst="rect">
-            <a:avLst/>
-          </a:prstGeom>
-          <a:noFill/>
-        </p:spPr>
-        <p:txBody>
-          <a:bodyPr wrap="square" anchor="t" lIns="0" rIns="0" tIns="0" bIns="0"/>
-          <a:lstStyle/>
-          <a:p>
-            <a:pPr algn="l">
-              <a:lnSpc>
-                <a:spcPct val="145000"/>
-              </a:lnSpc>
-            </a:pPr>
+              <a:t>罐子做大，人还是一个</a:t>
+            </a:r>
+          </a:p>
+        </p:txBody>
+      </p:sp>
+      <p:sp>
+        <p:nvSpPr>
+          <p:cNvPr id="13" name="TextBox 12"/>
+          <p:cNvSpPr txBox="1"/>
+          <p:nvPr/>
+        </p:nvSpPr>
+        <p:spPr>
+          <a:xfrm>
+            <a:off x="1417320" y="3968496"/>
+            <a:ext cx="9966960" cy="640080"/>
+          </a:xfrm>
+          <a:prstGeom prst="rect">
+            <a:avLst/>
+          </a:prstGeom>
+          <a:noFill/>
+        </p:spPr>
+        <p:txBody>
+          <a:bodyPr wrap="square" anchor="t" lIns="0" rIns="0" tIns="0" bIns="0"/>
+          <a:lstStyle/>
+          <a:p>
+            <a:pPr algn="l"/>
             <a:r>
               <a:rPr sz="1500" b="0" i="0" lang="zh-CN" altLang="en-US">
                 <a:solidFill>
@@ -9551,84 +9456,34 @@
                 <a:ea typeface="Noto Sans CJK SC"/>
                 <a:cs typeface="Noto Sans CJK SC"/>
               </a:rPr>
-              <a:t>下一道工序盖在原料厂的院墙外，
-用管道接。
-运的那一趟被拿掉，
-才不是在谈运费。</a:t>
-            </a:r>
-          </a:p>
-        </p:txBody>
-      </p:sp>
-      <p:sp>
-        <p:nvSpPr>
-          <p:cNvPr id="16" name="Rectangle 15"/>
-          <p:cNvSpPr/>
-          <p:nvPr/>
-        </p:nvSpPr>
-        <p:spPr>
-          <a:xfrm>
-            <a:off x="658368" y="4709160"/>
-            <a:ext cx="10881360" cy="10972"/>
-          </a:xfrm>
-          <a:prstGeom prst="rect">
-            <a:avLst/>
-          </a:prstGeom>
-          <a:solidFill>
-            <a:srgbClr val="E2E2E2"/>
-          </a:solidFill>
-          <a:ln>
-            <a:noFill/>
-          </a:ln>
-        </p:spPr>
-        <p:style>
-          <a:lnRef idx="1">
-            <a:schemeClr val="accent1"/>
-          </a:lnRef>
-          <a:fillRef idx="3">
-            <a:schemeClr val="accent1"/>
-          </a:fillRef>
-          <a:effectRef idx="2">
-            <a:schemeClr val="accent1"/>
-          </a:effectRef>
-          <a:fontRef idx="minor">
-            <a:schemeClr val="lt1"/>
-          </a:fontRef>
-        </p:style>
-        <p:txBody>
-          <a:bodyPr rtlCol="0" anchor="ctr"/>
-          <a:lstStyle/>
-          <a:p>
-            <a:pPr algn="ctr"/>
-          </a:p>
-        </p:txBody>
-      </p:sp>
-      <p:sp>
-        <p:nvSpPr>
-          <p:cNvPr id="17" name="TextBox 16"/>
-          <p:cNvSpPr txBox="1"/>
-          <p:nvPr/>
-        </p:nvSpPr>
-        <p:spPr>
-          <a:xfrm>
-            <a:off x="658368" y="4983480"/>
-            <a:ext cx="10789920" cy="1097280"/>
-          </a:xfrm>
-          <a:prstGeom prst="rect">
-            <a:avLst/>
-          </a:prstGeom>
-          <a:noFill/>
-        </p:spPr>
-        <p:txBody>
-          <a:bodyPr wrap="square" anchor="t" lIns="0" rIns="0" tIns="0" bIns="0"/>
-          <a:lstStyle/>
-          <a:p>
-            <a:pPr algn="l">
-              <a:lnSpc>
-                <a:spcPct val="135000"/>
-              </a:lnSpc>
-            </a:pPr>
-            <a:r>
-              <a:rPr sz="2200" b="0" i="0" lang="zh-CN" altLang="en-US">
+              <a:t>萃取罐从 0.5 吨做到 18 吨，三十六倍，操作的人仍是一个。要推的是这只罐子，不是多找几家小厂。</a:t>
+            </a:r>
+          </a:p>
+        </p:txBody>
+      </p:sp>
+      <p:sp>
+        <p:nvSpPr>
+          <p:cNvPr id="14" name="TextBox 13"/>
+          <p:cNvSpPr txBox="1"/>
+          <p:nvPr/>
+        </p:nvSpPr>
+        <p:spPr>
+          <a:xfrm>
+            <a:off x="658368" y="4791456"/>
+            <a:ext cx="640080" cy="329184"/>
+          </a:xfrm>
+          <a:prstGeom prst="rect">
+            <a:avLst/>
+          </a:prstGeom>
+          <a:noFill/>
+        </p:spPr>
+        <p:txBody>
+          <a:bodyPr wrap="square" anchor="t" lIns="0" rIns="0" tIns="0" bIns="0"/>
+          <a:lstStyle/>
+          <a:p>
+            <a:pPr algn="l"/>
+            <a:r>
+              <a:rPr sz="1600" b="0" i="0" lang="zh-CN" altLang="en-US">
                 <a:solidFill>
                   <a:srgbClr val="9E1B1B"/>
                 </a:solidFill>
@@ -9636,15 +9491,84 @@
                 <a:ea typeface="Noto Sans CJK SC Medium"/>
                 <a:cs typeface="Noto Sans CJK SC Medium"/>
               </a:rPr>
-              <a:t>第一件，谁都会做。
-后两件，才是一贯工程。</a:t>
-            </a:r>
-          </a:p>
-        </p:txBody>
-      </p:sp>
-      <p:sp>
-        <p:nvSpPr>
-          <p:cNvPr id="18" name="TextBox 17"/>
+              <a:t>04</a:t>
+            </a:r>
+          </a:p>
+        </p:txBody>
+      </p:sp>
+      <p:sp>
+        <p:nvSpPr>
+          <p:cNvPr id="15" name="TextBox 14"/>
+          <p:cNvSpPr txBox="1"/>
+          <p:nvPr/>
+        </p:nvSpPr>
+        <p:spPr>
+          <a:xfrm>
+            <a:off x="1417320" y="4773168"/>
+            <a:ext cx="9966960" cy="365760"/>
+          </a:xfrm>
+          <a:prstGeom prst="rect">
+            <a:avLst/>
+          </a:prstGeom>
+          <a:noFill/>
+        </p:spPr>
+        <p:txBody>
+          <a:bodyPr wrap="square" anchor="t" lIns="0" rIns="0" tIns="0" bIns="0"/>
+          <a:lstStyle/>
+          <a:p>
+            <a:pPr algn="l"/>
+            <a:r>
+              <a:rPr sz="2200" b="0" i="0" lang="zh-CN" altLang="en-US">
+                <a:solidFill>
+                  <a:srgbClr val="141414"/>
+                </a:solidFill>
+                <a:latin typeface="Noto Sans CJK SC Medium"/>
+                <a:ea typeface="Noto Sans CJK SC Medium"/>
+                <a:cs typeface="Noto Sans CJK SC Medium"/>
+              </a:rPr>
+              <a:t>鲜品进罐</a:t>
+            </a:r>
+          </a:p>
+        </p:txBody>
+      </p:sp>
+      <p:sp>
+        <p:nvSpPr>
+          <p:cNvPr id="16" name="TextBox 15"/>
+          <p:cNvSpPr txBox="1"/>
+          <p:nvPr/>
+        </p:nvSpPr>
+        <p:spPr>
+          <a:xfrm>
+            <a:off x="1417320" y="5175504"/>
+            <a:ext cx="9966960" cy="640080"/>
+          </a:xfrm>
+          <a:prstGeom prst="rect">
+            <a:avLst/>
+          </a:prstGeom>
+          <a:noFill/>
+        </p:spPr>
+        <p:txBody>
+          <a:bodyPr wrap="square" anchor="t" lIns="0" rIns="0" tIns="0" bIns="0"/>
+          <a:lstStyle/>
+          <a:p>
+            <a:pPr algn="l"/>
+            <a:r>
+              <a:rPr sz="1500" b="0" i="0" lang="zh-CN" altLang="en-US">
+                <a:solidFill>
+                  <a:srgbClr val="2C2C2C"/>
+                </a:solidFill>
+                <a:latin typeface="Noto Sans CJK SC"/>
+                <a:ea typeface="Noto Sans CJK SC"/>
+                <a:cs typeface="Noto Sans CJK SC"/>
+              </a:rPr>
+              <a:t>川芎、当归、白芍洗净直接煮。干燥和切断是按克卖药才有的。中国法人在产地守的是这一步。</a:t>
+            </a:r>
+          </a:p>
+        </p:txBody>
+      </p:sp>
+      <p:sp>
+        <p:nvSpPr>
+          <p:cNvPr id="17" name="TextBox 16"/>
           <p:cNvSpPr txBox="1"/>
           <p:nvPr/>
         </p:nvSpPr>
@@ -9768,7 +9692,7 @@
                 <a:ea typeface="Noto Sans CJK SC Medium"/>
                 <a:cs typeface="Noto Sans CJK SC Medium"/>
               </a:rPr>
-              <a:t>中国产线上就做这四件</a:t>
+              <a:t>带去合作方的，是这三样</a:t>
             </a:r>
           </a:p>
         </p:txBody>
@@ -9824,8 +9748,8 @@
         </p:nvSpPr>
         <p:spPr>
           <a:xfrm>
-            <a:off x="658368" y="1170432"/>
-            <a:ext cx="640080" cy="329184"/>
+            <a:off x="658368" y="1371600"/>
+            <a:ext cx="3246120" cy="1051560"/>
           </a:xfrm>
           <a:prstGeom prst="rect">
             <a:avLst/>
@@ -9838,15 +9762,15 @@
           <a:p>
             <a:pPr algn="l"/>
             <a:r>
-              <a:rPr sz="1600" b="0" i="0" lang="zh-CN" altLang="en-US">
-                <a:solidFill>
-                  <a:srgbClr val="9E1B1B"/>
+              <a:rPr sz="2400" b="0" i="0" lang="zh-CN" altLang="en-US">
+                <a:solidFill>
+                  <a:srgbClr val="141414"/>
                 </a:solidFill>
                 <a:latin typeface="Noto Sans CJK SC Medium"/>
                 <a:ea typeface="Noto Sans CJK SC Medium"/>
                 <a:cs typeface="Noto Sans CJK SC Medium"/>
               </a:rPr>
-              <a:t>01</a:t>
+              <a:t>一个月十万套</a:t>
             </a:r>
           </a:p>
         </p:txBody>
@@ -9859,8 +9783,92 @@
         </p:nvSpPr>
         <p:spPr>
           <a:xfrm>
-            <a:off x="1417320" y="1152144"/>
-            <a:ext cx="9966960" cy="365760"/>
+            <a:off x="658368" y="2560320"/>
+            <a:ext cx="3246120" cy="1645920"/>
+          </a:xfrm>
+          <a:prstGeom prst="rect">
+            <a:avLst/>
+          </a:prstGeom>
+          <a:noFill/>
+        </p:spPr>
+        <p:txBody>
+          <a:bodyPr wrap="square" anchor="t" lIns="0" rIns="0" tIns="0" bIns="0"/>
+          <a:lstStyle/>
+          <a:p>
+            <a:pPr algn="l">
+              <a:lnSpc>
+                <a:spcPct val="145000"/>
+              </a:lnSpc>
+            </a:pPr>
+            <a:r>
+              <a:rPr sz="1500" b="0" i="0" lang="zh-CN" altLang="en-US">
+                <a:solidFill>
+                  <a:srgbClr val="2C2C2C"/>
+                </a:solidFill>
+                <a:latin typeface="Noto Sans CJK SC"/>
+                <a:ea typeface="Noto Sans CJK SC"/>
+                <a:cs typeface="Noto Sans CJK SC"/>
+              </a:rPr>
+              <a:t>价格按这个量重算，
+才落到原来的十分之一。
+交出去的是能排产的这个数。</a:t>
+            </a:r>
+          </a:p>
+        </p:txBody>
+      </p:sp>
+      <p:sp>
+        <p:nvSpPr>
+          <p:cNvPr id="7" name="Rectangle 6"/>
+          <p:cNvSpPr/>
+          <p:nvPr/>
+        </p:nvSpPr>
+        <p:spPr>
+          <a:xfrm>
+            <a:off x="4160520" y="1280160"/>
+            <a:ext cx="10972" cy="2880360"/>
+          </a:xfrm>
+          <a:prstGeom prst="rect">
+            <a:avLst/>
+          </a:prstGeom>
+          <a:solidFill>
+            <a:srgbClr val="E2E2E2"/>
+          </a:solidFill>
+          <a:ln>
+            <a:noFill/>
+          </a:ln>
+        </p:spPr>
+        <p:style>
+          <a:lnRef idx="1">
+            <a:schemeClr val="accent1"/>
+          </a:lnRef>
+          <a:fillRef idx="3">
+            <a:schemeClr val="accent1"/>
+          </a:fillRef>
+          <a:effectRef idx="2">
+            <a:schemeClr val="accent1"/>
+          </a:effectRef>
+          <a:fontRef idx="minor">
+            <a:schemeClr val="lt1"/>
+          </a:fontRef>
+        </p:style>
+        <p:txBody>
+          <a:bodyPr rtlCol="0" anchor="ctr"/>
+          <a:lstStyle/>
+          <a:p>
+            <a:pPr algn="ctr"/>
+          </a:p>
+        </p:txBody>
+      </p:sp>
+      <p:sp>
+        <p:nvSpPr>
+          <p:cNvPr id="8" name="TextBox 7"/>
+          <p:cNvSpPr txBox="1"/>
+          <p:nvPr/>
+        </p:nvSpPr>
+        <p:spPr>
+          <a:xfrm>
+            <a:off x="4361688" y="1371600"/>
+            <a:ext cx="3246120" cy="1051560"/>
           </a:xfrm>
           <a:prstGeom prst="rect">
             <a:avLst/>
@@ -9873,7 +9881,7 @@
           <a:p>
             <a:pPr algn="l"/>
             <a:r>
-              <a:rPr sz="2200" b="0" i="0" lang="zh-CN" altLang="en-US">
+              <a:rPr sz="2400" b="0" i="0" lang="zh-CN" altLang="en-US">
                 <a:solidFill>
                   <a:srgbClr val="141414"/>
                 </a:solidFill>
@@ -9881,32 +9889,36 @@
                 <a:ea typeface="Noto Sans CJK SC Medium"/>
                 <a:cs typeface="Noto Sans CJK SC Medium"/>
               </a:rPr>
-              <a:t>一个模具做大</a:t>
-            </a:r>
-          </a:p>
-        </p:txBody>
-      </p:sp>
-      <p:sp>
-        <p:nvSpPr>
-          <p:cNvPr id="7" name="TextBox 6"/>
-          <p:cNvSpPr txBox="1"/>
-          <p:nvPr/>
-        </p:nvSpPr>
-        <p:spPr>
-          <a:xfrm>
-            <a:off x="1417320" y="1554480"/>
-            <a:ext cx="9966960" cy="640080"/>
-          </a:xfrm>
-          <a:prstGeom prst="rect">
-            <a:avLst/>
-          </a:prstGeom>
-          <a:noFill/>
-        </p:spPr>
-        <p:txBody>
-          <a:bodyPr wrap="square" anchor="t" lIns="0" rIns="0" tIns="0" bIns="0"/>
-          <a:lstStyle/>
-          <a:p>
-            <a:pPr algn="l"/>
+              <a:t>设备图纸</a:t>
+            </a:r>
+          </a:p>
+        </p:txBody>
+      </p:sp>
+      <p:sp>
+        <p:nvSpPr>
+          <p:cNvPr id="9" name="TextBox 8"/>
+          <p:cNvSpPr txBox="1"/>
+          <p:nvPr/>
+        </p:nvSpPr>
+        <p:spPr>
+          <a:xfrm>
+            <a:off x="4361688" y="2560320"/>
+            <a:ext cx="3246120" cy="1645920"/>
+          </a:xfrm>
+          <a:prstGeom prst="rect">
+            <a:avLst/>
+          </a:prstGeom>
+          <a:noFill/>
+        </p:spPr>
+        <p:txBody>
+          <a:bodyPr wrap="square" anchor="t" lIns="0" rIns="0" tIns="0" bIns="0"/>
+          <a:lstStyle/>
+          <a:p>
+            <a:pPr algn="l">
+              <a:lnSpc>
+                <a:spcPct val="145000"/>
+              </a:lnSpc>
+            </a:pPr>
             <a:r>
               <a:rPr sz="1500" b="0" i="0" lang="zh-CN" altLang="en-US">
                 <a:solidFill>
@@ -9916,21 +9928,66 @@
                 <a:ea typeface="Noto Sans CJK SC"/>
                 <a:cs typeface="Noto Sans CJK SC"/>
               </a:rPr>
-              <a:t>牙刷造型不改。腔数做大，机器换大，原料买吨袋，付现金。再换一个造型，腔数就做不大。</a:t>
-            </a:r>
-          </a:p>
-        </p:txBody>
-      </p:sp>
-      <p:sp>
-        <p:nvSpPr>
-          <p:cNvPr id="8" name="TextBox 7"/>
-          <p:cNvSpPr txBox="1"/>
-          <p:nvPr/>
-        </p:nvSpPr>
-        <p:spPr>
-          <a:xfrm>
-            <a:off x="658368" y="2377440"/>
-            <a:ext cx="640080" cy="329184"/>
+              <a:t>设备公司出。没有厂房，就在旁边盖。
+原料买断，对方只运转。
+拿去的是图纸，不是询价单。</a:t>
+            </a:r>
+          </a:p>
+        </p:txBody>
+      </p:sp>
+      <p:sp>
+        <p:nvSpPr>
+          <p:cNvPr id="10" name="Rectangle 9"/>
+          <p:cNvSpPr/>
+          <p:nvPr/>
+        </p:nvSpPr>
+        <p:spPr>
+          <a:xfrm>
+            <a:off x="7863840" y="1280160"/>
+            <a:ext cx="10972" cy="2880360"/>
+          </a:xfrm>
+          <a:prstGeom prst="rect">
+            <a:avLst/>
+          </a:prstGeom>
+          <a:solidFill>
+            <a:srgbClr val="E2E2E2"/>
+          </a:solidFill>
+          <a:ln>
+            <a:noFill/>
+          </a:ln>
+        </p:spPr>
+        <p:style>
+          <a:lnRef idx="1">
+            <a:schemeClr val="accent1"/>
+          </a:lnRef>
+          <a:fillRef idx="3">
+            <a:schemeClr val="accent1"/>
+          </a:fillRef>
+          <a:effectRef idx="2">
+            <a:schemeClr val="accent1"/>
+          </a:effectRef>
+          <a:fontRef idx="minor">
+            <a:schemeClr val="lt1"/>
+          </a:fontRef>
+        </p:style>
+        <p:txBody>
+          <a:bodyPr rtlCol="0" anchor="ctr"/>
+          <a:lstStyle/>
+          <a:p>
+            <a:pPr algn="ctr"/>
+          </a:p>
+        </p:txBody>
+      </p:sp>
+      <p:sp>
+        <p:nvSpPr>
+          <p:cNvPr id="11" name="TextBox 10"/>
+          <p:cNvSpPr txBox="1"/>
+          <p:nvPr/>
+        </p:nvSpPr>
+        <p:spPr>
+          <a:xfrm>
+            <a:off x="8065008" y="1371600"/>
+            <a:ext cx="3246120" cy="1051560"/>
           </a:xfrm>
           <a:prstGeom prst="rect">
             <a:avLst/>
@@ -9943,225 +10000,139 @@
           <a:p>
             <a:pPr algn="l"/>
             <a:r>
-              <a:rPr sz="1600" b="0" i="0" lang="zh-CN" altLang="en-US">
-                <a:solidFill>
-                  <a:srgbClr val="9E1B1B"/>
+              <a:rPr sz="2400" b="0" i="0" lang="zh-CN" altLang="en-US">
+                <a:solidFill>
+                  <a:srgbClr val="141414"/>
                 </a:solidFill>
                 <a:latin typeface="Noto Sans CJK SC Medium"/>
                 <a:ea typeface="Noto Sans CJK SC Medium"/>
                 <a:cs typeface="Noto Sans CJK SC Medium"/>
               </a:rPr>
-              <a:t>02</a:t>
-            </a:r>
-          </a:p>
-        </p:txBody>
-      </p:sp>
-      <p:sp>
-        <p:nvSpPr>
-          <p:cNvPr id="9" name="TextBox 8"/>
-          <p:cNvSpPr txBox="1"/>
-          <p:nvPr/>
-        </p:nvSpPr>
-        <p:spPr>
-          <a:xfrm>
-            <a:off x="1417320" y="2359152"/>
-            <a:ext cx="9966960" cy="365760"/>
-          </a:xfrm>
-          <a:prstGeom prst="rect">
-            <a:avLst/>
-          </a:prstGeom>
-          <a:noFill/>
-        </p:spPr>
-        <p:txBody>
-          <a:bodyPr wrap="square" anchor="t" lIns="0" rIns="0" tIns="0" bIns="0"/>
-          <a:lstStyle/>
-          <a:p>
-            <a:pPr algn="l"/>
+              <a:t>育苗就开始的合同</a:t>
+            </a:r>
+          </a:p>
+        </p:txBody>
+      </p:sp>
+      <p:sp>
+        <p:nvSpPr>
+          <p:cNvPr id="12" name="TextBox 11"/>
+          <p:cNvSpPr txBox="1"/>
+          <p:nvPr/>
+        </p:nvSpPr>
+        <p:spPr>
+          <a:xfrm>
+            <a:off x="8065008" y="2560320"/>
+            <a:ext cx="3246120" cy="1645920"/>
+          </a:xfrm>
+          <a:prstGeom prst="rect">
+            <a:avLst/>
+          </a:prstGeom>
+          <a:noFill/>
+        </p:spPr>
+        <p:txBody>
+          <a:bodyPr wrap="square" anchor="t" lIns="0" rIns="0" tIns="0" bIns="0"/>
+          <a:lstStyle/>
+          <a:p>
+            <a:pPr algn="l">
+              <a:lnSpc>
+                <a:spcPct val="145000"/>
+              </a:lnSpc>
+            </a:pPr>
+            <a:r>
+              <a:rPr sz="1500" b="0" i="0" lang="zh-CN" altLang="en-US">
+                <a:solidFill>
+                  <a:srgbClr val="2C2C2C"/>
+                </a:solidFill>
+                <a:latin typeface="Noto Sans CJK SC"/>
+                <a:ea typeface="Noto Sans CJK SC"/>
+                <a:cs typeface="Noto Sans CJK SC"/>
+              </a:rPr>
+              <a:t>川芎、当归、白芍从育苗起要一两年。
+合同在涨价之前锁上。
+农活不会，就公司带。</a:t>
+            </a:r>
+          </a:p>
+        </p:txBody>
+      </p:sp>
+      <p:sp>
+        <p:nvSpPr>
+          <p:cNvPr id="13" name="Rectangle 12"/>
+          <p:cNvSpPr/>
+          <p:nvPr/>
+        </p:nvSpPr>
+        <p:spPr>
+          <a:xfrm>
+            <a:off x="658368" y="4709160"/>
+            <a:ext cx="10881360" cy="10972"/>
+          </a:xfrm>
+          <a:prstGeom prst="rect">
+            <a:avLst/>
+          </a:prstGeom>
+          <a:solidFill>
+            <a:srgbClr val="E2E2E2"/>
+          </a:solidFill>
+          <a:ln>
+            <a:noFill/>
+          </a:ln>
+        </p:spPr>
+        <p:style>
+          <a:lnRef idx="1">
+            <a:schemeClr val="accent1"/>
+          </a:lnRef>
+          <a:fillRef idx="3">
+            <a:schemeClr val="accent1"/>
+          </a:fillRef>
+          <a:effectRef idx="2">
+            <a:schemeClr val="accent1"/>
+          </a:effectRef>
+          <a:fontRef idx="minor">
+            <a:schemeClr val="lt1"/>
+          </a:fontRef>
+        </p:style>
+        <p:txBody>
+          <a:bodyPr rtlCol="0" anchor="ctr"/>
+          <a:lstStyle/>
+          <a:p>
+            <a:pPr algn="ctr"/>
+          </a:p>
+        </p:txBody>
+      </p:sp>
+      <p:sp>
+        <p:nvSpPr>
+          <p:cNvPr id="14" name="TextBox 13"/>
+          <p:cNvSpPr txBox="1"/>
+          <p:nvPr/>
+        </p:nvSpPr>
+        <p:spPr>
+          <a:xfrm>
+            <a:off x="658368" y="4983480"/>
+            <a:ext cx="10789920" cy="1097280"/>
+          </a:xfrm>
+          <a:prstGeom prst="rect">
+            <a:avLst/>
+          </a:prstGeom>
+          <a:noFill/>
+        </p:spPr>
+        <p:txBody>
+          <a:bodyPr wrap="square" anchor="t" lIns="0" rIns="0" tIns="0" bIns="0"/>
+          <a:lstStyle/>
+          <a:p>
+            <a:pPr algn="l">
+              <a:lnSpc>
+                <a:spcPct val="135000"/>
+              </a:lnSpc>
+            </a:pPr>
             <a:r>
               <a:rPr sz="2200" b="0" i="0" lang="zh-CN" altLang="en-US">
                 <a:solidFill>
-                  <a:srgbClr val="141414"/>
+                  <a:srgbClr val="9E1B1B"/>
                 </a:solidFill>
                 <a:latin typeface="Noto Sans CJK SC Medium"/>
                 <a:ea typeface="Noto Sans CJK SC Medium"/>
                 <a:cs typeface="Noto Sans CJK SC Medium"/>
               </a:rPr>
-              <a:t>一种配方，罐子不洗</a:t>
-            </a:r>
-          </a:p>
-        </p:txBody>
-      </p:sp>
-      <p:sp>
-        <p:nvSpPr>
-          <p:cNvPr id="10" name="TextBox 9"/>
-          <p:cNvSpPr txBox="1"/>
-          <p:nvPr/>
-        </p:nvSpPr>
-        <p:spPr>
-          <a:xfrm>
-            <a:off x="1417320" y="2761488"/>
-            <a:ext cx="9966960" cy="640080"/>
-          </a:xfrm>
-          <a:prstGeom prst="rect">
-            <a:avLst/>
-          </a:prstGeom>
-          <a:noFill/>
-        </p:spPr>
-        <p:txBody>
-          <a:bodyPr wrap="square" anchor="t" lIns="0" rIns="0" tIns="0" bIns="0"/>
-          <a:lstStyle/>
-          <a:p>
-            <a:pPr algn="l"/>
-            <a:r>
-              <a:rPr sz="1500" b="0" i="0" lang="zh-CN" altLang="en-US">
-                <a:solidFill>
-                  <a:srgbClr val="2C2C2C"/>
-                </a:solidFill>
-                <a:latin typeface="Noto Sans CJK SC"/>
-                <a:ea typeface="Noto Sans CJK SC"/>
-                <a:cs typeface="Noto Sans CJK SC"/>
-              </a:rPr>
-              <a:t>洗发水四五款并成一款。换料和清洗都在多款里。再加一个口味，清洗就回来。</a:t>
-            </a:r>
-          </a:p>
-        </p:txBody>
-      </p:sp>
-      <p:sp>
-        <p:nvSpPr>
-          <p:cNvPr id="11" name="TextBox 10"/>
-          <p:cNvSpPr txBox="1"/>
-          <p:nvPr/>
-        </p:nvSpPr>
-        <p:spPr>
-          <a:xfrm>
-            <a:off x="658368" y="3584448"/>
-            <a:ext cx="640080" cy="329184"/>
-          </a:xfrm>
-          <a:prstGeom prst="rect">
-            <a:avLst/>
-          </a:prstGeom>
-          <a:noFill/>
-        </p:spPr>
-        <p:txBody>
-          <a:bodyPr wrap="square" anchor="t" lIns="0" rIns="0" tIns="0" bIns="0"/>
-          <a:lstStyle/>
-          <a:p>
-            <a:pPr algn="l"/>
-            <a:r>
-              <a:rPr sz="1600" b="0" i="0" lang="zh-CN" altLang="en-US">
-                <a:solidFill>
-                  <a:srgbClr val="9E1B1B"/>
-                </a:solidFill>
-                <a:latin typeface="Noto Sans CJK SC Medium"/>
-                <a:ea typeface="Noto Sans CJK SC Medium"/>
-                <a:cs typeface="Noto Sans CJK SC Medium"/>
-              </a:rPr>
-              <a:t>03</a:t>
-            </a:r>
-          </a:p>
-        </p:txBody>
-      </p:sp>
-      <p:sp>
-        <p:nvSpPr>
-          <p:cNvPr id="12" name="TextBox 11"/>
-          <p:cNvSpPr txBox="1"/>
-          <p:nvPr/>
-        </p:nvSpPr>
-        <p:spPr>
-          <a:xfrm>
-            <a:off x="1417320" y="3566160"/>
-            <a:ext cx="9966960" cy="365760"/>
-          </a:xfrm>
-          <a:prstGeom prst="rect">
-            <a:avLst/>
-          </a:prstGeom>
-          <a:noFill/>
-        </p:spPr>
-        <p:txBody>
-          <a:bodyPr wrap="square" anchor="t" lIns="0" rIns="0" tIns="0" bIns="0"/>
-          <a:lstStyle/>
-          <a:p>
-            <a:pPr algn="l"/>
-            <a:r>
-              <a:rPr sz="2200" b="0" i="0" lang="zh-CN" altLang="en-US">
-                <a:solidFill>
-                  <a:srgbClr val="141414"/>
-                </a:solidFill>
-                <a:latin typeface="Noto Sans CJK SC Medium"/>
-                <a:ea typeface="Noto Sans CJK SC Medium"/>
-                <a:cs typeface="Noto Sans CJK SC Medium"/>
-              </a:rPr>
-              <a:t>罐子做大，人还是一个</a:t>
-            </a:r>
-          </a:p>
-        </p:txBody>
-      </p:sp>
-      <p:sp>
-        <p:nvSpPr>
-          <p:cNvPr id="13" name="TextBox 12"/>
-          <p:cNvSpPr txBox="1"/>
-          <p:nvPr/>
-        </p:nvSpPr>
-        <p:spPr>
-          <a:xfrm>
-            <a:off x="1417320" y="3968496"/>
-            <a:ext cx="9966960" cy="640080"/>
-          </a:xfrm>
-          <a:prstGeom prst="rect">
-            <a:avLst/>
-          </a:prstGeom>
-          <a:noFill/>
-        </p:spPr>
-        <p:txBody>
-          <a:bodyPr wrap="square" anchor="t" lIns="0" rIns="0" tIns="0" bIns="0"/>
-          <a:lstStyle/>
-          <a:p>
-            <a:pPr algn="l"/>
-            <a:r>
-              <a:rPr sz="1500" b="0" i="0" lang="zh-CN" altLang="en-US">
-                <a:solidFill>
-                  <a:srgbClr val="2C2C2C"/>
-                </a:solidFill>
-                <a:latin typeface="Noto Sans CJK SC"/>
-                <a:ea typeface="Noto Sans CJK SC"/>
-                <a:cs typeface="Noto Sans CJK SC"/>
-              </a:rPr>
-              <a:t>萃取罐从 0.5 吨做到 18 吨，三十六倍，操作的人仍是一个。要推的是这只罐子，不是多找几家小厂。</a:t>
-            </a:r>
-          </a:p>
-        </p:txBody>
-      </p:sp>
-      <p:sp>
-        <p:nvSpPr>
-          <p:cNvPr id="14" name="TextBox 13"/>
-          <p:cNvSpPr txBox="1"/>
-          <p:nvPr/>
-        </p:nvSpPr>
-        <p:spPr>
-          <a:xfrm>
-            <a:off x="658368" y="4791456"/>
-            <a:ext cx="640080" cy="329184"/>
-          </a:xfrm>
-          <a:prstGeom prst="rect">
-            <a:avLst/>
-          </a:prstGeom>
-          <a:noFill/>
-        </p:spPr>
-        <p:txBody>
-          <a:bodyPr wrap="square" anchor="t" lIns="0" rIns="0" tIns="0" bIns="0"/>
-          <a:lstStyle/>
-          <a:p>
-            <a:pPr algn="l"/>
-            <a:r>
-              <a:rPr sz="1600" b="0" i="0" lang="zh-CN" altLang="en-US">
-                <a:solidFill>
-                  <a:srgbClr val="9E1B1B"/>
-                </a:solidFill>
-                <a:latin typeface="Noto Sans CJK SC Medium"/>
-                <a:ea typeface="Noto Sans CJK SC Medium"/>
-                <a:cs typeface="Noto Sans CJK SC Medium"/>
-              </a:rPr>
-              <a:t>04</a:t>
+              <a:t>大量生产不是第一步。
+这个数、这张图纸、这份合同，才是。</a:t>
             </a:r>
           </a:p>
         </p:txBody>
@@ -10169,76 +10140,6 @@
       <p:sp>
         <p:nvSpPr>
           <p:cNvPr id="15" name="TextBox 14"/>
-          <p:cNvSpPr txBox="1"/>
-          <p:nvPr/>
-        </p:nvSpPr>
-        <p:spPr>
-          <a:xfrm>
-            <a:off x="1417320" y="4773168"/>
-            <a:ext cx="9966960" cy="365760"/>
-          </a:xfrm>
-          <a:prstGeom prst="rect">
-            <a:avLst/>
-          </a:prstGeom>
-          <a:noFill/>
-        </p:spPr>
-        <p:txBody>
-          <a:bodyPr wrap="square" anchor="t" lIns="0" rIns="0" tIns="0" bIns="0"/>
-          <a:lstStyle/>
-          <a:p>
-            <a:pPr algn="l"/>
-            <a:r>
-              <a:rPr sz="2200" b="0" i="0" lang="zh-CN" altLang="en-US">
-                <a:solidFill>
-                  <a:srgbClr val="141414"/>
-                </a:solidFill>
-                <a:latin typeface="Noto Sans CJK SC Medium"/>
-                <a:ea typeface="Noto Sans CJK SC Medium"/>
-                <a:cs typeface="Noto Sans CJK SC Medium"/>
-              </a:rPr>
-              <a:t>鲜品进罐</a:t>
-            </a:r>
-          </a:p>
-        </p:txBody>
-      </p:sp>
-      <p:sp>
-        <p:nvSpPr>
-          <p:cNvPr id="16" name="TextBox 15"/>
-          <p:cNvSpPr txBox="1"/>
-          <p:nvPr/>
-        </p:nvSpPr>
-        <p:spPr>
-          <a:xfrm>
-            <a:off x="1417320" y="5175504"/>
-            <a:ext cx="9966960" cy="640080"/>
-          </a:xfrm>
-          <a:prstGeom prst="rect">
-            <a:avLst/>
-          </a:prstGeom>
-          <a:noFill/>
-        </p:spPr>
-        <p:txBody>
-          <a:bodyPr wrap="square" anchor="t" lIns="0" rIns="0" tIns="0" bIns="0"/>
-          <a:lstStyle/>
-          <a:p>
-            <a:pPr algn="l"/>
-            <a:r>
-              <a:rPr sz="1500" b="0" i="0" lang="zh-CN" altLang="en-US">
-                <a:solidFill>
-                  <a:srgbClr val="2C2C2C"/>
-                </a:solidFill>
-                <a:latin typeface="Noto Sans CJK SC"/>
-                <a:ea typeface="Noto Sans CJK SC"/>
-                <a:cs typeface="Noto Sans CJK SC"/>
-              </a:rPr>
-              <a:t>川芎、当归、白芍洗净直接煮。干燥和切断是按克卖药才有的。中国法人在产地守的是这一步。</a:t>
-            </a:r>
-          </a:p>
-        </p:txBody>
-      </p:sp>
-      <p:sp>
-        <p:nvSpPr>
-          <p:cNvPr id="17" name="TextBox 16"/>
           <p:cNvSpPr txBox="1"/>
           <p:nvPr/>
         </p:nvSpPr>
@@ -10362,7 +10263,7 @@
                 <a:ea typeface="Noto Sans CJK SC Medium"/>
                 <a:cs typeface="Noto Sans CJK SC Medium"/>
               </a:rPr>
-              <a:t>带去合作方的，是这三样</a:t>
+              <a:t>个人平台，先改变事业者</a:t>
             </a:r>
           </a:p>
         </p:txBody>
@@ -10418,8 +10319,8 @@
         </p:nvSpPr>
         <p:spPr>
           <a:xfrm>
-            <a:off x="658368" y="1371600"/>
-            <a:ext cx="3246120" cy="1051560"/>
+            <a:off x="658368" y="1207008"/>
+            <a:ext cx="3200400" cy="237744"/>
           </a:xfrm>
           <a:prstGeom prst="rect">
             <a:avLst/>
@@ -10432,15 +10333,15 @@
           <a:p>
             <a:pPr algn="l"/>
             <a:r>
-              <a:rPr sz="2400" b="0" i="0" lang="zh-CN" altLang="en-US">
-                <a:solidFill>
-                  <a:srgbClr val="141414"/>
+              <a:rPr sz="1400" b="0" i="0" lang="zh-CN" altLang="en-US">
+                <a:solidFill>
+                  <a:srgbClr val="9E1B1B"/>
                 </a:solidFill>
                 <a:latin typeface="Noto Sans CJK SC Medium"/>
                 <a:ea typeface="Noto Sans CJK SC Medium"/>
                 <a:cs typeface="Noto Sans CJK SC Medium"/>
               </a:rPr>
-              <a:t>一个月十万套</a:t>
+              <a:t>01</a:t>
             </a:r>
           </a:p>
         </p:txBody>
@@ -10453,8 +10354,43 @@
         </p:nvSpPr>
         <p:spPr>
           <a:xfrm>
-            <a:off x="658368" y="2560320"/>
-            <a:ext cx="3246120" cy="1645920"/>
+            <a:off x="658368" y="1499616"/>
+            <a:ext cx="3246120" cy="640080"/>
+          </a:xfrm>
+          <a:prstGeom prst="rect">
+            <a:avLst/>
+          </a:prstGeom>
+          <a:noFill/>
+        </p:spPr>
+        <p:txBody>
+          <a:bodyPr wrap="square" anchor="t" lIns="0" rIns="0" tIns="0" bIns="0"/>
+          <a:lstStyle/>
+          <a:p>
+            <a:pPr algn="l"/>
+            <a:r>
+              <a:rPr sz="2200" b="0" i="0" lang="zh-CN" altLang="en-US">
+                <a:solidFill>
+                  <a:srgbClr val="141414"/>
+                </a:solidFill>
+                <a:latin typeface="Noto Sans CJK SC Medium"/>
+                <a:ea typeface="Noto Sans CJK SC Medium"/>
+                <a:cs typeface="Noto Sans CJK SC Medium"/>
+              </a:rPr>
+              <a:t>八个阶段在里面</a:t>
+            </a:r>
+          </a:p>
+        </p:txBody>
+      </p:sp>
+      <p:sp>
+        <p:nvSpPr>
+          <p:cNvPr id="7" name="TextBox 6"/>
+          <p:cNvSpPr txBox="1"/>
+          <p:nvPr/>
+        </p:nvSpPr>
+        <p:spPr>
+          <a:xfrm>
+            <a:off x="658368" y="2240280"/>
+            <a:ext cx="3246120" cy="1965960"/>
           </a:xfrm>
           <a:prstGeom prst="rect">
             <a:avLst/>
@@ -10467,7 +10403,7 @@
           <a:p>
             <a:pPr algn="l">
               <a:lnSpc>
-                <a:spcPct val="145000"/>
+                <a:spcPct val="135000"/>
               </a:lnSpc>
             </a:pPr>
             <a:r>
@@ -10479,23 +10415,25 @@
                 <a:ea typeface="Noto Sans CJK SC"/>
                 <a:cs typeface="Noto Sans CJK SC"/>
               </a:rPr>
-              <a:t>价格按这个量重算，
-才落到原来的十分之一。
-交出去的是能排产的这个数。</a:t>
-            </a:r>
-          </a:p>
-        </p:txBody>
-      </p:sp>
-      <p:sp>
-        <p:nvSpPr>
-          <p:cNvPr id="7" name="Rectangle 6"/>
+              <a:t>产品懂得多少，
+八个阶段走到哪一步，
+下一步学什么，都在里面。
+中国法人做成中文的路径。
+人不用等一场酒店课。</a:t>
+            </a:r>
+          </a:p>
+        </p:txBody>
+      </p:sp>
+      <p:sp>
+        <p:nvSpPr>
+          <p:cNvPr id="8" name="Rectangle 7"/>
           <p:cNvSpPr/>
           <p:nvPr/>
         </p:nvSpPr>
         <p:spPr>
           <a:xfrm>
-            <a:off x="4160520" y="1280160"/>
-            <a:ext cx="10972" cy="2880360"/>
+            <a:off x="4160520" y="1207008"/>
+            <a:ext cx="10972" cy="3063240"/>
           </a:xfrm>
           <a:prstGeom prst="rect">
             <a:avLst/>
@@ -10531,14 +10469,14 @@
       </p:sp>
       <p:sp>
         <p:nvSpPr>
-          <p:cNvPr id="8" name="TextBox 7"/>
-          <p:cNvSpPr txBox="1"/>
-          <p:nvPr/>
-        </p:nvSpPr>
-        <p:spPr>
-          <a:xfrm>
-            <a:off x="4361688" y="1371600"/>
-            <a:ext cx="3246120" cy="1051560"/>
+          <p:cNvPr id="9" name="TextBox 8"/>
+          <p:cNvSpPr txBox="1"/>
+          <p:nvPr/>
+        </p:nvSpPr>
+        <p:spPr>
+          <a:xfrm>
+            <a:off x="4361688" y="1207008"/>
+            <a:ext cx="3200400" cy="237744"/>
           </a:xfrm>
           <a:prstGeom prst="rect">
             <a:avLst/>
@@ -10551,29 +10489,64 @@
           <a:p>
             <a:pPr algn="l"/>
             <a:r>
-              <a:rPr sz="2400" b="0" i="0" lang="zh-CN" altLang="en-US">
-                <a:solidFill>
-                  <a:srgbClr val="141414"/>
+              <a:rPr sz="1400" b="0" i="0" lang="zh-CN" altLang="en-US">
+                <a:solidFill>
+                  <a:srgbClr val="9E1B1B"/>
                 </a:solidFill>
                 <a:latin typeface="Noto Sans CJK SC Medium"/>
                 <a:ea typeface="Noto Sans CJK SC Medium"/>
                 <a:cs typeface="Noto Sans CJK SC Medium"/>
               </a:rPr>
-              <a:t>设备图纸</a:t>
-            </a:r>
-          </a:p>
-        </p:txBody>
-      </p:sp>
-      <p:sp>
-        <p:nvSpPr>
-          <p:cNvPr id="9" name="TextBox 8"/>
-          <p:cNvSpPr txBox="1"/>
-          <p:nvPr/>
-        </p:nvSpPr>
-        <p:spPr>
-          <a:xfrm>
-            <a:off x="4361688" y="2560320"/>
-            <a:ext cx="3246120" cy="1645920"/>
+              <a:t>02</a:t>
+            </a:r>
+          </a:p>
+        </p:txBody>
+      </p:sp>
+      <p:sp>
+        <p:nvSpPr>
+          <p:cNvPr id="10" name="TextBox 9"/>
+          <p:cNvSpPr txBox="1"/>
+          <p:nvPr/>
+        </p:nvSpPr>
+        <p:spPr>
+          <a:xfrm>
+            <a:off x="4361688" y="1499616"/>
+            <a:ext cx="3246120" cy="640080"/>
+          </a:xfrm>
+          <a:prstGeom prst="rect">
+            <a:avLst/>
+          </a:prstGeom>
+          <a:noFill/>
+        </p:spPr>
+        <p:txBody>
+          <a:bodyPr wrap="square" anchor="t" lIns="0" rIns="0" tIns="0" bIns="0"/>
+          <a:lstStyle/>
+          <a:p>
+            <a:pPr algn="l"/>
+            <a:r>
+              <a:rPr sz="2200" b="0" i="0" lang="zh-CN" altLang="en-US">
+                <a:solidFill>
+                  <a:srgbClr val="141414"/>
+                </a:solidFill>
+                <a:latin typeface="Noto Sans CJK SC Medium"/>
+                <a:ea typeface="Noto Sans CJK SC Medium"/>
+                <a:cs typeface="Noto Sans CJK SC Medium"/>
+              </a:rPr>
+              <a:t>一百到二百支骨架</a:t>
+            </a:r>
+          </a:p>
+        </p:txBody>
+      </p:sp>
+      <p:sp>
+        <p:nvSpPr>
+          <p:cNvPr id="11" name="TextBox 10"/>
+          <p:cNvSpPr txBox="1"/>
+          <p:nvPr/>
+        </p:nvSpPr>
+        <p:spPr>
+          <a:xfrm>
+            <a:off x="4361688" y="2240280"/>
+            <a:ext cx="3246120" cy="1965960"/>
           </a:xfrm>
           <a:prstGeom prst="rect">
             <a:avLst/>
@@ -10586,7 +10559,7 @@
           <a:p>
             <a:pPr algn="l">
               <a:lnSpc>
-                <a:spcPct val="145000"/>
+                <a:spcPct val="135000"/>
               </a:lnSpc>
             </a:pPr>
             <a:r>
@@ -10598,23 +10571,25 @@
                 <a:ea typeface="Noto Sans CJK SC"/>
                 <a:cs typeface="Noto Sans CJK SC"/>
               </a:rPr>
-              <a:t>设备公司出。没有厂房，就在旁边盖。
-原料买断，对方只运转。
-拿去的是图纸，不是询价单。</a:t>
-            </a:r>
-          </a:p>
-        </p:txBody>
-      </p:sp>
-      <p:sp>
-        <p:nvSpPr>
-          <p:cNvPr id="10" name="Rectangle 9"/>
+              <a:t>到明年年底先打好骨架。
+事业者换成自己的脸、
+自己的讲法。
+一小时收成五分钟。
+说明在这个人的平台上完成。</a:t>
+            </a:r>
+          </a:p>
+        </p:txBody>
+      </p:sp>
+      <p:sp>
+        <p:nvSpPr>
+          <p:cNvPr id="12" name="Rectangle 11"/>
           <p:cNvSpPr/>
           <p:nvPr/>
         </p:nvSpPr>
         <p:spPr>
           <a:xfrm>
-            <a:off x="7863840" y="1280160"/>
-            <a:ext cx="10972" cy="2880360"/>
+            <a:off x="7863840" y="1207008"/>
+            <a:ext cx="10972" cy="3063240"/>
           </a:xfrm>
           <a:prstGeom prst="rect">
             <a:avLst/>
@@ -10650,14 +10625,14 @@
       </p:sp>
       <p:sp>
         <p:nvSpPr>
-          <p:cNvPr id="11" name="TextBox 10"/>
-          <p:cNvSpPr txBox="1"/>
-          <p:nvPr/>
-        </p:nvSpPr>
-        <p:spPr>
-          <a:xfrm>
-            <a:off x="8065008" y="1371600"/>
-            <a:ext cx="3246120" cy="1051560"/>
+          <p:cNvPr id="13" name="TextBox 12"/>
+          <p:cNvSpPr txBox="1"/>
+          <p:nvPr/>
+        </p:nvSpPr>
+        <p:spPr>
+          <a:xfrm>
+            <a:off x="8065008" y="1207008"/>
+            <a:ext cx="3200400" cy="237744"/>
           </a:xfrm>
           <a:prstGeom prst="rect">
             <a:avLst/>
@@ -10670,29 +10645,64 @@
           <a:p>
             <a:pPr algn="l"/>
             <a:r>
-              <a:rPr sz="2400" b="0" i="0" lang="zh-CN" altLang="en-US">
-                <a:solidFill>
-                  <a:srgbClr val="141414"/>
+              <a:rPr sz="1400" b="0" i="0" lang="zh-CN" altLang="en-US">
+                <a:solidFill>
+                  <a:srgbClr val="9E1B1B"/>
                 </a:solidFill>
                 <a:latin typeface="Noto Sans CJK SC Medium"/>
                 <a:ea typeface="Noto Sans CJK SC Medium"/>
                 <a:cs typeface="Noto Sans CJK SC Medium"/>
               </a:rPr>
-              <a:t>育苗就开始的合同</a:t>
-            </a:r>
-          </a:p>
-        </p:txBody>
-      </p:sp>
-      <p:sp>
-        <p:nvSpPr>
-          <p:cNvPr id="12" name="TextBox 11"/>
-          <p:cNvSpPr txBox="1"/>
-          <p:nvPr/>
-        </p:nvSpPr>
-        <p:spPr>
-          <a:xfrm>
-            <a:off x="8065008" y="2560320"/>
-            <a:ext cx="3246120" cy="1645920"/>
+              <a:t>03</a:t>
+            </a:r>
+          </a:p>
+        </p:txBody>
+      </p:sp>
+      <p:sp>
+        <p:nvSpPr>
+          <p:cNvPr id="14" name="TextBox 13"/>
+          <p:cNvSpPr txBox="1"/>
+          <p:nvPr/>
+        </p:nvSpPr>
+        <p:spPr>
+          <a:xfrm>
+            <a:off x="8065008" y="1499616"/>
+            <a:ext cx="3246120" cy="640080"/>
+          </a:xfrm>
+          <a:prstGeom prst="rect">
+            <a:avLst/>
+          </a:prstGeom>
+          <a:noFill/>
+        </p:spPr>
+        <p:txBody>
+          <a:bodyPr wrap="square" anchor="t" lIns="0" rIns="0" tIns="0" bIns="0"/>
+          <a:lstStyle/>
+          <a:p>
+            <a:pPr algn="l"/>
+            <a:r>
+              <a:rPr sz="2200" b="0" i="0" lang="zh-CN" altLang="en-US">
+                <a:solidFill>
+                  <a:srgbClr val="141414"/>
+                </a:solidFill>
+                <a:latin typeface="Noto Sans CJK SC Medium"/>
+                <a:ea typeface="Noto Sans CJK SC Medium"/>
+                <a:cs typeface="Noto Sans CJK SC Medium"/>
+              </a:rPr>
+              <a:t>PPO，平台的主人</a:t>
+            </a:r>
+          </a:p>
+        </p:txBody>
+      </p:sp>
+      <p:sp>
+        <p:nvSpPr>
+          <p:cNvPr id="15" name="TextBox 14"/>
+          <p:cNvSpPr txBox="1"/>
+          <p:nvPr/>
+        </p:nvSpPr>
+        <p:spPr>
+          <a:xfrm>
+            <a:off x="8065008" y="2240280"/>
+            <a:ext cx="3246120" cy="1965960"/>
           </a:xfrm>
           <a:prstGeom prst="rect">
             <a:avLst/>
@@ -10705,7 +10715,7 @@
           <a:p>
             <a:pPr algn="l">
               <a:lnSpc>
-                <a:spcPct val="145000"/>
+                <a:spcPct val="135000"/>
               </a:lnSpc>
             </a:pPr>
             <a:r>
@@ -10717,22 +10727,25 @@
                 <a:ea typeface="Noto Sans CJK SC"/>
                 <a:cs typeface="Noto Sans CJK SC"/>
               </a:rPr>
-              <a:t>川芎、当归、白芍从育苗起要一两年。
-合同在涨价之前锁上。
-农活不会，就公司带。</a:t>
-            </a:r>
-          </a:p>
-        </p:txBody>
-      </p:sp>
-      <p:sp>
-        <p:nvSpPr>
-          <p:cNvPr id="13" name="Rectangle 12"/>
+              <a:t>PPO 是这家平台的主人，
+不是发链接的人。
+自己的店、健康、教育，
+收在一处。
+培育 PPO，是九月十三日
+三份发表之一。</a:t>
+            </a:r>
+          </a:p>
+        </p:txBody>
+      </p:sp>
+      <p:sp>
+        <p:nvSpPr>
+          <p:cNvPr id="16" name="Rectangle 15"/>
           <p:cNvSpPr/>
           <p:nvPr/>
         </p:nvSpPr>
         <p:spPr>
           <a:xfrm>
-            <a:off x="658368" y="4709160"/>
+            <a:off x="658368" y="4754880"/>
             <a:ext cx="10881360" cy="10972"/>
           </a:xfrm>
           <a:prstGeom prst="rect">
@@ -10769,14 +10782,14 @@
       </p:sp>
       <p:sp>
         <p:nvSpPr>
-          <p:cNvPr id="14" name="TextBox 13"/>
-          <p:cNvSpPr txBox="1"/>
-          <p:nvPr/>
-        </p:nvSpPr>
-        <p:spPr>
-          <a:xfrm>
-            <a:off x="658368" y="4983480"/>
-            <a:ext cx="10789920" cy="1097280"/>
+          <p:cNvPr id="17" name="TextBox 16"/>
+          <p:cNvSpPr txBox="1"/>
+          <p:nvPr/>
+        </p:nvSpPr>
+        <p:spPr>
+          <a:xfrm>
+            <a:off x="658368" y="4956048"/>
+            <a:ext cx="10789920" cy="1051560"/>
           </a:xfrm>
           <a:prstGeom prst="rect">
             <a:avLst/>
@@ -10789,7 +10802,7 @@
           <a:p>
             <a:pPr algn="l">
               <a:lnSpc>
-                <a:spcPct val="135000"/>
+                <a:spcPct val="130000"/>
               </a:lnSpc>
             </a:pPr>
             <a:r>
@@ -10801,15 +10814,15 @@
                 <a:ea typeface="Noto Sans CJK SC Medium"/>
                 <a:cs typeface="Noto Sans CJK SC Medium"/>
               </a:rPr>
-              <a:t>大量生产不是第一步。
-这个数、这张图纸、这份合同，才是。</a:t>
-            </a:r>
-          </a:p>
-        </p:txBody>
-      </p:sp>
-      <p:sp>
-        <p:nvSpPr>
-          <p:cNvPr id="15" name="TextBox 14"/>
+              <a:t>教育的大笔费用在这里消失。
+省下来的，还是那三十五个点。</a:t>
+            </a:r>
+          </a:p>
+        </p:txBody>
+      </p:sp>
+      <p:sp>
+        <p:nvSpPr>
+          <p:cNvPr id="18" name="TextBox 17"/>
           <p:cNvSpPr txBox="1"/>
           <p:nvPr/>
         </p:nvSpPr>
@@ -10933,7 +10946,7 @@
                 <a:ea typeface="Noto Sans CJK SC Medium"/>
                 <a:cs typeface="Noto Sans CJK SC Medium"/>
               </a:rPr>
-              <a:t>个人平台，先改变事业者</a:t>
+              <a:t>艾护理对着这个人说</a:t>
             </a:r>
           </a:p>
         </p:txBody>
@@ -10989,8 +11002,8 @@
         </p:nvSpPr>
         <p:spPr>
           <a:xfrm>
-            <a:off x="658368" y="1207008"/>
-            <a:ext cx="3200400" cy="237744"/>
+            <a:off x="658368" y="1170432"/>
+            <a:ext cx="5029200" cy="365760"/>
           </a:xfrm>
           <a:prstGeom prst="rect">
             <a:avLst/>
@@ -11003,7 +11016,7 @@
           <a:p>
             <a:pPr algn="l"/>
             <a:r>
-              <a:rPr sz="1400" b="0" i="0" lang="zh-CN" altLang="en-US">
+              <a:rPr sz="2000" b="0" i="0" lang="zh-CN" altLang="en-US">
                 <a:solidFill>
                   <a:srgbClr val="9E1B1B"/>
                 </a:solidFill>
@@ -11011,7 +11024,7 @@
                 <a:ea typeface="Noto Sans CJK SC Medium"/>
                 <a:cs typeface="Noto Sans CJK SC Medium"/>
               </a:rPr>
-              <a:t>01</a:t>
+              <a:t>放进来</a:t>
             </a:r>
           </a:p>
         </p:txBody>
@@ -11024,8 +11037,8 @@
         </p:nvSpPr>
         <p:spPr>
           <a:xfrm>
-            <a:off x="658368" y="1499616"/>
-            <a:ext cx="3246120" cy="640080"/>
+            <a:off x="6263640" y="1170432"/>
+            <a:ext cx="5120640" cy="365760"/>
           </a:xfrm>
           <a:prstGeom prst="rect">
             <a:avLst/>
@@ -11038,15 +11051,15 @@
           <a:p>
             <a:pPr algn="l"/>
             <a:r>
-              <a:rPr sz="2200" b="0" i="0" lang="zh-CN" altLang="en-US">
-                <a:solidFill>
-                  <a:srgbClr val="141414"/>
+              <a:rPr sz="2000" b="0" i="0" lang="zh-CN" altLang="en-US">
+                <a:solidFill>
+                  <a:srgbClr val="9E1B1B"/>
                 </a:solidFill>
                 <a:latin typeface="Noto Sans CJK SC Medium"/>
                 <a:ea typeface="Noto Sans CJK SC Medium"/>
                 <a:cs typeface="Noto Sans CJK SC Medium"/>
               </a:rPr>
-              <a:t>八个阶段在里面</a:t>
+              <a:t>说出来</a:t>
             </a:r>
           </a:p>
         </p:txBody>
@@ -11059,25 +11072,56 @@
         </p:nvSpPr>
         <p:spPr>
           <a:xfrm>
-            <a:off x="658368" y="2240280"/>
-            <a:ext cx="3246120" cy="1965960"/>
-          </a:xfrm>
-          <a:prstGeom prst="rect">
-            <a:avLst/>
-          </a:prstGeom>
-          <a:noFill/>
-        </p:spPr>
-        <p:txBody>
-          <a:bodyPr wrap="square" anchor="t" lIns="0" rIns="0" tIns="0" bIns="0"/>
-          <a:lstStyle/>
-          <a:p>
-            <a:pPr algn="l">
-              <a:lnSpc>
-                <a:spcPct val="135000"/>
-              </a:lnSpc>
-            </a:pPr>
-            <a:r>
-              <a:rPr sz="1500" b="0" i="0" lang="zh-CN" altLang="en-US">
+            <a:off x="658368" y="1572768"/>
+            <a:ext cx="5029200" cy="274320"/>
+          </a:xfrm>
+          <a:prstGeom prst="rect">
+            <a:avLst/>
+          </a:prstGeom>
+          <a:noFill/>
+        </p:spPr>
+        <p:txBody>
+          <a:bodyPr wrap="square" anchor="t" lIns="0" rIns="0" tIns="0" bIns="0"/>
+          <a:lstStyle/>
+          <a:p>
+            <a:pPr algn="l"/>
+            <a:r>
+              <a:rPr sz="1600" b="0" i="0" lang="zh-CN" altLang="en-US">
+                <a:solidFill>
+                  <a:srgbClr val="141414"/>
+                </a:solidFill>
+                <a:latin typeface="Noto Sans CJK SC Medium"/>
+                <a:ea typeface="Noto Sans CJK SC Medium"/>
+                <a:cs typeface="Noto Sans CJK SC Medium"/>
+              </a:rPr>
+              <a:t>每餐一张照片</a:t>
+            </a:r>
+          </a:p>
+        </p:txBody>
+      </p:sp>
+      <p:sp>
+        <p:nvSpPr>
+          <p:cNvPr id="8" name="TextBox 7"/>
+          <p:cNvSpPr txBox="1"/>
+          <p:nvPr/>
+        </p:nvSpPr>
+        <p:spPr>
+          <a:xfrm>
+            <a:off x="658368" y="1847088"/>
+            <a:ext cx="5029200" cy="384048"/>
+          </a:xfrm>
+          <a:prstGeom prst="rect">
+            <a:avLst/>
+          </a:prstGeom>
+          <a:noFill/>
+        </p:spPr>
+        <p:txBody>
+          <a:bodyPr wrap="square" anchor="t" lIns="0" rIns="0" tIns="0" bIns="0"/>
+          <a:lstStyle/>
+          <a:p>
+            <a:pPr algn="l"/>
+            <a:r>
+              <a:rPr sz="1400" b="0" i="0" lang="zh-CN" altLang="en-US">
                 <a:solidFill>
                   <a:srgbClr val="2C2C2C"/>
                 </a:solidFill>
@@ -11085,25 +11129,511 @@
                 <a:ea typeface="Noto Sans CJK SC"/>
                 <a:cs typeface="Noto Sans CJK SC"/>
               </a:rPr>
-              <a:t>产品懂得多少，
-八个阶段走到哪一步，
-下一步学什么，都在里面。
-中国法人做成中文的路径。
-人不用等一场酒店课。</a:t>
-            </a:r>
-          </a:p>
-        </p:txBody>
-      </p:sp>
-      <p:sp>
-        <p:nvSpPr>
-          <p:cNvPr id="8" name="Rectangle 7"/>
+              <a:t>碳水、蛋白、脂肪，白米还是玄米，蔬菜和纤维有多少。</a:t>
+            </a:r>
+          </a:p>
+        </p:txBody>
+      </p:sp>
+      <p:sp>
+        <p:nvSpPr>
+          <p:cNvPr id="9" name="TextBox 8"/>
+          <p:cNvSpPr txBox="1"/>
+          <p:nvPr/>
+        </p:nvSpPr>
+        <p:spPr>
+          <a:xfrm>
+            <a:off x="658368" y="2267712"/>
+            <a:ext cx="5029200" cy="274320"/>
+          </a:xfrm>
+          <a:prstGeom prst="rect">
+            <a:avLst/>
+          </a:prstGeom>
+          <a:noFill/>
+        </p:spPr>
+        <p:txBody>
+          <a:bodyPr wrap="square" anchor="t" lIns="0" rIns="0" tIns="0" bIns="0"/>
+          <a:lstStyle/>
+          <a:p>
+            <a:pPr algn="l"/>
+            <a:r>
+              <a:rPr sz="1600" b="0" i="0" lang="zh-CN" altLang="en-US">
+                <a:solidFill>
+                  <a:srgbClr val="141414"/>
+                </a:solidFill>
+                <a:latin typeface="Noto Sans CJK SC Medium"/>
+                <a:ea typeface="Noto Sans CJK SC Medium"/>
+                <a:cs typeface="Noto Sans CJK SC Medium"/>
+              </a:rPr>
+              <a:t>身高、体重、步数</a:t>
+            </a:r>
+          </a:p>
+        </p:txBody>
+      </p:sp>
+      <p:sp>
+        <p:nvSpPr>
+          <p:cNvPr id="10" name="TextBox 9"/>
+          <p:cNvSpPr txBox="1"/>
+          <p:nvPr/>
+        </p:nvSpPr>
+        <p:spPr>
+          <a:xfrm>
+            <a:off x="658368" y="2542032"/>
+            <a:ext cx="5029200" cy="384048"/>
+          </a:xfrm>
+          <a:prstGeom prst="rect">
+            <a:avLst/>
+          </a:prstGeom>
+          <a:noFill/>
+        </p:spPr>
+        <p:txBody>
+          <a:bodyPr wrap="square" anchor="t" lIns="0" rIns="0" tIns="0" bIns="0"/>
+          <a:lstStyle/>
+          <a:p>
+            <a:pPr algn="l"/>
+            <a:r>
+              <a:rPr sz="1400" b="0" i="0" lang="zh-CN" altLang="en-US">
+                <a:solidFill>
+                  <a:srgbClr val="2C2C2C"/>
+                </a:solidFill>
+                <a:latin typeface="Noto Sans CJK SC"/>
+                <a:ea typeface="Noto Sans CJK SC"/>
+                <a:cs typeface="Noto Sans CJK SC"/>
+              </a:rPr>
+              <a:t>肥胖还是肌肉，活动够不够。步数从手机接进来。</a:t>
+            </a:r>
+          </a:p>
+        </p:txBody>
+      </p:sp>
+      <p:sp>
+        <p:nvSpPr>
+          <p:cNvPr id="11" name="TextBox 10"/>
+          <p:cNvSpPr txBox="1"/>
+          <p:nvPr/>
+        </p:nvSpPr>
+        <p:spPr>
+          <a:xfrm>
+            <a:off x="658368" y="2962656"/>
+            <a:ext cx="5029200" cy="274320"/>
+          </a:xfrm>
+          <a:prstGeom prst="rect">
+            <a:avLst/>
+          </a:prstGeom>
+          <a:noFill/>
+        </p:spPr>
+        <p:txBody>
+          <a:bodyPr wrap="square" anchor="t" lIns="0" rIns="0" tIns="0" bIns="0"/>
+          <a:lstStyle/>
+          <a:p>
+            <a:pPr algn="l"/>
+            <a:r>
+              <a:rPr sz="1600" b="0" i="0" lang="zh-CN" altLang="en-US">
+                <a:solidFill>
+                  <a:srgbClr val="141414"/>
+                </a:solidFill>
+                <a:latin typeface="Noto Sans CJK SC Medium"/>
+                <a:ea typeface="Noto Sans CJK SC Medium"/>
+                <a:cs typeface="Noto Sans CJK SC Medium"/>
+              </a:rPr>
+              <a:t>用药和注射</a:t>
+            </a:r>
+          </a:p>
+        </p:txBody>
+      </p:sp>
+      <p:sp>
+        <p:nvSpPr>
+          <p:cNvPr id="12" name="TextBox 11"/>
+          <p:cNvSpPr txBox="1"/>
+          <p:nvPr/>
+        </p:nvSpPr>
+        <p:spPr>
+          <a:xfrm>
+            <a:off x="658368" y="3236976"/>
+            <a:ext cx="5029200" cy="384048"/>
+          </a:xfrm>
+          <a:prstGeom prst="rect">
+            <a:avLst/>
+          </a:prstGeom>
+          <a:noFill/>
+        </p:spPr>
+        <p:txBody>
+          <a:bodyPr wrap="square" anchor="t" lIns="0" rIns="0" tIns="0" bIns="0"/>
+          <a:lstStyle/>
+          <a:p>
+            <a:pPr algn="l"/>
+            <a:r>
+              <a:rPr sz="1400" b="0" i="0" lang="zh-CN" altLang="en-US">
+                <a:solidFill>
+                  <a:srgbClr val="2C2C2C"/>
+                </a:solidFill>
+                <a:latin typeface="Noto Sans CJK SC"/>
+                <a:ea typeface="Noto Sans CJK SC"/>
+                <a:cs typeface="Noto Sans CJK SC"/>
+              </a:rPr>
+              <a:t>代谢顺不顺，有连续记录才说得清。</a:t>
+            </a:r>
+          </a:p>
+        </p:txBody>
+      </p:sp>
+      <p:sp>
+        <p:nvSpPr>
+          <p:cNvPr id="13" name="TextBox 12"/>
+          <p:cNvSpPr txBox="1"/>
+          <p:nvPr/>
+        </p:nvSpPr>
+        <p:spPr>
+          <a:xfrm>
+            <a:off x="658368" y="3657600"/>
+            <a:ext cx="5029200" cy="274320"/>
+          </a:xfrm>
+          <a:prstGeom prst="rect">
+            <a:avLst/>
+          </a:prstGeom>
+          <a:noFill/>
+        </p:spPr>
+        <p:txBody>
+          <a:bodyPr wrap="square" anchor="t" lIns="0" rIns="0" tIns="0" bIns="0"/>
+          <a:lstStyle/>
+          <a:p>
+            <a:pPr algn="l"/>
+            <a:r>
+              <a:rPr sz="1600" b="0" i="0" lang="zh-CN" altLang="en-US">
+                <a:solidFill>
+                  <a:srgbClr val="141414"/>
+                </a:solidFill>
+                <a:latin typeface="Noto Sans CJK SC Medium"/>
+                <a:ea typeface="Noto Sans CJK SC Medium"/>
+                <a:cs typeface="Noto Sans CJK SC Medium"/>
+              </a:rPr>
+              <a:t>血和尿可以后补</a:t>
+            </a:r>
+          </a:p>
+        </p:txBody>
+      </p:sp>
+      <p:sp>
+        <p:nvSpPr>
+          <p:cNvPr id="14" name="TextBox 13"/>
+          <p:cNvSpPr txBox="1"/>
+          <p:nvPr/>
+        </p:nvSpPr>
+        <p:spPr>
+          <a:xfrm>
+            <a:off x="658368" y="3931920"/>
+            <a:ext cx="5029200" cy="384048"/>
+          </a:xfrm>
+          <a:prstGeom prst="rect">
+            <a:avLst/>
+          </a:prstGeom>
+          <a:noFill/>
+        </p:spPr>
+        <p:txBody>
+          <a:bodyPr wrap="square" anchor="t" lIns="0" rIns="0" tIns="0" bIns="0"/>
+          <a:lstStyle/>
+          <a:p>
+            <a:pPr algn="l"/>
+            <a:r>
+              <a:rPr sz="1400" b="0" i="0" lang="zh-CN" altLang="en-US">
+                <a:solidFill>
+                  <a:srgbClr val="2C2C2C"/>
+                </a:solidFill>
+                <a:latin typeface="Noto Sans CJK SC"/>
+                <a:ea typeface="Noto Sans CJK SC"/>
+                <a:cs typeface="Noto Sans CJK SC"/>
+              </a:rPr>
+              <a:t>上面这些先每天跑起来。不必等一座医院。</a:t>
+            </a:r>
+          </a:p>
+        </p:txBody>
+      </p:sp>
+      <p:sp>
+        <p:nvSpPr>
+          <p:cNvPr id="15" name="TextBox 14"/>
+          <p:cNvSpPr txBox="1"/>
+          <p:nvPr/>
+        </p:nvSpPr>
+        <p:spPr>
+          <a:xfrm>
+            <a:off x="6263640" y="1572768"/>
+            <a:ext cx="5120640" cy="274320"/>
+          </a:xfrm>
+          <a:prstGeom prst="rect">
+            <a:avLst/>
+          </a:prstGeom>
+          <a:noFill/>
+        </p:spPr>
+        <p:txBody>
+          <a:bodyPr wrap="square" anchor="t" lIns="0" rIns="0" tIns="0" bIns="0"/>
+          <a:lstStyle/>
+          <a:p>
+            <a:pPr algn="l"/>
+            <a:r>
+              <a:rPr sz="1600" b="0" i="0" lang="zh-CN" altLang="en-US">
+                <a:solidFill>
+                  <a:srgbClr val="141414"/>
+                </a:solidFill>
+                <a:latin typeface="Noto Sans CJK SC Medium"/>
+                <a:ea typeface="Noto Sans CJK SC Medium"/>
+                <a:cs typeface="Noto Sans CJK SC Medium"/>
+              </a:rPr>
+              <a:t>该减，还是该补</a:t>
+            </a:r>
+          </a:p>
+        </p:txBody>
+      </p:sp>
+      <p:sp>
+        <p:nvSpPr>
+          <p:cNvPr id="16" name="TextBox 15"/>
+          <p:cNvSpPr txBox="1"/>
+          <p:nvPr/>
+        </p:nvSpPr>
+        <p:spPr>
+          <a:xfrm>
+            <a:off x="6263640" y="1847088"/>
+            <a:ext cx="5120640" cy="384048"/>
+          </a:xfrm>
+          <a:prstGeom prst="rect">
+            <a:avLst/>
+          </a:prstGeom>
+          <a:noFill/>
+        </p:spPr>
+        <p:txBody>
+          <a:bodyPr wrap="square" anchor="t" lIns="0" rIns="0" tIns="0" bIns="0"/>
+          <a:lstStyle/>
+          <a:p>
+            <a:pPr algn="l"/>
+            <a:r>
+              <a:rPr sz="1400" b="0" i="0" lang="zh-CN" altLang="en-US">
+                <a:solidFill>
+                  <a:srgbClr val="2C2C2C"/>
+                </a:solidFill>
+                <a:latin typeface="Noto Sans CJK SC"/>
+                <a:ea typeface="Noto Sans CJK SC"/>
+                <a:cs typeface="Noto Sans CJK SC"/>
+              </a:rPr>
+              <a:t>减碳水，补蛋白；吃多了；或只吃精制，碳水其实不够。</a:t>
+            </a:r>
+          </a:p>
+        </p:txBody>
+      </p:sp>
+      <p:sp>
+        <p:nvSpPr>
+          <p:cNvPr id="17" name="TextBox 16"/>
+          <p:cNvSpPr txBox="1"/>
+          <p:nvPr/>
+        </p:nvSpPr>
+        <p:spPr>
+          <a:xfrm>
+            <a:off x="6263640" y="2267712"/>
+            <a:ext cx="5120640" cy="274320"/>
+          </a:xfrm>
+          <a:prstGeom prst="rect">
+            <a:avLst/>
+          </a:prstGeom>
+          <a:noFill/>
+        </p:spPr>
+        <p:txBody>
+          <a:bodyPr wrap="square" anchor="t" lIns="0" rIns="0" tIns="0" bIns="0"/>
+          <a:lstStyle/>
+          <a:p>
+            <a:pPr algn="l"/>
+            <a:r>
+              <a:rPr sz="1600" b="0" i="0" lang="zh-CN" altLang="en-US">
+                <a:solidFill>
+                  <a:srgbClr val="141414"/>
+                </a:solidFill>
+                <a:latin typeface="Noto Sans CJK SC Medium"/>
+                <a:ea typeface="Noto Sans CJK SC Medium"/>
+                <a:cs typeface="Noto Sans CJK SC Medium"/>
+              </a:rPr>
+              <a:t>一年、五年、十年</a:t>
+            </a:r>
+          </a:p>
+        </p:txBody>
+      </p:sp>
+      <p:sp>
+        <p:nvSpPr>
+          <p:cNvPr id="18" name="TextBox 17"/>
+          <p:cNvSpPr txBox="1"/>
+          <p:nvPr/>
+        </p:nvSpPr>
+        <p:spPr>
+          <a:xfrm>
+            <a:off x="6263640" y="2542032"/>
+            <a:ext cx="5120640" cy="384048"/>
+          </a:xfrm>
+          <a:prstGeom prst="rect">
+            <a:avLst/>
+          </a:prstGeom>
+          <a:noFill/>
+        </p:spPr>
+        <p:txBody>
+          <a:bodyPr wrap="square" anchor="t" lIns="0" rIns="0" tIns="0" bIns="0"/>
+          <a:lstStyle/>
+          <a:p>
+            <a:pPr algn="l"/>
+            <a:r>
+              <a:rPr sz="1400" b="0" i="0" lang="zh-CN" altLang="en-US">
+                <a:solidFill>
+                  <a:srgbClr val="2C2C2C"/>
+                </a:solidFill>
+                <a:latin typeface="Noto Sans CJK SC"/>
+                <a:ea typeface="Noto Sans CJK SC"/>
+                <a:cs typeface="Noto Sans CJK SC"/>
+              </a:rPr>
+              <a:t>照这样下去，身体可以估。家族里带下来的病要能看见。</a:t>
+            </a:r>
+          </a:p>
+        </p:txBody>
+      </p:sp>
+      <p:sp>
+        <p:nvSpPr>
+          <p:cNvPr id="19" name="TextBox 18"/>
+          <p:cNvSpPr txBox="1"/>
+          <p:nvPr/>
+        </p:nvSpPr>
+        <p:spPr>
+          <a:xfrm>
+            <a:off x="6263640" y="2962656"/>
+            <a:ext cx="5120640" cy="274320"/>
+          </a:xfrm>
+          <a:prstGeom prst="rect">
+            <a:avLst/>
+          </a:prstGeom>
+          <a:noFill/>
+        </p:spPr>
+        <p:txBody>
+          <a:bodyPr wrap="square" anchor="t" lIns="0" rIns="0" tIns="0" bIns="0"/>
+          <a:lstStyle/>
+          <a:p>
+            <a:pPr algn="l"/>
+            <a:r>
+              <a:rPr sz="1600" b="0" i="0" lang="zh-CN" altLang="en-US">
+                <a:solidFill>
+                  <a:srgbClr val="141414"/>
+                </a:solidFill>
+                <a:latin typeface="Noto Sans CJK SC Medium"/>
+                <a:ea typeface="Noto Sans CJK SC Medium"/>
+                <a:cs typeface="Noto Sans CJK SC Medium"/>
+              </a:rPr>
+              <a:t>缺哪个功能</a:t>
+            </a:r>
+          </a:p>
+        </p:txBody>
+      </p:sp>
+      <p:sp>
+        <p:nvSpPr>
+          <p:cNvPr id="20" name="TextBox 19"/>
+          <p:cNvSpPr txBox="1"/>
+          <p:nvPr/>
+        </p:nvSpPr>
+        <p:spPr>
+          <a:xfrm>
+            <a:off x="6263640" y="3236976"/>
+            <a:ext cx="5120640" cy="384048"/>
+          </a:xfrm>
+          <a:prstGeom prst="rect">
+            <a:avLst/>
+          </a:prstGeom>
+          <a:noFill/>
+        </p:spPr>
+        <p:txBody>
+          <a:bodyPr wrap="square" anchor="t" lIns="0" rIns="0" tIns="0" bIns="0"/>
+          <a:lstStyle/>
+          <a:p>
+            <a:pPr algn="l"/>
+            <a:r>
+              <a:rPr sz="1400" b="0" i="0" lang="zh-CN" altLang="en-US">
+                <a:solidFill>
+                  <a:srgbClr val="2C2C2C"/>
+                </a:solidFill>
+                <a:latin typeface="Noto Sans CJK SC"/>
+                <a:ea typeface="Noto Sans CJK SC"/>
+                <a:cs typeface="Noto Sans CJK SC"/>
+              </a:rPr>
+              <a:t>一能一品：先说缺哪个功能，那一个产品跟着定。</a:t>
+            </a:r>
+          </a:p>
+        </p:txBody>
+      </p:sp>
+      <p:sp>
+        <p:nvSpPr>
+          <p:cNvPr id="21" name="TextBox 20"/>
+          <p:cNvSpPr txBox="1"/>
+          <p:nvPr/>
+        </p:nvSpPr>
+        <p:spPr>
+          <a:xfrm>
+            <a:off x="6263640" y="3657600"/>
+            <a:ext cx="5120640" cy="274320"/>
+          </a:xfrm>
+          <a:prstGeom prst="rect">
+            <a:avLst/>
+          </a:prstGeom>
+          <a:noFill/>
+        </p:spPr>
+        <p:txBody>
+          <a:bodyPr wrap="square" anchor="t" lIns="0" rIns="0" tIns="0" bIns="0"/>
+          <a:lstStyle/>
+          <a:p>
+            <a:pPr algn="l"/>
+            <a:r>
+              <a:rPr sz="1600" b="0" i="0" lang="zh-CN" altLang="en-US">
+                <a:solidFill>
+                  <a:srgbClr val="141414"/>
+                </a:solidFill>
+                <a:latin typeface="Noto Sans CJK SC Medium"/>
+                <a:ea typeface="Noto Sans CJK SC Medium"/>
+                <a:cs typeface="Noto Sans CJK SC Medium"/>
+              </a:rPr>
+              <a:t>先进入艾护理</a:t>
+            </a:r>
+          </a:p>
+        </p:txBody>
+      </p:sp>
+      <p:sp>
+        <p:nvSpPr>
+          <p:cNvPr id="22" name="TextBox 21"/>
+          <p:cNvSpPr txBox="1"/>
+          <p:nvPr/>
+        </p:nvSpPr>
+        <p:spPr>
+          <a:xfrm>
+            <a:off x="6263640" y="3931920"/>
+            <a:ext cx="5120640" cy="384048"/>
+          </a:xfrm>
+          <a:prstGeom prst="rect">
+            <a:avLst/>
+          </a:prstGeom>
+          <a:noFill/>
+        </p:spPr>
+        <p:txBody>
+          <a:bodyPr wrap="square" anchor="t" lIns="0" rIns="0" tIns="0" bIns="0"/>
+          <a:lstStyle/>
+          <a:p>
+            <a:pPr algn="l"/>
+            <a:r>
+              <a:rPr sz="1400" b="0" i="0" lang="zh-CN" altLang="en-US">
+                <a:solidFill>
+                  <a:srgbClr val="2C2C2C"/>
+                </a:solidFill>
+                <a:latin typeface="Noto Sans CJK SC"/>
+                <a:ea typeface="Noto Sans CJK SC"/>
+                <a:cs typeface="Noto Sans CJK SC"/>
+              </a:rPr>
+              <a:t>介绍别人，先把对方的记录建起来，再谈产品。</a:t>
+            </a:r>
+          </a:p>
+        </p:txBody>
+      </p:sp>
+      <p:sp>
+        <p:nvSpPr>
+          <p:cNvPr id="23" name="Rectangle 22"/>
           <p:cNvSpPr/>
           <p:nvPr/>
         </p:nvSpPr>
         <p:spPr>
           <a:xfrm>
-            <a:off x="4160520" y="1207008"/>
-            <a:ext cx="10972" cy="3063240"/>
+            <a:off x="5897880" y="1170432"/>
+            <a:ext cx="10972" cy="3200400"/>
           </a:xfrm>
           <a:prstGeom prst="rect">
             <a:avLst/>
@@ -11139,127 +11669,14 @@
       </p:sp>
       <p:sp>
         <p:nvSpPr>
-          <p:cNvPr id="9" name="TextBox 8"/>
-          <p:cNvSpPr txBox="1"/>
-          <p:nvPr/>
-        </p:nvSpPr>
-        <p:spPr>
-          <a:xfrm>
-            <a:off x="4361688" y="1207008"/>
-            <a:ext cx="3200400" cy="237744"/>
-          </a:xfrm>
-          <a:prstGeom prst="rect">
-            <a:avLst/>
-          </a:prstGeom>
-          <a:noFill/>
-        </p:spPr>
-        <p:txBody>
-          <a:bodyPr wrap="square" anchor="t" lIns="0" rIns="0" tIns="0" bIns="0"/>
-          <a:lstStyle/>
-          <a:p>
-            <a:pPr algn="l"/>
-            <a:r>
-              <a:rPr sz="1400" b="0" i="0" lang="zh-CN" altLang="en-US">
-                <a:solidFill>
-                  <a:srgbClr val="9E1B1B"/>
-                </a:solidFill>
-                <a:latin typeface="Noto Sans CJK SC Medium"/>
-                <a:ea typeface="Noto Sans CJK SC Medium"/>
-                <a:cs typeface="Noto Sans CJK SC Medium"/>
-              </a:rPr>
-              <a:t>02</a:t>
-            </a:r>
-          </a:p>
-        </p:txBody>
-      </p:sp>
-      <p:sp>
-        <p:nvSpPr>
-          <p:cNvPr id="10" name="TextBox 9"/>
-          <p:cNvSpPr txBox="1"/>
-          <p:nvPr/>
-        </p:nvSpPr>
-        <p:spPr>
-          <a:xfrm>
-            <a:off x="4361688" y="1499616"/>
-            <a:ext cx="3246120" cy="640080"/>
-          </a:xfrm>
-          <a:prstGeom prst="rect">
-            <a:avLst/>
-          </a:prstGeom>
-          <a:noFill/>
-        </p:spPr>
-        <p:txBody>
-          <a:bodyPr wrap="square" anchor="t" lIns="0" rIns="0" tIns="0" bIns="0"/>
-          <a:lstStyle/>
-          <a:p>
-            <a:pPr algn="l"/>
-            <a:r>
-              <a:rPr sz="2200" b="0" i="0" lang="zh-CN" altLang="en-US">
-                <a:solidFill>
-                  <a:srgbClr val="141414"/>
-                </a:solidFill>
-                <a:latin typeface="Noto Sans CJK SC Medium"/>
-                <a:ea typeface="Noto Sans CJK SC Medium"/>
-                <a:cs typeface="Noto Sans CJK SC Medium"/>
-              </a:rPr>
-              <a:t>一百到二百支骨架</a:t>
-            </a:r>
-          </a:p>
-        </p:txBody>
-      </p:sp>
-      <p:sp>
-        <p:nvSpPr>
-          <p:cNvPr id="11" name="TextBox 10"/>
-          <p:cNvSpPr txBox="1"/>
-          <p:nvPr/>
-        </p:nvSpPr>
-        <p:spPr>
-          <a:xfrm>
-            <a:off x="4361688" y="2240280"/>
-            <a:ext cx="3246120" cy="1965960"/>
-          </a:xfrm>
-          <a:prstGeom prst="rect">
-            <a:avLst/>
-          </a:prstGeom>
-          <a:noFill/>
-        </p:spPr>
-        <p:txBody>
-          <a:bodyPr wrap="square" anchor="t" lIns="0" rIns="0" tIns="0" bIns="0"/>
-          <a:lstStyle/>
-          <a:p>
-            <a:pPr algn="l">
-              <a:lnSpc>
-                <a:spcPct val="135000"/>
-              </a:lnSpc>
-            </a:pPr>
-            <a:r>
-              <a:rPr sz="1500" b="0" i="0" lang="zh-CN" altLang="en-US">
-                <a:solidFill>
-                  <a:srgbClr val="2C2C2C"/>
-                </a:solidFill>
-                <a:latin typeface="Noto Sans CJK SC"/>
-                <a:ea typeface="Noto Sans CJK SC"/>
-                <a:cs typeface="Noto Sans CJK SC"/>
-              </a:rPr>
-              <a:t>到明年年底先打好骨架。
-事业者换成自己的脸、
-自己的讲法。
-一小时收成五分钟。
-说明在这个人的平台上完成。</a:t>
-            </a:r>
-          </a:p>
-        </p:txBody>
-      </p:sp>
-      <p:sp>
-        <p:nvSpPr>
-          <p:cNvPr id="12" name="Rectangle 11"/>
+          <p:cNvPr id="24" name="Rectangle 23"/>
           <p:cNvSpPr/>
           <p:nvPr/>
         </p:nvSpPr>
         <p:spPr>
           <a:xfrm>
-            <a:off x="7863840" y="1207008"/>
-            <a:ext cx="10972" cy="3063240"/>
+            <a:off x="658368" y="4617720"/>
+            <a:ext cx="10881360" cy="10972"/>
           </a:xfrm>
           <a:prstGeom prst="rect">
             <a:avLst/>
@@ -11295,168 +11712,13 @@
       </p:sp>
       <p:sp>
         <p:nvSpPr>
-          <p:cNvPr id="13" name="TextBox 12"/>
-          <p:cNvSpPr txBox="1"/>
-          <p:nvPr/>
-        </p:nvSpPr>
-        <p:spPr>
-          <a:xfrm>
-            <a:off x="8065008" y="1207008"/>
-            <a:ext cx="3200400" cy="237744"/>
-          </a:xfrm>
-          <a:prstGeom prst="rect">
-            <a:avLst/>
-          </a:prstGeom>
-          <a:noFill/>
-        </p:spPr>
-        <p:txBody>
-          <a:bodyPr wrap="square" anchor="t" lIns="0" rIns="0" tIns="0" bIns="0"/>
-          <a:lstStyle/>
-          <a:p>
-            <a:pPr algn="l"/>
-            <a:r>
-              <a:rPr sz="1400" b="0" i="0" lang="zh-CN" altLang="en-US">
-                <a:solidFill>
-                  <a:srgbClr val="9E1B1B"/>
-                </a:solidFill>
-                <a:latin typeface="Noto Sans CJK SC Medium"/>
-                <a:ea typeface="Noto Sans CJK SC Medium"/>
-                <a:cs typeface="Noto Sans CJK SC Medium"/>
-              </a:rPr>
-              <a:t>03</a:t>
-            </a:r>
-          </a:p>
-        </p:txBody>
-      </p:sp>
-      <p:sp>
-        <p:nvSpPr>
-          <p:cNvPr id="14" name="TextBox 13"/>
-          <p:cNvSpPr txBox="1"/>
-          <p:nvPr/>
-        </p:nvSpPr>
-        <p:spPr>
-          <a:xfrm>
-            <a:off x="8065008" y="1499616"/>
-            <a:ext cx="3246120" cy="640080"/>
-          </a:xfrm>
-          <a:prstGeom prst="rect">
-            <a:avLst/>
-          </a:prstGeom>
-          <a:noFill/>
-        </p:spPr>
-        <p:txBody>
-          <a:bodyPr wrap="square" anchor="t" lIns="0" rIns="0" tIns="0" bIns="0"/>
-          <a:lstStyle/>
-          <a:p>
-            <a:pPr algn="l"/>
-            <a:r>
-              <a:rPr sz="2200" b="0" i="0" lang="zh-CN" altLang="en-US">
-                <a:solidFill>
-                  <a:srgbClr val="141414"/>
-                </a:solidFill>
-                <a:latin typeface="Noto Sans CJK SC Medium"/>
-                <a:ea typeface="Noto Sans CJK SC Medium"/>
-                <a:cs typeface="Noto Sans CJK SC Medium"/>
-              </a:rPr>
-              <a:t>主人，不是链接</a:t>
-            </a:r>
-          </a:p>
-        </p:txBody>
-      </p:sp>
-      <p:sp>
-        <p:nvSpPr>
-          <p:cNvPr id="15" name="TextBox 14"/>
-          <p:cNvSpPr txBox="1"/>
-          <p:nvPr/>
-        </p:nvSpPr>
-        <p:spPr>
-          <a:xfrm>
-            <a:off x="8065008" y="2240280"/>
-            <a:ext cx="3246120" cy="1965960"/>
-          </a:xfrm>
-          <a:prstGeom prst="rect">
-            <a:avLst/>
-          </a:prstGeom>
-          <a:noFill/>
-        </p:spPr>
-        <p:txBody>
-          <a:bodyPr wrap="square" anchor="t" lIns="0" rIns="0" tIns="0" bIns="0"/>
-          <a:lstStyle/>
-          <a:p>
-            <a:pPr algn="l">
-              <a:lnSpc>
-                <a:spcPct val="135000"/>
-              </a:lnSpc>
-            </a:pPr>
-            <a:r>
-              <a:rPr sz="1500" b="0" i="0" lang="zh-CN" altLang="en-US">
-                <a:solidFill>
-                  <a:srgbClr val="2C2C2C"/>
-                </a:solidFill>
-                <a:latin typeface="Noto Sans CJK SC"/>
-                <a:ea typeface="Noto Sans CJK SC"/>
-                <a:cs typeface="Noto Sans CJK SC"/>
-              </a:rPr>
-              <a:t>自己的店、健康、教育，
-收在一处。
-顾客进来就知道为什么买。
-平台本身就是人工智能。</a:t>
-            </a:r>
-          </a:p>
-        </p:txBody>
-      </p:sp>
-      <p:sp>
-        <p:nvSpPr>
-          <p:cNvPr id="16" name="Rectangle 15"/>
-          <p:cNvSpPr/>
-          <p:nvPr/>
-        </p:nvSpPr>
-        <p:spPr>
-          <a:xfrm>
-            <a:off x="658368" y="4754880"/>
-            <a:ext cx="10881360" cy="10972"/>
-          </a:xfrm>
-          <a:prstGeom prst="rect">
-            <a:avLst/>
-          </a:prstGeom>
-          <a:solidFill>
-            <a:srgbClr val="E2E2E2"/>
-          </a:solidFill>
-          <a:ln>
-            <a:noFill/>
-          </a:ln>
-        </p:spPr>
-        <p:style>
-          <a:lnRef idx="1">
-            <a:schemeClr val="accent1"/>
-          </a:lnRef>
-          <a:fillRef idx="3">
-            <a:schemeClr val="accent1"/>
-          </a:fillRef>
-          <a:effectRef idx="2">
-            <a:schemeClr val="accent1"/>
-          </a:effectRef>
-          <a:fontRef idx="minor">
-            <a:schemeClr val="lt1"/>
-          </a:fontRef>
-        </p:style>
-        <p:txBody>
-          <a:bodyPr rtlCol="0" anchor="ctr"/>
-          <a:lstStyle/>
-          <a:p>
-            <a:pPr algn="ctr"/>
-          </a:p>
-        </p:txBody>
-      </p:sp>
-      <p:sp>
-        <p:nvSpPr>
-          <p:cNvPr id="17" name="TextBox 16"/>
-          <p:cNvSpPr txBox="1"/>
-          <p:nvPr/>
-        </p:nvSpPr>
-        <p:spPr>
-          <a:xfrm>
-            <a:off x="658368" y="4956048"/>
+          <p:cNvPr id="25" name="TextBox 24"/>
+          <p:cNvSpPr txBox="1"/>
+          <p:nvPr/>
+        </p:nvSpPr>
+        <p:spPr>
+          <a:xfrm>
+            <a:off x="658368" y="4773168"/>
             <a:ext cx="10789920" cy="1051560"/>
           </a:xfrm>
           <a:prstGeom prst="rect">
@@ -11474,7 +11736,7 @@
               </a:lnSpc>
             </a:pPr>
             <a:r>
-              <a:rPr sz="2200" b="0" i="0" lang="zh-CN" altLang="en-US">
+              <a:rPr sz="1800" b="0" i="0" lang="zh-CN" altLang="en-US">
                 <a:solidFill>
                   <a:srgbClr val="9E1B1B"/>
                 </a:solidFill>
@@ -11482,15 +11744,15 @@
                 <a:ea typeface="Noto Sans CJK SC Medium"/>
                 <a:cs typeface="Noto Sans CJK SC Medium"/>
               </a:rPr>
-              <a:t>教育的大笔费用在这里消失。
-省下来的，还是那三十五个点。</a:t>
-            </a:r>
-          </a:p>
-        </p:txBody>
-      </p:sp>
-      <p:sp>
-        <p:nvSpPr>
-          <p:cNvPr id="18" name="TextBox 17"/>
+              <a:t>终点是个人健康数据银行。本人同意，隐私守住。
+中国要先定两件：记录存在哪里，哪句话能说。</a:t>
+            </a:r>
+          </a:p>
+        </p:txBody>
+      </p:sp>
+      <p:sp>
+        <p:nvSpPr>
+          <p:cNvPr id="26" name="TextBox 25"/>
           <p:cNvSpPr txBox="1"/>
           <p:nvPr/>
         </p:nvSpPr>
@@ -12091,7 +12353,7 @@
                 <a:ea typeface="Noto Sans CJK SC Medium"/>
                 <a:cs typeface="Noto Sans CJK SC Medium"/>
               </a:rPr>
-              <a:t>艾护理对着这个人说</a:t>
+              <a:t>阿扎让人每天走进来</a:t>
             </a:r>
           </a:p>
         </p:txBody>
@@ -12147,8 +12409,8 @@
         </p:nvSpPr>
         <p:spPr>
           <a:xfrm>
-            <a:off x="658368" y="1170432"/>
-            <a:ext cx="5029200" cy="365760"/>
+            <a:off x="658368" y="1207008"/>
+            <a:ext cx="3200400" cy="237744"/>
           </a:xfrm>
           <a:prstGeom prst="rect">
             <a:avLst/>
@@ -12161,7 +12423,7 @@
           <a:p>
             <a:pPr algn="l"/>
             <a:r>
-              <a:rPr sz="2000" b="0" i="0" lang="zh-CN" altLang="en-US">
+              <a:rPr sz="1400" b="0" i="0" lang="zh-CN" altLang="en-US">
                 <a:solidFill>
                   <a:srgbClr val="9E1B1B"/>
                 </a:solidFill>
@@ -12169,7 +12431,7 @@
                 <a:ea typeface="Noto Sans CJK SC Medium"/>
                 <a:cs typeface="Noto Sans CJK SC Medium"/>
               </a:rPr>
-              <a:t>放进来</a:t>
+              <a:t>01</a:t>
             </a:r>
           </a:p>
         </p:txBody>
@@ -12182,8 +12444,8 @@
         </p:nvSpPr>
         <p:spPr>
           <a:xfrm>
-            <a:off x="6263640" y="1170432"/>
-            <a:ext cx="5120640" cy="365760"/>
+            <a:off x="658368" y="1499616"/>
+            <a:ext cx="3246120" cy="640080"/>
           </a:xfrm>
           <a:prstGeom prst="rect">
             <a:avLst/>
@@ -12196,15 +12458,15 @@
           <a:p>
             <a:pPr algn="l"/>
             <a:r>
-              <a:rPr sz="2000" b="0" i="0" lang="zh-CN" altLang="en-US">
-                <a:solidFill>
-                  <a:srgbClr val="9E1B1B"/>
+              <a:rPr sz="2200" b="0" i="0" lang="zh-CN" altLang="en-US">
+                <a:solidFill>
+                  <a:srgbClr val="141414"/>
                 </a:solidFill>
                 <a:latin typeface="Noto Sans CJK SC Medium"/>
                 <a:ea typeface="Noto Sans CJK SC Medium"/>
                 <a:cs typeface="Noto Sans CJK SC Medium"/>
               </a:rPr>
-              <a:t>说出来</a:t>
+              <a:t>十万个，不赚一百兆</a:t>
             </a:r>
           </a:p>
         </p:txBody>
@@ -12217,56 +12479,25 @@
         </p:nvSpPr>
         <p:spPr>
           <a:xfrm>
-            <a:off x="658368" y="1572768"/>
-            <a:ext cx="5029200" cy="274320"/>
-          </a:xfrm>
-          <a:prstGeom prst="rect">
-            <a:avLst/>
-          </a:prstGeom>
-          <a:noFill/>
-        </p:spPr>
-        <p:txBody>
-          <a:bodyPr wrap="square" anchor="t" lIns="0" rIns="0" tIns="0" bIns="0"/>
-          <a:lstStyle/>
-          <a:p>
-            <a:pPr algn="l"/>
-            <a:r>
-              <a:rPr sz="1600" b="0" i="0" lang="zh-CN" altLang="en-US">
-                <a:solidFill>
-                  <a:srgbClr val="141414"/>
-                </a:solidFill>
-                <a:latin typeface="Noto Sans CJK SC Medium"/>
-                <a:ea typeface="Noto Sans CJK SC Medium"/>
-                <a:cs typeface="Noto Sans CJK SC Medium"/>
-              </a:rPr>
-              <a:t>每餐一张照片</a:t>
-            </a:r>
-          </a:p>
-        </p:txBody>
-      </p:sp>
-      <p:sp>
-        <p:nvSpPr>
-          <p:cNvPr id="8" name="TextBox 7"/>
-          <p:cNvSpPr txBox="1"/>
-          <p:nvPr/>
-        </p:nvSpPr>
-        <p:spPr>
-          <a:xfrm>
-            <a:off x="658368" y="1847088"/>
-            <a:ext cx="5029200" cy="384048"/>
-          </a:xfrm>
-          <a:prstGeom prst="rect">
-            <a:avLst/>
-          </a:prstGeom>
-          <a:noFill/>
-        </p:spPr>
-        <p:txBody>
-          <a:bodyPr wrap="square" anchor="t" lIns="0" rIns="0" tIns="0" bIns="0"/>
-          <a:lstStyle/>
-          <a:p>
-            <a:pPr algn="l"/>
-            <a:r>
-              <a:rPr sz="1400" b="0" i="0" lang="zh-CN" altLang="en-US">
+            <a:off x="658368" y="2240280"/>
+            <a:ext cx="3246120" cy="1965960"/>
+          </a:xfrm>
+          <a:prstGeom prst="rect">
+            <a:avLst/>
+          </a:prstGeom>
+          <a:noFill/>
+        </p:spPr>
+        <p:txBody>
+          <a:bodyPr wrap="square" anchor="t" lIns="0" rIns="0" tIns="0" bIns="0"/>
+          <a:lstStyle/>
+          <a:p>
+            <a:pPr algn="l">
+              <a:lnSpc>
+                <a:spcPct val="135000"/>
+              </a:lnSpc>
+            </a:pPr>
+            <a:r>
+              <a:rPr sz="1500" b="0" i="0" lang="zh-CN" altLang="en-US">
                 <a:solidFill>
                   <a:srgbClr val="2C2C2C"/>
                 </a:solidFill>
@@ -12274,511 +12505,25 @@
                 <a:ea typeface="Noto Sans CJK SC"/>
                 <a:cs typeface="Noto Sans CJK SC"/>
               </a:rPr>
-              <a:t>碳水、蛋白、脂肪，白米还是玄米，蔬菜和纤维有多少。</a:t>
-            </a:r>
-          </a:p>
-        </p:txBody>
-      </p:sp>
-      <p:sp>
-        <p:nvSpPr>
-          <p:cNvPr id="9" name="TextBox 8"/>
-          <p:cNvSpPr txBox="1"/>
-          <p:nvPr/>
-        </p:nvSpPr>
-        <p:spPr>
-          <a:xfrm>
-            <a:off x="658368" y="2267712"/>
-            <a:ext cx="5029200" cy="274320"/>
-          </a:xfrm>
-          <a:prstGeom prst="rect">
-            <a:avLst/>
-          </a:prstGeom>
-          <a:noFill/>
-        </p:spPr>
-        <p:txBody>
-          <a:bodyPr wrap="square" anchor="t" lIns="0" rIns="0" tIns="0" bIns="0"/>
-          <a:lstStyle/>
-          <a:p>
-            <a:pPr algn="l"/>
-            <a:r>
-              <a:rPr sz="1600" b="0" i="0" lang="zh-CN" altLang="en-US">
-                <a:solidFill>
-                  <a:srgbClr val="141414"/>
-                </a:solidFill>
-                <a:latin typeface="Noto Sans CJK SC Medium"/>
-                <a:ea typeface="Noto Sans CJK SC Medium"/>
-                <a:cs typeface="Noto Sans CJK SC Medium"/>
-              </a:rPr>
-              <a:t>身高、体重、步数</a:t>
-            </a:r>
-          </a:p>
-        </p:txBody>
-      </p:sp>
-      <p:sp>
-        <p:nvSpPr>
-          <p:cNvPr id="10" name="TextBox 9"/>
-          <p:cNvSpPr txBox="1"/>
-          <p:nvPr/>
-        </p:nvSpPr>
-        <p:spPr>
-          <a:xfrm>
-            <a:off x="658368" y="2542032"/>
-            <a:ext cx="5029200" cy="384048"/>
-          </a:xfrm>
-          <a:prstGeom prst="rect">
-            <a:avLst/>
-          </a:prstGeom>
-          <a:noFill/>
-        </p:spPr>
-        <p:txBody>
-          <a:bodyPr wrap="square" anchor="t" lIns="0" rIns="0" tIns="0" bIns="0"/>
-          <a:lstStyle/>
-          <a:p>
-            <a:pPr algn="l"/>
-            <a:r>
-              <a:rPr sz="1400" b="0" i="0" lang="zh-CN" altLang="en-US">
-                <a:solidFill>
-                  <a:srgbClr val="2C2C2C"/>
-                </a:solidFill>
-                <a:latin typeface="Noto Sans CJK SC"/>
-                <a:ea typeface="Noto Sans CJK SC"/>
-                <a:cs typeface="Noto Sans CJK SC"/>
-              </a:rPr>
-              <a:t>肥胖还是肌肉，活动够不够。步数从手机接进来。</a:t>
-            </a:r>
-          </a:p>
-        </p:txBody>
-      </p:sp>
-      <p:sp>
-        <p:nvSpPr>
-          <p:cNvPr id="11" name="TextBox 10"/>
-          <p:cNvSpPr txBox="1"/>
-          <p:nvPr/>
-        </p:nvSpPr>
-        <p:spPr>
-          <a:xfrm>
-            <a:off x="658368" y="2962656"/>
-            <a:ext cx="5029200" cy="274320"/>
-          </a:xfrm>
-          <a:prstGeom prst="rect">
-            <a:avLst/>
-          </a:prstGeom>
-          <a:noFill/>
-        </p:spPr>
-        <p:txBody>
-          <a:bodyPr wrap="square" anchor="t" lIns="0" rIns="0" tIns="0" bIns="0"/>
-          <a:lstStyle/>
-          <a:p>
-            <a:pPr algn="l"/>
-            <a:r>
-              <a:rPr sz="1600" b="0" i="0" lang="zh-CN" altLang="en-US">
-                <a:solidFill>
-                  <a:srgbClr val="141414"/>
-                </a:solidFill>
-                <a:latin typeface="Noto Sans CJK SC Medium"/>
-                <a:ea typeface="Noto Sans CJK SC Medium"/>
-                <a:cs typeface="Noto Sans CJK SC Medium"/>
-              </a:rPr>
-              <a:t>用药和注射</a:t>
-            </a:r>
-          </a:p>
-        </p:txBody>
-      </p:sp>
-      <p:sp>
-        <p:nvSpPr>
-          <p:cNvPr id="12" name="TextBox 11"/>
-          <p:cNvSpPr txBox="1"/>
-          <p:nvPr/>
-        </p:nvSpPr>
-        <p:spPr>
-          <a:xfrm>
-            <a:off x="658368" y="3236976"/>
-            <a:ext cx="5029200" cy="384048"/>
-          </a:xfrm>
-          <a:prstGeom prst="rect">
-            <a:avLst/>
-          </a:prstGeom>
-          <a:noFill/>
-        </p:spPr>
-        <p:txBody>
-          <a:bodyPr wrap="square" anchor="t" lIns="0" rIns="0" tIns="0" bIns="0"/>
-          <a:lstStyle/>
-          <a:p>
-            <a:pPr algn="l"/>
-            <a:r>
-              <a:rPr sz="1400" b="0" i="0" lang="zh-CN" altLang="en-US">
-                <a:solidFill>
-                  <a:srgbClr val="2C2C2C"/>
-                </a:solidFill>
-                <a:latin typeface="Noto Sans CJK SC"/>
-                <a:ea typeface="Noto Sans CJK SC"/>
-                <a:cs typeface="Noto Sans CJK SC"/>
-              </a:rPr>
-              <a:t>代谢顺不顺，有连续记录才说得清。</a:t>
-            </a:r>
-          </a:p>
-        </p:txBody>
-      </p:sp>
-      <p:sp>
-        <p:nvSpPr>
-          <p:cNvPr id="13" name="TextBox 12"/>
-          <p:cNvSpPr txBox="1"/>
-          <p:nvPr/>
-        </p:nvSpPr>
-        <p:spPr>
-          <a:xfrm>
-            <a:off x="658368" y="3657600"/>
-            <a:ext cx="5029200" cy="274320"/>
-          </a:xfrm>
-          <a:prstGeom prst="rect">
-            <a:avLst/>
-          </a:prstGeom>
-          <a:noFill/>
-        </p:spPr>
-        <p:txBody>
-          <a:bodyPr wrap="square" anchor="t" lIns="0" rIns="0" tIns="0" bIns="0"/>
-          <a:lstStyle/>
-          <a:p>
-            <a:pPr algn="l"/>
-            <a:r>
-              <a:rPr sz="1600" b="0" i="0" lang="zh-CN" altLang="en-US">
-                <a:solidFill>
-                  <a:srgbClr val="141414"/>
-                </a:solidFill>
-                <a:latin typeface="Noto Sans CJK SC Medium"/>
-                <a:ea typeface="Noto Sans CJK SC Medium"/>
-                <a:cs typeface="Noto Sans CJK SC Medium"/>
-              </a:rPr>
-              <a:t>血和尿可以后补</a:t>
-            </a:r>
-          </a:p>
-        </p:txBody>
-      </p:sp>
-      <p:sp>
-        <p:nvSpPr>
-          <p:cNvPr id="14" name="TextBox 13"/>
-          <p:cNvSpPr txBox="1"/>
-          <p:nvPr/>
-        </p:nvSpPr>
-        <p:spPr>
-          <a:xfrm>
-            <a:off x="658368" y="3931920"/>
-            <a:ext cx="5029200" cy="384048"/>
-          </a:xfrm>
-          <a:prstGeom prst="rect">
-            <a:avLst/>
-          </a:prstGeom>
-          <a:noFill/>
-        </p:spPr>
-        <p:txBody>
-          <a:bodyPr wrap="square" anchor="t" lIns="0" rIns="0" tIns="0" bIns="0"/>
-          <a:lstStyle/>
-          <a:p>
-            <a:pPr algn="l"/>
-            <a:r>
-              <a:rPr sz="1400" b="0" i="0" lang="zh-CN" altLang="en-US">
-                <a:solidFill>
-                  <a:srgbClr val="2C2C2C"/>
-                </a:solidFill>
-                <a:latin typeface="Noto Sans CJK SC"/>
-                <a:ea typeface="Noto Sans CJK SC"/>
-                <a:cs typeface="Noto Sans CJK SC"/>
-              </a:rPr>
-              <a:t>上面这些先每天跑起来。不必等一座医院。</a:t>
-            </a:r>
-          </a:p>
-        </p:txBody>
-      </p:sp>
-      <p:sp>
-        <p:nvSpPr>
-          <p:cNvPr id="15" name="TextBox 14"/>
-          <p:cNvSpPr txBox="1"/>
-          <p:nvPr/>
-        </p:nvSpPr>
-        <p:spPr>
-          <a:xfrm>
-            <a:off x="6263640" y="1572768"/>
-            <a:ext cx="5120640" cy="274320"/>
-          </a:xfrm>
-          <a:prstGeom prst="rect">
-            <a:avLst/>
-          </a:prstGeom>
-          <a:noFill/>
-        </p:spPr>
-        <p:txBody>
-          <a:bodyPr wrap="square" anchor="t" lIns="0" rIns="0" tIns="0" bIns="0"/>
-          <a:lstStyle/>
-          <a:p>
-            <a:pPr algn="l"/>
-            <a:r>
-              <a:rPr sz="1600" b="0" i="0" lang="zh-CN" altLang="en-US">
-                <a:solidFill>
-                  <a:srgbClr val="141414"/>
-                </a:solidFill>
-                <a:latin typeface="Noto Sans CJK SC Medium"/>
-                <a:ea typeface="Noto Sans CJK SC Medium"/>
-                <a:cs typeface="Noto Sans CJK SC Medium"/>
-              </a:rPr>
-              <a:t>该减，还是该补</a:t>
-            </a:r>
-          </a:p>
-        </p:txBody>
-      </p:sp>
-      <p:sp>
-        <p:nvSpPr>
-          <p:cNvPr id="16" name="TextBox 15"/>
-          <p:cNvSpPr txBox="1"/>
-          <p:nvPr/>
-        </p:nvSpPr>
-        <p:spPr>
-          <a:xfrm>
-            <a:off x="6263640" y="1847088"/>
-            <a:ext cx="5120640" cy="384048"/>
-          </a:xfrm>
-          <a:prstGeom prst="rect">
-            <a:avLst/>
-          </a:prstGeom>
-          <a:noFill/>
-        </p:spPr>
-        <p:txBody>
-          <a:bodyPr wrap="square" anchor="t" lIns="0" rIns="0" tIns="0" bIns="0"/>
-          <a:lstStyle/>
-          <a:p>
-            <a:pPr algn="l"/>
-            <a:r>
-              <a:rPr sz="1400" b="0" i="0" lang="zh-CN" altLang="en-US">
-                <a:solidFill>
-                  <a:srgbClr val="2C2C2C"/>
-                </a:solidFill>
-                <a:latin typeface="Noto Sans CJK SC"/>
-                <a:ea typeface="Noto Sans CJK SC"/>
-                <a:cs typeface="Noto Sans CJK SC"/>
-              </a:rPr>
-              <a:t>减碳水，补蛋白；吃多了；或只吃精制，碳水其实不够。</a:t>
-            </a:r>
-          </a:p>
-        </p:txBody>
-      </p:sp>
-      <p:sp>
-        <p:nvSpPr>
-          <p:cNvPr id="17" name="TextBox 16"/>
-          <p:cNvSpPr txBox="1"/>
-          <p:nvPr/>
-        </p:nvSpPr>
-        <p:spPr>
-          <a:xfrm>
-            <a:off x="6263640" y="2267712"/>
-            <a:ext cx="5120640" cy="274320"/>
-          </a:xfrm>
-          <a:prstGeom prst="rect">
-            <a:avLst/>
-          </a:prstGeom>
-          <a:noFill/>
-        </p:spPr>
-        <p:txBody>
-          <a:bodyPr wrap="square" anchor="t" lIns="0" rIns="0" tIns="0" bIns="0"/>
-          <a:lstStyle/>
-          <a:p>
-            <a:pPr algn="l"/>
-            <a:r>
-              <a:rPr sz="1600" b="0" i="0" lang="zh-CN" altLang="en-US">
-                <a:solidFill>
-                  <a:srgbClr val="141414"/>
-                </a:solidFill>
-                <a:latin typeface="Noto Sans CJK SC Medium"/>
-                <a:ea typeface="Noto Sans CJK SC Medium"/>
-                <a:cs typeface="Noto Sans CJK SC Medium"/>
-              </a:rPr>
-              <a:t>一年、五年、十年</a:t>
-            </a:r>
-          </a:p>
-        </p:txBody>
-      </p:sp>
-      <p:sp>
-        <p:nvSpPr>
-          <p:cNvPr id="18" name="TextBox 17"/>
-          <p:cNvSpPr txBox="1"/>
-          <p:nvPr/>
-        </p:nvSpPr>
-        <p:spPr>
-          <a:xfrm>
-            <a:off x="6263640" y="2542032"/>
-            <a:ext cx="5120640" cy="384048"/>
-          </a:xfrm>
-          <a:prstGeom prst="rect">
-            <a:avLst/>
-          </a:prstGeom>
-          <a:noFill/>
-        </p:spPr>
-        <p:txBody>
-          <a:bodyPr wrap="square" anchor="t" lIns="0" rIns="0" tIns="0" bIns="0"/>
-          <a:lstStyle/>
-          <a:p>
-            <a:pPr algn="l"/>
-            <a:r>
-              <a:rPr sz="1400" b="0" i="0" lang="zh-CN" altLang="en-US">
-                <a:solidFill>
-                  <a:srgbClr val="2C2C2C"/>
-                </a:solidFill>
-                <a:latin typeface="Noto Sans CJK SC"/>
-                <a:ea typeface="Noto Sans CJK SC"/>
-                <a:cs typeface="Noto Sans CJK SC"/>
-              </a:rPr>
-              <a:t>照这样下去，身体可以估。家族里带下来的病要能看见。</a:t>
-            </a:r>
-          </a:p>
-        </p:txBody>
-      </p:sp>
-      <p:sp>
-        <p:nvSpPr>
-          <p:cNvPr id="19" name="TextBox 18"/>
-          <p:cNvSpPr txBox="1"/>
-          <p:nvPr/>
-        </p:nvSpPr>
-        <p:spPr>
-          <a:xfrm>
-            <a:off x="6263640" y="2962656"/>
-            <a:ext cx="5120640" cy="274320"/>
-          </a:xfrm>
-          <a:prstGeom prst="rect">
-            <a:avLst/>
-          </a:prstGeom>
-          <a:noFill/>
-        </p:spPr>
-        <p:txBody>
-          <a:bodyPr wrap="square" anchor="t" lIns="0" rIns="0" tIns="0" bIns="0"/>
-          <a:lstStyle/>
-          <a:p>
-            <a:pPr algn="l"/>
-            <a:r>
-              <a:rPr sz="1600" b="0" i="0" lang="zh-CN" altLang="en-US">
-                <a:solidFill>
-                  <a:srgbClr val="141414"/>
-                </a:solidFill>
-                <a:latin typeface="Noto Sans CJK SC Medium"/>
-                <a:ea typeface="Noto Sans CJK SC Medium"/>
-                <a:cs typeface="Noto Sans CJK SC Medium"/>
-              </a:rPr>
-              <a:t>为什么是这一个</a:t>
-            </a:r>
-          </a:p>
-        </p:txBody>
-      </p:sp>
-      <p:sp>
-        <p:nvSpPr>
-          <p:cNvPr id="20" name="TextBox 19"/>
-          <p:cNvSpPr txBox="1"/>
-          <p:nvPr/>
-        </p:nvSpPr>
-        <p:spPr>
-          <a:xfrm>
-            <a:off x="6263640" y="3236976"/>
-            <a:ext cx="5120640" cy="384048"/>
-          </a:xfrm>
-          <a:prstGeom prst="rect">
-            <a:avLst/>
-          </a:prstGeom>
-          <a:noFill/>
-        </p:spPr>
-        <p:txBody>
-          <a:bodyPr wrap="square" anchor="t" lIns="0" rIns="0" tIns="0" bIns="0"/>
-          <a:lstStyle/>
-          <a:p>
-            <a:pPr algn="l"/>
-            <a:r>
-              <a:rPr sz="1400" b="0" i="0" lang="zh-CN" altLang="en-US">
-                <a:solidFill>
-                  <a:srgbClr val="2C2C2C"/>
-                </a:solidFill>
-                <a:latin typeface="Noto Sans CJK SC"/>
-                <a:ea typeface="Noto Sans CJK SC"/>
-                <a:cs typeface="Noto Sans CJK SC"/>
-              </a:rPr>
-              <a:t>水飞蓟不再对所有人说对肝好。这个人的肝，才决定这句话。</a:t>
-            </a:r>
-          </a:p>
-        </p:txBody>
-      </p:sp>
-      <p:sp>
-        <p:nvSpPr>
-          <p:cNvPr id="21" name="TextBox 20"/>
-          <p:cNvSpPr txBox="1"/>
-          <p:nvPr/>
-        </p:nvSpPr>
-        <p:spPr>
-          <a:xfrm>
-            <a:off x="6263640" y="3657600"/>
-            <a:ext cx="5120640" cy="274320"/>
-          </a:xfrm>
-          <a:prstGeom prst="rect">
-            <a:avLst/>
-          </a:prstGeom>
-          <a:noFill/>
-        </p:spPr>
-        <p:txBody>
-          <a:bodyPr wrap="square" anchor="t" lIns="0" rIns="0" tIns="0" bIns="0"/>
-          <a:lstStyle/>
-          <a:p>
-            <a:pPr algn="l"/>
-            <a:r>
-              <a:rPr sz="1600" b="0" i="0" lang="zh-CN" altLang="en-US">
-                <a:solidFill>
-                  <a:srgbClr val="141414"/>
-                </a:solidFill>
-                <a:latin typeface="Noto Sans CJK SC Medium"/>
-                <a:ea typeface="Noto Sans CJK SC Medium"/>
-                <a:cs typeface="Noto Sans CJK SC Medium"/>
-              </a:rPr>
-              <a:t>先进入艾护理</a:t>
-            </a:r>
-          </a:p>
-        </p:txBody>
-      </p:sp>
-      <p:sp>
-        <p:nvSpPr>
-          <p:cNvPr id="22" name="TextBox 21"/>
-          <p:cNvSpPr txBox="1"/>
-          <p:nvPr/>
-        </p:nvSpPr>
-        <p:spPr>
-          <a:xfrm>
-            <a:off x="6263640" y="3931920"/>
-            <a:ext cx="5120640" cy="384048"/>
-          </a:xfrm>
-          <a:prstGeom prst="rect">
-            <a:avLst/>
-          </a:prstGeom>
-          <a:noFill/>
-        </p:spPr>
-        <p:txBody>
-          <a:bodyPr wrap="square" anchor="t" lIns="0" rIns="0" tIns="0" bIns="0"/>
-          <a:lstStyle/>
-          <a:p>
-            <a:pPr algn="l"/>
-            <a:r>
-              <a:rPr sz="1400" b="0" i="0" lang="zh-CN" altLang="en-US">
-                <a:solidFill>
-                  <a:srgbClr val="2C2C2C"/>
-                </a:solidFill>
-                <a:latin typeface="Noto Sans CJK SC"/>
-                <a:ea typeface="Noto Sans CJK SC"/>
-                <a:cs typeface="Noto Sans CJK SC"/>
-              </a:rPr>
-              <a:t>介绍别人，先把对方的记录建起来，再谈产品。</a:t>
-            </a:r>
-          </a:p>
-        </p:txBody>
-      </p:sp>
-      <p:sp>
-        <p:nvSpPr>
-          <p:cNvPr id="23" name="Rectangle 22"/>
+              <a:t>鸡蛋、油、充电接进来。
+一百兆由大约五百个
+主力品目赚。
+阿扎做的是热狗那一件事。
+先接每天都发生的开支。</a:t>
+            </a:r>
+          </a:p>
+        </p:txBody>
+      </p:sp>
+      <p:sp>
+        <p:nvSpPr>
+          <p:cNvPr id="8" name="Rectangle 7"/>
           <p:cNvSpPr/>
           <p:nvPr/>
         </p:nvSpPr>
         <p:spPr>
           <a:xfrm>
-            <a:off x="5897880" y="1170432"/>
-            <a:ext cx="10972" cy="3200400"/>
+            <a:off x="4160520" y="1207008"/>
+            <a:ext cx="10972" cy="3063240"/>
           </a:xfrm>
           <a:prstGeom prst="rect">
             <a:avLst/>
@@ -12814,14 +12559,126 @@
       </p:sp>
       <p:sp>
         <p:nvSpPr>
-          <p:cNvPr id="24" name="Rectangle 23"/>
+          <p:cNvPr id="9" name="TextBox 8"/>
+          <p:cNvSpPr txBox="1"/>
+          <p:nvPr/>
+        </p:nvSpPr>
+        <p:spPr>
+          <a:xfrm>
+            <a:off x="4361688" y="1207008"/>
+            <a:ext cx="3200400" cy="237744"/>
+          </a:xfrm>
+          <a:prstGeom prst="rect">
+            <a:avLst/>
+          </a:prstGeom>
+          <a:noFill/>
+        </p:spPr>
+        <p:txBody>
+          <a:bodyPr wrap="square" anchor="t" lIns="0" rIns="0" tIns="0" bIns="0"/>
+          <a:lstStyle/>
+          <a:p>
+            <a:pPr algn="l"/>
+            <a:r>
+              <a:rPr sz="1400" b="0" i="0" lang="zh-CN" altLang="en-US">
+                <a:solidFill>
+                  <a:srgbClr val="9E1B1B"/>
+                </a:solidFill>
+                <a:latin typeface="Noto Sans CJK SC Medium"/>
+                <a:ea typeface="Noto Sans CJK SC Medium"/>
+                <a:cs typeface="Noto Sans CJK SC Medium"/>
+              </a:rPr>
+              <a:t>02</a:t>
+            </a:r>
+          </a:p>
+        </p:txBody>
+      </p:sp>
+      <p:sp>
+        <p:nvSpPr>
+          <p:cNvPr id="10" name="TextBox 9"/>
+          <p:cNvSpPr txBox="1"/>
+          <p:nvPr/>
+        </p:nvSpPr>
+        <p:spPr>
+          <a:xfrm>
+            <a:off x="4361688" y="1499616"/>
+            <a:ext cx="3246120" cy="640080"/>
+          </a:xfrm>
+          <a:prstGeom prst="rect">
+            <a:avLst/>
+          </a:prstGeom>
+          <a:noFill/>
+        </p:spPr>
+        <p:txBody>
+          <a:bodyPr wrap="square" anchor="t" lIns="0" rIns="0" tIns="0" bIns="0"/>
+          <a:lstStyle/>
+          <a:p>
+            <a:pPr algn="l"/>
+            <a:r>
+              <a:rPr sz="2200" b="0" i="0" lang="zh-CN" altLang="en-US">
+                <a:solidFill>
+                  <a:srgbClr val="141414"/>
+                </a:solidFill>
+                <a:latin typeface="Noto Sans CJK SC Medium"/>
+                <a:ea typeface="Noto Sans CJK SC Medium"/>
+                <a:cs typeface="Noto Sans CJK SC Medium"/>
+              </a:rPr>
+              <a:t>鲭鱼回答不了</a:t>
+            </a:r>
+          </a:p>
+        </p:txBody>
+      </p:sp>
+      <p:sp>
+        <p:nvSpPr>
+          <p:cNvPr id="11" name="TextBox 10"/>
+          <p:cNvSpPr txBox="1"/>
+          <p:nvPr/>
+        </p:nvSpPr>
+        <p:spPr>
+          <a:xfrm>
+            <a:off x="4361688" y="2240280"/>
+            <a:ext cx="3246120" cy="1965960"/>
+          </a:xfrm>
+          <a:prstGeom prst="rect">
+            <a:avLst/>
+          </a:prstGeom>
+          <a:noFill/>
+        </p:spPr>
+        <p:txBody>
+          <a:bodyPr wrap="square" anchor="t" lIns="0" rIns="0" tIns="0" bIns="0"/>
+          <a:lstStyle/>
+          <a:p>
+            <a:pPr algn="l">
+              <a:lnSpc>
+                <a:spcPct val="135000"/>
+              </a:lnSpc>
+            </a:pPr>
+            <a:r>
+              <a:rPr sz="1500" b="0" i="0" lang="zh-CN" altLang="en-US">
+                <a:solidFill>
+                  <a:srgbClr val="2C2C2C"/>
+                </a:solidFill>
+                <a:latin typeface="Noto Sans CJK SC"/>
+                <a:ea typeface="Noto Sans CJK SC"/>
+                <a:cs typeface="Noto Sans CJK SC"/>
+              </a:rPr>
+              <a:t>成本率到七成五的日常品，
+单靠它到不了一百兆。
+它负责人每天来。
+主力品目负责赚。</a:t>
+            </a:r>
+          </a:p>
+        </p:txBody>
+      </p:sp>
+      <p:sp>
+        <p:nvSpPr>
+          <p:cNvPr id="12" name="Rectangle 11"/>
           <p:cNvSpPr/>
           <p:nvPr/>
         </p:nvSpPr>
         <p:spPr>
           <a:xfrm>
-            <a:off x="658368" y="4617720"/>
-            <a:ext cx="10881360" cy="10972"/>
+            <a:off x="7863840" y="1207008"/>
+            <a:ext cx="10972" cy="3063240"/>
           </a:xfrm>
           <a:prstGeom prst="rect">
             <a:avLst/>
@@ -12857,13 +12714,169 @@
       </p:sp>
       <p:sp>
         <p:nvSpPr>
-          <p:cNvPr id="25" name="TextBox 24"/>
-          <p:cNvSpPr txBox="1"/>
-          <p:nvPr/>
-        </p:nvSpPr>
-        <p:spPr>
-          <a:xfrm>
-            <a:off x="658368" y="4773168"/>
+          <p:cNvPr id="13" name="TextBox 12"/>
+          <p:cNvSpPr txBox="1"/>
+          <p:nvPr/>
+        </p:nvSpPr>
+        <p:spPr>
+          <a:xfrm>
+            <a:off x="8065008" y="1207008"/>
+            <a:ext cx="3200400" cy="237744"/>
+          </a:xfrm>
+          <a:prstGeom prst="rect">
+            <a:avLst/>
+          </a:prstGeom>
+          <a:noFill/>
+        </p:spPr>
+        <p:txBody>
+          <a:bodyPr wrap="square" anchor="t" lIns="0" rIns="0" tIns="0" bIns="0"/>
+          <a:lstStyle/>
+          <a:p>
+            <a:pPr algn="l"/>
+            <a:r>
+              <a:rPr sz="1400" b="0" i="0" lang="zh-CN" altLang="en-US">
+                <a:solidFill>
+                  <a:srgbClr val="9E1B1B"/>
+                </a:solidFill>
+                <a:latin typeface="Noto Sans CJK SC Medium"/>
+                <a:ea typeface="Noto Sans CJK SC Medium"/>
+                <a:cs typeface="Noto Sans CJK SC Medium"/>
+              </a:rPr>
+              <a:t>03</a:t>
+            </a:r>
+          </a:p>
+        </p:txBody>
+      </p:sp>
+      <p:sp>
+        <p:nvSpPr>
+          <p:cNvPr id="14" name="TextBox 13"/>
+          <p:cNvSpPr txBox="1"/>
+          <p:nvPr/>
+        </p:nvSpPr>
+        <p:spPr>
+          <a:xfrm>
+            <a:off x="8065008" y="1499616"/>
+            <a:ext cx="3246120" cy="640080"/>
+          </a:xfrm>
+          <a:prstGeom prst="rect">
+            <a:avLst/>
+          </a:prstGeom>
+          <a:noFill/>
+        </p:spPr>
+        <p:txBody>
+          <a:bodyPr wrap="square" anchor="t" lIns="0" rIns="0" tIns="0" bIns="0"/>
+          <a:lstStyle/>
+          <a:p>
+            <a:pPr algn="l"/>
+            <a:r>
+              <a:rPr sz="2200" b="0" i="0" lang="zh-CN" altLang="en-US">
+                <a:solidFill>
+                  <a:srgbClr val="141414"/>
+                </a:solidFill>
+                <a:latin typeface="Noto Sans CJK SC Medium"/>
+                <a:ea typeface="Noto Sans CJK SC Medium"/>
+                <a:cs typeface="Noto Sans CJK SC Medium"/>
+              </a:rPr>
+              <a:t>电，先定哪张卡</a:t>
+            </a:r>
+          </a:p>
+        </p:txBody>
+      </p:sp>
+      <p:sp>
+        <p:nvSpPr>
+          <p:cNvPr id="15" name="TextBox 14"/>
+          <p:cNvSpPr txBox="1"/>
+          <p:nvPr/>
+        </p:nvSpPr>
+        <p:spPr>
+          <a:xfrm>
+            <a:off x="8065008" y="2240280"/>
+            <a:ext cx="3246120" cy="1965960"/>
+          </a:xfrm>
+          <a:prstGeom prst="rect">
+            <a:avLst/>
+          </a:prstGeom>
+          <a:noFill/>
+        </p:spPr>
+        <p:txBody>
+          <a:bodyPr wrap="square" anchor="t" lIns="0" rIns="0" tIns="0" bIns="0"/>
+          <a:lstStyle/>
+          <a:p>
+            <a:pPr algn="l">
+              <a:lnSpc>
+                <a:spcPct val="135000"/>
+              </a:lnSpc>
+            </a:pPr>
+            <a:r>
+              <a:rPr sz="1500" b="0" i="0" lang="zh-CN" altLang="en-US">
+                <a:solidFill>
+                  <a:srgbClr val="2C2C2C"/>
+                </a:solidFill>
+                <a:latin typeface="Noto Sans CJK SC"/>
+                <a:ea typeface="Noto Sans CJK SC"/>
+                <a:cs typeface="Noto Sans CJK SC"/>
+              </a:rPr>
+              <a:t>不卖加油券，
+走联名卡积分。
+中国电动车多。
+用哪张卡、哪张充电网，
+先定。能累积，再对会员说。</a:t>
+            </a:r>
+          </a:p>
+        </p:txBody>
+      </p:sp>
+      <p:sp>
+        <p:nvSpPr>
+          <p:cNvPr id="16" name="Rectangle 15"/>
+          <p:cNvSpPr/>
+          <p:nvPr/>
+        </p:nvSpPr>
+        <p:spPr>
+          <a:xfrm>
+            <a:off x="658368" y="4754880"/>
+            <a:ext cx="10881360" cy="10972"/>
+          </a:xfrm>
+          <a:prstGeom prst="rect">
+            <a:avLst/>
+          </a:prstGeom>
+          <a:solidFill>
+            <a:srgbClr val="E2E2E2"/>
+          </a:solidFill>
+          <a:ln>
+            <a:noFill/>
+          </a:ln>
+        </p:spPr>
+        <p:style>
+          <a:lnRef idx="1">
+            <a:schemeClr val="accent1"/>
+          </a:lnRef>
+          <a:fillRef idx="3">
+            <a:schemeClr val="accent1"/>
+          </a:fillRef>
+          <a:effectRef idx="2">
+            <a:schemeClr val="accent1"/>
+          </a:effectRef>
+          <a:fontRef idx="minor">
+            <a:schemeClr val="lt1"/>
+          </a:fontRef>
+        </p:style>
+        <p:txBody>
+          <a:bodyPr rtlCol="0" anchor="ctr"/>
+          <a:lstStyle/>
+          <a:p>
+            <a:pPr algn="ctr"/>
+          </a:p>
+        </p:txBody>
+      </p:sp>
+      <p:sp>
+        <p:nvSpPr>
+          <p:cNvPr id="17" name="TextBox 16"/>
+          <p:cNvSpPr txBox="1"/>
+          <p:nvPr/>
+        </p:nvSpPr>
+        <p:spPr>
+          <a:xfrm>
+            <a:off x="658368" y="4956048"/>
             <a:ext cx="10789920" cy="1051560"/>
           </a:xfrm>
           <a:prstGeom prst="rect">
@@ -12881,7 +12894,7 @@
               </a:lnSpc>
             </a:pPr>
             <a:r>
-              <a:rPr sz="1800" b="0" i="0" lang="zh-CN" altLang="en-US">
+              <a:rPr sz="2000" b="0" i="0" lang="zh-CN" altLang="en-US">
                 <a:solidFill>
                   <a:srgbClr val="9E1B1B"/>
                 </a:solidFill>
@@ -12889,15 +12902,15 @@
                 <a:ea typeface="Noto Sans CJK SC Medium"/>
                 <a:cs typeface="Noto Sans CJK SC Medium"/>
               </a:rPr>
-              <a:t>终点是个人健康数据银行。本人同意，隐私守住。
-人连续用，下个月那只罐子要排的数才看得见。</a:t>
-            </a:r>
-          </a:p>
-        </p:txBody>
-      </p:sp>
-      <p:sp>
-        <p:nvSpPr>
-          <p:cNvPr id="26" name="TextBox 25"/>
+              <a:t>每天的开支接进同一个平台。
+人每天来，五百个主力的产量才留得住。</a:t>
+            </a:r>
+          </a:p>
+        </p:txBody>
+      </p:sp>
+      <p:sp>
+        <p:nvSpPr>
+          <p:cNvPr id="18" name="TextBox 17"/>
           <p:cNvSpPr txBox="1"/>
           <p:nvPr/>
         </p:nvSpPr>
@@ -13021,7 +13034,7 @@
                 <a:ea typeface="Noto Sans CJK SC Medium"/>
                 <a:cs typeface="Noto Sans CJK SC Medium"/>
               </a:rPr>
-              <a:t>阿扎让人每天走进来</a:t>
+              <a:t>三台是一条线，不是三个栏</a:t>
             </a:r>
           </a:p>
         </p:txBody>
@@ -13078,7 +13091,7 @@
         <p:spPr>
           <a:xfrm>
             <a:off x="658368" y="1207008"/>
-            <a:ext cx="3200400" cy="237744"/>
+            <a:ext cx="2011680" cy="237744"/>
           </a:xfrm>
           <a:prstGeom prst="rect">
             <a:avLst/>
@@ -13113,7 +13126,7 @@
         <p:spPr>
           <a:xfrm>
             <a:off x="658368" y="1499616"/>
-            <a:ext cx="3246120" cy="640080"/>
+            <a:ext cx="2103120" cy="640080"/>
           </a:xfrm>
           <a:prstGeom prst="rect">
             <a:avLst/>
@@ -13126,7 +13139,7 @@
           <a:p>
             <a:pPr algn="l"/>
             <a:r>
-              <a:rPr sz="2200" b="0" i="0" lang="zh-CN" altLang="en-US">
+              <a:rPr sz="2000" b="0" i="0" lang="zh-CN" altLang="en-US">
                 <a:solidFill>
                   <a:srgbClr val="141414"/>
                 </a:solidFill>
@@ -13134,7 +13147,7 @@
                 <a:ea typeface="Noto Sans CJK SC Medium"/>
                 <a:cs typeface="Noto Sans CJK SC Medium"/>
               </a:rPr>
-              <a:t>十万个，不赚一百兆</a:t>
+              <a:t>艾护理建记录</a:t>
             </a:r>
           </a:p>
         </p:txBody>
@@ -13148,7 +13161,7 @@
         <p:spPr>
           <a:xfrm>
             <a:off x="658368" y="2240280"/>
-            <a:ext cx="3246120" cy="1965960"/>
+            <a:ext cx="2103120" cy="2011680"/>
           </a:xfrm>
           <a:prstGeom prst="rect">
             <a:avLst/>
@@ -13165,7 +13178,7 @@
               </a:lnSpc>
             </a:pPr>
             <a:r>
-              <a:rPr sz="1500" b="0" i="0" lang="zh-CN" altLang="en-US">
+              <a:rPr sz="1400" b="0" i="0" lang="zh-CN" altLang="en-US">
                 <a:solidFill>
                   <a:srgbClr val="2C2C2C"/>
                 </a:solidFill>
@@ -13173,11 +13186,10 @@
                 <a:ea typeface="Noto Sans CJK SC"/>
                 <a:cs typeface="Noto Sans CJK SC"/>
               </a:rPr>
-              <a:t>鸡蛋、油、充电接进来。
-一百兆由大约五百个
-主力品目赚。
-阿扎做的是热狗那一件事：
-让人每天打开这个平台。</a:t>
+              <a:t>新人先进来。
+每餐、体型、步数、
+用药。
+记录先每天跑起来。</a:t>
             </a:r>
           </a:p>
         </p:txBody>
@@ -13190,7 +13202,7 @@
         </p:nvSpPr>
         <p:spPr>
           <a:xfrm>
-            <a:off x="4160520" y="1207008"/>
+            <a:off x="2752344" y="1207008"/>
             <a:ext cx="10972" cy="3063240"/>
           </a:xfrm>
           <a:prstGeom prst="rect">
@@ -13233,8 +13245,8 @@
         </p:nvSpPr>
         <p:spPr>
           <a:xfrm>
-            <a:off x="4361688" y="1207008"/>
-            <a:ext cx="3200400" cy="237744"/>
+            <a:off x="2871215" y="1207008"/>
+            <a:ext cx="2011680" cy="237744"/>
           </a:xfrm>
           <a:prstGeom prst="rect">
             <a:avLst/>
@@ -13268,8 +13280,8 @@
         </p:nvSpPr>
         <p:spPr>
           <a:xfrm>
-            <a:off x="4361688" y="1499616"/>
-            <a:ext cx="3246120" cy="640080"/>
+            <a:off x="2871215" y="1499616"/>
+            <a:ext cx="2103120" cy="640080"/>
           </a:xfrm>
           <a:prstGeom prst="rect">
             <a:avLst/>
@@ -13282,7 +13294,7 @@
           <a:p>
             <a:pPr algn="l"/>
             <a:r>
-              <a:rPr sz="2200" b="0" i="0" lang="zh-CN" altLang="en-US">
+              <a:rPr sz="2000" b="0" i="0" lang="zh-CN" altLang="en-US">
                 <a:solidFill>
                   <a:srgbClr val="141414"/>
                 </a:solidFill>
@@ -13290,7 +13302,7 @@
                 <a:ea typeface="Noto Sans CJK SC Medium"/>
                 <a:cs typeface="Noto Sans CJK SC Medium"/>
               </a:rPr>
-              <a:t>鲭鱼回答不了</a:t>
+              <a:t>说缺什么</a:t>
             </a:r>
           </a:p>
         </p:txBody>
@@ -13303,8 +13315,8 @@
         </p:nvSpPr>
         <p:spPr>
           <a:xfrm>
-            <a:off x="4361688" y="2240280"/>
-            <a:ext cx="3246120" cy="1965960"/>
+            <a:off x="2871215" y="2240280"/>
+            <a:ext cx="2103120" cy="2011680"/>
           </a:xfrm>
           <a:prstGeom prst="rect">
             <a:avLst/>
@@ -13321,7 +13333,7 @@
               </a:lnSpc>
             </a:pPr>
             <a:r>
-              <a:rPr sz="1500" b="0" i="0" lang="zh-CN" altLang="en-US">
+              <a:rPr sz="1400" b="0" i="0" lang="zh-CN" altLang="en-US">
                 <a:solidFill>
                   <a:srgbClr val="2C2C2C"/>
                 </a:solidFill>
@@ -13329,10 +13341,10 @@
                 <a:ea typeface="Noto Sans CJK SC"/>
                 <a:cs typeface="Noto Sans CJK SC"/>
               </a:rPr>
-              <a:t>成本率到七成五的日常品，
-单靠它到不了一百兆。
-它负责人每天来。
-主力品目负责赚。</a:t>
+              <a:t>先说这个人
+缺哪个功能。
+一个功能，
+只有一个产品。</a:t>
             </a:r>
           </a:p>
         </p:txBody>
@@ -13345,7 +13357,7 @@
         </p:nvSpPr>
         <p:spPr>
           <a:xfrm>
-            <a:off x="7863840" y="1207008"/>
+            <a:off x="4965192" y="1207008"/>
             <a:ext cx="10972" cy="3063240"/>
           </a:xfrm>
           <a:prstGeom prst="rect">
@@ -13388,8 +13400,8 @@
         </p:nvSpPr>
         <p:spPr>
           <a:xfrm>
-            <a:off x="8065008" y="1207008"/>
-            <a:ext cx="3200400" cy="237744"/>
+            <a:off x="5084064" y="1207008"/>
+            <a:ext cx="2011680" cy="237744"/>
           </a:xfrm>
           <a:prstGeom prst="rect">
             <a:avLst/>
@@ -13423,8 +13435,8 @@
         </p:nvSpPr>
         <p:spPr>
           <a:xfrm>
-            <a:off x="8065008" y="1499616"/>
-            <a:ext cx="3246120" cy="640080"/>
+            <a:off x="5084064" y="1499616"/>
+            <a:ext cx="2103120" cy="640080"/>
           </a:xfrm>
           <a:prstGeom prst="rect">
             <a:avLst/>
@@ -13437,7 +13449,7 @@
           <a:p>
             <a:pPr algn="l"/>
             <a:r>
-              <a:rPr sz="2200" b="0" i="0" lang="zh-CN" altLang="en-US">
+              <a:rPr sz="2000" b="0" i="0" lang="zh-CN" altLang="en-US">
                 <a:solidFill>
                   <a:srgbClr val="141414"/>
                 </a:solidFill>
@@ -13445,7 +13457,7 @@
                 <a:ea typeface="Noto Sans CJK SC Medium"/>
                 <a:cs typeface="Noto Sans CJK SC Medium"/>
               </a:rPr>
-              <a:t>电在规则里累积</a:t>
+              <a:t>那一个</a:t>
             </a:r>
           </a:p>
         </p:txBody>
@@ -13458,8 +13470,8 @@
         </p:nvSpPr>
         <p:spPr>
           <a:xfrm>
-            <a:off x="8065008" y="2240280"/>
-            <a:ext cx="3246120" cy="1965960"/>
+            <a:off x="5084064" y="2240280"/>
+            <a:ext cx="2103120" cy="2011680"/>
           </a:xfrm>
           <a:prstGeom prst="rect">
             <a:avLst/>
@@ -13476,7 +13488,7 @@
               </a:lnSpc>
             </a:pPr>
             <a:r>
-              <a:rPr sz="1500" b="0" i="0" lang="zh-CN" altLang="en-US">
+              <a:rPr sz="1400" b="0" i="0" lang="zh-CN" altLang="en-US">
                 <a:solidFill>
                   <a:srgbClr val="2C2C2C"/>
                 </a:solidFill>
@@ -13484,11 +13496,10 @@
                 <a:ea typeface="Noto Sans CJK SC"/>
                 <a:cs typeface="Noto Sans CJK SC"/>
               </a:rPr>
-              <a:t>不卖加油券，
-走联名卡积分。
-中国电动车多。
-家用的电也要能累积。
-办法在规则里面。</a:t>
+              <a:t>进的就是品类里
+那一个冠军。
+不必再比较，
+话对着这个人说。</a:t>
             </a:r>
           </a:p>
         </p:txBody>
@@ -13501,8 +13512,8 @@
         </p:nvSpPr>
         <p:spPr>
           <a:xfrm>
-            <a:off x="658368" y="4754880"/>
-            <a:ext cx="10881360" cy="10972"/>
+            <a:off x="7178040" y="1207008"/>
+            <a:ext cx="10972" cy="3063240"/>
           </a:xfrm>
           <a:prstGeom prst="rect">
             <a:avLst/>
@@ -13544,8 +13555,318 @@
         </p:nvSpPr>
         <p:spPr>
           <a:xfrm>
-            <a:off x="658368" y="4956048"/>
-            <a:ext cx="10789920" cy="1051560"/>
+            <a:off x="7296912" y="1207008"/>
+            <a:ext cx="2011680" cy="237744"/>
+          </a:xfrm>
+          <a:prstGeom prst="rect">
+            <a:avLst/>
+          </a:prstGeom>
+          <a:noFill/>
+        </p:spPr>
+        <p:txBody>
+          <a:bodyPr wrap="square" anchor="t" lIns="0" rIns="0" tIns="0" bIns="0"/>
+          <a:lstStyle/>
+          <a:p>
+            <a:pPr algn="l"/>
+            <a:r>
+              <a:rPr sz="1400" b="0" i="0" lang="zh-CN" altLang="en-US">
+                <a:solidFill>
+                  <a:srgbClr val="9E1B1B"/>
+                </a:solidFill>
+                <a:latin typeface="Noto Sans CJK SC Medium"/>
+                <a:ea typeface="Noto Sans CJK SC Medium"/>
+                <a:cs typeface="Noto Sans CJK SC Medium"/>
+              </a:rPr>
+              <a:t>04</a:t>
+            </a:r>
+          </a:p>
+        </p:txBody>
+      </p:sp>
+      <p:sp>
+        <p:nvSpPr>
+          <p:cNvPr id="18" name="TextBox 17"/>
+          <p:cNvSpPr txBox="1"/>
+          <p:nvPr/>
+        </p:nvSpPr>
+        <p:spPr>
+          <a:xfrm>
+            <a:off x="7296912" y="1499616"/>
+            <a:ext cx="2103120" cy="640080"/>
+          </a:xfrm>
+          <a:prstGeom prst="rect">
+            <a:avLst/>
+          </a:prstGeom>
+          <a:noFill/>
+        </p:spPr>
+        <p:txBody>
+          <a:bodyPr wrap="square" anchor="t" lIns="0" rIns="0" tIns="0" bIns="0"/>
+          <a:lstStyle/>
+          <a:p>
+            <a:pPr algn="l"/>
+            <a:r>
+              <a:rPr sz="2000" b="0" i="0" lang="zh-CN" altLang="en-US">
+                <a:solidFill>
+                  <a:srgbClr val="141414"/>
+                </a:solidFill>
+                <a:latin typeface="Noto Sans CJK SC Medium"/>
+                <a:ea typeface="Noto Sans CJK SC Medium"/>
+                <a:cs typeface="Noto Sans CJK SC Medium"/>
+              </a:rPr>
+              <a:t>阿扎每天</a:t>
+            </a:r>
+          </a:p>
+        </p:txBody>
+      </p:sp>
+      <p:sp>
+        <p:nvSpPr>
+          <p:cNvPr id="19" name="TextBox 18"/>
+          <p:cNvSpPr txBox="1"/>
+          <p:nvPr/>
+        </p:nvSpPr>
+        <p:spPr>
+          <a:xfrm>
+            <a:off x="7296912" y="2240280"/>
+            <a:ext cx="2103120" cy="2011680"/>
+          </a:xfrm>
+          <a:prstGeom prst="rect">
+            <a:avLst/>
+          </a:prstGeom>
+          <a:noFill/>
+        </p:spPr>
+        <p:txBody>
+          <a:bodyPr wrap="square" anchor="t" lIns="0" rIns="0" tIns="0" bIns="0"/>
+          <a:lstStyle/>
+          <a:p>
+            <a:pPr algn="l">
+              <a:lnSpc>
+                <a:spcPct val="135000"/>
+              </a:lnSpc>
+            </a:pPr>
+            <a:r>
+              <a:rPr sz="1400" b="0" i="0" lang="zh-CN" altLang="en-US">
+                <a:solidFill>
+                  <a:srgbClr val="2C2C2C"/>
+                </a:solidFill>
+                <a:latin typeface="Noto Sans CJK SC"/>
+                <a:ea typeface="Noto Sans CJK SC"/>
+                <a:cs typeface="Noto Sans CJK SC"/>
+              </a:rPr>
+              <a:t>每天的开支接进来。
+人每天打开。
+主力品目在这里
+被带出来。</a:t>
+            </a:r>
+          </a:p>
+        </p:txBody>
+      </p:sp>
+      <p:sp>
+        <p:nvSpPr>
+          <p:cNvPr id="20" name="Rectangle 19"/>
+          <p:cNvSpPr/>
+          <p:nvPr/>
+        </p:nvSpPr>
+        <p:spPr>
+          <a:xfrm>
+            <a:off x="9390887" y="1207008"/>
+            <a:ext cx="10972" cy="3063240"/>
+          </a:xfrm>
+          <a:prstGeom prst="rect">
+            <a:avLst/>
+          </a:prstGeom>
+          <a:solidFill>
+            <a:srgbClr val="E2E2E2"/>
+          </a:solidFill>
+          <a:ln>
+            <a:noFill/>
+          </a:ln>
+        </p:spPr>
+        <p:style>
+          <a:lnRef idx="1">
+            <a:schemeClr val="accent1"/>
+          </a:lnRef>
+          <a:fillRef idx="3">
+            <a:schemeClr val="accent1"/>
+          </a:fillRef>
+          <a:effectRef idx="2">
+            <a:schemeClr val="accent1"/>
+          </a:effectRef>
+          <a:fontRef idx="minor">
+            <a:schemeClr val="lt1"/>
+          </a:fontRef>
+        </p:style>
+        <p:txBody>
+          <a:bodyPr rtlCol="0" anchor="ctr"/>
+          <a:lstStyle/>
+          <a:p>
+            <a:pPr algn="ctr"/>
+          </a:p>
+        </p:txBody>
+      </p:sp>
+      <p:sp>
+        <p:nvSpPr>
+          <p:cNvPr id="21" name="TextBox 20"/>
+          <p:cNvSpPr txBox="1"/>
+          <p:nvPr/>
+        </p:nvSpPr>
+        <p:spPr>
+          <a:xfrm>
+            <a:off x="9509759" y="1207008"/>
+            <a:ext cx="2011680" cy="237744"/>
+          </a:xfrm>
+          <a:prstGeom prst="rect">
+            <a:avLst/>
+          </a:prstGeom>
+          <a:noFill/>
+        </p:spPr>
+        <p:txBody>
+          <a:bodyPr wrap="square" anchor="t" lIns="0" rIns="0" tIns="0" bIns="0"/>
+          <a:lstStyle/>
+          <a:p>
+            <a:pPr algn="l"/>
+            <a:r>
+              <a:rPr sz="1400" b="0" i="0" lang="zh-CN" altLang="en-US">
+                <a:solidFill>
+                  <a:srgbClr val="9E1B1B"/>
+                </a:solidFill>
+                <a:latin typeface="Noto Sans CJK SC Medium"/>
+                <a:ea typeface="Noto Sans CJK SC Medium"/>
+                <a:cs typeface="Noto Sans CJK SC Medium"/>
+              </a:rPr>
+              <a:t>05</a:t>
+            </a:r>
+          </a:p>
+        </p:txBody>
+      </p:sp>
+      <p:sp>
+        <p:nvSpPr>
+          <p:cNvPr id="22" name="TextBox 21"/>
+          <p:cNvSpPr txBox="1"/>
+          <p:nvPr/>
+        </p:nvSpPr>
+        <p:spPr>
+          <a:xfrm>
+            <a:off x="9509759" y="1499616"/>
+            <a:ext cx="2103120" cy="640080"/>
+          </a:xfrm>
+          <a:prstGeom prst="rect">
+            <a:avLst/>
+          </a:prstGeom>
+          <a:noFill/>
+        </p:spPr>
+        <p:txBody>
+          <a:bodyPr wrap="square" anchor="t" lIns="0" rIns="0" tIns="0" bIns="0"/>
+          <a:lstStyle/>
+          <a:p>
+            <a:pPr algn="l"/>
+            <a:r>
+              <a:rPr sz="2000" b="0" i="0" lang="zh-CN" altLang="en-US">
+                <a:solidFill>
+                  <a:srgbClr val="141414"/>
+                </a:solidFill>
+                <a:latin typeface="Noto Sans CJK SC Medium"/>
+                <a:ea typeface="Noto Sans CJK SC Medium"/>
+                <a:cs typeface="Noto Sans CJK SC Medium"/>
+              </a:rPr>
+              <a:t>PPO 与排产</a:t>
+            </a:r>
+          </a:p>
+        </p:txBody>
+      </p:sp>
+      <p:sp>
+        <p:nvSpPr>
+          <p:cNvPr id="23" name="TextBox 22"/>
+          <p:cNvSpPr txBox="1"/>
+          <p:nvPr/>
+        </p:nvSpPr>
+        <p:spPr>
+          <a:xfrm>
+            <a:off x="9509759" y="2240280"/>
+            <a:ext cx="2103120" cy="2011680"/>
+          </a:xfrm>
+          <a:prstGeom prst="rect">
+            <a:avLst/>
+          </a:prstGeom>
+          <a:noFill/>
+        </p:spPr>
+        <p:txBody>
+          <a:bodyPr wrap="square" anchor="t" lIns="0" rIns="0" tIns="0" bIns="0"/>
+          <a:lstStyle/>
+          <a:p>
+            <a:pPr algn="l">
+              <a:lnSpc>
+                <a:spcPct val="135000"/>
+              </a:lnSpc>
+            </a:pPr>
+            <a:r>
+              <a:rPr sz="1400" b="0" i="0" lang="zh-CN" altLang="en-US">
+                <a:solidFill>
+                  <a:srgbClr val="2C2C2C"/>
+                </a:solidFill>
+                <a:latin typeface="Noto Sans CJK SC"/>
+                <a:ea typeface="Noto Sans CJK SC"/>
+                <a:cs typeface="Noto Sans CJK SC"/>
+              </a:rPr>
+              <a:t>用的人记在 PPO 名下。
+合起来，是下个月
+那只罐子和栽培合同
+看得见的数。</a:t>
+            </a:r>
+          </a:p>
+        </p:txBody>
+      </p:sp>
+      <p:sp>
+        <p:nvSpPr>
+          <p:cNvPr id="24" name="Rectangle 23"/>
+          <p:cNvSpPr/>
+          <p:nvPr/>
+        </p:nvSpPr>
+        <p:spPr>
+          <a:xfrm>
+            <a:off x="658368" y="4617720"/>
+            <a:ext cx="10881360" cy="10972"/>
+          </a:xfrm>
+          <a:prstGeom prst="rect">
+            <a:avLst/>
+          </a:prstGeom>
+          <a:solidFill>
+            <a:srgbClr val="E2E2E2"/>
+          </a:solidFill>
+          <a:ln>
+            <a:noFill/>
+          </a:ln>
+        </p:spPr>
+        <p:style>
+          <a:lnRef idx="1">
+            <a:schemeClr val="accent1"/>
+          </a:lnRef>
+          <a:fillRef idx="3">
+            <a:schemeClr val="accent1"/>
+          </a:fillRef>
+          <a:effectRef idx="2">
+            <a:schemeClr val="accent1"/>
+          </a:effectRef>
+          <a:fontRef idx="minor">
+            <a:schemeClr val="lt1"/>
+          </a:fontRef>
+        </p:style>
+        <p:txBody>
+          <a:bodyPr rtlCol="0" anchor="ctr"/>
+          <a:lstStyle/>
+          <a:p>
+            <a:pPr algn="ctr"/>
+          </a:p>
+        </p:txBody>
+      </p:sp>
+      <p:sp>
+        <p:nvSpPr>
+          <p:cNvPr id="25" name="TextBox 24"/>
+          <p:cNvSpPr txBox="1"/>
+          <p:nvPr/>
+        </p:nvSpPr>
+        <p:spPr>
+          <a:xfrm>
+            <a:off x="658368" y="4800600"/>
+            <a:ext cx="10789920" cy="1188720"/>
           </a:xfrm>
           <a:prstGeom prst="rect">
             <a:avLst/>
@@ -13570,15 +13891,15 @@
                 <a:ea typeface="Noto Sans CJK SC Medium"/>
                 <a:cs typeface="Noto Sans CJK SC Medium"/>
               </a:rPr>
-              <a:t>每天的开支接进同一个平台。
-人每天来，五百个主力的产量才留得住。</a:t>
-            </a:r>
-          </a:p>
-        </p:txBody>
-      </p:sp>
-      <p:sp>
-        <p:nvSpPr>
-          <p:cNvPr id="18" name="TextBox 17"/>
+              <a:t>三台是一次企划的一条线。
+要数三样：建了记录的人，连续用的天数，每天打开阿扎的人。</a:t>
+            </a:r>
+          </a:p>
+        </p:txBody>
+      </p:sp>
+      <p:sp>
+        <p:nvSpPr>
+          <p:cNvPr id="26" name="TextBox 25"/>
           <p:cNvSpPr txBox="1"/>
           <p:nvPr/>
         </p:nvSpPr>
@@ -14127,7 +14448,7 @@
                 <a:ea typeface="Noto Sans CJK SC Medium"/>
                 <a:cs typeface="Noto Sans CJK SC Medium"/>
               </a:rPr>
-              <a:t>三 A 与平台主人</a:t>
+              <a:t>三 A 与 PPO</a:t>
             </a:r>
           </a:p>
         </p:txBody>
@@ -14168,7 +14489,8 @@
               </a:rPr>
               <a:t>个人平台、艾护理、阿扎
 一起扩散。
-事业者育成平台主人。
+培育 PPO，
+成为平台的主人。
 跟上来的合作方，
 成功一起负责。</a:t>
             </a:r>

--- a/艾多美何以成为100兆韩元企业.pptx
+++ b/艾多美何以成为100兆韩元企业.pptx
@@ -17,6 +17,9 @@
     <p:sldId id="265" r:id="rId17"/>
     <p:sldId id="266" r:id="rId18"/>
     <p:sldId id="267" r:id="rId19"/>
+    <p:sldId id="268" r:id="rId20"/>
+    <p:sldId id="269" r:id="rId21"/>
+    <p:sldId id="270" r:id="rId22"/>
   </p:sldIdLst>
   <p:sldSz cx="12192000" cy="6858000" type="screen4x3"/>
   <p:notesSz cx="6858000" cy="9144000"/>
@@ -513,7 +516,7 @@
           <a:lstStyle/>
           <a:p>
             <a:r>
-              <a:t>全稿 12 页。只讲中国法人要做的事：标准、产线、合作方、企划、三 A。</a:t>
+              <a:t>全稿 15 页。只讲中国法人要做的事：标准、产线、合作方、企划、三 A。</a:t>
             </a:r>
           </a:p>
         </p:txBody>
@@ -583,7 +586,7 @@
           <a:lstStyle/>
           <a:p>
             <a:r>
-              <a:t>阿扎是市集的地面，不是行政窗口。鲭鱼这类高成本率的日常品负责人来。一百兆仍由大约五百个主力品目赚。充电接不接、走哪张卡哪张网，中国先定，不卖加油券。</a:t>
+              <a:t>艾护理的输入是每餐、体型、步数、用药。输出先是这个人缺哪个功能，产品因一能一品而跟着定，人工智能不是在几个产品里挑。血和尿可以后补，记录不能等医院。记录存哪里、哪句话能说，中国要先定，定之前不对会员说。</a:t>
             </a:r>
           </a:p>
         </p:txBody>
@@ -653,7 +656,7 @@
           <a:lstStyle/>
           <a:p>
             <a:r>
-              <a:t>三 A 不是三个并列的应用。新人进艾护理建记录，记录说缺哪个功能，一能一品定那一个产品，阿扎每天接开支带出主力品目，用的人记在 PPO 名下，合起来变成能排产的数。要数的三样由中国法人自己给出，这里不填数字。</a:t>
+              <a:t>阿扎是市集的地面，不是行政窗口。鲭鱼这类高成本率的日常品负责人来。一百兆仍由大约五百个主力品目赚。充电接不接、走哪张卡哪张网，中国先定，不卖加油券。</a:t>
             </a:r>
           </a:p>
         </p:txBody>
@@ -723,7 +726,217 @@
           <a:lstStyle/>
           <a:p>
             <a:r>
-              <a:t>收束只回到四件：产线、合作方、企划、三A，以及要数的三样。然后停住。</a:t>
+              <a:t>三 A 不是三个并列的应用。新人进艾护理建记录，记录说缺哪个功能，一能一品定那一个产品，阿扎每天接开支带出主力品目，用的人记在 PPO 名下，合起来变成能排产的数。要数的三样由中国法人自己给出，这里不填数字。</a:t>
+            </a:r>
+          </a:p>
+        </p:txBody>
+      </p:sp>
+      <p:sp>
+        <p:nvSpPr>
+          <p:cNvPr id="4" name="Slide Number Placeholder 3"/>
+          <p:cNvSpPr>
+            <a:spLocks noGrp="1"/>
+          </p:cNvSpPr>
+          <p:nvPr>
+            <p:ph type="sldNum" idx="5" sz="quarter"/>
+          </p:nvPr>
+        </p:nvSpPr>
+        <p:spPr/>
+      </p:sp>
+    </p:spTree>
+  </p:cSld>
+  <p:clrMapOvr>
+    <a:masterClrMapping/>
+  </p:clrMapOvr>
+</p:notes>
+</file>
+
+<file path=ppt/notesSlides/notesSlide13.xml><?xml version="1.0" encoding="utf-8"?>
+<p:notes xmlns:a="http://schemas.openxmlformats.org/drawingml/2006/main" xmlns:p="http://schemas.openxmlformats.org/presentationml/2006/main" xmlns:r="http://schemas.openxmlformats.org/officeDocument/2006/relationships">
+  <p:cSld>
+    <p:spTree>
+      <p:nvGrpSpPr>
+        <p:cNvPr id="1" name=""/>
+        <p:cNvGrpSpPr/>
+        <p:nvPr/>
+      </p:nvGrpSpPr>
+      <p:grpSpPr>
+        <a:xfrm>
+          <a:off x="0" y="0"/>
+          <a:ext cx="0" cy="0"/>
+          <a:chOff x="0" y="0"/>
+          <a:chExt cx="0" cy="0"/>
+        </a:xfrm>
+      </p:grpSpPr>
+      <p:sp>
+        <p:nvSpPr>
+          <p:cNvPr id="2" name="Slide Image Placeholder 1"/>
+          <p:cNvSpPr>
+            <a:spLocks noGrp="1"/>
+          </p:cNvSpPr>
+          <p:nvPr>
+            <p:ph type="sldImg" idx="2"/>
+          </p:nvPr>
+        </p:nvSpPr>
+        <p:spPr/>
+      </p:sp>
+      <p:sp>
+        <p:nvSpPr>
+          <p:cNvPr id="3" name="Notes Placeholder 2"/>
+          <p:cNvSpPr>
+            <a:spLocks noGrp="1"/>
+          </p:cNvSpPr>
+          <p:nvPr>
+            <p:ph type="body" idx="3" sz="quarter"/>
+          </p:nvPr>
+        </p:nvSpPr>
+        <p:spPr/>
+        <p:txBody>
+          <a:bodyPr/>
+          <a:lstStyle/>
+          <a:p>
+            <a:r>
+              <a:t>时间点只有一个是会长讲过的：明年年底前的一百到二百支骨架。其余按先后排，不标日期。牵头部门是建议，需要按中国法人的实际分工调整。每月六个数：前三个来自四件产线动作，后三个来自三A。</a:t>
+            </a:r>
+          </a:p>
+        </p:txBody>
+      </p:sp>
+      <p:sp>
+        <p:nvSpPr>
+          <p:cNvPr id="4" name="Slide Number Placeholder 3"/>
+          <p:cNvSpPr>
+            <a:spLocks noGrp="1"/>
+          </p:cNvSpPr>
+          <p:nvPr>
+            <p:ph type="sldNum" idx="5" sz="quarter"/>
+          </p:nvPr>
+        </p:nvSpPr>
+        <p:spPr/>
+      </p:sp>
+    </p:spTree>
+  </p:cSld>
+  <p:clrMapOvr>
+    <a:masterClrMapping/>
+  </p:clrMapOvr>
+</p:notes>
+</file>
+
+<file path=ppt/notesSlides/notesSlide14.xml><?xml version="1.0" encoding="utf-8"?>
+<p:notes xmlns:a="http://schemas.openxmlformats.org/drawingml/2006/main" xmlns:p="http://schemas.openxmlformats.org/presentationml/2006/main" xmlns:r="http://schemas.openxmlformats.org/officeDocument/2006/relationships">
+  <p:cSld>
+    <p:spTree>
+      <p:nvGrpSpPr>
+        <p:cNvPr id="1" name=""/>
+        <p:cNvGrpSpPr/>
+        <p:nvPr/>
+      </p:nvGrpSpPr>
+      <p:grpSpPr>
+        <a:xfrm>
+          <a:off x="0" y="0"/>
+          <a:ext cx="0" cy="0"/>
+          <a:chOff x="0" y="0"/>
+          <a:chExt cx="0" cy="0"/>
+        </a:xfrm>
+      </p:grpSpPr>
+      <p:sp>
+        <p:nvSpPr>
+          <p:cNvPr id="2" name="Slide Image Placeholder 1"/>
+          <p:cNvSpPr>
+            <a:spLocks noGrp="1"/>
+          </p:cNvSpPr>
+          <p:nvPr>
+            <p:ph type="sldImg" idx="2"/>
+          </p:nvPr>
+        </p:nvSpPr>
+        <p:spPr/>
+      </p:sp>
+      <p:sp>
+        <p:nvSpPr>
+          <p:cNvPr id="3" name="Notes Placeholder 2"/>
+          <p:cNvSpPr>
+            <a:spLocks noGrp="1"/>
+          </p:cNvSpPr>
+          <p:nvPr>
+            <p:ph type="body" idx="3" sz="quarter"/>
+          </p:nvPr>
+        </p:nvSpPr>
+        <p:spPr/>
+        <p:txBody>
+          <a:bodyPr/>
+          <a:lstStyle/>
+          <a:p>
+            <a:r>
+              <a:t>左边一行来自《养成手册》第九章的填坑指南，右边是把它落到中国法人已经定下的动作上。手册里关于中国牌照状态的表述没有引用，以法务口径为准。</a:t>
+            </a:r>
+          </a:p>
+        </p:txBody>
+      </p:sp>
+      <p:sp>
+        <p:nvSpPr>
+          <p:cNvPr id="4" name="Slide Number Placeholder 3"/>
+          <p:cNvSpPr>
+            <a:spLocks noGrp="1"/>
+          </p:cNvSpPr>
+          <p:nvPr>
+            <p:ph type="sldNum" idx="5" sz="quarter"/>
+          </p:nvPr>
+        </p:nvSpPr>
+        <p:spPr/>
+      </p:sp>
+    </p:spTree>
+  </p:cSld>
+  <p:clrMapOvr>
+    <a:masterClrMapping/>
+  </p:clrMapOvr>
+</p:notes>
+</file>
+
+<file path=ppt/notesSlides/notesSlide15.xml><?xml version="1.0" encoding="utf-8"?>
+<p:notes xmlns:a="http://schemas.openxmlformats.org/drawingml/2006/main" xmlns:p="http://schemas.openxmlformats.org/presentationml/2006/main" xmlns:r="http://schemas.openxmlformats.org/officeDocument/2006/relationships">
+  <p:cSld>
+    <p:spTree>
+      <p:nvGrpSpPr>
+        <p:cNvPr id="1" name=""/>
+        <p:cNvGrpSpPr/>
+        <p:nvPr/>
+      </p:nvGrpSpPr>
+      <p:grpSpPr>
+        <a:xfrm>
+          <a:off x="0" y="0"/>
+          <a:ext cx="0" cy="0"/>
+          <a:chOff x="0" y="0"/>
+          <a:chExt cx="0" cy="0"/>
+        </a:xfrm>
+      </p:grpSpPr>
+      <p:sp>
+        <p:nvSpPr>
+          <p:cNvPr id="2" name="Slide Image Placeholder 1"/>
+          <p:cNvSpPr>
+            <a:spLocks noGrp="1"/>
+          </p:cNvSpPr>
+          <p:nvPr>
+            <p:ph type="sldImg" idx="2"/>
+          </p:nvPr>
+        </p:nvSpPr>
+        <p:spPr/>
+      </p:sp>
+      <p:sp>
+        <p:nvSpPr>
+          <p:cNvPr id="3" name="Notes Placeholder 2"/>
+          <p:cNvSpPr>
+            <a:spLocks noGrp="1"/>
+          </p:cNvSpPr>
+          <p:nvPr>
+            <p:ph type="body" idx="3" sz="quarter"/>
+          </p:nvPr>
+        </p:nvSpPr>
+        <p:spPr/>
+        <p:txBody>
+          <a:bodyPr/>
+          <a:lstStyle/>
+          <a:p>
+            <a:r>
+              <a:t>收束回到四项：产线盘点、合作方三样、企划、三A，以及每月看的六个数。然后停住。</a:t>
             </a:r>
           </a:p>
         </p:txBody>
@@ -1073,7 +1286,7 @@
           <a:lstStyle/>
           <a:p>
             <a:r>
-              <a:t>合作方先要看见能排产的量、设备由谁出、原料从育苗锁到哪一年。询价单给不出这些。</a:t>
+              <a:t>这一页不写结论，只列要查的。四条线按四件事对应：牙刷是模具和吨袋，厨具是并款，保健食品是罐容和鲜品，物流是转运趟数。烟台工厂造厨具、牙刷、保健食品，以及烟台国际物流中心2025年启用，均引自手册，未核实。</a:t>
             </a:r>
           </a:p>
         </p:txBody>
@@ -1143,7 +1356,7 @@
           <a:lstStyle/>
           <a:p>
             <a:r>
-              <a:t>7月28日：批评线性接力，要求从一体化企划一次贯通到终点。中国法人先出货、再补内容、再办培训，链在企划上就断了。</a:t>
+              <a:t>合作方先要看见能排产的量、设备由谁出、原料从育苗锁到哪一年。询价单给不出这些。</a:t>
             </a:r>
           </a:p>
         </p:txBody>
@@ -1213,7 +1426,7 @@
           <a:lstStyle/>
           <a:p>
             <a:r>
-              <a:t>个人平台先武装事业者：阶段、中文骨架、PPO。培育 PPO 是9月13日奖项的三份发表之一。酒店课和培训部是旧成本。</a:t>
+              <a:t>7月28日：批评线性接力，要求从一体化企划一次贯通到终点。中国法人先出货、再补内容、再办培训，链在企划上就断了。</a:t>
             </a:r>
           </a:p>
         </p:txBody>
@@ -1283,7 +1496,7 @@
           <a:lstStyle/>
           <a:p>
             <a:r>
-              <a:t>艾护理的输入是每餐、体型、步数、用药。输出先是这个人缺哪个功能，产品因一能一品而跟着定，人工智能不是在几个产品里挑。血和尿可以后补，记录不能等医院。记录存哪里、哪句话能说，中国要先定，定之前不对会员说。</a:t>
+              <a:t>个人平台先武装事业者：阶段、中文骨架、PPO。培育 PPO 是9月13日奖项的三份发表之一。酒店课和培训部是旧成本。</a:t>
             </a:r>
           </a:p>
         </p:txBody>
@@ -4634,7 +4847,7 @@
                 <a:ea typeface="Noto Sans CJK SC Medium"/>
                 <a:cs typeface="Noto Sans CJK SC Medium"/>
               </a:rPr>
-              <a:t>阿扎让人每天走进来</a:t>
+              <a:t>艾护理对着这个人说</a:t>
             </a:r>
           </a:p>
         </p:txBody>
@@ -4690,21 +4903,21 @@
         </p:nvSpPr>
         <p:spPr>
           <a:xfrm>
-            <a:off x="658368" y="1207008"/>
-            <a:ext cx="3200400" cy="237744"/>
-          </a:xfrm>
-          <a:prstGeom prst="rect">
-            <a:avLst/>
-          </a:prstGeom>
-          <a:noFill/>
-        </p:spPr>
-        <p:txBody>
-          <a:bodyPr wrap="square" anchor="t" lIns="0" rIns="0" tIns="0" bIns="0"/>
-          <a:lstStyle/>
-          <a:p>
-            <a:pPr algn="l"/>
-            <a:r>
-              <a:rPr sz="1400" b="0" i="0" lang="zh-CN" altLang="en-US">
+            <a:off x="658368" y="1170432"/>
+            <a:ext cx="5029200" cy="365760"/>
+          </a:xfrm>
+          <a:prstGeom prst="rect">
+            <a:avLst/>
+          </a:prstGeom>
+          <a:noFill/>
+        </p:spPr>
+        <p:txBody>
+          <a:bodyPr wrap="square" anchor="t" lIns="0" rIns="0" tIns="0" bIns="0"/>
+          <a:lstStyle/>
+          <a:p>
+            <a:pPr algn="l"/>
+            <a:r>
+              <a:rPr sz="2000" b="0" i="0" lang="zh-CN" altLang="en-US">
                 <a:solidFill>
                   <a:srgbClr val="9E1B1B"/>
                 </a:solidFill>
@@ -4712,7 +4925,7 @@
                 <a:ea typeface="Noto Sans CJK SC Medium"/>
                 <a:cs typeface="Noto Sans CJK SC Medium"/>
               </a:rPr>
-              <a:t>01</a:t>
+              <a:t>放进来</a:t>
             </a:r>
           </a:p>
         </p:txBody>
@@ -4725,29 +4938,29 @@
         </p:nvSpPr>
         <p:spPr>
           <a:xfrm>
-            <a:off x="658368" y="1499616"/>
-            <a:ext cx="3246120" cy="640080"/>
-          </a:xfrm>
-          <a:prstGeom prst="rect">
-            <a:avLst/>
-          </a:prstGeom>
-          <a:noFill/>
-        </p:spPr>
-        <p:txBody>
-          <a:bodyPr wrap="square" anchor="t" lIns="0" rIns="0" tIns="0" bIns="0"/>
-          <a:lstStyle/>
-          <a:p>
-            <a:pPr algn="l"/>
-            <a:r>
-              <a:rPr sz="2200" b="0" i="0" lang="zh-CN" altLang="en-US">
-                <a:solidFill>
-                  <a:srgbClr val="141414"/>
+            <a:off x="6263640" y="1170432"/>
+            <a:ext cx="5120640" cy="365760"/>
+          </a:xfrm>
+          <a:prstGeom prst="rect">
+            <a:avLst/>
+          </a:prstGeom>
+          <a:noFill/>
+        </p:spPr>
+        <p:txBody>
+          <a:bodyPr wrap="square" anchor="t" lIns="0" rIns="0" tIns="0" bIns="0"/>
+          <a:lstStyle/>
+          <a:p>
+            <a:pPr algn="l"/>
+            <a:r>
+              <a:rPr sz="2000" b="0" i="0" lang="zh-CN" altLang="en-US">
+                <a:solidFill>
+                  <a:srgbClr val="9E1B1B"/>
                 </a:solidFill>
                 <a:latin typeface="Noto Sans CJK SC Medium"/>
                 <a:ea typeface="Noto Sans CJK SC Medium"/>
                 <a:cs typeface="Noto Sans CJK SC Medium"/>
               </a:rPr>
-              <a:t>十万个，不赚一百兆</a:t>
+              <a:t>说出来</a:t>
             </a:r>
           </a:p>
         </p:txBody>
@@ -4760,25 +4973,56 @@
         </p:nvSpPr>
         <p:spPr>
           <a:xfrm>
-            <a:off x="658368" y="2240280"/>
-            <a:ext cx="3246120" cy="1965960"/>
-          </a:xfrm>
-          <a:prstGeom prst="rect">
-            <a:avLst/>
-          </a:prstGeom>
-          <a:noFill/>
-        </p:spPr>
-        <p:txBody>
-          <a:bodyPr wrap="square" anchor="t" lIns="0" rIns="0" tIns="0" bIns="0"/>
-          <a:lstStyle/>
-          <a:p>
-            <a:pPr algn="l">
-              <a:lnSpc>
-                <a:spcPct val="135000"/>
-              </a:lnSpc>
-            </a:pPr>
-            <a:r>
-              <a:rPr sz="1500" b="0" i="0" lang="zh-CN" altLang="en-US">
+            <a:off x="658368" y="1572768"/>
+            <a:ext cx="5029200" cy="274320"/>
+          </a:xfrm>
+          <a:prstGeom prst="rect">
+            <a:avLst/>
+          </a:prstGeom>
+          <a:noFill/>
+        </p:spPr>
+        <p:txBody>
+          <a:bodyPr wrap="square" anchor="t" lIns="0" rIns="0" tIns="0" bIns="0"/>
+          <a:lstStyle/>
+          <a:p>
+            <a:pPr algn="l"/>
+            <a:r>
+              <a:rPr sz="1600" b="0" i="0" lang="zh-CN" altLang="en-US">
+                <a:solidFill>
+                  <a:srgbClr val="141414"/>
+                </a:solidFill>
+                <a:latin typeface="Noto Sans CJK SC Medium"/>
+                <a:ea typeface="Noto Sans CJK SC Medium"/>
+                <a:cs typeface="Noto Sans CJK SC Medium"/>
+              </a:rPr>
+              <a:t>每餐一张照片</a:t>
+            </a:r>
+          </a:p>
+        </p:txBody>
+      </p:sp>
+      <p:sp>
+        <p:nvSpPr>
+          <p:cNvPr id="8" name="TextBox 7"/>
+          <p:cNvSpPr txBox="1"/>
+          <p:nvPr/>
+        </p:nvSpPr>
+        <p:spPr>
+          <a:xfrm>
+            <a:off x="658368" y="1847088"/>
+            <a:ext cx="5029200" cy="384048"/>
+          </a:xfrm>
+          <a:prstGeom prst="rect">
+            <a:avLst/>
+          </a:prstGeom>
+          <a:noFill/>
+        </p:spPr>
+        <p:txBody>
+          <a:bodyPr wrap="square" anchor="t" lIns="0" rIns="0" tIns="0" bIns="0"/>
+          <a:lstStyle/>
+          <a:p>
+            <a:pPr algn="l"/>
+            <a:r>
+              <a:rPr sz="1400" b="0" i="0" lang="zh-CN" altLang="en-US">
                 <a:solidFill>
                   <a:srgbClr val="2C2C2C"/>
                 </a:solidFill>
@@ -4786,25 +5030,511 @@
                 <a:ea typeface="Noto Sans CJK SC"/>
                 <a:cs typeface="Noto Sans CJK SC"/>
               </a:rPr>
-              <a:t>鸡蛋、油、充电接进来。
-一百兆由大约五百个
-主力品目赚。
-阿扎做的是热狗那一件事。
-先接每天都发生的开支。</a:t>
-            </a:r>
-          </a:p>
-        </p:txBody>
-      </p:sp>
-      <p:sp>
-        <p:nvSpPr>
-          <p:cNvPr id="8" name="Rectangle 7"/>
+              <a:t>碳水、蛋白、脂肪，白米还是玄米，蔬菜和纤维有多少。</a:t>
+            </a:r>
+          </a:p>
+        </p:txBody>
+      </p:sp>
+      <p:sp>
+        <p:nvSpPr>
+          <p:cNvPr id="9" name="TextBox 8"/>
+          <p:cNvSpPr txBox="1"/>
+          <p:nvPr/>
+        </p:nvSpPr>
+        <p:spPr>
+          <a:xfrm>
+            <a:off x="658368" y="2267712"/>
+            <a:ext cx="5029200" cy="274320"/>
+          </a:xfrm>
+          <a:prstGeom prst="rect">
+            <a:avLst/>
+          </a:prstGeom>
+          <a:noFill/>
+        </p:spPr>
+        <p:txBody>
+          <a:bodyPr wrap="square" anchor="t" lIns="0" rIns="0" tIns="0" bIns="0"/>
+          <a:lstStyle/>
+          <a:p>
+            <a:pPr algn="l"/>
+            <a:r>
+              <a:rPr sz="1600" b="0" i="0" lang="zh-CN" altLang="en-US">
+                <a:solidFill>
+                  <a:srgbClr val="141414"/>
+                </a:solidFill>
+                <a:latin typeface="Noto Sans CJK SC Medium"/>
+                <a:ea typeface="Noto Sans CJK SC Medium"/>
+                <a:cs typeface="Noto Sans CJK SC Medium"/>
+              </a:rPr>
+              <a:t>身高、体重、步数</a:t>
+            </a:r>
+          </a:p>
+        </p:txBody>
+      </p:sp>
+      <p:sp>
+        <p:nvSpPr>
+          <p:cNvPr id="10" name="TextBox 9"/>
+          <p:cNvSpPr txBox="1"/>
+          <p:nvPr/>
+        </p:nvSpPr>
+        <p:spPr>
+          <a:xfrm>
+            <a:off x="658368" y="2542032"/>
+            <a:ext cx="5029200" cy="384048"/>
+          </a:xfrm>
+          <a:prstGeom prst="rect">
+            <a:avLst/>
+          </a:prstGeom>
+          <a:noFill/>
+        </p:spPr>
+        <p:txBody>
+          <a:bodyPr wrap="square" anchor="t" lIns="0" rIns="0" tIns="0" bIns="0"/>
+          <a:lstStyle/>
+          <a:p>
+            <a:pPr algn="l"/>
+            <a:r>
+              <a:rPr sz="1400" b="0" i="0" lang="zh-CN" altLang="en-US">
+                <a:solidFill>
+                  <a:srgbClr val="2C2C2C"/>
+                </a:solidFill>
+                <a:latin typeface="Noto Sans CJK SC"/>
+                <a:ea typeface="Noto Sans CJK SC"/>
+                <a:cs typeface="Noto Sans CJK SC"/>
+              </a:rPr>
+              <a:t>肥胖还是肌肉，活动够不够。步数从手机接进来。</a:t>
+            </a:r>
+          </a:p>
+        </p:txBody>
+      </p:sp>
+      <p:sp>
+        <p:nvSpPr>
+          <p:cNvPr id="11" name="TextBox 10"/>
+          <p:cNvSpPr txBox="1"/>
+          <p:nvPr/>
+        </p:nvSpPr>
+        <p:spPr>
+          <a:xfrm>
+            <a:off x="658368" y="2962656"/>
+            <a:ext cx="5029200" cy="274320"/>
+          </a:xfrm>
+          <a:prstGeom prst="rect">
+            <a:avLst/>
+          </a:prstGeom>
+          <a:noFill/>
+        </p:spPr>
+        <p:txBody>
+          <a:bodyPr wrap="square" anchor="t" lIns="0" rIns="0" tIns="0" bIns="0"/>
+          <a:lstStyle/>
+          <a:p>
+            <a:pPr algn="l"/>
+            <a:r>
+              <a:rPr sz="1600" b="0" i="0" lang="zh-CN" altLang="en-US">
+                <a:solidFill>
+                  <a:srgbClr val="141414"/>
+                </a:solidFill>
+                <a:latin typeface="Noto Sans CJK SC Medium"/>
+                <a:ea typeface="Noto Sans CJK SC Medium"/>
+                <a:cs typeface="Noto Sans CJK SC Medium"/>
+              </a:rPr>
+              <a:t>用药和注射</a:t>
+            </a:r>
+          </a:p>
+        </p:txBody>
+      </p:sp>
+      <p:sp>
+        <p:nvSpPr>
+          <p:cNvPr id="12" name="TextBox 11"/>
+          <p:cNvSpPr txBox="1"/>
+          <p:nvPr/>
+        </p:nvSpPr>
+        <p:spPr>
+          <a:xfrm>
+            <a:off x="658368" y="3236976"/>
+            <a:ext cx="5029200" cy="384048"/>
+          </a:xfrm>
+          <a:prstGeom prst="rect">
+            <a:avLst/>
+          </a:prstGeom>
+          <a:noFill/>
+        </p:spPr>
+        <p:txBody>
+          <a:bodyPr wrap="square" anchor="t" lIns="0" rIns="0" tIns="0" bIns="0"/>
+          <a:lstStyle/>
+          <a:p>
+            <a:pPr algn="l"/>
+            <a:r>
+              <a:rPr sz="1400" b="0" i="0" lang="zh-CN" altLang="en-US">
+                <a:solidFill>
+                  <a:srgbClr val="2C2C2C"/>
+                </a:solidFill>
+                <a:latin typeface="Noto Sans CJK SC"/>
+                <a:ea typeface="Noto Sans CJK SC"/>
+                <a:cs typeface="Noto Sans CJK SC"/>
+              </a:rPr>
+              <a:t>代谢顺不顺，有连续记录才说得清。</a:t>
+            </a:r>
+          </a:p>
+        </p:txBody>
+      </p:sp>
+      <p:sp>
+        <p:nvSpPr>
+          <p:cNvPr id="13" name="TextBox 12"/>
+          <p:cNvSpPr txBox="1"/>
+          <p:nvPr/>
+        </p:nvSpPr>
+        <p:spPr>
+          <a:xfrm>
+            <a:off x="658368" y="3657600"/>
+            <a:ext cx="5029200" cy="274320"/>
+          </a:xfrm>
+          <a:prstGeom prst="rect">
+            <a:avLst/>
+          </a:prstGeom>
+          <a:noFill/>
+        </p:spPr>
+        <p:txBody>
+          <a:bodyPr wrap="square" anchor="t" lIns="0" rIns="0" tIns="0" bIns="0"/>
+          <a:lstStyle/>
+          <a:p>
+            <a:pPr algn="l"/>
+            <a:r>
+              <a:rPr sz="1600" b="0" i="0" lang="zh-CN" altLang="en-US">
+                <a:solidFill>
+                  <a:srgbClr val="141414"/>
+                </a:solidFill>
+                <a:latin typeface="Noto Sans CJK SC Medium"/>
+                <a:ea typeface="Noto Sans CJK SC Medium"/>
+                <a:cs typeface="Noto Sans CJK SC Medium"/>
+              </a:rPr>
+              <a:t>血和尿可以后补</a:t>
+            </a:r>
+          </a:p>
+        </p:txBody>
+      </p:sp>
+      <p:sp>
+        <p:nvSpPr>
+          <p:cNvPr id="14" name="TextBox 13"/>
+          <p:cNvSpPr txBox="1"/>
+          <p:nvPr/>
+        </p:nvSpPr>
+        <p:spPr>
+          <a:xfrm>
+            <a:off x="658368" y="3931920"/>
+            <a:ext cx="5029200" cy="384048"/>
+          </a:xfrm>
+          <a:prstGeom prst="rect">
+            <a:avLst/>
+          </a:prstGeom>
+          <a:noFill/>
+        </p:spPr>
+        <p:txBody>
+          <a:bodyPr wrap="square" anchor="t" lIns="0" rIns="0" tIns="0" bIns="0"/>
+          <a:lstStyle/>
+          <a:p>
+            <a:pPr algn="l"/>
+            <a:r>
+              <a:rPr sz="1400" b="0" i="0" lang="zh-CN" altLang="en-US">
+                <a:solidFill>
+                  <a:srgbClr val="2C2C2C"/>
+                </a:solidFill>
+                <a:latin typeface="Noto Sans CJK SC"/>
+                <a:ea typeface="Noto Sans CJK SC"/>
+                <a:cs typeface="Noto Sans CJK SC"/>
+              </a:rPr>
+              <a:t>上面这些先每天跑起来。不必等一座医院。</a:t>
+            </a:r>
+          </a:p>
+        </p:txBody>
+      </p:sp>
+      <p:sp>
+        <p:nvSpPr>
+          <p:cNvPr id="15" name="TextBox 14"/>
+          <p:cNvSpPr txBox="1"/>
+          <p:nvPr/>
+        </p:nvSpPr>
+        <p:spPr>
+          <a:xfrm>
+            <a:off x="6263640" y="1572768"/>
+            <a:ext cx="5120640" cy="274320"/>
+          </a:xfrm>
+          <a:prstGeom prst="rect">
+            <a:avLst/>
+          </a:prstGeom>
+          <a:noFill/>
+        </p:spPr>
+        <p:txBody>
+          <a:bodyPr wrap="square" anchor="t" lIns="0" rIns="0" tIns="0" bIns="0"/>
+          <a:lstStyle/>
+          <a:p>
+            <a:pPr algn="l"/>
+            <a:r>
+              <a:rPr sz="1600" b="0" i="0" lang="zh-CN" altLang="en-US">
+                <a:solidFill>
+                  <a:srgbClr val="141414"/>
+                </a:solidFill>
+                <a:latin typeface="Noto Sans CJK SC Medium"/>
+                <a:ea typeface="Noto Sans CJK SC Medium"/>
+                <a:cs typeface="Noto Sans CJK SC Medium"/>
+              </a:rPr>
+              <a:t>该减，还是该补</a:t>
+            </a:r>
+          </a:p>
+        </p:txBody>
+      </p:sp>
+      <p:sp>
+        <p:nvSpPr>
+          <p:cNvPr id="16" name="TextBox 15"/>
+          <p:cNvSpPr txBox="1"/>
+          <p:nvPr/>
+        </p:nvSpPr>
+        <p:spPr>
+          <a:xfrm>
+            <a:off x="6263640" y="1847088"/>
+            <a:ext cx="5120640" cy="384048"/>
+          </a:xfrm>
+          <a:prstGeom prst="rect">
+            <a:avLst/>
+          </a:prstGeom>
+          <a:noFill/>
+        </p:spPr>
+        <p:txBody>
+          <a:bodyPr wrap="square" anchor="t" lIns="0" rIns="0" tIns="0" bIns="0"/>
+          <a:lstStyle/>
+          <a:p>
+            <a:pPr algn="l"/>
+            <a:r>
+              <a:rPr sz="1400" b="0" i="0" lang="zh-CN" altLang="en-US">
+                <a:solidFill>
+                  <a:srgbClr val="2C2C2C"/>
+                </a:solidFill>
+                <a:latin typeface="Noto Sans CJK SC"/>
+                <a:ea typeface="Noto Sans CJK SC"/>
+                <a:cs typeface="Noto Sans CJK SC"/>
+              </a:rPr>
+              <a:t>减碳水，补蛋白；吃多了；或只吃精制，碳水其实不够。</a:t>
+            </a:r>
+          </a:p>
+        </p:txBody>
+      </p:sp>
+      <p:sp>
+        <p:nvSpPr>
+          <p:cNvPr id="17" name="TextBox 16"/>
+          <p:cNvSpPr txBox="1"/>
+          <p:nvPr/>
+        </p:nvSpPr>
+        <p:spPr>
+          <a:xfrm>
+            <a:off x="6263640" y="2267712"/>
+            <a:ext cx="5120640" cy="274320"/>
+          </a:xfrm>
+          <a:prstGeom prst="rect">
+            <a:avLst/>
+          </a:prstGeom>
+          <a:noFill/>
+        </p:spPr>
+        <p:txBody>
+          <a:bodyPr wrap="square" anchor="t" lIns="0" rIns="0" tIns="0" bIns="0"/>
+          <a:lstStyle/>
+          <a:p>
+            <a:pPr algn="l"/>
+            <a:r>
+              <a:rPr sz="1600" b="0" i="0" lang="zh-CN" altLang="en-US">
+                <a:solidFill>
+                  <a:srgbClr val="141414"/>
+                </a:solidFill>
+                <a:latin typeface="Noto Sans CJK SC Medium"/>
+                <a:ea typeface="Noto Sans CJK SC Medium"/>
+                <a:cs typeface="Noto Sans CJK SC Medium"/>
+              </a:rPr>
+              <a:t>一年、五年、十年</a:t>
+            </a:r>
+          </a:p>
+        </p:txBody>
+      </p:sp>
+      <p:sp>
+        <p:nvSpPr>
+          <p:cNvPr id="18" name="TextBox 17"/>
+          <p:cNvSpPr txBox="1"/>
+          <p:nvPr/>
+        </p:nvSpPr>
+        <p:spPr>
+          <a:xfrm>
+            <a:off x="6263640" y="2542032"/>
+            <a:ext cx="5120640" cy="384048"/>
+          </a:xfrm>
+          <a:prstGeom prst="rect">
+            <a:avLst/>
+          </a:prstGeom>
+          <a:noFill/>
+        </p:spPr>
+        <p:txBody>
+          <a:bodyPr wrap="square" anchor="t" lIns="0" rIns="0" tIns="0" bIns="0"/>
+          <a:lstStyle/>
+          <a:p>
+            <a:pPr algn="l"/>
+            <a:r>
+              <a:rPr sz="1400" b="0" i="0" lang="zh-CN" altLang="en-US">
+                <a:solidFill>
+                  <a:srgbClr val="2C2C2C"/>
+                </a:solidFill>
+                <a:latin typeface="Noto Sans CJK SC"/>
+                <a:ea typeface="Noto Sans CJK SC"/>
+                <a:cs typeface="Noto Sans CJK SC"/>
+              </a:rPr>
+              <a:t>照这样下去，身体可以估。家族里带下来的病要能看见。</a:t>
+            </a:r>
+          </a:p>
+        </p:txBody>
+      </p:sp>
+      <p:sp>
+        <p:nvSpPr>
+          <p:cNvPr id="19" name="TextBox 18"/>
+          <p:cNvSpPr txBox="1"/>
+          <p:nvPr/>
+        </p:nvSpPr>
+        <p:spPr>
+          <a:xfrm>
+            <a:off x="6263640" y="2962656"/>
+            <a:ext cx="5120640" cy="274320"/>
+          </a:xfrm>
+          <a:prstGeom prst="rect">
+            <a:avLst/>
+          </a:prstGeom>
+          <a:noFill/>
+        </p:spPr>
+        <p:txBody>
+          <a:bodyPr wrap="square" anchor="t" lIns="0" rIns="0" tIns="0" bIns="0"/>
+          <a:lstStyle/>
+          <a:p>
+            <a:pPr algn="l"/>
+            <a:r>
+              <a:rPr sz="1600" b="0" i="0" lang="zh-CN" altLang="en-US">
+                <a:solidFill>
+                  <a:srgbClr val="141414"/>
+                </a:solidFill>
+                <a:latin typeface="Noto Sans CJK SC Medium"/>
+                <a:ea typeface="Noto Sans CJK SC Medium"/>
+                <a:cs typeface="Noto Sans CJK SC Medium"/>
+              </a:rPr>
+              <a:t>缺哪个功能</a:t>
+            </a:r>
+          </a:p>
+        </p:txBody>
+      </p:sp>
+      <p:sp>
+        <p:nvSpPr>
+          <p:cNvPr id="20" name="TextBox 19"/>
+          <p:cNvSpPr txBox="1"/>
+          <p:nvPr/>
+        </p:nvSpPr>
+        <p:spPr>
+          <a:xfrm>
+            <a:off x="6263640" y="3236976"/>
+            <a:ext cx="5120640" cy="384048"/>
+          </a:xfrm>
+          <a:prstGeom prst="rect">
+            <a:avLst/>
+          </a:prstGeom>
+          <a:noFill/>
+        </p:spPr>
+        <p:txBody>
+          <a:bodyPr wrap="square" anchor="t" lIns="0" rIns="0" tIns="0" bIns="0"/>
+          <a:lstStyle/>
+          <a:p>
+            <a:pPr algn="l"/>
+            <a:r>
+              <a:rPr sz="1400" b="0" i="0" lang="zh-CN" altLang="en-US">
+                <a:solidFill>
+                  <a:srgbClr val="2C2C2C"/>
+                </a:solidFill>
+                <a:latin typeface="Noto Sans CJK SC"/>
+                <a:ea typeface="Noto Sans CJK SC"/>
+                <a:cs typeface="Noto Sans CJK SC"/>
+              </a:rPr>
+              <a:t>一能一品：先说缺哪个功能，那一个产品跟着定。</a:t>
+            </a:r>
+          </a:p>
+        </p:txBody>
+      </p:sp>
+      <p:sp>
+        <p:nvSpPr>
+          <p:cNvPr id="21" name="TextBox 20"/>
+          <p:cNvSpPr txBox="1"/>
+          <p:nvPr/>
+        </p:nvSpPr>
+        <p:spPr>
+          <a:xfrm>
+            <a:off x="6263640" y="3657600"/>
+            <a:ext cx="5120640" cy="274320"/>
+          </a:xfrm>
+          <a:prstGeom prst="rect">
+            <a:avLst/>
+          </a:prstGeom>
+          <a:noFill/>
+        </p:spPr>
+        <p:txBody>
+          <a:bodyPr wrap="square" anchor="t" lIns="0" rIns="0" tIns="0" bIns="0"/>
+          <a:lstStyle/>
+          <a:p>
+            <a:pPr algn="l"/>
+            <a:r>
+              <a:rPr sz="1600" b="0" i="0" lang="zh-CN" altLang="en-US">
+                <a:solidFill>
+                  <a:srgbClr val="141414"/>
+                </a:solidFill>
+                <a:latin typeface="Noto Sans CJK SC Medium"/>
+                <a:ea typeface="Noto Sans CJK SC Medium"/>
+                <a:cs typeface="Noto Sans CJK SC Medium"/>
+              </a:rPr>
+              <a:t>先进入艾护理</a:t>
+            </a:r>
+          </a:p>
+        </p:txBody>
+      </p:sp>
+      <p:sp>
+        <p:nvSpPr>
+          <p:cNvPr id="22" name="TextBox 21"/>
+          <p:cNvSpPr txBox="1"/>
+          <p:nvPr/>
+        </p:nvSpPr>
+        <p:spPr>
+          <a:xfrm>
+            <a:off x="6263640" y="3931920"/>
+            <a:ext cx="5120640" cy="384048"/>
+          </a:xfrm>
+          <a:prstGeom prst="rect">
+            <a:avLst/>
+          </a:prstGeom>
+          <a:noFill/>
+        </p:spPr>
+        <p:txBody>
+          <a:bodyPr wrap="square" anchor="t" lIns="0" rIns="0" tIns="0" bIns="0"/>
+          <a:lstStyle/>
+          <a:p>
+            <a:pPr algn="l"/>
+            <a:r>
+              <a:rPr sz="1400" b="0" i="0" lang="zh-CN" altLang="en-US">
+                <a:solidFill>
+                  <a:srgbClr val="2C2C2C"/>
+                </a:solidFill>
+                <a:latin typeface="Noto Sans CJK SC"/>
+                <a:ea typeface="Noto Sans CJK SC"/>
+                <a:cs typeface="Noto Sans CJK SC"/>
+              </a:rPr>
+              <a:t>介绍别人，先把对方的记录建起来，再谈产品。</a:t>
+            </a:r>
+          </a:p>
+        </p:txBody>
+      </p:sp>
+      <p:sp>
+        <p:nvSpPr>
+          <p:cNvPr id="23" name="Rectangle 22"/>
           <p:cNvSpPr/>
           <p:nvPr/>
         </p:nvSpPr>
         <p:spPr>
           <a:xfrm>
-            <a:off x="4160520" y="1207008"/>
-            <a:ext cx="10972" cy="3063240"/>
+            <a:off x="5897880" y="1170432"/>
+            <a:ext cx="10972" cy="3200400"/>
           </a:xfrm>
           <a:prstGeom prst="rect">
             <a:avLst/>
@@ -4840,126 +5570,14 @@
       </p:sp>
       <p:sp>
         <p:nvSpPr>
-          <p:cNvPr id="9" name="TextBox 8"/>
-          <p:cNvSpPr txBox="1"/>
-          <p:nvPr/>
-        </p:nvSpPr>
-        <p:spPr>
-          <a:xfrm>
-            <a:off x="4361688" y="1207008"/>
-            <a:ext cx="3200400" cy="237744"/>
-          </a:xfrm>
-          <a:prstGeom prst="rect">
-            <a:avLst/>
-          </a:prstGeom>
-          <a:noFill/>
-        </p:spPr>
-        <p:txBody>
-          <a:bodyPr wrap="square" anchor="t" lIns="0" rIns="0" tIns="0" bIns="0"/>
-          <a:lstStyle/>
-          <a:p>
-            <a:pPr algn="l"/>
-            <a:r>
-              <a:rPr sz="1400" b="0" i="0" lang="zh-CN" altLang="en-US">
-                <a:solidFill>
-                  <a:srgbClr val="9E1B1B"/>
-                </a:solidFill>
-                <a:latin typeface="Noto Sans CJK SC Medium"/>
-                <a:ea typeface="Noto Sans CJK SC Medium"/>
-                <a:cs typeface="Noto Sans CJK SC Medium"/>
-              </a:rPr>
-              <a:t>02</a:t>
-            </a:r>
-          </a:p>
-        </p:txBody>
-      </p:sp>
-      <p:sp>
-        <p:nvSpPr>
-          <p:cNvPr id="10" name="TextBox 9"/>
-          <p:cNvSpPr txBox="1"/>
-          <p:nvPr/>
-        </p:nvSpPr>
-        <p:spPr>
-          <a:xfrm>
-            <a:off x="4361688" y="1499616"/>
-            <a:ext cx="3246120" cy="640080"/>
-          </a:xfrm>
-          <a:prstGeom prst="rect">
-            <a:avLst/>
-          </a:prstGeom>
-          <a:noFill/>
-        </p:spPr>
-        <p:txBody>
-          <a:bodyPr wrap="square" anchor="t" lIns="0" rIns="0" tIns="0" bIns="0"/>
-          <a:lstStyle/>
-          <a:p>
-            <a:pPr algn="l"/>
-            <a:r>
-              <a:rPr sz="2200" b="0" i="0" lang="zh-CN" altLang="en-US">
-                <a:solidFill>
-                  <a:srgbClr val="141414"/>
-                </a:solidFill>
-                <a:latin typeface="Noto Sans CJK SC Medium"/>
-                <a:ea typeface="Noto Sans CJK SC Medium"/>
-                <a:cs typeface="Noto Sans CJK SC Medium"/>
-              </a:rPr>
-              <a:t>鲭鱼回答不了</a:t>
-            </a:r>
-          </a:p>
-        </p:txBody>
-      </p:sp>
-      <p:sp>
-        <p:nvSpPr>
-          <p:cNvPr id="11" name="TextBox 10"/>
-          <p:cNvSpPr txBox="1"/>
-          <p:nvPr/>
-        </p:nvSpPr>
-        <p:spPr>
-          <a:xfrm>
-            <a:off x="4361688" y="2240280"/>
-            <a:ext cx="3246120" cy="1965960"/>
-          </a:xfrm>
-          <a:prstGeom prst="rect">
-            <a:avLst/>
-          </a:prstGeom>
-          <a:noFill/>
-        </p:spPr>
-        <p:txBody>
-          <a:bodyPr wrap="square" anchor="t" lIns="0" rIns="0" tIns="0" bIns="0"/>
-          <a:lstStyle/>
-          <a:p>
-            <a:pPr algn="l">
-              <a:lnSpc>
-                <a:spcPct val="135000"/>
-              </a:lnSpc>
-            </a:pPr>
-            <a:r>
-              <a:rPr sz="1500" b="0" i="0" lang="zh-CN" altLang="en-US">
-                <a:solidFill>
-                  <a:srgbClr val="2C2C2C"/>
-                </a:solidFill>
-                <a:latin typeface="Noto Sans CJK SC"/>
-                <a:ea typeface="Noto Sans CJK SC"/>
-                <a:cs typeface="Noto Sans CJK SC"/>
-              </a:rPr>
-              <a:t>成本率到七成五的日常品，
-单靠它到不了一百兆。
-它负责人每天来。
-主力品目负责赚。</a:t>
-            </a:r>
-          </a:p>
-        </p:txBody>
-      </p:sp>
-      <p:sp>
-        <p:nvSpPr>
-          <p:cNvPr id="12" name="Rectangle 11"/>
+          <p:cNvPr id="24" name="Rectangle 23"/>
           <p:cNvSpPr/>
           <p:nvPr/>
         </p:nvSpPr>
         <p:spPr>
           <a:xfrm>
-            <a:off x="7863840" y="1207008"/>
-            <a:ext cx="10972" cy="3063240"/>
+            <a:off x="658368" y="4617720"/>
+            <a:ext cx="10881360" cy="10972"/>
           </a:xfrm>
           <a:prstGeom prst="rect">
             <a:avLst/>
@@ -4995,169 +5613,13 @@
       </p:sp>
       <p:sp>
         <p:nvSpPr>
-          <p:cNvPr id="13" name="TextBox 12"/>
-          <p:cNvSpPr txBox="1"/>
-          <p:nvPr/>
-        </p:nvSpPr>
-        <p:spPr>
-          <a:xfrm>
-            <a:off x="8065008" y="1207008"/>
-            <a:ext cx="3200400" cy="237744"/>
-          </a:xfrm>
-          <a:prstGeom prst="rect">
-            <a:avLst/>
-          </a:prstGeom>
-          <a:noFill/>
-        </p:spPr>
-        <p:txBody>
-          <a:bodyPr wrap="square" anchor="t" lIns="0" rIns="0" tIns="0" bIns="0"/>
-          <a:lstStyle/>
-          <a:p>
-            <a:pPr algn="l"/>
-            <a:r>
-              <a:rPr sz="1400" b="0" i="0" lang="zh-CN" altLang="en-US">
-                <a:solidFill>
-                  <a:srgbClr val="9E1B1B"/>
-                </a:solidFill>
-                <a:latin typeface="Noto Sans CJK SC Medium"/>
-                <a:ea typeface="Noto Sans CJK SC Medium"/>
-                <a:cs typeface="Noto Sans CJK SC Medium"/>
-              </a:rPr>
-              <a:t>03</a:t>
-            </a:r>
-          </a:p>
-        </p:txBody>
-      </p:sp>
-      <p:sp>
-        <p:nvSpPr>
-          <p:cNvPr id="14" name="TextBox 13"/>
-          <p:cNvSpPr txBox="1"/>
-          <p:nvPr/>
-        </p:nvSpPr>
-        <p:spPr>
-          <a:xfrm>
-            <a:off x="8065008" y="1499616"/>
-            <a:ext cx="3246120" cy="640080"/>
-          </a:xfrm>
-          <a:prstGeom prst="rect">
-            <a:avLst/>
-          </a:prstGeom>
-          <a:noFill/>
-        </p:spPr>
-        <p:txBody>
-          <a:bodyPr wrap="square" anchor="t" lIns="0" rIns="0" tIns="0" bIns="0"/>
-          <a:lstStyle/>
-          <a:p>
-            <a:pPr algn="l"/>
-            <a:r>
-              <a:rPr sz="2200" b="0" i="0" lang="zh-CN" altLang="en-US">
-                <a:solidFill>
-                  <a:srgbClr val="141414"/>
-                </a:solidFill>
-                <a:latin typeface="Noto Sans CJK SC Medium"/>
-                <a:ea typeface="Noto Sans CJK SC Medium"/>
-                <a:cs typeface="Noto Sans CJK SC Medium"/>
-              </a:rPr>
-              <a:t>电，先定哪张卡</a:t>
-            </a:r>
-          </a:p>
-        </p:txBody>
-      </p:sp>
-      <p:sp>
-        <p:nvSpPr>
-          <p:cNvPr id="15" name="TextBox 14"/>
-          <p:cNvSpPr txBox="1"/>
-          <p:nvPr/>
-        </p:nvSpPr>
-        <p:spPr>
-          <a:xfrm>
-            <a:off x="8065008" y="2240280"/>
-            <a:ext cx="3246120" cy="1965960"/>
-          </a:xfrm>
-          <a:prstGeom prst="rect">
-            <a:avLst/>
-          </a:prstGeom>
-          <a:noFill/>
-        </p:spPr>
-        <p:txBody>
-          <a:bodyPr wrap="square" anchor="t" lIns="0" rIns="0" tIns="0" bIns="0"/>
-          <a:lstStyle/>
-          <a:p>
-            <a:pPr algn="l">
-              <a:lnSpc>
-                <a:spcPct val="135000"/>
-              </a:lnSpc>
-            </a:pPr>
-            <a:r>
-              <a:rPr sz="1500" b="0" i="0" lang="zh-CN" altLang="en-US">
-                <a:solidFill>
-                  <a:srgbClr val="2C2C2C"/>
-                </a:solidFill>
-                <a:latin typeface="Noto Sans CJK SC"/>
-                <a:ea typeface="Noto Sans CJK SC"/>
-                <a:cs typeface="Noto Sans CJK SC"/>
-              </a:rPr>
-              <a:t>不卖加油券，
-走联名卡积分。
-中国电动车多。
-用哪张卡、哪张充电网，
-先定。能累积，再对会员说。</a:t>
-            </a:r>
-          </a:p>
-        </p:txBody>
-      </p:sp>
-      <p:sp>
-        <p:nvSpPr>
-          <p:cNvPr id="16" name="Rectangle 15"/>
-          <p:cNvSpPr/>
-          <p:nvPr/>
-        </p:nvSpPr>
-        <p:spPr>
-          <a:xfrm>
-            <a:off x="658368" y="4754880"/>
-            <a:ext cx="10881360" cy="10972"/>
-          </a:xfrm>
-          <a:prstGeom prst="rect">
-            <a:avLst/>
-          </a:prstGeom>
-          <a:solidFill>
-            <a:srgbClr val="E2E2E2"/>
-          </a:solidFill>
-          <a:ln>
-            <a:noFill/>
-          </a:ln>
-        </p:spPr>
-        <p:style>
-          <a:lnRef idx="1">
-            <a:schemeClr val="accent1"/>
-          </a:lnRef>
-          <a:fillRef idx="3">
-            <a:schemeClr val="accent1"/>
-          </a:fillRef>
-          <a:effectRef idx="2">
-            <a:schemeClr val="accent1"/>
-          </a:effectRef>
-          <a:fontRef idx="minor">
-            <a:schemeClr val="lt1"/>
-          </a:fontRef>
-        </p:style>
-        <p:txBody>
-          <a:bodyPr rtlCol="0" anchor="ctr"/>
-          <a:lstStyle/>
-          <a:p>
-            <a:pPr algn="ctr"/>
-          </a:p>
-        </p:txBody>
-      </p:sp>
-      <p:sp>
-        <p:nvSpPr>
-          <p:cNvPr id="17" name="TextBox 16"/>
-          <p:cNvSpPr txBox="1"/>
-          <p:nvPr/>
-        </p:nvSpPr>
-        <p:spPr>
-          <a:xfrm>
-            <a:off x="658368" y="4956048"/>
+          <p:cNvPr id="25" name="TextBox 24"/>
+          <p:cNvSpPr txBox="1"/>
+          <p:nvPr/>
+        </p:nvSpPr>
+        <p:spPr>
+          <a:xfrm>
+            <a:off x="658368" y="4773168"/>
             <a:ext cx="10789920" cy="1051560"/>
           </a:xfrm>
           <a:prstGeom prst="rect">
@@ -5175,7 +5637,7 @@
               </a:lnSpc>
             </a:pPr>
             <a:r>
-              <a:rPr sz="2000" b="0" i="0" lang="zh-CN" altLang="en-US">
+              <a:rPr sz="1800" b="0" i="0" lang="zh-CN" altLang="en-US">
                 <a:solidFill>
                   <a:srgbClr val="9E1B1B"/>
                 </a:solidFill>
@@ -5183,15 +5645,15 @@
                 <a:ea typeface="Noto Sans CJK SC Medium"/>
                 <a:cs typeface="Noto Sans CJK SC Medium"/>
               </a:rPr>
-              <a:t>每天的开支接进同一个平台。
-人每天来，五百个主力的产量才留得住。</a:t>
-            </a:r>
-          </a:p>
-        </p:txBody>
-      </p:sp>
-      <p:sp>
-        <p:nvSpPr>
-          <p:cNvPr id="18" name="TextBox 17"/>
+              <a:t>终点是个人健康数据银行。本人同意，隐私守住。
+中国要先定两件：记录存在哪里，哪句话能说。</a:t>
+            </a:r>
+          </a:p>
+        </p:txBody>
+      </p:sp>
+      <p:sp>
+        <p:nvSpPr>
+          <p:cNvPr id="26" name="TextBox 25"/>
           <p:cNvSpPr txBox="1"/>
           <p:nvPr/>
         </p:nvSpPr>
@@ -5315,7 +5777,7 @@
                 <a:ea typeface="Noto Sans CJK SC Medium"/>
                 <a:cs typeface="Noto Sans CJK SC Medium"/>
               </a:rPr>
-              <a:t>三台是一条线，不是三个栏</a:t>
+              <a:t>阿扎让人每天走进来</a:t>
             </a:r>
           </a:p>
         </p:txBody>
@@ -5372,7 +5834,7 @@
         <p:spPr>
           <a:xfrm>
             <a:off x="658368" y="1207008"/>
-            <a:ext cx="2011680" cy="237744"/>
+            <a:ext cx="3200400" cy="237744"/>
           </a:xfrm>
           <a:prstGeom prst="rect">
             <a:avLst/>
@@ -5407,20 +5869,20 @@
         <p:spPr>
           <a:xfrm>
             <a:off x="658368" y="1499616"/>
-            <a:ext cx="2103120" cy="640080"/>
-          </a:xfrm>
-          <a:prstGeom prst="rect">
-            <a:avLst/>
-          </a:prstGeom>
-          <a:noFill/>
-        </p:spPr>
-        <p:txBody>
-          <a:bodyPr wrap="square" anchor="t" lIns="0" rIns="0" tIns="0" bIns="0"/>
-          <a:lstStyle/>
-          <a:p>
-            <a:pPr algn="l"/>
-            <a:r>
-              <a:rPr sz="2000" b="0" i="0" lang="zh-CN" altLang="en-US">
+            <a:ext cx="3246120" cy="640080"/>
+          </a:xfrm>
+          <a:prstGeom prst="rect">
+            <a:avLst/>
+          </a:prstGeom>
+          <a:noFill/>
+        </p:spPr>
+        <p:txBody>
+          <a:bodyPr wrap="square" anchor="t" lIns="0" rIns="0" tIns="0" bIns="0"/>
+          <a:lstStyle/>
+          <a:p>
+            <a:pPr algn="l"/>
+            <a:r>
+              <a:rPr sz="2200" b="0" i="0" lang="zh-CN" altLang="en-US">
                 <a:solidFill>
                   <a:srgbClr val="141414"/>
                 </a:solidFill>
@@ -5428,7 +5890,7 @@
                 <a:ea typeface="Noto Sans CJK SC Medium"/>
                 <a:cs typeface="Noto Sans CJK SC Medium"/>
               </a:rPr>
-              <a:t>艾护理建记录</a:t>
+              <a:t>十万个，不赚一百兆</a:t>
             </a:r>
           </a:p>
         </p:txBody>
@@ -5442,7 +5904,7 @@
         <p:spPr>
           <a:xfrm>
             <a:off x="658368" y="2240280"/>
-            <a:ext cx="2103120" cy="2011680"/>
+            <a:ext cx="3246120" cy="1965960"/>
           </a:xfrm>
           <a:prstGeom prst="rect">
             <a:avLst/>
@@ -5459,7 +5921,7 @@
               </a:lnSpc>
             </a:pPr>
             <a:r>
-              <a:rPr sz="1400" b="0" i="0" lang="zh-CN" altLang="en-US">
+              <a:rPr sz="1500" b="0" i="0" lang="zh-CN" altLang="en-US">
                 <a:solidFill>
                   <a:srgbClr val="2C2C2C"/>
                 </a:solidFill>
@@ -5467,10 +5929,11 @@
                 <a:ea typeface="Noto Sans CJK SC"/>
                 <a:cs typeface="Noto Sans CJK SC"/>
               </a:rPr>
-              <a:t>新人先进来。
-每餐、体型、步数、
-用药。
-记录先每天跑起来。</a:t>
+              <a:t>鸡蛋、油、充电接进来。
+一百兆由大约五百个
+主力品目赚。
+阿扎做的是热狗那一件事。
+先接每天都发生的开支。</a:t>
             </a:r>
           </a:p>
         </p:txBody>
@@ -5483,7 +5946,7 @@
         </p:nvSpPr>
         <p:spPr>
           <a:xfrm>
-            <a:off x="2752344" y="1207008"/>
+            <a:off x="4160520" y="1207008"/>
             <a:ext cx="10972" cy="3063240"/>
           </a:xfrm>
           <a:prstGeom prst="rect">
@@ -5526,8 +5989,8 @@
         </p:nvSpPr>
         <p:spPr>
           <a:xfrm>
-            <a:off x="2871215" y="1207008"/>
-            <a:ext cx="2011680" cy="237744"/>
+            <a:off x="4361688" y="1207008"/>
+            <a:ext cx="3200400" cy="237744"/>
           </a:xfrm>
           <a:prstGeom prst="rect">
             <a:avLst/>
@@ -5561,21 +6024,21 @@
         </p:nvSpPr>
         <p:spPr>
           <a:xfrm>
-            <a:off x="2871215" y="1499616"/>
-            <a:ext cx="2103120" cy="640080"/>
-          </a:xfrm>
-          <a:prstGeom prst="rect">
-            <a:avLst/>
-          </a:prstGeom>
-          <a:noFill/>
-        </p:spPr>
-        <p:txBody>
-          <a:bodyPr wrap="square" anchor="t" lIns="0" rIns="0" tIns="0" bIns="0"/>
-          <a:lstStyle/>
-          <a:p>
-            <a:pPr algn="l"/>
-            <a:r>
-              <a:rPr sz="2000" b="0" i="0" lang="zh-CN" altLang="en-US">
+            <a:off x="4361688" y="1499616"/>
+            <a:ext cx="3246120" cy="640080"/>
+          </a:xfrm>
+          <a:prstGeom prst="rect">
+            <a:avLst/>
+          </a:prstGeom>
+          <a:noFill/>
+        </p:spPr>
+        <p:txBody>
+          <a:bodyPr wrap="square" anchor="t" lIns="0" rIns="0" tIns="0" bIns="0"/>
+          <a:lstStyle/>
+          <a:p>
+            <a:pPr algn="l"/>
+            <a:r>
+              <a:rPr sz="2200" b="0" i="0" lang="zh-CN" altLang="en-US">
                 <a:solidFill>
                   <a:srgbClr val="141414"/>
                 </a:solidFill>
@@ -5583,7 +6046,7 @@
                 <a:ea typeface="Noto Sans CJK SC Medium"/>
                 <a:cs typeface="Noto Sans CJK SC Medium"/>
               </a:rPr>
-              <a:t>说缺什么</a:t>
+              <a:t>鲭鱼回答不了</a:t>
             </a:r>
           </a:p>
         </p:txBody>
@@ -5596,8 +6059,8 @@
         </p:nvSpPr>
         <p:spPr>
           <a:xfrm>
-            <a:off x="2871215" y="2240280"/>
-            <a:ext cx="2103120" cy="2011680"/>
+            <a:off x="4361688" y="2240280"/>
+            <a:ext cx="3246120" cy="1965960"/>
           </a:xfrm>
           <a:prstGeom prst="rect">
             <a:avLst/>
@@ -5614,7 +6077,7 @@
               </a:lnSpc>
             </a:pPr>
             <a:r>
-              <a:rPr sz="1400" b="0" i="0" lang="zh-CN" altLang="en-US">
+              <a:rPr sz="1500" b="0" i="0" lang="zh-CN" altLang="en-US">
                 <a:solidFill>
                   <a:srgbClr val="2C2C2C"/>
                 </a:solidFill>
@@ -5622,10 +6085,10 @@
                 <a:ea typeface="Noto Sans CJK SC"/>
                 <a:cs typeface="Noto Sans CJK SC"/>
               </a:rPr>
-              <a:t>先说这个人
-缺哪个功能。
-一个功能，
-只有一个产品。</a:t>
+              <a:t>成本率到七成五的日常品，
+单靠它到不了一百兆。
+它负责人每天来。
+主力品目负责赚。</a:t>
             </a:r>
           </a:p>
         </p:txBody>
@@ -5638,7 +6101,7 @@
         </p:nvSpPr>
         <p:spPr>
           <a:xfrm>
-            <a:off x="4965192" y="1207008"/>
+            <a:off x="7863840" y="1207008"/>
             <a:ext cx="10972" cy="3063240"/>
           </a:xfrm>
           <a:prstGeom prst="rect">
@@ -5681,8 +6144,8 @@
         </p:nvSpPr>
         <p:spPr>
           <a:xfrm>
-            <a:off x="5084064" y="1207008"/>
-            <a:ext cx="2011680" cy="237744"/>
+            <a:off x="8065008" y="1207008"/>
+            <a:ext cx="3200400" cy="237744"/>
           </a:xfrm>
           <a:prstGeom prst="rect">
             <a:avLst/>
@@ -5716,21 +6179,21 @@
         </p:nvSpPr>
         <p:spPr>
           <a:xfrm>
-            <a:off x="5084064" y="1499616"/>
-            <a:ext cx="2103120" cy="640080"/>
-          </a:xfrm>
-          <a:prstGeom prst="rect">
-            <a:avLst/>
-          </a:prstGeom>
-          <a:noFill/>
-        </p:spPr>
-        <p:txBody>
-          <a:bodyPr wrap="square" anchor="t" lIns="0" rIns="0" tIns="0" bIns="0"/>
-          <a:lstStyle/>
-          <a:p>
-            <a:pPr algn="l"/>
-            <a:r>
-              <a:rPr sz="2000" b="0" i="0" lang="zh-CN" altLang="en-US">
+            <a:off x="8065008" y="1499616"/>
+            <a:ext cx="3246120" cy="640080"/>
+          </a:xfrm>
+          <a:prstGeom prst="rect">
+            <a:avLst/>
+          </a:prstGeom>
+          <a:noFill/>
+        </p:spPr>
+        <p:txBody>
+          <a:bodyPr wrap="square" anchor="t" lIns="0" rIns="0" tIns="0" bIns="0"/>
+          <a:lstStyle/>
+          <a:p>
+            <a:pPr algn="l"/>
+            <a:r>
+              <a:rPr sz="2200" b="0" i="0" lang="zh-CN" altLang="en-US">
                 <a:solidFill>
                   <a:srgbClr val="141414"/>
                 </a:solidFill>
@@ -5738,7 +6201,7 @@
                 <a:ea typeface="Noto Sans CJK SC Medium"/>
                 <a:cs typeface="Noto Sans CJK SC Medium"/>
               </a:rPr>
-              <a:t>那一个</a:t>
+              <a:t>电，先定哪张卡</a:t>
             </a:r>
           </a:p>
         </p:txBody>
@@ -5751,8 +6214,8 @@
         </p:nvSpPr>
         <p:spPr>
           <a:xfrm>
-            <a:off x="5084064" y="2240280"/>
-            <a:ext cx="2103120" cy="2011680"/>
+            <a:off x="8065008" y="2240280"/>
+            <a:ext cx="3246120" cy="1965960"/>
           </a:xfrm>
           <a:prstGeom prst="rect">
             <a:avLst/>
@@ -5769,7 +6232,7 @@
               </a:lnSpc>
             </a:pPr>
             <a:r>
-              <a:rPr sz="1400" b="0" i="0" lang="zh-CN" altLang="en-US">
+              <a:rPr sz="1500" b="0" i="0" lang="zh-CN" altLang="en-US">
                 <a:solidFill>
                   <a:srgbClr val="2C2C2C"/>
                 </a:solidFill>
@@ -5777,10 +6240,11 @@
                 <a:ea typeface="Noto Sans CJK SC"/>
                 <a:cs typeface="Noto Sans CJK SC"/>
               </a:rPr>
-              <a:t>进的就是品类里
-那一个冠军。
-不必再比较，
-话对着这个人说。</a:t>
+              <a:t>不卖加油券，
+走联名卡积分。
+中国电动车多。
+用哪张卡、哪张充电网，
+先定。能累积，再对会员说。</a:t>
             </a:r>
           </a:p>
         </p:txBody>
@@ -5793,8 +6257,8 @@
         </p:nvSpPr>
         <p:spPr>
           <a:xfrm>
-            <a:off x="7178040" y="1207008"/>
-            <a:ext cx="10972" cy="3063240"/>
+            <a:off x="658368" y="4754880"/>
+            <a:ext cx="10881360" cy="10972"/>
           </a:xfrm>
           <a:prstGeom prst="rect">
             <a:avLst/>
@@ -5836,21 +6300,25 @@
         </p:nvSpPr>
         <p:spPr>
           <a:xfrm>
-            <a:off x="7296912" y="1207008"/>
-            <a:ext cx="2011680" cy="237744"/>
-          </a:xfrm>
-          <a:prstGeom prst="rect">
-            <a:avLst/>
-          </a:prstGeom>
-          <a:noFill/>
-        </p:spPr>
-        <p:txBody>
-          <a:bodyPr wrap="square" anchor="t" lIns="0" rIns="0" tIns="0" bIns="0"/>
-          <a:lstStyle/>
-          <a:p>
-            <a:pPr algn="l"/>
-            <a:r>
-              <a:rPr sz="1400" b="0" i="0" lang="zh-CN" altLang="en-US">
+            <a:off x="658368" y="4956048"/>
+            <a:ext cx="10789920" cy="1051560"/>
+          </a:xfrm>
+          <a:prstGeom prst="rect">
+            <a:avLst/>
+          </a:prstGeom>
+          <a:noFill/>
+        </p:spPr>
+        <p:txBody>
+          <a:bodyPr wrap="square" anchor="t" lIns="0" rIns="0" tIns="0" bIns="0"/>
+          <a:lstStyle/>
+          <a:p>
+            <a:pPr algn="l">
+              <a:lnSpc>
+                <a:spcPct val="130000"/>
+              </a:lnSpc>
+            </a:pPr>
+            <a:r>
+              <a:rPr sz="2000" b="0" i="0" lang="zh-CN" altLang="en-US">
                 <a:solidFill>
                   <a:srgbClr val="9E1B1B"/>
                 </a:solidFill>
@@ -5858,7 +6326,8 @@
                 <a:ea typeface="Noto Sans CJK SC Medium"/>
                 <a:cs typeface="Noto Sans CJK SC Medium"/>
               </a:rPr>
-              <a:t>04</a:t>
+              <a:t>每天的开支接进同一个平台。
+人每天来，五百个主力的产量才留得住。</a:t>
             </a:r>
           </a:p>
         </p:txBody>
@@ -5871,85 +6340,139 @@
         </p:nvSpPr>
         <p:spPr>
           <a:xfrm>
-            <a:off x="7296912" y="1499616"/>
-            <a:ext cx="2103120" cy="640080"/>
-          </a:xfrm>
-          <a:prstGeom prst="rect">
-            <a:avLst/>
-          </a:prstGeom>
-          <a:noFill/>
-        </p:spPr>
-        <p:txBody>
-          <a:bodyPr wrap="square" anchor="t" lIns="0" rIns="0" tIns="0" bIns="0"/>
-          <a:lstStyle/>
-          <a:p>
-            <a:pPr algn="l"/>
-            <a:r>
-              <a:rPr sz="2000" b="0" i="0" lang="zh-CN" altLang="en-US">
-                <a:solidFill>
-                  <a:srgbClr val="141414"/>
+            <a:off x="10561320" y="6492240"/>
+            <a:ext cx="1051560" cy="201168"/>
+          </a:xfrm>
+          <a:prstGeom prst="rect">
+            <a:avLst/>
+          </a:prstGeom>
+          <a:noFill/>
+        </p:spPr>
+        <p:txBody>
+          <a:bodyPr wrap="square" anchor="t" lIns="0" rIns="0" tIns="0" bIns="0"/>
+          <a:lstStyle/>
+          <a:p>
+            <a:pPr algn="r"/>
+            <a:r>
+              <a:rPr sz="1100" b="0" i="0" lang="zh-CN" altLang="en-US">
+                <a:solidFill>
+                  <a:srgbClr val="C8C8C8"/>
+                </a:solidFill>
+                <a:latin typeface="Noto Sans CJK SC"/>
+                <a:ea typeface="Noto Sans CJK SC"/>
+                <a:cs typeface="Noto Sans CJK SC"/>
+              </a:rPr>
+              <a:t>11</a:t>
+            </a:r>
+          </a:p>
+        </p:txBody>
+      </p:sp>
+    </p:spTree>
+  </p:cSld>
+  <p:clrMapOvr>
+    <a:masterClrMapping/>
+  </p:clrMapOvr>
+</p:sld>
+</file>
+
+<file path=ppt/slides/slide12.xml><?xml version="1.0" encoding="utf-8"?>
+<p:sld xmlns:a="http://schemas.openxmlformats.org/drawingml/2006/main" xmlns:p="http://schemas.openxmlformats.org/presentationml/2006/main" xmlns:r="http://schemas.openxmlformats.org/officeDocument/2006/relationships">
+  <p:cSld>
+    <p:bg>
+      <p:bgPr>
+        <a:solidFill>
+          <a:srgbClr val="FFFFFF"/>
+        </a:solidFill>
+        <a:effectLst/>
+      </p:bgPr>
+    </p:bg>
+    <p:spTree>
+      <p:nvGrpSpPr>
+        <p:cNvPr id="1" name=""/>
+        <p:cNvGrpSpPr/>
+        <p:nvPr/>
+      </p:nvGrpSpPr>
+      <p:grpSpPr/>
+      <p:sp>
+        <p:nvSpPr>
+          <p:cNvPr id="2" name="TextBox 1"/>
+          <p:cNvSpPr txBox="1"/>
+          <p:nvPr/>
+        </p:nvSpPr>
+        <p:spPr>
+          <a:xfrm>
+            <a:off x="658368" y="365760"/>
+            <a:ext cx="640080" cy="329184"/>
+          </a:xfrm>
+          <a:prstGeom prst="rect">
+            <a:avLst/>
+          </a:prstGeom>
+          <a:noFill/>
+        </p:spPr>
+        <p:txBody>
+          <a:bodyPr wrap="square" anchor="t" lIns="0" rIns="0" tIns="0" bIns="0"/>
+          <a:lstStyle/>
+          <a:p>
+            <a:pPr algn="l"/>
+            <a:r>
+              <a:rPr sz="1500" b="0" i="0" lang="zh-CN" altLang="en-US">
+                <a:solidFill>
+                  <a:srgbClr val="9E1B1B"/>
                 </a:solidFill>
                 <a:latin typeface="Noto Sans CJK SC Medium"/>
                 <a:ea typeface="Noto Sans CJK SC Medium"/>
                 <a:cs typeface="Noto Sans CJK SC Medium"/>
               </a:rPr>
-              <a:t>阿扎每天</a:t>
-            </a:r>
-          </a:p>
-        </p:txBody>
-      </p:sp>
-      <p:sp>
-        <p:nvSpPr>
-          <p:cNvPr id="19" name="TextBox 18"/>
-          <p:cNvSpPr txBox="1"/>
-          <p:nvPr/>
-        </p:nvSpPr>
-        <p:spPr>
-          <a:xfrm>
-            <a:off x="7296912" y="2240280"/>
-            <a:ext cx="2103120" cy="2011680"/>
-          </a:xfrm>
-          <a:prstGeom prst="rect">
-            <a:avLst/>
-          </a:prstGeom>
-          <a:noFill/>
-        </p:spPr>
-        <p:txBody>
-          <a:bodyPr wrap="square" anchor="t" lIns="0" rIns="0" tIns="0" bIns="0"/>
-          <a:lstStyle/>
-          <a:p>
-            <a:pPr algn="l">
-              <a:lnSpc>
-                <a:spcPct val="135000"/>
-              </a:lnSpc>
-            </a:pPr>
-            <a:r>
-              <a:rPr sz="1400" b="0" i="0" lang="zh-CN" altLang="en-US">
-                <a:solidFill>
-                  <a:srgbClr val="2C2C2C"/>
-                </a:solidFill>
-                <a:latin typeface="Noto Sans CJK SC"/>
-                <a:ea typeface="Noto Sans CJK SC"/>
-                <a:cs typeface="Noto Sans CJK SC"/>
-              </a:rPr>
-              <a:t>每天的开支接进来。
-人每天打开。
-主力品目在这里
-被带出来。</a:t>
-            </a:r>
-          </a:p>
-        </p:txBody>
-      </p:sp>
-      <p:sp>
-        <p:nvSpPr>
-          <p:cNvPr id="20" name="Rectangle 19"/>
+              <a:t>11</a:t>
+            </a:r>
+          </a:p>
+        </p:txBody>
+      </p:sp>
+      <p:sp>
+        <p:nvSpPr>
+          <p:cNvPr id="3" name="TextBox 2"/>
+          <p:cNvSpPr txBox="1"/>
+          <p:nvPr/>
+        </p:nvSpPr>
+        <p:spPr>
+          <a:xfrm>
+            <a:off x="1371600" y="310896"/>
+            <a:ext cx="10058400" cy="438912"/>
+          </a:xfrm>
+          <a:prstGeom prst="rect">
+            <a:avLst/>
+          </a:prstGeom>
+          <a:noFill/>
+        </p:spPr>
+        <p:txBody>
+          <a:bodyPr wrap="square" anchor="t" lIns="0" rIns="0" tIns="0" bIns="0"/>
+          <a:lstStyle/>
+          <a:p>
+            <a:pPr algn="l"/>
+            <a:r>
+              <a:rPr sz="3000" b="0" i="0" lang="zh-CN" altLang="en-US">
+                <a:solidFill>
+                  <a:srgbClr val="141414"/>
+                </a:solidFill>
+                <a:latin typeface="Noto Sans CJK SC Medium"/>
+                <a:ea typeface="Noto Sans CJK SC Medium"/>
+                <a:cs typeface="Noto Sans CJK SC Medium"/>
+              </a:rPr>
+              <a:t>三台是一条线，不是三个栏</a:t>
+            </a:r>
+          </a:p>
+        </p:txBody>
+      </p:sp>
+      <p:sp>
+        <p:nvSpPr>
+          <p:cNvPr id="4" name="Rectangle 3"/>
           <p:cNvSpPr/>
           <p:nvPr/>
         </p:nvSpPr>
         <p:spPr>
           <a:xfrm>
-            <a:off x="9390887" y="1207008"/>
-            <a:ext cx="10972" cy="3063240"/>
+            <a:off x="658368" y="960120"/>
+            <a:ext cx="10881360" cy="10972"/>
           </a:xfrm>
           <a:prstGeom prst="rect">
             <a:avLst/>
@@ -5985,13 +6508,13 @@
       </p:sp>
       <p:sp>
         <p:nvSpPr>
-          <p:cNvPr id="21" name="TextBox 20"/>
-          <p:cNvSpPr txBox="1"/>
-          <p:nvPr/>
-        </p:nvSpPr>
-        <p:spPr>
-          <a:xfrm>
-            <a:off x="9509759" y="1207008"/>
+          <p:cNvPr id="5" name="TextBox 4"/>
+          <p:cNvSpPr txBox="1"/>
+          <p:nvPr/>
+        </p:nvSpPr>
+        <p:spPr>
+          <a:xfrm>
+            <a:off x="658368" y="1207008"/>
             <a:ext cx="2011680" cy="237744"/>
           </a:xfrm>
           <a:prstGeom prst="rect">
@@ -6013,20 +6536,20 @@
                 <a:ea typeface="Noto Sans CJK SC Medium"/>
                 <a:cs typeface="Noto Sans CJK SC Medium"/>
               </a:rPr>
-              <a:t>05</a:t>
-            </a:r>
-          </a:p>
-        </p:txBody>
-      </p:sp>
-      <p:sp>
-        <p:nvSpPr>
-          <p:cNvPr id="22" name="TextBox 21"/>
-          <p:cNvSpPr txBox="1"/>
-          <p:nvPr/>
-        </p:nvSpPr>
-        <p:spPr>
-          <a:xfrm>
-            <a:off x="9509759" y="1499616"/>
+              <a:t>01</a:t>
+            </a:r>
+          </a:p>
+        </p:txBody>
+      </p:sp>
+      <p:sp>
+        <p:nvSpPr>
+          <p:cNvPr id="6" name="TextBox 5"/>
+          <p:cNvSpPr txBox="1"/>
+          <p:nvPr/>
+        </p:nvSpPr>
+        <p:spPr>
+          <a:xfrm>
+            <a:off x="658368" y="1499616"/>
             <a:ext cx="2103120" cy="640080"/>
           </a:xfrm>
           <a:prstGeom prst="rect">
@@ -6048,20 +6571,20 @@
                 <a:ea typeface="Noto Sans CJK SC Medium"/>
                 <a:cs typeface="Noto Sans CJK SC Medium"/>
               </a:rPr>
-              <a:t>PPO 与排产</a:t>
-            </a:r>
-          </a:p>
-        </p:txBody>
-      </p:sp>
-      <p:sp>
-        <p:nvSpPr>
-          <p:cNvPr id="23" name="TextBox 22"/>
-          <p:cNvSpPr txBox="1"/>
-          <p:nvPr/>
-        </p:nvSpPr>
-        <p:spPr>
-          <a:xfrm>
-            <a:off x="9509759" y="2240280"/>
+              <a:t>艾护理建记录</a:t>
+            </a:r>
+          </a:p>
+        </p:txBody>
+      </p:sp>
+      <p:sp>
+        <p:nvSpPr>
+          <p:cNvPr id="7" name="TextBox 6"/>
+          <p:cNvSpPr txBox="1"/>
+          <p:nvPr/>
+        </p:nvSpPr>
+        <p:spPr>
+          <a:xfrm>
+            <a:off x="658368" y="2240280"/>
             <a:ext cx="2103120" cy="2011680"/>
           </a:xfrm>
           <a:prstGeom prst="rect">
@@ -6087,24 +6610,24 @@
                 <a:ea typeface="Noto Sans CJK SC"/>
                 <a:cs typeface="Noto Sans CJK SC"/>
               </a:rPr>
-              <a:t>用的人记在 PPO 名下。
-合起来，是下个月
-那只罐子和栽培合同
-看得见的数。</a:t>
-            </a:r>
-          </a:p>
-        </p:txBody>
-      </p:sp>
-      <p:sp>
-        <p:nvSpPr>
-          <p:cNvPr id="24" name="Rectangle 23"/>
+              <a:t>新人先进来。
+每餐、体型、步数、
+用药。
+记录先每天跑起来。</a:t>
+            </a:r>
+          </a:p>
+        </p:txBody>
+      </p:sp>
+      <p:sp>
+        <p:nvSpPr>
+          <p:cNvPr id="8" name="Rectangle 7"/>
           <p:cNvSpPr/>
           <p:nvPr/>
         </p:nvSpPr>
         <p:spPr>
           <a:xfrm>
-            <a:off x="658368" y="4617720"/>
-            <a:ext cx="10881360" cy="10972"/>
+            <a:off x="2752344" y="1207008"/>
+            <a:ext cx="10972" cy="3063240"/>
           </a:xfrm>
           <a:prstGeom prst="rect">
             <a:avLst/>
@@ -6140,6 +6663,626 @@
       </p:sp>
       <p:sp>
         <p:nvSpPr>
+          <p:cNvPr id="9" name="TextBox 8"/>
+          <p:cNvSpPr txBox="1"/>
+          <p:nvPr/>
+        </p:nvSpPr>
+        <p:spPr>
+          <a:xfrm>
+            <a:off x="2871215" y="1207008"/>
+            <a:ext cx="2011680" cy="237744"/>
+          </a:xfrm>
+          <a:prstGeom prst="rect">
+            <a:avLst/>
+          </a:prstGeom>
+          <a:noFill/>
+        </p:spPr>
+        <p:txBody>
+          <a:bodyPr wrap="square" anchor="t" lIns="0" rIns="0" tIns="0" bIns="0"/>
+          <a:lstStyle/>
+          <a:p>
+            <a:pPr algn="l"/>
+            <a:r>
+              <a:rPr sz="1400" b="0" i="0" lang="zh-CN" altLang="en-US">
+                <a:solidFill>
+                  <a:srgbClr val="9E1B1B"/>
+                </a:solidFill>
+                <a:latin typeface="Noto Sans CJK SC Medium"/>
+                <a:ea typeface="Noto Sans CJK SC Medium"/>
+                <a:cs typeface="Noto Sans CJK SC Medium"/>
+              </a:rPr>
+              <a:t>02</a:t>
+            </a:r>
+          </a:p>
+        </p:txBody>
+      </p:sp>
+      <p:sp>
+        <p:nvSpPr>
+          <p:cNvPr id="10" name="TextBox 9"/>
+          <p:cNvSpPr txBox="1"/>
+          <p:nvPr/>
+        </p:nvSpPr>
+        <p:spPr>
+          <a:xfrm>
+            <a:off x="2871215" y="1499616"/>
+            <a:ext cx="2103120" cy="640080"/>
+          </a:xfrm>
+          <a:prstGeom prst="rect">
+            <a:avLst/>
+          </a:prstGeom>
+          <a:noFill/>
+        </p:spPr>
+        <p:txBody>
+          <a:bodyPr wrap="square" anchor="t" lIns="0" rIns="0" tIns="0" bIns="0"/>
+          <a:lstStyle/>
+          <a:p>
+            <a:pPr algn="l"/>
+            <a:r>
+              <a:rPr sz="2000" b="0" i="0" lang="zh-CN" altLang="en-US">
+                <a:solidFill>
+                  <a:srgbClr val="141414"/>
+                </a:solidFill>
+                <a:latin typeface="Noto Sans CJK SC Medium"/>
+                <a:ea typeface="Noto Sans CJK SC Medium"/>
+                <a:cs typeface="Noto Sans CJK SC Medium"/>
+              </a:rPr>
+              <a:t>说缺什么</a:t>
+            </a:r>
+          </a:p>
+        </p:txBody>
+      </p:sp>
+      <p:sp>
+        <p:nvSpPr>
+          <p:cNvPr id="11" name="TextBox 10"/>
+          <p:cNvSpPr txBox="1"/>
+          <p:nvPr/>
+        </p:nvSpPr>
+        <p:spPr>
+          <a:xfrm>
+            <a:off x="2871215" y="2240280"/>
+            <a:ext cx="2103120" cy="2011680"/>
+          </a:xfrm>
+          <a:prstGeom prst="rect">
+            <a:avLst/>
+          </a:prstGeom>
+          <a:noFill/>
+        </p:spPr>
+        <p:txBody>
+          <a:bodyPr wrap="square" anchor="t" lIns="0" rIns="0" tIns="0" bIns="0"/>
+          <a:lstStyle/>
+          <a:p>
+            <a:pPr algn="l">
+              <a:lnSpc>
+                <a:spcPct val="135000"/>
+              </a:lnSpc>
+            </a:pPr>
+            <a:r>
+              <a:rPr sz="1400" b="0" i="0" lang="zh-CN" altLang="en-US">
+                <a:solidFill>
+                  <a:srgbClr val="2C2C2C"/>
+                </a:solidFill>
+                <a:latin typeface="Noto Sans CJK SC"/>
+                <a:ea typeface="Noto Sans CJK SC"/>
+                <a:cs typeface="Noto Sans CJK SC"/>
+              </a:rPr>
+              <a:t>先说这个人
+缺哪个功能。
+一个功能，
+只有一个产品。</a:t>
+            </a:r>
+          </a:p>
+        </p:txBody>
+      </p:sp>
+      <p:sp>
+        <p:nvSpPr>
+          <p:cNvPr id="12" name="Rectangle 11"/>
+          <p:cNvSpPr/>
+          <p:nvPr/>
+        </p:nvSpPr>
+        <p:spPr>
+          <a:xfrm>
+            <a:off x="4965192" y="1207008"/>
+            <a:ext cx="10972" cy="3063240"/>
+          </a:xfrm>
+          <a:prstGeom prst="rect">
+            <a:avLst/>
+          </a:prstGeom>
+          <a:solidFill>
+            <a:srgbClr val="E2E2E2"/>
+          </a:solidFill>
+          <a:ln>
+            <a:noFill/>
+          </a:ln>
+        </p:spPr>
+        <p:style>
+          <a:lnRef idx="1">
+            <a:schemeClr val="accent1"/>
+          </a:lnRef>
+          <a:fillRef idx="3">
+            <a:schemeClr val="accent1"/>
+          </a:fillRef>
+          <a:effectRef idx="2">
+            <a:schemeClr val="accent1"/>
+          </a:effectRef>
+          <a:fontRef idx="minor">
+            <a:schemeClr val="lt1"/>
+          </a:fontRef>
+        </p:style>
+        <p:txBody>
+          <a:bodyPr rtlCol="0" anchor="ctr"/>
+          <a:lstStyle/>
+          <a:p>
+            <a:pPr algn="ctr"/>
+          </a:p>
+        </p:txBody>
+      </p:sp>
+      <p:sp>
+        <p:nvSpPr>
+          <p:cNvPr id="13" name="TextBox 12"/>
+          <p:cNvSpPr txBox="1"/>
+          <p:nvPr/>
+        </p:nvSpPr>
+        <p:spPr>
+          <a:xfrm>
+            <a:off x="5084064" y="1207008"/>
+            <a:ext cx="2011680" cy="237744"/>
+          </a:xfrm>
+          <a:prstGeom prst="rect">
+            <a:avLst/>
+          </a:prstGeom>
+          <a:noFill/>
+        </p:spPr>
+        <p:txBody>
+          <a:bodyPr wrap="square" anchor="t" lIns="0" rIns="0" tIns="0" bIns="0"/>
+          <a:lstStyle/>
+          <a:p>
+            <a:pPr algn="l"/>
+            <a:r>
+              <a:rPr sz="1400" b="0" i="0" lang="zh-CN" altLang="en-US">
+                <a:solidFill>
+                  <a:srgbClr val="9E1B1B"/>
+                </a:solidFill>
+                <a:latin typeface="Noto Sans CJK SC Medium"/>
+                <a:ea typeface="Noto Sans CJK SC Medium"/>
+                <a:cs typeface="Noto Sans CJK SC Medium"/>
+              </a:rPr>
+              <a:t>03</a:t>
+            </a:r>
+          </a:p>
+        </p:txBody>
+      </p:sp>
+      <p:sp>
+        <p:nvSpPr>
+          <p:cNvPr id="14" name="TextBox 13"/>
+          <p:cNvSpPr txBox="1"/>
+          <p:nvPr/>
+        </p:nvSpPr>
+        <p:spPr>
+          <a:xfrm>
+            <a:off x="5084064" y="1499616"/>
+            <a:ext cx="2103120" cy="640080"/>
+          </a:xfrm>
+          <a:prstGeom prst="rect">
+            <a:avLst/>
+          </a:prstGeom>
+          <a:noFill/>
+        </p:spPr>
+        <p:txBody>
+          <a:bodyPr wrap="square" anchor="t" lIns="0" rIns="0" tIns="0" bIns="0"/>
+          <a:lstStyle/>
+          <a:p>
+            <a:pPr algn="l"/>
+            <a:r>
+              <a:rPr sz="2000" b="0" i="0" lang="zh-CN" altLang="en-US">
+                <a:solidFill>
+                  <a:srgbClr val="141414"/>
+                </a:solidFill>
+                <a:latin typeface="Noto Sans CJK SC Medium"/>
+                <a:ea typeface="Noto Sans CJK SC Medium"/>
+                <a:cs typeface="Noto Sans CJK SC Medium"/>
+              </a:rPr>
+              <a:t>那一个</a:t>
+            </a:r>
+          </a:p>
+        </p:txBody>
+      </p:sp>
+      <p:sp>
+        <p:nvSpPr>
+          <p:cNvPr id="15" name="TextBox 14"/>
+          <p:cNvSpPr txBox="1"/>
+          <p:nvPr/>
+        </p:nvSpPr>
+        <p:spPr>
+          <a:xfrm>
+            <a:off x="5084064" y="2240280"/>
+            <a:ext cx="2103120" cy="2011680"/>
+          </a:xfrm>
+          <a:prstGeom prst="rect">
+            <a:avLst/>
+          </a:prstGeom>
+          <a:noFill/>
+        </p:spPr>
+        <p:txBody>
+          <a:bodyPr wrap="square" anchor="t" lIns="0" rIns="0" tIns="0" bIns="0"/>
+          <a:lstStyle/>
+          <a:p>
+            <a:pPr algn="l">
+              <a:lnSpc>
+                <a:spcPct val="135000"/>
+              </a:lnSpc>
+            </a:pPr>
+            <a:r>
+              <a:rPr sz="1400" b="0" i="0" lang="zh-CN" altLang="en-US">
+                <a:solidFill>
+                  <a:srgbClr val="2C2C2C"/>
+                </a:solidFill>
+                <a:latin typeface="Noto Sans CJK SC"/>
+                <a:ea typeface="Noto Sans CJK SC"/>
+                <a:cs typeface="Noto Sans CJK SC"/>
+              </a:rPr>
+              <a:t>进的就是品类里
+那一个冠军。
+不必再比较，
+话对着这个人说。</a:t>
+            </a:r>
+          </a:p>
+        </p:txBody>
+      </p:sp>
+      <p:sp>
+        <p:nvSpPr>
+          <p:cNvPr id="16" name="Rectangle 15"/>
+          <p:cNvSpPr/>
+          <p:nvPr/>
+        </p:nvSpPr>
+        <p:spPr>
+          <a:xfrm>
+            <a:off x="7178040" y="1207008"/>
+            <a:ext cx="10972" cy="3063240"/>
+          </a:xfrm>
+          <a:prstGeom prst="rect">
+            <a:avLst/>
+          </a:prstGeom>
+          <a:solidFill>
+            <a:srgbClr val="E2E2E2"/>
+          </a:solidFill>
+          <a:ln>
+            <a:noFill/>
+          </a:ln>
+        </p:spPr>
+        <p:style>
+          <a:lnRef idx="1">
+            <a:schemeClr val="accent1"/>
+          </a:lnRef>
+          <a:fillRef idx="3">
+            <a:schemeClr val="accent1"/>
+          </a:fillRef>
+          <a:effectRef idx="2">
+            <a:schemeClr val="accent1"/>
+          </a:effectRef>
+          <a:fontRef idx="minor">
+            <a:schemeClr val="lt1"/>
+          </a:fontRef>
+        </p:style>
+        <p:txBody>
+          <a:bodyPr rtlCol="0" anchor="ctr"/>
+          <a:lstStyle/>
+          <a:p>
+            <a:pPr algn="ctr"/>
+          </a:p>
+        </p:txBody>
+      </p:sp>
+      <p:sp>
+        <p:nvSpPr>
+          <p:cNvPr id="17" name="TextBox 16"/>
+          <p:cNvSpPr txBox="1"/>
+          <p:nvPr/>
+        </p:nvSpPr>
+        <p:spPr>
+          <a:xfrm>
+            <a:off x="7296912" y="1207008"/>
+            <a:ext cx="2011680" cy="237744"/>
+          </a:xfrm>
+          <a:prstGeom prst="rect">
+            <a:avLst/>
+          </a:prstGeom>
+          <a:noFill/>
+        </p:spPr>
+        <p:txBody>
+          <a:bodyPr wrap="square" anchor="t" lIns="0" rIns="0" tIns="0" bIns="0"/>
+          <a:lstStyle/>
+          <a:p>
+            <a:pPr algn="l"/>
+            <a:r>
+              <a:rPr sz="1400" b="0" i="0" lang="zh-CN" altLang="en-US">
+                <a:solidFill>
+                  <a:srgbClr val="9E1B1B"/>
+                </a:solidFill>
+                <a:latin typeface="Noto Sans CJK SC Medium"/>
+                <a:ea typeface="Noto Sans CJK SC Medium"/>
+                <a:cs typeface="Noto Sans CJK SC Medium"/>
+              </a:rPr>
+              <a:t>04</a:t>
+            </a:r>
+          </a:p>
+        </p:txBody>
+      </p:sp>
+      <p:sp>
+        <p:nvSpPr>
+          <p:cNvPr id="18" name="TextBox 17"/>
+          <p:cNvSpPr txBox="1"/>
+          <p:nvPr/>
+        </p:nvSpPr>
+        <p:spPr>
+          <a:xfrm>
+            <a:off x="7296912" y="1499616"/>
+            <a:ext cx="2103120" cy="640080"/>
+          </a:xfrm>
+          <a:prstGeom prst="rect">
+            <a:avLst/>
+          </a:prstGeom>
+          <a:noFill/>
+        </p:spPr>
+        <p:txBody>
+          <a:bodyPr wrap="square" anchor="t" lIns="0" rIns="0" tIns="0" bIns="0"/>
+          <a:lstStyle/>
+          <a:p>
+            <a:pPr algn="l"/>
+            <a:r>
+              <a:rPr sz="2000" b="0" i="0" lang="zh-CN" altLang="en-US">
+                <a:solidFill>
+                  <a:srgbClr val="141414"/>
+                </a:solidFill>
+                <a:latin typeface="Noto Sans CJK SC Medium"/>
+                <a:ea typeface="Noto Sans CJK SC Medium"/>
+                <a:cs typeface="Noto Sans CJK SC Medium"/>
+              </a:rPr>
+              <a:t>阿扎每天</a:t>
+            </a:r>
+          </a:p>
+        </p:txBody>
+      </p:sp>
+      <p:sp>
+        <p:nvSpPr>
+          <p:cNvPr id="19" name="TextBox 18"/>
+          <p:cNvSpPr txBox="1"/>
+          <p:nvPr/>
+        </p:nvSpPr>
+        <p:spPr>
+          <a:xfrm>
+            <a:off x="7296912" y="2240280"/>
+            <a:ext cx="2103120" cy="2011680"/>
+          </a:xfrm>
+          <a:prstGeom prst="rect">
+            <a:avLst/>
+          </a:prstGeom>
+          <a:noFill/>
+        </p:spPr>
+        <p:txBody>
+          <a:bodyPr wrap="square" anchor="t" lIns="0" rIns="0" tIns="0" bIns="0"/>
+          <a:lstStyle/>
+          <a:p>
+            <a:pPr algn="l">
+              <a:lnSpc>
+                <a:spcPct val="135000"/>
+              </a:lnSpc>
+            </a:pPr>
+            <a:r>
+              <a:rPr sz="1400" b="0" i="0" lang="zh-CN" altLang="en-US">
+                <a:solidFill>
+                  <a:srgbClr val="2C2C2C"/>
+                </a:solidFill>
+                <a:latin typeface="Noto Sans CJK SC"/>
+                <a:ea typeface="Noto Sans CJK SC"/>
+                <a:cs typeface="Noto Sans CJK SC"/>
+              </a:rPr>
+              <a:t>每天的开支接进来。
+人每天打开。
+主力品目在这里
+被带出来。</a:t>
+            </a:r>
+          </a:p>
+        </p:txBody>
+      </p:sp>
+      <p:sp>
+        <p:nvSpPr>
+          <p:cNvPr id="20" name="Rectangle 19"/>
+          <p:cNvSpPr/>
+          <p:nvPr/>
+        </p:nvSpPr>
+        <p:spPr>
+          <a:xfrm>
+            <a:off x="9390887" y="1207008"/>
+            <a:ext cx="10972" cy="3063240"/>
+          </a:xfrm>
+          <a:prstGeom prst="rect">
+            <a:avLst/>
+          </a:prstGeom>
+          <a:solidFill>
+            <a:srgbClr val="E2E2E2"/>
+          </a:solidFill>
+          <a:ln>
+            <a:noFill/>
+          </a:ln>
+        </p:spPr>
+        <p:style>
+          <a:lnRef idx="1">
+            <a:schemeClr val="accent1"/>
+          </a:lnRef>
+          <a:fillRef idx="3">
+            <a:schemeClr val="accent1"/>
+          </a:fillRef>
+          <a:effectRef idx="2">
+            <a:schemeClr val="accent1"/>
+          </a:effectRef>
+          <a:fontRef idx="minor">
+            <a:schemeClr val="lt1"/>
+          </a:fontRef>
+        </p:style>
+        <p:txBody>
+          <a:bodyPr rtlCol="0" anchor="ctr"/>
+          <a:lstStyle/>
+          <a:p>
+            <a:pPr algn="ctr"/>
+          </a:p>
+        </p:txBody>
+      </p:sp>
+      <p:sp>
+        <p:nvSpPr>
+          <p:cNvPr id="21" name="TextBox 20"/>
+          <p:cNvSpPr txBox="1"/>
+          <p:nvPr/>
+        </p:nvSpPr>
+        <p:spPr>
+          <a:xfrm>
+            <a:off x="9509759" y="1207008"/>
+            <a:ext cx="2011680" cy="237744"/>
+          </a:xfrm>
+          <a:prstGeom prst="rect">
+            <a:avLst/>
+          </a:prstGeom>
+          <a:noFill/>
+        </p:spPr>
+        <p:txBody>
+          <a:bodyPr wrap="square" anchor="t" lIns="0" rIns="0" tIns="0" bIns="0"/>
+          <a:lstStyle/>
+          <a:p>
+            <a:pPr algn="l"/>
+            <a:r>
+              <a:rPr sz="1400" b="0" i="0" lang="zh-CN" altLang="en-US">
+                <a:solidFill>
+                  <a:srgbClr val="9E1B1B"/>
+                </a:solidFill>
+                <a:latin typeface="Noto Sans CJK SC Medium"/>
+                <a:ea typeface="Noto Sans CJK SC Medium"/>
+                <a:cs typeface="Noto Sans CJK SC Medium"/>
+              </a:rPr>
+              <a:t>05</a:t>
+            </a:r>
+          </a:p>
+        </p:txBody>
+      </p:sp>
+      <p:sp>
+        <p:nvSpPr>
+          <p:cNvPr id="22" name="TextBox 21"/>
+          <p:cNvSpPr txBox="1"/>
+          <p:nvPr/>
+        </p:nvSpPr>
+        <p:spPr>
+          <a:xfrm>
+            <a:off x="9509759" y="1499616"/>
+            <a:ext cx="2103120" cy="640080"/>
+          </a:xfrm>
+          <a:prstGeom prst="rect">
+            <a:avLst/>
+          </a:prstGeom>
+          <a:noFill/>
+        </p:spPr>
+        <p:txBody>
+          <a:bodyPr wrap="square" anchor="t" lIns="0" rIns="0" tIns="0" bIns="0"/>
+          <a:lstStyle/>
+          <a:p>
+            <a:pPr algn="l"/>
+            <a:r>
+              <a:rPr sz="2000" b="0" i="0" lang="zh-CN" altLang="en-US">
+                <a:solidFill>
+                  <a:srgbClr val="141414"/>
+                </a:solidFill>
+                <a:latin typeface="Noto Sans CJK SC Medium"/>
+                <a:ea typeface="Noto Sans CJK SC Medium"/>
+                <a:cs typeface="Noto Sans CJK SC Medium"/>
+              </a:rPr>
+              <a:t>PPO 与排产</a:t>
+            </a:r>
+          </a:p>
+        </p:txBody>
+      </p:sp>
+      <p:sp>
+        <p:nvSpPr>
+          <p:cNvPr id="23" name="TextBox 22"/>
+          <p:cNvSpPr txBox="1"/>
+          <p:nvPr/>
+        </p:nvSpPr>
+        <p:spPr>
+          <a:xfrm>
+            <a:off x="9509759" y="2240280"/>
+            <a:ext cx="2103120" cy="2011680"/>
+          </a:xfrm>
+          <a:prstGeom prst="rect">
+            <a:avLst/>
+          </a:prstGeom>
+          <a:noFill/>
+        </p:spPr>
+        <p:txBody>
+          <a:bodyPr wrap="square" anchor="t" lIns="0" rIns="0" tIns="0" bIns="0"/>
+          <a:lstStyle/>
+          <a:p>
+            <a:pPr algn="l">
+              <a:lnSpc>
+                <a:spcPct val="135000"/>
+              </a:lnSpc>
+            </a:pPr>
+            <a:r>
+              <a:rPr sz="1400" b="0" i="0" lang="zh-CN" altLang="en-US">
+                <a:solidFill>
+                  <a:srgbClr val="2C2C2C"/>
+                </a:solidFill>
+                <a:latin typeface="Noto Sans CJK SC"/>
+                <a:ea typeface="Noto Sans CJK SC"/>
+                <a:cs typeface="Noto Sans CJK SC"/>
+              </a:rPr>
+              <a:t>用的人记在 PPO 名下。
+合起来，是下个月
+那只罐子和栽培合同
+看得见的数。</a:t>
+            </a:r>
+          </a:p>
+        </p:txBody>
+      </p:sp>
+      <p:sp>
+        <p:nvSpPr>
+          <p:cNvPr id="24" name="Rectangle 23"/>
+          <p:cNvSpPr/>
+          <p:nvPr/>
+        </p:nvSpPr>
+        <p:spPr>
+          <a:xfrm>
+            <a:off x="658368" y="4617720"/>
+            <a:ext cx="10881360" cy="10972"/>
+          </a:xfrm>
+          <a:prstGeom prst="rect">
+            <a:avLst/>
+          </a:prstGeom>
+          <a:solidFill>
+            <a:srgbClr val="E2E2E2"/>
+          </a:solidFill>
+          <a:ln>
+            <a:noFill/>
+          </a:ln>
+        </p:spPr>
+        <p:style>
+          <a:lnRef idx="1">
+            <a:schemeClr val="accent1"/>
+          </a:lnRef>
+          <a:fillRef idx="3">
+            <a:schemeClr val="accent1"/>
+          </a:fillRef>
+          <a:effectRef idx="2">
+            <a:schemeClr val="accent1"/>
+          </a:effectRef>
+          <a:fontRef idx="minor">
+            <a:schemeClr val="lt1"/>
+          </a:fontRef>
+        </p:style>
+        <p:txBody>
+          <a:bodyPr rtlCol="0" anchor="ctr"/>
+          <a:lstStyle/>
+          <a:p>
+            <a:pPr algn="ctr"/>
+          </a:p>
+        </p:txBody>
+      </p:sp>
+      <p:sp>
+        <p:nvSpPr>
           <p:cNvPr id="25" name="TextBox 24"/>
           <p:cNvSpPr txBox="1"/>
           <p:nvPr/>
@@ -6208,7 +7351,7 @@
                 <a:ea typeface="Noto Sans CJK SC"/>
                 <a:cs typeface="Noto Sans CJK SC"/>
               </a:rPr>
-              <a:t>11</a:t>
+              <a:t>12</a:t>
             </a:r>
           </a:p>
         </p:txBody>
@@ -6221,7 +7364,2222 @@
 </p:sld>
 </file>
 
-<file path=ppt/slides/slide12.xml><?xml version="1.0" encoding="utf-8"?>
+<file path=ppt/slides/slide13.xml><?xml version="1.0" encoding="utf-8"?>
+<p:sld xmlns:a="http://schemas.openxmlformats.org/drawingml/2006/main" xmlns:p="http://schemas.openxmlformats.org/presentationml/2006/main" xmlns:r="http://schemas.openxmlformats.org/officeDocument/2006/relationships">
+  <p:cSld>
+    <p:bg>
+      <p:bgPr>
+        <a:solidFill>
+          <a:srgbClr val="FFFFFF"/>
+        </a:solidFill>
+        <a:effectLst/>
+      </p:bgPr>
+    </p:bg>
+    <p:spTree>
+      <p:nvGrpSpPr>
+        <p:cNvPr id="1" name=""/>
+        <p:cNvGrpSpPr/>
+        <p:nvPr/>
+      </p:nvGrpSpPr>
+      <p:grpSpPr/>
+      <p:sp>
+        <p:nvSpPr>
+          <p:cNvPr id="2" name="TextBox 1"/>
+          <p:cNvSpPr txBox="1"/>
+          <p:nvPr/>
+        </p:nvSpPr>
+        <p:spPr>
+          <a:xfrm>
+            <a:off x="658368" y="365760"/>
+            <a:ext cx="640080" cy="329184"/>
+          </a:xfrm>
+          <a:prstGeom prst="rect">
+            <a:avLst/>
+          </a:prstGeom>
+          <a:noFill/>
+        </p:spPr>
+        <p:txBody>
+          <a:bodyPr wrap="square" anchor="t" lIns="0" rIns="0" tIns="0" bIns="0"/>
+          <a:lstStyle/>
+          <a:p>
+            <a:pPr algn="l"/>
+            <a:r>
+              <a:rPr sz="1500" b="0" i="0" lang="zh-CN" altLang="en-US">
+                <a:solidFill>
+                  <a:srgbClr val="9E1B1B"/>
+                </a:solidFill>
+                <a:latin typeface="Noto Sans CJK SC Medium"/>
+                <a:ea typeface="Noto Sans CJK SC Medium"/>
+                <a:cs typeface="Noto Sans CJK SC Medium"/>
+              </a:rPr>
+              <a:t>12</a:t>
+            </a:r>
+          </a:p>
+        </p:txBody>
+      </p:sp>
+      <p:sp>
+        <p:nvSpPr>
+          <p:cNvPr id="3" name="TextBox 2"/>
+          <p:cNvSpPr txBox="1"/>
+          <p:nvPr/>
+        </p:nvSpPr>
+        <p:spPr>
+          <a:xfrm>
+            <a:off x="1371600" y="310896"/>
+            <a:ext cx="10058400" cy="438912"/>
+          </a:xfrm>
+          <a:prstGeom prst="rect">
+            <a:avLst/>
+          </a:prstGeom>
+          <a:noFill/>
+        </p:spPr>
+        <p:txBody>
+          <a:bodyPr wrap="square" anchor="t" lIns="0" rIns="0" tIns="0" bIns="0"/>
+          <a:lstStyle/>
+          <a:p>
+            <a:pPr algn="l"/>
+            <a:r>
+              <a:rPr sz="3000" b="0" i="0" lang="zh-CN" altLang="en-US">
+                <a:solidFill>
+                  <a:srgbClr val="141414"/>
+                </a:solidFill>
+                <a:latin typeface="Noto Sans CJK SC Medium"/>
+                <a:ea typeface="Noto Sans CJK SC Medium"/>
+                <a:cs typeface="Noto Sans CJK SC Medium"/>
+              </a:rPr>
+              <a:t>三步：做什么，交什么，谁牵头</a:t>
+            </a:r>
+          </a:p>
+        </p:txBody>
+      </p:sp>
+      <p:sp>
+        <p:nvSpPr>
+          <p:cNvPr id="4" name="Rectangle 3"/>
+          <p:cNvSpPr/>
+          <p:nvPr/>
+        </p:nvSpPr>
+        <p:spPr>
+          <a:xfrm>
+            <a:off x="658368" y="960120"/>
+            <a:ext cx="10881360" cy="10972"/>
+          </a:xfrm>
+          <a:prstGeom prst="rect">
+            <a:avLst/>
+          </a:prstGeom>
+          <a:solidFill>
+            <a:srgbClr val="E2E2E2"/>
+          </a:solidFill>
+          <a:ln>
+            <a:noFill/>
+          </a:ln>
+        </p:spPr>
+        <p:style>
+          <a:lnRef idx="1">
+            <a:schemeClr val="accent1"/>
+          </a:lnRef>
+          <a:fillRef idx="3">
+            <a:schemeClr val="accent1"/>
+          </a:fillRef>
+          <a:effectRef idx="2">
+            <a:schemeClr val="accent1"/>
+          </a:effectRef>
+          <a:fontRef idx="minor">
+            <a:schemeClr val="lt1"/>
+          </a:fontRef>
+        </p:style>
+        <p:txBody>
+          <a:bodyPr rtlCol="0" anchor="ctr"/>
+          <a:lstStyle/>
+          <a:p>
+            <a:pPr algn="ctr"/>
+          </a:p>
+        </p:txBody>
+      </p:sp>
+      <p:sp>
+        <p:nvSpPr>
+          <p:cNvPr id="5" name="TextBox 4"/>
+          <p:cNvSpPr txBox="1"/>
+          <p:nvPr/>
+        </p:nvSpPr>
+        <p:spPr>
+          <a:xfrm>
+            <a:off x="658368" y="1188720"/>
+            <a:ext cx="3200400" cy="237744"/>
+          </a:xfrm>
+          <a:prstGeom prst="rect">
+            <a:avLst/>
+          </a:prstGeom>
+          <a:noFill/>
+        </p:spPr>
+        <p:txBody>
+          <a:bodyPr wrap="square" anchor="t" lIns="0" rIns="0" tIns="0" bIns="0"/>
+          <a:lstStyle/>
+          <a:p>
+            <a:pPr algn="l"/>
+            <a:r>
+              <a:rPr sz="1400" b="0" i="0" lang="zh-CN" altLang="en-US">
+                <a:solidFill>
+                  <a:srgbClr val="9E1B1B"/>
+                </a:solidFill>
+                <a:latin typeface="Noto Sans CJK SC Medium"/>
+                <a:ea typeface="Noto Sans CJK SC Medium"/>
+                <a:cs typeface="Noto Sans CJK SC Medium"/>
+              </a:rPr>
+              <a:t>01</a:t>
+            </a:r>
+          </a:p>
+        </p:txBody>
+      </p:sp>
+      <p:sp>
+        <p:nvSpPr>
+          <p:cNvPr id="6" name="TextBox 5"/>
+          <p:cNvSpPr txBox="1"/>
+          <p:nvPr/>
+        </p:nvSpPr>
+        <p:spPr>
+          <a:xfrm>
+            <a:off x="658368" y="1463040"/>
+            <a:ext cx="3291840" cy="457200"/>
+          </a:xfrm>
+          <a:prstGeom prst="rect">
+            <a:avLst/>
+          </a:prstGeom>
+          <a:noFill/>
+        </p:spPr>
+        <p:txBody>
+          <a:bodyPr wrap="square" anchor="t" lIns="0" rIns="0" tIns="0" bIns="0"/>
+          <a:lstStyle/>
+          <a:p>
+            <a:pPr algn="l"/>
+            <a:r>
+              <a:rPr sz="2200" b="0" i="0" lang="zh-CN" altLang="en-US">
+                <a:solidFill>
+                  <a:srgbClr val="141414"/>
+                </a:solidFill>
+                <a:latin typeface="Noto Sans CJK SC Medium"/>
+                <a:ea typeface="Noto Sans CJK SC Medium"/>
+                <a:cs typeface="Noto Sans CJK SC Medium"/>
+              </a:rPr>
+              <a:t>现在起</a:t>
+            </a:r>
+          </a:p>
+        </p:txBody>
+      </p:sp>
+      <p:sp>
+        <p:nvSpPr>
+          <p:cNvPr id="7" name="TextBox 6"/>
+          <p:cNvSpPr txBox="1"/>
+          <p:nvPr/>
+        </p:nvSpPr>
+        <p:spPr>
+          <a:xfrm>
+            <a:off x="658368" y="2057400"/>
+            <a:ext cx="3200400" cy="237744"/>
+          </a:xfrm>
+          <a:prstGeom prst="rect">
+            <a:avLst/>
+          </a:prstGeom>
+          <a:noFill/>
+        </p:spPr>
+        <p:txBody>
+          <a:bodyPr wrap="square" anchor="t" lIns="0" rIns="0" tIns="0" bIns="0"/>
+          <a:lstStyle/>
+          <a:p>
+            <a:pPr algn="l"/>
+            <a:r>
+              <a:rPr sz="1200" b="0" i="0" lang="zh-CN" altLang="en-US">
+                <a:solidFill>
+                  <a:srgbClr val="9E1B1B"/>
+                </a:solidFill>
+                <a:latin typeface="Noto Sans CJK SC"/>
+                <a:ea typeface="Noto Sans CJK SC"/>
+                <a:cs typeface="Noto Sans CJK SC"/>
+              </a:rPr>
+              <a:t>做什么</a:t>
+            </a:r>
+          </a:p>
+        </p:txBody>
+      </p:sp>
+      <p:sp>
+        <p:nvSpPr>
+          <p:cNvPr id="8" name="TextBox 7"/>
+          <p:cNvSpPr txBox="1"/>
+          <p:nvPr/>
+        </p:nvSpPr>
+        <p:spPr>
+          <a:xfrm>
+            <a:off x="658368" y="2304288"/>
+            <a:ext cx="3291840" cy="1280160"/>
+          </a:xfrm>
+          <a:prstGeom prst="rect">
+            <a:avLst/>
+          </a:prstGeom>
+          <a:noFill/>
+        </p:spPr>
+        <p:txBody>
+          <a:bodyPr wrap="square" anchor="t" lIns="0" rIns="0" tIns="0" bIns="0"/>
+          <a:lstStyle/>
+          <a:p>
+            <a:pPr algn="l">
+              <a:lnSpc>
+                <a:spcPct val="130000"/>
+              </a:lnSpc>
+            </a:pPr>
+            <a:r>
+              <a:rPr sz="1400" b="0" i="0" lang="zh-CN" altLang="en-US">
+                <a:solidFill>
+                  <a:srgbClr val="2C2C2C"/>
+                </a:solidFill>
+                <a:latin typeface="Noto Sans CJK SC"/>
+                <a:ea typeface="Noto Sans CJK SC"/>
+                <a:cs typeface="Noto Sans CJK SC"/>
+              </a:rPr>
+              <a:t>烟台四条线自查。
+定两件事：记录存哪里、
+哪句话能说。
+定阿扎接哪张卡、哪张充电网。</a:t>
+            </a:r>
+          </a:p>
+        </p:txBody>
+      </p:sp>
+      <p:sp>
+        <p:nvSpPr>
+          <p:cNvPr id="9" name="TextBox 8"/>
+          <p:cNvSpPr txBox="1"/>
+          <p:nvPr/>
+        </p:nvSpPr>
+        <p:spPr>
+          <a:xfrm>
+            <a:off x="658368" y="3657600"/>
+            <a:ext cx="3200400" cy="237744"/>
+          </a:xfrm>
+          <a:prstGeom prst="rect">
+            <a:avLst/>
+          </a:prstGeom>
+          <a:noFill/>
+        </p:spPr>
+        <p:txBody>
+          <a:bodyPr wrap="square" anchor="t" lIns="0" rIns="0" tIns="0" bIns="0"/>
+          <a:lstStyle/>
+          <a:p>
+            <a:pPr algn="l"/>
+            <a:r>
+              <a:rPr sz="1200" b="0" i="0" lang="zh-CN" altLang="en-US">
+                <a:solidFill>
+                  <a:srgbClr val="9E1B1B"/>
+                </a:solidFill>
+                <a:latin typeface="Noto Sans CJK SC"/>
+                <a:ea typeface="Noto Sans CJK SC"/>
+                <a:cs typeface="Noto Sans CJK SC"/>
+              </a:rPr>
+              <a:t>交出什么</a:t>
+            </a:r>
+          </a:p>
+        </p:txBody>
+      </p:sp>
+      <p:sp>
+        <p:nvSpPr>
+          <p:cNvPr id="10" name="TextBox 9"/>
+          <p:cNvSpPr txBox="1"/>
+          <p:nvPr/>
+        </p:nvSpPr>
+        <p:spPr>
+          <a:xfrm>
+            <a:off x="658368" y="3904487"/>
+            <a:ext cx="3291840" cy="731520"/>
+          </a:xfrm>
+          <a:prstGeom prst="rect">
+            <a:avLst/>
+          </a:prstGeom>
+          <a:noFill/>
+        </p:spPr>
+        <p:txBody>
+          <a:bodyPr wrap="square" anchor="t" lIns="0" rIns="0" tIns="0" bIns="0"/>
+          <a:lstStyle/>
+          <a:p>
+            <a:pPr algn="l">
+              <a:lnSpc>
+                <a:spcPct val="130000"/>
+              </a:lnSpc>
+            </a:pPr>
+            <a:r>
+              <a:rPr sz="1400" b="0" i="0" lang="zh-CN" altLang="en-US">
+                <a:solidFill>
+                  <a:srgbClr val="2C2C2C"/>
+                </a:solidFill>
+                <a:latin typeface="Noto Sans CJK SC"/>
+                <a:ea typeface="Noto Sans CJK SC"/>
+                <a:cs typeface="Noto Sans CJK SC"/>
+              </a:rPr>
+              <a:t>自查单，
+两份书面口径。</a:t>
+            </a:r>
+          </a:p>
+        </p:txBody>
+      </p:sp>
+      <p:sp>
+        <p:nvSpPr>
+          <p:cNvPr id="11" name="TextBox 10"/>
+          <p:cNvSpPr txBox="1"/>
+          <p:nvPr/>
+        </p:nvSpPr>
+        <p:spPr>
+          <a:xfrm>
+            <a:off x="658368" y="4617720"/>
+            <a:ext cx="3200400" cy="237744"/>
+          </a:xfrm>
+          <a:prstGeom prst="rect">
+            <a:avLst/>
+          </a:prstGeom>
+          <a:noFill/>
+        </p:spPr>
+        <p:txBody>
+          <a:bodyPr wrap="square" anchor="t" lIns="0" rIns="0" tIns="0" bIns="0"/>
+          <a:lstStyle/>
+          <a:p>
+            <a:pPr algn="l"/>
+            <a:r>
+              <a:rPr sz="1200" b="0" i="0" lang="zh-CN" altLang="en-US">
+                <a:solidFill>
+                  <a:srgbClr val="9E1B1B"/>
+                </a:solidFill>
+                <a:latin typeface="Noto Sans CJK SC"/>
+                <a:ea typeface="Noto Sans CJK SC"/>
+                <a:cs typeface="Noto Sans CJK SC"/>
+              </a:rPr>
+              <a:t>建议牵头</a:t>
+            </a:r>
+          </a:p>
+        </p:txBody>
+      </p:sp>
+      <p:sp>
+        <p:nvSpPr>
+          <p:cNvPr id="12" name="TextBox 11"/>
+          <p:cNvSpPr txBox="1"/>
+          <p:nvPr/>
+        </p:nvSpPr>
+        <p:spPr>
+          <a:xfrm>
+            <a:off x="658368" y="4864608"/>
+            <a:ext cx="3291840" cy="365760"/>
+          </a:xfrm>
+          <a:prstGeom prst="rect">
+            <a:avLst/>
+          </a:prstGeom>
+          <a:noFill/>
+        </p:spPr>
+        <p:txBody>
+          <a:bodyPr wrap="square" anchor="t" lIns="0" rIns="0" tIns="0" bIns="0"/>
+          <a:lstStyle/>
+          <a:p>
+            <a:pPr algn="l"/>
+            <a:r>
+              <a:rPr sz="1400" b="0" i="0" lang="zh-CN" altLang="en-US">
+                <a:solidFill>
+                  <a:srgbClr val="2C2C2C"/>
+                </a:solidFill>
+                <a:latin typeface="Noto Sans CJK SC"/>
+                <a:ea typeface="Noto Sans CJK SC"/>
+                <a:cs typeface="Noto Sans CJK SC"/>
+              </a:rPr>
+              <a:t>生产、采购、合规</a:t>
+            </a:r>
+          </a:p>
+        </p:txBody>
+      </p:sp>
+      <p:sp>
+        <p:nvSpPr>
+          <p:cNvPr id="13" name="Rectangle 12"/>
+          <p:cNvSpPr/>
+          <p:nvPr/>
+        </p:nvSpPr>
+        <p:spPr>
+          <a:xfrm>
+            <a:off x="4160520" y="1188720"/>
+            <a:ext cx="10972" cy="3977639"/>
+          </a:xfrm>
+          <a:prstGeom prst="rect">
+            <a:avLst/>
+          </a:prstGeom>
+          <a:solidFill>
+            <a:srgbClr val="E2E2E2"/>
+          </a:solidFill>
+          <a:ln>
+            <a:noFill/>
+          </a:ln>
+        </p:spPr>
+        <p:style>
+          <a:lnRef idx="1">
+            <a:schemeClr val="accent1"/>
+          </a:lnRef>
+          <a:fillRef idx="3">
+            <a:schemeClr val="accent1"/>
+          </a:fillRef>
+          <a:effectRef idx="2">
+            <a:schemeClr val="accent1"/>
+          </a:effectRef>
+          <a:fontRef idx="minor">
+            <a:schemeClr val="lt1"/>
+          </a:fontRef>
+        </p:style>
+        <p:txBody>
+          <a:bodyPr rtlCol="0" anchor="ctr"/>
+          <a:lstStyle/>
+          <a:p>
+            <a:pPr algn="ctr"/>
+          </a:p>
+        </p:txBody>
+      </p:sp>
+      <p:sp>
+        <p:nvSpPr>
+          <p:cNvPr id="14" name="TextBox 13"/>
+          <p:cNvSpPr txBox="1"/>
+          <p:nvPr/>
+        </p:nvSpPr>
+        <p:spPr>
+          <a:xfrm>
+            <a:off x="4361688" y="1188720"/>
+            <a:ext cx="3200400" cy="237744"/>
+          </a:xfrm>
+          <a:prstGeom prst="rect">
+            <a:avLst/>
+          </a:prstGeom>
+          <a:noFill/>
+        </p:spPr>
+        <p:txBody>
+          <a:bodyPr wrap="square" anchor="t" lIns="0" rIns="0" tIns="0" bIns="0"/>
+          <a:lstStyle/>
+          <a:p>
+            <a:pPr algn="l"/>
+            <a:r>
+              <a:rPr sz="1400" b="0" i="0" lang="zh-CN" altLang="en-US">
+                <a:solidFill>
+                  <a:srgbClr val="9E1B1B"/>
+                </a:solidFill>
+                <a:latin typeface="Noto Sans CJK SC Medium"/>
+                <a:ea typeface="Noto Sans CJK SC Medium"/>
+                <a:cs typeface="Noto Sans CJK SC Medium"/>
+              </a:rPr>
+              <a:t>02</a:t>
+            </a:r>
+          </a:p>
+        </p:txBody>
+      </p:sp>
+      <p:sp>
+        <p:nvSpPr>
+          <p:cNvPr id="15" name="TextBox 14"/>
+          <p:cNvSpPr txBox="1"/>
+          <p:nvPr/>
+        </p:nvSpPr>
+        <p:spPr>
+          <a:xfrm>
+            <a:off x="4361688" y="1463040"/>
+            <a:ext cx="3291840" cy="457200"/>
+          </a:xfrm>
+          <a:prstGeom prst="rect">
+            <a:avLst/>
+          </a:prstGeom>
+          <a:noFill/>
+        </p:spPr>
+        <p:txBody>
+          <a:bodyPr wrap="square" anchor="t" lIns="0" rIns="0" tIns="0" bIns="0"/>
+          <a:lstStyle/>
+          <a:p>
+            <a:pPr algn="l"/>
+            <a:r>
+              <a:rPr sz="2200" b="0" i="0" lang="zh-CN" altLang="en-US">
+                <a:solidFill>
+                  <a:srgbClr val="141414"/>
+                </a:solidFill>
+                <a:latin typeface="Noto Sans CJK SC Medium"/>
+                <a:ea typeface="Noto Sans CJK SC Medium"/>
+                <a:cs typeface="Noto Sans CJK SC Medium"/>
+              </a:rPr>
+              <a:t>带去合作方</a:t>
+            </a:r>
+          </a:p>
+        </p:txBody>
+      </p:sp>
+      <p:sp>
+        <p:nvSpPr>
+          <p:cNvPr id="16" name="TextBox 15"/>
+          <p:cNvSpPr txBox="1"/>
+          <p:nvPr/>
+        </p:nvSpPr>
+        <p:spPr>
+          <a:xfrm>
+            <a:off x="4361688" y="2057400"/>
+            <a:ext cx="3200400" cy="237744"/>
+          </a:xfrm>
+          <a:prstGeom prst="rect">
+            <a:avLst/>
+          </a:prstGeom>
+          <a:noFill/>
+        </p:spPr>
+        <p:txBody>
+          <a:bodyPr wrap="square" anchor="t" lIns="0" rIns="0" tIns="0" bIns="0"/>
+          <a:lstStyle/>
+          <a:p>
+            <a:pPr algn="l"/>
+            <a:r>
+              <a:rPr sz="1200" b="0" i="0" lang="zh-CN" altLang="en-US">
+                <a:solidFill>
+                  <a:srgbClr val="9E1B1B"/>
+                </a:solidFill>
+                <a:latin typeface="Noto Sans CJK SC"/>
+                <a:ea typeface="Noto Sans CJK SC"/>
+                <a:cs typeface="Noto Sans CJK SC"/>
+              </a:rPr>
+              <a:t>做什么</a:t>
+            </a:r>
+          </a:p>
+        </p:txBody>
+      </p:sp>
+      <p:sp>
+        <p:nvSpPr>
+          <p:cNvPr id="17" name="TextBox 16"/>
+          <p:cNvSpPr txBox="1"/>
+          <p:nvPr/>
+        </p:nvSpPr>
+        <p:spPr>
+          <a:xfrm>
+            <a:off x="4361688" y="2304288"/>
+            <a:ext cx="3291840" cy="1280160"/>
+          </a:xfrm>
+          <a:prstGeom prst="rect">
+            <a:avLst/>
+          </a:prstGeom>
+          <a:noFill/>
+        </p:spPr>
+        <p:txBody>
+          <a:bodyPr wrap="square" anchor="t" lIns="0" rIns="0" tIns="0" bIns="0"/>
+          <a:lstStyle/>
+          <a:p>
+            <a:pPr algn="l">
+              <a:lnSpc>
+                <a:spcPct val="130000"/>
+              </a:lnSpc>
+            </a:pPr>
+            <a:r>
+              <a:rPr sz="1400" b="0" i="0" lang="zh-CN" altLang="en-US">
+                <a:solidFill>
+                  <a:srgbClr val="2C2C2C"/>
+                </a:solidFill>
+                <a:latin typeface="Noto Sans CJK SC"/>
+                <a:ea typeface="Noto Sans CJK SC"/>
+                <a:cs typeface="Noto Sans CJK SC"/>
+              </a:rPr>
+              <a:t>拿三样去谈：
+月十万套的数、
+设备图纸、
+育苗就开始的合同。</a:t>
+            </a:r>
+          </a:p>
+        </p:txBody>
+      </p:sp>
+      <p:sp>
+        <p:nvSpPr>
+          <p:cNvPr id="18" name="TextBox 17"/>
+          <p:cNvSpPr txBox="1"/>
+          <p:nvPr/>
+        </p:nvSpPr>
+        <p:spPr>
+          <a:xfrm>
+            <a:off x="4361688" y="3657600"/>
+            <a:ext cx="3200400" cy="237744"/>
+          </a:xfrm>
+          <a:prstGeom prst="rect">
+            <a:avLst/>
+          </a:prstGeom>
+          <a:noFill/>
+        </p:spPr>
+        <p:txBody>
+          <a:bodyPr wrap="square" anchor="t" lIns="0" rIns="0" tIns="0" bIns="0"/>
+          <a:lstStyle/>
+          <a:p>
+            <a:pPr algn="l"/>
+            <a:r>
+              <a:rPr sz="1200" b="0" i="0" lang="zh-CN" altLang="en-US">
+                <a:solidFill>
+                  <a:srgbClr val="9E1B1B"/>
+                </a:solidFill>
+                <a:latin typeface="Noto Sans CJK SC"/>
+                <a:ea typeface="Noto Sans CJK SC"/>
+                <a:cs typeface="Noto Sans CJK SC"/>
+              </a:rPr>
+              <a:t>交出什么</a:t>
+            </a:r>
+          </a:p>
+        </p:txBody>
+      </p:sp>
+      <p:sp>
+        <p:nvSpPr>
+          <p:cNvPr id="19" name="TextBox 18"/>
+          <p:cNvSpPr txBox="1"/>
+          <p:nvPr/>
+        </p:nvSpPr>
+        <p:spPr>
+          <a:xfrm>
+            <a:off x="4361688" y="3904487"/>
+            <a:ext cx="3291840" cy="731520"/>
+          </a:xfrm>
+          <a:prstGeom prst="rect">
+            <a:avLst/>
+          </a:prstGeom>
+          <a:noFill/>
+        </p:spPr>
+        <p:txBody>
+          <a:bodyPr wrap="square" anchor="t" lIns="0" rIns="0" tIns="0" bIns="0"/>
+          <a:lstStyle/>
+          <a:p>
+            <a:pPr algn="l">
+              <a:lnSpc>
+                <a:spcPct val="130000"/>
+              </a:lnSpc>
+            </a:pPr>
+            <a:r>
+              <a:rPr sz="1400" b="0" i="0" lang="zh-CN" altLang="en-US">
+                <a:solidFill>
+                  <a:srgbClr val="2C2C2C"/>
+                </a:solidFill>
+                <a:latin typeface="Noto Sans CJK SC"/>
+                <a:ea typeface="Noto Sans CJK SC"/>
+                <a:cs typeface="Noto Sans CJK SC"/>
+              </a:rPr>
+              <a:t>一份按量重算的报价，
+一份栽培合同。</a:t>
+            </a:r>
+          </a:p>
+        </p:txBody>
+      </p:sp>
+      <p:sp>
+        <p:nvSpPr>
+          <p:cNvPr id="20" name="TextBox 19"/>
+          <p:cNvSpPr txBox="1"/>
+          <p:nvPr/>
+        </p:nvSpPr>
+        <p:spPr>
+          <a:xfrm>
+            <a:off x="4361688" y="4617720"/>
+            <a:ext cx="3200400" cy="237744"/>
+          </a:xfrm>
+          <a:prstGeom prst="rect">
+            <a:avLst/>
+          </a:prstGeom>
+          <a:noFill/>
+        </p:spPr>
+        <p:txBody>
+          <a:bodyPr wrap="square" anchor="t" lIns="0" rIns="0" tIns="0" bIns="0"/>
+          <a:lstStyle/>
+          <a:p>
+            <a:pPr algn="l"/>
+            <a:r>
+              <a:rPr sz="1200" b="0" i="0" lang="zh-CN" altLang="en-US">
+                <a:solidFill>
+                  <a:srgbClr val="9E1B1B"/>
+                </a:solidFill>
+                <a:latin typeface="Noto Sans CJK SC"/>
+                <a:ea typeface="Noto Sans CJK SC"/>
+                <a:cs typeface="Noto Sans CJK SC"/>
+              </a:rPr>
+              <a:t>建议牵头</a:t>
+            </a:r>
+          </a:p>
+        </p:txBody>
+      </p:sp>
+      <p:sp>
+        <p:nvSpPr>
+          <p:cNvPr id="21" name="TextBox 20"/>
+          <p:cNvSpPr txBox="1"/>
+          <p:nvPr/>
+        </p:nvSpPr>
+        <p:spPr>
+          <a:xfrm>
+            <a:off x="4361688" y="4864608"/>
+            <a:ext cx="3291840" cy="365760"/>
+          </a:xfrm>
+          <a:prstGeom prst="rect">
+            <a:avLst/>
+          </a:prstGeom>
+          <a:noFill/>
+        </p:spPr>
+        <p:txBody>
+          <a:bodyPr wrap="square" anchor="t" lIns="0" rIns="0" tIns="0" bIns="0"/>
+          <a:lstStyle/>
+          <a:p>
+            <a:pPr algn="l"/>
+            <a:r>
+              <a:rPr sz="1400" b="0" i="0" lang="zh-CN" altLang="en-US">
+                <a:solidFill>
+                  <a:srgbClr val="2C2C2C"/>
+                </a:solidFill>
+                <a:latin typeface="Noto Sans CJK SC"/>
+                <a:ea typeface="Noto Sans CJK SC"/>
+                <a:cs typeface="Noto Sans CJK SC"/>
+              </a:rPr>
+              <a:t>采购、企划</a:t>
+            </a:r>
+          </a:p>
+        </p:txBody>
+      </p:sp>
+      <p:sp>
+        <p:nvSpPr>
+          <p:cNvPr id="22" name="Rectangle 21"/>
+          <p:cNvSpPr/>
+          <p:nvPr/>
+        </p:nvSpPr>
+        <p:spPr>
+          <a:xfrm>
+            <a:off x="7863840" y="1188720"/>
+            <a:ext cx="10972" cy="3977639"/>
+          </a:xfrm>
+          <a:prstGeom prst="rect">
+            <a:avLst/>
+          </a:prstGeom>
+          <a:solidFill>
+            <a:srgbClr val="E2E2E2"/>
+          </a:solidFill>
+          <a:ln>
+            <a:noFill/>
+          </a:ln>
+        </p:spPr>
+        <p:style>
+          <a:lnRef idx="1">
+            <a:schemeClr val="accent1"/>
+          </a:lnRef>
+          <a:fillRef idx="3">
+            <a:schemeClr val="accent1"/>
+          </a:fillRef>
+          <a:effectRef idx="2">
+            <a:schemeClr val="accent1"/>
+          </a:effectRef>
+          <a:fontRef idx="minor">
+            <a:schemeClr val="lt1"/>
+          </a:fontRef>
+        </p:style>
+        <p:txBody>
+          <a:bodyPr rtlCol="0" anchor="ctr"/>
+          <a:lstStyle/>
+          <a:p>
+            <a:pPr algn="ctr"/>
+          </a:p>
+        </p:txBody>
+      </p:sp>
+      <p:sp>
+        <p:nvSpPr>
+          <p:cNvPr id="23" name="TextBox 22"/>
+          <p:cNvSpPr txBox="1"/>
+          <p:nvPr/>
+        </p:nvSpPr>
+        <p:spPr>
+          <a:xfrm>
+            <a:off x="8065008" y="1188720"/>
+            <a:ext cx="3200400" cy="237744"/>
+          </a:xfrm>
+          <a:prstGeom prst="rect">
+            <a:avLst/>
+          </a:prstGeom>
+          <a:noFill/>
+        </p:spPr>
+        <p:txBody>
+          <a:bodyPr wrap="square" anchor="t" lIns="0" rIns="0" tIns="0" bIns="0"/>
+          <a:lstStyle/>
+          <a:p>
+            <a:pPr algn="l"/>
+            <a:r>
+              <a:rPr sz="1400" b="0" i="0" lang="zh-CN" altLang="en-US">
+                <a:solidFill>
+                  <a:srgbClr val="9E1B1B"/>
+                </a:solidFill>
+                <a:latin typeface="Noto Sans CJK SC Medium"/>
+                <a:ea typeface="Noto Sans CJK SC Medium"/>
+                <a:cs typeface="Noto Sans CJK SC Medium"/>
+              </a:rPr>
+              <a:t>03</a:t>
+            </a:r>
+          </a:p>
+        </p:txBody>
+      </p:sp>
+      <p:sp>
+        <p:nvSpPr>
+          <p:cNvPr id="24" name="TextBox 23"/>
+          <p:cNvSpPr txBox="1"/>
+          <p:nvPr/>
+        </p:nvSpPr>
+        <p:spPr>
+          <a:xfrm>
+            <a:off x="8065008" y="1463040"/>
+            <a:ext cx="3291840" cy="457200"/>
+          </a:xfrm>
+          <a:prstGeom prst="rect">
+            <a:avLst/>
+          </a:prstGeom>
+          <a:noFill/>
+        </p:spPr>
+        <p:txBody>
+          <a:bodyPr wrap="square" anchor="t" lIns="0" rIns="0" tIns="0" bIns="0"/>
+          <a:lstStyle/>
+          <a:p>
+            <a:pPr algn="l"/>
+            <a:r>
+              <a:rPr sz="2200" b="0" i="0" lang="zh-CN" altLang="en-US">
+                <a:solidFill>
+                  <a:srgbClr val="141414"/>
+                </a:solidFill>
+                <a:latin typeface="Noto Sans CJK SC Medium"/>
+                <a:ea typeface="Noto Sans CJK SC Medium"/>
+                <a:cs typeface="Noto Sans CJK SC Medium"/>
+              </a:rPr>
+              <a:t>明年年底前</a:t>
+            </a:r>
+          </a:p>
+        </p:txBody>
+      </p:sp>
+      <p:sp>
+        <p:nvSpPr>
+          <p:cNvPr id="25" name="TextBox 24"/>
+          <p:cNvSpPr txBox="1"/>
+          <p:nvPr/>
+        </p:nvSpPr>
+        <p:spPr>
+          <a:xfrm>
+            <a:off x="8065008" y="2057400"/>
+            <a:ext cx="3200400" cy="237744"/>
+          </a:xfrm>
+          <a:prstGeom prst="rect">
+            <a:avLst/>
+          </a:prstGeom>
+          <a:noFill/>
+        </p:spPr>
+        <p:txBody>
+          <a:bodyPr wrap="square" anchor="t" lIns="0" rIns="0" tIns="0" bIns="0"/>
+          <a:lstStyle/>
+          <a:p>
+            <a:pPr algn="l"/>
+            <a:r>
+              <a:rPr sz="1200" b="0" i="0" lang="zh-CN" altLang="en-US">
+                <a:solidFill>
+                  <a:srgbClr val="9E1B1B"/>
+                </a:solidFill>
+                <a:latin typeface="Noto Sans CJK SC"/>
+                <a:ea typeface="Noto Sans CJK SC"/>
+                <a:cs typeface="Noto Sans CJK SC"/>
+              </a:rPr>
+              <a:t>做什么</a:t>
+            </a:r>
+          </a:p>
+        </p:txBody>
+      </p:sp>
+      <p:sp>
+        <p:nvSpPr>
+          <p:cNvPr id="26" name="TextBox 25"/>
+          <p:cNvSpPr txBox="1"/>
+          <p:nvPr/>
+        </p:nvSpPr>
+        <p:spPr>
+          <a:xfrm>
+            <a:off x="8065008" y="2304288"/>
+            <a:ext cx="3291840" cy="1280160"/>
+          </a:xfrm>
+          <a:prstGeom prst="rect">
+            <a:avLst/>
+          </a:prstGeom>
+          <a:noFill/>
+        </p:spPr>
+        <p:txBody>
+          <a:bodyPr wrap="square" anchor="t" lIns="0" rIns="0" tIns="0" bIns="0"/>
+          <a:lstStyle/>
+          <a:p>
+            <a:pPr algn="l">
+              <a:lnSpc>
+                <a:spcPct val="130000"/>
+              </a:lnSpc>
+            </a:pPr>
+            <a:r>
+              <a:rPr sz="1400" b="0" i="0" lang="zh-CN" altLang="en-US">
+                <a:solidFill>
+                  <a:srgbClr val="2C2C2C"/>
+                </a:solidFill>
+                <a:latin typeface="Noto Sans CJK SC"/>
+                <a:ea typeface="Noto Sans CJK SC"/>
+                <a:cs typeface="Noto Sans CJK SC"/>
+              </a:rPr>
+              <a:t>中文骨架，
+一百到二百支上线。
+艾护理、阿扎接进个人平台。</a:t>
+            </a:r>
+          </a:p>
+        </p:txBody>
+      </p:sp>
+      <p:sp>
+        <p:nvSpPr>
+          <p:cNvPr id="27" name="TextBox 26"/>
+          <p:cNvSpPr txBox="1"/>
+          <p:nvPr/>
+        </p:nvSpPr>
+        <p:spPr>
+          <a:xfrm>
+            <a:off x="8065008" y="3657600"/>
+            <a:ext cx="3200400" cy="237744"/>
+          </a:xfrm>
+          <a:prstGeom prst="rect">
+            <a:avLst/>
+          </a:prstGeom>
+          <a:noFill/>
+        </p:spPr>
+        <p:txBody>
+          <a:bodyPr wrap="square" anchor="t" lIns="0" rIns="0" tIns="0" bIns="0"/>
+          <a:lstStyle/>
+          <a:p>
+            <a:pPr algn="l"/>
+            <a:r>
+              <a:rPr sz="1200" b="0" i="0" lang="zh-CN" altLang="en-US">
+                <a:solidFill>
+                  <a:srgbClr val="9E1B1B"/>
+                </a:solidFill>
+                <a:latin typeface="Noto Sans CJK SC"/>
+                <a:ea typeface="Noto Sans CJK SC"/>
+                <a:cs typeface="Noto Sans CJK SC"/>
+              </a:rPr>
+              <a:t>交出什么</a:t>
+            </a:r>
+          </a:p>
+        </p:txBody>
+      </p:sp>
+      <p:sp>
+        <p:nvSpPr>
+          <p:cNvPr id="28" name="TextBox 27"/>
+          <p:cNvSpPr txBox="1"/>
+          <p:nvPr/>
+        </p:nvSpPr>
+        <p:spPr>
+          <a:xfrm>
+            <a:off x="8065008" y="3904487"/>
+            <a:ext cx="3291840" cy="731520"/>
+          </a:xfrm>
+          <a:prstGeom prst="rect">
+            <a:avLst/>
+          </a:prstGeom>
+          <a:noFill/>
+        </p:spPr>
+        <p:txBody>
+          <a:bodyPr wrap="square" anchor="t" lIns="0" rIns="0" tIns="0" bIns="0"/>
+          <a:lstStyle/>
+          <a:p>
+            <a:pPr algn="l">
+              <a:lnSpc>
+                <a:spcPct val="130000"/>
+              </a:lnSpc>
+            </a:pPr>
+            <a:r>
+              <a:rPr sz="1400" b="0" i="0" lang="zh-CN" altLang="en-US">
+                <a:solidFill>
+                  <a:srgbClr val="2C2C2C"/>
+                </a:solidFill>
+                <a:latin typeface="Noto Sans CJK SC"/>
+                <a:ea typeface="Noto Sans CJK SC"/>
+                <a:cs typeface="Noto Sans CJK SC"/>
+              </a:rPr>
+              <a:t>骨架清单，
+月度数表。</a:t>
+            </a:r>
+          </a:p>
+        </p:txBody>
+      </p:sp>
+      <p:sp>
+        <p:nvSpPr>
+          <p:cNvPr id="29" name="TextBox 28"/>
+          <p:cNvSpPr txBox="1"/>
+          <p:nvPr/>
+        </p:nvSpPr>
+        <p:spPr>
+          <a:xfrm>
+            <a:off x="8065008" y="4617720"/>
+            <a:ext cx="3200400" cy="237744"/>
+          </a:xfrm>
+          <a:prstGeom prst="rect">
+            <a:avLst/>
+          </a:prstGeom>
+          <a:noFill/>
+        </p:spPr>
+        <p:txBody>
+          <a:bodyPr wrap="square" anchor="t" lIns="0" rIns="0" tIns="0" bIns="0"/>
+          <a:lstStyle/>
+          <a:p>
+            <a:pPr algn="l"/>
+            <a:r>
+              <a:rPr sz="1200" b="0" i="0" lang="zh-CN" altLang="en-US">
+                <a:solidFill>
+                  <a:srgbClr val="9E1B1B"/>
+                </a:solidFill>
+                <a:latin typeface="Noto Sans CJK SC"/>
+                <a:ea typeface="Noto Sans CJK SC"/>
+                <a:cs typeface="Noto Sans CJK SC"/>
+              </a:rPr>
+              <a:t>建议牵头</a:t>
+            </a:r>
+          </a:p>
+        </p:txBody>
+      </p:sp>
+      <p:sp>
+        <p:nvSpPr>
+          <p:cNvPr id="30" name="TextBox 29"/>
+          <p:cNvSpPr txBox="1"/>
+          <p:nvPr/>
+        </p:nvSpPr>
+        <p:spPr>
+          <a:xfrm>
+            <a:off x="8065008" y="4864608"/>
+            <a:ext cx="3291840" cy="365760"/>
+          </a:xfrm>
+          <a:prstGeom prst="rect">
+            <a:avLst/>
+          </a:prstGeom>
+          <a:noFill/>
+        </p:spPr>
+        <p:txBody>
+          <a:bodyPr wrap="square" anchor="t" lIns="0" rIns="0" tIns="0" bIns="0"/>
+          <a:lstStyle/>
+          <a:p>
+            <a:pPr algn="l"/>
+            <a:r>
+              <a:rPr sz="1400" b="0" i="0" lang="zh-CN" altLang="en-US">
+                <a:solidFill>
+                  <a:srgbClr val="2C2C2C"/>
+                </a:solidFill>
+                <a:latin typeface="Noto Sans CJK SC"/>
+                <a:ea typeface="Noto Sans CJK SC"/>
+                <a:cs typeface="Noto Sans CJK SC"/>
+              </a:rPr>
+              <a:t>企划、培训、数字</a:t>
+            </a:r>
+          </a:p>
+        </p:txBody>
+      </p:sp>
+      <p:sp>
+        <p:nvSpPr>
+          <p:cNvPr id="31" name="Rectangle 30"/>
+          <p:cNvSpPr/>
+          <p:nvPr/>
+        </p:nvSpPr>
+        <p:spPr>
+          <a:xfrm>
+            <a:off x="658368" y="5440680"/>
+            <a:ext cx="10881360" cy="10972"/>
+          </a:xfrm>
+          <a:prstGeom prst="rect">
+            <a:avLst/>
+          </a:prstGeom>
+          <a:solidFill>
+            <a:srgbClr val="E2E2E2"/>
+          </a:solidFill>
+          <a:ln>
+            <a:noFill/>
+          </a:ln>
+        </p:spPr>
+        <p:style>
+          <a:lnRef idx="1">
+            <a:schemeClr val="accent1"/>
+          </a:lnRef>
+          <a:fillRef idx="3">
+            <a:schemeClr val="accent1"/>
+          </a:fillRef>
+          <a:effectRef idx="2">
+            <a:schemeClr val="accent1"/>
+          </a:effectRef>
+          <a:fontRef idx="minor">
+            <a:schemeClr val="lt1"/>
+          </a:fontRef>
+        </p:style>
+        <p:txBody>
+          <a:bodyPr rtlCol="0" anchor="ctr"/>
+          <a:lstStyle/>
+          <a:p>
+            <a:pPr algn="ctr"/>
+          </a:p>
+        </p:txBody>
+      </p:sp>
+      <p:sp>
+        <p:nvSpPr>
+          <p:cNvPr id="32" name="TextBox 31"/>
+          <p:cNvSpPr txBox="1"/>
+          <p:nvPr/>
+        </p:nvSpPr>
+        <p:spPr>
+          <a:xfrm>
+            <a:off x="658368" y="5559552"/>
+            <a:ext cx="10789920" cy="640080"/>
+          </a:xfrm>
+          <a:prstGeom prst="rect">
+            <a:avLst/>
+          </a:prstGeom>
+          <a:noFill/>
+        </p:spPr>
+        <p:txBody>
+          <a:bodyPr wrap="square" anchor="t" lIns="0" rIns="0" tIns="0" bIns="0"/>
+          <a:lstStyle/>
+          <a:p>
+            <a:pPr algn="l">
+              <a:lnSpc>
+                <a:spcPct val="130000"/>
+              </a:lnSpc>
+            </a:pPr>
+            <a:r>
+              <a:rPr sz="1600" b="0" i="0" lang="zh-CN" altLang="en-US">
+                <a:solidFill>
+                  <a:srgbClr val="9E1B1B"/>
+                </a:solidFill>
+                <a:latin typeface="Noto Sans CJK SC Medium"/>
+                <a:ea typeface="Noto Sans CJK SC Medium"/>
+                <a:cs typeface="Noto Sans CJK SC Medium"/>
+              </a:rPr>
+              <a:t>每月看六个数：型号数、换料清洗次数、罐容与人数，
+建了记录的人、连续用的天数、每天打开阿扎的人。</a:t>
+            </a:r>
+          </a:p>
+        </p:txBody>
+      </p:sp>
+      <p:sp>
+        <p:nvSpPr>
+          <p:cNvPr id="33" name="TextBox 32"/>
+          <p:cNvSpPr txBox="1"/>
+          <p:nvPr/>
+        </p:nvSpPr>
+        <p:spPr>
+          <a:xfrm>
+            <a:off x="10561320" y="6492240"/>
+            <a:ext cx="1051560" cy="201168"/>
+          </a:xfrm>
+          <a:prstGeom prst="rect">
+            <a:avLst/>
+          </a:prstGeom>
+          <a:noFill/>
+        </p:spPr>
+        <p:txBody>
+          <a:bodyPr wrap="square" anchor="t" lIns="0" rIns="0" tIns="0" bIns="0"/>
+          <a:lstStyle/>
+          <a:p>
+            <a:pPr algn="r"/>
+            <a:r>
+              <a:rPr sz="1100" b="0" i="0" lang="zh-CN" altLang="en-US">
+                <a:solidFill>
+                  <a:srgbClr val="C8C8C8"/>
+                </a:solidFill>
+                <a:latin typeface="Noto Sans CJK SC"/>
+                <a:ea typeface="Noto Sans CJK SC"/>
+                <a:cs typeface="Noto Sans CJK SC"/>
+              </a:rPr>
+              <a:t>13</a:t>
+            </a:r>
+          </a:p>
+        </p:txBody>
+      </p:sp>
+    </p:spTree>
+  </p:cSld>
+  <p:clrMapOvr>
+    <a:masterClrMapping/>
+  </p:clrMapOvr>
+</p:sld>
+</file>
+
+<file path=ppt/slides/slide14.xml><?xml version="1.0" encoding="utf-8"?>
+<p:sld xmlns:a="http://schemas.openxmlformats.org/drawingml/2006/main" xmlns:p="http://schemas.openxmlformats.org/presentationml/2006/main" xmlns:r="http://schemas.openxmlformats.org/officeDocument/2006/relationships">
+  <p:cSld>
+    <p:bg>
+      <p:bgPr>
+        <a:solidFill>
+          <a:srgbClr val="FFFFFF"/>
+        </a:solidFill>
+        <a:effectLst/>
+      </p:bgPr>
+    </p:bg>
+    <p:spTree>
+      <p:nvGrpSpPr>
+        <p:cNvPr id="1" name=""/>
+        <p:cNvGrpSpPr/>
+        <p:nvPr/>
+      </p:nvGrpSpPr>
+      <p:grpSpPr/>
+      <p:sp>
+        <p:nvSpPr>
+          <p:cNvPr id="2" name="TextBox 1"/>
+          <p:cNvSpPr txBox="1"/>
+          <p:nvPr/>
+        </p:nvSpPr>
+        <p:spPr>
+          <a:xfrm>
+            <a:off x="658368" y="365760"/>
+            <a:ext cx="640080" cy="329184"/>
+          </a:xfrm>
+          <a:prstGeom prst="rect">
+            <a:avLst/>
+          </a:prstGeom>
+          <a:noFill/>
+        </p:spPr>
+        <p:txBody>
+          <a:bodyPr wrap="square" anchor="t" lIns="0" rIns="0" tIns="0" bIns="0"/>
+          <a:lstStyle/>
+          <a:p>
+            <a:pPr algn="l"/>
+            <a:r>
+              <a:rPr sz="1500" b="0" i="0" lang="zh-CN" altLang="en-US">
+                <a:solidFill>
+                  <a:srgbClr val="9E1B1B"/>
+                </a:solidFill>
+                <a:latin typeface="Noto Sans CJK SC Medium"/>
+                <a:ea typeface="Noto Sans CJK SC Medium"/>
+                <a:cs typeface="Noto Sans CJK SC Medium"/>
+              </a:rPr>
+              <a:t>13</a:t>
+            </a:r>
+          </a:p>
+        </p:txBody>
+      </p:sp>
+      <p:sp>
+        <p:nvSpPr>
+          <p:cNvPr id="3" name="TextBox 2"/>
+          <p:cNvSpPr txBox="1"/>
+          <p:nvPr/>
+        </p:nvSpPr>
+        <p:spPr>
+          <a:xfrm>
+            <a:off x="1371600" y="310896"/>
+            <a:ext cx="10058400" cy="438912"/>
+          </a:xfrm>
+          <a:prstGeom prst="rect">
+            <a:avLst/>
+          </a:prstGeom>
+          <a:noFill/>
+        </p:spPr>
+        <p:txBody>
+          <a:bodyPr wrap="square" anchor="t" lIns="0" rIns="0" tIns="0" bIns="0"/>
+          <a:lstStyle/>
+          <a:p>
+            <a:pPr algn="l"/>
+            <a:r>
+              <a:rPr sz="3000" b="0" i="0" lang="zh-CN" altLang="en-US">
+                <a:solidFill>
+                  <a:srgbClr val="141414"/>
+                </a:solidFill>
+                <a:latin typeface="Noto Sans CJK SC Medium"/>
+                <a:ea typeface="Noto Sans CJK SC Medium"/>
+                <a:cs typeface="Noto Sans CJK SC Medium"/>
+              </a:rPr>
+              <a:t>三个坑，中国法人各接一个</a:t>
+            </a:r>
+          </a:p>
+        </p:txBody>
+      </p:sp>
+      <p:sp>
+        <p:nvSpPr>
+          <p:cNvPr id="4" name="Rectangle 3"/>
+          <p:cNvSpPr/>
+          <p:nvPr/>
+        </p:nvSpPr>
+        <p:spPr>
+          <a:xfrm>
+            <a:off x="658368" y="960120"/>
+            <a:ext cx="10881360" cy="10972"/>
+          </a:xfrm>
+          <a:prstGeom prst="rect">
+            <a:avLst/>
+          </a:prstGeom>
+          <a:solidFill>
+            <a:srgbClr val="E2E2E2"/>
+          </a:solidFill>
+          <a:ln>
+            <a:noFill/>
+          </a:ln>
+        </p:spPr>
+        <p:style>
+          <a:lnRef idx="1">
+            <a:schemeClr val="accent1"/>
+          </a:lnRef>
+          <a:fillRef idx="3">
+            <a:schemeClr val="accent1"/>
+          </a:fillRef>
+          <a:effectRef idx="2">
+            <a:schemeClr val="accent1"/>
+          </a:effectRef>
+          <a:fontRef idx="minor">
+            <a:schemeClr val="lt1"/>
+          </a:fontRef>
+        </p:style>
+        <p:txBody>
+          <a:bodyPr rtlCol="0" anchor="ctr"/>
+          <a:lstStyle/>
+          <a:p>
+            <a:pPr algn="ctr"/>
+          </a:p>
+        </p:txBody>
+      </p:sp>
+      <p:sp>
+        <p:nvSpPr>
+          <p:cNvPr id="5" name="TextBox 4"/>
+          <p:cNvSpPr txBox="1"/>
+          <p:nvPr/>
+        </p:nvSpPr>
+        <p:spPr>
+          <a:xfrm>
+            <a:off x="658368" y="1188720"/>
+            <a:ext cx="3200400" cy="237744"/>
+          </a:xfrm>
+          <a:prstGeom prst="rect">
+            <a:avLst/>
+          </a:prstGeom>
+          <a:noFill/>
+        </p:spPr>
+        <p:txBody>
+          <a:bodyPr wrap="square" anchor="t" lIns="0" rIns="0" tIns="0" bIns="0"/>
+          <a:lstStyle/>
+          <a:p>
+            <a:pPr algn="l"/>
+            <a:r>
+              <a:rPr sz="1400" b="0" i="0" lang="zh-CN" altLang="en-US">
+                <a:solidFill>
+                  <a:srgbClr val="9E1B1B"/>
+                </a:solidFill>
+                <a:latin typeface="Noto Sans CJK SC Medium"/>
+                <a:ea typeface="Noto Sans CJK SC Medium"/>
+                <a:cs typeface="Noto Sans CJK SC Medium"/>
+              </a:rPr>
+              <a:t>01</a:t>
+            </a:r>
+          </a:p>
+        </p:txBody>
+      </p:sp>
+      <p:sp>
+        <p:nvSpPr>
+          <p:cNvPr id="6" name="TextBox 5"/>
+          <p:cNvSpPr txBox="1"/>
+          <p:nvPr/>
+        </p:nvSpPr>
+        <p:spPr>
+          <a:xfrm>
+            <a:off x="658368" y="1463040"/>
+            <a:ext cx="3291840" cy="457200"/>
+          </a:xfrm>
+          <a:prstGeom prst="rect">
+            <a:avLst/>
+          </a:prstGeom>
+          <a:noFill/>
+        </p:spPr>
+        <p:txBody>
+          <a:bodyPr wrap="square" anchor="t" lIns="0" rIns="0" tIns="0" bIns="0"/>
+          <a:lstStyle/>
+          <a:p>
+            <a:pPr algn="l"/>
+            <a:r>
+              <a:rPr sz="2200" b="0" i="0" lang="zh-CN" altLang="en-US">
+                <a:solidFill>
+                  <a:srgbClr val="141414"/>
+                </a:solidFill>
+                <a:latin typeface="Noto Sans CJK SC Medium"/>
+                <a:ea typeface="Noto Sans CJK SC Medium"/>
+                <a:cs typeface="Noto Sans CJK SC Medium"/>
+              </a:rPr>
+              <a:t>合规</a:t>
+            </a:r>
+          </a:p>
+        </p:txBody>
+      </p:sp>
+      <p:sp>
+        <p:nvSpPr>
+          <p:cNvPr id="7" name="TextBox 6"/>
+          <p:cNvSpPr txBox="1"/>
+          <p:nvPr/>
+        </p:nvSpPr>
+        <p:spPr>
+          <a:xfrm>
+            <a:off x="658368" y="2103120"/>
+            <a:ext cx="3200400" cy="237744"/>
+          </a:xfrm>
+          <a:prstGeom prst="rect">
+            <a:avLst/>
+          </a:prstGeom>
+          <a:noFill/>
+        </p:spPr>
+        <p:txBody>
+          <a:bodyPr wrap="square" anchor="t" lIns="0" rIns="0" tIns="0" bIns="0"/>
+          <a:lstStyle/>
+          <a:p>
+            <a:pPr algn="l"/>
+            <a:r>
+              <a:rPr sz="1200" b="0" i="0" lang="zh-CN" altLang="en-US">
+                <a:solidFill>
+                  <a:srgbClr val="9E1B1B"/>
+                </a:solidFill>
+                <a:latin typeface="Noto Sans CJK SC"/>
+                <a:ea typeface="Noto Sans CJK SC"/>
+                <a:cs typeface="Noto Sans CJK SC"/>
+              </a:rPr>
+              <a:t>手册怎么填</a:t>
+            </a:r>
+          </a:p>
+        </p:txBody>
+      </p:sp>
+      <p:sp>
+        <p:nvSpPr>
+          <p:cNvPr id="8" name="TextBox 7"/>
+          <p:cNvSpPr txBox="1"/>
+          <p:nvPr/>
+        </p:nvSpPr>
+        <p:spPr>
+          <a:xfrm>
+            <a:off x="658368" y="2350008"/>
+            <a:ext cx="3291840" cy="914400"/>
+          </a:xfrm>
+          <a:prstGeom prst="rect">
+            <a:avLst/>
+          </a:prstGeom>
+          <a:noFill/>
+        </p:spPr>
+        <p:txBody>
+          <a:bodyPr wrap="square" anchor="t" lIns="0" rIns="0" tIns="0" bIns="0"/>
+          <a:lstStyle/>
+          <a:p>
+            <a:pPr algn="l">
+              <a:lnSpc>
+                <a:spcPct val="130000"/>
+              </a:lnSpc>
+            </a:pPr>
+            <a:r>
+              <a:rPr sz="1400" b="0" i="0" lang="zh-CN" altLang="en-US">
+                <a:solidFill>
+                  <a:srgbClr val="2C2C2C"/>
+                </a:solidFill>
+                <a:latin typeface="Noto Sans CJK SC"/>
+                <a:ea typeface="Noto Sans CJK SC"/>
+                <a:cs typeface="Noto Sans CJK SC"/>
+              </a:rPr>
+              <a:t>牌照优先于放量；认证模板复制；收益封顶。</a:t>
+            </a:r>
+          </a:p>
+        </p:txBody>
+      </p:sp>
+      <p:sp>
+        <p:nvSpPr>
+          <p:cNvPr id="9" name="TextBox 8"/>
+          <p:cNvSpPr txBox="1"/>
+          <p:nvPr/>
+        </p:nvSpPr>
+        <p:spPr>
+          <a:xfrm>
+            <a:off x="658368" y="3429000"/>
+            <a:ext cx="3200400" cy="237744"/>
+          </a:xfrm>
+          <a:prstGeom prst="rect">
+            <a:avLst/>
+          </a:prstGeom>
+          <a:noFill/>
+        </p:spPr>
+        <p:txBody>
+          <a:bodyPr wrap="square" anchor="t" lIns="0" rIns="0" tIns="0" bIns="0"/>
+          <a:lstStyle/>
+          <a:p>
+            <a:pPr algn="l"/>
+            <a:r>
+              <a:rPr sz="1200" b="0" i="0" lang="zh-CN" altLang="en-US">
+                <a:solidFill>
+                  <a:srgbClr val="9E1B1B"/>
+                </a:solidFill>
+                <a:latin typeface="Noto Sans CJK SC"/>
+                <a:ea typeface="Noto Sans CJK SC"/>
+                <a:cs typeface="Noto Sans CJK SC"/>
+              </a:rPr>
+              <a:t>中国法人接什么</a:t>
+            </a:r>
+          </a:p>
+        </p:txBody>
+      </p:sp>
+      <p:sp>
+        <p:nvSpPr>
+          <p:cNvPr id="10" name="TextBox 9"/>
+          <p:cNvSpPr txBox="1"/>
+          <p:nvPr/>
+        </p:nvSpPr>
+        <p:spPr>
+          <a:xfrm>
+            <a:off x="658368" y="3675887"/>
+            <a:ext cx="3291840" cy="1280160"/>
+          </a:xfrm>
+          <a:prstGeom prst="rect">
+            <a:avLst/>
+          </a:prstGeom>
+          <a:noFill/>
+        </p:spPr>
+        <p:txBody>
+          <a:bodyPr wrap="square" anchor="t" lIns="0" rIns="0" tIns="0" bIns="0"/>
+          <a:lstStyle/>
+          <a:p>
+            <a:pPr algn="l">
+              <a:lnSpc>
+                <a:spcPct val="130000"/>
+              </a:lnSpc>
+            </a:pPr>
+            <a:r>
+              <a:rPr sz="1400" b="0" i="0" lang="zh-CN" altLang="en-US">
+                <a:solidFill>
+                  <a:srgbClr val="2C2C2C"/>
+                </a:solidFill>
+                <a:latin typeface="Noto Sans CJK SC"/>
+                <a:ea typeface="Noto Sans CJK SC"/>
+                <a:cs typeface="Noto Sans CJK SC"/>
+              </a:rPr>
+              <a:t>艾护理哪句话能说、记录存哪里，阿扎哪张卡。定之前，不对会员说。</a:t>
+            </a:r>
+          </a:p>
+        </p:txBody>
+      </p:sp>
+      <p:sp>
+        <p:nvSpPr>
+          <p:cNvPr id="11" name="Rectangle 10"/>
+          <p:cNvSpPr/>
+          <p:nvPr/>
+        </p:nvSpPr>
+        <p:spPr>
+          <a:xfrm>
+            <a:off x="4160520" y="1188720"/>
+            <a:ext cx="10972" cy="3749039"/>
+          </a:xfrm>
+          <a:prstGeom prst="rect">
+            <a:avLst/>
+          </a:prstGeom>
+          <a:solidFill>
+            <a:srgbClr val="E2E2E2"/>
+          </a:solidFill>
+          <a:ln>
+            <a:noFill/>
+          </a:ln>
+        </p:spPr>
+        <p:style>
+          <a:lnRef idx="1">
+            <a:schemeClr val="accent1"/>
+          </a:lnRef>
+          <a:fillRef idx="3">
+            <a:schemeClr val="accent1"/>
+          </a:fillRef>
+          <a:effectRef idx="2">
+            <a:schemeClr val="accent1"/>
+          </a:effectRef>
+          <a:fontRef idx="minor">
+            <a:schemeClr val="lt1"/>
+          </a:fontRef>
+        </p:style>
+        <p:txBody>
+          <a:bodyPr rtlCol="0" anchor="ctr"/>
+          <a:lstStyle/>
+          <a:p>
+            <a:pPr algn="ctr"/>
+          </a:p>
+        </p:txBody>
+      </p:sp>
+      <p:sp>
+        <p:nvSpPr>
+          <p:cNvPr id="12" name="TextBox 11"/>
+          <p:cNvSpPr txBox="1"/>
+          <p:nvPr/>
+        </p:nvSpPr>
+        <p:spPr>
+          <a:xfrm>
+            <a:off x="4361688" y="1188720"/>
+            <a:ext cx="3200400" cy="237744"/>
+          </a:xfrm>
+          <a:prstGeom prst="rect">
+            <a:avLst/>
+          </a:prstGeom>
+          <a:noFill/>
+        </p:spPr>
+        <p:txBody>
+          <a:bodyPr wrap="square" anchor="t" lIns="0" rIns="0" tIns="0" bIns="0"/>
+          <a:lstStyle/>
+          <a:p>
+            <a:pPr algn="l"/>
+            <a:r>
+              <a:rPr sz="1400" b="0" i="0" lang="zh-CN" altLang="en-US">
+                <a:solidFill>
+                  <a:srgbClr val="9E1B1B"/>
+                </a:solidFill>
+                <a:latin typeface="Noto Sans CJK SC Medium"/>
+                <a:ea typeface="Noto Sans CJK SC Medium"/>
+                <a:cs typeface="Noto Sans CJK SC Medium"/>
+              </a:rPr>
+              <a:t>02</a:t>
+            </a:r>
+          </a:p>
+        </p:txBody>
+      </p:sp>
+      <p:sp>
+        <p:nvSpPr>
+          <p:cNvPr id="13" name="TextBox 12"/>
+          <p:cNvSpPr txBox="1"/>
+          <p:nvPr/>
+        </p:nvSpPr>
+        <p:spPr>
+          <a:xfrm>
+            <a:off x="4361688" y="1463040"/>
+            <a:ext cx="3291840" cy="457200"/>
+          </a:xfrm>
+          <a:prstGeom prst="rect">
+            <a:avLst/>
+          </a:prstGeom>
+          <a:noFill/>
+        </p:spPr>
+        <p:txBody>
+          <a:bodyPr wrap="square" anchor="t" lIns="0" rIns="0" tIns="0" bIns="0"/>
+          <a:lstStyle/>
+          <a:p>
+            <a:pPr algn="l"/>
+            <a:r>
+              <a:rPr sz="2200" b="0" i="0" lang="zh-CN" altLang="en-US">
+                <a:solidFill>
+                  <a:srgbClr val="141414"/>
+                </a:solidFill>
+                <a:latin typeface="Noto Sans CJK SC Medium"/>
+                <a:ea typeface="Noto Sans CJK SC Medium"/>
+                <a:cs typeface="Noto Sans CJK SC Medium"/>
+              </a:rPr>
+              <a:t>供应链与地缘</a:t>
+            </a:r>
+          </a:p>
+        </p:txBody>
+      </p:sp>
+      <p:sp>
+        <p:nvSpPr>
+          <p:cNvPr id="14" name="TextBox 13"/>
+          <p:cNvSpPr txBox="1"/>
+          <p:nvPr/>
+        </p:nvSpPr>
+        <p:spPr>
+          <a:xfrm>
+            <a:off x="4361688" y="2103120"/>
+            <a:ext cx="3200400" cy="237744"/>
+          </a:xfrm>
+          <a:prstGeom prst="rect">
+            <a:avLst/>
+          </a:prstGeom>
+          <a:noFill/>
+        </p:spPr>
+        <p:txBody>
+          <a:bodyPr wrap="square" anchor="t" lIns="0" rIns="0" tIns="0" bIns="0"/>
+          <a:lstStyle/>
+          <a:p>
+            <a:pPr algn="l"/>
+            <a:r>
+              <a:rPr sz="1200" b="0" i="0" lang="zh-CN" altLang="en-US">
+                <a:solidFill>
+                  <a:srgbClr val="9E1B1B"/>
+                </a:solidFill>
+                <a:latin typeface="Noto Sans CJK SC"/>
+                <a:ea typeface="Noto Sans CJK SC"/>
+                <a:cs typeface="Noto Sans CJK SC"/>
+              </a:rPr>
+              <a:t>手册怎么填</a:t>
+            </a:r>
+          </a:p>
+        </p:txBody>
+      </p:sp>
+      <p:sp>
+        <p:nvSpPr>
+          <p:cNvPr id="15" name="TextBox 14"/>
+          <p:cNvSpPr txBox="1"/>
+          <p:nvPr/>
+        </p:nvSpPr>
+        <p:spPr>
+          <a:xfrm>
+            <a:off x="4361688" y="2350008"/>
+            <a:ext cx="3291840" cy="914400"/>
+          </a:xfrm>
+          <a:prstGeom prst="rect">
+            <a:avLst/>
+          </a:prstGeom>
+          <a:noFill/>
+        </p:spPr>
+        <p:txBody>
+          <a:bodyPr wrap="square" anchor="t" lIns="0" rIns="0" tIns="0" bIns="0"/>
+          <a:lstStyle/>
+          <a:p>
+            <a:pPr algn="l">
+              <a:lnSpc>
+                <a:spcPct val="130000"/>
+              </a:lnSpc>
+            </a:pPr>
+            <a:r>
+              <a:rPr sz="1400" b="0" i="0" lang="zh-CN" altLang="en-US">
+                <a:solidFill>
+                  <a:srgbClr val="2C2C2C"/>
+                </a:solidFill>
+                <a:latin typeface="Noto Sans CJK SC"/>
+                <a:ea typeface="Noto Sans CJK SC"/>
+                <a:cs typeface="Noto Sans CJK SC"/>
+              </a:rPr>
+              <a:t>多基地生产，本地定价对冲。</a:t>
+            </a:r>
+          </a:p>
+        </p:txBody>
+      </p:sp>
+      <p:sp>
+        <p:nvSpPr>
+          <p:cNvPr id="16" name="TextBox 15"/>
+          <p:cNvSpPr txBox="1"/>
+          <p:nvPr/>
+        </p:nvSpPr>
+        <p:spPr>
+          <a:xfrm>
+            <a:off x="4361688" y="3429000"/>
+            <a:ext cx="3200400" cy="237744"/>
+          </a:xfrm>
+          <a:prstGeom prst="rect">
+            <a:avLst/>
+          </a:prstGeom>
+          <a:noFill/>
+        </p:spPr>
+        <p:txBody>
+          <a:bodyPr wrap="square" anchor="t" lIns="0" rIns="0" tIns="0" bIns="0"/>
+          <a:lstStyle/>
+          <a:p>
+            <a:pPr algn="l"/>
+            <a:r>
+              <a:rPr sz="1200" b="0" i="0" lang="zh-CN" altLang="en-US">
+                <a:solidFill>
+                  <a:srgbClr val="9E1B1B"/>
+                </a:solidFill>
+                <a:latin typeface="Noto Sans CJK SC"/>
+                <a:ea typeface="Noto Sans CJK SC"/>
+                <a:cs typeface="Noto Sans CJK SC"/>
+              </a:rPr>
+              <a:t>中国法人接什么</a:t>
+            </a:r>
+          </a:p>
+        </p:txBody>
+      </p:sp>
+      <p:sp>
+        <p:nvSpPr>
+          <p:cNvPr id="17" name="TextBox 16"/>
+          <p:cNvSpPr txBox="1"/>
+          <p:nvPr/>
+        </p:nvSpPr>
+        <p:spPr>
+          <a:xfrm>
+            <a:off x="4361688" y="3675887"/>
+            <a:ext cx="3291840" cy="1280160"/>
+          </a:xfrm>
+          <a:prstGeom prst="rect">
+            <a:avLst/>
+          </a:prstGeom>
+          <a:noFill/>
+        </p:spPr>
+        <p:txBody>
+          <a:bodyPr wrap="square" anchor="t" lIns="0" rIns="0" tIns="0" bIns="0"/>
+          <a:lstStyle/>
+          <a:p>
+            <a:pPr algn="l">
+              <a:lnSpc>
+                <a:spcPct val="130000"/>
+              </a:lnSpc>
+            </a:pPr>
+            <a:r>
+              <a:rPr sz="1400" b="0" i="0" lang="zh-CN" altLang="en-US">
+                <a:solidFill>
+                  <a:srgbClr val="2C2C2C"/>
+                </a:solidFill>
+                <a:latin typeface="Noto Sans CJK SC"/>
+                <a:ea typeface="Noto Sans CJK SC"/>
+                <a:cs typeface="Noto Sans CJK SC"/>
+              </a:rPr>
+              <a:t>原料在中国，下一道工序放在墙外。转运少一趟，风险就少一段。</a:t>
+            </a:r>
+          </a:p>
+        </p:txBody>
+      </p:sp>
+      <p:sp>
+        <p:nvSpPr>
+          <p:cNvPr id="18" name="Rectangle 17"/>
+          <p:cNvSpPr/>
+          <p:nvPr/>
+        </p:nvSpPr>
+        <p:spPr>
+          <a:xfrm>
+            <a:off x="7863840" y="1188720"/>
+            <a:ext cx="10972" cy="3749039"/>
+          </a:xfrm>
+          <a:prstGeom prst="rect">
+            <a:avLst/>
+          </a:prstGeom>
+          <a:solidFill>
+            <a:srgbClr val="E2E2E2"/>
+          </a:solidFill>
+          <a:ln>
+            <a:noFill/>
+          </a:ln>
+        </p:spPr>
+        <p:style>
+          <a:lnRef idx="1">
+            <a:schemeClr val="accent1"/>
+          </a:lnRef>
+          <a:fillRef idx="3">
+            <a:schemeClr val="accent1"/>
+          </a:fillRef>
+          <a:effectRef idx="2">
+            <a:schemeClr val="accent1"/>
+          </a:effectRef>
+          <a:fontRef idx="minor">
+            <a:schemeClr val="lt1"/>
+          </a:fontRef>
+        </p:style>
+        <p:txBody>
+          <a:bodyPr rtlCol="0" anchor="ctr"/>
+          <a:lstStyle/>
+          <a:p>
+            <a:pPr algn="ctr"/>
+          </a:p>
+        </p:txBody>
+      </p:sp>
+      <p:sp>
+        <p:nvSpPr>
+          <p:cNvPr id="19" name="TextBox 18"/>
+          <p:cNvSpPr txBox="1"/>
+          <p:nvPr/>
+        </p:nvSpPr>
+        <p:spPr>
+          <a:xfrm>
+            <a:off x="8065008" y="1188720"/>
+            <a:ext cx="3200400" cy="237744"/>
+          </a:xfrm>
+          <a:prstGeom prst="rect">
+            <a:avLst/>
+          </a:prstGeom>
+          <a:noFill/>
+        </p:spPr>
+        <p:txBody>
+          <a:bodyPr wrap="square" anchor="t" lIns="0" rIns="0" tIns="0" bIns="0"/>
+          <a:lstStyle/>
+          <a:p>
+            <a:pPr algn="l"/>
+            <a:r>
+              <a:rPr sz="1400" b="0" i="0" lang="zh-CN" altLang="en-US">
+                <a:solidFill>
+                  <a:srgbClr val="9E1B1B"/>
+                </a:solidFill>
+                <a:latin typeface="Noto Sans CJK SC Medium"/>
+                <a:ea typeface="Noto Sans CJK SC Medium"/>
+                <a:cs typeface="Noto Sans CJK SC Medium"/>
+              </a:rPr>
+              <a:t>03</a:t>
+            </a:r>
+          </a:p>
+        </p:txBody>
+      </p:sp>
+      <p:sp>
+        <p:nvSpPr>
+          <p:cNvPr id="20" name="TextBox 19"/>
+          <p:cNvSpPr txBox="1"/>
+          <p:nvPr/>
+        </p:nvSpPr>
+        <p:spPr>
+          <a:xfrm>
+            <a:off x="8065008" y="1463040"/>
+            <a:ext cx="3291840" cy="457200"/>
+          </a:xfrm>
+          <a:prstGeom prst="rect">
+            <a:avLst/>
+          </a:prstGeom>
+          <a:noFill/>
+        </p:spPr>
+        <p:txBody>
+          <a:bodyPr wrap="square" anchor="t" lIns="0" rIns="0" tIns="0" bIns="0"/>
+          <a:lstStyle/>
+          <a:p>
+            <a:pPr algn="l"/>
+            <a:r>
+              <a:rPr sz="2200" b="0" i="0" lang="zh-CN" altLang="en-US">
+                <a:solidFill>
+                  <a:srgbClr val="141414"/>
+                </a:solidFill>
+                <a:latin typeface="Noto Sans CJK SC Medium"/>
+                <a:ea typeface="Noto Sans CJK SC Medium"/>
+                <a:cs typeface="Noto Sans CJK SC Medium"/>
+              </a:rPr>
+              <a:t>模式声誉</a:t>
+            </a:r>
+          </a:p>
+        </p:txBody>
+      </p:sp>
+      <p:sp>
+        <p:nvSpPr>
+          <p:cNvPr id="21" name="TextBox 20"/>
+          <p:cNvSpPr txBox="1"/>
+          <p:nvPr/>
+        </p:nvSpPr>
+        <p:spPr>
+          <a:xfrm>
+            <a:off x="8065008" y="2103120"/>
+            <a:ext cx="3200400" cy="237744"/>
+          </a:xfrm>
+          <a:prstGeom prst="rect">
+            <a:avLst/>
+          </a:prstGeom>
+          <a:noFill/>
+        </p:spPr>
+        <p:txBody>
+          <a:bodyPr wrap="square" anchor="t" lIns="0" rIns="0" tIns="0" bIns="0"/>
+          <a:lstStyle/>
+          <a:p>
+            <a:pPr algn="l"/>
+            <a:r>
+              <a:rPr sz="1200" b="0" i="0" lang="zh-CN" altLang="en-US">
+                <a:solidFill>
+                  <a:srgbClr val="9E1B1B"/>
+                </a:solidFill>
+                <a:latin typeface="Noto Sans CJK SC"/>
+                <a:ea typeface="Noto Sans CJK SC"/>
+                <a:cs typeface="Noto Sans CJK SC"/>
+              </a:rPr>
+              <a:t>手册怎么填</a:t>
+            </a:r>
+          </a:p>
+        </p:txBody>
+      </p:sp>
+      <p:sp>
+        <p:nvSpPr>
+          <p:cNvPr id="22" name="TextBox 21"/>
+          <p:cNvSpPr txBox="1"/>
+          <p:nvPr/>
+        </p:nvSpPr>
+        <p:spPr>
+          <a:xfrm>
+            <a:off x="8065008" y="2350008"/>
+            <a:ext cx="3291840" cy="914400"/>
+          </a:xfrm>
+          <a:prstGeom prst="rect">
+            <a:avLst/>
+          </a:prstGeom>
+          <a:noFill/>
+        </p:spPr>
+        <p:txBody>
+          <a:bodyPr wrap="square" anchor="t" lIns="0" rIns="0" tIns="0" bIns="0"/>
+          <a:lstStyle/>
+          <a:p>
+            <a:pPr algn="l">
+              <a:lnSpc>
+                <a:spcPct val="130000"/>
+              </a:lnSpc>
+            </a:pPr>
+            <a:r>
+              <a:rPr sz="1400" b="0" i="0" lang="zh-CN" altLang="en-US">
+                <a:solidFill>
+                  <a:srgbClr val="2C2C2C"/>
+                </a:solidFill>
+                <a:latin typeface="Noto Sans CJK SC"/>
+                <a:ea typeface="Noto Sans CJK SC"/>
+                <a:cs typeface="Noto Sans CJK SC"/>
+              </a:rPr>
+              <a:t>伦理自律委员会执法，违规清退，透明披露。</a:t>
+            </a:r>
+          </a:p>
+        </p:txBody>
+      </p:sp>
+      <p:sp>
+        <p:nvSpPr>
+          <p:cNvPr id="23" name="TextBox 22"/>
+          <p:cNvSpPr txBox="1"/>
+          <p:nvPr/>
+        </p:nvSpPr>
+        <p:spPr>
+          <a:xfrm>
+            <a:off x="8065008" y="3429000"/>
+            <a:ext cx="3200400" cy="237744"/>
+          </a:xfrm>
+          <a:prstGeom prst="rect">
+            <a:avLst/>
+          </a:prstGeom>
+          <a:noFill/>
+        </p:spPr>
+        <p:txBody>
+          <a:bodyPr wrap="square" anchor="t" lIns="0" rIns="0" tIns="0" bIns="0"/>
+          <a:lstStyle/>
+          <a:p>
+            <a:pPr algn="l"/>
+            <a:r>
+              <a:rPr sz="1200" b="0" i="0" lang="zh-CN" altLang="en-US">
+                <a:solidFill>
+                  <a:srgbClr val="9E1B1B"/>
+                </a:solidFill>
+                <a:latin typeface="Noto Sans CJK SC"/>
+                <a:ea typeface="Noto Sans CJK SC"/>
+                <a:cs typeface="Noto Sans CJK SC"/>
+              </a:rPr>
+              <a:t>中国法人接什么</a:t>
+            </a:r>
+          </a:p>
+        </p:txBody>
+      </p:sp>
+      <p:sp>
+        <p:nvSpPr>
+          <p:cNvPr id="24" name="TextBox 23"/>
+          <p:cNvSpPr txBox="1"/>
+          <p:nvPr/>
+        </p:nvSpPr>
+        <p:spPr>
+          <a:xfrm>
+            <a:off x="8065008" y="3675887"/>
+            <a:ext cx="3291840" cy="1280160"/>
+          </a:xfrm>
+          <a:prstGeom prst="rect">
+            <a:avLst/>
+          </a:prstGeom>
+          <a:noFill/>
+        </p:spPr>
+        <p:txBody>
+          <a:bodyPr wrap="square" anchor="t" lIns="0" rIns="0" tIns="0" bIns="0"/>
+          <a:lstStyle/>
+          <a:p>
+            <a:pPr algn="l">
+              <a:lnSpc>
+                <a:spcPct val="130000"/>
+              </a:lnSpc>
+            </a:pPr>
+            <a:r>
+              <a:rPr sz="1400" b="0" i="0" lang="zh-CN" altLang="en-US">
+                <a:solidFill>
+                  <a:srgbClr val="2C2C2C"/>
+                </a:solidFill>
+                <a:latin typeface="Noto Sans CJK SC"/>
+                <a:ea typeface="Noto Sans CJK SC"/>
+                <a:cs typeface="Noto Sans CJK SC"/>
+              </a:rPr>
+              <a:t>一百到二百支骨架把话术固定。事业者换脸，不换话。乱宣传，先从话术上收。</a:t>
+            </a:r>
+          </a:p>
+        </p:txBody>
+      </p:sp>
+      <p:sp>
+        <p:nvSpPr>
+          <p:cNvPr id="25" name="Rectangle 24"/>
+          <p:cNvSpPr/>
+          <p:nvPr/>
+        </p:nvSpPr>
+        <p:spPr>
+          <a:xfrm>
+            <a:off x="658368" y="5212080"/>
+            <a:ext cx="10881360" cy="10972"/>
+          </a:xfrm>
+          <a:prstGeom prst="rect">
+            <a:avLst/>
+          </a:prstGeom>
+          <a:solidFill>
+            <a:srgbClr val="E2E2E2"/>
+          </a:solidFill>
+          <a:ln>
+            <a:noFill/>
+          </a:ln>
+        </p:spPr>
+        <p:style>
+          <a:lnRef idx="1">
+            <a:schemeClr val="accent1"/>
+          </a:lnRef>
+          <a:fillRef idx="3">
+            <a:schemeClr val="accent1"/>
+          </a:fillRef>
+          <a:effectRef idx="2">
+            <a:schemeClr val="accent1"/>
+          </a:effectRef>
+          <a:fontRef idx="minor">
+            <a:schemeClr val="lt1"/>
+          </a:fontRef>
+        </p:style>
+        <p:txBody>
+          <a:bodyPr rtlCol="0" anchor="ctr"/>
+          <a:lstStyle/>
+          <a:p>
+            <a:pPr algn="ctr"/>
+          </a:p>
+        </p:txBody>
+      </p:sp>
+      <p:sp>
+        <p:nvSpPr>
+          <p:cNvPr id="26" name="TextBox 25"/>
+          <p:cNvSpPr txBox="1"/>
+          <p:nvPr/>
+        </p:nvSpPr>
+        <p:spPr>
+          <a:xfrm>
+            <a:off x="658368" y="5394960"/>
+            <a:ext cx="10789920" cy="822960"/>
+          </a:xfrm>
+          <a:prstGeom prst="rect">
+            <a:avLst/>
+          </a:prstGeom>
+          <a:noFill/>
+        </p:spPr>
+        <p:txBody>
+          <a:bodyPr wrap="square" anchor="t" lIns="0" rIns="0" tIns="0" bIns="0"/>
+          <a:lstStyle/>
+          <a:p>
+            <a:pPr algn="l">
+              <a:lnSpc>
+                <a:spcPct val="130000"/>
+              </a:lnSpc>
+            </a:pPr>
+            <a:r>
+              <a:rPr sz="2000" b="0" i="0" lang="zh-CN" altLang="en-US">
+                <a:solidFill>
+                  <a:srgbClr val="9E1B1B"/>
+                </a:solidFill>
+                <a:latin typeface="Noto Sans CJK SC Medium"/>
+                <a:ea typeface="Noto Sans CJK SC Medium"/>
+                <a:cs typeface="Noto Sans CJK SC Medium"/>
+              </a:rPr>
+              <a:t>手册的判断：走砸，多半是合规，
+不是市场不够大。</a:t>
+            </a:r>
+          </a:p>
+        </p:txBody>
+      </p:sp>
+      <p:sp>
+        <p:nvSpPr>
+          <p:cNvPr id="27" name="TextBox 26"/>
+          <p:cNvSpPr txBox="1"/>
+          <p:nvPr/>
+        </p:nvSpPr>
+        <p:spPr>
+          <a:xfrm>
+            <a:off x="10561320" y="6492240"/>
+            <a:ext cx="1051560" cy="201168"/>
+          </a:xfrm>
+          <a:prstGeom prst="rect">
+            <a:avLst/>
+          </a:prstGeom>
+          <a:noFill/>
+        </p:spPr>
+        <p:txBody>
+          <a:bodyPr wrap="square" anchor="t" lIns="0" rIns="0" tIns="0" bIns="0"/>
+          <a:lstStyle/>
+          <a:p>
+            <a:pPr algn="r"/>
+            <a:r>
+              <a:rPr sz="1100" b="0" i="0" lang="zh-CN" altLang="en-US">
+                <a:solidFill>
+                  <a:srgbClr val="C8C8C8"/>
+                </a:solidFill>
+                <a:latin typeface="Noto Sans CJK SC"/>
+                <a:ea typeface="Noto Sans CJK SC"/>
+                <a:cs typeface="Noto Sans CJK SC"/>
+              </a:rPr>
+              <a:t>14</a:t>
+            </a:r>
+          </a:p>
+        </p:txBody>
+      </p:sp>
+    </p:spTree>
+  </p:cSld>
+  <p:clrMapOvr>
+    <a:masterClrMapping/>
+  </p:clrMapOvr>
+</p:sld>
+</file>
+
+<file path=ppt/slides/slide15.xml><?xml version="1.0" encoding="utf-8"?>
 <p:sld xmlns:a="http://schemas.openxmlformats.org/drawingml/2006/main" xmlns:p="http://schemas.openxmlformats.org/presentationml/2006/main" xmlns:r="http://schemas.openxmlformats.org/officeDocument/2006/relationships">
   <p:cSld>
     <p:bg>
@@ -6347,7 +9705,7 @@
                 <a:ea typeface="Noto Sans CJK SC"/>
                 <a:cs typeface="Noto Sans CJK SC"/>
               </a:rPr>
-              <a:t>拿掉只为旧卖法存在的工序</a:t>
+              <a:t>烟台四条线，先盘点</a:t>
             </a:r>
           </a:p>
         </p:txBody>
@@ -6631,8 +9989,8 @@
                 <a:ea typeface="Noto Sans CJK SC"/>
                 <a:cs typeface="Noto Sans CJK SC"/>
               </a:rPr>
-              <a:t>要数三样：建了记录的人，
-连续用的天数，每天打开阿扎的人。</a:t>
+              <a:t>每月看六个数：型号数、换料清洗次数、罐容与人数，
+建了记录的人、连续用的天数、每天打开阿扎的人。</a:t>
             </a:r>
           </a:p>
         </p:txBody>
@@ -6702,7 +10060,7 @@
                 <a:ea typeface="Noto Sans CJK SC"/>
                 <a:cs typeface="Noto Sans CJK SC"/>
               </a:rPr>
-              <a:t>12</a:t>
+              <a:t>15</a:t>
             </a:r>
           </a:p>
         </p:txBody>
@@ -9566,7 +12924,7 @@
                 <a:ea typeface="Noto Sans CJK SC Medium"/>
                 <a:cs typeface="Noto Sans CJK SC Medium"/>
               </a:rPr>
-              <a:t>带去合作方的，是这三样</a:t>
+              <a:t>烟台先查这四条线</a:t>
             </a:r>
           </a:p>
         </p:txBody>
@@ -9622,84 +12980,113 @@
         </p:nvSpPr>
         <p:spPr>
           <a:xfrm>
-            <a:off x="658368" y="1371600"/>
-            <a:ext cx="3246120" cy="1051560"/>
-          </a:xfrm>
-          <a:prstGeom prst="rect">
-            <a:avLst/>
-          </a:prstGeom>
-          <a:noFill/>
-        </p:spPr>
-        <p:txBody>
-          <a:bodyPr wrap="square" anchor="t" lIns="0" rIns="0" tIns="0" bIns="0"/>
-          <a:lstStyle/>
-          <a:p>
-            <a:pPr algn="l"/>
-            <a:r>
-              <a:rPr sz="2400" b="0" i="0" lang="zh-CN" altLang="en-US">
-                <a:solidFill>
-                  <a:srgbClr val="141414"/>
-                </a:solidFill>
-                <a:latin typeface="Noto Sans CJK SC Medium"/>
-                <a:ea typeface="Noto Sans CJK SC Medium"/>
-                <a:cs typeface="Noto Sans CJK SC Medium"/>
-              </a:rPr>
-              <a:t>一个月十万套</a:t>
-            </a:r>
-          </a:p>
-        </p:txBody>
-      </p:sp>
-      <p:sp>
-        <p:nvSpPr>
-          <p:cNvPr id="6" name="TextBox 5"/>
-          <p:cNvSpPr txBox="1"/>
-          <p:nvPr/>
-        </p:nvSpPr>
-        <p:spPr>
-          <a:xfrm>
-            <a:off x="658368" y="2560320"/>
-            <a:ext cx="3246120" cy="1645920"/>
-          </a:xfrm>
-          <a:prstGeom prst="rect">
-            <a:avLst/>
-          </a:prstGeom>
-          <a:noFill/>
-        </p:spPr>
-        <p:txBody>
-          <a:bodyPr wrap="square" anchor="t" lIns="0" rIns="0" tIns="0" bIns="0"/>
-          <a:lstStyle/>
-          <a:p>
-            <a:pPr algn="l">
-              <a:lnSpc>
-                <a:spcPct val="145000"/>
-              </a:lnSpc>
-            </a:pPr>
-            <a:r>
-              <a:rPr sz="1500" b="0" i="0" lang="zh-CN" altLang="en-US">
-                <a:solidFill>
-                  <a:srgbClr val="2C2C2C"/>
+            <a:off x="658368" y="1143000"/>
+            <a:ext cx="2743200" cy="274320"/>
+          </a:xfrm>
+          <a:prstGeom prst="rect">
+            <a:avLst/>
+          </a:prstGeom>
+          <a:noFill/>
+        </p:spPr>
+        <p:txBody>
+          <a:bodyPr wrap="square" anchor="t" lIns="0" rIns="0" tIns="0" bIns="0"/>
+          <a:lstStyle/>
+          <a:p>
+            <a:pPr algn="l"/>
+            <a:r>
+              <a:rPr sz="1300" b="0" i="0" lang="zh-CN" altLang="en-US">
+                <a:solidFill>
+                  <a:srgbClr val="6A6A6A"/>
                 </a:solidFill>
                 <a:latin typeface="Noto Sans CJK SC"/>
                 <a:ea typeface="Noto Sans CJK SC"/>
                 <a:cs typeface="Noto Sans CJK SC"/>
               </a:rPr>
-              <a:t>价格按这个量重算，
-才落到原来的十分之一。
-交出去的是能排产的这个数。</a:t>
-            </a:r>
-          </a:p>
-        </p:txBody>
-      </p:sp>
-      <p:sp>
-        <p:nvSpPr>
-          <p:cNvPr id="7" name="Rectangle 6"/>
+              <a:t>线</a:t>
+            </a:r>
+          </a:p>
+        </p:txBody>
+      </p:sp>
+      <p:sp>
+        <p:nvSpPr>
+          <p:cNvPr id="6" name="TextBox 5"/>
+          <p:cNvSpPr txBox="1"/>
+          <p:nvPr/>
+        </p:nvSpPr>
+        <p:spPr>
+          <a:xfrm>
+            <a:off x="3383280" y="1143000"/>
+            <a:ext cx="4572000" cy="274320"/>
+          </a:xfrm>
+          <a:prstGeom prst="rect">
+            <a:avLst/>
+          </a:prstGeom>
+          <a:noFill/>
+        </p:spPr>
+        <p:txBody>
+          <a:bodyPr wrap="square" anchor="t" lIns="0" rIns="0" tIns="0" bIns="0"/>
+          <a:lstStyle/>
+          <a:p>
+            <a:pPr algn="l"/>
+            <a:r>
+              <a:rPr sz="1300" b="0" i="0" lang="zh-CN" altLang="en-US">
+                <a:solidFill>
+                  <a:srgbClr val="6A6A6A"/>
+                </a:solidFill>
+                <a:latin typeface="Noto Sans CJK SC"/>
+                <a:ea typeface="Noto Sans CJK SC"/>
+                <a:cs typeface="Noto Sans CJK SC"/>
+              </a:rPr>
+              <a:t>查什么</a:t>
+            </a:r>
+          </a:p>
+        </p:txBody>
+      </p:sp>
+      <p:sp>
+        <p:nvSpPr>
+          <p:cNvPr id="7" name="TextBox 6"/>
+          <p:cNvSpPr txBox="1"/>
+          <p:nvPr/>
+        </p:nvSpPr>
+        <p:spPr>
+          <a:xfrm>
+            <a:off x="8732520" y="1143000"/>
+            <a:ext cx="2926080" cy="274320"/>
+          </a:xfrm>
+          <a:prstGeom prst="rect">
+            <a:avLst/>
+          </a:prstGeom>
+          <a:noFill/>
+        </p:spPr>
+        <p:txBody>
+          <a:bodyPr wrap="square" anchor="t" lIns="0" rIns="0" tIns="0" bIns="0"/>
+          <a:lstStyle/>
+          <a:p>
+            <a:pPr algn="l"/>
+            <a:r>
+              <a:rPr sz="1300" b="0" i="0" lang="zh-CN" altLang="en-US">
+                <a:solidFill>
+                  <a:srgbClr val="6A6A6A"/>
+                </a:solidFill>
+                <a:latin typeface="Noto Sans CJK SC"/>
+                <a:ea typeface="Noto Sans CJK SC"/>
+                <a:cs typeface="Noto Sans CJK SC"/>
+              </a:rPr>
+              <a:t>交出什么</a:t>
+            </a:r>
+          </a:p>
+        </p:txBody>
+      </p:sp>
+      <p:sp>
+        <p:nvSpPr>
+          <p:cNvPr id="8" name="Rectangle 7"/>
           <p:cNvSpPr/>
           <p:nvPr/>
         </p:nvSpPr>
         <p:spPr>
           <a:xfrm>
-            <a:off x="4160520" y="1280160"/>
-            <a:ext cx="10972" cy="2880360"/>
+            <a:off x="658368" y="1408176"/>
+            <a:ext cx="10881360" cy="9144"/>
           </a:xfrm>
           <a:prstGeom prst="rect">
             <a:avLst/>
@@ -9735,27 +13122,27 @@
       </p:sp>
       <p:sp>
         <p:nvSpPr>
-          <p:cNvPr id="8" name="TextBox 7"/>
-          <p:cNvSpPr txBox="1"/>
-          <p:nvPr/>
-        </p:nvSpPr>
-        <p:spPr>
-          <a:xfrm>
-            <a:off x="4361688" y="1371600"/>
-            <a:ext cx="3246120" cy="1051560"/>
-          </a:xfrm>
-          <a:prstGeom prst="rect">
-            <a:avLst/>
-          </a:prstGeom>
-          <a:noFill/>
-        </p:spPr>
-        <p:txBody>
-          <a:bodyPr wrap="square" anchor="t" lIns="0" rIns="0" tIns="0" bIns="0"/>
-          <a:lstStyle/>
-          <a:p>
-            <a:pPr algn="l"/>
-            <a:r>
-              <a:rPr sz="2400" b="0" i="0" lang="zh-CN" altLang="en-US">
+          <p:cNvPr id="9" name="TextBox 8"/>
+          <p:cNvSpPr txBox="1"/>
+          <p:nvPr/>
+        </p:nvSpPr>
+        <p:spPr>
+          <a:xfrm>
+            <a:off x="658368" y="1481328"/>
+            <a:ext cx="2651760" cy="365760"/>
+          </a:xfrm>
+          <a:prstGeom prst="rect">
+            <a:avLst/>
+          </a:prstGeom>
+          <a:noFill/>
+        </p:spPr>
+        <p:txBody>
+          <a:bodyPr wrap="square" anchor="t" lIns="0" rIns="0" tIns="0" bIns="0"/>
+          <a:lstStyle/>
+          <a:p>
+            <a:pPr algn="l"/>
+            <a:r>
+              <a:rPr sz="2000" b="0" i="0" lang="zh-CN" altLang="en-US">
                 <a:solidFill>
                   <a:srgbClr val="141414"/>
                 </a:solidFill>
@@ -9763,62 +13150,137 @@
                 <a:ea typeface="Noto Sans CJK SC Medium"/>
                 <a:cs typeface="Noto Sans CJK SC Medium"/>
               </a:rPr>
-              <a:t>设备图纸</a:t>
-            </a:r>
-          </a:p>
-        </p:txBody>
-      </p:sp>
-      <p:sp>
-        <p:nvSpPr>
-          <p:cNvPr id="9" name="TextBox 8"/>
-          <p:cNvSpPr txBox="1"/>
-          <p:nvPr/>
-        </p:nvSpPr>
-        <p:spPr>
-          <a:xfrm>
-            <a:off x="4361688" y="2560320"/>
-            <a:ext cx="3246120" cy="1645920"/>
-          </a:xfrm>
-          <a:prstGeom prst="rect">
-            <a:avLst/>
-          </a:prstGeom>
-          <a:noFill/>
-        </p:spPr>
-        <p:txBody>
-          <a:bodyPr wrap="square" anchor="t" lIns="0" rIns="0" tIns="0" bIns="0"/>
-          <a:lstStyle/>
-          <a:p>
-            <a:pPr algn="l">
-              <a:lnSpc>
-                <a:spcPct val="145000"/>
-              </a:lnSpc>
-            </a:pPr>
-            <a:r>
-              <a:rPr sz="1500" b="0" i="0" lang="zh-CN" altLang="en-US">
-                <a:solidFill>
-                  <a:srgbClr val="2C2C2C"/>
+              <a:t>牙刷</a:t>
+            </a:r>
+          </a:p>
+        </p:txBody>
+      </p:sp>
+      <p:sp>
+        <p:nvSpPr>
+          <p:cNvPr id="10" name="TextBox 9"/>
+          <p:cNvSpPr txBox="1"/>
+          <p:nvPr/>
+        </p:nvSpPr>
+        <p:spPr>
+          <a:xfrm>
+            <a:off x="658368" y="1865376"/>
+            <a:ext cx="2651760" cy="457200"/>
+          </a:xfrm>
+          <a:prstGeom prst="rect">
+            <a:avLst/>
+          </a:prstGeom>
+          <a:noFill/>
+        </p:spPr>
+        <p:txBody>
+          <a:bodyPr wrap="square" anchor="t" lIns="0" rIns="0" tIns="0" bIns="0"/>
+          <a:lstStyle/>
+          <a:p>
+            <a:pPr algn="l"/>
+            <a:r>
+              <a:rPr sz="1200" b="0" i="0" lang="zh-CN" altLang="en-US">
+                <a:solidFill>
+                  <a:srgbClr val="6A6A6A"/>
                 </a:solidFill>
                 <a:latin typeface="Noto Sans CJK SC"/>
                 <a:ea typeface="Noto Sans CJK SC"/>
                 <a:cs typeface="Noto Sans CJK SC"/>
               </a:rPr>
-              <a:t>设备公司出。没有厂房，就在旁边盖。
-原料买断，对方只运转。
-拿去的是图纸，不是询价单。</a:t>
-            </a:r>
-          </a:p>
-        </p:txBody>
-      </p:sp>
-      <p:sp>
-        <p:nvSpPr>
-          <p:cNvPr id="10" name="Rectangle 9"/>
+              <a:t>烟台工厂造</a:t>
+            </a:r>
+          </a:p>
+        </p:txBody>
+      </p:sp>
+      <p:sp>
+        <p:nvSpPr>
+          <p:cNvPr id="11" name="TextBox 10"/>
+          <p:cNvSpPr txBox="1"/>
+          <p:nvPr/>
+        </p:nvSpPr>
+        <p:spPr>
+          <a:xfrm>
+            <a:off x="3383280" y="1481328"/>
+            <a:ext cx="5120640" cy="868680"/>
+          </a:xfrm>
+          <a:prstGeom prst="rect">
+            <a:avLst/>
+          </a:prstGeom>
+          <a:noFill/>
+        </p:spPr>
+        <p:txBody>
+          <a:bodyPr wrap="square" anchor="t" lIns="0" rIns="0" tIns="0" bIns="0"/>
+          <a:lstStyle/>
+          <a:p>
+            <a:pPr algn="l">
+              <a:lnSpc>
+                <a:spcPct val="130000"/>
+              </a:lnSpc>
+            </a:pPr>
+            <a:r>
+              <a:rPr sz="1500" b="0" i="0" lang="zh-CN" altLang="en-US">
+                <a:solidFill>
+                  <a:srgbClr val="2C2C2C"/>
+                </a:solidFill>
+                <a:latin typeface="Noto Sans CJK SC"/>
+                <a:ea typeface="Noto Sans CJK SC"/>
+                <a:cs typeface="Noto Sans CJK SC"/>
+              </a:rPr>
+              <a:t>型号几款；模具几腔；
+原料是袋装还是吨袋；
+付现金还是赊账。</a:t>
+            </a:r>
+          </a:p>
+        </p:txBody>
+      </p:sp>
+      <p:sp>
+        <p:nvSpPr>
+          <p:cNvPr id="12" name="TextBox 11"/>
+          <p:cNvSpPr txBox="1"/>
+          <p:nvPr/>
+        </p:nvSpPr>
+        <p:spPr>
+          <a:xfrm>
+            <a:off x="8732520" y="1481328"/>
+            <a:ext cx="2926080" cy="868680"/>
+          </a:xfrm>
+          <a:prstGeom prst="rect">
+            <a:avLst/>
+          </a:prstGeom>
+          <a:noFill/>
+        </p:spPr>
+        <p:txBody>
+          <a:bodyPr wrap="square" anchor="t" lIns="0" rIns="0" tIns="0" bIns="0"/>
+          <a:lstStyle/>
+          <a:p>
+            <a:pPr algn="l">
+              <a:lnSpc>
+                <a:spcPct val="130000"/>
+              </a:lnSpc>
+            </a:pPr>
+            <a:r>
+              <a:rPr sz="1500" b="0" i="0" lang="zh-CN" altLang="en-US">
+                <a:solidFill>
+                  <a:srgbClr val="2C2C2C"/>
+                </a:solidFill>
+                <a:latin typeface="Noto Sans CJK SC"/>
+                <a:ea typeface="Noto Sans CJK SC"/>
+                <a:cs typeface="Noto Sans CJK SC"/>
+              </a:rPr>
+              <a:t>缺哪几项，
+按总部标准列出。</a:t>
+            </a:r>
+          </a:p>
+        </p:txBody>
+      </p:sp>
+      <p:sp>
+        <p:nvSpPr>
+          <p:cNvPr id="13" name="Rectangle 12"/>
           <p:cNvSpPr/>
           <p:nvPr/>
         </p:nvSpPr>
         <p:spPr>
           <a:xfrm>
-            <a:off x="7863840" y="1280160"/>
-            <a:ext cx="10972" cy="2880360"/>
+            <a:off x="658368" y="2386584"/>
+            <a:ext cx="10881360" cy="9144"/>
           </a:xfrm>
           <a:prstGeom prst="rect">
             <a:avLst/>
@@ -9854,27 +13316,27 @@
       </p:sp>
       <p:sp>
         <p:nvSpPr>
-          <p:cNvPr id="11" name="TextBox 10"/>
-          <p:cNvSpPr txBox="1"/>
-          <p:nvPr/>
-        </p:nvSpPr>
-        <p:spPr>
-          <a:xfrm>
-            <a:off x="8065008" y="1371600"/>
-            <a:ext cx="3246120" cy="1051560"/>
-          </a:xfrm>
-          <a:prstGeom prst="rect">
-            <a:avLst/>
-          </a:prstGeom>
-          <a:noFill/>
-        </p:spPr>
-        <p:txBody>
-          <a:bodyPr wrap="square" anchor="t" lIns="0" rIns="0" tIns="0" bIns="0"/>
-          <a:lstStyle/>
-          <a:p>
-            <a:pPr algn="l"/>
-            <a:r>
-              <a:rPr sz="2400" b="0" i="0" lang="zh-CN" altLang="en-US">
+          <p:cNvPr id="14" name="TextBox 13"/>
+          <p:cNvSpPr txBox="1"/>
+          <p:nvPr/>
+        </p:nvSpPr>
+        <p:spPr>
+          <a:xfrm>
+            <a:off x="658368" y="2459736"/>
+            <a:ext cx="2651760" cy="365760"/>
+          </a:xfrm>
+          <a:prstGeom prst="rect">
+            <a:avLst/>
+          </a:prstGeom>
+          <a:noFill/>
+        </p:spPr>
+        <p:txBody>
+          <a:bodyPr wrap="square" anchor="t" lIns="0" rIns="0" tIns="0" bIns="0"/>
+          <a:lstStyle/>
+          <a:p>
+            <a:pPr algn="l"/>
+            <a:r>
+              <a:rPr sz="2000" b="0" i="0" lang="zh-CN" altLang="en-US">
                 <a:solidFill>
                   <a:srgbClr val="141414"/>
                 </a:solidFill>
@@ -9882,62 +13344,135 @@
                 <a:ea typeface="Noto Sans CJK SC Medium"/>
                 <a:cs typeface="Noto Sans CJK SC Medium"/>
               </a:rPr>
-              <a:t>育苗就开始的合同</a:t>
-            </a:r>
-          </a:p>
-        </p:txBody>
-      </p:sp>
-      <p:sp>
-        <p:nvSpPr>
-          <p:cNvPr id="12" name="TextBox 11"/>
-          <p:cNvSpPr txBox="1"/>
-          <p:nvPr/>
-        </p:nvSpPr>
-        <p:spPr>
-          <a:xfrm>
-            <a:off x="8065008" y="2560320"/>
-            <a:ext cx="3246120" cy="1645920"/>
-          </a:xfrm>
-          <a:prstGeom prst="rect">
-            <a:avLst/>
-          </a:prstGeom>
-          <a:noFill/>
-        </p:spPr>
-        <p:txBody>
-          <a:bodyPr wrap="square" anchor="t" lIns="0" rIns="0" tIns="0" bIns="0"/>
-          <a:lstStyle/>
-          <a:p>
-            <a:pPr algn="l">
-              <a:lnSpc>
-                <a:spcPct val="145000"/>
-              </a:lnSpc>
-            </a:pPr>
-            <a:r>
-              <a:rPr sz="1500" b="0" i="0" lang="zh-CN" altLang="en-US">
-                <a:solidFill>
-                  <a:srgbClr val="2C2C2C"/>
+              <a:t>厨具</a:t>
+            </a:r>
+          </a:p>
+        </p:txBody>
+      </p:sp>
+      <p:sp>
+        <p:nvSpPr>
+          <p:cNvPr id="15" name="TextBox 14"/>
+          <p:cNvSpPr txBox="1"/>
+          <p:nvPr/>
+        </p:nvSpPr>
+        <p:spPr>
+          <a:xfrm>
+            <a:off x="658368" y="2843784"/>
+            <a:ext cx="2651760" cy="457200"/>
+          </a:xfrm>
+          <a:prstGeom prst="rect">
+            <a:avLst/>
+          </a:prstGeom>
+          <a:noFill/>
+        </p:spPr>
+        <p:txBody>
+          <a:bodyPr wrap="square" anchor="t" lIns="0" rIns="0" tIns="0" bIns="0"/>
+          <a:lstStyle/>
+          <a:p>
+            <a:pPr algn="l"/>
+            <a:r>
+              <a:rPr sz="1200" b="0" i="0" lang="zh-CN" altLang="en-US">
+                <a:solidFill>
+                  <a:srgbClr val="6A6A6A"/>
                 </a:solidFill>
                 <a:latin typeface="Noto Sans CJK SC"/>
                 <a:ea typeface="Noto Sans CJK SC"/>
                 <a:cs typeface="Noto Sans CJK SC"/>
               </a:rPr>
-              <a:t>川芎、当归、白芍从育苗起要一两年。
-合同在涨价之前锁上。
-农活不会，就公司带。</a:t>
-            </a:r>
-          </a:p>
-        </p:txBody>
-      </p:sp>
-      <p:sp>
-        <p:nvSpPr>
-          <p:cNvPr id="13" name="Rectangle 12"/>
+              <a:t>烟台工厂造</a:t>
+            </a:r>
+          </a:p>
+        </p:txBody>
+      </p:sp>
+      <p:sp>
+        <p:nvSpPr>
+          <p:cNvPr id="16" name="TextBox 15"/>
+          <p:cNvSpPr txBox="1"/>
+          <p:nvPr/>
+        </p:nvSpPr>
+        <p:spPr>
+          <a:xfrm>
+            <a:off x="3383280" y="2459736"/>
+            <a:ext cx="5120640" cy="868680"/>
+          </a:xfrm>
+          <a:prstGeom prst="rect">
+            <a:avLst/>
+          </a:prstGeom>
+          <a:noFill/>
+        </p:spPr>
+        <p:txBody>
+          <a:bodyPr wrap="square" anchor="t" lIns="0" rIns="0" tIns="0" bIns="0"/>
+          <a:lstStyle/>
+          <a:p>
+            <a:pPr algn="l">
+              <a:lnSpc>
+                <a:spcPct val="130000"/>
+              </a:lnSpc>
+            </a:pPr>
+            <a:r>
+              <a:rPr sz="1500" b="0" i="0" lang="zh-CN" altLang="en-US">
+                <a:solidFill>
+                  <a:srgbClr val="2C2C2C"/>
+                </a:solidFill>
+                <a:latin typeface="Noto Sans CJK SC"/>
+                <a:ea typeface="Noto Sans CJK SC"/>
+                <a:cs typeface="Noto Sans CJK SC"/>
+              </a:rPr>
+              <a:t>同一个功能几款；
+换款一次，停线多久。</a:t>
+            </a:r>
+          </a:p>
+        </p:txBody>
+      </p:sp>
+      <p:sp>
+        <p:nvSpPr>
+          <p:cNvPr id="17" name="TextBox 16"/>
+          <p:cNvSpPr txBox="1"/>
+          <p:nvPr/>
+        </p:nvSpPr>
+        <p:spPr>
+          <a:xfrm>
+            <a:off x="8732520" y="2459736"/>
+            <a:ext cx="2926080" cy="868680"/>
+          </a:xfrm>
+          <a:prstGeom prst="rect">
+            <a:avLst/>
+          </a:prstGeom>
+          <a:noFill/>
+        </p:spPr>
+        <p:txBody>
+          <a:bodyPr wrap="square" anchor="t" lIns="0" rIns="0" tIns="0" bIns="0"/>
+          <a:lstStyle/>
+          <a:p>
+            <a:pPr algn="l">
+              <a:lnSpc>
+                <a:spcPct val="130000"/>
+              </a:lnSpc>
+            </a:pPr>
+            <a:r>
+              <a:rPr sz="1500" b="0" i="0" lang="zh-CN" altLang="en-US">
+                <a:solidFill>
+                  <a:srgbClr val="2C2C2C"/>
+                </a:solidFill>
+                <a:latin typeface="Noto Sans CJK SC"/>
+                <a:ea typeface="Noto Sans CJK SC"/>
+                <a:cs typeface="Noto Sans CJK SC"/>
+              </a:rPr>
+              <a:t>并款清单。</a:t>
+            </a:r>
+          </a:p>
+        </p:txBody>
+      </p:sp>
+      <p:sp>
+        <p:nvSpPr>
+          <p:cNvPr id="18" name="Rectangle 17"/>
           <p:cNvSpPr/>
           <p:nvPr/>
         </p:nvSpPr>
         <p:spPr>
           <a:xfrm>
-            <a:off x="658368" y="4709160"/>
-            <a:ext cx="10881360" cy="10972"/>
+            <a:off x="658368" y="3364992"/>
+            <a:ext cx="10881360" cy="9144"/>
           </a:xfrm>
           <a:prstGeom prst="rect">
             <a:avLst/>
@@ -9973,47 +13508,463 @@
       </p:sp>
       <p:sp>
         <p:nvSpPr>
-          <p:cNvPr id="14" name="TextBox 13"/>
-          <p:cNvSpPr txBox="1"/>
-          <p:nvPr/>
-        </p:nvSpPr>
-        <p:spPr>
-          <a:xfrm>
-            <a:off x="658368" y="4983480"/>
-            <a:ext cx="10789920" cy="1097280"/>
-          </a:xfrm>
-          <a:prstGeom prst="rect">
-            <a:avLst/>
-          </a:prstGeom>
-          <a:noFill/>
-        </p:spPr>
-        <p:txBody>
-          <a:bodyPr wrap="square" anchor="t" lIns="0" rIns="0" tIns="0" bIns="0"/>
-          <a:lstStyle/>
-          <a:p>
-            <a:pPr algn="l">
-              <a:lnSpc>
-                <a:spcPct val="135000"/>
-              </a:lnSpc>
-            </a:pPr>
-            <a:r>
-              <a:rPr sz="2200" b="0" i="0" lang="zh-CN" altLang="en-US">
-                <a:solidFill>
-                  <a:srgbClr val="9E1B1B"/>
+          <p:cNvPr id="19" name="TextBox 18"/>
+          <p:cNvSpPr txBox="1"/>
+          <p:nvPr/>
+        </p:nvSpPr>
+        <p:spPr>
+          <a:xfrm>
+            <a:off x="658368" y="3438144"/>
+            <a:ext cx="2651760" cy="365760"/>
+          </a:xfrm>
+          <a:prstGeom prst="rect">
+            <a:avLst/>
+          </a:prstGeom>
+          <a:noFill/>
+        </p:spPr>
+        <p:txBody>
+          <a:bodyPr wrap="square" anchor="t" lIns="0" rIns="0" tIns="0" bIns="0"/>
+          <a:lstStyle/>
+          <a:p>
+            <a:pPr algn="l"/>
+            <a:r>
+              <a:rPr sz="2000" b="0" i="0" lang="zh-CN" altLang="en-US">
+                <a:solidFill>
+                  <a:srgbClr val="141414"/>
                 </a:solidFill>
                 <a:latin typeface="Noto Sans CJK SC Medium"/>
                 <a:ea typeface="Noto Sans CJK SC Medium"/>
                 <a:cs typeface="Noto Sans CJK SC Medium"/>
               </a:rPr>
-              <a:t>大量生产不是第一步。
-这个数、这张图纸、这份合同，才是。</a:t>
-            </a:r>
-          </a:p>
-        </p:txBody>
-      </p:sp>
-      <p:sp>
-        <p:nvSpPr>
-          <p:cNvPr id="15" name="TextBox 14"/>
+              <a:t>保健食品</a:t>
+            </a:r>
+          </a:p>
+        </p:txBody>
+      </p:sp>
+      <p:sp>
+        <p:nvSpPr>
+          <p:cNvPr id="20" name="TextBox 19"/>
+          <p:cNvSpPr txBox="1"/>
+          <p:nvPr/>
+        </p:nvSpPr>
+        <p:spPr>
+          <a:xfrm>
+            <a:off x="658368" y="3822192"/>
+            <a:ext cx="2651760" cy="457200"/>
+          </a:xfrm>
+          <a:prstGeom prst="rect">
+            <a:avLst/>
+          </a:prstGeom>
+          <a:noFill/>
+        </p:spPr>
+        <p:txBody>
+          <a:bodyPr wrap="square" anchor="t" lIns="0" rIns="0" tIns="0" bIns="0"/>
+          <a:lstStyle/>
+          <a:p>
+            <a:pPr algn="l"/>
+            <a:r>
+              <a:rPr sz="1200" b="0" i="0" lang="zh-CN" altLang="en-US">
+                <a:solidFill>
+                  <a:srgbClr val="6A6A6A"/>
+                </a:solidFill>
+                <a:latin typeface="Noto Sans CJK SC"/>
+                <a:ea typeface="Noto Sans CJK SC"/>
+                <a:cs typeface="Noto Sans CJK SC"/>
+              </a:rPr>
+              <a:t>烟台工厂造</a:t>
+            </a:r>
+          </a:p>
+        </p:txBody>
+      </p:sp>
+      <p:sp>
+        <p:nvSpPr>
+          <p:cNvPr id="21" name="TextBox 20"/>
+          <p:cNvSpPr txBox="1"/>
+          <p:nvPr/>
+        </p:nvSpPr>
+        <p:spPr>
+          <a:xfrm>
+            <a:off x="3383280" y="3438144"/>
+            <a:ext cx="5120640" cy="868680"/>
+          </a:xfrm>
+          <a:prstGeom prst="rect">
+            <a:avLst/>
+          </a:prstGeom>
+          <a:noFill/>
+        </p:spPr>
+        <p:txBody>
+          <a:bodyPr wrap="square" anchor="t" lIns="0" rIns="0" tIns="0" bIns="0"/>
+          <a:lstStyle/>
+          <a:p>
+            <a:pPr algn="l">
+              <a:lnSpc>
+                <a:spcPct val="130000"/>
+              </a:lnSpc>
+            </a:pPr>
+            <a:r>
+              <a:rPr sz="1500" b="0" i="0" lang="zh-CN" altLang="en-US">
+                <a:solidFill>
+                  <a:srgbClr val="2C2C2C"/>
+                </a:solidFill>
+                <a:latin typeface="Noto Sans CJK SC"/>
+                <a:ea typeface="Noto Sans CJK SC"/>
+                <a:cs typeface="Noto Sans CJK SC"/>
+              </a:rPr>
+              <a:t>萃取罐几吨，几个人操作；
+干燥、切断两步还在不在。</a:t>
+            </a:r>
+          </a:p>
+        </p:txBody>
+      </p:sp>
+      <p:sp>
+        <p:nvSpPr>
+          <p:cNvPr id="22" name="TextBox 21"/>
+          <p:cNvSpPr txBox="1"/>
+          <p:nvPr/>
+        </p:nvSpPr>
+        <p:spPr>
+          <a:xfrm>
+            <a:off x="8732520" y="3438144"/>
+            <a:ext cx="2926080" cy="868680"/>
+          </a:xfrm>
+          <a:prstGeom prst="rect">
+            <a:avLst/>
+          </a:prstGeom>
+          <a:noFill/>
+        </p:spPr>
+        <p:txBody>
+          <a:bodyPr wrap="square" anchor="t" lIns="0" rIns="0" tIns="0" bIns="0"/>
+          <a:lstStyle/>
+          <a:p>
+            <a:pPr algn="l">
+              <a:lnSpc>
+                <a:spcPct val="130000"/>
+              </a:lnSpc>
+            </a:pPr>
+            <a:r>
+              <a:rPr sz="1500" b="0" i="0" lang="zh-CN" altLang="en-US">
+                <a:solidFill>
+                  <a:srgbClr val="2C2C2C"/>
+                </a:solidFill>
+                <a:latin typeface="Noto Sans CJK SC"/>
+                <a:ea typeface="Noto Sans CJK SC"/>
+                <a:cs typeface="Noto Sans CJK SC"/>
+              </a:rPr>
+              <a:t>鲜品直接取汁的
+改造单。</a:t>
+            </a:r>
+          </a:p>
+        </p:txBody>
+      </p:sp>
+      <p:sp>
+        <p:nvSpPr>
+          <p:cNvPr id="23" name="Rectangle 22"/>
+          <p:cNvSpPr/>
+          <p:nvPr/>
+        </p:nvSpPr>
+        <p:spPr>
+          <a:xfrm>
+            <a:off x="658368" y="4343400"/>
+            <a:ext cx="10881360" cy="9144"/>
+          </a:xfrm>
+          <a:prstGeom prst="rect">
+            <a:avLst/>
+          </a:prstGeom>
+          <a:solidFill>
+            <a:srgbClr val="E2E2E2"/>
+          </a:solidFill>
+          <a:ln>
+            <a:noFill/>
+          </a:ln>
+        </p:spPr>
+        <p:style>
+          <a:lnRef idx="1">
+            <a:schemeClr val="accent1"/>
+          </a:lnRef>
+          <a:fillRef idx="3">
+            <a:schemeClr val="accent1"/>
+          </a:fillRef>
+          <a:effectRef idx="2">
+            <a:schemeClr val="accent1"/>
+          </a:effectRef>
+          <a:fontRef idx="minor">
+            <a:schemeClr val="lt1"/>
+          </a:fontRef>
+        </p:style>
+        <p:txBody>
+          <a:bodyPr rtlCol="0" anchor="ctr"/>
+          <a:lstStyle/>
+          <a:p>
+            <a:pPr algn="ctr"/>
+          </a:p>
+        </p:txBody>
+      </p:sp>
+      <p:sp>
+        <p:nvSpPr>
+          <p:cNvPr id="24" name="TextBox 23"/>
+          <p:cNvSpPr txBox="1"/>
+          <p:nvPr/>
+        </p:nvSpPr>
+        <p:spPr>
+          <a:xfrm>
+            <a:off x="658368" y="4416552"/>
+            <a:ext cx="2651760" cy="365760"/>
+          </a:xfrm>
+          <a:prstGeom prst="rect">
+            <a:avLst/>
+          </a:prstGeom>
+          <a:noFill/>
+        </p:spPr>
+        <p:txBody>
+          <a:bodyPr wrap="square" anchor="t" lIns="0" rIns="0" tIns="0" bIns="0"/>
+          <a:lstStyle/>
+          <a:p>
+            <a:pPr algn="l"/>
+            <a:r>
+              <a:rPr sz="2000" b="0" i="0" lang="zh-CN" altLang="en-US">
+                <a:solidFill>
+                  <a:srgbClr val="141414"/>
+                </a:solidFill>
+                <a:latin typeface="Noto Sans CJK SC Medium"/>
+                <a:ea typeface="Noto Sans CJK SC Medium"/>
+                <a:cs typeface="Noto Sans CJK SC Medium"/>
+              </a:rPr>
+              <a:t>物流</a:t>
+            </a:r>
+          </a:p>
+        </p:txBody>
+      </p:sp>
+      <p:sp>
+        <p:nvSpPr>
+          <p:cNvPr id="25" name="TextBox 24"/>
+          <p:cNvSpPr txBox="1"/>
+          <p:nvPr/>
+        </p:nvSpPr>
+        <p:spPr>
+          <a:xfrm>
+            <a:off x="658368" y="4800600"/>
+            <a:ext cx="2651760" cy="457200"/>
+          </a:xfrm>
+          <a:prstGeom prst="rect">
+            <a:avLst/>
+          </a:prstGeom>
+          <a:noFill/>
+        </p:spPr>
+        <p:txBody>
+          <a:bodyPr wrap="square" anchor="t" lIns="0" rIns="0" tIns="0" bIns="0"/>
+          <a:lstStyle/>
+          <a:p>
+            <a:pPr algn="l"/>
+            <a:r>
+              <a:rPr sz="1200" b="0" i="0" lang="zh-CN" altLang="en-US">
+                <a:solidFill>
+                  <a:srgbClr val="6A6A6A"/>
+                </a:solidFill>
+                <a:latin typeface="Noto Sans CJK SC"/>
+                <a:ea typeface="Noto Sans CJK SC"/>
+                <a:cs typeface="Noto Sans CJK SC"/>
+              </a:rPr>
+              <a:t>烟台国际物流中心，2025 年启用</a:t>
+            </a:r>
+          </a:p>
+        </p:txBody>
+      </p:sp>
+      <p:sp>
+        <p:nvSpPr>
+          <p:cNvPr id="26" name="TextBox 25"/>
+          <p:cNvSpPr txBox="1"/>
+          <p:nvPr/>
+        </p:nvSpPr>
+        <p:spPr>
+          <a:xfrm>
+            <a:off x="3383280" y="4416552"/>
+            <a:ext cx="5120640" cy="868680"/>
+          </a:xfrm>
+          <a:prstGeom prst="rect">
+            <a:avLst/>
+          </a:prstGeom>
+          <a:noFill/>
+        </p:spPr>
+        <p:txBody>
+          <a:bodyPr wrap="square" anchor="t" lIns="0" rIns="0" tIns="0" bIns="0"/>
+          <a:lstStyle/>
+          <a:p>
+            <a:pPr algn="l">
+              <a:lnSpc>
+                <a:spcPct val="130000"/>
+              </a:lnSpc>
+            </a:pPr>
+            <a:r>
+              <a:rPr sz="1500" b="0" i="0" lang="zh-CN" altLang="en-US">
+                <a:solidFill>
+                  <a:srgbClr val="2C2C2C"/>
+                </a:solidFill>
+                <a:latin typeface="Noto Sans CJK SC"/>
+                <a:ea typeface="Noto Sans CJK SC"/>
+                <a:cs typeface="Noto Sans CJK SC"/>
+              </a:rPr>
+              <a:t>原料到下一道工序，中间转几趟；
+下一道工序能不能放到
+原料厂的墙外。</a:t>
+            </a:r>
+          </a:p>
+        </p:txBody>
+      </p:sp>
+      <p:sp>
+        <p:nvSpPr>
+          <p:cNvPr id="27" name="TextBox 26"/>
+          <p:cNvSpPr txBox="1"/>
+          <p:nvPr/>
+        </p:nvSpPr>
+        <p:spPr>
+          <a:xfrm>
+            <a:off x="8732520" y="4416552"/>
+            <a:ext cx="2926080" cy="868680"/>
+          </a:xfrm>
+          <a:prstGeom prst="rect">
+            <a:avLst/>
+          </a:prstGeom>
+          <a:noFill/>
+        </p:spPr>
+        <p:txBody>
+          <a:bodyPr wrap="square" anchor="t" lIns="0" rIns="0" tIns="0" bIns="0"/>
+          <a:lstStyle/>
+          <a:p>
+            <a:pPr algn="l">
+              <a:lnSpc>
+                <a:spcPct val="130000"/>
+              </a:lnSpc>
+            </a:pPr>
+            <a:r>
+              <a:rPr sz="1500" b="0" i="0" lang="zh-CN" altLang="en-US">
+                <a:solidFill>
+                  <a:srgbClr val="2C2C2C"/>
+                </a:solidFill>
+                <a:latin typeface="Noto Sans CJK SC"/>
+                <a:ea typeface="Noto Sans CJK SC"/>
+                <a:cs typeface="Noto Sans CJK SC"/>
+              </a:rPr>
+              <a:t>少一趟的清单。</a:t>
+            </a:r>
+          </a:p>
+        </p:txBody>
+      </p:sp>
+      <p:sp>
+        <p:nvSpPr>
+          <p:cNvPr id="28" name="Rectangle 27"/>
+          <p:cNvSpPr/>
+          <p:nvPr/>
+        </p:nvSpPr>
+        <p:spPr>
+          <a:xfrm>
+            <a:off x="658368" y="5321808"/>
+            <a:ext cx="10881360" cy="9144"/>
+          </a:xfrm>
+          <a:prstGeom prst="rect">
+            <a:avLst/>
+          </a:prstGeom>
+          <a:solidFill>
+            <a:srgbClr val="E2E2E2"/>
+          </a:solidFill>
+          <a:ln>
+            <a:noFill/>
+          </a:ln>
+        </p:spPr>
+        <p:style>
+          <a:lnRef idx="1">
+            <a:schemeClr val="accent1"/>
+          </a:lnRef>
+          <a:fillRef idx="3">
+            <a:schemeClr val="accent1"/>
+          </a:fillRef>
+          <a:effectRef idx="2">
+            <a:schemeClr val="accent1"/>
+          </a:effectRef>
+          <a:fontRef idx="minor">
+            <a:schemeClr val="lt1"/>
+          </a:fontRef>
+        </p:style>
+        <p:txBody>
+          <a:bodyPr rtlCol="0" anchor="ctr"/>
+          <a:lstStyle/>
+          <a:p>
+            <a:pPr algn="ctr"/>
+          </a:p>
+        </p:txBody>
+      </p:sp>
+      <p:sp>
+        <p:nvSpPr>
+          <p:cNvPr id="29" name="TextBox 28"/>
+          <p:cNvSpPr txBox="1"/>
+          <p:nvPr/>
+        </p:nvSpPr>
+        <p:spPr>
+          <a:xfrm>
+            <a:off x="658368" y="5486400"/>
+            <a:ext cx="10789920" cy="411480"/>
+          </a:xfrm>
+          <a:prstGeom prst="rect">
+            <a:avLst/>
+          </a:prstGeom>
+          <a:noFill/>
+        </p:spPr>
+        <p:txBody>
+          <a:bodyPr wrap="square" anchor="t" lIns="0" rIns="0" tIns="0" bIns="0"/>
+          <a:lstStyle/>
+          <a:p>
+            <a:pPr algn="l"/>
+            <a:r>
+              <a:rPr sz="2000" b="0" i="0" lang="zh-CN" altLang="en-US">
+                <a:solidFill>
+                  <a:srgbClr val="9E1B1B"/>
+                </a:solidFill>
+                <a:latin typeface="Noto Sans CJK SC Medium"/>
+                <a:ea typeface="Noto Sans CJK SC Medium"/>
+                <a:cs typeface="Noto Sans CJK SC Medium"/>
+              </a:rPr>
+              <a:t>先各自盘点，再谈改。</a:t>
+            </a:r>
+          </a:p>
+        </p:txBody>
+      </p:sp>
+      <p:sp>
+        <p:nvSpPr>
+          <p:cNvPr id="30" name="TextBox 29"/>
+          <p:cNvSpPr txBox="1"/>
+          <p:nvPr/>
+        </p:nvSpPr>
+        <p:spPr>
+          <a:xfrm>
+            <a:off x="658368" y="6035040"/>
+            <a:ext cx="10789920" cy="274320"/>
+          </a:xfrm>
+          <a:prstGeom prst="rect">
+            <a:avLst/>
+          </a:prstGeom>
+          <a:noFill/>
+        </p:spPr>
+        <p:txBody>
+          <a:bodyPr wrap="square" anchor="t" lIns="0" rIns="0" tIns="0" bIns="0"/>
+          <a:lstStyle/>
+          <a:p>
+            <a:pPr algn="l"/>
+            <a:r>
+              <a:rPr sz="1100" b="0" i="0" lang="zh-CN" altLang="en-US">
+                <a:solidFill>
+                  <a:srgbClr val="6A6A6A"/>
+                </a:solidFill>
+                <a:latin typeface="Noto Sans CJK SC"/>
+                <a:ea typeface="Noto Sans CJK SC"/>
+                <a:cs typeface="Noto Sans CJK SC"/>
+              </a:rPr>
+              <a:t>烟台工厂与物流中心的情况引自《艾多美 100 兆亿养成手册》，需核实。</a:t>
+            </a:r>
+          </a:p>
+        </p:txBody>
+      </p:sp>
+      <p:sp>
+        <p:nvSpPr>
+          <p:cNvPr id="31" name="TextBox 30"/>
           <p:cNvSpPr txBox="1"/>
           <p:nvPr/>
         </p:nvSpPr>
@@ -10137,7 +14088,7 @@
                 <a:ea typeface="Noto Sans CJK SC Medium"/>
                 <a:cs typeface="Noto Sans CJK SC Medium"/>
               </a:rPr>
-              <a:t>从企划一次通到终点</a:t>
+              <a:t>带去合作方的，是这三样</a:t>
             </a:r>
           </a:p>
         </p:txBody>
@@ -10193,29 +14144,29 @@
         </p:nvSpPr>
         <p:spPr>
           <a:xfrm>
-            <a:off x="658368" y="1234440"/>
-            <a:ext cx="640080" cy="329184"/>
-          </a:xfrm>
-          <a:prstGeom prst="rect">
-            <a:avLst/>
-          </a:prstGeom>
-          <a:noFill/>
-        </p:spPr>
-        <p:txBody>
-          <a:bodyPr wrap="square" anchor="t" lIns="0" rIns="0" tIns="0" bIns="0"/>
-          <a:lstStyle/>
-          <a:p>
-            <a:pPr algn="l"/>
-            <a:r>
-              <a:rPr sz="1600" b="0" i="0" lang="zh-CN" altLang="en-US">
-                <a:solidFill>
-                  <a:srgbClr val="9E1B1B"/>
+            <a:off x="658368" y="1371600"/>
+            <a:ext cx="3246120" cy="1051560"/>
+          </a:xfrm>
+          <a:prstGeom prst="rect">
+            <a:avLst/>
+          </a:prstGeom>
+          <a:noFill/>
+        </p:spPr>
+        <p:txBody>
+          <a:bodyPr wrap="square" anchor="t" lIns="0" rIns="0" tIns="0" bIns="0"/>
+          <a:lstStyle/>
+          <a:p>
+            <a:pPr algn="l"/>
+            <a:r>
+              <a:rPr sz="2400" b="0" i="0" lang="zh-CN" altLang="en-US">
+                <a:solidFill>
+                  <a:srgbClr val="141414"/>
                 </a:solidFill>
                 <a:latin typeface="Noto Sans CJK SC Medium"/>
                 <a:ea typeface="Noto Sans CJK SC Medium"/>
                 <a:cs typeface="Noto Sans CJK SC Medium"/>
               </a:rPr>
-              <a:t>01</a:t>
+              <a:t>一个月十万套</a:t>
             </a:r>
           </a:p>
         </p:txBody>
@@ -10228,56 +14179,25 @@
         </p:nvSpPr>
         <p:spPr>
           <a:xfrm>
-            <a:off x="1417320" y="1216152"/>
-            <a:ext cx="9966960" cy="365760"/>
-          </a:xfrm>
-          <a:prstGeom prst="rect">
-            <a:avLst/>
-          </a:prstGeom>
-          <a:noFill/>
-        </p:spPr>
-        <p:txBody>
-          <a:bodyPr wrap="square" anchor="t" lIns="0" rIns="0" tIns="0" bIns="0"/>
-          <a:lstStyle/>
-          <a:p>
-            <a:pPr algn="l"/>
-            <a:r>
-              <a:rPr sz="2200" b="0" i="0" lang="zh-CN" altLang="en-US">
-                <a:solidFill>
-                  <a:srgbClr val="141414"/>
-                </a:solidFill>
-                <a:latin typeface="Noto Sans CJK SC Medium"/>
-                <a:ea typeface="Noto Sans CJK SC Medium"/>
-                <a:cs typeface="Noto Sans CJK SC Medium"/>
-              </a:rPr>
-              <a:t>接力做不成一炉</a:t>
-            </a:r>
-          </a:p>
-        </p:txBody>
-      </p:sp>
-      <p:sp>
-        <p:nvSpPr>
-          <p:cNvPr id="7" name="TextBox 6"/>
-          <p:cNvSpPr txBox="1"/>
-          <p:nvPr/>
-        </p:nvSpPr>
-        <p:spPr>
-          <a:xfrm>
-            <a:off x="1417320" y="1655064"/>
-            <a:ext cx="9966960" cy="502920"/>
-          </a:xfrm>
-          <a:prstGeom prst="rect">
-            <a:avLst/>
-          </a:prstGeom>
-          <a:noFill/>
-        </p:spPr>
-        <p:txBody>
-          <a:bodyPr wrap="square" anchor="t" lIns="0" rIns="0" tIns="0" bIns="0"/>
-          <a:lstStyle/>
-          <a:p>
-            <a:pPr algn="l"/>
-            <a:r>
-              <a:rPr sz="1600" b="0" i="0" lang="zh-CN" altLang="en-US">
+            <a:off x="658368" y="2560320"/>
+            <a:ext cx="3246120" cy="1645920"/>
+          </a:xfrm>
+          <a:prstGeom prst="rect">
+            <a:avLst/>
+          </a:prstGeom>
+          <a:noFill/>
+        </p:spPr>
+        <p:txBody>
+          <a:bodyPr wrap="square" anchor="t" lIns="0" rIns="0" tIns="0" bIns="0"/>
+          <a:lstStyle/>
+          <a:p>
+            <a:pPr algn="l">
+              <a:lnSpc>
+                <a:spcPct val="145000"/>
+              </a:lnSpc>
+            </a:pPr>
+            <a:r>
+              <a:rPr sz="1500" b="0" i="0" lang="zh-CN" altLang="en-US">
                 <a:solidFill>
                   <a:srgbClr val="2C2C2C"/>
                 </a:solidFill>
@@ -10285,231 +14205,23 @@
                 <a:ea typeface="Noto Sans CJK SC"/>
                 <a:cs typeface="Noto Sans CJK SC"/>
               </a:rPr>
-              <a:t>商品做完才做内容，内容做完才培训。任何一环停下，后面都在等。</a:t>
-            </a:r>
-          </a:p>
-        </p:txBody>
-      </p:sp>
-      <p:sp>
-        <p:nvSpPr>
-          <p:cNvPr id="8" name="TextBox 7"/>
-          <p:cNvSpPr txBox="1"/>
-          <p:nvPr/>
-        </p:nvSpPr>
-        <p:spPr>
-          <a:xfrm>
-            <a:off x="658368" y="2350008"/>
-            <a:ext cx="640080" cy="329184"/>
-          </a:xfrm>
-          <a:prstGeom prst="rect">
-            <a:avLst/>
-          </a:prstGeom>
-          <a:noFill/>
-        </p:spPr>
-        <p:txBody>
-          <a:bodyPr wrap="square" anchor="t" lIns="0" rIns="0" tIns="0" bIns="0"/>
-          <a:lstStyle/>
-          <a:p>
-            <a:pPr algn="l"/>
-            <a:r>
-              <a:rPr sz="1600" b="0" i="0" lang="zh-CN" altLang="en-US">
-                <a:solidFill>
-                  <a:srgbClr val="9E1B1B"/>
-                </a:solidFill>
-                <a:latin typeface="Noto Sans CJK SC Medium"/>
-                <a:ea typeface="Noto Sans CJK SC Medium"/>
-                <a:cs typeface="Noto Sans CJK SC Medium"/>
-              </a:rPr>
-              <a:t>02</a:t>
-            </a:r>
-          </a:p>
-        </p:txBody>
-      </p:sp>
-      <p:sp>
-        <p:nvSpPr>
-          <p:cNvPr id="9" name="TextBox 8"/>
-          <p:cNvSpPr txBox="1"/>
-          <p:nvPr/>
-        </p:nvSpPr>
-        <p:spPr>
-          <a:xfrm>
-            <a:off x="1417320" y="2331720"/>
-            <a:ext cx="9966960" cy="365760"/>
-          </a:xfrm>
-          <a:prstGeom prst="rect">
-            <a:avLst/>
-          </a:prstGeom>
-          <a:noFill/>
-        </p:spPr>
-        <p:txBody>
-          <a:bodyPr wrap="square" anchor="t" lIns="0" rIns="0" tIns="0" bIns="0"/>
-          <a:lstStyle/>
-          <a:p>
-            <a:pPr algn="l"/>
-            <a:r>
-              <a:rPr sz="2200" b="0" i="0" lang="zh-CN" altLang="en-US">
-                <a:solidFill>
-                  <a:srgbClr val="141414"/>
-                </a:solidFill>
-                <a:latin typeface="Noto Sans CJK SC Medium"/>
-                <a:ea typeface="Noto Sans CJK SC Medium"/>
-                <a:cs typeface="Noto Sans CJK SC Medium"/>
-              </a:rPr>
-              <a:t>中间不能熄火</a:t>
-            </a:r>
-          </a:p>
-        </p:txBody>
-      </p:sp>
-      <p:sp>
-        <p:nvSpPr>
-          <p:cNvPr id="10" name="TextBox 9"/>
-          <p:cNvSpPr txBox="1"/>
-          <p:nvPr/>
-        </p:nvSpPr>
-        <p:spPr>
-          <a:xfrm>
-            <a:off x="1417320" y="2770632"/>
-            <a:ext cx="9966960" cy="502920"/>
-          </a:xfrm>
-          <a:prstGeom prst="rect">
-            <a:avLst/>
-          </a:prstGeom>
-          <a:noFill/>
-        </p:spPr>
-        <p:txBody>
-          <a:bodyPr wrap="square" anchor="t" lIns="0" rIns="0" tIns="0" bIns="0"/>
-          <a:lstStyle/>
-          <a:p>
-            <a:pPr algn="l"/>
-            <a:r>
-              <a:rPr sz="1600" b="0" i="0" lang="zh-CN" altLang="en-US">
-                <a:solidFill>
-                  <a:srgbClr val="2C2C2C"/>
-                </a:solidFill>
-                <a:latin typeface="Noto Sans CJK SC"/>
-                <a:ea typeface="Noto Sans CJK SC"/>
-                <a:cs typeface="Noto Sans CJK SC"/>
-              </a:rPr>
-              <a:t>钢铁厂从原料到成品不能中断。干燥、切断、运去别处再运回，都是中间熄火。</a:t>
-            </a:r>
-          </a:p>
-        </p:txBody>
-      </p:sp>
-      <p:sp>
-        <p:nvSpPr>
-          <p:cNvPr id="11" name="TextBox 10"/>
-          <p:cNvSpPr txBox="1"/>
-          <p:nvPr/>
-        </p:nvSpPr>
-        <p:spPr>
-          <a:xfrm>
-            <a:off x="658368" y="3465576"/>
-            <a:ext cx="640080" cy="329184"/>
-          </a:xfrm>
-          <a:prstGeom prst="rect">
-            <a:avLst/>
-          </a:prstGeom>
-          <a:noFill/>
-        </p:spPr>
-        <p:txBody>
-          <a:bodyPr wrap="square" anchor="t" lIns="0" rIns="0" tIns="0" bIns="0"/>
-          <a:lstStyle/>
-          <a:p>
-            <a:pPr algn="l"/>
-            <a:r>
-              <a:rPr sz="1600" b="0" i="0" lang="zh-CN" altLang="en-US">
-                <a:solidFill>
-                  <a:srgbClr val="9E1B1B"/>
-                </a:solidFill>
-                <a:latin typeface="Noto Sans CJK SC Medium"/>
-                <a:ea typeface="Noto Sans CJK SC Medium"/>
-                <a:cs typeface="Noto Sans CJK SC Medium"/>
-              </a:rPr>
-              <a:t>03</a:t>
-            </a:r>
-          </a:p>
-        </p:txBody>
-      </p:sp>
-      <p:sp>
-        <p:nvSpPr>
-          <p:cNvPr id="12" name="TextBox 11"/>
-          <p:cNvSpPr txBox="1"/>
-          <p:nvPr/>
-        </p:nvSpPr>
-        <p:spPr>
-          <a:xfrm>
-            <a:off x="1417320" y="3447288"/>
-            <a:ext cx="9966960" cy="365760"/>
-          </a:xfrm>
-          <a:prstGeom prst="rect">
-            <a:avLst/>
-          </a:prstGeom>
-          <a:noFill/>
-        </p:spPr>
-        <p:txBody>
-          <a:bodyPr wrap="square" anchor="t" lIns="0" rIns="0" tIns="0" bIns="0"/>
-          <a:lstStyle/>
-          <a:p>
-            <a:pPr algn="l"/>
-            <a:r>
-              <a:rPr sz="2200" b="0" i="0" lang="zh-CN" altLang="en-US">
-                <a:solidFill>
-                  <a:srgbClr val="141414"/>
-                </a:solidFill>
-                <a:latin typeface="Noto Sans CJK SC Medium"/>
-                <a:ea typeface="Noto Sans CJK SC Medium"/>
-                <a:cs typeface="Noto Sans CJK SC Medium"/>
-              </a:rPr>
-              <a:t>一次写完</a:t>
-            </a:r>
-          </a:p>
-        </p:txBody>
-      </p:sp>
-      <p:sp>
-        <p:nvSpPr>
-          <p:cNvPr id="13" name="TextBox 12"/>
-          <p:cNvSpPr txBox="1"/>
-          <p:nvPr/>
-        </p:nvSpPr>
-        <p:spPr>
-          <a:xfrm>
-            <a:off x="1417320" y="3886200"/>
-            <a:ext cx="9966960" cy="502920"/>
-          </a:xfrm>
-          <a:prstGeom prst="rect">
-            <a:avLst/>
-          </a:prstGeom>
-          <a:noFill/>
-        </p:spPr>
-        <p:txBody>
-          <a:bodyPr wrap="square" anchor="t" lIns="0" rIns="0" tIns="0" bIns="0"/>
-          <a:lstStyle/>
-          <a:p>
-            <a:pPr algn="l"/>
-            <a:r>
-              <a:rPr sz="1600" b="0" i="0" lang="zh-CN" altLang="en-US">
-                <a:solidFill>
-                  <a:srgbClr val="2C2C2C"/>
-                </a:solidFill>
-                <a:latin typeface="Noto Sans CJK SC"/>
-                <a:ea typeface="Noto Sans CJK SC"/>
-                <a:cs typeface="Noto Sans CJK SC"/>
-              </a:rPr>
-              <a:t>这个产品、这条工序、中文骨架、对这个人的那句话、每天打开的那一件，写在同一次企划里。</a:t>
-            </a:r>
-          </a:p>
-        </p:txBody>
-      </p:sp>
-      <p:sp>
-        <p:nvSpPr>
-          <p:cNvPr id="14" name="Rectangle 13"/>
+              <a:t>价格按这个量重算，
+才落到原来的十分之一。
+交出去的是能排产的这个数。</a:t>
+            </a:r>
+          </a:p>
+        </p:txBody>
+      </p:sp>
+      <p:sp>
+        <p:nvSpPr>
+          <p:cNvPr id="7" name="Rectangle 6"/>
           <p:cNvSpPr/>
           <p:nvPr/>
         </p:nvSpPr>
         <p:spPr>
           <a:xfrm>
-            <a:off x="658368" y="4754880"/>
-            <a:ext cx="10881360" cy="10972"/>
+            <a:off x="4160520" y="1280160"/>
+            <a:ext cx="10972" cy="2880360"/>
           </a:xfrm>
           <a:prstGeom prst="rect">
             <a:avLst/>
@@ -10545,47 +14257,285 @@
       </p:sp>
       <p:sp>
         <p:nvSpPr>
-          <p:cNvPr id="15" name="TextBox 14"/>
-          <p:cNvSpPr txBox="1"/>
-          <p:nvPr/>
-        </p:nvSpPr>
-        <p:spPr>
-          <a:xfrm>
-            <a:off x="658368" y="4983480"/>
-            <a:ext cx="10789920" cy="1005840"/>
-          </a:xfrm>
-          <a:prstGeom prst="rect">
-            <a:avLst/>
-          </a:prstGeom>
-          <a:noFill/>
-        </p:spPr>
-        <p:txBody>
-          <a:bodyPr wrap="square" anchor="t" lIns="0" rIns="0" tIns="0" bIns="0"/>
-          <a:lstStyle/>
-          <a:p>
-            <a:pPr algn="l">
-              <a:lnSpc>
-                <a:spcPct val="130000"/>
-              </a:lnSpc>
-            </a:pPr>
-            <a:r>
-              <a:rPr sz="2200" b="0" i="0" lang="zh-CN" altLang="en-US">
-                <a:solidFill>
-                  <a:srgbClr val="9E1B1B"/>
+          <p:cNvPr id="8" name="TextBox 7"/>
+          <p:cNvSpPr txBox="1"/>
+          <p:nvPr/>
+        </p:nvSpPr>
+        <p:spPr>
+          <a:xfrm>
+            <a:off x="4361688" y="1371600"/>
+            <a:ext cx="3246120" cy="1051560"/>
+          </a:xfrm>
+          <a:prstGeom prst="rect">
+            <a:avLst/>
+          </a:prstGeom>
+          <a:noFill/>
+        </p:spPr>
+        <p:txBody>
+          <a:bodyPr wrap="square" anchor="t" lIns="0" rIns="0" tIns="0" bIns="0"/>
+          <a:lstStyle/>
+          <a:p>
+            <a:pPr algn="l"/>
+            <a:r>
+              <a:rPr sz="2400" b="0" i="0" lang="zh-CN" altLang="en-US">
+                <a:solidFill>
+                  <a:srgbClr val="141414"/>
                 </a:solidFill>
                 <a:latin typeface="Noto Sans CJK SC Medium"/>
                 <a:ea typeface="Noto Sans CJK SC Medium"/>
                 <a:cs typeface="Noto Sans CJK SC Medium"/>
               </a:rPr>
-              <a:t>中国法人先出货、再补内容、再办培训，
-链就在企划上断了。</a:t>
-            </a:r>
-          </a:p>
-        </p:txBody>
-      </p:sp>
-      <p:sp>
-        <p:nvSpPr>
-          <p:cNvPr id="16" name="TextBox 15"/>
+              <a:t>设备图纸</a:t>
+            </a:r>
+          </a:p>
+        </p:txBody>
+      </p:sp>
+      <p:sp>
+        <p:nvSpPr>
+          <p:cNvPr id="9" name="TextBox 8"/>
+          <p:cNvSpPr txBox="1"/>
+          <p:nvPr/>
+        </p:nvSpPr>
+        <p:spPr>
+          <a:xfrm>
+            <a:off x="4361688" y="2560320"/>
+            <a:ext cx="3246120" cy="1645920"/>
+          </a:xfrm>
+          <a:prstGeom prst="rect">
+            <a:avLst/>
+          </a:prstGeom>
+          <a:noFill/>
+        </p:spPr>
+        <p:txBody>
+          <a:bodyPr wrap="square" anchor="t" lIns="0" rIns="0" tIns="0" bIns="0"/>
+          <a:lstStyle/>
+          <a:p>
+            <a:pPr algn="l">
+              <a:lnSpc>
+                <a:spcPct val="145000"/>
+              </a:lnSpc>
+            </a:pPr>
+            <a:r>
+              <a:rPr sz="1500" b="0" i="0" lang="zh-CN" altLang="en-US">
+                <a:solidFill>
+                  <a:srgbClr val="2C2C2C"/>
+                </a:solidFill>
+                <a:latin typeface="Noto Sans CJK SC"/>
+                <a:ea typeface="Noto Sans CJK SC"/>
+                <a:cs typeface="Noto Sans CJK SC"/>
+              </a:rPr>
+              <a:t>设备公司出。没有厂房，就在旁边盖。
+原料买断，对方只运转。
+拿去的是图纸，不是询价单。</a:t>
+            </a:r>
+          </a:p>
+        </p:txBody>
+      </p:sp>
+      <p:sp>
+        <p:nvSpPr>
+          <p:cNvPr id="10" name="Rectangle 9"/>
+          <p:cNvSpPr/>
+          <p:nvPr/>
+        </p:nvSpPr>
+        <p:spPr>
+          <a:xfrm>
+            <a:off x="7863840" y="1280160"/>
+            <a:ext cx="10972" cy="2880360"/>
+          </a:xfrm>
+          <a:prstGeom prst="rect">
+            <a:avLst/>
+          </a:prstGeom>
+          <a:solidFill>
+            <a:srgbClr val="E2E2E2"/>
+          </a:solidFill>
+          <a:ln>
+            <a:noFill/>
+          </a:ln>
+        </p:spPr>
+        <p:style>
+          <a:lnRef idx="1">
+            <a:schemeClr val="accent1"/>
+          </a:lnRef>
+          <a:fillRef idx="3">
+            <a:schemeClr val="accent1"/>
+          </a:fillRef>
+          <a:effectRef idx="2">
+            <a:schemeClr val="accent1"/>
+          </a:effectRef>
+          <a:fontRef idx="minor">
+            <a:schemeClr val="lt1"/>
+          </a:fontRef>
+        </p:style>
+        <p:txBody>
+          <a:bodyPr rtlCol="0" anchor="ctr"/>
+          <a:lstStyle/>
+          <a:p>
+            <a:pPr algn="ctr"/>
+          </a:p>
+        </p:txBody>
+      </p:sp>
+      <p:sp>
+        <p:nvSpPr>
+          <p:cNvPr id="11" name="TextBox 10"/>
+          <p:cNvSpPr txBox="1"/>
+          <p:nvPr/>
+        </p:nvSpPr>
+        <p:spPr>
+          <a:xfrm>
+            <a:off x="8065008" y="1371600"/>
+            <a:ext cx="3246120" cy="1051560"/>
+          </a:xfrm>
+          <a:prstGeom prst="rect">
+            <a:avLst/>
+          </a:prstGeom>
+          <a:noFill/>
+        </p:spPr>
+        <p:txBody>
+          <a:bodyPr wrap="square" anchor="t" lIns="0" rIns="0" tIns="0" bIns="0"/>
+          <a:lstStyle/>
+          <a:p>
+            <a:pPr algn="l"/>
+            <a:r>
+              <a:rPr sz="2400" b="0" i="0" lang="zh-CN" altLang="en-US">
+                <a:solidFill>
+                  <a:srgbClr val="141414"/>
+                </a:solidFill>
+                <a:latin typeface="Noto Sans CJK SC Medium"/>
+                <a:ea typeface="Noto Sans CJK SC Medium"/>
+                <a:cs typeface="Noto Sans CJK SC Medium"/>
+              </a:rPr>
+              <a:t>育苗就开始的合同</a:t>
+            </a:r>
+          </a:p>
+        </p:txBody>
+      </p:sp>
+      <p:sp>
+        <p:nvSpPr>
+          <p:cNvPr id="12" name="TextBox 11"/>
+          <p:cNvSpPr txBox="1"/>
+          <p:nvPr/>
+        </p:nvSpPr>
+        <p:spPr>
+          <a:xfrm>
+            <a:off x="8065008" y="2560320"/>
+            <a:ext cx="3246120" cy="1645920"/>
+          </a:xfrm>
+          <a:prstGeom prst="rect">
+            <a:avLst/>
+          </a:prstGeom>
+          <a:noFill/>
+        </p:spPr>
+        <p:txBody>
+          <a:bodyPr wrap="square" anchor="t" lIns="0" rIns="0" tIns="0" bIns="0"/>
+          <a:lstStyle/>
+          <a:p>
+            <a:pPr algn="l">
+              <a:lnSpc>
+                <a:spcPct val="145000"/>
+              </a:lnSpc>
+            </a:pPr>
+            <a:r>
+              <a:rPr sz="1500" b="0" i="0" lang="zh-CN" altLang="en-US">
+                <a:solidFill>
+                  <a:srgbClr val="2C2C2C"/>
+                </a:solidFill>
+                <a:latin typeface="Noto Sans CJK SC"/>
+                <a:ea typeface="Noto Sans CJK SC"/>
+                <a:cs typeface="Noto Sans CJK SC"/>
+              </a:rPr>
+              <a:t>川芎、当归、白芍从育苗起要一两年。
+合同在涨价之前锁上。
+农活不会，就公司带。</a:t>
+            </a:r>
+          </a:p>
+        </p:txBody>
+      </p:sp>
+      <p:sp>
+        <p:nvSpPr>
+          <p:cNvPr id="13" name="Rectangle 12"/>
+          <p:cNvSpPr/>
+          <p:nvPr/>
+        </p:nvSpPr>
+        <p:spPr>
+          <a:xfrm>
+            <a:off x="658368" y="4709160"/>
+            <a:ext cx="10881360" cy="10972"/>
+          </a:xfrm>
+          <a:prstGeom prst="rect">
+            <a:avLst/>
+          </a:prstGeom>
+          <a:solidFill>
+            <a:srgbClr val="E2E2E2"/>
+          </a:solidFill>
+          <a:ln>
+            <a:noFill/>
+          </a:ln>
+        </p:spPr>
+        <p:style>
+          <a:lnRef idx="1">
+            <a:schemeClr val="accent1"/>
+          </a:lnRef>
+          <a:fillRef idx="3">
+            <a:schemeClr val="accent1"/>
+          </a:fillRef>
+          <a:effectRef idx="2">
+            <a:schemeClr val="accent1"/>
+          </a:effectRef>
+          <a:fontRef idx="minor">
+            <a:schemeClr val="lt1"/>
+          </a:fontRef>
+        </p:style>
+        <p:txBody>
+          <a:bodyPr rtlCol="0" anchor="ctr"/>
+          <a:lstStyle/>
+          <a:p>
+            <a:pPr algn="ctr"/>
+          </a:p>
+        </p:txBody>
+      </p:sp>
+      <p:sp>
+        <p:nvSpPr>
+          <p:cNvPr id="14" name="TextBox 13"/>
+          <p:cNvSpPr txBox="1"/>
+          <p:nvPr/>
+        </p:nvSpPr>
+        <p:spPr>
+          <a:xfrm>
+            <a:off x="658368" y="4983480"/>
+            <a:ext cx="10789920" cy="1097280"/>
+          </a:xfrm>
+          <a:prstGeom prst="rect">
+            <a:avLst/>
+          </a:prstGeom>
+          <a:noFill/>
+        </p:spPr>
+        <p:txBody>
+          <a:bodyPr wrap="square" anchor="t" lIns="0" rIns="0" tIns="0" bIns="0"/>
+          <a:lstStyle/>
+          <a:p>
+            <a:pPr algn="l">
+              <a:lnSpc>
+                <a:spcPct val="135000"/>
+              </a:lnSpc>
+            </a:pPr>
+            <a:r>
+              <a:rPr sz="2200" b="0" i="0" lang="zh-CN" altLang="en-US">
+                <a:solidFill>
+                  <a:srgbClr val="9E1B1B"/>
+                </a:solidFill>
+                <a:latin typeface="Noto Sans CJK SC Medium"/>
+                <a:ea typeface="Noto Sans CJK SC Medium"/>
+                <a:cs typeface="Noto Sans CJK SC Medium"/>
+              </a:rPr>
+              <a:t>大量生产不是第一步。
+这个数、这张图纸、这份合同，才是。</a:t>
+            </a:r>
+          </a:p>
+        </p:txBody>
+      </p:sp>
+      <p:sp>
+        <p:nvSpPr>
+          <p:cNvPr id="15" name="TextBox 14"/>
           <p:cNvSpPr txBox="1"/>
           <p:nvPr/>
         </p:nvSpPr>
@@ -10709,7 +14659,7 @@
                 <a:ea typeface="Noto Sans CJK SC Medium"/>
                 <a:cs typeface="Noto Sans CJK SC Medium"/>
               </a:rPr>
-              <a:t>个人平台，先改变事业者</a:t>
+              <a:t>从企划一次通到终点</a:t>
             </a:r>
           </a:p>
         </p:txBody>
@@ -10765,21 +14715,21 @@
         </p:nvSpPr>
         <p:spPr>
           <a:xfrm>
-            <a:off x="658368" y="1207008"/>
-            <a:ext cx="3200400" cy="237744"/>
-          </a:xfrm>
-          <a:prstGeom prst="rect">
-            <a:avLst/>
-          </a:prstGeom>
-          <a:noFill/>
-        </p:spPr>
-        <p:txBody>
-          <a:bodyPr wrap="square" anchor="t" lIns="0" rIns="0" tIns="0" bIns="0"/>
-          <a:lstStyle/>
-          <a:p>
-            <a:pPr algn="l"/>
-            <a:r>
-              <a:rPr sz="1400" b="0" i="0" lang="zh-CN" altLang="en-US">
+            <a:off x="658368" y="1234440"/>
+            <a:ext cx="640080" cy="329184"/>
+          </a:xfrm>
+          <a:prstGeom prst="rect">
+            <a:avLst/>
+          </a:prstGeom>
+          <a:noFill/>
+        </p:spPr>
+        <p:txBody>
+          <a:bodyPr wrap="square" anchor="t" lIns="0" rIns="0" tIns="0" bIns="0"/>
+          <a:lstStyle/>
+          <a:p>
+            <a:pPr algn="l"/>
+            <a:r>
+              <a:rPr sz="1600" b="0" i="0" lang="zh-CN" altLang="en-US">
                 <a:solidFill>
                   <a:srgbClr val="9E1B1B"/>
                 </a:solidFill>
@@ -10800,8 +14750,8 @@
         </p:nvSpPr>
         <p:spPr>
           <a:xfrm>
-            <a:off x="658368" y="1499616"/>
-            <a:ext cx="3246120" cy="640080"/>
+            <a:off x="1417320" y="1216152"/>
+            <a:ext cx="9966960" cy="365760"/>
           </a:xfrm>
           <a:prstGeom prst="rect">
             <a:avLst/>
@@ -10822,7 +14772,7 @@
                 <a:ea typeface="Noto Sans CJK SC Medium"/>
                 <a:cs typeface="Noto Sans CJK SC Medium"/>
               </a:rPr>
-              <a:t>八个阶段在里面</a:t>
+              <a:t>接力做不成一炉</a:t>
             </a:r>
           </a:p>
         </p:txBody>
@@ -10835,25 +14785,21 @@
         </p:nvSpPr>
         <p:spPr>
           <a:xfrm>
-            <a:off x="658368" y="2240280"/>
-            <a:ext cx="3246120" cy="1965960"/>
-          </a:xfrm>
-          <a:prstGeom prst="rect">
-            <a:avLst/>
-          </a:prstGeom>
-          <a:noFill/>
-        </p:spPr>
-        <p:txBody>
-          <a:bodyPr wrap="square" anchor="t" lIns="0" rIns="0" tIns="0" bIns="0"/>
-          <a:lstStyle/>
-          <a:p>
-            <a:pPr algn="l">
-              <a:lnSpc>
-                <a:spcPct val="135000"/>
-              </a:lnSpc>
-            </a:pPr>
-            <a:r>
-              <a:rPr sz="1500" b="0" i="0" lang="zh-CN" altLang="en-US">
+            <a:off x="1417320" y="1655064"/>
+            <a:ext cx="9966960" cy="502920"/>
+          </a:xfrm>
+          <a:prstGeom prst="rect">
+            <a:avLst/>
+          </a:prstGeom>
+          <a:noFill/>
+        </p:spPr>
+        <p:txBody>
+          <a:bodyPr wrap="square" anchor="t" lIns="0" rIns="0" tIns="0" bIns="0"/>
+          <a:lstStyle/>
+          <a:p>
+            <a:pPr algn="l"/>
+            <a:r>
+              <a:rPr sz="1600" b="0" i="0" lang="zh-CN" altLang="en-US">
                 <a:solidFill>
                   <a:srgbClr val="2C2C2C"/>
                 </a:solidFill>
@@ -10861,25 +14807,231 @@
                 <a:ea typeface="Noto Sans CJK SC"/>
                 <a:cs typeface="Noto Sans CJK SC"/>
               </a:rPr>
-              <a:t>产品懂得多少，
-八个阶段走到哪一步，
-下一步学什么，都在里面。
-中国法人做成中文的路径。
-人不用等一场酒店课。</a:t>
-            </a:r>
-          </a:p>
-        </p:txBody>
-      </p:sp>
-      <p:sp>
-        <p:nvSpPr>
-          <p:cNvPr id="8" name="Rectangle 7"/>
+              <a:t>商品做完才做内容，内容做完才培训。任何一环停下，后面都在等。</a:t>
+            </a:r>
+          </a:p>
+        </p:txBody>
+      </p:sp>
+      <p:sp>
+        <p:nvSpPr>
+          <p:cNvPr id="8" name="TextBox 7"/>
+          <p:cNvSpPr txBox="1"/>
+          <p:nvPr/>
+        </p:nvSpPr>
+        <p:spPr>
+          <a:xfrm>
+            <a:off x="658368" y="2350008"/>
+            <a:ext cx="640080" cy="329184"/>
+          </a:xfrm>
+          <a:prstGeom prst="rect">
+            <a:avLst/>
+          </a:prstGeom>
+          <a:noFill/>
+        </p:spPr>
+        <p:txBody>
+          <a:bodyPr wrap="square" anchor="t" lIns="0" rIns="0" tIns="0" bIns="0"/>
+          <a:lstStyle/>
+          <a:p>
+            <a:pPr algn="l"/>
+            <a:r>
+              <a:rPr sz="1600" b="0" i="0" lang="zh-CN" altLang="en-US">
+                <a:solidFill>
+                  <a:srgbClr val="9E1B1B"/>
+                </a:solidFill>
+                <a:latin typeface="Noto Sans CJK SC Medium"/>
+                <a:ea typeface="Noto Sans CJK SC Medium"/>
+                <a:cs typeface="Noto Sans CJK SC Medium"/>
+              </a:rPr>
+              <a:t>02</a:t>
+            </a:r>
+          </a:p>
+        </p:txBody>
+      </p:sp>
+      <p:sp>
+        <p:nvSpPr>
+          <p:cNvPr id="9" name="TextBox 8"/>
+          <p:cNvSpPr txBox="1"/>
+          <p:nvPr/>
+        </p:nvSpPr>
+        <p:spPr>
+          <a:xfrm>
+            <a:off x="1417320" y="2331720"/>
+            <a:ext cx="9966960" cy="365760"/>
+          </a:xfrm>
+          <a:prstGeom prst="rect">
+            <a:avLst/>
+          </a:prstGeom>
+          <a:noFill/>
+        </p:spPr>
+        <p:txBody>
+          <a:bodyPr wrap="square" anchor="t" lIns="0" rIns="0" tIns="0" bIns="0"/>
+          <a:lstStyle/>
+          <a:p>
+            <a:pPr algn="l"/>
+            <a:r>
+              <a:rPr sz="2200" b="0" i="0" lang="zh-CN" altLang="en-US">
+                <a:solidFill>
+                  <a:srgbClr val="141414"/>
+                </a:solidFill>
+                <a:latin typeface="Noto Sans CJK SC Medium"/>
+                <a:ea typeface="Noto Sans CJK SC Medium"/>
+                <a:cs typeface="Noto Sans CJK SC Medium"/>
+              </a:rPr>
+              <a:t>中间不能熄火</a:t>
+            </a:r>
+          </a:p>
+        </p:txBody>
+      </p:sp>
+      <p:sp>
+        <p:nvSpPr>
+          <p:cNvPr id="10" name="TextBox 9"/>
+          <p:cNvSpPr txBox="1"/>
+          <p:nvPr/>
+        </p:nvSpPr>
+        <p:spPr>
+          <a:xfrm>
+            <a:off x="1417320" y="2770632"/>
+            <a:ext cx="9966960" cy="502920"/>
+          </a:xfrm>
+          <a:prstGeom prst="rect">
+            <a:avLst/>
+          </a:prstGeom>
+          <a:noFill/>
+        </p:spPr>
+        <p:txBody>
+          <a:bodyPr wrap="square" anchor="t" lIns="0" rIns="0" tIns="0" bIns="0"/>
+          <a:lstStyle/>
+          <a:p>
+            <a:pPr algn="l"/>
+            <a:r>
+              <a:rPr sz="1600" b="0" i="0" lang="zh-CN" altLang="en-US">
+                <a:solidFill>
+                  <a:srgbClr val="2C2C2C"/>
+                </a:solidFill>
+                <a:latin typeface="Noto Sans CJK SC"/>
+                <a:ea typeface="Noto Sans CJK SC"/>
+                <a:cs typeface="Noto Sans CJK SC"/>
+              </a:rPr>
+              <a:t>钢铁厂从原料到成品不能中断。干燥、切断、运去别处再运回，都是中间熄火。</a:t>
+            </a:r>
+          </a:p>
+        </p:txBody>
+      </p:sp>
+      <p:sp>
+        <p:nvSpPr>
+          <p:cNvPr id="11" name="TextBox 10"/>
+          <p:cNvSpPr txBox="1"/>
+          <p:nvPr/>
+        </p:nvSpPr>
+        <p:spPr>
+          <a:xfrm>
+            <a:off x="658368" y="3465576"/>
+            <a:ext cx="640080" cy="329184"/>
+          </a:xfrm>
+          <a:prstGeom prst="rect">
+            <a:avLst/>
+          </a:prstGeom>
+          <a:noFill/>
+        </p:spPr>
+        <p:txBody>
+          <a:bodyPr wrap="square" anchor="t" lIns="0" rIns="0" tIns="0" bIns="0"/>
+          <a:lstStyle/>
+          <a:p>
+            <a:pPr algn="l"/>
+            <a:r>
+              <a:rPr sz="1600" b="0" i="0" lang="zh-CN" altLang="en-US">
+                <a:solidFill>
+                  <a:srgbClr val="9E1B1B"/>
+                </a:solidFill>
+                <a:latin typeface="Noto Sans CJK SC Medium"/>
+                <a:ea typeface="Noto Sans CJK SC Medium"/>
+                <a:cs typeface="Noto Sans CJK SC Medium"/>
+              </a:rPr>
+              <a:t>03</a:t>
+            </a:r>
+          </a:p>
+        </p:txBody>
+      </p:sp>
+      <p:sp>
+        <p:nvSpPr>
+          <p:cNvPr id="12" name="TextBox 11"/>
+          <p:cNvSpPr txBox="1"/>
+          <p:nvPr/>
+        </p:nvSpPr>
+        <p:spPr>
+          <a:xfrm>
+            <a:off x="1417320" y="3447288"/>
+            <a:ext cx="9966960" cy="365760"/>
+          </a:xfrm>
+          <a:prstGeom prst="rect">
+            <a:avLst/>
+          </a:prstGeom>
+          <a:noFill/>
+        </p:spPr>
+        <p:txBody>
+          <a:bodyPr wrap="square" anchor="t" lIns="0" rIns="0" tIns="0" bIns="0"/>
+          <a:lstStyle/>
+          <a:p>
+            <a:pPr algn="l"/>
+            <a:r>
+              <a:rPr sz="2200" b="0" i="0" lang="zh-CN" altLang="en-US">
+                <a:solidFill>
+                  <a:srgbClr val="141414"/>
+                </a:solidFill>
+                <a:latin typeface="Noto Sans CJK SC Medium"/>
+                <a:ea typeface="Noto Sans CJK SC Medium"/>
+                <a:cs typeface="Noto Sans CJK SC Medium"/>
+              </a:rPr>
+              <a:t>一次写完</a:t>
+            </a:r>
+          </a:p>
+        </p:txBody>
+      </p:sp>
+      <p:sp>
+        <p:nvSpPr>
+          <p:cNvPr id="13" name="TextBox 12"/>
+          <p:cNvSpPr txBox="1"/>
+          <p:nvPr/>
+        </p:nvSpPr>
+        <p:spPr>
+          <a:xfrm>
+            <a:off x="1417320" y="3886200"/>
+            <a:ext cx="9966960" cy="502920"/>
+          </a:xfrm>
+          <a:prstGeom prst="rect">
+            <a:avLst/>
+          </a:prstGeom>
+          <a:noFill/>
+        </p:spPr>
+        <p:txBody>
+          <a:bodyPr wrap="square" anchor="t" lIns="0" rIns="0" tIns="0" bIns="0"/>
+          <a:lstStyle/>
+          <a:p>
+            <a:pPr algn="l"/>
+            <a:r>
+              <a:rPr sz="1600" b="0" i="0" lang="zh-CN" altLang="en-US">
+                <a:solidFill>
+                  <a:srgbClr val="2C2C2C"/>
+                </a:solidFill>
+                <a:latin typeface="Noto Sans CJK SC"/>
+                <a:ea typeface="Noto Sans CJK SC"/>
+                <a:cs typeface="Noto Sans CJK SC"/>
+              </a:rPr>
+              <a:t>这个产品、这条工序、中文骨架、对这个人的那句话、每天打开的那一件，写在同一次企划里。</a:t>
+            </a:r>
+          </a:p>
+        </p:txBody>
+      </p:sp>
+      <p:sp>
+        <p:nvSpPr>
+          <p:cNvPr id="14" name="Rectangle 13"/>
           <p:cNvSpPr/>
           <p:nvPr/>
         </p:nvSpPr>
         <p:spPr>
           <a:xfrm>
-            <a:off x="4160520" y="1207008"/>
-            <a:ext cx="10972" cy="3063240"/>
+            <a:off x="658368" y="4754880"/>
+            <a:ext cx="10881360" cy="10972"/>
           </a:xfrm>
           <a:prstGeom prst="rect">
             <a:avLst/>
@@ -10915,327 +15067,14 @@
       </p:sp>
       <p:sp>
         <p:nvSpPr>
-          <p:cNvPr id="9" name="TextBox 8"/>
-          <p:cNvSpPr txBox="1"/>
-          <p:nvPr/>
-        </p:nvSpPr>
-        <p:spPr>
-          <a:xfrm>
-            <a:off x="4361688" y="1207008"/>
-            <a:ext cx="3200400" cy="237744"/>
-          </a:xfrm>
-          <a:prstGeom prst="rect">
-            <a:avLst/>
-          </a:prstGeom>
-          <a:noFill/>
-        </p:spPr>
-        <p:txBody>
-          <a:bodyPr wrap="square" anchor="t" lIns="0" rIns="0" tIns="0" bIns="0"/>
-          <a:lstStyle/>
-          <a:p>
-            <a:pPr algn="l"/>
-            <a:r>
-              <a:rPr sz="1400" b="0" i="0" lang="zh-CN" altLang="en-US">
-                <a:solidFill>
-                  <a:srgbClr val="9E1B1B"/>
-                </a:solidFill>
-                <a:latin typeface="Noto Sans CJK SC Medium"/>
-                <a:ea typeface="Noto Sans CJK SC Medium"/>
-                <a:cs typeface="Noto Sans CJK SC Medium"/>
-              </a:rPr>
-              <a:t>02</a:t>
-            </a:r>
-          </a:p>
-        </p:txBody>
-      </p:sp>
-      <p:sp>
-        <p:nvSpPr>
-          <p:cNvPr id="10" name="TextBox 9"/>
-          <p:cNvSpPr txBox="1"/>
-          <p:nvPr/>
-        </p:nvSpPr>
-        <p:spPr>
-          <a:xfrm>
-            <a:off x="4361688" y="1499616"/>
-            <a:ext cx="3246120" cy="640080"/>
-          </a:xfrm>
-          <a:prstGeom prst="rect">
-            <a:avLst/>
-          </a:prstGeom>
-          <a:noFill/>
-        </p:spPr>
-        <p:txBody>
-          <a:bodyPr wrap="square" anchor="t" lIns="0" rIns="0" tIns="0" bIns="0"/>
-          <a:lstStyle/>
-          <a:p>
-            <a:pPr algn="l"/>
-            <a:r>
-              <a:rPr sz="2200" b="0" i="0" lang="zh-CN" altLang="en-US">
-                <a:solidFill>
-                  <a:srgbClr val="141414"/>
-                </a:solidFill>
-                <a:latin typeface="Noto Sans CJK SC Medium"/>
-                <a:ea typeface="Noto Sans CJK SC Medium"/>
-                <a:cs typeface="Noto Sans CJK SC Medium"/>
-              </a:rPr>
-              <a:t>一百到二百支骨架</a:t>
-            </a:r>
-          </a:p>
-        </p:txBody>
-      </p:sp>
-      <p:sp>
-        <p:nvSpPr>
-          <p:cNvPr id="11" name="TextBox 10"/>
-          <p:cNvSpPr txBox="1"/>
-          <p:nvPr/>
-        </p:nvSpPr>
-        <p:spPr>
-          <a:xfrm>
-            <a:off x="4361688" y="2240280"/>
-            <a:ext cx="3246120" cy="1965960"/>
-          </a:xfrm>
-          <a:prstGeom prst="rect">
-            <a:avLst/>
-          </a:prstGeom>
-          <a:noFill/>
-        </p:spPr>
-        <p:txBody>
-          <a:bodyPr wrap="square" anchor="t" lIns="0" rIns="0" tIns="0" bIns="0"/>
-          <a:lstStyle/>
-          <a:p>
-            <a:pPr algn="l">
-              <a:lnSpc>
-                <a:spcPct val="135000"/>
-              </a:lnSpc>
-            </a:pPr>
-            <a:r>
-              <a:rPr sz="1500" b="0" i="0" lang="zh-CN" altLang="en-US">
-                <a:solidFill>
-                  <a:srgbClr val="2C2C2C"/>
-                </a:solidFill>
-                <a:latin typeface="Noto Sans CJK SC"/>
-                <a:ea typeface="Noto Sans CJK SC"/>
-                <a:cs typeface="Noto Sans CJK SC"/>
-              </a:rPr>
-              <a:t>到明年年底先打好骨架。
-事业者换成自己的脸、
-自己的讲法。
-一小时收成五分钟。
-说明在这个人的平台上完成。</a:t>
-            </a:r>
-          </a:p>
-        </p:txBody>
-      </p:sp>
-      <p:sp>
-        <p:nvSpPr>
-          <p:cNvPr id="12" name="Rectangle 11"/>
-          <p:cNvSpPr/>
-          <p:nvPr/>
-        </p:nvSpPr>
-        <p:spPr>
-          <a:xfrm>
-            <a:off x="7863840" y="1207008"/>
-            <a:ext cx="10972" cy="3063240"/>
-          </a:xfrm>
-          <a:prstGeom prst="rect">
-            <a:avLst/>
-          </a:prstGeom>
-          <a:solidFill>
-            <a:srgbClr val="E2E2E2"/>
-          </a:solidFill>
-          <a:ln>
-            <a:noFill/>
-          </a:ln>
-        </p:spPr>
-        <p:style>
-          <a:lnRef idx="1">
-            <a:schemeClr val="accent1"/>
-          </a:lnRef>
-          <a:fillRef idx="3">
-            <a:schemeClr val="accent1"/>
-          </a:fillRef>
-          <a:effectRef idx="2">
-            <a:schemeClr val="accent1"/>
-          </a:effectRef>
-          <a:fontRef idx="minor">
-            <a:schemeClr val="lt1"/>
-          </a:fontRef>
-        </p:style>
-        <p:txBody>
-          <a:bodyPr rtlCol="0" anchor="ctr"/>
-          <a:lstStyle/>
-          <a:p>
-            <a:pPr algn="ctr"/>
-          </a:p>
-        </p:txBody>
-      </p:sp>
-      <p:sp>
-        <p:nvSpPr>
-          <p:cNvPr id="13" name="TextBox 12"/>
-          <p:cNvSpPr txBox="1"/>
-          <p:nvPr/>
-        </p:nvSpPr>
-        <p:spPr>
-          <a:xfrm>
-            <a:off x="8065008" y="1207008"/>
-            <a:ext cx="3200400" cy="237744"/>
-          </a:xfrm>
-          <a:prstGeom prst="rect">
-            <a:avLst/>
-          </a:prstGeom>
-          <a:noFill/>
-        </p:spPr>
-        <p:txBody>
-          <a:bodyPr wrap="square" anchor="t" lIns="0" rIns="0" tIns="0" bIns="0"/>
-          <a:lstStyle/>
-          <a:p>
-            <a:pPr algn="l"/>
-            <a:r>
-              <a:rPr sz="1400" b="0" i="0" lang="zh-CN" altLang="en-US">
-                <a:solidFill>
-                  <a:srgbClr val="9E1B1B"/>
-                </a:solidFill>
-                <a:latin typeface="Noto Sans CJK SC Medium"/>
-                <a:ea typeface="Noto Sans CJK SC Medium"/>
-                <a:cs typeface="Noto Sans CJK SC Medium"/>
-              </a:rPr>
-              <a:t>03</a:t>
-            </a:r>
-          </a:p>
-        </p:txBody>
-      </p:sp>
-      <p:sp>
-        <p:nvSpPr>
-          <p:cNvPr id="14" name="TextBox 13"/>
-          <p:cNvSpPr txBox="1"/>
-          <p:nvPr/>
-        </p:nvSpPr>
-        <p:spPr>
-          <a:xfrm>
-            <a:off x="8065008" y="1499616"/>
-            <a:ext cx="3246120" cy="640080"/>
-          </a:xfrm>
-          <a:prstGeom prst="rect">
-            <a:avLst/>
-          </a:prstGeom>
-          <a:noFill/>
-        </p:spPr>
-        <p:txBody>
-          <a:bodyPr wrap="square" anchor="t" lIns="0" rIns="0" tIns="0" bIns="0"/>
-          <a:lstStyle/>
-          <a:p>
-            <a:pPr algn="l"/>
-            <a:r>
-              <a:rPr sz="2200" b="0" i="0" lang="zh-CN" altLang="en-US">
-                <a:solidFill>
-                  <a:srgbClr val="141414"/>
-                </a:solidFill>
-                <a:latin typeface="Noto Sans CJK SC Medium"/>
-                <a:ea typeface="Noto Sans CJK SC Medium"/>
-                <a:cs typeface="Noto Sans CJK SC Medium"/>
-              </a:rPr>
-              <a:t>PPO，平台的主人</a:t>
-            </a:r>
-          </a:p>
-        </p:txBody>
-      </p:sp>
-      <p:sp>
-        <p:nvSpPr>
           <p:cNvPr id="15" name="TextBox 14"/>
           <p:cNvSpPr txBox="1"/>
           <p:nvPr/>
         </p:nvSpPr>
         <p:spPr>
           <a:xfrm>
-            <a:off x="8065008" y="2240280"/>
-            <a:ext cx="3246120" cy="1965960"/>
-          </a:xfrm>
-          <a:prstGeom prst="rect">
-            <a:avLst/>
-          </a:prstGeom>
-          <a:noFill/>
-        </p:spPr>
-        <p:txBody>
-          <a:bodyPr wrap="square" anchor="t" lIns="0" rIns="0" tIns="0" bIns="0"/>
-          <a:lstStyle/>
-          <a:p>
-            <a:pPr algn="l">
-              <a:lnSpc>
-                <a:spcPct val="135000"/>
-              </a:lnSpc>
-            </a:pPr>
-            <a:r>
-              <a:rPr sz="1500" b="0" i="0" lang="zh-CN" altLang="en-US">
-                <a:solidFill>
-                  <a:srgbClr val="2C2C2C"/>
-                </a:solidFill>
-                <a:latin typeface="Noto Sans CJK SC"/>
-                <a:ea typeface="Noto Sans CJK SC"/>
-                <a:cs typeface="Noto Sans CJK SC"/>
-              </a:rPr>
-              <a:t>PPO 是这家平台的主人，
-不是发链接的人。
-自己的店、健康、教育，
-收在一处。
-培育 PPO，是九月十三日
-三份发表之一。</a:t>
-            </a:r>
-          </a:p>
-        </p:txBody>
-      </p:sp>
-      <p:sp>
-        <p:nvSpPr>
-          <p:cNvPr id="16" name="Rectangle 15"/>
-          <p:cNvSpPr/>
-          <p:nvPr/>
-        </p:nvSpPr>
-        <p:spPr>
-          <a:xfrm>
-            <a:off x="658368" y="4754880"/>
-            <a:ext cx="10881360" cy="10972"/>
-          </a:xfrm>
-          <a:prstGeom prst="rect">
-            <a:avLst/>
-          </a:prstGeom>
-          <a:solidFill>
-            <a:srgbClr val="E2E2E2"/>
-          </a:solidFill>
-          <a:ln>
-            <a:noFill/>
-          </a:ln>
-        </p:spPr>
-        <p:style>
-          <a:lnRef idx="1">
-            <a:schemeClr val="accent1"/>
-          </a:lnRef>
-          <a:fillRef idx="3">
-            <a:schemeClr val="accent1"/>
-          </a:fillRef>
-          <a:effectRef idx="2">
-            <a:schemeClr val="accent1"/>
-          </a:effectRef>
-          <a:fontRef idx="minor">
-            <a:schemeClr val="lt1"/>
-          </a:fontRef>
-        </p:style>
-        <p:txBody>
-          <a:bodyPr rtlCol="0" anchor="ctr"/>
-          <a:lstStyle/>
-          <a:p>
-            <a:pPr algn="ctr"/>
-          </a:p>
-        </p:txBody>
-      </p:sp>
-      <p:sp>
-        <p:nvSpPr>
-          <p:cNvPr id="17" name="TextBox 16"/>
-          <p:cNvSpPr txBox="1"/>
-          <p:nvPr/>
-        </p:nvSpPr>
-        <p:spPr>
-          <a:xfrm>
-            <a:off x="658368" y="4956048"/>
-            <a:ext cx="10789920" cy="1051560"/>
+            <a:off x="658368" y="4983480"/>
+            <a:ext cx="10789920" cy="1005840"/>
           </a:xfrm>
           <a:prstGeom prst="rect">
             <a:avLst/>
@@ -11260,15 +15099,15 @@
                 <a:ea typeface="Noto Sans CJK SC Medium"/>
                 <a:cs typeface="Noto Sans CJK SC Medium"/>
               </a:rPr>
-              <a:t>教育的大笔费用在这里消失。
-省下来的，还是那三十五个点。</a:t>
-            </a:r>
-          </a:p>
-        </p:txBody>
-      </p:sp>
-      <p:sp>
-        <p:nvSpPr>
-          <p:cNvPr id="18" name="TextBox 17"/>
+              <a:t>中国法人先出货、再补内容、再办培训，
+链就在企划上断了。</a:t>
+            </a:r>
+          </a:p>
+        </p:txBody>
+      </p:sp>
+      <p:sp>
+        <p:nvSpPr>
+          <p:cNvPr id="16" name="TextBox 15"/>
           <p:cNvSpPr txBox="1"/>
           <p:nvPr/>
         </p:nvSpPr>
@@ -11392,7 +15231,7 @@
                 <a:ea typeface="Noto Sans CJK SC Medium"/>
                 <a:cs typeface="Noto Sans CJK SC Medium"/>
               </a:rPr>
-              <a:t>艾护理对着这个人说</a:t>
+              <a:t>个人平台，先改变事业者</a:t>
             </a:r>
           </a:p>
         </p:txBody>
@@ -11448,21 +15287,21 @@
         </p:nvSpPr>
         <p:spPr>
           <a:xfrm>
-            <a:off x="658368" y="1170432"/>
-            <a:ext cx="5029200" cy="365760"/>
-          </a:xfrm>
-          <a:prstGeom prst="rect">
-            <a:avLst/>
-          </a:prstGeom>
-          <a:noFill/>
-        </p:spPr>
-        <p:txBody>
-          <a:bodyPr wrap="square" anchor="t" lIns="0" rIns="0" tIns="0" bIns="0"/>
-          <a:lstStyle/>
-          <a:p>
-            <a:pPr algn="l"/>
-            <a:r>
-              <a:rPr sz="2000" b="0" i="0" lang="zh-CN" altLang="en-US">
+            <a:off x="658368" y="1207008"/>
+            <a:ext cx="3200400" cy="237744"/>
+          </a:xfrm>
+          <a:prstGeom prst="rect">
+            <a:avLst/>
+          </a:prstGeom>
+          <a:noFill/>
+        </p:spPr>
+        <p:txBody>
+          <a:bodyPr wrap="square" anchor="t" lIns="0" rIns="0" tIns="0" bIns="0"/>
+          <a:lstStyle/>
+          <a:p>
+            <a:pPr algn="l"/>
+            <a:r>
+              <a:rPr sz="1400" b="0" i="0" lang="zh-CN" altLang="en-US">
                 <a:solidFill>
                   <a:srgbClr val="9E1B1B"/>
                 </a:solidFill>
@@ -11470,7 +15309,7 @@
                 <a:ea typeface="Noto Sans CJK SC Medium"/>
                 <a:cs typeface="Noto Sans CJK SC Medium"/>
               </a:rPr>
-              <a:t>放进来</a:t>
+              <a:t>01</a:t>
             </a:r>
           </a:p>
         </p:txBody>
@@ -11483,29 +15322,29 @@
         </p:nvSpPr>
         <p:spPr>
           <a:xfrm>
-            <a:off x="6263640" y="1170432"/>
-            <a:ext cx="5120640" cy="365760"/>
-          </a:xfrm>
-          <a:prstGeom prst="rect">
-            <a:avLst/>
-          </a:prstGeom>
-          <a:noFill/>
-        </p:spPr>
-        <p:txBody>
-          <a:bodyPr wrap="square" anchor="t" lIns="0" rIns="0" tIns="0" bIns="0"/>
-          <a:lstStyle/>
-          <a:p>
-            <a:pPr algn="l"/>
-            <a:r>
-              <a:rPr sz="2000" b="0" i="0" lang="zh-CN" altLang="en-US">
-                <a:solidFill>
-                  <a:srgbClr val="9E1B1B"/>
+            <a:off x="658368" y="1499616"/>
+            <a:ext cx="3246120" cy="640080"/>
+          </a:xfrm>
+          <a:prstGeom prst="rect">
+            <a:avLst/>
+          </a:prstGeom>
+          <a:noFill/>
+        </p:spPr>
+        <p:txBody>
+          <a:bodyPr wrap="square" anchor="t" lIns="0" rIns="0" tIns="0" bIns="0"/>
+          <a:lstStyle/>
+          <a:p>
+            <a:pPr algn="l"/>
+            <a:r>
+              <a:rPr sz="2200" b="0" i="0" lang="zh-CN" altLang="en-US">
+                <a:solidFill>
+                  <a:srgbClr val="141414"/>
                 </a:solidFill>
                 <a:latin typeface="Noto Sans CJK SC Medium"/>
                 <a:ea typeface="Noto Sans CJK SC Medium"/>
                 <a:cs typeface="Noto Sans CJK SC Medium"/>
               </a:rPr>
-              <a:t>说出来</a:t>
+              <a:t>八个阶段在里面</a:t>
             </a:r>
           </a:p>
         </p:txBody>
@@ -11518,56 +15357,25 @@
         </p:nvSpPr>
         <p:spPr>
           <a:xfrm>
-            <a:off x="658368" y="1572768"/>
-            <a:ext cx="5029200" cy="274320"/>
-          </a:xfrm>
-          <a:prstGeom prst="rect">
-            <a:avLst/>
-          </a:prstGeom>
-          <a:noFill/>
-        </p:spPr>
-        <p:txBody>
-          <a:bodyPr wrap="square" anchor="t" lIns="0" rIns="0" tIns="0" bIns="0"/>
-          <a:lstStyle/>
-          <a:p>
-            <a:pPr algn="l"/>
-            <a:r>
-              <a:rPr sz="1600" b="0" i="0" lang="zh-CN" altLang="en-US">
-                <a:solidFill>
-                  <a:srgbClr val="141414"/>
-                </a:solidFill>
-                <a:latin typeface="Noto Sans CJK SC Medium"/>
-                <a:ea typeface="Noto Sans CJK SC Medium"/>
-                <a:cs typeface="Noto Sans CJK SC Medium"/>
-              </a:rPr>
-              <a:t>每餐一张照片</a:t>
-            </a:r>
-          </a:p>
-        </p:txBody>
-      </p:sp>
-      <p:sp>
-        <p:nvSpPr>
-          <p:cNvPr id="8" name="TextBox 7"/>
-          <p:cNvSpPr txBox="1"/>
-          <p:nvPr/>
-        </p:nvSpPr>
-        <p:spPr>
-          <a:xfrm>
-            <a:off x="658368" y="1847088"/>
-            <a:ext cx="5029200" cy="384048"/>
-          </a:xfrm>
-          <a:prstGeom prst="rect">
-            <a:avLst/>
-          </a:prstGeom>
-          <a:noFill/>
-        </p:spPr>
-        <p:txBody>
-          <a:bodyPr wrap="square" anchor="t" lIns="0" rIns="0" tIns="0" bIns="0"/>
-          <a:lstStyle/>
-          <a:p>
-            <a:pPr algn="l"/>
-            <a:r>
-              <a:rPr sz="1400" b="0" i="0" lang="zh-CN" altLang="en-US">
+            <a:off x="658368" y="2240280"/>
+            <a:ext cx="3246120" cy="1965960"/>
+          </a:xfrm>
+          <a:prstGeom prst="rect">
+            <a:avLst/>
+          </a:prstGeom>
+          <a:noFill/>
+        </p:spPr>
+        <p:txBody>
+          <a:bodyPr wrap="square" anchor="t" lIns="0" rIns="0" tIns="0" bIns="0"/>
+          <a:lstStyle/>
+          <a:p>
+            <a:pPr algn="l">
+              <a:lnSpc>
+                <a:spcPct val="135000"/>
+              </a:lnSpc>
+            </a:pPr>
+            <a:r>
+              <a:rPr sz="1500" b="0" i="0" lang="zh-CN" altLang="en-US">
                 <a:solidFill>
                   <a:srgbClr val="2C2C2C"/>
                 </a:solidFill>
@@ -11575,511 +15383,25 @@
                 <a:ea typeface="Noto Sans CJK SC"/>
                 <a:cs typeface="Noto Sans CJK SC"/>
               </a:rPr>
-              <a:t>碳水、蛋白、脂肪，白米还是玄米，蔬菜和纤维有多少。</a:t>
-            </a:r>
-          </a:p>
-        </p:txBody>
-      </p:sp>
-      <p:sp>
-        <p:nvSpPr>
-          <p:cNvPr id="9" name="TextBox 8"/>
-          <p:cNvSpPr txBox="1"/>
-          <p:nvPr/>
-        </p:nvSpPr>
-        <p:spPr>
-          <a:xfrm>
-            <a:off x="658368" y="2267712"/>
-            <a:ext cx="5029200" cy="274320"/>
-          </a:xfrm>
-          <a:prstGeom prst="rect">
-            <a:avLst/>
-          </a:prstGeom>
-          <a:noFill/>
-        </p:spPr>
-        <p:txBody>
-          <a:bodyPr wrap="square" anchor="t" lIns="0" rIns="0" tIns="0" bIns="0"/>
-          <a:lstStyle/>
-          <a:p>
-            <a:pPr algn="l"/>
-            <a:r>
-              <a:rPr sz="1600" b="0" i="0" lang="zh-CN" altLang="en-US">
-                <a:solidFill>
-                  <a:srgbClr val="141414"/>
-                </a:solidFill>
-                <a:latin typeface="Noto Sans CJK SC Medium"/>
-                <a:ea typeface="Noto Sans CJK SC Medium"/>
-                <a:cs typeface="Noto Sans CJK SC Medium"/>
-              </a:rPr>
-              <a:t>身高、体重、步数</a:t>
-            </a:r>
-          </a:p>
-        </p:txBody>
-      </p:sp>
-      <p:sp>
-        <p:nvSpPr>
-          <p:cNvPr id="10" name="TextBox 9"/>
-          <p:cNvSpPr txBox="1"/>
-          <p:nvPr/>
-        </p:nvSpPr>
-        <p:spPr>
-          <a:xfrm>
-            <a:off x="658368" y="2542032"/>
-            <a:ext cx="5029200" cy="384048"/>
-          </a:xfrm>
-          <a:prstGeom prst="rect">
-            <a:avLst/>
-          </a:prstGeom>
-          <a:noFill/>
-        </p:spPr>
-        <p:txBody>
-          <a:bodyPr wrap="square" anchor="t" lIns="0" rIns="0" tIns="0" bIns="0"/>
-          <a:lstStyle/>
-          <a:p>
-            <a:pPr algn="l"/>
-            <a:r>
-              <a:rPr sz="1400" b="0" i="0" lang="zh-CN" altLang="en-US">
-                <a:solidFill>
-                  <a:srgbClr val="2C2C2C"/>
-                </a:solidFill>
-                <a:latin typeface="Noto Sans CJK SC"/>
-                <a:ea typeface="Noto Sans CJK SC"/>
-                <a:cs typeface="Noto Sans CJK SC"/>
-              </a:rPr>
-              <a:t>肥胖还是肌肉，活动够不够。步数从手机接进来。</a:t>
-            </a:r>
-          </a:p>
-        </p:txBody>
-      </p:sp>
-      <p:sp>
-        <p:nvSpPr>
-          <p:cNvPr id="11" name="TextBox 10"/>
-          <p:cNvSpPr txBox="1"/>
-          <p:nvPr/>
-        </p:nvSpPr>
-        <p:spPr>
-          <a:xfrm>
-            <a:off x="658368" y="2962656"/>
-            <a:ext cx="5029200" cy="274320"/>
-          </a:xfrm>
-          <a:prstGeom prst="rect">
-            <a:avLst/>
-          </a:prstGeom>
-          <a:noFill/>
-        </p:spPr>
-        <p:txBody>
-          <a:bodyPr wrap="square" anchor="t" lIns="0" rIns="0" tIns="0" bIns="0"/>
-          <a:lstStyle/>
-          <a:p>
-            <a:pPr algn="l"/>
-            <a:r>
-              <a:rPr sz="1600" b="0" i="0" lang="zh-CN" altLang="en-US">
-                <a:solidFill>
-                  <a:srgbClr val="141414"/>
-                </a:solidFill>
-                <a:latin typeface="Noto Sans CJK SC Medium"/>
-                <a:ea typeface="Noto Sans CJK SC Medium"/>
-                <a:cs typeface="Noto Sans CJK SC Medium"/>
-              </a:rPr>
-              <a:t>用药和注射</a:t>
-            </a:r>
-          </a:p>
-        </p:txBody>
-      </p:sp>
-      <p:sp>
-        <p:nvSpPr>
-          <p:cNvPr id="12" name="TextBox 11"/>
-          <p:cNvSpPr txBox="1"/>
-          <p:nvPr/>
-        </p:nvSpPr>
-        <p:spPr>
-          <a:xfrm>
-            <a:off x="658368" y="3236976"/>
-            <a:ext cx="5029200" cy="384048"/>
-          </a:xfrm>
-          <a:prstGeom prst="rect">
-            <a:avLst/>
-          </a:prstGeom>
-          <a:noFill/>
-        </p:spPr>
-        <p:txBody>
-          <a:bodyPr wrap="square" anchor="t" lIns="0" rIns="0" tIns="0" bIns="0"/>
-          <a:lstStyle/>
-          <a:p>
-            <a:pPr algn="l"/>
-            <a:r>
-              <a:rPr sz="1400" b="0" i="0" lang="zh-CN" altLang="en-US">
-                <a:solidFill>
-                  <a:srgbClr val="2C2C2C"/>
-                </a:solidFill>
-                <a:latin typeface="Noto Sans CJK SC"/>
-                <a:ea typeface="Noto Sans CJK SC"/>
-                <a:cs typeface="Noto Sans CJK SC"/>
-              </a:rPr>
-              <a:t>代谢顺不顺，有连续记录才说得清。</a:t>
-            </a:r>
-          </a:p>
-        </p:txBody>
-      </p:sp>
-      <p:sp>
-        <p:nvSpPr>
-          <p:cNvPr id="13" name="TextBox 12"/>
-          <p:cNvSpPr txBox="1"/>
-          <p:nvPr/>
-        </p:nvSpPr>
-        <p:spPr>
-          <a:xfrm>
-            <a:off x="658368" y="3657600"/>
-            <a:ext cx="5029200" cy="274320"/>
-          </a:xfrm>
-          <a:prstGeom prst="rect">
-            <a:avLst/>
-          </a:prstGeom>
-          <a:noFill/>
-        </p:spPr>
-        <p:txBody>
-          <a:bodyPr wrap="square" anchor="t" lIns="0" rIns="0" tIns="0" bIns="0"/>
-          <a:lstStyle/>
-          <a:p>
-            <a:pPr algn="l"/>
-            <a:r>
-              <a:rPr sz="1600" b="0" i="0" lang="zh-CN" altLang="en-US">
-                <a:solidFill>
-                  <a:srgbClr val="141414"/>
-                </a:solidFill>
-                <a:latin typeface="Noto Sans CJK SC Medium"/>
-                <a:ea typeface="Noto Sans CJK SC Medium"/>
-                <a:cs typeface="Noto Sans CJK SC Medium"/>
-              </a:rPr>
-              <a:t>血和尿可以后补</a:t>
-            </a:r>
-          </a:p>
-        </p:txBody>
-      </p:sp>
-      <p:sp>
-        <p:nvSpPr>
-          <p:cNvPr id="14" name="TextBox 13"/>
-          <p:cNvSpPr txBox="1"/>
-          <p:nvPr/>
-        </p:nvSpPr>
-        <p:spPr>
-          <a:xfrm>
-            <a:off x="658368" y="3931920"/>
-            <a:ext cx="5029200" cy="384048"/>
-          </a:xfrm>
-          <a:prstGeom prst="rect">
-            <a:avLst/>
-          </a:prstGeom>
-          <a:noFill/>
-        </p:spPr>
-        <p:txBody>
-          <a:bodyPr wrap="square" anchor="t" lIns="0" rIns="0" tIns="0" bIns="0"/>
-          <a:lstStyle/>
-          <a:p>
-            <a:pPr algn="l"/>
-            <a:r>
-              <a:rPr sz="1400" b="0" i="0" lang="zh-CN" altLang="en-US">
-                <a:solidFill>
-                  <a:srgbClr val="2C2C2C"/>
-                </a:solidFill>
-                <a:latin typeface="Noto Sans CJK SC"/>
-                <a:ea typeface="Noto Sans CJK SC"/>
-                <a:cs typeface="Noto Sans CJK SC"/>
-              </a:rPr>
-              <a:t>上面这些先每天跑起来。不必等一座医院。</a:t>
-            </a:r>
-          </a:p>
-        </p:txBody>
-      </p:sp>
-      <p:sp>
-        <p:nvSpPr>
-          <p:cNvPr id="15" name="TextBox 14"/>
-          <p:cNvSpPr txBox="1"/>
-          <p:nvPr/>
-        </p:nvSpPr>
-        <p:spPr>
-          <a:xfrm>
-            <a:off x="6263640" y="1572768"/>
-            <a:ext cx="5120640" cy="274320"/>
-          </a:xfrm>
-          <a:prstGeom prst="rect">
-            <a:avLst/>
-          </a:prstGeom>
-          <a:noFill/>
-        </p:spPr>
-        <p:txBody>
-          <a:bodyPr wrap="square" anchor="t" lIns="0" rIns="0" tIns="0" bIns="0"/>
-          <a:lstStyle/>
-          <a:p>
-            <a:pPr algn="l"/>
-            <a:r>
-              <a:rPr sz="1600" b="0" i="0" lang="zh-CN" altLang="en-US">
-                <a:solidFill>
-                  <a:srgbClr val="141414"/>
-                </a:solidFill>
-                <a:latin typeface="Noto Sans CJK SC Medium"/>
-                <a:ea typeface="Noto Sans CJK SC Medium"/>
-                <a:cs typeface="Noto Sans CJK SC Medium"/>
-              </a:rPr>
-              <a:t>该减，还是该补</a:t>
-            </a:r>
-          </a:p>
-        </p:txBody>
-      </p:sp>
-      <p:sp>
-        <p:nvSpPr>
-          <p:cNvPr id="16" name="TextBox 15"/>
-          <p:cNvSpPr txBox="1"/>
-          <p:nvPr/>
-        </p:nvSpPr>
-        <p:spPr>
-          <a:xfrm>
-            <a:off x="6263640" y="1847088"/>
-            <a:ext cx="5120640" cy="384048"/>
-          </a:xfrm>
-          <a:prstGeom prst="rect">
-            <a:avLst/>
-          </a:prstGeom>
-          <a:noFill/>
-        </p:spPr>
-        <p:txBody>
-          <a:bodyPr wrap="square" anchor="t" lIns="0" rIns="0" tIns="0" bIns="0"/>
-          <a:lstStyle/>
-          <a:p>
-            <a:pPr algn="l"/>
-            <a:r>
-              <a:rPr sz="1400" b="0" i="0" lang="zh-CN" altLang="en-US">
-                <a:solidFill>
-                  <a:srgbClr val="2C2C2C"/>
-                </a:solidFill>
-                <a:latin typeface="Noto Sans CJK SC"/>
-                <a:ea typeface="Noto Sans CJK SC"/>
-                <a:cs typeface="Noto Sans CJK SC"/>
-              </a:rPr>
-              <a:t>减碳水，补蛋白；吃多了；或只吃精制，碳水其实不够。</a:t>
-            </a:r>
-          </a:p>
-        </p:txBody>
-      </p:sp>
-      <p:sp>
-        <p:nvSpPr>
-          <p:cNvPr id="17" name="TextBox 16"/>
-          <p:cNvSpPr txBox="1"/>
-          <p:nvPr/>
-        </p:nvSpPr>
-        <p:spPr>
-          <a:xfrm>
-            <a:off x="6263640" y="2267712"/>
-            <a:ext cx="5120640" cy="274320"/>
-          </a:xfrm>
-          <a:prstGeom prst="rect">
-            <a:avLst/>
-          </a:prstGeom>
-          <a:noFill/>
-        </p:spPr>
-        <p:txBody>
-          <a:bodyPr wrap="square" anchor="t" lIns="0" rIns="0" tIns="0" bIns="0"/>
-          <a:lstStyle/>
-          <a:p>
-            <a:pPr algn="l"/>
-            <a:r>
-              <a:rPr sz="1600" b="0" i="0" lang="zh-CN" altLang="en-US">
-                <a:solidFill>
-                  <a:srgbClr val="141414"/>
-                </a:solidFill>
-                <a:latin typeface="Noto Sans CJK SC Medium"/>
-                <a:ea typeface="Noto Sans CJK SC Medium"/>
-                <a:cs typeface="Noto Sans CJK SC Medium"/>
-              </a:rPr>
-              <a:t>一年、五年、十年</a:t>
-            </a:r>
-          </a:p>
-        </p:txBody>
-      </p:sp>
-      <p:sp>
-        <p:nvSpPr>
-          <p:cNvPr id="18" name="TextBox 17"/>
-          <p:cNvSpPr txBox="1"/>
-          <p:nvPr/>
-        </p:nvSpPr>
-        <p:spPr>
-          <a:xfrm>
-            <a:off x="6263640" y="2542032"/>
-            <a:ext cx="5120640" cy="384048"/>
-          </a:xfrm>
-          <a:prstGeom prst="rect">
-            <a:avLst/>
-          </a:prstGeom>
-          <a:noFill/>
-        </p:spPr>
-        <p:txBody>
-          <a:bodyPr wrap="square" anchor="t" lIns="0" rIns="0" tIns="0" bIns="0"/>
-          <a:lstStyle/>
-          <a:p>
-            <a:pPr algn="l"/>
-            <a:r>
-              <a:rPr sz="1400" b="0" i="0" lang="zh-CN" altLang="en-US">
-                <a:solidFill>
-                  <a:srgbClr val="2C2C2C"/>
-                </a:solidFill>
-                <a:latin typeface="Noto Sans CJK SC"/>
-                <a:ea typeface="Noto Sans CJK SC"/>
-                <a:cs typeface="Noto Sans CJK SC"/>
-              </a:rPr>
-              <a:t>照这样下去，身体可以估。家族里带下来的病要能看见。</a:t>
-            </a:r>
-          </a:p>
-        </p:txBody>
-      </p:sp>
-      <p:sp>
-        <p:nvSpPr>
-          <p:cNvPr id="19" name="TextBox 18"/>
-          <p:cNvSpPr txBox="1"/>
-          <p:nvPr/>
-        </p:nvSpPr>
-        <p:spPr>
-          <a:xfrm>
-            <a:off x="6263640" y="2962656"/>
-            <a:ext cx="5120640" cy="274320"/>
-          </a:xfrm>
-          <a:prstGeom prst="rect">
-            <a:avLst/>
-          </a:prstGeom>
-          <a:noFill/>
-        </p:spPr>
-        <p:txBody>
-          <a:bodyPr wrap="square" anchor="t" lIns="0" rIns="0" tIns="0" bIns="0"/>
-          <a:lstStyle/>
-          <a:p>
-            <a:pPr algn="l"/>
-            <a:r>
-              <a:rPr sz="1600" b="0" i="0" lang="zh-CN" altLang="en-US">
-                <a:solidFill>
-                  <a:srgbClr val="141414"/>
-                </a:solidFill>
-                <a:latin typeface="Noto Sans CJK SC Medium"/>
-                <a:ea typeface="Noto Sans CJK SC Medium"/>
-                <a:cs typeface="Noto Sans CJK SC Medium"/>
-              </a:rPr>
-              <a:t>缺哪个功能</a:t>
-            </a:r>
-          </a:p>
-        </p:txBody>
-      </p:sp>
-      <p:sp>
-        <p:nvSpPr>
-          <p:cNvPr id="20" name="TextBox 19"/>
-          <p:cNvSpPr txBox="1"/>
-          <p:nvPr/>
-        </p:nvSpPr>
-        <p:spPr>
-          <a:xfrm>
-            <a:off x="6263640" y="3236976"/>
-            <a:ext cx="5120640" cy="384048"/>
-          </a:xfrm>
-          <a:prstGeom prst="rect">
-            <a:avLst/>
-          </a:prstGeom>
-          <a:noFill/>
-        </p:spPr>
-        <p:txBody>
-          <a:bodyPr wrap="square" anchor="t" lIns="0" rIns="0" tIns="0" bIns="0"/>
-          <a:lstStyle/>
-          <a:p>
-            <a:pPr algn="l"/>
-            <a:r>
-              <a:rPr sz="1400" b="0" i="0" lang="zh-CN" altLang="en-US">
-                <a:solidFill>
-                  <a:srgbClr val="2C2C2C"/>
-                </a:solidFill>
-                <a:latin typeface="Noto Sans CJK SC"/>
-                <a:ea typeface="Noto Sans CJK SC"/>
-                <a:cs typeface="Noto Sans CJK SC"/>
-              </a:rPr>
-              <a:t>一能一品：先说缺哪个功能，那一个产品跟着定。</a:t>
-            </a:r>
-          </a:p>
-        </p:txBody>
-      </p:sp>
-      <p:sp>
-        <p:nvSpPr>
-          <p:cNvPr id="21" name="TextBox 20"/>
-          <p:cNvSpPr txBox="1"/>
-          <p:nvPr/>
-        </p:nvSpPr>
-        <p:spPr>
-          <a:xfrm>
-            <a:off x="6263640" y="3657600"/>
-            <a:ext cx="5120640" cy="274320"/>
-          </a:xfrm>
-          <a:prstGeom prst="rect">
-            <a:avLst/>
-          </a:prstGeom>
-          <a:noFill/>
-        </p:spPr>
-        <p:txBody>
-          <a:bodyPr wrap="square" anchor="t" lIns="0" rIns="0" tIns="0" bIns="0"/>
-          <a:lstStyle/>
-          <a:p>
-            <a:pPr algn="l"/>
-            <a:r>
-              <a:rPr sz="1600" b="0" i="0" lang="zh-CN" altLang="en-US">
-                <a:solidFill>
-                  <a:srgbClr val="141414"/>
-                </a:solidFill>
-                <a:latin typeface="Noto Sans CJK SC Medium"/>
-                <a:ea typeface="Noto Sans CJK SC Medium"/>
-                <a:cs typeface="Noto Sans CJK SC Medium"/>
-              </a:rPr>
-              <a:t>先进入艾护理</a:t>
-            </a:r>
-          </a:p>
-        </p:txBody>
-      </p:sp>
-      <p:sp>
-        <p:nvSpPr>
-          <p:cNvPr id="22" name="TextBox 21"/>
-          <p:cNvSpPr txBox="1"/>
-          <p:nvPr/>
-        </p:nvSpPr>
-        <p:spPr>
-          <a:xfrm>
-            <a:off x="6263640" y="3931920"/>
-            <a:ext cx="5120640" cy="384048"/>
-          </a:xfrm>
-          <a:prstGeom prst="rect">
-            <a:avLst/>
-          </a:prstGeom>
-          <a:noFill/>
-        </p:spPr>
-        <p:txBody>
-          <a:bodyPr wrap="square" anchor="t" lIns="0" rIns="0" tIns="0" bIns="0"/>
-          <a:lstStyle/>
-          <a:p>
-            <a:pPr algn="l"/>
-            <a:r>
-              <a:rPr sz="1400" b="0" i="0" lang="zh-CN" altLang="en-US">
-                <a:solidFill>
-                  <a:srgbClr val="2C2C2C"/>
-                </a:solidFill>
-                <a:latin typeface="Noto Sans CJK SC"/>
-                <a:ea typeface="Noto Sans CJK SC"/>
-                <a:cs typeface="Noto Sans CJK SC"/>
-              </a:rPr>
-              <a:t>介绍别人，先把对方的记录建起来，再谈产品。</a:t>
-            </a:r>
-          </a:p>
-        </p:txBody>
-      </p:sp>
-      <p:sp>
-        <p:nvSpPr>
-          <p:cNvPr id="23" name="Rectangle 22"/>
+              <a:t>产品懂得多少，
+八个阶段走到哪一步，
+下一步学什么，都在里面。
+中国法人做成中文的路径。
+人不用等一场酒店课。</a:t>
+            </a:r>
+          </a:p>
+        </p:txBody>
+      </p:sp>
+      <p:sp>
+        <p:nvSpPr>
+          <p:cNvPr id="8" name="Rectangle 7"/>
           <p:cNvSpPr/>
           <p:nvPr/>
         </p:nvSpPr>
         <p:spPr>
           <a:xfrm>
-            <a:off x="5897880" y="1170432"/>
-            <a:ext cx="10972" cy="3200400"/>
+            <a:off x="4160520" y="1207008"/>
+            <a:ext cx="10972" cy="3063240"/>
           </a:xfrm>
           <a:prstGeom prst="rect">
             <a:avLst/>
@@ -12115,14 +15437,127 @@
       </p:sp>
       <p:sp>
         <p:nvSpPr>
-          <p:cNvPr id="24" name="Rectangle 23"/>
+          <p:cNvPr id="9" name="TextBox 8"/>
+          <p:cNvSpPr txBox="1"/>
+          <p:nvPr/>
+        </p:nvSpPr>
+        <p:spPr>
+          <a:xfrm>
+            <a:off x="4361688" y="1207008"/>
+            <a:ext cx="3200400" cy="237744"/>
+          </a:xfrm>
+          <a:prstGeom prst="rect">
+            <a:avLst/>
+          </a:prstGeom>
+          <a:noFill/>
+        </p:spPr>
+        <p:txBody>
+          <a:bodyPr wrap="square" anchor="t" lIns="0" rIns="0" tIns="0" bIns="0"/>
+          <a:lstStyle/>
+          <a:p>
+            <a:pPr algn="l"/>
+            <a:r>
+              <a:rPr sz="1400" b="0" i="0" lang="zh-CN" altLang="en-US">
+                <a:solidFill>
+                  <a:srgbClr val="9E1B1B"/>
+                </a:solidFill>
+                <a:latin typeface="Noto Sans CJK SC Medium"/>
+                <a:ea typeface="Noto Sans CJK SC Medium"/>
+                <a:cs typeface="Noto Sans CJK SC Medium"/>
+              </a:rPr>
+              <a:t>02</a:t>
+            </a:r>
+          </a:p>
+        </p:txBody>
+      </p:sp>
+      <p:sp>
+        <p:nvSpPr>
+          <p:cNvPr id="10" name="TextBox 9"/>
+          <p:cNvSpPr txBox="1"/>
+          <p:nvPr/>
+        </p:nvSpPr>
+        <p:spPr>
+          <a:xfrm>
+            <a:off x="4361688" y="1499616"/>
+            <a:ext cx="3246120" cy="640080"/>
+          </a:xfrm>
+          <a:prstGeom prst="rect">
+            <a:avLst/>
+          </a:prstGeom>
+          <a:noFill/>
+        </p:spPr>
+        <p:txBody>
+          <a:bodyPr wrap="square" anchor="t" lIns="0" rIns="0" tIns="0" bIns="0"/>
+          <a:lstStyle/>
+          <a:p>
+            <a:pPr algn="l"/>
+            <a:r>
+              <a:rPr sz="2200" b="0" i="0" lang="zh-CN" altLang="en-US">
+                <a:solidFill>
+                  <a:srgbClr val="141414"/>
+                </a:solidFill>
+                <a:latin typeface="Noto Sans CJK SC Medium"/>
+                <a:ea typeface="Noto Sans CJK SC Medium"/>
+                <a:cs typeface="Noto Sans CJK SC Medium"/>
+              </a:rPr>
+              <a:t>一百到二百支骨架</a:t>
+            </a:r>
+          </a:p>
+        </p:txBody>
+      </p:sp>
+      <p:sp>
+        <p:nvSpPr>
+          <p:cNvPr id="11" name="TextBox 10"/>
+          <p:cNvSpPr txBox="1"/>
+          <p:nvPr/>
+        </p:nvSpPr>
+        <p:spPr>
+          <a:xfrm>
+            <a:off x="4361688" y="2240280"/>
+            <a:ext cx="3246120" cy="1965960"/>
+          </a:xfrm>
+          <a:prstGeom prst="rect">
+            <a:avLst/>
+          </a:prstGeom>
+          <a:noFill/>
+        </p:spPr>
+        <p:txBody>
+          <a:bodyPr wrap="square" anchor="t" lIns="0" rIns="0" tIns="0" bIns="0"/>
+          <a:lstStyle/>
+          <a:p>
+            <a:pPr algn="l">
+              <a:lnSpc>
+                <a:spcPct val="135000"/>
+              </a:lnSpc>
+            </a:pPr>
+            <a:r>
+              <a:rPr sz="1500" b="0" i="0" lang="zh-CN" altLang="en-US">
+                <a:solidFill>
+                  <a:srgbClr val="2C2C2C"/>
+                </a:solidFill>
+                <a:latin typeface="Noto Sans CJK SC"/>
+                <a:ea typeface="Noto Sans CJK SC"/>
+                <a:cs typeface="Noto Sans CJK SC"/>
+              </a:rPr>
+              <a:t>到明年年底先打好骨架。
+事业者换成自己的脸、
+自己的讲法。
+一小时收成五分钟。
+说明在这个人的平台上完成。</a:t>
+            </a:r>
+          </a:p>
+        </p:txBody>
+      </p:sp>
+      <p:sp>
+        <p:nvSpPr>
+          <p:cNvPr id="12" name="Rectangle 11"/>
           <p:cNvSpPr/>
           <p:nvPr/>
         </p:nvSpPr>
         <p:spPr>
           <a:xfrm>
-            <a:off x="658368" y="4617720"/>
-            <a:ext cx="10881360" cy="10972"/>
+            <a:off x="7863840" y="1207008"/>
+            <a:ext cx="10972" cy="3063240"/>
           </a:xfrm>
           <a:prstGeom prst="rect">
             <a:avLst/>
@@ -12158,13 +15593,170 @@
       </p:sp>
       <p:sp>
         <p:nvSpPr>
-          <p:cNvPr id="25" name="TextBox 24"/>
-          <p:cNvSpPr txBox="1"/>
-          <p:nvPr/>
-        </p:nvSpPr>
-        <p:spPr>
-          <a:xfrm>
-            <a:off x="658368" y="4773168"/>
+          <p:cNvPr id="13" name="TextBox 12"/>
+          <p:cNvSpPr txBox="1"/>
+          <p:nvPr/>
+        </p:nvSpPr>
+        <p:spPr>
+          <a:xfrm>
+            <a:off x="8065008" y="1207008"/>
+            <a:ext cx="3200400" cy="237744"/>
+          </a:xfrm>
+          <a:prstGeom prst="rect">
+            <a:avLst/>
+          </a:prstGeom>
+          <a:noFill/>
+        </p:spPr>
+        <p:txBody>
+          <a:bodyPr wrap="square" anchor="t" lIns="0" rIns="0" tIns="0" bIns="0"/>
+          <a:lstStyle/>
+          <a:p>
+            <a:pPr algn="l"/>
+            <a:r>
+              <a:rPr sz="1400" b="0" i="0" lang="zh-CN" altLang="en-US">
+                <a:solidFill>
+                  <a:srgbClr val="9E1B1B"/>
+                </a:solidFill>
+                <a:latin typeface="Noto Sans CJK SC Medium"/>
+                <a:ea typeface="Noto Sans CJK SC Medium"/>
+                <a:cs typeface="Noto Sans CJK SC Medium"/>
+              </a:rPr>
+              <a:t>03</a:t>
+            </a:r>
+          </a:p>
+        </p:txBody>
+      </p:sp>
+      <p:sp>
+        <p:nvSpPr>
+          <p:cNvPr id="14" name="TextBox 13"/>
+          <p:cNvSpPr txBox="1"/>
+          <p:nvPr/>
+        </p:nvSpPr>
+        <p:spPr>
+          <a:xfrm>
+            <a:off x="8065008" y="1499616"/>
+            <a:ext cx="3246120" cy="640080"/>
+          </a:xfrm>
+          <a:prstGeom prst="rect">
+            <a:avLst/>
+          </a:prstGeom>
+          <a:noFill/>
+        </p:spPr>
+        <p:txBody>
+          <a:bodyPr wrap="square" anchor="t" lIns="0" rIns="0" tIns="0" bIns="0"/>
+          <a:lstStyle/>
+          <a:p>
+            <a:pPr algn="l"/>
+            <a:r>
+              <a:rPr sz="2200" b="0" i="0" lang="zh-CN" altLang="en-US">
+                <a:solidFill>
+                  <a:srgbClr val="141414"/>
+                </a:solidFill>
+                <a:latin typeface="Noto Sans CJK SC Medium"/>
+                <a:ea typeface="Noto Sans CJK SC Medium"/>
+                <a:cs typeface="Noto Sans CJK SC Medium"/>
+              </a:rPr>
+              <a:t>PPO，平台的主人</a:t>
+            </a:r>
+          </a:p>
+        </p:txBody>
+      </p:sp>
+      <p:sp>
+        <p:nvSpPr>
+          <p:cNvPr id="15" name="TextBox 14"/>
+          <p:cNvSpPr txBox="1"/>
+          <p:nvPr/>
+        </p:nvSpPr>
+        <p:spPr>
+          <a:xfrm>
+            <a:off x="8065008" y="2240280"/>
+            <a:ext cx="3246120" cy="1965960"/>
+          </a:xfrm>
+          <a:prstGeom prst="rect">
+            <a:avLst/>
+          </a:prstGeom>
+          <a:noFill/>
+        </p:spPr>
+        <p:txBody>
+          <a:bodyPr wrap="square" anchor="t" lIns="0" rIns="0" tIns="0" bIns="0"/>
+          <a:lstStyle/>
+          <a:p>
+            <a:pPr algn="l">
+              <a:lnSpc>
+                <a:spcPct val="135000"/>
+              </a:lnSpc>
+            </a:pPr>
+            <a:r>
+              <a:rPr sz="1500" b="0" i="0" lang="zh-CN" altLang="en-US">
+                <a:solidFill>
+                  <a:srgbClr val="2C2C2C"/>
+                </a:solidFill>
+                <a:latin typeface="Noto Sans CJK SC"/>
+                <a:ea typeface="Noto Sans CJK SC"/>
+                <a:cs typeface="Noto Sans CJK SC"/>
+              </a:rPr>
+              <a:t>PPO 是这家平台的主人，
+不是发链接的人。
+自己的店、健康、教育，
+收在一处。
+培育 PPO，是九月十三日
+三份发表之一。</a:t>
+            </a:r>
+          </a:p>
+        </p:txBody>
+      </p:sp>
+      <p:sp>
+        <p:nvSpPr>
+          <p:cNvPr id="16" name="Rectangle 15"/>
+          <p:cNvSpPr/>
+          <p:nvPr/>
+        </p:nvSpPr>
+        <p:spPr>
+          <a:xfrm>
+            <a:off x="658368" y="4754880"/>
+            <a:ext cx="10881360" cy="10972"/>
+          </a:xfrm>
+          <a:prstGeom prst="rect">
+            <a:avLst/>
+          </a:prstGeom>
+          <a:solidFill>
+            <a:srgbClr val="E2E2E2"/>
+          </a:solidFill>
+          <a:ln>
+            <a:noFill/>
+          </a:ln>
+        </p:spPr>
+        <p:style>
+          <a:lnRef idx="1">
+            <a:schemeClr val="accent1"/>
+          </a:lnRef>
+          <a:fillRef idx="3">
+            <a:schemeClr val="accent1"/>
+          </a:fillRef>
+          <a:effectRef idx="2">
+            <a:schemeClr val="accent1"/>
+          </a:effectRef>
+          <a:fontRef idx="minor">
+            <a:schemeClr val="lt1"/>
+          </a:fontRef>
+        </p:style>
+        <p:txBody>
+          <a:bodyPr rtlCol="0" anchor="ctr"/>
+          <a:lstStyle/>
+          <a:p>
+            <a:pPr algn="ctr"/>
+          </a:p>
+        </p:txBody>
+      </p:sp>
+      <p:sp>
+        <p:nvSpPr>
+          <p:cNvPr id="17" name="TextBox 16"/>
+          <p:cNvSpPr txBox="1"/>
+          <p:nvPr/>
+        </p:nvSpPr>
+        <p:spPr>
+          <a:xfrm>
+            <a:off x="658368" y="4956048"/>
             <a:ext cx="10789920" cy="1051560"/>
           </a:xfrm>
           <a:prstGeom prst="rect">
@@ -12182,7 +15774,7 @@
               </a:lnSpc>
             </a:pPr>
             <a:r>
-              <a:rPr sz="1800" b="0" i="0" lang="zh-CN" altLang="en-US">
+              <a:rPr sz="2200" b="0" i="0" lang="zh-CN" altLang="en-US">
                 <a:solidFill>
                   <a:srgbClr val="9E1B1B"/>
                 </a:solidFill>
@@ -12190,15 +15782,15 @@
                 <a:ea typeface="Noto Sans CJK SC Medium"/>
                 <a:cs typeface="Noto Sans CJK SC Medium"/>
               </a:rPr>
-              <a:t>终点是个人健康数据银行。本人同意，隐私守住。
-中国要先定两件：记录存在哪里，哪句话能说。</a:t>
-            </a:r>
-          </a:p>
-        </p:txBody>
-      </p:sp>
-      <p:sp>
-        <p:nvSpPr>
-          <p:cNvPr id="26" name="TextBox 25"/>
+              <a:t>教育的大笔费用在这里消失。
+省下来的，还是那三十五个点。</a:t>
+            </a:r>
+          </a:p>
+        </p:txBody>
+      </p:sp>
+      <p:sp>
+        <p:nvSpPr>
+          <p:cNvPr id="18" name="TextBox 17"/>
           <p:cNvSpPr txBox="1"/>
           <p:nvPr/>
         </p:nvSpPr>

--- a/艾多美何以成为100兆韩元企业.pptx
+++ b/艾多美何以成为100兆韩元企业.pptx
@@ -20,6 +20,7 @@
     <p:sldId id="268" r:id="rId20"/>
     <p:sldId id="269" r:id="rId21"/>
     <p:sldId id="270" r:id="rId22"/>
+    <p:sldId id="271" r:id="rId23"/>
   </p:sldIdLst>
   <p:sldSz cx="12192000" cy="6858000" type="screen4x3"/>
   <p:notesSz cx="6858000" cy="9144000"/>
@@ -516,7 +517,7 @@
           <a:lstStyle/>
           <a:p>
             <a:r>
-              <a:t>全稿 15 页。只讲中国法人要做的事：标准、产线、合作方、企划、三 A。</a:t>
+              <a:t>全稿 16 页。只讲中国法人要做的事：标准、产线、合作方、企划、三 A。</a:t>
             </a:r>
           </a:p>
         </p:txBody>
@@ -796,7 +797,7 @@
           <a:lstStyle/>
           <a:p>
             <a:r>
-              <a:t>时间点只有一个是会长讲过的：明年年底前的一百到二百支骨架。其余按先后排，不标日期。牵头部门是建议，需要按中国法人的实际分工调整。每月六个数：前三个来自四件产线动作，后三个来自三A。</a:t>
+              <a:t>千人千面是两样和那句话因人而异，不是目录变长。推荐只做缺什么、快用完、该带给谁。语音只确认已经摆上的两样，支付走现有收银台，不在语音里收集卡号。下单同时记到 PPO、连续使用和排产。</a:t>
             </a:r>
           </a:p>
         </p:txBody>
@@ -866,7 +867,7 @@
           <a:lstStyle/>
           <a:p>
             <a:r>
-              <a:t>左边一行来自《养成手册》第九章的填坑指南，右边是把它落到中国法人已经定下的动作上。手册里关于中国牌照状态的表述没有引用，以法务口径为准。</a:t>
+              <a:t>时间点只有一个是会长讲过的：明年年底前的一百到二百支骨架。首页两样和语音确认与骨架同一批验收。其余按先后排，不标日期。牵头部门是建议。</a:t>
             </a:r>
           </a:p>
         </p:txBody>
@@ -892,6 +893,76 @@
 </file>
 
 <file path=ppt/notesSlides/notesSlide15.xml><?xml version="1.0" encoding="utf-8"?>
+<p:notes xmlns:a="http://schemas.openxmlformats.org/drawingml/2006/main" xmlns:p="http://schemas.openxmlformats.org/presentationml/2006/main" xmlns:r="http://schemas.openxmlformats.org/officeDocument/2006/relationships">
+  <p:cSld>
+    <p:spTree>
+      <p:nvGrpSpPr>
+        <p:cNvPr id="1" name=""/>
+        <p:cNvGrpSpPr/>
+        <p:nvPr/>
+      </p:nvGrpSpPr>
+      <p:grpSpPr>
+        <a:xfrm>
+          <a:off x="0" y="0"/>
+          <a:ext cx="0" cy="0"/>
+          <a:chOff x="0" y="0"/>
+          <a:chExt cx="0" cy="0"/>
+        </a:xfrm>
+      </p:grpSpPr>
+      <p:sp>
+        <p:nvSpPr>
+          <p:cNvPr id="2" name="Slide Image Placeholder 1"/>
+          <p:cNvSpPr>
+            <a:spLocks noGrp="1"/>
+          </p:cNvSpPr>
+          <p:nvPr>
+            <p:ph type="sldImg" idx="2"/>
+          </p:nvPr>
+        </p:nvSpPr>
+        <p:spPr/>
+      </p:sp>
+      <p:sp>
+        <p:nvSpPr>
+          <p:cNvPr id="3" name="Notes Placeholder 2"/>
+          <p:cNvSpPr>
+            <a:spLocks noGrp="1"/>
+          </p:cNvSpPr>
+          <p:nvPr>
+            <p:ph type="body" idx="3" sz="quarter"/>
+          </p:nvPr>
+        </p:nvSpPr>
+        <p:spPr/>
+        <p:txBody>
+          <a:bodyPr/>
+          <a:lstStyle/>
+          <a:p>
+            <a:r>
+              <a:t>左边一行来自《养成手册》第九章的填坑指南，右边是把它落到中国法人已经定下的动作上。手册里关于中国牌照状态的表述没有引用，以法务口径为准。</a:t>
+            </a:r>
+          </a:p>
+        </p:txBody>
+      </p:sp>
+      <p:sp>
+        <p:nvSpPr>
+          <p:cNvPr id="4" name="Slide Number Placeholder 3"/>
+          <p:cNvSpPr>
+            <a:spLocks noGrp="1"/>
+          </p:cNvSpPr>
+          <p:nvPr>
+            <p:ph type="sldNum" idx="5" sz="quarter"/>
+          </p:nvPr>
+        </p:nvSpPr>
+        <p:spPr/>
+      </p:sp>
+    </p:spTree>
+  </p:cSld>
+  <p:clrMapOvr>
+    <a:masterClrMapping/>
+  </p:clrMapOvr>
+</p:notes>
+</file>
+
+<file path=ppt/notesSlides/notesSlide16.xml><?xml version="1.0" encoding="utf-8"?>
 <p:notes xmlns:a="http://schemas.openxmlformats.org/drawingml/2006/main" xmlns:p="http://schemas.openxmlformats.org/presentationml/2006/main" xmlns:r="http://schemas.openxmlformats.org/officeDocument/2006/relationships">
   <p:cSld>
     <p:spTree>
@@ -7447,7 +7518,7 @@
                 <a:ea typeface="Noto Sans CJK SC Medium"/>
                 <a:cs typeface="Noto Sans CJK SC Medium"/>
               </a:rPr>
-              <a:t>三步：做什么，交什么，谁牵头</a:t>
+              <a:t>首页两样，语音只确认</a:t>
             </a:r>
           </a:p>
         </p:txBody>
@@ -7503,8 +7574,8 @@
         </p:nvSpPr>
         <p:spPr>
           <a:xfrm>
-            <a:off x="658368" y="1188720"/>
-            <a:ext cx="3200400" cy="237744"/>
+            <a:off x="658368" y="1115568"/>
+            <a:ext cx="502920" cy="292608"/>
           </a:xfrm>
           <a:prstGeom prst="rect">
             <a:avLst/>
@@ -7538,21 +7609,21 @@
         </p:nvSpPr>
         <p:spPr>
           <a:xfrm>
-            <a:off x="658368" y="1463040"/>
-            <a:ext cx="3291840" cy="457200"/>
-          </a:xfrm>
-          <a:prstGeom prst="rect">
-            <a:avLst/>
-          </a:prstGeom>
-          <a:noFill/>
-        </p:spPr>
-        <p:txBody>
-          <a:bodyPr wrap="square" anchor="t" lIns="0" rIns="0" tIns="0" bIns="0"/>
-          <a:lstStyle/>
-          <a:p>
-            <a:pPr algn="l"/>
-            <a:r>
-              <a:rPr sz="2200" b="0" i="0" lang="zh-CN" altLang="en-US">
+            <a:off x="1234440" y="1097280"/>
+            <a:ext cx="2286000" cy="329184"/>
+          </a:xfrm>
+          <a:prstGeom prst="rect">
+            <a:avLst/>
+          </a:prstGeom>
+          <a:noFill/>
+        </p:spPr>
+        <p:txBody>
+          <a:bodyPr wrap="square" anchor="t" lIns="0" rIns="0" tIns="0" bIns="0"/>
+          <a:lstStyle/>
+          <a:p>
+            <a:pPr algn="l"/>
+            <a:r>
+              <a:rPr sz="1800" b="0" i="0" lang="zh-CN" altLang="en-US">
                 <a:solidFill>
                   <a:srgbClr val="141414"/>
                 </a:solidFill>
@@ -7560,7 +7631,7 @@
                 <a:ea typeface="Noto Sans CJK SC Medium"/>
                 <a:cs typeface="Noto Sans CJK SC Medium"/>
               </a:rPr>
-              <a:t>现在起</a:t>
+              <a:t>千人千面</a:t>
             </a:r>
           </a:p>
         </p:txBody>
@@ -7573,230 +7644,47 @@
         </p:nvSpPr>
         <p:spPr>
           <a:xfrm>
-            <a:off x="658368" y="2057400"/>
-            <a:ext cx="3200400" cy="237744"/>
-          </a:xfrm>
-          <a:prstGeom prst="rect">
-            <a:avLst/>
-          </a:prstGeom>
-          <a:noFill/>
-        </p:spPr>
-        <p:txBody>
-          <a:bodyPr wrap="square" anchor="t" lIns="0" rIns="0" tIns="0" bIns="0"/>
-          <a:lstStyle/>
-          <a:p>
-            <a:pPr algn="l"/>
-            <a:r>
-              <a:rPr sz="1200" b="0" i="0" lang="zh-CN" altLang="en-US">
-                <a:solidFill>
-                  <a:srgbClr val="9E1B1B"/>
+            <a:off x="3566160" y="1115568"/>
+            <a:ext cx="7955279" cy="777240"/>
+          </a:xfrm>
+          <a:prstGeom prst="rect">
+            <a:avLst/>
+          </a:prstGeom>
+          <a:noFill/>
+        </p:spPr>
+        <p:txBody>
+          <a:bodyPr wrap="square" anchor="t" lIns="0" rIns="0" tIns="0" bIns="0"/>
+          <a:lstStyle/>
+          <a:p>
+            <a:pPr algn="l">
+              <a:lnSpc>
+                <a:spcPct val="125000"/>
+              </a:lnSpc>
+            </a:pPr>
+            <a:r>
+              <a:rPr sz="1400" b="0" i="0" lang="zh-CN" altLang="en-US">
+                <a:solidFill>
+                  <a:srgbClr val="2C2C2C"/>
                 </a:solidFill>
                 <a:latin typeface="Noto Sans CJK SC"/>
                 <a:ea typeface="Noto Sans CJK SC"/>
                 <a:cs typeface="Noto Sans CJK SC"/>
               </a:rPr>
-              <a:t>做什么</a:t>
-            </a:r>
-          </a:p>
-        </p:txBody>
-      </p:sp>
-      <p:sp>
-        <p:nvSpPr>
-          <p:cNvPr id="8" name="TextBox 7"/>
-          <p:cNvSpPr txBox="1"/>
-          <p:nvPr/>
-        </p:nvSpPr>
-        <p:spPr>
-          <a:xfrm>
-            <a:off x="658368" y="2304288"/>
-            <a:ext cx="3291840" cy="1280160"/>
-          </a:xfrm>
-          <a:prstGeom prst="rect">
-            <a:avLst/>
-          </a:prstGeom>
-          <a:noFill/>
-        </p:spPr>
-        <p:txBody>
-          <a:bodyPr wrap="square" anchor="t" lIns="0" rIns="0" tIns="0" bIns="0"/>
-          <a:lstStyle/>
-          <a:p>
-            <a:pPr algn="l">
-              <a:lnSpc>
-                <a:spcPct val="130000"/>
-              </a:lnSpc>
-            </a:pPr>
-            <a:r>
-              <a:rPr sz="1400" b="0" i="0" lang="zh-CN" altLang="en-US">
-                <a:solidFill>
-                  <a:srgbClr val="2C2C2C"/>
-                </a:solidFill>
-                <a:latin typeface="Noto Sans CJK SC"/>
-                <a:ea typeface="Noto Sans CJK SC"/>
-                <a:cs typeface="Noto Sans CJK SC"/>
-              </a:rPr>
-              <a:t>烟台四条线自查。
-定两件事：记录存哪里、
-哪句话能说。
-定阿扎接哪张卡、哪张充电网。</a:t>
-            </a:r>
-          </a:p>
-        </p:txBody>
-      </p:sp>
-      <p:sp>
-        <p:nvSpPr>
-          <p:cNvPr id="9" name="TextBox 8"/>
-          <p:cNvSpPr txBox="1"/>
-          <p:nvPr/>
-        </p:nvSpPr>
-        <p:spPr>
-          <a:xfrm>
-            <a:off x="658368" y="3657600"/>
-            <a:ext cx="3200400" cy="237744"/>
-          </a:xfrm>
-          <a:prstGeom prst="rect">
-            <a:avLst/>
-          </a:prstGeom>
-          <a:noFill/>
-        </p:spPr>
-        <p:txBody>
-          <a:bodyPr wrap="square" anchor="t" lIns="0" rIns="0" tIns="0" bIns="0"/>
-          <a:lstStyle/>
-          <a:p>
-            <a:pPr algn="l"/>
-            <a:r>
-              <a:rPr sz="1200" b="0" i="0" lang="zh-CN" altLang="en-US">
-                <a:solidFill>
-                  <a:srgbClr val="9E1B1B"/>
-                </a:solidFill>
-                <a:latin typeface="Noto Sans CJK SC"/>
-                <a:ea typeface="Noto Sans CJK SC"/>
-                <a:cs typeface="Noto Sans CJK SC"/>
-              </a:rPr>
-              <a:t>交出什么</a:t>
-            </a:r>
-          </a:p>
-        </p:txBody>
-      </p:sp>
-      <p:sp>
-        <p:nvSpPr>
-          <p:cNvPr id="10" name="TextBox 9"/>
-          <p:cNvSpPr txBox="1"/>
-          <p:nvPr/>
-        </p:nvSpPr>
-        <p:spPr>
-          <a:xfrm>
-            <a:off x="658368" y="3904487"/>
-            <a:ext cx="3291840" cy="731520"/>
-          </a:xfrm>
-          <a:prstGeom prst="rect">
-            <a:avLst/>
-          </a:prstGeom>
-          <a:noFill/>
-        </p:spPr>
-        <p:txBody>
-          <a:bodyPr wrap="square" anchor="t" lIns="0" rIns="0" tIns="0" bIns="0"/>
-          <a:lstStyle/>
-          <a:p>
-            <a:pPr algn="l">
-              <a:lnSpc>
-                <a:spcPct val="130000"/>
-              </a:lnSpc>
-            </a:pPr>
-            <a:r>
-              <a:rPr sz="1400" b="0" i="0" lang="zh-CN" altLang="en-US">
-                <a:solidFill>
-                  <a:srgbClr val="2C2C2C"/>
-                </a:solidFill>
-                <a:latin typeface="Noto Sans CJK SC"/>
-                <a:ea typeface="Noto Sans CJK SC"/>
-                <a:cs typeface="Noto Sans CJK SC"/>
-              </a:rPr>
-              <a:t>自查单，
-两份书面口径。</a:t>
-            </a:r>
-          </a:p>
-        </p:txBody>
-      </p:sp>
-      <p:sp>
-        <p:nvSpPr>
-          <p:cNvPr id="11" name="TextBox 10"/>
-          <p:cNvSpPr txBox="1"/>
-          <p:nvPr/>
-        </p:nvSpPr>
-        <p:spPr>
-          <a:xfrm>
-            <a:off x="658368" y="4617720"/>
-            <a:ext cx="3200400" cy="237744"/>
-          </a:xfrm>
-          <a:prstGeom prst="rect">
-            <a:avLst/>
-          </a:prstGeom>
-          <a:noFill/>
-        </p:spPr>
-        <p:txBody>
-          <a:bodyPr wrap="square" anchor="t" lIns="0" rIns="0" tIns="0" bIns="0"/>
-          <a:lstStyle/>
-          <a:p>
-            <a:pPr algn="l"/>
-            <a:r>
-              <a:rPr sz="1200" b="0" i="0" lang="zh-CN" altLang="en-US">
-                <a:solidFill>
-                  <a:srgbClr val="9E1B1B"/>
-                </a:solidFill>
-                <a:latin typeface="Noto Sans CJK SC"/>
-                <a:ea typeface="Noto Sans CJK SC"/>
-                <a:cs typeface="Noto Sans CJK SC"/>
-              </a:rPr>
-              <a:t>建议牵头</a:t>
-            </a:r>
-          </a:p>
-        </p:txBody>
-      </p:sp>
-      <p:sp>
-        <p:nvSpPr>
-          <p:cNvPr id="12" name="TextBox 11"/>
-          <p:cNvSpPr txBox="1"/>
-          <p:nvPr/>
-        </p:nvSpPr>
-        <p:spPr>
-          <a:xfrm>
-            <a:off x="658368" y="4864608"/>
-            <a:ext cx="3291840" cy="365760"/>
-          </a:xfrm>
-          <a:prstGeom prst="rect">
-            <a:avLst/>
-          </a:prstGeom>
-          <a:noFill/>
-        </p:spPr>
-        <p:txBody>
-          <a:bodyPr wrap="square" anchor="t" lIns="0" rIns="0" tIns="0" bIns="0"/>
-          <a:lstStyle/>
-          <a:p>
-            <a:pPr algn="l"/>
-            <a:r>
-              <a:rPr sz="1400" b="0" i="0" lang="zh-CN" altLang="en-US">
-                <a:solidFill>
-                  <a:srgbClr val="2C2C2C"/>
-                </a:solidFill>
-                <a:latin typeface="Noto Sans CJK SC"/>
-                <a:ea typeface="Noto Sans CJK SC"/>
-                <a:cs typeface="Noto Sans CJK SC"/>
-              </a:rPr>
-              <a:t>生产、采购、合规</a:t>
-            </a:r>
-          </a:p>
-        </p:txBody>
-      </p:sp>
-      <p:sp>
-        <p:nvSpPr>
-          <p:cNvPr id="13" name="Rectangle 12"/>
+              <a:t>打开不是目录。今天只摆两样：缺的那个功能对应的产品，旁边一句为什么；再加上每天用的那一件。人不同，两样不同。功效句只用审过的。没定哪句话能说，首页不新写。</a:t>
+            </a:r>
+          </a:p>
+        </p:txBody>
+      </p:sp>
+      <p:sp>
+        <p:nvSpPr>
+          <p:cNvPr id="8" name="Rectangle 7"/>
           <p:cNvSpPr/>
           <p:nvPr/>
         </p:nvSpPr>
         <p:spPr>
           <a:xfrm>
-            <a:off x="4160520" y="1188720"/>
-            <a:ext cx="10972" cy="3977639"/>
+            <a:off x="658368" y="1965960"/>
+            <a:ext cx="10881360" cy="9144"/>
           </a:xfrm>
           <a:prstGeom prst="rect">
             <a:avLst/>
@@ -7832,14 +7720,14 @@
       </p:sp>
       <p:sp>
         <p:nvSpPr>
-          <p:cNvPr id="14" name="TextBox 13"/>
-          <p:cNvSpPr txBox="1"/>
-          <p:nvPr/>
-        </p:nvSpPr>
-        <p:spPr>
-          <a:xfrm>
-            <a:off x="4361688" y="1188720"/>
-            <a:ext cx="3200400" cy="237744"/>
+          <p:cNvPr id="9" name="TextBox 8"/>
+          <p:cNvSpPr txBox="1"/>
+          <p:nvPr/>
+        </p:nvSpPr>
+        <p:spPr>
+          <a:xfrm>
+            <a:off x="658368" y="2075688"/>
+            <a:ext cx="502920" cy="292608"/>
           </a:xfrm>
           <a:prstGeom prst="rect">
             <a:avLst/>
@@ -7867,27 +7755,27 @@
       </p:sp>
       <p:sp>
         <p:nvSpPr>
-          <p:cNvPr id="15" name="TextBox 14"/>
-          <p:cNvSpPr txBox="1"/>
-          <p:nvPr/>
-        </p:nvSpPr>
-        <p:spPr>
-          <a:xfrm>
-            <a:off x="4361688" y="1463040"/>
-            <a:ext cx="3291840" cy="457200"/>
-          </a:xfrm>
-          <a:prstGeom prst="rect">
-            <a:avLst/>
-          </a:prstGeom>
-          <a:noFill/>
-        </p:spPr>
-        <p:txBody>
-          <a:bodyPr wrap="square" anchor="t" lIns="0" rIns="0" tIns="0" bIns="0"/>
-          <a:lstStyle/>
-          <a:p>
-            <a:pPr algn="l"/>
-            <a:r>
-              <a:rPr sz="2200" b="0" i="0" lang="zh-CN" altLang="en-US">
+          <p:cNvPr id="10" name="TextBox 9"/>
+          <p:cNvSpPr txBox="1"/>
+          <p:nvPr/>
+        </p:nvSpPr>
+        <p:spPr>
+          <a:xfrm>
+            <a:off x="1234440" y="2057400"/>
+            <a:ext cx="2286000" cy="329184"/>
+          </a:xfrm>
+          <a:prstGeom prst="rect">
+            <a:avLst/>
+          </a:prstGeom>
+          <a:noFill/>
+        </p:spPr>
+        <p:txBody>
+          <a:bodyPr wrap="square" anchor="t" lIns="0" rIns="0" tIns="0" bIns="0"/>
+          <a:lstStyle/>
+          <a:p>
+            <a:pPr algn="l"/>
+            <a:r>
+              <a:rPr sz="1800" b="0" i="0" lang="zh-CN" altLang="en-US">
                 <a:solidFill>
                   <a:srgbClr val="141414"/>
                 </a:solidFill>
@@ -7895,243 +7783,60 @@
                 <a:ea typeface="Noto Sans CJK SC Medium"/>
                 <a:cs typeface="Noto Sans CJK SC Medium"/>
               </a:rPr>
-              <a:t>带去合作方</a:t>
-            </a:r>
-          </a:p>
-        </p:txBody>
-      </p:sp>
-      <p:sp>
-        <p:nvSpPr>
-          <p:cNvPr id="16" name="TextBox 15"/>
-          <p:cNvSpPr txBox="1"/>
-          <p:nvPr/>
-        </p:nvSpPr>
-        <p:spPr>
-          <a:xfrm>
-            <a:off x="4361688" y="2057400"/>
-            <a:ext cx="3200400" cy="237744"/>
-          </a:xfrm>
-          <a:prstGeom prst="rect">
-            <a:avLst/>
-          </a:prstGeom>
-          <a:noFill/>
-        </p:spPr>
-        <p:txBody>
-          <a:bodyPr wrap="square" anchor="t" lIns="0" rIns="0" tIns="0" bIns="0"/>
-          <a:lstStyle/>
-          <a:p>
-            <a:pPr algn="l"/>
-            <a:r>
-              <a:rPr sz="1200" b="0" i="0" lang="zh-CN" altLang="en-US">
-                <a:solidFill>
-                  <a:srgbClr val="9E1B1B"/>
+              <a:t>推荐只做三件</a:t>
+            </a:r>
+          </a:p>
+        </p:txBody>
+      </p:sp>
+      <p:sp>
+        <p:nvSpPr>
+          <p:cNvPr id="11" name="TextBox 10"/>
+          <p:cNvSpPr txBox="1"/>
+          <p:nvPr/>
+        </p:nvSpPr>
+        <p:spPr>
+          <a:xfrm>
+            <a:off x="3566160" y="2075688"/>
+            <a:ext cx="7955279" cy="777240"/>
+          </a:xfrm>
+          <a:prstGeom prst="rect">
+            <a:avLst/>
+          </a:prstGeom>
+          <a:noFill/>
+        </p:spPr>
+        <p:txBody>
+          <a:bodyPr wrap="square" anchor="t" lIns="0" rIns="0" tIns="0" bIns="0"/>
+          <a:lstStyle/>
+          <a:p>
+            <a:pPr algn="l">
+              <a:lnSpc>
+                <a:spcPct val="125000"/>
+              </a:lnSpc>
+            </a:pPr>
+            <a:r>
+              <a:rPr sz="1400" b="0" i="0" lang="zh-CN" altLang="en-US">
+                <a:solidFill>
+                  <a:srgbClr val="2C2C2C"/>
                 </a:solidFill>
                 <a:latin typeface="Noto Sans CJK SC"/>
                 <a:ea typeface="Noto Sans CJK SC"/>
                 <a:cs typeface="Noto Sans CJK SC"/>
               </a:rPr>
-              <a:t>做什么</a:t>
-            </a:r>
-          </a:p>
-        </p:txBody>
-      </p:sp>
-      <p:sp>
-        <p:nvSpPr>
-          <p:cNvPr id="17" name="TextBox 16"/>
-          <p:cNvSpPr txBox="1"/>
-          <p:nvPr/>
-        </p:nvSpPr>
-        <p:spPr>
-          <a:xfrm>
-            <a:off x="4361688" y="2304288"/>
-            <a:ext cx="3291840" cy="1280160"/>
-          </a:xfrm>
-          <a:prstGeom prst="rect">
-            <a:avLst/>
-          </a:prstGeom>
-          <a:noFill/>
-        </p:spPr>
-        <p:txBody>
-          <a:bodyPr wrap="square" anchor="t" lIns="0" rIns="0" tIns="0" bIns="0"/>
-          <a:lstStyle/>
-          <a:p>
-            <a:pPr algn="l">
-              <a:lnSpc>
-                <a:spcPct val="130000"/>
-              </a:lnSpc>
-            </a:pPr>
-            <a:r>
-              <a:rPr sz="1400" b="0" i="0" lang="zh-CN" altLang="en-US">
-                <a:solidFill>
-                  <a:srgbClr val="2C2C2C"/>
-                </a:solidFill>
-                <a:latin typeface="Noto Sans CJK SC"/>
-                <a:ea typeface="Noto Sans CJK SC"/>
-                <a:cs typeface="Noto Sans CJK SC"/>
-              </a:rPr>
-              <a:t>拿三样去谈：
-月十万套的数、
-设备图纸、
-育苗就开始的合同。</a:t>
-            </a:r>
-          </a:p>
-        </p:txBody>
-      </p:sp>
-      <p:sp>
-        <p:nvSpPr>
-          <p:cNvPr id="18" name="TextBox 17"/>
-          <p:cNvSpPr txBox="1"/>
-          <p:nvPr/>
-        </p:nvSpPr>
-        <p:spPr>
-          <a:xfrm>
-            <a:off x="4361688" y="3657600"/>
-            <a:ext cx="3200400" cy="237744"/>
-          </a:xfrm>
-          <a:prstGeom prst="rect">
-            <a:avLst/>
-          </a:prstGeom>
-          <a:noFill/>
-        </p:spPr>
-        <p:txBody>
-          <a:bodyPr wrap="square" anchor="t" lIns="0" rIns="0" tIns="0" bIns="0"/>
-          <a:lstStyle/>
-          <a:p>
-            <a:pPr algn="l"/>
-            <a:r>
-              <a:rPr sz="1200" b="0" i="0" lang="zh-CN" altLang="en-US">
-                <a:solidFill>
-                  <a:srgbClr val="9E1B1B"/>
-                </a:solidFill>
-                <a:latin typeface="Noto Sans CJK SC"/>
-                <a:ea typeface="Noto Sans CJK SC"/>
-                <a:cs typeface="Noto Sans CJK SC"/>
-              </a:rPr>
-              <a:t>交出什么</a:t>
-            </a:r>
-          </a:p>
-        </p:txBody>
-      </p:sp>
-      <p:sp>
-        <p:nvSpPr>
-          <p:cNvPr id="19" name="TextBox 18"/>
-          <p:cNvSpPr txBox="1"/>
-          <p:nvPr/>
-        </p:nvSpPr>
-        <p:spPr>
-          <a:xfrm>
-            <a:off x="4361688" y="3904487"/>
-            <a:ext cx="3291840" cy="731520"/>
-          </a:xfrm>
-          <a:prstGeom prst="rect">
-            <a:avLst/>
-          </a:prstGeom>
-          <a:noFill/>
-        </p:spPr>
-        <p:txBody>
-          <a:bodyPr wrap="square" anchor="t" lIns="0" rIns="0" tIns="0" bIns="0"/>
-          <a:lstStyle/>
-          <a:p>
-            <a:pPr algn="l">
-              <a:lnSpc>
-                <a:spcPct val="130000"/>
-              </a:lnSpc>
-            </a:pPr>
-            <a:r>
-              <a:rPr sz="1400" b="0" i="0" lang="zh-CN" altLang="en-US">
-                <a:solidFill>
-                  <a:srgbClr val="2C2C2C"/>
-                </a:solidFill>
-                <a:latin typeface="Noto Sans CJK SC"/>
-                <a:ea typeface="Noto Sans CJK SC"/>
-                <a:cs typeface="Noto Sans CJK SC"/>
-              </a:rPr>
-              <a:t>一份按量重算的报价，
-一份栽培合同。</a:t>
-            </a:r>
-          </a:p>
-        </p:txBody>
-      </p:sp>
-      <p:sp>
-        <p:nvSpPr>
-          <p:cNvPr id="20" name="TextBox 19"/>
-          <p:cNvSpPr txBox="1"/>
-          <p:nvPr/>
-        </p:nvSpPr>
-        <p:spPr>
-          <a:xfrm>
-            <a:off x="4361688" y="4617720"/>
-            <a:ext cx="3200400" cy="237744"/>
-          </a:xfrm>
-          <a:prstGeom prst="rect">
-            <a:avLst/>
-          </a:prstGeom>
-          <a:noFill/>
-        </p:spPr>
-        <p:txBody>
-          <a:bodyPr wrap="square" anchor="t" lIns="0" rIns="0" tIns="0" bIns="0"/>
-          <a:lstStyle/>
-          <a:p>
-            <a:pPr algn="l"/>
-            <a:r>
-              <a:rPr sz="1200" b="0" i="0" lang="zh-CN" altLang="en-US">
-                <a:solidFill>
-                  <a:srgbClr val="9E1B1B"/>
-                </a:solidFill>
-                <a:latin typeface="Noto Sans CJK SC"/>
-                <a:ea typeface="Noto Sans CJK SC"/>
-                <a:cs typeface="Noto Sans CJK SC"/>
-              </a:rPr>
-              <a:t>建议牵头</a:t>
-            </a:r>
-          </a:p>
-        </p:txBody>
-      </p:sp>
-      <p:sp>
-        <p:nvSpPr>
-          <p:cNvPr id="21" name="TextBox 20"/>
-          <p:cNvSpPr txBox="1"/>
-          <p:nvPr/>
-        </p:nvSpPr>
-        <p:spPr>
-          <a:xfrm>
-            <a:off x="4361688" y="4864608"/>
-            <a:ext cx="3291840" cy="365760"/>
-          </a:xfrm>
-          <a:prstGeom prst="rect">
-            <a:avLst/>
-          </a:prstGeom>
-          <a:noFill/>
-        </p:spPr>
-        <p:txBody>
-          <a:bodyPr wrap="square" anchor="t" lIns="0" rIns="0" tIns="0" bIns="0"/>
-          <a:lstStyle/>
-          <a:p>
-            <a:pPr algn="l"/>
-            <a:r>
-              <a:rPr sz="1400" b="0" i="0" lang="zh-CN" altLang="en-US">
-                <a:solidFill>
-                  <a:srgbClr val="2C2C2C"/>
-                </a:solidFill>
-                <a:latin typeface="Noto Sans CJK SC"/>
-                <a:ea typeface="Noto Sans CJK SC"/>
-                <a:cs typeface="Noto Sans CJK SC"/>
-              </a:rPr>
-              <a:t>采购、企划</a:t>
-            </a:r>
-          </a:p>
-        </p:txBody>
-      </p:sp>
-      <p:sp>
-        <p:nvSpPr>
-          <p:cNvPr id="22" name="Rectangle 21"/>
+              <a:t>缺什么：记录决定功能，功能决定那一个，不另推替代款。快用完了：按上次购买和用量提醒续上。该带给谁：先发进入艾护理的入口，不发产品链接。</a:t>
+            </a:r>
+          </a:p>
+        </p:txBody>
+      </p:sp>
+      <p:sp>
+        <p:nvSpPr>
+          <p:cNvPr id="12" name="Rectangle 11"/>
           <p:cNvSpPr/>
           <p:nvPr/>
         </p:nvSpPr>
         <p:spPr>
           <a:xfrm>
-            <a:off x="7863840" y="1188720"/>
-            <a:ext cx="10972" cy="3977639"/>
+            <a:off x="658368" y="2926080"/>
+            <a:ext cx="10881360" cy="9144"/>
           </a:xfrm>
           <a:prstGeom prst="rect">
             <a:avLst/>
@@ -8167,14 +7872,14 @@
       </p:sp>
       <p:sp>
         <p:nvSpPr>
-          <p:cNvPr id="23" name="TextBox 22"/>
-          <p:cNvSpPr txBox="1"/>
-          <p:nvPr/>
-        </p:nvSpPr>
-        <p:spPr>
-          <a:xfrm>
-            <a:off x="8065008" y="1188720"/>
-            <a:ext cx="3200400" cy="237744"/>
+          <p:cNvPr id="13" name="TextBox 12"/>
+          <p:cNvSpPr txBox="1"/>
+          <p:nvPr/>
+        </p:nvSpPr>
+        <p:spPr>
+          <a:xfrm>
+            <a:off x="658368" y="3035808"/>
+            <a:ext cx="502920" cy="292608"/>
           </a:xfrm>
           <a:prstGeom prst="rect">
             <a:avLst/>
@@ -8202,27 +7907,27 @@
       </p:sp>
       <p:sp>
         <p:nvSpPr>
-          <p:cNvPr id="24" name="TextBox 23"/>
-          <p:cNvSpPr txBox="1"/>
-          <p:nvPr/>
-        </p:nvSpPr>
-        <p:spPr>
-          <a:xfrm>
-            <a:off x="8065008" y="1463040"/>
-            <a:ext cx="3291840" cy="457200"/>
-          </a:xfrm>
-          <a:prstGeom prst="rect">
-            <a:avLst/>
-          </a:prstGeom>
-          <a:noFill/>
-        </p:spPr>
-        <p:txBody>
-          <a:bodyPr wrap="square" anchor="t" lIns="0" rIns="0" tIns="0" bIns="0"/>
-          <a:lstStyle/>
-          <a:p>
-            <a:pPr algn="l"/>
-            <a:r>
-              <a:rPr sz="2200" b="0" i="0" lang="zh-CN" altLang="en-US">
+          <p:cNvPr id="14" name="TextBox 13"/>
+          <p:cNvSpPr txBox="1"/>
+          <p:nvPr/>
+        </p:nvSpPr>
+        <p:spPr>
+          <a:xfrm>
+            <a:off x="1234440" y="3017520"/>
+            <a:ext cx="2286000" cy="329184"/>
+          </a:xfrm>
+          <a:prstGeom prst="rect">
+            <a:avLst/>
+          </a:prstGeom>
+          <a:noFill/>
+        </p:spPr>
+        <p:txBody>
+          <a:bodyPr wrap="square" anchor="t" lIns="0" rIns="0" tIns="0" bIns="0"/>
+          <a:lstStyle/>
+          <a:p>
+            <a:pPr algn="l"/>
+            <a:r>
+              <a:rPr sz="1800" b="0" i="0" lang="zh-CN" altLang="en-US">
                 <a:solidFill>
                   <a:srgbClr val="141414"/>
                 </a:solidFill>
@@ -8230,242 +7935,60 @@
                 <a:ea typeface="Noto Sans CJK SC Medium"/>
                 <a:cs typeface="Noto Sans CJK SC Medium"/>
               </a:rPr>
-              <a:t>明年年底前</a:t>
-            </a:r>
-          </a:p>
-        </p:txBody>
-      </p:sp>
-      <p:sp>
-        <p:nvSpPr>
-          <p:cNvPr id="25" name="TextBox 24"/>
-          <p:cNvSpPr txBox="1"/>
-          <p:nvPr/>
-        </p:nvSpPr>
-        <p:spPr>
-          <a:xfrm>
-            <a:off x="8065008" y="2057400"/>
-            <a:ext cx="3200400" cy="237744"/>
-          </a:xfrm>
-          <a:prstGeom prst="rect">
-            <a:avLst/>
-          </a:prstGeom>
-          <a:noFill/>
-        </p:spPr>
-        <p:txBody>
-          <a:bodyPr wrap="square" anchor="t" lIns="0" rIns="0" tIns="0" bIns="0"/>
-          <a:lstStyle/>
-          <a:p>
-            <a:pPr algn="l"/>
-            <a:r>
-              <a:rPr sz="1200" b="0" i="0" lang="zh-CN" altLang="en-US">
-                <a:solidFill>
-                  <a:srgbClr val="9E1B1B"/>
+              <a:t>语音加购与支付</a:t>
+            </a:r>
+          </a:p>
+        </p:txBody>
+      </p:sp>
+      <p:sp>
+        <p:nvSpPr>
+          <p:cNvPr id="15" name="TextBox 14"/>
+          <p:cNvSpPr txBox="1"/>
+          <p:nvPr/>
+        </p:nvSpPr>
+        <p:spPr>
+          <a:xfrm>
+            <a:off x="3566160" y="3035808"/>
+            <a:ext cx="7955279" cy="777240"/>
+          </a:xfrm>
+          <a:prstGeom prst="rect">
+            <a:avLst/>
+          </a:prstGeom>
+          <a:noFill/>
+        </p:spPr>
+        <p:txBody>
+          <a:bodyPr wrap="square" anchor="t" lIns="0" rIns="0" tIns="0" bIns="0"/>
+          <a:lstStyle/>
+          <a:p>
+            <a:pPr algn="l">
+              <a:lnSpc>
+                <a:spcPct val="125000"/>
+              </a:lnSpc>
+            </a:pPr>
+            <a:r>
+              <a:rPr sz="1400" b="0" i="0" lang="zh-CN" altLang="en-US">
+                <a:solidFill>
+                  <a:srgbClr val="2C2C2C"/>
                 </a:solidFill>
                 <a:latin typeface="Noto Sans CJK SC"/>
                 <a:ea typeface="Noto Sans CJK SC"/>
                 <a:cs typeface="Noto Sans CJK SC"/>
               </a:rPr>
-              <a:t>做什么</a:t>
-            </a:r>
-          </a:p>
-        </p:txBody>
-      </p:sp>
-      <p:sp>
-        <p:nvSpPr>
-          <p:cNvPr id="26" name="TextBox 25"/>
-          <p:cNvSpPr txBox="1"/>
-          <p:nvPr/>
-        </p:nvSpPr>
-        <p:spPr>
-          <a:xfrm>
-            <a:off x="8065008" y="2304288"/>
-            <a:ext cx="3291840" cy="1280160"/>
-          </a:xfrm>
-          <a:prstGeom prst="rect">
-            <a:avLst/>
-          </a:prstGeom>
-          <a:noFill/>
-        </p:spPr>
-        <p:txBody>
-          <a:bodyPr wrap="square" anchor="t" lIns="0" rIns="0" tIns="0" bIns="0"/>
-          <a:lstStyle/>
-          <a:p>
-            <a:pPr algn="l">
-              <a:lnSpc>
-                <a:spcPct val="130000"/>
-              </a:lnSpc>
-            </a:pPr>
-            <a:r>
-              <a:rPr sz="1400" b="0" i="0" lang="zh-CN" altLang="en-US">
-                <a:solidFill>
-                  <a:srgbClr val="2C2C2C"/>
-                </a:solidFill>
-                <a:latin typeface="Noto Sans CJK SC"/>
-                <a:ea typeface="Noto Sans CJK SC"/>
-                <a:cs typeface="Noto Sans CJK SC"/>
-              </a:rPr>
-              <a:t>中文骨架，
-一百到二百支上线。
-艾护理、阿扎接进个人平台。</a:t>
-            </a:r>
-          </a:p>
-        </p:txBody>
-      </p:sp>
-      <p:sp>
-        <p:nvSpPr>
-          <p:cNvPr id="27" name="TextBox 26"/>
-          <p:cNvSpPr txBox="1"/>
-          <p:nvPr/>
-        </p:nvSpPr>
-        <p:spPr>
-          <a:xfrm>
-            <a:off x="8065008" y="3657600"/>
-            <a:ext cx="3200400" cy="237744"/>
-          </a:xfrm>
-          <a:prstGeom prst="rect">
-            <a:avLst/>
-          </a:prstGeom>
-          <a:noFill/>
-        </p:spPr>
-        <p:txBody>
-          <a:bodyPr wrap="square" anchor="t" lIns="0" rIns="0" tIns="0" bIns="0"/>
-          <a:lstStyle/>
-          <a:p>
-            <a:pPr algn="l"/>
-            <a:r>
-              <a:rPr sz="1200" b="0" i="0" lang="zh-CN" altLang="en-US">
-                <a:solidFill>
-                  <a:srgbClr val="9E1B1B"/>
-                </a:solidFill>
-                <a:latin typeface="Noto Sans CJK SC"/>
-                <a:ea typeface="Noto Sans CJK SC"/>
-                <a:cs typeface="Noto Sans CJK SC"/>
-              </a:rPr>
-              <a:t>交出什么</a:t>
-            </a:r>
-          </a:p>
-        </p:txBody>
-      </p:sp>
-      <p:sp>
-        <p:nvSpPr>
-          <p:cNvPr id="28" name="TextBox 27"/>
-          <p:cNvSpPr txBox="1"/>
-          <p:nvPr/>
-        </p:nvSpPr>
-        <p:spPr>
-          <a:xfrm>
-            <a:off x="8065008" y="3904487"/>
-            <a:ext cx="3291840" cy="731520"/>
-          </a:xfrm>
-          <a:prstGeom prst="rect">
-            <a:avLst/>
-          </a:prstGeom>
-          <a:noFill/>
-        </p:spPr>
-        <p:txBody>
-          <a:bodyPr wrap="square" anchor="t" lIns="0" rIns="0" tIns="0" bIns="0"/>
-          <a:lstStyle/>
-          <a:p>
-            <a:pPr algn="l">
-              <a:lnSpc>
-                <a:spcPct val="130000"/>
-              </a:lnSpc>
-            </a:pPr>
-            <a:r>
-              <a:rPr sz="1400" b="0" i="0" lang="zh-CN" altLang="en-US">
-                <a:solidFill>
-                  <a:srgbClr val="2C2C2C"/>
-                </a:solidFill>
-                <a:latin typeface="Noto Sans CJK SC"/>
-                <a:ea typeface="Noto Sans CJK SC"/>
-                <a:cs typeface="Noto Sans CJK SC"/>
-              </a:rPr>
-              <a:t>骨架清单，
-月度数表。</a:t>
-            </a:r>
-          </a:p>
-        </p:txBody>
-      </p:sp>
-      <p:sp>
-        <p:nvSpPr>
-          <p:cNvPr id="29" name="TextBox 28"/>
-          <p:cNvSpPr txBox="1"/>
-          <p:nvPr/>
-        </p:nvSpPr>
-        <p:spPr>
-          <a:xfrm>
-            <a:off x="8065008" y="4617720"/>
-            <a:ext cx="3200400" cy="237744"/>
-          </a:xfrm>
-          <a:prstGeom prst="rect">
-            <a:avLst/>
-          </a:prstGeom>
-          <a:noFill/>
-        </p:spPr>
-        <p:txBody>
-          <a:bodyPr wrap="square" anchor="t" lIns="0" rIns="0" tIns="0" bIns="0"/>
-          <a:lstStyle/>
-          <a:p>
-            <a:pPr algn="l"/>
-            <a:r>
-              <a:rPr sz="1200" b="0" i="0" lang="zh-CN" altLang="en-US">
-                <a:solidFill>
-                  <a:srgbClr val="9E1B1B"/>
-                </a:solidFill>
-                <a:latin typeface="Noto Sans CJK SC"/>
-                <a:ea typeface="Noto Sans CJK SC"/>
-                <a:cs typeface="Noto Sans CJK SC"/>
-              </a:rPr>
-              <a:t>建议牵头</a:t>
-            </a:r>
-          </a:p>
-        </p:txBody>
-      </p:sp>
-      <p:sp>
-        <p:nvSpPr>
-          <p:cNvPr id="30" name="TextBox 29"/>
-          <p:cNvSpPr txBox="1"/>
-          <p:nvPr/>
-        </p:nvSpPr>
-        <p:spPr>
-          <a:xfrm>
-            <a:off x="8065008" y="4864608"/>
-            <a:ext cx="3291840" cy="365760"/>
-          </a:xfrm>
-          <a:prstGeom prst="rect">
-            <a:avLst/>
-          </a:prstGeom>
-          <a:noFill/>
-        </p:spPr>
-        <p:txBody>
-          <a:bodyPr wrap="square" anchor="t" lIns="0" rIns="0" tIns="0" bIns="0"/>
-          <a:lstStyle/>
-          <a:p>
-            <a:pPr algn="l"/>
-            <a:r>
-              <a:rPr sz="1400" b="0" i="0" lang="zh-CN" altLang="en-US">
-                <a:solidFill>
-                  <a:srgbClr val="2C2C2C"/>
-                </a:solidFill>
-                <a:latin typeface="Noto Sans CJK SC"/>
-                <a:ea typeface="Noto Sans CJK SC"/>
-                <a:cs typeface="Noto Sans CJK SC"/>
-              </a:rPr>
-              <a:t>企划、培训、数字</a:t>
-            </a:r>
-          </a:p>
-        </p:txBody>
-      </p:sp>
-      <p:sp>
-        <p:nvSpPr>
-          <p:cNvPr id="31" name="Rectangle 30"/>
+              <a:t>说“把今天这两样加入购物车”，再说“确认支付”。语音不搜索、不比较、不改款。支付走现有收银台，语音里不报卡号、不存卡号。收银台没接上之前，语音只加购。</a:t>
+            </a:r>
+          </a:p>
+        </p:txBody>
+      </p:sp>
+      <p:sp>
+        <p:nvSpPr>
+          <p:cNvPr id="16" name="Rectangle 15"/>
           <p:cNvSpPr/>
           <p:nvPr/>
         </p:nvSpPr>
         <p:spPr>
           <a:xfrm>
-            <a:off x="658368" y="5440680"/>
-            <a:ext cx="10881360" cy="10972"/>
+            <a:off x="658368" y="3886200"/>
+            <a:ext cx="10881360" cy="9144"/>
           </a:xfrm>
           <a:prstGeom prst="rect">
             <a:avLst/>
@@ -8501,31 +8024,27 @@
       </p:sp>
       <p:sp>
         <p:nvSpPr>
-          <p:cNvPr id="32" name="TextBox 31"/>
-          <p:cNvSpPr txBox="1"/>
-          <p:nvPr/>
-        </p:nvSpPr>
-        <p:spPr>
-          <a:xfrm>
-            <a:off x="658368" y="5559552"/>
-            <a:ext cx="10789920" cy="640080"/>
-          </a:xfrm>
-          <a:prstGeom prst="rect">
-            <a:avLst/>
-          </a:prstGeom>
-          <a:noFill/>
-        </p:spPr>
-        <p:txBody>
-          <a:bodyPr wrap="square" anchor="t" lIns="0" rIns="0" tIns="0" bIns="0"/>
-          <a:lstStyle/>
-          <a:p>
-            <a:pPr algn="l">
-              <a:lnSpc>
-                <a:spcPct val="130000"/>
-              </a:lnSpc>
-            </a:pPr>
-            <a:r>
-              <a:rPr sz="1600" b="0" i="0" lang="zh-CN" altLang="en-US">
+          <p:cNvPr id="17" name="TextBox 16"/>
+          <p:cNvSpPr txBox="1"/>
+          <p:nvPr/>
+        </p:nvSpPr>
+        <p:spPr>
+          <a:xfrm>
+            <a:off x="658368" y="3995928"/>
+            <a:ext cx="502920" cy="292608"/>
+          </a:xfrm>
+          <a:prstGeom prst="rect">
+            <a:avLst/>
+          </a:prstGeom>
+          <a:noFill/>
+        </p:spPr>
+        <p:txBody>
+          <a:bodyPr wrap="square" anchor="t" lIns="0" rIns="0" tIns="0" bIns="0"/>
+          <a:lstStyle/>
+          <a:p>
+            <a:pPr algn="l"/>
+            <a:r>
+              <a:rPr sz="1400" b="0" i="0" lang="zh-CN" altLang="en-US">
                 <a:solidFill>
                   <a:srgbClr val="9E1B1B"/>
                 </a:solidFill>
@@ -8533,15 +8052,171 @@
                 <a:ea typeface="Noto Sans CJK SC Medium"/>
                 <a:cs typeface="Noto Sans CJK SC Medium"/>
               </a:rPr>
-              <a:t>每月看六个数：型号数、换料清洗次数、罐容与人数，
-建了记录的人、连续用的天数、每天打开阿扎的人。</a:t>
-            </a:r>
-          </a:p>
-        </p:txBody>
-      </p:sp>
-      <p:sp>
-        <p:nvSpPr>
-          <p:cNvPr id="33" name="TextBox 32"/>
+              <a:t>04</a:t>
+            </a:r>
+          </a:p>
+        </p:txBody>
+      </p:sp>
+      <p:sp>
+        <p:nvSpPr>
+          <p:cNvPr id="18" name="TextBox 17"/>
+          <p:cNvSpPr txBox="1"/>
+          <p:nvPr/>
+        </p:nvSpPr>
+        <p:spPr>
+          <a:xfrm>
+            <a:off x="1234440" y="3977640"/>
+            <a:ext cx="2286000" cy="329184"/>
+          </a:xfrm>
+          <a:prstGeom prst="rect">
+            <a:avLst/>
+          </a:prstGeom>
+          <a:noFill/>
+        </p:spPr>
+        <p:txBody>
+          <a:bodyPr wrap="square" anchor="t" lIns="0" rIns="0" tIns="0" bIns="0"/>
+          <a:lstStyle/>
+          <a:p>
+            <a:pPr algn="l"/>
+            <a:r>
+              <a:rPr sz="1800" b="0" i="0" lang="zh-CN" altLang="en-US">
+                <a:solidFill>
+                  <a:srgbClr val="141414"/>
+                </a:solidFill>
+                <a:latin typeface="Noto Sans CJK SC Medium"/>
+                <a:ea typeface="Noto Sans CJK SC Medium"/>
+                <a:cs typeface="Noto Sans CJK SC Medium"/>
+              </a:rPr>
+              <a:t>下完单，三处一起变</a:t>
+            </a:r>
+          </a:p>
+        </p:txBody>
+      </p:sp>
+      <p:sp>
+        <p:nvSpPr>
+          <p:cNvPr id="19" name="TextBox 18"/>
+          <p:cNvSpPr txBox="1"/>
+          <p:nvPr/>
+        </p:nvSpPr>
+        <p:spPr>
+          <a:xfrm>
+            <a:off x="3566160" y="3995928"/>
+            <a:ext cx="7955279" cy="777240"/>
+          </a:xfrm>
+          <a:prstGeom prst="rect">
+            <a:avLst/>
+          </a:prstGeom>
+          <a:noFill/>
+        </p:spPr>
+        <p:txBody>
+          <a:bodyPr wrap="square" anchor="t" lIns="0" rIns="0" tIns="0" bIns="0"/>
+          <a:lstStyle/>
+          <a:p>
+            <a:pPr algn="l">
+              <a:lnSpc>
+                <a:spcPct val="125000"/>
+              </a:lnSpc>
+            </a:pPr>
+            <a:r>
+              <a:rPr sz="1400" b="0" i="0" lang="zh-CN" altLang="en-US">
+                <a:solidFill>
+                  <a:srgbClr val="2C2C2C"/>
+                </a:solidFill>
+                <a:latin typeface="Noto Sans CJK SC"/>
+                <a:ea typeface="Noto Sans CJK SC"/>
+                <a:cs typeface="Noto Sans CJK SC"/>
+              </a:rPr>
+              <a:t>记在 PPO 名下。这个人的连续使用更新。同类订单合成下个月那只罐子要排的数。事业者工作台只看三行：谁还没建记录，谁的瓶子快空了，谁停了几天。</a:t>
+            </a:r>
+          </a:p>
+        </p:txBody>
+      </p:sp>
+      <p:sp>
+        <p:nvSpPr>
+          <p:cNvPr id="20" name="Rectangle 19"/>
+          <p:cNvSpPr/>
+          <p:nvPr/>
+        </p:nvSpPr>
+        <p:spPr>
+          <a:xfrm>
+            <a:off x="658368" y="4846320"/>
+            <a:ext cx="10881360" cy="9144"/>
+          </a:xfrm>
+          <a:prstGeom prst="rect">
+            <a:avLst/>
+          </a:prstGeom>
+          <a:solidFill>
+            <a:srgbClr val="E2E2E2"/>
+          </a:solidFill>
+          <a:ln>
+            <a:noFill/>
+          </a:ln>
+        </p:spPr>
+        <p:style>
+          <a:lnRef idx="1">
+            <a:schemeClr val="accent1"/>
+          </a:lnRef>
+          <a:fillRef idx="3">
+            <a:schemeClr val="accent1"/>
+          </a:fillRef>
+          <a:effectRef idx="2">
+            <a:schemeClr val="accent1"/>
+          </a:effectRef>
+          <a:fontRef idx="minor">
+            <a:schemeClr val="lt1"/>
+          </a:fontRef>
+        </p:style>
+        <p:txBody>
+          <a:bodyPr rtlCol="0" anchor="ctr"/>
+          <a:lstStyle/>
+          <a:p>
+            <a:pPr algn="ctr"/>
+          </a:p>
+        </p:txBody>
+      </p:sp>
+      <p:sp>
+        <p:nvSpPr>
+          <p:cNvPr id="21" name="TextBox 20"/>
+          <p:cNvSpPr txBox="1"/>
+          <p:nvPr/>
+        </p:nvSpPr>
+        <p:spPr>
+          <a:xfrm>
+            <a:off x="658368" y="5074920"/>
+            <a:ext cx="10789920" cy="914400"/>
+          </a:xfrm>
+          <a:prstGeom prst="rect">
+            <a:avLst/>
+          </a:prstGeom>
+          <a:noFill/>
+        </p:spPr>
+        <p:txBody>
+          <a:bodyPr wrap="square" anchor="t" lIns="0" rIns="0" tIns="0" bIns="0"/>
+          <a:lstStyle/>
+          <a:p>
+            <a:pPr algn="l">
+              <a:lnSpc>
+                <a:spcPct val="125000"/>
+              </a:lnSpc>
+            </a:pPr>
+            <a:r>
+              <a:rPr sz="2000" b="0" i="0" lang="zh-CN" altLang="en-US">
+                <a:solidFill>
+                  <a:srgbClr val="9E1B1B"/>
+                </a:solidFill>
+                <a:latin typeface="Noto Sans CJK SC Medium"/>
+                <a:ea typeface="Noto Sans CJK SC Medium"/>
+                <a:cs typeface="Noto Sans CJK SC Medium"/>
+              </a:rPr>
+              <a:t>平台已经会在几百款里推荐。
+中国法人的商城不做那一件。</a:t>
+            </a:r>
+          </a:p>
+        </p:txBody>
+      </p:sp>
+      <p:sp>
+        <p:nvSpPr>
+          <p:cNvPr id="22" name="TextBox 21"/>
           <p:cNvSpPr txBox="1"/>
           <p:nvPr/>
         </p:nvSpPr>
@@ -8665,7 +8340,7 @@
                 <a:ea typeface="Noto Sans CJK SC Medium"/>
                 <a:cs typeface="Noto Sans CJK SC Medium"/>
               </a:rPr>
-              <a:t>三个坑，中国法人各接一个</a:t>
+              <a:t>三步：做什么，交什么，谁牵头</a:t>
             </a:r>
           </a:p>
         </p:txBody>
@@ -8778,7 +8453,7 @@
                 <a:ea typeface="Noto Sans CJK SC Medium"/>
                 <a:cs typeface="Noto Sans CJK SC Medium"/>
               </a:rPr>
-              <a:t>合规</a:t>
+              <a:t>现在起</a:t>
             </a:r>
           </a:p>
         </p:txBody>
@@ -8791,7 +8466,7 @@
         </p:nvSpPr>
         <p:spPr>
           <a:xfrm>
-            <a:off x="658368" y="2103120"/>
+            <a:off x="658368" y="2057400"/>
             <a:ext cx="3200400" cy="237744"/>
           </a:xfrm>
           <a:prstGeom prst="rect">
@@ -8813,7 +8488,7 @@
                 <a:ea typeface="Noto Sans CJK SC"/>
                 <a:cs typeface="Noto Sans CJK SC"/>
               </a:rPr>
-              <a:t>手册怎么填</a:t>
+              <a:t>做什么</a:t>
             </a:r>
           </a:p>
         </p:txBody>
@@ -8826,8 +8501,8 @@
         </p:nvSpPr>
         <p:spPr>
           <a:xfrm>
-            <a:off x="658368" y="2350008"/>
-            <a:ext cx="3291840" cy="914400"/>
+            <a:off x="658368" y="2304288"/>
+            <a:ext cx="3291840" cy="1280160"/>
           </a:xfrm>
           <a:prstGeom prst="rect">
             <a:avLst/>
@@ -8852,7 +8527,10 @@
                 <a:ea typeface="Noto Sans CJK SC"/>
                 <a:cs typeface="Noto Sans CJK SC"/>
               </a:rPr>
-              <a:t>牌照优先于放量；认证模板复制；收益封顶。</a:t>
+              <a:t>烟台四条线自查。
+定两件事：记录存哪里、
+哪句话能说。
+定阿扎接哪张卡、哪张充电网。</a:t>
             </a:r>
           </a:p>
         </p:txBody>
@@ -8865,7 +8543,7 @@
         </p:nvSpPr>
         <p:spPr>
           <a:xfrm>
-            <a:off x="658368" y="3429000"/>
+            <a:off x="658368" y="3657600"/>
             <a:ext cx="3200400" cy="237744"/>
           </a:xfrm>
           <a:prstGeom prst="rect">
@@ -8887,7 +8565,7 @@
                 <a:ea typeface="Noto Sans CJK SC"/>
                 <a:cs typeface="Noto Sans CJK SC"/>
               </a:rPr>
-              <a:t>中国法人接什么</a:t>
+              <a:t>交出什么</a:t>
             </a:r>
           </a:p>
         </p:txBody>
@@ -8900,8 +8578,8 @@
         </p:nvSpPr>
         <p:spPr>
           <a:xfrm>
-            <a:off x="658368" y="3675887"/>
-            <a:ext cx="3291840" cy="1280160"/>
+            <a:off x="658368" y="3904487"/>
+            <a:ext cx="3291840" cy="731520"/>
           </a:xfrm>
           <a:prstGeom prst="rect">
             <a:avLst/>
@@ -8926,21 +8604,92 @@
                 <a:ea typeface="Noto Sans CJK SC"/>
                 <a:cs typeface="Noto Sans CJK SC"/>
               </a:rPr>
-              <a:t>艾护理哪句话能说、记录存哪里，阿扎哪张卡。定之前，不对会员说。</a:t>
-            </a:r>
-          </a:p>
-        </p:txBody>
-      </p:sp>
-      <p:sp>
-        <p:nvSpPr>
-          <p:cNvPr id="11" name="Rectangle 10"/>
+              <a:t>自查单，
+两份书面口径。</a:t>
+            </a:r>
+          </a:p>
+        </p:txBody>
+      </p:sp>
+      <p:sp>
+        <p:nvSpPr>
+          <p:cNvPr id="11" name="TextBox 10"/>
+          <p:cNvSpPr txBox="1"/>
+          <p:nvPr/>
+        </p:nvSpPr>
+        <p:spPr>
+          <a:xfrm>
+            <a:off x="658368" y="4617720"/>
+            <a:ext cx="3200400" cy="237744"/>
+          </a:xfrm>
+          <a:prstGeom prst="rect">
+            <a:avLst/>
+          </a:prstGeom>
+          <a:noFill/>
+        </p:spPr>
+        <p:txBody>
+          <a:bodyPr wrap="square" anchor="t" lIns="0" rIns="0" tIns="0" bIns="0"/>
+          <a:lstStyle/>
+          <a:p>
+            <a:pPr algn="l"/>
+            <a:r>
+              <a:rPr sz="1200" b="0" i="0" lang="zh-CN" altLang="en-US">
+                <a:solidFill>
+                  <a:srgbClr val="9E1B1B"/>
+                </a:solidFill>
+                <a:latin typeface="Noto Sans CJK SC"/>
+                <a:ea typeface="Noto Sans CJK SC"/>
+                <a:cs typeface="Noto Sans CJK SC"/>
+              </a:rPr>
+              <a:t>建议牵头</a:t>
+            </a:r>
+          </a:p>
+        </p:txBody>
+      </p:sp>
+      <p:sp>
+        <p:nvSpPr>
+          <p:cNvPr id="12" name="TextBox 11"/>
+          <p:cNvSpPr txBox="1"/>
+          <p:nvPr/>
+        </p:nvSpPr>
+        <p:spPr>
+          <a:xfrm>
+            <a:off x="658368" y="4864608"/>
+            <a:ext cx="3291840" cy="365760"/>
+          </a:xfrm>
+          <a:prstGeom prst="rect">
+            <a:avLst/>
+          </a:prstGeom>
+          <a:noFill/>
+        </p:spPr>
+        <p:txBody>
+          <a:bodyPr wrap="square" anchor="t" lIns="0" rIns="0" tIns="0" bIns="0"/>
+          <a:lstStyle/>
+          <a:p>
+            <a:pPr algn="l"/>
+            <a:r>
+              <a:rPr sz="1400" b="0" i="0" lang="zh-CN" altLang="en-US">
+                <a:solidFill>
+                  <a:srgbClr val="2C2C2C"/>
+                </a:solidFill>
+                <a:latin typeface="Noto Sans CJK SC"/>
+                <a:ea typeface="Noto Sans CJK SC"/>
+                <a:cs typeface="Noto Sans CJK SC"/>
+              </a:rPr>
+              <a:t>生产、采购、合规</a:t>
+            </a:r>
+          </a:p>
+        </p:txBody>
+      </p:sp>
+      <p:sp>
+        <p:nvSpPr>
+          <p:cNvPr id="13" name="Rectangle 12"/>
           <p:cNvSpPr/>
           <p:nvPr/>
         </p:nvSpPr>
         <p:spPr>
           <a:xfrm>
             <a:off x="4160520" y="1188720"/>
-            <a:ext cx="10972" cy="3749039"/>
+            <a:ext cx="10972" cy="3977639"/>
           </a:xfrm>
           <a:prstGeom prst="rect">
             <a:avLst/>
@@ -8976,7 +8725,7 @@
       </p:sp>
       <p:sp>
         <p:nvSpPr>
-          <p:cNvPr id="12" name="TextBox 11"/>
+          <p:cNvPr id="14" name="TextBox 13"/>
           <p:cNvSpPr txBox="1"/>
           <p:nvPr/>
         </p:nvSpPr>
@@ -9011,7 +8760,7 @@
       </p:sp>
       <p:sp>
         <p:nvSpPr>
-          <p:cNvPr id="13" name="TextBox 12"/>
+          <p:cNvPr id="15" name="TextBox 14"/>
           <p:cNvSpPr txBox="1"/>
           <p:nvPr/>
         </p:nvSpPr>
@@ -9039,20 +8788,20 @@
                 <a:ea typeface="Noto Sans CJK SC Medium"/>
                 <a:cs typeface="Noto Sans CJK SC Medium"/>
               </a:rPr>
-              <a:t>供应链与地缘</a:t>
-            </a:r>
-          </a:p>
-        </p:txBody>
-      </p:sp>
-      <p:sp>
-        <p:nvSpPr>
-          <p:cNvPr id="14" name="TextBox 13"/>
-          <p:cNvSpPr txBox="1"/>
-          <p:nvPr/>
-        </p:nvSpPr>
-        <p:spPr>
-          <a:xfrm>
-            <a:off x="4361688" y="2103120"/>
+              <a:t>带去合作方</a:t>
+            </a:r>
+          </a:p>
+        </p:txBody>
+      </p:sp>
+      <p:sp>
+        <p:nvSpPr>
+          <p:cNvPr id="16" name="TextBox 15"/>
+          <p:cNvSpPr txBox="1"/>
+          <p:nvPr/>
+        </p:nvSpPr>
+        <p:spPr>
+          <a:xfrm>
+            <a:off x="4361688" y="2057400"/>
             <a:ext cx="3200400" cy="237744"/>
           </a:xfrm>
           <a:prstGeom prst="rect">
@@ -9074,21 +8823,21 @@
                 <a:ea typeface="Noto Sans CJK SC"/>
                 <a:cs typeface="Noto Sans CJK SC"/>
               </a:rPr>
-              <a:t>手册怎么填</a:t>
-            </a:r>
-          </a:p>
-        </p:txBody>
-      </p:sp>
-      <p:sp>
-        <p:nvSpPr>
-          <p:cNvPr id="15" name="TextBox 14"/>
-          <p:cNvSpPr txBox="1"/>
-          <p:nvPr/>
-        </p:nvSpPr>
-        <p:spPr>
-          <a:xfrm>
-            <a:off x="4361688" y="2350008"/>
-            <a:ext cx="3291840" cy="914400"/>
+              <a:t>做什么</a:t>
+            </a:r>
+          </a:p>
+        </p:txBody>
+      </p:sp>
+      <p:sp>
+        <p:nvSpPr>
+          <p:cNvPr id="17" name="TextBox 16"/>
+          <p:cNvSpPr txBox="1"/>
+          <p:nvPr/>
+        </p:nvSpPr>
+        <p:spPr>
+          <a:xfrm>
+            <a:off x="4361688" y="2304288"/>
+            <a:ext cx="3291840" cy="1280160"/>
           </a:xfrm>
           <a:prstGeom prst="rect">
             <a:avLst/>
@@ -9113,20 +8862,23 @@
                 <a:ea typeface="Noto Sans CJK SC"/>
                 <a:cs typeface="Noto Sans CJK SC"/>
               </a:rPr>
-              <a:t>多基地生产，本地定价对冲。</a:t>
-            </a:r>
-          </a:p>
-        </p:txBody>
-      </p:sp>
-      <p:sp>
-        <p:nvSpPr>
-          <p:cNvPr id="16" name="TextBox 15"/>
-          <p:cNvSpPr txBox="1"/>
-          <p:nvPr/>
-        </p:nvSpPr>
-        <p:spPr>
-          <a:xfrm>
-            <a:off x="4361688" y="3429000"/>
+              <a:t>拿三样去谈：
+月十万套的数、
+设备图纸、
+育苗就开始的合同。</a:t>
+            </a:r>
+          </a:p>
+        </p:txBody>
+      </p:sp>
+      <p:sp>
+        <p:nvSpPr>
+          <p:cNvPr id="18" name="TextBox 17"/>
+          <p:cNvSpPr txBox="1"/>
+          <p:nvPr/>
+        </p:nvSpPr>
+        <p:spPr>
+          <a:xfrm>
+            <a:off x="4361688" y="3657600"/>
             <a:ext cx="3200400" cy="237744"/>
           </a:xfrm>
           <a:prstGeom prst="rect">
@@ -9148,21 +8900,21 @@
                 <a:ea typeface="Noto Sans CJK SC"/>
                 <a:cs typeface="Noto Sans CJK SC"/>
               </a:rPr>
-              <a:t>中国法人接什么</a:t>
-            </a:r>
-          </a:p>
-        </p:txBody>
-      </p:sp>
-      <p:sp>
-        <p:nvSpPr>
-          <p:cNvPr id="17" name="TextBox 16"/>
-          <p:cNvSpPr txBox="1"/>
-          <p:nvPr/>
-        </p:nvSpPr>
-        <p:spPr>
-          <a:xfrm>
-            <a:off x="4361688" y="3675887"/>
-            <a:ext cx="3291840" cy="1280160"/>
+              <a:t>交出什么</a:t>
+            </a:r>
+          </a:p>
+        </p:txBody>
+      </p:sp>
+      <p:sp>
+        <p:nvSpPr>
+          <p:cNvPr id="19" name="TextBox 18"/>
+          <p:cNvSpPr txBox="1"/>
+          <p:nvPr/>
+        </p:nvSpPr>
+        <p:spPr>
+          <a:xfrm>
+            <a:off x="4361688" y="3904487"/>
+            <a:ext cx="3291840" cy="731520"/>
           </a:xfrm>
           <a:prstGeom prst="rect">
             <a:avLst/>
@@ -9187,21 +8939,92 @@
                 <a:ea typeface="Noto Sans CJK SC"/>
                 <a:cs typeface="Noto Sans CJK SC"/>
               </a:rPr>
-              <a:t>原料在中国，下一道工序放在墙外。转运少一趟，风险就少一段。</a:t>
-            </a:r>
-          </a:p>
-        </p:txBody>
-      </p:sp>
-      <p:sp>
-        <p:nvSpPr>
-          <p:cNvPr id="18" name="Rectangle 17"/>
+              <a:t>一份按量重算的报价，
+一份栽培合同。</a:t>
+            </a:r>
+          </a:p>
+        </p:txBody>
+      </p:sp>
+      <p:sp>
+        <p:nvSpPr>
+          <p:cNvPr id="20" name="TextBox 19"/>
+          <p:cNvSpPr txBox="1"/>
+          <p:nvPr/>
+        </p:nvSpPr>
+        <p:spPr>
+          <a:xfrm>
+            <a:off x="4361688" y="4617720"/>
+            <a:ext cx="3200400" cy="237744"/>
+          </a:xfrm>
+          <a:prstGeom prst="rect">
+            <a:avLst/>
+          </a:prstGeom>
+          <a:noFill/>
+        </p:spPr>
+        <p:txBody>
+          <a:bodyPr wrap="square" anchor="t" lIns="0" rIns="0" tIns="0" bIns="0"/>
+          <a:lstStyle/>
+          <a:p>
+            <a:pPr algn="l"/>
+            <a:r>
+              <a:rPr sz="1200" b="0" i="0" lang="zh-CN" altLang="en-US">
+                <a:solidFill>
+                  <a:srgbClr val="9E1B1B"/>
+                </a:solidFill>
+                <a:latin typeface="Noto Sans CJK SC"/>
+                <a:ea typeface="Noto Sans CJK SC"/>
+                <a:cs typeface="Noto Sans CJK SC"/>
+              </a:rPr>
+              <a:t>建议牵头</a:t>
+            </a:r>
+          </a:p>
+        </p:txBody>
+      </p:sp>
+      <p:sp>
+        <p:nvSpPr>
+          <p:cNvPr id="21" name="TextBox 20"/>
+          <p:cNvSpPr txBox="1"/>
+          <p:nvPr/>
+        </p:nvSpPr>
+        <p:spPr>
+          <a:xfrm>
+            <a:off x="4361688" y="4864608"/>
+            <a:ext cx="3291840" cy="365760"/>
+          </a:xfrm>
+          <a:prstGeom prst="rect">
+            <a:avLst/>
+          </a:prstGeom>
+          <a:noFill/>
+        </p:spPr>
+        <p:txBody>
+          <a:bodyPr wrap="square" anchor="t" lIns="0" rIns="0" tIns="0" bIns="0"/>
+          <a:lstStyle/>
+          <a:p>
+            <a:pPr algn="l"/>
+            <a:r>
+              <a:rPr sz="1400" b="0" i="0" lang="zh-CN" altLang="en-US">
+                <a:solidFill>
+                  <a:srgbClr val="2C2C2C"/>
+                </a:solidFill>
+                <a:latin typeface="Noto Sans CJK SC"/>
+                <a:ea typeface="Noto Sans CJK SC"/>
+                <a:cs typeface="Noto Sans CJK SC"/>
+              </a:rPr>
+              <a:t>采购、企划</a:t>
+            </a:r>
+          </a:p>
+        </p:txBody>
+      </p:sp>
+      <p:sp>
+        <p:nvSpPr>
+          <p:cNvPr id="22" name="Rectangle 21"/>
           <p:cNvSpPr/>
           <p:nvPr/>
         </p:nvSpPr>
         <p:spPr>
           <a:xfrm>
             <a:off x="7863840" y="1188720"/>
-            <a:ext cx="10972" cy="3749039"/>
+            <a:ext cx="10972" cy="3977639"/>
           </a:xfrm>
           <a:prstGeom prst="rect">
             <a:avLst/>
@@ -9237,7 +9060,7 @@
       </p:sp>
       <p:sp>
         <p:nvSpPr>
-          <p:cNvPr id="19" name="TextBox 18"/>
+          <p:cNvPr id="23" name="TextBox 22"/>
           <p:cNvSpPr txBox="1"/>
           <p:nvPr/>
         </p:nvSpPr>
@@ -9272,7 +9095,7 @@
       </p:sp>
       <p:sp>
         <p:nvSpPr>
-          <p:cNvPr id="20" name="TextBox 19"/>
+          <p:cNvPr id="24" name="TextBox 23"/>
           <p:cNvSpPr txBox="1"/>
           <p:nvPr/>
         </p:nvSpPr>
@@ -9300,20 +9123,20 @@
                 <a:ea typeface="Noto Sans CJK SC Medium"/>
                 <a:cs typeface="Noto Sans CJK SC Medium"/>
               </a:rPr>
-              <a:t>模式声誉</a:t>
-            </a:r>
-          </a:p>
-        </p:txBody>
-      </p:sp>
-      <p:sp>
-        <p:nvSpPr>
-          <p:cNvPr id="21" name="TextBox 20"/>
-          <p:cNvSpPr txBox="1"/>
-          <p:nvPr/>
-        </p:nvSpPr>
-        <p:spPr>
-          <a:xfrm>
-            <a:off x="8065008" y="2103120"/>
+              <a:t>明年年底前</a:t>
+            </a:r>
+          </a:p>
+        </p:txBody>
+      </p:sp>
+      <p:sp>
+        <p:nvSpPr>
+          <p:cNvPr id="25" name="TextBox 24"/>
+          <p:cNvSpPr txBox="1"/>
+          <p:nvPr/>
+        </p:nvSpPr>
+        <p:spPr>
+          <a:xfrm>
+            <a:off x="8065008" y="2057400"/>
             <a:ext cx="3200400" cy="237744"/>
           </a:xfrm>
           <a:prstGeom prst="rect">
@@ -9335,21 +9158,21 @@
                 <a:ea typeface="Noto Sans CJK SC"/>
                 <a:cs typeface="Noto Sans CJK SC"/>
               </a:rPr>
-              <a:t>手册怎么填</a:t>
-            </a:r>
-          </a:p>
-        </p:txBody>
-      </p:sp>
-      <p:sp>
-        <p:nvSpPr>
-          <p:cNvPr id="22" name="TextBox 21"/>
-          <p:cNvSpPr txBox="1"/>
-          <p:nvPr/>
-        </p:nvSpPr>
-        <p:spPr>
-          <a:xfrm>
-            <a:off x="8065008" y="2350008"/>
-            <a:ext cx="3291840" cy="914400"/>
+              <a:t>做什么</a:t>
+            </a:r>
+          </a:p>
+        </p:txBody>
+      </p:sp>
+      <p:sp>
+        <p:nvSpPr>
+          <p:cNvPr id="26" name="TextBox 25"/>
+          <p:cNvSpPr txBox="1"/>
+          <p:nvPr/>
+        </p:nvSpPr>
+        <p:spPr>
+          <a:xfrm>
+            <a:off x="8065008" y="2304288"/>
+            <a:ext cx="3291840" cy="1280160"/>
           </a:xfrm>
           <a:prstGeom prst="rect">
             <a:avLst/>
@@ -9374,20 +9197,23 @@
                 <a:ea typeface="Noto Sans CJK SC"/>
                 <a:cs typeface="Noto Sans CJK SC"/>
               </a:rPr>
-              <a:t>伦理自律委员会执法，违规清退，透明披露。</a:t>
-            </a:r>
-          </a:p>
-        </p:txBody>
-      </p:sp>
-      <p:sp>
-        <p:nvSpPr>
-          <p:cNvPr id="23" name="TextBox 22"/>
-          <p:cNvSpPr txBox="1"/>
-          <p:nvPr/>
-        </p:nvSpPr>
-        <p:spPr>
-          <a:xfrm>
-            <a:off x="8065008" y="3429000"/>
+              <a:t>中文骨架，
+一百到二百支上线。
+首页只摆两样。
+语音只确认这两样。</a:t>
+            </a:r>
+          </a:p>
+        </p:txBody>
+      </p:sp>
+      <p:sp>
+        <p:nvSpPr>
+          <p:cNvPr id="27" name="TextBox 26"/>
+          <p:cNvSpPr txBox="1"/>
+          <p:nvPr/>
+        </p:nvSpPr>
+        <p:spPr>
+          <a:xfrm>
+            <a:off x="8065008" y="3657600"/>
             <a:ext cx="3200400" cy="237744"/>
           </a:xfrm>
           <a:prstGeom prst="rect">
@@ -9409,21 +9235,21 @@
                 <a:ea typeface="Noto Sans CJK SC"/>
                 <a:cs typeface="Noto Sans CJK SC"/>
               </a:rPr>
-              <a:t>中国法人接什么</a:t>
-            </a:r>
-          </a:p>
-        </p:txBody>
-      </p:sp>
-      <p:sp>
-        <p:nvSpPr>
-          <p:cNvPr id="24" name="TextBox 23"/>
-          <p:cNvSpPr txBox="1"/>
-          <p:nvPr/>
-        </p:nvSpPr>
-        <p:spPr>
-          <a:xfrm>
-            <a:off x="8065008" y="3675887"/>
-            <a:ext cx="3291840" cy="1280160"/>
+              <a:t>交出什么</a:t>
+            </a:r>
+          </a:p>
+        </p:txBody>
+      </p:sp>
+      <p:sp>
+        <p:nvSpPr>
+          <p:cNvPr id="28" name="TextBox 27"/>
+          <p:cNvSpPr txBox="1"/>
+          <p:nvPr/>
+        </p:nvSpPr>
+        <p:spPr>
+          <a:xfrm>
+            <a:off x="8065008" y="3904487"/>
+            <a:ext cx="3291840" cy="731520"/>
           </a:xfrm>
           <a:prstGeom prst="rect">
             <a:avLst/>
@@ -9448,20 +9274,91 @@
                 <a:ea typeface="Noto Sans CJK SC"/>
                 <a:cs typeface="Noto Sans CJK SC"/>
               </a:rPr>
-              <a:t>一百到二百支骨架把话术固定。事业者换脸，不换话。乱宣传，先从话术上收。</a:t>
-            </a:r>
-          </a:p>
-        </p:txBody>
-      </p:sp>
-      <p:sp>
-        <p:nvSpPr>
-          <p:cNvPr id="25" name="Rectangle 24"/>
+              <a:t>骨架清单，
+首页与语音验收单。</a:t>
+            </a:r>
+          </a:p>
+        </p:txBody>
+      </p:sp>
+      <p:sp>
+        <p:nvSpPr>
+          <p:cNvPr id="29" name="TextBox 28"/>
+          <p:cNvSpPr txBox="1"/>
+          <p:nvPr/>
+        </p:nvSpPr>
+        <p:spPr>
+          <a:xfrm>
+            <a:off x="8065008" y="4617720"/>
+            <a:ext cx="3200400" cy="237744"/>
+          </a:xfrm>
+          <a:prstGeom prst="rect">
+            <a:avLst/>
+          </a:prstGeom>
+          <a:noFill/>
+        </p:spPr>
+        <p:txBody>
+          <a:bodyPr wrap="square" anchor="t" lIns="0" rIns="0" tIns="0" bIns="0"/>
+          <a:lstStyle/>
+          <a:p>
+            <a:pPr algn="l"/>
+            <a:r>
+              <a:rPr sz="1200" b="0" i="0" lang="zh-CN" altLang="en-US">
+                <a:solidFill>
+                  <a:srgbClr val="9E1B1B"/>
+                </a:solidFill>
+                <a:latin typeface="Noto Sans CJK SC"/>
+                <a:ea typeface="Noto Sans CJK SC"/>
+                <a:cs typeface="Noto Sans CJK SC"/>
+              </a:rPr>
+              <a:t>建议牵头</a:t>
+            </a:r>
+          </a:p>
+        </p:txBody>
+      </p:sp>
+      <p:sp>
+        <p:nvSpPr>
+          <p:cNvPr id="30" name="TextBox 29"/>
+          <p:cNvSpPr txBox="1"/>
+          <p:nvPr/>
+        </p:nvSpPr>
+        <p:spPr>
+          <a:xfrm>
+            <a:off x="8065008" y="4864608"/>
+            <a:ext cx="3291840" cy="365760"/>
+          </a:xfrm>
+          <a:prstGeom prst="rect">
+            <a:avLst/>
+          </a:prstGeom>
+          <a:noFill/>
+        </p:spPr>
+        <p:txBody>
+          <a:bodyPr wrap="square" anchor="t" lIns="0" rIns="0" tIns="0" bIns="0"/>
+          <a:lstStyle/>
+          <a:p>
+            <a:pPr algn="l"/>
+            <a:r>
+              <a:rPr sz="1400" b="0" i="0" lang="zh-CN" altLang="en-US">
+                <a:solidFill>
+                  <a:srgbClr val="2C2C2C"/>
+                </a:solidFill>
+                <a:latin typeface="Noto Sans CJK SC"/>
+                <a:ea typeface="Noto Sans CJK SC"/>
+                <a:cs typeface="Noto Sans CJK SC"/>
+              </a:rPr>
+              <a:t>企划、培训、数字</a:t>
+            </a:r>
+          </a:p>
+        </p:txBody>
+      </p:sp>
+      <p:sp>
+        <p:nvSpPr>
+          <p:cNvPr id="31" name="Rectangle 30"/>
           <p:cNvSpPr/>
           <p:nvPr/>
         </p:nvSpPr>
         <p:spPr>
           <a:xfrm>
-            <a:off x="658368" y="5212080"/>
+            <a:off x="658368" y="5440680"/>
             <a:ext cx="10881360" cy="10972"/>
           </a:xfrm>
           <a:prstGeom prst="rect">
@@ -9498,14 +9395,14 @@
       </p:sp>
       <p:sp>
         <p:nvSpPr>
-          <p:cNvPr id="26" name="TextBox 25"/>
-          <p:cNvSpPr txBox="1"/>
-          <p:nvPr/>
-        </p:nvSpPr>
-        <p:spPr>
-          <a:xfrm>
-            <a:off x="658368" y="5394960"/>
-            <a:ext cx="10789920" cy="822960"/>
+          <p:cNvPr id="32" name="TextBox 31"/>
+          <p:cNvSpPr txBox="1"/>
+          <p:nvPr/>
+        </p:nvSpPr>
+        <p:spPr>
+          <a:xfrm>
+            <a:off x="658368" y="5559552"/>
+            <a:ext cx="10789920" cy="640080"/>
           </a:xfrm>
           <a:prstGeom prst="rect">
             <a:avLst/>
@@ -9522,7 +9419,7 @@
               </a:lnSpc>
             </a:pPr>
             <a:r>
-              <a:rPr sz="2000" b="0" i="0" lang="zh-CN" altLang="en-US">
+              <a:rPr sz="1600" b="0" i="0" lang="zh-CN" altLang="en-US">
                 <a:solidFill>
                   <a:srgbClr val="9E1B1B"/>
                 </a:solidFill>
@@ -9530,15 +9427,15 @@
                 <a:ea typeface="Noto Sans CJK SC Medium"/>
                 <a:cs typeface="Noto Sans CJK SC Medium"/>
               </a:rPr>
-              <a:t>手册的判断：走砸，多半是合规，
-不是市场不够大。</a:t>
-            </a:r>
-          </a:p>
-        </p:txBody>
-      </p:sp>
-      <p:sp>
-        <p:nvSpPr>
-          <p:cNvPr id="27" name="TextBox 26"/>
+              <a:t>每月看六个数：型号数、换料清洗次数、罐容与人数，
+建了记录的人、连续用的天数、每天打开阿扎的人。</a:t>
+            </a:r>
+          </a:p>
+        </p:txBody>
+      </p:sp>
+      <p:sp>
+        <p:nvSpPr>
+          <p:cNvPr id="33" name="TextBox 32"/>
           <p:cNvSpPr txBox="1"/>
           <p:nvPr/>
         </p:nvSpPr>
@@ -9580,6 +9477,1003 @@
 </file>
 
 <file path=ppt/slides/slide15.xml><?xml version="1.0" encoding="utf-8"?>
+<p:sld xmlns:a="http://schemas.openxmlformats.org/drawingml/2006/main" xmlns:p="http://schemas.openxmlformats.org/presentationml/2006/main" xmlns:r="http://schemas.openxmlformats.org/officeDocument/2006/relationships">
+  <p:cSld>
+    <p:bg>
+      <p:bgPr>
+        <a:solidFill>
+          <a:srgbClr val="FFFFFF"/>
+        </a:solidFill>
+        <a:effectLst/>
+      </p:bgPr>
+    </p:bg>
+    <p:spTree>
+      <p:nvGrpSpPr>
+        <p:cNvPr id="1" name=""/>
+        <p:cNvGrpSpPr/>
+        <p:nvPr/>
+      </p:nvGrpSpPr>
+      <p:grpSpPr/>
+      <p:sp>
+        <p:nvSpPr>
+          <p:cNvPr id="2" name="TextBox 1"/>
+          <p:cNvSpPr txBox="1"/>
+          <p:nvPr/>
+        </p:nvSpPr>
+        <p:spPr>
+          <a:xfrm>
+            <a:off x="658368" y="365760"/>
+            <a:ext cx="640080" cy="329184"/>
+          </a:xfrm>
+          <a:prstGeom prst="rect">
+            <a:avLst/>
+          </a:prstGeom>
+          <a:noFill/>
+        </p:spPr>
+        <p:txBody>
+          <a:bodyPr wrap="square" anchor="t" lIns="0" rIns="0" tIns="0" bIns="0"/>
+          <a:lstStyle/>
+          <a:p>
+            <a:pPr algn="l"/>
+            <a:r>
+              <a:rPr sz="1500" b="0" i="0" lang="zh-CN" altLang="en-US">
+                <a:solidFill>
+                  <a:srgbClr val="9E1B1B"/>
+                </a:solidFill>
+                <a:latin typeface="Noto Sans CJK SC Medium"/>
+                <a:ea typeface="Noto Sans CJK SC Medium"/>
+                <a:cs typeface="Noto Sans CJK SC Medium"/>
+              </a:rPr>
+              <a:t>14</a:t>
+            </a:r>
+          </a:p>
+        </p:txBody>
+      </p:sp>
+      <p:sp>
+        <p:nvSpPr>
+          <p:cNvPr id="3" name="TextBox 2"/>
+          <p:cNvSpPr txBox="1"/>
+          <p:nvPr/>
+        </p:nvSpPr>
+        <p:spPr>
+          <a:xfrm>
+            <a:off x="1371600" y="310896"/>
+            <a:ext cx="10058400" cy="438912"/>
+          </a:xfrm>
+          <a:prstGeom prst="rect">
+            <a:avLst/>
+          </a:prstGeom>
+          <a:noFill/>
+        </p:spPr>
+        <p:txBody>
+          <a:bodyPr wrap="square" anchor="t" lIns="0" rIns="0" tIns="0" bIns="0"/>
+          <a:lstStyle/>
+          <a:p>
+            <a:pPr algn="l"/>
+            <a:r>
+              <a:rPr sz="3000" b="0" i="0" lang="zh-CN" altLang="en-US">
+                <a:solidFill>
+                  <a:srgbClr val="141414"/>
+                </a:solidFill>
+                <a:latin typeface="Noto Sans CJK SC Medium"/>
+                <a:ea typeface="Noto Sans CJK SC Medium"/>
+                <a:cs typeface="Noto Sans CJK SC Medium"/>
+              </a:rPr>
+              <a:t>三个坑，中国法人各接一个</a:t>
+            </a:r>
+          </a:p>
+        </p:txBody>
+      </p:sp>
+      <p:sp>
+        <p:nvSpPr>
+          <p:cNvPr id="4" name="Rectangle 3"/>
+          <p:cNvSpPr/>
+          <p:nvPr/>
+        </p:nvSpPr>
+        <p:spPr>
+          <a:xfrm>
+            <a:off x="658368" y="960120"/>
+            <a:ext cx="10881360" cy="10972"/>
+          </a:xfrm>
+          <a:prstGeom prst="rect">
+            <a:avLst/>
+          </a:prstGeom>
+          <a:solidFill>
+            <a:srgbClr val="E2E2E2"/>
+          </a:solidFill>
+          <a:ln>
+            <a:noFill/>
+          </a:ln>
+        </p:spPr>
+        <p:style>
+          <a:lnRef idx="1">
+            <a:schemeClr val="accent1"/>
+          </a:lnRef>
+          <a:fillRef idx="3">
+            <a:schemeClr val="accent1"/>
+          </a:fillRef>
+          <a:effectRef idx="2">
+            <a:schemeClr val="accent1"/>
+          </a:effectRef>
+          <a:fontRef idx="minor">
+            <a:schemeClr val="lt1"/>
+          </a:fontRef>
+        </p:style>
+        <p:txBody>
+          <a:bodyPr rtlCol="0" anchor="ctr"/>
+          <a:lstStyle/>
+          <a:p>
+            <a:pPr algn="ctr"/>
+          </a:p>
+        </p:txBody>
+      </p:sp>
+      <p:sp>
+        <p:nvSpPr>
+          <p:cNvPr id="5" name="TextBox 4"/>
+          <p:cNvSpPr txBox="1"/>
+          <p:nvPr/>
+        </p:nvSpPr>
+        <p:spPr>
+          <a:xfrm>
+            <a:off x="658368" y="1188720"/>
+            <a:ext cx="3200400" cy="237744"/>
+          </a:xfrm>
+          <a:prstGeom prst="rect">
+            <a:avLst/>
+          </a:prstGeom>
+          <a:noFill/>
+        </p:spPr>
+        <p:txBody>
+          <a:bodyPr wrap="square" anchor="t" lIns="0" rIns="0" tIns="0" bIns="0"/>
+          <a:lstStyle/>
+          <a:p>
+            <a:pPr algn="l"/>
+            <a:r>
+              <a:rPr sz="1400" b="0" i="0" lang="zh-CN" altLang="en-US">
+                <a:solidFill>
+                  <a:srgbClr val="9E1B1B"/>
+                </a:solidFill>
+                <a:latin typeface="Noto Sans CJK SC Medium"/>
+                <a:ea typeface="Noto Sans CJK SC Medium"/>
+                <a:cs typeface="Noto Sans CJK SC Medium"/>
+              </a:rPr>
+              <a:t>01</a:t>
+            </a:r>
+          </a:p>
+        </p:txBody>
+      </p:sp>
+      <p:sp>
+        <p:nvSpPr>
+          <p:cNvPr id="6" name="TextBox 5"/>
+          <p:cNvSpPr txBox="1"/>
+          <p:nvPr/>
+        </p:nvSpPr>
+        <p:spPr>
+          <a:xfrm>
+            <a:off x="658368" y="1463040"/>
+            <a:ext cx="3291840" cy="457200"/>
+          </a:xfrm>
+          <a:prstGeom prst="rect">
+            <a:avLst/>
+          </a:prstGeom>
+          <a:noFill/>
+        </p:spPr>
+        <p:txBody>
+          <a:bodyPr wrap="square" anchor="t" lIns="0" rIns="0" tIns="0" bIns="0"/>
+          <a:lstStyle/>
+          <a:p>
+            <a:pPr algn="l"/>
+            <a:r>
+              <a:rPr sz="2200" b="0" i="0" lang="zh-CN" altLang="en-US">
+                <a:solidFill>
+                  <a:srgbClr val="141414"/>
+                </a:solidFill>
+                <a:latin typeface="Noto Sans CJK SC Medium"/>
+                <a:ea typeface="Noto Sans CJK SC Medium"/>
+                <a:cs typeface="Noto Sans CJK SC Medium"/>
+              </a:rPr>
+              <a:t>合规</a:t>
+            </a:r>
+          </a:p>
+        </p:txBody>
+      </p:sp>
+      <p:sp>
+        <p:nvSpPr>
+          <p:cNvPr id="7" name="TextBox 6"/>
+          <p:cNvSpPr txBox="1"/>
+          <p:nvPr/>
+        </p:nvSpPr>
+        <p:spPr>
+          <a:xfrm>
+            <a:off x="658368" y="2103120"/>
+            <a:ext cx="3200400" cy="237744"/>
+          </a:xfrm>
+          <a:prstGeom prst="rect">
+            <a:avLst/>
+          </a:prstGeom>
+          <a:noFill/>
+        </p:spPr>
+        <p:txBody>
+          <a:bodyPr wrap="square" anchor="t" lIns="0" rIns="0" tIns="0" bIns="0"/>
+          <a:lstStyle/>
+          <a:p>
+            <a:pPr algn="l"/>
+            <a:r>
+              <a:rPr sz="1200" b="0" i="0" lang="zh-CN" altLang="en-US">
+                <a:solidFill>
+                  <a:srgbClr val="9E1B1B"/>
+                </a:solidFill>
+                <a:latin typeface="Noto Sans CJK SC"/>
+                <a:ea typeface="Noto Sans CJK SC"/>
+                <a:cs typeface="Noto Sans CJK SC"/>
+              </a:rPr>
+              <a:t>手册怎么填</a:t>
+            </a:r>
+          </a:p>
+        </p:txBody>
+      </p:sp>
+      <p:sp>
+        <p:nvSpPr>
+          <p:cNvPr id="8" name="TextBox 7"/>
+          <p:cNvSpPr txBox="1"/>
+          <p:nvPr/>
+        </p:nvSpPr>
+        <p:spPr>
+          <a:xfrm>
+            <a:off x="658368" y="2350008"/>
+            <a:ext cx="3291840" cy="914400"/>
+          </a:xfrm>
+          <a:prstGeom prst="rect">
+            <a:avLst/>
+          </a:prstGeom>
+          <a:noFill/>
+        </p:spPr>
+        <p:txBody>
+          <a:bodyPr wrap="square" anchor="t" lIns="0" rIns="0" tIns="0" bIns="0"/>
+          <a:lstStyle/>
+          <a:p>
+            <a:pPr algn="l">
+              <a:lnSpc>
+                <a:spcPct val="130000"/>
+              </a:lnSpc>
+            </a:pPr>
+            <a:r>
+              <a:rPr sz="1400" b="0" i="0" lang="zh-CN" altLang="en-US">
+                <a:solidFill>
+                  <a:srgbClr val="2C2C2C"/>
+                </a:solidFill>
+                <a:latin typeface="Noto Sans CJK SC"/>
+                <a:ea typeface="Noto Sans CJK SC"/>
+                <a:cs typeface="Noto Sans CJK SC"/>
+              </a:rPr>
+              <a:t>牌照优先于放量；认证模板复制；收益封顶。</a:t>
+            </a:r>
+          </a:p>
+        </p:txBody>
+      </p:sp>
+      <p:sp>
+        <p:nvSpPr>
+          <p:cNvPr id="9" name="TextBox 8"/>
+          <p:cNvSpPr txBox="1"/>
+          <p:nvPr/>
+        </p:nvSpPr>
+        <p:spPr>
+          <a:xfrm>
+            <a:off x="658368" y="3429000"/>
+            <a:ext cx="3200400" cy="237744"/>
+          </a:xfrm>
+          <a:prstGeom prst="rect">
+            <a:avLst/>
+          </a:prstGeom>
+          <a:noFill/>
+        </p:spPr>
+        <p:txBody>
+          <a:bodyPr wrap="square" anchor="t" lIns="0" rIns="0" tIns="0" bIns="0"/>
+          <a:lstStyle/>
+          <a:p>
+            <a:pPr algn="l"/>
+            <a:r>
+              <a:rPr sz="1200" b="0" i="0" lang="zh-CN" altLang="en-US">
+                <a:solidFill>
+                  <a:srgbClr val="9E1B1B"/>
+                </a:solidFill>
+                <a:latin typeface="Noto Sans CJK SC"/>
+                <a:ea typeface="Noto Sans CJK SC"/>
+                <a:cs typeface="Noto Sans CJK SC"/>
+              </a:rPr>
+              <a:t>中国法人接什么</a:t>
+            </a:r>
+          </a:p>
+        </p:txBody>
+      </p:sp>
+      <p:sp>
+        <p:nvSpPr>
+          <p:cNvPr id="10" name="TextBox 9"/>
+          <p:cNvSpPr txBox="1"/>
+          <p:nvPr/>
+        </p:nvSpPr>
+        <p:spPr>
+          <a:xfrm>
+            <a:off x="658368" y="3675887"/>
+            <a:ext cx="3291840" cy="1280160"/>
+          </a:xfrm>
+          <a:prstGeom prst="rect">
+            <a:avLst/>
+          </a:prstGeom>
+          <a:noFill/>
+        </p:spPr>
+        <p:txBody>
+          <a:bodyPr wrap="square" anchor="t" lIns="0" rIns="0" tIns="0" bIns="0"/>
+          <a:lstStyle/>
+          <a:p>
+            <a:pPr algn="l">
+              <a:lnSpc>
+                <a:spcPct val="130000"/>
+              </a:lnSpc>
+            </a:pPr>
+            <a:r>
+              <a:rPr sz="1400" b="0" i="0" lang="zh-CN" altLang="en-US">
+                <a:solidFill>
+                  <a:srgbClr val="2C2C2C"/>
+                </a:solidFill>
+                <a:latin typeface="Noto Sans CJK SC"/>
+                <a:ea typeface="Noto Sans CJK SC"/>
+                <a:cs typeface="Noto Sans CJK SC"/>
+              </a:rPr>
+              <a:t>艾护理哪句话能说、记录存哪里，阿扎哪张卡。定之前，不对会员说。</a:t>
+            </a:r>
+          </a:p>
+        </p:txBody>
+      </p:sp>
+      <p:sp>
+        <p:nvSpPr>
+          <p:cNvPr id="11" name="Rectangle 10"/>
+          <p:cNvSpPr/>
+          <p:nvPr/>
+        </p:nvSpPr>
+        <p:spPr>
+          <a:xfrm>
+            <a:off x="4160520" y="1188720"/>
+            <a:ext cx="10972" cy="3749039"/>
+          </a:xfrm>
+          <a:prstGeom prst="rect">
+            <a:avLst/>
+          </a:prstGeom>
+          <a:solidFill>
+            <a:srgbClr val="E2E2E2"/>
+          </a:solidFill>
+          <a:ln>
+            <a:noFill/>
+          </a:ln>
+        </p:spPr>
+        <p:style>
+          <a:lnRef idx="1">
+            <a:schemeClr val="accent1"/>
+          </a:lnRef>
+          <a:fillRef idx="3">
+            <a:schemeClr val="accent1"/>
+          </a:fillRef>
+          <a:effectRef idx="2">
+            <a:schemeClr val="accent1"/>
+          </a:effectRef>
+          <a:fontRef idx="minor">
+            <a:schemeClr val="lt1"/>
+          </a:fontRef>
+        </p:style>
+        <p:txBody>
+          <a:bodyPr rtlCol="0" anchor="ctr"/>
+          <a:lstStyle/>
+          <a:p>
+            <a:pPr algn="ctr"/>
+          </a:p>
+        </p:txBody>
+      </p:sp>
+      <p:sp>
+        <p:nvSpPr>
+          <p:cNvPr id="12" name="TextBox 11"/>
+          <p:cNvSpPr txBox="1"/>
+          <p:nvPr/>
+        </p:nvSpPr>
+        <p:spPr>
+          <a:xfrm>
+            <a:off x="4361688" y="1188720"/>
+            <a:ext cx="3200400" cy="237744"/>
+          </a:xfrm>
+          <a:prstGeom prst="rect">
+            <a:avLst/>
+          </a:prstGeom>
+          <a:noFill/>
+        </p:spPr>
+        <p:txBody>
+          <a:bodyPr wrap="square" anchor="t" lIns="0" rIns="0" tIns="0" bIns="0"/>
+          <a:lstStyle/>
+          <a:p>
+            <a:pPr algn="l"/>
+            <a:r>
+              <a:rPr sz="1400" b="0" i="0" lang="zh-CN" altLang="en-US">
+                <a:solidFill>
+                  <a:srgbClr val="9E1B1B"/>
+                </a:solidFill>
+                <a:latin typeface="Noto Sans CJK SC Medium"/>
+                <a:ea typeface="Noto Sans CJK SC Medium"/>
+                <a:cs typeface="Noto Sans CJK SC Medium"/>
+              </a:rPr>
+              <a:t>02</a:t>
+            </a:r>
+          </a:p>
+        </p:txBody>
+      </p:sp>
+      <p:sp>
+        <p:nvSpPr>
+          <p:cNvPr id="13" name="TextBox 12"/>
+          <p:cNvSpPr txBox="1"/>
+          <p:nvPr/>
+        </p:nvSpPr>
+        <p:spPr>
+          <a:xfrm>
+            <a:off x="4361688" y="1463040"/>
+            <a:ext cx="3291840" cy="457200"/>
+          </a:xfrm>
+          <a:prstGeom prst="rect">
+            <a:avLst/>
+          </a:prstGeom>
+          <a:noFill/>
+        </p:spPr>
+        <p:txBody>
+          <a:bodyPr wrap="square" anchor="t" lIns="0" rIns="0" tIns="0" bIns="0"/>
+          <a:lstStyle/>
+          <a:p>
+            <a:pPr algn="l"/>
+            <a:r>
+              <a:rPr sz="2200" b="0" i="0" lang="zh-CN" altLang="en-US">
+                <a:solidFill>
+                  <a:srgbClr val="141414"/>
+                </a:solidFill>
+                <a:latin typeface="Noto Sans CJK SC Medium"/>
+                <a:ea typeface="Noto Sans CJK SC Medium"/>
+                <a:cs typeface="Noto Sans CJK SC Medium"/>
+              </a:rPr>
+              <a:t>供应链与地缘</a:t>
+            </a:r>
+          </a:p>
+        </p:txBody>
+      </p:sp>
+      <p:sp>
+        <p:nvSpPr>
+          <p:cNvPr id="14" name="TextBox 13"/>
+          <p:cNvSpPr txBox="1"/>
+          <p:nvPr/>
+        </p:nvSpPr>
+        <p:spPr>
+          <a:xfrm>
+            <a:off x="4361688" y="2103120"/>
+            <a:ext cx="3200400" cy="237744"/>
+          </a:xfrm>
+          <a:prstGeom prst="rect">
+            <a:avLst/>
+          </a:prstGeom>
+          <a:noFill/>
+        </p:spPr>
+        <p:txBody>
+          <a:bodyPr wrap="square" anchor="t" lIns="0" rIns="0" tIns="0" bIns="0"/>
+          <a:lstStyle/>
+          <a:p>
+            <a:pPr algn="l"/>
+            <a:r>
+              <a:rPr sz="1200" b="0" i="0" lang="zh-CN" altLang="en-US">
+                <a:solidFill>
+                  <a:srgbClr val="9E1B1B"/>
+                </a:solidFill>
+                <a:latin typeface="Noto Sans CJK SC"/>
+                <a:ea typeface="Noto Sans CJK SC"/>
+                <a:cs typeface="Noto Sans CJK SC"/>
+              </a:rPr>
+              <a:t>手册怎么填</a:t>
+            </a:r>
+          </a:p>
+        </p:txBody>
+      </p:sp>
+      <p:sp>
+        <p:nvSpPr>
+          <p:cNvPr id="15" name="TextBox 14"/>
+          <p:cNvSpPr txBox="1"/>
+          <p:nvPr/>
+        </p:nvSpPr>
+        <p:spPr>
+          <a:xfrm>
+            <a:off x="4361688" y="2350008"/>
+            <a:ext cx="3291840" cy="914400"/>
+          </a:xfrm>
+          <a:prstGeom prst="rect">
+            <a:avLst/>
+          </a:prstGeom>
+          <a:noFill/>
+        </p:spPr>
+        <p:txBody>
+          <a:bodyPr wrap="square" anchor="t" lIns="0" rIns="0" tIns="0" bIns="0"/>
+          <a:lstStyle/>
+          <a:p>
+            <a:pPr algn="l">
+              <a:lnSpc>
+                <a:spcPct val="130000"/>
+              </a:lnSpc>
+            </a:pPr>
+            <a:r>
+              <a:rPr sz="1400" b="0" i="0" lang="zh-CN" altLang="en-US">
+                <a:solidFill>
+                  <a:srgbClr val="2C2C2C"/>
+                </a:solidFill>
+                <a:latin typeface="Noto Sans CJK SC"/>
+                <a:ea typeface="Noto Sans CJK SC"/>
+                <a:cs typeface="Noto Sans CJK SC"/>
+              </a:rPr>
+              <a:t>多基地生产，本地定价对冲。</a:t>
+            </a:r>
+          </a:p>
+        </p:txBody>
+      </p:sp>
+      <p:sp>
+        <p:nvSpPr>
+          <p:cNvPr id="16" name="TextBox 15"/>
+          <p:cNvSpPr txBox="1"/>
+          <p:nvPr/>
+        </p:nvSpPr>
+        <p:spPr>
+          <a:xfrm>
+            <a:off x="4361688" y="3429000"/>
+            <a:ext cx="3200400" cy="237744"/>
+          </a:xfrm>
+          <a:prstGeom prst="rect">
+            <a:avLst/>
+          </a:prstGeom>
+          <a:noFill/>
+        </p:spPr>
+        <p:txBody>
+          <a:bodyPr wrap="square" anchor="t" lIns="0" rIns="0" tIns="0" bIns="0"/>
+          <a:lstStyle/>
+          <a:p>
+            <a:pPr algn="l"/>
+            <a:r>
+              <a:rPr sz="1200" b="0" i="0" lang="zh-CN" altLang="en-US">
+                <a:solidFill>
+                  <a:srgbClr val="9E1B1B"/>
+                </a:solidFill>
+                <a:latin typeface="Noto Sans CJK SC"/>
+                <a:ea typeface="Noto Sans CJK SC"/>
+                <a:cs typeface="Noto Sans CJK SC"/>
+              </a:rPr>
+              <a:t>中国法人接什么</a:t>
+            </a:r>
+          </a:p>
+        </p:txBody>
+      </p:sp>
+      <p:sp>
+        <p:nvSpPr>
+          <p:cNvPr id="17" name="TextBox 16"/>
+          <p:cNvSpPr txBox="1"/>
+          <p:nvPr/>
+        </p:nvSpPr>
+        <p:spPr>
+          <a:xfrm>
+            <a:off x="4361688" y="3675887"/>
+            <a:ext cx="3291840" cy="1280160"/>
+          </a:xfrm>
+          <a:prstGeom prst="rect">
+            <a:avLst/>
+          </a:prstGeom>
+          <a:noFill/>
+        </p:spPr>
+        <p:txBody>
+          <a:bodyPr wrap="square" anchor="t" lIns="0" rIns="0" tIns="0" bIns="0"/>
+          <a:lstStyle/>
+          <a:p>
+            <a:pPr algn="l">
+              <a:lnSpc>
+                <a:spcPct val="130000"/>
+              </a:lnSpc>
+            </a:pPr>
+            <a:r>
+              <a:rPr sz="1400" b="0" i="0" lang="zh-CN" altLang="en-US">
+                <a:solidFill>
+                  <a:srgbClr val="2C2C2C"/>
+                </a:solidFill>
+                <a:latin typeface="Noto Sans CJK SC"/>
+                <a:ea typeface="Noto Sans CJK SC"/>
+                <a:cs typeface="Noto Sans CJK SC"/>
+              </a:rPr>
+              <a:t>原料在中国，下一道工序放在墙外。转运少一趟，风险就少一段。</a:t>
+            </a:r>
+          </a:p>
+        </p:txBody>
+      </p:sp>
+      <p:sp>
+        <p:nvSpPr>
+          <p:cNvPr id="18" name="Rectangle 17"/>
+          <p:cNvSpPr/>
+          <p:nvPr/>
+        </p:nvSpPr>
+        <p:spPr>
+          <a:xfrm>
+            <a:off x="7863840" y="1188720"/>
+            <a:ext cx="10972" cy="3749039"/>
+          </a:xfrm>
+          <a:prstGeom prst="rect">
+            <a:avLst/>
+          </a:prstGeom>
+          <a:solidFill>
+            <a:srgbClr val="E2E2E2"/>
+          </a:solidFill>
+          <a:ln>
+            <a:noFill/>
+          </a:ln>
+        </p:spPr>
+        <p:style>
+          <a:lnRef idx="1">
+            <a:schemeClr val="accent1"/>
+          </a:lnRef>
+          <a:fillRef idx="3">
+            <a:schemeClr val="accent1"/>
+          </a:fillRef>
+          <a:effectRef idx="2">
+            <a:schemeClr val="accent1"/>
+          </a:effectRef>
+          <a:fontRef idx="minor">
+            <a:schemeClr val="lt1"/>
+          </a:fontRef>
+        </p:style>
+        <p:txBody>
+          <a:bodyPr rtlCol="0" anchor="ctr"/>
+          <a:lstStyle/>
+          <a:p>
+            <a:pPr algn="ctr"/>
+          </a:p>
+        </p:txBody>
+      </p:sp>
+      <p:sp>
+        <p:nvSpPr>
+          <p:cNvPr id="19" name="TextBox 18"/>
+          <p:cNvSpPr txBox="1"/>
+          <p:nvPr/>
+        </p:nvSpPr>
+        <p:spPr>
+          <a:xfrm>
+            <a:off x="8065008" y="1188720"/>
+            <a:ext cx="3200400" cy="237744"/>
+          </a:xfrm>
+          <a:prstGeom prst="rect">
+            <a:avLst/>
+          </a:prstGeom>
+          <a:noFill/>
+        </p:spPr>
+        <p:txBody>
+          <a:bodyPr wrap="square" anchor="t" lIns="0" rIns="0" tIns="0" bIns="0"/>
+          <a:lstStyle/>
+          <a:p>
+            <a:pPr algn="l"/>
+            <a:r>
+              <a:rPr sz="1400" b="0" i="0" lang="zh-CN" altLang="en-US">
+                <a:solidFill>
+                  <a:srgbClr val="9E1B1B"/>
+                </a:solidFill>
+                <a:latin typeface="Noto Sans CJK SC Medium"/>
+                <a:ea typeface="Noto Sans CJK SC Medium"/>
+                <a:cs typeface="Noto Sans CJK SC Medium"/>
+              </a:rPr>
+              <a:t>03</a:t>
+            </a:r>
+          </a:p>
+        </p:txBody>
+      </p:sp>
+      <p:sp>
+        <p:nvSpPr>
+          <p:cNvPr id="20" name="TextBox 19"/>
+          <p:cNvSpPr txBox="1"/>
+          <p:nvPr/>
+        </p:nvSpPr>
+        <p:spPr>
+          <a:xfrm>
+            <a:off x="8065008" y="1463040"/>
+            <a:ext cx="3291840" cy="457200"/>
+          </a:xfrm>
+          <a:prstGeom prst="rect">
+            <a:avLst/>
+          </a:prstGeom>
+          <a:noFill/>
+        </p:spPr>
+        <p:txBody>
+          <a:bodyPr wrap="square" anchor="t" lIns="0" rIns="0" tIns="0" bIns="0"/>
+          <a:lstStyle/>
+          <a:p>
+            <a:pPr algn="l"/>
+            <a:r>
+              <a:rPr sz="2200" b="0" i="0" lang="zh-CN" altLang="en-US">
+                <a:solidFill>
+                  <a:srgbClr val="141414"/>
+                </a:solidFill>
+                <a:latin typeface="Noto Sans CJK SC Medium"/>
+                <a:ea typeface="Noto Sans CJK SC Medium"/>
+                <a:cs typeface="Noto Sans CJK SC Medium"/>
+              </a:rPr>
+              <a:t>模式声誉</a:t>
+            </a:r>
+          </a:p>
+        </p:txBody>
+      </p:sp>
+      <p:sp>
+        <p:nvSpPr>
+          <p:cNvPr id="21" name="TextBox 20"/>
+          <p:cNvSpPr txBox="1"/>
+          <p:nvPr/>
+        </p:nvSpPr>
+        <p:spPr>
+          <a:xfrm>
+            <a:off x="8065008" y="2103120"/>
+            <a:ext cx="3200400" cy="237744"/>
+          </a:xfrm>
+          <a:prstGeom prst="rect">
+            <a:avLst/>
+          </a:prstGeom>
+          <a:noFill/>
+        </p:spPr>
+        <p:txBody>
+          <a:bodyPr wrap="square" anchor="t" lIns="0" rIns="0" tIns="0" bIns="0"/>
+          <a:lstStyle/>
+          <a:p>
+            <a:pPr algn="l"/>
+            <a:r>
+              <a:rPr sz="1200" b="0" i="0" lang="zh-CN" altLang="en-US">
+                <a:solidFill>
+                  <a:srgbClr val="9E1B1B"/>
+                </a:solidFill>
+                <a:latin typeface="Noto Sans CJK SC"/>
+                <a:ea typeface="Noto Sans CJK SC"/>
+                <a:cs typeface="Noto Sans CJK SC"/>
+              </a:rPr>
+              <a:t>手册怎么填</a:t>
+            </a:r>
+          </a:p>
+        </p:txBody>
+      </p:sp>
+      <p:sp>
+        <p:nvSpPr>
+          <p:cNvPr id="22" name="TextBox 21"/>
+          <p:cNvSpPr txBox="1"/>
+          <p:nvPr/>
+        </p:nvSpPr>
+        <p:spPr>
+          <a:xfrm>
+            <a:off x="8065008" y="2350008"/>
+            <a:ext cx="3291840" cy="914400"/>
+          </a:xfrm>
+          <a:prstGeom prst="rect">
+            <a:avLst/>
+          </a:prstGeom>
+          <a:noFill/>
+        </p:spPr>
+        <p:txBody>
+          <a:bodyPr wrap="square" anchor="t" lIns="0" rIns="0" tIns="0" bIns="0"/>
+          <a:lstStyle/>
+          <a:p>
+            <a:pPr algn="l">
+              <a:lnSpc>
+                <a:spcPct val="130000"/>
+              </a:lnSpc>
+            </a:pPr>
+            <a:r>
+              <a:rPr sz="1400" b="0" i="0" lang="zh-CN" altLang="en-US">
+                <a:solidFill>
+                  <a:srgbClr val="2C2C2C"/>
+                </a:solidFill>
+                <a:latin typeface="Noto Sans CJK SC"/>
+                <a:ea typeface="Noto Sans CJK SC"/>
+                <a:cs typeface="Noto Sans CJK SC"/>
+              </a:rPr>
+              <a:t>伦理自律委员会执法，违规清退，透明披露。</a:t>
+            </a:r>
+          </a:p>
+        </p:txBody>
+      </p:sp>
+      <p:sp>
+        <p:nvSpPr>
+          <p:cNvPr id="23" name="TextBox 22"/>
+          <p:cNvSpPr txBox="1"/>
+          <p:nvPr/>
+        </p:nvSpPr>
+        <p:spPr>
+          <a:xfrm>
+            <a:off x="8065008" y="3429000"/>
+            <a:ext cx="3200400" cy="237744"/>
+          </a:xfrm>
+          <a:prstGeom prst="rect">
+            <a:avLst/>
+          </a:prstGeom>
+          <a:noFill/>
+        </p:spPr>
+        <p:txBody>
+          <a:bodyPr wrap="square" anchor="t" lIns="0" rIns="0" tIns="0" bIns="0"/>
+          <a:lstStyle/>
+          <a:p>
+            <a:pPr algn="l"/>
+            <a:r>
+              <a:rPr sz="1200" b="0" i="0" lang="zh-CN" altLang="en-US">
+                <a:solidFill>
+                  <a:srgbClr val="9E1B1B"/>
+                </a:solidFill>
+                <a:latin typeface="Noto Sans CJK SC"/>
+                <a:ea typeface="Noto Sans CJK SC"/>
+                <a:cs typeface="Noto Sans CJK SC"/>
+              </a:rPr>
+              <a:t>中国法人接什么</a:t>
+            </a:r>
+          </a:p>
+        </p:txBody>
+      </p:sp>
+      <p:sp>
+        <p:nvSpPr>
+          <p:cNvPr id="24" name="TextBox 23"/>
+          <p:cNvSpPr txBox="1"/>
+          <p:nvPr/>
+        </p:nvSpPr>
+        <p:spPr>
+          <a:xfrm>
+            <a:off x="8065008" y="3675887"/>
+            <a:ext cx="3291840" cy="1280160"/>
+          </a:xfrm>
+          <a:prstGeom prst="rect">
+            <a:avLst/>
+          </a:prstGeom>
+          <a:noFill/>
+        </p:spPr>
+        <p:txBody>
+          <a:bodyPr wrap="square" anchor="t" lIns="0" rIns="0" tIns="0" bIns="0"/>
+          <a:lstStyle/>
+          <a:p>
+            <a:pPr algn="l">
+              <a:lnSpc>
+                <a:spcPct val="130000"/>
+              </a:lnSpc>
+            </a:pPr>
+            <a:r>
+              <a:rPr sz="1400" b="0" i="0" lang="zh-CN" altLang="en-US">
+                <a:solidFill>
+                  <a:srgbClr val="2C2C2C"/>
+                </a:solidFill>
+                <a:latin typeface="Noto Sans CJK SC"/>
+                <a:ea typeface="Noto Sans CJK SC"/>
+                <a:cs typeface="Noto Sans CJK SC"/>
+              </a:rPr>
+              <a:t>一百到二百支骨架把话术固定。事业者换脸，不换话。乱宣传，先从话术上收。</a:t>
+            </a:r>
+          </a:p>
+        </p:txBody>
+      </p:sp>
+      <p:sp>
+        <p:nvSpPr>
+          <p:cNvPr id="25" name="Rectangle 24"/>
+          <p:cNvSpPr/>
+          <p:nvPr/>
+        </p:nvSpPr>
+        <p:spPr>
+          <a:xfrm>
+            <a:off x="658368" y="5212080"/>
+            <a:ext cx="10881360" cy="10972"/>
+          </a:xfrm>
+          <a:prstGeom prst="rect">
+            <a:avLst/>
+          </a:prstGeom>
+          <a:solidFill>
+            <a:srgbClr val="E2E2E2"/>
+          </a:solidFill>
+          <a:ln>
+            <a:noFill/>
+          </a:ln>
+        </p:spPr>
+        <p:style>
+          <a:lnRef idx="1">
+            <a:schemeClr val="accent1"/>
+          </a:lnRef>
+          <a:fillRef idx="3">
+            <a:schemeClr val="accent1"/>
+          </a:fillRef>
+          <a:effectRef idx="2">
+            <a:schemeClr val="accent1"/>
+          </a:effectRef>
+          <a:fontRef idx="minor">
+            <a:schemeClr val="lt1"/>
+          </a:fontRef>
+        </p:style>
+        <p:txBody>
+          <a:bodyPr rtlCol="0" anchor="ctr"/>
+          <a:lstStyle/>
+          <a:p>
+            <a:pPr algn="ctr"/>
+          </a:p>
+        </p:txBody>
+      </p:sp>
+      <p:sp>
+        <p:nvSpPr>
+          <p:cNvPr id="26" name="TextBox 25"/>
+          <p:cNvSpPr txBox="1"/>
+          <p:nvPr/>
+        </p:nvSpPr>
+        <p:spPr>
+          <a:xfrm>
+            <a:off x="658368" y="5394960"/>
+            <a:ext cx="10789920" cy="822960"/>
+          </a:xfrm>
+          <a:prstGeom prst="rect">
+            <a:avLst/>
+          </a:prstGeom>
+          <a:noFill/>
+        </p:spPr>
+        <p:txBody>
+          <a:bodyPr wrap="square" anchor="t" lIns="0" rIns="0" tIns="0" bIns="0"/>
+          <a:lstStyle/>
+          <a:p>
+            <a:pPr algn="l">
+              <a:lnSpc>
+                <a:spcPct val="130000"/>
+              </a:lnSpc>
+            </a:pPr>
+            <a:r>
+              <a:rPr sz="2000" b="0" i="0" lang="zh-CN" altLang="en-US">
+                <a:solidFill>
+                  <a:srgbClr val="9E1B1B"/>
+                </a:solidFill>
+                <a:latin typeface="Noto Sans CJK SC Medium"/>
+                <a:ea typeface="Noto Sans CJK SC Medium"/>
+                <a:cs typeface="Noto Sans CJK SC Medium"/>
+              </a:rPr>
+              <a:t>手册的判断：走砸，多半是合规，
+不是市场不够大。</a:t>
+            </a:r>
+          </a:p>
+        </p:txBody>
+      </p:sp>
+      <p:sp>
+        <p:nvSpPr>
+          <p:cNvPr id="27" name="TextBox 26"/>
+          <p:cNvSpPr txBox="1"/>
+          <p:nvPr/>
+        </p:nvSpPr>
+        <p:spPr>
+          <a:xfrm>
+            <a:off x="10561320" y="6492240"/>
+            <a:ext cx="1051560" cy="201168"/>
+          </a:xfrm>
+          <a:prstGeom prst="rect">
+            <a:avLst/>
+          </a:prstGeom>
+          <a:noFill/>
+        </p:spPr>
+        <p:txBody>
+          <a:bodyPr wrap="square" anchor="t" lIns="0" rIns="0" tIns="0" bIns="0"/>
+          <a:lstStyle/>
+          <a:p>
+            <a:pPr algn="r"/>
+            <a:r>
+              <a:rPr sz="1100" b="0" i="0" lang="zh-CN" altLang="en-US">
+                <a:solidFill>
+                  <a:srgbClr val="C8C8C8"/>
+                </a:solidFill>
+                <a:latin typeface="Noto Sans CJK SC"/>
+                <a:ea typeface="Noto Sans CJK SC"/>
+                <a:cs typeface="Noto Sans CJK SC"/>
+              </a:rPr>
+              <a:t>15</a:t>
+            </a:r>
+          </a:p>
+        </p:txBody>
+      </p:sp>
+    </p:spTree>
+  </p:cSld>
+  <p:clrMapOvr>
+    <a:masterClrMapping/>
+  </p:clrMapOvr>
+</p:sld>
+</file>
+
+<file path=ppt/slides/slide16.xml><?xml version="1.0" encoding="utf-8"?>
 <p:sld xmlns:a="http://schemas.openxmlformats.org/drawingml/2006/main" xmlns:p="http://schemas.openxmlformats.org/presentationml/2006/main" xmlns:r="http://schemas.openxmlformats.org/officeDocument/2006/relationships">
   <p:cSld>
     <p:bg>
@@ -10060,7 +10954,7 @@
                 <a:ea typeface="Noto Sans CJK SC"/>
                 <a:cs typeface="Noto Sans CJK SC"/>
               </a:rPr>
-              <a:t>15</a:t>
+              <a:t>16</a:t>
             </a:r>
           </a:p>
         </p:txBody>

--- a/艾多美何以成为100兆韩元企业.pptx
+++ b/艾多美何以成为100兆韩元企业.pptx
@@ -13,14 +13,6 @@
     <p:sldId id="261" r:id="rId13"/>
     <p:sldId id="262" r:id="rId14"/>
     <p:sldId id="263" r:id="rId15"/>
-    <p:sldId id="264" r:id="rId16"/>
-    <p:sldId id="265" r:id="rId17"/>
-    <p:sldId id="266" r:id="rId18"/>
-    <p:sldId id="267" r:id="rId19"/>
-    <p:sldId id="268" r:id="rId20"/>
-    <p:sldId id="269" r:id="rId21"/>
-    <p:sldId id="270" r:id="rId22"/>
-    <p:sldId id="271" r:id="rId23"/>
   </p:sldIdLst>
   <p:sldSz cx="12192000" cy="6858000" type="screen4x3"/>
   <p:notesSz cx="6858000" cy="9144000"/>
@@ -517,497 +509,7 @@
           <a:lstStyle/>
           <a:p>
             <a:r>
-              <a:t>全稿 16 页。只讲中国法人要做的事：3A 是 APP、Acare、AZA，再接到产线和合作方。</a:t>
-            </a:r>
-          </a:p>
-        </p:txBody>
-      </p:sp>
-      <p:sp>
-        <p:nvSpPr>
-          <p:cNvPr id="4" name="Slide Number Placeholder 3"/>
-          <p:cNvSpPr>
-            <a:spLocks noGrp="1"/>
-          </p:cNvSpPr>
-          <p:nvPr>
-            <p:ph type="sldNum" idx="5" sz="quarter"/>
-          </p:nvPr>
-        </p:nvSpPr>
-        <p:spPr/>
-      </p:sp>
-    </p:spTree>
-  </p:cSld>
-  <p:clrMapOvr>
-    <a:masterClrMapping/>
-  </p:clrMapOvr>
-</p:notes>
-</file>
-
-<file path=ppt/notesSlides/notesSlide10.xml><?xml version="1.0" encoding="utf-8"?>
-<p:notes xmlns:a="http://schemas.openxmlformats.org/drawingml/2006/main" xmlns:p="http://schemas.openxmlformats.org/presentationml/2006/main" xmlns:r="http://schemas.openxmlformats.org/officeDocument/2006/relationships">
-  <p:cSld>
-    <p:spTree>
-      <p:nvGrpSpPr>
-        <p:cNvPr id="1" name=""/>
-        <p:cNvGrpSpPr/>
-        <p:nvPr/>
-      </p:nvGrpSpPr>
-      <p:grpSpPr>
-        <a:xfrm>
-          <a:off x="0" y="0"/>
-          <a:ext cx="0" cy="0"/>
-          <a:chOff x="0" y="0"/>
-          <a:chExt cx="0" cy="0"/>
-        </a:xfrm>
-      </p:grpSpPr>
-      <p:sp>
-        <p:nvSpPr>
-          <p:cNvPr id="2" name="Slide Image Placeholder 1"/>
-          <p:cNvSpPr>
-            <a:spLocks noGrp="1"/>
-          </p:cNvSpPr>
-          <p:nvPr>
-            <p:ph type="sldImg" idx="2"/>
-          </p:nvPr>
-        </p:nvSpPr>
-        <p:spPr/>
-      </p:sp>
-      <p:sp>
-        <p:nvSpPr>
-          <p:cNvPr id="3" name="Notes Placeholder 2"/>
-          <p:cNvSpPr>
-            <a:spLocks noGrp="1"/>
-          </p:cNvSpPr>
-          <p:nvPr>
-            <p:ph type="body" idx="3" sz="quarter"/>
-          </p:nvPr>
-        </p:nvSpPr>
-        <p:spPr/>
-        <p:txBody>
-          <a:bodyPr/>
-          <a:lstStyle/>
-          <a:p>
-            <a:r>
-              <a:t>四件都落在工序上：模具、配方、罐容、鲜品。加款、谈运费、再加一个口味，都不在这四件里。</a:t>
-            </a:r>
-          </a:p>
-        </p:txBody>
-      </p:sp>
-      <p:sp>
-        <p:nvSpPr>
-          <p:cNvPr id="4" name="Slide Number Placeholder 3"/>
-          <p:cNvSpPr>
-            <a:spLocks noGrp="1"/>
-          </p:cNvSpPr>
-          <p:nvPr>
-            <p:ph type="sldNum" idx="5" sz="quarter"/>
-          </p:nvPr>
-        </p:nvSpPr>
-        <p:spPr/>
-      </p:sp>
-    </p:spTree>
-  </p:cSld>
-  <p:clrMapOvr>
-    <a:masterClrMapping/>
-  </p:clrMapOvr>
-</p:notes>
-</file>
-
-<file path=ppt/notesSlides/notesSlide11.xml><?xml version="1.0" encoding="utf-8"?>
-<p:notes xmlns:a="http://schemas.openxmlformats.org/drawingml/2006/main" xmlns:p="http://schemas.openxmlformats.org/presentationml/2006/main" xmlns:r="http://schemas.openxmlformats.org/officeDocument/2006/relationships">
-  <p:cSld>
-    <p:spTree>
-      <p:nvGrpSpPr>
-        <p:cNvPr id="1" name=""/>
-        <p:cNvGrpSpPr/>
-        <p:nvPr/>
-      </p:nvGrpSpPr>
-      <p:grpSpPr>
-        <a:xfrm>
-          <a:off x="0" y="0"/>
-          <a:ext cx="0" cy="0"/>
-          <a:chOff x="0" y="0"/>
-          <a:chExt cx="0" cy="0"/>
-        </a:xfrm>
-      </p:grpSpPr>
-      <p:sp>
-        <p:nvSpPr>
-          <p:cNvPr id="2" name="Slide Image Placeholder 1"/>
-          <p:cNvSpPr>
-            <a:spLocks noGrp="1"/>
-          </p:cNvSpPr>
-          <p:nvPr>
-            <p:ph type="sldImg" idx="2"/>
-          </p:nvPr>
-        </p:nvSpPr>
-        <p:spPr/>
-      </p:sp>
-      <p:sp>
-        <p:nvSpPr>
-          <p:cNvPr id="3" name="Notes Placeholder 2"/>
-          <p:cNvSpPr>
-            <a:spLocks noGrp="1"/>
-          </p:cNvSpPr>
-          <p:nvPr>
-            <p:ph type="body" idx="3" sz="quarter"/>
-          </p:nvPr>
-        </p:nvSpPr>
-        <p:spPr/>
-        <p:txBody>
-          <a:bodyPr/>
-          <a:lstStyle/>
-          <a:p>
-            <a:r>
-              <a:t>这一页不写结论，只列要查的。四条线按四件事对应：牙刷是模具和吨袋，厨具是并款，保健食品是罐容和鲜品，物流是转运趟数。烟台工厂造厨具、牙刷、保健食品，以及烟台国际物流中心2025年启用，均引自手册，未核实。</a:t>
-            </a:r>
-          </a:p>
-        </p:txBody>
-      </p:sp>
-      <p:sp>
-        <p:nvSpPr>
-          <p:cNvPr id="4" name="Slide Number Placeholder 3"/>
-          <p:cNvSpPr>
-            <a:spLocks noGrp="1"/>
-          </p:cNvSpPr>
-          <p:nvPr>
-            <p:ph type="sldNum" idx="5" sz="quarter"/>
-          </p:nvPr>
-        </p:nvSpPr>
-        <p:spPr/>
-      </p:sp>
-    </p:spTree>
-  </p:cSld>
-  <p:clrMapOvr>
-    <a:masterClrMapping/>
-  </p:clrMapOvr>
-</p:notes>
-</file>
-
-<file path=ppt/notesSlides/notesSlide12.xml><?xml version="1.0" encoding="utf-8"?>
-<p:notes xmlns:a="http://schemas.openxmlformats.org/drawingml/2006/main" xmlns:p="http://schemas.openxmlformats.org/presentationml/2006/main" xmlns:r="http://schemas.openxmlformats.org/officeDocument/2006/relationships">
-  <p:cSld>
-    <p:spTree>
-      <p:nvGrpSpPr>
-        <p:cNvPr id="1" name=""/>
-        <p:cNvGrpSpPr/>
-        <p:nvPr/>
-      </p:nvGrpSpPr>
-      <p:grpSpPr>
-        <a:xfrm>
-          <a:off x="0" y="0"/>
-          <a:ext cx="0" cy="0"/>
-          <a:chOff x="0" y="0"/>
-          <a:chExt cx="0" cy="0"/>
-        </a:xfrm>
-      </p:grpSpPr>
-      <p:sp>
-        <p:nvSpPr>
-          <p:cNvPr id="2" name="Slide Image Placeholder 1"/>
-          <p:cNvSpPr>
-            <a:spLocks noGrp="1"/>
-          </p:cNvSpPr>
-          <p:nvPr>
-            <p:ph type="sldImg" idx="2"/>
-          </p:nvPr>
-        </p:nvSpPr>
-        <p:spPr/>
-      </p:sp>
-      <p:sp>
-        <p:nvSpPr>
-          <p:cNvPr id="3" name="Notes Placeholder 2"/>
-          <p:cNvSpPr>
-            <a:spLocks noGrp="1"/>
-          </p:cNvSpPr>
-          <p:nvPr>
-            <p:ph type="body" idx="3" sz="quarter"/>
-          </p:nvPr>
-        </p:nvSpPr>
-        <p:spPr/>
-        <p:txBody>
-          <a:bodyPr/>
-          <a:lstStyle/>
-          <a:p>
-            <a:r>
-              <a:t>合作方先要看见能排产的量、设备由谁出、原料从育苗锁到哪一年。询价单给不出这些。</a:t>
-            </a:r>
-          </a:p>
-        </p:txBody>
-      </p:sp>
-      <p:sp>
-        <p:nvSpPr>
-          <p:cNvPr id="4" name="Slide Number Placeholder 3"/>
-          <p:cNvSpPr>
-            <a:spLocks noGrp="1"/>
-          </p:cNvSpPr>
-          <p:nvPr>
-            <p:ph type="sldNum" idx="5" sz="quarter"/>
-          </p:nvPr>
-        </p:nvSpPr>
-        <p:spPr/>
-      </p:sp>
-    </p:spTree>
-  </p:cSld>
-  <p:clrMapOvr>
-    <a:masterClrMapping/>
-  </p:clrMapOvr>
-</p:notes>
-</file>
-
-<file path=ppt/notesSlides/notesSlide13.xml><?xml version="1.0" encoding="utf-8"?>
-<p:notes xmlns:a="http://schemas.openxmlformats.org/drawingml/2006/main" xmlns:p="http://schemas.openxmlformats.org/presentationml/2006/main" xmlns:r="http://schemas.openxmlformats.org/officeDocument/2006/relationships">
-  <p:cSld>
-    <p:spTree>
-      <p:nvGrpSpPr>
-        <p:cNvPr id="1" name=""/>
-        <p:cNvGrpSpPr/>
-        <p:nvPr/>
-      </p:nvGrpSpPr>
-      <p:grpSpPr>
-        <a:xfrm>
-          <a:off x="0" y="0"/>
-          <a:ext cx="0" cy="0"/>
-          <a:chOff x="0" y="0"/>
-          <a:chExt cx="0" cy="0"/>
-        </a:xfrm>
-      </p:grpSpPr>
-      <p:sp>
-        <p:nvSpPr>
-          <p:cNvPr id="2" name="Slide Image Placeholder 1"/>
-          <p:cNvSpPr>
-            <a:spLocks noGrp="1"/>
-          </p:cNvSpPr>
-          <p:nvPr>
-            <p:ph type="sldImg" idx="2"/>
-          </p:nvPr>
-        </p:nvSpPr>
-        <p:spPr/>
-      </p:sp>
-      <p:sp>
-        <p:nvSpPr>
-          <p:cNvPr id="3" name="Notes Placeholder 2"/>
-          <p:cNvSpPr>
-            <a:spLocks noGrp="1"/>
-          </p:cNvSpPr>
-          <p:nvPr>
-            <p:ph type="body" idx="3" sz="quarter"/>
-          </p:nvPr>
-        </p:nvSpPr>
-        <p:spPr/>
-        <p:txBody>
-          <a:bodyPr/>
-          <a:lstStyle/>
-          <a:p>
-            <a:r>
-              <a:t>7月28日：批评线性接力，要求从一体化企划一次贯通到终点。中国法人先出货、再补内容、再办培训，链在企划上就断了。</a:t>
-            </a:r>
-          </a:p>
-        </p:txBody>
-      </p:sp>
-      <p:sp>
-        <p:nvSpPr>
-          <p:cNvPr id="4" name="Slide Number Placeholder 3"/>
-          <p:cNvSpPr>
-            <a:spLocks noGrp="1"/>
-          </p:cNvSpPr>
-          <p:nvPr>
-            <p:ph type="sldNum" idx="5" sz="quarter"/>
-          </p:nvPr>
-        </p:nvSpPr>
-        <p:spPr/>
-      </p:sp>
-    </p:spTree>
-  </p:cSld>
-  <p:clrMapOvr>
-    <a:masterClrMapping/>
-  </p:clrMapOvr>
-</p:notes>
-</file>
-
-<file path=ppt/notesSlides/notesSlide14.xml><?xml version="1.0" encoding="utf-8"?>
-<p:notes xmlns:a="http://schemas.openxmlformats.org/drawingml/2006/main" xmlns:p="http://schemas.openxmlformats.org/presentationml/2006/main" xmlns:r="http://schemas.openxmlformats.org/officeDocument/2006/relationships">
-  <p:cSld>
-    <p:spTree>
-      <p:nvGrpSpPr>
-        <p:cNvPr id="1" name=""/>
-        <p:cNvGrpSpPr/>
-        <p:nvPr/>
-      </p:nvGrpSpPr>
-      <p:grpSpPr>
-        <a:xfrm>
-          <a:off x="0" y="0"/>
-          <a:ext cx="0" cy="0"/>
-          <a:chOff x="0" y="0"/>
-          <a:chExt cx="0" cy="0"/>
-        </a:xfrm>
-      </p:grpSpPr>
-      <p:sp>
-        <p:nvSpPr>
-          <p:cNvPr id="2" name="Slide Image Placeholder 1"/>
-          <p:cNvSpPr>
-            <a:spLocks noGrp="1"/>
-          </p:cNvSpPr>
-          <p:nvPr>
-            <p:ph type="sldImg" idx="2"/>
-          </p:nvPr>
-        </p:nvSpPr>
-        <p:spPr/>
-      </p:sp>
-      <p:sp>
-        <p:nvSpPr>
-          <p:cNvPr id="3" name="Notes Placeholder 2"/>
-          <p:cNvSpPr>
-            <a:spLocks noGrp="1"/>
-          </p:cNvSpPr>
-          <p:nvPr>
-            <p:ph type="body" idx="3" sz="quarter"/>
-          </p:nvPr>
-        </p:nvSpPr>
-        <p:spPr/>
-        <p:txBody>
-          <a:bodyPr/>
-          <a:lstStyle/>
-          <a:p>
-            <a:r>
-              <a:t>时间点只有一个是会长讲过的：明年年底前的一百到二百支骨架。首页两样和语音确认与骨架同一批验收。其余按先后排，不标日期。牵头部门是建议。</a:t>
-            </a:r>
-          </a:p>
-        </p:txBody>
-      </p:sp>
-      <p:sp>
-        <p:nvSpPr>
-          <p:cNvPr id="4" name="Slide Number Placeholder 3"/>
-          <p:cNvSpPr>
-            <a:spLocks noGrp="1"/>
-          </p:cNvSpPr>
-          <p:nvPr>
-            <p:ph type="sldNum" idx="5" sz="quarter"/>
-          </p:nvPr>
-        </p:nvSpPr>
-        <p:spPr/>
-      </p:sp>
-    </p:spTree>
-  </p:cSld>
-  <p:clrMapOvr>
-    <a:masterClrMapping/>
-  </p:clrMapOvr>
-</p:notes>
-</file>
-
-<file path=ppt/notesSlides/notesSlide15.xml><?xml version="1.0" encoding="utf-8"?>
-<p:notes xmlns:a="http://schemas.openxmlformats.org/drawingml/2006/main" xmlns:p="http://schemas.openxmlformats.org/presentationml/2006/main" xmlns:r="http://schemas.openxmlformats.org/officeDocument/2006/relationships">
-  <p:cSld>
-    <p:spTree>
-      <p:nvGrpSpPr>
-        <p:cNvPr id="1" name=""/>
-        <p:cNvGrpSpPr/>
-        <p:nvPr/>
-      </p:nvGrpSpPr>
-      <p:grpSpPr>
-        <a:xfrm>
-          <a:off x="0" y="0"/>
-          <a:ext cx="0" cy="0"/>
-          <a:chOff x="0" y="0"/>
-          <a:chExt cx="0" cy="0"/>
-        </a:xfrm>
-      </p:grpSpPr>
-      <p:sp>
-        <p:nvSpPr>
-          <p:cNvPr id="2" name="Slide Image Placeholder 1"/>
-          <p:cNvSpPr>
-            <a:spLocks noGrp="1"/>
-          </p:cNvSpPr>
-          <p:nvPr>
-            <p:ph type="sldImg" idx="2"/>
-          </p:nvPr>
-        </p:nvSpPr>
-        <p:spPr/>
-      </p:sp>
-      <p:sp>
-        <p:nvSpPr>
-          <p:cNvPr id="3" name="Notes Placeholder 2"/>
-          <p:cNvSpPr>
-            <a:spLocks noGrp="1"/>
-          </p:cNvSpPr>
-          <p:nvPr>
-            <p:ph type="body" idx="3" sz="quarter"/>
-          </p:nvPr>
-        </p:nvSpPr>
-        <p:spPr/>
-        <p:txBody>
-          <a:bodyPr/>
-          <a:lstStyle/>
-          <a:p>
-            <a:r>
-              <a:t>左边一行来自《养成手册》第九章的填坑指南，右边是把它落到中国法人已经定下的动作上。手册里关于中国牌照状态的表述没有引用，以法务口径为准。</a:t>
-            </a:r>
-          </a:p>
-        </p:txBody>
-      </p:sp>
-      <p:sp>
-        <p:nvSpPr>
-          <p:cNvPr id="4" name="Slide Number Placeholder 3"/>
-          <p:cNvSpPr>
-            <a:spLocks noGrp="1"/>
-          </p:cNvSpPr>
-          <p:nvPr>
-            <p:ph type="sldNum" idx="5" sz="quarter"/>
-          </p:nvPr>
-        </p:nvSpPr>
-        <p:spPr/>
-      </p:sp>
-    </p:spTree>
-  </p:cSld>
-  <p:clrMapOvr>
-    <a:masterClrMapping/>
-  </p:clrMapOvr>
-</p:notes>
-</file>
-
-<file path=ppt/notesSlides/notesSlide16.xml><?xml version="1.0" encoding="utf-8"?>
-<p:notes xmlns:a="http://schemas.openxmlformats.org/drawingml/2006/main" xmlns:p="http://schemas.openxmlformats.org/presentationml/2006/main" xmlns:r="http://schemas.openxmlformats.org/officeDocument/2006/relationships">
-  <p:cSld>
-    <p:spTree>
-      <p:nvGrpSpPr>
-        <p:cNvPr id="1" name=""/>
-        <p:cNvGrpSpPr/>
-        <p:nvPr/>
-      </p:nvGrpSpPr>
-      <p:grpSpPr>
-        <a:xfrm>
-          <a:off x="0" y="0"/>
-          <a:ext cx="0" cy="0"/>
-          <a:chOff x="0" y="0"/>
-          <a:chExt cx="0" cy="0"/>
-        </a:xfrm>
-      </p:grpSpPr>
-      <p:sp>
-        <p:nvSpPr>
-          <p:cNvPr id="2" name="Slide Image Placeholder 1"/>
-          <p:cNvSpPr>
-            <a:spLocks noGrp="1"/>
-          </p:cNvSpPr>
-          <p:nvPr>
-            <p:ph type="sldImg" idx="2"/>
-          </p:nvPr>
-        </p:nvSpPr>
-        <p:spPr/>
-      </p:sp>
-      <p:sp>
-        <p:nvSpPr>
-          <p:cNvPr id="3" name="Notes Placeholder 2"/>
-          <p:cNvSpPr>
-            <a:spLocks noGrp="1"/>
-          </p:cNvSpPr>
-          <p:nvPr>
-            <p:ph type="body" idx="3" sz="quarter"/>
-          </p:nvPr>
-        </p:nvSpPr>
-        <p:spPr/>
-        <p:txBody>
-          <a:bodyPr/>
-          <a:lstStyle/>
-          <a:p>
-            <a:r>
-              <a:t>收束回到四项：产线盘点、合作方三样、企划、3A，以及每月看的六个数。然后停住。</a:t>
+              <a:t>全稿 8 页。只讲 3A：APP、Acare、AZA，以及人工智能怎样抬体验、抬业绩。</a:t>
             </a:r>
           </a:p>
         </p:txBody>
@@ -1427,7 +929,7 @@
           <a:lstStyle/>
           <a:p>
             <a:r>
-              <a:t>7月28日工作坊：面对按规格生产的竞争者，回到重新制定标准。三条是一能一品、品质加倍或价格减半、从超大规模重构成本。9月13日把品质定为世界第一、价格竞争力定为压倒性第一，一能一品是一个产品、一个全球冠军。</a:t>
+              <a:t>四件都接在已有的首页两样和语音确认上，不另开一个会在几百款里挑的引擎。拍完重算是当次转化。空瓶前三天只续同一款。家里的人分开记，首页按人出。停用分三天、七天、十四天，用审过的骨架对这一个人说。</a:t>
             </a:r>
           </a:p>
         </p:txBody>
@@ -1497,77 +999,7 @@
           <a:lstStyle/>
           <a:p>
             <a:r>
-              <a:t>三层成本：多型号的制造、广告和店、消费者的选择失败。拿掉这三层，1,200 才成立。</a:t>
-            </a:r>
-          </a:p>
-        </p:txBody>
-      </p:sp>
-      <p:sp>
-        <p:nvSpPr>
-          <p:cNvPr id="4" name="Slide Number Placeholder 3"/>
-          <p:cNvSpPr>
-            <a:spLocks noGrp="1"/>
-          </p:cNvSpPr>
-          <p:nvPr>
-            <p:ph type="sldNum" idx="5" sz="quarter"/>
-          </p:nvPr>
-        </p:nvSpPr>
-        <p:spPr/>
-      </p:sp>
-    </p:spTree>
-  </p:cSld>
-  <p:clrMapOvr>
-    <a:masterClrMapping/>
-  </p:clrMapOvr>
-</p:notes>
-</file>
-
-<file path=ppt/notesSlides/notesSlide9.xml><?xml version="1.0" encoding="utf-8"?>
-<p:notes xmlns:a="http://schemas.openxmlformats.org/drawingml/2006/main" xmlns:p="http://schemas.openxmlformats.org/presentationml/2006/main" xmlns:r="http://schemas.openxmlformats.org/officeDocument/2006/relationships">
-  <p:cSld>
-    <p:spTree>
-      <p:nvGrpSpPr>
-        <p:cNvPr id="1" name=""/>
-        <p:cNvGrpSpPr/>
-        <p:nvPr/>
-      </p:nvGrpSpPr>
-      <p:grpSpPr>
-        <a:xfrm>
-          <a:off x="0" y="0"/>
-          <a:ext cx="0" cy="0"/>
-          <a:chOff x="0" y="0"/>
-          <a:chExt cx="0" cy="0"/>
-        </a:xfrm>
-      </p:grpSpPr>
-      <p:sp>
-        <p:nvSpPr>
-          <p:cNvPr id="2" name="Slide Image Placeholder 1"/>
-          <p:cNvSpPr>
-            <a:spLocks noGrp="1"/>
-          </p:cNvSpPr>
-          <p:nvPr>
-            <p:ph type="sldImg" idx="2"/>
-          </p:nvPr>
-        </p:nvSpPr>
-        <p:spPr/>
-      </p:sp>
-      <p:sp>
-        <p:nvSpPr>
-          <p:cNvPr id="3" name="Notes Placeholder 2"/>
-          <p:cNvSpPr>
-            <a:spLocks noGrp="1"/>
-          </p:cNvSpPr>
-          <p:nvPr>
-            <p:ph type="body" idx="3" sz="quarter"/>
-          </p:nvPr>
-        </p:nvSpPr>
-        <p:spPr/>
-        <p:txBody>
-          <a:bodyPr/>
-          <a:lstStyle/>
-          <a:p>
-            <a:r>
-              <a:t>不是把价格砍下来。是把无用工序拿掉，再按一个月十万盒重算成本。</a:t>
+              <a:t>收束只留 3A：APP、Acare、AZA，以及要数的三样。然后停住。</a:t>
             </a:r>
           </a:p>
         </p:txBody>
@@ -4835,5695 +4267,6 @@
 </p:sld>
 </file>
 
-<file path=ppt/slides/slide10.xml><?xml version="1.0" encoding="utf-8"?>
-<p:sld xmlns:a="http://schemas.openxmlformats.org/drawingml/2006/main" xmlns:p="http://schemas.openxmlformats.org/presentationml/2006/main" xmlns:r="http://schemas.openxmlformats.org/officeDocument/2006/relationships">
-  <p:cSld>
-    <p:bg>
-      <p:bgPr>
-        <a:solidFill>
-          <a:srgbClr val="FFFFFF"/>
-        </a:solidFill>
-        <a:effectLst/>
-      </p:bgPr>
-    </p:bg>
-    <p:spTree>
-      <p:nvGrpSpPr>
-        <p:cNvPr id="1" name=""/>
-        <p:cNvGrpSpPr/>
-        <p:nvPr/>
-      </p:nvGrpSpPr>
-      <p:grpSpPr/>
-      <p:sp>
-        <p:nvSpPr>
-          <p:cNvPr id="2" name="TextBox 1"/>
-          <p:cNvSpPr txBox="1"/>
-          <p:nvPr/>
-        </p:nvSpPr>
-        <p:spPr>
-          <a:xfrm>
-            <a:off x="658368" y="365760"/>
-            <a:ext cx="640080" cy="329184"/>
-          </a:xfrm>
-          <a:prstGeom prst="rect">
-            <a:avLst/>
-          </a:prstGeom>
-          <a:noFill/>
-        </p:spPr>
-        <p:txBody>
-          <a:bodyPr wrap="square" anchor="t" lIns="0" rIns="0" tIns="0" bIns="0"/>
-          <a:lstStyle/>
-          <a:p>
-            <a:pPr algn="l"/>
-            <a:r>
-              <a:rPr sz="1500" b="0" i="0" lang="zh-CN" altLang="en-US">
-                <a:solidFill>
-                  <a:srgbClr val="9E1B1B"/>
-                </a:solidFill>
-                <a:latin typeface="Noto Sans CJK SC Medium"/>
-                <a:ea typeface="Noto Sans CJK SC Medium"/>
-                <a:cs typeface="Noto Sans CJK SC Medium"/>
-              </a:rPr>
-              <a:t>09</a:t>
-            </a:r>
-          </a:p>
-        </p:txBody>
-      </p:sp>
-      <p:sp>
-        <p:nvSpPr>
-          <p:cNvPr id="3" name="TextBox 2"/>
-          <p:cNvSpPr txBox="1"/>
-          <p:nvPr/>
-        </p:nvSpPr>
-        <p:spPr>
-          <a:xfrm>
-            <a:off x="1371600" y="310896"/>
-            <a:ext cx="10058400" cy="438912"/>
-          </a:xfrm>
-          <a:prstGeom prst="rect">
-            <a:avLst/>
-          </a:prstGeom>
-          <a:noFill/>
-        </p:spPr>
-        <p:txBody>
-          <a:bodyPr wrap="square" anchor="t" lIns="0" rIns="0" tIns="0" bIns="0"/>
-          <a:lstStyle/>
-          <a:p>
-            <a:pPr algn="l"/>
-            <a:r>
-              <a:rPr sz="3000" b="0" i="0" lang="zh-CN" altLang="en-US">
-                <a:solidFill>
-                  <a:srgbClr val="141414"/>
-                </a:solidFill>
-                <a:latin typeface="Noto Sans CJK SC Medium"/>
-                <a:ea typeface="Noto Sans CJK SC Medium"/>
-                <a:cs typeface="Noto Sans CJK SC Medium"/>
-              </a:rPr>
-              <a:t>中国产线上就做这四件</a:t>
-            </a:r>
-          </a:p>
-        </p:txBody>
-      </p:sp>
-      <p:sp>
-        <p:nvSpPr>
-          <p:cNvPr id="4" name="Rectangle 3"/>
-          <p:cNvSpPr/>
-          <p:nvPr/>
-        </p:nvSpPr>
-        <p:spPr>
-          <a:xfrm>
-            <a:off x="658368" y="960120"/>
-            <a:ext cx="10881360" cy="10972"/>
-          </a:xfrm>
-          <a:prstGeom prst="rect">
-            <a:avLst/>
-          </a:prstGeom>
-          <a:solidFill>
-            <a:srgbClr val="E2E2E2"/>
-          </a:solidFill>
-          <a:ln>
-            <a:noFill/>
-          </a:ln>
-        </p:spPr>
-        <p:style>
-          <a:lnRef idx="1">
-            <a:schemeClr val="accent1"/>
-          </a:lnRef>
-          <a:fillRef idx="3">
-            <a:schemeClr val="accent1"/>
-          </a:fillRef>
-          <a:effectRef idx="2">
-            <a:schemeClr val="accent1"/>
-          </a:effectRef>
-          <a:fontRef idx="minor">
-            <a:schemeClr val="lt1"/>
-          </a:fontRef>
-        </p:style>
-        <p:txBody>
-          <a:bodyPr rtlCol="0" anchor="ctr"/>
-          <a:lstStyle/>
-          <a:p>
-            <a:pPr algn="ctr"/>
-          </a:p>
-        </p:txBody>
-      </p:sp>
-      <p:sp>
-        <p:nvSpPr>
-          <p:cNvPr id="5" name="TextBox 4"/>
-          <p:cNvSpPr txBox="1"/>
-          <p:nvPr/>
-        </p:nvSpPr>
-        <p:spPr>
-          <a:xfrm>
-            <a:off x="658368" y="1170432"/>
-            <a:ext cx="640080" cy="329184"/>
-          </a:xfrm>
-          <a:prstGeom prst="rect">
-            <a:avLst/>
-          </a:prstGeom>
-          <a:noFill/>
-        </p:spPr>
-        <p:txBody>
-          <a:bodyPr wrap="square" anchor="t" lIns="0" rIns="0" tIns="0" bIns="0"/>
-          <a:lstStyle/>
-          <a:p>
-            <a:pPr algn="l"/>
-            <a:r>
-              <a:rPr sz="1600" b="0" i="0" lang="zh-CN" altLang="en-US">
-                <a:solidFill>
-                  <a:srgbClr val="9E1B1B"/>
-                </a:solidFill>
-                <a:latin typeface="Noto Sans CJK SC Medium"/>
-                <a:ea typeface="Noto Sans CJK SC Medium"/>
-                <a:cs typeface="Noto Sans CJK SC Medium"/>
-              </a:rPr>
-              <a:t>01</a:t>
-            </a:r>
-          </a:p>
-        </p:txBody>
-      </p:sp>
-      <p:sp>
-        <p:nvSpPr>
-          <p:cNvPr id="6" name="TextBox 5"/>
-          <p:cNvSpPr txBox="1"/>
-          <p:nvPr/>
-        </p:nvSpPr>
-        <p:spPr>
-          <a:xfrm>
-            <a:off x="1417320" y="1152144"/>
-            <a:ext cx="9966960" cy="365760"/>
-          </a:xfrm>
-          <a:prstGeom prst="rect">
-            <a:avLst/>
-          </a:prstGeom>
-          <a:noFill/>
-        </p:spPr>
-        <p:txBody>
-          <a:bodyPr wrap="square" anchor="t" lIns="0" rIns="0" tIns="0" bIns="0"/>
-          <a:lstStyle/>
-          <a:p>
-            <a:pPr algn="l"/>
-            <a:r>
-              <a:rPr sz="2200" b="0" i="0" lang="zh-CN" altLang="en-US">
-                <a:solidFill>
-                  <a:srgbClr val="141414"/>
-                </a:solidFill>
-                <a:latin typeface="Noto Sans CJK SC Medium"/>
-                <a:ea typeface="Noto Sans CJK SC Medium"/>
-                <a:cs typeface="Noto Sans CJK SC Medium"/>
-              </a:rPr>
-              <a:t>一个模具做大</a:t>
-            </a:r>
-          </a:p>
-        </p:txBody>
-      </p:sp>
-      <p:sp>
-        <p:nvSpPr>
-          <p:cNvPr id="7" name="TextBox 6"/>
-          <p:cNvSpPr txBox="1"/>
-          <p:nvPr/>
-        </p:nvSpPr>
-        <p:spPr>
-          <a:xfrm>
-            <a:off x="1417320" y="1554480"/>
-            <a:ext cx="9966960" cy="640080"/>
-          </a:xfrm>
-          <a:prstGeom prst="rect">
-            <a:avLst/>
-          </a:prstGeom>
-          <a:noFill/>
-        </p:spPr>
-        <p:txBody>
-          <a:bodyPr wrap="square" anchor="t" lIns="0" rIns="0" tIns="0" bIns="0"/>
-          <a:lstStyle/>
-          <a:p>
-            <a:pPr algn="l"/>
-            <a:r>
-              <a:rPr sz="1500" b="0" i="0" lang="zh-CN" altLang="en-US">
-                <a:solidFill>
-                  <a:srgbClr val="2C2C2C"/>
-                </a:solidFill>
-                <a:latin typeface="Noto Sans CJK SC"/>
-                <a:ea typeface="Noto Sans CJK SC"/>
-                <a:cs typeface="Noto Sans CJK SC"/>
-              </a:rPr>
-              <a:t>牙刷造型不改。腔数做大，机器换大，原料买吨袋，付现金。再换一个造型，腔数就做不大。</a:t>
-            </a:r>
-          </a:p>
-        </p:txBody>
-      </p:sp>
-      <p:sp>
-        <p:nvSpPr>
-          <p:cNvPr id="8" name="TextBox 7"/>
-          <p:cNvSpPr txBox="1"/>
-          <p:nvPr/>
-        </p:nvSpPr>
-        <p:spPr>
-          <a:xfrm>
-            <a:off x="658368" y="2377440"/>
-            <a:ext cx="640080" cy="329184"/>
-          </a:xfrm>
-          <a:prstGeom prst="rect">
-            <a:avLst/>
-          </a:prstGeom>
-          <a:noFill/>
-        </p:spPr>
-        <p:txBody>
-          <a:bodyPr wrap="square" anchor="t" lIns="0" rIns="0" tIns="0" bIns="0"/>
-          <a:lstStyle/>
-          <a:p>
-            <a:pPr algn="l"/>
-            <a:r>
-              <a:rPr sz="1600" b="0" i="0" lang="zh-CN" altLang="en-US">
-                <a:solidFill>
-                  <a:srgbClr val="9E1B1B"/>
-                </a:solidFill>
-                <a:latin typeface="Noto Sans CJK SC Medium"/>
-                <a:ea typeface="Noto Sans CJK SC Medium"/>
-                <a:cs typeface="Noto Sans CJK SC Medium"/>
-              </a:rPr>
-              <a:t>02</a:t>
-            </a:r>
-          </a:p>
-        </p:txBody>
-      </p:sp>
-      <p:sp>
-        <p:nvSpPr>
-          <p:cNvPr id="9" name="TextBox 8"/>
-          <p:cNvSpPr txBox="1"/>
-          <p:nvPr/>
-        </p:nvSpPr>
-        <p:spPr>
-          <a:xfrm>
-            <a:off x="1417320" y="2359152"/>
-            <a:ext cx="9966960" cy="365760"/>
-          </a:xfrm>
-          <a:prstGeom prst="rect">
-            <a:avLst/>
-          </a:prstGeom>
-          <a:noFill/>
-        </p:spPr>
-        <p:txBody>
-          <a:bodyPr wrap="square" anchor="t" lIns="0" rIns="0" tIns="0" bIns="0"/>
-          <a:lstStyle/>
-          <a:p>
-            <a:pPr algn="l"/>
-            <a:r>
-              <a:rPr sz="2200" b="0" i="0" lang="zh-CN" altLang="en-US">
-                <a:solidFill>
-                  <a:srgbClr val="141414"/>
-                </a:solidFill>
-                <a:latin typeface="Noto Sans CJK SC Medium"/>
-                <a:ea typeface="Noto Sans CJK SC Medium"/>
-                <a:cs typeface="Noto Sans CJK SC Medium"/>
-              </a:rPr>
-              <a:t>一种配方，罐子不洗</a:t>
-            </a:r>
-          </a:p>
-        </p:txBody>
-      </p:sp>
-      <p:sp>
-        <p:nvSpPr>
-          <p:cNvPr id="10" name="TextBox 9"/>
-          <p:cNvSpPr txBox="1"/>
-          <p:nvPr/>
-        </p:nvSpPr>
-        <p:spPr>
-          <a:xfrm>
-            <a:off x="1417320" y="2761488"/>
-            <a:ext cx="9966960" cy="640080"/>
-          </a:xfrm>
-          <a:prstGeom prst="rect">
-            <a:avLst/>
-          </a:prstGeom>
-          <a:noFill/>
-        </p:spPr>
-        <p:txBody>
-          <a:bodyPr wrap="square" anchor="t" lIns="0" rIns="0" tIns="0" bIns="0"/>
-          <a:lstStyle/>
-          <a:p>
-            <a:pPr algn="l"/>
-            <a:r>
-              <a:rPr sz="1500" b="0" i="0" lang="zh-CN" altLang="en-US">
-                <a:solidFill>
-                  <a:srgbClr val="2C2C2C"/>
-                </a:solidFill>
-                <a:latin typeface="Noto Sans CJK SC"/>
-                <a:ea typeface="Noto Sans CJK SC"/>
-                <a:cs typeface="Noto Sans CJK SC"/>
-              </a:rPr>
-              <a:t>洗发水四五款并成一款。换料和清洗都在多款里。再加一个口味，清洗就回来。</a:t>
-            </a:r>
-          </a:p>
-        </p:txBody>
-      </p:sp>
-      <p:sp>
-        <p:nvSpPr>
-          <p:cNvPr id="11" name="TextBox 10"/>
-          <p:cNvSpPr txBox="1"/>
-          <p:nvPr/>
-        </p:nvSpPr>
-        <p:spPr>
-          <a:xfrm>
-            <a:off x="658368" y="3584448"/>
-            <a:ext cx="640080" cy="329184"/>
-          </a:xfrm>
-          <a:prstGeom prst="rect">
-            <a:avLst/>
-          </a:prstGeom>
-          <a:noFill/>
-        </p:spPr>
-        <p:txBody>
-          <a:bodyPr wrap="square" anchor="t" lIns="0" rIns="0" tIns="0" bIns="0"/>
-          <a:lstStyle/>
-          <a:p>
-            <a:pPr algn="l"/>
-            <a:r>
-              <a:rPr sz="1600" b="0" i="0" lang="zh-CN" altLang="en-US">
-                <a:solidFill>
-                  <a:srgbClr val="9E1B1B"/>
-                </a:solidFill>
-                <a:latin typeface="Noto Sans CJK SC Medium"/>
-                <a:ea typeface="Noto Sans CJK SC Medium"/>
-                <a:cs typeface="Noto Sans CJK SC Medium"/>
-              </a:rPr>
-              <a:t>03</a:t>
-            </a:r>
-          </a:p>
-        </p:txBody>
-      </p:sp>
-      <p:sp>
-        <p:nvSpPr>
-          <p:cNvPr id="12" name="TextBox 11"/>
-          <p:cNvSpPr txBox="1"/>
-          <p:nvPr/>
-        </p:nvSpPr>
-        <p:spPr>
-          <a:xfrm>
-            <a:off x="1417320" y="3566160"/>
-            <a:ext cx="9966960" cy="365760"/>
-          </a:xfrm>
-          <a:prstGeom prst="rect">
-            <a:avLst/>
-          </a:prstGeom>
-          <a:noFill/>
-        </p:spPr>
-        <p:txBody>
-          <a:bodyPr wrap="square" anchor="t" lIns="0" rIns="0" tIns="0" bIns="0"/>
-          <a:lstStyle/>
-          <a:p>
-            <a:pPr algn="l"/>
-            <a:r>
-              <a:rPr sz="2200" b="0" i="0" lang="zh-CN" altLang="en-US">
-                <a:solidFill>
-                  <a:srgbClr val="141414"/>
-                </a:solidFill>
-                <a:latin typeface="Noto Sans CJK SC Medium"/>
-                <a:ea typeface="Noto Sans CJK SC Medium"/>
-                <a:cs typeface="Noto Sans CJK SC Medium"/>
-              </a:rPr>
-              <a:t>罐子做大，人还是一个</a:t>
-            </a:r>
-          </a:p>
-        </p:txBody>
-      </p:sp>
-      <p:sp>
-        <p:nvSpPr>
-          <p:cNvPr id="13" name="TextBox 12"/>
-          <p:cNvSpPr txBox="1"/>
-          <p:nvPr/>
-        </p:nvSpPr>
-        <p:spPr>
-          <a:xfrm>
-            <a:off x="1417320" y="3968496"/>
-            <a:ext cx="9966960" cy="640080"/>
-          </a:xfrm>
-          <a:prstGeom prst="rect">
-            <a:avLst/>
-          </a:prstGeom>
-          <a:noFill/>
-        </p:spPr>
-        <p:txBody>
-          <a:bodyPr wrap="square" anchor="t" lIns="0" rIns="0" tIns="0" bIns="0"/>
-          <a:lstStyle/>
-          <a:p>
-            <a:pPr algn="l"/>
-            <a:r>
-              <a:rPr sz="1500" b="0" i="0" lang="zh-CN" altLang="en-US">
-                <a:solidFill>
-                  <a:srgbClr val="2C2C2C"/>
-                </a:solidFill>
-                <a:latin typeface="Noto Sans CJK SC"/>
-                <a:ea typeface="Noto Sans CJK SC"/>
-                <a:cs typeface="Noto Sans CJK SC"/>
-              </a:rPr>
-              <a:t>萃取罐从 0.5 吨做到 18 吨，三十六倍，操作的人仍是一个。要推的是这只罐子，不是多找几家小厂。</a:t>
-            </a:r>
-          </a:p>
-        </p:txBody>
-      </p:sp>
-      <p:sp>
-        <p:nvSpPr>
-          <p:cNvPr id="14" name="TextBox 13"/>
-          <p:cNvSpPr txBox="1"/>
-          <p:nvPr/>
-        </p:nvSpPr>
-        <p:spPr>
-          <a:xfrm>
-            <a:off x="658368" y="4791456"/>
-            <a:ext cx="640080" cy="329184"/>
-          </a:xfrm>
-          <a:prstGeom prst="rect">
-            <a:avLst/>
-          </a:prstGeom>
-          <a:noFill/>
-        </p:spPr>
-        <p:txBody>
-          <a:bodyPr wrap="square" anchor="t" lIns="0" rIns="0" tIns="0" bIns="0"/>
-          <a:lstStyle/>
-          <a:p>
-            <a:pPr algn="l"/>
-            <a:r>
-              <a:rPr sz="1600" b="0" i="0" lang="zh-CN" altLang="en-US">
-                <a:solidFill>
-                  <a:srgbClr val="9E1B1B"/>
-                </a:solidFill>
-                <a:latin typeface="Noto Sans CJK SC Medium"/>
-                <a:ea typeface="Noto Sans CJK SC Medium"/>
-                <a:cs typeface="Noto Sans CJK SC Medium"/>
-              </a:rPr>
-              <a:t>04</a:t>
-            </a:r>
-          </a:p>
-        </p:txBody>
-      </p:sp>
-      <p:sp>
-        <p:nvSpPr>
-          <p:cNvPr id="15" name="TextBox 14"/>
-          <p:cNvSpPr txBox="1"/>
-          <p:nvPr/>
-        </p:nvSpPr>
-        <p:spPr>
-          <a:xfrm>
-            <a:off x="1417320" y="4773168"/>
-            <a:ext cx="9966960" cy="365760"/>
-          </a:xfrm>
-          <a:prstGeom prst="rect">
-            <a:avLst/>
-          </a:prstGeom>
-          <a:noFill/>
-        </p:spPr>
-        <p:txBody>
-          <a:bodyPr wrap="square" anchor="t" lIns="0" rIns="0" tIns="0" bIns="0"/>
-          <a:lstStyle/>
-          <a:p>
-            <a:pPr algn="l"/>
-            <a:r>
-              <a:rPr sz="2200" b="0" i="0" lang="zh-CN" altLang="en-US">
-                <a:solidFill>
-                  <a:srgbClr val="141414"/>
-                </a:solidFill>
-                <a:latin typeface="Noto Sans CJK SC Medium"/>
-                <a:ea typeface="Noto Sans CJK SC Medium"/>
-                <a:cs typeface="Noto Sans CJK SC Medium"/>
-              </a:rPr>
-              <a:t>鲜品进罐</a:t>
-            </a:r>
-          </a:p>
-        </p:txBody>
-      </p:sp>
-      <p:sp>
-        <p:nvSpPr>
-          <p:cNvPr id="16" name="TextBox 15"/>
-          <p:cNvSpPr txBox="1"/>
-          <p:nvPr/>
-        </p:nvSpPr>
-        <p:spPr>
-          <a:xfrm>
-            <a:off x="1417320" y="5175504"/>
-            <a:ext cx="9966960" cy="640080"/>
-          </a:xfrm>
-          <a:prstGeom prst="rect">
-            <a:avLst/>
-          </a:prstGeom>
-          <a:noFill/>
-        </p:spPr>
-        <p:txBody>
-          <a:bodyPr wrap="square" anchor="t" lIns="0" rIns="0" tIns="0" bIns="0"/>
-          <a:lstStyle/>
-          <a:p>
-            <a:pPr algn="l"/>
-            <a:r>
-              <a:rPr sz="1500" b="0" i="0" lang="zh-CN" altLang="en-US">
-                <a:solidFill>
-                  <a:srgbClr val="2C2C2C"/>
-                </a:solidFill>
-                <a:latin typeface="Noto Sans CJK SC"/>
-                <a:ea typeface="Noto Sans CJK SC"/>
-                <a:cs typeface="Noto Sans CJK SC"/>
-              </a:rPr>
-              <a:t>川芎、当归、白芍洗净直接煮。干燥和切断是按克卖药才有的。中国法人在产地守的是这一步。</a:t>
-            </a:r>
-          </a:p>
-        </p:txBody>
-      </p:sp>
-      <p:sp>
-        <p:nvSpPr>
-          <p:cNvPr id="17" name="Rectangle 16"/>
-          <p:cNvSpPr/>
-          <p:nvPr/>
-        </p:nvSpPr>
-        <p:spPr>
-          <a:xfrm>
-            <a:off x="658368" y="5760720"/>
-            <a:ext cx="10881360" cy="10972"/>
-          </a:xfrm>
-          <a:prstGeom prst="rect">
-            <a:avLst/>
-          </a:prstGeom>
-          <a:solidFill>
-            <a:srgbClr val="E2E2E2"/>
-          </a:solidFill>
-          <a:ln>
-            <a:noFill/>
-          </a:ln>
-        </p:spPr>
-        <p:style>
-          <a:lnRef idx="1">
-            <a:schemeClr val="accent1"/>
-          </a:lnRef>
-          <a:fillRef idx="3">
-            <a:schemeClr val="accent1"/>
-          </a:fillRef>
-          <a:effectRef idx="2">
-            <a:schemeClr val="accent1"/>
-          </a:effectRef>
-          <a:fontRef idx="minor">
-            <a:schemeClr val="lt1"/>
-          </a:fontRef>
-        </p:style>
-        <p:txBody>
-          <a:bodyPr rtlCol="0" anchor="ctr"/>
-          <a:lstStyle/>
-          <a:p>
-            <a:pPr algn="ctr"/>
-          </a:p>
-        </p:txBody>
-      </p:sp>
-      <p:sp>
-        <p:nvSpPr>
-          <p:cNvPr id="18" name="TextBox 17"/>
-          <p:cNvSpPr txBox="1"/>
-          <p:nvPr/>
-        </p:nvSpPr>
-        <p:spPr>
-          <a:xfrm>
-            <a:off x="658368" y="5870448"/>
-            <a:ext cx="10789920" cy="457200"/>
-          </a:xfrm>
-          <a:prstGeom prst="rect">
-            <a:avLst/>
-          </a:prstGeom>
-          <a:noFill/>
-        </p:spPr>
-        <p:txBody>
-          <a:bodyPr wrap="square" anchor="t" lIns="0" rIns="0" tIns="0" bIns="0"/>
-          <a:lstStyle/>
-          <a:p>
-            <a:pPr algn="l"/>
-            <a:r>
-              <a:rPr sz="1800" b="0" i="0" lang="zh-CN" altLang="en-US">
-                <a:solidFill>
-                  <a:srgbClr val="9E1B1B"/>
-                </a:solidFill>
-                <a:latin typeface="Noto Sans CJK SC Medium"/>
-                <a:ea typeface="Noto Sans CJK SC Medium"/>
-                <a:cs typeface="Noto Sans CJK SC Medium"/>
-              </a:rPr>
-              <a:t>谈运费，谁都会。这四件，只有一贯工程才会做。</a:t>
-            </a:r>
-          </a:p>
-        </p:txBody>
-      </p:sp>
-      <p:sp>
-        <p:nvSpPr>
-          <p:cNvPr id="19" name="TextBox 18"/>
-          <p:cNvSpPr txBox="1"/>
-          <p:nvPr/>
-        </p:nvSpPr>
-        <p:spPr>
-          <a:xfrm>
-            <a:off x="10561320" y="6492240"/>
-            <a:ext cx="1051560" cy="201168"/>
-          </a:xfrm>
-          <a:prstGeom prst="rect">
-            <a:avLst/>
-          </a:prstGeom>
-          <a:noFill/>
-        </p:spPr>
-        <p:txBody>
-          <a:bodyPr wrap="square" anchor="t" lIns="0" rIns="0" tIns="0" bIns="0"/>
-          <a:lstStyle/>
-          <a:p>
-            <a:pPr algn="r"/>
-            <a:r>
-              <a:rPr sz="1100" b="0" i="0" lang="zh-CN" altLang="en-US">
-                <a:solidFill>
-                  <a:srgbClr val="C8C8C8"/>
-                </a:solidFill>
-                <a:latin typeface="Noto Sans CJK SC"/>
-                <a:ea typeface="Noto Sans CJK SC"/>
-                <a:cs typeface="Noto Sans CJK SC"/>
-              </a:rPr>
-              <a:t>10</a:t>
-            </a:r>
-          </a:p>
-        </p:txBody>
-      </p:sp>
-    </p:spTree>
-  </p:cSld>
-  <p:clrMapOvr>
-    <a:masterClrMapping/>
-  </p:clrMapOvr>
-</p:sld>
-</file>
-
-<file path=ppt/slides/slide11.xml><?xml version="1.0" encoding="utf-8"?>
-<p:sld xmlns:a="http://schemas.openxmlformats.org/drawingml/2006/main" xmlns:p="http://schemas.openxmlformats.org/presentationml/2006/main" xmlns:r="http://schemas.openxmlformats.org/officeDocument/2006/relationships">
-  <p:cSld>
-    <p:bg>
-      <p:bgPr>
-        <a:solidFill>
-          <a:srgbClr val="FFFFFF"/>
-        </a:solidFill>
-        <a:effectLst/>
-      </p:bgPr>
-    </p:bg>
-    <p:spTree>
-      <p:nvGrpSpPr>
-        <p:cNvPr id="1" name=""/>
-        <p:cNvGrpSpPr/>
-        <p:nvPr/>
-      </p:nvGrpSpPr>
-      <p:grpSpPr/>
-      <p:sp>
-        <p:nvSpPr>
-          <p:cNvPr id="2" name="TextBox 1"/>
-          <p:cNvSpPr txBox="1"/>
-          <p:nvPr/>
-        </p:nvSpPr>
-        <p:spPr>
-          <a:xfrm>
-            <a:off x="658368" y="365760"/>
-            <a:ext cx="640080" cy="329184"/>
-          </a:xfrm>
-          <a:prstGeom prst="rect">
-            <a:avLst/>
-          </a:prstGeom>
-          <a:noFill/>
-        </p:spPr>
-        <p:txBody>
-          <a:bodyPr wrap="square" anchor="t" lIns="0" rIns="0" tIns="0" bIns="0"/>
-          <a:lstStyle/>
-          <a:p>
-            <a:pPr algn="l"/>
-            <a:r>
-              <a:rPr sz="1500" b="0" i="0" lang="zh-CN" altLang="en-US">
-                <a:solidFill>
-                  <a:srgbClr val="9E1B1B"/>
-                </a:solidFill>
-                <a:latin typeface="Noto Sans CJK SC Medium"/>
-                <a:ea typeface="Noto Sans CJK SC Medium"/>
-                <a:cs typeface="Noto Sans CJK SC Medium"/>
-              </a:rPr>
-              <a:t>10</a:t>
-            </a:r>
-          </a:p>
-        </p:txBody>
-      </p:sp>
-      <p:sp>
-        <p:nvSpPr>
-          <p:cNvPr id="3" name="TextBox 2"/>
-          <p:cNvSpPr txBox="1"/>
-          <p:nvPr/>
-        </p:nvSpPr>
-        <p:spPr>
-          <a:xfrm>
-            <a:off x="1371600" y="310896"/>
-            <a:ext cx="10058400" cy="438912"/>
-          </a:xfrm>
-          <a:prstGeom prst="rect">
-            <a:avLst/>
-          </a:prstGeom>
-          <a:noFill/>
-        </p:spPr>
-        <p:txBody>
-          <a:bodyPr wrap="square" anchor="t" lIns="0" rIns="0" tIns="0" bIns="0"/>
-          <a:lstStyle/>
-          <a:p>
-            <a:pPr algn="l"/>
-            <a:r>
-              <a:rPr sz="3000" b="0" i="0" lang="zh-CN" altLang="en-US">
-                <a:solidFill>
-                  <a:srgbClr val="141414"/>
-                </a:solidFill>
-                <a:latin typeface="Noto Sans CJK SC Medium"/>
-                <a:ea typeface="Noto Sans CJK SC Medium"/>
-                <a:cs typeface="Noto Sans CJK SC Medium"/>
-              </a:rPr>
-              <a:t>烟台先查这四条线</a:t>
-            </a:r>
-          </a:p>
-        </p:txBody>
-      </p:sp>
-      <p:sp>
-        <p:nvSpPr>
-          <p:cNvPr id="4" name="Rectangle 3"/>
-          <p:cNvSpPr/>
-          <p:nvPr/>
-        </p:nvSpPr>
-        <p:spPr>
-          <a:xfrm>
-            <a:off x="658368" y="960120"/>
-            <a:ext cx="10881360" cy="10972"/>
-          </a:xfrm>
-          <a:prstGeom prst="rect">
-            <a:avLst/>
-          </a:prstGeom>
-          <a:solidFill>
-            <a:srgbClr val="E2E2E2"/>
-          </a:solidFill>
-          <a:ln>
-            <a:noFill/>
-          </a:ln>
-        </p:spPr>
-        <p:style>
-          <a:lnRef idx="1">
-            <a:schemeClr val="accent1"/>
-          </a:lnRef>
-          <a:fillRef idx="3">
-            <a:schemeClr val="accent1"/>
-          </a:fillRef>
-          <a:effectRef idx="2">
-            <a:schemeClr val="accent1"/>
-          </a:effectRef>
-          <a:fontRef idx="minor">
-            <a:schemeClr val="lt1"/>
-          </a:fontRef>
-        </p:style>
-        <p:txBody>
-          <a:bodyPr rtlCol="0" anchor="ctr"/>
-          <a:lstStyle/>
-          <a:p>
-            <a:pPr algn="ctr"/>
-          </a:p>
-        </p:txBody>
-      </p:sp>
-      <p:sp>
-        <p:nvSpPr>
-          <p:cNvPr id="5" name="TextBox 4"/>
-          <p:cNvSpPr txBox="1"/>
-          <p:nvPr/>
-        </p:nvSpPr>
-        <p:spPr>
-          <a:xfrm>
-            <a:off x="658368" y="1143000"/>
-            <a:ext cx="2743200" cy="274320"/>
-          </a:xfrm>
-          <a:prstGeom prst="rect">
-            <a:avLst/>
-          </a:prstGeom>
-          <a:noFill/>
-        </p:spPr>
-        <p:txBody>
-          <a:bodyPr wrap="square" anchor="t" lIns="0" rIns="0" tIns="0" bIns="0"/>
-          <a:lstStyle/>
-          <a:p>
-            <a:pPr algn="l"/>
-            <a:r>
-              <a:rPr sz="1300" b="0" i="0" lang="zh-CN" altLang="en-US">
-                <a:solidFill>
-                  <a:srgbClr val="6A6A6A"/>
-                </a:solidFill>
-                <a:latin typeface="Noto Sans CJK SC"/>
-                <a:ea typeface="Noto Sans CJK SC"/>
-                <a:cs typeface="Noto Sans CJK SC"/>
-              </a:rPr>
-              <a:t>线</a:t>
-            </a:r>
-          </a:p>
-        </p:txBody>
-      </p:sp>
-      <p:sp>
-        <p:nvSpPr>
-          <p:cNvPr id="6" name="TextBox 5"/>
-          <p:cNvSpPr txBox="1"/>
-          <p:nvPr/>
-        </p:nvSpPr>
-        <p:spPr>
-          <a:xfrm>
-            <a:off x="3383280" y="1143000"/>
-            <a:ext cx="4572000" cy="274320"/>
-          </a:xfrm>
-          <a:prstGeom prst="rect">
-            <a:avLst/>
-          </a:prstGeom>
-          <a:noFill/>
-        </p:spPr>
-        <p:txBody>
-          <a:bodyPr wrap="square" anchor="t" lIns="0" rIns="0" tIns="0" bIns="0"/>
-          <a:lstStyle/>
-          <a:p>
-            <a:pPr algn="l"/>
-            <a:r>
-              <a:rPr sz="1300" b="0" i="0" lang="zh-CN" altLang="en-US">
-                <a:solidFill>
-                  <a:srgbClr val="6A6A6A"/>
-                </a:solidFill>
-                <a:latin typeface="Noto Sans CJK SC"/>
-                <a:ea typeface="Noto Sans CJK SC"/>
-                <a:cs typeface="Noto Sans CJK SC"/>
-              </a:rPr>
-              <a:t>查什么</a:t>
-            </a:r>
-          </a:p>
-        </p:txBody>
-      </p:sp>
-      <p:sp>
-        <p:nvSpPr>
-          <p:cNvPr id="7" name="TextBox 6"/>
-          <p:cNvSpPr txBox="1"/>
-          <p:nvPr/>
-        </p:nvSpPr>
-        <p:spPr>
-          <a:xfrm>
-            <a:off x="8732520" y="1143000"/>
-            <a:ext cx="2926080" cy="274320"/>
-          </a:xfrm>
-          <a:prstGeom prst="rect">
-            <a:avLst/>
-          </a:prstGeom>
-          <a:noFill/>
-        </p:spPr>
-        <p:txBody>
-          <a:bodyPr wrap="square" anchor="t" lIns="0" rIns="0" tIns="0" bIns="0"/>
-          <a:lstStyle/>
-          <a:p>
-            <a:pPr algn="l"/>
-            <a:r>
-              <a:rPr sz="1300" b="0" i="0" lang="zh-CN" altLang="en-US">
-                <a:solidFill>
-                  <a:srgbClr val="6A6A6A"/>
-                </a:solidFill>
-                <a:latin typeface="Noto Sans CJK SC"/>
-                <a:ea typeface="Noto Sans CJK SC"/>
-                <a:cs typeface="Noto Sans CJK SC"/>
-              </a:rPr>
-              <a:t>交出什么</a:t>
-            </a:r>
-          </a:p>
-        </p:txBody>
-      </p:sp>
-      <p:sp>
-        <p:nvSpPr>
-          <p:cNvPr id="8" name="Rectangle 7"/>
-          <p:cNvSpPr/>
-          <p:nvPr/>
-        </p:nvSpPr>
-        <p:spPr>
-          <a:xfrm>
-            <a:off x="658368" y="1408176"/>
-            <a:ext cx="10881360" cy="9144"/>
-          </a:xfrm>
-          <a:prstGeom prst="rect">
-            <a:avLst/>
-          </a:prstGeom>
-          <a:solidFill>
-            <a:srgbClr val="E2E2E2"/>
-          </a:solidFill>
-          <a:ln>
-            <a:noFill/>
-          </a:ln>
-        </p:spPr>
-        <p:style>
-          <a:lnRef idx="1">
-            <a:schemeClr val="accent1"/>
-          </a:lnRef>
-          <a:fillRef idx="3">
-            <a:schemeClr val="accent1"/>
-          </a:fillRef>
-          <a:effectRef idx="2">
-            <a:schemeClr val="accent1"/>
-          </a:effectRef>
-          <a:fontRef idx="minor">
-            <a:schemeClr val="lt1"/>
-          </a:fontRef>
-        </p:style>
-        <p:txBody>
-          <a:bodyPr rtlCol="0" anchor="ctr"/>
-          <a:lstStyle/>
-          <a:p>
-            <a:pPr algn="ctr"/>
-          </a:p>
-        </p:txBody>
-      </p:sp>
-      <p:sp>
-        <p:nvSpPr>
-          <p:cNvPr id="9" name="TextBox 8"/>
-          <p:cNvSpPr txBox="1"/>
-          <p:nvPr/>
-        </p:nvSpPr>
-        <p:spPr>
-          <a:xfrm>
-            <a:off x="658368" y="1481328"/>
-            <a:ext cx="2651760" cy="365760"/>
-          </a:xfrm>
-          <a:prstGeom prst="rect">
-            <a:avLst/>
-          </a:prstGeom>
-          <a:noFill/>
-        </p:spPr>
-        <p:txBody>
-          <a:bodyPr wrap="square" anchor="t" lIns="0" rIns="0" tIns="0" bIns="0"/>
-          <a:lstStyle/>
-          <a:p>
-            <a:pPr algn="l"/>
-            <a:r>
-              <a:rPr sz="2000" b="0" i="0" lang="zh-CN" altLang="en-US">
-                <a:solidFill>
-                  <a:srgbClr val="141414"/>
-                </a:solidFill>
-                <a:latin typeface="Noto Sans CJK SC Medium"/>
-                <a:ea typeface="Noto Sans CJK SC Medium"/>
-                <a:cs typeface="Noto Sans CJK SC Medium"/>
-              </a:rPr>
-              <a:t>牙刷</a:t>
-            </a:r>
-          </a:p>
-        </p:txBody>
-      </p:sp>
-      <p:sp>
-        <p:nvSpPr>
-          <p:cNvPr id="10" name="TextBox 9"/>
-          <p:cNvSpPr txBox="1"/>
-          <p:nvPr/>
-        </p:nvSpPr>
-        <p:spPr>
-          <a:xfrm>
-            <a:off x="658368" y="1865376"/>
-            <a:ext cx="2651760" cy="457200"/>
-          </a:xfrm>
-          <a:prstGeom prst="rect">
-            <a:avLst/>
-          </a:prstGeom>
-          <a:noFill/>
-        </p:spPr>
-        <p:txBody>
-          <a:bodyPr wrap="square" anchor="t" lIns="0" rIns="0" tIns="0" bIns="0"/>
-          <a:lstStyle/>
-          <a:p>
-            <a:pPr algn="l"/>
-            <a:r>
-              <a:rPr sz="1200" b="0" i="0" lang="zh-CN" altLang="en-US">
-                <a:solidFill>
-                  <a:srgbClr val="6A6A6A"/>
-                </a:solidFill>
-                <a:latin typeface="Noto Sans CJK SC"/>
-                <a:ea typeface="Noto Sans CJK SC"/>
-                <a:cs typeface="Noto Sans CJK SC"/>
-              </a:rPr>
-              <a:t>烟台工厂造</a:t>
-            </a:r>
-          </a:p>
-        </p:txBody>
-      </p:sp>
-      <p:sp>
-        <p:nvSpPr>
-          <p:cNvPr id="11" name="TextBox 10"/>
-          <p:cNvSpPr txBox="1"/>
-          <p:nvPr/>
-        </p:nvSpPr>
-        <p:spPr>
-          <a:xfrm>
-            <a:off x="3383280" y="1481328"/>
-            <a:ext cx="5120640" cy="868680"/>
-          </a:xfrm>
-          <a:prstGeom prst="rect">
-            <a:avLst/>
-          </a:prstGeom>
-          <a:noFill/>
-        </p:spPr>
-        <p:txBody>
-          <a:bodyPr wrap="square" anchor="t" lIns="0" rIns="0" tIns="0" bIns="0"/>
-          <a:lstStyle/>
-          <a:p>
-            <a:pPr algn="l">
-              <a:lnSpc>
-                <a:spcPct val="130000"/>
-              </a:lnSpc>
-            </a:pPr>
-            <a:r>
-              <a:rPr sz="1500" b="0" i="0" lang="zh-CN" altLang="en-US">
-                <a:solidFill>
-                  <a:srgbClr val="2C2C2C"/>
-                </a:solidFill>
-                <a:latin typeface="Noto Sans CJK SC"/>
-                <a:ea typeface="Noto Sans CJK SC"/>
-                <a:cs typeface="Noto Sans CJK SC"/>
-              </a:rPr>
-              <a:t>型号几款；模具几腔；
-原料是袋装还是吨袋；
-付现金还是赊账。</a:t>
-            </a:r>
-          </a:p>
-        </p:txBody>
-      </p:sp>
-      <p:sp>
-        <p:nvSpPr>
-          <p:cNvPr id="12" name="TextBox 11"/>
-          <p:cNvSpPr txBox="1"/>
-          <p:nvPr/>
-        </p:nvSpPr>
-        <p:spPr>
-          <a:xfrm>
-            <a:off x="8732520" y="1481328"/>
-            <a:ext cx="2926080" cy="868680"/>
-          </a:xfrm>
-          <a:prstGeom prst="rect">
-            <a:avLst/>
-          </a:prstGeom>
-          <a:noFill/>
-        </p:spPr>
-        <p:txBody>
-          <a:bodyPr wrap="square" anchor="t" lIns="0" rIns="0" tIns="0" bIns="0"/>
-          <a:lstStyle/>
-          <a:p>
-            <a:pPr algn="l">
-              <a:lnSpc>
-                <a:spcPct val="130000"/>
-              </a:lnSpc>
-            </a:pPr>
-            <a:r>
-              <a:rPr sz="1500" b="0" i="0" lang="zh-CN" altLang="en-US">
-                <a:solidFill>
-                  <a:srgbClr val="2C2C2C"/>
-                </a:solidFill>
-                <a:latin typeface="Noto Sans CJK SC"/>
-                <a:ea typeface="Noto Sans CJK SC"/>
-                <a:cs typeface="Noto Sans CJK SC"/>
-              </a:rPr>
-              <a:t>缺哪几项，
-按总部标准列出。</a:t>
-            </a:r>
-          </a:p>
-        </p:txBody>
-      </p:sp>
-      <p:sp>
-        <p:nvSpPr>
-          <p:cNvPr id="13" name="Rectangle 12"/>
-          <p:cNvSpPr/>
-          <p:nvPr/>
-        </p:nvSpPr>
-        <p:spPr>
-          <a:xfrm>
-            <a:off x="658368" y="2386584"/>
-            <a:ext cx="10881360" cy="9144"/>
-          </a:xfrm>
-          <a:prstGeom prst="rect">
-            <a:avLst/>
-          </a:prstGeom>
-          <a:solidFill>
-            <a:srgbClr val="E2E2E2"/>
-          </a:solidFill>
-          <a:ln>
-            <a:noFill/>
-          </a:ln>
-        </p:spPr>
-        <p:style>
-          <a:lnRef idx="1">
-            <a:schemeClr val="accent1"/>
-          </a:lnRef>
-          <a:fillRef idx="3">
-            <a:schemeClr val="accent1"/>
-          </a:fillRef>
-          <a:effectRef idx="2">
-            <a:schemeClr val="accent1"/>
-          </a:effectRef>
-          <a:fontRef idx="minor">
-            <a:schemeClr val="lt1"/>
-          </a:fontRef>
-        </p:style>
-        <p:txBody>
-          <a:bodyPr rtlCol="0" anchor="ctr"/>
-          <a:lstStyle/>
-          <a:p>
-            <a:pPr algn="ctr"/>
-          </a:p>
-        </p:txBody>
-      </p:sp>
-      <p:sp>
-        <p:nvSpPr>
-          <p:cNvPr id="14" name="TextBox 13"/>
-          <p:cNvSpPr txBox="1"/>
-          <p:nvPr/>
-        </p:nvSpPr>
-        <p:spPr>
-          <a:xfrm>
-            <a:off x="658368" y="2459736"/>
-            <a:ext cx="2651760" cy="365760"/>
-          </a:xfrm>
-          <a:prstGeom prst="rect">
-            <a:avLst/>
-          </a:prstGeom>
-          <a:noFill/>
-        </p:spPr>
-        <p:txBody>
-          <a:bodyPr wrap="square" anchor="t" lIns="0" rIns="0" tIns="0" bIns="0"/>
-          <a:lstStyle/>
-          <a:p>
-            <a:pPr algn="l"/>
-            <a:r>
-              <a:rPr sz="2000" b="0" i="0" lang="zh-CN" altLang="en-US">
-                <a:solidFill>
-                  <a:srgbClr val="141414"/>
-                </a:solidFill>
-                <a:latin typeface="Noto Sans CJK SC Medium"/>
-                <a:ea typeface="Noto Sans CJK SC Medium"/>
-                <a:cs typeface="Noto Sans CJK SC Medium"/>
-              </a:rPr>
-              <a:t>厨具</a:t>
-            </a:r>
-          </a:p>
-        </p:txBody>
-      </p:sp>
-      <p:sp>
-        <p:nvSpPr>
-          <p:cNvPr id="15" name="TextBox 14"/>
-          <p:cNvSpPr txBox="1"/>
-          <p:nvPr/>
-        </p:nvSpPr>
-        <p:spPr>
-          <a:xfrm>
-            <a:off x="658368" y="2843784"/>
-            <a:ext cx="2651760" cy="457200"/>
-          </a:xfrm>
-          <a:prstGeom prst="rect">
-            <a:avLst/>
-          </a:prstGeom>
-          <a:noFill/>
-        </p:spPr>
-        <p:txBody>
-          <a:bodyPr wrap="square" anchor="t" lIns="0" rIns="0" tIns="0" bIns="0"/>
-          <a:lstStyle/>
-          <a:p>
-            <a:pPr algn="l"/>
-            <a:r>
-              <a:rPr sz="1200" b="0" i="0" lang="zh-CN" altLang="en-US">
-                <a:solidFill>
-                  <a:srgbClr val="6A6A6A"/>
-                </a:solidFill>
-                <a:latin typeface="Noto Sans CJK SC"/>
-                <a:ea typeface="Noto Sans CJK SC"/>
-                <a:cs typeface="Noto Sans CJK SC"/>
-              </a:rPr>
-              <a:t>烟台工厂造</a:t>
-            </a:r>
-          </a:p>
-        </p:txBody>
-      </p:sp>
-      <p:sp>
-        <p:nvSpPr>
-          <p:cNvPr id="16" name="TextBox 15"/>
-          <p:cNvSpPr txBox="1"/>
-          <p:nvPr/>
-        </p:nvSpPr>
-        <p:spPr>
-          <a:xfrm>
-            <a:off x="3383280" y="2459736"/>
-            <a:ext cx="5120640" cy="868680"/>
-          </a:xfrm>
-          <a:prstGeom prst="rect">
-            <a:avLst/>
-          </a:prstGeom>
-          <a:noFill/>
-        </p:spPr>
-        <p:txBody>
-          <a:bodyPr wrap="square" anchor="t" lIns="0" rIns="0" tIns="0" bIns="0"/>
-          <a:lstStyle/>
-          <a:p>
-            <a:pPr algn="l">
-              <a:lnSpc>
-                <a:spcPct val="130000"/>
-              </a:lnSpc>
-            </a:pPr>
-            <a:r>
-              <a:rPr sz="1500" b="0" i="0" lang="zh-CN" altLang="en-US">
-                <a:solidFill>
-                  <a:srgbClr val="2C2C2C"/>
-                </a:solidFill>
-                <a:latin typeface="Noto Sans CJK SC"/>
-                <a:ea typeface="Noto Sans CJK SC"/>
-                <a:cs typeface="Noto Sans CJK SC"/>
-              </a:rPr>
-              <a:t>同一个功能几款；
-换款一次，停线多久。</a:t>
-            </a:r>
-          </a:p>
-        </p:txBody>
-      </p:sp>
-      <p:sp>
-        <p:nvSpPr>
-          <p:cNvPr id="17" name="TextBox 16"/>
-          <p:cNvSpPr txBox="1"/>
-          <p:nvPr/>
-        </p:nvSpPr>
-        <p:spPr>
-          <a:xfrm>
-            <a:off x="8732520" y="2459736"/>
-            <a:ext cx="2926080" cy="868680"/>
-          </a:xfrm>
-          <a:prstGeom prst="rect">
-            <a:avLst/>
-          </a:prstGeom>
-          <a:noFill/>
-        </p:spPr>
-        <p:txBody>
-          <a:bodyPr wrap="square" anchor="t" lIns="0" rIns="0" tIns="0" bIns="0"/>
-          <a:lstStyle/>
-          <a:p>
-            <a:pPr algn="l">
-              <a:lnSpc>
-                <a:spcPct val="130000"/>
-              </a:lnSpc>
-            </a:pPr>
-            <a:r>
-              <a:rPr sz="1500" b="0" i="0" lang="zh-CN" altLang="en-US">
-                <a:solidFill>
-                  <a:srgbClr val="2C2C2C"/>
-                </a:solidFill>
-                <a:latin typeface="Noto Sans CJK SC"/>
-                <a:ea typeface="Noto Sans CJK SC"/>
-                <a:cs typeface="Noto Sans CJK SC"/>
-              </a:rPr>
-              <a:t>并款清单。</a:t>
-            </a:r>
-          </a:p>
-        </p:txBody>
-      </p:sp>
-      <p:sp>
-        <p:nvSpPr>
-          <p:cNvPr id="18" name="Rectangle 17"/>
-          <p:cNvSpPr/>
-          <p:nvPr/>
-        </p:nvSpPr>
-        <p:spPr>
-          <a:xfrm>
-            <a:off x="658368" y="3364992"/>
-            <a:ext cx="10881360" cy="9144"/>
-          </a:xfrm>
-          <a:prstGeom prst="rect">
-            <a:avLst/>
-          </a:prstGeom>
-          <a:solidFill>
-            <a:srgbClr val="E2E2E2"/>
-          </a:solidFill>
-          <a:ln>
-            <a:noFill/>
-          </a:ln>
-        </p:spPr>
-        <p:style>
-          <a:lnRef idx="1">
-            <a:schemeClr val="accent1"/>
-          </a:lnRef>
-          <a:fillRef idx="3">
-            <a:schemeClr val="accent1"/>
-          </a:fillRef>
-          <a:effectRef idx="2">
-            <a:schemeClr val="accent1"/>
-          </a:effectRef>
-          <a:fontRef idx="minor">
-            <a:schemeClr val="lt1"/>
-          </a:fontRef>
-        </p:style>
-        <p:txBody>
-          <a:bodyPr rtlCol="0" anchor="ctr"/>
-          <a:lstStyle/>
-          <a:p>
-            <a:pPr algn="ctr"/>
-          </a:p>
-        </p:txBody>
-      </p:sp>
-      <p:sp>
-        <p:nvSpPr>
-          <p:cNvPr id="19" name="TextBox 18"/>
-          <p:cNvSpPr txBox="1"/>
-          <p:nvPr/>
-        </p:nvSpPr>
-        <p:spPr>
-          <a:xfrm>
-            <a:off x="658368" y="3438144"/>
-            <a:ext cx="2651760" cy="365760"/>
-          </a:xfrm>
-          <a:prstGeom prst="rect">
-            <a:avLst/>
-          </a:prstGeom>
-          <a:noFill/>
-        </p:spPr>
-        <p:txBody>
-          <a:bodyPr wrap="square" anchor="t" lIns="0" rIns="0" tIns="0" bIns="0"/>
-          <a:lstStyle/>
-          <a:p>
-            <a:pPr algn="l"/>
-            <a:r>
-              <a:rPr sz="2000" b="0" i="0" lang="zh-CN" altLang="en-US">
-                <a:solidFill>
-                  <a:srgbClr val="141414"/>
-                </a:solidFill>
-                <a:latin typeface="Noto Sans CJK SC Medium"/>
-                <a:ea typeface="Noto Sans CJK SC Medium"/>
-                <a:cs typeface="Noto Sans CJK SC Medium"/>
-              </a:rPr>
-              <a:t>保健食品</a:t>
-            </a:r>
-          </a:p>
-        </p:txBody>
-      </p:sp>
-      <p:sp>
-        <p:nvSpPr>
-          <p:cNvPr id="20" name="TextBox 19"/>
-          <p:cNvSpPr txBox="1"/>
-          <p:nvPr/>
-        </p:nvSpPr>
-        <p:spPr>
-          <a:xfrm>
-            <a:off x="658368" y="3822192"/>
-            <a:ext cx="2651760" cy="457200"/>
-          </a:xfrm>
-          <a:prstGeom prst="rect">
-            <a:avLst/>
-          </a:prstGeom>
-          <a:noFill/>
-        </p:spPr>
-        <p:txBody>
-          <a:bodyPr wrap="square" anchor="t" lIns="0" rIns="0" tIns="0" bIns="0"/>
-          <a:lstStyle/>
-          <a:p>
-            <a:pPr algn="l"/>
-            <a:r>
-              <a:rPr sz="1200" b="0" i="0" lang="zh-CN" altLang="en-US">
-                <a:solidFill>
-                  <a:srgbClr val="6A6A6A"/>
-                </a:solidFill>
-                <a:latin typeface="Noto Sans CJK SC"/>
-                <a:ea typeface="Noto Sans CJK SC"/>
-                <a:cs typeface="Noto Sans CJK SC"/>
-              </a:rPr>
-              <a:t>烟台工厂造</a:t>
-            </a:r>
-          </a:p>
-        </p:txBody>
-      </p:sp>
-      <p:sp>
-        <p:nvSpPr>
-          <p:cNvPr id="21" name="TextBox 20"/>
-          <p:cNvSpPr txBox="1"/>
-          <p:nvPr/>
-        </p:nvSpPr>
-        <p:spPr>
-          <a:xfrm>
-            <a:off x="3383280" y="3438144"/>
-            <a:ext cx="5120640" cy="868680"/>
-          </a:xfrm>
-          <a:prstGeom prst="rect">
-            <a:avLst/>
-          </a:prstGeom>
-          <a:noFill/>
-        </p:spPr>
-        <p:txBody>
-          <a:bodyPr wrap="square" anchor="t" lIns="0" rIns="0" tIns="0" bIns="0"/>
-          <a:lstStyle/>
-          <a:p>
-            <a:pPr algn="l">
-              <a:lnSpc>
-                <a:spcPct val="130000"/>
-              </a:lnSpc>
-            </a:pPr>
-            <a:r>
-              <a:rPr sz="1500" b="0" i="0" lang="zh-CN" altLang="en-US">
-                <a:solidFill>
-                  <a:srgbClr val="2C2C2C"/>
-                </a:solidFill>
-                <a:latin typeface="Noto Sans CJK SC"/>
-                <a:ea typeface="Noto Sans CJK SC"/>
-                <a:cs typeface="Noto Sans CJK SC"/>
-              </a:rPr>
-              <a:t>萃取罐几吨，几个人操作；
-干燥、切断两步还在不在。</a:t>
-            </a:r>
-          </a:p>
-        </p:txBody>
-      </p:sp>
-      <p:sp>
-        <p:nvSpPr>
-          <p:cNvPr id="22" name="TextBox 21"/>
-          <p:cNvSpPr txBox="1"/>
-          <p:nvPr/>
-        </p:nvSpPr>
-        <p:spPr>
-          <a:xfrm>
-            <a:off x="8732520" y="3438144"/>
-            <a:ext cx="2926080" cy="868680"/>
-          </a:xfrm>
-          <a:prstGeom prst="rect">
-            <a:avLst/>
-          </a:prstGeom>
-          <a:noFill/>
-        </p:spPr>
-        <p:txBody>
-          <a:bodyPr wrap="square" anchor="t" lIns="0" rIns="0" tIns="0" bIns="0"/>
-          <a:lstStyle/>
-          <a:p>
-            <a:pPr algn="l">
-              <a:lnSpc>
-                <a:spcPct val="130000"/>
-              </a:lnSpc>
-            </a:pPr>
-            <a:r>
-              <a:rPr sz="1500" b="0" i="0" lang="zh-CN" altLang="en-US">
-                <a:solidFill>
-                  <a:srgbClr val="2C2C2C"/>
-                </a:solidFill>
-                <a:latin typeface="Noto Sans CJK SC"/>
-                <a:ea typeface="Noto Sans CJK SC"/>
-                <a:cs typeface="Noto Sans CJK SC"/>
-              </a:rPr>
-              <a:t>鲜品直接取汁的
-改造单。</a:t>
-            </a:r>
-          </a:p>
-        </p:txBody>
-      </p:sp>
-      <p:sp>
-        <p:nvSpPr>
-          <p:cNvPr id="23" name="Rectangle 22"/>
-          <p:cNvSpPr/>
-          <p:nvPr/>
-        </p:nvSpPr>
-        <p:spPr>
-          <a:xfrm>
-            <a:off x="658368" y="4343400"/>
-            <a:ext cx="10881360" cy="9144"/>
-          </a:xfrm>
-          <a:prstGeom prst="rect">
-            <a:avLst/>
-          </a:prstGeom>
-          <a:solidFill>
-            <a:srgbClr val="E2E2E2"/>
-          </a:solidFill>
-          <a:ln>
-            <a:noFill/>
-          </a:ln>
-        </p:spPr>
-        <p:style>
-          <a:lnRef idx="1">
-            <a:schemeClr val="accent1"/>
-          </a:lnRef>
-          <a:fillRef idx="3">
-            <a:schemeClr val="accent1"/>
-          </a:fillRef>
-          <a:effectRef idx="2">
-            <a:schemeClr val="accent1"/>
-          </a:effectRef>
-          <a:fontRef idx="minor">
-            <a:schemeClr val="lt1"/>
-          </a:fontRef>
-        </p:style>
-        <p:txBody>
-          <a:bodyPr rtlCol="0" anchor="ctr"/>
-          <a:lstStyle/>
-          <a:p>
-            <a:pPr algn="ctr"/>
-          </a:p>
-        </p:txBody>
-      </p:sp>
-      <p:sp>
-        <p:nvSpPr>
-          <p:cNvPr id="24" name="TextBox 23"/>
-          <p:cNvSpPr txBox="1"/>
-          <p:nvPr/>
-        </p:nvSpPr>
-        <p:spPr>
-          <a:xfrm>
-            <a:off x="658368" y="4416552"/>
-            <a:ext cx="2651760" cy="365760"/>
-          </a:xfrm>
-          <a:prstGeom prst="rect">
-            <a:avLst/>
-          </a:prstGeom>
-          <a:noFill/>
-        </p:spPr>
-        <p:txBody>
-          <a:bodyPr wrap="square" anchor="t" lIns="0" rIns="0" tIns="0" bIns="0"/>
-          <a:lstStyle/>
-          <a:p>
-            <a:pPr algn="l"/>
-            <a:r>
-              <a:rPr sz="2000" b="0" i="0" lang="zh-CN" altLang="en-US">
-                <a:solidFill>
-                  <a:srgbClr val="141414"/>
-                </a:solidFill>
-                <a:latin typeface="Noto Sans CJK SC Medium"/>
-                <a:ea typeface="Noto Sans CJK SC Medium"/>
-                <a:cs typeface="Noto Sans CJK SC Medium"/>
-              </a:rPr>
-              <a:t>物流</a:t>
-            </a:r>
-          </a:p>
-        </p:txBody>
-      </p:sp>
-      <p:sp>
-        <p:nvSpPr>
-          <p:cNvPr id="25" name="TextBox 24"/>
-          <p:cNvSpPr txBox="1"/>
-          <p:nvPr/>
-        </p:nvSpPr>
-        <p:spPr>
-          <a:xfrm>
-            <a:off x="658368" y="4800600"/>
-            <a:ext cx="2651760" cy="457200"/>
-          </a:xfrm>
-          <a:prstGeom prst="rect">
-            <a:avLst/>
-          </a:prstGeom>
-          <a:noFill/>
-        </p:spPr>
-        <p:txBody>
-          <a:bodyPr wrap="square" anchor="t" lIns="0" rIns="0" tIns="0" bIns="0"/>
-          <a:lstStyle/>
-          <a:p>
-            <a:pPr algn="l"/>
-            <a:r>
-              <a:rPr sz="1200" b="0" i="0" lang="zh-CN" altLang="en-US">
-                <a:solidFill>
-                  <a:srgbClr val="6A6A6A"/>
-                </a:solidFill>
-                <a:latin typeface="Noto Sans CJK SC"/>
-                <a:ea typeface="Noto Sans CJK SC"/>
-                <a:cs typeface="Noto Sans CJK SC"/>
-              </a:rPr>
-              <a:t>烟台国际物流中心，2025 年启用</a:t>
-            </a:r>
-          </a:p>
-        </p:txBody>
-      </p:sp>
-      <p:sp>
-        <p:nvSpPr>
-          <p:cNvPr id="26" name="TextBox 25"/>
-          <p:cNvSpPr txBox="1"/>
-          <p:nvPr/>
-        </p:nvSpPr>
-        <p:spPr>
-          <a:xfrm>
-            <a:off x="3383280" y="4416552"/>
-            <a:ext cx="5120640" cy="868680"/>
-          </a:xfrm>
-          <a:prstGeom prst="rect">
-            <a:avLst/>
-          </a:prstGeom>
-          <a:noFill/>
-        </p:spPr>
-        <p:txBody>
-          <a:bodyPr wrap="square" anchor="t" lIns="0" rIns="0" tIns="0" bIns="0"/>
-          <a:lstStyle/>
-          <a:p>
-            <a:pPr algn="l">
-              <a:lnSpc>
-                <a:spcPct val="130000"/>
-              </a:lnSpc>
-            </a:pPr>
-            <a:r>
-              <a:rPr sz="1500" b="0" i="0" lang="zh-CN" altLang="en-US">
-                <a:solidFill>
-                  <a:srgbClr val="2C2C2C"/>
-                </a:solidFill>
-                <a:latin typeface="Noto Sans CJK SC"/>
-                <a:ea typeface="Noto Sans CJK SC"/>
-                <a:cs typeface="Noto Sans CJK SC"/>
-              </a:rPr>
-              <a:t>原料到下一道工序，中间转几趟；
-下一道工序能不能放到
-原料厂的墙外。</a:t>
-            </a:r>
-          </a:p>
-        </p:txBody>
-      </p:sp>
-      <p:sp>
-        <p:nvSpPr>
-          <p:cNvPr id="27" name="TextBox 26"/>
-          <p:cNvSpPr txBox="1"/>
-          <p:nvPr/>
-        </p:nvSpPr>
-        <p:spPr>
-          <a:xfrm>
-            <a:off x="8732520" y="4416552"/>
-            <a:ext cx="2926080" cy="868680"/>
-          </a:xfrm>
-          <a:prstGeom prst="rect">
-            <a:avLst/>
-          </a:prstGeom>
-          <a:noFill/>
-        </p:spPr>
-        <p:txBody>
-          <a:bodyPr wrap="square" anchor="t" lIns="0" rIns="0" tIns="0" bIns="0"/>
-          <a:lstStyle/>
-          <a:p>
-            <a:pPr algn="l">
-              <a:lnSpc>
-                <a:spcPct val="130000"/>
-              </a:lnSpc>
-            </a:pPr>
-            <a:r>
-              <a:rPr sz="1500" b="0" i="0" lang="zh-CN" altLang="en-US">
-                <a:solidFill>
-                  <a:srgbClr val="2C2C2C"/>
-                </a:solidFill>
-                <a:latin typeface="Noto Sans CJK SC"/>
-                <a:ea typeface="Noto Sans CJK SC"/>
-                <a:cs typeface="Noto Sans CJK SC"/>
-              </a:rPr>
-              <a:t>少一趟的清单。</a:t>
-            </a:r>
-          </a:p>
-        </p:txBody>
-      </p:sp>
-      <p:sp>
-        <p:nvSpPr>
-          <p:cNvPr id="28" name="Rectangle 27"/>
-          <p:cNvSpPr/>
-          <p:nvPr/>
-        </p:nvSpPr>
-        <p:spPr>
-          <a:xfrm>
-            <a:off x="658368" y="5321808"/>
-            <a:ext cx="10881360" cy="9144"/>
-          </a:xfrm>
-          <a:prstGeom prst="rect">
-            <a:avLst/>
-          </a:prstGeom>
-          <a:solidFill>
-            <a:srgbClr val="E2E2E2"/>
-          </a:solidFill>
-          <a:ln>
-            <a:noFill/>
-          </a:ln>
-        </p:spPr>
-        <p:style>
-          <a:lnRef idx="1">
-            <a:schemeClr val="accent1"/>
-          </a:lnRef>
-          <a:fillRef idx="3">
-            <a:schemeClr val="accent1"/>
-          </a:fillRef>
-          <a:effectRef idx="2">
-            <a:schemeClr val="accent1"/>
-          </a:effectRef>
-          <a:fontRef idx="minor">
-            <a:schemeClr val="lt1"/>
-          </a:fontRef>
-        </p:style>
-        <p:txBody>
-          <a:bodyPr rtlCol="0" anchor="ctr"/>
-          <a:lstStyle/>
-          <a:p>
-            <a:pPr algn="ctr"/>
-          </a:p>
-        </p:txBody>
-      </p:sp>
-      <p:sp>
-        <p:nvSpPr>
-          <p:cNvPr id="29" name="TextBox 28"/>
-          <p:cNvSpPr txBox="1"/>
-          <p:nvPr/>
-        </p:nvSpPr>
-        <p:spPr>
-          <a:xfrm>
-            <a:off x="658368" y="5486400"/>
-            <a:ext cx="10789920" cy="411480"/>
-          </a:xfrm>
-          <a:prstGeom prst="rect">
-            <a:avLst/>
-          </a:prstGeom>
-          <a:noFill/>
-        </p:spPr>
-        <p:txBody>
-          <a:bodyPr wrap="square" anchor="t" lIns="0" rIns="0" tIns="0" bIns="0"/>
-          <a:lstStyle/>
-          <a:p>
-            <a:pPr algn="l"/>
-            <a:r>
-              <a:rPr sz="2000" b="0" i="0" lang="zh-CN" altLang="en-US">
-                <a:solidFill>
-                  <a:srgbClr val="9E1B1B"/>
-                </a:solidFill>
-                <a:latin typeface="Noto Sans CJK SC Medium"/>
-                <a:ea typeface="Noto Sans CJK SC Medium"/>
-                <a:cs typeface="Noto Sans CJK SC Medium"/>
-              </a:rPr>
-              <a:t>先各自盘点，再谈改。</a:t>
-            </a:r>
-          </a:p>
-        </p:txBody>
-      </p:sp>
-      <p:sp>
-        <p:nvSpPr>
-          <p:cNvPr id="30" name="TextBox 29"/>
-          <p:cNvSpPr txBox="1"/>
-          <p:nvPr/>
-        </p:nvSpPr>
-        <p:spPr>
-          <a:xfrm>
-            <a:off x="658368" y="6035040"/>
-            <a:ext cx="10789920" cy="274320"/>
-          </a:xfrm>
-          <a:prstGeom prst="rect">
-            <a:avLst/>
-          </a:prstGeom>
-          <a:noFill/>
-        </p:spPr>
-        <p:txBody>
-          <a:bodyPr wrap="square" anchor="t" lIns="0" rIns="0" tIns="0" bIns="0"/>
-          <a:lstStyle/>
-          <a:p>
-            <a:pPr algn="l"/>
-            <a:r>
-              <a:rPr sz="1100" b="0" i="0" lang="zh-CN" altLang="en-US">
-                <a:solidFill>
-                  <a:srgbClr val="6A6A6A"/>
-                </a:solidFill>
-                <a:latin typeface="Noto Sans CJK SC"/>
-                <a:ea typeface="Noto Sans CJK SC"/>
-                <a:cs typeface="Noto Sans CJK SC"/>
-              </a:rPr>
-              <a:t>烟台工厂与物流中心的情况引自《艾多美 100 兆亿养成手册》，需核实。</a:t>
-            </a:r>
-          </a:p>
-        </p:txBody>
-      </p:sp>
-      <p:sp>
-        <p:nvSpPr>
-          <p:cNvPr id="31" name="TextBox 30"/>
-          <p:cNvSpPr txBox="1"/>
-          <p:nvPr/>
-        </p:nvSpPr>
-        <p:spPr>
-          <a:xfrm>
-            <a:off x="10561320" y="6492240"/>
-            <a:ext cx="1051560" cy="201168"/>
-          </a:xfrm>
-          <a:prstGeom prst="rect">
-            <a:avLst/>
-          </a:prstGeom>
-          <a:noFill/>
-        </p:spPr>
-        <p:txBody>
-          <a:bodyPr wrap="square" anchor="t" lIns="0" rIns="0" tIns="0" bIns="0"/>
-          <a:lstStyle/>
-          <a:p>
-            <a:pPr algn="r"/>
-            <a:r>
-              <a:rPr sz="1100" b="0" i="0" lang="zh-CN" altLang="en-US">
-                <a:solidFill>
-                  <a:srgbClr val="C8C8C8"/>
-                </a:solidFill>
-                <a:latin typeface="Noto Sans CJK SC"/>
-                <a:ea typeface="Noto Sans CJK SC"/>
-                <a:cs typeface="Noto Sans CJK SC"/>
-              </a:rPr>
-              <a:t>11</a:t>
-            </a:r>
-          </a:p>
-        </p:txBody>
-      </p:sp>
-    </p:spTree>
-  </p:cSld>
-  <p:clrMapOvr>
-    <a:masterClrMapping/>
-  </p:clrMapOvr>
-</p:sld>
-</file>
-
-<file path=ppt/slides/slide12.xml><?xml version="1.0" encoding="utf-8"?>
-<p:sld xmlns:a="http://schemas.openxmlformats.org/drawingml/2006/main" xmlns:p="http://schemas.openxmlformats.org/presentationml/2006/main" xmlns:r="http://schemas.openxmlformats.org/officeDocument/2006/relationships">
-  <p:cSld>
-    <p:bg>
-      <p:bgPr>
-        <a:solidFill>
-          <a:srgbClr val="FFFFFF"/>
-        </a:solidFill>
-        <a:effectLst/>
-      </p:bgPr>
-    </p:bg>
-    <p:spTree>
-      <p:nvGrpSpPr>
-        <p:cNvPr id="1" name=""/>
-        <p:cNvGrpSpPr/>
-        <p:nvPr/>
-      </p:nvGrpSpPr>
-      <p:grpSpPr/>
-      <p:sp>
-        <p:nvSpPr>
-          <p:cNvPr id="2" name="TextBox 1"/>
-          <p:cNvSpPr txBox="1"/>
-          <p:nvPr/>
-        </p:nvSpPr>
-        <p:spPr>
-          <a:xfrm>
-            <a:off x="658368" y="365760"/>
-            <a:ext cx="640080" cy="329184"/>
-          </a:xfrm>
-          <a:prstGeom prst="rect">
-            <a:avLst/>
-          </a:prstGeom>
-          <a:noFill/>
-        </p:spPr>
-        <p:txBody>
-          <a:bodyPr wrap="square" anchor="t" lIns="0" rIns="0" tIns="0" bIns="0"/>
-          <a:lstStyle/>
-          <a:p>
-            <a:pPr algn="l"/>
-            <a:r>
-              <a:rPr sz="1500" b="0" i="0" lang="zh-CN" altLang="en-US">
-                <a:solidFill>
-                  <a:srgbClr val="9E1B1B"/>
-                </a:solidFill>
-                <a:latin typeface="Noto Sans CJK SC Medium"/>
-                <a:ea typeface="Noto Sans CJK SC Medium"/>
-                <a:cs typeface="Noto Sans CJK SC Medium"/>
-              </a:rPr>
-              <a:t>11</a:t>
-            </a:r>
-          </a:p>
-        </p:txBody>
-      </p:sp>
-      <p:sp>
-        <p:nvSpPr>
-          <p:cNvPr id="3" name="TextBox 2"/>
-          <p:cNvSpPr txBox="1"/>
-          <p:nvPr/>
-        </p:nvSpPr>
-        <p:spPr>
-          <a:xfrm>
-            <a:off x="1371600" y="310896"/>
-            <a:ext cx="10058400" cy="438912"/>
-          </a:xfrm>
-          <a:prstGeom prst="rect">
-            <a:avLst/>
-          </a:prstGeom>
-          <a:noFill/>
-        </p:spPr>
-        <p:txBody>
-          <a:bodyPr wrap="square" anchor="t" lIns="0" rIns="0" tIns="0" bIns="0"/>
-          <a:lstStyle/>
-          <a:p>
-            <a:pPr algn="l"/>
-            <a:r>
-              <a:rPr sz="3000" b="0" i="0" lang="zh-CN" altLang="en-US">
-                <a:solidFill>
-                  <a:srgbClr val="141414"/>
-                </a:solidFill>
-                <a:latin typeface="Noto Sans CJK SC Medium"/>
-                <a:ea typeface="Noto Sans CJK SC Medium"/>
-                <a:cs typeface="Noto Sans CJK SC Medium"/>
-              </a:rPr>
-              <a:t>带去合作方的，是这三样</a:t>
-            </a:r>
-          </a:p>
-        </p:txBody>
-      </p:sp>
-      <p:sp>
-        <p:nvSpPr>
-          <p:cNvPr id="4" name="Rectangle 3"/>
-          <p:cNvSpPr/>
-          <p:nvPr/>
-        </p:nvSpPr>
-        <p:spPr>
-          <a:xfrm>
-            <a:off x="658368" y="960120"/>
-            <a:ext cx="10881360" cy="10972"/>
-          </a:xfrm>
-          <a:prstGeom prst="rect">
-            <a:avLst/>
-          </a:prstGeom>
-          <a:solidFill>
-            <a:srgbClr val="E2E2E2"/>
-          </a:solidFill>
-          <a:ln>
-            <a:noFill/>
-          </a:ln>
-        </p:spPr>
-        <p:style>
-          <a:lnRef idx="1">
-            <a:schemeClr val="accent1"/>
-          </a:lnRef>
-          <a:fillRef idx="3">
-            <a:schemeClr val="accent1"/>
-          </a:fillRef>
-          <a:effectRef idx="2">
-            <a:schemeClr val="accent1"/>
-          </a:effectRef>
-          <a:fontRef idx="minor">
-            <a:schemeClr val="lt1"/>
-          </a:fontRef>
-        </p:style>
-        <p:txBody>
-          <a:bodyPr rtlCol="0" anchor="ctr"/>
-          <a:lstStyle/>
-          <a:p>
-            <a:pPr algn="ctr"/>
-          </a:p>
-        </p:txBody>
-      </p:sp>
-      <p:sp>
-        <p:nvSpPr>
-          <p:cNvPr id="5" name="TextBox 4"/>
-          <p:cNvSpPr txBox="1"/>
-          <p:nvPr/>
-        </p:nvSpPr>
-        <p:spPr>
-          <a:xfrm>
-            <a:off x="658368" y="1371600"/>
-            <a:ext cx="3246120" cy="1051560"/>
-          </a:xfrm>
-          <a:prstGeom prst="rect">
-            <a:avLst/>
-          </a:prstGeom>
-          <a:noFill/>
-        </p:spPr>
-        <p:txBody>
-          <a:bodyPr wrap="square" anchor="t" lIns="0" rIns="0" tIns="0" bIns="0"/>
-          <a:lstStyle/>
-          <a:p>
-            <a:pPr algn="l"/>
-            <a:r>
-              <a:rPr sz="2400" b="0" i="0" lang="zh-CN" altLang="en-US">
-                <a:solidFill>
-                  <a:srgbClr val="141414"/>
-                </a:solidFill>
-                <a:latin typeface="Noto Sans CJK SC Medium"/>
-                <a:ea typeface="Noto Sans CJK SC Medium"/>
-                <a:cs typeface="Noto Sans CJK SC Medium"/>
-              </a:rPr>
-              <a:t>一个月十万套</a:t>
-            </a:r>
-          </a:p>
-        </p:txBody>
-      </p:sp>
-      <p:sp>
-        <p:nvSpPr>
-          <p:cNvPr id="6" name="TextBox 5"/>
-          <p:cNvSpPr txBox="1"/>
-          <p:nvPr/>
-        </p:nvSpPr>
-        <p:spPr>
-          <a:xfrm>
-            <a:off x="658368" y="2560320"/>
-            <a:ext cx="3246120" cy="1645920"/>
-          </a:xfrm>
-          <a:prstGeom prst="rect">
-            <a:avLst/>
-          </a:prstGeom>
-          <a:noFill/>
-        </p:spPr>
-        <p:txBody>
-          <a:bodyPr wrap="square" anchor="t" lIns="0" rIns="0" tIns="0" bIns="0"/>
-          <a:lstStyle/>
-          <a:p>
-            <a:pPr algn="l">
-              <a:lnSpc>
-                <a:spcPct val="145000"/>
-              </a:lnSpc>
-            </a:pPr>
-            <a:r>
-              <a:rPr sz="1500" b="0" i="0" lang="zh-CN" altLang="en-US">
-                <a:solidFill>
-                  <a:srgbClr val="2C2C2C"/>
-                </a:solidFill>
-                <a:latin typeface="Noto Sans CJK SC"/>
-                <a:ea typeface="Noto Sans CJK SC"/>
-                <a:cs typeface="Noto Sans CJK SC"/>
-              </a:rPr>
-              <a:t>价格按这个量重算，
-才落到原来的十分之一。
-交出去的是能排产的这个数。</a:t>
-            </a:r>
-          </a:p>
-        </p:txBody>
-      </p:sp>
-      <p:sp>
-        <p:nvSpPr>
-          <p:cNvPr id="7" name="Rectangle 6"/>
-          <p:cNvSpPr/>
-          <p:nvPr/>
-        </p:nvSpPr>
-        <p:spPr>
-          <a:xfrm>
-            <a:off x="4160520" y="1280160"/>
-            <a:ext cx="10972" cy="2880360"/>
-          </a:xfrm>
-          <a:prstGeom prst="rect">
-            <a:avLst/>
-          </a:prstGeom>
-          <a:solidFill>
-            <a:srgbClr val="E2E2E2"/>
-          </a:solidFill>
-          <a:ln>
-            <a:noFill/>
-          </a:ln>
-        </p:spPr>
-        <p:style>
-          <a:lnRef idx="1">
-            <a:schemeClr val="accent1"/>
-          </a:lnRef>
-          <a:fillRef idx="3">
-            <a:schemeClr val="accent1"/>
-          </a:fillRef>
-          <a:effectRef idx="2">
-            <a:schemeClr val="accent1"/>
-          </a:effectRef>
-          <a:fontRef idx="minor">
-            <a:schemeClr val="lt1"/>
-          </a:fontRef>
-        </p:style>
-        <p:txBody>
-          <a:bodyPr rtlCol="0" anchor="ctr"/>
-          <a:lstStyle/>
-          <a:p>
-            <a:pPr algn="ctr"/>
-          </a:p>
-        </p:txBody>
-      </p:sp>
-      <p:sp>
-        <p:nvSpPr>
-          <p:cNvPr id="8" name="TextBox 7"/>
-          <p:cNvSpPr txBox="1"/>
-          <p:nvPr/>
-        </p:nvSpPr>
-        <p:spPr>
-          <a:xfrm>
-            <a:off x="4361688" y="1371600"/>
-            <a:ext cx="3246120" cy="1051560"/>
-          </a:xfrm>
-          <a:prstGeom prst="rect">
-            <a:avLst/>
-          </a:prstGeom>
-          <a:noFill/>
-        </p:spPr>
-        <p:txBody>
-          <a:bodyPr wrap="square" anchor="t" lIns="0" rIns="0" tIns="0" bIns="0"/>
-          <a:lstStyle/>
-          <a:p>
-            <a:pPr algn="l"/>
-            <a:r>
-              <a:rPr sz="2400" b="0" i="0" lang="zh-CN" altLang="en-US">
-                <a:solidFill>
-                  <a:srgbClr val="141414"/>
-                </a:solidFill>
-                <a:latin typeface="Noto Sans CJK SC Medium"/>
-                <a:ea typeface="Noto Sans CJK SC Medium"/>
-                <a:cs typeface="Noto Sans CJK SC Medium"/>
-              </a:rPr>
-              <a:t>设备图纸</a:t>
-            </a:r>
-          </a:p>
-        </p:txBody>
-      </p:sp>
-      <p:sp>
-        <p:nvSpPr>
-          <p:cNvPr id="9" name="TextBox 8"/>
-          <p:cNvSpPr txBox="1"/>
-          <p:nvPr/>
-        </p:nvSpPr>
-        <p:spPr>
-          <a:xfrm>
-            <a:off x="4361688" y="2560320"/>
-            <a:ext cx="3246120" cy="1645920"/>
-          </a:xfrm>
-          <a:prstGeom prst="rect">
-            <a:avLst/>
-          </a:prstGeom>
-          <a:noFill/>
-        </p:spPr>
-        <p:txBody>
-          <a:bodyPr wrap="square" anchor="t" lIns="0" rIns="0" tIns="0" bIns="0"/>
-          <a:lstStyle/>
-          <a:p>
-            <a:pPr algn="l">
-              <a:lnSpc>
-                <a:spcPct val="145000"/>
-              </a:lnSpc>
-            </a:pPr>
-            <a:r>
-              <a:rPr sz="1500" b="0" i="0" lang="zh-CN" altLang="en-US">
-                <a:solidFill>
-                  <a:srgbClr val="2C2C2C"/>
-                </a:solidFill>
-                <a:latin typeface="Noto Sans CJK SC"/>
-                <a:ea typeface="Noto Sans CJK SC"/>
-                <a:cs typeface="Noto Sans CJK SC"/>
-              </a:rPr>
-              <a:t>设备公司出。没有厂房，就在旁边盖。
-原料买断，对方只运转。
-拿去的是图纸，不是询价单。</a:t>
-            </a:r>
-          </a:p>
-        </p:txBody>
-      </p:sp>
-      <p:sp>
-        <p:nvSpPr>
-          <p:cNvPr id="10" name="Rectangle 9"/>
-          <p:cNvSpPr/>
-          <p:nvPr/>
-        </p:nvSpPr>
-        <p:spPr>
-          <a:xfrm>
-            <a:off x="7863840" y="1280160"/>
-            <a:ext cx="10972" cy="2880360"/>
-          </a:xfrm>
-          <a:prstGeom prst="rect">
-            <a:avLst/>
-          </a:prstGeom>
-          <a:solidFill>
-            <a:srgbClr val="E2E2E2"/>
-          </a:solidFill>
-          <a:ln>
-            <a:noFill/>
-          </a:ln>
-        </p:spPr>
-        <p:style>
-          <a:lnRef idx="1">
-            <a:schemeClr val="accent1"/>
-          </a:lnRef>
-          <a:fillRef idx="3">
-            <a:schemeClr val="accent1"/>
-          </a:fillRef>
-          <a:effectRef idx="2">
-            <a:schemeClr val="accent1"/>
-          </a:effectRef>
-          <a:fontRef idx="minor">
-            <a:schemeClr val="lt1"/>
-          </a:fontRef>
-        </p:style>
-        <p:txBody>
-          <a:bodyPr rtlCol="0" anchor="ctr"/>
-          <a:lstStyle/>
-          <a:p>
-            <a:pPr algn="ctr"/>
-          </a:p>
-        </p:txBody>
-      </p:sp>
-      <p:sp>
-        <p:nvSpPr>
-          <p:cNvPr id="11" name="TextBox 10"/>
-          <p:cNvSpPr txBox="1"/>
-          <p:nvPr/>
-        </p:nvSpPr>
-        <p:spPr>
-          <a:xfrm>
-            <a:off x="8065008" y="1371600"/>
-            <a:ext cx="3246120" cy="1051560"/>
-          </a:xfrm>
-          <a:prstGeom prst="rect">
-            <a:avLst/>
-          </a:prstGeom>
-          <a:noFill/>
-        </p:spPr>
-        <p:txBody>
-          <a:bodyPr wrap="square" anchor="t" lIns="0" rIns="0" tIns="0" bIns="0"/>
-          <a:lstStyle/>
-          <a:p>
-            <a:pPr algn="l"/>
-            <a:r>
-              <a:rPr sz="2400" b="0" i="0" lang="zh-CN" altLang="en-US">
-                <a:solidFill>
-                  <a:srgbClr val="141414"/>
-                </a:solidFill>
-                <a:latin typeface="Noto Sans CJK SC Medium"/>
-                <a:ea typeface="Noto Sans CJK SC Medium"/>
-                <a:cs typeface="Noto Sans CJK SC Medium"/>
-              </a:rPr>
-              <a:t>育苗就开始的合同</a:t>
-            </a:r>
-          </a:p>
-        </p:txBody>
-      </p:sp>
-      <p:sp>
-        <p:nvSpPr>
-          <p:cNvPr id="12" name="TextBox 11"/>
-          <p:cNvSpPr txBox="1"/>
-          <p:nvPr/>
-        </p:nvSpPr>
-        <p:spPr>
-          <a:xfrm>
-            <a:off x="8065008" y="2560320"/>
-            <a:ext cx="3246120" cy="1645920"/>
-          </a:xfrm>
-          <a:prstGeom prst="rect">
-            <a:avLst/>
-          </a:prstGeom>
-          <a:noFill/>
-        </p:spPr>
-        <p:txBody>
-          <a:bodyPr wrap="square" anchor="t" lIns="0" rIns="0" tIns="0" bIns="0"/>
-          <a:lstStyle/>
-          <a:p>
-            <a:pPr algn="l">
-              <a:lnSpc>
-                <a:spcPct val="145000"/>
-              </a:lnSpc>
-            </a:pPr>
-            <a:r>
-              <a:rPr sz="1500" b="0" i="0" lang="zh-CN" altLang="en-US">
-                <a:solidFill>
-                  <a:srgbClr val="2C2C2C"/>
-                </a:solidFill>
-                <a:latin typeface="Noto Sans CJK SC"/>
-                <a:ea typeface="Noto Sans CJK SC"/>
-                <a:cs typeface="Noto Sans CJK SC"/>
-              </a:rPr>
-              <a:t>川芎、当归、白芍从育苗起要一两年。
-合同在涨价之前锁上。
-农活不会，就公司带。</a:t>
-            </a:r>
-          </a:p>
-        </p:txBody>
-      </p:sp>
-      <p:sp>
-        <p:nvSpPr>
-          <p:cNvPr id="13" name="Rectangle 12"/>
-          <p:cNvSpPr/>
-          <p:nvPr/>
-        </p:nvSpPr>
-        <p:spPr>
-          <a:xfrm>
-            <a:off x="658368" y="4709160"/>
-            <a:ext cx="10881360" cy="10972"/>
-          </a:xfrm>
-          <a:prstGeom prst="rect">
-            <a:avLst/>
-          </a:prstGeom>
-          <a:solidFill>
-            <a:srgbClr val="E2E2E2"/>
-          </a:solidFill>
-          <a:ln>
-            <a:noFill/>
-          </a:ln>
-        </p:spPr>
-        <p:style>
-          <a:lnRef idx="1">
-            <a:schemeClr val="accent1"/>
-          </a:lnRef>
-          <a:fillRef idx="3">
-            <a:schemeClr val="accent1"/>
-          </a:fillRef>
-          <a:effectRef idx="2">
-            <a:schemeClr val="accent1"/>
-          </a:effectRef>
-          <a:fontRef idx="minor">
-            <a:schemeClr val="lt1"/>
-          </a:fontRef>
-        </p:style>
-        <p:txBody>
-          <a:bodyPr rtlCol="0" anchor="ctr"/>
-          <a:lstStyle/>
-          <a:p>
-            <a:pPr algn="ctr"/>
-          </a:p>
-        </p:txBody>
-      </p:sp>
-      <p:sp>
-        <p:nvSpPr>
-          <p:cNvPr id="14" name="TextBox 13"/>
-          <p:cNvSpPr txBox="1"/>
-          <p:nvPr/>
-        </p:nvSpPr>
-        <p:spPr>
-          <a:xfrm>
-            <a:off x="658368" y="4983480"/>
-            <a:ext cx="10789920" cy="1097280"/>
-          </a:xfrm>
-          <a:prstGeom prst="rect">
-            <a:avLst/>
-          </a:prstGeom>
-          <a:noFill/>
-        </p:spPr>
-        <p:txBody>
-          <a:bodyPr wrap="square" anchor="t" lIns="0" rIns="0" tIns="0" bIns="0"/>
-          <a:lstStyle/>
-          <a:p>
-            <a:pPr algn="l">
-              <a:lnSpc>
-                <a:spcPct val="135000"/>
-              </a:lnSpc>
-            </a:pPr>
-            <a:r>
-              <a:rPr sz="2200" b="0" i="0" lang="zh-CN" altLang="en-US">
-                <a:solidFill>
-                  <a:srgbClr val="9E1B1B"/>
-                </a:solidFill>
-                <a:latin typeface="Noto Sans CJK SC Medium"/>
-                <a:ea typeface="Noto Sans CJK SC Medium"/>
-                <a:cs typeface="Noto Sans CJK SC Medium"/>
-              </a:rPr>
-              <a:t>大量生产不是第一步。
-这个数、这张图纸、这份合同，才是。</a:t>
-            </a:r>
-          </a:p>
-        </p:txBody>
-      </p:sp>
-      <p:sp>
-        <p:nvSpPr>
-          <p:cNvPr id="15" name="TextBox 14"/>
-          <p:cNvSpPr txBox="1"/>
-          <p:nvPr/>
-        </p:nvSpPr>
-        <p:spPr>
-          <a:xfrm>
-            <a:off x="10561320" y="6492240"/>
-            <a:ext cx="1051560" cy="201168"/>
-          </a:xfrm>
-          <a:prstGeom prst="rect">
-            <a:avLst/>
-          </a:prstGeom>
-          <a:noFill/>
-        </p:spPr>
-        <p:txBody>
-          <a:bodyPr wrap="square" anchor="t" lIns="0" rIns="0" tIns="0" bIns="0"/>
-          <a:lstStyle/>
-          <a:p>
-            <a:pPr algn="r"/>
-            <a:r>
-              <a:rPr sz="1100" b="0" i="0" lang="zh-CN" altLang="en-US">
-                <a:solidFill>
-                  <a:srgbClr val="C8C8C8"/>
-                </a:solidFill>
-                <a:latin typeface="Noto Sans CJK SC"/>
-                <a:ea typeface="Noto Sans CJK SC"/>
-                <a:cs typeface="Noto Sans CJK SC"/>
-              </a:rPr>
-              <a:t>12</a:t>
-            </a:r>
-          </a:p>
-        </p:txBody>
-      </p:sp>
-    </p:spTree>
-  </p:cSld>
-  <p:clrMapOvr>
-    <a:masterClrMapping/>
-  </p:clrMapOvr>
-</p:sld>
-</file>
-
-<file path=ppt/slides/slide13.xml><?xml version="1.0" encoding="utf-8"?>
-<p:sld xmlns:a="http://schemas.openxmlformats.org/drawingml/2006/main" xmlns:p="http://schemas.openxmlformats.org/presentationml/2006/main" xmlns:r="http://schemas.openxmlformats.org/officeDocument/2006/relationships">
-  <p:cSld>
-    <p:bg>
-      <p:bgPr>
-        <a:solidFill>
-          <a:srgbClr val="FFFFFF"/>
-        </a:solidFill>
-        <a:effectLst/>
-      </p:bgPr>
-    </p:bg>
-    <p:spTree>
-      <p:nvGrpSpPr>
-        <p:cNvPr id="1" name=""/>
-        <p:cNvGrpSpPr/>
-        <p:nvPr/>
-      </p:nvGrpSpPr>
-      <p:grpSpPr/>
-      <p:sp>
-        <p:nvSpPr>
-          <p:cNvPr id="2" name="TextBox 1"/>
-          <p:cNvSpPr txBox="1"/>
-          <p:nvPr/>
-        </p:nvSpPr>
-        <p:spPr>
-          <a:xfrm>
-            <a:off x="658368" y="365760"/>
-            <a:ext cx="640080" cy="329184"/>
-          </a:xfrm>
-          <a:prstGeom prst="rect">
-            <a:avLst/>
-          </a:prstGeom>
-          <a:noFill/>
-        </p:spPr>
-        <p:txBody>
-          <a:bodyPr wrap="square" anchor="t" lIns="0" rIns="0" tIns="0" bIns="0"/>
-          <a:lstStyle/>
-          <a:p>
-            <a:pPr algn="l"/>
-            <a:r>
-              <a:rPr sz="1500" b="0" i="0" lang="zh-CN" altLang="en-US">
-                <a:solidFill>
-                  <a:srgbClr val="9E1B1B"/>
-                </a:solidFill>
-                <a:latin typeface="Noto Sans CJK SC Medium"/>
-                <a:ea typeface="Noto Sans CJK SC Medium"/>
-                <a:cs typeface="Noto Sans CJK SC Medium"/>
-              </a:rPr>
-              <a:t>12</a:t>
-            </a:r>
-          </a:p>
-        </p:txBody>
-      </p:sp>
-      <p:sp>
-        <p:nvSpPr>
-          <p:cNvPr id="3" name="TextBox 2"/>
-          <p:cNvSpPr txBox="1"/>
-          <p:nvPr/>
-        </p:nvSpPr>
-        <p:spPr>
-          <a:xfrm>
-            <a:off x="1371600" y="310896"/>
-            <a:ext cx="10058400" cy="438912"/>
-          </a:xfrm>
-          <a:prstGeom prst="rect">
-            <a:avLst/>
-          </a:prstGeom>
-          <a:noFill/>
-        </p:spPr>
-        <p:txBody>
-          <a:bodyPr wrap="square" anchor="t" lIns="0" rIns="0" tIns="0" bIns="0"/>
-          <a:lstStyle/>
-          <a:p>
-            <a:pPr algn="l"/>
-            <a:r>
-              <a:rPr sz="3000" b="0" i="0" lang="zh-CN" altLang="en-US">
-                <a:solidFill>
-                  <a:srgbClr val="141414"/>
-                </a:solidFill>
-                <a:latin typeface="Noto Sans CJK SC Medium"/>
-                <a:ea typeface="Noto Sans CJK SC Medium"/>
-                <a:cs typeface="Noto Sans CJK SC Medium"/>
-              </a:rPr>
-              <a:t>从企划一次通到终点</a:t>
-            </a:r>
-          </a:p>
-        </p:txBody>
-      </p:sp>
-      <p:sp>
-        <p:nvSpPr>
-          <p:cNvPr id="4" name="Rectangle 3"/>
-          <p:cNvSpPr/>
-          <p:nvPr/>
-        </p:nvSpPr>
-        <p:spPr>
-          <a:xfrm>
-            <a:off x="658368" y="960120"/>
-            <a:ext cx="10881360" cy="10972"/>
-          </a:xfrm>
-          <a:prstGeom prst="rect">
-            <a:avLst/>
-          </a:prstGeom>
-          <a:solidFill>
-            <a:srgbClr val="E2E2E2"/>
-          </a:solidFill>
-          <a:ln>
-            <a:noFill/>
-          </a:ln>
-        </p:spPr>
-        <p:style>
-          <a:lnRef idx="1">
-            <a:schemeClr val="accent1"/>
-          </a:lnRef>
-          <a:fillRef idx="3">
-            <a:schemeClr val="accent1"/>
-          </a:fillRef>
-          <a:effectRef idx="2">
-            <a:schemeClr val="accent1"/>
-          </a:effectRef>
-          <a:fontRef idx="minor">
-            <a:schemeClr val="lt1"/>
-          </a:fontRef>
-        </p:style>
-        <p:txBody>
-          <a:bodyPr rtlCol="0" anchor="ctr"/>
-          <a:lstStyle/>
-          <a:p>
-            <a:pPr algn="ctr"/>
-          </a:p>
-        </p:txBody>
-      </p:sp>
-      <p:sp>
-        <p:nvSpPr>
-          <p:cNvPr id="5" name="TextBox 4"/>
-          <p:cNvSpPr txBox="1"/>
-          <p:nvPr/>
-        </p:nvSpPr>
-        <p:spPr>
-          <a:xfrm>
-            <a:off x="658368" y="1234440"/>
-            <a:ext cx="640080" cy="329184"/>
-          </a:xfrm>
-          <a:prstGeom prst="rect">
-            <a:avLst/>
-          </a:prstGeom>
-          <a:noFill/>
-        </p:spPr>
-        <p:txBody>
-          <a:bodyPr wrap="square" anchor="t" lIns="0" rIns="0" tIns="0" bIns="0"/>
-          <a:lstStyle/>
-          <a:p>
-            <a:pPr algn="l"/>
-            <a:r>
-              <a:rPr sz="1600" b="0" i="0" lang="zh-CN" altLang="en-US">
-                <a:solidFill>
-                  <a:srgbClr val="9E1B1B"/>
-                </a:solidFill>
-                <a:latin typeface="Noto Sans CJK SC Medium"/>
-                <a:ea typeface="Noto Sans CJK SC Medium"/>
-                <a:cs typeface="Noto Sans CJK SC Medium"/>
-              </a:rPr>
-              <a:t>01</a:t>
-            </a:r>
-          </a:p>
-        </p:txBody>
-      </p:sp>
-      <p:sp>
-        <p:nvSpPr>
-          <p:cNvPr id="6" name="TextBox 5"/>
-          <p:cNvSpPr txBox="1"/>
-          <p:nvPr/>
-        </p:nvSpPr>
-        <p:spPr>
-          <a:xfrm>
-            <a:off x="1417320" y="1216152"/>
-            <a:ext cx="9966960" cy="365760"/>
-          </a:xfrm>
-          <a:prstGeom prst="rect">
-            <a:avLst/>
-          </a:prstGeom>
-          <a:noFill/>
-        </p:spPr>
-        <p:txBody>
-          <a:bodyPr wrap="square" anchor="t" lIns="0" rIns="0" tIns="0" bIns="0"/>
-          <a:lstStyle/>
-          <a:p>
-            <a:pPr algn="l"/>
-            <a:r>
-              <a:rPr sz="2200" b="0" i="0" lang="zh-CN" altLang="en-US">
-                <a:solidFill>
-                  <a:srgbClr val="141414"/>
-                </a:solidFill>
-                <a:latin typeface="Noto Sans CJK SC Medium"/>
-                <a:ea typeface="Noto Sans CJK SC Medium"/>
-                <a:cs typeface="Noto Sans CJK SC Medium"/>
-              </a:rPr>
-              <a:t>接力做不成一炉</a:t>
-            </a:r>
-          </a:p>
-        </p:txBody>
-      </p:sp>
-      <p:sp>
-        <p:nvSpPr>
-          <p:cNvPr id="7" name="TextBox 6"/>
-          <p:cNvSpPr txBox="1"/>
-          <p:nvPr/>
-        </p:nvSpPr>
-        <p:spPr>
-          <a:xfrm>
-            <a:off x="1417320" y="1655064"/>
-            <a:ext cx="9966960" cy="502920"/>
-          </a:xfrm>
-          <a:prstGeom prst="rect">
-            <a:avLst/>
-          </a:prstGeom>
-          <a:noFill/>
-        </p:spPr>
-        <p:txBody>
-          <a:bodyPr wrap="square" anchor="t" lIns="0" rIns="0" tIns="0" bIns="0"/>
-          <a:lstStyle/>
-          <a:p>
-            <a:pPr algn="l"/>
-            <a:r>
-              <a:rPr sz="1600" b="0" i="0" lang="zh-CN" altLang="en-US">
-                <a:solidFill>
-                  <a:srgbClr val="2C2C2C"/>
-                </a:solidFill>
-                <a:latin typeface="Noto Sans CJK SC"/>
-                <a:ea typeface="Noto Sans CJK SC"/>
-                <a:cs typeface="Noto Sans CJK SC"/>
-              </a:rPr>
-              <a:t>商品做完才做内容，内容做完才培训。任何一环停下，后面都在等。</a:t>
-            </a:r>
-          </a:p>
-        </p:txBody>
-      </p:sp>
-      <p:sp>
-        <p:nvSpPr>
-          <p:cNvPr id="8" name="TextBox 7"/>
-          <p:cNvSpPr txBox="1"/>
-          <p:nvPr/>
-        </p:nvSpPr>
-        <p:spPr>
-          <a:xfrm>
-            <a:off x="658368" y="2350008"/>
-            <a:ext cx="640080" cy="329184"/>
-          </a:xfrm>
-          <a:prstGeom prst="rect">
-            <a:avLst/>
-          </a:prstGeom>
-          <a:noFill/>
-        </p:spPr>
-        <p:txBody>
-          <a:bodyPr wrap="square" anchor="t" lIns="0" rIns="0" tIns="0" bIns="0"/>
-          <a:lstStyle/>
-          <a:p>
-            <a:pPr algn="l"/>
-            <a:r>
-              <a:rPr sz="1600" b="0" i="0" lang="zh-CN" altLang="en-US">
-                <a:solidFill>
-                  <a:srgbClr val="9E1B1B"/>
-                </a:solidFill>
-                <a:latin typeface="Noto Sans CJK SC Medium"/>
-                <a:ea typeface="Noto Sans CJK SC Medium"/>
-                <a:cs typeface="Noto Sans CJK SC Medium"/>
-              </a:rPr>
-              <a:t>02</a:t>
-            </a:r>
-          </a:p>
-        </p:txBody>
-      </p:sp>
-      <p:sp>
-        <p:nvSpPr>
-          <p:cNvPr id="9" name="TextBox 8"/>
-          <p:cNvSpPr txBox="1"/>
-          <p:nvPr/>
-        </p:nvSpPr>
-        <p:spPr>
-          <a:xfrm>
-            <a:off x="1417320" y="2331720"/>
-            <a:ext cx="9966960" cy="365760"/>
-          </a:xfrm>
-          <a:prstGeom prst="rect">
-            <a:avLst/>
-          </a:prstGeom>
-          <a:noFill/>
-        </p:spPr>
-        <p:txBody>
-          <a:bodyPr wrap="square" anchor="t" lIns="0" rIns="0" tIns="0" bIns="0"/>
-          <a:lstStyle/>
-          <a:p>
-            <a:pPr algn="l"/>
-            <a:r>
-              <a:rPr sz="2200" b="0" i="0" lang="zh-CN" altLang="en-US">
-                <a:solidFill>
-                  <a:srgbClr val="141414"/>
-                </a:solidFill>
-                <a:latin typeface="Noto Sans CJK SC Medium"/>
-                <a:ea typeface="Noto Sans CJK SC Medium"/>
-                <a:cs typeface="Noto Sans CJK SC Medium"/>
-              </a:rPr>
-              <a:t>中间不能熄火</a:t>
-            </a:r>
-          </a:p>
-        </p:txBody>
-      </p:sp>
-      <p:sp>
-        <p:nvSpPr>
-          <p:cNvPr id="10" name="TextBox 9"/>
-          <p:cNvSpPr txBox="1"/>
-          <p:nvPr/>
-        </p:nvSpPr>
-        <p:spPr>
-          <a:xfrm>
-            <a:off x="1417320" y="2770632"/>
-            <a:ext cx="9966960" cy="502920"/>
-          </a:xfrm>
-          <a:prstGeom prst="rect">
-            <a:avLst/>
-          </a:prstGeom>
-          <a:noFill/>
-        </p:spPr>
-        <p:txBody>
-          <a:bodyPr wrap="square" anchor="t" lIns="0" rIns="0" tIns="0" bIns="0"/>
-          <a:lstStyle/>
-          <a:p>
-            <a:pPr algn="l"/>
-            <a:r>
-              <a:rPr sz="1600" b="0" i="0" lang="zh-CN" altLang="en-US">
-                <a:solidFill>
-                  <a:srgbClr val="2C2C2C"/>
-                </a:solidFill>
-                <a:latin typeface="Noto Sans CJK SC"/>
-                <a:ea typeface="Noto Sans CJK SC"/>
-                <a:cs typeface="Noto Sans CJK SC"/>
-              </a:rPr>
-              <a:t>钢铁厂从原料到成品不能中断。干燥、切断、运去别处再运回，都是中间熄火。</a:t>
-            </a:r>
-          </a:p>
-        </p:txBody>
-      </p:sp>
-      <p:sp>
-        <p:nvSpPr>
-          <p:cNvPr id="11" name="TextBox 10"/>
-          <p:cNvSpPr txBox="1"/>
-          <p:nvPr/>
-        </p:nvSpPr>
-        <p:spPr>
-          <a:xfrm>
-            <a:off x="658368" y="3465576"/>
-            <a:ext cx="640080" cy="329184"/>
-          </a:xfrm>
-          <a:prstGeom prst="rect">
-            <a:avLst/>
-          </a:prstGeom>
-          <a:noFill/>
-        </p:spPr>
-        <p:txBody>
-          <a:bodyPr wrap="square" anchor="t" lIns="0" rIns="0" tIns="0" bIns="0"/>
-          <a:lstStyle/>
-          <a:p>
-            <a:pPr algn="l"/>
-            <a:r>
-              <a:rPr sz="1600" b="0" i="0" lang="zh-CN" altLang="en-US">
-                <a:solidFill>
-                  <a:srgbClr val="9E1B1B"/>
-                </a:solidFill>
-                <a:latin typeface="Noto Sans CJK SC Medium"/>
-                <a:ea typeface="Noto Sans CJK SC Medium"/>
-                <a:cs typeface="Noto Sans CJK SC Medium"/>
-              </a:rPr>
-              <a:t>03</a:t>
-            </a:r>
-          </a:p>
-        </p:txBody>
-      </p:sp>
-      <p:sp>
-        <p:nvSpPr>
-          <p:cNvPr id="12" name="TextBox 11"/>
-          <p:cNvSpPr txBox="1"/>
-          <p:nvPr/>
-        </p:nvSpPr>
-        <p:spPr>
-          <a:xfrm>
-            <a:off x="1417320" y="3447288"/>
-            <a:ext cx="9966960" cy="365760"/>
-          </a:xfrm>
-          <a:prstGeom prst="rect">
-            <a:avLst/>
-          </a:prstGeom>
-          <a:noFill/>
-        </p:spPr>
-        <p:txBody>
-          <a:bodyPr wrap="square" anchor="t" lIns="0" rIns="0" tIns="0" bIns="0"/>
-          <a:lstStyle/>
-          <a:p>
-            <a:pPr algn="l"/>
-            <a:r>
-              <a:rPr sz="2200" b="0" i="0" lang="zh-CN" altLang="en-US">
-                <a:solidFill>
-                  <a:srgbClr val="141414"/>
-                </a:solidFill>
-                <a:latin typeface="Noto Sans CJK SC Medium"/>
-                <a:ea typeface="Noto Sans CJK SC Medium"/>
-                <a:cs typeface="Noto Sans CJK SC Medium"/>
-              </a:rPr>
-              <a:t>一次写完</a:t>
-            </a:r>
-          </a:p>
-        </p:txBody>
-      </p:sp>
-      <p:sp>
-        <p:nvSpPr>
-          <p:cNvPr id="13" name="TextBox 12"/>
-          <p:cNvSpPr txBox="1"/>
-          <p:nvPr/>
-        </p:nvSpPr>
-        <p:spPr>
-          <a:xfrm>
-            <a:off x="1417320" y="3886200"/>
-            <a:ext cx="9966960" cy="502920"/>
-          </a:xfrm>
-          <a:prstGeom prst="rect">
-            <a:avLst/>
-          </a:prstGeom>
-          <a:noFill/>
-        </p:spPr>
-        <p:txBody>
-          <a:bodyPr wrap="square" anchor="t" lIns="0" rIns="0" tIns="0" bIns="0"/>
-          <a:lstStyle/>
-          <a:p>
-            <a:pPr algn="l"/>
-            <a:r>
-              <a:rPr sz="1600" b="0" i="0" lang="zh-CN" altLang="en-US">
-                <a:solidFill>
-                  <a:srgbClr val="2C2C2C"/>
-                </a:solidFill>
-                <a:latin typeface="Noto Sans CJK SC"/>
-                <a:ea typeface="Noto Sans CJK SC"/>
-                <a:cs typeface="Noto Sans CJK SC"/>
-              </a:rPr>
-              <a:t>这个产品、这条工序、中文骨架、对这个人的那句话、每天打开的那一件，写在同一次企划里。</a:t>
-            </a:r>
-          </a:p>
-        </p:txBody>
-      </p:sp>
-      <p:sp>
-        <p:nvSpPr>
-          <p:cNvPr id="14" name="Rectangle 13"/>
-          <p:cNvSpPr/>
-          <p:nvPr/>
-        </p:nvSpPr>
-        <p:spPr>
-          <a:xfrm>
-            <a:off x="658368" y="4754880"/>
-            <a:ext cx="10881360" cy="10972"/>
-          </a:xfrm>
-          <a:prstGeom prst="rect">
-            <a:avLst/>
-          </a:prstGeom>
-          <a:solidFill>
-            <a:srgbClr val="E2E2E2"/>
-          </a:solidFill>
-          <a:ln>
-            <a:noFill/>
-          </a:ln>
-        </p:spPr>
-        <p:style>
-          <a:lnRef idx="1">
-            <a:schemeClr val="accent1"/>
-          </a:lnRef>
-          <a:fillRef idx="3">
-            <a:schemeClr val="accent1"/>
-          </a:fillRef>
-          <a:effectRef idx="2">
-            <a:schemeClr val="accent1"/>
-          </a:effectRef>
-          <a:fontRef idx="minor">
-            <a:schemeClr val="lt1"/>
-          </a:fontRef>
-        </p:style>
-        <p:txBody>
-          <a:bodyPr rtlCol="0" anchor="ctr"/>
-          <a:lstStyle/>
-          <a:p>
-            <a:pPr algn="ctr"/>
-          </a:p>
-        </p:txBody>
-      </p:sp>
-      <p:sp>
-        <p:nvSpPr>
-          <p:cNvPr id="15" name="TextBox 14"/>
-          <p:cNvSpPr txBox="1"/>
-          <p:nvPr/>
-        </p:nvSpPr>
-        <p:spPr>
-          <a:xfrm>
-            <a:off x="658368" y="4983480"/>
-            <a:ext cx="10789920" cy="1005840"/>
-          </a:xfrm>
-          <a:prstGeom prst="rect">
-            <a:avLst/>
-          </a:prstGeom>
-          <a:noFill/>
-        </p:spPr>
-        <p:txBody>
-          <a:bodyPr wrap="square" anchor="t" lIns="0" rIns="0" tIns="0" bIns="0"/>
-          <a:lstStyle/>
-          <a:p>
-            <a:pPr algn="l">
-              <a:lnSpc>
-                <a:spcPct val="130000"/>
-              </a:lnSpc>
-            </a:pPr>
-            <a:r>
-              <a:rPr sz="2200" b="0" i="0" lang="zh-CN" altLang="en-US">
-                <a:solidFill>
-                  <a:srgbClr val="9E1B1B"/>
-                </a:solidFill>
-                <a:latin typeface="Noto Sans CJK SC Medium"/>
-                <a:ea typeface="Noto Sans CJK SC Medium"/>
-                <a:cs typeface="Noto Sans CJK SC Medium"/>
-              </a:rPr>
-              <a:t>中国法人先出货、再补内容、再办培训，
-链就在企划上断了。</a:t>
-            </a:r>
-          </a:p>
-        </p:txBody>
-      </p:sp>
-      <p:sp>
-        <p:nvSpPr>
-          <p:cNvPr id="16" name="TextBox 15"/>
-          <p:cNvSpPr txBox="1"/>
-          <p:nvPr/>
-        </p:nvSpPr>
-        <p:spPr>
-          <a:xfrm>
-            <a:off x="10561320" y="6492240"/>
-            <a:ext cx="1051560" cy="201168"/>
-          </a:xfrm>
-          <a:prstGeom prst="rect">
-            <a:avLst/>
-          </a:prstGeom>
-          <a:noFill/>
-        </p:spPr>
-        <p:txBody>
-          <a:bodyPr wrap="square" anchor="t" lIns="0" rIns="0" tIns="0" bIns="0"/>
-          <a:lstStyle/>
-          <a:p>
-            <a:pPr algn="r"/>
-            <a:r>
-              <a:rPr sz="1100" b="0" i="0" lang="zh-CN" altLang="en-US">
-                <a:solidFill>
-                  <a:srgbClr val="C8C8C8"/>
-                </a:solidFill>
-                <a:latin typeface="Noto Sans CJK SC"/>
-                <a:ea typeface="Noto Sans CJK SC"/>
-                <a:cs typeface="Noto Sans CJK SC"/>
-              </a:rPr>
-              <a:t>13</a:t>
-            </a:r>
-          </a:p>
-        </p:txBody>
-      </p:sp>
-    </p:spTree>
-  </p:cSld>
-  <p:clrMapOvr>
-    <a:masterClrMapping/>
-  </p:clrMapOvr>
-</p:sld>
-</file>
-
-<file path=ppt/slides/slide14.xml><?xml version="1.0" encoding="utf-8"?>
-<p:sld xmlns:a="http://schemas.openxmlformats.org/drawingml/2006/main" xmlns:p="http://schemas.openxmlformats.org/presentationml/2006/main" xmlns:r="http://schemas.openxmlformats.org/officeDocument/2006/relationships">
-  <p:cSld>
-    <p:bg>
-      <p:bgPr>
-        <a:solidFill>
-          <a:srgbClr val="FFFFFF"/>
-        </a:solidFill>
-        <a:effectLst/>
-      </p:bgPr>
-    </p:bg>
-    <p:spTree>
-      <p:nvGrpSpPr>
-        <p:cNvPr id="1" name=""/>
-        <p:cNvGrpSpPr/>
-        <p:nvPr/>
-      </p:nvGrpSpPr>
-      <p:grpSpPr/>
-      <p:sp>
-        <p:nvSpPr>
-          <p:cNvPr id="2" name="TextBox 1"/>
-          <p:cNvSpPr txBox="1"/>
-          <p:nvPr/>
-        </p:nvSpPr>
-        <p:spPr>
-          <a:xfrm>
-            <a:off x="658368" y="365760"/>
-            <a:ext cx="640080" cy="329184"/>
-          </a:xfrm>
-          <a:prstGeom prst="rect">
-            <a:avLst/>
-          </a:prstGeom>
-          <a:noFill/>
-        </p:spPr>
-        <p:txBody>
-          <a:bodyPr wrap="square" anchor="t" lIns="0" rIns="0" tIns="0" bIns="0"/>
-          <a:lstStyle/>
-          <a:p>
-            <a:pPr algn="l"/>
-            <a:r>
-              <a:rPr sz="1500" b="0" i="0" lang="zh-CN" altLang="en-US">
-                <a:solidFill>
-                  <a:srgbClr val="9E1B1B"/>
-                </a:solidFill>
-                <a:latin typeface="Noto Sans CJK SC Medium"/>
-                <a:ea typeface="Noto Sans CJK SC Medium"/>
-                <a:cs typeface="Noto Sans CJK SC Medium"/>
-              </a:rPr>
-              <a:t>13</a:t>
-            </a:r>
-          </a:p>
-        </p:txBody>
-      </p:sp>
-      <p:sp>
-        <p:nvSpPr>
-          <p:cNvPr id="3" name="TextBox 2"/>
-          <p:cNvSpPr txBox="1"/>
-          <p:nvPr/>
-        </p:nvSpPr>
-        <p:spPr>
-          <a:xfrm>
-            <a:off x="1371600" y="310896"/>
-            <a:ext cx="10058400" cy="438912"/>
-          </a:xfrm>
-          <a:prstGeom prst="rect">
-            <a:avLst/>
-          </a:prstGeom>
-          <a:noFill/>
-        </p:spPr>
-        <p:txBody>
-          <a:bodyPr wrap="square" anchor="t" lIns="0" rIns="0" tIns="0" bIns="0"/>
-          <a:lstStyle/>
-          <a:p>
-            <a:pPr algn="l"/>
-            <a:r>
-              <a:rPr sz="3000" b="0" i="0" lang="zh-CN" altLang="en-US">
-                <a:solidFill>
-                  <a:srgbClr val="141414"/>
-                </a:solidFill>
-                <a:latin typeface="Noto Sans CJK SC Medium"/>
-                <a:ea typeface="Noto Sans CJK SC Medium"/>
-                <a:cs typeface="Noto Sans CJK SC Medium"/>
-              </a:rPr>
-              <a:t>三步：做什么，交什么，谁牵头</a:t>
-            </a:r>
-          </a:p>
-        </p:txBody>
-      </p:sp>
-      <p:sp>
-        <p:nvSpPr>
-          <p:cNvPr id="4" name="Rectangle 3"/>
-          <p:cNvSpPr/>
-          <p:nvPr/>
-        </p:nvSpPr>
-        <p:spPr>
-          <a:xfrm>
-            <a:off x="658368" y="960120"/>
-            <a:ext cx="10881360" cy="10972"/>
-          </a:xfrm>
-          <a:prstGeom prst="rect">
-            <a:avLst/>
-          </a:prstGeom>
-          <a:solidFill>
-            <a:srgbClr val="E2E2E2"/>
-          </a:solidFill>
-          <a:ln>
-            <a:noFill/>
-          </a:ln>
-        </p:spPr>
-        <p:style>
-          <a:lnRef idx="1">
-            <a:schemeClr val="accent1"/>
-          </a:lnRef>
-          <a:fillRef idx="3">
-            <a:schemeClr val="accent1"/>
-          </a:fillRef>
-          <a:effectRef idx="2">
-            <a:schemeClr val="accent1"/>
-          </a:effectRef>
-          <a:fontRef idx="minor">
-            <a:schemeClr val="lt1"/>
-          </a:fontRef>
-        </p:style>
-        <p:txBody>
-          <a:bodyPr rtlCol="0" anchor="ctr"/>
-          <a:lstStyle/>
-          <a:p>
-            <a:pPr algn="ctr"/>
-          </a:p>
-        </p:txBody>
-      </p:sp>
-      <p:sp>
-        <p:nvSpPr>
-          <p:cNvPr id="5" name="TextBox 4"/>
-          <p:cNvSpPr txBox="1"/>
-          <p:nvPr/>
-        </p:nvSpPr>
-        <p:spPr>
-          <a:xfrm>
-            <a:off x="658368" y="1188720"/>
-            <a:ext cx="3200400" cy="237744"/>
-          </a:xfrm>
-          <a:prstGeom prst="rect">
-            <a:avLst/>
-          </a:prstGeom>
-          <a:noFill/>
-        </p:spPr>
-        <p:txBody>
-          <a:bodyPr wrap="square" anchor="t" lIns="0" rIns="0" tIns="0" bIns="0"/>
-          <a:lstStyle/>
-          <a:p>
-            <a:pPr algn="l"/>
-            <a:r>
-              <a:rPr sz="1400" b="0" i="0" lang="zh-CN" altLang="en-US">
-                <a:solidFill>
-                  <a:srgbClr val="9E1B1B"/>
-                </a:solidFill>
-                <a:latin typeface="Noto Sans CJK SC Medium"/>
-                <a:ea typeface="Noto Sans CJK SC Medium"/>
-                <a:cs typeface="Noto Sans CJK SC Medium"/>
-              </a:rPr>
-              <a:t>01</a:t>
-            </a:r>
-          </a:p>
-        </p:txBody>
-      </p:sp>
-      <p:sp>
-        <p:nvSpPr>
-          <p:cNvPr id="6" name="TextBox 5"/>
-          <p:cNvSpPr txBox="1"/>
-          <p:nvPr/>
-        </p:nvSpPr>
-        <p:spPr>
-          <a:xfrm>
-            <a:off x="658368" y="1463040"/>
-            <a:ext cx="3291840" cy="457200"/>
-          </a:xfrm>
-          <a:prstGeom prst="rect">
-            <a:avLst/>
-          </a:prstGeom>
-          <a:noFill/>
-        </p:spPr>
-        <p:txBody>
-          <a:bodyPr wrap="square" anchor="t" lIns="0" rIns="0" tIns="0" bIns="0"/>
-          <a:lstStyle/>
-          <a:p>
-            <a:pPr algn="l"/>
-            <a:r>
-              <a:rPr sz="2200" b="0" i="0" lang="zh-CN" altLang="en-US">
-                <a:solidFill>
-                  <a:srgbClr val="141414"/>
-                </a:solidFill>
-                <a:latin typeface="Noto Sans CJK SC Medium"/>
-                <a:ea typeface="Noto Sans CJK SC Medium"/>
-                <a:cs typeface="Noto Sans CJK SC Medium"/>
-              </a:rPr>
-              <a:t>现在起</a:t>
-            </a:r>
-          </a:p>
-        </p:txBody>
-      </p:sp>
-      <p:sp>
-        <p:nvSpPr>
-          <p:cNvPr id="7" name="TextBox 6"/>
-          <p:cNvSpPr txBox="1"/>
-          <p:nvPr/>
-        </p:nvSpPr>
-        <p:spPr>
-          <a:xfrm>
-            <a:off x="658368" y="2057400"/>
-            <a:ext cx="3200400" cy="237744"/>
-          </a:xfrm>
-          <a:prstGeom prst="rect">
-            <a:avLst/>
-          </a:prstGeom>
-          <a:noFill/>
-        </p:spPr>
-        <p:txBody>
-          <a:bodyPr wrap="square" anchor="t" lIns="0" rIns="0" tIns="0" bIns="0"/>
-          <a:lstStyle/>
-          <a:p>
-            <a:pPr algn="l"/>
-            <a:r>
-              <a:rPr sz="1200" b="0" i="0" lang="zh-CN" altLang="en-US">
-                <a:solidFill>
-                  <a:srgbClr val="9E1B1B"/>
-                </a:solidFill>
-                <a:latin typeface="Noto Sans CJK SC"/>
-                <a:ea typeface="Noto Sans CJK SC"/>
-                <a:cs typeface="Noto Sans CJK SC"/>
-              </a:rPr>
-              <a:t>做什么</a:t>
-            </a:r>
-          </a:p>
-        </p:txBody>
-      </p:sp>
-      <p:sp>
-        <p:nvSpPr>
-          <p:cNvPr id="8" name="TextBox 7"/>
-          <p:cNvSpPr txBox="1"/>
-          <p:nvPr/>
-        </p:nvSpPr>
-        <p:spPr>
-          <a:xfrm>
-            <a:off x="658368" y="2304288"/>
-            <a:ext cx="3291840" cy="1280160"/>
-          </a:xfrm>
-          <a:prstGeom prst="rect">
-            <a:avLst/>
-          </a:prstGeom>
-          <a:noFill/>
-        </p:spPr>
-        <p:txBody>
-          <a:bodyPr wrap="square" anchor="t" lIns="0" rIns="0" tIns="0" bIns="0"/>
-          <a:lstStyle/>
-          <a:p>
-            <a:pPr algn="l">
-              <a:lnSpc>
-                <a:spcPct val="130000"/>
-              </a:lnSpc>
-            </a:pPr>
-            <a:r>
-              <a:rPr sz="1400" b="0" i="0" lang="zh-CN" altLang="en-US">
-                <a:solidFill>
-                  <a:srgbClr val="2C2C2C"/>
-                </a:solidFill>
-                <a:latin typeface="Noto Sans CJK SC"/>
-                <a:ea typeface="Noto Sans CJK SC"/>
-                <a:cs typeface="Noto Sans CJK SC"/>
-              </a:rPr>
-              <a:t>烟台四条线自查。
-定两件事：记录存哪里、
-哪句话能说。
-定 AZA 接哪张卡、哪张充电网。</a:t>
-            </a:r>
-          </a:p>
-        </p:txBody>
-      </p:sp>
-      <p:sp>
-        <p:nvSpPr>
-          <p:cNvPr id="9" name="TextBox 8"/>
-          <p:cNvSpPr txBox="1"/>
-          <p:nvPr/>
-        </p:nvSpPr>
-        <p:spPr>
-          <a:xfrm>
-            <a:off x="658368" y="3657600"/>
-            <a:ext cx="3200400" cy="237744"/>
-          </a:xfrm>
-          <a:prstGeom prst="rect">
-            <a:avLst/>
-          </a:prstGeom>
-          <a:noFill/>
-        </p:spPr>
-        <p:txBody>
-          <a:bodyPr wrap="square" anchor="t" lIns="0" rIns="0" tIns="0" bIns="0"/>
-          <a:lstStyle/>
-          <a:p>
-            <a:pPr algn="l"/>
-            <a:r>
-              <a:rPr sz="1200" b="0" i="0" lang="zh-CN" altLang="en-US">
-                <a:solidFill>
-                  <a:srgbClr val="9E1B1B"/>
-                </a:solidFill>
-                <a:latin typeface="Noto Sans CJK SC"/>
-                <a:ea typeface="Noto Sans CJK SC"/>
-                <a:cs typeface="Noto Sans CJK SC"/>
-              </a:rPr>
-              <a:t>交出什么</a:t>
-            </a:r>
-          </a:p>
-        </p:txBody>
-      </p:sp>
-      <p:sp>
-        <p:nvSpPr>
-          <p:cNvPr id="10" name="TextBox 9"/>
-          <p:cNvSpPr txBox="1"/>
-          <p:nvPr/>
-        </p:nvSpPr>
-        <p:spPr>
-          <a:xfrm>
-            <a:off x="658368" y="3904487"/>
-            <a:ext cx="3291840" cy="731520"/>
-          </a:xfrm>
-          <a:prstGeom prst="rect">
-            <a:avLst/>
-          </a:prstGeom>
-          <a:noFill/>
-        </p:spPr>
-        <p:txBody>
-          <a:bodyPr wrap="square" anchor="t" lIns="0" rIns="0" tIns="0" bIns="0"/>
-          <a:lstStyle/>
-          <a:p>
-            <a:pPr algn="l">
-              <a:lnSpc>
-                <a:spcPct val="130000"/>
-              </a:lnSpc>
-            </a:pPr>
-            <a:r>
-              <a:rPr sz="1400" b="0" i="0" lang="zh-CN" altLang="en-US">
-                <a:solidFill>
-                  <a:srgbClr val="2C2C2C"/>
-                </a:solidFill>
-                <a:latin typeface="Noto Sans CJK SC"/>
-                <a:ea typeface="Noto Sans CJK SC"/>
-                <a:cs typeface="Noto Sans CJK SC"/>
-              </a:rPr>
-              <a:t>自查单，
-两份书面口径。</a:t>
-            </a:r>
-          </a:p>
-        </p:txBody>
-      </p:sp>
-      <p:sp>
-        <p:nvSpPr>
-          <p:cNvPr id="11" name="TextBox 10"/>
-          <p:cNvSpPr txBox="1"/>
-          <p:nvPr/>
-        </p:nvSpPr>
-        <p:spPr>
-          <a:xfrm>
-            <a:off x="658368" y="4617720"/>
-            <a:ext cx="3200400" cy="237744"/>
-          </a:xfrm>
-          <a:prstGeom prst="rect">
-            <a:avLst/>
-          </a:prstGeom>
-          <a:noFill/>
-        </p:spPr>
-        <p:txBody>
-          <a:bodyPr wrap="square" anchor="t" lIns="0" rIns="0" tIns="0" bIns="0"/>
-          <a:lstStyle/>
-          <a:p>
-            <a:pPr algn="l"/>
-            <a:r>
-              <a:rPr sz="1200" b="0" i="0" lang="zh-CN" altLang="en-US">
-                <a:solidFill>
-                  <a:srgbClr val="9E1B1B"/>
-                </a:solidFill>
-                <a:latin typeface="Noto Sans CJK SC"/>
-                <a:ea typeface="Noto Sans CJK SC"/>
-                <a:cs typeface="Noto Sans CJK SC"/>
-              </a:rPr>
-              <a:t>建议牵头</a:t>
-            </a:r>
-          </a:p>
-        </p:txBody>
-      </p:sp>
-      <p:sp>
-        <p:nvSpPr>
-          <p:cNvPr id="12" name="TextBox 11"/>
-          <p:cNvSpPr txBox="1"/>
-          <p:nvPr/>
-        </p:nvSpPr>
-        <p:spPr>
-          <a:xfrm>
-            <a:off x="658368" y="4864608"/>
-            <a:ext cx="3291840" cy="365760"/>
-          </a:xfrm>
-          <a:prstGeom prst="rect">
-            <a:avLst/>
-          </a:prstGeom>
-          <a:noFill/>
-        </p:spPr>
-        <p:txBody>
-          <a:bodyPr wrap="square" anchor="t" lIns="0" rIns="0" tIns="0" bIns="0"/>
-          <a:lstStyle/>
-          <a:p>
-            <a:pPr algn="l"/>
-            <a:r>
-              <a:rPr sz="1400" b="0" i="0" lang="zh-CN" altLang="en-US">
-                <a:solidFill>
-                  <a:srgbClr val="2C2C2C"/>
-                </a:solidFill>
-                <a:latin typeface="Noto Sans CJK SC"/>
-                <a:ea typeface="Noto Sans CJK SC"/>
-                <a:cs typeface="Noto Sans CJK SC"/>
-              </a:rPr>
-              <a:t>生产、采购、合规</a:t>
-            </a:r>
-          </a:p>
-        </p:txBody>
-      </p:sp>
-      <p:sp>
-        <p:nvSpPr>
-          <p:cNvPr id="13" name="Rectangle 12"/>
-          <p:cNvSpPr/>
-          <p:nvPr/>
-        </p:nvSpPr>
-        <p:spPr>
-          <a:xfrm>
-            <a:off x="4160520" y="1188720"/>
-            <a:ext cx="10972" cy="3977639"/>
-          </a:xfrm>
-          <a:prstGeom prst="rect">
-            <a:avLst/>
-          </a:prstGeom>
-          <a:solidFill>
-            <a:srgbClr val="E2E2E2"/>
-          </a:solidFill>
-          <a:ln>
-            <a:noFill/>
-          </a:ln>
-        </p:spPr>
-        <p:style>
-          <a:lnRef idx="1">
-            <a:schemeClr val="accent1"/>
-          </a:lnRef>
-          <a:fillRef idx="3">
-            <a:schemeClr val="accent1"/>
-          </a:fillRef>
-          <a:effectRef idx="2">
-            <a:schemeClr val="accent1"/>
-          </a:effectRef>
-          <a:fontRef idx="minor">
-            <a:schemeClr val="lt1"/>
-          </a:fontRef>
-        </p:style>
-        <p:txBody>
-          <a:bodyPr rtlCol="0" anchor="ctr"/>
-          <a:lstStyle/>
-          <a:p>
-            <a:pPr algn="ctr"/>
-          </a:p>
-        </p:txBody>
-      </p:sp>
-      <p:sp>
-        <p:nvSpPr>
-          <p:cNvPr id="14" name="TextBox 13"/>
-          <p:cNvSpPr txBox="1"/>
-          <p:nvPr/>
-        </p:nvSpPr>
-        <p:spPr>
-          <a:xfrm>
-            <a:off x="4361688" y="1188720"/>
-            <a:ext cx="3200400" cy="237744"/>
-          </a:xfrm>
-          <a:prstGeom prst="rect">
-            <a:avLst/>
-          </a:prstGeom>
-          <a:noFill/>
-        </p:spPr>
-        <p:txBody>
-          <a:bodyPr wrap="square" anchor="t" lIns="0" rIns="0" tIns="0" bIns="0"/>
-          <a:lstStyle/>
-          <a:p>
-            <a:pPr algn="l"/>
-            <a:r>
-              <a:rPr sz="1400" b="0" i="0" lang="zh-CN" altLang="en-US">
-                <a:solidFill>
-                  <a:srgbClr val="9E1B1B"/>
-                </a:solidFill>
-                <a:latin typeface="Noto Sans CJK SC Medium"/>
-                <a:ea typeface="Noto Sans CJK SC Medium"/>
-                <a:cs typeface="Noto Sans CJK SC Medium"/>
-              </a:rPr>
-              <a:t>02</a:t>
-            </a:r>
-          </a:p>
-        </p:txBody>
-      </p:sp>
-      <p:sp>
-        <p:nvSpPr>
-          <p:cNvPr id="15" name="TextBox 14"/>
-          <p:cNvSpPr txBox="1"/>
-          <p:nvPr/>
-        </p:nvSpPr>
-        <p:spPr>
-          <a:xfrm>
-            <a:off x="4361688" y="1463040"/>
-            <a:ext cx="3291840" cy="457200"/>
-          </a:xfrm>
-          <a:prstGeom prst="rect">
-            <a:avLst/>
-          </a:prstGeom>
-          <a:noFill/>
-        </p:spPr>
-        <p:txBody>
-          <a:bodyPr wrap="square" anchor="t" lIns="0" rIns="0" tIns="0" bIns="0"/>
-          <a:lstStyle/>
-          <a:p>
-            <a:pPr algn="l"/>
-            <a:r>
-              <a:rPr sz="2200" b="0" i="0" lang="zh-CN" altLang="en-US">
-                <a:solidFill>
-                  <a:srgbClr val="141414"/>
-                </a:solidFill>
-                <a:latin typeface="Noto Sans CJK SC Medium"/>
-                <a:ea typeface="Noto Sans CJK SC Medium"/>
-                <a:cs typeface="Noto Sans CJK SC Medium"/>
-              </a:rPr>
-              <a:t>带去合作方</a:t>
-            </a:r>
-          </a:p>
-        </p:txBody>
-      </p:sp>
-      <p:sp>
-        <p:nvSpPr>
-          <p:cNvPr id="16" name="TextBox 15"/>
-          <p:cNvSpPr txBox="1"/>
-          <p:nvPr/>
-        </p:nvSpPr>
-        <p:spPr>
-          <a:xfrm>
-            <a:off x="4361688" y="2057400"/>
-            <a:ext cx="3200400" cy="237744"/>
-          </a:xfrm>
-          <a:prstGeom prst="rect">
-            <a:avLst/>
-          </a:prstGeom>
-          <a:noFill/>
-        </p:spPr>
-        <p:txBody>
-          <a:bodyPr wrap="square" anchor="t" lIns="0" rIns="0" tIns="0" bIns="0"/>
-          <a:lstStyle/>
-          <a:p>
-            <a:pPr algn="l"/>
-            <a:r>
-              <a:rPr sz="1200" b="0" i="0" lang="zh-CN" altLang="en-US">
-                <a:solidFill>
-                  <a:srgbClr val="9E1B1B"/>
-                </a:solidFill>
-                <a:latin typeface="Noto Sans CJK SC"/>
-                <a:ea typeface="Noto Sans CJK SC"/>
-                <a:cs typeface="Noto Sans CJK SC"/>
-              </a:rPr>
-              <a:t>做什么</a:t>
-            </a:r>
-          </a:p>
-        </p:txBody>
-      </p:sp>
-      <p:sp>
-        <p:nvSpPr>
-          <p:cNvPr id="17" name="TextBox 16"/>
-          <p:cNvSpPr txBox="1"/>
-          <p:nvPr/>
-        </p:nvSpPr>
-        <p:spPr>
-          <a:xfrm>
-            <a:off x="4361688" y="2304288"/>
-            <a:ext cx="3291840" cy="1280160"/>
-          </a:xfrm>
-          <a:prstGeom prst="rect">
-            <a:avLst/>
-          </a:prstGeom>
-          <a:noFill/>
-        </p:spPr>
-        <p:txBody>
-          <a:bodyPr wrap="square" anchor="t" lIns="0" rIns="0" tIns="0" bIns="0"/>
-          <a:lstStyle/>
-          <a:p>
-            <a:pPr algn="l">
-              <a:lnSpc>
-                <a:spcPct val="130000"/>
-              </a:lnSpc>
-            </a:pPr>
-            <a:r>
-              <a:rPr sz="1400" b="0" i="0" lang="zh-CN" altLang="en-US">
-                <a:solidFill>
-                  <a:srgbClr val="2C2C2C"/>
-                </a:solidFill>
-                <a:latin typeface="Noto Sans CJK SC"/>
-                <a:ea typeface="Noto Sans CJK SC"/>
-                <a:cs typeface="Noto Sans CJK SC"/>
-              </a:rPr>
-              <a:t>拿三样去谈：
-月十万套的数、
-设备图纸、
-育苗就开始的合同。</a:t>
-            </a:r>
-          </a:p>
-        </p:txBody>
-      </p:sp>
-      <p:sp>
-        <p:nvSpPr>
-          <p:cNvPr id="18" name="TextBox 17"/>
-          <p:cNvSpPr txBox="1"/>
-          <p:nvPr/>
-        </p:nvSpPr>
-        <p:spPr>
-          <a:xfrm>
-            <a:off x="4361688" y="3657600"/>
-            <a:ext cx="3200400" cy="237744"/>
-          </a:xfrm>
-          <a:prstGeom prst="rect">
-            <a:avLst/>
-          </a:prstGeom>
-          <a:noFill/>
-        </p:spPr>
-        <p:txBody>
-          <a:bodyPr wrap="square" anchor="t" lIns="0" rIns="0" tIns="0" bIns="0"/>
-          <a:lstStyle/>
-          <a:p>
-            <a:pPr algn="l"/>
-            <a:r>
-              <a:rPr sz="1200" b="0" i="0" lang="zh-CN" altLang="en-US">
-                <a:solidFill>
-                  <a:srgbClr val="9E1B1B"/>
-                </a:solidFill>
-                <a:latin typeface="Noto Sans CJK SC"/>
-                <a:ea typeface="Noto Sans CJK SC"/>
-                <a:cs typeface="Noto Sans CJK SC"/>
-              </a:rPr>
-              <a:t>交出什么</a:t>
-            </a:r>
-          </a:p>
-        </p:txBody>
-      </p:sp>
-      <p:sp>
-        <p:nvSpPr>
-          <p:cNvPr id="19" name="TextBox 18"/>
-          <p:cNvSpPr txBox="1"/>
-          <p:nvPr/>
-        </p:nvSpPr>
-        <p:spPr>
-          <a:xfrm>
-            <a:off x="4361688" y="3904487"/>
-            <a:ext cx="3291840" cy="731520"/>
-          </a:xfrm>
-          <a:prstGeom prst="rect">
-            <a:avLst/>
-          </a:prstGeom>
-          <a:noFill/>
-        </p:spPr>
-        <p:txBody>
-          <a:bodyPr wrap="square" anchor="t" lIns="0" rIns="0" tIns="0" bIns="0"/>
-          <a:lstStyle/>
-          <a:p>
-            <a:pPr algn="l">
-              <a:lnSpc>
-                <a:spcPct val="130000"/>
-              </a:lnSpc>
-            </a:pPr>
-            <a:r>
-              <a:rPr sz="1400" b="0" i="0" lang="zh-CN" altLang="en-US">
-                <a:solidFill>
-                  <a:srgbClr val="2C2C2C"/>
-                </a:solidFill>
-                <a:latin typeface="Noto Sans CJK SC"/>
-                <a:ea typeface="Noto Sans CJK SC"/>
-                <a:cs typeface="Noto Sans CJK SC"/>
-              </a:rPr>
-              <a:t>一份按量重算的报价，
-一份栽培合同。</a:t>
-            </a:r>
-          </a:p>
-        </p:txBody>
-      </p:sp>
-      <p:sp>
-        <p:nvSpPr>
-          <p:cNvPr id="20" name="TextBox 19"/>
-          <p:cNvSpPr txBox="1"/>
-          <p:nvPr/>
-        </p:nvSpPr>
-        <p:spPr>
-          <a:xfrm>
-            <a:off x="4361688" y="4617720"/>
-            <a:ext cx="3200400" cy="237744"/>
-          </a:xfrm>
-          <a:prstGeom prst="rect">
-            <a:avLst/>
-          </a:prstGeom>
-          <a:noFill/>
-        </p:spPr>
-        <p:txBody>
-          <a:bodyPr wrap="square" anchor="t" lIns="0" rIns="0" tIns="0" bIns="0"/>
-          <a:lstStyle/>
-          <a:p>
-            <a:pPr algn="l"/>
-            <a:r>
-              <a:rPr sz="1200" b="0" i="0" lang="zh-CN" altLang="en-US">
-                <a:solidFill>
-                  <a:srgbClr val="9E1B1B"/>
-                </a:solidFill>
-                <a:latin typeface="Noto Sans CJK SC"/>
-                <a:ea typeface="Noto Sans CJK SC"/>
-                <a:cs typeface="Noto Sans CJK SC"/>
-              </a:rPr>
-              <a:t>建议牵头</a:t>
-            </a:r>
-          </a:p>
-        </p:txBody>
-      </p:sp>
-      <p:sp>
-        <p:nvSpPr>
-          <p:cNvPr id="21" name="TextBox 20"/>
-          <p:cNvSpPr txBox="1"/>
-          <p:nvPr/>
-        </p:nvSpPr>
-        <p:spPr>
-          <a:xfrm>
-            <a:off x="4361688" y="4864608"/>
-            <a:ext cx="3291840" cy="365760"/>
-          </a:xfrm>
-          <a:prstGeom prst="rect">
-            <a:avLst/>
-          </a:prstGeom>
-          <a:noFill/>
-        </p:spPr>
-        <p:txBody>
-          <a:bodyPr wrap="square" anchor="t" lIns="0" rIns="0" tIns="0" bIns="0"/>
-          <a:lstStyle/>
-          <a:p>
-            <a:pPr algn="l"/>
-            <a:r>
-              <a:rPr sz="1400" b="0" i="0" lang="zh-CN" altLang="en-US">
-                <a:solidFill>
-                  <a:srgbClr val="2C2C2C"/>
-                </a:solidFill>
-                <a:latin typeface="Noto Sans CJK SC"/>
-                <a:ea typeface="Noto Sans CJK SC"/>
-                <a:cs typeface="Noto Sans CJK SC"/>
-              </a:rPr>
-              <a:t>采购、企划</a:t>
-            </a:r>
-          </a:p>
-        </p:txBody>
-      </p:sp>
-      <p:sp>
-        <p:nvSpPr>
-          <p:cNvPr id="22" name="Rectangle 21"/>
-          <p:cNvSpPr/>
-          <p:nvPr/>
-        </p:nvSpPr>
-        <p:spPr>
-          <a:xfrm>
-            <a:off x="7863840" y="1188720"/>
-            <a:ext cx="10972" cy="3977639"/>
-          </a:xfrm>
-          <a:prstGeom prst="rect">
-            <a:avLst/>
-          </a:prstGeom>
-          <a:solidFill>
-            <a:srgbClr val="E2E2E2"/>
-          </a:solidFill>
-          <a:ln>
-            <a:noFill/>
-          </a:ln>
-        </p:spPr>
-        <p:style>
-          <a:lnRef idx="1">
-            <a:schemeClr val="accent1"/>
-          </a:lnRef>
-          <a:fillRef idx="3">
-            <a:schemeClr val="accent1"/>
-          </a:fillRef>
-          <a:effectRef idx="2">
-            <a:schemeClr val="accent1"/>
-          </a:effectRef>
-          <a:fontRef idx="minor">
-            <a:schemeClr val="lt1"/>
-          </a:fontRef>
-        </p:style>
-        <p:txBody>
-          <a:bodyPr rtlCol="0" anchor="ctr"/>
-          <a:lstStyle/>
-          <a:p>
-            <a:pPr algn="ctr"/>
-          </a:p>
-        </p:txBody>
-      </p:sp>
-      <p:sp>
-        <p:nvSpPr>
-          <p:cNvPr id="23" name="TextBox 22"/>
-          <p:cNvSpPr txBox="1"/>
-          <p:nvPr/>
-        </p:nvSpPr>
-        <p:spPr>
-          <a:xfrm>
-            <a:off x="8065008" y="1188720"/>
-            <a:ext cx="3200400" cy="237744"/>
-          </a:xfrm>
-          <a:prstGeom prst="rect">
-            <a:avLst/>
-          </a:prstGeom>
-          <a:noFill/>
-        </p:spPr>
-        <p:txBody>
-          <a:bodyPr wrap="square" anchor="t" lIns="0" rIns="0" tIns="0" bIns="0"/>
-          <a:lstStyle/>
-          <a:p>
-            <a:pPr algn="l"/>
-            <a:r>
-              <a:rPr sz="1400" b="0" i="0" lang="zh-CN" altLang="en-US">
-                <a:solidFill>
-                  <a:srgbClr val="9E1B1B"/>
-                </a:solidFill>
-                <a:latin typeface="Noto Sans CJK SC Medium"/>
-                <a:ea typeface="Noto Sans CJK SC Medium"/>
-                <a:cs typeface="Noto Sans CJK SC Medium"/>
-              </a:rPr>
-              <a:t>03</a:t>
-            </a:r>
-          </a:p>
-        </p:txBody>
-      </p:sp>
-      <p:sp>
-        <p:nvSpPr>
-          <p:cNvPr id="24" name="TextBox 23"/>
-          <p:cNvSpPr txBox="1"/>
-          <p:nvPr/>
-        </p:nvSpPr>
-        <p:spPr>
-          <a:xfrm>
-            <a:off x="8065008" y="1463040"/>
-            <a:ext cx="3291840" cy="457200"/>
-          </a:xfrm>
-          <a:prstGeom prst="rect">
-            <a:avLst/>
-          </a:prstGeom>
-          <a:noFill/>
-        </p:spPr>
-        <p:txBody>
-          <a:bodyPr wrap="square" anchor="t" lIns="0" rIns="0" tIns="0" bIns="0"/>
-          <a:lstStyle/>
-          <a:p>
-            <a:pPr algn="l"/>
-            <a:r>
-              <a:rPr sz="2200" b="0" i="0" lang="zh-CN" altLang="en-US">
-                <a:solidFill>
-                  <a:srgbClr val="141414"/>
-                </a:solidFill>
-                <a:latin typeface="Noto Sans CJK SC Medium"/>
-                <a:ea typeface="Noto Sans CJK SC Medium"/>
-                <a:cs typeface="Noto Sans CJK SC Medium"/>
-              </a:rPr>
-              <a:t>明年年底前</a:t>
-            </a:r>
-          </a:p>
-        </p:txBody>
-      </p:sp>
-      <p:sp>
-        <p:nvSpPr>
-          <p:cNvPr id="25" name="TextBox 24"/>
-          <p:cNvSpPr txBox="1"/>
-          <p:nvPr/>
-        </p:nvSpPr>
-        <p:spPr>
-          <a:xfrm>
-            <a:off x="8065008" y="2057400"/>
-            <a:ext cx="3200400" cy="237744"/>
-          </a:xfrm>
-          <a:prstGeom prst="rect">
-            <a:avLst/>
-          </a:prstGeom>
-          <a:noFill/>
-        </p:spPr>
-        <p:txBody>
-          <a:bodyPr wrap="square" anchor="t" lIns="0" rIns="0" tIns="0" bIns="0"/>
-          <a:lstStyle/>
-          <a:p>
-            <a:pPr algn="l"/>
-            <a:r>
-              <a:rPr sz="1200" b="0" i="0" lang="zh-CN" altLang="en-US">
-                <a:solidFill>
-                  <a:srgbClr val="9E1B1B"/>
-                </a:solidFill>
-                <a:latin typeface="Noto Sans CJK SC"/>
-                <a:ea typeface="Noto Sans CJK SC"/>
-                <a:cs typeface="Noto Sans CJK SC"/>
-              </a:rPr>
-              <a:t>做什么</a:t>
-            </a:r>
-          </a:p>
-        </p:txBody>
-      </p:sp>
-      <p:sp>
-        <p:nvSpPr>
-          <p:cNvPr id="26" name="TextBox 25"/>
-          <p:cNvSpPr txBox="1"/>
-          <p:nvPr/>
-        </p:nvSpPr>
-        <p:spPr>
-          <a:xfrm>
-            <a:off x="8065008" y="2304288"/>
-            <a:ext cx="3291840" cy="1280160"/>
-          </a:xfrm>
-          <a:prstGeom prst="rect">
-            <a:avLst/>
-          </a:prstGeom>
-          <a:noFill/>
-        </p:spPr>
-        <p:txBody>
-          <a:bodyPr wrap="square" anchor="t" lIns="0" rIns="0" tIns="0" bIns="0"/>
-          <a:lstStyle/>
-          <a:p>
-            <a:pPr algn="l">
-              <a:lnSpc>
-                <a:spcPct val="130000"/>
-              </a:lnSpc>
-            </a:pPr>
-            <a:r>
-              <a:rPr sz="1400" b="0" i="0" lang="zh-CN" altLang="en-US">
-                <a:solidFill>
-                  <a:srgbClr val="2C2C2C"/>
-                </a:solidFill>
-                <a:latin typeface="Noto Sans CJK SC"/>
-                <a:ea typeface="Noto Sans CJK SC"/>
-                <a:cs typeface="Noto Sans CJK SC"/>
-              </a:rPr>
-              <a:t>中文骨架，
-一百到二百支上线。
-首页只摆两样。
-语音只确认这两样。</a:t>
-            </a:r>
-          </a:p>
-        </p:txBody>
-      </p:sp>
-      <p:sp>
-        <p:nvSpPr>
-          <p:cNvPr id="27" name="TextBox 26"/>
-          <p:cNvSpPr txBox="1"/>
-          <p:nvPr/>
-        </p:nvSpPr>
-        <p:spPr>
-          <a:xfrm>
-            <a:off x="8065008" y="3657600"/>
-            <a:ext cx="3200400" cy="237744"/>
-          </a:xfrm>
-          <a:prstGeom prst="rect">
-            <a:avLst/>
-          </a:prstGeom>
-          <a:noFill/>
-        </p:spPr>
-        <p:txBody>
-          <a:bodyPr wrap="square" anchor="t" lIns="0" rIns="0" tIns="0" bIns="0"/>
-          <a:lstStyle/>
-          <a:p>
-            <a:pPr algn="l"/>
-            <a:r>
-              <a:rPr sz="1200" b="0" i="0" lang="zh-CN" altLang="en-US">
-                <a:solidFill>
-                  <a:srgbClr val="9E1B1B"/>
-                </a:solidFill>
-                <a:latin typeface="Noto Sans CJK SC"/>
-                <a:ea typeface="Noto Sans CJK SC"/>
-                <a:cs typeface="Noto Sans CJK SC"/>
-              </a:rPr>
-              <a:t>交出什么</a:t>
-            </a:r>
-          </a:p>
-        </p:txBody>
-      </p:sp>
-      <p:sp>
-        <p:nvSpPr>
-          <p:cNvPr id="28" name="TextBox 27"/>
-          <p:cNvSpPr txBox="1"/>
-          <p:nvPr/>
-        </p:nvSpPr>
-        <p:spPr>
-          <a:xfrm>
-            <a:off x="8065008" y="3904487"/>
-            <a:ext cx="3291840" cy="731520"/>
-          </a:xfrm>
-          <a:prstGeom prst="rect">
-            <a:avLst/>
-          </a:prstGeom>
-          <a:noFill/>
-        </p:spPr>
-        <p:txBody>
-          <a:bodyPr wrap="square" anchor="t" lIns="0" rIns="0" tIns="0" bIns="0"/>
-          <a:lstStyle/>
-          <a:p>
-            <a:pPr algn="l">
-              <a:lnSpc>
-                <a:spcPct val="130000"/>
-              </a:lnSpc>
-            </a:pPr>
-            <a:r>
-              <a:rPr sz="1400" b="0" i="0" lang="zh-CN" altLang="en-US">
-                <a:solidFill>
-                  <a:srgbClr val="2C2C2C"/>
-                </a:solidFill>
-                <a:latin typeface="Noto Sans CJK SC"/>
-                <a:ea typeface="Noto Sans CJK SC"/>
-                <a:cs typeface="Noto Sans CJK SC"/>
-              </a:rPr>
-              <a:t>骨架清单，
-首页与语音验收单。</a:t>
-            </a:r>
-          </a:p>
-        </p:txBody>
-      </p:sp>
-      <p:sp>
-        <p:nvSpPr>
-          <p:cNvPr id="29" name="TextBox 28"/>
-          <p:cNvSpPr txBox="1"/>
-          <p:nvPr/>
-        </p:nvSpPr>
-        <p:spPr>
-          <a:xfrm>
-            <a:off x="8065008" y="4617720"/>
-            <a:ext cx="3200400" cy="237744"/>
-          </a:xfrm>
-          <a:prstGeom prst="rect">
-            <a:avLst/>
-          </a:prstGeom>
-          <a:noFill/>
-        </p:spPr>
-        <p:txBody>
-          <a:bodyPr wrap="square" anchor="t" lIns="0" rIns="0" tIns="0" bIns="0"/>
-          <a:lstStyle/>
-          <a:p>
-            <a:pPr algn="l"/>
-            <a:r>
-              <a:rPr sz="1200" b="0" i="0" lang="zh-CN" altLang="en-US">
-                <a:solidFill>
-                  <a:srgbClr val="9E1B1B"/>
-                </a:solidFill>
-                <a:latin typeface="Noto Sans CJK SC"/>
-                <a:ea typeface="Noto Sans CJK SC"/>
-                <a:cs typeface="Noto Sans CJK SC"/>
-              </a:rPr>
-              <a:t>建议牵头</a:t>
-            </a:r>
-          </a:p>
-        </p:txBody>
-      </p:sp>
-      <p:sp>
-        <p:nvSpPr>
-          <p:cNvPr id="30" name="TextBox 29"/>
-          <p:cNvSpPr txBox="1"/>
-          <p:nvPr/>
-        </p:nvSpPr>
-        <p:spPr>
-          <a:xfrm>
-            <a:off x="8065008" y="4864608"/>
-            <a:ext cx="3291840" cy="365760"/>
-          </a:xfrm>
-          <a:prstGeom prst="rect">
-            <a:avLst/>
-          </a:prstGeom>
-          <a:noFill/>
-        </p:spPr>
-        <p:txBody>
-          <a:bodyPr wrap="square" anchor="t" lIns="0" rIns="0" tIns="0" bIns="0"/>
-          <a:lstStyle/>
-          <a:p>
-            <a:pPr algn="l"/>
-            <a:r>
-              <a:rPr sz="1400" b="0" i="0" lang="zh-CN" altLang="en-US">
-                <a:solidFill>
-                  <a:srgbClr val="2C2C2C"/>
-                </a:solidFill>
-                <a:latin typeface="Noto Sans CJK SC"/>
-                <a:ea typeface="Noto Sans CJK SC"/>
-                <a:cs typeface="Noto Sans CJK SC"/>
-              </a:rPr>
-              <a:t>企划、培训、数字</a:t>
-            </a:r>
-          </a:p>
-        </p:txBody>
-      </p:sp>
-      <p:sp>
-        <p:nvSpPr>
-          <p:cNvPr id="31" name="Rectangle 30"/>
-          <p:cNvSpPr/>
-          <p:nvPr/>
-        </p:nvSpPr>
-        <p:spPr>
-          <a:xfrm>
-            <a:off x="658368" y="5440680"/>
-            <a:ext cx="10881360" cy="10972"/>
-          </a:xfrm>
-          <a:prstGeom prst="rect">
-            <a:avLst/>
-          </a:prstGeom>
-          <a:solidFill>
-            <a:srgbClr val="E2E2E2"/>
-          </a:solidFill>
-          <a:ln>
-            <a:noFill/>
-          </a:ln>
-        </p:spPr>
-        <p:style>
-          <a:lnRef idx="1">
-            <a:schemeClr val="accent1"/>
-          </a:lnRef>
-          <a:fillRef idx="3">
-            <a:schemeClr val="accent1"/>
-          </a:fillRef>
-          <a:effectRef idx="2">
-            <a:schemeClr val="accent1"/>
-          </a:effectRef>
-          <a:fontRef idx="minor">
-            <a:schemeClr val="lt1"/>
-          </a:fontRef>
-        </p:style>
-        <p:txBody>
-          <a:bodyPr rtlCol="0" anchor="ctr"/>
-          <a:lstStyle/>
-          <a:p>
-            <a:pPr algn="ctr"/>
-          </a:p>
-        </p:txBody>
-      </p:sp>
-      <p:sp>
-        <p:nvSpPr>
-          <p:cNvPr id="32" name="TextBox 31"/>
-          <p:cNvSpPr txBox="1"/>
-          <p:nvPr/>
-        </p:nvSpPr>
-        <p:spPr>
-          <a:xfrm>
-            <a:off x="658368" y="5559552"/>
-            <a:ext cx="10789920" cy="640080"/>
-          </a:xfrm>
-          <a:prstGeom prst="rect">
-            <a:avLst/>
-          </a:prstGeom>
-          <a:noFill/>
-        </p:spPr>
-        <p:txBody>
-          <a:bodyPr wrap="square" anchor="t" lIns="0" rIns="0" tIns="0" bIns="0"/>
-          <a:lstStyle/>
-          <a:p>
-            <a:pPr algn="l">
-              <a:lnSpc>
-                <a:spcPct val="130000"/>
-              </a:lnSpc>
-            </a:pPr>
-            <a:r>
-              <a:rPr sz="1600" b="0" i="0" lang="zh-CN" altLang="en-US">
-                <a:solidFill>
-                  <a:srgbClr val="9E1B1B"/>
-                </a:solidFill>
-                <a:latin typeface="Noto Sans CJK SC Medium"/>
-                <a:ea typeface="Noto Sans CJK SC Medium"/>
-                <a:cs typeface="Noto Sans CJK SC Medium"/>
-              </a:rPr>
-              <a:t>每月看六个数：型号数、换料清洗次数、罐容与人数，
-建了记录的人、连续用的天数、每天打开 AZA 的人。</a:t>
-            </a:r>
-          </a:p>
-        </p:txBody>
-      </p:sp>
-      <p:sp>
-        <p:nvSpPr>
-          <p:cNvPr id="33" name="TextBox 32"/>
-          <p:cNvSpPr txBox="1"/>
-          <p:nvPr/>
-        </p:nvSpPr>
-        <p:spPr>
-          <a:xfrm>
-            <a:off x="10561320" y="6492240"/>
-            <a:ext cx="1051560" cy="201168"/>
-          </a:xfrm>
-          <a:prstGeom prst="rect">
-            <a:avLst/>
-          </a:prstGeom>
-          <a:noFill/>
-        </p:spPr>
-        <p:txBody>
-          <a:bodyPr wrap="square" anchor="t" lIns="0" rIns="0" tIns="0" bIns="0"/>
-          <a:lstStyle/>
-          <a:p>
-            <a:pPr algn="r"/>
-            <a:r>
-              <a:rPr sz="1100" b="0" i="0" lang="zh-CN" altLang="en-US">
-                <a:solidFill>
-                  <a:srgbClr val="C8C8C8"/>
-                </a:solidFill>
-                <a:latin typeface="Noto Sans CJK SC"/>
-                <a:ea typeface="Noto Sans CJK SC"/>
-                <a:cs typeface="Noto Sans CJK SC"/>
-              </a:rPr>
-              <a:t>14</a:t>
-            </a:r>
-          </a:p>
-        </p:txBody>
-      </p:sp>
-    </p:spTree>
-  </p:cSld>
-  <p:clrMapOvr>
-    <a:masterClrMapping/>
-  </p:clrMapOvr>
-</p:sld>
-</file>
-
-<file path=ppt/slides/slide15.xml><?xml version="1.0" encoding="utf-8"?>
-<p:sld xmlns:a="http://schemas.openxmlformats.org/drawingml/2006/main" xmlns:p="http://schemas.openxmlformats.org/presentationml/2006/main" xmlns:r="http://schemas.openxmlformats.org/officeDocument/2006/relationships">
-  <p:cSld>
-    <p:bg>
-      <p:bgPr>
-        <a:solidFill>
-          <a:srgbClr val="FFFFFF"/>
-        </a:solidFill>
-        <a:effectLst/>
-      </p:bgPr>
-    </p:bg>
-    <p:spTree>
-      <p:nvGrpSpPr>
-        <p:cNvPr id="1" name=""/>
-        <p:cNvGrpSpPr/>
-        <p:nvPr/>
-      </p:nvGrpSpPr>
-      <p:grpSpPr/>
-      <p:sp>
-        <p:nvSpPr>
-          <p:cNvPr id="2" name="TextBox 1"/>
-          <p:cNvSpPr txBox="1"/>
-          <p:nvPr/>
-        </p:nvSpPr>
-        <p:spPr>
-          <a:xfrm>
-            <a:off x="658368" y="365760"/>
-            <a:ext cx="640080" cy="329184"/>
-          </a:xfrm>
-          <a:prstGeom prst="rect">
-            <a:avLst/>
-          </a:prstGeom>
-          <a:noFill/>
-        </p:spPr>
-        <p:txBody>
-          <a:bodyPr wrap="square" anchor="t" lIns="0" rIns="0" tIns="0" bIns="0"/>
-          <a:lstStyle/>
-          <a:p>
-            <a:pPr algn="l"/>
-            <a:r>
-              <a:rPr sz="1500" b="0" i="0" lang="zh-CN" altLang="en-US">
-                <a:solidFill>
-                  <a:srgbClr val="9E1B1B"/>
-                </a:solidFill>
-                <a:latin typeface="Noto Sans CJK SC Medium"/>
-                <a:ea typeface="Noto Sans CJK SC Medium"/>
-                <a:cs typeface="Noto Sans CJK SC Medium"/>
-              </a:rPr>
-              <a:t>14</a:t>
-            </a:r>
-          </a:p>
-        </p:txBody>
-      </p:sp>
-      <p:sp>
-        <p:nvSpPr>
-          <p:cNvPr id="3" name="TextBox 2"/>
-          <p:cNvSpPr txBox="1"/>
-          <p:nvPr/>
-        </p:nvSpPr>
-        <p:spPr>
-          <a:xfrm>
-            <a:off x="1371600" y="310896"/>
-            <a:ext cx="10058400" cy="438912"/>
-          </a:xfrm>
-          <a:prstGeom prst="rect">
-            <a:avLst/>
-          </a:prstGeom>
-          <a:noFill/>
-        </p:spPr>
-        <p:txBody>
-          <a:bodyPr wrap="square" anchor="t" lIns="0" rIns="0" tIns="0" bIns="0"/>
-          <a:lstStyle/>
-          <a:p>
-            <a:pPr algn="l"/>
-            <a:r>
-              <a:rPr sz="3000" b="0" i="0" lang="zh-CN" altLang="en-US">
-                <a:solidFill>
-                  <a:srgbClr val="141414"/>
-                </a:solidFill>
-                <a:latin typeface="Noto Sans CJK SC Medium"/>
-                <a:ea typeface="Noto Sans CJK SC Medium"/>
-                <a:cs typeface="Noto Sans CJK SC Medium"/>
-              </a:rPr>
-              <a:t>三个坑，中国法人各接一个</a:t>
-            </a:r>
-          </a:p>
-        </p:txBody>
-      </p:sp>
-      <p:sp>
-        <p:nvSpPr>
-          <p:cNvPr id="4" name="Rectangle 3"/>
-          <p:cNvSpPr/>
-          <p:nvPr/>
-        </p:nvSpPr>
-        <p:spPr>
-          <a:xfrm>
-            <a:off x="658368" y="960120"/>
-            <a:ext cx="10881360" cy="10972"/>
-          </a:xfrm>
-          <a:prstGeom prst="rect">
-            <a:avLst/>
-          </a:prstGeom>
-          <a:solidFill>
-            <a:srgbClr val="E2E2E2"/>
-          </a:solidFill>
-          <a:ln>
-            <a:noFill/>
-          </a:ln>
-        </p:spPr>
-        <p:style>
-          <a:lnRef idx="1">
-            <a:schemeClr val="accent1"/>
-          </a:lnRef>
-          <a:fillRef idx="3">
-            <a:schemeClr val="accent1"/>
-          </a:fillRef>
-          <a:effectRef idx="2">
-            <a:schemeClr val="accent1"/>
-          </a:effectRef>
-          <a:fontRef idx="minor">
-            <a:schemeClr val="lt1"/>
-          </a:fontRef>
-        </p:style>
-        <p:txBody>
-          <a:bodyPr rtlCol="0" anchor="ctr"/>
-          <a:lstStyle/>
-          <a:p>
-            <a:pPr algn="ctr"/>
-          </a:p>
-        </p:txBody>
-      </p:sp>
-      <p:sp>
-        <p:nvSpPr>
-          <p:cNvPr id="5" name="TextBox 4"/>
-          <p:cNvSpPr txBox="1"/>
-          <p:nvPr/>
-        </p:nvSpPr>
-        <p:spPr>
-          <a:xfrm>
-            <a:off x="658368" y="1188720"/>
-            <a:ext cx="3200400" cy="237744"/>
-          </a:xfrm>
-          <a:prstGeom prst="rect">
-            <a:avLst/>
-          </a:prstGeom>
-          <a:noFill/>
-        </p:spPr>
-        <p:txBody>
-          <a:bodyPr wrap="square" anchor="t" lIns="0" rIns="0" tIns="0" bIns="0"/>
-          <a:lstStyle/>
-          <a:p>
-            <a:pPr algn="l"/>
-            <a:r>
-              <a:rPr sz="1400" b="0" i="0" lang="zh-CN" altLang="en-US">
-                <a:solidFill>
-                  <a:srgbClr val="9E1B1B"/>
-                </a:solidFill>
-                <a:latin typeface="Noto Sans CJK SC Medium"/>
-                <a:ea typeface="Noto Sans CJK SC Medium"/>
-                <a:cs typeface="Noto Sans CJK SC Medium"/>
-              </a:rPr>
-              <a:t>01</a:t>
-            </a:r>
-          </a:p>
-        </p:txBody>
-      </p:sp>
-      <p:sp>
-        <p:nvSpPr>
-          <p:cNvPr id="6" name="TextBox 5"/>
-          <p:cNvSpPr txBox="1"/>
-          <p:nvPr/>
-        </p:nvSpPr>
-        <p:spPr>
-          <a:xfrm>
-            <a:off x="658368" y="1463040"/>
-            <a:ext cx="3291840" cy="457200"/>
-          </a:xfrm>
-          <a:prstGeom prst="rect">
-            <a:avLst/>
-          </a:prstGeom>
-          <a:noFill/>
-        </p:spPr>
-        <p:txBody>
-          <a:bodyPr wrap="square" anchor="t" lIns="0" rIns="0" tIns="0" bIns="0"/>
-          <a:lstStyle/>
-          <a:p>
-            <a:pPr algn="l"/>
-            <a:r>
-              <a:rPr sz="2200" b="0" i="0" lang="zh-CN" altLang="en-US">
-                <a:solidFill>
-                  <a:srgbClr val="141414"/>
-                </a:solidFill>
-                <a:latin typeface="Noto Sans CJK SC Medium"/>
-                <a:ea typeface="Noto Sans CJK SC Medium"/>
-                <a:cs typeface="Noto Sans CJK SC Medium"/>
-              </a:rPr>
-              <a:t>合规</a:t>
-            </a:r>
-          </a:p>
-        </p:txBody>
-      </p:sp>
-      <p:sp>
-        <p:nvSpPr>
-          <p:cNvPr id="7" name="TextBox 6"/>
-          <p:cNvSpPr txBox="1"/>
-          <p:nvPr/>
-        </p:nvSpPr>
-        <p:spPr>
-          <a:xfrm>
-            <a:off x="658368" y="2103120"/>
-            <a:ext cx="3200400" cy="237744"/>
-          </a:xfrm>
-          <a:prstGeom prst="rect">
-            <a:avLst/>
-          </a:prstGeom>
-          <a:noFill/>
-        </p:spPr>
-        <p:txBody>
-          <a:bodyPr wrap="square" anchor="t" lIns="0" rIns="0" tIns="0" bIns="0"/>
-          <a:lstStyle/>
-          <a:p>
-            <a:pPr algn="l"/>
-            <a:r>
-              <a:rPr sz="1200" b="0" i="0" lang="zh-CN" altLang="en-US">
-                <a:solidFill>
-                  <a:srgbClr val="9E1B1B"/>
-                </a:solidFill>
-                <a:latin typeface="Noto Sans CJK SC"/>
-                <a:ea typeface="Noto Sans CJK SC"/>
-                <a:cs typeface="Noto Sans CJK SC"/>
-              </a:rPr>
-              <a:t>手册怎么填</a:t>
-            </a:r>
-          </a:p>
-        </p:txBody>
-      </p:sp>
-      <p:sp>
-        <p:nvSpPr>
-          <p:cNvPr id="8" name="TextBox 7"/>
-          <p:cNvSpPr txBox="1"/>
-          <p:nvPr/>
-        </p:nvSpPr>
-        <p:spPr>
-          <a:xfrm>
-            <a:off x="658368" y="2350008"/>
-            <a:ext cx="3291840" cy="914400"/>
-          </a:xfrm>
-          <a:prstGeom prst="rect">
-            <a:avLst/>
-          </a:prstGeom>
-          <a:noFill/>
-        </p:spPr>
-        <p:txBody>
-          <a:bodyPr wrap="square" anchor="t" lIns="0" rIns="0" tIns="0" bIns="0"/>
-          <a:lstStyle/>
-          <a:p>
-            <a:pPr algn="l">
-              <a:lnSpc>
-                <a:spcPct val="130000"/>
-              </a:lnSpc>
-            </a:pPr>
-            <a:r>
-              <a:rPr sz="1400" b="0" i="0" lang="zh-CN" altLang="en-US">
-                <a:solidFill>
-                  <a:srgbClr val="2C2C2C"/>
-                </a:solidFill>
-                <a:latin typeface="Noto Sans CJK SC"/>
-                <a:ea typeface="Noto Sans CJK SC"/>
-                <a:cs typeface="Noto Sans CJK SC"/>
-              </a:rPr>
-              <a:t>牌照优先于放量；认证模板复制；收益封顶。</a:t>
-            </a:r>
-          </a:p>
-        </p:txBody>
-      </p:sp>
-      <p:sp>
-        <p:nvSpPr>
-          <p:cNvPr id="9" name="TextBox 8"/>
-          <p:cNvSpPr txBox="1"/>
-          <p:nvPr/>
-        </p:nvSpPr>
-        <p:spPr>
-          <a:xfrm>
-            <a:off x="658368" y="3429000"/>
-            <a:ext cx="3200400" cy="237744"/>
-          </a:xfrm>
-          <a:prstGeom prst="rect">
-            <a:avLst/>
-          </a:prstGeom>
-          <a:noFill/>
-        </p:spPr>
-        <p:txBody>
-          <a:bodyPr wrap="square" anchor="t" lIns="0" rIns="0" tIns="0" bIns="0"/>
-          <a:lstStyle/>
-          <a:p>
-            <a:pPr algn="l"/>
-            <a:r>
-              <a:rPr sz="1200" b="0" i="0" lang="zh-CN" altLang="en-US">
-                <a:solidFill>
-                  <a:srgbClr val="9E1B1B"/>
-                </a:solidFill>
-                <a:latin typeface="Noto Sans CJK SC"/>
-                <a:ea typeface="Noto Sans CJK SC"/>
-                <a:cs typeface="Noto Sans CJK SC"/>
-              </a:rPr>
-              <a:t>中国法人接什么</a:t>
-            </a:r>
-          </a:p>
-        </p:txBody>
-      </p:sp>
-      <p:sp>
-        <p:nvSpPr>
-          <p:cNvPr id="10" name="TextBox 9"/>
-          <p:cNvSpPr txBox="1"/>
-          <p:nvPr/>
-        </p:nvSpPr>
-        <p:spPr>
-          <a:xfrm>
-            <a:off x="658368" y="3675887"/>
-            <a:ext cx="3291840" cy="1280160"/>
-          </a:xfrm>
-          <a:prstGeom prst="rect">
-            <a:avLst/>
-          </a:prstGeom>
-          <a:noFill/>
-        </p:spPr>
-        <p:txBody>
-          <a:bodyPr wrap="square" anchor="t" lIns="0" rIns="0" tIns="0" bIns="0"/>
-          <a:lstStyle/>
-          <a:p>
-            <a:pPr algn="l">
-              <a:lnSpc>
-                <a:spcPct val="130000"/>
-              </a:lnSpc>
-            </a:pPr>
-            <a:r>
-              <a:rPr sz="1400" b="0" i="0" lang="zh-CN" altLang="en-US">
-                <a:solidFill>
-                  <a:srgbClr val="2C2C2C"/>
-                </a:solidFill>
-                <a:latin typeface="Noto Sans CJK SC"/>
-                <a:ea typeface="Noto Sans CJK SC"/>
-                <a:cs typeface="Noto Sans CJK SC"/>
-              </a:rPr>
-              <a:t>Acare 哪句话能说、记录存哪里，AZA 哪张卡。定之前，不对会员说。</a:t>
-            </a:r>
-          </a:p>
-        </p:txBody>
-      </p:sp>
-      <p:sp>
-        <p:nvSpPr>
-          <p:cNvPr id="11" name="Rectangle 10"/>
-          <p:cNvSpPr/>
-          <p:nvPr/>
-        </p:nvSpPr>
-        <p:spPr>
-          <a:xfrm>
-            <a:off x="4160520" y="1188720"/>
-            <a:ext cx="10972" cy="3749039"/>
-          </a:xfrm>
-          <a:prstGeom prst="rect">
-            <a:avLst/>
-          </a:prstGeom>
-          <a:solidFill>
-            <a:srgbClr val="E2E2E2"/>
-          </a:solidFill>
-          <a:ln>
-            <a:noFill/>
-          </a:ln>
-        </p:spPr>
-        <p:style>
-          <a:lnRef idx="1">
-            <a:schemeClr val="accent1"/>
-          </a:lnRef>
-          <a:fillRef idx="3">
-            <a:schemeClr val="accent1"/>
-          </a:fillRef>
-          <a:effectRef idx="2">
-            <a:schemeClr val="accent1"/>
-          </a:effectRef>
-          <a:fontRef idx="minor">
-            <a:schemeClr val="lt1"/>
-          </a:fontRef>
-        </p:style>
-        <p:txBody>
-          <a:bodyPr rtlCol="0" anchor="ctr"/>
-          <a:lstStyle/>
-          <a:p>
-            <a:pPr algn="ctr"/>
-          </a:p>
-        </p:txBody>
-      </p:sp>
-      <p:sp>
-        <p:nvSpPr>
-          <p:cNvPr id="12" name="TextBox 11"/>
-          <p:cNvSpPr txBox="1"/>
-          <p:nvPr/>
-        </p:nvSpPr>
-        <p:spPr>
-          <a:xfrm>
-            <a:off x="4361688" y="1188720"/>
-            <a:ext cx="3200400" cy="237744"/>
-          </a:xfrm>
-          <a:prstGeom prst="rect">
-            <a:avLst/>
-          </a:prstGeom>
-          <a:noFill/>
-        </p:spPr>
-        <p:txBody>
-          <a:bodyPr wrap="square" anchor="t" lIns="0" rIns="0" tIns="0" bIns="0"/>
-          <a:lstStyle/>
-          <a:p>
-            <a:pPr algn="l"/>
-            <a:r>
-              <a:rPr sz="1400" b="0" i="0" lang="zh-CN" altLang="en-US">
-                <a:solidFill>
-                  <a:srgbClr val="9E1B1B"/>
-                </a:solidFill>
-                <a:latin typeface="Noto Sans CJK SC Medium"/>
-                <a:ea typeface="Noto Sans CJK SC Medium"/>
-                <a:cs typeface="Noto Sans CJK SC Medium"/>
-              </a:rPr>
-              <a:t>02</a:t>
-            </a:r>
-          </a:p>
-        </p:txBody>
-      </p:sp>
-      <p:sp>
-        <p:nvSpPr>
-          <p:cNvPr id="13" name="TextBox 12"/>
-          <p:cNvSpPr txBox="1"/>
-          <p:nvPr/>
-        </p:nvSpPr>
-        <p:spPr>
-          <a:xfrm>
-            <a:off x="4361688" y="1463040"/>
-            <a:ext cx="3291840" cy="457200"/>
-          </a:xfrm>
-          <a:prstGeom prst="rect">
-            <a:avLst/>
-          </a:prstGeom>
-          <a:noFill/>
-        </p:spPr>
-        <p:txBody>
-          <a:bodyPr wrap="square" anchor="t" lIns="0" rIns="0" tIns="0" bIns="0"/>
-          <a:lstStyle/>
-          <a:p>
-            <a:pPr algn="l"/>
-            <a:r>
-              <a:rPr sz="2200" b="0" i="0" lang="zh-CN" altLang="en-US">
-                <a:solidFill>
-                  <a:srgbClr val="141414"/>
-                </a:solidFill>
-                <a:latin typeface="Noto Sans CJK SC Medium"/>
-                <a:ea typeface="Noto Sans CJK SC Medium"/>
-                <a:cs typeface="Noto Sans CJK SC Medium"/>
-              </a:rPr>
-              <a:t>供应链与地缘</a:t>
-            </a:r>
-          </a:p>
-        </p:txBody>
-      </p:sp>
-      <p:sp>
-        <p:nvSpPr>
-          <p:cNvPr id="14" name="TextBox 13"/>
-          <p:cNvSpPr txBox="1"/>
-          <p:nvPr/>
-        </p:nvSpPr>
-        <p:spPr>
-          <a:xfrm>
-            <a:off x="4361688" y="2103120"/>
-            <a:ext cx="3200400" cy="237744"/>
-          </a:xfrm>
-          <a:prstGeom prst="rect">
-            <a:avLst/>
-          </a:prstGeom>
-          <a:noFill/>
-        </p:spPr>
-        <p:txBody>
-          <a:bodyPr wrap="square" anchor="t" lIns="0" rIns="0" tIns="0" bIns="0"/>
-          <a:lstStyle/>
-          <a:p>
-            <a:pPr algn="l"/>
-            <a:r>
-              <a:rPr sz="1200" b="0" i="0" lang="zh-CN" altLang="en-US">
-                <a:solidFill>
-                  <a:srgbClr val="9E1B1B"/>
-                </a:solidFill>
-                <a:latin typeface="Noto Sans CJK SC"/>
-                <a:ea typeface="Noto Sans CJK SC"/>
-                <a:cs typeface="Noto Sans CJK SC"/>
-              </a:rPr>
-              <a:t>手册怎么填</a:t>
-            </a:r>
-          </a:p>
-        </p:txBody>
-      </p:sp>
-      <p:sp>
-        <p:nvSpPr>
-          <p:cNvPr id="15" name="TextBox 14"/>
-          <p:cNvSpPr txBox="1"/>
-          <p:nvPr/>
-        </p:nvSpPr>
-        <p:spPr>
-          <a:xfrm>
-            <a:off x="4361688" y="2350008"/>
-            <a:ext cx="3291840" cy="914400"/>
-          </a:xfrm>
-          <a:prstGeom prst="rect">
-            <a:avLst/>
-          </a:prstGeom>
-          <a:noFill/>
-        </p:spPr>
-        <p:txBody>
-          <a:bodyPr wrap="square" anchor="t" lIns="0" rIns="0" tIns="0" bIns="0"/>
-          <a:lstStyle/>
-          <a:p>
-            <a:pPr algn="l">
-              <a:lnSpc>
-                <a:spcPct val="130000"/>
-              </a:lnSpc>
-            </a:pPr>
-            <a:r>
-              <a:rPr sz="1400" b="0" i="0" lang="zh-CN" altLang="en-US">
-                <a:solidFill>
-                  <a:srgbClr val="2C2C2C"/>
-                </a:solidFill>
-                <a:latin typeface="Noto Sans CJK SC"/>
-                <a:ea typeface="Noto Sans CJK SC"/>
-                <a:cs typeface="Noto Sans CJK SC"/>
-              </a:rPr>
-              <a:t>多基地生产，本地定价对冲。</a:t>
-            </a:r>
-          </a:p>
-        </p:txBody>
-      </p:sp>
-      <p:sp>
-        <p:nvSpPr>
-          <p:cNvPr id="16" name="TextBox 15"/>
-          <p:cNvSpPr txBox="1"/>
-          <p:nvPr/>
-        </p:nvSpPr>
-        <p:spPr>
-          <a:xfrm>
-            <a:off x="4361688" y="3429000"/>
-            <a:ext cx="3200400" cy="237744"/>
-          </a:xfrm>
-          <a:prstGeom prst="rect">
-            <a:avLst/>
-          </a:prstGeom>
-          <a:noFill/>
-        </p:spPr>
-        <p:txBody>
-          <a:bodyPr wrap="square" anchor="t" lIns="0" rIns="0" tIns="0" bIns="0"/>
-          <a:lstStyle/>
-          <a:p>
-            <a:pPr algn="l"/>
-            <a:r>
-              <a:rPr sz="1200" b="0" i="0" lang="zh-CN" altLang="en-US">
-                <a:solidFill>
-                  <a:srgbClr val="9E1B1B"/>
-                </a:solidFill>
-                <a:latin typeface="Noto Sans CJK SC"/>
-                <a:ea typeface="Noto Sans CJK SC"/>
-                <a:cs typeface="Noto Sans CJK SC"/>
-              </a:rPr>
-              <a:t>中国法人接什么</a:t>
-            </a:r>
-          </a:p>
-        </p:txBody>
-      </p:sp>
-      <p:sp>
-        <p:nvSpPr>
-          <p:cNvPr id="17" name="TextBox 16"/>
-          <p:cNvSpPr txBox="1"/>
-          <p:nvPr/>
-        </p:nvSpPr>
-        <p:spPr>
-          <a:xfrm>
-            <a:off x="4361688" y="3675887"/>
-            <a:ext cx="3291840" cy="1280160"/>
-          </a:xfrm>
-          <a:prstGeom prst="rect">
-            <a:avLst/>
-          </a:prstGeom>
-          <a:noFill/>
-        </p:spPr>
-        <p:txBody>
-          <a:bodyPr wrap="square" anchor="t" lIns="0" rIns="0" tIns="0" bIns="0"/>
-          <a:lstStyle/>
-          <a:p>
-            <a:pPr algn="l">
-              <a:lnSpc>
-                <a:spcPct val="130000"/>
-              </a:lnSpc>
-            </a:pPr>
-            <a:r>
-              <a:rPr sz="1400" b="0" i="0" lang="zh-CN" altLang="en-US">
-                <a:solidFill>
-                  <a:srgbClr val="2C2C2C"/>
-                </a:solidFill>
-                <a:latin typeface="Noto Sans CJK SC"/>
-                <a:ea typeface="Noto Sans CJK SC"/>
-                <a:cs typeface="Noto Sans CJK SC"/>
-              </a:rPr>
-              <a:t>原料在中国，下一道工序放在墙外。转运少一趟，风险就少一段。</a:t>
-            </a:r>
-          </a:p>
-        </p:txBody>
-      </p:sp>
-      <p:sp>
-        <p:nvSpPr>
-          <p:cNvPr id="18" name="Rectangle 17"/>
-          <p:cNvSpPr/>
-          <p:nvPr/>
-        </p:nvSpPr>
-        <p:spPr>
-          <a:xfrm>
-            <a:off x="7863840" y="1188720"/>
-            <a:ext cx="10972" cy="3749039"/>
-          </a:xfrm>
-          <a:prstGeom prst="rect">
-            <a:avLst/>
-          </a:prstGeom>
-          <a:solidFill>
-            <a:srgbClr val="E2E2E2"/>
-          </a:solidFill>
-          <a:ln>
-            <a:noFill/>
-          </a:ln>
-        </p:spPr>
-        <p:style>
-          <a:lnRef idx="1">
-            <a:schemeClr val="accent1"/>
-          </a:lnRef>
-          <a:fillRef idx="3">
-            <a:schemeClr val="accent1"/>
-          </a:fillRef>
-          <a:effectRef idx="2">
-            <a:schemeClr val="accent1"/>
-          </a:effectRef>
-          <a:fontRef idx="minor">
-            <a:schemeClr val="lt1"/>
-          </a:fontRef>
-        </p:style>
-        <p:txBody>
-          <a:bodyPr rtlCol="0" anchor="ctr"/>
-          <a:lstStyle/>
-          <a:p>
-            <a:pPr algn="ctr"/>
-          </a:p>
-        </p:txBody>
-      </p:sp>
-      <p:sp>
-        <p:nvSpPr>
-          <p:cNvPr id="19" name="TextBox 18"/>
-          <p:cNvSpPr txBox="1"/>
-          <p:nvPr/>
-        </p:nvSpPr>
-        <p:spPr>
-          <a:xfrm>
-            <a:off x="8065008" y="1188720"/>
-            <a:ext cx="3200400" cy="237744"/>
-          </a:xfrm>
-          <a:prstGeom prst="rect">
-            <a:avLst/>
-          </a:prstGeom>
-          <a:noFill/>
-        </p:spPr>
-        <p:txBody>
-          <a:bodyPr wrap="square" anchor="t" lIns="0" rIns="0" tIns="0" bIns="0"/>
-          <a:lstStyle/>
-          <a:p>
-            <a:pPr algn="l"/>
-            <a:r>
-              <a:rPr sz="1400" b="0" i="0" lang="zh-CN" altLang="en-US">
-                <a:solidFill>
-                  <a:srgbClr val="9E1B1B"/>
-                </a:solidFill>
-                <a:latin typeface="Noto Sans CJK SC Medium"/>
-                <a:ea typeface="Noto Sans CJK SC Medium"/>
-                <a:cs typeface="Noto Sans CJK SC Medium"/>
-              </a:rPr>
-              <a:t>03</a:t>
-            </a:r>
-          </a:p>
-        </p:txBody>
-      </p:sp>
-      <p:sp>
-        <p:nvSpPr>
-          <p:cNvPr id="20" name="TextBox 19"/>
-          <p:cNvSpPr txBox="1"/>
-          <p:nvPr/>
-        </p:nvSpPr>
-        <p:spPr>
-          <a:xfrm>
-            <a:off x="8065008" y="1463040"/>
-            <a:ext cx="3291840" cy="457200"/>
-          </a:xfrm>
-          <a:prstGeom prst="rect">
-            <a:avLst/>
-          </a:prstGeom>
-          <a:noFill/>
-        </p:spPr>
-        <p:txBody>
-          <a:bodyPr wrap="square" anchor="t" lIns="0" rIns="0" tIns="0" bIns="0"/>
-          <a:lstStyle/>
-          <a:p>
-            <a:pPr algn="l"/>
-            <a:r>
-              <a:rPr sz="2200" b="0" i="0" lang="zh-CN" altLang="en-US">
-                <a:solidFill>
-                  <a:srgbClr val="141414"/>
-                </a:solidFill>
-                <a:latin typeface="Noto Sans CJK SC Medium"/>
-                <a:ea typeface="Noto Sans CJK SC Medium"/>
-                <a:cs typeface="Noto Sans CJK SC Medium"/>
-              </a:rPr>
-              <a:t>模式声誉</a:t>
-            </a:r>
-          </a:p>
-        </p:txBody>
-      </p:sp>
-      <p:sp>
-        <p:nvSpPr>
-          <p:cNvPr id="21" name="TextBox 20"/>
-          <p:cNvSpPr txBox="1"/>
-          <p:nvPr/>
-        </p:nvSpPr>
-        <p:spPr>
-          <a:xfrm>
-            <a:off x="8065008" y="2103120"/>
-            <a:ext cx="3200400" cy="237744"/>
-          </a:xfrm>
-          <a:prstGeom prst="rect">
-            <a:avLst/>
-          </a:prstGeom>
-          <a:noFill/>
-        </p:spPr>
-        <p:txBody>
-          <a:bodyPr wrap="square" anchor="t" lIns="0" rIns="0" tIns="0" bIns="0"/>
-          <a:lstStyle/>
-          <a:p>
-            <a:pPr algn="l"/>
-            <a:r>
-              <a:rPr sz="1200" b="0" i="0" lang="zh-CN" altLang="en-US">
-                <a:solidFill>
-                  <a:srgbClr val="9E1B1B"/>
-                </a:solidFill>
-                <a:latin typeface="Noto Sans CJK SC"/>
-                <a:ea typeface="Noto Sans CJK SC"/>
-                <a:cs typeface="Noto Sans CJK SC"/>
-              </a:rPr>
-              <a:t>手册怎么填</a:t>
-            </a:r>
-          </a:p>
-        </p:txBody>
-      </p:sp>
-      <p:sp>
-        <p:nvSpPr>
-          <p:cNvPr id="22" name="TextBox 21"/>
-          <p:cNvSpPr txBox="1"/>
-          <p:nvPr/>
-        </p:nvSpPr>
-        <p:spPr>
-          <a:xfrm>
-            <a:off x="8065008" y="2350008"/>
-            <a:ext cx="3291840" cy="914400"/>
-          </a:xfrm>
-          <a:prstGeom prst="rect">
-            <a:avLst/>
-          </a:prstGeom>
-          <a:noFill/>
-        </p:spPr>
-        <p:txBody>
-          <a:bodyPr wrap="square" anchor="t" lIns="0" rIns="0" tIns="0" bIns="0"/>
-          <a:lstStyle/>
-          <a:p>
-            <a:pPr algn="l">
-              <a:lnSpc>
-                <a:spcPct val="130000"/>
-              </a:lnSpc>
-            </a:pPr>
-            <a:r>
-              <a:rPr sz="1400" b="0" i="0" lang="zh-CN" altLang="en-US">
-                <a:solidFill>
-                  <a:srgbClr val="2C2C2C"/>
-                </a:solidFill>
-                <a:latin typeface="Noto Sans CJK SC"/>
-                <a:ea typeface="Noto Sans CJK SC"/>
-                <a:cs typeface="Noto Sans CJK SC"/>
-              </a:rPr>
-              <a:t>伦理自律委员会执法，违规清退，透明披露。</a:t>
-            </a:r>
-          </a:p>
-        </p:txBody>
-      </p:sp>
-      <p:sp>
-        <p:nvSpPr>
-          <p:cNvPr id="23" name="TextBox 22"/>
-          <p:cNvSpPr txBox="1"/>
-          <p:nvPr/>
-        </p:nvSpPr>
-        <p:spPr>
-          <a:xfrm>
-            <a:off x="8065008" y="3429000"/>
-            <a:ext cx="3200400" cy="237744"/>
-          </a:xfrm>
-          <a:prstGeom prst="rect">
-            <a:avLst/>
-          </a:prstGeom>
-          <a:noFill/>
-        </p:spPr>
-        <p:txBody>
-          <a:bodyPr wrap="square" anchor="t" lIns="0" rIns="0" tIns="0" bIns="0"/>
-          <a:lstStyle/>
-          <a:p>
-            <a:pPr algn="l"/>
-            <a:r>
-              <a:rPr sz="1200" b="0" i="0" lang="zh-CN" altLang="en-US">
-                <a:solidFill>
-                  <a:srgbClr val="9E1B1B"/>
-                </a:solidFill>
-                <a:latin typeface="Noto Sans CJK SC"/>
-                <a:ea typeface="Noto Sans CJK SC"/>
-                <a:cs typeface="Noto Sans CJK SC"/>
-              </a:rPr>
-              <a:t>中国法人接什么</a:t>
-            </a:r>
-          </a:p>
-        </p:txBody>
-      </p:sp>
-      <p:sp>
-        <p:nvSpPr>
-          <p:cNvPr id="24" name="TextBox 23"/>
-          <p:cNvSpPr txBox="1"/>
-          <p:nvPr/>
-        </p:nvSpPr>
-        <p:spPr>
-          <a:xfrm>
-            <a:off x="8065008" y="3675887"/>
-            <a:ext cx="3291840" cy="1280160"/>
-          </a:xfrm>
-          <a:prstGeom prst="rect">
-            <a:avLst/>
-          </a:prstGeom>
-          <a:noFill/>
-        </p:spPr>
-        <p:txBody>
-          <a:bodyPr wrap="square" anchor="t" lIns="0" rIns="0" tIns="0" bIns="0"/>
-          <a:lstStyle/>
-          <a:p>
-            <a:pPr algn="l">
-              <a:lnSpc>
-                <a:spcPct val="130000"/>
-              </a:lnSpc>
-            </a:pPr>
-            <a:r>
-              <a:rPr sz="1400" b="0" i="0" lang="zh-CN" altLang="en-US">
-                <a:solidFill>
-                  <a:srgbClr val="2C2C2C"/>
-                </a:solidFill>
-                <a:latin typeface="Noto Sans CJK SC"/>
-                <a:ea typeface="Noto Sans CJK SC"/>
-                <a:cs typeface="Noto Sans CJK SC"/>
-              </a:rPr>
-              <a:t>一百到二百支骨架把话术固定。事业者换脸，不换话。乱宣传，先从话术上收。</a:t>
-            </a:r>
-          </a:p>
-        </p:txBody>
-      </p:sp>
-      <p:sp>
-        <p:nvSpPr>
-          <p:cNvPr id="25" name="Rectangle 24"/>
-          <p:cNvSpPr/>
-          <p:nvPr/>
-        </p:nvSpPr>
-        <p:spPr>
-          <a:xfrm>
-            <a:off x="658368" y="5212080"/>
-            <a:ext cx="10881360" cy="10972"/>
-          </a:xfrm>
-          <a:prstGeom prst="rect">
-            <a:avLst/>
-          </a:prstGeom>
-          <a:solidFill>
-            <a:srgbClr val="E2E2E2"/>
-          </a:solidFill>
-          <a:ln>
-            <a:noFill/>
-          </a:ln>
-        </p:spPr>
-        <p:style>
-          <a:lnRef idx="1">
-            <a:schemeClr val="accent1"/>
-          </a:lnRef>
-          <a:fillRef idx="3">
-            <a:schemeClr val="accent1"/>
-          </a:fillRef>
-          <a:effectRef idx="2">
-            <a:schemeClr val="accent1"/>
-          </a:effectRef>
-          <a:fontRef idx="minor">
-            <a:schemeClr val="lt1"/>
-          </a:fontRef>
-        </p:style>
-        <p:txBody>
-          <a:bodyPr rtlCol="0" anchor="ctr"/>
-          <a:lstStyle/>
-          <a:p>
-            <a:pPr algn="ctr"/>
-          </a:p>
-        </p:txBody>
-      </p:sp>
-      <p:sp>
-        <p:nvSpPr>
-          <p:cNvPr id="26" name="TextBox 25"/>
-          <p:cNvSpPr txBox="1"/>
-          <p:nvPr/>
-        </p:nvSpPr>
-        <p:spPr>
-          <a:xfrm>
-            <a:off x="658368" y="5394960"/>
-            <a:ext cx="10789920" cy="822960"/>
-          </a:xfrm>
-          <a:prstGeom prst="rect">
-            <a:avLst/>
-          </a:prstGeom>
-          <a:noFill/>
-        </p:spPr>
-        <p:txBody>
-          <a:bodyPr wrap="square" anchor="t" lIns="0" rIns="0" tIns="0" bIns="0"/>
-          <a:lstStyle/>
-          <a:p>
-            <a:pPr algn="l">
-              <a:lnSpc>
-                <a:spcPct val="130000"/>
-              </a:lnSpc>
-            </a:pPr>
-            <a:r>
-              <a:rPr sz="2000" b="0" i="0" lang="zh-CN" altLang="en-US">
-                <a:solidFill>
-                  <a:srgbClr val="9E1B1B"/>
-                </a:solidFill>
-                <a:latin typeface="Noto Sans CJK SC Medium"/>
-                <a:ea typeface="Noto Sans CJK SC Medium"/>
-                <a:cs typeface="Noto Sans CJK SC Medium"/>
-              </a:rPr>
-              <a:t>手册的判断：走砸，多半是合规，
-不是市场不够大。</a:t>
-            </a:r>
-          </a:p>
-        </p:txBody>
-      </p:sp>
-      <p:sp>
-        <p:nvSpPr>
-          <p:cNvPr id="27" name="TextBox 26"/>
-          <p:cNvSpPr txBox="1"/>
-          <p:nvPr/>
-        </p:nvSpPr>
-        <p:spPr>
-          <a:xfrm>
-            <a:off x="10561320" y="6492240"/>
-            <a:ext cx="1051560" cy="201168"/>
-          </a:xfrm>
-          <a:prstGeom prst="rect">
-            <a:avLst/>
-          </a:prstGeom>
-          <a:noFill/>
-        </p:spPr>
-        <p:txBody>
-          <a:bodyPr wrap="square" anchor="t" lIns="0" rIns="0" tIns="0" bIns="0"/>
-          <a:lstStyle/>
-          <a:p>
-            <a:pPr algn="r"/>
-            <a:r>
-              <a:rPr sz="1100" b="0" i="0" lang="zh-CN" altLang="en-US">
-                <a:solidFill>
-                  <a:srgbClr val="C8C8C8"/>
-                </a:solidFill>
-                <a:latin typeface="Noto Sans CJK SC"/>
-                <a:ea typeface="Noto Sans CJK SC"/>
-                <a:cs typeface="Noto Sans CJK SC"/>
-              </a:rPr>
-              <a:t>15</a:t>
-            </a:r>
-          </a:p>
-        </p:txBody>
-      </p:sp>
-    </p:spTree>
-  </p:cSld>
-  <p:clrMapOvr>
-    <a:masterClrMapping/>
-  </p:clrMapOvr>
-</p:sld>
-</file>
-
-<file path=ppt/slides/slide16.xml><?xml version="1.0" encoding="utf-8"?>
-<p:sld xmlns:a="http://schemas.openxmlformats.org/drawingml/2006/main" xmlns:p="http://schemas.openxmlformats.org/presentationml/2006/main" xmlns:r="http://schemas.openxmlformats.org/officeDocument/2006/relationships">
-  <p:cSld>
-    <p:bg>
-      <p:bgPr>
-        <a:solidFill>
-          <a:srgbClr val="121212"/>
-        </a:solidFill>
-        <a:effectLst/>
-      </p:bgPr>
-    </p:bg>
-    <p:spTree>
-      <p:nvGrpSpPr>
-        <p:cNvPr id="1" name=""/>
-        <p:cNvGrpSpPr/>
-        <p:nvPr/>
-      </p:nvGrpSpPr>
-      <p:grpSpPr/>
-      <p:sp>
-        <p:nvSpPr>
-          <p:cNvPr id="2" name="Rectangle 1"/>
-          <p:cNvSpPr/>
-          <p:nvPr/>
-        </p:nvSpPr>
-        <p:spPr>
-          <a:xfrm>
-            <a:off x="0" y="0"/>
-            <a:ext cx="73152" cy="6858000"/>
-          </a:xfrm>
-          <a:prstGeom prst="rect">
-            <a:avLst/>
-          </a:prstGeom>
-          <a:solidFill>
-            <a:srgbClr val="9E1B1B"/>
-          </a:solidFill>
-          <a:ln>
-            <a:noFill/>
-          </a:ln>
-        </p:spPr>
-        <p:style>
-          <a:lnRef idx="1">
-            <a:schemeClr val="accent1"/>
-          </a:lnRef>
-          <a:fillRef idx="3">
-            <a:schemeClr val="accent1"/>
-          </a:fillRef>
-          <a:effectRef idx="2">
-            <a:schemeClr val="accent1"/>
-          </a:effectRef>
-          <a:fontRef idx="minor">
-            <a:schemeClr val="lt1"/>
-          </a:fontRef>
-        </p:style>
-        <p:txBody>
-          <a:bodyPr rtlCol="0" anchor="ctr"/>
-          <a:lstStyle/>
-          <a:p>
-            <a:pPr algn="ctr"/>
-          </a:p>
-        </p:txBody>
-      </p:sp>
-      <p:sp>
-        <p:nvSpPr>
-          <p:cNvPr id="3" name="TextBox 2"/>
-          <p:cNvSpPr txBox="1"/>
-          <p:nvPr/>
-        </p:nvSpPr>
-        <p:spPr>
-          <a:xfrm>
-            <a:off x="777240" y="658368"/>
-            <a:ext cx="4572000" cy="457200"/>
-          </a:xfrm>
-          <a:prstGeom prst="rect">
-            <a:avLst/>
-          </a:prstGeom>
-          <a:noFill/>
-        </p:spPr>
-        <p:txBody>
-          <a:bodyPr wrap="square" anchor="t" lIns="0" rIns="0" tIns="0" bIns="0"/>
-          <a:lstStyle/>
-          <a:p>
-            <a:pPr algn="l"/>
-            <a:r>
-              <a:rPr sz="2600" b="0" i="0" lang="zh-CN" altLang="en-US">
-                <a:solidFill>
-                  <a:srgbClr val="FFFFFF"/>
-                </a:solidFill>
-                <a:latin typeface="Noto Sans CJK SC Medium"/>
-                <a:ea typeface="Noto Sans CJK SC Medium"/>
-                <a:cs typeface="Noto Sans CJK SC Medium"/>
-              </a:rPr>
-              <a:t>产线</a:t>
-            </a:r>
-          </a:p>
-        </p:txBody>
-      </p:sp>
-      <p:sp>
-        <p:nvSpPr>
-          <p:cNvPr id="4" name="TextBox 3"/>
-          <p:cNvSpPr txBox="1"/>
-          <p:nvPr/>
-        </p:nvSpPr>
-        <p:spPr>
-          <a:xfrm>
-            <a:off x="5623560" y="731519"/>
-            <a:ext cx="5760720" cy="365760"/>
-          </a:xfrm>
-          <a:prstGeom prst="rect">
-            <a:avLst/>
-          </a:prstGeom>
-          <a:noFill/>
-        </p:spPr>
-        <p:txBody>
-          <a:bodyPr wrap="square" anchor="t" lIns="0" rIns="0" tIns="0" bIns="0"/>
-          <a:lstStyle/>
-          <a:p>
-            <a:pPr algn="l"/>
-            <a:r>
-              <a:rPr sz="1600" b="0" i="0" lang="zh-CN" altLang="en-US">
-                <a:solidFill>
-                  <a:srgbClr val="B5B5B5"/>
-                </a:solidFill>
-                <a:latin typeface="Noto Sans CJK SC"/>
-                <a:ea typeface="Noto Sans CJK SC"/>
-                <a:cs typeface="Noto Sans CJK SC"/>
-              </a:rPr>
-              <a:t>烟台四条线，先盘点</a:t>
-            </a:r>
-          </a:p>
-        </p:txBody>
-      </p:sp>
-      <p:sp>
-        <p:nvSpPr>
-          <p:cNvPr id="5" name="TextBox 4"/>
-          <p:cNvSpPr txBox="1"/>
-          <p:nvPr/>
-        </p:nvSpPr>
-        <p:spPr>
-          <a:xfrm>
-            <a:off x="777240" y="1371600"/>
-            <a:ext cx="4572000" cy="457200"/>
-          </a:xfrm>
-          <a:prstGeom prst="rect">
-            <a:avLst/>
-          </a:prstGeom>
-          <a:noFill/>
-        </p:spPr>
-        <p:txBody>
-          <a:bodyPr wrap="square" anchor="t" lIns="0" rIns="0" tIns="0" bIns="0"/>
-          <a:lstStyle/>
-          <a:p>
-            <a:pPr algn="l"/>
-            <a:r>
-              <a:rPr sz="2600" b="0" i="0" lang="zh-CN" altLang="en-US">
-                <a:solidFill>
-                  <a:srgbClr val="FFFFFF"/>
-                </a:solidFill>
-                <a:latin typeface="Noto Sans CJK SC Medium"/>
-                <a:ea typeface="Noto Sans CJK SC Medium"/>
-                <a:cs typeface="Noto Sans CJK SC Medium"/>
-              </a:rPr>
-              <a:t>合作方</a:t>
-            </a:r>
-          </a:p>
-        </p:txBody>
-      </p:sp>
-      <p:sp>
-        <p:nvSpPr>
-          <p:cNvPr id="6" name="TextBox 5"/>
-          <p:cNvSpPr txBox="1"/>
-          <p:nvPr/>
-        </p:nvSpPr>
-        <p:spPr>
-          <a:xfrm>
-            <a:off x="5623560" y="1444752"/>
-            <a:ext cx="5760720" cy="365760"/>
-          </a:xfrm>
-          <a:prstGeom prst="rect">
-            <a:avLst/>
-          </a:prstGeom>
-          <a:noFill/>
-        </p:spPr>
-        <p:txBody>
-          <a:bodyPr wrap="square" anchor="t" lIns="0" rIns="0" tIns="0" bIns="0"/>
-          <a:lstStyle/>
-          <a:p>
-            <a:pPr algn="l"/>
-            <a:r>
-              <a:rPr sz="1600" b="0" i="0" lang="zh-CN" altLang="en-US">
-                <a:solidFill>
-                  <a:srgbClr val="B5B5B5"/>
-                </a:solidFill>
-                <a:latin typeface="Noto Sans CJK SC"/>
-                <a:ea typeface="Noto Sans CJK SC"/>
-                <a:cs typeface="Noto Sans CJK SC"/>
-              </a:rPr>
-              <a:t>一个数、一张图纸、一份合同</a:t>
-            </a:r>
-          </a:p>
-        </p:txBody>
-      </p:sp>
-      <p:sp>
-        <p:nvSpPr>
-          <p:cNvPr id="7" name="TextBox 6"/>
-          <p:cNvSpPr txBox="1"/>
-          <p:nvPr/>
-        </p:nvSpPr>
-        <p:spPr>
-          <a:xfrm>
-            <a:off x="777240" y="2084832"/>
-            <a:ext cx="4572000" cy="457200"/>
-          </a:xfrm>
-          <a:prstGeom prst="rect">
-            <a:avLst/>
-          </a:prstGeom>
-          <a:noFill/>
-        </p:spPr>
-        <p:txBody>
-          <a:bodyPr wrap="square" anchor="t" lIns="0" rIns="0" tIns="0" bIns="0"/>
-          <a:lstStyle/>
-          <a:p>
-            <a:pPr algn="l"/>
-            <a:r>
-              <a:rPr sz="2600" b="0" i="0" lang="zh-CN" altLang="en-US">
-                <a:solidFill>
-                  <a:srgbClr val="FFFFFF"/>
-                </a:solidFill>
-                <a:latin typeface="Noto Sans CJK SC Medium"/>
-                <a:ea typeface="Noto Sans CJK SC Medium"/>
-                <a:cs typeface="Noto Sans CJK SC Medium"/>
-              </a:rPr>
-              <a:t>企划</a:t>
-            </a:r>
-          </a:p>
-        </p:txBody>
-      </p:sp>
-      <p:sp>
-        <p:nvSpPr>
-          <p:cNvPr id="8" name="TextBox 7"/>
-          <p:cNvSpPr txBox="1"/>
-          <p:nvPr/>
-        </p:nvSpPr>
-        <p:spPr>
-          <a:xfrm>
-            <a:off x="5623560" y="2157984"/>
-            <a:ext cx="5760720" cy="365760"/>
-          </a:xfrm>
-          <a:prstGeom prst="rect">
-            <a:avLst/>
-          </a:prstGeom>
-          <a:noFill/>
-        </p:spPr>
-        <p:txBody>
-          <a:bodyPr wrap="square" anchor="t" lIns="0" rIns="0" tIns="0" bIns="0"/>
-          <a:lstStyle/>
-          <a:p>
-            <a:pPr algn="l"/>
-            <a:r>
-              <a:rPr sz="1600" b="0" i="0" lang="zh-CN" altLang="en-US">
-                <a:solidFill>
-                  <a:srgbClr val="B5B5B5"/>
-                </a:solidFill>
-                <a:latin typeface="Noto Sans CJK SC"/>
-                <a:ea typeface="Noto Sans CJK SC"/>
-                <a:cs typeface="Noto Sans CJK SC"/>
-              </a:rPr>
-              <a:t>一次写完，一次通到终点</a:t>
-            </a:r>
-          </a:p>
-        </p:txBody>
-      </p:sp>
-      <p:sp>
-        <p:nvSpPr>
-          <p:cNvPr id="9" name="TextBox 8"/>
-          <p:cNvSpPr txBox="1"/>
-          <p:nvPr/>
-        </p:nvSpPr>
-        <p:spPr>
-          <a:xfrm>
-            <a:off x="777240" y="2798064"/>
-            <a:ext cx="4572000" cy="457200"/>
-          </a:xfrm>
-          <a:prstGeom prst="rect">
-            <a:avLst/>
-          </a:prstGeom>
-          <a:noFill/>
-        </p:spPr>
-        <p:txBody>
-          <a:bodyPr wrap="square" anchor="t" lIns="0" rIns="0" tIns="0" bIns="0"/>
-          <a:lstStyle/>
-          <a:p>
-            <a:pPr algn="l"/>
-            <a:r>
-              <a:rPr sz="2600" b="0" i="0" lang="zh-CN" altLang="en-US">
-                <a:solidFill>
-                  <a:srgbClr val="FFFFFF"/>
-                </a:solidFill>
-                <a:latin typeface="Noto Sans CJK SC Medium"/>
-                <a:ea typeface="Noto Sans CJK SC Medium"/>
-                <a:cs typeface="Noto Sans CJK SC Medium"/>
-              </a:rPr>
-              <a:t>3A</a:t>
-            </a:r>
-          </a:p>
-        </p:txBody>
-      </p:sp>
-      <p:sp>
-        <p:nvSpPr>
-          <p:cNvPr id="10" name="TextBox 9"/>
-          <p:cNvSpPr txBox="1"/>
-          <p:nvPr/>
-        </p:nvSpPr>
-        <p:spPr>
-          <a:xfrm>
-            <a:off x="5623560" y="2871216"/>
-            <a:ext cx="5760720" cy="365760"/>
-          </a:xfrm>
-          <a:prstGeom prst="rect">
-            <a:avLst/>
-          </a:prstGeom>
-          <a:noFill/>
-        </p:spPr>
-        <p:txBody>
-          <a:bodyPr wrap="square" anchor="t" lIns="0" rIns="0" tIns="0" bIns="0"/>
-          <a:lstStyle/>
-          <a:p>
-            <a:pPr algn="l"/>
-            <a:r>
-              <a:rPr sz="1600" b="0" i="0" lang="zh-CN" altLang="en-US">
-                <a:solidFill>
-                  <a:srgbClr val="B5B5B5"/>
-                </a:solidFill>
-                <a:latin typeface="Noto Sans CJK SC"/>
-                <a:ea typeface="Noto Sans CJK SC"/>
-                <a:cs typeface="Noto Sans CJK SC"/>
-              </a:rPr>
-              <a:t>记录、那一个、每天</a:t>
-            </a:r>
-          </a:p>
-        </p:txBody>
-      </p:sp>
-      <p:sp>
-        <p:nvSpPr>
-          <p:cNvPr id="11" name="TextBox 10"/>
-          <p:cNvSpPr txBox="1"/>
-          <p:nvPr/>
-        </p:nvSpPr>
-        <p:spPr>
-          <a:xfrm>
-            <a:off x="749808" y="3703320"/>
-            <a:ext cx="10058400" cy="777240"/>
-          </a:xfrm>
-          <a:prstGeom prst="rect">
-            <a:avLst/>
-          </a:prstGeom>
-          <a:noFill/>
-        </p:spPr>
-        <p:txBody>
-          <a:bodyPr wrap="square" anchor="t" lIns="0" rIns="0" tIns="0" bIns="0"/>
-          <a:lstStyle/>
-          <a:p>
-            <a:pPr algn="l"/>
-            <a:r>
-              <a:rPr sz="4800" b="0" i="0" lang="zh-CN" altLang="en-US">
-                <a:solidFill>
-                  <a:srgbClr val="9E1B1B"/>
-                </a:solidFill>
-                <a:latin typeface="Noto Sans CJK SC Medium"/>
-                <a:ea typeface="Noto Sans CJK SC Medium"/>
-                <a:cs typeface="Noto Sans CJK SC Medium"/>
-              </a:rPr>
-              <a:t>不能不去</a:t>
-            </a:r>
-          </a:p>
-        </p:txBody>
-      </p:sp>
-      <p:sp>
-        <p:nvSpPr>
-          <p:cNvPr id="12" name="TextBox 11"/>
-          <p:cNvSpPr txBox="1"/>
-          <p:nvPr/>
-        </p:nvSpPr>
-        <p:spPr>
-          <a:xfrm>
-            <a:off x="804672" y="4617720"/>
-            <a:ext cx="10241280" cy="777240"/>
-          </a:xfrm>
-          <a:prstGeom prst="rect">
-            <a:avLst/>
-          </a:prstGeom>
-          <a:noFill/>
-        </p:spPr>
-        <p:txBody>
-          <a:bodyPr wrap="square" anchor="t" lIns="0" rIns="0" tIns="0" bIns="0"/>
-          <a:lstStyle/>
-          <a:p>
-            <a:pPr algn="l">
-              <a:lnSpc>
-                <a:spcPct val="125000"/>
-              </a:lnSpc>
-            </a:pPr>
-            <a:r>
-              <a:rPr sz="1800" b="0" i="0" lang="zh-CN" altLang="en-US">
-                <a:solidFill>
-                  <a:srgbClr val="D4D4D4"/>
-                </a:solidFill>
-                <a:latin typeface="Noto Sans CJK SC"/>
-                <a:ea typeface="Noto Sans CJK SC"/>
-                <a:cs typeface="Noto Sans CJK SC"/>
-              </a:rPr>
-              <a:t>每月看六个数：型号数、换料清洗次数、罐容与人数，
-建了记录的人、连续用的天数、每天打开 AZA 的人。</a:t>
-            </a:r>
-          </a:p>
-        </p:txBody>
-      </p:sp>
-      <p:sp>
-        <p:nvSpPr>
-          <p:cNvPr id="13" name="TextBox 12"/>
-          <p:cNvSpPr txBox="1"/>
-          <p:nvPr/>
-        </p:nvSpPr>
-        <p:spPr>
-          <a:xfrm>
-            <a:off x="804672" y="5806440"/>
-            <a:ext cx="8229600" cy="274320"/>
-          </a:xfrm>
-          <a:prstGeom prst="rect">
-            <a:avLst/>
-          </a:prstGeom>
-          <a:noFill/>
-        </p:spPr>
-        <p:txBody>
-          <a:bodyPr wrap="square" anchor="t" lIns="0" rIns="0" tIns="0" bIns="0"/>
-          <a:lstStyle/>
-          <a:p>
-            <a:pPr algn="l"/>
-            <a:r>
-              <a:rPr sz="1400" b="0" i="0" lang="zh-CN" altLang="en-US">
-                <a:solidFill>
-                  <a:srgbClr val="9A9A9A"/>
-                </a:solidFill>
-                <a:latin typeface="Noto Sans CJK SC"/>
-                <a:ea typeface="Noto Sans CJK SC"/>
-                <a:cs typeface="Noto Sans CJK SC"/>
-              </a:rPr>
-              <a:t>蒙想讯息    2026年9月22日</a:t>
-            </a:r>
-          </a:p>
-        </p:txBody>
-      </p:sp>
-      <p:sp>
-        <p:nvSpPr>
-          <p:cNvPr id="14" name="TextBox 13"/>
-          <p:cNvSpPr txBox="1"/>
-          <p:nvPr/>
-        </p:nvSpPr>
-        <p:spPr>
-          <a:xfrm>
-            <a:off x="10561320" y="6492240"/>
-            <a:ext cx="1051560" cy="201168"/>
-          </a:xfrm>
-          <a:prstGeom prst="rect">
-            <a:avLst/>
-          </a:prstGeom>
-          <a:noFill/>
-        </p:spPr>
-        <p:txBody>
-          <a:bodyPr wrap="square" anchor="t" lIns="0" rIns="0" tIns="0" bIns="0"/>
-          <a:lstStyle/>
-          <a:p>
-            <a:pPr algn="r"/>
-            <a:r>
-              <a:rPr sz="1100" b="0" i="0" lang="zh-CN" altLang="en-US">
-                <a:solidFill>
-                  <a:srgbClr val="6A6A6A"/>
-                </a:solidFill>
-                <a:latin typeface="Noto Sans CJK SC"/>
-                <a:ea typeface="Noto Sans CJK SC"/>
-                <a:cs typeface="Noto Sans CJK SC"/>
-              </a:rPr>
-              <a:t>16</a:t>
-            </a:r>
-          </a:p>
-        </p:txBody>
-      </p:sp>
-    </p:spTree>
-  </p:cSld>
-  <p:clrMapOvr>
-    <a:masterClrMapping/>
-  </p:clrMapOvr>
-</p:sld>
-</file>
-
 <file path=ppt/slides/slide2.xml><?xml version="1.0" encoding="utf-8"?>
 <p:sld xmlns:a="http://schemas.openxmlformats.org/drawingml/2006/main" xmlns:p="http://schemas.openxmlformats.org/presentationml/2006/main" xmlns:r="http://schemas.openxmlformats.org/officeDocument/2006/relationships">
   <p:cSld>
@@ -14712,7 +8455,7 @@
                 <a:ea typeface="Noto Sans CJK SC Medium"/>
                 <a:cs typeface="Noto Sans CJK SC Medium"/>
               </a:rPr>
-              <a:t>回到重定标准的时候</a:t>
+              <a:t>四件都长在两样和语音上</a:t>
             </a:r>
           </a:p>
         </p:txBody>
@@ -14768,8 +8511,8 @@
         </p:nvSpPr>
         <p:spPr>
           <a:xfrm>
-            <a:off x="658368" y="1207008"/>
-            <a:ext cx="3200400" cy="237744"/>
+            <a:off x="658368" y="1170432"/>
+            <a:ext cx="640080" cy="329184"/>
           </a:xfrm>
           <a:prstGeom prst="rect">
             <a:avLst/>
@@ -14782,7 +8525,7 @@
           <a:p>
             <a:pPr algn="l"/>
             <a:r>
-              <a:rPr sz="1400" b="0" i="0" lang="zh-CN" altLang="en-US">
+              <a:rPr sz="1600" b="0" i="0" lang="zh-CN" altLang="en-US">
                 <a:solidFill>
                   <a:srgbClr val="9E1B1B"/>
                 </a:solidFill>
@@ -14803,8 +8546,8 @@
         </p:nvSpPr>
         <p:spPr>
           <a:xfrm>
-            <a:off x="658368" y="1499616"/>
-            <a:ext cx="3246120" cy="640080"/>
+            <a:off x="1417320" y="1152144"/>
+            <a:ext cx="9966960" cy="365760"/>
           </a:xfrm>
           <a:prstGeom prst="rect">
             <a:avLst/>
@@ -14825,7 +8568,7 @@
                 <a:ea typeface="Noto Sans CJK SC Medium"/>
                 <a:cs typeface="Noto Sans CJK SC Medium"/>
               </a:rPr>
-              <a:t>一能一品</a:t>
+              <a:t>拍完，首页当场重算</a:t>
             </a:r>
           </a:p>
         </p:txBody>
@@ -14838,25 +8581,21 @@
         </p:nvSpPr>
         <p:spPr>
           <a:xfrm>
-            <a:off x="658368" y="2240280"/>
-            <a:ext cx="3246120" cy="2011680"/>
-          </a:xfrm>
-          <a:prstGeom prst="rect">
-            <a:avLst/>
-          </a:prstGeom>
-          <a:noFill/>
-        </p:spPr>
-        <p:txBody>
-          <a:bodyPr wrap="square" anchor="t" lIns="0" rIns="0" tIns="0" bIns="0"/>
-          <a:lstStyle/>
-          <a:p>
-            <a:pPr algn="l">
-              <a:lnSpc>
-                <a:spcPct val="135000"/>
-              </a:lnSpc>
-            </a:pPr>
-            <a:r>
-              <a:rPr sz="1500" b="0" i="0" lang="zh-CN" altLang="en-US">
+            <a:off x="1417320" y="1554480"/>
+            <a:ext cx="9966960" cy="502920"/>
+          </a:xfrm>
+          <a:prstGeom prst="rect">
+            <a:avLst/>
+          </a:prstGeom>
+          <a:noFill/>
+        </p:spPr>
+        <p:txBody>
+          <a:bodyPr wrap="square" anchor="t" lIns="0" rIns="0" tIns="0" bIns="0"/>
+          <a:lstStyle/>
+          <a:p>
+            <a:pPr algn="l"/>
+            <a:r>
+              <a:rPr sz="1600" b="0" i="0" lang="zh-CN" altLang="en-US">
                 <a:solidFill>
                   <a:srgbClr val="2C2C2C"/>
                 </a:solidFill>
@@ -14864,25 +8603,336 @@
                 <a:ea typeface="Noto Sans CJK SC"/>
                 <a:cs typeface="Noto Sans CJK SC"/>
               </a:rPr>
-              <a:t>散开的品类收成一个。
-一个功能，一个产品。
-这一个，要成为品类里的
-全球冠军。
-中国的量用在这一个上。</a:t>
-            </a:r>
-          </a:p>
-        </p:txBody>
-      </p:sp>
-      <p:sp>
-        <p:nvSpPr>
-          <p:cNvPr id="8" name="Rectangle 7"/>
+              <a:t>拍下这一餐，两样立刻换，不等运营改图。当次就能加购，不流失到下次打开。</a:t>
+            </a:r>
+          </a:p>
+        </p:txBody>
+      </p:sp>
+      <p:sp>
+        <p:nvSpPr>
+          <p:cNvPr id="8" name="TextBox 7"/>
+          <p:cNvSpPr txBox="1"/>
+          <p:nvPr/>
+        </p:nvSpPr>
+        <p:spPr>
+          <a:xfrm>
+            <a:off x="658368" y="2221991"/>
+            <a:ext cx="640080" cy="329184"/>
+          </a:xfrm>
+          <a:prstGeom prst="rect">
+            <a:avLst/>
+          </a:prstGeom>
+          <a:noFill/>
+        </p:spPr>
+        <p:txBody>
+          <a:bodyPr wrap="square" anchor="t" lIns="0" rIns="0" tIns="0" bIns="0"/>
+          <a:lstStyle/>
+          <a:p>
+            <a:pPr algn="l"/>
+            <a:r>
+              <a:rPr sz="1600" b="0" i="0" lang="zh-CN" altLang="en-US">
+                <a:solidFill>
+                  <a:srgbClr val="9E1B1B"/>
+                </a:solidFill>
+                <a:latin typeface="Noto Sans CJK SC Medium"/>
+                <a:ea typeface="Noto Sans CJK SC Medium"/>
+                <a:cs typeface="Noto Sans CJK SC Medium"/>
+              </a:rPr>
+              <a:t>02</a:t>
+            </a:r>
+          </a:p>
+        </p:txBody>
+      </p:sp>
+      <p:sp>
+        <p:nvSpPr>
+          <p:cNvPr id="9" name="TextBox 8"/>
+          <p:cNvSpPr txBox="1"/>
+          <p:nvPr/>
+        </p:nvSpPr>
+        <p:spPr>
+          <a:xfrm>
+            <a:off x="1417320" y="2203703"/>
+            <a:ext cx="9966960" cy="365760"/>
+          </a:xfrm>
+          <a:prstGeom prst="rect">
+            <a:avLst/>
+          </a:prstGeom>
+          <a:noFill/>
+        </p:spPr>
+        <p:txBody>
+          <a:bodyPr wrap="square" anchor="t" lIns="0" rIns="0" tIns="0" bIns="0"/>
+          <a:lstStyle/>
+          <a:p>
+            <a:pPr algn="l"/>
+            <a:r>
+              <a:rPr sz="2200" b="0" i="0" lang="zh-CN" altLang="en-US">
+                <a:solidFill>
+                  <a:srgbClr val="141414"/>
+                </a:solidFill>
+                <a:latin typeface="Noto Sans CJK SC Medium"/>
+                <a:ea typeface="Noto Sans CJK SC Medium"/>
+                <a:cs typeface="Noto Sans CJK SC Medium"/>
+              </a:rPr>
+              <a:t>空瓶前三天，只续同一款</a:t>
+            </a:r>
+          </a:p>
+        </p:txBody>
+      </p:sp>
+      <p:sp>
+        <p:nvSpPr>
+          <p:cNvPr id="10" name="TextBox 9"/>
+          <p:cNvSpPr txBox="1"/>
+          <p:nvPr/>
+        </p:nvSpPr>
+        <p:spPr>
+          <a:xfrm>
+            <a:off x="1417320" y="2606039"/>
+            <a:ext cx="9966960" cy="502920"/>
+          </a:xfrm>
+          <a:prstGeom prst="rect">
+            <a:avLst/>
+          </a:prstGeom>
+          <a:noFill/>
+        </p:spPr>
+        <p:txBody>
+          <a:bodyPr wrap="square" anchor="t" lIns="0" rIns="0" tIns="0" bIns="0"/>
+          <a:lstStyle/>
+          <a:p>
+            <a:pPr algn="l"/>
+            <a:r>
+              <a:rPr sz="1600" b="0" i="0" lang="zh-CN" altLang="en-US">
+                <a:solidFill>
+                  <a:srgbClr val="2C2C2C"/>
+                </a:solidFill>
+                <a:latin typeface="Noto Sans CJK SC"/>
+                <a:ea typeface="Noto Sans CJK SC"/>
+                <a:cs typeface="Noto Sans CJK SC"/>
+              </a:rPr>
+              <a:t>按上次的量和每天用量倒推。提前三天，语音只问要不要续上。不推新品。连续天数不断在这里。</a:t>
+            </a:r>
+          </a:p>
+        </p:txBody>
+      </p:sp>
+      <p:sp>
+        <p:nvSpPr>
+          <p:cNvPr id="11" name="TextBox 10"/>
+          <p:cNvSpPr txBox="1"/>
+          <p:nvPr/>
+        </p:nvSpPr>
+        <p:spPr>
+          <a:xfrm>
+            <a:off x="658368" y="3273551"/>
+            <a:ext cx="640080" cy="329184"/>
+          </a:xfrm>
+          <a:prstGeom prst="rect">
+            <a:avLst/>
+          </a:prstGeom>
+          <a:noFill/>
+        </p:spPr>
+        <p:txBody>
+          <a:bodyPr wrap="square" anchor="t" lIns="0" rIns="0" tIns="0" bIns="0"/>
+          <a:lstStyle/>
+          <a:p>
+            <a:pPr algn="l"/>
+            <a:r>
+              <a:rPr sz="1600" b="0" i="0" lang="zh-CN" altLang="en-US">
+                <a:solidFill>
+                  <a:srgbClr val="9E1B1B"/>
+                </a:solidFill>
+                <a:latin typeface="Noto Sans CJK SC Medium"/>
+                <a:ea typeface="Noto Sans CJK SC Medium"/>
+                <a:cs typeface="Noto Sans CJK SC Medium"/>
+              </a:rPr>
+              <a:t>03</a:t>
+            </a:r>
+          </a:p>
+        </p:txBody>
+      </p:sp>
+      <p:sp>
+        <p:nvSpPr>
+          <p:cNvPr id="12" name="TextBox 11"/>
+          <p:cNvSpPr txBox="1"/>
+          <p:nvPr/>
+        </p:nvSpPr>
+        <p:spPr>
+          <a:xfrm>
+            <a:off x="1417320" y="3255263"/>
+            <a:ext cx="9966960" cy="365760"/>
+          </a:xfrm>
+          <a:prstGeom prst="rect">
+            <a:avLst/>
+          </a:prstGeom>
+          <a:noFill/>
+        </p:spPr>
+        <p:txBody>
+          <a:bodyPr wrap="square" anchor="t" lIns="0" rIns="0" tIns="0" bIns="0"/>
+          <a:lstStyle/>
+          <a:p>
+            <a:pPr algn="l"/>
+            <a:r>
+              <a:rPr sz="2200" b="0" i="0" lang="zh-CN" altLang="en-US">
+                <a:solidFill>
+                  <a:srgbClr val="141414"/>
+                </a:solidFill>
+                <a:latin typeface="Noto Sans CJK SC Medium"/>
+                <a:ea typeface="Noto Sans CJK SC Medium"/>
+                <a:cs typeface="Noto Sans CJK SC Medium"/>
+              </a:rPr>
+              <a:t>家里的人分开记</a:t>
+            </a:r>
+          </a:p>
+        </p:txBody>
+      </p:sp>
+      <p:sp>
+        <p:nvSpPr>
+          <p:cNvPr id="13" name="TextBox 12"/>
+          <p:cNvSpPr txBox="1"/>
+          <p:nvPr/>
+        </p:nvSpPr>
+        <p:spPr>
+          <a:xfrm>
+            <a:off x="1417320" y="3657599"/>
+            <a:ext cx="9966960" cy="502920"/>
+          </a:xfrm>
+          <a:prstGeom prst="rect">
+            <a:avLst/>
+          </a:prstGeom>
+          <a:noFill/>
+        </p:spPr>
+        <p:txBody>
+          <a:bodyPr wrap="square" anchor="t" lIns="0" rIns="0" tIns="0" bIns="0"/>
+          <a:lstStyle/>
+          <a:p>
+            <a:pPr algn="l"/>
+            <a:r>
+              <a:rPr sz="1600" b="0" i="0" lang="zh-CN" altLang="en-US">
+                <a:solidFill>
+                  <a:srgbClr val="2C2C2C"/>
+                </a:solidFill>
+                <a:latin typeface="Noto Sans CJK SC"/>
+                <a:ea typeface="Noto Sans CJK SC"/>
+                <a:cs typeface="Noto Sans CJK SC"/>
+              </a:rPr>
+              <a:t>父母、孩子各一份记录。首页按人出两样，不混进一个购物车。买对的人变多，一户不止一个人在用。</a:t>
+            </a:r>
+          </a:p>
+        </p:txBody>
+      </p:sp>
+      <p:sp>
+        <p:nvSpPr>
+          <p:cNvPr id="14" name="TextBox 13"/>
+          <p:cNvSpPr txBox="1"/>
+          <p:nvPr/>
+        </p:nvSpPr>
+        <p:spPr>
+          <a:xfrm>
+            <a:off x="658368" y="4325112"/>
+            <a:ext cx="640080" cy="329184"/>
+          </a:xfrm>
+          <a:prstGeom prst="rect">
+            <a:avLst/>
+          </a:prstGeom>
+          <a:noFill/>
+        </p:spPr>
+        <p:txBody>
+          <a:bodyPr wrap="square" anchor="t" lIns="0" rIns="0" tIns="0" bIns="0"/>
+          <a:lstStyle/>
+          <a:p>
+            <a:pPr algn="l"/>
+            <a:r>
+              <a:rPr sz="1600" b="0" i="0" lang="zh-CN" altLang="en-US">
+                <a:solidFill>
+                  <a:srgbClr val="9E1B1B"/>
+                </a:solidFill>
+                <a:latin typeface="Noto Sans CJK SC Medium"/>
+                <a:ea typeface="Noto Sans CJK SC Medium"/>
+                <a:cs typeface="Noto Sans CJK SC Medium"/>
+              </a:rPr>
+              <a:t>04</a:t>
+            </a:r>
+          </a:p>
+        </p:txBody>
+      </p:sp>
+      <p:sp>
+        <p:nvSpPr>
+          <p:cNvPr id="15" name="TextBox 14"/>
+          <p:cNvSpPr txBox="1"/>
+          <p:nvPr/>
+        </p:nvSpPr>
+        <p:spPr>
+          <a:xfrm>
+            <a:off x="1417320" y="4306824"/>
+            <a:ext cx="9966960" cy="365760"/>
+          </a:xfrm>
+          <a:prstGeom prst="rect">
+            <a:avLst/>
+          </a:prstGeom>
+          <a:noFill/>
+        </p:spPr>
+        <p:txBody>
+          <a:bodyPr wrap="square" anchor="t" lIns="0" rIns="0" tIns="0" bIns="0"/>
+          <a:lstStyle/>
+          <a:p>
+            <a:pPr algn="l"/>
+            <a:r>
+              <a:rPr sz="2200" b="0" i="0" lang="zh-CN" altLang="en-US">
+                <a:solidFill>
+                  <a:srgbClr val="141414"/>
+                </a:solidFill>
+                <a:latin typeface="Noto Sans CJK SC Medium"/>
+                <a:ea typeface="Noto Sans CJK SC Medium"/>
+                <a:cs typeface="Noto Sans CJK SC Medium"/>
+              </a:rPr>
+              <a:t>停了才开口，而且分档</a:t>
+            </a:r>
+          </a:p>
+        </p:txBody>
+      </p:sp>
+      <p:sp>
+        <p:nvSpPr>
+          <p:cNvPr id="16" name="TextBox 15"/>
+          <p:cNvSpPr txBox="1"/>
+          <p:nvPr/>
+        </p:nvSpPr>
+        <p:spPr>
+          <a:xfrm>
+            <a:off x="1417320" y="4709159"/>
+            <a:ext cx="9966960" cy="502920"/>
+          </a:xfrm>
+          <a:prstGeom prst="rect">
+            <a:avLst/>
+          </a:prstGeom>
+          <a:noFill/>
+        </p:spPr>
+        <p:txBody>
+          <a:bodyPr wrap="square" anchor="t" lIns="0" rIns="0" tIns="0" bIns="0"/>
+          <a:lstStyle/>
+          <a:p>
+            <a:pPr algn="l"/>
+            <a:r>
+              <a:rPr sz="1600" b="0" i="0" lang="zh-CN" altLang="en-US">
+                <a:solidFill>
+                  <a:srgbClr val="2C2C2C"/>
+                </a:solidFill>
+                <a:latin typeface="Noto Sans CJK SC"/>
+                <a:ea typeface="Noto Sans CJK SC"/>
+                <a:cs typeface="Noto Sans CJK SC"/>
+              </a:rPr>
+              <a:t>三天、七天、十四天，话用审过的骨架，对象是这一个人。点开就联系。被记得，不是被群发。</a:t>
+            </a:r>
+          </a:p>
+        </p:txBody>
+      </p:sp>
+      <p:sp>
+        <p:nvSpPr>
+          <p:cNvPr id="17" name="Rectangle 16"/>
           <p:cNvSpPr/>
           <p:nvPr/>
         </p:nvSpPr>
         <p:spPr>
           <a:xfrm>
-            <a:off x="4160520" y="1207008"/>
-            <a:ext cx="10972" cy="3063240"/>
+            <a:off x="658368" y="5394960"/>
+            <a:ext cx="10881360" cy="10972"/>
           </a:xfrm>
           <a:prstGeom prst="rect">
             <a:avLst/>
@@ -14918,14 +8968,14 @@
       </p:sp>
       <p:sp>
         <p:nvSpPr>
-          <p:cNvPr id="9" name="TextBox 8"/>
-          <p:cNvSpPr txBox="1"/>
-          <p:nvPr/>
-        </p:nvSpPr>
-        <p:spPr>
-          <a:xfrm>
-            <a:off x="4361688" y="1207008"/>
-            <a:ext cx="3200400" cy="237744"/>
+          <p:cNvPr id="18" name="TextBox 17"/>
+          <p:cNvSpPr txBox="1"/>
+          <p:nvPr/>
+        </p:nvSpPr>
+        <p:spPr>
+          <a:xfrm>
+            <a:off x="658368" y="5559552"/>
+            <a:ext cx="10789920" cy="640080"/>
           </a:xfrm>
           <a:prstGeom prst="rect">
             <a:avLst/>
@@ -14938,7 +8988,7 @@
           <a:p>
             <a:pPr algn="l"/>
             <a:r>
-              <a:rPr sz="1400" b="0" i="0" lang="zh-CN" altLang="en-US">
+              <a:rPr sz="1600" b="0" i="0" lang="zh-CN" altLang="en-US">
                 <a:solidFill>
                   <a:srgbClr val="9E1B1B"/>
                 </a:solidFill>
@@ -14946,104 +8996,88 @@
                 <a:ea typeface="Noto Sans CJK SC Medium"/>
                 <a:cs typeface="Noto Sans CJK SC Medium"/>
               </a:rPr>
-              <a:t>02</a:t>
-            </a:r>
-          </a:p>
-        </p:txBody>
-      </p:sp>
-      <p:sp>
-        <p:nvSpPr>
-          <p:cNvPr id="10" name="TextBox 9"/>
-          <p:cNvSpPr txBox="1"/>
-          <p:nvPr/>
-        </p:nvSpPr>
-        <p:spPr>
-          <a:xfrm>
-            <a:off x="4361688" y="1499616"/>
-            <a:ext cx="3246120" cy="640080"/>
-          </a:xfrm>
-          <a:prstGeom prst="rect">
-            <a:avLst/>
-          </a:prstGeom>
-          <a:noFill/>
-        </p:spPr>
-        <p:txBody>
-          <a:bodyPr wrap="square" anchor="t" lIns="0" rIns="0" tIns="0" bIns="0"/>
-          <a:lstStyle/>
-          <a:p>
-            <a:pPr algn="l"/>
-            <a:r>
-              <a:rPr sz="2200" b="0" i="0" lang="zh-CN" altLang="en-US">
-                <a:solidFill>
-                  <a:srgbClr val="141414"/>
-                </a:solidFill>
-                <a:latin typeface="Noto Sans CJK SC Medium"/>
-                <a:ea typeface="Noto Sans CJK SC Medium"/>
-                <a:cs typeface="Noto Sans CJK SC Medium"/>
-              </a:rPr>
-              <a:t>加倍，或减半</a:t>
-            </a:r>
-          </a:p>
-        </p:txBody>
-      </p:sp>
-      <p:sp>
-        <p:nvSpPr>
-          <p:cNvPr id="11" name="TextBox 10"/>
-          <p:cNvSpPr txBox="1"/>
-          <p:nvPr/>
-        </p:nvSpPr>
-        <p:spPr>
-          <a:xfrm>
-            <a:off x="4361688" y="2240280"/>
-            <a:ext cx="3246120" cy="2011680"/>
-          </a:xfrm>
-          <a:prstGeom prst="rect">
-            <a:avLst/>
-          </a:prstGeom>
-          <a:noFill/>
-        </p:spPr>
-        <p:txBody>
-          <a:bodyPr wrap="square" anchor="t" lIns="0" rIns="0" tIns="0" bIns="0"/>
-          <a:lstStyle/>
-          <a:p>
-            <a:pPr algn="l">
-              <a:lnSpc>
-                <a:spcPct val="135000"/>
-              </a:lnSpc>
-            </a:pPr>
-            <a:r>
-              <a:rPr sz="1500" b="0" i="0" lang="zh-CN" altLang="en-US">
-                <a:solidFill>
-                  <a:srgbClr val="2C2C2C"/>
+              <a:t>体验省掉的是改图、再找、买错、被群发。业绩留下的是当次加购、续上、一户多人、停掉的人回来。</a:t>
+            </a:r>
+          </a:p>
+        </p:txBody>
+      </p:sp>
+      <p:sp>
+        <p:nvSpPr>
+          <p:cNvPr id="19" name="TextBox 18"/>
+          <p:cNvSpPr txBox="1"/>
+          <p:nvPr/>
+        </p:nvSpPr>
+        <p:spPr>
+          <a:xfrm>
+            <a:off x="10561320" y="6492240"/>
+            <a:ext cx="1051560" cy="201168"/>
+          </a:xfrm>
+          <a:prstGeom prst="rect">
+            <a:avLst/>
+          </a:prstGeom>
+          <a:noFill/>
+        </p:spPr>
+        <p:txBody>
+          <a:bodyPr wrap="square" anchor="t" lIns="0" rIns="0" tIns="0" bIns="0"/>
+          <a:lstStyle/>
+          <a:p>
+            <a:pPr algn="r"/>
+            <a:r>
+              <a:rPr sz="1100" b="0" i="0" lang="zh-CN" altLang="en-US">
+                <a:solidFill>
+                  <a:srgbClr val="C8C8C8"/>
                 </a:solidFill>
                 <a:latin typeface="Noto Sans CJK SC"/>
                 <a:ea typeface="Noto Sans CJK SC"/>
                 <a:cs typeface="Noto Sans CJK SC"/>
               </a:rPr>
-              <a:t>品质加倍，或价格减半。
-两件可以一起发生。
-品质是世界第一。
-价格是压倒性的第一。</a:t>
-            </a:r>
-          </a:p>
-        </p:txBody>
-      </p:sp>
-      <p:sp>
-        <p:nvSpPr>
-          <p:cNvPr id="12" name="Rectangle 11"/>
+              <a:t>07</a:t>
+            </a:r>
+          </a:p>
+        </p:txBody>
+      </p:sp>
+    </p:spTree>
+  </p:cSld>
+  <p:clrMapOvr>
+    <a:masterClrMapping/>
+  </p:clrMapOvr>
+</p:sld>
+</file>
+
+<file path=ppt/slides/slide8.xml><?xml version="1.0" encoding="utf-8"?>
+<p:sld xmlns:a="http://schemas.openxmlformats.org/drawingml/2006/main" xmlns:p="http://schemas.openxmlformats.org/presentationml/2006/main" xmlns:r="http://schemas.openxmlformats.org/officeDocument/2006/relationships">
+  <p:cSld>
+    <p:bg>
+      <p:bgPr>
+        <a:solidFill>
+          <a:srgbClr val="121212"/>
+        </a:solidFill>
+        <a:effectLst/>
+      </p:bgPr>
+    </p:bg>
+    <p:spTree>
+      <p:nvGrpSpPr>
+        <p:cNvPr id="1" name=""/>
+        <p:cNvGrpSpPr/>
+        <p:nvPr/>
+      </p:nvGrpSpPr>
+      <p:grpSpPr/>
+      <p:sp>
+        <p:nvSpPr>
+          <p:cNvPr id="2" name="Rectangle 1"/>
           <p:cNvSpPr/>
           <p:nvPr/>
         </p:nvSpPr>
         <p:spPr>
           <a:xfrm>
-            <a:off x="7863840" y="1207008"/>
-            <a:ext cx="10972" cy="3063240"/>
+            <a:off x="0" y="0"/>
+            <a:ext cx="73152" cy="6858000"/>
           </a:xfrm>
           <a:prstGeom prst="rect">
             <a:avLst/>
           </a:prstGeom>
           <a:solidFill>
-            <a:srgbClr val="E2E2E2"/>
+            <a:srgbClr val="9E1B1B"/>
           </a:solidFill>
           <a:ln>
             <a:noFill/>
@@ -15073,14 +9107,14 @@
       </p:sp>
       <p:sp>
         <p:nvSpPr>
-          <p:cNvPr id="13" name="TextBox 12"/>
-          <p:cNvSpPr txBox="1"/>
-          <p:nvPr/>
-        </p:nvSpPr>
-        <p:spPr>
-          <a:xfrm>
-            <a:off x="8065008" y="1207008"/>
-            <a:ext cx="3200400" cy="237744"/>
+          <p:cNvPr id="3" name="TextBox 2"/>
+          <p:cNvSpPr txBox="1"/>
+          <p:nvPr/>
+        </p:nvSpPr>
+        <p:spPr>
+          <a:xfrm>
+            <a:off x="777240" y="658368"/>
+            <a:ext cx="4572000" cy="457200"/>
           </a:xfrm>
           <a:prstGeom prst="rect">
             <a:avLst/>
@@ -15093,29 +9127,29 @@
           <a:p>
             <a:pPr algn="l"/>
             <a:r>
-              <a:rPr sz="1400" b="0" i="0" lang="zh-CN" altLang="en-US">
-                <a:solidFill>
-                  <a:srgbClr val="9E1B1B"/>
+              <a:rPr sz="2600" b="0" i="0" lang="zh-CN" altLang="en-US">
+                <a:solidFill>
+                  <a:srgbClr val="FFFFFF"/>
                 </a:solidFill>
                 <a:latin typeface="Noto Sans CJK SC Medium"/>
                 <a:ea typeface="Noto Sans CJK SC Medium"/>
                 <a:cs typeface="Noto Sans CJK SC Medium"/>
               </a:rPr>
-              <a:t>03</a:t>
-            </a:r>
-          </a:p>
-        </p:txBody>
-      </p:sp>
-      <p:sp>
-        <p:nvSpPr>
-          <p:cNvPr id="14" name="TextBox 13"/>
-          <p:cNvSpPr txBox="1"/>
-          <p:nvPr/>
-        </p:nvSpPr>
-        <p:spPr>
-          <a:xfrm>
-            <a:off x="8065008" y="1499616"/>
-            <a:ext cx="3246120" cy="640080"/>
+              <a:t>APP</a:t>
+            </a:r>
+          </a:p>
+        </p:txBody>
+      </p:sp>
+      <p:sp>
+        <p:nvSpPr>
+          <p:cNvPr id="4" name="TextBox 3"/>
+          <p:cNvSpPr txBox="1"/>
+          <p:nvPr/>
+        </p:nvSpPr>
+        <p:spPr>
+          <a:xfrm>
+            <a:off x="5623560" y="731519"/>
+            <a:ext cx="5760720" cy="365760"/>
           </a:xfrm>
           <a:prstGeom prst="rect">
             <a:avLst/>
@@ -15128,215 +9162,169 @@
           <a:p>
             <a:pPr algn="l"/>
             <a:r>
-              <a:rPr sz="2200" b="0" i="0" lang="zh-CN" altLang="en-US">
-                <a:solidFill>
-                  <a:srgbClr val="141414"/>
+              <a:rPr sz="1600" b="0" i="0" lang="zh-CN" altLang="en-US">
+                <a:solidFill>
+                  <a:srgbClr val="B5B5B5"/>
+                </a:solidFill>
+                <a:latin typeface="Noto Sans CJK SC"/>
+                <a:ea typeface="Noto Sans CJK SC"/>
+                <a:cs typeface="Noto Sans CJK SC"/>
+              </a:rPr>
+              <a:t>五分钟说明，早上三行</a:t>
+            </a:r>
+          </a:p>
+        </p:txBody>
+      </p:sp>
+      <p:sp>
+        <p:nvSpPr>
+          <p:cNvPr id="5" name="TextBox 4"/>
+          <p:cNvSpPr txBox="1"/>
+          <p:nvPr/>
+        </p:nvSpPr>
+        <p:spPr>
+          <a:xfrm>
+            <a:off x="777240" y="1371600"/>
+            <a:ext cx="4572000" cy="457200"/>
+          </a:xfrm>
+          <a:prstGeom prst="rect">
+            <a:avLst/>
+          </a:prstGeom>
+          <a:noFill/>
+        </p:spPr>
+        <p:txBody>
+          <a:bodyPr wrap="square" anchor="t" lIns="0" rIns="0" tIns="0" bIns="0"/>
+          <a:lstStyle/>
+          <a:p>
+            <a:pPr algn="l"/>
+            <a:r>
+              <a:rPr sz="2600" b="0" i="0" lang="zh-CN" altLang="en-US">
+                <a:solidFill>
+                  <a:srgbClr val="FFFFFF"/>
                 </a:solidFill>
                 <a:latin typeface="Noto Sans CJK SC Medium"/>
                 <a:ea typeface="Noto Sans CJK SC Medium"/>
                 <a:cs typeface="Noto Sans CJK SC Medium"/>
               </a:rPr>
-              <a:t>成本先按超大算</a:t>
-            </a:r>
-          </a:p>
-        </p:txBody>
-      </p:sp>
-      <p:sp>
-        <p:nvSpPr>
-          <p:cNvPr id="15" name="TextBox 14"/>
-          <p:cNvSpPr txBox="1"/>
-          <p:nvPr/>
-        </p:nvSpPr>
-        <p:spPr>
-          <a:xfrm>
-            <a:off x="8065008" y="2240280"/>
-            <a:ext cx="3246120" cy="2011680"/>
-          </a:xfrm>
-          <a:prstGeom prst="rect">
-            <a:avLst/>
-          </a:prstGeom>
-          <a:noFill/>
-        </p:spPr>
-        <p:txBody>
-          <a:bodyPr wrap="square" anchor="t" lIns="0" rIns="0" tIns="0" bIns="0"/>
-          <a:lstStyle/>
-          <a:p>
-            <a:pPr algn="l">
-              <a:lnSpc>
-                <a:spcPct val="135000"/>
-              </a:lnSpc>
-            </a:pPr>
-            <a:r>
-              <a:rPr sz="1500" b="0" i="0" lang="zh-CN" altLang="en-US">
-                <a:solidFill>
-                  <a:srgbClr val="2C2C2C"/>
+              <a:t>Acare</a:t>
+            </a:r>
+          </a:p>
+        </p:txBody>
+      </p:sp>
+      <p:sp>
+        <p:nvSpPr>
+          <p:cNvPr id="6" name="TextBox 5"/>
+          <p:cNvSpPr txBox="1"/>
+          <p:nvPr/>
+        </p:nvSpPr>
+        <p:spPr>
+          <a:xfrm>
+            <a:off x="5623560" y="1444752"/>
+            <a:ext cx="5760720" cy="365760"/>
+          </a:xfrm>
+          <a:prstGeom prst="rect">
+            <a:avLst/>
+          </a:prstGeom>
+          <a:noFill/>
+        </p:spPr>
+        <p:txBody>
+          <a:bodyPr wrap="square" anchor="t" lIns="0" rIns="0" tIns="0" bIns="0"/>
+          <a:lstStyle/>
+          <a:p>
+            <a:pPr algn="l"/>
+            <a:r>
+              <a:rPr sz="1600" b="0" i="0" lang="zh-CN" altLang="en-US">
+                <a:solidFill>
+                  <a:srgbClr val="B5B5B5"/>
                 </a:solidFill>
                 <a:latin typeface="Noto Sans CJK SC"/>
                 <a:ea typeface="Noto Sans CJK SC"/>
                 <a:cs typeface="Noto Sans CJK SC"/>
               </a:rPr>
-              <a:t>从起点就按超大规模重算。
-一个月十万套是前提，
-不是卖起来再去谈。
-谈运费，谁都会。</a:t>
-            </a:r>
-          </a:p>
-        </p:txBody>
-      </p:sp>
-      <p:sp>
-        <p:nvSpPr>
-          <p:cNvPr id="16" name="Rectangle 15"/>
-          <p:cNvSpPr/>
-          <p:nvPr/>
-        </p:nvSpPr>
-        <p:spPr>
-          <a:xfrm>
-            <a:off x="658368" y="4754880"/>
-            <a:ext cx="10881360" cy="10972"/>
-          </a:xfrm>
-          <a:prstGeom prst="rect">
-            <a:avLst/>
-          </a:prstGeom>
-          <a:solidFill>
-            <a:srgbClr val="E2E2E2"/>
-          </a:solidFill>
-          <a:ln>
-            <a:noFill/>
-          </a:ln>
-        </p:spPr>
-        <p:style>
-          <a:lnRef idx="1">
-            <a:schemeClr val="accent1"/>
-          </a:lnRef>
-          <a:fillRef idx="3">
-            <a:schemeClr val="accent1"/>
-          </a:fillRef>
-          <a:effectRef idx="2">
-            <a:schemeClr val="accent1"/>
-          </a:effectRef>
-          <a:fontRef idx="minor">
-            <a:schemeClr val="lt1"/>
-          </a:fontRef>
-        </p:style>
-        <p:txBody>
-          <a:bodyPr rtlCol="0" anchor="ctr"/>
-          <a:lstStyle/>
-          <a:p>
-            <a:pPr algn="ctr"/>
-          </a:p>
-        </p:txBody>
-      </p:sp>
-      <p:sp>
-        <p:nvSpPr>
-          <p:cNvPr id="17" name="TextBox 16"/>
-          <p:cNvSpPr txBox="1"/>
-          <p:nvPr/>
-        </p:nvSpPr>
-        <p:spPr>
-          <a:xfrm>
-            <a:off x="658368" y="4956048"/>
-            <a:ext cx="10789920" cy="1051560"/>
-          </a:xfrm>
-          <a:prstGeom prst="rect">
-            <a:avLst/>
-          </a:prstGeom>
-          <a:noFill/>
-        </p:spPr>
-        <p:txBody>
-          <a:bodyPr wrap="square" anchor="t" lIns="0" rIns="0" tIns="0" bIns="0"/>
-          <a:lstStyle/>
-          <a:p>
-            <a:pPr algn="l">
-              <a:lnSpc>
-                <a:spcPct val="130000"/>
-              </a:lnSpc>
-            </a:pPr>
-            <a:r>
-              <a:rPr sz="2000" b="0" i="0" lang="zh-CN" altLang="en-US">
-                <a:solidFill>
-                  <a:srgbClr val="9E1B1B"/>
+              <a:t>拍一张，说缺什么</a:t>
+            </a:r>
+          </a:p>
+        </p:txBody>
+      </p:sp>
+      <p:sp>
+        <p:nvSpPr>
+          <p:cNvPr id="7" name="TextBox 6"/>
+          <p:cNvSpPr txBox="1"/>
+          <p:nvPr/>
+        </p:nvSpPr>
+        <p:spPr>
+          <a:xfrm>
+            <a:off x="777240" y="2084832"/>
+            <a:ext cx="4572000" cy="457200"/>
+          </a:xfrm>
+          <a:prstGeom prst="rect">
+            <a:avLst/>
+          </a:prstGeom>
+          <a:noFill/>
+        </p:spPr>
+        <p:txBody>
+          <a:bodyPr wrap="square" anchor="t" lIns="0" rIns="0" tIns="0" bIns="0"/>
+          <a:lstStyle/>
+          <a:p>
+            <a:pPr algn="l"/>
+            <a:r>
+              <a:rPr sz="2600" b="0" i="0" lang="zh-CN" altLang="en-US">
+                <a:solidFill>
+                  <a:srgbClr val="FFFFFF"/>
                 </a:solidFill>
                 <a:latin typeface="Noto Sans CJK SC Medium"/>
                 <a:ea typeface="Noto Sans CJK SC Medium"/>
                 <a:cs typeface="Noto Sans CJK SC Medium"/>
               </a:rPr>
-              <a:t>总目标：十年前的价格，十年后的品质。
-按规格跟着市场走，标准就在对方手里。</a:t>
-            </a:r>
-          </a:p>
-        </p:txBody>
-      </p:sp>
-      <p:sp>
-        <p:nvSpPr>
-          <p:cNvPr id="18" name="TextBox 17"/>
-          <p:cNvSpPr txBox="1"/>
-          <p:nvPr/>
-        </p:nvSpPr>
-        <p:spPr>
-          <a:xfrm>
-            <a:off x="10561320" y="6492240"/>
-            <a:ext cx="1051560" cy="201168"/>
-          </a:xfrm>
-          <a:prstGeom prst="rect">
-            <a:avLst/>
-          </a:prstGeom>
-          <a:noFill/>
-        </p:spPr>
-        <p:txBody>
-          <a:bodyPr wrap="square" anchor="t" lIns="0" rIns="0" tIns="0" bIns="0"/>
-          <a:lstStyle/>
-          <a:p>
-            <a:pPr algn="r"/>
-            <a:r>
-              <a:rPr sz="1100" b="0" i="0" lang="zh-CN" altLang="en-US">
-                <a:solidFill>
-                  <a:srgbClr val="C8C8C8"/>
+              <a:t>AZA</a:t>
+            </a:r>
+          </a:p>
+        </p:txBody>
+      </p:sp>
+      <p:sp>
+        <p:nvSpPr>
+          <p:cNvPr id="8" name="TextBox 7"/>
+          <p:cNvSpPr txBox="1"/>
+          <p:nvPr/>
+        </p:nvSpPr>
+        <p:spPr>
+          <a:xfrm>
+            <a:off x="5623560" y="2157984"/>
+            <a:ext cx="5760720" cy="365760"/>
+          </a:xfrm>
+          <a:prstGeom prst="rect">
+            <a:avLst/>
+          </a:prstGeom>
+          <a:noFill/>
+        </p:spPr>
+        <p:txBody>
+          <a:bodyPr wrap="square" anchor="t" lIns="0" rIns="0" tIns="0" bIns="0"/>
+          <a:lstStyle/>
+          <a:p>
+            <a:pPr algn="l"/>
+            <a:r>
+              <a:rPr sz="1600" b="0" i="0" lang="zh-CN" altLang="en-US">
+                <a:solidFill>
+                  <a:srgbClr val="B5B5B5"/>
                 </a:solidFill>
                 <a:latin typeface="Noto Sans CJK SC"/>
                 <a:ea typeface="Noto Sans CJK SC"/>
                 <a:cs typeface="Noto Sans CJK SC"/>
               </a:rPr>
-              <a:t>07</a:t>
-            </a:r>
-          </a:p>
-        </p:txBody>
-      </p:sp>
-    </p:spTree>
-  </p:cSld>
-  <p:clrMapOvr>
-    <a:masterClrMapping/>
-  </p:clrMapOvr>
-</p:sld>
-</file>
-
-<file path=ppt/slides/slide8.xml><?xml version="1.0" encoding="utf-8"?>
-<p:sld xmlns:a="http://schemas.openxmlformats.org/drawingml/2006/main" xmlns:p="http://schemas.openxmlformats.org/presentationml/2006/main" xmlns:r="http://schemas.openxmlformats.org/officeDocument/2006/relationships">
-  <p:cSld>
-    <p:bg>
-      <p:bgPr>
-        <a:solidFill>
-          <a:srgbClr val="FFFFFF"/>
-        </a:solidFill>
-        <a:effectLst/>
-      </p:bgPr>
-    </p:bg>
-    <p:spTree>
-      <p:nvGrpSpPr>
-        <p:cNvPr id="1" name=""/>
-        <p:cNvGrpSpPr/>
-        <p:nvPr/>
-      </p:nvGrpSpPr>
-      <p:grpSpPr/>
-      <p:sp>
-        <p:nvSpPr>
-          <p:cNvPr id="2" name="TextBox 1"/>
-          <p:cNvSpPr txBox="1"/>
-          <p:nvPr/>
-        </p:nvSpPr>
-        <p:spPr>
-          <a:xfrm>
-            <a:off x="658368" y="365760"/>
-            <a:ext cx="640080" cy="329184"/>
+              <a:t>说一句，就买到</a:t>
+            </a:r>
+          </a:p>
+        </p:txBody>
+      </p:sp>
+      <p:sp>
+        <p:nvSpPr>
+          <p:cNvPr id="9" name="TextBox 8"/>
+          <p:cNvSpPr txBox="1"/>
+          <p:nvPr/>
+        </p:nvSpPr>
+        <p:spPr>
+          <a:xfrm>
+            <a:off x="777240" y="2798064"/>
+            <a:ext cx="4572000" cy="457200"/>
           </a:xfrm>
           <a:prstGeom prst="rect">
             <a:avLst/>
@@ -15349,29 +9337,29 @@
           <a:p>
             <a:pPr algn="l"/>
             <a:r>
-              <a:rPr sz="1500" b="0" i="0" lang="zh-CN" altLang="en-US">
-                <a:solidFill>
-                  <a:srgbClr val="9E1B1B"/>
+              <a:rPr sz="2600" b="0" i="0" lang="zh-CN" altLang="en-US">
+                <a:solidFill>
+                  <a:srgbClr val="FFFFFF"/>
                 </a:solidFill>
                 <a:latin typeface="Noto Sans CJK SC Medium"/>
                 <a:ea typeface="Noto Sans CJK SC Medium"/>
                 <a:cs typeface="Noto Sans CJK SC Medium"/>
               </a:rPr>
-              <a:t>07</a:t>
-            </a:r>
-          </a:p>
-        </p:txBody>
-      </p:sp>
-      <p:sp>
-        <p:nvSpPr>
-          <p:cNvPr id="3" name="TextBox 2"/>
-          <p:cNvSpPr txBox="1"/>
-          <p:nvPr/>
-        </p:nvSpPr>
-        <p:spPr>
-          <a:xfrm>
-            <a:off x="1371600" y="310896"/>
-            <a:ext cx="10058400" cy="438912"/>
+              <a:t>要数的</a:t>
+            </a:r>
+          </a:p>
+        </p:txBody>
+      </p:sp>
+      <p:sp>
+        <p:nvSpPr>
+          <p:cNvPr id="10" name="TextBox 9"/>
+          <p:cNvSpPr txBox="1"/>
+          <p:nvPr/>
+        </p:nvSpPr>
+        <p:spPr>
+          <a:xfrm>
+            <a:off x="5623560" y="2871216"/>
+            <a:ext cx="5760720" cy="365760"/>
           </a:xfrm>
           <a:prstGeom prst="rect">
             <a:avLst/>
@@ -15384,107 +9372,64 @@
           <a:p>
             <a:pPr algn="l"/>
             <a:r>
-              <a:rPr sz="3000" b="0" i="0" lang="zh-CN" altLang="en-US">
-                <a:solidFill>
-                  <a:srgbClr val="141414"/>
+              <a:rPr sz="1600" b="0" i="0" lang="zh-CN" altLang="en-US">
+                <a:solidFill>
+                  <a:srgbClr val="B5B5B5"/>
+                </a:solidFill>
+                <a:latin typeface="Noto Sans CJK SC"/>
+                <a:ea typeface="Noto Sans CJK SC"/>
+                <a:cs typeface="Noto Sans CJK SC"/>
+              </a:rPr>
+              <a:t>记录、连续天数、每天打开</a:t>
+            </a:r>
+          </a:p>
+        </p:txBody>
+      </p:sp>
+      <p:sp>
+        <p:nvSpPr>
+          <p:cNvPr id="11" name="TextBox 10"/>
+          <p:cNvSpPr txBox="1"/>
+          <p:nvPr/>
+        </p:nvSpPr>
+        <p:spPr>
+          <a:xfrm>
+            <a:off x="749808" y="3703320"/>
+            <a:ext cx="10058400" cy="777240"/>
+          </a:xfrm>
+          <a:prstGeom prst="rect">
+            <a:avLst/>
+          </a:prstGeom>
+          <a:noFill/>
+        </p:spPr>
+        <p:txBody>
+          <a:bodyPr wrap="square" anchor="t" lIns="0" rIns="0" tIns="0" bIns="0"/>
+          <a:lstStyle/>
+          <a:p>
+            <a:pPr algn="l"/>
+            <a:r>
+              <a:rPr sz="4800" b="0" i="0" lang="zh-CN" altLang="en-US">
+                <a:solidFill>
+                  <a:srgbClr val="9E1B1B"/>
                 </a:solidFill>
                 <a:latin typeface="Noto Sans CJK SC Medium"/>
                 <a:ea typeface="Noto Sans CJK SC Medium"/>
                 <a:cs typeface="Noto Sans CJK SC Medium"/>
               </a:rPr>
-              <a:t>一千八百韩元，不是利润</a:t>
-            </a:r>
-          </a:p>
-        </p:txBody>
-      </p:sp>
-      <p:sp>
-        <p:nvSpPr>
-          <p:cNvPr id="4" name="Rectangle 3"/>
-          <p:cNvSpPr/>
-          <p:nvPr/>
-        </p:nvSpPr>
-        <p:spPr>
-          <a:xfrm>
-            <a:off x="658368" y="960120"/>
-            <a:ext cx="10881360" cy="10972"/>
-          </a:xfrm>
-          <a:prstGeom prst="rect">
-            <a:avLst/>
-          </a:prstGeom>
-          <a:solidFill>
-            <a:srgbClr val="E2E2E2"/>
-          </a:solidFill>
-          <a:ln>
-            <a:noFill/>
-          </a:ln>
-        </p:spPr>
-        <p:style>
-          <a:lnRef idx="1">
-            <a:schemeClr val="accent1"/>
-          </a:lnRef>
-          <a:fillRef idx="3">
-            <a:schemeClr val="accent1"/>
-          </a:fillRef>
-          <a:effectRef idx="2">
-            <a:schemeClr val="accent1"/>
-          </a:effectRef>
-          <a:fontRef idx="minor">
-            <a:schemeClr val="lt1"/>
-          </a:fontRef>
-        </p:style>
-        <p:txBody>
-          <a:bodyPr rtlCol="0" anchor="ctr"/>
-          <a:lstStyle/>
-          <a:p>
-            <a:pPr algn="ctr"/>
-          </a:p>
-        </p:txBody>
-      </p:sp>
-      <p:sp>
-        <p:nvSpPr>
-          <p:cNvPr id="5" name="TextBox 4"/>
-          <p:cNvSpPr txBox="1"/>
-          <p:nvPr/>
-        </p:nvSpPr>
-        <p:spPr>
-          <a:xfrm>
-            <a:off x="658368" y="1234440"/>
-            <a:ext cx="4937760" cy="1051560"/>
-          </a:xfrm>
-          <a:prstGeom prst="rect">
-            <a:avLst/>
-          </a:prstGeom>
-          <a:noFill/>
-        </p:spPr>
-        <p:txBody>
-          <a:bodyPr wrap="square" anchor="t" lIns="0" rIns="0" tIns="0" bIns="0"/>
-          <a:lstStyle/>
-          <a:p>
-            <a:pPr algn="l"/>
-            <a:r>
-              <a:rPr sz="7200" b="0" i="0" lang="zh-CN" altLang="en-US">
-                <a:solidFill>
-                  <a:srgbClr val="9E1B1B"/>
-                </a:solidFill>
-                <a:latin typeface="Noto Sans CJK SC Medium"/>
-                <a:ea typeface="Noto Sans CJK SC Medium"/>
-                <a:cs typeface="Noto Sans CJK SC Medium"/>
-              </a:rPr>
-              <a:t>1,200</a:t>
-            </a:r>
-          </a:p>
-        </p:txBody>
-      </p:sp>
-      <p:sp>
-        <p:nvSpPr>
-          <p:cNvPr id="6" name="TextBox 5"/>
-          <p:cNvSpPr txBox="1"/>
-          <p:nvPr/>
-        </p:nvSpPr>
-        <p:spPr>
-          <a:xfrm>
-            <a:off x="658368" y="2377440"/>
-            <a:ext cx="4754880" cy="640080"/>
+              <a:t>不能不去</a:t>
+            </a:r>
+          </a:p>
+        </p:txBody>
+      </p:sp>
+      <p:sp>
+        <p:nvSpPr>
+          <p:cNvPr id="12" name="TextBox 11"/>
+          <p:cNvSpPr txBox="1"/>
+          <p:nvPr/>
+        </p:nvSpPr>
+        <p:spPr>
+          <a:xfrm>
+            <a:off x="804672" y="4617720"/>
+            <a:ext cx="10241280" cy="777240"/>
           </a:xfrm>
           <a:prstGeom prst="rect">
             <a:avLst/>
@@ -15497,34 +9442,34 @@
           <a:p>
             <a:pPr algn="l">
               <a:lnSpc>
-                <a:spcPct val="140000"/>
+                <a:spcPct val="125000"/>
               </a:lnSpc>
             </a:pPr>
             <a:r>
-              <a:rPr sz="1600" b="0" i="0" lang="zh-CN" altLang="en-US">
-                <a:solidFill>
-                  <a:srgbClr val="2C2C2C"/>
+              <a:rPr sz="1800" b="0" i="0" lang="zh-CN" altLang="en-US">
+                <a:solidFill>
+                  <a:srgbClr val="D4D4D4"/>
                 </a:solidFill>
                 <a:latin typeface="Noto Sans CJK SC"/>
                 <a:ea typeface="Noto Sans CJK SC"/>
                 <a:cs typeface="Noto Sans CJK SC"/>
               </a:rPr>
-              <a:t>韩元。市价 2,000 到 3,000。
-二十年，没有人跟上。</a:t>
-            </a:r>
-          </a:p>
-        </p:txBody>
-      </p:sp>
-      <p:sp>
-        <p:nvSpPr>
-          <p:cNvPr id="7" name="TextBox 6"/>
-          <p:cNvSpPr txBox="1"/>
-          <p:nvPr/>
-        </p:nvSpPr>
-        <p:spPr>
-          <a:xfrm>
-            <a:off x="6126480" y="1280160"/>
-            <a:ext cx="1234440" cy="365760"/>
+              <a:t>体验省掉的是等课、填表、搜索。
+业绩留下的是续购，和跟到的那一个人。</a:t>
+            </a:r>
+          </a:p>
+        </p:txBody>
+      </p:sp>
+      <p:sp>
+        <p:nvSpPr>
+          <p:cNvPr id="13" name="TextBox 12"/>
+          <p:cNvSpPr txBox="1"/>
+          <p:nvPr/>
+        </p:nvSpPr>
+        <p:spPr>
+          <a:xfrm>
+            <a:off x="804672" y="5806440"/>
+            <a:ext cx="8229600" cy="274320"/>
           </a:xfrm>
           <a:prstGeom prst="rect">
             <a:avLst/>
@@ -15537,1182 +9482,50 @@
           <a:p>
             <a:pPr algn="l"/>
             <a:r>
-              <a:rPr sz="1800" b="0" i="0" lang="zh-CN" altLang="en-US">
-                <a:solidFill>
-                  <a:srgbClr val="9E1B1B"/>
-                </a:solidFill>
-                <a:latin typeface="Noto Sans CJK SC Medium"/>
-                <a:ea typeface="Noto Sans CJK SC Medium"/>
-                <a:cs typeface="Noto Sans CJK SC Medium"/>
-              </a:rPr>
-              <a:t>制造</a:t>
-            </a:r>
-          </a:p>
-        </p:txBody>
-      </p:sp>
-      <p:sp>
-        <p:nvSpPr>
-          <p:cNvPr id="8" name="TextBox 7"/>
-          <p:cNvSpPr txBox="1"/>
-          <p:nvPr/>
-        </p:nvSpPr>
-        <p:spPr>
-          <a:xfrm>
-            <a:off x="7452360" y="1298448"/>
-            <a:ext cx="4023360" cy="502920"/>
-          </a:xfrm>
-          <a:prstGeom prst="rect">
-            <a:avLst/>
-          </a:prstGeom>
-          <a:noFill/>
-        </p:spPr>
-        <p:txBody>
-          <a:bodyPr wrap="square" anchor="t" lIns="0" rIns="0" tIns="0" bIns="0"/>
-          <a:lstStyle/>
-          <a:p>
-            <a:pPr algn="l"/>
-            <a:r>
-              <a:rPr sz="1600" b="0" i="0" lang="zh-CN" altLang="en-US">
-                <a:solidFill>
-                  <a:srgbClr val="2C2C2C"/>
+              <a:rPr sz="1400" b="0" i="0" lang="zh-CN" altLang="en-US">
+                <a:solidFill>
+                  <a:srgbClr val="9A9A9A"/>
                 </a:solidFill>
                 <a:latin typeface="Noto Sans CJK SC"/>
                 <a:ea typeface="Noto Sans CJK SC"/>
                 <a:cs typeface="Noto Sans CJK SC"/>
               </a:rPr>
-              <a:t>型号一多，每样只做一点，成本被抬高。</a:t>
-            </a:r>
-          </a:p>
-        </p:txBody>
-      </p:sp>
-      <p:sp>
-        <p:nvSpPr>
-          <p:cNvPr id="9" name="Rectangle 8"/>
-          <p:cNvSpPr/>
-          <p:nvPr/>
-        </p:nvSpPr>
-        <p:spPr>
-          <a:xfrm>
-            <a:off x="6126480" y="1892807"/>
-            <a:ext cx="5349240" cy="9144"/>
-          </a:xfrm>
-          <a:prstGeom prst="rect">
-            <a:avLst/>
-          </a:prstGeom>
-          <a:solidFill>
-            <a:srgbClr val="E2E2E2"/>
-          </a:solidFill>
-          <a:ln>
-            <a:noFill/>
-          </a:ln>
-        </p:spPr>
-        <p:style>
-          <a:lnRef idx="1">
-            <a:schemeClr val="accent1"/>
-          </a:lnRef>
-          <a:fillRef idx="3">
-            <a:schemeClr val="accent1"/>
-          </a:fillRef>
-          <a:effectRef idx="2">
-            <a:schemeClr val="accent1"/>
-          </a:effectRef>
-          <a:fontRef idx="minor">
-            <a:schemeClr val="lt1"/>
-          </a:fontRef>
-        </p:style>
-        <p:txBody>
-          <a:bodyPr rtlCol="0" anchor="ctr"/>
-          <a:lstStyle/>
-          <a:p>
-            <a:pPr algn="ctr"/>
-          </a:p>
-        </p:txBody>
-      </p:sp>
-      <p:sp>
-        <p:nvSpPr>
-          <p:cNvPr id="10" name="TextBox 9"/>
-          <p:cNvSpPr txBox="1"/>
-          <p:nvPr/>
-        </p:nvSpPr>
-        <p:spPr>
-          <a:xfrm>
-            <a:off x="6126480" y="2057400"/>
-            <a:ext cx="1234440" cy="365760"/>
-          </a:xfrm>
-          <a:prstGeom prst="rect">
-            <a:avLst/>
-          </a:prstGeom>
-          <a:noFill/>
-        </p:spPr>
-        <p:txBody>
-          <a:bodyPr wrap="square" anchor="t" lIns="0" rIns="0" tIns="0" bIns="0"/>
-          <a:lstStyle/>
-          <a:p>
-            <a:pPr algn="l"/>
-            <a:r>
-              <a:rPr sz="1800" b="0" i="0" lang="zh-CN" altLang="en-US">
-                <a:solidFill>
-                  <a:srgbClr val="9E1B1B"/>
-                </a:solidFill>
-                <a:latin typeface="Noto Sans CJK SC Medium"/>
-                <a:ea typeface="Noto Sans CJK SC Medium"/>
-                <a:cs typeface="Noto Sans CJK SC Medium"/>
-              </a:rPr>
-              <a:t>信任</a:t>
-            </a:r>
-          </a:p>
-        </p:txBody>
-      </p:sp>
-      <p:sp>
-        <p:nvSpPr>
-          <p:cNvPr id="11" name="TextBox 10"/>
-          <p:cNvSpPr txBox="1"/>
-          <p:nvPr/>
-        </p:nvSpPr>
-        <p:spPr>
-          <a:xfrm>
-            <a:off x="7452360" y="2075688"/>
-            <a:ext cx="4023360" cy="502920"/>
-          </a:xfrm>
-          <a:prstGeom prst="rect">
-            <a:avLst/>
-          </a:prstGeom>
-          <a:noFill/>
-        </p:spPr>
-        <p:txBody>
-          <a:bodyPr wrap="square" anchor="t" lIns="0" rIns="0" tIns="0" bIns="0"/>
-          <a:lstStyle/>
-          <a:p>
-            <a:pPr algn="l"/>
-            <a:r>
-              <a:rPr sz="1600" b="0" i="0" lang="zh-CN" altLang="en-US">
-                <a:solidFill>
-                  <a:srgbClr val="2C2C2C"/>
+              <a:t>蒙想讯息    2026年9月22日</a:t>
+            </a:r>
+          </a:p>
+        </p:txBody>
+      </p:sp>
+      <p:sp>
+        <p:nvSpPr>
+          <p:cNvPr id="14" name="TextBox 13"/>
+          <p:cNvSpPr txBox="1"/>
+          <p:nvPr/>
+        </p:nvSpPr>
+        <p:spPr>
+          <a:xfrm>
+            <a:off x="10561320" y="6492240"/>
+            <a:ext cx="1051560" cy="201168"/>
+          </a:xfrm>
+          <a:prstGeom prst="rect">
+            <a:avLst/>
+          </a:prstGeom>
+          <a:noFill/>
+        </p:spPr>
+        <p:txBody>
+          <a:bodyPr wrap="square" anchor="t" lIns="0" rIns="0" tIns="0" bIns="0"/>
+          <a:lstStyle/>
+          <a:p>
+            <a:pPr algn="r"/>
+            <a:r>
+              <a:rPr sz="1100" b="0" i="0" lang="zh-CN" altLang="en-US">
+                <a:solidFill>
+                  <a:srgbClr val="6A6A6A"/>
                 </a:solidFill>
                 <a:latin typeface="Noto Sans CJK SC"/>
                 <a:ea typeface="Noto Sans CJK SC"/>
                 <a:cs typeface="Noto Sans CJK SC"/>
               </a:rPr>
-              <a:t>为了让人相信，广告和店铺把钱花出去。</a:t>
-            </a:r>
-          </a:p>
-        </p:txBody>
-      </p:sp>
-      <p:sp>
-        <p:nvSpPr>
-          <p:cNvPr id="12" name="Rectangle 11"/>
-          <p:cNvSpPr/>
-          <p:nvPr/>
-        </p:nvSpPr>
-        <p:spPr>
-          <a:xfrm>
-            <a:off x="6126480" y="2670048"/>
-            <a:ext cx="5349240" cy="9144"/>
-          </a:xfrm>
-          <a:prstGeom prst="rect">
-            <a:avLst/>
-          </a:prstGeom>
-          <a:solidFill>
-            <a:srgbClr val="E2E2E2"/>
-          </a:solidFill>
-          <a:ln>
-            <a:noFill/>
-          </a:ln>
-        </p:spPr>
-        <p:style>
-          <a:lnRef idx="1">
-            <a:schemeClr val="accent1"/>
-          </a:lnRef>
-          <a:fillRef idx="3">
-            <a:schemeClr val="accent1"/>
-          </a:fillRef>
-          <a:effectRef idx="2">
-            <a:schemeClr val="accent1"/>
-          </a:effectRef>
-          <a:fontRef idx="minor">
-            <a:schemeClr val="lt1"/>
-          </a:fontRef>
-        </p:style>
-        <p:txBody>
-          <a:bodyPr rtlCol="0" anchor="ctr"/>
-          <a:lstStyle/>
-          <a:p>
-            <a:pPr algn="ctr"/>
-          </a:p>
-        </p:txBody>
-      </p:sp>
-      <p:sp>
-        <p:nvSpPr>
-          <p:cNvPr id="13" name="TextBox 12"/>
-          <p:cNvSpPr txBox="1"/>
-          <p:nvPr/>
-        </p:nvSpPr>
-        <p:spPr>
-          <a:xfrm>
-            <a:off x="6126480" y="2834640"/>
-            <a:ext cx="1234440" cy="365760"/>
-          </a:xfrm>
-          <a:prstGeom prst="rect">
-            <a:avLst/>
-          </a:prstGeom>
-          <a:noFill/>
-        </p:spPr>
-        <p:txBody>
-          <a:bodyPr wrap="square" anchor="t" lIns="0" rIns="0" tIns="0" bIns="0"/>
-          <a:lstStyle/>
-          <a:p>
-            <a:pPr algn="l"/>
-            <a:r>
-              <a:rPr sz="1800" b="0" i="0" lang="zh-CN" altLang="en-US">
-                <a:solidFill>
-                  <a:srgbClr val="9E1B1B"/>
-                </a:solidFill>
-                <a:latin typeface="Noto Sans CJK SC Medium"/>
-                <a:ea typeface="Noto Sans CJK SC Medium"/>
-                <a:cs typeface="Noto Sans CJK SC Medium"/>
-              </a:rPr>
-              <a:t>选择</a:t>
-            </a:r>
-          </a:p>
-        </p:txBody>
-      </p:sp>
-      <p:sp>
-        <p:nvSpPr>
-          <p:cNvPr id="14" name="TextBox 13"/>
-          <p:cNvSpPr txBox="1"/>
-          <p:nvPr/>
-        </p:nvSpPr>
-        <p:spPr>
-          <a:xfrm>
-            <a:off x="7452360" y="2852928"/>
-            <a:ext cx="4023360" cy="502920"/>
-          </a:xfrm>
-          <a:prstGeom prst="rect">
-            <a:avLst/>
-          </a:prstGeom>
-          <a:noFill/>
-        </p:spPr>
-        <p:txBody>
-          <a:bodyPr wrap="square" anchor="t" lIns="0" rIns="0" tIns="0" bIns="0"/>
-          <a:lstStyle/>
-          <a:p>
-            <a:pPr algn="l"/>
-            <a:r>
-              <a:rPr sz="1600" b="0" i="0" lang="zh-CN" altLang="en-US">
-                <a:solidFill>
-                  <a:srgbClr val="2C2C2C"/>
-                </a:solidFill>
-                <a:latin typeface="Noto Sans CJK SC"/>
-                <a:ea typeface="Noto Sans CJK SC"/>
-                <a:cs typeface="Noto Sans CJK SC"/>
-              </a:rPr>
-              <a:t>人要挑选，会买错，会退货。</a:t>
-            </a:r>
-          </a:p>
-        </p:txBody>
-      </p:sp>
-      <p:sp>
-        <p:nvSpPr>
-          <p:cNvPr id="15" name="Rectangle 14"/>
-          <p:cNvSpPr/>
-          <p:nvPr/>
-        </p:nvSpPr>
-        <p:spPr>
-          <a:xfrm>
-            <a:off x="6126480" y="3447288"/>
-            <a:ext cx="5349240" cy="9144"/>
-          </a:xfrm>
-          <a:prstGeom prst="rect">
-            <a:avLst/>
-          </a:prstGeom>
-          <a:solidFill>
-            <a:srgbClr val="E2E2E2"/>
-          </a:solidFill>
-          <a:ln>
-            <a:noFill/>
-          </a:ln>
-        </p:spPr>
-        <p:style>
-          <a:lnRef idx="1">
-            <a:schemeClr val="accent1"/>
-          </a:lnRef>
-          <a:fillRef idx="3">
-            <a:schemeClr val="accent1"/>
-          </a:fillRef>
-          <a:effectRef idx="2">
-            <a:schemeClr val="accent1"/>
-          </a:effectRef>
-          <a:fontRef idx="minor">
-            <a:schemeClr val="lt1"/>
-          </a:fontRef>
-        </p:style>
-        <p:txBody>
-          <a:bodyPr rtlCol="0" anchor="ctr"/>
-          <a:lstStyle/>
-          <a:p>
-            <a:pPr algn="ctr"/>
-          </a:p>
-        </p:txBody>
-      </p:sp>
-      <p:sp>
-        <p:nvSpPr>
-          <p:cNvPr id="16" name="TextBox 15"/>
-          <p:cNvSpPr txBox="1"/>
-          <p:nvPr/>
-        </p:nvSpPr>
-        <p:spPr>
-          <a:xfrm>
-            <a:off x="658368" y="4709160"/>
-            <a:ext cx="10789920" cy="1234440"/>
-          </a:xfrm>
-          <a:prstGeom prst="rect">
-            <a:avLst/>
-          </a:prstGeom>
-          <a:noFill/>
-        </p:spPr>
-        <p:txBody>
-          <a:bodyPr wrap="square" anchor="t" lIns="0" rIns="0" tIns="0" bIns="0"/>
-          <a:lstStyle/>
-          <a:p>
-            <a:pPr algn="l">
-              <a:lnSpc>
-                <a:spcPct val="145000"/>
-              </a:lnSpc>
-            </a:pPr>
-            <a:r>
-              <a:rPr sz="1600" b="0" i="0" lang="zh-CN" altLang="en-US">
-                <a:solidFill>
-                  <a:srgbClr val="141414"/>
-                </a:solidFill>
-                <a:latin typeface="Noto Sans CJK SC"/>
-                <a:ea typeface="Noto Sans CJK SC"/>
-                <a:cs typeface="Noto Sans CJK SC"/>
-              </a:rPr>
-              <a:t>一个造型。人的嘴不变，模具就不改。腔数做大，原料买吨袋，货款付现金。
-若只是从现成的货里挑一个，Coupang 明天就能做。要做的是把这一件的生产从头重排。</a:t>
-            </a:r>
-          </a:p>
-        </p:txBody>
-      </p:sp>
-      <p:sp>
-        <p:nvSpPr>
-          <p:cNvPr id="17" name="TextBox 16"/>
-          <p:cNvSpPr txBox="1"/>
-          <p:nvPr/>
-        </p:nvSpPr>
-        <p:spPr>
-          <a:xfrm>
-            <a:off x="10561320" y="6492240"/>
-            <a:ext cx="1051560" cy="201168"/>
-          </a:xfrm>
-          <a:prstGeom prst="rect">
-            <a:avLst/>
-          </a:prstGeom>
-          <a:noFill/>
-        </p:spPr>
-        <p:txBody>
-          <a:bodyPr wrap="square" anchor="t" lIns="0" rIns="0" tIns="0" bIns="0"/>
-          <a:lstStyle/>
-          <a:p>
-            <a:pPr algn="r"/>
-            <a:r>
-              <a:rPr sz="1100" b="0" i="0" lang="zh-CN" altLang="en-US">
-                <a:solidFill>
-                  <a:srgbClr val="C8C8C8"/>
-                </a:solidFill>
-                <a:latin typeface="Noto Sans CJK SC"/>
-                <a:ea typeface="Noto Sans CJK SC"/>
-                <a:cs typeface="Noto Sans CJK SC"/>
-              </a:rPr>
               <a:t>08</a:t>
-            </a:r>
-          </a:p>
-        </p:txBody>
-      </p:sp>
-    </p:spTree>
-  </p:cSld>
-  <p:clrMapOvr>
-    <a:masterClrMapping/>
-  </p:clrMapOvr>
-</p:sld>
-</file>
-
-<file path=ppt/slides/slide9.xml><?xml version="1.0" encoding="utf-8"?>
-<p:sld xmlns:a="http://schemas.openxmlformats.org/drawingml/2006/main" xmlns:p="http://schemas.openxmlformats.org/presentationml/2006/main" xmlns:r="http://schemas.openxmlformats.org/officeDocument/2006/relationships">
-  <p:cSld>
-    <p:bg>
-      <p:bgPr>
-        <a:solidFill>
-          <a:srgbClr val="FFFFFF"/>
-        </a:solidFill>
-        <a:effectLst/>
-      </p:bgPr>
-    </p:bg>
-    <p:spTree>
-      <p:nvGrpSpPr>
-        <p:cNvPr id="1" name=""/>
-        <p:cNvGrpSpPr/>
-        <p:nvPr/>
-      </p:nvGrpSpPr>
-      <p:grpSpPr/>
-      <p:sp>
-        <p:nvSpPr>
-          <p:cNvPr id="2" name="TextBox 1"/>
-          <p:cNvSpPr txBox="1"/>
-          <p:nvPr/>
-        </p:nvSpPr>
-        <p:spPr>
-          <a:xfrm>
-            <a:off x="658368" y="365760"/>
-            <a:ext cx="640080" cy="329184"/>
-          </a:xfrm>
-          <a:prstGeom prst="rect">
-            <a:avLst/>
-          </a:prstGeom>
-          <a:noFill/>
-        </p:spPr>
-        <p:txBody>
-          <a:bodyPr wrap="square" anchor="t" lIns="0" rIns="0" tIns="0" bIns="0"/>
-          <a:lstStyle/>
-          <a:p>
-            <a:pPr algn="l"/>
-            <a:r>
-              <a:rPr sz="1500" b="0" i="0" lang="zh-CN" altLang="en-US">
-                <a:solidFill>
-                  <a:srgbClr val="9E1B1B"/>
-                </a:solidFill>
-                <a:latin typeface="Noto Sans CJK SC Medium"/>
-                <a:ea typeface="Noto Sans CJK SC Medium"/>
-                <a:cs typeface="Noto Sans CJK SC Medium"/>
-              </a:rPr>
-              <a:t>08</a:t>
-            </a:r>
-          </a:p>
-        </p:txBody>
-      </p:sp>
-      <p:sp>
-        <p:nvSpPr>
-          <p:cNvPr id="3" name="TextBox 2"/>
-          <p:cNvSpPr txBox="1"/>
-          <p:nvPr/>
-        </p:nvSpPr>
-        <p:spPr>
-          <a:xfrm>
-            <a:off x="1371600" y="310896"/>
-            <a:ext cx="10058400" cy="438912"/>
-          </a:xfrm>
-          <a:prstGeom prst="rect">
-            <a:avLst/>
-          </a:prstGeom>
-          <a:noFill/>
-        </p:spPr>
-        <p:txBody>
-          <a:bodyPr wrap="square" anchor="t" lIns="0" rIns="0" tIns="0" bIns="0"/>
-          <a:lstStyle/>
-          <a:p>
-            <a:pPr algn="l"/>
-            <a:r>
-              <a:rPr sz="3000" b="0" i="0" lang="zh-CN" altLang="en-US">
-                <a:solidFill>
-                  <a:srgbClr val="141414"/>
-                </a:solidFill>
-                <a:latin typeface="Noto Sans CJK SC Medium"/>
-                <a:ea typeface="Noto Sans CJK SC Medium"/>
-                <a:cs typeface="Noto Sans CJK SC Medium"/>
-              </a:rPr>
-              <a:t>七十七万，怎样落到七万六</a:t>
-            </a:r>
-          </a:p>
-        </p:txBody>
-      </p:sp>
-      <p:sp>
-        <p:nvSpPr>
-          <p:cNvPr id="4" name="Rectangle 3"/>
-          <p:cNvSpPr/>
-          <p:nvPr/>
-        </p:nvSpPr>
-        <p:spPr>
-          <a:xfrm>
-            <a:off x="658368" y="960120"/>
-            <a:ext cx="10881360" cy="10972"/>
-          </a:xfrm>
-          <a:prstGeom prst="rect">
-            <a:avLst/>
-          </a:prstGeom>
-          <a:solidFill>
-            <a:srgbClr val="E2E2E2"/>
-          </a:solidFill>
-          <a:ln>
-            <a:noFill/>
-          </a:ln>
-        </p:spPr>
-        <p:style>
-          <a:lnRef idx="1">
-            <a:schemeClr val="accent1"/>
-          </a:lnRef>
-          <a:fillRef idx="3">
-            <a:schemeClr val="accent1"/>
-          </a:fillRef>
-          <a:effectRef idx="2">
-            <a:schemeClr val="accent1"/>
-          </a:effectRef>
-          <a:fontRef idx="minor">
-            <a:schemeClr val="lt1"/>
-          </a:fontRef>
-        </p:style>
-        <p:txBody>
-          <a:bodyPr rtlCol="0" anchor="ctr"/>
-          <a:lstStyle/>
-          <a:p>
-            <a:pPr algn="ctr"/>
-          </a:p>
-        </p:txBody>
-      </p:sp>
-      <p:sp>
-        <p:nvSpPr>
-          <p:cNvPr id="5" name="Rectangle 4"/>
-          <p:cNvSpPr/>
-          <p:nvPr/>
-        </p:nvSpPr>
-        <p:spPr>
-          <a:xfrm>
-            <a:off x="0" y="1170432"/>
-            <a:ext cx="5806440" cy="2606040"/>
-          </a:xfrm>
-          <a:prstGeom prst="rect">
-            <a:avLst/>
-          </a:prstGeom>
-          <a:solidFill>
-            <a:srgbClr val="F4F4F4"/>
-          </a:solidFill>
-          <a:ln>
-            <a:noFill/>
-          </a:ln>
-        </p:spPr>
-        <p:style>
-          <a:lnRef idx="1">
-            <a:schemeClr val="accent1"/>
-          </a:lnRef>
-          <a:fillRef idx="3">
-            <a:schemeClr val="accent1"/>
-          </a:fillRef>
-          <a:effectRef idx="2">
-            <a:schemeClr val="accent1"/>
-          </a:effectRef>
-          <a:fontRef idx="minor">
-            <a:schemeClr val="lt1"/>
-          </a:fontRef>
-        </p:style>
-        <p:txBody>
-          <a:bodyPr rtlCol="0" anchor="ctr"/>
-          <a:lstStyle/>
-          <a:p>
-            <a:pPr algn="ctr"/>
-          </a:p>
-        </p:txBody>
-      </p:sp>
-      <p:sp>
-        <p:nvSpPr>
-          <p:cNvPr id="6" name="Rectangle 5"/>
-          <p:cNvSpPr/>
-          <p:nvPr/>
-        </p:nvSpPr>
-        <p:spPr>
-          <a:xfrm>
-            <a:off x="5806440" y="1170432"/>
-            <a:ext cx="6391656" cy="2606040"/>
-          </a:xfrm>
-          <a:prstGeom prst="rect">
-            <a:avLst/>
-          </a:prstGeom>
-          <a:solidFill>
-            <a:srgbClr val="121212"/>
-          </a:solidFill>
-          <a:ln>
-            <a:noFill/>
-          </a:ln>
-        </p:spPr>
-        <p:style>
-          <a:lnRef idx="1">
-            <a:schemeClr val="accent1"/>
-          </a:lnRef>
-          <a:fillRef idx="3">
-            <a:schemeClr val="accent1"/>
-          </a:fillRef>
-          <a:effectRef idx="2">
-            <a:schemeClr val="accent1"/>
-          </a:effectRef>
-          <a:fontRef idx="minor">
-            <a:schemeClr val="lt1"/>
-          </a:fontRef>
-        </p:style>
-        <p:txBody>
-          <a:bodyPr rtlCol="0" anchor="ctr"/>
-          <a:lstStyle/>
-          <a:p>
-            <a:pPr algn="ctr"/>
-          </a:p>
-        </p:txBody>
-      </p:sp>
-      <p:sp>
-        <p:nvSpPr>
-          <p:cNvPr id="7" name="TextBox 6"/>
-          <p:cNvSpPr txBox="1"/>
-          <p:nvPr/>
-        </p:nvSpPr>
-        <p:spPr>
-          <a:xfrm>
-            <a:off x="658368" y="1353312"/>
-            <a:ext cx="4572000" cy="256032"/>
-          </a:xfrm>
-          <a:prstGeom prst="rect">
-            <a:avLst/>
-          </a:prstGeom>
-          <a:noFill/>
-        </p:spPr>
-        <p:txBody>
-          <a:bodyPr wrap="square" anchor="t" lIns="0" rIns="0" tIns="0" bIns="0"/>
-          <a:lstStyle/>
-          <a:p>
-            <a:pPr algn="l"/>
-            <a:r>
-              <a:rPr sz="1400" b="0" i="0" lang="zh-CN" altLang="en-US">
-                <a:solidFill>
-                  <a:srgbClr val="6A6A6A"/>
-                </a:solidFill>
-                <a:latin typeface="Noto Sans CJK SC"/>
-                <a:ea typeface="Noto Sans CJK SC"/>
-                <a:cs typeface="Noto Sans CJK SC"/>
-              </a:rPr>
-              <a:t>原先</a:t>
-            </a:r>
-          </a:p>
-        </p:txBody>
-      </p:sp>
-      <p:sp>
-        <p:nvSpPr>
-          <p:cNvPr id="8" name="TextBox 7"/>
-          <p:cNvSpPr txBox="1"/>
-          <p:nvPr/>
-        </p:nvSpPr>
-        <p:spPr>
-          <a:xfrm>
-            <a:off x="621792" y="1691640"/>
-            <a:ext cx="4846320" cy="868680"/>
-          </a:xfrm>
-          <a:prstGeom prst="rect">
-            <a:avLst/>
-          </a:prstGeom>
-          <a:noFill/>
-        </p:spPr>
-        <p:txBody>
-          <a:bodyPr wrap="square" anchor="t" lIns="0" rIns="0" tIns="0" bIns="0"/>
-          <a:lstStyle/>
-          <a:p>
-            <a:pPr algn="l"/>
-            <a:r>
-              <a:rPr sz="4200" b="0" i="0" lang="zh-CN" altLang="en-US">
-                <a:solidFill>
-                  <a:srgbClr val="141414"/>
-                </a:solidFill>
-                <a:latin typeface="Noto Sans CJK SC Medium"/>
-                <a:ea typeface="Noto Sans CJK SC Medium"/>
-                <a:cs typeface="Noto Sans CJK SC Medium"/>
-              </a:rPr>
-              <a:t>770,000</a:t>
-            </a:r>
-          </a:p>
-        </p:txBody>
-      </p:sp>
-      <p:sp>
-        <p:nvSpPr>
-          <p:cNvPr id="9" name="TextBox 8"/>
-          <p:cNvSpPr txBox="1"/>
-          <p:nvPr/>
-        </p:nvSpPr>
-        <p:spPr>
-          <a:xfrm>
-            <a:off x="658368" y="2697480"/>
-            <a:ext cx="4572000" cy="502920"/>
-          </a:xfrm>
-          <a:prstGeom prst="rect">
-            <a:avLst/>
-          </a:prstGeom>
-          <a:noFill/>
-        </p:spPr>
-        <p:txBody>
-          <a:bodyPr wrap="square" anchor="t" lIns="0" rIns="0" tIns="0" bIns="0"/>
-          <a:lstStyle/>
-          <a:p>
-            <a:pPr algn="l">
-              <a:lnSpc>
-                <a:spcPct val="135000"/>
-              </a:lnSpc>
-            </a:pPr>
-            <a:r>
-              <a:rPr sz="1400" b="0" i="0" lang="zh-CN" altLang="en-US">
-                <a:solidFill>
-                  <a:srgbClr val="6A6A6A"/>
-                </a:solidFill>
-                <a:latin typeface="Noto Sans CJK SC"/>
-                <a:ea typeface="Noto Sans CJK SC"/>
-                <a:cs typeface="Noto Sans CJK SC"/>
-              </a:rPr>
-              <a:t>韩元。走干燥，走切断，
-在药材市场现买。</a:t>
-            </a:r>
-          </a:p>
-        </p:txBody>
-      </p:sp>
-      <p:sp>
-        <p:nvSpPr>
-          <p:cNvPr id="10" name="TextBox 9"/>
-          <p:cNvSpPr txBox="1"/>
-          <p:nvPr/>
-        </p:nvSpPr>
-        <p:spPr>
-          <a:xfrm>
-            <a:off x="6446520" y="1353312"/>
-            <a:ext cx="5029200" cy="256032"/>
-          </a:xfrm>
-          <a:prstGeom prst="rect">
-            <a:avLst/>
-          </a:prstGeom>
-          <a:noFill/>
-        </p:spPr>
-        <p:txBody>
-          <a:bodyPr wrap="square" anchor="t" lIns="0" rIns="0" tIns="0" bIns="0"/>
-          <a:lstStyle/>
-          <a:p>
-            <a:pPr algn="l"/>
-            <a:r>
-              <a:rPr sz="1400" b="0" i="0" lang="zh-CN" altLang="en-US">
-                <a:solidFill>
-                  <a:srgbClr val="E7B1B1"/>
-                </a:solidFill>
-                <a:latin typeface="Noto Sans CJK SC"/>
-                <a:ea typeface="Noto Sans CJK SC"/>
-                <a:cs typeface="Noto Sans CJK SC"/>
-              </a:rPr>
-              <a:t>现在</a:t>
-            </a:r>
-          </a:p>
-        </p:txBody>
-      </p:sp>
-      <p:sp>
-        <p:nvSpPr>
-          <p:cNvPr id="11" name="TextBox 10"/>
-          <p:cNvSpPr txBox="1"/>
-          <p:nvPr/>
-        </p:nvSpPr>
-        <p:spPr>
-          <a:xfrm>
-            <a:off x="6400800" y="1664208"/>
-            <a:ext cx="5120640" cy="960120"/>
-          </a:xfrm>
-          <a:prstGeom prst="rect">
-            <a:avLst/>
-          </a:prstGeom>
-          <a:noFill/>
-        </p:spPr>
-        <p:txBody>
-          <a:bodyPr wrap="square" anchor="t" lIns="0" rIns="0" tIns="0" bIns="0"/>
-          <a:lstStyle/>
-          <a:p>
-            <a:pPr algn="l"/>
-            <a:r>
-              <a:rPr sz="4800" b="0" i="0" lang="zh-CN" altLang="en-US">
-                <a:solidFill>
-                  <a:srgbClr val="FFFFFF"/>
-                </a:solidFill>
-                <a:latin typeface="Noto Sans CJK SC Medium"/>
-                <a:ea typeface="Noto Sans CJK SC Medium"/>
-                <a:cs typeface="Noto Sans CJK SC Medium"/>
-              </a:rPr>
-              <a:t>76,500</a:t>
-            </a:r>
-          </a:p>
-        </p:txBody>
-      </p:sp>
-      <p:sp>
-        <p:nvSpPr>
-          <p:cNvPr id="12" name="TextBox 11"/>
-          <p:cNvSpPr txBox="1"/>
-          <p:nvPr/>
-        </p:nvSpPr>
-        <p:spPr>
-          <a:xfrm>
-            <a:off x="6446520" y="2697480"/>
-            <a:ext cx="5029200" cy="502920"/>
-          </a:xfrm>
-          <a:prstGeom prst="rect">
-            <a:avLst/>
-          </a:prstGeom>
-          <a:noFill/>
-        </p:spPr>
-        <p:txBody>
-          <a:bodyPr wrap="square" anchor="t" lIns="0" rIns="0" tIns="0" bIns="0"/>
-          <a:lstStyle/>
-          <a:p>
-            <a:pPr algn="l">
-              <a:lnSpc>
-                <a:spcPct val="135000"/>
-              </a:lnSpc>
-            </a:pPr>
-            <a:r>
-              <a:rPr sz="1400" b="0" i="0" lang="zh-CN" altLang="en-US">
-                <a:solidFill>
-                  <a:srgbClr val="E7B1B1"/>
-                </a:solidFill>
-                <a:latin typeface="Noto Sans CJK SC"/>
-                <a:ea typeface="Noto Sans CJK SC"/>
-                <a:cs typeface="Noto Sans CJK SC"/>
-              </a:rPr>
-              <a:t>韩元。价格停在十年前，
-品质走到十年后。</a:t>
-            </a:r>
-          </a:p>
-        </p:txBody>
-      </p:sp>
-      <p:sp>
-        <p:nvSpPr>
-          <p:cNvPr id="13" name="TextBox 12"/>
-          <p:cNvSpPr txBox="1"/>
-          <p:nvPr/>
-        </p:nvSpPr>
-        <p:spPr>
-          <a:xfrm>
-            <a:off x="658368" y="4069080"/>
-            <a:ext cx="3291840" cy="640080"/>
-          </a:xfrm>
-          <a:prstGeom prst="rect">
-            <a:avLst/>
-          </a:prstGeom>
-          <a:noFill/>
-        </p:spPr>
-        <p:txBody>
-          <a:bodyPr wrap="square" anchor="t" lIns="0" rIns="0" tIns="0" bIns="0"/>
-          <a:lstStyle/>
-          <a:p>
-            <a:pPr algn="l"/>
-            <a:r>
-              <a:rPr sz="1600" b="0" i="0" lang="zh-CN" altLang="en-US">
-                <a:solidFill>
-                  <a:srgbClr val="141414"/>
-                </a:solidFill>
-                <a:latin typeface="Noto Sans CJK SC Medium"/>
-                <a:ea typeface="Noto Sans CJK SC Medium"/>
-                <a:cs typeface="Noto Sans CJK SC Medium"/>
-              </a:rPr>
-              <a:t>0.5 吨到 18 吨</a:t>
-            </a:r>
-          </a:p>
-        </p:txBody>
-      </p:sp>
-      <p:sp>
-        <p:nvSpPr>
-          <p:cNvPr id="14" name="TextBox 13"/>
-          <p:cNvSpPr txBox="1"/>
-          <p:nvPr/>
-        </p:nvSpPr>
-        <p:spPr>
-          <a:xfrm>
-            <a:off x="658368" y="4754880"/>
-            <a:ext cx="3246120" cy="1051560"/>
-          </a:xfrm>
-          <a:prstGeom prst="rect">
-            <a:avLst/>
-          </a:prstGeom>
-          <a:noFill/>
-        </p:spPr>
-        <p:txBody>
-          <a:bodyPr wrap="square" anchor="t" lIns="0" rIns="0" tIns="0" bIns="0"/>
-          <a:lstStyle/>
-          <a:p>
-            <a:pPr algn="l">
-              <a:lnSpc>
-                <a:spcPct val="140000"/>
-              </a:lnSpc>
-            </a:pPr>
-            <a:r>
-              <a:rPr sz="1400" b="0" i="0" lang="zh-CN" altLang="en-US">
-                <a:solidFill>
-                  <a:srgbClr val="2C2C2C"/>
-                </a:solidFill>
-                <a:latin typeface="Noto Sans CJK SC"/>
-                <a:ea typeface="Noto Sans CJK SC"/>
-                <a:cs typeface="Noto Sans CJK SC"/>
-              </a:rPr>
-              <a:t>三十六倍。操作的人仍是一个，人工按三十六分之一计。</a:t>
-            </a:r>
-          </a:p>
-        </p:txBody>
-      </p:sp>
-      <p:sp>
-        <p:nvSpPr>
-          <p:cNvPr id="15" name="Rectangle 14"/>
-          <p:cNvSpPr/>
-          <p:nvPr/>
-        </p:nvSpPr>
-        <p:spPr>
-          <a:xfrm>
-            <a:off x="4178807" y="4114800"/>
-            <a:ext cx="10972" cy="1554480"/>
-          </a:xfrm>
-          <a:prstGeom prst="rect">
-            <a:avLst/>
-          </a:prstGeom>
-          <a:solidFill>
-            <a:srgbClr val="E2E2E2"/>
-          </a:solidFill>
-          <a:ln>
-            <a:noFill/>
-          </a:ln>
-        </p:spPr>
-        <p:style>
-          <a:lnRef idx="1">
-            <a:schemeClr val="accent1"/>
-          </a:lnRef>
-          <a:fillRef idx="3">
-            <a:schemeClr val="accent1"/>
-          </a:fillRef>
-          <a:effectRef idx="2">
-            <a:schemeClr val="accent1"/>
-          </a:effectRef>
-          <a:fontRef idx="minor">
-            <a:schemeClr val="lt1"/>
-          </a:fontRef>
-        </p:style>
-        <p:txBody>
-          <a:bodyPr rtlCol="0" anchor="ctr"/>
-          <a:lstStyle/>
-          <a:p>
-            <a:pPr algn="ctr"/>
-          </a:p>
-        </p:txBody>
-      </p:sp>
-      <p:sp>
-        <p:nvSpPr>
-          <p:cNvPr id="16" name="TextBox 15"/>
-          <p:cNvSpPr txBox="1"/>
-          <p:nvPr/>
-        </p:nvSpPr>
-        <p:spPr>
-          <a:xfrm>
-            <a:off x="4361688" y="4069080"/>
-            <a:ext cx="3291840" cy="640080"/>
-          </a:xfrm>
-          <a:prstGeom prst="rect">
-            <a:avLst/>
-          </a:prstGeom>
-          <a:noFill/>
-        </p:spPr>
-        <p:txBody>
-          <a:bodyPr wrap="square" anchor="t" lIns="0" rIns="0" tIns="0" bIns="0"/>
-          <a:lstStyle/>
-          <a:p>
-            <a:pPr algn="l"/>
-            <a:r>
-              <a:rPr sz="1600" b="0" i="0" lang="zh-CN" altLang="en-US">
-                <a:solidFill>
-                  <a:srgbClr val="141414"/>
-                </a:solidFill>
-                <a:latin typeface="Noto Sans CJK SC Medium"/>
-                <a:ea typeface="Noto Sans CJK SC Medium"/>
-                <a:cs typeface="Noto Sans CJK SC Medium"/>
-              </a:rPr>
-              <a:t>干燥与切断省掉</a:t>
-            </a:r>
-          </a:p>
-        </p:txBody>
-      </p:sp>
-      <p:sp>
-        <p:nvSpPr>
-          <p:cNvPr id="17" name="TextBox 16"/>
-          <p:cNvSpPr txBox="1"/>
-          <p:nvPr/>
-        </p:nvSpPr>
-        <p:spPr>
-          <a:xfrm>
-            <a:off x="4361688" y="4754880"/>
-            <a:ext cx="3246120" cy="1051560"/>
-          </a:xfrm>
-          <a:prstGeom prst="rect">
-            <a:avLst/>
-          </a:prstGeom>
-          <a:noFill/>
-        </p:spPr>
-        <p:txBody>
-          <a:bodyPr wrap="square" anchor="t" lIns="0" rIns="0" tIns="0" bIns="0"/>
-          <a:lstStyle/>
-          <a:p>
-            <a:pPr algn="l">
-              <a:lnSpc>
-                <a:spcPct val="140000"/>
-              </a:lnSpc>
-            </a:pPr>
-            <a:r>
-              <a:rPr sz="1400" b="0" i="0" lang="zh-CN" altLang="en-US">
-                <a:solidFill>
-                  <a:srgbClr val="2C2C2C"/>
-                </a:solidFill>
-                <a:latin typeface="Noto Sans CJK SC"/>
-                <a:ea typeface="Noto Sans CJK SC"/>
-                <a:cs typeface="Noto Sans CJK SC"/>
-              </a:rPr>
-              <a:t>大罐用洗净的鲜品直接取汁。药房那两道工序没有了。</a:t>
-            </a:r>
-          </a:p>
-        </p:txBody>
-      </p:sp>
-      <p:sp>
-        <p:nvSpPr>
-          <p:cNvPr id="18" name="Rectangle 17"/>
-          <p:cNvSpPr/>
-          <p:nvPr/>
-        </p:nvSpPr>
-        <p:spPr>
-          <a:xfrm>
-            <a:off x="7882128" y="4114800"/>
-            <a:ext cx="10972" cy="1554480"/>
-          </a:xfrm>
-          <a:prstGeom prst="rect">
-            <a:avLst/>
-          </a:prstGeom>
-          <a:solidFill>
-            <a:srgbClr val="E2E2E2"/>
-          </a:solidFill>
-          <a:ln>
-            <a:noFill/>
-          </a:ln>
-        </p:spPr>
-        <p:style>
-          <a:lnRef idx="1">
-            <a:schemeClr val="accent1"/>
-          </a:lnRef>
-          <a:fillRef idx="3">
-            <a:schemeClr val="accent1"/>
-          </a:fillRef>
-          <a:effectRef idx="2">
-            <a:schemeClr val="accent1"/>
-          </a:effectRef>
-          <a:fontRef idx="minor">
-            <a:schemeClr val="lt1"/>
-          </a:fontRef>
-        </p:style>
-        <p:txBody>
-          <a:bodyPr rtlCol="0" anchor="ctr"/>
-          <a:lstStyle/>
-          <a:p>
-            <a:pPr algn="ctr"/>
-          </a:p>
-        </p:txBody>
-      </p:sp>
-      <p:sp>
-        <p:nvSpPr>
-          <p:cNvPr id="19" name="TextBox 18"/>
-          <p:cNvSpPr txBox="1"/>
-          <p:nvPr/>
-        </p:nvSpPr>
-        <p:spPr>
-          <a:xfrm>
-            <a:off x="8065008" y="4069080"/>
-            <a:ext cx="3291840" cy="640080"/>
-          </a:xfrm>
-          <a:prstGeom prst="rect">
-            <a:avLst/>
-          </a:prstGeom>
-          <a:noFill/>
-        </p:spPr>
-        <p:txBody>
-          <a:bodyPr wrap="square" anchor="t" lIns="0" rIns="0" tIns="0" bIns="0"/>
-          <a:lstStyle/>
-          <a:p>
-            <a:pPr algn="l"/>
-            <a:r>
-              <a:rPr sz="1600" b="0" i="0" lang="zh-CN" altLang="en-US">
-                <a:solidFill>
-                  <a:srgbClr val="141414"/>
-                </a:solidFill>
-                <a:latin typeface="Noto Sans CJK SC Medium"/>
-                <a:ea typeface="Noto Sans CJK SC Medium"/>
-                <a:cs typeface="Noto Sans CJK SC Medium"/>
-              </a:rPr>
-              <a:t>先锁住，再放量</a:t>
-            </a:r>
-          </a:p>
-        </p:txBody>
-      </p:sp>
-      <p:sp>
-        <p:nvSpPr>
-          <p:cNvPr id="20" name="TextBox 19"/>
-          <p:cNvSpPr txBox="1"/>
-          <p:nvPr/>
-        </p:nvSpPr>
-        <p:spPr>
-          <a:xfrm>
-            <a:off x="8065008" y="4754880"/>
-            <a:ext cx="3246120" cy="1051560"/>
-          </a:xfrm>
-          <a:prstGeom prst="rect">
-            <a:avLst/>
-          </a:prstGeom>
-          <a:noFill/>
-        </p:spPr>
-        <p:txBody>
-          <a:bodyPr wrap="square" anchor="t" lIns="0" rIns="0" tIns="0" bIns="0"/>
-          <a:lstStyle/>
-          <a:p>
-            <a:pPr algn="l">
-              <a:lnSpc>
-                <a:spcPct val="140000"/>
-              </a:lnSpc>
-            </a:pPr>
-            <a:r>
-              <a:rPr sz="1400" b="0" i="0" lang="zh-CN" altLang="en-US">
-                <a:solidFill>
-                  <a:srgbClr val="2C2C2C"/>
-                </a:solidFill>
-                <a:latin typeface="Noto Sans CJK SC"/>
-                <a:ea typeface="Noto Sans CJK SC"/>
-                <a:cs typeface="Noto Sans CJK SC"/>
-              </a:rPr>
-              <a:t>药材要一两年。合同栽培做在涨价之前。依据是月销十万盒。</a:t>
-            </a:r>
-          </a:p>
-        </p:txBody>
-      </p:sp>
-      <p:sp>
-        <p:nvSpPr>
-          <p:cNvPr id="21" name="TextBox 20"/>
-          <p:cNvSpPr txBox="1"/>
-          <p:nvPr/>
-        </p:nvSpPr>
-        <p:spPr>
-          <a:xfrm>
-            <a:off x="10561320" y="6492240"/>
-            <a:ext cx="1051560" cy="201168"/>
-          </a:xfrm>
-          <a:prstGeom prst="rect">
-            <a:avLst/>
-          </a:prstGeom>
-          <a:noFill/>
-        </p:spPr>
-        <p:txBody>
-          <a:bodyPr wrap="square" anchor="t" lIns="0" rIns="0" tIns="0" bIns="0"/>
-          <a:lstStyle/>
-          <a:p>
-            <a:pPr algn="r"/>
-            <a:r>
-              <a:rPr sz="1100" b="0" i="0" lang="zh-CN" altLang="en-US">
-                <a:solidFill>
-                  <a:srgbClr val="C8C8C8"/>
-                </a:solidFill>
-                <a:latin typeface="Noto Sans CJK SC"/>
-                <a:ea typeface="Noto Sans CJK SC"/>
-                <a:cs typeface="Noto Sans CJK SC"/>
-              </a:rPr>
-              <a:t>09</a:t>
             </a:r>
           </a:p>
         </p:txBody>

--- a/艾多美何以成为100兆韩元企业.pptx
+++ b/艾多美何以成为100兆韩元企业.pptx
@@ -579,7 +579,7 @@
           <a:lstStyle/>
           <a:p>
             <a:r>
-              <a:t>3A 就是 APP、Acare、AZA，不是三个并列的应用。新人进 Acare 建记录，记录说缺哪个功能，一能一品定那一个产品，AZA 每天接开支带出主力品目，用的人记在 PPO 名下，合起来变成能排产的数。要数的三样由中国法人自己给出，这里不填数字。</a:t>
+              <a:t>3A 就是 APP、Acare、AZA，不是三个并列的应用。新人进 Acare 建记录，记录说缺哪个功能，一能一品定那一个产品，AZA 每天接开支带出主力品目，买的人记在平台主人名下。平台主人是公司里的 PPO。要数的三样由中国法人自己给出，这里不填数字。</a:t>
             </a:r>
           </a:p>
         </p:txBody>
@@ -649,7 +649,7 @@
           <a:lstStyle/>
           <a:p>
             <a:r>
-              <a:t>APP 先武装事业者：阶段、中文骨架、PPO。培育 PPO 是9月13日奖项的三份发表之一。酒店课和培训部是旧成本。</a:t>
+              <a:t>APP 先武装事业者：阶段、中文骨架、平台主人。PPO 是公司里对个人平台主人的叫法，全称 Personal Platform Owner，2021 年会刊已用。培育平台主人是9月13日奖项的三份发表之一。酒店课是旧成本。</a:t>
             </a:r>
           </a:p>
         </p:txBody>
@@ -789,7 +789,7 @@
           <a:lstStyle/>
           <a:p>
             <a:r>
-              <a:t>AZA 是市集的地面，不是行政窗口。鲭鱼这类高成本率的日常品负责人来。一百兆仍由大约五百个主力品目赚。充电接不接、走哪张卡哪张网，中国先定，不卖加油券。</a:t>
+              <a:t>AZA 是市集的地面，不是行政窗口。鲭鱼出自9月22日文稿里的反问：成本率 75% 的日常品，35% 从哪来。答案是单靠它到不了一百兆，它让人每天来，五百个主力品目负责赚。充电接不接、走哪张卡哪张网，中国先定，不卖加油券。</a:t>
             </a:r>
           </a:p>
         </p:txBody>
@@ -859,7 +859,7 @@
           <a:lstStyle/>
           <a:p>
             <a:r>
-              <a:t>千人千面是两样和那句话因人而异，不是目录变长。推荐只做缺什么、快用完、该带给谁。语音只确认已经摆上的两样，支付走现有收银台，不在语音里收集卡号。下单同时记到 PPO、连续使用和排产。</a:t>
+              <a:t>千人千面是两样和那句话因人而异，不是目录变长。推荐只做缺什么、快用完、该带给谁。语音只确认已经摆上的两样，支付走现有收银台，不在语音里收集卡号。下单记在平台主人名下，并更新连续使用。</a:t>
             </a:r>
           </a:p>
         </p:txBody>
@@ -4217,9 +4217,8 @@
                 <a:ea typeface="Noto Sans CJK SC"/>
                 <a:cs typeface="Noto Sans CJK SC"/>
               </a:rPr>
-              <a:t>3A 就是 APP、Acare、AZA。
-APP 是店，Acare 对着这个人说，AZA 把每天接进来。
-写给中国法人。</a:t>
+              <a:t>APP 是事业者自己的店。Acare 对着这个人说缺什么。
+AZA 把每天的开支接进来。写给中国法人。</a:t>
             </a:r>
           </a:p>
         </p:txBody>
@@ -5083,7 +5082,7 @@
                 <a:ea typeface="Noto Sans CJK SC Medium"/>
                 <a:cs typeface="Noto Sans CJK SC Medium"/>
               </a:rPr>
-              <a:t>PPO 与排产</a:t>
+              <a:t>记在谁名下</a:t>
             </a:r>
           </a:p>
         </p:txBody>
@@ -5122,10 +5121,11 @@
                 <a:ea typeface="Noto Sans CJK SC"/>
                 <a:cs typeface="Noto Sans CJK SC"/>
               </a:rPr>
-              <a:t>用的人记在 PPO 名下。
-合起来，是下个月
-那只罐子和栽培合同
-看得见的数。</a:t>
+              <a:t>买的人记在这个
+平台主人名下。
+连续用了几天，
+每天打不打开，
+都从这里看见。</a:t>
             </a:r>
           </a:p>
         </p:txBody>
@@ -5764,7 +5764,7 @@
                 <a:ea typeface="Noto Sans CJK SC Medium"/>
                 <a:cs typeface="Noto Sans CJK SC Medium"/>
               </a:rPr>
-              <a:t>PPO，平台的主人</a:t>
+              <a:t>平台主人</a:t>
             </a:r>
           </a:p>
         </p:txBody>
@@ -5803,11 +5803,11 @@
                 <a:ea typeface="Noto Sans CJK SC"/>
                 <a:cs typeface="Noto Sans CJK SC"/>
               </a:rPr>
-              <a:t>PPO 是这家平台的主人，
+              <a:t>事业者是这家平台的主人，
 不是发链接的人。
-自己的店、健康、教育，
-收在一处。
-培育 PPO，是九月十三日
+公司里的叫法是 PPO。
+店、健康、教育，收在一处。
+培育平台主人，是九月十三日
 三份发表之一。</a:t>
             </a:r>
           </a:p>
@@ -5890,8 +5890,8 @@
                 <a:ea typeface="Noto Sans CJK SC Medium"/>
                 <a:cs typeface="Noto Sans CJK SC Medium"/>
               </a:rPr>
-              <a:t>教育的大笔费用在这里消失。
-省下来的，还是那三十五个点。</a:t>
+              <a:t>酒店课的费用在这里消失。
+省下来的，补在事业者那三十五个点上。</a:t>
             </a:r>
           </a:p>
         </p:txBody>
@@ -7107,8 +7107,8 @@
               <a:t>鸡蛋、油、充电接进来。
 一百兆由大约五百个
 主力品目赚。
-AZA 做的是热狗那一件事。
-先接每天都发生的开支。</a:t>
+这十万个负责把人
+每天引进来。</a:t>
             </a:r>
           </a:p>
         </p:txBody>
@@ -7221,7 +7221,7 @@
                 <a:ea typeface="Noto Sans CJK SC Medium"/>
                 <a:cs typeface="Noto Sans CJK SC Medium"/>
               </a:rPr>
-              <a:t>鲭鱼回答不了</a:t>
+              <a:t>鲭鱼是个例子</a:t>
             </a:r>
           </a:p>
         </p:txBody>
@@ -7260,10 +7260,11 @@
                 <a:ea typeface="Noto Sans CJK SC"/>
                 <a:cs typeface="Noto Sans CJK SC"/>
               </a:rPr>
-              <a:t>成本率到七成五的日常品，
-单靠它到不了一百兆。
-它负责人每天来。
-主力品目负责赚。</a:t>
+              <a:t>会长拿鲭鱼作例子。
+这种日常品成本率
+到七成五。单靠它
+到不了一百兆。
+它让人每天来。</a:t>
             </a:r>
           </a:p>
         </p:txBody>
@@ -8202,7 +8203,7 @@
                 <a:ea typeface="Noto Sans CJK SC Medium"/>
                 <a:cs typeface="Noto Sans CJK SC Medium"/>
               </a:rPr>
-              <a:t>下完单，三处一起变</a:t>
+              <a:t>下完单，记在谁名下</a:t>
             </a:r>
           </a:p>
         </p:txBody>
@@ -8241,7 +8242,7 @@
                 <a:ea typeface="Noto Sans CJK SC"/>
                 <a:cs typeface="Noto Sans CJK SC"/>
               </a:rPr>
-              <a:t>记在 PPO 名下。这个人的连续使用更新。同类订单合成下个月那只罐子要排的数。事业者工作台只看三行：谁还没建记录，谁的瓶子快空了，谁停了几天。</a:t>
+              <a:t>记在这个平台主人名下。这个人的连续使用更新。事业者工作台只看三行：谁还没建记录，谁的瓶子快空了，谁停了几天。</a:t>
             </a:r>
           </a:p>
         </p:txBody>
